--- a/PPTs/Ch8_ARM_Subroutines_Exercises ANS.pptx
+++ b/PPTs/Ch8_ARM_Subroutines_Exercises ANS.pptx
@@ -5,10 +5,10 @@
     <p:sldMasterId id="2147483660" r:id="rId1"/>
   </p:sldMasterIdLst>
   <p:notesMasterIdLst>
-    <p:notesMasterId r:id="rId26"/>
+    <p:notesMasterId r:id="rId32"/>
   </p:notesMasterIdLst>
   <p:handoutMasterIdLst>
-    <p:handoutMasterId r:id="rId27"/>
+    <p:handoutMasterId r:id="rId33"/>
   </p:handoutMasterIdLst>
   <p:sldIdLst>
     <p:sldId id="256" r:id="rId2"/>
@@ -19,22 +19,28 @@
     <p:sldId id="263" r:id="rId7"/>
     <p:sldId id="280" r:id="rId8"/>
     <p:sldId id="260" r:id="rId9"/>
-    <p:sldId id="371" r:id="rId10"/>
-    <p:sldId id="369" r:id="rId11"/>
-    <p:sldId id="367" r:id="rId12"/>
-    <p:sldId id="374" r:id="rId13"/>
-    <p:sldId id="257" r:id="rId14"/>
-    <p:sldId id="258" r:id="rId15"/>
-    <p:sldId id="281" r:id="rId16"/>
-    <p:sldId id="282" r:id="rId17"/>
-    <p:sldId id="283" r:id="rId18"/>
-    <p:sldId id="286" r:id="rId19"/>
-    <p:sldId id="353" r:id="rId20"/>
-    <p:sldId id="354" r:id="rId21"/>
-    <p:sldId id="757" r:id="rId22"/>
-    <p:sldId id="751" r:id="rId23"/>
-    <p:sldId id="752" r:id="rId24"/>
-    <p:sldId id="756" r:id="rId25"/>
+    <p:sldId id="264" r:id="rId10"/>
+    <p:sldId id="268" r:id="rId11"/>
+    <p:sldId id="762" r:id="rId12"/>
+    <p:sldId id="761" r:id="rId13"/>
+    <p:sldId id="760" r:id="rId14"/>
+    <p:sldId id="759" r:id="rId15"/>
+    <p:sldId id="371" r:id="rId16"/>
+    <p:sldId id="369" r:id="rId17"/>
+    <p:sldId id="367" r:id="rId18"/>
+    <p:sldId id="374" r:id="rId19"/>
+    <p:sldId id="257" r:id="rId20"/>
+    <p:sldId id="258" r:id="rId21"/>
+    <p:sldId id="281" r:id="rId22"/>
+    <p:sldId id="282" r:id="rId23"/>
+    <p:sldId id="283" r:id="rId24"/>
+    <p:sldId id="286" r:id="rId25"/>
+    <p:sldId id="353" r:id="rId26"/>
+    <p:sldId id="354" r:id="rId27"/>
+    <p:sldId id="757" r:id="rId28"/>
+    <p:sldId id="751" r:id="rId29"/>
+    <p:sldId id="752" r:id="rId30"/>
+    <p:sldId id="756" r:id="rId31"/>
   </p:sldIdLst>
   <p:sldSz cx="9144000" cy="6858000" type="screen4x3"/>
   <p:notesSz cx="6950075" cy="9236075"/>
@@ -155,7 +161,7 @@
 <file path=ppt/revisionInfo.xml><?xml version="1.0" encoding="utf-8"?>
 <p1510:revInfo xmlns:a="http://schemas.openxmlformats.org/drawingml/2006/main" xmlns:r="http://schemas.openxmlformats.org/officeDocument/2006/relationships" xmlns:p1510="http://schemas.microsoft.com/office/powerpoint/2015/10/main">
   <p1510:revLst>
-    <p1510:client id="{26DF0AC7-7898-4CAF-8C74-9051912ABD73}" v="187" dt="2025-10-05T03:06:53.273"/>
+    <p1510:client id="{26DF0AC7-7898-4CAF-8C74-9051912ABD73}" v="193" dt="2025-10-14T21:11:06.050"/>
   </p1510:revLst>
 </p1510:revInfo>
 </file>
@@ -165,7 +171,7 @@
   <pc:docChgLst>
     <pc:chgData name="Zonghua Gu" userId="9a7e1853e1951ef5" providerId="LiveId" clId="{CF1FAA12-072C-4ED5-BA76-0FFFAEFDB88A}"/>
     <pc:docChg chg="undo redo custSel addSld delSld modSld">
-      <pc:chgData name="Zonghua Gu" userId="9a7e1853e1951ef5" providerId="LiveId" clId="{CF1FAA12-072C-4ED5-BA76-0FFFAEFDB88A}" dt="2025-10-05T03:07:25.511" v="2862" actId="1076"/>
+      <pc:chgData name="Zonghua Gu" userId="9a7e1853e1951ef5" providerId="LiveId" clId="{CF1FAA12-072C-4ED5-BA76-0FFFAEFDB88A}" dt="2025-10-14T21:12:16.519" v="2919" actId="20577"/>
       <pc:docMkLst>
         <pc:docMk/>
       </pc:docMkLst>
@@ -521,12 +527,58 @@
           </ac:spMkLst>
         </pc:spChg>
       </pc:sldChg>
+      <pc:sldChg chg="modSp add mod">
+        <pc:chgData name="Zonghua Gu" userId="9a7e1853e1951ef5" providerId="LiveId" clId="{CF1FAA12-072C-4ED5-BA76-0FFFAEFDB88A}" dt="2025-10-14T21:11:45.950" v="2885" actId="20577"/>
+        <pc:sldMkLst>
+          <pc:docMk/>
+          <pc:sldMk cId="245926897" sldId="264"/>
+        </pc:sldMkLst>
+        <pc:spChg chg="mod">
+          <ac:chgData name="Zonghua Gu" userId="9a7e1853e1951ef5" providerId="LiveId" clId="{CF1FAA12-072C-4ED5-BA76-0FFFAEFDB88A}" dt="2025-10-14T21:11:45.950" v="2885" actId="20577"/>
+          <ac:spMkLst>
+            <pc:docMk/>
+            <pc:sldMk cId="245926897" sldId="264"/>
+            <ac:spMk id="2" creationId="{00000000-0000-0000-0000-000000000000}"/>
+          </ac:spMkLst>
+        </pc:spChg>
+        <pc:spChg chg="mod">
+          <ac:chgData name="Zonghua Gu" userId="9a7e1853e1951ef5" providerId="LiveId" clId="{CF1FAA12-072C-4ED5-BA76-0FFFAEFDB88A}" dt="2025-10-14T21:11:39.917" v="2884" actId="14100"/>
+          <ac:spMkLst>
+            <pc:docMk/>
+            <pc:sldMk cId="245926897" sldId="264"/>
+            <ac:spMk id="32" creationId="{00000000-0000-0000-0000-000000000000}"/>
+          </ac:spMkLst>
+        </pc:spChg>
+      </pc:sldChg>
       <pc:sldChg chg="del">
         <pc:chgData name="Zonghua Gu" userId="9a7e1853e1951ef5" providerId="LiveId" clId="{CF1FAA12-072C-4ED5-BA76-0FFFAEFDB88A}" dt="2025-09-22T00:19:08.642" v="112" actId="47"/>
         <pc:sldMkLst>
           <pc:docMk/>
           <pc:sldMk cId="2949426341" sldId="266"/>
         </pc:sldMkLst>
+      </pc:sldChg>
+      <pc:sldChg chg="modSp add mod">
+        <pc:chgData name="Zonghua Gu" userId="9a7e1853e1951ef5" providerId="LiveId" clId="{CF1FAA12-072C-4ED5-BA76-0FFFAEFDB88A}" dt="2025-10-14T21:12:16.519" v="2919" actId="20577"/>
+        <pc:sldMkLst>
+          <pc:docMk/>
+          <pc:sldMk cId="2098831747" sldId="268"/>
+        </pc:sldMkLst>
+        <pc:spChg chg="mod">
+          <ac:chgData name="Zonghua Gu" userId="9a7e1853e1951ef5" providerId="LiveId" clId="{CF1FAA12-072C-4ED5-BA76-0FFFAEFDB88A}" dt="2025-10-14T21:11:51.484" v="2892" actId="20577"/>
+          <ac:spMkLst>
+            <pc:docMk/>
+            <pc:sldMk cId="2098831747" sldId="268"/>
+            <ac:spMk id="2" creationId="{00000000-0000-0000-0000-000000000000}"/>
+          </ac:spMkLst>
+        </pc:spChg>
+        <pc:spChg chg="mod">
+          <ac:chgData name="Zonghua Gu" userId="9a7e1853e1951ef5" providerId="LiveId" clId="{CF1FAA12-072C-4ED5-BA76-0FFFAEFDB88A}" dt="2025-10-14T21:12:16.519" v="2919" actId="20577"/>
+          <ac:spMkLst>
+            <pc:docMk/>
+            <pc:sldMk cId="2098831747" sldId="268"/>
+            <ac:spMk id="32" creationId="{00000000-0000-0000-0000-000000000000}"/>
+          </ac:spMkLst>
+        </pc:spChg>
       </pc:sldChg>
       <pc:sldChg chg="addSp modSp add">
         <pc:chgData name="Zonghua Gu" userId="9a7e1853e1951ef5" providerId="LiveId" clId="{CF1FAA12-072C-4ED5-BA76-0FFFAEFDB88A}" dt="2025-09-22T19:33:26.215" v="657"/>
@@ -747,22 +799,6 @@
             <pc:docMk/>
             <pc:sldMk cId="3387447015" sldId="286"/>
             <ac:spMk id="2" creationId="{B94D12DC-0F10-83D1-ABB7-CBAA3C868C79}"/>
-          </ac:spMkLst>
-        </pc:spChg>
-        <pc:spChg chg="del mod">
-          <ac:chgData name="Zonghua Gu" userId="9a7e1853e1951ef5" providerId="LiveId" clId="{CF1FAA12-072C-4ED5-BA76-0FFFAEFDB88A}" dt="2025-10-05T02:41:58.546" v="2576" actId="478"/>
-          <ac:spMkLst>
-            <pc:docMk/>
-            <pc:sldMk cId="3387447015" sldId="286"/>
-            <ac:spMk id="4" creationId="{AA7D4B7B-4A30-8F07-789A-FFB8DD17492B}"/>
-          </ac:spMkLst>
-        </pc:spChg>
-        <pc:spChg chg="add del mod">
-          <ac:chgData name="Zonghua Gu" userId="9a7e1853e1951ef5" providerId="LiveId" clId="{CF1FAA12-072C-4ED5-BA76-0FFFAEFDB88A}" dt="2025-10-05T02:44:01.405" v="2640" actId="478"/>
-          <ac:spMkLst>
-            <pc:docMk/>
-            <pc:sldMk cId="3387447015" sldId="286"/>
-            <ac:spMk id="7" creationId="{0D126F9E-0C09-AE3C-A9BD-81B85FCD0F23}"/>
           </ac:spMkLst>
         </pc:spChg>
         <pc:graphicFrameChg chg="add mod modGraphic">
@@ -1214,38 +1250,6 @@
           <pc:docMk/>
           <pc:sldMk cId="945339359" sldId="370"/>
         </pc:sldMkLst>
-        <pc:spChg chg="mod">
-          <ac:chgData name="Zonghua Gu" userId="9a7e1853e1951ef5" providerId="LiveId" clId="{CF1FAA12-072C-4ED5-BA76-0FFFAEFDB88A}" dt="2025-10-05T02:21:05.260" v="2344" actId="20577"/>
-          <ac:spMkLst>
-            <pc:docMk/>
-            <pc:sldMk cId="945339359" sldId="370"/>
-            <ac:spMk id="2" creationId="{9C255BDF-455F-A2A4-1746-C497917F4075}"/>
-          </ac:spMkLst>
-        </pc:spChg>
-        <pc:spChg chg="del">
-          <ac:chgData name="Zonghua Gu" userId="9a7e1853e1951ef5" providerId="LiveId" clId="{CF1FAA12-072C-4ED5-BA76-0FFFAEFDB88A}" dt="2025-10-05T02:21:10.318" v="2345" actId="478"/>
-          <ac:spMkLst>
-            <pc:docMk/>
-            <pc:sldMk cId="945339359" sldId="370"/>
-            <ac:spMk id="6" creationId="{CECF9031-89E5-5E93-5A23-ABB35E85760E}"/>
-          </ac:spMkLst>
-        </pc:spChg>
-        <pc:spChg chg="mod">
-          <ac:chgData name="Zonghua Gu" userId="9a7e1853e1951ef5" providerId="LiveId" clId="{CF1FAA12-072C-4ED5-BA76-0FFFAEFDB88A}" dt="2025-10-05T02:22:38.858" v="2382" actId="20577"/>
-          <ac:spMkLst>
-            <pc:docMk/>
-            <pc:sldMk cId="945339359" sldId="370"/>
-            <ac:spMk id="15" creationId="{7A0417B7-5E77-642F-80A9-B5C1728FC533}"/>
-          </ac:spMkLst>
-        </pc:spChg>
-        <pc:spChg chg="mod">
-          <ac:chgData name="Zonghua Gu" userId="9a7e1853e1951ef5" providerId="LiveId" clId="{CF1FAA12-072C-4ED5-BA76-0FFFAEFDB88A}" dt="2025-10-05T02:22:31.988" v="2380" actId="20577"/>
-          <ac:spMkLst>
-            <pc:docMk/>
-            <pc:sldMk cId="945339359" sldId="370"/>
-            <ac:spMk id="28" creationId="{D090E78B-B151-BCA0-4FB7-C4B51F0218C2}"/>
-          </ac:spMkLst>
-        </pc:spChg>
       </pc:sldChg>
       <pc:sldChg chg="del">
         <pc:chgData name="Zonghua Gu" userId="9a7e1853e1951ef5" providerId="LiveId" clId="{CF1FAA12-072C-4ED5-BA76-0FFFAEFDB88A}" dt="2025-09-22T00:19:08.642" v="112" actId="47"/>
@@ -1266,14 +1270,6 @@
             <pc:docMk/>
             <pc:sldMk cId="3970213323" sldId="371"/>
             <ac:spMk id="2" creationId="{B8B35D03-E63B-948E-7B28-FE2BC0D48EA8}"/>
-          </ac:spMkLst>
-        </pc:spChg>
-        <pc:spChg chg="del">
-          <ac:chgData name="Zonghua Gu" userId="9a7e1853e1951ef5" providerId="LiveId" clId="{CF1FAA12-072C-4ED5-BA76-0FFFAEFDB88A}" dt="2025-10-05T02:23:33.532" v="2393" actId="478"/>
-          <ac:spMkLst>
-            <pc:docMk/>
-            <pc:sldMk cId="3970213323" sldId="371"/>
-            <ac:spMk id="6" creationId="{DA7C1506-4980-6BE7-EC23-E864AD3059D1}"/>
           </ac:spMkLst>
         </pc:spChg>
         <pc:spChg chg="mod">
@@ -1320,14 +1316,6 @@
           <pc:docMk/>
           <pc:sldMk cId="1233805222" sldId="373"/>
         </pc:sldMkLst>
-        <pc:spChg chg="mod">
-          <ac:chgData name="Zonghua Gu" userId="9a7e1853e1951ef5" providerId="LiveId" clId="{CF1FAA12-072C-4ED5-BA76-0FFFAEFDB88A}" dt="2025-10-05T02:26:36.958" v="2435" actId="20577"/>
-          <ac:spMkLst>
-            <pc:docMk/>
-            <pc:sldMk cId="1233805222" sldId="373"/>
-            <ac:spMk id="4" creationId="{EB7121D8-70FE-F704-E41C-9406407A1E4E}"/>
-          </ac:spMkLst>
-        </pc:spChg>
       </pc:sldChg>
       <pc:sldChg chg="addSp delSp modSp new del mod">
         <pc:chgData name="Zonghua Gu" userId="9a7e1853e1951ef5" providerId="LiveId" clId="{CF1FAA12-072C-4ED5-BA76-0FFFAEFDB88A}" dt="2025-09-22T00:19:08.642" v="112" actId="47"/>
@@ -1465,6 +1453,57 @@
           </ac:spMkLst>
         </pc:spChg>
       </pc:sldChg>
+      <pc:sldChg chg="new del modNotesTx">
+        <pc:chgData name="Zonghua Gu" userId="9a7e1853e1951ef5" providerId="LiveId" clId="{CF1FAA12-072C-4ED5-BA76-0FFFAEFDB88A}" dt="2025-10-14T21:08:41.639" v="2872" actId="47"/>
+        <pc:sldMkLst>
+          <pc:docMk/>
+          <pc:sldMk cId="3281418012" sldId="758"/>
+        </pc:sldMkLst>
+      </pc:sldChg>
+      <pc:sldChg chg="modSp add mod">
+        <pc:chgData name="Zonghua Gu" userId="9a7e1853e1951ef5" providerId="LiveId" clId="{CF1FAA12-072C-4ED5-BA76-0FFFAEFDB88A}" dt="2025-10-14T21:08:29.941" v="2870" actId="20577"/>
+        <pc:sldMkLst>
+          <pc:docMk/>
+          <pc:sldMk cId="414796749" sldId="759"/>
+        </pc:sldMkLst>
+        <pc:spChg chg="mod">
+          <ac:chgData name="Zonghua Gu" userId="9a7e1853e1951ef5" providerId="LiveId" clId="{CF1FAA12-072C-4ED5-BA76-0FFFAEFDB88A}" dt="2025-10-14T21:08:29.941" v="2870" actId="20577"/>
+          <ac:spMkLst>
+            <pc:docMk/>
+            <pc:sldMk cId="414796749" sldId="759"/>
+            <ac:spMk id="2" creationId="{00000000-0000-0000-0000-000000000000}"/>
+          </ac:spMkLst>
+        </pc:spChg>
+      </pc:sldChg>
+      <pc:sldChg chg="modSp add mod">
+        <pc:chgData name="Zonghua Gu" userId="9a7e1853e1951ef5" providerId="LiveId" clId="{CF1FAA12-072C-4ED5-BA76-0FFFAEFDB88A}" dt="2025-10-14T21:08:46.973" v="2877" actId="20577"/>
+        <pc:sldMkLst>
+          <pc:docMk/>
+          <pc:sldMk cId="3252337491" sldId="760"/>
+        </pc:sldMkLst>
+        <pc:spChg chg="mod">
+          <ac:chgData name="Zonghua Gu" userId="9a7e1853e1951ef5" providerId="LiveId" clId="{CF1FAA12-072C-4ED5-BA76-0FFFAEFDB88A}" dt="2025-10-14T21:08:46.973" v="2877" actId="20577"/>
+          <ac:spMkLst>
+            <pc:docMk/>
+            <pc:sldMk cId="3252337491" sldId="760"/>
+            <ac:spMk id="2" creationId="{00000000-0000-0000-0000-000000000000}"/>
+          </ac:spMkLst>
+        </pc:spChg>
+      </pc:sldChg>
+      <pc:sldChg chg="new">
+        <pc:chgData name="Zonghua Gu" userId="9a7e1853e1951ef5" providerId="LiveId" clId="{CF1FAA12-072C-4ED5-BA76-0FFFAEFDB88A}" dt="2025-10-14T21:10:10.888" v="2878" actId="680"/>
+        <pc:sldMkLst>
+          <pc:docMk/>
+          <pc:sldMk cId="1273994328" sldId="761"/>
+        </pc:sldMkLst>
+      </pc:sldChg>
+      <pc:sldChg chg="add">
+        <pc:chgData name="Zonghua Gu" userId="9a7e1853e1951ef5" providerId="LiveId" clId="{CF1FAA12-072C-4ED5-BA76-0FFFAEFDB88A}" dt="2025-10-14T21:11:06.050" v="2879"/>
+        <pc:sldMkLst>
+          <pc:docMk/>
+          <pc:sldMk cId="734650997" sldId="762"/>
+        </pc:sldMkLst>
+      </pc:sldChg>
     </pc:docChg>
   </pc:docChgLst>
 </pc:chgInfo>
@@ -1564,7 +1603,7 @@
           <a:p>
             <a:fld id="{3B161579-C726-4AFD-89FC-66D961EAF8EA}" type="datetimeFigureOut">
               <a:rPr lang="en-US" smtClean="0"/>
-              <a:t>10/4/2025</a:t>
+              <a:t>10/14/2025</a:t>
             </a:fld>
             <a:endParaRPr lang="en-US"/>
           </a:p>
@@ -1742,7 +1781,7 @@
             <a:fld id="{0C5DCA7A-C3FD-4606-A3AD-864BD96433D4}" type="datetimeFigureOut">
               <a:rPr lang="en-US" smtClean="0"/>
               <a:pPr/>
-              <a:t>10/4/2025</a:t>
+              <a:t>10/14/2025</a:t>
             </a:fld>
             <a:endParaRPr lang="en-US"/>
           </a:p>
@@ -2617,7 +2656,7 @@
             <a:fld id="{D46F4F04-2BB1-473A-9274-1B455085D21A}" type="slidenum">
               <a:rPr lang="en-US" smtClean="0"/>
               <a:pPr/>
-              <a:t>15</a:t>
+              <a:t>21</a:t>
             </a:fld>
             <a:endParaRPr lang="en-US"/>
           </a:p>
@@ -2844,7 +2883,7 @@
             <a:fld id="{D46F4F04-2BB1-473A-9274-1B455085D21A}" type="slidenum">
               <a:rPr lang="en-US" smtClean="0"/>
               <a:pPr/>
-              <a:t>16</a:t>
+              <a:t>22</a:t>
             </a:fld>
             <a:endParaRPr lang="en-US"/>
           </a:p>
@@ -3195,7 +3234,7 @@
             <a:fld id="{D46F4F04-2BB1-473A-9274-1B455085D21A}" type="slidenum">
               <a:rPr lang="en-US" smtClean="0"/>
               <a:pPr/>
-              <a:t>18</a:t>
+              <a:t>24</a:t>
             </a:fld>
             <a:endParaRPr lang="en-US"/>
           </a:p>
@@ -3303,7 +3342,7 @@
             <a:fld id="{D46F4F04-2BB1-473A-9274-1B455085D21A}" type="slidenum">
               <a:rPr lang="en-US" smtClean="0"/>
               <a:pPr/>
-              <a:t>19</a:t>
+              <a:t>25</a:t>
             </a:fld>
             <a:endParaRPr lang="en-US"/>
           </a:p>
@@ -3464,7 +3503,7 @@
             <a:pPr eaLnBrk="1" latinLnBrk="0" hangingPunct="1"/>
             <a:fld id="{7966D375-7FE4-4861-9EA3-8493E3E81506}" type="datetime1">
               <a:rPr lang="en-US" smtClean="0"/>
-              <a:t>10/4/2025</a:t>
+              <a:t>10/14/2025</a:t>
             </a:fld>
             <a:endParaRPr lang="en-US" sz="1600" dirty="0"/>
           </a:p>
@@ -3824,7 +3863,7 @@
             <a:pPr eaLnBrk="1" latinLnBrk="0" hangingPunct="1"/>
             <a:fld id="{A9C54BE0-D5FE-4C7B-88A7-8835FDA599B1}" type="datetime1">
               <a:rPr lang="en-US" smtClean="0"/>
-              <a:t>10/4/2025</a:t>
+              <a:t>10/14/2025</a:t>
             </a:fld>
             <a:endParaRPr lang="en-US"/>
           </a:p>
@@ -4000,7 +4039,7 @@
             <a:pPr eaLnBrk="1" latinLnBrk="0" hangingPunct="1"/>
             <a:fld id="{F132153C-039A-48A4-AC9F-CEC24D5C2B7A}" type="datetime1">
               <a:rPr lang="en-US" smtClean="0"/>
-              <a:t>10/4/2025</a:t>
+              <a:t>10/14/2025</a:t>
             </a:fld>
             <a:endParaRPr lang="en-US"/>
           </a:p>
@@ -4381,7 +4420,7 @@
             <a:pPr eaLnBrk="1" latinLnBrk="0" hangingPunct="1"/>
             <a:fld id="{00065D69-4622-413E-9E09-6A2509001B66}" type="datetime1">
               <a:rPr lang="en-US" smtClean="0"/>
-              <a:t>10/4/2025</a:t>
+              <a:t>10/14/2025</a:t>
             </a:fld>
             <a:endParaRPr lang="en-US" dirty="0"/>
           </a:p>
@@ -4651,7 +4690,7 @@
             <a:pPr eaLnBrk="1" latinLnBrk="0" hangingPunct="1"/>
             <a:fld id="{26D84756-85D3-4017-90AB-B482945A0CB0}" type="datetime1">
               <a:rPr lang="en-US" smtClean="0"/>
-              <a:t>10/4/2025</a:t>
+              <a:t>10/14/2025</a:t>
             </a:fld>
             <a:endParaRPr lang="en-US" dirty="0"/>
           </a:p>
@@ -4872,7 +4911,7 @@
             <a:pPr eaLnBrk="1" latinLnBrk="0" hangingPunct="1"/>
             <a:fld id="{1359E9A9-3822-4D57-8A64-831B26641011}" type="datetime1">
               <a:rPr lang="en-US" smtClean="0"/>
-              <a:t>10/4/2025</a:t>
+              <a:t>10/14/2025</a:t>
             </a:fld>
             <a:endParaRPr lang="en-US"/>
           </a:p>
@@ -5225,7 +5264,7 @@
             <a:pPr eaLnBrk="1" latinLnBrk="0" hangingPunct="1"/>
             <a:fld id="{F96C45A0-00E6-4B4B-A1A7-CF1486D67AF4}" type="datetime1">
               <a:rPr lang="en-US" smtClean="0"/>
-              <a:t>10/4/2025</a:t>
+              <a:t>10/14/2025</a:t>
             </a:fld>
             <a:endParaRPr lang="en-US"/>
           </a:p>
@@ -5458,7 +5497,7 @@
             <a:pPr eaLnBrk="1" latinLnBrk="0" hangingPunct="1"/>
             <a:fld id="{B88C3861-EF45-4815-A76E-294671FAB405}" type="datetime1">
               <a:rPr lang="en-US" smtClean="0"/>
-              <a:t>10/4/2025</a:t>
+              <a:t>10/14/2025</a:t>
             </a:fld>
             <a:endParaRPr lang="en-US"/>
           </a:p>
@@ -5600,7 +5639,7 @@
             <a:pPr eaLnBrk="1" latinLnBrk="0" hangingPunct="1"/>
             <a:fld id="{0F0B8080-ED7A-45A9-A704-76D750342F93}" type="datetime1">
               <a:rPr lang="en-US" smtClean="0"/>
-              <a:t>10/4/2025</a:t>
+              <a:t>10/14/2025</a:t>
             </a:fld>
             <a:endParaRPr lang="en-US"/>
           </a:p>
@@ -5878,7 +5917,7 @@
             <a:pPr eaLnBrk="1" latinLnBrk="0" hangingPunct="1"/>
             <a:fld id="{D1503A19-0780-4B28-9CCB-B5B1820188BD}" type="datetime1">
               <a:rPr lang="en-US" smtClean="0"/>
-              <a:t>10/4/2025</a:t>
+              <a:t>10/14/2025</a:t>
             </a:fld>
             <a:endParaRPr lang="en-US"/>
           </a:p>
@@ -6286,7 +6325,7 @@
             <a:pPr eaLnBrk="1" latinLnBrk="0" hangingPunct="1"/>
             <a:fld id="{2142A9E5-AE71-46A9-A65E-9BA279401128}" type="datetime1">
               <a:rPr lang="en-US" smtClean="0"/>
-              <a:t>10/4/2025</a:t>
+              <a:t>10/14/2025</a:t>
             </a:fld>
             <a:endParaRPr lang="en-US"/>
           </a:p>
@@ -6624,7 +6663,7 @@
             <a:pPr eaLnBrk="1" latinLnBrk="0" hangingPunct="1"/>
             <a:fld id="{4087DD3F-948A-46ED-B3EC-5D68A963D0B7}" type="datetime1">
               <a:rPr lang="en-US" smtClean="0"/>
-              <a:t>10/4/2025</a:t>
+              <a:t>10/14/2025</a:t>
             </a:fld>
             <a:endParaRPr lang="en-US" sz="1400" dirty="0">
               <a:solidFill>
@@ -7367,6 +7406,153 @@
       </p:grpSpPr>
       <p:sp>
         <p:nvSpPr>
+          <p:cNvPr id="41" name="Rectangle 40"/>
+          <p:cNvSpPr/>
+          <p:nvPr/>
+        </p:nvSpPr>
+        <p:spPr>
+          <a:xfrm>
+            <a:off x="4127376" y="2348880"/>
+            <a:ext cx="1296144" cy="360040"/>
+          </a:xfrm>
+          <a:prstGeom prst="rect">
+            <a:avLst/>
+          </a:prstGeom>
+          <a:solidFill>
+            <a:schemeClr val="bg1"/>
+          </a:solidFill>
+          <a:ln>
+            <a:prstDash val="dash"/>
+          </a:ln>
+        </p:spPr>
+        <p:style>
+          <a:lnRef idx="2">
+            <a:schemeClr val="accent1">
+              <a:shade val="50000"/>
+            </a:schemeClr>
+          </a:lnRef>
+          <a:fillRef idx="1">
+            <a:schemeClr val="accent1"/>
+          </a:fillRef>
+          <a:effectRef idx="0">
+            <a:schemeClr val="accent1"/>
+          </a:effectRef>
+          <a:fontRef idx="minor">
+            <a:schemeClr val="lt1"/>
+          </a:fontRef>
+        </p:style>
+        <p:txBody>
+          <a:bodyPr rtlCol="0" anchor="ctr"/>
+          <a:lstStyle/>
+          <a:p>
+            <a:pPr algn="ctr"/>
+            <a:endParaRPr lang="en-GB" sz="1600" b="1">
+              <a:latin typeface="Consolas" panose="020B0609020204030204" pitchFamily="49" charset="0"/>
+              <a:cs typeface="Consolas" panose="020B0609020204030204" pitchFamily="49" charset="0"/>
+            </a:endParaRPr>
+          </a:p>
+        </p:txBody>
+      </p:sp>
+      <p:sp>
+        <p:nvSpPr>
+          <p:cNvPr id="29" name="Rectangle 28"/>
+          <p:cNvSpPr/>
+          <p:nvPr/>
+        </p:nvSpPr>
+        <p:spPr>
+          <a:xfrm>
+            <a:off x="6230164" y="2984680"/>
+            <a:ext cx="1296144" cy="360040"/>
+          </a:xfrm>
+          <a:prstGeom prst="rect">
+            <a:avLst/>
+          </a:prstGeom>
+          <a:solidFill>
+            <a:schemeClr val="bg1"/>
+          </a:solidFill>
+          <a:ln>
+            <a:prstDash val="dash"/>
+          </a:ln>
+        </p:spPr>
+        <p:style>
+          <a:lnRef idx="2">
+            <a:schemeClr val="accent1">
+              <a:shade val="50000"/>
+            </a:schemeClr>
+          </a:lnRef>
+          <a:fillRef idx="1">
+            <a:schemeClr val="accent1"/>
+          </a:fillRef>
+          <a:effectRef idx="0">
+            <a:schemeClr val="accent1"/>
+          </a:effectRef>
+          <a:fontRef idx="minor">
+            <a:schemeClr val="lt1"/>
+          </a:fontRef>
+        </p:style>
+        <p:txBody>
+          <a:bodyPr rtlCol="0" anchor="ctr"/>
+          <a:lstStyle/>
+          <a:p>
+            <a:pPr algn="ctr"/>
+            <a:endParaRPr lang="en-GB" sz="1600" b="1">
+              <a:latin typeface="Consolas" panose="020B0609020204030204" pitchFamily="49" charset="0"/>
+              <a:cs typeface="Consolas" panose="020B0609020204030204" pitchFamily="49" charset="0"/>
+            </a:endParaRPr>
+          </a:p>
+        </p:txBody>
+      </p:sp>
+      <p:sp>
+        <p:nvSpPr>
+          <p:cNvPr id="27" name="Rectangle 26"/>
+          <p:cNvSpPr/>
+          <p:nvPr/>
+        </p:nvSpPr>
+        <p:spPr>
+          <a:xfrm>
+            <a:off x="6230164" y="4423395"/>
+            <a:ext cx="1296144" cy="360040"/>
+          </a:xfrm>
+          <a:prstGeom prst="rect">
+            <a:avLst/>
+          </a:prstGeom>
+          <a:solidFill>
+            <a:schemeClr val="bg1"/>
+          </a:solidFill>
+          <a:ln>
+            <a:prstDash val="dash"/>
+          </a:ln>
+        </p:spPr>
+        <p:style>
+          <a:lnRef idx="2">
+            <a:schemeClr val="accent1">
+              <a:shade val="50000"/>
+            </a:schemeClr>
+          </a:lnRef>
+          <a:fillRef idx="1">
+            <a:schemeClr val="accent1"/>
+          </a:fillRef>
+          <a:effectRef idx="0">
+            <a:schemeClr val="accent1"/>
+          </a:effectRef>
+          <a:fontRef idx="minor">
+            <a:schemeClr val="lt1"/>
+          </a:fontRef>
+        </p:style>
+        <p:txBody>
+          <a:bodyPr rtlCol="0" anchor="ctr"/>
+          <a:lstStyle/>
+          <a:p>
+            <a:pPr algn="ctr"/>
+            <a:endParaRPr lang="en-GB" sz="1600" b="1">
+              <a:latin typeface="Consolas" panose="020B0609020204030204" pitchFamily="49" charset="0"/>
+              <a:cs typeface="Consolas" panose="020B0609020204030204" pitchFamily="49" charset="0"/>
+            </a:endParaRPr>
+          </a:p>
+        </p:txBody>
+      </p:sp>
+      <p:sp>
+        <p:nvSpPr>
           <p:cNvPr id="2" name="Title 1"/>
           <p:cNvSpPr>
             <a:spLocks noGrp="1"/>
@@ -7377,21 +7563,657 @@
         </p:nvSpPr>
         <p:spPr/>
         <p:txBody>
-          <a:bodyPr>
-            <a:normAutofit fontScale="90000"/>
+          <a:bodyPr/>
+          <a:lstStyle/>
+          <a:p>
+            <a:r>
+              <a:rPr lang="en-GB" dirty="0"/>
+              <a:t>Stack ANS</a:t>
+            </a:r>
+          </a:p>
+        </p:txBody>
+      </p:sp>
+      <p:sp>
+        <p:nvSpPr>
+          <p:cNvPr id="6" name="Rectangle 5"/>
+          <p:cNvSpPr/>
+          <p:nvPr/>
+        </p:nvSpPr>
+        <p:spPr>
+          <a:xfrm>
+            <a:off x="4127376" y="1628800"/>
+            <a:ext cx="1296144" cy="360040"/>
+          </a:xfrm>
+          <a:prstGeom prst="rect">
+            <a:avLst/>
+          </a:prstGeom>
+          <a:solidFill>
+            <a:schemeClr val="bg1"/>
+          </a:solidFill>
+        </p:spPr>
+        <p:style>
+          <a:lnRef idx="2">
+            <a:schemeClr val="accent1">
+              <a:shade val="50000"/>
+            </a:schemeClr>
+          </a:lnRef>
+          <a:fillRef idx="1">
+            <a:schemeClr val="accent1"/>
+          </a:fillRef>
+          <a:effectRef idx="0">
+            <a:schemeClr val="accent1"/>
+          </a:effectRef>
+          <a:fontRef idx="minor">
+            <a:schemeClr val="lt1"/>
+          </a:fontRef>
+        </p:style>
+        <p:txBody>
+          <a:bodyPr rtlCol="0" anchor="ctr"/>
+          <a:lstStyle/>
+          <a:p>
+            <a:pPr algn="ctr"/>
+            <a:endParaRPr lang="en-GB" sz="1600" b="1">
+              <a:latin typeface="Consolas" panose="020B0609020204030204" pitchFamily="49" charset="0"/>
+              <a:cs typeface="Consolas" panose="020B0609020204030204" pitchFamily="49" charset="0"/>
+            </a:endParaRPr>
+          </a:p>
+        </p:txBody>
+      </p:sp>
+      <p:sp>
+        <p:nvSpPr>
+          <p:cNvPr id="7" name="TextBox 6"/>
+          <p:cNvSpPr txBox="1"/>
+          <p:nvPr/>
+        </p:nvSpPr>
+        <p:spPr>
+          <a:xfrm>
+            <a:off x="3551312" y="1628800"/>
+            <a:ext cx="576064" cy="338554"/>
+          </a:xfrm>
+          <a:prstGeom prst="rect">
+            <a:avLst/>
+          </a:prstGeom>
+          <a:noFill/>
+        </p:spPr>
+        <p:txBody>
+          <a:bodyPr wrap="square" rtlCol="0">
+            <a:spAutoFit/>
           </a:bodyPr>
           <a:lstStyle/>
           <a:p>
             <a:r>
-              <a:rPr lang="en-US" dirty="0"/>
-              <a:t>What’s wrong? Passing arguments and Returning Value ANS</a:t>
-            </a:r>
-          </a:p>
-        </p:txBody>
-      </p:sp>
-      <p:sp>
-        <p:nvSpPr>
-          <p:cNvPr id="3" name="Slide Number Placeholder 2"/>
+              <a:rPr lang="en-GB" sz="1600" b="1" dirty="0">
+                <a:latin typeface="Consolas" panose="020B0609020204030204" pitchFamily="49" charset="0"/>
+                <a:cs typeface="Consolas" panose="020B0609020204030204" pitchFamily="49" charset="0"/>
+              </a:rPr>
+              <a:t>R1</a:t>
+            </a:r>
+          </a:p>
+        </p:txBody>
+      </p:sp>
+      <p:sp>
+        <p:nvSpPr>
+          <p:cNvPr id="9" name="Rectangle 8"/>
+          <p:cNvSpPr/>
+          <p:nvPr/>
+        </p:nvSpPr>
+        <p:spPr>
+          <a:xfrm>
+            <a:off x="4127376" y="1988840"/>
+            <a:ext cx="1296144" cy="360040"/>
+          </a:xfrm>
+          <a:prstGeom prst="rect">
+            <a:avLst/>
+          </a:prstGeom>
+          <a:solidFill>
+            <a:schemeClr val="bg1"/>
+          </a:solidFill>
+        </p:spPr>
+        <p:style>
+          <a:lnRef idx="2">
+            <a:schemeClr val="accent1">
+              <a:shade val="50000"/>
+            </a:schemeClr>
+          </a:lnRef>
+          <a:fillRef idx="1">
+            <a:schemeClr val="accent1"/>
+          </a:fillRef>
+          <a:effectRef idx="0">
+            <a:schemeClr val="accent1"/>
+          </a:effectRef>
+          <a:fontRef idx="minor">
+            <a:schemeClr val="lt1"/>
+          </a:fontRef>
+        </p:style>
+        <p:txBody>
+          <a:bodyPr rtlCol="0" anchor="ctr"/>
+          <a:lstStyle/>
+          <a:p>
+            <a:pPr algn="ctr"/>
+            <a:endParaRPr lang="en-GB" sz="1600" b="1">
+              <a:latin typeface="Consolas" panose="020B0609020204030204" pitchFamily="49" charset="0"/>
+              <a:cs typeface="Consolas" panose="020B0609020204030204" pitchFamily="49" charset="0"/>
+            </a:endParaRPr>
+          </a:p>
+        </p:txBody>
+      </p:sp>
+      <p:sp>
+        <p:nvSpPr>
+          <p:cNvPr id="10" name="TextBox 9"/>
+          <p:cNvSpPr txBox="1"/>
+          <p:nvPr/>
+        </p:nvSpPr>
+        <p:spPr>
+          <a:xfrm>
+            <a:off x="3551312" y="1988840"/>
+            <a:ext cx="576064" cy="338554"/>
+          </a:xfrm>
+          <a:prstGeom prst="rect">
+            <a:avLst/>
+          </a:prstGeom>
+          <a:noFill/>
+        </p:spPr>
+        <p:txBody>
+          <a:bodyPr wrap="square" rtlCol="0">
+            <a:spAutoFit/>
+          </a:bodyPr>
+          <a:lstStyle/>
+          <a:p>
+            <a:r>
+              <a:rPr lang="en-GB" sz="1600" b="1" dirty="0">
+                <a:latin typeface="Consolas" panose="020B0609020204030204" pitchFamily="49" charset="0"/>
+                <a:cs typeface="Consolas" panose="020B0609020204030204" pitchFamily="49" charset="0"/>
+              </a:rPr>
+              <a:t>R2</a:t>
+            </a:r>
+          </a:p>
+        </p:txBody>
+      </p:sp>
+      <p:sp>
+        <p:nvSpPr>
+          <p:cNvPr id="12" name="Rectangle 11"/>
+          <p:cNvSpPr/>
+          <p:nvPr/>
+        </p:nvSpPr>
+        <p:spPr>
+          <a:xfrm>
+            <a:off x="4127376" y="2708920"/>
+            <a:ext cx="1296144" cy="360040"/>
+          </a:xfrm>
+          <a:prstGeom prst="rect">
+            <a:avLst/>
+          </a:prstGeom>
+          <a:solidFill>
+            <a:schemeClr val="bg1"/>
+          </a:solidFill>
+        </p:spPr>
+        <p:style>
+          <a:lnRef idx="2">
+            <a:schemeClr val="accent1">
+              <a:shade val="50000"/>
+            </a:schemeClr>
+          </a:lnRef>
+          <a:fillRef idx="1">
+            <a:schemeClr val="accent1"/>
+          </a:fillRef>
+          <a:effectRef idx="0">
+            <a:schemeClr val="accent1"/>
+          </a:effectRef>
+          <a:fontRef idx="minor">
+            <a:schemeClr val="lt1"/>
+          </a:fontRef>
+        </p:style>
+        <p:txBody>
+          <a:bodyPr rtlCol="0" anchor="ctr"/>
+          <a:lstStyle/>
+          <a:p>
+            <a:pPr algn="ctr"/>
+            <a:endParaRPr lang="en-GB" sz="1600" b="1">
+              <a:latin typeface="Consolas" panose="020B0609020204030204" pitchFamily="49" charset="0"/>
+              <a:cs typeface="Consolas" panose="020B0609020204030204" pitchFamily="49" charset="0"/>
+            </a:endParaRPr>
+          </a:p>
+        </p:txBody>
+      </p:sp>
+      <p:sp>
+        <p:nvSpPr>
+          <p:cNvPr id="13" name="TextBox 12"/>
+          <p:cNvSpPr txBox="1"/>
+          <p:nvPr/>
+        </p:nvSpPr>
+        <p:spPr>
+          <a:xfrm>
+            <a:off x="2971800" y="2708920"/>
+            <a:ext cx="1155576" cy="338554"/>
+          </a:xfrm>
+          <a:prstGeom prst="rect">
+            <a:avLst/>
+          </a:prstGeom>
+          <a:noFill/>
+        </p:spPr>
+        <p:txBody>
+          <a:bodyPr wrap="square" rtlCol="0">
+            <a:spAutoFit/>
+          </a:bodyPr>
+          <a:lstStyle/>
+          <a:p>
+            <a:pPr algn="r"/>
+            <a:r>
+              <a:rPr lang="en-GB" sz="1600" b="1" dirty="0" err="1">
+                <a:latin typeface="Consolas" panose="020B0609020204030204" pitchFamily="49" charset="0"/>
+                <a:cs typeface="Consolas" panose="020B0609020204030204" pitchFamily="49" charset="0"/>
+              </a:rPr>
+              <a:t>R13</a:t>
+            </a:r>
+            <a:r>
+              <a:rPr lang="en-GB" sz="1600" b="1" dirty="0">
+                <a:latin typeface="Consolas" panose="020B0609020204030204" pitchFamily="49" charset="0"/>
+                <a:cs typeface="Consolas" panose="020B0609020204030204" pitchFamily="49" charset="0"/>
+              </a:rPr>
+              <a:t> (</a:t>
+            </a:r>
+            <a:r>
+              <a:rPr lang="en-GB" sz="1600" b="1" dirty="0" err="1">
+                <a:latin typeface="Consolas" panose="020B0609020204030204" pitchFamily="49" charset="0"/>
+                <a:cs typeface="Consolas" panose="020B0609020204030204" pitchFamily="49" charset="0"/>
+              </a:rPr>
+              <a:t>SP</a:t>
+            </a:r>
+            <a:r>
+              <a:rPr lang="en-GB" sz="1600" b="1" dirty="0">
+                <a:latin typeface="Consolas" panose="020B0609020204030204" pitchFamily="49" charset="0"/>
+                <a:cs typeface="Consolas" panose="020B0609020204030204" pitchFamily="49" charset="0"/>
+              </a:rPr>
+              <a:t>)</a:t>
+            </a:r>
+          </a:p>
+        </p:txBody>
+      </p:sp>
+      <p:sp>
+        <p:nvSpPr>
+          <p:cNvPr id="14" name="Rectangle 13"/>
+          <p:cNvSpPr/>
+          <p:nvPr/>
+        </p:nvSpPr>
+        <p:spPr>
+          <a:xfrm>
+            <a:off x="6230164" y="3343275"/>
+            <a:ext cx="1296144" cy="360040"/>
+          </a:xfrm>
+          <a:prstGeom prst="rect">
+            <a:avLst/>
+          </a:prstGeom>
+          <a:solidFill>
+            <a:schemeClr val="bg1"/>
+          </a:solidFill>
+        </p:spPr>
+        <p:style>
+          <a:lnRef idx="2">
+            <a:schemeClr val="accent1">
+              <a:shade val="50000"/>
+            </a:schemeClr>
+          </a:lnRef>
+          <a:fillRef idx="1">
+            <a:schemeClr val="accent1"/>
+          </a:fillRef>
+          <a:effectRef idx="0">
+            <a:schemeClr val="accent1"/>
+          </a:effectRef>
+          <a:fontRef idx="minor">
+            <a:schemeClr val="lt1"/>
+          </a:fontRef>
+        </p:style>
+        <p:txBody>
+          <a:bodyPr rtlCol="0" anchor="ctr"/>
+          <a:lstStyle/>
+          <a:p>
+            <a:pPr algn="ctr"/>
+            <a:endParaRPr lang="en-GB" sz="1600" b="1">
+              <a:latin typeface="Consolas" panose="020B0609020204030204" pitchFamily="49" charset="0"/>
+              <a:cs typeface="Consolas" panose="020B0609020204030204" pitchFamily="49" charset="0"/>
+            </a:endParaRPr>
+          </a:p>
+        </p:txBody>
+      </p:sp>
+      <p:sp>
+        <p:nvSpPr>
+          <p:cNvPr id="15" name="TextBox 14"/>
+          <p:cNvSpPr txBox="1"/>
+          <p:nvPr/>
+        </p:nvSpPr>
+        <p:spPr>
+          <a:xfrm>
+            <a:off x="7526308" y="3343275"/>
+            <a:ext cx="1368152" cy="338554"/>
+          </a:xfrm>
+          <a:prstGeom prst="rect">
+            <a:avLst/>
+          </a:prstGeom>
+          <a:noFill/>
+        </p:spPr>
+        <p:txBody>
+          <a:bodyPr wrap="square" rtlCol="0">
+            <a:spAutoFit/>
+          </a:bodyPr>
+          <a:lstStyle/>
+          <a:p>
+            <a:pPr algn="ctr"/>
+            <a:r>
+              <a:rPr lang="en-GB" sz="1600" b="1" dirty="0">
+                <a:latin typeface="Consolas" panose="020B0609020204030204" pitchFamily="49" charset="0"/>
+                <a:cs typeface="Consolas" panose="020B0609020204030204" pitchFamily="49" charset="0"/>
+              </a:rPr>
+              <a:t>0x20000200</a:t>
+            </a:r>
+          </a:p>
+        </p:txBody>
+      </p:sp>
+      <p:sp>
+        <p:nvSpPr>
+          <p:cNvPr id="16" name="Rectangle 15"/>
+          <p:cNvSpPr/>
+          <p:nvPr/>
+        </p:nvSpPr>
+        <p:spPr>
+          <a:xfrm>
+            <a:off x="6230164" y="3703315"/>
+            <a:ext cx="1296144" cy="360040"/>
+          </a:xfrm>
+          <a:prstGeom prst="rect">
+            <a:avLst/>
+          </a:prstGeom>
+          <a:solidFill>
+            <a:schemeClr val="bg1"/>
+          </a:solidFill>
+        </p:spPr>
+        <p:style>
+          <a:lnRef idx="2">
+            <a:schemeClr val="accent1">
+              <a:shade val="50000"/>
+            </a:schemeClr>
+          </a:lnRef>
+          <a:fillRef idx="1">
+            <a:schemeClr val="accent1"/>
+          </a:fillRef>
+          <a:effectRef idx="0">
+            <a:schemeClr val="accent1"/>
+          </a:effectRef>
+          <a:fontRef idx="minor">
+            <a:schemeClr val="lt1"/>
+          </a:fontRef>
+        </p:style>
+        <p:txBody>
+          <a:bodyPr rtlCol="0" anchor="ctr"/>
+          <a:lstStyle/>
+          <a:p>
+            <a:pPr algn="ctr"/>
+            <a:endParaRPr lang="en-GB" sz="1600" b="1">
+              <a:latin typeface="Consolas" panose="020B0609020204030204" pitchFamily="49" charset="0"/>
+              <a:cs typeface="Consolas" panose="020B0609020204030204" pitchFamily="49" charset="0"/>
+            </a:endParaRPr>
+          </a:p>
+        </p:txBody>
+      </p:sp>
+      <p:sp>
+        <p:nvSpPr>
+          <p:cNvPr id="17" name="Rectangle 16"/>
+          <p:cNvSpPr/>
+          <p:nvPr/>
+        </p:nvSpPr>
+        <p:spPr>
+          <a:xfrm>
+            <a:off x="6230164" y="4063355"/>
+            <a:ext cx="1296144" cy="360040"/>
+          </a:xfrm>
+          <a:prstGeom prst="rect">
+            <a:avLst/>
+          </a:prstGeom>
+          <a:solidFill>
+            <a:schemeClr val="bg1"/>
+          </a:solidFill>
+        </p:spPr>
+        <p:style>
+          <a:lnRef idx="2">
+            <a:schemeClr val="accent1">
+              <a:shade val="50000"/>
+            </a:schemeClr>
+          </a:lnRef>
+          <a:fillRef idx="1">
+            <a:schemeClr val="accent1"/>
+          </a:fillRef>
+          <a:effectRef idx="0">
+            <a:schemeClr val="accent1"/>
+          </a:effectRef>
+          <a:fontRef idx="minor">
+            <a:schemeClr val="lt1"/>
+          </a:fontRef>
+        </p:style>
+        <p:txBody>
+          <a:bodyPr rtlCol="0" anchor="ctr"/>
+          <a:lstStyle/>
+          <a:p>
+            <a:pPr algn="ctr"/>
+            <a:endParaRPr lang="en-GB" sz="1600" b="1">
+              <a:latin typeface="Consolas" panose="020B0609020204030204" pitchFamily="49" charset="0"/>
+              <a:cs typeface="Consolas" panose="020B0609020204030204" pitchFamily="49" charset="0"/>
+            </a:endParaRPr>
+          </a:p>
+        </p:txBody>
+      </p:sp>
+      <p:sp>
+        <p:nvSpPr>
+          <p:cNvPr id="18" name="TextBox 17"/>
+          <p:cNvSpPr txBox="1"/>
+          <p:nvPr/>
+        </p:nvSpPr>
+        <p:spPr>
+          <a:xfrm>
+            <a:off x="7526308" y="3703315"/>
+            <a:ext cx="1368152" cy="338554"/>
+          </a:xfrm>
+          <a:prstGeom prst="rect">
+            <a:avLst/>
+          </a:prstGeom>
+          <a:noFill/>
+        </p:spPr>
+        <p:txBody>
+          <a:bodyPr wrap="square" rtlCol="0">
+            <a:spAutoFit/>
+          </a:bodyPr>
+          <a:lstStyle/>
+          <a:p>
+            <a:pPr algn="ctr"/>
+            <a:r>
+              <a:rPr lang="en-GB" sz="1600" b="1" dirty="0">
+                <a:latin typeface="Consolas" panose="020B0609020204030204" pitchFamily="49" charset="0"/>
+                <a:cs typeface="Consolas" panose="020B0609020204030204" pitchFamily="49" charset="0"/>
+              </a:rPr>
+              <a:t>0x200001FC</a:t>
+            </a:r>
+          </a:p>
+        </p:txBody>
+      </p:sp>
+      <p:sp>
+        <p:nvSpPr>
+          <p:cNvPr id="19" name="TextBox 18"/>
+          <p:cNvSpPr txBox="1"/>
+          <p:nvPr/>
+        </p:nvSpPr>
+        <p:spPr>
+          <a:xfrm>
+            <a:off x="7526308" y="4063355"/>
+            <a:ext cx="1368152" cy="338554"/>
+          </a:xfrm>
+          <a:prstGeom prst="rect">
+            <a:avLst/>
+          </a:prstGeom>
+          <a:noFill/>
+        </p:spPr>
+        <p:txBody>
+          <a:bodyPr wrap="square" rtlCol="0">
+            <a:spAutoFit/>
+          </a:bodyPr>
+          <a:lstStyle/>
+          <a:p>
+            <a:pPr algn="ctr"/>
+            <a:r>
+              <a:rPr lang="en-GB" sz="1600" b="1" dirty="0">
+                <a:latin typeface="Consolas" panose="020B0609020204030204" pitchFamily="49" charset="0"/>
+                <a:cs typeface="Consolas" panose="020B0609020204030204" pitchFamily="49" charset="0"/>
+              </a:rPr>
+              <a:t>0x200001F8</a:t>
+            </a:r>
+          </a:p>
+        </p:txBody>
+      </p:sp>
+      <p:sp>
+        <p:nvSpPr>
+          <p:cNvPr id="20" name="TextBox 19"/>
+          <p:cNvSpPr txBox="1"/>
+          <p:nvPr/>
+        </p:nvSpPr>
+        <p:spPr>
+          <a:xfrm>
+            <a:off x="4127376" y="2708920"/>
+            <a:ext cx="1368152" cy="338554"/>
+          </a:xfrm>
+          <a:prstGeom prst="rect">
+            <a:avLst/>
+          </a:prstGeom>
+          <a:noFill/>
+        </p:spPr>
+        <p:txBody>
+          <a:bodyPr wrap="square" rtlCol="0">
+            <a:spAutoFit/>
+          </a:bodyPr>
+          <a:lstStyle/>
+          <a:p>
+            <a:pPr algn="ctr"/>
+            <a:r>
+              <a:rPr lang="en-GB" sz="1600" b="1" dirty="0">
+                <a:latin typeface="Consolas" panose="020B0609020204030204" pitchFamily="49" charset="0"/>
+                <a:cs typeface="Consolas" panose="020B0609020204030204" pitchFamily="49" charset="0"/>
+              </a:rPr>
+              <a:t>0x20000200</a:t>
+            </a:r>
+          </a:p>
+        </p:txBody>
+      </p:sp>
+      <p:sp>
+        <p:nvSpPr>
+          <p:cNvPr id="21" name="TextBox 20"/>
+          <p:cNvSpPr txBox="1"/>
+          <p:nvPr/>
+        </p:nvSpPr>
+        <p:spPr>
+          <a:xfrm>
+            <a:off x="4127376" y="1988840"/>
+            <a:ext cx="1296144" cy="338554"/>
+          </a:xfrm>
+          <a:prstGeom prst="rect">
+            <a:avLst/>
+          </a:prstGeom>
+          <a:noFill/>
+        </p:spPr>
+        <p:txBody>
+          <a:bodyPr wrap="square" rtlCol="0">
+            <a:spAutoFit/>
+          </a:bodyPr>
+          <a:lstStyle/>
+          <a:p>
+            <a:pPr algn="r"/>
+            <a:r>
+              <a:rPr lang="en-GB" sz="1600" b="1" dirty="0" err="1">
+                <a:latin typeface="Consolas" panose="020B0609020204030204" pitchFamily="49" charset="0"/>
+                <a:cs typeface="Consolas" panose="020B0609020204030204" pitchFamily="49" charset="0"/>
+              </a:rPr>
+              <a:t>0x22222222</a:t>
+            </a:r>
+            <a:endParaRPr lang="en-GB" sz="1600" b="1" dirty="0">
+              <a:latin typeface="Consolas" panose="020B0609020204030204" pitchFamily="49" charset="0"/>
+              <a:cs typeface="Consolas" panose="020B0609020204030204" pitchFamily="49" charset="0"/>
+            </a:endParaRPr>
+          </a:p>
+        </p:txBody>
+      </p:sp>
+      <p:sp>
+        <p:nvSpPr>
+          <p:cNvPr id="22" name="TextBox 21"/>
+          <p:cNvSpPr txBox="1"/>
+          <p:nvPr/>
+        </p:nvSpPr>
+        <p:spPr>
+          <a:xfrm>
+            <a:off x="4127376" y="1628800"/>
+            <a:ext cx="1296144" cy="338554"/>
+          </a:xfrm>
+          <a:prstGeom prst="rect">
+            <a:avLst/>
+          </a:prstGeom>
+          <a:noFill/>
+        </p:spPr>
+        <p:txBody>
+          <a:bodyPr wrap="square" rtlCol="0">
+            <a:spAutoFit/>
+          </a:bodyPr>
+          <a:lstStyle/>
+          <a:p>
+            <a:pPr algn="r"/>
+            <a:r>
+              <a:rPr lang="en-GB" sz="1600" b="1" dirty="0" err="1">
+                <a:latin typeface="Consolas" panose="020B0609020204030204" pitchFamily="49" charset="0"/>
+                <a:cs typeface="Consolas" panose="020B0609020204030204" pitchFamily="49" charset="0"/>
+              </a:rPr>
+              <a:t>0x11111111</a:t>
+            </a:r>
+            <a:endParaRPr lang="en-GB" sz="1600" b="1" dirty="0">
+              <a:latin typeface="Consolas" panose="020B0609020204030204" pitchFamily="49" charset="0"/>
+              <a:cs typeface="Consolas" panose="020B0609020204030204" pitchFamily="49" charset="0"/>
+            </a:endParaRPr>
+          </a:p>
+        </p:txBody>
+      </p:sp>
+      <p:cxnSp>
+        <p:nvCxnSpPr>
+          <p:cNvPr id="24" name="Straight Arrow Connector 23"/>
+          <p:cNvCxnSpPr>
+            <a:endCxn id="35" idx="1"/>
+          </p:cNvCxnSpPr>
+          <p:nvPr/>
+        </p:nvCxnSpPr>
+        <p:spPr>
+          <a:xfrm>
+            <a:off x="5429517" y="2891802"/>
+            <a:ext cx="802628" cy="1340830"/>
+          </a:xfrm>
+          <a:prstGeom prst="straightConnector1">
+            <a:avLst/>
+          </a:prstGeom>
+          <a:ln w="19050">
+            <a:solidFill>
+              <a:srgbClr val="C00000"/>
+            </a:solidFill>
+            <a:tailEnd type="arrow"/>
+          </a:ln>
+        </p:spPr>
+        <p:style>
+          <a:lnRef idx="1">
+            <a:schemeClr val="accent1"/>
+          </a:lnRef>
+          <a:fillRef idx="0">
+            <a:schemeClr val="accent1"/>
+          </a:fillRef>
+          <a:effectRef idx="0">
+            <a:schemeClr val="accent1"/>
+          </a:effectRef>
+          <a:fontRef idx="minor">
+            <a:schemeClr val="tx1"/>
+          </a:fontRef>
+        </p:style>
+      </p:cxnSp>
+      <p:sp>
+        <p:nvSpPr>
+          <p:cNvPr id="4" name="Slide Number Placeholder 3"/>
           <p:cNvSpPr>
             <a:spLocks noGrp="1"/>
           </p:cNvSpPr>
@@ -7409,65 +8231,20 @@
               <a:pPr/>
               <a:t>10</a:t>
             </a:fld>
-            <a:endParaRPr kumimoji="0" lang="en-US" dirty="0"/>
-          </a:p>
-        </p:txBody>
-      </p:sp>
-      <p:sp>
-        <p:nvSpPr>
-          <p:cNvPr id="11" name="Rectangle 10"/>
-          <p:cNvSpPr/>
+            <a:endParaRPr kumimoji="0" lang="en-US"/>
+          </a:p>
+        </p:txBody>
+      </p:sp>
+      <p:sp>
+        <p:nvSpPr>
+          <p:cNvPr id="23" name="TextBox 22"/>
+          <p:cNvSpPr txBox="1"/>
           <p:nvPr/>
         </p:nvSpPr>
         <p:spPr>
           <a:xfrm>
-            <a:off x="76200" y="1593468"/>
-            <a:ext cx="9163050" cy="646331"/>
-          </a:xfrm>
-          <a:prstGeom prst="rect">
-            <a:avLst/>
-          </a:prstGeom>
-        </p:spPr>
-        <p:txBody>
-          <a:bodyPr wrap="square">
-            <a:spAutoFit/>
-          </a:bodyPr>
-          <a:lstStyle/>
-          <a:p>
-            <a:r>
-              <a:rPr lang="en-US" b="1" dirty="0">
-                <a:latin typeface="Consolas" panose="020B0609020204030204" pitchFamily="49" charset="0"/>
-              </a:rPr>
-              <a:t>uint32_t sum(uint8_t a8, uint8_t b8, uint16_t c16, uint16_t d16, </a:t>
-            </a:r>
-            <a:r>
-              <a:rPr lang="en-US" b="1" dirty="0">
-                <a:solidFill>
-                  <a:srgbClr val="FF0000"/>
-                </a:solidFill>
-                <a:latin typeface="Consolas" panose="020B0609020204030204" pitchFamily="49" charset="0"/>
-              </a:rPr>
-              <a:t>uint32_t e32</a:t>
-            </a:r>
-            <a:r>
-              <a:rPr lang="en-US" b="1" dirty="0">
-                <a:latin typeface="Consolas" panose="020B0609020204030204" pitchFamily="49" charset="0"/>
-              </a:rPr>
-              <a:t>);</a:t>
-            </a:r>
-          </a:p>
-        </p:txBody>
-      </p:sp>
-      <p:sp>
-        <p:nvSpPr>
-          <p:cNvPr id="4" name="TextBox 3"/>
-          <p:cNvSpPr txBox="1"/>
-          <p:nvPr/>
-        </p:nvSpPr>
-        <p:spPr>
-          <a:xfrm>
-            <a:off x="304800" y="2754035"/>
-            <a:ext cx="750526" cy="369332"/>
+            <a:off x="6230165" y="3352800"/>
+            <a:ext cx="1296142" cy="338554"/>
           </a:xfrm>
           <a:prstGeom prst="rect">
             <a:avLst/>
@@ -7475,74 +8252,289 @@
           <a:noFill/>
         </p:spPr>
         <p:txBody>
-          <a:bodyPr wrap="none" rtlCol="0">
+          <a:bodyPr wrap="square" rtlCol="0">
             <a:spAutoFit/>
           </a:bodyPr>
           <a:lstStyle/>
           <a:p>
-            <a:r>
-              <a:rPr lang="en-US" dirty="0"/>
-              <a:t>Caller</a:t>
-            </a:r>
-          </a:p>
-        </p:txBody>
-      </p:sp>
-      <p:sp>
-        <p:nvSpPr>
-          <p:cNvPr id="23" name="Rectangle 22"/>
+            <a:pPr algn="ctr"/>
+            <a:r>
+              <a:rPr lang="en-US" sz="1600" b="1" dirty="0" err="1">
+                <a:latin typeface="Consolas" panose="020B0609020204030204" pitchFamily="49" charset="0"/>
+                <a:cs typeface="Consolas" panose="020B0609020204030204" pitchFamily="49" charset="0"/>
+              </a:rPr>
+              <a:t>xxxxxxxx</a:t>
+            </a:r>
+            <a:endParaRPr lang="en-US" sz="1600" b="1" dirty="0">
+              <a:latin typeface="Consolas" panose="020B0609020204030204" pitchFamily="49" charset="0"/>
+              <a:cs typeface="Consolas" panose="020B0609020204030204" pitchFamily="49" charset="0"/>
+            </a:endParaRPr>
+          </a:p>
+        </p:txBody>
+      </p:sp>
+      <p:sp>
+        <p:nvSpPr>
+          <p:cNvPr id="25" name="Rounded Rectangle 24"/>
           <p:cNvSpPr/>
           <p:nvPr/>
         </p:nvSpPr>
         <p:spPr>
           <a:xfrm>
-            <a:off x="33528" y="2251948"/>
-            <a:ext cx="9163050" cy="369332"/>
+            <a:off x="381000" y="2528900"/>
+            <a:ext cx="2438400" cy="2078360"/>
+          </a:xfrm>
+          <a:prstGeom prst="roundRect">
+            <a:avLst/>
+          </a:prstGeom>
+          <a:noFill/>
+          <a:ln>
+            <a:solidFill>
+              <a:schemeClr val="tx1"/>
+            </a:solidFill>
+          </a:ln>
+        </p:spPr>
+        <p:style>
+          <a:lnRef idx="2">
+            <a:schemeClr val="accent1">
+              <a:shade val="50000"/>
+            </a:schemeClr>
+          </a:lnRef>
+          <a:fillRef idx="1">
+            <a:schemeClr val="accent1"/>
+          </a:fillRef>
+          <a:effectRef idx="0">
+            <a:schemeClr val="accent1"/>
+          </a:effectRef>
+          <a:fontRef idx="minor">
+            <a:schemeClr val="lt1"/>
+          </a:fontRef>
+        </p:style>
+        <p:txBody>
+          <a:bodyPr rtlCol="0" anchor="ctr"/>
+          <a:lstStyle/>
+          <a:p>
+            <a:pPr>
+              <a:buNone/>
+            </a:pPr>
+            <a:r>
+              <a:rPr lang="en-GB" sz="2400" dirty="0">
+                <a:solidFill>
+                  <a:schemeClr val="tx1"/>
+                </a:solidFill>
+                <a:latin typeface="Consolas" panose="020B0609020204030204" pitchFamily="49" charset="0"/>
+                <a:cs typeface="Consolas" panose="020B0609020204030204" pitchFamily="49" charset="0"/>
+              </a:rPr>
+              <a:t>PUSH {R1,R2}</a:t>
+            </a:r>
+          </a:p>
+          <a:p>
+            <a:pPr>
+              <a:buNone/>
+            </a:pPr>
+            <a:r>
+              <a:rPr lang="en-GB" sz="2400" dirty="0">
+                <a:solidFill>
+                  <a:schemeClr val="tx1"/>
+                </a:solidFill>
+                <a:latin typeface="Consolas" panose="020B0609020204030204" pitchFamily="49" charset="0"/>
+                <a:cs typeface="Consolas" panose="020B0609020204030204" pitchFamily="49" charset="0"/>
+              </a:rPr>
+              <a:t>POP  {R1}</a:t>
+            </a:r>
+          </a:p>
+          <a:p>
+            <a:pPr>
+              <a:buNone/>
+            </a:pPr>
+            <a:r>
+              <a:rPr lang="en-GB" sz="2400" dirty="0">
+                <a:solidFill>
+                  <a:schemeClr val="tx1"/>
+                </a:solidFill>
+                <a:latin typeface="Consolas" panose="020B0609020204030204" pitchFamily="49" charset="0"/>
+                <a:cs typeface="Consolas" panose="020B0609020204030204" pitchFamily="49" charset="0"/>
+              </a:rPr>
+              <a:t>POP  {</a:t>
+            </a:r>
+            <a:r>
+              <a:rPr lang="en-GB" sz="2400" dirty="0" err="1">
+                <a:solidFill>
+                  <a:schemeClr val="tx1"/>
+                </a:solidFill>
+                <a:latin typeface="Consolas" panose="020B0609020204030204" pitchFamily="49" charset="0"/>
+                <a:cs typeface="Consolas" panose="020B0609020204030204" pitchFamily="49" charset="0"/>
+              </a:rPr>
+              <a:t>R2</a:t>
+            </a:r>
+            <a:r>
+              <a:rPr lang="en-GB" sz="2400" dirty="0">
+                <a:solidFill>
+                  <a:schemeClr val="tx1"/>
+                </a:solidFill>
+                <a:latin typeface="Consolas" panose="020B0609020204030204" pitchFamily="49" charset="0"/>
+                <a:cs typeface="Consolas" panose="020B0609020204030204" pitchFamily="49" charset="0"/>
+              </a:rPr>
+              <a:t>}</a:t>
+            </a:r>
+          </a:p>
+        </p:txBody>
+      </p:sp>
+      <p:sp>
+        <p:nvSpPr>
+          <p:cNvPr id="3" name="TextBox 2"/>
+          <p:cNvSpPr txBox="1"/>
+          <p:nvPr/>
+        </p:nvSpPr>
+        <p:spPr>
+          <a:xfrm>
+            <a:off x="6230164" y="4736068"/>
+            <a:ext cx="1298123" cy="369332"/>
           </a:xfrm>
           <a:prstGeom prst="rect">
             <a:avLst/>
           </a:prstGeom>
+          <a:noFill/>
         </p:spPr>
         <p:txBody>
-          <a:bodyPr wrap="square">
+          <a:bodyPr wrap="square" rtlCol="0">
             <a:spAutoFit/>
           </a:bodyPr>
           <a:lstStyle/>
           <a:p>
-            <a:r>
-              <a:rPr lang="en-US" b="1" dirty="0">
-                <a:solidFill>
-                  <a:srgbClr val="FF0000"/>
-                </a:solidFill>
-                <a:latin typeface="Consolas" panose="020B0609020204030204" pitchFamily="49" charset="0"/>
-              </a:rPr>
-              <a:t>s = sum(1, 2, 3, 4, 5);</a:t>
-            </a:r>
-          </a:p>
-        </p:txBody>
-      </p:sp>
-      <p:sp>
-        <p:nvSpPr>
-          <p:cNvPr id="15" name="TextBox 14"/>
+            <a:pPr algn="ctr"/>
+            <a:r>
+              <a:rPr lang="en-US" dirty="0"/>
+              <a:t>memory</a:t>
+            </a:r>
+          </a:p>
+        </p:txBody>
+      </p:sp>
+      <p:sp>
+        <p:nvSpPr>
+          <p:cNvPr id="28" name="TextBox 27"/>
           <p:cNvSpPr txBox="1"/>
           <p:nvPr/>
         </p:nvSpPr>
         <p:spPr>
           <a:xfrm>
-            <a:off x="449580" y="3256122"/>
-            <a:ext cx="2464136" cy="2585323"/>
+            <a:off x="7738363" y="2615348"/>
+            <a:ext cx="944041" cy="369332"/>
+          </a:xfrm>
+          <a:prstGeom prst="rect">
+            <a:avLst/>
+          </a:prstGeom>
+          <a:noFill/>
+        </p:spPr>
+        <p:txBody>
+          <a:bodyPr wrap="none" rtlCol="0">
+            <a:spAutoFit/>
+          </a:bodyPr>
+          <a:lstStyle/>
+          <a:p>
+            <a:r>
+              <a:rPr lang="en-US" dirty="0"/>
+              <a:t>Address</a:t>
+            </a:r>
+          </a:p>
+        </p:txBody>
+      </p:sp>
+      <p:sp>
+        <p:nvSpPr>
+          <p:cNvPr id="34" name="TextBox 33"/>
+          <p:cNvSpPr txBox="1"/>
+          <p:nvPr/>
+        </p:nvSpPr>
+        <p:spPr>
+          <a:xfrm>
+            <a:off x="6232145" y="3724801"/>
+            <a:ext cx="1296142" cy="338554"/>
+          </a:xfrm>
+          <a:prstGeom prst="rect">
+            <a:avLst/>
+          </a:prstGeom>
+          <a:noFill/>
+        </p:spPr>
+        <p:txBody>
+          <a:bodyPr wrap="square" rtlCol="0">
+            <a:spAutoFit/>
+          </a:bodyPr>
+          <a:lstStyle/>
+          <a:p>
+            <a:pPr algn="ctr"/>
+            <a:r>
+              <a:rPr lang="en-US" sz="1600" dirty="0">
+                <a:latin typeface="Consolas" panose="020B0609020204030204" pitchFamily="49" charset="0"/>
+                <a:cs typeface="Consolas" panose="020B0609020204030204" pitchFamily="49" charset="0"/>
+              </a:rPr>
+              <a:t>0x22222222</a:t>
+            </a:r>
+            <a:endParaRPr lang="en-US" sz="1600" b="1" dirty="0">
+              <a:latin typeface="Consolas" panose="020B0609020204030204" pitchFamily="49" charset="0"/>
+              <a:cs typeface="Consolas" panose="020B0609020204030204" pitchFamily="49" charset="0"/>
+            </a:endParaRPr>
+          </a:p>
+        </p:txBody>
+      </p:sp>
+      <p:sp>
+        <p:nvSpPr>
+          <p:cNvPr id="35" name="TextBox 34"/>
+          <p:cNvSpPr txBox="1"/>
+          <p:nvPr/>
+        </p:nvSpPr>
+        <p:spPr>
+          <a:xfrm>
+            <a:off x="6232145" y="4063355"/>
+            <a:ext cx="1296142" cy="338554"/>
+          </a:xfrm>
+          <a:prstGeom prst="rect">
+            <a:avLst/>
+          </a:prstGeom>
+          <a:noFill/>
+        </p:spPr>
+        <p:txBody>
+          <a:bodyPr wrap="square" rtlCol="0">
+            <a:spAutoFit/>
+          </a:bodyPr>
+          <a:lstStyle/>
+          <a:p>
+            <a:pPr algn="ctr"/>
+            <a:r>
+              <a:rPr lang="en-US" sz="1600" dirty="0">
+                <a:latin typeface="Consolas" panose="020B0609020204030204" pitchFamily="49" charset="0"/>
+                <a:cs typeface="Consolas" panose="020B0609020204030204" pitchFamily="49" charset="0"/>
+              </a:rPr>
+              <a:t>0x11111111</a:t>
+            </a:r>
+            <a:endParaRPr lang="en-US" sz="1600" b="1" dirty="0">
+              <a:latin typeface="Consolas" panose="020B0609020204030204" pitchFamily="49" charset="0"/>
+              <a:cs typeface="Consolas" panose="020B0609020204030204" pitchFamily="49" charset="0"/>
+            </a:endParaRPr>
+          </a:p>
+        </p:txBody>
+      </p:sp>
+      <p:sp>
+        <p:nvSpPr>
+          <p:cNvPr id="30" name="Rectangle 29"/>
+          <p:cNvSpPr/>
+          <p:nvPr/>
+        </p:nvSpPr>
+        <p:spPr>
+          <a:xfrm>
+            <a:off x="443880" y="1675288"/>
+            <a:ext cx="2819400" cy="685274"/>
           </a:xfrm>
           <a:prstGeom prst="rect">
             <a:avLst/>
           </a:prstGeom>
         </p:spPr>
         <p:style>
-          <a:lnRef idx="2">
+          <a:lnRef idx="1">
             <a:schemeClr val="accent1"/>
           </a:lnRef>
-          <a:fillRef idx="1">
-            <a:schemeClr val="lt1"/>
+          <a:fillRef idx="2">
+            <a:schemeClr val="accent1"/>
           </a:fillRef>
-          <a:effectRef idx="0">
+          <a:effectRef idx="1">
             <a:schemeClr val="accent1"/>
           </a:effectRef>
           <a:fontRef idx="minor">
@@ -7550,413 +8542,105 @@
           </a:fontRef>
         </p:style>
         <p:txBody>
-          <a:bodyPr wrap="none" rtlCol="0">
-            <a:spAutoFit/>
-          </a:bodyPr>
-          <a:lstStyle/>
-          <a:p>
-            <a:r>
-              <a:rPr lang="en-US" dirty="0">
-                <a:latin typeface="Consolas" panose="020B0609020204030204" pitchFamily="49" charset="0"/>
-              </a:rPr>
-              <a:t>  MOV r0, #5 </a:t>
-            </a:r>
-            <a:r>
-              <a:rPr lang="en-US" dirty="0">
-                <a:solidFill>
-                  <a:schemeClr val="bg1">
-                    <a:lumMod val="50000"/>
-                  </a:schemeClr>
-                </a:solidFill>
-                <a:latin typeface="Consolas" panose="020B0609020204030204" pitchFamily="49" charset="0"/>
-              </a:rPr>
-              <a:t>; e32</a:t>
-            </a:r>
-          </a:p>
-          <a:p>
-            <a:r>
-              <a:rPr lang="en-US" dirty="0">
-                <a:latin typeface="Consolas" panose="020B0609020204030204" pitchFamily="49" charset="0"/>
-              </a:rPr>
-              <a:t>  </a:t>
-            </a:r>
-            <a:r>
-              <a:rPr lang="en-US" b="1" dirty="0">
-                <a:solidFill>
-                  <a:srgbClr val="FF0000"/>
-                </a:solidFill>
-                <a:latin typeface="Consolas" panose="020B0609020204030204" pitchFamily="49" charset="0"/>
-              </a:rPr>
-              <a:t>PUSH {r0}</a:t>
-            </a:r>
-          </a:p>
-          <a:p>
-            <a:r>
-              <a:rPr lang="en-US" dirty="0">
+          <a:bodyPr rtlCol="0" anchor="ctr"/>
+          <a:lstStyle/>
+          <a:p>
+            <a:pPr algn="ctr"/>
+            <a:r>
+              <a:rPr lang="en-US" sz="2400" dirty="0">
                 <a:solidFill>
                   <a:schemeClr val="tx1"/>
                 </a:solidFill>
                 <a:latin typeface="Consolas" panose="020B0609020204030204" pitchFamily="49" charset="0"/>
-              </a:rPr>
-              <a:t>  MOV r0, #1 </a:t>
-            </a:r>
-            <a:r>
-              <a:rPr lang="en-US" dirty="0">
+                <a:cs typeface="Consolas" panose="020B0609020204030204" pitchFamily="49" charset="0"/>
+              </a:rPr>
+              <a:t>R1==0x11111111</a:t>
+            </a:r>
+          </a:p>
+          <a:p>
+            <a:pPr algn="ctr"/>
+            <a:r>
+              <a:rPr lang="en-US" sz="2400" dirty="0">
                 <a:solidFill>
-                  <a:schemeClr val="bg1">
-                    <a:lumMod val="50000"/>
-                  </a:schemeClr>
+                  <a:schemeClr val="tx1"/>
                 </a:solidFill>
                 <a:latin typeface="Consolas" panose="020B0609020204030204" pitchFamily="49" charset="0"/>
-              </a:rPr>
-              <a:t>; a8</a:t>
-            </a:r>
-          </a:p>
-          <a:p>
-            <a:r>
-              <a:rPr lang="en-US" dirty="0">
-                <a:latin typeface="Consolas" panose="020B0609020204030204" pitchFamily="49" charset="0"/>
-              </a:rPr>
-              <a:t>  MOV r1, #2 </a:t>
-            </a:r>
-            <a:r>
-              <a:rPr lang="en-US" dirty="0">
-                <a:solidFill>
-                  <a:schemeClr val="bg1">
-                    <a:lumMod val="50000"/>
-                  </a:schemeClr>
-                </a:solidFill>
-                <a:latin typeface="Consolas" panose="020B0609020204030204" pitchFamily="49" charset="0"/>
-              </a:rPr>
-              <a:t>; b8</a:t>
-            </a:r>
-          </a:p>
-          <a:p>
-            <a:r>
-              <a:rPr lang="en-US" dirty="0">
-                <a:latin typeface="Consolas" panose="020B0609020204030204" pitchFamily="49" charset="0"/>
-              </a:rPr>
-              <a:t>  MOV r2, #3 </a:t>
-            </a:r>
-            <a:r>
-              <a:rPr lang="en-US" dirty="0">
-                <a:solidFill>
-                  <a:schemeClr val="bg1">
-                    <a:lumMod val="50000"/>
-                  </a:schemeClr>
-                </a:solidFill>
-                <a:latin typeface="Consolas" panose="020B0609020204030204" pitchFamily="49" charset="0"/>
-              </a:rPr>
-              <a:t>; c16</a:t>
-            </a:r>
-          </a:p>
-          <a:p>
-            <a:r>
-              <a:rPr lang="en-US" dirty="0">
-                <a:latin typeface="Consolas" panose="020B0609020204030204" pitchFamily="49" charset="0"/>
-              </a:rPr>
-              <a:t>  MOV r3, #4 </a:t>
-            </a:r>
-            <a:r>
-              <a:rPr lang="en-US" dirty="0">
-                <a:solidFill>
-                  <a:schemeClr val="bg1">
-                    <a:lumMod val="50000"/>
-                  </a:schemeClr>
-                </a:solidFill>
-                <a:latin typeface="Consolas" panose="020B0609020204030204" pitchFamily="49" charset="0"/>
-              </a:rPr>
-              <a:t>; d16</a:t>
-            </a:r>
-          </a:p>
-          <a:p>
-            <a:r>
-              <a:rPr lang="en-US" dirty="0">
-                <a:latin typeface="Consolas" panose="020B0609020204030204" pitchFamily="49" charset="0"/>
-              </a:rPr>
-              <a:t>  BL  sum</a:t>
-            </a:r>
-          </a:p>
-          <a:p>
-            <a:r>
-              <a:rPr lang="en-US" dirty="0">
-                <a:latin typeface="Consolas" panose="020B0609020204030204" pitchFamily="49" charset="0"/>
-              </a:rPr>
-              <a:t>  ...</a:t>
-            </a:r>
-          </a:p>
-          <a:p>
-            <a:r>
-              <a:rPr lang="en-US" dirty="0">
-                <a:latin typeface="Consolas" panose="020B0609020204030204" pitchFamily="49" charset="0"/>
-              </a:rPr>
-              <a:t>  </a:t>
-            </a:r>
-            <a:r>
-              <a:rPr lang="en-US" b="1" dirty="0">
-                <a:solidFill>
-                  <a:srgbClr val="FF0000"/>
-                </a:solidFill>
-                <a:latin typeface="Consolas" panose="020B0609020204030204" pitchFamily="49" charset="0"/>
-              </a:rPr>
-              <a:t>POP {r0}</a:t>
-            </a:r>
-          </a:p>
-        </p:txBody>
-      </p:sp>
-      <p:sp>
-        <p:nvSpPr>
-          <p:cNvPr id="27" name="TextBox 26"/>
-          <p:cNvSpPr txBox="1"/>
+                <a:cs typeface="Consolas" panose="020B0609020204030204" pitchFamily="49" charset="0"/>
+              </a:rPr>
+              <a:t>R2==0x22222222</a:t>
+            </a:r>
+          </a:p>
+        </p:txBody>
+      </p:sp>
+      <p:sp>
+        <p:nvSpPr>
+          <p:cNvPr id="31" name="Rectangle 30"/>
+          <p:cNvSpPr/>
           <p:nvPr/>
         </p:nvSpPr>
         <p:spPr>
           <a:xfrm>
-            <a:off x="3581400" y="2840938"/>
-            <a:ext cx="769763" cy="369332"/>
-          </a:xfrm>
-          <a:prstGeom prst="rect">
-            <a:avLst/>
-          </a:prstGeom>
-          <a:noFill/>
-        </p:spPr>
-        <p:txBody>
-          <a:bodyPr wrap="none" rtlCol="0">
-            <a:spAutoFit/>
-          </a:bodyPr>
-          <a:lstStyle/>
-          <a:p>
-            <a:r>
-              <a:rPr lang="en-US" dirty="0" err="1"/>
-              <a:t>Callee</a:t>
-            </a:r>
-            <a:endParaRPr lang="en-US" dirty="0"/>
-          </a:p>
-        </p:txBody>
-      </p:sp>
-      <p:sp>
-        <p:nvSpPr>
-          <p:cNvPr id="28" name="TextBox 27"/>
-          <p:cNvSpPr txBox="1"/>
-          <p:nvPr/>
-        </p:nvSpPr>
-        <p:spPr>
-          <a:xfrm>
-            <a:off x="3607914" y="3305718"/>
-            <a:ext cx="4996881" cy="2308324"/>
+            <a:off x="677570" y="1237054"/>
+            <a:ext cx="2441694" cy="400110"/>
           </a:xfrm>
           <a:prstGeom prst="rect">
             <a:avLst/>
           </a:prstGeom>
         </p:spPr>
-        <p:style>
-          <a:lnRef idx="2">
-            <a:schemeClr val="accent1"/>
-          </a:lnRef>
-          <a:fillRef idx="1">
-            <a:schemeClr val="lt1"/>
-          </a:fillRef>
-          <a:effectRef idx="0">
-            <a:schemeClr val="accent1"/>
-          </a:effectRef>
-          <a:fontRef idx="minor">
-            <a:schemeClr val="dk1"/>
-          </a:fontRef>
-        </p:style>
-        <p:txBody>
-          <a:bodyPr wrap="none" rtlCol="0">
+        <p:txBody>
+          <a:bodyPr wrap="none">
             <a:spAutoFit/>
           </a:bodyPr>
           <a:lstStyle/>
           <a:p>
             <a:r>
-              <a:rPr lang="en-US" b="1" dirty="0">
-                <a:solidFill>
-                  <a:srgbClr val="0000FF"/>
-                </a:solidFill>
+              <a:rPr lang="en-US" sz="2000" dirty="0">
                 <a:latin typeface="Consolas" panose="020B0609020204030204" pitchFamily="49" charset="0"/>
-              </a:rPr>
-              <a:t>sum</a:t>
-            </a:r>
-            <a:r>
-              <a:rPr lang="en-US" dirty="0">
-                <a:latin typeface="Consolas" panose="020B0609020204030204" pitchFamily="49" charset="0"/>
-              </a:rPr>
-              <a:t> PROC    </a:t>
-            </a:r>
-          </a:p>
-          <a:p>
-            <a:r>
-              <a:rPr lang="en-US" dirty="0">
-                <a:latin typeface="Consolas" panose="020B0609020204030204" pitchFamily="49" charset="0"/>
-              </a:rPr>
-              <a:t>  ADD r0, r0, r1   </a:t>
-            </a:r>
-            <a:r>
-              <a:rPr lang="en-US" dirty="0">
-                <a:solidFill>
-                  <a:schemeClr val="bg1">
-                    <a:lumMod val="50000"/>
-                  </a:schemeClr>
-                </a:solidFill>
-                <a:latin typeface="Consolas" panose="020B0609020204030204" pitchFamily="49" charset="0"/>
-              </a:rPr>
-              <a:t>; a8 + b8</a:t>
-            </a:r>
-          </a:p>
-          <a:p>
-            <a:r>
-              <a:rPr lang="en-US" dirty="0">
-                <a:latin typeface="Consolas" panose="020B0609020204030204" pitchFamily="49" charset="0"/>
-              </a:rPr>
-              <a:t>  ADD r0, r0, r2   </a:t>
-            </a:r>
-            <a:r>
-              <a:rPr lang="en-US" dirty="0">
-                <a:solidFill>
-                  <a:schemeClr val="bg1">
-                    <a:lumMod val="50000"/>
-                  </a:schemeClr>
-                </a:solidFill>
-                <a:latin typeface="Consolas" panose="020B0609020204030204" pitchFamily="49" charset="0"/>
-              </a:rPr>
-              <a:t>; add c16</a:t>
-            </a:r>
-          </a:p>
-          <a:p>
-            <a:r>
-              <a:rPr lang="en-US" dirty="0">
-                <a:latin typeface="Consolas" panose="020B0609020204030204" pitchFamily="49" charset="0"/>
-              </a:rPr>
-              <a:t>  ADD r0, r0, r3   </a:t>
-            </a:r>
-            <a:r>
-              <a:rPr lang="en-US" dirty="0">
-                <a:solidFill>
-                  <a:schemeClr val="bg1">
-                    <a:lumMod val="50000"/>
-                  </a:schemeClr>
-                </a:solidFill>
-                <a:latin typeface="Consolas" panose="020B0609020204030204" pitchFamily="49" charset="0"/>
-              </a:rPr>
-              <a:t>; add d16</a:t>
-            </a:r>
-          </a:p>
-          <a:p>
-            <a:r>
-              <a:rPr lang="en-US" b="1" dirty="0">
-                <a:solidFill>
-                  <a:srgbClr val="FF0000"/>
-                </a:solidFill>
-                <a:latin typeface="Consolas" panose="020B0609020204030204" pitchFamily="49" charset="0"/>
-              </a:rPr>
-              <a:t>  LDR r1, [</a:t>
-            </a:r>
-            <a:r>
-              <a:rPr lang="en-US" b="1" dirty="0" err="1">
-                <a:solidFill>
-                  <a:srgbClr val="FF0000"/>
-                </a:solidFill>
-                <a:latin typeface="Consolas" panose="020B0609020204030204" pitchFamily="49" charset="0"/>
-              </a:rPr>
-              <a:t>sp</a:t>
-            </a:r>
-            <a:r>
-              <a:rPr lang="en-US" b="1" dirty="0">
-                <a:solidFill>
-                  <a:srgbClr val="FF0000"/>
-                </a:solidFill>
-                <a:latin typeface="Consolas" panose="020B0609020204030204" pitchFamily="49" charset="0"/>
-              </a:rPr>
-              <a:t>, #0] </a:t>
-            </a:r>
-            <a:r>
-              <a:rPr lang="en-US" b="1" dirty="0">
-                <a:solidFill>
-                  <a:schemeClr val="bg1">
-                    <a:lumMod val="50000"/>
-                  </a:schemeClr>
-                </a:solidFill>
-                <a:latin typeface="Consolas" panose="020B0609020204030204" pitchFamily="49" charset="0"/>
-              </a:rPr>
-              <a:t>; read argument e32</a:t>
-            </a:r>
-          </a:p>
-          <a:p>
-            <a:r>
-              <a:rPr lang="en-US" dirty="0">
-                <a:solidFill>
-                  <a:schemeClr val="bg1">
-                    <a:lumMod val="50000"/>
-                  </a:schemeClr>
-                </a:solidFill>
-                <a:latin typeface="Consolas" panose="020B0609020204030204" pitchFamily="49" charset="0"/>
-              </a:rPr>
-              <a:t>  </a:t>
-            </a:r>
-            <a:r>
-              <a:rPr lang="en-US" dirty="0">
-                <a:solidFill>
-                  <a:schemeClr val="tx1"/>
-                </a:solidFill>
-                <a:latin typeface="Consolas" panose="020B0609020204030204" pitchFamily="49" charset="0"/>
-              </a:rPr>
-              <a:t>ADD r0, r0, r1   </a:t>
-            </a:r>
-            <a:r>
-              <a:rPr lang="en-US" dirty="0">
-                <a:solidFill>
-                  <a:schemeClr val="bg1">
-                    <a:lumMod val="50000"/>
-                  </a:schemeClr>
-                </a:solidFill>
-                <a:latin typeface="Consolas" panose="020B0609020204030204" pitchFamily="49" charset="0"/>
-              </a:rPr>
-              <a:t>; add e32</a:t>
-            </a:r>
-          </a:p>
-          <a:p>
-            <a:r>
-              <a:rPr lang="en-US" dirty="0">
-                <a:latin typeface="Consolas" panose="020B0609020204030204" pitchFamily="49" charset="0"/>
-              </a:rPr>
-              <a:t>  BX  LR</a:t>
-            </a:r>
-          </a:p>
-          <a:p>
-            <a:r>
-              <a:rPr lang="en-US" dirty="0">
-                <a:latin typeface="Consolas" panose="020B0609020204030204" pitchFamily="49" charset="0"/>
-              </a:rPr>
-              <a:t>  ENDP</a:t>
-            </a:r>
-          </a:p>
-        </p:txBody>
-      </p:sp>
-      <p:sp>
-        <p:nvSpPr>
-          <p:cNvPr id="6" name="Rectangle 5"/>
-          <p:cNvSpPr/>
-          <p:nvPr/>
+                <a:cs typeface="Consolas" panose="020B0609020204030204" pitchFamily="49" charset="0"/>
+              </a:rPr>
+              <a:t>Before execution</a:t>
+            </a:r>
+            <a:endParaRPr lang="en-US" sz="2000" dirty="0"/>
+          </a:p>
+        </p:txBody>
+      </p:sp>
+      <p:sp>
+        <p:nvSpPr>
+          <p:cNvPr id="32" name="Content Placeholder 3"/>
+          <p:cNvSpPr>
+            <a:spLocks noGrp="1"/>
+          </p:cNvSpPr>
+          <p:nvPr>
+            <p:ph sz="quarter" idx="1"/>
+          </p:nvPr>
         </p:nvSpPr>
         <p:spPr>
           <a:xfrm>
-            <a:off x="914400" y="5854799"/>
-            <a:ext cx="4861560" cy="646331"/>
+            <a:off x="443880" y="5044440"/>
+            <a:ext cx="8229600" cy="1333396"/>
           </a:xfrm>
-          <a:prstGeom prst="rect">
-            <a:avLst/>
-          </a:prstGeom>
         </p:spPr>
         <p:txBody>
-          <a:bodyPr wrap="square">
-            <a:spAutoFit/>
-          </a:bodyPr>
+          <a:bodyPr/>
           <a:lstStyle/>
           <a:p>
             <a:r>
               <a:rPr lang="en-US" dirty="0"/>
-              <a:t>The caller is responsible to pop extra arguments out of the stack after the subroutine returns.</a:t>
+              <a:t>Stack content </a:t>
+            </a:r>
+            <a:r>
+              <a:rPr lang="en-US"/>
+              <a:t>and SP shown </a:t>
+            </a:r>
+            <a:r>
+              <a:rPr lang="en-US" dirty="0"/>
+              <a:t>in figure</a:t>
+            </a:r>
+          </a:p>
+          <a:p>
+            <a:r>
+              <a:rPr lang="en-US" dirty="0"/>
+              <a:t>After POP {R2}, R1==0x11111111, R2==0x22222222</a:t>
             </a:r>
           </a:p>
         </p:txBody>
@@ -7964,7 +8648,7 @@
     </p:spTree>
     <p:extLst>
       <p:ext uri="{BB962C8B-B14F-4D97-AF65-F5344CB8AC3E}">
-        <p14:creationId xmlns:p14="http://schemas.microsoft.com/office/powerpoint/2010/main" val="2345755417"/>
+        <p14:creationId xmlns:p14="http://schemas.microsoft.com/office/powerpoint/2010/main" val="2098831747"/>
       </p:ext>
     </p:extLst>
   </p:cSld>
@@ -7993,6 +8677,153 @@
       </p:grpSpPr>
       <p:sp>
         <p:nvSpPr>
+          <p:cNvPr id="41" name="Rectangle 40"/>
+          <p:cNvSpPr/>
+          <p:nvPr/>
+        </p:nvSpPr>
+        <p:spPr>
+          <a:xfrm>
+            <a:off x="4127376" y="2348880"/>
+            <a:ext cx="1296144" cy="360040"/>
+          </a:xfrm>
+          <a:prstGeom prst="rect">
+            <a:avLst/>
+          </a:prstGeom>
+          <a:solidFill>
+            <a:schemeClr val="bg1"/>
+          </a:solidFill>
+          <a:ln>
+            <a:prstDash val="dash"/>
+          </a:ln>
+        </p:spPr>
+        <p:style>
+          <a:lnRef idx="2">
+            <a:schemeClr val="accent1">
+              <a:shade val="50000"/>
+            </a:schemeClr>
+          </a:lnRef>
+          <a:fillRef idx="1">
+            <a:schemeClr val="accent1"/>
+          </a:fillRef>
+          <a:effectRef idx="0">
+            <a:schemeClr val="accent1"/>
+          </a:effectRef>
+          <a:fontRef idx="minor">
+            <a:schemeClr val="lt1"/>
+          </a:fontRef>
+        </p:style>
+        <p:txBody>
+          <a:bodyPr rtlCol="0" anchor="ctr"/>
+          <a:lstStyle/>
+          <a:p>
+            <a:pPr algn="ctr"/>
+            <a:endParaRPr lang="en-GB" sz="1600" b="1">
+              <a:latin typeface="Consolas" panose="020B0609020204030204" pitchFamily="49" charset="0"/>
+              <a:cs typeface="Consolas" panose="020B0609020204030204" pitchFamily="49" charset="0"/>
+            </a:endParaRPr>
+          </a:p>
+        </p:txBody>
+      </p:sp>
+      <p:sp>
+        <p:nvSpPr>
+          <p:cNvPr id="29" name="Rectangle 28"/>
+          <p:cNvSpPr/>
+          <p:nvPr/>
+        </p:nvSpPr>
+        <p:spPr>
+          <a:xfrm>
+            <a:off x="6230164" y="2984680"/>
+            <a:ext cx="1296144" cy="360040"/>
+          </a:xfrm>
+          <a:prstGeom prst="rect">
+            <a:avLst/>
+          </a:prstGeom>
+          <a:solidFill>
+            <a:schemeClr val="bg1"/>
+          </a:solidFill>
+          <a:ln>
+            <a:prstDash val="dash"/>
+          </a:ln>
+        </p:spPr>
+        <p:style>
+          <a:lnRef idx="2">
+            <a:schemeClr val="accent1">
+              <a:shade val="50000"/>
+            </a:schemeClr>
+          </a:lnRef>
+          <a:fillRef idx="1">
+            <a:schemeClr val="accent1"/>
+          </a:fillRef>
+          <a:effectRef idx="0">
+            <a:schemeClr val="accent1"/>
+          </a:effectRef>
+          <a:fontRef idx="minor">
+            <a:schemeClr val="lt1"/>
+          </a:fontRef>
+        </p:style>
+        <p:txBody>
+          <a:bodyPr rtlCol="0" anchor="ctr"/>
+          <a:lstStyle/>
+          <a:p>
+            <a:pPr algn="ctr"/>
+            <a:endParaRPr lang="en-GB" sz="1600" b="1">
+              <a:latin typeface="Consolas" panose="020B0609020204030204" pitchFamily="49" charset="0"/>
+              <a:cs typeface="Consolas" panose="020B0609020204030204" pitchFamily="49" charset="0"/>
+            </a:endParaRPr>
+          </a:p>
+        </p:txBody>
+      </p:sp>
+      <p:sp>
+        <p:nvSpPr>
+          <p:cNvPr id="27" name="Rectangle 26"/>
+          <p:cNvSpPr/>
+          <p:nvPr/>
+        </p:nvSpPr>
+        <p:spPr>
+          <a:xfrm>
+            <a:off x="6230164" y="4423395"/>
+            <a:ext cx="1296144" cy="360040"/>
+          </a:xfrm>
+          <a:prstGeom prst="rect">
+            <a:avLst/>
+          </a:prstGeom>
+          <a:solidFill>
+            <a:schemeClr val="bg1"/>
+          </a:solidFill>
+          <a:ln>
+            <a:prstDash val="dash"/>
+          </a:ln>
+        </p:spPr>
+        <p:style>
+          <a:lnRef idx="2">
+            <a:schemeClr val="accent1">
+              <a:shade val="50000"/>
+            </a:schemeClr>
+          </a:lnRef>
+          <a:fillRef idx="1">
+            <a:schemeClr val="accent1"/>
+          </a:fillRef>
+          <a:effectRef idx="0">
+            <a:schemeClr val="accent1"/>
+          </a:effectRef>
+          <a:fontRef idx="minor">
+            <a:schemeClr val="lt1"/>
+          </a:fontRef>
+        </p:style>
+        <p:txBody>
+          <a:bodyPr rtlCol="0" anchor="ctr"/>
+          <a:lstStyle/>
+          <a:p>
+            <a:pPr algn="ctr"/>
+            <a:endParaRPr lang="en-GB" sz="1600" b="1">
+              <a:latin typeface="Consolas" panose="020B0609020204030204" pitchFamily="49" charset="0"/>
+              <a:cs typeface="Consolas" panose="020B0609020204030204" pitchFamily="49" charset="0"/>
+            </a:endParaRPr>
+          </a:p>
+        </p:txBody>
+      </p:sp>
+      <p:sp>
+        <p:nvSpPr>
           <p:cNvPr id="2" name="Title 1"/>
           <p:cNvSpPr>
             <a:spLocks noGrp="1"/>
@@ -8003,14 +8834,1293 @@
         </p:nvSpPr>
         <p:spPr/>
         <p:txBody>
-          <a:bodyPr>
-            <a:normAutofit fontScale="90000"/>
+          <a:bodyPr/>
+          <a:lstStyle/>
+          <a:p>
+            <a:r>
+              <a:rPr lang="en-GB" dirty="0"/>
+              <a:t>Example: Swap R1 &amp; R2</a:t>
+            </a:r>
+          </a:p>
+        </p:txBody>
+      </p:sp>
+      <p:sp>
+        <p:nvSpPr>
+          <p:cNvPr id="6" name="Rectangle 5"/>
+          <p:cNvSpPr/>
+          <p:nvPr/>
+        </p:nvSpPr>
+        <p:spPr>
+          <a:xfrm>
+            <a:off x="4127376" y="1628800"/>
+            <a:ext cx="1296144" cy="360040"/>
+          </a:xfrm>
+          <a:prstGeom prst="rect">
+            <a:avLst/>
+          </a:prstGeom>
+          <a:solidFill>
+            <a:schemeClr val="bg1"/>
+          </a:solidFill>
+        </p:spPr>
+        <p:style>
+          <a:lnRef idx="2">
+            <a:schemeClr val="accent1">
+              <a:shade val="50000"/>
+            </a:schemeClr>
+          </a:lnRef>
+          <a:fillRef idx="1">
+            <a:schemeClr val="accent1"/>
+          </a:fillRef>
+          <a:effectRef idx="0">
+            <a:schemeClr val="accent1"/>
+          </a:effectRef>
+          <a:fontRef idx="minor">
+            <a:schemeClr val="lt1"/>
+          </a:fontRef>
+        </p:style>
+        <p:txBody>
+          <a:bodyPr rtlCol="0" anchor="ctr"/>
+          <a:lstStyle/>
+          <a:p>
+            <a:pPr algn="ctr"/>
+            <a:endParaRPr lang="en-GB" sz="1600" b="1">
+              <a:latin typeface="Consolas" panose="020B0609020204030204" pitchFamily="49" charset="0"/>
+              <a:cs typeface="Consolas" panose="020B0609020204030204" pitchFamily="49" charset="0"/>
+            </a:endParaRPr>
+          </a:p>
+        </p:txBody>
+      </p:sp>
+      <p:sp>
+        <p:nvSpPr>
+          <p:cNvPr id="7" name="TextBox 6"/>
+          <p:cNvSpPr txBox="1"/>
+          <p:nvPr/>
+        </p:nvSpPr>
+        <p:spPr>
+          <a:xfrm>
+            <a:off x="3551312" y="1628800"/>
+            <a:ext cx="576064" cy="338554"/>
+          </a:xfrm>
+          <a:prstGeom prst="rect">
+            <a:avLst/>
+          </a:prstGeom>
+          <a:noFill/>
+        </p:spPr>
+        <p:txBody>
+          <a:bodyPr wrap="square" rtlCol="0">
+            <a:spAutoFit/>
           </a:bodyPr>
           <a:lstStyle/>
           <a:p>
             <a:r>
+              <a:rPr lang="en-GB" sz="1600" b="1" dirty="0">
+                <a:latin typeface="Consolas" panose="020B0609020204030204" pitchFamily="49" charset="0"/>
+                <a:cs typeface="Consolas" panose="020B0609020204030204" pitchFamily="49" charset="0"/>
+              </a:rPr>
+              <a:t>R1</a:t>
+            </a:r>
+          </a:p>
+        </p:txBody>
+      </p:sp>
+      <p:sp>
+        <p:nvSpPr>
+          <p:cNvPr id="9" name="Rectangle 8"/>
+          <p:cNvSpPr/>
+          <p:nvPr/>
+        </p:nvSpPr>
+        <p:spPr>
+          <a:xfrm>
+            <a:off x="4127376" y="1988840"/>
+            <a:ext cx="1296144" cy="360040"/>
+          </a:xfrm>
+          <a:prstGeom prst="rect">
+            <a:avLst/>
+          </a:prstGeom>
+          <a:solidFill>
+            <a:schemeClr val="bg1"/>
+          </a:solidFill>
+        </p:spPr>
+        <p:style>
+          <a:lnRef idx="2">
+            <a:schemeClr val="accent1">
+              <a:shade val="50000"/>
+            </a:schemeClr>
+          </a:lnRef>
+          <a:fillRef idx="1">
+            <a:schemeClr val="accent1"/>
+          </a:fillRef>
+          <a:effectRef idx="0">
+            <a:schemeClr val="accent1"/>
+          </a:effectRef>
+          <a:fontRef idx="minor">
+            <a:schemeClr val="lt1"/>
+          </a:fontRef>
+        </p:style>
+        <p:txBody>
+          <a:bodyPr rtlCol="0" anchor="ctr"/>
+          <a:lstStyle/>
+          <a:p>
+            <a:pPr algn="ctr"/>
+            <a:endParaRPr lang="en-GB" sz="1600" b="1">
+              <a:latin typeface="Consolas" panose="020B0609020204030204" pitchFamily="49" charset="0"/>
+              <a:cs typeface="Consolas" panose="020B0609020204030204" pitchFamily="49" charset="0"/>
+            </a:endParaRPr>
+          </a:p>
+        </p:txBody>
+      </p:sp>
+      <p:sp>
+        <p:nvSpPr>
+          <p:cNvPr id="10" name="TextBox 9"/>
+          <p:cNvSpPr txBox="1"/>
+          <p:nvPr/>
+        </p:nvSpPr>
+        <p:spPr>
+          <a:xfrm>
+            <a:off x="3551312" y="1988840"/>
+            <a:ext cx="576064" cy="338554"/>
+          </a:xfrm>
+          <a:prstGeom prst="rect">
+            <a:avLst/>
+          </a:prstGeom>
+          <a:noFill/>
+        </p:spPr>
+        <p:txBody>
+          <a:bodyPr wrap="square" rtlCol="0">
+            <a:spAutoFit/>
+          </a:bodyPr>
+          <a:lstStyle/>
+          <a:p>
+            <a:r>
+              <a:rPr lang="en-GB" sz="1600" b="1" dirty="0">
+                <a:latin typeface="Consolas" panose="020B0609020204030204" pitchFamily="49" charset="0"/>
+                <a:cs typeface="Consolas" panose="020B0609020204030204" pitchFamily="49" charset="0"/>
+              </a:rPr>
+              <a:t>R2</a:t>
+            </a:r>
+          </a:p>
+        </p:txBody>
+      </p:sp>
+      <p:sp>
+        <p:nvSpPr>
+          <p:cNvPr id="12" name="Rectangle 11"/>
+          <p:cNvSpPr/>
+          <p:nvPr/>
+        </p:nvSpPr>
+        <p:spPr>
+          <a:xfrm>
+            <a:off x="4127376" y="2708920"/>
+            <a:ext cx="1296144" cy="360040"/>
+          </a:xfrm>
+          <a:prstGeom prst="rect">
+            <a:avLst/>
+          </a:prstGeom>
+          <a:solidFill>
+            <a:schemeClr val="bg1"/>
+          </a:solidFill>
+        </p:spPr>
+        <p:style>
+          <a:lnRef idx="2">
+            <a:schemeClr val="accent1">
+              <a:shade val="50000"/>
+            </a:schemeClr>
+          </a:lnRef>
+          <a:fillRef idx="1">
+            <a:schemeClr val="accent1"/>
+          </a:fillRef>
+          <a:effectRef idx="0">
+            <a:schemeClr val="accent1"/>
+          </a:effectRef>
+          <a:fontRef idx="minor">
+            <a:schemeClr val="lt1"/>
+          </a:fontRef>
+        </p:style>
+        <p:txBody>
+          <a:bodyPr rtlCol="0" anchor="ctr"/>
+          <a:lstStyle/>
+          <a:p>
+            <a:pPr algn="ctr"/>
+            <a:endParaRPr lang="en-GB" sz="1600" b="1">
+              <a:latin typeface="Consolas" panose="020B0609020204030204" pitchFamily="49" charset="0"/>
+              <a:cs typeface="Consolas" panose="020B0609020204030204" pitchFamily="49" charset="0"/>
+            </a:endParaRPr>
+          </a:p>
+        </p:txBody>
+      </p:sp>
+      <p:sp>
+        <p:nvSpPr>
+          <p:cNvPr id="13" name="TextBox 12"/>
+          <p:cNvSpPr txBox="1"/>
+          <p:nvPr/>
+        </p:nvSpPr>
+        <p:spPr>
+          <a:xfrm>
+            <a:off x="2971800" y="2708920"/>
+            <a:ext cx="1155576" cy="338554"/>
+          </a:xfrm>
+          <a:prstGeom prst="rect">
+            <a:avLst/>
+          </a:prstGeom>
+          <a:noFill/>
+        </p:spPr>
+        <p:txBody>
+          <a:bodyPr wrap="square" rtlCol="0">
+            <a:spAutoFit/>
+          </a:bodyPr>
+          <a:lstStyle/>
+          <a:p>
+            <a:pPr algn="r"/>
+            <a:r>
+              <a:rPr lang="en-GB" sz="1600" b="1" dirty="0" err="1">
+                <a:latin typeface="Consolas" panose="020B0609020204030204" pitchFamily="49" charset="0"/>
+                <a:cs typeface="Consolas" panose="020B0609020204030204" pitchFamily="49" charset="0"/>
+              </a:rPr>
+              <a:t>R13</a:t>
+            </a:r>
+            <a:r>
+              <a:rPr lang="en-GB" sz="1600" b="1" dirty="0">
+                <a:latin typeface="Consolas" panose="020B0609020204030204" pitchFamily="49" charset="0"/>
+                <a:cs typeface="Consolas" panose="020B0609020204030204" pitchFamily="49" charset="0"/>
+              </a:rPr>
+              <a:t> (</a:t>
+            </a:r>
+            <a:r>
+              <a:rPr lang="en-GB" sz="1600" b="1" dirty="0" err="1">
+                <a:latin typeface="Consolas" panose="020B0609020204030204" pitchFamily="49" charset="0"/>
+                <a:cs typeface="Consolas" panose="020B0609020204030204" pitchFamily="49" charset="0"/>
+              </a:rPr>
+              <a:t>SP</a:t>
+            </a:r>
+            <a:r>
+              <a:rPr lang="en-GB" sz="1600" b="1" dirty="0">
+                <a:latin typeface="Consolas" panose="020B0609020204030204" pitchFamily="49" charset="0"/>
+                <a:cs typeface="Consolas" panose="020B0609020204030204" pitchFamily="49" charset="0"/>
+              </a:rPr>
+              <a:t>)</a:t>
+            </a:r>
+          </a:p>
+        </p:txBody>
+      </p:sp>
+      <p:sp>
+        <p:nvSpPr>
+          <p:cNvPr id="14" name="Rectangle 13"/>
+          <p:cNvSpPr/>
+          <p:nvPr/>
+        </p:nvSpPr>
+        <p:spPr>
+          <a:xfrm>
+            <a:off x="6230164" y="3343275"/>
+            <a:ext cx="1296144" cy="360040"/>
+          </a:xfrm>
+          <a:prstGeom prst="rect">
+            <a:avLst/>
+          </a:prstGeom>
+          <a:solidFill>
+            <a:schemeClr val="bg1"/>
+          </a:solidFill>
+        </p:spPr>
+        <p:style>
+          <a:lnRef idx="2">
+            <a:schemeClr val="accent1">
+              <a:shade val="50000"/>
+            </a:schemeClr>
+          </a:lnRef>
+          <a:fillRef idx="1">
+            <a:schemeClr val="accent1"/>
+          </a:fillRef>
+          <a:effectRef idx="0">
+            <a:schemeClr val="accent1"/>
+          </a:effectRef>
+          <a:fontRef idx="minor">
+            <a:schemeClr val="lt1"/>
+          </a:fontRef>
+        </p:style>
+        <p:txBody>
+          <a:bodyPr rtlCol="0" anchor="ctr"/>
+          <a:lstStyle/>
+          <a:p>
+            <a:pPr algn="ctr"/>
+            <a:endParaRPr lang="en-GB" sz="1600" b="1">
+              <a:latin typeface="Consolas" panose="020B0609020204030204" pitchFamily="49" charset="0"/>
+              <a:cs typeface="Consolas" panose="020B0609020204030204" pitchFamily="49" charset="0"/>
+            </a:endParaRPr>
+          </a:p>
+        </p:txBody>
+      </p:sp>
+      <p:sp>
+        <p:nvSpPr>
+          <p:cNvPr id="15" name="TextBox 14"/>
+          <p:cNvSpPr txBox="1"/>
+          <p:nvPr/>
+        </p:nvSpPr>
+        <p:spPr>
+          <a:xfrm>
+            <a:off x="7526308" y="3343275"/>
+            <a:ext cx="1368152" cy="338554"/>
+          </a:xfrm>
+          <a:prstGeom prst="rect">
+            <a:avLst/>
+          </a:prstGeom>
+          <a:noFill/>
+        </p:spPr>
+        <p:txBody>
+          <a:bodyPr wrap="square" rtlCol="0">
+            <a:spAutoFit/>
+          </a:bodyPr>
+          <a:lstStyle/>
+          <a:p>
+            <a:pPr algn="ctr"/>
+            <a:r>
+              <a:rPr lang="en-GB" sz="1600" b="1" dirty="0">
+                <a:latin typeface="Consolas" panose="020B0609020204030204" pitchFamily="49" charset="0"/>
+                <a:cs typeface="Consolas" panose="020B0609020204030204" pitchFamily="49" charset="0"/>
+              </a:rPr>
+              <a:t>0x20000200</a:t>
+            </a:r>
+          </a:p>
+        </p:txBody>
+      </p:sp>
+      <p:sp>
+        <p:nvSpPr>
+          <p:cNvPr id="16" name="Rectangle 15"/>
+          <p:cNvSpPr/>
+          <p:nvPr/>
+        </p:nvSpPr>
+        <p:spPr>
+          <a:xfrm>
+            <a:off x="6230164" y="3703315"/>
+            <a:ext cx="1296144" cy="360040"/>
+          </a:xfrm>
+          <a:prstGeom prst="rect">
+            <a:avLst/>
+          </a:prstGeom>
+          <a:solidFill>
+            <a:schemeClr val="bg1"/>
+          </a:solidFill>
+        </p:spPr>
+        <p:style>
+          <a:lnRef idx="2">
+            <a:schemeClr val="accent1">
+              <a:shade val="50000"/>
+            </a:schemeClr>
+          </a:lnRef>
+          <a:fillRef idx="1">
+            <a:schemeClr val="accent1"/>
+          </a:fillRef>
+          <a:effectRef idx="0">
+            <a:schemeClr val="accent1"/>
+          </a:effectRef>
+          <a:fontRef idx="minor">
+            <a:schemeClr val="lt1"/>
+          </a:fontRef>
+        </p:style>
+        <p:txBody>
+          <a:bodyPr rtlCol="0" anchor="ctr"/>
+          <a:lstStyle/>
+          <a:p>
+            <a:pPr algn="ctr"/>
+            <a:endParaRPr lang="en-GB" sz="1600" b="1">
+              <a:latin typeface="Consolas" panose="020B0609020204030204" pitchFamily="49" charset="0"/>
+              <a:cs typeface="Consolas" panose="020B0609020204030204" pitchFamily="49" charset="0"/>
+            </a:endParaRPr>
+          </a:p>
+        </p:txBody>
+      </p:sp>
+      <p:sp>
+        <p:nvSpPr>
+          <p:cNvPr id="17" name="Rectangle 16"/>
+          <p:cNvSpPr/>
+          <p:nvPr/>
+        </p:nvSpPr>
+        <p:spPr>
+          <a:xfrm>
+            <a:off x="6230164" y="4063355"/>
+            <a:ext cx="1296144" cy="360040"/>
+          </a:xfrm>
+          <a:prstGeom prst="rect">
+            <a:avLst/>
+          </a:prstGeom>
+          <a:solidFill>
+            <a:schemeClr val="bg1"/>
+          </a:solidFill>
+        </p:spPr>
+        <p:style>
+          <a:lnRef idx="2">
+            <a:schemeClr val="accent1">
+              <a:shade val="50000"/>
+            </a:schemeClr>
+          </a:lnRef>
+          <a:fillRef idx="1">
+            <a:schemeClr val="accent1"/>
+          </a:fillRef>
+          <a:effectRef idx="0">
+            <a:schemeClr val="accent1"/>
+          </a:effectRef>
+          <a:fontRef idx="minor">
+            <a:schemeClr val="lt1"/>
+          </a:fontRef>
+        </p:style>
+        <p:txBody>
+          <a:bodyPr rtlCol="0" anchor="ctr"/>
+          <a:lstStyle/>
+          <a:p>
+            <a:pPr algn="ctr"/>
+            <a:endParaRPr lang="en-GB" sz="1600" b="1">
+              <a:latin typeface="Consolas" panose="020B0609020204030204" pitchFamily="49" charset="0"/>
+              <a:cs typeface="Consolas" panose="020B0609020204030204" pitchFamily="49" charset="0"/>
+            </a:endParaRPr>
+          </a:p>
+        </p:txBody>
+      </p:sp>
+      <p:sp>
+        <p:nvSpPr>
+          <p:cNvPr id="18" name="TextBox 17"/>
+          <p:cNvSpPr txBox="1"/>
+          <p:nvPr/>
+        </p:nvSpPr>
+        <p:spPr>
+          <a:xfrm>
+            <a:off x="7526308" y="3703315"/>
+            <a:ext cx="1368152" cy="338554"/>
+          </a:xfrm>
+          <a:prstGeom prst="rect">
+            <a:avLst/>
+          </a:prstGeom>
+          <a:noFill/>
+        </p:spPr>
+        <p:txBody>
+          <a:bodyPr wrap="square" rtlCol="0">
+            <a:spAutoFit/>
+          </a:bodyPr>
+          <a:lstStyle/>
+          <a:p>
+            <a:pPr algn="ctr"/>
+            <a:r>
+              <a:rPr lang="en-GB" sz="1600" b="1" dirty="0">
+                <a:latin typeface="Consolas" panose="020B0609020204030204" pitchFamily="49" charset="0"/>
+                <a:cs typeface="Consolas" panose="020B0609020204030204" pitchFamily="49" charset="0"/>
+              </a:rPr>
+              <a:t>0x200001FC</a:t>
+            </a:r>
+          </a:p>
+        </p:txBody>
+      </p:sp>
+      <p:sp>
+        <p:nvSpPr>
+          <p:cNvPr id="19" name="TextBox 18"/>
+          <p:cNvSpPr txBox="1"/>
+          <p:nvPr/>
+        </p:nvSpPr>
+        <p:spPr>
+          <a:xfrm>
+            <a:off x="7526308" y="4063355"/>
+            <a:ext cx="1368152" cy="338554"/>
+          </a:xfrm>
+          <a:prstGeom prst="rect">
+            <a:avLst/>
+          </a:prstGeom>
+          <a:noFill/>
+        </p:spPr>
+        <p:txBody>
+          <a:bodyPr wrap="square" rtlCol="0">
+            <a:spAutoFit/>
+          </a:bodyPr>
+          <a:lstStyle/>
+          <a:p>
+            <a:pPr algn="ctr"/>
+            <a:r>
+              <a:rPr lang="en-GB" sz="1600" b="1" dirty="0">
+                <a:latin typeface="Consolas" panose="020B0609020204030204" pitchFamily="49" charset="0"/>
+                <a:cs typeface="Consolas" panose="020B0609020204030204" pitchFamily="49" charset="0"/>
+              </a:rPr>
+              <a:t>0x200001F8</a:t>
+            </a:r>
+          </a:p>
+        </p:txBody>
+      </p:sp>
+      <p:sp>
+        <p:nvSpPr>
+          <p:cNvPr id="20" name="TextBox 19"/>
+          <p:cNvSpPr txBox="1"/>
+          <p:nvPr/>
+        </p:nvSpPr>
+        <p:spPr>
+          <a:xfrm>
+            <a:off x="4127376" y="2708920"/>
+            <a:ext cx="1368152" cy="338554"/>
+          </a:xfrm>
+          <a:prstGeom prst="rect">
+            <a:avLst/>
+          </a:prstGeom>
+          <a:noFill/>
+        </p:spPr>
+        <p:txBody>
+          <a:bodyPr wrap="square" rtlCol="0">
+            <a:spAutoFit/>
+          </a:bodyPr>
+          <a:lstStyle/>
+          <a:p>
+            <a:pPr algn="ctr"/>
+            <a:r>
+              <a:rPr lang="en-GB" sz="1600" b="1" dirty="0" err="1">
+                <a:latin typeface="Consolas" panose="020B0609020204030204" pitchFamily="49" charset="0"/>
+                <a:cs typeface="Consolas" panose="020B0609020204030204" pitchFamily="49" charset="0"/>
+              </a:rPr>
+              <a:t>0x20000</a:t>
+            </a:r>
+            <a:r>
+              <a:rPr lang="en-GB" sz="1600" b="1" dirty="0" err="1">
+                <a:solidFill>
+                  <a:srgbClr val="C00000"/>
+                </a:solidFill>
+                <a:latin typeface="Consolas" panose="020B0609020204030204" pitchFamily="49" charset="0"/>
+                <a:cs typeface="Consolas" panose="020B0609020204030204" pitchFamily="49" charset="0"/>
+              </a:rPr>
+              <a:t>1F8</a:t>
+            </a:r>
+            <a:endParaRPr lang="en-GB" sz="1600" b="1" dirty="0">
+              <a:solidFill>
+                <a:srgbClr val="C00000"/>
+              </a:solidFill>
+              <a:latin typeface="Consolas" panose="020B0609020204030204" pitchFamily="49" charset="0"/>
+              <a:cs typeface="Consolas" panose="020B0609020204030204" pitchFamily="49" charset="0"/>
+            </a:endParaRPr>
+          </a:p>
+        </p:txBody>
+      </p:sp>
+      <p:sp>
+        <p:nvSpPr>
+          <p:cNvPr id="21" name="TextBox 20"/>
+          <p:cNvSpPr txBox="1"/>
+          <p:nvPr/>
+        </p:nvSpPr>
+        <p:spPr>
+          <a:xfrm>
+            <a:off x="4127376" y="1988840"/>
+            <a:ext cx="1296144" cy="338554"/>
+          </a:xfrm>
+          <a:prstGeom prst="rect">
+            <a:avLst/>
+          </a:prstGeom>
+          <a:noFill/>
+        </p:spPr>
+        <p:txBody>
+          <a:bodyPr wrap="square" rtlCol="0">
+            <a:spAutoFit/>
+          </a:bodyPr>
+          <a:lstStyle/>
+          <a:p>
+            <a:pPr algn="r"/>
+            <a:r>
+              <a:rPr lang="en-GB" sz="1600" b="1" dirty="0" err="1">
+                <a:latin typeface="Consolas" panose="020B0609020204030204" pitchFamily="49" charset="0"/>
+                <a:cs typeface="Consolas" panose="020B0609020204030204" pitchFamily="49" charset="0"/>
+              </a:rPr>
+              <a:t>0x22222222</a:t>
+            </a:r>
+            <a:endParaRPr lang="en-GB" sz="1600" b="1" dirty="0">
+              <a:latin typeface="Consolas" panose="020B0609020204030204" pitchFamily="49" charset="0"/>
+              <a:cs typeface="Consolas" panose="020B0609020204030204" pitchFamily="49" charset="0"/>
+            </a:endParaRPr>
+          </a:p>
+        </p:txBody>
+      </p:sp>
+      <p:sp>
+        <p:nvSpPr>
+          <p:cNvPr id="22" name="TextBox 21"/>
+          <p:cNvSpPr txBox="1"/>
+          <p:nvPr/>
+        </p:nvSpPr>
+        <p:spPr>
+          <a:xfrm>
+            <a:off x="4127376" y="1628800"/>
+            <a:ext cx="1296144" cy="338554"/>
+          </a:xfrm>
+          <a:prstGeom prst="rect">
+            <a:avLst/>
+          </a:prstGeom>
+          <a:noFill/>
+        </p:spPr>
+        <p:txBody>
+          <a:bodyPr wrap="square" rtlCol="0">
+            <a:spAutoFit/>
+          </a:bodyPr>
+          <a:lstStyle/>
+          <a:p>
+            <a:pPr algn="r"/>
+            <a:r>
+              <a:rPr lang="en-GB" sz="1600" b="1" dirty="0" err="1">
+                <a:latin typeface="Consolas" panose="020B0609020204030204" pitchFamily="49" charset="0"/>
+                <a:cs typeface="Consolas" panose="020B0609020204030204" pitchFamily="49" charset="0"/>
+              </a:rPr>
+              <a:t>0x11111111</a:t>
+            </a:r>
+            <a:endParaRPr lang="en-GB" sz="1600" b="1" dirty="0">
+              <a:latin typeface="Consolas" panose="020B0609020204030204" pitchFamily="49" charset="0"/>
+              <a:cs typeface="Consolas" panose="020B0609020204030204" pitchFamily="49" charset="0"/>
+            </a:endParaRPr>
+          </a:p>
+        </p:txBody>
+      </p:sp>
+      <p:cxnSp>
+        <p:nvCxnSpPr>
+          <p:cNvPr id="24" name="Straight Arrow Connector 23"/>
+          <p:cNvCxnSpPr>
+            <a:endCxn id="17" idx="1"/>
+          </p:cNvCxnSpPr>
+          <p:nvPr/>
+        </p:nvCxnSpPr>
+        <p:spPr>
+          <a:xfrm>
+            <a:off x="5429517" y="2891802"/>
+            <a:ext cx="800647" cy="1351573"/>
+          </a:xfrm>
+          <a:prstGeom prst="straightConnector1">
+            <a:avLst/>
+          </a:prstGeom>
+          <a:ln w="19050">
+            <a:solidFill>
+              <a:srgbClr val="C00000"/>
+            </a:solidFill>
+            <a:tailEnd type="arrow"/>
+          </a:ln>
+        </p:spPr>
+        <p:style>
+          <a:lnRef idx="1">
+            <a:schemeClr val="accent1"/>
+          </a:lnRef>
+          <a:fillRef idx="0">
+            <a:schemeClr val="accent1"/>
+          </a:fillRef>
+          <a:effectRef idx="0">
+            <a:schemeClr val="accent1"/>
+          </a:effectRef>
+          <a:fontRef idx="minor">
+            <a:schemeClr val="tx1"/>
+          </a:fontRef>
+        </p:style>
+      </p:cxnSp>
+      <p:sp>
+        <p:nvSpPr>
+          <p:cNvPr id="4" name="Slide Number Placeholder 3"/>
+          <p:cNvSpPr>
+            <a:spLocks noGrp="1"/>
+          </p:cNvSpPr>
+          <p:nvPr>
+            <p:ph type="sldNum" sz="quarter" idx="12"/>
+          </p:nvPr>
+        </p:nvSpPr>
+        <p:spPr/>
+        <p:txBody>
+          <a:bodyPr/>
+          <a:lstStyle/>
+          <a:p>
+            <a:fld id="{EA7C8D44-3667-46F6-9772-CC52308E2A7F}" type="slidenum">
+              <a:rPr kumimoji="0" lang="en-US" smtClean="0"/>
+              <a:pPr/>
+              <a:t>11</a:t>
+            </a:fld>
+            <a:endParaRPr kumimoji="0" lang="en-US"/>
+          </a:p>
+        </p:txBody>
+      </p:sp>
+      <p:sp>
+        <p:nvSpPr>
+          <p:cNvPr id="23" name="TextBox 22"/>
+          <p:cNvSpPr txBox="1"/>
+          <p:nvPr/>
+        </p:nvSpPr>
+        <p:spPr>
+          <a:xfrm>
+            <a:off x="6230165" y="3352800"/>
+            <a:ext cx="1296142" cy="338554"/>
+          </a:xfrm>
+          <a:prstGeom prst="rect">
+            <a:avLst/>
+          </a:prstGeom>
+          <a:noFill/>
+        </p:spPr>
+        <p:txBody>
+          <a:bodyPr wrap="square" rtlCol="0">
+            <a:spAutoFit/>
+          </a:bodyPr>
+          <a:lstStyle/>
+          <a:p>
+            <a:pPr algn="ctr"/>
+            <a:r>
+              <a:rPr lang="en-US" sz="1600" b="1" dirty="0" err="1">
+                <a:latin typeface="Consolas" panose="020B0609020204030204" pitchFamily="49" charset="0"/>
+                <a:cs typeface="Consolas" panose="020B0609020204030204" pitchFamily="49" charset="0"/>
+              </a:rPr>
+              <a:t>xxxxxxxx</a:t>
+            </a:r>
+            <a:endParaRPr lang="en-US" sz="1600" b="1" dirty="0">
+              <a:latin typeface="Consolas" panose="020B0609020204030204" pitchFamily="49" charset="0"/>
+              <a:cs typeface="Consolas" panose="020B0609020204030204" pitchFamily="49" charset="0"/>
+            </a:endParaRPr>
+          </a:p>
+        </p:txBody>
+      </p:sp>
+      <p:sp>
+        <p:nvSpPr>
+          <p:cNvPr id="25" name="Rounded Rectangle 24"/>
+          <p:cNvSpPr/>
+          <p:nvPr/>
+        </p:nvSpPr>
+        <p:spPr>
+          <a:xfrm>
+            <a:off x="914400" y="2528900"/>
+            <a:ext cx="1905000" cy="2078360"/>
+          </a:xfrm>
+          <a:prstGeom prst="roundRect">
+            <a:avLst/>
+          </a:prstGeom>
+          <a:noFill/>
+          <a:ln>
+            <a:solidFill>
+              <a:schemeClr val="tx1"/>
+            </a:solidFill>
+          </a:ln>
+        </p:spPr>
+        <p:style>
+          <a:lnRef idx="2">
+            <a:schemeClr val="accent1">
+              <a:shade val="50000"/>
+            </a:schemeClr>
+          </a:lnRef>
+          <a:fillRef idx="1">
+            <a:schemeClr val="accent1"/>
+          </a:fillRef>
+          <a:effectRef idx="0">
+            <a:schemeClr val="accent1"/>
+          </a:effectRef>
+          <a:fontRef idx="minor">
+            <a:schemeClr val="lt1"/>
+          </a:fontRef>
+        </p:style>
+        <p:txBody>
+          <a:bodyPr rtlCol="0" anchor="ctr"/>
+          <a:lstStyle/>
+          <a:p>
+            <a:pPr>
+              <a:buNone/>
+            </a:pPr>
+            <a:r>
+              <a:rPr lang="en-GB" sz="2400" dirty="0">
+                <a:solidFill>
+                  <a:schemeClr val="tx1"/>
+                </a:solidFill>
+                <a:latin typeface="Consolas" panose="020B0609020204030204" pitchFamily="49" charset="0"/>
+                <a:cs typeface="Consolas" panose="020B0609020204030204" pitchFamily="49" charset="0"/>
+              </a:rPr>
+              <a:t>PUSH {</a:t>
+            </a:r>
+            <a:r>
+              <a:rPr lang="en-GB" sz="2400" dirty="0" err="1">
+                <a:solidFill>
+                  <a:schemeClr val="tx1"/>
+                </a:solidFill>
+                <a:latin typeface="Consolas" panose="020B0609020204030204" pitchFamily="49" charset="0"/>
+                <a:cs typeface="Consolas" panose="020B0609020204030204" pitchFamily="49" charset="0"/>
+              </a:rPr>
+              <a:t>R1</a:t>
+            </a:r>
+            <a:r>
+              <a:rPr lang="en-GB" sz="2400" dirty="0">
+                <a:solidFill>
+                  <a:schemeClr val="tx1"/>
+                </a:solidFill>
+                <a:latin typeface="Consolas" panose="020B0609020204030204" pitchFamily="49" charset="0"/>
+                <a:cs typeface="Consolas" panose="020B0609020204030204" pitchFamily="49" charset="0"/>
+              </a:rPr>
+              <a:t>}</a:t>
+            </a:r>
+          </a:p>
+          <a:p>
+            <a:pPr>
+              <a:buNone/>
+            </a:pPr>
+            <a:r>
+              <a:rPr lang="en-GB" sz="2400" dirty="0">
+                <a:solidFill>
+                  <a:srgbClr val="C00000"/>
+                </a:solidFill>
+                <a:latin typeface="Consolas" panose="020B0609020204030204" pitchFamily="49" charset="0"/>
+                <a:cs typeface="Consolas" panose="020B0609020204030204" pitchFamily="49" charset="0"/>
+              </a:rPr>
+              <a:t>PUSH {</a:t>
+            </a:r>
+            <a:r>
+              <a:rPr lang="en-GB" sz="2400" dirty="0" err="1">
+                <a:solidFill>
+                  <a:srgbClr val="C00000"/>
+                </a:solidFill>
+                <a:latin typeface="Consolas" panose="020B0609020204030204" pitchFamily="49" charset="0"/>
+                <a:cs typeface="Consolas" panose="020B0609020204030204" pitchFamily="49" charset="0"/>
+              </a:rPr>
+              <a:t>R2</a:t>
+            </a:r>
+            <a:r>
+              <a:rPr lang="en-GB" sz="2400" dirty="0">
+                <a:solidFill>
+                  <a:srgbClr val="C00000"/>
+                </a:solidFill>
+                <a:latin typeface="Consolas" panose="020B0609020204030204" pitchFamily="49" charset="0"/>
+                <a:cs typeface="Consolas" panose="020B0609020204030204" pitchFamily="49" charset="0"/>
+              </a:rPr>
+              <a:t>}</a:t>
+            </a:r>
+          </a:p>
+          <a:p>
+            <a:pPr>
+              <a:buNone/>
+            </a:pPr>
+            <a:r>
+              <a:rPr lang="en-GB" sz="2400" dirty="0">
+                <a:solidFill>
+                  <a:schemeClr val="tx1"/>
+                </a:solidFill>
+                <a:latin typeface="Consolas" panose="020B0609020204030204" pitchFamily="49" charset="0"/>
+                <a:cs typeface="Consolas" panose="020B0609020204030204" pitchFamily="49" charset="0"/>
+              </a:rPr>
+              <a:t>POP  {</a:t>
+            </a:r>
+            <a:r>
+              <a:rPr lang="en-GB" sz="2400" dirty="0" err="1">
+                <a:solidFill>
+                  <a:schemeClr val="tx1"/>
+                </a:solidFill>
+                <a:latin typeface="Consolas" panose="020B0609020204030204" pitchFamily="49" charset="0"/>
+                <a:cs typeface="Consolas" panose="020B0609020204030204" pitchFamily="49" charset="0"/>
+              </a:rPr>
+              <a:t>R1</a:t>
+            </a:r>
+            <a:r>
+              <a:rPr lang="en-GB" sz="2400" dirty="0">
+                <a:solidFill>
+                  <a:schemeClr val="tx1"/>
+                </a:solidFill>
+                <a:latin typeface="Consolas" panose="020B0609020204030204" pitchFamily="49" charset="0"/>
+                <a:cs typeface="Consolas" panose="020B0609020204030204" pitchFamily="49" charset="0"/>
+              </a:rPr>
+              <a:t>}</a:t>
+            </a:r>
+          </a:p>
+          <a:p>
+            <a:pPr>
+              <a:buNone/>
+            </a:pPr>
+            <a:r>
+              <a:rPr lang="en-GB" sz="2400" dirty="0">
+                <a:solidFill>
+                  <a:schemeClr val="tx1"/>
+                </a:solidFill>
+                <a:latin typeface="Consolas" panose="020B0609020204030204" pitchFamily="49" charset="0"/>
+                <a:cs typeface="Consolas" panose="020B0609020204030204" pitchFamily="49" charset="0"/>
+              </a:rPr>
+              <a:t>POP  {</a:t>
+            </a:r>
+            <a:r>
+              <a:rPr lang="en-GB" sz="2400" dirty="0" err="1">
+                <a:solidFill>
+                  <a:schemeClr val="tx1"/>
+                </a:solidFill>
+                <a:latin typeface="Consolas" panose="020B0609020204030204" pitchFamily="49" charset="0"/>
+                <a:cs typeface="Consolas" panose="020B0609020204030204" pitchFamily="49" charset="0"/>
+              </a:rPr>
+              <a:t>R2</a:t>
+            </a:r>
+            <a:r>
+              <a:rPr lang="en-GB" sz="2400" dirty="0">
+                <a:solidFill>
+                  <a:schemeClr val="tx1"/>
+                </a:solidFill>
+                <a:latin typeface="Consolas" panose="020B0609020204030204" pitchFamily="49" charset="0"/>
+                <a:cs typeface="Consolas" panose="020B0609020204030204" pitchFamily="49" charset="0"/>
+              </a:rPr>
+              <a:t>}</a:t>
+            </a:r>
+          </a:p>
+        </p:txBody>
+      </p:sp>
+      <p:sp>
+        <p:nvSpPr>
+          <p:cNvPr id="3" name="TextBox 2"/>
+          <p:cNvSpPr txBox="1"/>
+          <p:nvPr/>
+        </p:nvSpPr>
+        <p:spPr>
+          <a:xfrm>
+            <a:off x="6230164" y="4989423"/>
+            <a:ext cx="1298123" cy="369332"/>
+          </a:xfrm>
+          <a:prstGeom prst="rect">
+            <a:avLst/>
+          </a:prstGeom>
+          <a:noFill/>
+        </p:spPr>
+        <p:txBody>
+          <a:bodyPr wrap="square" rtlCol="0">
+            <a:spAutoFit/>
+          </a:bodyPr>
+          <a:lstStyle/>
+          <a:p>
+            <a:pPr algn="ctr"/>
+            <a:r>
               <a:rPr lang="en-US" dirty="0"/>
-              <a:t>Passing arguments and Returning Value</a:t>
+              <a:t>memory</a:t>
+            </a:r>
+          </a:p>
+        </p:txBody>
+      </p:sp>
+      <p:sp>
+        <p:nvSpPr>
+          <p:cNvPr id="28" name="TextBox 27"/>
+          <p:cNvSpPr txBox="1"/>
+          <p:nvPr/>
+        </p:nvSpPr>
+        <p:spPr>
+          <a:xfrm>
+            <a:off x="7738363" y="2615348"/>
+            <a:ext cx="944041" cy="369332"/>
+          </a:xfrm>
+          <a:prstGeom prst="rect">
+            <a:avLst/>
+          </a:prstGeom>
+          <a:noFill/>
+        </p:spPr>
+        <p:txBody>
+          <a:bodyPr wrap="none" rtlCol="0">
+            <a:spAutoFit/>
+          </a:bodyPr>
+          <a:lstStyle/>
+          <a:p>
+            <a:r>
+              <a:rPr lang="en-US" dirty="0"/>
+              <a:t>Address</a:t>
+            </a:r>
+          </a:p>
+        </p:txBody>
+      </p:sp>
+      <p:sp>
+        <p:nvSpPr>
+          <p:cNvPr id="30" name="TextBox 29"/>
+          <p:cNvSpPr txBox="1"/>
+          <p:nvPr/>
+        </p:nvSpPr>
+        <p:spPr>
+          <a:xfrm>
+            <a:off x="152400" y="3200400"/>
+            <a:ext cx="465192" cy="369332"/>
+          </a:xfrm>
+          <a:prstGeom prst="rect">
+            <a:avLst/>
+          </a:prstGeom>
+          <a:noFill/>
+        </p:spPr>
+        <p:txBody>
+          <a:bodyPr wrap="none" rtlCol="0">
+            <a:spAutoFit/>
+          </a:bodyPr>
+          <a:lstStyle/>
+          <a:p>
+            <a:r>
+              <a:rPr lang="en-US" dirty="0">
+                <a:solidFill>
+                  <a:srgbClr val="C00000"/>
+                </a:solidFill>
+              </a:rPr>
+              <a:t>PC</a:t>
+            </a:r>
+          </a:p>
+        </p:txBody>
+      </p:sp>
+      <p:cxnSp>
+        <p:nvCxnSpPr>
+          <p:cNvPr id="32" name="Straight Arrow Connector 31"/>
+          <p:cNvCxnSpPr/>
+          <p:nvPr/>
+        </p:nvCxnSpPr>
+        <p:spPr>
+          <a:xfrm>
+            <a:off x="533400" y="3378764"/>
+            <a:ext cx="525408" cy="0"/>
+          </a:xfrm>
+          <a:prstGeom prst="straightConnector1">
+            <a:avLst/>
+          </a:prstGeom>
+          <a:ln w="28575">
+            <a:solidFill>
+              <a:srgbClr val="C00000"/>
+            </a:solidFill>
+            <a:tailEnd type="arrow"/>
+          </a:ln>
+        </p:spPr>
+        <p:style>
+          <a:lnRef idx="1">
+            <a:schemeClr val="accent1"/>
+          </a:lnRef>
+          <a:fillRef idx="0">
+            <a:schemeClr val="accent1"/>
+          </a:fillRef>
+          <a:effectRef idx="0">
+            <a:schemeClr val="accent1"/>
+          </a:effectRef>
+          <a:fontRef idx="minor">
+            <a:schemeClr val="tx1"/>
+          </a:fontRef>
+        </p:style>
+      </p:cxnSp>
+      <p:sp>
+        <p:nvSpPr>
+          <p:cNvPr id="34" name="TextBox 33"/>
+          <p:cNvSpPr txBox="1"/>
+          <p:nvPr/>
+        </p:nvSpPr>
+        <p:spPr>
+          <a:xfrm>
+            <a:off x="6232145" y="3724801"/>
+            <a:ext cx="1296142" cy="338554"/>
+          </a:xfrm>
+          <a:prstGeom prst="rect">
+            <a:avLst/>
+          </a:prstGeom>
+          <a:noFill/>
+        </p:spPr>
+        <p:txBody>
+          <a:bodyPr wrap="square" rtlCol="0">
+            <a:spAutoFit/>
+          </a:bodyPr>
+          <a:lstStyle/>
+          <a:p>
+            <a:pPr algn="ctr"/>
+            <a:r>
+              <a:rPr lang="en-GB" sz="1600" b="1" dirty="0" err="1">
+                <a:solidFill>
+                  <a:srgbClr val="C00000"/>
+                </a:solidFill>
+                <a:latin typeface="Consolas" panose="020B0609020204030204" pitchFamily="49" charset="0"/>
+                <a:cs typeface="Consolas" panose="020B0609020204030204" pitchFamily="49" charset="0"/>
+              </a:rPr>
+              <a:t>0x11111111</a:t>
+            </a:r>
+            <a:endParaRPr lang="en-US" sz="1600" b="1" dirty="0">
+              <a:solidFill>
+                <a:srgbClr val="C00000"/>
+              </a:solidFill>
+              <a:latin typeface="Consolas" panose="020B0609020204030204" pitchFamily="49" charset="0"/>
+              <a:cs typeface="Consolas" panose="020B0609020204030204" pitchFamily="49" charset="0"/>
+            </a:endParaRPr>
+          </a:p>
+        </p:txBody>
+      </p:sp>
+      <p:sp>
+        <p:nvSpPr>
+          <p:cNvPr id="35" name="TextBox 34"/>
+          <p:cNvSpPr txBox="1"/>
+          <p:nvPr/>
+        </p:nvSpPr>
+        <p:spPr>
+          <a:xfrm>
+            <a:off x="6232145" y="4063355"/>
+            <a:ext cx="1296142" cy="584775"/>
+          </a:xfrm>
+          <a:prstGeom prst="rect">
+            <a:avLst/>
+          </a:prstGeom>
+          <a:noFill/>
+        </p:spPr>
+        <p:txBody>
+          <a:bodyPr wrap="square" rtlCol="0">
+            <a:spAutoFit/>
+          </a:bodyPr>
+          <a:lstStyle/>
+          <a:p>
+            <a:pPr algn="ctr"/>
+            <a:r>
+              <a:rPr lang="en-GB" sz="1600" b="1" dirty="0" err="1">
+                <a:solidFill>
+                  <a:srgbClr val="C00000"/>
+                </a:solidFill>
+                <a:latin typeface="Consolas" panose="020B0609020204030204" pitchFamily="49" charset="0"/>
+                <a:cs typeface="Consolas" panose="020B0609020204030204" pitchFamily="49" charset="0"/>
+              </a:rPr>
+              <a:t>0x22222222</a:t>
+            </a:r>
+            <a:endParaRPr lang="en-GB" sz="1600" b="1" dirty="0">
+              <a:solidFill>
+                <a:srgbClr val="C00000"/>
+              </a:solidFill>
+              <a:latin typeface="Consolas" panose="020B0609020204030204" pitchFamily="49" charset="0"/>
+              <a:cs typeface="Consolas" panose="020B0609020204030204" pitchFamily="49" charset="0"/>
+            </a:endParaRPr>
+          </a:p>
+          <a:p>
+            <a:pPr algn="ctr"/>
+            <a:endParaRPr lang="en-US" sz="1600" b="1" dirty="0">
+              <a:latin typeface="Consolas" panose="020B0609020204030204" pitchFamily="49" charset="0"/>
+              <a:cs typeface="Consolas" panose="020B0609020204030204" pitchFamily="49" charset="0"/>
+            </a:endParaRPr>
+          </a:p>
+        </p:txBody>
+      </p:sp>
+    </p:spTree>
+    <p:extLst>
+      <p:ext uri="{BB962C8B-B14F-4D97-AF65-F5344CB8AC3E}">
+        <p14:creationId xmlns:p14="http://schemas.microsoft.com/office/powerpoint/2010/main" val="734650997"/>
+      </p:ext>
+    </p:extLst>
+  </p:cSld>
+  <p:clrMapOvr>
+    <a:masterClrMapping/>
+  </p:clrMapOvr>
+</p:sld>
+</file>
+
+<file path=ppt/slides/slide12.xml><?xml version="1.0" encoding="utf-8"?>
+<p:sld xmlns:a="http://schemas.openxmlformats.org/drawingml/2006/main" xmlns:r="http://schemas.openxmlformats.org/officeDocument/2006/relationships" xmlns:p="http://schemas.openxmlformats.org/presentationml/2006/main">
+  <p:cSld>
+    <p:spTree>
+      <p:nvGrpSpPr>
+        <p:cNvPr id="1" name=""/>
+        <p:cNvGrpSpPr/>
+        <p:nvPr/>
+      </p:nvGrpSpPr>
+      <p:grpSpPr>
+        <a:xfrm>
+          <a:off x="0" y="0"/>
+          <a:ext cx="0" cy="0"/>
+          <a:chOff x="0" y="0"/>
+          <a:chExt cx="0" cy="0"/>
+        </a:xfrm>
+      </p:grpSpPr>
+      <p:sp>
+        <p:nvSpPr>
+          <p:cNvPr id="2" name="Title 1">
+            <a:extLst>
+              <a:ext uri="{FF2B5EF4-FFF2-40B4-BE49-F238E27FC236}">
+                <a16:creationId xmlns:a16="http://schemas.microsoft.com/office/drawing/2014/main" id="{5A8CE7FB-D6EA-91FF-145A-7E9C61E5FF5B}"/>
+              </a:ext>
+            </a:extLst>
+          </p:cNvPr>
+          <p:cNvSpPr>
+            <a:spLocks noGrp="1"/>
+          </p:cNvSpPr>
+          <p:nvPr>
+            <p:ph type="title"/>
+          </p:nvPr>
+        </p:nvSpPr>
+        <p:spPr/>
+        <p:txBody>
+          <a:bodyPr/>
+          <a:lstStyle/>
+          <a:p>
+            <a:endParaRPr lang="en-US"/>
+          </a:p>
+        </p:txBody>
+      </p:sp>
+      <p:sp>
+        <p:nvSpPr>
+          <p:cNvPr id="3" name="Slide Number Placeholder 2">
+            <a:extLst>
+              <a:ext uri="{FF2B5EF4-FFF2-40B4-BE49-F238E27FC236}">
+                <a16:creationId xmlns:a16="http://schemas.microsoft.com/office/drawing/2014/main" id="{678C8752-847F-B682-ACE3-F232BF18A861}"/>
+              </a:ext>
+            </a:extLst>
+          </p:cNvPr>
+          <p:cNvSpPr>
+            <a:spLocks noGrp="1"/>
+          </p:cNvSpPr>
+          <p:nvPr>
+            <p:ph type="sldNum" sz="quarter" idx="12"/>
+          </p:nvPr>
+        </p:nvSpPr>
+        <p:spPr/>
+        <p:txBody>
+          <a:bodyPr/>
+          <a:lstStyle/>
+          <a:p>
+            <a:fld id="{EA7C8D44-3667-46F6-9772-CC52308E2A7F}" type="slidenum">
+              <a:rPr kumimoji="0" lang="en-US" smtClean="0"/>
+              <a:pPr/>
+              <a:t>12</a:t>
+            </a:fld>
+            <a:endParaRPr kumimoji="0" lang="en-US" dirty="0"/>
+          </a:p>
+        </p:txBody>
+      </p:sp>
+      <p:sp>
+        <p:nvSpPr>
+          <p:cNvPr id="4" name="Content Placeholder 3">
+            <a:extLst>
+              <a:ext uri="{FF2B5EF4-FFF2-40B4-BE49-F238E27FC236}">
+                <a16:creationId xmlns:a16="http://schemas.microsoft.com/office/drawing/2014/main" id="{49EB078B-EDB9-9761-61A0-2C9E94C4CEB7}"/>
+              </a:ext>
+            </a:extLst>
+          </p:cNvPr>
+          <p:cNvSpPr>
+            <a:spLocks noGrp="1"/>
+          </p:cNvSpPr>
+          <p:nvPr>
+            <p:ph sz="quarter" idx="1"/>
+          </p:nvPr>
+        </p:nvSpPr>
+        <p:spPr/>
+        <p:txBody>
+          <a:bodyPr/>
+          <a:lstStyle/>
+          <a:p>
+            <a:endParaRPr lang="en-US"/>
+          </a:p>
+        </p:txBody>
+      </p:sp>
+    </p:spTree>
+    <p:extLst>
+      <p:ext uri="{BB962C8B-B14F-4D97-AF65-F5344CB8AC3E}">
+        <p14:creationId xmlns:p14="http://schemas.microsoft.com/office/powerpoint/2010/main" val="1273994328"/>
+      </p:ext>
+    </p:extLst>
+  </p:cSld>
+  <p:clrMapOvr>
+    <a:masterClrMapping/>
+  </p:clrMapOvr>
+</p:sld>
+</file>
+
+<file path=ppt/slides/slide13.xml><?xml version="1.0" encoding="utf-8"?>
+<p:sld xmlns:a="http://schemas.openxmlformats.org/drawingml/2006/main" xmlns:r="http://schemas.openxmlformats.org/officeDocument/2006/relationships" xmlns:p="http://schemas.openxmlformats.org/presentationml/2006/main">
+  <p:cSld>
+    <p:spTree>
+      <p:nvGrpSpPr>
+        <p:cNvPr id="1" name=""/>
+        <p:cNvGrpSpPr/>
+        <p:nvPr/>
+      </p:nvGrpSpPr>
+      <p:grpSpPr>
+        <a:xfrm>
+          <a:off x="0" y="0"/>
+          <a:ext cx="0" cy="0"/>
+          <a:chOff x="0" y="0"/>
+          <a:chExt cx="0" cy="0"/>
+        </a:xfrm>
+      </p:grpSpPr>
+      <p:sp>
+        <p:nvSpPr>
+          <p:cNvPr id="2" name="Title 1"/>
+          <p:cNvSpPr>
+            <a:spLocks noGrp="1"/>
+          </p:cNvSpPr>
+          <p:nvPr>
+            <p:ph type="title"/>
+          </p:nvPr>
+        </p:nvSpPr>
+        <p:spPr/>
+        <p:txBody>
+          <a:bodyPr/>
+          <a:lstStyle/>
+          <a:p>
+            <a:r>
+              <a:rPr lang="en-US" dirty="0"/>
+              <a:t>Argument Passing</a:t>
             </a:r>
           </a:p>
         </p:txBody>
@@ -8033,7 +10143,2198 @@
             <a:fld id="{EA7C8D44-3667-46F6-9772-CC52308E2A7F}" type="slidenum">
               <a:rPr kumimoji="0" lang="en-US" smtClean="0"/>
               <a:pPr/>
-              <a:t>11</a:t>
+              <a:t>13</a:t>
+            </a:fld>
+            <a:endParaRPr kumimoji="0" lang="en-US" dirty="0"/>
+          </a:p>
+        </p:txBody>
+      </p:sp>
+      <p:sp>
+        <p:nvSpPr>
+          <p:cNvPr id="4" name="Content Placeholder 3"/>
+          <p:cNvSpPr>
+            <a:spLocks noGrp="1"/>
+          </p:cNvSpPr>
+          <p:nvPr>
+            <p:ph sz="quarter" idx="1"/>
+          </p:nvPr>
+        </p:nvSpPr>
+        <p:spPr/>
+        <p:txBody>
+          <a:bodyPr/>
+          <a:lstStyle/>
+          <a:p>
+            <a:r>
+              <a:rPr lang="en-US" altLang="zh-CN" dirty="0"/>
+              <a:t>W</a:t>
+            </a:r>
+            <a:r>
+              <a:rPr lang="en-US" dirty="0"/>
+              <a:t>hich registers are used to pass the arguments and return the result? </a:t>
+            </a:r>
+          </a:p>
+        </p:txBody>
+      </p:sp>
+      <p:sp>
+        <p:nvSpPr>
+          <p:cNvPr id="5" name="Rectangle 4"/>
+          <p:cNvSpPr/>
+          <p:nvPr/>
+        </p:nvSpPr>
+        <p:spPr>
+          <a:xfrm>
+            <a:off x="304800" y="2279674"/>
+            <a:ext cx="5582234" cy="369332"/>
+          </a:xfrm>
+          <a:prstGeom prst="rect">
+            <a:avLst/>
+          </a:prstGeom>
+        </p:spPr>
+        <p:style>
+          <a:lnRef idx="1">
+            <a:schemeClr val="accent1"/>
+          </a:lnRef>
+          <a:fillRef idx="2">
+            <a:schemeClr val="accent1"/>
+          </a:fillRef>
+          <a:effectRef idx="1">
+            <a:schemeClr val="accent1"/>
+          </a:effectRef>
+          <a:fontRef idx="minor">
+            <a:schemeClr val="dk1"/>
+          </a:fontRef>
+        </p:style>
+        <p:txBody>
+          <a:bodyPr wrap="none">
+            <a:spAutoFit/>
+          </a:bodyPr>
+          <a:lstStyle/>
+          <a:p>
+            <a:r>
+              <a:rPr lang="en-US" dirty="0">
+                <a:solidFill>
+                  <a:srgbClr val="333333"/>
+                </a:solidFill>
+                <a:latin typeface="Segoe UI" panose="020B0502040204020203" pitchFamily="34" charset="0"/>
+              </a:rPr>
+              <a:t>long fun (short a1, char a2, double a3, </a:t>
+            </a:r>
+            <a:r>
+              <a:rPr lang="en-US" dirty="0" err="1">
+                <a:solidFill>
+                  <a:srgbClr val="333333"/>
+                </a:solidFill>
+                <a:latin typeface="Segoe UI" panose="020B0502040204020203" pitchFamily="34" charset="0"/>
+              </a:rPr>
+              <a:t>int</a:t>
+            </a:r>
+            <a:r>
+              <a:rPr lang="en-US" dirty="0">
+                <a:solidFill>
+                  <a:srgbClr val="333333"/>
+                </a:solidFill>
+                <a:latin typeface="Segoe UI" panose="020B0502040204020203" pitchFamily="34" charset="0"/>
+              </a:rPr>
+              <a:t> a4, char a5)</a:t>
+            </a:r>
+          </a:p>
+        </p:txBody>
+      </p:sp>
+      <p:graphicFrame>
+        <p:nvGraphicFramePr>
+          <p:cNvPr id="6" name="Content Placeholder 12"/>
+          <p:cNvGraphicFramePr>
+            <a:graphicFrameLocks/>
+          </p:cNvGraphicFramePr>
+          <p:nvPr/>
+        </p:nvGraphicFramePr>
+        <p:xfrm>
+          <a:off x="685800" y="2981960"/>
+          <a:ext cx="2971800" cy="370840"/>
+        </p:xfrm>
+        <a:graphic>
+          <a:graphicData uri="http://schemas.openxmlformats.org/drawingml/2006/table">
+            <a:tbl>
+              <a:tblPr firstRow="1" bandRow="1">
+                <a:tableStyleId>{5940675A-B579-460E-94D1-54222C63F5DA}</a:tableStyleId>
+              </a:tblPr>
+              <a:tblGrid>
+                <a:gridCol w="742950">
+                  <a:extLst>
+                    <a:ext uri="{9D8B030D-6E8A-4147-A177-3AD203B41FA5}">
+                      <a16:colId xmlns:a16="http://schemas.microsoft.com/office/drawing/2014/main" val="242172939"/>
+                    </a:ext>
+                  </a:extLst>
+                </a:gridCol>
+                <a:gridCol w="742950">
+                  <a:extLst>
+                    <a:ext uri="{9D8B030D-6E8A-4147-A177-3AD203B41FA5}">
+                      <a16:colId xmlns:a16="http://schemas.microsoft.com/office/drawing/2014/main" val="2188387863"/>
+                    </a:ext>
+                  </a:extLst>
+                </a:gridCol>
+                <a:gridCol w="742950">
+                  <a:extLst>
+                    <a:ext uri="{9D8B030D-6E8A-4147-A177-3AD203B41FA5}">
+                      <a16:colId xmlns:a16="http://schemas.microsoft.com/office/drawing/2014/main" val="85967061"/>
+                    </a:ext>
+                  </a:extLst>
+                </a:gridCol>
+                <a:gridCol w="742950">
+                  <a:extLst>
+                    <a:ext uri="{9D8B030D-6E8A-4147-A177-3AD203B41FA5}">
+                      <a16:colId xmlns:a16="http://schemas.microsoft.com/office/drawing/2014/main" val="2525421763"/>
+                    </a:ext>
+                  </a:extLst>
+                </a:gridCol>
+              </a:tblGrid>
+              <a:tr h="370840">
+                <a:tc>
+                  <a:txBody>
+                    <a:bodyPr/>
+                    <a:lstStyle/>
+                    <a:p>
+                      <a:pPr algn="ctr"/>
+                      <a:endParaRPr lang="en-US" dirty="0"/>
+                    </a:p>
+                  </a:txBody>
+                  <a:tcPr/>
+                </a:tc>
+                <a:tc>
+                  <a:txBody>
+                    <a:bodyPr/>
+                    <a:lstStyle/>
+                    <a:p>
+                      <a:pPr algn="ctr"/>
+                      <a:endParaRPr lang="en-US" dirty="0"/>
+                    </a:p>
+                  </a:txBody>
+                  <a:tcPr/>
+                </a:tc>
+                <a:tc>
+                  <a:txBody>
+                    <a:bodyPr/>
+                    <a:lstStyle/>
+                    <a:p>
+                      <a:pPr algn="ctr"/>
+                      <a:endParaRPr lang="en-US" dirty="0"/>
+                    </a:p>
+                  </a:txBody>
+                  <a:tcPr/>
+                </a:tc>
+                <a:tc>
+                  <a:txBody>
+                    <a:bodyPr/>
+                    <a:lstStyle/>
+                    <a:p>
+                      <a:pPr algn="ctr"/>
+                      <a:endParaRPr lang="en-US" dirty="0"/>
+                    </a:p>
+                  </a:txBody>
+                  <a:tcPr/>
+                </a:tc>
+                <a:extLst>
+                  <a:ext uri="{0D108BD9-81ED-4DB2-BD59-A6C34878D82A}">
+                    <a16:rowId xmlns:a16="http://schemas.microsoft.com/office/drawing/2014/main" val="3892313521"/>
+                  </a:ext>
+                </a:extLst>
+              </a:tr>
+            </a:tbl>
+          </a:graphicData>
+        </a:graphic>
+      </p:graphicFrame>
+      <p:graphicFrame>
+        <p:nvGraphicFramePr>
+          <p:cNvPr id="7" name="Content Placeholder 12"/>
+          <p:cNvGraphicFramePr>
+            <a:graphicFrameLocks/>
+          </p:cNvGraphicFramePr>
+          <p:nvPr/>
+        </p:nvGraphicFramePr>
+        <p:xfrm>
+          <a:off x="3962397" y="2981960"/>
+          <a:ext cx="4648203" cy="370840"/>
+        </p:xfrm>
+        <a:graphic>
+          <a:graphicData uri="http://schemas.openxmlformats.org/drawingml/2006/table">
+            <a:tbl>
+              <a:tblPr firstRow="1" bandRow="1">
+                <a:tableStyleId>{5940675A-B579-460E-94D1-54222C63F5DA}</a:tableStyleId>
+              </a:tblPr>
+              <a:tblGrid>
+                <a:gridCol w="664029">
+                  <a:extLst>
+                    <a:ext uri="{9D8B030D-6E8A-4147-A177-3AD203B41FA5}">
+                      <a16:colId xmlns:a16="http://schemas.microsoft.com/office/drawing/2014/main" val="242172939"/>
+                    </a:ext>
+                  </a:extLst>
+                </a:gridCol>
+                <a:gridCol w="664029">
+                  <a:extLst>
+                    <a:ext uri="{9D8B030D-6E8A-4147-A177-3AD203B41FA5}">
+                      <a16:colId xmlns:a16="http://schemas.microsoft.com/office/drawing/2014/main" val="2188387863"/>
+                    </a:ext>
+                  </a:extLst>
+                </a:gridCol>
+                <a:gridCol w="664029">
+                  <a:extLst>
+                    <a:ext uri="{9D8B030D-6E8A-4147-A177-3AD203B41FA5}">
+                      <a16:colId xmlns:a16="http://schemas.microsoft.com/office/drawing/2014/main" val="85967061"/>
+                    </a:ext>
+                  </a:extLst>
+                </a:gridCol>
+                <a:gridCol w="664029">
+                  <a:extLst>
+                    <a:ext uri="{9D8B030D-6E8A-4147-A177-3AD203B41FA5}">
+                      <a16:colId xmlns:a16="http://schemas.microsoft.com/office/drawing/2014/main" val="2525421763"/>
+                    </a:ext>
+                  </a:extLst>
+                </a:gridCol>
+                <a:gridCol w="664029">
+                  <a:extLst>
+                    <a:ext uri="{9D8B030D-6E8A-4147-A177-3AD203B41FA5}">
+                      <a16:colId xmlns:a16="http://schemas.microsoft.com/office/drawing/2014/main" val="620484926"/>
+                    </a:ext>
+                  </a:extLst>
+                </a:gridCol>
+                <a:gridCol w="664029">
+                  <a:extLst>
+                    <a:ext uri="{9D8B030D-6E8A-4147-A177-3AD203B41FA5}">
+                      <a16:colId xmlns:a16="http://schemas.microsoft.com/office/drawing/2014/main" val="1648192157"/>
+                    </a:ext>
+                  </a:extLst>
+                </a:gridCol>
+                <a:gridCol w="664029">
+                  <a:extLst>
+                    <a:ext uri="{9D8B030D-6E8A-4147-A177-3AD203B41FA5}">
+                      <a16:colId xmlns:a16="http://schemas.microsoft.com/office/drawing/2014/main" val="3500636327"/>
+                    </a:ext>
+                  </a:extLst>
+                </a:gridCol>
+              </a:tblGrid>
+              <a:tr h="370840">
+                <a:tc>
+                  <a:txBody>
+                    <a:bodyPr/>
+                    <a:lstStyle/>
+                    <a:p>
+                      <a:endParaRPr lang="en-US" dirty="0"/>
+                    </a:p>
+                  </a:txBody>
+                  <a:tcPr/>
+                </a:tc>
+                <a:tc>
+                  <a:txBody>
+                    <a:bodyPr/>
+                    <a:lstStyle/>
+                    <a:p>
+                      <a:endParaRPr lang="en-US" dirty="0"/>
+                    </a:p>
+                  </a:txBody>
+                  <a:tcPr/>
+                </a:tc>
+                <a:tc>
+                  <a:txBody>
+                    <a:bodyPr/>
+                    <a:lstStyle/>
+                    <a:p>
+                      <a:endParaRPr lang="en-US" dirty="0"/>
+                    </a:p>
+                  </a:txBody>
+                  <a:tcPr/>
+                </a:tc>
+                <a:tc>
+                  <a:txBody>
+                    <a:bodyPr/>
+                    <a:lstStyle/>
+                    <a:p>
+                      <a:endParaRPr lang="en-US" dirty="0"/>
+                    </a:p>
+                  </a:txBody>
+                  <a:tcPr/>
+                </a:tc>
+                <a:tc>
+                  <a:txBody>
+                    <a:bodyPr/>
+                    <a:lstStyle/>
+                    <a:p>
+                      <a:endParaRPr lang="en-US" dirty="0"/>
+                    </a:p>
+                  </a:txBody>
+                  <a:tcPr/>
+                </a:tc>
+                <a:tc>
+                  <a:txBody>
+                    <a:bodyPr/>
+                    <a:lstStyle/>
+                    <a:p>
+                      <a:endParaRPr lang="en-US" dirty="0"/>
+                    </a:p>
+                  </a:txBody>
+                  <a:tcPr/>
+                </a:tc>
+                <a:tc>
+                  <a:txBody>
+                    <a:bodyPr/>
+                    <a:lstStyle/>
+                    <a:p>
+                      <a:endParaRPr lang="en-US" dirty="0"/>
+                    </a:p>
+                  </a:txBody>
+                  <a:tcPr/>
+                </a:tc>
+                <a:extLst>
+                  <a:ext uri="{0D108BD9-81ED-4DB2-BD59-A6C34878D82A}">
+                    <a16:rowId xmlns:a16="http://schemas.microsoft.com/office/drawing/2014/main" val="3892313521"/>
+                  </a:ext>
+                </a:extLst>
+              </a:tr>
+            </a:tbl>
+          </a:graphicData>
+        </a:graphic>
+      </p:graphicFrame>
+      <p:sp>
+        <p:nvSpPr>
+          <p:cNvPr id="8" name="TextBox 7"/>
+          <p:cNvSpPr txBox="1"/>
+          <p:nvPr/>
+        </p:nvSpPr>
+        <p:spPr>
+          <a:xfrm>
+            <a:off x="1905000" y="2626900"/>
+            <a:ext cx="1039067" cy="369332"/>
+          </a:xfrm>
+          <a:prstGeom prst="rect">
+            <a:avLst/>
+          </a:prstGeom>
+          <a:noFill/>
+        </p:spPr>
+        <p:txBody>
+          <a:bodyPr wrap="none" rtlCol="0">
+            <a:spAutoFit/>
+          </a:bodyPr>
+          <a:lstStyle/>
+          <a:p>
+            <a:r>
+              <a:rPr lang="en-US" dirty="0"/>
+              <a:t>Registers</a:t>
+            </a:r>
+          </a:p>
+        </p:txBody>
+      </p:sp>
+      <p:sp>
+        <p:nvSpPr>
+          <p:cNvPr id="9" name="TextBox 8"/>
+          <p:cNvSpPr txBox="1"/>
+          <p:nvPr/>
+        </p:nvSpPr>
+        <p:spPr>
+          <a:xfrm>
+            <a:off x="5334000" y="2626900"/>
+            <a:ext cx="1765676" cy="646331"/>
+          </a:xfrm>
+          <a:prstGeom prst="rect">
+            <a:avLst/>
+          </a:prstGeom>
+          <a:noFill/>
+        </p:spPr>
+        <p:txBody>
+          <a:bodyPr wrap="none" rtlCol="0">
+            <a:spAutoFit/>
+          </a:bodyPr>
+          <a:lstStyle/>
+          <a:p>
+            <a:r>
+              <a:rPr lang="en-US" dirty="0"/>
+              <a:t>Stack </a:t>
+            </a:r>
+            <a:r>
+              <a:rPr lang="en-US" altLang="zh-CN" dirty="0"/>
+              <a:t>in Memory</a:t>
+            </a:r>
+            <a:endParaRPr lang="en-US" dirty="0"/>
+          </a:p>
+          <a:p>
+            <a:endParaRPr lang="en-US" dirty="0"/>
+          </a:p>
+        </p:txBody>
+      </p:sp>
+    </p:spTree>
+    <p:extLst>
+      <p:ext uri="{BB962C8B-B14F-4D97-AF65-F5344CB8AC3E}">
+        <p14:creationId xmlns:p14="http://schemas.microsoft.com/office/powerpoint/2010/main" val="3252337491"/>
+      </p:ext>
+    </p:extLst>
+  </p:cSld>
+  <p:clrMapOvr>
+    <a:masterClrMapping/>
+  </p:clrMapOvr>
+</p:sld>
+</file>
+
+<file path=ppt/slides/slide14.xml><?xml version="1.0" encoding="utf-8"?>
+<p:sld xmlns:a="http://schemas.openxmlformats.org/drawingml/2006/main" xmlns:r="http://schemas.openxmlformats.org/officeDocument/2006/relationships" xmlns:p="http://schemas.openxmlformats.org/presentationml/2006/main">
+  <p:cSld>
+    <p:spTree>
+      <p:nvGrpSpPr>
+        <p:cNvPr id="1" name=""/>
+        <p:cNvGrpSpPr/>
+        <p:nvPr/>
+      </p:nvGrpSpPr>
+      <p:grpSpPr>
+        <a:xfrm>
+          <a:off x="0" y="0"/>
+          <a:ext cx="0" cy="0"/>
+          <a:chOff x="0" y="0"/>
+          <a:chExt cx="0" cy="0"/>
+        </a:xfrm>
+      </p:grpSpPr>
+      <p:sp>
+        <p:nvSpPr>
+          <p:cNvPr id="2" name="Title 1"/>
+          <p:cNvSpPr>
+            <a:spLocks noGrp="1"/>
+          </p:cNvSpPr>
+          <p:nvPr>
+            <p:ph type="title"/>
+          </p:nvPr>
+        </p:nvSpPr>
+        <p:spPr/>
+        <p:txBody>
+          <a:bodyPr/>
+          <a:lstStyle/>
+          <a:p>
+            <a:r>
+              <a:rPr lang="en-US" dirty="0"/>
+              <a:t>Argument Passing ANS</a:t>
+            </a:r>
+          </a:p>
+        </p:txBody>
+      </p:sp>
+      <p:sp>
+        <p:nvSpPr>
+          <p:cNvPr id="3" name="Slide Number Placeholder 2"/>
+          <p:cNvSpPr>
+            <a:spLocks noGrp="1"/>
+          </p:cNvSpPr>
+          <p:nvPr>
+            <p:ph type="sldNum" sz="quarter" idx="12"/>
+          </p:nvPr>
+        </p:nvSpPr>
+        <p:spPr/>
+        <p:txBody>
+          <a:bodyPr/>
+          <a:lstStyle/>
+          <a:p>
+            <a:fld id="{EA7C8D44-3667-46F6-9772-CC52308E2A7F}" type="slidenum">
+              <a:rPr kumimoji="0" lang="en-US" smtClean="0"/>
+              <a:pPr/>
+              <a:t>14</a:t>
+            </a:fld>
+            <a:endParaRPr kumimoji="0" lang="en-US" dirty="0"/>
+          </a:p>
+        </p:txBody>
+      </p:sp>
+      <p:sp>
+        <p:nvSpPr>
+          <p:cNvPr id="4" name="Content Placeholder 3"/>
+          <p:cNvSpPr>
+            <a:spLocks noGrp="1"/>
+          </p:cNvSpPr>
+          <p:nvPr>
+            <p:ph sz="quarter" idx="1"/>
+          </p:nvPr>
+        </p:nvSpPr>
+        <p:spPr/>
+        <p:txBody>
+          <a:bodyPr/>
+          <a:lstStyle/>
+          <a:p>
+            <a:r>
+              <a:rPr lang="en-US" altLang="zh-CN" dirty="0"/>
+              <a:t>W</a:t>
+            </a:r>
+            <a:r>
+              <a:rPr lang="en-US" dirty="0"/>
+              <a:t>hich registers are used to pass the arguments and return the result? </a:t>
+            </a:r>
+          </a:p>
+          <a:p>
+            <a:endParaRPr lang="en-US" dirty="0"/>
+          </a:p>
+          <a:p>
+            <a:endParaRPr lang="en-US" dirty="0"/>
+          </a:p>
+          <a:p>
+            <a:endParaRPr lang="en-US" dirty="0"/>
+          </a:p>
+          <a:p>
+            <a:r>
+              <a:rPr lang="en-US" dirty="0"/>
+              <a:t>Each argument of 8-bit char, or 16-bit short, is passed in 1 32-bit register; cannot use 1 register to pass more than 1 arguments</a:t>
+            </a:r>
+          </a:p>
+          <a:p>
+            <a:endParaRPr lang="en-US" dirty="0"/>
+          </a:p>
+        </p:txBody>
+      </p:sp>
+      <p:sp>
+        <p:nvSpPr>
+          <p:cNvPr id="5" name="Rectangle 4"/>
+          <p:cNvSpPr/>
+          <p:nvPr/>
+        </p:nvSpPr>
+        <p:spPr>
+          <a:xfrm>
+            <a:off x="304800" y="2279674"/>
+            <a:ext cx="5582234" cy="369332"/>
+          </a:xfrm>
+          <a:prstGeom prst="rect">
+            <a:avLst/>
+          </a:prstGeom>
+        </p:spPr>
+        <p:style>
+          <a:lnRef idx="1">
+            <a:schemeClr val="accent1"/>
+          </a:lnRef>
+          <a:fillRef idx="2">
+            <a:schemeClr val="accent1"/>
+          </a:fillRef>
+          <a:effectRef idx="1">
+            <a:schemeClr val="accent1"/>
+          </a:effectRef>
+          <a:fontRef idx="minor">
+            <a:schemeClr val="dk1"/>
+          </a:fontRef>
+        </p:style>
+        <p:txBody>
+          <a:bodyPr wrap="none">
+            <a:spAutoFit/>
+          </a:bodyPr>
+          <a:lstStyle/>
+          <a:p>
+            <a:r>
+              <a:rPr lang="en-US" dirty="0">
+                <a:solidFill>
+                  <a:srgbClr val="333333"/>
+                </a:solidFill>
+                <a:latin typeface="Segoe UI" panose="020B0502040204020203" pitchFamily="34" charset="0"/>
+              </a:rPr>
+              <a:t>long fun (short a1, char a2, double a3, </a:t>
+            </a:r>
+            <a:r>
+              <a:rPr lang="en-US" dirty="0" err="1">
+                <a:solidFill>
+                  <a:srgbClr val="333333"/>
+                </a:solidFill>
+                <a:latin typeface="Segoe UI" panose="020B0502040204020203" pitchFamily="34" charset="0"/>
+              </a:rPr>
+              <a:t>int</a:t>
+            </a:r>
+            <a:r>
+              <a:rPr lang="en-US" dirty="0">
+                <a:solidFill>
+                  <a:srgbClr val="333333"/>
+                </a:solidFill>
+                <a:latin typeface="Segoe UI" panose="020B0502040204020203" pitchFamily="34" charset="0"/>
+              </a:rPr>
+              <a:t> a4, char a5)</a:t>
+            </a:r>
+          </a:p>
+        </p:txBody>
+      </p:sp>
+      <p:graphicFrame>
+        <p:nvGraphicFramePr>
+          <p:cNvPr id="6" name="Content Placeholder 12"/>
+          <p:cNvGraphicFramePr>
+            <a:graphicFrameLocks/>
+          </p:cNvGraphicFramePr>
+          <p:nvPr/>
+        </p:nvGraphicFramePr>
+        <p:xfrm>
+          <a:off x="685800" y="2981960"/>
+          <a:ext cx="2971800" cy="370840"/>
+        </p:xfrm>
+        <a:graphic>
+          <a:graphicData uri="http://schemas.openxmlformats.org/drawingml/2006/table">
+            <a:tbl>
+              <a:tblPr firstRow="1" bandRow="1">
+                <a:tableStyleId>{5940675A-B579-460E-94D1-54222C63F5DA}</a:tableStyleId>
+              </a:tblPr>
+              <a:tblGrid>
+                <a:gridCol w="742950">
+                  <a:extLst>
+                    <a:ext uri="{9D8B030D-6E8A-4147-A177-3AD203B41FA5}">
+                      <a16:colId xmlns:a16="http://schemas.microsoft.com/office/drawing/2014/main" val="242172939"/>
+                    </a:ext>
+                  </a:extLst>
+                </a:gridCol>
+                <a:gridCol w="742950">
+                  <a:extLst>
+                    <a:ext uri="{9D8B030D-6E8A-4147-A177-3AD203B41FA5}">
+                      <a16:colId xmlns:a16="http://schemas.microsoft.com/office/drawing/2014/main" val="2188387863"/>
+                    </a:ext>
+                  </a:extLst>
+                </a:gridCol>
+                <a:gridCol w="1485900">
+                  <a:extLst>
+                    <a:ext uri="{9D8B030D-6E8A-4147-A177-3AD203B41FA5}">
+                      <a16:colId xmlns:a16="http://schemas.microsoft.com/office/drawing/2014/main" val="85967061"/>
+                    </a:ext>
+                  </a:extLst>
+                </a:gridCol>
+              </a:tblGrid>
+              <a:tr h="370840">
+                <a:tc>
+                  <a:txBody>
+                    <a:bodyPr/>
+                    <a:lstStyle/>
+                    <a:p>
+                      <a:pPr algn="ctr"/>
+                      <a:r>
+                        <a:rPr lang="en-US" altLang="zh-CN" dirty="0"/>
+                        <a:t>a1</a:t>
+                      </a:r>
+                      <a:endParaRPr lang="en-US" dirty="0"/>
+                    </a:p>
+                  </a:txBody>
+                  <a:tcPr/>
+                </a:tc>
+                <a:tc>
+                  <a:txBody>
+                    <a:bodyPr/>
+                    <a:lstStyle/>
+                    <a:p>
+                      <a:pPr algn="ctr"/>
+                      <a:r>
+                        <a:rPr lang="en-US" dirty="0"/>
+                        <a:t>a2</a:t>
+                      </a:r>
+                    </a:p>
+                  </a:txBody>
+                  <a:tcPr/>
+                </a:tc>
+                <a:tc>
+                  <a:txBody>
+                    <a:bodyPr/>
+                    <a:lstStyle/>
+                    <a:p>
+                      <a:pPr algn="ctr"/>
+                      <a:r>
+                        <a:rPr lang="en-US" dirty="0"/>
+                        <a:t>a3</a:t>
+                      </a:r>
+                    </a:p>
+                  </a:txBody>
+                  <a:tcPr/>
+                </a:tc>
+                <a:extLst>
+                  <a:ext uri="{0D108BD9-81ED-4DB2-BD59-A6C34878D82A}">
+                    <a16:rowId xmlns:a16="http://schemas.microsoft.com/office/drawing/2014/main" val="3892313521"/>
+                  </a:ext>
+                </a:extLst>
+              </a:tr>
+            </a:tbl>
+          </a:graphicData>
+        </a:graphic>
+      </p:graphicFrame>
+      <p:graphicFrame>
+        <p:nvGraphicFramePr>
+          <p:cNvPr id="7" name="Content Placeholder 12"/>
+          <p:cNvGraphicFramePr>
+            <a:graphicFrameLocks/>
+          </p:cNvGraphicFramePr>
+          <p:nvPr/>
+        </p:nvGraphicFramePr>
+        <p:xfrm>
+          <a:off x="3962397" y="2981960"/>
+          <a:ext cx="4648203" cy="370840"/>
+        </p:xfrm>
+        <a:graphic>
+          <a:graphicData uri="http://schemas.openxmlformats.org/drawingml/2006/table">
+            <a:tbl>
+              <a:tblPr firstRow="1" bandRow="1">
+                <a:tableStyleId>{5940675A-B579-460E-94D1-54222C63F5DA}</a:tableStyleId>
+              </a:tblPr>
+              <a:tblGrid>
+                <a:gridCol w="664029">
+                  <a:extLst>
+                    <a:ext uri="{9D8B030D-6E8A-4147-A177-3AD203B41FA5}">
+                      <a16:colId xmlns:a16="http://schemas.microsoft.com/office/drawing/2014/main" val="242172939"/>
+                    </a:ext>
+                  </a:extLst>
+                </a:gridCol>
+                <a:gridCol w="664029">
+                  <a:extLst>
+                    <a:ext uri="{9D8B030D-6E8A-4147-A177-3AD203B41FA5}">
+                      <a16:colId xmlns:a16="http://schemas.microsoft.com/office/drawing/2014/main" val="2188387863"/>
+                    </a:ext>
+                  </a:extLst>
+                </a:gridCol>
+                <a:gridCol w="664029">
+                  <a:extLst>
+                    <a:ext uri="{9D8B030D-6E8A-4147-A177-3AD203B41FA5}">
+                      <a16:colId xmlns:a16="http://schemas.microsoft.com/office/drawing/2014/main" val="85967061"/>
+                    </a:ext>
+                  </a:extLst>
+                </a:gridCol>
+                <a:gridCol w="664029">
+                  <a:extLst>
+                    <a:ext uri="{9D8B030D-6E8A-4147-A177-3AD203B41FA5}">
+                      <a16:colId xmlns:a16="http://schemas.microsoft.com/office/drawing/2014/main" val="2525421763"/>
+                    </a:ext>
+                  </a:extLst>
+                </a:gridCol>
+                <a:gridCol w="664029">
+                  <a:extLst>
+                    <a:ext uri="{9D8B030D-6E8A-4147-A177-3AD203B41FA5}">
+                      <a16:colId xmlns:a16="http://schemas.microsoft.com/office/drawing/2014/main" val="620484926"/>
+                    </a:ext>
+                  </a:extLst>
+                </a:gridCol>
+                <a:gridCol w="664029">
+                  <a:extLst>
+                    <a:ext uri="{9D8B030D-6E8A-4147-A177-3AD203B41FA5}">
+                      <a16:colId xmlns:a16="http://schemas.microsoft.com/office/drawing/2014/main" val="1648192157"/>
+                    </a:ext>
+                  </a:extLst>
+                </a:gridCol>
+                <a:gridCol w="664029">
+                  <a:extLst>
+                    <a:ext uri="{9D8B030D-6E8A-4147-A177-3AD203B41FA5}">
+                      <a16:colId xmlns:a16="http://schemas.microsoft.com/office/drawing/2014/main" val="3500636327"/>
+                    </a:ext>
+                  </a:extLst>
+                </a:gridCol>
+              </a:tblGrid>
+              <a:tr h="370840">
+                <a:tc>
+                  <a:txBody>
+                    <a:bodyPr/>
+                    <a:lstStyle/>
+                    <a:p>
+                      <a:pPr algn="ctr"/>
+                      <a:r>
+                        <a:rPr lang="en-US"/>
+                        <a:t>a4</a:t>
+                      </a:r>
+                      <a:endParaRPr lang="en-US" dirty="0"/>
+                    </a:p>
+                  </a:txBody>
+                  <a:tcPr/>
+                </a:tc>
+                <a:tc>
+                  <a:txBody>
+                    <a:bodyPr/>
+                    <a:lstStyle/>
+                    <a:p>
+                      <a:pPr algn="ctr"/>
+                      <a:r>
+                        <a:rPr lang="en-US" dirty="0"/>
+                        <a:t>a5</a:t>
+                      </a:r>
+                    </a:p>
+                  </a:txBody>
+                  <a:tcPr/>
+                </a:tc>
+                <a:tc>
+                  <a:txBody>
+                    <a:bodyPr/>
+                    <a:lstStyle/>
+                    <a:p>
+                      <a:pPr algn="ctr"/>
+                      <a:endParaRPr lang="en-US" dirty="0"/>
+                    </a:p>
+                  </a:txBody>
+                  <a:tcPr/>
+                </a:tc>
+                <a:tc>
+                  <a:txBody>
+                    <a:bodyPr/>
+                    <a:lstStyle/>
+                    <a:p>
+                      <a:pPr algn="ctr"/>
+                      <a:endParaRPr lang="en-US" dirty="0"/>
+                    </a:p>
+                  </a:txBody>
+                  <a:tcPr/>
+                </a:tc>
+                <a:tc>
+                  <a:txBody>
+                    <a:bodyPr/>
+                    <a:lstStyle/>
+                    <a:p>
+                      <a:pPr algn="ctr"/>
+                      <a:endParaRPr lang="en-US" dirty="0"/>
+                    </a:p>
+                  </a:txBody>
+                  <a:tcPr/>
+                </a:tc>
+                <a:tc>
+                  <a:txBody>
+                    <a:bodyPr/>
+                    <a:lstStyle/>
+                    <a:p>
+                      <a:pPr algn="ctr"/>
+                      <a:endParaRPr lang="en-US" dirty="0"/>
+                    </a:p>
+                  </a:txBody>
+                  <a:tcPr/>
+                </a:tc>
+                <a:tc>
+                  <a:txBody>
+                    <a:bodyPr/>
+                    <a:lstStyle/>
+                    <a:p>
+                      <a:pPr algn="ctr"/>
+                      <a:endParaRPr lang="en-US" dirty="0"/>
+                    </a:p>
+                  </a:txBody>
+                  <a:tcPr/>
+                </a:tc>
+                <a:extLst>
+                  <a:ext uri="{0D108BD9-81ED-4DB2-BD59-A6C34878D82A}">
+                    <a16:rowId xmlns:a16="http://schemas.microsoft.com/office/drawing/2014/main" val="3892313521"/>
+                  </a:ext>
+                </a:extLst>
+              </a:tr>
+            </a:tbl>
+          </a:graphicData>
+        </a:graphic>
+      </p:graphicFrame>
+      <p:sp>
+        <p:nvSpPr>
+          <p:cNvPr id="8" name="TextBox 7"/>
+          <p:cNvSpPr txBox="1"/>
+          <p:nvPr/>
+        </p:nvSpPr>
+        <p:spPr>
+          <a:xfrm>
+            <a:off x="1905000" y="2626900"/>
+            <a:ext cx="1039067" cy="369332"/>
+          </a:xfrm>
+          <a:prstGeom prst="rect">
+            <a:avLst/>
+          </a:prstGeom>
+          <a:noFill/>
+        </p:spPr>
+        <p:txBody>
+          <a:bodyPr wrap="none" rtlCol="0">
+            <a:spAutoFit/>
+          </a:bodyPr>
+          <a:lstStyle/>
+          <a:p>
+            <a:r>
+              <a:rPr lang="en-US" dirty="0"/>
+              <a:t>Registers</a:t>
+            </a:r>
+          </a:p>
+        </p:txBody>
+      </p:sp>
+      <p:sp>
+        <p:nvSpPr>
+          <p:cNvPr id="9" name="TextBox 8"/>
+          <p:cNvSpPr txBox="1"/>
+          <p:nvPr/>
+        </p:nvSpPr>
+        <p:spPr>
+          <a:xfrm>
+            <a:off x="5334000" y="2626900"/>
+            <a:ext cx="1765676" cy="646331"/>
+          </a:xfrm>
+          <a:prstGeom prst="rect">
+            <a:avLst/>
+          </a:prstGeom>
+          <a:noFill/>
+        </p:spPr>
+        <p:txBody>
+          <a:bodyPr wrap="none" rtlCol="0">
+            <a:spAutoFit/>
+          </a:bodyPr>
+          <a:lstStyle/>
+          <a:p>
+            <a:r>
+              <a:rPr lang="en-US" dirty="0"/>
+              <a:t>Stack </a:t>
+            </a:r>
+            <a:r>
+              <a:rPr lang="en-US" altLang="zh-CN" dirty="0"/>
+              <a:t>in Memory</a:t>
+            </a:r>
+            <a:endParaRPr lang="en-US" dirty="0"/>
+          </a:p>
+          <a:p>
+            <a:endParaRPr lang="en-US" dirty="0"/>
+          </a:p>
+        </p:txBody>
+      </p:sp>
+    </p:spTree>
+    <p:extLst>
+      <p:ext uri="{BB962C8B-B14F-4D97-AF65-F5344CB8AC3E}">
+        <p14:creationId xmlns:p14="http://schemas.microsoft.com/office/powerpoint/2010/main" val="414796749"/>
+      </p:ext>
+    </p:extLst>
+  </p:cSld>
+  <p:clrMapOvr>
+    <a:masterClrMapping/>
+  </p:clrMapOvr>
+</p:sld>
+</file>
+
+<file path=ppt/slides/slide15.xml><?xml version="1.0" encoding="utf-8"?>
+<p:sld xmlns:a="http://schemas.openxmlformats.org/drawingml/2006/main" xmlns:r="http://schemas.openxmlformats.org/officeDocument/2006/relationships" xmlns:p="http://schemas.openxmlformats.org/presentationml/2006/main">
+  <p:cSld>
+    <p:spTree>
+      <p:nvGrpSpPr>
+        <p:cNvPr id="1" name="">
+          <a:extLst>
+            <a:ext uri="{FF2B5EF4-FFF2-40B4-BE49-F238E27FC236}">
+              <a16:creationId xmlns:a16="http://schemas.microsoft.com/office/drawing/2014/main" id="{18DFCAEB-CD92-F6E6-96EC-622670592FF2}"/>
+            </a:ext>
+          </a:extLst>
+        </p:cNvPr>
+        <p:cNvGrpSpPr/>
+        <p:nvPr/>
+      </p:nvGrpSpPr>
+      <p:grpSpPr>
+        <a:xfrm>
+          <a:off x="0" y="0"/>
+          <a:ext cx="0" cy="0"/>
+          <a:chOff x="0" y="0"/>
+          <a:chExt cx="0" cy="0"/>
+        </a:xfrm>
+      </p:grpSpPr>
+      <p:sp>
+        <p:nvSpPr>
+          <p:cNvPr id="2" name="Title 1">
+            <a:extLst>
+              <a:ext uri="{FF2B5EF4-FFF2-40B4-BE49-F238E27FC236}">
+                <a16:creationId xmlns:a16="http://schemas.microsoft.com/office/drawing/2014/main" id="{B8B35D03-E63B-948E-7B28-FE2BC0D48EA8}"/>
+              </a:ext>
+            </a:extLst>
+          </p:cNvPr>
+          <p:cNvSpPr>
+            <a:spLocks noGrp="1"/>
+          </p:cNvSpPr>
+          <p:nvPr>
+            <p:ph type="title"/>
+          </p:nvPr>
+        </p:nvSpPr>
+        <p:spPr/>
+        <p:txBody>
+          <a:bodyPr>
+            <a:normAutofit fontScale="90000"/>
+          </a:bodyPr>
+          <a:lstStyle/>
+          <a:p>
+            <a:r>
+              <a:rPr lang="en-US" dirty="0"/>
+              <a:t>What’s wrong? Passing arguments and Returning Value</a:t>
+            </a:r>
+          </a:p>
+        </p:txBody>
+      </p:sp>
+      <p:sp>
+        <p:nvSpPr>
+          <p:cNvPr id="3" name="Slide Number Placeholder 2">
+            <a:extLst>
+              <a:ext uri="{FF2B5EF4-FFF2-40B4-BE49-F238E27FC236}">
+                <a16:creationId xmlns:a16="http://schemas.microsoft.com/office/drawing/2014/main" id="{F2A24FAD-DC69-0014-9A87-E1D9B0AFB91E}"/>
+              </a:ext>
+            </a:extLst>
+          </p:cNvPr>
+          <p:cNvSpPr>
+            <a:spLocks noGrp="1"/>
+          </p:cNvSpPr>
+          <p:nvPr>
+            <p:ph type="sldNum" sz="quarter" idx="12"/>
+          </p:nvPr>
+        </p:nvSpPr>
+        <p:spPr/>
+        <p:txBody>
+          <a:bodyPr/>
+          <a:lstStyle/>
+          <a:p>
+            <a:fld id="{EA7C8D44-3667-46F6-9772-CC52308E2A7F}" type="slidenum">
+              <a:rPr kumimoji="0" lang="en-US" smtClean="0"/>
+              <a:pPr/>
+              <a:t>15</a:t>
+            </a:fld>
+            <a:endParaRPr kumimoji="0" lang="en-US" dirty="0"/>
+          </a:p>
+        </p:txBody>
+      </p:sp>
+      <p:sp>
+        <p:nvSpPr>
+          <p:cNvPr id="11" name="Rectangle 10">
+            <a:extLst>
+              <a:ext uri="{FF2B5EF4-FFF2-40B4-BE49-F238E27FC236}">
+                <a16:creationId xmlns:a16="http://schemas.microsoft.com/office/drawing/2014/main" id="{41B1B8CA-B3E7-1ACE-322F-D0B4A4D4E57D}"/>
+              </a:ext>
+            </a:extLst>
+          </p:cNvPr>
+          <p:cNvSpPr/>
+          <p:nvPr/>
+        </p:nvSpPr>
+        <p:spPr>
+          <a:xfrm>
+            <a:off x="76200" y="1593468"/>
+            <a:ext cx="9163050" cy="646331"/>
+          </a:xfrm>
+          <a:prstGeom prst="rect">
+            <a:avLst/>
+          </a:prstGeom>
+        </p:spPr>
+        <p:txBody>
+          <a:bodyPr wrap="square">
+            <a:spAutoFit/>
+          </a:bodyPr>
+          <a:lstStyle/>
+          <a:p>
+            <a:r>
+              <a:rPr lang="en-US" b="1" dirty="0">
+                <a:latin typeface="Consolas" panose="020B0609020204030204" pitchFamily="49" charset="0"/>
+              </a:rPr>
+              <a:t>uint32_t sum(uint8_t a8, uint8_t b8, uint16_t c16, uint16_t d16, </a:t>
+            </a:r>
+            <a:r>
+              <a:rPr lang="en-US" b="1" dirty="0">
+                <a:solidFill>
+                  <a:srgbClr val="FF0000"/>
+                </a:solidFill>
+                <a:latin typeface="Consolas" panose="020B0609020204030204" pitchFamily="49" charset="0"/>
+              </a:rPr>
+              <a:t>uint32_t e32</a:t>
+            </a:r>
+            <a:r>
+              <a:rPr lang="en-US" b="1" dirty="0">
+                <a:latin typeface="Consolas" panose="020B0609020204030204" pitchFamily="49" charset="0"/>
+              </a:rPr>
+              <a:t>);</a:t>
+            </a:r>
+          </a:p>
+        </p:txBody>
+      </p:sp>
+      <p:sp>
+        <p:nvSpPr>
+          <p:cNvPr id="4" name="TextBox 3">
+            <a:extLst>
+              <a:ext uri="{FF2B5EF4-FFF2-40B4-BE49-F238E27FC236}">
+                <a16:creationId xmlns:a16="http://schemas.microsoft.com/office/drawing/2014/main" id="{9BD5669A-1FE1-C6BC-0617-481BE80F1863}"/>
+              </a:ext>
+            </a:extLst>
+          </p:cNvPr>
+          <p:cNvSpPr txBox="1"/>
+          <p:nvPr/>
+        </p:nvSpPr>
+        <p:spPr>
+          <a:xfrm>
+            <a:off x="304800" y="2754035"/>
+            <a:ext cx="750526" cy="369332"/>
+          </a:xfrm>
+          <a:prstGeom prst="rect">
+            <a:avLst/>
+          </a:prstGeom>
+          <a:noFill/>
+        </p:spPr>
+        <p:txBody>
+          <a:bodyPr wrap="none" rtlCol="0">
+            <a:spAutoFit/>
+          </a:bodyPr>
+          <a:lstStyle/>
+          <a:p>
+            <a:r>
+              <a:rPr lang="en-US" dirty="0"/>
+              <a:t>Caller</a:t>
+            </a:r>
+          </a:p>
+        </p:txBody>
+      </p:sp>
+      <p:sp>
+        <p:nvSpPr>
+          <p:cNvPr id="23" name="Rectangle 22">
+            <a:extLst>
+              <a:ext uri="{FF2B5EF4-FFF2-40B4-BE49-F238E27FC236}">
+                <a16:creationId xmlns:a16="http://schemas.microsoft.com/office/drawing/2014/main" id="{B5A46639-51AC-D259-C3DB-1521D258BD49}"/>
+              </a:ext>
+            </a:extLst>
+          </p:cNvPr>
+          <p:cNvSpPr/>
+          <p:nvPr/>
+        </p:nvSpPr>
+        <p:spPr>
+          <a:xfrm>
+            <a:off x="33528" y="2251948"/>
+            <a:ext cx="9163050" cy="369332"/>
+          </a:xfrm>
+          <a:prstGeom prst="rect">
+            <a:avLst/>
+          </a:prstGeom>
+        </p:spPr>
+        <p:txBody>
+          <a:bodyPr wrap="square">
+            <a:spAutoFit/>
+          </a:bodyPr>
+          <a:lstStyle/>
+          <a:p>
+            <a:r>
+              <a:rPr lang="en-US" b="1" dirty="0">
+                <a:solidFill>
+                  <a:srgbClr val="FF0000"/>
+                </a:solidFill>
+                <a:latin typeface="Consolas" panose="020B0609020204030204" pitchFamily="49" charset="0"/>
+              </a:rPr>
+              <a:t>s = sum(1, 2, 3, 4, 5);</a:t>
+            </a:r>
+          </a:p>
+        </p:txBody>
+      </p:sp>
+      <p:sp>
+        <p:nvSpPr>
+          <p:cNvPr id="15" name="TextBox 14">
+            <a:extLst>
+              <a:ext uri="{FF2B5EF4-FFF2-40B4-BE49-F238E27FC236}">
+                <a16:creationId xmlns:a16="http://schemas.microsoft.com/office/drawing/2014/main" id="{D4F04556-2048-4F19-A763-9BBFFFCAD277}"/>
+              </a:ext>
+            </a:extLst>
+          </p:cNvPr>
+          <p:cNvSpPr txBox="1"/>
+          <p:nvPr/>
+        </p:nvSpPr>
+        <p:spPr>
+          <a:xfrm>
+            <a:off x="449580" y="3256122"/>
+            <a:ext cx="2464136" cy="2031325"/>
+          </a:xfrm>
+          <a:prstGeom prst="rect">
+            <a:avLst/>
+          </a:prstGeom>
+        </p:spPr>
+        <p:style>
+          <a:lnRef idx="2">
+            <a:schemeClr val="accent1"/>
+          </a:lnRef>
+          <a:fillRef idx="1">
+            <a:schemeClr val="lt1"/>
+          </a:fillRef>
+          <a:effectRef idx="0">
+            <a:schemeClr val="accent1"/>
+          </a:effectRef>
+          <a:fontRef idx="minor">
+            <a:schemeClr val="dk1"/>
+          </a:fontRef>
+        </p:style>
+        <p:txBody>
+          <a:bodyPr wrap="none" rtlCol="0">
+            <a:spAutoFit/>
+          </a:bodyPr>
+          <a:lstStyle/>
+          <a:p>
+            <a:r>
+              <a:rPr lang="en-US" dirty="0">
+                <a:latin typeface="Consolas" panose="020B0609020204030204" pitchFamily="49" charset="0"/>
+              </a:rPr>
+              <a:t>  MOV r0, #5 </a:t>
+            </a:r>
+            <a:r>
+              <a:rPr lang="en-US" dirty="0">
+                <a:solidFill>
+                  <a:schemeClr val="bg1">
+                    <a:lumMod val="50000"/>
+                  </a:schemeClr>
+                </a:solidFill>
+                <a:latin typeface="Consolas" panose="020B0609020204030204" pitchFamily="49" charset="0"/>
+              </a:rPr>
+              <a:t>; e32</a:t>
+            </a:r>
+          </a:p>
+          <a:p>
+            <a:r>
+              <a:rPr lang="en-US" dirty="0">
+                <a:solidFill>
+                  <a:schemeClr val="tx1"/>
+                </a:solidFill>
+                <a:latin typeface="Consolas" panose="020B0609020204030204" pitchFamily="49" charset="0"/>
+              </a:rPr>
+              <a:t>  MOV r0, #1 </a:t>
+            </a:r>
+            <a:r>
+              <a:rPr lang="en-US" dirty="0">
+                <a:solidFill>
+                  <a:schemeClr val="bg1">
+                    <a:lumMod val="50000"/>
+                  </a:schemeClr>
+                </a:solidFill>
+                <a:latin typeface="Consolas" panose="020B0609020204030204" pitchFamily="49" charset="0"/>
+              </a:rPr>
+              <a:t>; a8</a:t>
+            </a:r>
+          </a:p>
+          <a:p>
+            <a:r>
+              <a:rPr lang="en-US" dirty="0">
+                <a:latin typeface="Consolas" panose="020B0609020204030204" pitchFamily="49" charset="0"/>
+              </a:rPr>
+              <a:t>  MOV r1, #2 </a:t>
+            </a:r>
+            <a:r>
+              <a:rPr lang="en-US" dirty="0">
+                <a:solidFill>
+                  <a:schemeClr val="bg1">
+                    <a:lumMod val="50000"/>
+                  </a:schemeClr>
+                </a:solidFill>
+                <a:latin typeface="Consolas" panose="020B0609020204030204" pitchFamily="49" charset="0"/>
+              </a:rPr>
+              <a:t>; b8</a:t>
+            </a:r>
+          </a:p>
+          <a:p>
+            <a:r>
+              <a:rPr lang="en-US" dirty="0">
+                <a:latin typeface="Consolas" panose="020B0609020204030204" pitchFamily="49" charset="0"/>
+              </a:rPr>
+              <a:t>  MOV r2, #3 </a:t>
+            </a:r>
+            <a:r>
+              <a:rPr lang="en-US" dirty="0">
+                <a:solidFill>
+                  <a:schemeClr val="bg1">
+                    <a:lumMod val="50000"/>
+                  </a:schemeClr>
+                </a:solidFill>
+                <a:latin typeface="Consolas" panose="020B0609020204030204" pitchFamily="49" charset="0"/>
+              </a:rPr>
+              <a:t>; c16</a:t>
+            </a:r>
+          </a:p>
+          <a:p>
+            <a:r>
+              <a:rPr lang="en-US" dirty="0">
+                <a:latin typeface="Consolas" panose="020B0609020204030204" pitchFamily="49" charset="0"/>
+              </a:rPr>
+              <a:t>  MOV r3, #4 </a:t>
+            </a:r>
+            <a:r>
+              <a:rPr lang="en-US" dirty="0">
+                <a:solidFill>
+                  <a:schemeClr val="bg1">
+                    <a:lumMod val="50000"/>
+                  </a:schemeClr>
+                </a:solidFill>
+                <a:latin typeface="Consolas" panose="020B0609020204030204" pitchFamily="49" charset="0"/>
+              </a:rPr>
+              <a:t>; d16</a:t>
+            </a:r>
+          </a:p>
+          <a:p>
+            <a:r>
+              <a:rPr lang="en-US" dirty="0">
+                <a:latin typeface="Consolas" panose="020B0609020204030204" pitchFamily="49" charset="0"/>
+              </a:rPr>
+              <a:t>  BL  sum</a:t>
+            </a:r>
+          </a:p>
+          <a:p>
+            <a:r>
+              <a:rPr lang="en-US" dirty="0">
+                <a:latin typeface="Consolas" panose="020B0609020204030204" pitchFamily="49" charset="0"/>
+              </a:rPr>
+              <a:t>  ...</a:t>
+            </a:r>
+          </a:p>
+        </p:txBody>
+      </p:sp>
+      <p:sp>
+        <p:nvSpPr>
+          <p:cNvPr id="27" name="TextBox 26">
+            <a:extLst>
+              <a:ext uri="{FF2B5EF4-FFF2-40B4-BE49-F238E27FC236}">
+                <a16:creationId xmlns:a16="http://schemas.microsoft.com/office/drawing/2014/main" id="{6AC2BFAF-703A-1607-3F8B-C3C6EAC24548}"/>
+              </a:ext>
+            </a:extLst>
+          </p:cNvPr>
+          <p:cNvSpPr txBox="1"/>
+          <p:nvPr/>
+        </p:nvSpPr>
+        <p:spPr>
+          <a:xfrm>
+            <a:off x="3581400" y="2840938"/>
+            <a:ext cx="769763" cy="369332"/>
+          </a:xfrm>
+          <a:prstGeom prst="rect">
+            <a:avLst/>
+          </a:prstGeom>
+          <a:noFill/>
+        </p:spPr>
+        <p:txBody>
+          <a:bodyPr wrap="none" rtlCol="0">
+            <a:spAutoFit/>
+          </a:bodyPr>
+          <a:lstStyle/>
+          <a:p>
+            <a:r>
+              <a:rPr lang="en-US" dirty="0" err="1"/>
+              <a:t>Callee</a:t>
+            </a:r>
+            <a:endParaRPr lang="en-US" dirty="0"/>
+          </a:p>
+        </p:txBody>
+      </p:sp>
+      <p:sp>
+        <p:nvSpPr>
+          <p:cNvPr id="28" name="TextBox 27">
+            <a:extLst>
+              <a:ext uri="{FF2B5EF4-FFF2-40B4-BE49-F238E27FC236}">
+                <a16:creationId xmlns:a16="http://schemas.microsoft.com/office/drawing/2014/main" id="{5A07EE5F-FDFB-4DFD-A418-4743BE043075}"/>
+              </a:ext>
+            </a:extLst>
+          </p:cNvPr>
+          <p:cNvSpPr txBox="1"/>
+          <p:nvPr/>
+        </p:nvSpPr>
+        <p:spPr>
+          <a:xfrm>
+            <a:off x="3607914" y="3305718"/>
+            <a:ext cx="3730508" cy="2031325"/>
+          </a:xfrm>
+          <a:prstGeom prst="rect">
+            <a:avLst/>
+          </a:prstGeom>
+        </p:spPr>
+        <p:style>
+          <a:lnRef idx="2">
+            <a:schemeClr val="accent1"/>
+          </a:lnRef>
+          <a:fillRef idx="1">
+            <a:schemeClr val="lt1"/>
+          </a:fillRef>
+          <a:effectRef idx="0">
+            <a:schemeClr val="accent1"/>
+          </a:effectRef>
+          <a:fontRef idx="minor">
+            <a:schemeClr val="dk1"/>
+          </a:fontRef>
+        </p:style>
+        <p:txBody>
+          <a:bodyPr wrap="none" rtlCol="0">
+            <a:spAutoFit/>
+          </a:bodyPr>
+          <a:lstStyle/>
+          <a:p>
+            <a:r>
+              <a:rPr lang="en-US" b="1" dirty="0">
+                <a:solidFill>
+                  <a:srgbClr val="0000FF"/>
+                </a:solidFill>
+                <a:latin typeface="Consolas" panose="020B0609020204030204" pitchFamily="49" charset="0"/>
+              </a:rPr>
+              <a:t>sum</a:t>
+            </a:r>
+            <a:r>
+              <a:rPr lang="en-US" dirty="0">
+                <a:latin typeface="Consolas" panose="020B0609020204030204" pitchFamily="49" charset="0"/>
+              </a:rPr>
+              <a:t> PROC    </a:t>
+            </a:r>
+          </a:p>
+          <a:p>
+            <a:r>
+              <a:rPr lang="en-US" dirty="0">
+                <a:latin typeface="Consolas" panose="020B0609020204030204" pitchFamily="49" charset="0"/>
+              </a:rPr>
+              <a:t>  ADD r0, r0, r1   </a:t>
+            </a:r>
+            <a:r>
+              <a:rPr lang="en-US" dirty="0">
+                <a:solidFill>
+                  <a:schemeClr val="bg1">
+                    <a:lumMod val="50000"/>
+                  </a:schemeClr>
+                </a:solidFill>
+                <a:latin typeface="Consolas" panose="020B0609020204030204" pitchFamily="49" charset="0"/>
+              </a:rPr>
+              <a:t>; a8 + b8</a:t>
+            </a:r>
+          </a:p>
+          <a:p>
+            <a:r>
+              <a:rPr lang="en-US" dirty="0">
+                <a:latin typeface="Consolas" panose="020B0609020204030204" pitchFamily="49" charset="0"/>
+              </a:rPr>
+              <a:t>  ADD r0, r0, r2   </a:t>
+            </a:r>
+            <a:r>
+              <a:rPr lang="en-US" dirty="0">
+                <a:solidFill>
+                  <a:schemeClr val="bg1">
+                    <a:lumMod val="50000"/>
+                  </a:schemeClr>
+                </a:solidFill>
+                <a:latin typeface="Consolas" panose="020B0609020204030204" pitchFamily="49" charset="0"/>
+              </a:rPr>
+              <a:t>; add c16</a:t>
+            </a:r>
+          </a:p>
+          <a:p>
+            <a:r>
+              <a:rPr lang="en-US" dirty="0">
+                <a:latin typeface="Consolas" panose="020B0609020204030204" pitchFamily="49" charset="0"/>
+              </a:rPr>
+              <a:t>  ADD r0, r0, r3   </a:t>
+            </a:r>
+            <a:r>
+              <a:rPr lang="en-US" dirty="0">
+                <a:solidFill>
+                  <a:schemeClr val="bg1">
+                    <a:lumMod val="50000"/>
+                  </a:schemeClr>
+                </a:solidFill>
+                <a:latin typeface="Consolas" panose="020B0609020204030204" pitchFamily="49" charset="0"/>
+              </a:rPr>
+              <a:t>; add d16</a:t>
+            </a:r>
+          </a:p>
+          <a:p>
+            <a:r>
+              <a:rPr lang="en-US" dirty="0">
+                <a:solidFill>
+                  <a:schemeClr val="tx1"/>
+                </a:solidFill>
+                <a:latin typeface="Consolas" panose="020B0609020204030204" pitchFamily="49" charset="0"/>
+              </a:rPr>
+              <a:t>  ADD r0, r0, r1   </a:t>
+            </a:r>
+            <a:r>
+              <a:rPr lang="en-US" dirty="0">
+                <a:solidFill>
+                  <a:schemeClr val="bg1">
+                    <a:lumMod val="50000"/>
+                  </a:schemeClr>
+                </a:solidFill>
+                <a:latin typeface="Consolas" panose="020B0609020204030204" pitchFamily="49" charset="0"/>
+              </a:rPr>
+              <a:t>; add e32</a:t>
+            </a:r>
+          </a:p>
+          <a:p>
+            <a:r>
+              <a:rPr lang="en-US" dirty="0">
+                <a:latin typeface="Consolas" panose="020B0609020204030204" pitchFamily="49" charset="0"/>
+              </a:rPr>
+              <a:t>  BX  LR</a:t>
+            </a:r>
+          </a:p>
+          <a:p>
+            <a:r>
+              <a:rPr lang="en-US" dirty="0">
+                <a:latin typeface="Consolas" panose="020B0609020204030204" pitchFamily="49" charset="0"/>
+              </a:rPr>
+              <a:t>  ENDP</a:t>
+            </a:r>
+          </a:p>
+        </p:txBody>
+      </p:sp>
+    </p:spTree>
+    <p:extLst>
+      <p:ext uri="{BB962C8B-B14F-4D97-AF65-F5344CB8AC3E}">
+        <p14:creationId xmlns:p14="http://schemas.microsoft.com/office/powerpoint/2010/main" val="3970213323"/>
+      </p:ext>
+    </p:extLst>
+  </p:cSld>
+  <p:clrMapOvr>
+    <a:masterClrMapping/>
+  </p:clrMapOvr>
+</p:sld>
+</file>
+
+<file path=ppt/slides/slide16.xml><?xml version="1.0" encoding="utf-8"?>
+<p:sld xmlns:a="http://schemas.openxmlformats.org/drawingml/2006/main" xmlns:r="http://schemas.openxmlformats.org/officeDocument/2006/relationships" xmlns:p="http://schemas.openxmlformats.org/presentationml/2006/main">
+  <p:cSld>
+    <p:spTree>
+      <p:nvGrpSpPr>
+        <p:cNvPr id="1" name=""/>
+        <p:cNvGrpSpPr/>
+        <p:nvPr/>
+      </p:nvGrpSpPr>
+      <p:grpSpPr>
+        <a:xfrm>
+          <a:off x="0" y="0"/>
+          <a:ext cx="0" cy="0"/>
+          <a:chOff x="0" y="0"/>
+          <a:chExt cx="0" cy="0"/>
+        </a:xfrm>
+      </p:grpSpPr>
+      <p:sp>
+        <p:nvSpPr>
+          <p:cNvPr id="2" name="Title 1"/>
+          <p:cNvSpPr>
+            <a:spLocks noGrp="1"/>
+          </p:cNvSpPr>
+          <p:nvPr>
+            <p:ph type="title"/>
+          </p:nvPr>
+        </p:nvSpPr>
+        <p:spPr/>
+        <p:txBody>
+          <a:bodyPr>
+            <a:normAutofit fontScale="90000"/>
+          </a:bodyPr>
+          <a:lstStyle/>
+          <a:p>
+            <a:r>
+              <a:rPr lang="en-US" dirty="0"/>
+              <a:t>What’s wrong? Passing arguments and Returning Value ANS</a:t>
+            </a:r>
+          </a:p>
+        </p:txBody>
+      </p:sp>
+      <p:sp>
+        <p:nvSpPr>
+          <p:cNvPr id="3" name="Slide Number Placeholder 2"/>
+          <p:cNvSpPr>
+            <a:spLocks noGrp="1"/>
+          </p:cNvSpPr>
+          <p:nvPr>
+            <p:ph type="sldNum" sz="quarter" idx="12"/>
+          </p:nvPr>
+        </p:nvSpPr>
+        <p:spPr/>
+        <p:txBody>
+          <a:bodyPr/>
+          <a:lstStyle/>
+          <a:p>
+            <a:fld id="{EA7C8D44-3667-46F6-9772-CC52308E2A7F}" type="slidenum">
+              <a:rPr kumimoji="0" lang="en-US" smtClean="0"/>
+              <a:pPr/>
+              <a:t>16</a:t>
+            </a:fld>
+            <a:endParaRPr kumimoji="0" lang="en-US" dirty="0"/>
+          </a:p>
+        </p:txBody>
+      </p:sp>
+      <p:sp>
+        <p:nvSpPr>
+          <p:cNvPr id="11" name="Rectangle 10"/>
+          <p:cNvSpPr/>
+          <p:nvPr/>
+        </p:nvSpPr>
+        <p:spPr>
+          <a:xfrm>
+            <a:off x="76200" y="1593468"/>
+            <a:ext cx="9163050" cy="646331"/>
+          </a:xfrm>
+          <a:prstGeom prst="rect">
+            <a:avLst/>
+          </a:prstGeom>
+        </p:spPr>
+        <p:txBody>
+          <a:bodyPr wrap="square">
+            <a:spAutoFit/>
+          </a:bodyPr>
+          <a:lstStyle/>
+          <a:p>
+            <a:r>
+              <a:rPr lang="en-US" b="1" dirty="0">
+                <a:latin typeface="Consolas" panose="020B0609020204030204" pitchFamily="49" charset="0"/>
+              </a:rPr>
+              <a:t>uint32_t sum(uint8_t a8, uint8_t b8, uint16_t c16, uint16_t d16, </a:t>
+            </a:r>
+            <a:r>
+              <a:rPr lang="en-US" b="1" dirty="0">
+                <a:solidFill>
+                  <a:srgbClr val="FF0000"/>
+                </a:solidFill>
+                <a:latin typeface="Consolas" panose="020B0609020204030204" pitchFamily="49" charset="0"/>
+              </a:rPr>
+              <a:t>uint32_t e32</a:t>
+            </a:r>
+            <a:r>
+              <a:rPr lang="en-US" b="1" dirty="0">
+                <a:latin typeface="Consolas" panose="020B0609020204030204" pitchFamily="49" charset="0"/>
+              </a:rPr>
+              <a:t>);</a:t>
+            </a:r>
+          </a:p>
+        </p:txBody>
+      </p:sp>
+      <p:sp>
+        <p:nvSpPr>
+          <p:cNvPr id="4" name="TextBox 3"/>
+          <p:cNvSpPr txBox="1"/>
+          <p:nvPr/>
+        </p:nvSpPr>
+        <p:spPr>
+          <a:xfrm>
+            <a:off x="304800" y="2754035"/>
+            <a:ext cx="750526" cy="369332"/>
+          </a:xfrm>
+          <a:prstGeom prst="rect">
+            <a:avLst/>
+          </a:prstGeom>
+          <a:noFill/>
+        </p:spPr>
+        <p:txBody>
+          <a:bodyPr wrap="none" rtlCol="0">
+            <a:spAutoFit/>
+          </a:bodyPr>
+          <a:lstStyle/>
+          <a:p>
+            <a:r>
+              <a:rPr lang="en-US" dirty="0"/>
+              <a:t>Caller</a:t>
+            </a:r>
+          </a:p>
+        </p:txBody>
+      </p:sp>
+      <p:sp>
+        <p:nvSpPr>
+          <p:cNvPr id="23" name="Rectangle 22"/>
+          <p:cNvSpPr/>
+          <p:nvPr/>
+        </p:nvSpPr>
+        <p:spPr>
+          <a:xfrm>
+            <a:off x="33528" y="2251948"/>
+            <a:ext cx="9163050" cy="369332"/>
+          </a:xfrm>
+          <a:prstGeom prst="rect">
+            <a:avLst/>
+          </a:prstGeom>
+        </p:spPr>
+        <p:txBody>
+          <a:bodyPr wrap="square">
+            <a:spAutoFit/>
+          </a:bodyPr>
+          <a:lstStyle/>
+          <a:p>
+            <a:r>
+              <a:rPr lang="en-US" b="1" dirty="0">
+                <a:solidFill>
+                  <a:srgbClr val="FF0000"/>
+                </a:solidFill>
+                <a:latin typeface="Consolas" panose="020B0609020204030204" pitchFamily="49" charset="0"/>
+              </a:rPr>
+              <a:t>s = sum(1, 2, 3, 4, 5);</a:t>
+            </a:r>
+          </a:p>
+        </p:txBody>
+      </p:sp>
+      <p:sp>
+        <p:nvSpPr>
+          <p:cNvPr id="15" name="TextBox 14"/>
+          <p:cNvSpPr txBox="1"/>
+          <p:nvPr/>
+        </p:nvSpPr>
+        <p:spPr>
+          <a:xfrm>
+            <a:off x="449580" y="3256122"/>
+            <a:ext cx="2464136" cy="2585323"/>
+          </a:xfrm>
+          <a:prstGeom prst="rect">
+            <a:avLst/>
+          </a:prstGeom>
+        </p:spPr>
+        <p:style>
+          <a:lnRef idx="2">
+            <a:schemeClr val="accent1"/>
+          </a:lnRef>
+          <a:fillRef idx="1">
+            <a:schemeClr val="lt1"/>
+          </a:fillRef>
+          <a:effectRef idx="0">
+            <a:schemeClr val="accent1"/>
+          </a:effectRef>
+          <a:fontRef idx="minor">
+            <a:schemeClr val="dk1"/>
+          </a:fontRef>
+        </p:style>
+        <p:txBody>
+          <a:bodyPr wrap="none" rtlCol="0">
+            <a:spAutoFit/>
+          </a:bodyPr>
+          <a:lstStyle/>
+          <a:p>
+            <a:r>
+              <a:rPr lang="en-US" dirty="0">
+                <a:latin typeface="Consolas" panose="020B0609020204030204" pitchFamily="49" charset="0"/>
+              </a:rPr>
+              <a:t>  MOV r0, #5 </a:t>
+            </a:r>
+            <a:r>
+              <a:rPr lang="en-US" dirty="0">
+                <a:solidFill>
+                  <a:schemeClr val="bg1">
+                    <a:lumMod val="50000"/>
+                  </a:schemeClr>
+                </a:solidFill>
+                <a:latin typeface="Consolas" panose="020B0609020204030204" pitchFamily="49" charset="0"/>
+              </a:rPr>
+              <a:t>; e32</a:t>
+            </a:r>
+          </a:p>
+          <a:p>
+            <a:r>
+              <a:rPr lang="en-US" dirty="0">
+                <a:latin typeface="Consolas" panose="020B0609020204030204" pitchFamily="49" charset="0"/>
+              </a:rPr>
+              <a:t>  </a:t>
+            </a:r>
+            <a:r>
+              <a:rPr lang="en-US" b="1" dirty="0">
+                <a:solidFill>
+                  <a:srgbClr val="FF0000"/>
+                </a:solidFill>
+                <a:latin typeface="Consolas" panose="020B0609020204030204" pitchFamily="49" charset="0"/>
+              </a:rPr>
+              <a:t>PUSH {r0}</a:t>
+            </a:r>
+          </a:p>
+          <a:p>
+            <a:r>
+              <a:rPr lang="en-US" dirty="0">
+                <a:solidFill>
+                  <a:schemeClr val="tx1"/>
+                </a:solidFill>
+                <a:latin typeface="Consolas" panose="020B0609020204030204" pitchFamily="49" charset="0"/>
+              </a:rPr>
+              <a:t>  MOV r0, #1 </a:t>
+            </a:r>
+            <a:r>
+              <a:rPr lang="en-US" dirty="0">
+                <a:solidFill>
+                  <a:schemeClr val="bg1">
+                    <a:lumMod val="50000"/>
+                  </a:schemeClr>
+                </a:solidFill>
+                <a:latin typeface="Consolas" panose="020B0609020204030204" pitchFamily="49" charset="0"/>
+              </a:rPr>
+              <a:t>; a8</a:t>
+            </a:r>
+          </a:p>
+          <a:p>
+            <a:r>
+              <a:rPr lang="en-US" dirty="0">
+                <a:latin typeface="Consolas" panose="020B0609020204030204" pitchFamily="49" charset="0"/>
+              </a:rPr>
+              <a:t>  MOV r1, #2 </a:t>
+            </a:r>
+            <a:r>
+              <a:rPr lang="en-US" dirty="0">
+                <a:solidFill>
+                  <a:schemeClr val="bg1">
+                    <a:lumMod val="50000"/>
+                  </a:schemeClr>
+                </a:solidFill>
+                <a:latin typeface="Consolas" panose="020B0609020204030204" pitchFamily="49" charset="0"/>
+              </a:rPr>
+              <a:t>; b8</a:t>
+            </a:r>
+          </a:p>
+          <a:p>
+            <a:r>
+              <a:rPr lang="en-US" dirty="0">
+                <a:latin typeface="Consolas" panose="020B0609020204030204" pitchFamily="49" charset="0"/>
+              </a:rPr>
+              <a:t>  MOV r2, #3 </a:t>
+            </a:r>
+            <a:r>
+              <a:rPr lang="en-US" dirty="0">
+                <a:solidFill>
+                  <a:schemeClr val="bg1">
+                    <a:lumMod val="50000"/>
+                  </a:schemeClr>
+                </a:solidFill>
+                <a:latin typeface="Consolas" panose="020B0609020204030204" pitchFamily="49" charset="0"/>
+              </a:rPr>
+              <a:t>; c16</a:t>
+            </a:r>
+          </a:p>
+          <a:p>
+            <a:r>
+              <a:rPr lang="en-US" dirty="0">
+                <a:latin typeface="Consolas" panose="020B0609020204030204" pitchFamily="49" charset="0"/>
+              </a:rPr>
+              <a:t>  MOV r3, #4 </a:t>
+            </a:r>
+            <a:r>
+              <a:rPr lang="en-US" dirty="0">
+                <a:solidFill>
+                  <a:schemeClr val="bg1">
+                    <a:lumMod val="50000"/>
+                  </a:schemeClr>
+                </a:solidFill>
+                <a:latin typeface="Consolas" panose="020B0609020204030204" pitchFamily="49" charset="0"/>
+              </a:rPr>
+              <a:t>; d16</a:t>
+            </a:r>
+          </a:p>
+          <a:p>
+            <a:r>
+              <a:rPr lang="en-US" dirty="0">
+                <a:latin typeface="Consolas" panose="020B0609020204030204" pitchFamily="49" charset="0"/>
+              </a:rPr>
+              <a:t>  BL  sum</a:t>
+            </a:r>
+          </a:p>
+          <a:p>
+            <a:r>
+              <a:rPr lang="en-US" dirty="0">
+                <a:latin typeface="Consolas" panose="020B0609020204030204" pitchFamily="49" charset="0"/>
+              </a:rPr>
+              <a:t>  ...</a:t>
+            </a:r>
+          </a:p>
+          <a:p>
+            <a:r>
+              <a:rPr lang="en-US" dirty="0">
+                <a:latin typeface="Consolas" panose="020B0609020204030204" pitchFamily="49" charset="0"/>
+              </a:rPr>
+              <a:t>  </a:t>
+            </a:r>
+            <a:r>
+              <a:rPr lang="en-US" b="1" dirty="0">
+                <a:solidFill>
+                  <a:srgbClr val="FF0000"/>
+                </a:solidFill>
+                <a:latin typeface="Consolas" panose="020B0609020204030204" pitchFamily="49" charset="0"/>
+              </a:rPr>
+              <a:t>POP {r0}</a:t>
+            </a:r>
+          </a:p>
+        </p:txBody>
+      </p:sp>
+      <p:sp>
+        <p:nvSpPr>
+          <p:cNvPr id="27" name="TextBox 26"/>
+          <p:cNvSpPr txBox="1"/>
+          <p:nvPr/>
+        </p:nvSpPr>
+        <p:spPr>
+          <a:xfrm>
+            <a:off x="3581400" y="2840938"/>
+            <a:ext cx="769763" cy="369332"/>
+          </a:xfrm>
+          <a:prstGeom prst="rect">
+            <a:avLst/>
+          </a:prstGeom>
+          <a:noFill/>
+        </p:spPr>
+        <p:txBody>
+          <a:bodyPr wrap="none" rtlCol="0">
+            <a:spAutoFit/>
+          </a:bodyPr>
+          <a:lstStyle/>
+          <a:p>
+            <a:r>
+              <a:rPr lang="en-US" dirty="0" err="1"/>
+              <a:t>Callee</a:t>
+            </a:r>
+            <a:endParaRPr lang="en-US" dirty="0"/>
+          </a:p>
+        </p:txBody>
+      </p:sp>
+      <p:sp>
+        <p:nvSpPr>
+          <p:cNvPr id="28" name="TextBox 27"/>
+          <p:cNvSpPr txBox="1"/>
+          <p:nvPr/>
+        </p:nvSpPr>
+        <p:spPr>
+          <a:xfrm>
+            <a:off x="3607914" y="3305718"/>
+            <a:ext cx="4996881" cy="2308324"/>
+          </a:xfrm>
+          <a:prstGeom prst="rect">
+            <a:avLst/>
+          </a:prstGeom>
+        </p:spPr>
+        <p:style>
+          <a:lnRef idx="2">
+            <a:schemeClr val="accent1"/>
+          </a:lnRef>
+          <a:fillRef idx="1">
+            <a:schemeClr val="lt1"/>
+          </a:fillRef>
+          <a:effectRef idx="0">
+            <a:schemeClr val="accent1"/>
+          </a:effectRef>
+          <a:fontRef idx="minor">
+            <a:schemeClr val="dk1"/>
+          </a:fontRef>
+        </p:style>
+        <p:txBody>
+          <a:bodyPr wrap="none" rtlCol="0">
+            <a:spAutoFit/>
+          </a:bodyPr>
+          <a:lstStyle/>
+          <a:p>
+            <a:r>
+              <a:rPr lang="en-US" b="1" dirty="0">
+                <a:solidFill>
+                  <a:srgbClr val="0000FF"/>
+                </a:solidFill>
+                <a:latin typeface="Consolas" panose="020B0609020204030204" pitchFamily="49" charset="0"/>
+              </a:rPr>
+              <a:t>sum</a:t>
+            </a:r>
+            <a:r>
+              <a:rPr lang="en-US" dirty="0">
+                <a:latin typeface="Consolas" panose="020B0609020204030204" pitchFamily="49" charset="0"/>
+              </a:rPr>
+              <a:t> PROC    </a:t>
+            </a:r>
+          </a:p>
+          <a:p>
+            <a:r>
+              <a:rPr lang="en-US" dirty="0">
+                <a:latin typeface="Consolas" panose="020B0609020204030204" pitchFamily="49" charset="0"/>
+              </a:rPr>
+              <a:t>  ADD r0, r0, r1   </a:t>
+            </a:r>
+            <a:r>
+              <a:rPr lang="en-US" dirty="0">
+                <a:solidFill>
+                  <a:schemeClr val="bg1">
+                    <a:lumMod val="50000"/>
+                  </a:schemeClr>
+                </a:solidFill>
+                <a:latin typeface="Consolas" panose="020B0609020204030204" pitchFamily="49" charset="0"/>
+              </a:rPr>
+              <a:t>; a8 + b8</a:t>
+            </a:r>
+          </a:p>
+          <a:p>
+            <a:r>
+              <a:rPr lang="en-US" dirty="0">
+                <a:latin typeface="Consolas" panose="020B0609020204030204" pitchFamily="49" charset="0"/>
+              </a:rPr>
+              <a:t>  ADD r0, r0, r2   </a:t>
+            </a:r>
+            <a:r>
+              <a:rPr lang="en-US" dirty="0">
+                <a:solidFill>
+                  <a:schemeClr val="bg1">
+                    <a:lumMod val="50000"/>
+                  </a:schemeClr>
+                </a:solidFill>
+                <a:latin typeface="Consolas" panose="020B0609020204030204" pitchFamily="49" charset="0"/>
+              </a:rPr>
+              <a:t>; add c16</a:t>
+            </a:r>
+          </a:p>
+          <a:p>
+            <a:r>
+              <a:rPr lang="en-US" dirty="0">
+                <a:latin typeface="Consolas" panose="020B0609020204030204" pitchFamily="49" charset="0"/>
+              </a:rPr>
+              <a:t>  ADD r0, r0, r3   </a:t>
+            </a:r>
+            <a:r>
+              <a:rPr lang="en-US" dirty="0">
+                <a:solidFill>
+                  <a:schemeClr val="bg1">
+                    <a:lumMod val="50000"/>
+                  </a:schemeClr>
+                </a:solidFill>
+                <a:latin typeface="Consolas" panose="020B0609020204030204" pitchFamily="49" charset="0"/>
+              </a:rPr>
+              <a:t>; add d16</a:t>
+            </a:r>
+          </a:p>
+          <a:p>
+            <a:r>
+              <a:rPr lang="en-US" b="1" dirty="0">
+                <a:solidFill>
+                  <a:srgbClr val="FF0000"/>
+                </a:solidFill>
+                <a:latin typeface="Consolas" panose="020B0609020204030204" pitchFamily="49" charset="0"/>
+              </a:rPr>
+              <a:t>  LDR r1, [</a:t>
+            </a:r>
+            <a:r>
+              <a:rPr lang="en-US" b="1" dirty="0" err="1">
+                <a:solidFill>
+                  <a:srgbClr val="FF0000"/>
+                </a:solidFill>
+                <a:latin typeface="Consolas" panose="020B0609020204030204" pitchFamily="49" charset="0"/>
+              </a:rPr>
+              <a:t>sp</a:t>
+            </a:r>
+            <a:r>
+              <a:rPr lang="en-US" b="1" dirty="0">
+                <a:solidFill>
+                  <a:srgbClr val="FF0000"/>
+                </a:solidFill>
+                <a:latin typeface="Consolas" panose="020B0609020204030204" pitchFamily="49" charset="0"/>
+              </a:rPr>
+              <a:t>, #0] </a:t>
+            </a:r>
+            <a:r>
+              <a:rPr lang="en-US" b="1" dirty="0">
+                <a:solidFill>
+                  <a:schemeClr val="bg1">
+                    <a:lumMod val="50000"/>
+                  </a:schemeClr>
+                </a:solidFill>
+                <a:latin typeface="Consolas" panose="020B0609020204030204" pitchFamily="49" charset="0"/>
+              </a:rPr>
+              <a:t>; read argument e32</a:t>
+            </a:r>
+          </a:p>
+          <a:p>
+            <a:r>
+              <a:rPr lang="en-US" dirty="0">
+                <a:solidFill>
+                  <a:schemeClr val="bg1">
+                    <a:lumMod val="50000"/>
+                  </a:schemeClr>
+                </a:solidFill>
+                <a:latin typeface="Consolas" panose="020B0609020204030204" pitchFamily="49" charset="0"/>
+              </a:rPr>
+              <a:t>  </a:t>
+            </a:r>
+            <a:r>
+              <a:rPr lang="en-US" dirty="0">
+                <a:solidFill>
+                  <a:schemeClr val="tx1"/>
+                </a:solidFill>
+                <a:latin typeface="Consolas" panose="020B0609020204030204" pitchFamily="49" charset="0"/>
+              </a:rPr>
+              <a:t>ADD r0, r0, r1   </a:t>
+            </a:r>
+            <a:r>
+              <a:rPr lang="en-US" dirty="0">
+                <a:solidFill>
+                  <a:schemeClr val="bg1">
+                    <a:lumMod val="50000"/>
+                  </a:schemeClr>
+                </a:solidFill>
+                <a:latin typeface="Consolas" panose="020B0609020204030204" pitchFamily="49" charset="0"/>
+              </a:rPr>
+              <a:t>; add e32</a:t>
+            </a:r>
+          </a:p>
+          <a:p>
+            <a:r>
+              <a:rPr lang="en-US" dirty="0">
+                <a:latin typeface="Consolas" panose="020B0609020204030204" pitchFamily="49" charset="0"/>
+              </a:rPr>
+              <a:t>  BX  LR</a:t>
+            </a:r>
+          </a:p>
+          <a:p>
+            <a:r>
+              <a:rPr lang="en-US" dirty="0">
+                <a:latin typeface="Consolas" panose="020B0609020204030204" pitchFamily="49" charset="0"/>
+              </a:rPr>
+              <a:t>  ENDP</a:t>
+            </a:r>
+          </a:p>
+        </p:txBody>
+      </p:sp>
+      <p:sp>
+        <p:nvSpPr>
+          <p:cNvPr id="6" name="Rectangle 5"/>
+          <p:cNvSpPr/>
+          <p:nvPr/>
+        </p:nvSpPr>
+        <p:spPr>
+          <a:xfrm>
+            <a:off x="914400" y="5854799"/>
+            <a:ext cx="4861560" cy="646331"/>
+          </a:xfrm>
+          <a:prstGeom prst="rect">
+            <a:avLst/>
+          </a:prstGeom>
+        </p:spPr>
+        <p:txBody>
+          <a:bodyPr wrap="square">
+            <a:spAutoFit/>
+          </a:bodyPr>
+          <a:lstStyle/>
+          <a:p>
+            <a:r>
+              <a:rPr lang="en-US" dirty="0"/>
+              <a:t>The caller is responsible to pop extra arguments out of the stack after the subroutine returns.</a:t>
+            </a:r>
+          </a:p>
+        </p:txBody>
+      </p:sp>
+    </p:spTree>
+    <p:extLst>
+      <p:ext uri="{BB962C8B-B14F-4D97-AF65-F5344CB8AC3E}">
+        <p14:creationId xmlns:p14="http://schemas.microsoft.com/office/powerpoint/2010/main" val="2345755417"/>
+      </p:ext>
+    </p:extLst>
+  </p:cSld>
+  <p:clrMapOvr>
+    <a:masterClrMapping/>
+  </p:clrMapOvr>
+</p:sld>
+</file>
+
+<file path=ppt/slides/slide17.xml><?xml version="1.0" encoding="utf-8"?>
+<p:sld xmlns:a="http://schemas.openxmlformats.org/drawingml/2006/main" xmlns:r="http://schemas.openxmlformats.org/officeDocument/2006/relationships" xmlns:p="http://schemas.openxmlformats.org/presentationml/2006/main">
+  <p:cSld>
+    <p:spTree>
+      <p:nvGrpSpPr>
+        <p:cNvPr id="1" name=""/>
+        <p:cNvGrpSpPr/>
+        <p:nvPr/>
+      </p:nvGrpSpPr>
+      <p:grpSpPr>
+        <a:xfrm>
+          <a:off x="0" y="0"/>
+          <a:ext cx="0" cy="0"/>
+          <a:chOff x="0" y="0"/>
+          <a:chExt cx="0" cy="0"/>
+        </a:xfrm>
+      </p:grpSpPr>
+      <p:sp>
+        <p:nvSpPr>
+          <p:cNvPr id="2" name="Title 1"/>
+          <p:cNvSpPr>
+            <a:spLocks noGrp="1"/>
+          </p:cNvSpPr>
+          <p:nvPr>
+            <p:ph type="title"/>
+          </p:nvPr>
+        </p:nvSpPr>
+        <p:spPr/>
+        <p:txBody>
+          <a:bodyPr>
+            <a:normAutofit fontScale="90000"/>
+          </a:bodyPr>
+          <a:lstStyle/>
+          <a:p>
+            <a:r>
+              <a:rPr lang="en-US" dirty="0"/>
+              <a:t>Passing arguments and Returning Value</a:t>
+            </a:r>
+          </a:p>
+        </p:txBody>
+      </p:sp>
+      <p:sp>
+        <p:nvSpPr>
+          <p:cNvPr id="3" name="Slide Number Placeholder 2"/>
+          <p:cNvSpPr>
+            <a:spLocks noGrp="1"/>
+          </p:cNvSpPr>
+          <p:nvPr>
+            <p:ph type="sldNum" sz="quarter" idx="12"/>
+          </p:nvPr>
+        </p:nvSpPr>
+        <p:spPr/>
+        <p:txBody>
+          <a:bodyPr/>
+          <a:lstStyle/>
+          <a:p>
+            <a:fld id="{EA7C8D44-3667-46F6-9772-CC52308E2A7F}" type="slidenum">
+              <a:rPr kumimoji="0" lang="en-US" smtClean="0"/>
+              <a:pPr/>
+              <a:t>17</a:t>
             </a:fld>
             <a:endParaRPr kumimoji="0" lang="en-US" dirty="0"/>
           </a:p>
@@ -8848,7 +13149,7 @@
 </p:sld>
 </file>
 
-<file path=ppt/slides/slide12.xml><?xml version="1.0" encoding="utf-8"?>
+<file path=ppt/slides/slide18.xml><?xml version="1.0" encoding="utf-8"?>
 <p:sld xmlns:a="http://schemas.openxmlformats.org/drawingml/2006/main" xmlns:r="http://schemas.openxmlformats.org/officeDocument/2006/relationships" xmlns:p="http://schemas.openxmlformats.org/presentationml/2006/main">
   <p:cSld>
     <p:spTree>
@@ -8925,7 +13226,7 @@
             <a:fld id="{EA7C8D44-3667-46F6-9772-CC52308E2A7F}" type="slidenum">
               <a:rPr kumimoji="0" lang="en-US" smtClean="0"/>
               <a:pPr/>
-              <a:t>12</a:t>
+              <a:t>18</a:t>
             </a:fld>
             <a:endParaRPr kumimoji="0" lang="en-US" dirty="0"/>
           </a:p>
@@ -9804,7 +14105,7 @@
 </p:sld>
 </file>
 
-<file path=ppt/slides/slide13.xml><?xml version="1.0" encoding="utf-8"?>
+<file path=ppt/slides/slide19.xml><?xml version="1.0" encoding="utf-8"?>
 <p:sld xmlns:a="http://schemas.openxmlformats.org/drawingml/2006/main" xmlns:r="http://schemas.openxmlformats.org/officeDocument/2006/relationships" xmlns:p="http://schemas.openxmlformats.org/presentationml/2006/main">
   <p:cSld>
     <p:spTree>
@@ -9878,7 +14179,7 @@
             <a:fld id="{EA7C8D44-3667-46F6-9772-CC52308E2A7F}" type="slidenum">
               <a:rPr kumimoji="0" lang="en-US" smtClean="0"/>
               <a:pPr/>
-              <a:t>13</a:t>
+              <a:t>19</a:t>
             </a:fld>
             <a:endParaRPr kumimoji="0" lang="en-US" dirty="0"/>
           </a:p>
@@ -10472,7 +14773,761 @@
 </p:sld>
 </file>
 
-<file path=ppt/slides/slide14.xml><?xml version="1.0" encoding="utf-8"?>
+<file path=ppt/slides/slide2.xml><?xml version="1.0" encoding="utf-8"?>
+<p:sld xmlns:a="http://schemas.openxmlformats.org/drawingml/2006/main" xmlns:r="http://schemas.openxmlformats.org/officeDocument/2006/relationships" xmlns:p="http://schemas.openxmlformats.org/presentationml/2006/main">
+  <p:cSld>
+    <p:spTree>
+      <p:nvGrpSpPr>
+        <p:cNvPr id="1" name=""/>
+        <p:cNvGrpSpPr/>
+        <p:nvPr/>
+      </p:nvGrpSpPr>
+      <p:grpSpPr>
+        <a:xfrm>
+          <a:off x="0" y="0"/>
+          <a:ext cx="0" cy="0"/>
+          <a:chOff x="0" y="0"/>
+          <a:chExt cx="0" cy="0"/>
+        </a:xfrm>
+      </p:grpSpPr>
+      <p:sp>
+        <p:nvSpPr>
+          <p:cNvPr id="2" name="Title 1"/>
+          <p:cNvSpPr>
+            <a:spLocks noGrp="1"/>
+          </p:cNvSpPr>
+          <p:nvPr>
+            <p:ph type="title"/>
+          </p:nvPr>
+        </p:nvSpPr>
+        <p:spPr/>
+        <p:txBody>
+          <a:bodyPr/>
+          <a:lstStyle/>
+          <a:p>
+            <a:r>
+              <a:rPr lang="en-GB" dirty="0"/>
+              <a:t>Stack</a:t>
+            </a:r>
+          </a:p>
+        </p:txBody>
+      </p:sp>
+      <p:sp>
+        <p:nvSpPr>
+          <p:cNvPr id="3" name="Content Placeholder 2"/>
+          <p:cNvSpPr>
+            <a:spLocks noGrp="1"/>
+          </p:cNvSpPr>
+          <p:nvPr>
+            <p:ph idx="1"/>
+          </p:nvPr>
+        </p:nvSpPr>
+        <p:spPr>
+          <a:xfrm>
+            <a:off x="457200" y="1219200"/>
+            <a:ext cx="8229600" cy="3200400"/>
+          </a:xfrm>
+        </p:spPr>
+        <p:txBody>
+          <a:bodyPr/>
+          <a:lstStyle/>
+          <a:p>
+            <a:pPr>
+              <a:buNone/>
+            </a:pPr>
+            <a:r>
+              <a:rPr lang="en-GB" sz="2800" b="1" dirty="0">
+                <a:solidFill>
+                  <a:srgbClr val="FF0000"/>
+                </a:solidFill>
+                <a:latin typeface="Consolas" panose="020B0609020204030204" pitchFamily="49" charset="0"/>
+                <a:cs typeface="Consolas" panose="020B0609020204030204" pitchFamily="49" charset="0"/>
+              </a:rPr>
+              <a:t>PUSH</a:t>
+            </a:r>
+            <a:r>
+              <a:rPr lang="en-GB" sz="2800" dirty="0">
+                <a:solidFill>
+                  <a:srgbClr val="FF0000"/>
+                </a:solidFill>
+                <a:latin typeface="Consolas" panose="020B0609020204030204" pitchFamily="49" charset="0"/>
+                <a:cs typeface="Consolas" panose="020B0609020204030204" pitchFamily="49" charset="0"/>
+              </a:rPr>
+              <a:t> </a:t>
+            </a:r>
+            <a:r>
+              <a:rPr lang="en-GB" sz="2800" dirty="0">
+                <a:latin typeface="Consolas" panose="020B0609020204030204" pitchFamily="49" charset="0"/>
+                <a:cs typeface="Consolas" panose="020B0609020204030204" pitchFamily="49" charset="0"/>
+              </a:rPr>
+              <a:t>{</a:t>
+            </a:r>
+            <a:r>
+              <a:rPr lang="en-GB" sz="2800" i="1" dirty="0">
+                <a:latin typeface="Consolas" panose="020B0609020204030204" pitchFamily="49" charset="0"/>
+                <a:cs typeface="Consolas" panose="020B0609020204030204" pitchFamily="49" charset="0"/>
+              </a:rPr>
+              <a:t>Rd</a:t>
+            </a:r>
+            <a:r>
+              <a:rPr lang="en-GB" sz="2800" dirty="0">
+                <a:latin typeface="Consolas" panose="020B0609020204030204" pitchFamily="49" charset="0"/>
+                <a:cs typeface="Consolas" panose="020B0609020204030204" pitchFamily="49" charset="0"/>
+              </a:rPr>
+              <a:t>} </a:t>
+            </a:r>
+          </a:p>
+          <a:p>
+            <a:pPr lvl="1"/>
+            <a:r>
+              <a:rPr lang="en-GB" sz="2400" dirty="0" err="1">
+                <a:latin typeface="Consolas" panose="020B0609020204030204" pitchFamily="49" charset="0"/>
+                <a:cs typeface="Consolas" panose="020B0609020204030204" pitchFamily="49" charset="0"/>
+              </a:rPr>
+              <a:t>SP</a:t>
+            </a:r>
+            <a:r>
+              <a:rPr lang="en-GB" sz="2400" dirty="0">
+                <a:latin typeface="Consolas" panose="020B0609020204030204" pitchFamily="49" charset="0"/>
+                <a:cs typeface="Consolas" panose="020B0609020204030204" pitchFamily="49" charset="0"/>
+              </a:rPr>
+              <a:t> = </a:t>
+            </a:r>
+            <a:r>
+              <a:rPr lang="en-GB" sz="2400" dirty="0" err="1">
+                <a:latin typeface="Consolas" panose="020B0609020204030204" pitchFamily="49" charset="0"/>
+                <a:cs typeface="Consolas" panose="020B0609020204030204" pitchFamily="49" charset="0"/>
+              </a:rPr>
+              <a:t>SP</a:t>
+            </a:r>
+            <a:r>
+              <a:rPr lang="en-GB" sz="2400" dirty="0">
+                <a:latin typeface="Consolas" panose="020B0609020204030204" pitchFamily="49" charset="0"/>
+                <a:cs typeface="Consolas" panose="020B0609020204030204" pitchFamily="49" charset="0"/>
+              </a:rPr>
+              <a:t>-4   </a:t>
+            </a:r>
+            <a:r>
+              <a:rPr lang="en-GB" sz="2400" dirty="0">
+                <a:latin typeface="Cambria Math"/>
+                <a:ea typeface="Cambria Math"/>
+                <a:cs typeface="Consolas" panose="020B0609020204030204" pitchFamily="49" charset="0"/>
+              </a:rPr>
+              <a:t>⟶    descending stack</a:t>
+            </a:r>
+            <a:endParaRPr lang="en-GB" sz="2400" dirty="0">
+              <a:latin typeface="Consolas" panose="020B0609020204030204" pitchFamily="49" charset="0"/>
+              <a:cs typeface="Consolas" panose="020B0609020204030204" pitchFamily="49" charset="0"/>
+            </a:endParaRPr>
+          </a:p>
+          <a:p>
+            <a:pPr lvl="1"/>
+            <a:r>
+              <a:rPr lang="en-GB" sz="2400" dirty="0">
+                <a:latin typeface="Consolas" panose="020B0609020204030204" pitchFamily="49" charset="0"/>
+                <a:cs typeface="Consolas" panose="020B0609020204030204" pitchFamily="49" charset="0"/>
+              </a:rPr>
+              <a:t>(*SP) = </a:t>
+            </a:r>
+            <a:r>
+              <a:rPr lang="en-GB" sz="2400" i="1" dirty="0">
+                <a:latin typeface="Consolas" panose="020B0609020204030204" pitchFamily="49" charset="0"/>
+                <a:cs typeface="Consolas" panose="020B0609020204030204" pitchFamily="49" charset="0"/>
+              </a:rPr>
+              <a:t>Rd</a:t>
+            </a:r>
+            <a:r>
+              <a:rPr lang="en-GB" sz="2400" dirty="0">
+                <a:latin typeface="Cambria Math"/>
+                <a:ea typeface="Cambria Math"/>
+                <a:cs typeface="Consolas" panose="020B0609020204030204" pitchFamily="49" charset="0"/>
+              </a:rPr>
+              <a:t>     ⟶    full stack</a:t>
+            </a:r>
+          </a:p>
+          <a:p>
+            <a:pPr marL="0" indent="0">
+              <a:buNone/>
+            </a:pPr>
+            <a:endParaRPr lang="en-GB" sz="2700" i="1" dirty="0">
+              <a:latin typeface="Consolas" panose="020B0609020204030204" pitchFamily="49" charset="0"/>
+              <a:cs typeface="Consolas" panose="020B0609020204030204" pitchFamily="49" charset="0"/>
+            </a:endParaRPr>
+          </a:p>
+          <a:p>
+            <a:pPr marL="0" indent="0">
+              <a:buNone/>
+            </a:pPr>
+            <a:r>
+              <a:rPr lang="en-GB" sz="2700" dirty="0">
+                <a:cs typeface="Consolas" panose="020B0609020204030204" pitchFamily="49" charset="0"/>
+              </a:rPr>
+              <a:t>Push multiple registers</a:t>
+            </a:r>
+          </a:p>
+          <a:p>
+            <a:pPr marL="0" indent="0">
+              <a:buNone/>
+            </a:pPr>
+            <a:endParaRPr lang="en-GB" sz="2800" dirty="0"/>
+          </a:p>
+          <a:p>
+            <a:endParaRPr lang="en-GB" sz="2400" dirty="0"/>
+          </a:p>
+          <a:p>
+            <a:pPr>
+              <a:buNone/>
+            </a:pPr>
+            <a:endParaRPr lang="en-GB" dirty="0"/>
+          </a:p>
+        </p:txBody>
+      </p:sp>
+      <p:sp>
+        <p:nvSpPr>
+          <p:cNvPr id="4" name="Slide Number Placeholder 3"/>
+          <p:cNvSpPr>
+            <a:spLocks noGrp="1"/>
+          </p:cNvSpPr>
+          <p:nvPr>
+            <p:ph type="sldNum" sz="quarter" idx="12"/>
+          </p:nvPr>
+        </p:nvSpPr>
+        <p:spPr/>
+        <p:txBody>
+          <a:bodyPr/>
+          <a:lstStyle/>
+          <a:p>
+            <a:fld id="{EA7C8D44-3667-46F6-9772-CC52308E2A7F}" type="slidenum">
+              <a:rPr kumimoji="0" lang="en-US" smtClean="0"/>
+              <a:pPr/>
+              <a:t>2</a:t>
+            </a:fld>
+            <a:endParaRPr kumimoji="0" lang="en-US" dirty="0"/>
+          </a:p>
+        </p:txBody>
+      </p:sp>
+      <p:sp>
+        <p:nvSpPr>
+          <p:cNvPr id="5" name="Rectangle 4"/>
+          <p:cNvSpPr/>
+          <p:nvPr/>
+        </p:nvSpPr>
+        <p:spPr>
+          <a:xfrm>
+            <a:off x="410688" y="3848146"/>
+            <a:ext cx="2488850" cy="369332"/>
+          </a:xfrm>
+          <a:prstGeom prst="rect">
+            <a:avLst/>
+          </a:prstGeom>
+        </p:spPr>
+        <p:txBody>
+          <a:bodyPr wrap="square">
+            <a:spAutoFit/>
+          </a:bodyPr>
+          <a:lstStyle/>
+          <a:p>
+            <a:r>
+              <a:rPr lang="en-GB" b="1" dirty="0">
+                <a:solidFill>
+                  <a:srgbClr val="FF0000"/>
+                </a:solidFill>
+                <a:latin typeface="Consolas" panose="020B0609020204030204" pitchFamily="49" charset="0"/>
+                <a:cs typeface="Consolas" panose="020B0609020204030204" pitchFamily="49" charset="0"/>
+              </a:rPr>
+              <a:t>PUSH {r6, r7, </a:t>
+            </a:r>
+            <a:r>
+              <a:rPr lang="en-GB" b="1" dirty="0" err="1">
+                <a:solidFill>
+                  <a:srgbClr val="FF0000"/>
+                </a:solidFill>
+                <a:latin typeface="Consolas" panose="020B0609020204030204" pitchFamily="49" charset="0"/>
+                <a:cs typeface="Consolas" panose="020B0609020204030204" pitchFamily="49" charset="0"/>
+              </a:rPr>
+              <a:t>r8</a:t>
+            </a:r>
+            <a:r>
+              <a:rPr lang="en-GB" b="1" dirty="0">
+                <a:solidFill>
+                  <a:srgbClr val="FF0000"/>
+                </a:solidFill>
+                <a:latin typeface="Consolas" panose="020B0609020204030204" pitchFamily="49" charset="0"/>
+                <a:cs typeface="Consolas" panose="020B0609020204030204" pitchFamily="49" charset="0"/>
+              </a:rPr>
+              <a:t>}</a:t>
+            </a:r>
+          </a:p>
+        </p:txBody>
+      </p:sp>
+      <p:sp>
+        <p:nvSpPr>
+          <p:cNvPr id="6" name="TextBox 5"/>
+          <p:cNvSpPr txBox="1"/>
+          <p:nvPr/>
+        </p:nvSpPr>
+        <p:spPr>
+          <a:xfrm>
+            <a:off x="3611088" y="3465945"/>
+            <a:ext cx="1969129" cy="369332"/>
+          </a:xfrm>
+          <a:prstGeom prst="rect">
+            <a:avLst/>
+          </a:prstGeom>
+          <a:noFill/>
+        </p:spPr>
+        <p:txBody>
+          <a:bodyPr wrap="none" rtlCol="0">
+            <a:spAutoFit/>
+          </a:bodyPr>
+          <a:lstStyle/>
+          <a:p>
+            <a:r>
+              <a:rPr lang="en-US" i="1" dirty="0"/>
+              <a:t>They are equivalent. </a:t>
+            </a:r>
+          </a:p>
+        </p:txBody>
+      </p:sp>
+      <p:sp>
+        <p:nvSpPr>
+          <p:cNvPr id="8" name="Rectangle 7"/>
+          <p:cNvSpPr/>
+          <p:nvPr/>
+        </p:nvSpPr>
+        <p:spPr>
+          <a:xfrm>
+            <a:off x="7040088" y="3568140"/>
+            <a:ext cx="1324402" cy="923330"/>
+          </a:xfrm>
+          <a:prstGeom prst="rect">
+            <a:avLst/>
+          </a:prstGeom>
+        </p:spPr>
+        <p:txBody>
+          <a:bodyPr wrap="none">
+            <a:spAutoFit/>
+          </a:bodyPr>
+          <a:lstStyle/>
+          <a:p>
+            <a:r>
+              <a:rPr lang="en-GB" b="1" dirty="0">
+                <a:solidFill>
+                  <a:srgbClr val="FF0000"/>
+                </a:solidFill>
+                <a:latin typeface="Consolas" panose="020B0609020204030204" pitchFamily="49" charset="0"/>
+                <a:cs typeface="Consolas" panose="020B0609020204030204" pitchFamily="49" charset="0"/>
+              </a:rPr>
+              <a:t>PUSH {r8}</a:t>
+            </a:r>
+          </a:p>
+          <a:p>
+            <a:r>
+              <a:rPr lang="en-GB" b="1" dirty="0">
+                <a:solidFill>
+                  <a:srgbClr val="FF0000"/>
+                </a:solidFill>
+                <a:latin typeface="Consolas" panose="020B0609020204030204" pitchFamily="49" charset="0"/>
+                <a:cs typeface="Consolas" panose="020B0609020204030204" pitchFamily="49" charset="0"/>
+              </a:rPr>
+              <a:t>PUSH {r7}</a:t>
+            </a:r>
+          </a:p>
+          <a:p>
+            <a:r>
+              <a:rPr lang="en-GB" b="1" dirty="0">
+                <a:solidFill>
+                  <a:srgbClr val="FF0000"/>
+                </a:solidFill>
+                <a:latin typeface="Consolas" panose="020B0609020204030204" pitchFamily="49" charset="0"/>
+                <a:cs typeface="Consolas" panose="020B0609020204030204" pitchFamily="49" charset="0"/>
+              </a:rPr>
+              <a:t>PUSH {r6}</a:t>
+            </a:r>
+          </a:p>
+        </p:txBody>
+      </p:sp>
+      <p:sp>
+        <p:nvSpPr>
+          <p:cNvPr id="10" name="Rectangle 9"/>
+          <p:cNvSpPr/>
+          <p:nvPr/>
+        </p:nvSpPr>
+        <p:spPr>
+          <a:xfrm>
+            <a:off x="3611088" y="3848146"/>
+            <a:ext cx="2337499" cy="369332"/>
+          </a:xfrm>
+          <a:prstGeom prst="rect">
+            <a:avLst/>
+          </a:prstGeom>
+        </p:spPr>
+        <p:txBody>
+          <a:bodyPr wrap="none">
+            <a:spAutoFit/>
+          </a:bodyPr>
+          <a:lstStyle/>
+          <a:p>
+            <a:r>
+              <a:rPr lang="en-GB" b="1" dirty="0">
+                <a:solidFill>
+                  <a:srgbClr val="FF0000"/>
+                </a:solidFill>
+                <a:latin typeface="Consolas" panose="020B0609020204030204" pitchFamily="49" charset="0"/>
+                <a:cs typeface="Consolas" panose="020B0609020204030204" pitchFamily="49" charset="0"/>
+              </a:rPr>
+              <a:t>PUSH {</a:t>
+            </a:r>
+            <a:r>
+              <a:rPr lang="en-GB" b="1" dirty="0" err="1">
+                <a:solidFill>
+                  <a:srgbClr val="FF0000"/>
+                </a:solidFill>
+                <a:latin typeface="Consolas" panose="020B0609020204030204" pitchFamily="49" charset="0"/>
+                <a:cs typeface="Consolas" panose="020B0609020204030204" pitchFamily="49" charset="0"/>
+              </a:rPr>
+              <a:t>r8</a:t>
+            </a:r>
+            <a:r>
+              <a:rPr lang="en-GB" b="1" dirty="0">
+                <a:solidFill>
+                  <a:srgbClr val="FF0000"/>
+                </a:solidFill>
+                <a:latin typeface="Consolas" panose="020B0609020204030204" pitchFamily="49" charset="0"/>
+                <a:cs typeface="Consolas" panose="020B0609020204030204" pitchFamily="49" charset="0"/>
+              </a:rPr>
+              <a:t>, </a:t>
+            </a:r>
+            <a:r>
+              <a:rPr lang="en-GB" b="1" dirty="0" err="1">
+                <a:solidFill>
+                  <a:srgbClr val="FF0000"/>
+                </a:solidFill>
+                <a:latin typeface="Consolas" panose="020B0609020204030204" pitchFamily="49" charset="0"/>
+                <a:cs typeface="Consolas" panose="020B0609020204030204" pitchFamily="49" charset="0"/>
+              </a:rPr>
+              <a:t>r7</a:t>
+            </a:r>
+            <a:r>
+              <a:rPr lang="en-GB" b="1" dirty="0">
+                <a:solidFill>
+                  <a:srgbClr val="FF0000"/>
+                </a:solidFill>
+                <a:latin typeface="Consolas" panose="020B0609020204030204" pitchFamily="49" charset="0"/>
+                <a:cs typeface="Consolas" panose="020B0609020204030204" pitchFamily="49" charset="0"/>
+              </a:rPr>
+              <a:t>, </a:t>
+            </a:r>
+            <a:r>
+              <a:rPr lang="en-GB" b="1" dirty="0" err="1">
+                <a:solidFill>
+                  <a:srgbClr val="FF0000"/>
+                </a:solidFill>
+                <a:latin typeface="Consolas" panose="020B0609020204030204" pitchFamily="49" charset="0"/>
+                <a:cs typeface="Consolas" panose="020B0609020204030204" pitchFamily="49" charset="0"/>
+              </a:rPr>
+              <a:t>r6</a:t>
+            </a:r>
+            <a:r>
+              <a:rPr lang="en-GB" b="1" dirty="0">
+                <a:solidFill>
+                  <a:srgbClr val="FF0000"/>
+                </a:solidFill>
+                <a:latin typeface="Consolas" panose="020B0609020204030204" pitchFamily="49" charset="0"/>
+                <a:cs typeface="Consolas" panose="020B0609020204030204" pitchFamily="49" charset="0"/>
+              </a:rPr>
+              <a:t>}</a:t>
+            </a:r>
+          </a:p>
+        </p:txBody>
+      </p:sp>
+      <p:sp>
+        <p:nvSpPr>
+          <p:cNvPr id="11" name="Left-Right Arrow 10"/>
+          <p:cNvSpPr/>
+          <p:nvPr/>
+        </p:nvSpPr>
+        <p:spPr>
+          <a:xfrm>
+            <a:off x="3001488" y="3976346"/>
+            <a:ext cx="482950" cy="197882"/>
+          </a:xfrm>
+          <a:prstGeom prst="leftRightArrow">
+            <a:avLst/>
+          </a:prstGeom>
+        </p:spPr>
+        <p:style>
+          <a:lnRef idx="2">
+            <a:schemeClr val="accent1">
+              <a:shade val="50000"/>
+            </a:schemeClr>
+          </a:lnRef>
+          <a:fillRef idx="1">
+            <a:schemeClr val="accent1"/>
+          </a:fillRef>
+          <a:effectRef idx="0">
+            <a:schemeClr val="accent1"/>
+          </a:effectRef>
+          <a:fontRef idx="minor">
+            <a:schemeClr val="lt1"/>
+          </a:fontRef>
+        </p:style>
+        <p:txBody>
+          <a:bodyPr rtlCol="0" anchor="ctr"/>
+          <a:lstStyle/>
+          <a:p>
+            <a:pPr algn="ctr"/>
+            <a:endParaRPr lang="en-US"/>
+          </a:p>
+        </p:txBody>
+      </p:sp>
+      <p:sp>
+        <p:nvSpPr>
+          <p:cNvPr id="12" name="Left-Right Arrow 11"/>
+          <p:cNvSpPr/>
+          <p:nvPr/>
+        </p:nvSpPr>
+        <p:spPr>
+          <a:xfrm>
+            <a:off x="6278088" y="3930864"/>
+            <a:ext cx="482950" cy="197882"/>
+          </a:xfrm>
+          <a:prstGeom prst="leftRightArrow">
+            <a:avLst/>
+          </a:prstGeom>
+        </p:spPr>
+        <p:style>
+          <a:lnRef idx="2">
+            <a:schemeClr val="accent1">
+              <a:shade val="50000"/>
+            </a:schemeClr>
+          </a:lnRef>
+          <a:fillRef idx="1">
+            <a:schemeClr val="accent1"/>
+          </a:fillRef>
+          <a:effectRef idx="0">
+            <a:schemeClr val="accent1"/>
+          </a:effectRef>
+          <a:fontRef idx="minor">
+            <a:schemeClr val="lt1"/>
+          </a:fontRef>
+        </p:style>
+        <p:txBody>
+          <a:bodyPr rtlCol="0" anchor="ctr"/>
+          <a:lstStyle/>
+          <a:p>
+            <a:pPr algn="ctr"/>
+            <a:endParaRPr lang="en-US"/>
+          </a:p>
+        </p:txBody>
+      </p:sp>
+      <p:sp>
+        <p:nvSpPr>
+          <p:cNvPr id="13" name="Rectangle 12"/>
+          <p:cNvSpPr/>
+          <p:nvPr/>
+        </p:nvSpPr>
+        <p:spPr>
+          <a:xfrm>
+            <a:off x="758953" y="4504339"/>
+            <a:ext cx="7772399" cy="1938992"/>
+          </a:xfrm>
+          <a:prstGeom prst="rect">
+            <a:avLst/>
+          </a:prstGeom>
+        </p:spPr>
+        <p:txBody>
+          <a:bodyPr wrap="square">
+            <a:spAutoFit/>
+          </a:bodyPr>
+          <a:lstStyle/>
+          <a:p>
+            <a:pPr marL="285750" indent="-285750">
+              <a:buFont typeface="Arial" panose="020B0604020202020204" pitchFamily="34" charset="0"/>
+              <a:buChar char="•"/>
+            </a:pPr>
+            <a:r>
+              <a:rPr lang="en-US" sz="2000" dirty="0"/>
+              <a:t>SP is decremented before PUSH (pre-decrement), and incremented after POP (post-increment). </a:t>
+            </a:r>
+          </a:p>
+          <a:p>
+            <a:pPr marL="285750" indent="-285750">
+              <a:buFont typeface="Arial" panose="020B0604020202020204" pitchFamily="34" charset="0"/>
+              <a:buChar char="•"/>
+            </a:pPr>
+            <a:r>
+              <a:rPr lang="en-US" sz="2000" dirty="0"/>
+              <a:t>The order in which registers listed in the register list does not matter. </a:t>
+            </a:r>
+          </a:p>
+          <a:p>
+            <a:pPr marL="285750" indent="-285750">
+              <a:buFont typeface="Arial" panose="020B0604020202020204" pitchFamily="34" charset="0"/>
+              <a:buChar char="•"/>
+            </a:pPr>
+            <a:r>
+              <a:rPr lang="en-US" sz="2000" dirty="0"/>
+              <a:t>When pushing multiple registers, these registers are automatically </a:t>
+            </a:r>
+            <a:r>
+              <a:rPr lang="en-US" sz="2000" dirty="0">
+                <a:solidFill>
+                  <a:srgbClr val="3333FF"/>
+                </a:solidFill>
+              </a:rPr>
+              <a:t>sorted by name </a:t>
+            </a:r>
+            <a:r>
+              <a:rPr lang="en-US" sz="2000" dirty="0"/>
+              <a:t>and </a:t>
+            </a:r>
+            <a:r>
+              <a:rPr lang="en-US" sz="2000" dirty="0">
+                <a:solidFill>
+                  <a:srgbClr val="3333FF"/>
+                </a:solidFill>
+              </a:rPr>
+              <a:t>the lowest-numbered register </a:t>
+            </a:r>
+            <a:r>
+              <a:rPr lang="en-US" sz="2000" dirty="0"/>
+              <a:t>is stored to the lowest memory address, </a:t>
+            </a:r>
+            <a:r>
+              <a:rPr lang="en-US" sz="2000" i="1" dirty="0"/>
+              <a:t>i.e. </a:t>
+            </a:r>
+            <a:r>
+              <a:rPr lang="en-US" sz="2000" dirty="0">
+                <a:solidFill>
+                  <a:srgbClr val="3333FF"/>
+                </a:solidFill>
+              </a:rPr>
+              <a:t>is stored last</a:t>
+            </a:r>
+            <a:r>
+              <a:rPr lang="en-US" sz="2000" dirty="0"/>
+              <a:t>. </a:t>
+            </a:r>
+          </a:p>
+        </p:txBody>
+      </p:sp>
+      <p:sp>
+        <p:nvSpPr>
+          <p:cNvPr id="7" name="Horizontal Scroll 15">
+            <a:extLst>
+              <a:ext uri="{FF2B5EF4-FFF2-40B4-BE49-F238E27FC236}">
+                <a16:creationId xmlns:a16="http://schemas.microsoft.com/office/drawing/2014/main" id="{CA1DAB37-747D-183E-CAAD-AD690621F135}"/>
+              </a:ext>
+            </a:extLst>
+          </p:cNvPr>
+          <p:cNvSpPr/>
+          <p:nvPr/>
+        </p:nvSpPr>
+        <p:spPr>
+          <a:xfrm>
+            <a:off x="76200" y="-23210"/>
+            <a:ext cx="1265712" cy="762000"/>
+          </a:xfrm>
+          <a:prstGeom prst="horizontalScroll">
+            <a:avLst/>
+          </a:prstGeom>
+          <a:gradFill rotWithShape="1">
+            <a:gsLst>
+              <a:gs pos="0">
+                <a:srgbClr val="4F81BD">
+                  <a:tint val="50000"/>
+                  <a:satMod val="300000"/>
+                </a:srgbClr>
+              </a:gs>
+              <a:gs pos="35000">
+                <a:srgbClr val="4F81BD">
+                  <a:tint val="37000"/>
+                  <a:satMod val="300000"/>
+                </a:srgbClr>
+              </a:gs>
+              <a:gs pos="100000">
+                <a:srgbClr val="4F81BD">
+                  <a:tint val="15000"/>
+                  <a:satMod val="350000"/>
+                </a:srgbClr>
+              </a:gs>
+            </a:gsLst>
+            <a:lin ang="16200000" scaled="1"/>
+          </a:gradFill>
+          <a:ln w="9525" cap="flat" cmpd="sng" algn="ctr">
+            <a:solidFill>
+              <a:srgbClr val="4F81BD">
+                <a:shade val="95000"/>
+                <a:satMod val="105000"/>
+              </a:srgbClr>
+            </a:solidFill>
+            <a:prstDash val="solid"/>
+          </a:ln>
+          <a:effectLst>
+            <a:outerShdw blurRad="40000" dist="20000" dir="5400000" rotWithShape="0">
+              <a:srgbClr val="000000">
+                <a:alpha val="38000"/>
+              </a:srgbClr>
+            </a:outerShdw>
+          </a:effectLst>
+        </p:spPr>
+        <p:txBody>
+          <a:bodyPr rtlCol="0" anchor="ctr"/>
+          <a:lstStyle/>
+          <a:p>
+            <a:pPr marL="0" marR="0" lvl="0" indent="0" algn="ctr" defTabSz="457200" eaLnBrk="1" fontAlgn="auto" latinLnBrk="0" hangingPunct="1">
+              <a:lnSpc>
+                <a:spcPct val="100000"/>
+              </a:lnSpc>
+              <a:spcBef>
+                <a:spcPts val="0"/>
+              </a:spcBef>
+              <a:spcAft>
+                <a:spcPts val="0"/>
+              </a:spcAft>
+              <a:buClrTx/>
+              <a:buSzTx/>
+              <a:buFontTx/>
+              <a:buNone/>
+              <a:tabLst/>
+              <a:defRPr/>
+            </a:pPr>
+            <a:r>
+              <a:rPr kumimoji="0" lang="en-US" sz="2400" b="0" i="0" u="none" strike="noStrike" kern="0" cap="none" spc="0" normalizeH="0" baseline="0" noProof="0" dirty="0">
+                <a:ln>
+                  <a:noFill/>
+                </a:ln>
+                <a:solidFill>
+                  <a:prstClr val="black"/>
+                </a:solidFill>
+                <a:effectLst/>
+                <a:uLnTx/>
+                <a:uFillTx/>
+                <a:latin typeface="Calibri"/>
+                <a:ea typeface="+mn-ea"/>
+                <a:cs typeface="+mn-cs"/>
+              </a:rPr>
+              <a:t>Review</a:t>
+            </a:r>
+          </a:p>
+        </p:txBody>
+      </p:sp>
+    </p:spTree>
+    <p:extLst>
+      <p:ext uri="{BB962C8B-B14F-4D97-AF65-F5344CB8AC3E}">
+        <p14:creationId xmlns:p14="http://schemas.microsoft.com/office/powerpoint/2010/main" val="1120632604"/>
+      </p:ext>
+    </p:extLst>
+  </p:cSld>
+  <p:clrMapOvr>
+    <a:masterClrMapping/>
+  </p:clrMapOvr>
+</p:sld>
+</file>
+
+<file path=ppt/slides/slide20.xml><?xml version="1.0" encoding="utf-8"?>
 <p:sld xmlns:a="http://schemas.openxmlformats.org/drawingml/2006/main" xmlns:r="http://schemas.openxmlformats.org/officeDocument/2006/relationships" xmlns:p="http://schemas.openxmlformats.org/presentationml/2006/main">
   <p:cSld>
     <p:spTree>
@@ -10548,7 +15603,7 @@
             <a:fld id="{EA7C8D44-3667-46F6-9772-CC52308E2A7F}" type="slidenum">
               <a:rPr kumimoji="0" lang="en-US" smtClean="0"/>
               <a:pPr/>
-              <a:t>14</a:t>
+              <a:t>20</a:t>
             </a:fld>
             <a:endParaRPr kumimoji="0" lang="en-US" dirty="0"/>
           </a:p>
@@ -11183,7 +16238,7 @@
 </p:sld>
 </file>
 
-<file path=ppt/slides/slide15.xml><?xml version="1.0" encoding="utf-8"?>
+<file path=ppt/slides/slide21.xml><?xml version="1.0" encoding="utf-8"?>
 <p:sld xmlns:a="http://schemas.openxmlformats.org/drawingml/2006/main" xmlns:r="http://schemas.openxmlformats.org/officeDocument/2006/relationships" xmlns:p="http://schemas.openxmlformats.org/presentationml/2006/main">
   <p:cSld>
     <p:spTree>
@@ -11253,7 +16308,7 @@
             <a:fld id="{EA7C8D44-3667-46F6-9772-CC52308E2A7F}" type="slidenum">
               <a:rPr kumimoji="0" lang="en-US" smtClean="0"/>
               <a:pPr/>
-              <a:t>15</a:t>
+              <a:t>21</a:t>
             </a:fld>
             <a:endParaRPr kumimoji="0" lang="en-US" dirty="0"/>
           </a:p>
@@ -13016,7 +18071,7 @@
 </p:sld>
 </file>
 
-<file path=ppt/slides/slide16.xml><?xml version="1.0" encoding="utf-8"?>
+<file path=ppt/slides/slide22.xml><?xml version="1.0" encoding="utf-8"?>
 <p:sld xmlns:a="http://schemas.openxmlformats.org/drawingml/2006/main" xmlns:r="http://schemas.openxmlformats.org/officeDocument/2006/relationships" xmlns:p="http://schemas.openxmlformats.org/presentationml/2006/main">
   <p:cSld>
     <p:spTree>
@@ -13095,7 +18150,7 @@
             <a:fld id="{EA7C8D44-3667-46F6-9772-CC52308E2A7F}" type="slidenum">
               <a:rPr kumimoji="0" lang="en-US" smtClean="0"/>
               <a:pPr/>
-              <a:t>16</a:t>
+              <a:t>22</a:t>
             </a:fld>
             <a:endParaRPr kumimoji="0" lang="en-US" dirty="0"/>
           </a:p>
@@ -13884,7 +18939,7 @@
 </p:sld>
 </file>
 
-<file path=ppt/slides/slide17.xml><?xml version="1.0" encoding="utf-8"?>
+<file path=ppt/slides/slide23.xml><?xml version="1.0" encoding="utf-8"?>
 <p:sld xmlns:a="http://schemas.openxmlformats.org/drawingml/2006/main" xmlns:r="http://schemas.openxmlformats.org/officeDocument/2006/relationships" xmlns:p="http://schemas.openxmlformats.org/presentationml/2006/main">
   <p:cSld>
     <p:spTree>
@@ -13953,7 +19008,7 @@
             <a:fld id="{EA7C8D44-3667-46F6-9772-CC52308E2A7F}" type="slidenum">
               <a:rPr kumimoji="0" lang="en-US" smtClean="0"/>
               <a:pPr/>
-              <a:t>17</a:t>
+              <a:t>23</a:t>
             </a:fld>
             <a:endParaRPr kumimoji="0" lang="en-US" dirty="0"/>
           </a:p>
@@ -14247,7 +19302,7 @@
 </p:sld>
 </file>
 
-<file path=ppt/slides/slide18.xml><?xml version="1.0" encoding="utf-8"?>
+<file path=ppt/slides/slide24.xml><?xml version="1.0" encoding="utf-8"?>
 <p:sld xmlns:a="http://schemas.openxmlformats.org/drawingml/2006/main" xmlns:r="http://schemas.openxmlformats.org/officeDocument/2006/relationships" xmlns:p="http://schemas.openxmlformats.org/presentationml/2006/main">
   <p:cSld>
     <p:spTree>
@@ -14323,7 +19378,7 @@
             <a:fld id="{EA7C8D44-3667-46F6-9772-CC52308E2A7F}" type="slidenum">
               <a:rPr kumimoji="0" lang="en-US" smtClean="0"/>
               <a:pPr/>
-              <a:t>18</a:t>
+              <a:t>24</a:t>
             </a:fld>
             <a:endParaRPr kumimoji="0" lang="en-US" dirty="0"/>
           </a:p>
@@ -15179,7 +20234,7 @@
 </p:sld>
 </file>
 
-<file path=ppt/slides/slide19.xml><?xml version="1.0" encoding="utf-8"?>
+<file path=ppt/slides/slide25.xml><?xml version="1.0" encoding="utf-8"?>
 <p:sld xmlns:a="http://schemas.openxmlformats.org/drawingml/2006/main" xmlns:r="http://schemas.openxmlformats.org/officeDocument/2006/relationships" xmlns:p="http://schemas.openxmlformats.org/presentationml/2006/main">
   <p:cSld>
     <p:spTree>
@@ -15248,7 +20303,7 @@
             <a:fld id="{EA7C8D44-3667-46F6-9772-CC52308E2A7F}" type="slidenum">
               <a:rPr kumimoji="0" lang="en-US" smtClean="0"/>
               <a:pPr/>
-              <a:t>19</a:t>
+              <a:t>25</a:t>
             </a:fld>
             <a:endParaRPr kumimoji="0" lang="en-US" dirty="0"/>
           </a:p>
@@ -15977,7 +21032,7 @@
 </p:sld>
 </file>
 
-<file path=ppt/slides/slide2.xml><?xml version="1.0" encoding="utf-8"?>
+<file path=ppt/slides/slide26.xml><?xml version="1.0" encoding="utf-8"?>
 <p:sld xmlns:a="http://schemas.openxmlformats.org/drawingml/2006/main" xmlns:r="http://schemas.openxmlformats.org/officeDocument/2006/relationships" xmlns:p="http://schemas.openxmlformats.org/presentationml/2006/main">
   <p:cSld>
     <p:spTree>
@@ -15996,760 +21051,6 @@
       </p:grpSpPr>
       <p:sp>
         <p:nvSpPr>
-          <p:cNvPr id="2" name="Title 1"/>
-          <p:cNvSpPr>
-            <a:spLocks noGrp="1"/>
-          </p:cNvSpPr>
-          <p:nvPr>
-            <p:ph type="title"/>
-          </p:nvPr>
-        </p:nvSpPr>
-        <p:spPr/>
-        <p:txBody>
-          <a:bodyPr/>
-          <a:lstStyle/>
-          <a:p>
-            <a:r>
-              <a:rPr lang="en-GB" dirty="0"/>
-              <a:t>Stack</a:t>
-            </a:r>
-          </a:p>
-        </p:txBody>
-      </p:sp>
-      <p:sp>
-        <p:nvSpPr>
-          <p:cNvPr id="3" name="Content Placeholder 2"/>
-          <p:cNvSpPr>
-            <a:spLocks noGrp="1"/>
-          </p:cNvSpPr>
-          <p:nvPr>
-            <p:ph idx="1"/>
-          </p:nvPr>
-        </p:nvSpPr>
-        <p:spPr>
-          <a:xfrm>
-            <a:off x="457200" y="1219200"/>
-            <a:ext cx="8229600" cy="3200400"/>
-          </a:xfrm>
-        </p:spPr>
-        <p:txBody>
-          <a:bodyPr/>
-          <a:lstStyle/>
-          <a:p>
-            <a:pPr>
-              <a:buNone/>
-            </a:pPr>
-            <a:r>
-              <a:rPr lang="en-GB" sz="2800" b="1" dirty="0">
-                <a:solidFill>
-                  <a:srgbClr val="FF0000"/>
-                </a:solidFill>
-                <a:latin typeface="Consolas" panose="020B0609020204030204" pitchFamily="49" charset="0"/>
-                <a:cs typeface="Consolas" panose="020B0609020204030204" pitchFamily="49" charset="0"/>
-              </a:rPr>
-              <a:t>PUSH</a:t>
-            </a:r>
-            <a:r>
-              <a:rPr lang="en-GB" sz="2800" dirty="0">
-                <a:solidFill>
-                  <a:srgbClr val="FF0000"/>
-                </a:solidFill>
-                <a:latin typeface="Consolas" panose="020B0609020204030204" pitchFamily="49" charset="0"/>
-                <a:cs typeface="Consolas" panose="020B0609020204030204" pitchFamily="49" charset="0"/>
-              </a:rPr>
-              <a:t> </a:t>
-            </a:r>
-            <a:r>
-              <a:rPr lang="en-GB" sz="2800" dirty="0">
-                <a:latin typeface="Consolas" panose="020B0609020204030204" pitchFamily="49" charset="0"/>
-                <a:cs typeface="Consolas" panose="020B0609020204030204" pitchFamily="49" charset="0"/>
-              </a:rPr>
-              <a:t>{</a:t>
-            </a:r>
-            <a:r>
-              <a:rPr lang="en-GB" sz="2800" i="1" dirty="0">
-                <a:latin typeface="Consolas" panose="020B0609020204030204" pitchFamily="49" charset="0"/>
-                <a:cs typeface="Consolas" panose="020B0609020204030204" pitchFamily="49" charset="0"/>
-              </a:rPr>
-              <a:t>Rd</a:t>
-            </a:r>
-            <a:r>
-              <a:rPr lang="en-GB" sz="2800" dirty="0">
-                <a:latin typeface="Consolas" panose="020B0609020204030204" pitchFamily="49" charset="0"/>
-                <a:cs typeface="Consolas" panose="020B0609020204030204" pitchFamily="49" charset="0"/>
-              </a:rPr>
-              <a:t>} </a:t>
-            </a:r>
-          </a:p>
-          <a:p>
-            <a:pPr lvl="1"/>
-            <a:r>
-              <a:rPr lang="en-GB" sz="2400" dirty="0" err="1">
-                <a:latin typeface="Consolas" panose="020B0609020204030204" pitchFamily="49" charset="0"/>
-                <a:cs typeface="Consolas" panose="020B0609020204030204" pitchFamily="49" charset="0"/>
-              </a:rPr>
-              <a:t>SP</a:t>
-            </a:r>
-            <a:r>
-              <a:rPr lang="en-GB" sz="2400" dirty="0">
-                <a:latin typeface="Consolas" panose="020B0609020204030204" pitchFamily="49" charset="0"/>
-                <a:cs typeface="Consolas" panose="020B0609020204030204" pitchFamily="49" charset="0"/>
-              </a:rPr>
-              <a:t> = </a:t>
-            </a:r>
-            <a:r>
-              <a:rPr lang="en-GB" sz="2400" dirty="0" err="1">
-                <a:latin typeface="Consolas" panose="020B0609020204030204" pitchFamily="49" charset="0"/>
-                <a:cs typeface="Consolas" panose="020B0609020204030204" pitchFamily="49" charset="0"/>
-              </a:rPr>
-              <a:t>SP</a:t>
-            </a:r>
-            <a:r>
-              <a:rPr lang="en-GB" sz="2400" dirty="0">
-                <a:latin typeface="Consolas" panose="020B0609020204030204" pitchFamily="49" charset="0"/>
-                <a:cs typeface="Consolas" panose="020B0609020204030204" pitchFamily="49" charset="0"/>
-              </a:rPr>
-              <a:t>-4   </a:t>
-            </a:r>
-            <a:r>
-              <a:rPr lang="en-GB" sz="2400" dirty="0">
-                <a:latin typeface="Cambria Math"/>
-                <a:ea typeface="Cambria Math"/>
-                <a:cs typeface="Consolas" panose="020B0609020204030204" pitchFamily="49" charset="0"/>
-              </a:rPr>
-              <a:t>⟶    descending stack</a:t>
-            </a:r>
-            <a:endParaRPr lang="en-GB" sz="2400" dirty="0">
-              <a:latin typeface="Consolas" panose="020B0609020204030204" pitchFamily="49" charset="0"/>
-              <a:cs typeface="Consolas" panose="020B0609020204030204" pitchFamily="49" charset="0"/>
-            </a:endParaRPr>
-          </a:p>
-          <a:p>
-            <a:pPr lvl="1"/>
-            <a:r>
-              <a:rPr lang="en-GB" sz="2400" dirty="0">
-                <a:latin typeface="Consolas" panose="020B0609020204030204" pitchFamily="49" charset="0"/>
-                <a:cs typeface="Consolas" panose="020B0609020204030204" pitchFamily="49" charset="0"/>
-              </a:rPr>
-              <a:t>(*SP) = </a:t>
-            </a:r>
-            <a:r>
-              <a:rPr lang="en-GB" sz="2400" i="1" dirty="0">
-                <a:latin typeface="Consolas" panose="020B0609020204030204" pitchFamily="49" charset="0"/>
-                <a:cs typeface="Consolas" panose="020B0609020204030204" pitchFamily="49" charset="0"/>
-              </a:rPr>
-              <a:t>Rd</a:t>
-            </a:r>
-            <a:r>
-              <a:rPr lang="en-GB" sz="2400" dirty="0">
-                <a:latin typeface="Cambria Math"/>
-                <a:ea typeface="Cambria Math"/>
-                <a:cs typeface="Consolas" panose="020B0609020204030204" pitchFamily="49" charset="0"/>
-              </a:rPr>
-              <a:t>     ⟶    full stack</a:t>
-            </a:r>
-          </a:p>
-          <a:p>
-            <a:pPr marL="0" indent="0">
-              <a:buNone/>
-            </a:pPr>
-            <a:endParaRPr lang="en-GB" sz="2700" i="1" dirty="0">
-              <a:latin typeface="Consolas" panose="020B0609020204030204" pitchFamily="49" charset="0"/>
-              <a:cs typeface="Consolas" panose="020B0609020204030204" pitchFamily="49" charset="0"/>
-            </a:endParaRPr>
-          </a:p>
-          <a:p>
-            <a:pPr marL="0" indent="0">
-              <a:buNone/>
-            </a:pPr>
-            <a:r>
-              <a:rPr lang="en-GB" sz="2700" dirty="0">
-                <a:cs typeface="Consolas" panose="020B0609020204030204" pitchFamily="49" charset="0"/>
-              </a:rPr>
-              <a:t>Push multiple registers</a:t>
-            </a:r>
-          </a:p>
-          <a:p>
-            <a:pPr marL="0" indent="0">
-              <a:buNone/>
-            </a:pPr>
-            <a:endParaRPr lang="en-GB" sz="2800" dirty="0"/>
-          </a:p>
-          <a:p>
-            <a:endParaRPr lang="en-GB" sz="2400" dirty="0"/>
-          </a:p>
-          <a:p>
-            <a:pPr>
-              <a:buNone/>
-            </a:pPr>
-            <a:endParaRPr lang="en-GB" dirty="0"/>
-          </a:p>
-        </p:txBody>
-      </p:sp>
-      <p:sp>
-        <p:nvSpPr>
-          <p:cNvPr id="4" name="Slide Number Placeholder 3"/>
-          <p:cNvSpPr>
-            <a:spLocks noGrp="1"/>
-          </p:cNvSpPr>
-          <p:nvPr>
-            <p:ph type="sldNum" sz="quarter" idx="12"/>
-          </p:nvPr>
-        </p:nvSpPr>
-        <p:spPr/>
-        <p:txBody>
-          <a:bodyPr/>
-          <a:lstStyle/>
-          <a:p>
-            <a:fld id="{EA7C8D44-3667-46F6-9772-CC52308E2A7F}" type="slidenum">
-              <a:rPr kumimoji="0" lang="en-US" smtClean="0"/>
-              <a:pPr/>
-              <a:t>2</a:t>
-            </a:fld>
-            <a:endParaRPr kumimoji="0" lang="en-US" dirty="0"/>
-          </a:p>
-        </p:txBody>
-      </p:sp>
-      <p:sp>
-        <p:nvSpPr>
-          <p:cNvPr id="5" name="Rectangle 4"/>
-          <p:cNvSpPr/>
-          <p:nvPr/>
-        </p:nvSpPr>
-        <p:spPr>
-          <a:xfrm>
-            <a:off x="410688" y="3848146"/>
-            <a:ext cx="2488850" cy="369332"/>
-          </a:xfrm>
-          <a:prstGeom prst="rect">
-            <a:avLst/>
-          </a:prstGeom>
-        </p:spPr>
-        <p:txBody>
-          <a:bodyPr wrap="square">
-            <a:spAutoFit/>
-          </a:bodyPr>
-          <a:lstStyle/>
-          <a:p>
-            <a:r>
-              <a:rPr lang="en-GB" b="1" dirty="0">
-                <a:solidFill>
-                  <a:srgbClr val="FF0000"/>
-                </a:solidFill>
-                <a:latin typeface="Consolas" panose="020B0609020204030204" pitchFamily="49" charset="0"/>
-                <a:cs typeface="Consolas" panose="020B0609020204030204" pitchFamily="49" charset="0"/>
-              </a:rPr>
-              <a:t>PUSH {r6, r7, </a:t>
-            </a:r>
-            <a:r>
-              <a:rPr lang="en-GB" b="1" dirty="0" err="1">
-                <a:solidFill>
-                  <a:srgbClr val="FF0000"/>
-                </a:solidFill>
-                <a:latin typeface="Consolas" panose="020B0609020204030204" pitchFamily="49" charset="0"/>
-                <a:cs typeface="Consolas" panose="020B0609020204030204" pitchFamily="49" charset="0"/>
-              </a:rPr>
-              <a:t>r8</a:t>
-            </a:r>
-            <a:r>
-              <a:rPr lang="en-GB" b="1" dirty="0">
-                <a:solidFill>
-                  <a:srgbClr val="FF0000"/>
-                </a:solidFill>
-                <a:latin typeface="Consolas" panose="020B0609020204030204" pitchFamily="49" charset="0"/>
-                <a:cs typeface="Consolas" panose="020B0609020204030204" pitchFamily="49" charset="0"/>
-              </a:rPr>
-              <a:t>}</a:t>
-            </a:r>
-          </a:p>
-        </p:txBody>
-      </p:sp>
-      <p:sp>
-        <p:nvSpPr>
-          <p:cNvPr id="6" name="TextBox 5"/>
-          <p:cNvSpPr txBox="1"/>
-          <p:nvPr/>
-        </p:nvSpPr>
-        <p:spPr>
-          <a:xfrm>
-            <a:off x="3611088" y="3465945"/>
-            <a:ext cx="1969129" cy="369332"/>
-          </a:xfrm>
-          <a:prstGeom prst="rect">
-            <a:avLst/>
-          </a:prstGeom>
-          <a:noFill/>
-        </p:spPr>
-        <p:txBody>
-          <a:bodyPr wrap="none" rtlCol="0">
-            <a:spAutoFit/>
-          </a:bodyPr>
-          <a:lstStyle/>
-          <a:p>
-            <a:r>
-              <a:rPr lang="en-US" i="1" dirty="0"/>
-              <a:t>They are equivalent. </a:t>
-            </a:r>
-          </a:p>
-        </p:txBody>
-      </p:sp>
-      <p:sp>
-        <p:nvSpPr>
-          <p:cNvPr id="8" name="Rectangle 7"/>
-          <p:cNvSpPr/>
-          <p:nvPr/>
-        </p:nvSpPr>
-        <p:spPr>
-          <a:xfrm>
-            <a:off x="7040088" y="3568140"/>
-            <a:ext cx="1324402" cy="923330"/>
-          </a:xfrm>
-          <a:prstGeom prst="rect">
-            <a:avLst/>
-          </a:prstGeom>
-        </p:spPr>
-        <p:txBody>
-          <a:bodyPr wrap="none">
-            <a:spAutoFit/>
-          </a:bodyPr>
-          <a:lstStyle/>
-          <a:p>
-            <a:r>
-              <a:rPr lang="en-GB" b="1" dirty="0">
-                <a:solidFill>
-                  <a:srgbClr val="FF0000"/>
-                </a:solidFill>
-                <a:latin typeface="Consolas" panose="020B0609020204030204" pitchFamily="49" charset="0"/>
-                <a:cs typeface="Consolas" panose="020B0609020204030204" pitchFamily="49" charset="0"/>
-              </a:rPr>
-              <a:t>PUSH {r8}</a:t>
-            </a:r>
-          </a:p>
-          <a:p>
-            <a:r>
-              <a:rPr lang="en-GB" b="1" dirty="0">
-                <a:solidFill>
-                  <a:srgbClr val="FF0000"/>
-                </a:solidFill>
-                <a:latin typeface="Consolas" panose="020B0609020204030204" pitchFamily="49" charset="0"/>
-                <a:cs typeface="Consolas" panose="020B0609020204030204" pitchFamily="49" charset="0"/>
-              </a:rPr>
-              <a:t>PUSH {r7}</a:t>
-            </a:r>
-          </a:p>
-          <a:p>
-            <a:r>
-              <a:rPr lang="en-GB" b="1" dirty="0">
-                <a:solidFill>
-                  <a:srgbClr val="FF0000"/>
-                </a:solidFill>
-                <a:latin typeface="Consolas" panose="020B0609020204030204" pitchFamily="49" charset="0"/>
-                <a:cs typeface="Consolas" panose="020B0609020204030204" pitchFamily="49" charset="0"/>
-              </a:rPr>
-              <a:t>PUSH {r6}</a:t>
-            </a:r>
-          </a:p>
-        </p:txBody>
-      </p:sp>
-      <p:sp>
-        <p:nvSpPr>
-          <p:cNvPr id="10" name="Rectangle 9"/>
-          <p:cNvSpPr/>
-          <p:nvPr/>
-        </p:nvSpPr>
-        <p:spPr>
-          <a:xfrm>
-            <a:off x="3611088" y="3848146"/>
-            <a:ext cx="2337499" cy="369332"/>
-          </a:xfrm>
-          <a:prstGeom prst="rect">
-            <a:avLst/>
-          </a:prstGeom>
-        </p:spPr>
-        <p:txBody>
-          <a:bodyPr wrap="none">
-            <a:spAutoFit/>
-          </a:bodyPr>
-          <a:lstStyle/>
-          <a:p>
-            <a:r>
-              <a:rPr lang="en-GB" b="1" dirty="0">
-                <a:solidFill>
-                  <a:srgbClr val="FF0000"/>
-                </a:solidFill>
-                <a:latin typeface="Consolas" panose="020B0609020204030204" pitchFamily="49" charset="0"/>
-                <a:cs typeface="Consolas" panose="020B0609020204030204" pitchFamily="49" charset="0"/>
-              </a:rPr>
-              <a:t>PUSH {</a:t>
-            </a:r>
-            <a:r>
-              <a:rPr lang="en-GB" b="1" dirty="0" err="1">
-                <a:solidFill>
-                  <a:srgbClr val="FF0000"/>
-                </a:solidFill>
-                <a:latin typeface="Consolas" panose="020B0609020204030204" pitchFamily="49" charset="0"/>
-                <a:cs typeface="Consolas" panose="020B0609020204030204" pitchFamily="49" charset="0"/>
-              </a:rPr>
-              <a:t>r8</a:t>
-            </a:r>
-            <a:r>
-              <a:rPr lang="en-GB" b="1" dirty="0">
-                <a:solidFill>
-                  <a:srgbClr val="FF0000"/>
-                </a:solidFill>
-                <a:latin typeface="Consolas" panose="020B0609020204030204" pitchFamily="49" charset="0"/>
-                <a:cs typeface="Consolas" panose="020B0609020204030204" pitchFamily="49" charset="0"/>
-              </a:rPr>
-              <a:t>, </a:t>
-            </a:r>
-            <a:r>
-              <a:rPr lang="en-GB" b="1" dirty="0" err="1">
-                <a:solidFill>
-                  <a:srgbClr val="FF0000"/>
-                </a:solidFill>
-                <a:latin typeface="Consolas" panose="020B0609020204030204" pitchFamily="49" charset="0"/>
-                <a:cs typeface="Consolas" panose="020B0609020204030204" pitchFamily="49" charset="0"/>
-              </a:rPr>
-              <a:t>r7</a:t>
-            </a:r>
-            <a:r>
-              <a:rPr lang="en-GB" b="1" dirty="0">
-                <a:solidFill>
-                  <a:srgbClr val="FF0000"/>
-                </a:solidFill>
-                <a:latin typeface="Consolas" panose="020B0609020204030204" pitchFamily="49" charset="0"/>
-                <a:cs typeface="Consolas" panose="020B0609020204030204" pitchFamily="49" charset="0"/>
-              </a:rPr>
-              <a:t>, </a:t>
-            </a:r>
-            <a:r>
-              <a:rPr lang="en-GB" b="1" dirty="0" err="1">
-                <a:solidFill>
-                  <a:srgbClr val="FF0000"/>
-                </a:solidFill>
-                <a:latin typeface="Consolas" panose="020B0609020204030204" pitchFamily="49" charset="0"/>
-                <a:cs typeface="Consolas" panose="020B0609020204030204" pitchFamily="49" charset="0"/>
-              </a:rPr>
-              <a:t>r6</a:t>
-            </a:r>
-            <a:r>
-              <a:rPr lang="en-GB" b="1" dirty="0">
-                <a:solidFill>
-                  <a:srgbClr val="FF0000"/>
-                </a:solidFill>
-                <a:latin typeface="Consolas" panose="020B0609020204030204" pitchFamily="49" charset="0"/>
-                <a:cs typeface="Consolas" panose="020B0609020204030204" pitchFamily="49" charset="0"/>
-              </a:rPr>
-              <a:t>}</a:t>
-            </a:r>
-          </a:p>
-        </p:txBody>
-      </p:sp>
-      <p:sp>
-        <p:nvSpPr>
-          <p:cNvPr id="11" name="Left-Right Arrow 10"/>
-          <p:cNvSpPr/>
-          <p:nvPr/>
-        </p:nvSpPr>
-        <p:spPr>
-          <a:xfrm>
-            <a:off x="3001488" y="3976346"/>
-            <a:ext cx="482950" cy="197882"/>
-          </a:xfrm>
-          <a:prstGeom prst="leftRightArrow">
-            <a:avLst/>
-          </a:prstGeom>
-        </p:spPr>
-        <p:style>
-          <a:lnRef idx="2">
-            <a:schemeClr val="accent1">
-              <a:shade val="50000"/>
-            </a:schemeClr>
-          </a:lnRef>
-          <a:fillRef idx="1">
-            <a:schemeClr val="accent1"/>
-          </a:fillRef>
-          <a:effectRef idx="0">
-            <a:schemeClr val="accent1"/>
-          </a:effectRef>
-          <a:fontRef idx="minor">
-            <a:schemeClr val="lt1"/>
-          </a:fontRef>
-        </p:style>
-        <p:txBody>
-          <a:bodyPr rtlCol="0" anchor="ctr"/>
-          <a:lstStyle/>
-          <a:p>
-            <a:pPr algn="ctr"/>
-            <a:endParaRPr lang="en-US"/>
-          </a:p>
-        </p:txBody>
-      </p:sp>
-      <p:sp>
-        <p:nvSpPr>
-          <p:cNvPr id="12" name="Left-Right Arrow 11"/>
-          <p:cNvSpPr/>
-          <p:nvPr/>
-        </p:nvSpPr>
-        <p:spPr>
-          <a:xfrm>
-            <a:off x="6278088" y="3930864"/>
-            <a:ext cx="482950" cy="197882"/>
-          </a:xfrm>
-          <a:prstGeom prst="leftRightArrow">
-            <a:avLst/>
-          </a:prstGeom>
-        </p:spPr>
-        <p:style>
-          <a:lnRef idx="2">
-            <a:schemeClr val="accent1">
-              <a:shade val="50000"/>
-            </a:schemeClr>
-          </a:lnRef>
-          <a:fillRef idx="1">
-            <a:schemeClr val="accent1"/>
-          </a:fillRef>
-          <a:effectRef idx="0">
-            <a:schemeClr val="accent1"/>
-          </a:effectRef>
-          <a:fontRef idx="minor">
-            <a:schemeClr val="lt1"/>
-          </a:fontRef>
-        </p:style>
-        <p:txBody>
-          <a:bodyPr rtlCol="0" anchor="ctr"/>
-          <a:lstStyle/>
-          <a:p>
-            <a:pPr algn="ctr"/>
-            <a:endParaRPr lang="en-US"/>
-          </a:p>
-        </p:txBody>
-      </p:sp>
-      <p:sp>
-        <p:nvSpPr>
-          <p:cNvPr id="13" name="Rectangle 12"/>
-          <p:cNvSpPr/>
-          <p:nvPr/>
-        </p:nvSpPr>
-        <p:spPr>
-          <a:xfrm>
-            <a:off x="758953" y="4504339"/>
-            <a:ext cx="7772399" cy="1938992"/>
-          </a:xfrm>
-          <a:prstGeom prst="rect">
-            <a:avLst/>
-          </a:prstGeom>
-        </p:spPr>
-        <p:txBody>
-          <a:bodyPr wrap="square">
-            <a:spAutoFit/>
-          </a:bodyPr>
-          <a:lstStyle/>
-          <a:p>
-            <a:pPr marL="285750" indent="-285750">
-              <a:buFont typeface="Arial" panose="020B0604020202020204" pitchFamily="34" charset="0"/>
-              <a:buChar char="•"/>
-            </a:pPr>
-            <a:r>
-              <a:rPr lang="en-US" sz="2000" dirty="0"/>
-              <a:t>SP is decremented before PUSH (pre-decrement), and incremented after POP (post-increment). </a:t>
-            </a:r>
-          </a:p>
-          <a:p>
-            <a:pPr marL="285750" indent="-285750">
-              <a:buFont typeface="Arial" panose="020B0604020202020204" pitchFamily="34" charset="0"/>
-              <a:buChar char="•"/>
-            </a:pPr>
-            <a:r>
-              <a:rPr lang="en-US" sz="2000" dirty="0"/>
-              <a:t>The order in which registers listed in the register list does not matter. </a:t>
-            </a:r>
-          </a:p>
-          <a:p>
-            <a:pPr marL="285750" indent="-285750">
-              <a:buFont typeface="Arial" panose="020B0604020202020204" pitchFamily="34" charset="0"/>
-              <a:buChar char="•"/>
-            </a:pPr>
-            <a:r>
-              <a:rPr lang="en-US" sz="2000" dirty="0"/>
-              <a:t>When pushing multiple registers, these registers are automatically </a:t>
-            </a:r>
-            <a:r>
-              <a:rPr lang="en-US" sz="2000" dirty="0">
-                <a:solidFill>
-                  <a:srgbClr val="3333FF"/>
-                </a:solidFill>
-              </a:rPr>
-              <a:t>sorted by name </a:t>
-            </a:r>
-            <a:r>
-              <a:rPr lang="en-US" sz="2000" dirty="0"/>
-              <a:t>and </a:t>
-            </a:r>
-            <a:r>
-              <a:rPr lang="en-US" sz="2000" dirty="0">
-                <a:solidFill>
-                  <a:srgbClr val="3333FF"/>
-                </a:solidFill>
-              </a:rPr>
-              <a:t>the lowest-numbered register </a:t>
-            </a:r>
-            <a:r>
-              <a:rPr lang="en-US" sz="2000" dirty="0"/>
-              <a:t>is stored to the lowest memory address, </a:t>
-            </a:r>
-            <a:r>
-              <a:rPr lang="en-US" sz="2000" i="1" dirty="0"/>
-              <a:t>i.e. </a:t>
-            </a:r>
-            <a:r>
-              <a:rPr lang="en-US" sz="2000" dirty="0">
-                <a:solidFill>
-                  <a:srgbClr val="3333FF"/>
-                </a:solidFill>
-              </a:rPr>
-              <a:t>is stored last</a:t>
-            </a:r>
-            <a:r>
-              <a:rPr lang="en-US" sz="2000" dirty="0"/>
-              <a:t>. </a:t>
-            </a:r>
-          </a:p>
-        </p:txBody>
-      </p:sp>
-      <p:sp>
-        <p:nvSpPr>
-          <p:cNvPr id="7" name="Horizontal Scroll 15">
-            <a:extLst>
-              <a:ext uri="{FF2B5EF4-FFF2-40B4-BE49-F238E27FC236}">
-                <a16:creationId xmlns:a16="http://schemas.microsoft.com/office/drawing/2014/main" id="{CA1DAB37-747D-183E-CAAD-AD690621F135}"/>
-              </a:ext>
-            </a:extLst>
-          </p:cNvPr>
-          <p:cNvSpPr/>
-          <p:nvPr/>
-        </p:nvSpPr>
-        <p:spPr>
-          <a:xfrm>
-            <a:off x="76200" y="-23210"/>
-            <a:ext cx="1265712" cy="762000"/>
-          </a:xfrm>
-          <a:prstGeom prst="horizontalScroll">
-            <a:avLst/>
-          </a:prstGeom>
-          <a:gradFill rotWithShape="1">
-            <a:gsLst>
-              <a:gs pos="0">
-                <a:srgbClr val="4F81BD">
-                  <a:tint val="50000"/>
-                  <a:satMod val="300000"/>
-                </a:srgbClr>
-              </a:gs>
-              <a:gs pos="35000">
-                <a:srgbClr val="4F81BD">
-                  <a:tint val="37000"/>
-                  <a:satMod val="300000"/>
-                </a:srgbClr>
-              </a:gs>
-              <a:gs pos="100000">
-                <a:srgbClr val="4F81BD">
-                  <a:tint val="15000"/>
-                  <a:satMod val="350000"/>
-                </a:srgbClr>
-              </a:gs>
-            </a:gsLst>
-            <a:lin ang="16200000" scaled="1"/>
-          </a:gradFill>
-          <a:ln w="9525" cap="flat" cmpd="sng" algn="ctr">
-            <a:solidFill>
-              <a:srgbClr val="4F81BD">
-                <a:shade val="95000"/>
-                <a:satMod val="105000"/>
-              </a:srgbClr>
-            </a:solidFill>
-            <a:prstDash val="solid"/>
-          </a:ln>
-          <a:effectLst>
-            <a:outerShdw blurRad="40000" dist="20000" dir="5400000" rotWithShape="0">
-              <a:srgbClr val="000000">
-                <a:alpha val="38000"/>
-              </a:srgbClr>
-            </a:outerShdw>
-          </a:effectLst>
-        </p:spPr>
-        <p:txBody>
-          <a:bodyPr rtlCol="0" anchor="ctr"/>
-          <a:lstStyle/>
-          <a:p>
-            <a:pPr marL="0" marR="0" lvl="0" indent="0" algn="ctr" defTabSz="457200" eaLnBrk="1" fontAlgn="auto" latinLnBrk="0" hangingPunct="1">
-              <a:lnSpc>
-                <a:spcPct val="100000"/>
-              </a:lnSpc>
-              <a:spcBef>
-                <a:spcPts val="0"/>
-              </a:spcBef>
-              <a:spcAft>
-                <a:spcPts val="0"/>
-              </a:spcAft>
-              <a:buClrTx/>
-              <a:buSzTx/>
-              <a:buFontTx/>
-              <a:buNone/>
-              <a:tabLst/>
-              <a:defRPr/>
-            </a:pPr>
-            <a:r>
-              <a:rPr kumimoji="0" lang="en-US" sz="2400" b="0" i="0" u="none" strike="noStrike" kern="0" cap="none" spc="0" normalizeH="0" baseline="0" noProof="0" dirty="0">
-                <a:ln>
-                  <a:noFill/>
-                </a:ln>
-                <a:solidFill>
-                  <a:prstClr val="black"/>
-                </a:solidFill>
-                <a:effectLst/>
-                <a:uLnTx/>
-                <a:uFillTx/>
-                <a:latin typeface="Calibri"/>
-                <a:ea typeface="+mn-ea"/>
-                <a:cs typeface="+mn-cs"/>
-              </a:rPr>
-              <a:t>Review</a:t>
-            </a:r>
-          </a:p>
-        </p:txBody>
-      </p:sp>
-    </p:spTree>
-    <p:extLst>
-      <p:ext uri="{BB962C8B-B14F-4D97-AF65-F5344CB8AC3E}">
-        <p14:creationId xmlns:p14="http://schemas.microsoft.com/office/powerpoint/2010/main" val="1120632604"/>
-      </p:ext>
-    </p:extLst>
-  </p:cSld>
-  <p:clrMapOvr>
-    <a:masterClrMapping/>
-  </p:clrMapOvr>
-</p:sld>
-</file>
-
-<file path=ppt/slides/slide20.xml><?xml version="1.0" encoding="utf-8"?>
-<p:sld xmlns:a="http://schemas.openxmlformats.org/drawingml/2006/main" xmlns:r="http://schemas.openxmlformats.org/officeDocument/2006/relationships" xmlns:p="http://schemas.openxmlformats.org/presentationml/2006/main">
-  <p:cSld>
-    <p:spTree>
-      <p:nvGrpSpPr>
-        <p:cNvPr id="1" name=""/>
-        <p:cNvGrpSpPr/>
-        <p:nvPr/>
-      </p:nvGrpSpPr>
-      <p:grpSpPr>
-        <a:xfrm>
-          <a:off x="0" y="0"/>
-          <a:ext cx="0" cy="0"/>
-          <a:chOff x="0" y="0"/>
-          <a:chExt cx="0" cy="0"/>
-        </a:xfrm>
-      </p:grpSpPr>
-      <p:sp>
-        <p:nvSpPr>
           <p:cNvPr id="2" name="Title 1">
             <a:extLst>
               <a:ext uri="{FF2B5EF4-FFF2-40B4-BE49-F238E27FC236}">
@@ -16800,7 +21101,7 @@
             <a:fld id="{EA7C8D44-3667-46F6-9772-CC52308E2A7F}" type="slidenum">
               <a:rPr kumimoji="0" lang="en-US" smtClean="0"/>
               <a:pPr/>
-              <a:t>20</a:t>
+              <a:t>26</a:t>
             </a:fld>
             <a:endParaRPr kumimoji="0" lang="en-US" dirty="0"/>
           </a:p>
@@ -17485,7 +21786,7 @@
 </p:sld>
 </file>
 
-<file path=ppt/slides/slide21.xml><?xml version="1.0" encoding="utf-8"?>
+<file path=ppt/slides/slide27.xml><?xml version="1.0" encoding="utf-8"?>
 <p:sld xmlns:a="http://schemas.openxmlformats.org/drawingml/2006/main" xmlns:r="http://schemas.openxmlformats.org/officeDocument/2006/relationships" xmlns:p="http://schemas.openxmlformats.org/presentationml/2006/main">
   <p:cSld>
     <p:spTree>
@@ -17560,7 +21861,7 @@
             <a:fld id="{EA7C8D44-3667-46F6-9772-CC52308E2A7F}" type="slidenum">
               <a:rPr kumimoji="0" lang="en-US" smtClean="0"/>
               <a:pPr/>
-              <a:t>21</a:t>
+              <a:t>27</a:t>
             </a:fld>
             <a:endParaRPr kumimoji="0" lang="en-US" dirty="0"/>
           </a:p>
@@ -18378,7 +22679,7 @@
 </p:sld>
 </file>
 
-<file path=ppt/slides/slide22.xml><?xml version="1.0" encoding="utf-8"?>
+<file path=ppt/slides/slide28.xml><?xml version="1.0" encoding="utf-8"?>
 <p:sld xmlns:a="http://schemas.openxmlformats.org/drawingml/2006/main" xmlns:r="http://schemas.openxmlformats.org/officeDocument/2006/relationships" xmlns:p="http://schemas.openxmlformats.org/presentationml/2006/main">
   <p:cSld>
     <p:spTree>
@@ -18449,7 +22750,7 @@
             <a:fld id="{EA7C8D44-3667-46F6-9772-CC52308E2A7F}" type="slidenum">
               <a:rPr kumimoji="0" lang="en-US" smtClean="0"/>
               <a:pPr/>
-              <a:t>22</a:t>
+              <a:t>28</a:t>
             </a:fld>
             <a:endParaRPr kumimoji="0" lang="en-US" dirty="0"/>
           </a:p>
@@ -19046,7 +23347,7 @@
 </p:sld>
 </file>
 
-<file path=ppt/slides/slide23.xml><?xml version="1.0" encoding="utf-8"?>
+<file path=ppt/slides/slide29.xml><?xml version="1.0" encoding="utf-8"?>
 <p:sld xmlns:a="http://schemas.openxmlformats.org/drawingml/2006/main" xmlns:r="http://schemas.openxmlformats.org/officeDocument/2006/relationships" xmlns:p="http://schemas.openxmlformats.org/presentationml/2006/main">
   <p:cSld>
     <p:spTree>
@@ -19117,7 +23418,7 @@
             <a:fld id="{EA7C8D44-3667-46F6-9772-CC52308E2A7F}" type="slidenum">
               <a:rPr kumimoji="0" lang="en-US" smtClean="0"/>
               <a:pPr/>
-              <a:t>23</a:t>
+              <a:t>29</a:t>
             </a:fld>
             <a:endParaRPr kumimoji="0" lang="en-US" dirty="0"/>
           </a:p>
@@ -20071,238 +24372,6 @@
     <p:extLst>
       <p:ext uri="{BB962C8B-B14F-4D97-AF65-F5344CB8AC3E}">
         <p14:creationId xmlns:p14="http://schemas.microsoft.com/office/powerpoint/2010/main" val="658532706"/>
-      </p:ext>
-    </p:extLst>
-  </p:cSld>
-  <p:clrMapOvr>
-    <a:masterClrMapping/>
-  </p:clrMapOvr>
-</p:sld>
-</file>
-
-<file path=ppt/slides/slide24.xml><?xml version="1.0" encoding="utf-8"?>
-<p:sld xmlns:a="http://schemas.openxmlformats.org/drawingml/2006/main" xmlns:r="http://schemas.openxmlformats.org/officeDocument/2006/relationships" xmlns:p="http://schemas.openxmlformats.org/presentationml/2006/main">
-  <p:cSld>
-    <p:spTree>
-      <p:nvGrpSpPr>
-        <p:cNvPr id="1" name=""/>
-        <p:cNvGrpSpPr/>
-        <p:nvPr/>
-      </p:nvGrpSpPr>
-      <p:grpSpPr>
-        <a:xfrm>
-          <a:off x="0" y="0"/>
-          <a:ext cx="0" cy="0"/>
-          <a:chOff x="0" y="0"/>
-          <a:chExt cx="0" cy="0"/>
-        </a:xfrm>
-      </p:grpSpPr>
-      <p:sp>
-        <p:nvSpPr>
-          <p:cNvPr id="2" name="Title 1">
-            <a:extLst>
-              <a:ext uri="{FF2B5EF4-FFF2-40B4-BE49-F238E27FC236}">
-                <a16:creationId xmlns:a16="http://schemas.microsoft.com/office/drawing/2014/main" id="{0B680E2F-C62E-EF54-5DBD-340196E1CA5F}"/>
-              </a:ext>
-            </a:extLst>
-          </p:cNvPr>
-          <p:cNvSpPr>
-            <a:spLocks noGrp="1"/>
-          </p:cNvSpPr>
-          <p:nvPr>
-            <p:ph type="title"/>
-          </p:nvPr>
-        </p:nvSpPr>
-        <p:spPr/>
-        <p:txBody>
-          <a:bodyPr/>
-          <a:lstStyle/>
-          <a:p>
-            <a:r>
-              <a:rPr lang="en-US" dirty="0"/>
-              <a:t>Explanations</a:t>
-            </a:r>
-          </a:p>
-        </p:txBody>
-      </p:sp>
-      <p:sp>
-        <p:nvSpPr>
-          <p:cNvPr id="3" name="Slide Number Placeholder 2">
-            <a:extLst>
-              <a:ext uri="{FF2B5EF4-FFF2-40B4-BE49-F238E27FC236}">
-                <a16:creationId xmlns:a16="http://schemas.microsoft.com/office/drawing/2014/main" id="{9ECF1D85-43EB-71B3-363D-9FF339EE4AA2}"/>
-              </a:ext>
-            </a:extLst>
-          </p:cNvPr>
-          <p:cNvSpPr>
-            <a:spLocks noGrp="1"/>
-          </p:cNvSpPr>
-          <p:nvPr>
-            <p:ph type="sldNum" sz="quarter" idx="12"/>
-          </p:nvPr>
-        </p:nvSpPr>
-        <p:spPr/>
-        <p:txBody>
-          <a:bodyPr/>
-          <a:lstStyle/>
-          <a:p>
-            <a:fld id="{EA7C8D44-3667-46F6-9772-CC52308E2A7F}" type="slidenum">
-              <a:rPr kumimoji="0" lang="en-US" smtClean="0"/>
-              <a:pPr/>
-              <a:t>24</a:t>
-            </a:fld>
-            <a:endParaRPr kumimoji="0" lang="en-US" dirty="0"/>
-          </a:p>
-        </p:txBody>
-      </p:sp>
-      <p:sp>
-        <p:nvSpPr>
-          <p:cNvPr id="4" name="Content Placeholder 3">
-            <a:extLst>
-              <a:ext uri="{FF2B5EF4-FFF2-40B4-BE49-F238E27FC236}">
-                <a16:creationId xmlns:a16="http://schemas.microsoft.com/office/drawing/2014/main" id="{E4F57FE1-A328-6D2A-AFB7-A6C1600FE210}"/>
-              </a:ext>
-            </a:extLst>
-          </p:cNvPr>
-          <p:cNvSpPr>
-            <a:spLocks noGrp="1"/>
-          </p:cNvSpPr>
-          <p:nvPr>
-            <p:ph sz="quarter" idx="1"/>
-          </p:nvPr>
-        </p:nvSpPr>
-        <p:spPr/>
-        <p:txBody>
-          <a:bodyPr>
-            <a:normAutofit fontScale="70000" lnSpcReduction="20000"/>
-          </a:bodyPr>
-          <a:lstStyle/>
-          <a:p>
-            <a:r>
-              <a:rPr lang="en-US" dirty="0"/>
-              <a:t>These two lines sign-extend the lower 16 bits of r3 into a full 32-bit value in r0.</a:t>
-            </a:r>
-          </a:p>
-          <a:p>
-            <a:r>
-              <a:rPr lang="en-US" dirty="0"/>
-              <a:t>MOV r0, r3, LSL #16</a:t>
-            </a:r>
-          </a:p>
-          <a:p>
-            <a:pPr lvl="1"/>
-            <a:r>
-              <a:rPr lang="en-US" dirty="0"/>
-              <a:t>Shifts the value in r3 left by 16 bits.</a:t>
-            </a:r>
-          </a:p>
-          <a:p>
-            <a:pPr lvl="1"/>
-            <a:r>
-              <a:rPr lang="en-US" dirty="0"/>
-              <a:t>The lower 16 bits of r3 (the part we care about) move up into the upper 16 bits of r0.</a:t>
-            </a:r>
-          </a:p>
-          <a:p>
-            <a:pPr lvl="1"/>
-            <a:r>
-              <a:rPr lang="en-US" dirty="0"/>
-              <a:t>The bottom 16 bits of r0 become 0.</a:t>
-            </a:r>
-          </a:p>
-          <a:p>
-            <a:r>
-              <a:rPr lang="en-US" dirty="0"/>
-              <a:t>MOV r0, r0, ASR #16</a:t>
-            </a:r>
-          </a:p>
-          <a:p>
-            <a:pPr lvl="1"/>
-            <a:r>
-              <a:rPr lang="en-US" dirty="0"/>
-              <a:t>Shifts the value right by 16 bits, but preserves the sign (arithmetic shift).</a:t>
-            </a:r>
-          </a:p>
-          <a:p>
-            <a:pPr lvl="1"/>
-            <a:r>
-              <a:rPr lang="en-US" dirty="0"/>
-              <a:t>That means if bit 31 (the sign bit after the first shift) is 1, it fills with 1s; if 0, it fills with 0s.</a:t>
-            </a:r>
-          </a:p>
-          <a:p>
-            <a:pPr lvl="1"/>
-            <a:r>
-              <a:rPr lang="en-US" dirty="0"/>
-              <a:t>The result is a sign-extended 16-bit value from the original lower half of r3.</a:t>
-            </a:r>
-          </a:p>
-          <a:p>
-            <a:r>
-              <a:rPr lang="en-US" dirty="0"/>
-              <a:t>Examples: </a:t>
-            </a:r>
-          </a:p>
-          <a:p>
-            <a:r>
-              <a:rPr lang="en-US" dirty="0"/>
-              <a:t>r3 = 0x00001234</a:t>
-            </a:r>
-          </a:p>
-          <a:p>
-            <a:pPr lvl="1"/>
-            <a:r>
-              <a:rPr lang="en-US" dirty="0"/>
-              <a:t>LSL #16 → 0x12340000</a:t>
-            </a:r>
-          </a:p>
-          <a:p>
-            <a:pPr lvl="1"/>
-            <a:r>
-              <a:rPr lang="en-US" dirty="0"/>
-              <a:t>ASR #16 → 0x00001234</a:t>
-            </a:r>
-          </a:p>
-          <a:p>
-            <a:r>
-              <a:rPr lang="en-US" dirty="0"/>
-              <a:t>r3 = 0x0000ABCD</a:t>
-            </a:r>
-          </a:p>
-          <a:p>
-            <a:pPr lvl="1"/>
-            <a:r>
-              <a:rPr lang="en-US" dirty="0"/>
-              <a:t>LSL #16 → 0xABCD0000</a:t>
-            </a:r>
-          </a:p>
-          <a:p>
-            <a:pPr lvl="1"/>
-            <a:r>
-              <a:rPr lang="en-US" dirty="0"/>
-              <a:t>ASR #16 → 0xFFFFABCD</a:t>
-            </a:r>
-          </a:p>
-          <a:p>
-            <a:r>
-              <a:rPr lang="pt-BR" dirty="0"/>
-              <a:t>Can be replaced with a single instruction:</a:t>
-            </a:r>
-          </a:p>
-          <a:p>
-            <a:pPr lvl="1"/>
-            <a:r>
-              <a:rPr lang="pt-BR" dirty="0"/>
-              <a:t>SXTH  r0, r3   ; r0 = (int16_t) r3, sign-extend</a:t>
-            </a:r>
-            <a:endParaRPr lang="en-US" dirty="0"/>
-          </a:p>
-        </p:txBody>
-      </p:sp>
-    </p:spTree>
-    <p:extLst>
-      <p:ext uri="{BB962C8B-B14F-4D97-AF65-F5344CB8AC3E}">
-        <p14:creationId xmlns:p14="http://schemas.microsoft.com/office/powerpoint/2010/main" val="1757812227"/>
       </p:ext>
     </p:extLst>
   </p:cSld>
@@ -21069,6 +25138,238 @@
     <p:extLst>
       <p:ext uri="{BB962C8B-B14F-4D97-AF65-F5344CB8AC3E}">
         <p14:creationId xmlns:p14="http://schemas.microsoft.com/office/powerpoint/2010/main" val="424972285"/>
+      </p:ext>
+    </p:extLst>
+  </p:cSld>
+  <p:clrMapOvr>
+    <a:masterClrMapping/>
+  </p:clrMapOvr>
+</p:sld>
+</file>
+
+<file path=ppt/slides/slide30.xml><?xml version="1.0" encoding="utf-8"?>
+<p:sld xmlns:a="http://schemas.openxmlformats.org/drawingml/2006/main" xmlns:r="http://schemas.openxmlformats.org/officeDocument/2006/relationships" xmlns:p="http://schemas.openxmlformats.org/presentationml/2006/main">
+  <p:cSld>
+    <p:spTree>
+      <p:nvGrpSpPr>
+        <p:cNvPr id="1" name=""/>
+        <p:cNvGrpSpPr/>
+        <p:nvPr/>
+      </p:nvGrpSpPr>
+      <p:grpSpPr>
+        <a:xfrm>
+          <a:off x="0" y="0"/>
+          <a:ext cx="0" cy="0"/>
+          <a:chOff x="0" y="0"/>
+          <a:chExt cx="0" cy="0"/>
+        </a:xfrm>
+      </p:grpSpPr>
+      <p:sp>
+        <p:nvSpPr>
+          <p:cNvPr id="2" name="Title 1">
+            <a:extLst>
+              <a:ext uri="{FF2B5EF4-FFF2-40B4-BE49-F238E27FC236}">
+                <a16:creationId xmlns:a16="http://schemas.microsoft.com/office/drawing/2014/main" id="{0B680E2F-C62E-EF54-5DBD-340196E1CA5F}"/>
+              </a:ext>
+            </a:extLst>
+          </p:cNvPr>
+          <p:cNvSpPr>
+            <a:spLocks noGrp="1"/>
+          </p:cNvSpPr>
+          <p:nvPr>
+            <p:ph type="title"/>
+          </p:nvPr>
+        </p:nvSpPr>
+        <p:spPr/>
+        <p:txBody>
+          <a:bodyPr/>
+          <a:lstStyle/>
+          <a:p>
+            <a:r>
+              <a:rPr lang="en-US" dirty="0"/>
+              <a:t>Explanations</a:t>
+            </a:r>
+          </a:p>
+        </p:txBody>
+      </p:sp>
+      <p:sp>
+        <p:nvSpPr>
+          <p:cNvPr id="3" name="Slide Number Placeholder 2">
+            <a:extLst>
+              <a:ext uri="{FF2B5EF4-FFF2-40B4-BE49-F238E27FC236}">
+                <a16:creationId xmlns:a16="http://schemas.microsoft.com/office/drawing/2014/main" id="{9ECF1D85-43EB-71B3-363D-9FF339EE4AA2}"/>
+              </a:ext>
+            </a:extLst>
+          </p:cNvPr>
+          <p:cNvSpPr>
+            <a:spLocks noGrp="1"/>
+          </p:cNvSpPr>
+          <p:nvPr>
+            <p:ph type="sldNum" sz="quarter" idx="12"/>
+          </p:nvPr>
+        </p:nvSpPr>
+        <p:spPr/>
+        <p:txBody>
+          <a:bodyPr/>
+          <a:lstStyle/>
+          <a:p>
+            <a:fld id="{EA7C8D44-3667-46F6-9772-CC52308E2A7F}" type="slidenum">
+              <a:rPr kumimoji="0" lang="en-US" smtClean="0"/>
+              <a:pPr/>
+              <a:t>30</a:t>
+            </a:fld>
+            <a:endParaRPr kumimoji="0" lang="en-US" dirty="0"/>
+          </a:p>
+        </p:txBody>
+      </p:sp>
+      <p:sp>
+        <p:nvSpPr>
+          <p:cNvPr id="4" name="Content Placeholder 3">
+            <a:extLst>
+              <a:ext uri="{FF2B5EF4-FFF2-40B4-BE49-F238E27FC236}">
+                <a16:creationId xmlns:a16="http://schemas.microsoft.com/office/drawing/2014/main" id="{E4F57FE1-A328-6D2A-AFB7-A6C1600FE210}"/>
+              </a:ext>
+            </a:extLst>
+          </p:cNvPr>
+          <p:cNvSpPr>
+            <a:spLocks noGrp="1"/>
+          </p:cNvSpPr>
+          <p:nvPr>
+            <p:ph sz="quarter" idx="1"/>
+          </p:nvPr>
+        </p:nvSpPr>
+        <p:spPr/>
+        <p:txBody>
+          <a:bodyPr>
+            <a:normAutofit fontScale="70000" lnSpcReduction="20000"/>
+          </a:bodyPr>
+          <a:lstStyle/>
+          <a:p>
+            <a:r>
+              <a:rPr lang="en-US" dirty="0"/>
+              <a:t>These two lines sign-extend the lower 16 bits of r3 into a full 32-bit value in r0.</a:t>
+            </a:r>
+          </a:p>
+          <a:p>
+            <a:r>
+              <a:rPr lang="en-US" dirty="0"/>
+              <a:t>MOV r0, r3, LSL #16</a:t>
+            </a:r>
+          </a:p>
+          <a:p>
+            <a:pPr lvl="1"/>
+            <a:r>
+              <a:rPr lang="en-US" dirty="0"/>
+              <a:t>Shifts the value in r3 left by 16 bits.</a:t>
+            </a:r>
+          </a:p>
+          <a:p>
+            <a:pPr lvl="1"/>
+            <a:r>
+              <a:rPr lang="en-US" dirty="0"/>
+              <a:t>The lower 16 bits of r3 (the part we care about) move up into the upper 16 bits of r0.</a:t>
+            </a:r>
+          </a:p>
+          <a:p>
+            <a:pPr lvl="1"/>
+            <a:r>
+              <a:rPr lang="en-US" dirty="0"/>
+              <a:t>The bottom 16 bits of r0 become 0.</a:t>
+            </a:r>
+          </a:p>
+          <a:p>
+            <a:r>
+              <a:rPr lang="en-US" dirty="0"/>
+              <a:t>MOV r0, r0, ASR #16</a:t>
+            </a:r>
+          </a:p>
+          <a:p>
+            <a:pPr lvl="1"/>
+            <a:r>
+              <a:rPr lang="en-US" dirty="0"/>
+              <a:t>Shifts the value right by 16 bits, but preserves the sign (arithmetic shift).</a:t>
+            </a:r>
+          </a:p>
+          <a:p>
+            <a:pPr lvl="1"/>
+            <a:r>
+              <a:rPr lang="en-US" dirty="0"/>
+              <a:t>That means if bit 31 (the sign bit after the first shift) is 1, it fills with 1s; if 0, it fills with 0s.</a:t>
+            </a:r>
+          </a:p>
+          <a:p>
+            <a:pPr lvl="1"/>
+            <a:r>
+              <a:rPr lang="en-US" dirty="0"/>
+              <a:t>The result is a sign-extended 16-bit value from the original lower half of r3.</a:t>
+            </a:r>
+          </a:p>
+          <a:p>
+            <a:r>
+              <a:rPr lang="en-US" dirty="0"/>
+              <a:t>Examples: </a:t>
+            </a:r>
+          </a:p>
+          <a:p>
+            <a:r>
+              <a:rPr lang="en-US" dirty="0"/>
+              <a:t>r3 = 0x00001234</a:t>
+            </a:r>
+          </a:p>
+          <a:p>
+            <a:pPr lvl="1"/>
+            <a:r>
+              <a:rPr lang="en-US" dirty="0"/>
+              <a:t>LSL #16 → 0x12340000</a:t>
+            </a:r>
+          </a:p>
+          <a:p>
+            <a:pPr lvl="1"/>
+            <a:r>
+              <a:rPr lang="en-US" dirty="0"/>
+              <a:t>ASR #16 → 0x00001234</a:t>
+            </a:r>
+          </a:p>
+          <a:p>
+            <a:r>
+              <a:rPr lang="en-US" dirty="0"/>
+              <a:t>r3 = 0x0000ABCD</a:t>
+            </a:r>
+          </a:p>
+          <a:p>
+            <a:pPr lvl="1"/>
+            <a:r>
+              <a:rPr lang="en-US" dirty="0"/>
+              <a:t>LSL #16 → 0xABCD0000</a:t>
+            </a:r>
+          </a:p>
+          <a:p>
+            <a:pPr lvl="1"/>
+            <a:r>
+              <a:rPr lang="en-US" dirty="0"/>
+              <a:t>ASR #16 → 0xFFFFABCD</a:t>
+            </a:r>
+          </a:p>
+          <a:p>
+            <a:r>
+              <a:rPr lang="pt-BR" dirty="0"/>
+              <a:t>Can be replaced with a single instruction:</a:t>
+            </a:r>
+          </a:p>
+          <a:p>
+            <a:pPr lvl="1"/>
+            <a:r>
+              <a:rPr lang="pt-BR" dirty="0"/>
+              <a:t>SXTH  r0, r3   ; r0 = (int16_t) r3, sign-extend</a:t>
+            </a:r>
+            <a:endParaRPr lang="en-US" dirty="0"/>
+          </a:p>
+        </p:txBody>
+      </p:sp>
+    </p:spTree>
+    <p:extLst>
+      <p:ext uri="{BB962C8B-B14F-4D97-AF65-F5344CB8AC3E}">
+        <p14:creationId xmlns:p14="http://schemas.microsoft.com/office/powerpoint/2010/main" val="1757812227"/>
       </p:ext>
     </p:extLst>
   </p:cSld>
@@ -27577,13 +31878,7 @@
   <p:cSld>
     <p:spTree>
       <p:nvGrpSpPr>
-        <p:cNvPr id="1" name="">
-          <a:extLst>
-            <a:ext uri="{FF2B5EF4-FFF2-40B4-BE49-F238E27FC236}">
-              <a16:creationId xmlns:a16="http://schemas.microsoft.com/office/drawing/2014/main" id="{18DFCAEB-CD92-F6E6-96EC-622670592FF2}"/>
-            </a:ext>
-          </a:extLst>
-        </p:cNvPr>
+        <p:cNvPr id="1" name=""/>
         <p:cNvGrpSpPr/>
         <p:nvPr/>
       </p:nvGrpSpPr>
@@ -27597,13 +31892,154 @@
       </p:grpSpPr>
       <p:sp>
         <p:nvSpPr>
-          <p:cNvPr id="2" name="Title 1">
-            <a:extLst>
-              <a:ext uri="{FF2B5EF4-FFF2-40B4-BE49-F238E27FC236}">
-                <a16:creationId xmlns:a16="http://schemas.microsoft.com/office/drawing/2014/main" id="{B8B35D03-E63B-948E-7B28-FE2BC0D48EA8}"/>
-              </a:ext>
-            </a:extLst>
-          </p:cNvPr>
+          <p:cNvPr id="41" name="Rectangle 40"/>
+          <p:cNvSpPr/>
+          <p:nvPr/>
+        </p:nvSpPr>
+        <p:spPr>
+          <a:xfrm>
+            <a:off x="4127376" y="2348880"/>
+            <a:ext cx="1296144" cy="360040"/>
+          </a:xfrm>
+          <a:prstGeom prst="rect">
+            <a:avLst/>
+          </a:prstGeom>
+          <a:solidFill>
+            <a:schemeClr val="bg1"/>
+          </a:solidFill>
+          <a:ln>
+            <a:prstDash val="dash"/>
+          </a:ln>
+        </p:spPr>
+        <p:style>
+          <a:lnRef idx="2">
+            <a:schemeClr val="accent1">
+              <a:shade val="50000"/>
+            </a:schemeClr>
+          </a:lnRef>
+          <a:fillRef idx="1">
+            <a:schemeClr val="accent1"/>
+          </a:fillRef>
+          <a:effectRef idx="0">
+            <a:schemeClr val="accent1"/>
+          </a:effectRef>
+          <a:fontRef idx="minor">
+            <a:schemeClr val="lt1"/>
+          </a:fontRef>
+        </p:style>
+        <p:txBody>
+          <a:bodyPr rtlCol="0" anchor="ctr"/>
+          <a:lstStyle/>
+          <a:p>
+            <a:pPr algn="ctr"/>
+            <a:endParaRPr lang="en-GB" sz="1600" b="1">
+              <a:latin typeface="Consolas" panose="020B0609020204030204" pitchFamily="49" charset="0"/>
+              <a:cs typeface="Consolas" panose="020B0609020204030204" pitchFamily="49" charset="0"/>
+            </a:endParaRPr>
+          </a:p>
+        </p:txBody>
+      </p:sp>
+      <p:sp>
+        <p:nvSpPr>
+          <p:cNvPr id="29" name="Rectangle 28"/>
+          <p:cNvSpPr/>
+          <p:nvPr/>
+        </p:nvSpPr>
+        <p:spPr>
+          <a:xfrm>
+            <a:off x="6230164" y="2984680"/>
+            <a:ext cx="1296144" cy="360040"/>
+          </a:xfrm>
+          <a:prstGeom prst="rect">
+            <a:avLst/>
+          </a:prstGeom>
+          <a:solidFill>
+            <a:schemeClr val="bg1"/>
+          </a:solidFill>
+          <a:ln>
+            <a:prstDash val="dash"/>
+          </a:ln>
+        </p:spPr>
+        <p:style>
+          <a:lnRef idx="2">
+            <a:schemeClr val="accent1">
+              <a:shade val="50000"/>
+            </a:schemeClr>
+          </a:lnRef>
+          <a:fillRef idx="1">
+            <a:schemeClr val="accent1"/>
+          </a:fillRef>
+          <a:effectRef idx="0">
+            <a:schemeClr val="accent1"/>
+          </a:effectRef>
+          <a:fontRef idx="minor">
+            <a:schemeClr val="lt1"/>
+          </a:fontRef>
+        </p:style>
+        <p:txBody>
+          <a:bodyPr rtlCol="0" anchor="ctr"/>
+          <a:lstStyle/>
+          <a:p>
+            <a:pPr algn="ctr"/>
+            <a:endParaRPr lang="en-GB" sz="1600" b="1">
+              <a:latin typeface="Consolas" panose="020B0609020204030204" pitchFamily="49" charset="0"/>
+              <a:cs typeface="Consolas" panose="020B0609020204030204" pitchFamily="49" charset="0"/>
+            </a:endParaRPr>
+          </a:p>
+        </p:txBody>
+      </p:sp>
+      <p:sp>
+        <p:nvSpPr>
+          <p:cNvPr id="27" name="Rectangle 26"/>
+          <p:cNvSpPr/>
+          <p:nvPr/>
+        </p:nvSpPr>
+        <p:spPr>
+          <a:xfrm>
+            <a:off x="6230164" y="4423395"/>
+            <a:ext cx="1296144" cy="360040"/>
+          </a:xfrm>
+          <a:prstGeom prst="rect">
+            <a:avLst/>
+          </a:prstGeom>
+          <a:solidFill>
+            <a:schemeClr val="bg1"/>
+          </a:solidFill>
+          <a:ln>
+            <a:prstDash val="dash"/>
+          </a:ln>
+        </p:spPr>
+        <p:style>
+          <a:lnRef idx="2">
+            <a:schemeClr val="accent1">
+              <a:shade val="50000"/>
+            </a:schemeClr>
+          </a:lnRef>
+          <a:fillRef idx="1">
+            <a:schemeClr val="accent1"/>
+          </a:fillRef>
+          <a:effectRef idx="0">
+            <a:schemeClr val="accent1"/>
+          </a:effectRef>
+          <a:fontRef idx="minor">
+            <a:schemeClr val="lt1"/>
+          </a:fontRef>
+        </p:style>
+        <p:txBody>
+          <a:bodyPr rtlCol="0" anchor="ctr"/>
+          <a:lstStyle/>
+          <a:p>
+            <a:pPr algn="ctr"/>
+            <a:endParaRPr lang="en-GB" sz="1600" b="1">
+              <a:latin typeface="Consolas" panose="020B0609020204030204" pitchFamily="49" charset="0"/>
+              <a:cs typeface="Consolas" panose="020B0609020204030204" pitchFamily="49" charset="0"/>
+            </a:endParaRPr>
+          </a:p>
+        </p:txBody>
+      </p:sp>
+      <p:sp>
+        <p:nvSpPr>
+          <p:cNvPr id="2" name="Title 1"/>
           <p:cNvSpPr>
             <a:spLocks noGrp="1"/>
           </p:cNvSpPr>
@@ -27613,27 +32049,655 @@
         </p:nvSpPr>
         <p:spPr/>
         <p:txBody>
-          <a:bodyPr>
-            <a:normAutofit fontScale="90000"/>
+          <a:bodyPr/>
+          <a:lstStyle/>
+          <a:p>
+            <a:r>
+              <a:rPr lang="en-GB" dirty="0"/>
+              <a:t>Stack</a:t>
+            </a:r>
+          </a:p>
+        </p:txBody>
+      </p:sp>
+      <p:sp>
+        <p:nvSpPr>
+          <p:cNvPr id="6" name="Rectangle 5"/>
+          <p:cNvSpPr/>
+          <p:nvPr/>
+        </p:nvSpPr>
+        <p:spPr>
+          <a:xfrm>
+            <a:off x="4127376" y="1628800"/>
+            <a:ext cx="1296144" cy="360040"/>
+          </a:xfrm>
+          <a:prstGeom prst="rect">
+            <a:avLst/>
+          </a:prstGeom>
+          <a:solidFill>
+            <a:schemeClr val="bg1"/>
+          </a:solidFill>
+        </p:spPr>
+        <p:style>
+          <a:lnRef idx="2">
+            <a:schemeClr val="accent1">
+              <a:shade val="50000"/>
+            </a:schemeClr>
+          </a:lnRef>
+          <a:fillRef idx="1">
+            <a:schemeClr val="accent1"/>
+          </a:fillRef>
+          <a:effectRef idx="0">
+            <a:schemeClr val="accent1"/>
+          </a:effectRef>
+          <a:fontRef idx="minor">
+            <a:schemeClr val="lt1"/>
+          </a:fontRef>
+        </p:style>
+        <p:txBody>
+          <a:bodyPr rtlCol="0" anchor="ctr"/>
+          <a:lstStyle/>
+          <a:p>
+            <a:pPr algn="ctr"/>
+            <a:endParaRPr lang="en-GB" sz="1600" b="1">
+              <a:latin typeface="Consolas" panose="020B0609020204030204" pitchFamily="49" charset="0"/>
+              <a:cs typeface="Consolas" panose="020B0609020204030204" pitchFamily="49" charset="0"/>
+            </a:endParaRPr>
+          </a:p>
+        </p:txBody>
+      </p:sp>
+      <p:sp>
+        <p:nvSpPr>
+          <p:cNvPr id="7" name="TextBox 6"/>
+          <p:cNvSpPr txBox="1"/>
+          <p:nvPr/>
+        </p:nvSpPr>
+        <p:spPr>
+          <a:xfrm>
+            <a:off x="3551312" y="1628800"/>
+            <a:ext cx="576064" cy="338554"/>
+          </a:xfrm>
+          <a:prstGeom prst="rect">
+            <a:avLst/>
+          </a:prstGeom>
+          <a:noFill/>
+        </p:spPr>
+        <p:txBody>
+          <a:bodyPr wrap="square" rtlCol="0">
+            <a:spAutoFit/>
           </a:bodyPr>
           <a:lstStyle/>
           <a:p>
             <a:r>
-              <a:rPr lang="en-US" dirty="0"/>
-              <a:t>What’s wrong? Passing arguments and Returning Value</a:t>
-            </a:r>
-          </a:p>
-        </p:txBody>
-      </p:sp>
-      <p:sp>
-        <p:nvSpPr>
-          <p:cNvPr id="3" name="Slide Number Placeholder 2">
-            <a:extLst>
-              <a:ext uri="{FF2B5EF4-FFF2-40B4-BE49-F238E27FC236}">
-                <a16:creationId xmlns:a16="http://schemas.microsoft.com/office/drawing/2014/main" id="{F2A24FAD-DC69-0014-9A87-E1D9B0AFB91E}"/>
-              </a:ext>
-            </a:extLst>
-          </p:cNvPr>
+              <a:rPr lang="en-GB" sz="1600" b="1" dirty="0">
+                <a:latin typeface="Consolas" panose="020B0609020204030204" pitchFamily="49" charset="0"/>
+                <a:cs typeface="Consolas" panose="020B0609020204030204" pitchFamily="49" charset="0"/>
+              </a:rPr>
+              <a:t>R1</a:t>
+            </a:r>
+          </a:p>
+        </p:txBody>
+      </p:sp>
+      <p:sp>
+        <p:nvSpPr>
+          <p:cNvPr id="9" name="Rectangle 8"/>
+          <p:cNvSpPr/>
+          <p:nvPr/>
+        </p:nvSpPr>
+        <p:spPr>
+          <a:xfrm>
+            <a:off x="4127376" y="1988840"/>
+            <a:ext cx="1296144" cy="360040"/>
+          </a:xfrm>
+          <a:prstGeom prst="rect">
+            <a:avLst/>
+          </a:prstGeom>
+          <a:solidFill>
+            <a:schemeClr val="bg1"/>
+          </a:solidFill>
+        </p:spPr>
+        <p:style>
+          <a:lnRef idx="2">
+            <a:schemeClr val="accent1">
+              <a:shade val="50000"/>
+            </a:schemeClr>
+          </a:lnRef>
+          <a:fillRef idx="1">
+            <a:schemeClr val="accent1"/>
+          </a:fillRef>
+          <a:effectRef idx="0">
+            <a:schemeClr val="accent1"/>
+          </a:effectRef>
+          <a:fontRef idx="minor">
+            <a:schemeClr val="lt1"/>
+          </a:fontRef>
+        </p:style>
+        <p:txBody>
+          <a:bodyPr rtlCol="0" anchor="ctr"/>
+          <a:lstStyle/>
+          <a:p>
+            <a:pPr algn="ctr"/>
+            <a:endParaRPr lang="en-GB" sz="1600" b="1">
+              <a:latin typeface="Consolas" panose="020B0609020204030204" pitchFamily="49" charset="0"/>
+              <a:cs typeface="Consolas" panose="020B0609020204030204" pitchFamily="49" charset="0"/>
+            </a:endParaRPr>
+          </a:p>
+        </p:txBody>
+      </p:sp>
+      <p:sp>
+        <p:nvSpPr>
+          <p:cNvPr id="10" name="TextBox 9"/>
+          <p:cNvSpPr txBox="1"/>
+          <p:nvPr/>
+        </p:nvSpPr>
+        <p:spPr>
+          <a:xfrm>
+            <a:off x="3551312" y="1988840"/>
+            <a:ext cx="576064" cy="338554"/>
+          </a:xfrm>
+          <a:prstGeom prst="rect">
+            <a:avLst/>
+          </a:prstGeom>
+          <a:noFill/>
+        </p:spPr>
+        <p:txBody>
+          <a:bodyPr wrap="square" rtlCol="0">
+            <a:spAutoFit/>
+          </a:bodyPr>
+          <a:lstStyle/>
+          <a:p>
+            <a:r>
+              <a:rPr lang="en-GB" sz="1600" b="1" dirty="0">
+                <a:latin typeface="Consolas" panose="020B0609020204030204" pitchFamily="49" charset="0"/>
+                <a:cs typeface="Consolas" panose="020B0609020204030204" pitchFamily="49" charset="0"/>
+              </a:rPr>
+              <a:t>R2</a:t>
+            </a:r>
+          </a:p>
+        </p:txBody>
+      </p:sp>
+      <p:sp>
+        <p:nvSpPr>
+          <p:cNvPr id="12" name="Rectangle 11"/>
+          <p:cNvSpPr/>
+          <p:nvPr/>
+        </p:nvSpPr>
+        <p:spPr>
+          <a:xfrm>
+            <a:off x="4127376" y="2708920"/>
+            <a:ext cx="1296144" cy="360040"/>
+          </a:xfrm>
+          <a:prstGeom prst="rect">
+            <a:avLst/>
+          </a:prstGeom>
+          <a:solidFill>
+            <a:schemeClr val="bg1"/>
+          </a:solidFill>
+        </p:spPr>
+        <p:style>
+          <a:lnRef idx="2">
+            <a:schemeClr val="accent1">
+              <a:shade val="50000"/>
+            </a:schemeClr>
+          </a:lnRef>
+          <a:fillRef idx="1">
+            <a:schemeClr val="accent1"/>
+          </a:fillRef>
+          <a:effectRef idx="0">
+            <a:schemeClr val="accent1"/>
+          </a:effectRef>
+          <a:fontRef idx="minor">
+            <a:schemeClr val="lt1"/>
+          </a:fontRef>
+        </p:style>
+        <p:txBody>
+          <a:bodyPr rtlCol="0" anchor="ctr"/>
+          <a:lstStyle/>
+          <a:p>
+            <a:pPr algn="ctr"/>
+            <a:endParaRPr lang="en-GB" sz="1600" b="1">
+              <a:latin typeface="Consolas" panose="020B0609020204030204" pitchFamily="49" charset="0"/>
+              <a:cs typeface="Consolas" panose="020B0609020204030204" pitchFamily="49" charset="0"/>
+            </a:endParaRPr>
+          </a:p>
+        </p:txBody>
+      </p:sp>
+      <p:sp>
+        <p:nvSpPr>
+          <p:cNvPr id="13" name="TextBox 12"/>
+          <p:cNvSpPr txBox="1"/>
+          <p:nvPr/>
+        </p:nvSpPr>
+        <p:spPr>
+          <a:xfrm>
+            <a:off x="2971800" y="2708920"/>
+            <a:ext cx="1155576" cy="338554"/>
+          </a:xfrm>
+          <a:prstGeom prst="rect">
+            <a:avLst/>
+          </a:prstGeom>
+          <a:noFill/>
+        </p:spPr>
+        <p:txBody>
+          <a:bodyPr wrap="square" rtlCol="0">
+            <a:spAutoFit/>
+          </a:bodyPr>
+          <a:lstStyle/>
+          <a:p>
+            <a:pPr algn="r"/>
+            <a:r>
+              <a:rPr lang="en-GB" sz="1600" b="1" dirty="0" err="1">
+                <a:latin typeface="Consolas" panose="020B0609020204030204" pitchFamily="49" charset="0"/>
+                <a:cs typeface="Consolas" panose="020B0609020204030204" pitchFamily="49" charset="0"/>
+              </a:rPr>
+              <a:t>R13</a:t>
+            </a:r>
+            <a:r>
+              <a:rPr lang="en-GB" sz="1600" b="1" dirty="0">
+                <a:latin typeface="Consolas" panose="020B0609020204030204" pitchFamily="49" charset="0"/>
+                <a:cs typeface="Consolas" panose="020B0609020204030204" pitchFamily="49" charset="0"/>
+              </a:rPr>
+              <a:t> (</a:t>
+            </a:r>
+            <a:r>
+              <a:rPr lang="en-GB" sz="1600" b="1" dirty="0" err="1">
+                <a:latin typeface="Consolas" panose="020B0609020204030204" pitchFamily="49" charset="0"/>
+                <a:cs typeface="Consolas" panose="020B0609020204030204" pitchFamily="49" charset="0"/>
+              </a:rPr>
+              <a:t>SP</a:t>
+            </a:r>
+            <a:r>
+              <a:rPr lang="en-GB" sz="1600" b="1" dirty="0">
+                <a:latin typeface="Consolas" panose="020B0609020204030204" pitchFamily="49" charset="0"/>
+                <a:cs typeface="Consolas" panose="020B0609020204030204" pitchFamily="49" charset="0"/>
+              </a:rPr>
+              <a:t>)</a:t>
+            </a:r>
+          </a:p>
+        </p:txBody>
+      </p:sp>
+      <p:sp>
+        <p:nvSpPr>
+          <p:cNvPr id="14" name="Rectangle 13"/>
+          <p:cNvSpPr/>
+          <p:nvPr/>
+        </p:nvSpPr>
+        <p:spPr>
+          <a:xfrm>
+            <a:off x="6230164" y="3343275"/>
+            <a:ext cx="1296144" cy="360040"/>
+          </a:xfrm>
+          <a:prstGeom prst="rect">
+            <a:avLst/>
+          </a:prstGeom>
+          <a:solidFill>
+            <a:schemeClr val="bg1"/>
+          </a:solidFill>
+        </p:spPr>
+        <p:style>
+          <a:lnRef idx="2">
+            <a:schemeClr val="accent1">
+              <a:shade val="50000"/>
+            </a:schemeClr>
+          </a:lnRef>
+          <a:fillRef idx="1">
+            <a:schemeClr val="accent1"/>
+          </a:fillRef>
+          <a:effectRef idx="0">
+            <a:schemeClr val="accent1"/>
+          </a:effectRef>
+          <a:fontRef idx="minor">
+            <a:schemeClr val="lt1"/>
+          </a:fontRef>
+        </p:style>
+        <p:txBody>
+          <a:bodyPr rtlCol="0" anchor="ctr"/>
+          <a:lstStyle/>
+          <a:p>
+            <a:pPr algn="ctr"/>
+            <a:endParaRPr lang="en-GB" sz="1600" b="1">
+              <a:latin typeface="Consolas" panose="020B0609020204030204" pitchFamily="49" charset="0"/>
+              <a:cs typeface="Consolas" panose="020B0609020204030204" pitchFamily="49" charset="0"/>
+            </a:endParaRPr>
+          </a:p>
+        </p:txBody>
+      </p:sp>
+      <p:sp>
+        <p:nvSpPr>
+          <p:cNvPr id="15" name="TextBox 14"/>
+          <p:cNvSpPr txBox="1"/>
+          <p:nvPr/>
+        </p:nvSpPr>
+        <p:spPr>
+          <a:xfrm>
+            <a:off x="7526308" y="3343275"/>
+            <a:ext cx="1368152" cy="338554"/>
+          </a:xfrm>
+          <a:prstGeom prst="rect">
+            <a:avLst/>
+          </a:prstGeom>
+          <a:noFill/>
+        </p:spPr>
+        <p:txBody>
+          <a:bodyPr wrap="square" rtlCol="0">
+            <a:spAutoFit/>
+          </a:bodyPr>
+          <a:lstStyle/>
+          <a:p>
+            <a:pPr algn="ctr"/>
+            <a:r>
+              <a:rPr lang="en-GB" sz="1600" b="1" dirty="0">
+                <a:latin typeface="Consolas" panose="020B0609020204030204" pitchFamily="49" charset="0"/>
+                <a:cs typeface="Consolas" panose="020B0609020204030204" pitchFamily="49" charset="0"/>
+              </a:rPr>
+              <a:t>0x20000200</a:t>
+            </a:r>
+          </a:p>
+        </p:txBody>
+      </p:sp>
+      <p:sp>
+        <p:nvSpPr>
+          <p:cNvPr id="16" name="Rectangle 15"/>
+          <p:cNvSpPr/>
+          <p:nvPr/>
+        </p:nvSpPr>
+        <p:spPr>
+          <a:xfrm>
+            <a:off x="6230164" y="3703315"/>
+            <a:ext cx="1296144" cy="360040"/>
+          </a:xfrm>
+          <a:prstGeom prst="rect">
+            <a:avLst/>
+          </a:prstGeom>
+          <a:solidFill>
+            <a:schemeClr val="bg1"/>
+          </a:solidFill>
+        </p:spPr>
+        <p:style>
+          <a:lnRef idx="2">
+            <a:schemeClr val="accent1">
+              <a:shade val="50000"/>
+            </a:schemeClr>
+          </a:lnRef>
+          <a:fillRef idx="1">
+            <a:schemeClr val="accent1"/>
+          </a:fillRef>
+          <a:effectRef idx="0">
+            <a:schemeClr val="accent1"/>
+          </a:effectRef>
+          <a:fontRef idx="minor">
+            <a:schemeClr val="lt1"/>
+          </a:fontRef>
+        </p:style>
+        <p:txBody>
+          <a:bodyPr rtlCol="0" anchor="ctr"/>
+          <a:lstStyle/>
+          <a:p>
+            <a:pPr algn="ctr"/>
+            <a:endParaRPr lang="en-GB" sz="1600" b="1">
+              <a:latin typeface="Consolas" panose="020B0609020204030204" pitchFamily="49" charset="0"/>
+              <a:cs typeface="Consolas" panose="020B0609020204030204" pitchFamily="49" charset="0"/>
+            </a:endParaRPr>
+          </a:p>
+        </p:txBody>
+      </p:sp>
+      <p:sp>
+        <p:nvSpPr>
+          <p:cNvPr id="17" name="Rectangle 16"/>
+          <p:cNvSpPr/>
+          <p:nvPr/>
+        </p:nvSpPr>
+        <p:spPr>
+          <a:xfrm>
+            <a:off x="6230164" y="4063355"/>
+            <a:ext cx="1296144" cy="360040"/>
+          </a:xfrm>
+          <a:prstGeom prst="rect">
+            <a:avLst/>
+          </a:prstGeom>
+          <a:solidFill>
+            <a:schemeClr val="bg1"/>
+          </a:solidFill>
+        </p:spPr>
+        <p:style>
+          <a:lnRef idx="2">
+            <a:schemeClr val="accent1">
+              <a:shade val="50000"/>
+            </a:schemeClr>
+          </a:lnRef>
+          <a:fillRef idx="1">
+            <a:schemeClr val="accent1"/>
+          </a:fillRef>
+          <a:effectRef idx="0">
+            <a:schemeClr val="accent1"/>
+          </a:effectRef>
+          <a:fontRef idx="minor">
+            <a:schemeClr val="lt1"/>
+          </a:fontRef>
+        </p:style>
+        <p:txBody>
+          <a:bodyPr rtlCol="0" anchor="ctr"/>
+          <a:lstStyle/>
+          <a:p>
+            <a:pPr algn="ctr"/>
+            <a:endParaRPr lang="en-GB" sz="1600" b="1">
+              <a:latin typeface="Consolas" panose="020B0609020204030204" pitchFamily="49" charset="0"/>
+              <a:cs typeface="Consolas" panose="020B0609020204030204" pitchFamily="49" charset="0"/>
+            </a:endParaRPr>
+          </a:p>
+        </p:txBody>
+      </p:sp>
+      <p:sp>
+        <p:nvSpPr>
+          <p:cNvPr id="18" name="TextBox 17"/>
+          <p:cNvSpPr txBox="1"/>
+          <p:nvPr/>
+        </p:nvSpPr>
+        <p:spPr>
+          <a:xfrm>
+            <a:off x="7526308" y="3703315"/>
+            <a:ext cx="1368152" cy="338554"/>
+          </a:xfrm>
+          <a:prstGeom prst="rect">
+            <a:avLst/>
+          </a:prstGeom>
+          <a:noFill/>
+        </p:spPr>
+        <p:txBody>
+          <a:bodyPr wrap="square" rtlCol="0">
+            <a:spAutoFit/>
+          </a:bodyPr>
+          <a:lstStyle/>
+          <a:p>
+            <a:pPr algn="ctr"/>
+            <a:r>
+              <a:rPr lang="en-GB" sz="1600" b="1" dirty="0">
+                <a:latin typeface="Consolas" panose="020B0609020204030204" pitchFamily="49" charset="0"/>
+                <a:cs typeface="Consolas" panose="020B0609020204030204" pitchFamily="49" charset="0"/>
+              </a:rPr>
+              <a:t>0x200001FC</a:t>
+            </a:r>
+          </a:p>
+        </p:txBody>
+      </p:sp>
+      <p:sp>
+        <p:nvSpPr>
+          <p:cNvPr id="19" name="TextBox 18"/>
+          <p:cNvSpPr txBox="1"/>
+          <p:nvPr/>
+        </p:nvSpPr>
+        <p:spPr>
+          <a:xfrm>
+            <a:off x="7526308" y="4063355"/>
+            <a:ext cx="1368152" cy="338554"/>
+          </a:xfrm>
+          <a:prstGeom prst="rect">
+            <a:avLst/>
+          </a:prstGeom>
+          <a:noFill/>
+        </p:spPr>
+        <p:txBody>
+          <a:bodyPr wrap="square" rtlCol="0">
+            <a:spAutoFit/>
+          </a:bodyPr>
+          <a:lstStyle/>
+          <a:p>
+            <a:pPr algn="ctr"/>
+            <a:r>
+              <a:rPr lang="en-GB" sz="1600" b="1" dirty="0">
+                <a:latin typeface="Consolas" panose="020B0609020204030204" pitchFamily="49" charset="0"/>
+                <a:cs typeface="Consolas" panose="020B0609020204030204" pitchFamily="49" charset="0"/>
+              </a:rPr>
+              <a:t>0x200001F8</a:t>
+            </a:r>
+          </a:p>
+        </p:txBody>
+      </p:sp>
+      <p:sp>
+        <p:nvSpPr>
+          <p:cNvPr id="20" name="TextBox 19"/>
+          <p:cNvSpPr txBox="1"/>
+          <p:nvPr/>
+        </p:nvSpPr>
+        <p:spPr>
+          <a:xfrm>
+            <a:off x="4127376" y="2708920"/>
+            <a:ext cx="1368152" cy="338554"/>
+          </a:xfrm>
+          <a:prstGeom prst="rect">
+            <a:avLst/>
+          </a:prstGeom>
+          <a:noFill/>
+        </p:spPr>
+        <p:txBody>
+          <a:bodyPr wrap="square" rtlCol="0">
+            <a:spAutoFit/>
+          </a:bodyPr>
+          <a:lstStyle/>
+          <a:p>
+            <a:pPr algn="ctr"/>
+            <a:r>
+              <a:rPr lang="en-GB" sz="1600" b="1" dirty="0">
+                <a:latin typeface="Consolas" panose="020B0609020204030204" pitchFamily="49" charset="0"/>
+                <a:cs typeface="Consolas" panose="020B0609020204030204" pitchFamily="49" charset="0"/>
+              </a:rPr>
+              <a:t>0x20000200</a:t>
+            </a:r>
+          </a:p>
+        </p:txBody>
+      </p:sp>
+      <p:sp>
+        <p:nvSpPr>
+          <p:cNvPr id="21" name="TextBox 20"/>
+          <p:cNvSpPr txBox="1"/>
+          <p:nvPr/>
+        </p:nvSpPr>
+        <p:spPr>
+          <a:xfrm>
+            <a:off x="4127376" y="1988840"/>
+            <a:ext cx="1296144" cy="338554"/>
+          </a:xfrm>
+          <a:prstGeom prst="rect">
+            <a:avLst/>
+          </a:prstGeom>
+          <a:noFill/>
+        </p:spPr>
+        <p:txBody>
+          <a:bodyPr wrap="square" rtlCol="0">
+            <a:spAutoFit/>
+          </a:bodyPr>
+          <a:lstStyle/>
+          <a:p>
+            <a:pPr algn="r"/>
+            <a:r>
+              <a:rPr lang="en-GB" sz="1600" b="1" dirty="0" err="1">
+                <a:latin typeface="Consolas" panose="020B0609020204030204" pitchFamily="49" charset="0"/>
+                <a:cs typeface="Consolas" panose="020B0609020204030204" pitchFamily="49" charset="0"/>
+              </a:rPr>
+              <a:t>0x22222222</a:t>
+            </a:r>
+            <a:endParaRPr lang="en-GB" sz="1600" b="1" dirty="0">
+              <a:latin typeface="Consolas" panose="020B0609020204030204" pitchFamily="49" charset="0"/>
+              <a:cs typeface="Consolas" panose="020B0609020204030204" pitchFamily="49" charset="0"/>
+            </a:endParaRPr>
+          </a:p>
+        </p:txBody>
+      </p:sp>
+      <p:sp>
+        <p:nvSpPr>
+          <p:cNvPr id="22" name="TextBox 21"/>
+          <p:cNvSpPr txBox="1"/>
+          <p:nvPr/>
+        </p:nvSpPr>
+        <p:spPr>
+          <a:xfrm>
+            <a:off x="4127376" y="1628800"/>
+            <a:ext cx="1296144" cy="338554"/>
+          </a:xfrm>
+          <a:prstGeom prst="rect">
+            <a:avLst/>
+          </a:prstGeom>
+          <a:noFill/>
+        </p:spPr>
+        <p:txBody>
+          <a:bodyPr wrap="square" rtlCol="0">
+            <a:spAutoFit/>
+          </a:bodyPr>
+          <a:lstStyle/>
+          <a:p>
+            <a:pPr algn="r"/>
+            <a:r>
+              <a:rPr lang="en-GB" sz="1600" b="1" dirty="0" err="1">
+                <a:latin typeface="Consolas" panose="020B0609020204030204" pitchFamily="49" charset="0"/>
+                <a:cs typeface="Consolas" panose="020B0609020204030204" pitchFamily="49" charset="0"/>
+              </a:rPr>
+              <a:t>0x11111111</a:t>
+            </a:r>
+            <a:endParaRPr lang="en-GB" sz="1600" b="1" dirty="0">
+              <a:latin typeface="Consolas" panose="020B0609020204030204" pitchFamily="49" charset="0"/>
+              <a:cs typeface="Consolas" panose="020B0609020204030204" pitchFamily="49" charset="0"/>
+            </a:endParaRPr>
+          </a:p>
+        </p:txBody>
+      </p:sp>
+      <p:cxnSp>
+        <p:nvCxnSpPr>
+          <p:cNvPr id="24" name="Straight Arrow Connector 23"/>
+          <p:cNvCxnSpPr/>
+          <p:nvPr/>
+        </p:nvCxnSpPr>
+        <p:spPr>
+          <a:xfrm>
+            <a:off x="5429517" y="2891802"/>
+            <a:ext cx="819965" cy="630275"/>
+          </a:xfrm>
+          <a:prstGeom prst="straightConnector1">
+            <a:avLst/>
+          </a:prstGeom>
+          <a:ln w="19050">
+            <a:solidFill>
+              <a:srgbClr val="C00000"/>
+            </a:solidFill>
+            <a:tailEnd type="arrow"/>
+          </a:ln>
+        </p:spPr>
+        <p:style>
+          <a:lnRef idx="1">
+            <a:schemeClr val="accent1"/>
+          </a:lnRef>
+          <a:fillRef idx="0">
+            <a:schemeClr val="accent1"/>
+          </a:fillRef>
+          <a:effectRef idx="0">
+            <a:schemeClr val="accent1"/>
+          </a:effectRef>
+          <a:fontRef idx="minor">
+            <a:schemeClr val="tx1"/>
+          </a:fontRef>
+        </p:style>
+      </p:cxnSp>
+      <p:sp>
+        <p:nvSpPr>
+          <p:cNvPr id="4" name="Slide Number Placeholder 3"/>
           <p:cNvSpPr>
             <a:spLocks noGrp="1"/>
           </p:cNvSpPr>
@@ -27651,77 +32715,20 @@
               <a:pPr/>
               <a:t>9</a:t>
             </a:fld>
-            <a:endParaRPr kumimoji="0" lang="en-US" dirty="0"/>
-          </a:p>
-        </p:txBody>
-      </p:sp>
-      <p:sp>
-        <p:nvSpPr>
-          <p:cNvPr id="11" name="Rectangle 10">
-            <a:extLst>
-              <a:ext uri="{FF2B5EF4-FFF2-40B4-BE49-F238E27FC236}">
-                <a16:creationId xmlns:a16="http://schemas.microsoft.com/office/drawing/2014/main" id="{41B1B8CA-B3E7-1ACE-322F-D0B4A4D4E57D}"/>
-              </a:ext>
-            </a:extLst>
-          </p:cNvPr>
-          <p:cNvSpPr/>
+            <a:endParaRPr kumimoji="0" lang="en-US"/>
+          </a:p>
+        </p:txBody>
+      </p:sp>
+      <p:sp>
+        <p:nvSpPr>
+          <p:cNvPr id="23" name="TextBox 22"/>
+          <p:cNvSpPr txBox="1"/>
           <p:nvPr/>
         </p:nvSpPr>
         <p:spPr>
           <a:xfrm>
-            <a:off x="76200" y="1593468"/>
-            <a:ext cx="9163050" cy="646331"/>
-          </a:xfrm>
-          <a:prstGeom prst="rect">
-            <a:avLst/>
-          </a:prstGeom>
-        </p:spPr>
-        <p:txBody>
-          <a:bodyPr wrap="square">
-            <a:spAutoFit/>
-          </a:bodyPr>
-          <a:lstStyle/>
-          <a:p>
-            <a:r>
-              <a:rPr lang="en-US" b="1" dirty="0">
-                <a:latin typeface="Consolas" panose="020B0609020204030204" pitchFamily="49" charset="0"/>
-              </a:rPr>
-              <a:t>uint32_t sum(uint8_t a8, uint8_t b8, uint16_t c16, uint16_t d16, </a:t>
-            </a:r>
-            <a:r>
-              <a:rPr lang="en-US" b="1" dirty="0">
-                <a:solidFill>
-                  <a:srgbClr val="FF0000"/>
-                </a:solidFill>
-                <a:latin typeface="Consolas" panose="020B0609020204030204" pitchFamily="49" charset="0"/>
-              </a:rPr>
-              <a:t>uint32_t e32</a:t>
-            </a:r>
-            <a:r>
-              <a:rPr lang="en-US" b="1" dirty="0">
-                <a:latin typeface="Consolas" panose="020B0609020204030204" pitchFamily="49" charset="0"/>
-              </a:rPr>
-              <a:t>);</a:t>
-            </a:r>
-          </a:p>
-        </p:txBody>
-      </p:sp>
-      <p:sp>
-        <p:nvSpPr>
-          <p:cNvPr id="4" name="TextBox 3">
-            <a:extLst>
-              <a:ext uri="{FF2B5EF4-FFF2-40B4-BE49-F238E27FC236}">
-                <a16:creationId xmlns:a16="http://schemas.microsoft.com/office/drawing/2014/main" id="{9BD5669A-1FE1-C6BC-0617-481BE80F1863}"/>
-              </a:ext>
-            </a:extLst>
-          </p:cNvPr>
-          <p:cNvSpPr txBox="1"/>
-          <p:nvPr/>
-        </p:nvSpPr>
-        <p:spPr>
-          <a:xfrm>
-            <a:off x="304800" y="2754035"/>
-            <a:ext cx="750526" cy="369332"/>
+            <a:off x="6230165" y="3352800"/>
+            <a:ext cx="1296142" cy="338554"/>
           </a:xfrm>
           <a:prstGeom prst="rect">
             <a:avLst/>
@@ -27729,86 +32736,306 @@
           <a:noFill/>
         </p:spPr>
         <p:txBody>
-          <a:bodyPr wrap="none" rtlCol="0">
+          <a:bodyPr wrap="square" rtlCol="0">
             <a:spAutoFit/>
           </a:bodyPr>
           <a:lstStyle/>
           <a:p>
-            <a:r>
-              <a:rPr lang="en-US" dirty="0"/>
-              <a:t>Caller</a:t>
-            </a:r>
-          </a:p>
-        </p:txBody>
-      </p:sp>
-      <p:sp>
-        <p:nvSpPr>
-          <p:cNvPr id="23" name="Rectangle 22">
-            <a:extLst>
-              <a:ext uri="{FF2B5EF4-FFF2-40B4-BE49-F238E27FC236}">
-                <a16:creationId xmlns:a16="http://schemas.microsoft.com/office/drawing/2014/main" id="{B5A46639-51AC-D259-C3DB-1521D258BD49}"/>
-              </a:ext>
-            </a:extLst>
-          </p:cNvPr>
+            <a:pPr algn="ctr"/>
+            <a:r>
+              <a:rPr lang="en-US" sz="1600" b="1" dirty="0" err="1">
+                <a:latin typeface="Consolas" panose="020B0609020204030204" pitchFamily="49" charset="0"/>
+                <a:cs typeface="Consolas" panose="020B0609020204030204" pitchFamily="49" charset="0"/>
+              </a:rPr>
+              <a:t>xxxxxxxx</a:t>
+            </a:r>
+            <a:endParaRPr lang="en-US" sz="1600" b="1" dirty="0">
+              <a:latin typeface="Consolas" panose="020B0609020204030204" pitchFamily="49" charset="0"/>
+              <a:cs typeface="Consolas" panose="020B0609020204030204" pitchFamily="49" charset="0"/>
+            </a:endParaRPr>
+          </a:p>
+        </p:txBody>
+      </p:sp>
+      <p:sp>
+        <p:nvSpPr>
+          <p:cNvPr id="25" name="Rounded Rectangle 24"/>
           <p:cNvSpPr/>
           <p:nvPr/>
         </p:nvSpPr>
         <p:spPr>
           <a:xfrm>
-            <a:off x="33528" y="2251948"/>
-            <a:ext cx="9163050" cy="369332"/>
+            <a:off x="381000" y="2528900"/>
+            <a:ext cx="2438400" cy="2078360"/>
+          </a:xfrm>
+          <a:prstGeom prst="roundRect">
+            <a:avLst/>
+          </a:prstGeom>
+          <a:noFill/>
+          <a:ln>
+            <a:solidFill>
+              <a:schemeClr val="tx1"/>
+            </a:solidFill>
+          </a:ln>
+        </p:spPr>
+        <p:style>
+          <a:lnRef idx="2">
+            <a:schemeClr val="accent1">
+              <a:shade val="50000"/>
+            </a:schemeClr>
+          </a:lnRef>
+          <a:fillRef idx="1">
+            <a:schemeClr val="accent1"/>
+          </a:fillRef>
+          <a:effectRef idx="0">
+            <a:schemeClr val="accent1"/>
+          </a:effectRef>
+          <a:fontRef idx="minor">
+            <a:schemeClr val="lt1"/>
+          </a:fontRef>
+        </p:style>
+        <p:txBody>
+          <a:bodyPr rtlCol="0" anchor="ctr"/>
+          <a:lstStyle/>
+          <a:p>
+            <a:pPr>
+              <a:buNone/>
+            </a:pPr>
+            <a:r>
+              <a:rPr lang="en-GB" sz="2400" dirty="0">
+                <a:solidFill>
+                  <a:schemeClr val="tx1"/>
+                </a:solidFill>
+                <a:latin typeface="Consolas" panose="020B0609020204030204" pitchFamily="49" charset="0"/>
+                <a:cs typeface="Consolas" panose="020B0609020204030204" pitchFamily="49" charset="0"/>
+              </a:rPr>
+              <a:t>PUSH </a:t>
+            </a:r>
+            <a:r>
+              <a:rPr lang="en-GB" sz="2400">
+                <a:solidFill>
+                  <a:schemeClr val="tx1"/>
+                </a:solidFill>
+                <a:latin typeface="Consolas" panose="020B0609020204030204" pitchFamily="49" charset="0"/>
+                <a:cs typeface="Consolas" panose="020B0609020204030204" pitchFamily="49" charset="0"/>
+              </a:rPr>
+              <a:t>{R1,R2}</a:t>
+            </a:r>
+            <a:endParaRPr lang="en-GB" sz="2400" dirty="0">
+              <a:solidFill>
+                <a:schemeClr val="tx1"/>
+              </a:solidFill>
+              <a:latin typeface="Consolas" panose="020B0609020204030204" pitchFamily="49" charset="0"/>
+              <a:cs typeface="Consolas" panose="020B0609020204030204" pitchFamily="49" charset="0"/>
+            </a:endParaRPr>
+          </a:p>
+          <a:p>
+            <a:pPr>
+              <a:buNone/>
+            </a:pPr>
+            <a:r>
+              <a:rPr lang="en-GB" sz="2400" dirty="0">
+                <a:solidFill>
+                  <a:schemeClr val="tx1"/>
+                </a:solidFill>
+                <a:latin typeface="Consolas" panose="020B0609020204030204" pitchFamily="49" charset="0"/>
+                <a:cs typeface="Consolas" panose="020B0609020204030204" pitchFamily="49" charset="0"/>
+              </a:rPr>
+              <a:t>POP  {R1}</a:t>
+            </a:r>
+          </a:p>
+          <a:p>
+            <a:pPr>
+              <a:buNone/>
+            </a:pPr>
+            <a:r>
+              <a:rPr lang="en-GB" sz="2400" dirty="0">
+                <a:solidFill>
+                  <a:schemeClr val="tx1"/>
+                </a:solidFill>
+                <a:latin typeface="Consolas" panose="020B0609020204030204" pitchFamily="49" charset="0"/>
+                <a:cs typeface="Consolas" panose="020B0609020204030204" pitchFamily="49" charset="0"/>
+              </a:rPr>
+              <a:t>POP  {</a:t>
+            </a:r>
+            <a:r>
+              <a:rPr lang="en-GB" sz="2400" dirty="0" err="1">
+                <a:solidFill>
+                  <a:schemeClr val="tx1"/>
+                </a:solidFill>
+                <a:latin typeface="Consolas" panose="020B0609020204030204" pitchFamily="49" charset="0"/>
+                <a:cs typeface="Consolas" panose="020B0609020204030204" pitchFamily="49" charset="0"/>
+              </a:rPr>
+              <a:t>R2</a:t>
+            </a:r>
+            <a:r>
+              <a:rPr lang="en-GB" sz="2400" dirty="0">
+                <a:solidFill>
+                  <a:schemeClr val="tx1"/>
+                </a:solidFill>
+                <a:latin typeface="Consolas" panose="020B0609020204030204" pitchFamily="49" charset="0"/>
+                <a:cs typeface="Consolas" panose="020B0609020204030204" pitchFamily="49" charset="0"/>
+              </a:rPr>
+              <a:t>}</a:t>
+            </a:r>
+          </a:p>
+        </p:txBody>
+      </p:sp>
+      <p:sp>
+        <p:nvSpPr>
+          <p:cNvPr id="3" name="TextBox 2"/>
+          <p:cNvSpPr txBox="1"/>
+          <p:nvPr/>
+        </p:nvSpPr>
+        <p:spPr>
+          <a:xfrm>
+            <a:off x="6230164" y="4736068"/>
+            <a:ext cx="1298123" cy="369332"/>
           </a:xfrm>
           <a:prstGeom prst="rect">
             <a:avLst/>
           </a:prstGeom>
+          <a:noFill/>
         </p:spPr>
         <p:txBody>
-          <a:bodyPr wrap="square">
+          <a:bodyPr wrap="square" rtlCol="0">
             <a:spAutoFit/>
           </a:bodyPr>
           <a:lstStyle/>
           <a:p>
-            <a:r>
-              <a:rPr lang="en-US" b="1" dirty="0">
-                <a:solidFill>
-                  <a:srgbClr val="FF0000"/>
-                </a:solidFill>
-                <a:latin typeface="Consolas" panose="020B0609020204030204" pitchFamily="49" charset="0"/>
-              </a:rPr>
-              <a:t>s = sum(1, 2, 3, 4, 5);</a:t>
-            </a:r>
-          </a:p>
-        </p:txBody>
-      </p:sp>
-      <p:sp>
-        <p:nvSpPr>
-          <p:cNvPr id="15" name="TextBox 14">
-            <a:extLst>
-              <a:ext uri="{FF2B5EF4-FFF2-40B4-BE49-F238E27FC236}">
-                <a16:creationId xmlns:a16="http://schemas.microsoft.com/office/drawing/2014/main" id="{D4F04556-2048-4F19-A763-9BBFFFCAD277}"/>
-              </a:ext>
-            </a:extLst>
-          </p:cNvPr>
+            <a:pPr algn="ctr"/>
+            <a:r>
+              <a:rPr lang="en-US" dirty="0"/>
+              <a:t>memory</a:t>
+            </a:r>
+          </a:p>
+        </p:txBody>
+      </p:sp>
+      <p:sp>
+        <p:nvSpPr>
+          <p:cNvPr id="28" name="TextBox 27"/>
           <p:cNvSpPr txBox="1"/>
           <p:nvPr/>
         </p:nvSpPr>
         <p:spPr>
           <a:xfrm>
-            <a:off x="449580" y="3256122"/>
-            <a:ext cx="2464136" cy="2031325"/>
+            <a:off x="7738363" y="2615348"/>
+            <a:ext cx="944041" cy="369332"/>
+          </a:xfrm>
+          <a:prstGeom prst="rect">
+            <a:avLst/>
+          </a:prstGeom>
+          <a:noFill/>
+        </p:spPr>
+        <p:txBody>
+          <a:bodyPr wrap="none" rtlCol="0">
+            <a:spAutoFit/>
+          </a:bodyPr>
+          <a:lstStyle/>
+          <a:p>
+            <a:r>
+              <a:rPr lang="en-US" dirty="0"/>
+              <a:t>Address</a:t>
+            </a:r>
+          </a:p>
+        </p:txBody>
+      </p:sp>
+      <p:sp>
+        <p:nvSpPr>
+          <p:cNvPr id="34" name="TextBox 33"/>
+          <p:cNvSpPr txBox="1"/>
+          <p:nvPr/>
+        </p:nvSpPr>
+        <p:spPr>
+          <a:xfrm>
+            <a:off x="6232145" y="3724801"/>
+            <a:ext cx="1296142" cy="338554"/>
+          </a:xfrm>
+          <a:prstGeom prst="rect">
+            <a:avLst/>
+          </a:prstGeom>
+          <a:noFill/>
+        </p:spPr>
+        <p:txBody>
+          <a:bodyPr wrap="square" rtlCol="0">
+            <a:spAutoFit/>
+          </a:bodyPr>
+          <a:lstStyle/>
+          <a:p>
+            <a:pPr algn="ctr"/>
+            <a:r>
+              <a:rPr lang="en-US" sz="1600" b="1" dirty="0" err="1">
+                <a:latin typeface="Consolas" panose="020B0609020204030204" pitchFamily="49" charset="0"/>
+                <a:cs typeface="Consolas" panose="020B0609020204030204" pitchFamily="49" charset="0"/>
+              </a:rPr>
+              <a:t>xxxxxxxx</a:t>
+            </a:r>
+            <a:endParaRPr lang="en-US" sz="1600" b="1" dirty="0">
+              <a:latin typeface="Consolas" panose="020B0609020204030204" pitchFamily="49" charset="0"/>
+              <a:cs typeface="Consolas" panose="020B0609020204030204" pitchFamily="49" charset="0"/>
+            </a:endParaRPr>
+          </a:p>
+        </p:txBody>
+      </p:sp>
+      <p:sp>
+        <p:nvSpPr>
+          <p:cNvPr id="35" name="TextBox 34"/>
+          <p:cNvSpPr txBox="1"/>
+          <p:nvPr/>
+        </p:nvSpPr>
+        <p:spPr>
+          <a:xfrm>
+            <a:off x="6232145" y="4063355"/>
+            <a:ext cx="1296142" cy="338554"/>
+          </a:xfrm>
+          <a:prstGeom prst="rect">
+            <a:avLst/>
+          </a:prstGeom>
+          <a:noFill/>
+        </p:spPr>
+        <p:txBody>
+          <a:bodyPr wrap="square" rtlCol="0">
+            <a:spAutoFit/>
+          </a:bodyPr>
+          <a:lstStyle/>
+          <a:p>
+            <a:pPr algn="ctr"/>
+            <a:r>
+              <a:rPr lang="en-US" sz="1600" b="1" dirty="0" err="1">
+                <a:latin typeface="Consolas" panose="020B0609020204030204" pitchFamily="49" charset="0"/>
+                <a:cs typeface="Consolas" panose="020B0609020204030204" pitchFamily="49" charset="0"/>
+              </a:rPr>
+              <a:t>xxxxxxxx</a:t>
+            </a:r>
+            <a:endParaRPr lang="en-US" sz="1600" b="1" dirty="0">
+              <a:latin typeface="Consolas" panose="020B0609020204030204" pitchFamily="49" charset="0"/>
+              <a:cs typeface="Consolas" panose="020B0609020204030204" pitchFamily="49" charset="0"/>
+            </a:endParaRPr>
+          </a:p>
+        </p:txBody>
+      </p:sp>
+      <p:sp>
+        <p:nvSpPr>
+          <p:cNvPr id="30" name="Rectangle 29"/>
+          <p:cNvSpPr/>
+          <p:nvPr/>
+        </p:nvSpPr>
+        <p:spPr>
+          <a:xfrm>
+            <a:off x="443880" y="1675288"/>
+            <a:ext cx="2819400" cy="685274"/>
           </a:xfrm>
           <a:prstGeom prst="rect">
             <a:avLst/>
           </a:prstGeom>
         </p:spPr>
         <p:style>
-          <a:lnRef idx="2">
+          <a:lnRef idx="1">
             <a:schemeClr val="accent1"/>
           </a:lnRef>
-          <a:fillRef idx="1">
-            <a:schemeClr val="lt1"/>
+          <a:fillRef idx="2">
+            <a:schemeClr val="accent1"/>
           </a:fillRef>
-          <a:effectRef idx="0">
+          <a:effectRef idx="1">
             <a:schemeClr val="accent1"/>
           </a:effectRef>
           <a:fontRef idx="minor">
@@ -27816,312 +33043,97 @@
           </a:fontRef>
         </p:style>
         <p:txBody>
-          <a:bodyPr wrap="none" rtlCol="0">
-            <a:spAutoFit/>
-          </a:bodyPr>
-          <a:lstStyle/>
-          <a:p>
-            <a:r>
-              <a:rPr lang="en-US" dirty="0">
-                <a:latin typeface="Consolas" panose="020B0609020204030204" pitchFamily="49" charset="0"/>
-              </a:rPr>
-              <a:t>  MOV r0, #5 </a:t>
-            </a:r>
-            <a:r>
-              <a:rPr lang="en-US" dirty="0">
-                <a:solidFill>
-                  <a:schemeClr val="bg1">
-                    <a:lumMod val="50000"/>
-                  </a:schemeClr>
-                </a:solidFill>
-                <a:latin typeface="Consolas" panose="020B0609020204030204" pitchFamily="49" charset="0"/>
-              </a:rPr>
-              <a:t>; e32</a:t>
-            </a:r>
-          </a:p>
-          <a:p>
-            <a:r>
-              <a:rPr lang="en-US" dirty="0">
+          <a:bodyPr rtlCol="0" anchor="ctr"/>
+          <a:lstStyle/>
+          <a:p>
+            <a:pPr algn="ctr"/>
+            <a:r>
+              <a:rPr lang="en-US" sz="2400" dirty="0">
                 <a:solidFill>
                   <a:schemeClr val="tx1"/>
                 </a:solidFill>
                 <a:latin typeface="Consolas" panose="020B0609020204030204" pitchFamily="49" charset="0"/>
-              </a:rPr>
-              <a:t>  MOV r0, #1 </a:t>
-            </a:r>
-            <a:r>
-              <a:rPr lang="en-US" dirty="0">
+                <a:cs typeface="Consolas" panose="020B0609020204030204" pitchFamily="49" charset="0"/>
+              </a:rPr>
+              <a:t>R1==0x11111111</a:t>
+            </a:r>
+          </a:p>
+          <a:p>
+            <a:pPr algn="ctr"/>
+            <a:r>
+              <a:rPr lang="en-US" sz="2400" dirty="0">
                 <a:solidFill>
-                  <a:schemeClr val="bg1">
-                    <a:lumMod val="50000"/>
-                  </a:schemeClr>
+                  <a:schemeClr val="tx1"/>
                 </a:solidFill>
                 <a:latin typeface="Consolas" panose="020B0609020204030204" pitchFamily="49" charset="0"/>
-              </a:rPr>
-              <a:t>; a8</a:t>
-            </a:r>
-          </a:p>
-          <a:p>
-            <a:r>
-              <a:rPr lang="en-US" dirty="0">
-                <a:latin typeface="Consolas" panose="020B0609020204030204" pitchFamily="49" charset="0"/>
-              </a:rPr>
-              <a:t>  MOV r1, #2 </a:t>
-            </a:r>
-            <a:r>
-              <a:rPr lang="en-US" dirty="0">
-                <a:solidFill>
-                  <a:schemeClr val="bg1">
-                    <a:lumMod val="50000"/>
-                  </a:schemeClr>
-                </a:solidFill>
-                <a:latin typeface="Consolas" panose="020B0609020204030204" pitchFamily="49" charset="0"/>
-              </a:rPr>
-              <a:t>; b8</a:t>
-            </a:r>
-          </a:p>
-          <a:p>
-            <a:r>
-              <a:rPr lang="en-US" dirty="0">
-                <a:latin typeface="Consolas" panose="020B0609020204030204" pitchFamily="49" charset="0"/>
-              </a:rPr>
-              <a:t>  MOV r2, #3 </a:t>
-            </a:r>
-            <a:r>
-              <a:rPr lang="en-US" dirty="0">
-                <a:solidFill>
-                  <a:schemeClr val="bg1">
-                    <a:lumMod val="50000"/>
-                  </a:schemeClr>
-                </a:solidFill>
-                <a:latin typeface="Consolas" panose="020B0609020204030204" pitchFamily="49" charset="0"/>
-              </a:rPr>
-              <a:t>; c16</a:t>
-            </a:r>
-          </a:p>
-          <a:p>
-            <a:r>
-              <a:rPr lang="en-US" dirty="0">
-                <a:latin typeface="Consolas" panose="020B0609020204030204" pitchFamily="49" charset="0"/>
-              </a:rPr>
-              <a:t>  MOV r3, #4 </a:t>
-            </a:r>
-            <a:r>
-              <a:rPr lang="en-US" dirty="0">
-                <a:solidFill>
-                  <a:schemeClr val="bg1">
-                    <a:lumMod val="50000"/>
-                  </a:schemeClr>
-                </a:solidFill>
-                <a:latin typeface="Consolas" panose="020B0609020204030204" pitchFamily="49" charset="0"/>
-              </a:rPr>
-              <a:t>; d16</a:t>
-            </a:r>
-          </a:p>
-          <a:p>
-            <a:r>
-              <a:rPr lang="en-US" dirty="0">
-                <a:latin typeface="Consolas" panose="020B0609020204030204" pitchFamily="49" charset="0"/>
-              </a:rPr>
-              <a:t>  BL  sum</a:t>
-            </a:r>
-          </a:p>
-          <a:p>
-            <a:r>
-              <a:rPr lang="en-US" dirty="0">
-                <a:latin typeface="Consolas" panose="020B0609020204030204" pitchFamily="49" charset="0"/>
-              </a:rPr>
-              <a:t>  ...</a:t>
-            </a:r>
-          </a:p>
-        </p:txBody>
-      </p:sp>
-      <p:sp>
-        <p:nvSpPr>
-          <p:cNvPr id="27" name="TextBox 26">
-            <a:extLst>
-              <a:ext uri="{FF2B5EF4-FFF2-40B4-BE49-F238E27FC236}">
-                <a16:creationId xmlns:a16="http://schemas.microsoft.com/office/drawing/2014/main" id="{6AC2BFAF-703A-1607-3F8B-C3C6EAC24548}"/>
-              </a:ext>
-            </a:extLst>
-          </p:cNvPr>
-          <p:cNvSpPr txBox="1"/>
+                <a:cs typeface="Consolas" panose="020B0609020204030204" pitchFamily="49" charset="0"/>
+              </a:rPr>
+              <a:t>R2==0x22222222</a:t>
+            </a:r>
+          </a:p>
+        </p:txBody>
+      </p:sp>
+      <p:sp>
+        <p:nvSpPr>
+          <p:cNvPr id="31" name="Rectangle 30"/>
+          <p:cNvSpPr/>
           <p:nvPr/>
         </p:nvSpPr>
         <p:spPr>
           <a:xfrm>
-            <a:off x="3581400" y="2840938"/>
-            <a:ext cx="769763" cy="369332"/>
-          </a:xfrm>
-          <a:prstGeom prst="rect">
-            <a:avLst/>
-          </a:prstGeom>
-          <a:noFill/>
-        </p:spPr>
-        <p:txBody>
-          <a:bodyPr wrap="none" rtlCol="0">
-            <a:spAutoFit/>
-          </a:bodyPr>
-          <a:lstStyle/>
-          <a:p>
-            <a:r>
-              <a:rPr lang="en-US" dirty="0" err="1"/>
-              <a:t>Callee</a:t>
-            </a:r>
-            <a:endParaRPr lang="en-US" dirty="0"/>
-          </a:p>
-        </p:txBody>
-      </p:sp>
-      <p:sp>
-        <p:nvSpPr>
-          <p:cNvPr id="28" name="TextBox 27">
-            <a:extLst>
-              <a:ext uri="{FF2B5EF4-FFF2-40B4-BE49-F238E27FC236}">
-                <a16:creationId xmlns:a16="http://schemas.microsoft.com/office/drawing/2014/main" id="{5A07EE5F-FDFB-4DFD-A418-4743BE043075}"/>
-              </a:ext>
-            </a:extLst>
-          </p:cNvPr>
-          <p:cNvSpPr txBox="1"/>
-          <p:nvPr/>
-        </p:nvSpPr>
-        <p:spPr>
-          <a:xfrm>
-            <a:off x="3607914" y="3305718"/>
-            <a:ext cx="3730508" cy="2031325"/>
+            <a:off x="677570" y="1237054"/>
+            <a:ext cx="2441694" cy="400110"/>
           </a:xfrm>
           <a:prstGeom prst="rect">
             <a:avLst/>
           </a:prstGeom>
         </p:spPr>
-        <p:style>
-          <a:lnRef idx="2">
-            <a:schemeClr val="accent1"/>
-          </a:lnRef>
-          <a:fillRef idx="1">
-            <a:schemeClr val="lt1"/>
-          </a:fillRef>
-          <a:effectRef idx="0">
-            <a:schemeClr val="accent1"/>
-          </a:effectRef>
-          <a:fontRef idx="minor">
-            <a:schemeClr val="dk1"/>
-          </a:fontRef>
-        </p:style>
-        <p:txBody>
-          <a:bodyPr wrap="none" rtlCol="0">
+        <p:txBody>
+          <a:bodyPr wrap="none">
             <a:spAutoFit/>
           </a:bodyPr>
           <a:lstStyle/>
           <a:p>
             <a:r>
-              <a:rPr lang="en-US" b="1" dirty="0">
-                <a:solidFill>
-                  <a:srgbClr val="0000FF"/>
-                </a:solidFill>
+              <a:rPr lang="en-US" sz="2000" dirty="0">
                 <a:latin typeface="Consolas" panose="020B0609020204030204" pitchFamily="49" charset="0"/>
-              </a:rPr>
-              <a:t>sum</a:t>
-            </a:r>
-            <a:r>
-              <a:rPr lang="en-US" dirty="0">
-                <a:latin typeface="Consolas" panose="020B0609020204030204" pitchFamily="49" charset="0"/>
-              </a:rPr>
-              <a:t> PROC    </a:t>
-            </a:r>
-          </a:p>
-          <a:p>
-            <a:r>
-              <a:rPr lang="en-US" dirty="0">
-                <a:latin typeface="Consolas" panose="020B0609020204030204" pitchFamily="49" charset="0"/>
-              </a:rPr>
-              <a:t>  ADD r0, r0, r1   </a:t>
-            </a:r>
-            <a:r>
-              <a:rPr lang="en-US" dirty="0">
-                <a:solidFill>
-                  <a:schemeClr val="bg1">
-                    <a:lumMod val="50000"/>
-                  </a:schemeClr>
-                </a:solidFill>
-                <a:latin typeface="Consolas" panose="020B0609020204030204" pitchFamily="49" charset="0"/>
-              </a:rPr>
-              <a:t>; a8 + b8</a:t>
-            </a:r>
-          </a:p>
-          <a:p>
-            <a:r>
-              <a:rPr lang="en-US" dirty="0">
-                <a:latin typeface="Consolas" panose="020B0609020204030204" pitchFamily="49" charset="0"/>
-              </a:rPr>
-              <a:t>  ADD r0, r0, r2   </a:t>
-            </a:r>
-            <a:r>
-              <a:rPr lang="en-US" dirty="0">
-                <a:solidFill>
-                  <a:schemeClr val="bg1">
-                    <a:lumMod val="50000"/>
-                  </a:schemeClr>
-                </a:solidFill>
-                <a:latin typeface="Consolas" panose="020B0609020204030204" pitchFamily="49" charset="0"/>
-              </a:rPr>
-              <a:t>; add c16</a:t>
-            </a:r>
-          </a:p>
-          <a:p>
-            <a:r>
-              <a:rPr lang="en-US" dirty="0">
-                <a:latin typeface="Consolas" panose="020B0609020204030204" pitchFamily="49" charset="0"/>
-              </a:rPr>
-              <a:t>  ADD r0, r0, r3   </a:t>
-            </a:r>
-            <a:r>
-              <a:rPr lang="en-US" dirty="0">
-                <a:solidFill>
-                  <a:schemeClr val="bg1">
-                    <a:lumMod val="50000"/>
-                  </a:schemeClr>
-                </a:solidFill>
-                <a:latin typeface="Consolas" panose="020B0609020204030204" pitchFamily="49" charset="0"/>
-              </a:rPr>
-              <a:t>; add d16</a:t>
-            </a:r>
-          </a:p>
-          <a:p>
-            <a:r>
-              <a:rPr lang="en-US" dirty="0">
-                <a:solidFill>
-                  <a:schemeClr val="tx1"/>
-                </a:solidFill>
-                <a:latin typeface="Consolas" panose="020B0609020204030204" pitchFamily="49" charset="0"/>
-              </a:rPr>
-              <a:t>  ADD r0, r0, r1   </a:t>
-            </a:r>
-            <a:r>
-              <a:rPr lang="en-US" dirty="0">
-                <a:solidFill>
-                  <a:schemeClr val="bg1">
-                    <a:lumMod val="50000"/>
-                  </a:schemeClr>
-                </a:solidFill>
-                <a:latin typeface="Consolas" panose="020B0609020204030204" pitchFamily="49" charset="0"/>
-              </a:rPr>
-              <a:t>; add e32</a:t>
-            </a:r>
-          </a:p>
-          <a:p>
-            <a:r>
-              <a:rPr lang="en-US" dirty="0">
-                <a:latin typeface="Consolas" panose="020B0609020204030204" pitchFamily="49" charset="0"/>
-              </a:rPr>
-              <a:t>  BX  LR</a:t>
-            </a:r>
-          </a:p>
-          <a:p>
-            <a:r>
-              <a:rPr lang="en-US" dirty="0">
-                <a:latin typeface="Consolas" panose="020B0609020204030204" pitchFamily="49" charset="0"/>
-              </a:rPr>
-              <a:t>  ENDP</a:t>
+                <a:cs typeface="Consolas" panose="020B0609020204030204" pitchFamily="49" charset="0"/>
+              </a:rPr>
+              <a:t>Before execution</a:t>
+            </a:r>
+            <a:endParaRPr lang="en-US" sz="2000" dirty="0"/>
+          </a:p>
+        </p:txBody>
+      </p:sp>
+      <p:sp>
+        <p:nvSpPr>
+          <p:cNvPr id="32" name="Content Placeholder 3"/>
+          <p:cNvSpPr>
+            <a:spLocks noGrp="1"/>
+          </p:cNvSpPr>
+          <p:nvPr>
+            <p:ph sz="quarter" idx="1"/>
+          </p:nvPr>
+        </p:nvSpPr>
+        <p:spPr>
+          <a:xfrm>
+            <a:off x="443880" y="5044440"/>
+            <a:ext cx="8229600" cy="1404500"/>
+          </a:xfrm>
+        </p:spPr>
+        <p:txBody>
+          <a:bodyPr/>
+          <a:lstStyle/>
+          <a:p>
+            <a:r>
+              <a:rPr lang="en-US" dirty="0"/>
+              <a:t>What is content of stack, and position of SP, after PUSH {R2,R1}?</a:t>
+            </a:r>
+          </a:p>
+          <a:p>
+            <a:r>
+              <a:rPr lang="en-US" dirty="0"/>
+              <a:t>What are the values of R1/R2 after POP {R2}?</a:t>
             </a:r>
           </a:p>
         </p:txBody>
@@ -28129,7 +33141,7 @@
     </p:spTree>
     <p:extLst>
       <p:ext uri="{BB962C8B-B14F-4D97-AF65-F5344CB8AC3E}">
-        <p14:creationId xmlns:p14="http://schemas.microsoft.com/office/powerpoint/2010/main" val="3970213323"/>
+        <p14:creationId xmlns:p14="http://schemas.microsoft.com/office/powerpoint/2010/main" val="245926897"/>
       </p:ext>
     </p:extLst>
   </p:cSld>

--- a/PPTs/Ch8_ARM_Subroutines_Exercises ANS.pptx
+++ b/PPTs/Ch8_ARM_Subroutines_Exercises ANS.pptx
@@ -5,42 +5,43 @@
     <p:sldMasterId id="2147483660" r:id="rId1"/>
   </p:sldMasterIdLst>
   <p:notesMasterIdLst>
-    <p:notesMasterId r:id="rId32"/>
+    <p:notesMasterId r:id="rId33"/>
   </p:notesMasterIdLst>
   <p:handoutMasterIdLst>
-    <p:handoutMasterId r:id="rId33"/>
+    <p:handoutMasterId r:id="rId34"/>
   </p:handoutMasterIdLst>
   <p:sldIdLst>
     <p:sldId id="256" r:id="rId2"/>
     <p:sldId id="278" r:id="rId3"/>
     <p:sldId id="279" r:id="rId4"/>
-    <p:sldId id="352" r:id="rId5"/>
-    <p:sldId id="261" r:id="rId6"/>
-    <p:sldId id="263" r:id="rId7"/>
-    <p:sldId id="280" r:id="rId8"/>
-    <p:sldId id="260" r:id="rId9"/>
-    <p:sldId id="264" r:id="rId10"/>
-    <p:sldId id="268" r:id="rId11"/>
-    <p:sldId id="762" r:id="rId12"/>
-    <p:sldId id="761" r:id="rId13"/>
-    <p:sldId id="760" r:id="rId14"/>
-    <p:sldId id="759" r:id="rId15"/>
-    <p:sldId id="371" r:id="rId16"/>
-    <p:sldId id="369" r:id="rId17"/>
-    <p:sldId id="367" r:id="rId18"/>
-    <p:sldId id="374" r:id="rId19"/>
-    <p:sldId id="257" r:id="rId20"/>
-    <p:sldId id="258" r:id="rId21"/>
-    <p:sldId id="281" r:id="rId22"/>
-    <p:sldId id="282" r:id="rId23"/>
-    <p:sldId id="283" r:id="rId24"/>
-    <p:sldId id="286" r:id="rId25"/>
-    <p:sldId id="353" r:id="rId26"/>
-    <p:sldId id="354" r:id="rId27"/>
-    <p:sldId id="757" r:id="rId28"/>
-    <p:sldId id="751" r:id="rId29"/>
-    <p:sldId id="752" r:id="rId30"/>
-    <p:sldId id="756" r:id="rId31"/>
+    <p:sldId id="266" r:id="rId5"/>
+    <p:sldId id="352" r:id="rId6"/>
+    <p:sldId id="261" r:id="rId7"/>
+    <p:sldId id="263" r:id="rId8"/>
+    <p:sldId id="280" r:id="rId9"/>
+    <p:sldId id="260" r:id="rId10"/>
+    <p:sldId id="264" r:id="rId11"/>
+    <p:sldId id="268" r:id="rId12"/>
+    <p:sldId id="762" r:id="rId13"/>
+    <p:sldId id="761" r:id="rId14"/>
+    <p:sldId id="760" r:id="rId15"/>
+    <p:sldId id="759" r:id="rId16"/>
+    <p:sldId id="371" r:id="rId17"/>
+    <p:sldId id="369" r:id="rId18"/>
+    <p:sldId id="367" r:id="rId19"/>
+    <p:sldId id="374" r:id="rId20"/>
+    <p:sldId id="257" r:id="rId21"/>
+    <p:sldId id="258" r:id="rId22"/>
+    <p:sldId id="281" r:id="rId23"/>
+    <p:sldId id="282" r:id="rId24"/>
+    <p:sldId id="283" r:id="rId25"/>
+    <p:sldId id="286" r:id="rId26"/>
+    <p:sldId id="353" r:id="rId27"/>
+    <p:sldId id="354" r:id="rId28"/>
+    <p:sldId id="757" r:id="rId29"/>
+    <p:sldId id="751" r:id="rId30"/>
+    <p:sldId id="752" r:id="rId31"/>
+    <p:sldId id="756" r:id="rId32"/>
   </p:sldIdLst>
   <p:sldSz cx="9144000" cy="6858000" type="screen4x3"/>
   <p:notesSz cx="6950075" cy="9236075"/>
@@ -161,7 +162,7 @@
 <file path=ppt/revisionInfo.xml><?xml version="1.0" encoding="utf-8"?>
 <p1510:revInfo xmlns:a="http://schemas.openxmlformats.org/drawingml/2006/main" xmlns:r="http://schemas.openxmlformats.org/officeDocument/2006/relationships" xmlns:p1510="http://schemas.microsoft.com/office/powerpoint/2015/10/main">
   <p1510:revLst>
-    <p1510:client id="{26DF0AC7-7898-4CAF-8C74-9051912ABD73}" v="193" dt="2025-10-14T21:11:06.050"/>
+    <p1510:client id="{26DF0AC7-7898-4CAF-8C74-9051912ABD73}" v="195" dt="2025-10-14T21:25:49.853"/>
   </p1510:revLst>
 </p1510:revInfo>
 </file>
@@ -171,7 +172,7 @@
   <pc:docChgLst>
     <pc:chgData name="Zonghua Gu" userId="9a7e1853e1951ef5" providerId="LiveId" clId="{CF1FAA12-072C-4ED5-BA76-0FFFAEFDB88A}"/>
     <pc:docChg chg="undo redo custSel addSld delSld modSld">
-      <pc:chgData name="Zonghua Gu" userId="9a7e1853e1951ef5" providerId="LiveId" clId="{CF1FAA12-072C-4ED5-BA76-0FFFAEFDB88A}" dt="2025-10-14T21:12:16.519" v="2919" actId="20577"/>
+      <pc:chgData name="Zonghua Gu" userId="9a7e1853e1951ef5" providerId="LiveId" clId="{CF1FAA12-072C-4ED5-BA76-0FFFAEFDB88A}" dt="2025-10-14T21:25:51.586" v="2922" actId="47"/>
       <pc:docMkLst>
         <pc:docMk/>
       </pc:docMkLst>
@@ -549,6 +550,13 @@
             <ac:spMk id="32" creationId="{00000000-0000-0000-0000-000000000000}"/>
           </ac:spMkLst>
         </pc:spChg>
+      </pc:sldChg>
+      <pc:sldChg chg="add">
+        <pc:chgData name="Zonghua Gu" userId="9a7e1853e1951ef5" providerId="LiveId" clId="{CF1FAA12-072C-4ED5-BA76-0FFFAEFDB88A}" dt="2025-10-14T21:25:49.851" v="2921"/>
+        <pc:sldMkLst>
+          <pc:docMk/>
+          <pc:sldMk cId="850150354" sldId="266"/>
+        </pc:sldMkLst>
       </pc:sldChg>
       <pc:sldChg chg="del">
         <pc:chgData name="Zonghua Gu" userId="9a7e1853e1951ef5" providerId="LiveId" clId="{CF1FAA12-072C-4ED5-BA76-0FFFAEFDB88A}" dt="2025-09-22T00:19:08.642" v="112" actId="47"/>
@@ -1377,6 +1385,13 @@
           <pc:sldMk cId="3663400516" sldId="376"/>
         </pc:sldMkLst>
       </pc:sldChg>
+      <pc:sldChg chg="add del">
+        <pc:chgData name="Zonghua Gu" userId="9a7e1853e1951ef5" providerId="LiveId" clId="{CF1FAA12-072C-4ED5-BA76-0FFFAEFDB88A}" dt="2025-10-14T21:25:51.586" v="2922" actId="47"/>
+        <pc:sldMkLst>
+          <pc:docMk/>
+          <pc:sldMk cId="3812285226" sldId="747"/>
+        </pc:sldMkLst>
+      </pc:sldChg>
       <pc:sldChg chg="modSp add mod">
         <pc:chgData name="Zonghua Gu" userId="9a7e1853e1951ef5" providerId="LiveId" clId="{CF1FAA12-072C-4ED5-BA76-0FFFAEFDB88A}" dt="2025-10-05T02:35:31.975" v="2511" actId="20577"/>
         <pc:sldMkLst>
@@ -2656,7 +2671,7 @@
             <a:fld id="{D46F4F04-2BB1-473A-9274-1B455085D21A}" type="slidenum">
               <a:rPr lang="en-US" smtClean="0"/>
               <a:pPr/>
-              <a:t>21</a:t>
+              <a:t>22</a:t>
             </a:fld>
             <a:endParaRPr lang="en-US"/>
           </a:p>
@@ -2883,7 +2898,7 @@
             <a:fld id="{D46F4F04-2BB1-473A-9274-1B455085D21A}" type="slidenum">
               <a:rPr lang="en-US" smtClean="0"/>
               <a:pPr/>
-              <a:t>22</a:t>
+              <a:t>23</a:t>
             </a:fld>
             <a:endParaRPr lang="en-US"/>
           </a:p>
@@ -3234,7 +3249,7 @@
             <a:fld id="{D46F4F04-2BB1-473A-9274-1B455085D21A}" type="slidenum">
               <a:rPr lang="en-US" smtClean="0"/>
               <a:pPr/>
-              <a:t>24</a:t>
+              <a:t>25</a:t>
             </a:fld>
             <a:endParaRPr lang="en-US"/>
           </a:p>
@@ -3342,7 +3357,7 @@
             <a:fld id="{D46F4F04-2BB1-473A-9274-1B455085D21A}" type="slidenum">
               <a:rPr lang="en-US" smtClean="0"/>
               <a:pPr/>
-              <a:t>25</a:t>
+              <a:t>26</a:t>
             </a:fld>
             <a:endParaRPr lang="en-US"/>
           </a:p>
@@ -7568,6 +7583,1284 @@
           <a:p>
             <a:r>
               <a:rPr lang="en-GB" dirty="0"/>
+              <a:t>Stack</a:t>
+            </a:r>
+          </a:p>
+        </p:txBody>
+      </p:sp>
+      <p:sp>
+        <p:nvSpPr>
+          <p:cNvPr id="6" name="Rectangle 5"/>
+          <p:cNvSpPr/>
+          <p:nvPr/>
+        </p:nvSpPr>
+        <p:spPr>
+          <a:xfrm>
+            <a:off x="4127376" y="1628800"/>
+            <a:ext cx="1296144" cy="360040"/>
+          </a:xfrm>
+          <a:prstGeom prst="rect">
+            <a:avLst/>
+          </a:prstGeom>
+          <a:solidFill>
+            <a:schemeClr val="bg1"/>
+          </a:solidFill>
+        </p:spPr>
+        <p:style>
+          <a:lnRef idx="2">
+            <a:schemeClr val="accent1">
+              <a:shade val="50000"/>
+            </a:schemeClr>
+          </a:lnRef>
+          <a:fillRef idx="1">
+            <a:schemeClr val="accent1"/>
+          </a:fillRef>
+          <a:effectRef idx="0">
+            <a:schemeClr val="accent1"/>
+          </a:effectRef>
+          <a:fontRef idx="minor">
+            <a:schemeClr val="lt1"/>
+          </a:fontRef>
+        </p:style>
+        <p:txBody>
+          <a:bodyPr rtlCol="0" anchor="ctr"/>
+          <a:lstStyle/>
+          <a:p>
+            <a:pPr algn="ctr"/>
+            <a:endParaRPr lang="en-GB" sz="1600" b="1">
+              <a:latin typeface="Consolas" panose="020B0609020204030204" pitchFamily="49" charset="0"/>
+              <a:cs typeface="Consolas" panose="020B0609020204030204" pitchFamily="49" charset="0"/>
+            </a:endParaRPr>
+          </a:p>
+        </p:txBody>
+      </p:sp>
+      <p:sp>
+        <p:nvSpPr>
+          <p:cNvPr id="7" name="TextBox 6"/>
+          <p:cNvSpPr txBox="1"/>
+          <p:nvPr/>
+        </p:nvSpPr>
+        <p:spPr>
+          <a:xfrm>
+            <a:off x="3551312" y="1628800"/>
+            <a:ext cx="576064" cy="338554"/>
+          </a:xfrm>
+          <a:prstGeom prst="rect">
+            <a:avLst/>
+          </a:prstGeom>
+          <a:noFill/>
+        </p:spPr>
+        <p:txBody>
+          <a:bodyPr wrap="square" rtlCol="0">
+            <a:spAutoFit/>
+          </a:bodyPr>
+          <a:lstStyle/>
+          <a:p>
+            <a:r>
+              <a:rPr lang="en-GB" sz="1600" b="1" dirty="0">
+                <a:latin typeface="Consolas" panose="020B0609020204030204" pitchFamily="49" charset="0"/>
+                <a:cs typeface="Consolas" panose="020B0609020204030204" pitchFamily="49" charset="0"/>
+              </a:rPr>
+              <a:t>R1</a:t>
+            </a:r>
+          </a:p>
+        </p:txBody>
+      </p:sp>
+      <p:sp>
+        <p:nvSpPr>
+          <p:cNvPr id="9" name="Rectangle 8"/>
+          <p:cNvSpPr/>
+          <p:nvPr/>
+        </p:nvSpPr>
+        <p:spPr>
+          <a:xfrm>
+            <a:off x="4127376" y="1988840"/>
+            <a:ext cx="1296144" cy="360040"/>
+          </a:xfrm>
+          <a:prstGeom prst="rect">
+            <a:avLst/>
+          </a:prstGeom>
+          <a:solidFill>
+            <a:schemeClr val="bg1"/>
+          </a:solidFill>
+        </p:spPr>
+        <p:style>
+          <a:lnRef idx="2">
+            <a:schemeClr val="accent1">
+              <a:shade val="50000"/>
+            </a:schemeClr>
+          </a:lnRef>
+          <a:fillRef idx="1">
+            <a:schemeClr val="accent1"/>
+          </a:fillRef>
+          <a:effectRef idx="0">
+            <a:schemeClr val="accent1"/>
+          </a:effectRef>
+          <a:fontRef idx="minor">
+            <a:schemeClr val="lt1"/>
+          </a:fontRef>
+        </p:style>
+        <p:txBody>
+          <a:bodyPr rtlCol="0" anchor="ctr"/>
+          <a:lstStyle/>
+          <a:p>
+            <a:pPr algn="ctr"/>
+            <a:endParaRPr lang="en-GB" sz="1600" b="1">
+              <a:latin typeface="Consolas" panose="020B0609020204030204" pitchFamily="49" charset="0"/>
+              <a:cs typeface="Consolas" panose="020B0609020204030204" pitchFamily="49" charset="0"/>
+            </a:endParaRPr>
+          </a:p>
+        </p:txBody>
+      </p:sp>
+      <p:sp>
+        <p:nvSpPr>
+          <p:cNvPr id="10" name="TextBox 9"/>
+          <p:cNvSpPr txBox="1"/>
+          <p:nvPr/>
+        </p:nvSpPr>
+        <p:spPr>
+          <a:xfrm>
+            <a:off x="3551312" y="1988840"/>
+            <a:ext cx="576064" cy="338554"/>
+          </a:xfrm>
+          <a:prstGeom prst="rect">
+            <a:avLst/>
+          </a:prstGeom>
+          <a:noFill/>
+        </p:spPr>
+        <p:txBody>
+          <a:bodyPr wrap="square" rtlCol="0">
+            <a:spAutoFit/>
+          </a:bodyPr>
+          <a:lstStyle/>
+          <a:p>
+            <a:r>
+              <a:rPr lang="en-GB" sz="1600" b="1" dirty="0">
+                <a:latin typeface="Consolas" panose="020B0609020204030204" pitchFamily="49" charset="0"/>
+                <a:cs typeface="Consolas" panose="020B0609020204030204" pitchFamily="49" charset="0"/>
+              </a:rPr>
+              <a:t>R2</a:t>
+            </a:r>
+          </a:p>
+        </p:txBody>
+      </p:sp>
+      <p:sp>
+        <p:nvSpPr>
+          <p:cNvPr id="12" name="Rectangle 11"/>
+          <p:cNvSpPr/>
+          <p:nvPr/>
+        </p:nvSpPr>
+        <p:spPr>
+          <a:xfrm>
+            <a:off x="4127376" y="2708920"/>
+            <a:ext cx="1296144" cy="360040"/>
+          </a:xfrm>
+          <a:prstGeom prst="rect">
+            <a:avLst/>
+          </a:prstGeom>
+          <a:solidFill>
+            <a:schemeClr val="bg1"/>
+          </a:solidFill>
+        </p:spPr>
+        <p:style>
+          <a:lnRef idx="2">
+            <a:schemeClr val="accent1">
+              <a:shade val="50000"/>
+            </a:schemeClr>
+          </a:lnRef>
+          <a:fillRef idx="1">
+            <a:schemeClr val="accent1"/>
+          </a:fillRef>
+          <a:effectRef idx="0">
+            <a:schemeClr val="accent1"/>
+          </a:effectRef>
+          <a:fontRef idx="minor">
+            <a:schemeClr val="lt1"/>
+          </a:fontRef>
+        </p:style>
+        <p:txBody>
+          <a:bodyPr rtlCol="0" anchor="ctr"/>
+          <a:lstStyle/>
+          <a:p>
+            <a:pPr algn="ctr"/>
+            <a:endParaRPr lang="en-GB" sz="1600" b="1">
+              <a:latin typeface="Consolas" panose="020B0609020204030204" pitchFamily="49" charset="0"/>
+              <a:cs typeface="Consolas" panose="020B0609020204030204" pitchFamily="49" charset="0"/>
+            </a:endParaRPr>
+          </a:p>
+        </p:txBody>
+      </p:sp>
+      <p:sp>
+        <p:nvSpPr>
+          <p:cNvPr id="13" name="TextBox 12"/>
+          <p:cNvSpPr txBox="1"/>
+          <p:nvPr/>
+        </p:nvSpPr>
+        <p:spPr>
+          <a:xfrm>
+            <a:off x="2971800" y="2708920"/>
+            <a:ext cx="1155576" cy="338554"/>
+          </a:xfrm>
+          <a:prstGeom prst="rect">
+            <a:avLst/>
+          </a:prstGeom>
+          <a:noFill/>
+        </p:spPr>
+        <p:txBody>
+          <a:bodyPr wrap="square" rtlCol="0">
+            <a:spAutoFit/>
+          </a:bodyPr>
+          <a:lstStyle/>
+          <a:p>
+            <a:pPr algn="r"/>
+            <a:r>
+              <a:rPr lang="en-GB" sz="1600" b="1" dirty="0" err="1">
+                <a:latin typeface="Consolas" panose="020B0609020204030204" pitchFamily="49" charset="0"/>
+                <a:cs typeface="Consolas" panose="020B0609020204030204" pitchFamily="49" charset="0"/>
+              </a:rPr>
+              <a:t>R13</a:t>
+            </a:r>
+            <a:r>
+              <a:rPr lang="en-GB" sz="1600" b="1" dirty="0">
+                <a:latin typeface="Consolas" panose="020B0609020204030204" pitchFamily="49" charset="0"/>
+                <a:cs typeface="Consolas" panose="020B0609020204030204" pitchFamily="49" charset="0"/>
+              </a:rPr>
+              <a:t> (</a:t>
+            </a:r>
+            <a:r>
+              <a:rPr lang="en-GB" sz="1600" b="1" dirty="0" err="1">
+                <a:latin typeface="Consolas" panose="020B0609020204030204" pitchFamily="49" charset="0"/>
+                <a:cs typeface="Consolas" panose="020B0609020204030204" pitchFamily="49" charset="0"/>
+              </a:rPr>
+              <a:t>SP</a:t>
+            </a:r>
+            <a:r>
+              <a:rPr lang="en-GB" sz="1600" b="1" dirty="0">
+                <a:latin typeface="Consolas" panose="020B0609020204030204" pitchFamily="49" charset="0"/>
+                <a:cs typeface="Consolas" panose="020B0609020204030204" pitchFamily="49" charset="0"/>
+              </a:rPr>
+              <a:t>)</a:t>
+            </a:r>
+          </a:p>
+        </p:txBody>
+      </p:sp>
+      <p:sp>
+        <p:nvSpPr>
+          <p:cNvPr id="14" name="Rectangle 13"/>
+          <p:cNvSpPr/>
+          <p:nvPr/>
+        </p:nvSpPr>
+        <p:spPr>
+          <a:xfrm>
+            <a:off x="6230164" y="3343275"/>
+            <a:ext cx="1296144" cy="360040"/>
+          </a:xfrm>
+          <a:prstGeom prst="rect">
+            <a:avLst/>
+          </a:prstGeom>
+          <a:solidFill>
+            <a:schemeClr val="bg1"/>
+          </a:solidFill>
+        </p:spPr>
+        <p:style>
+          <a:lnRef idx="2">
+            <a:schemeClr val="accent1">
+              <a:shade val="50000"/>
+            </a:schemeClr>
+          </a:lnRef>
+          <a:fillRef idx="1">
+            <a:schemeClr val="accent1"/>
+          </a:fillRef>
+          <a:effectRef idx="0">
+            <a:schemeClr val="accent1"/>
+          </a:effectRef>
+          <a:fontRef idx="minor">
+            <a:schemeClr val="lt1"/>
+          </a:fontRef>
+        </p:style>
+        <p:txBody>
+          <a:bodyPr rtlCol="0" anchor="ctr"/>
+          <a:lstStyle/>
+          <a:p>
+            <a:pPr algn="ctr"/>
+            <a:endParaRPr lang="en-GB" sz="1600" b="1">
+              <a:latin typeface="Consolas" panose="020B0609020204030204" pitchFamily="49" charset="0"/>
+              <a:cs typeface="Consolas" panose="020B0609020204030204" pitchFamily="49" charset="0"/>
+            </a:endParaRPr>
+          </a:p>
+        </p:txBody>
+      </p:sp>
+      <p:sp>
+        <p:nvSpPr>
+          <p:cNvPr id="15" name="TextBox 14"/>
+          <p:cNvSpPr txBox="1"/>
+          <p:nvPr/>
+        </p:nvSpPr>
+        <p:spPr>
+          <a:xfrm>
+            <a:off x="7526308" y="3343275"/>
+            <a:ext cx="1368152" cy="338554"/>
+          </a:xfrm>
+          <a:prstGeom prst="rect">
+            <a:avLst/>
+          </a:prstGeom>
+          <a:noFill/>
+        </p:spPr>
+        <p:txBody>
+          <a:bodyPr wrap="square" rtlCol="0">
+            <a:spAutoFit/>
+          </a:bodyPr>
+          <a:lstStyle/>
+          <a:p>
+            <a:pPr algn="ctr"/>
+            <a:r>
+              <a:rPr lang="en-GB" sz="1600" b="1" dirty="0">
+                <a:latin typeface="Consolas" panose="020B0609020204030204" pitchFamily="49" charset="0"/>
+                <a:cs typeface="Consolas" panose="020B0609020204030204" pitchFamily="49" charset="0"/>
+              </a:rPr>
+              <a:t>0x20000200</a:t>
+            </a:r>
+          </a:p>
+        </p:txBody>
+      </p:sp>
+      <p:sp>
+        <p:nvSpPr>
+          <p:cNvPr id="16" name="Rectangle 15"/>
+          <p:cNvSpPr/>
+          <p:nvPr/>
+        </p:nvSpPr>
+        <p:spPr>
+          <a:xfrm>
+            <a:off x="6230164" y="3703315"/>
+            <a:ext cx="1296144" cy="360040"/>
+          </a:xfrm>
+          <a:prstGeom prst="rect">
+            <a:avLst/>
+          </a:prstGeom>
+          <a:solidFill>
+            <a:schemeClr val="bg1"/>
+          </a:solidFill>
+        </p:spPr>
+        <p:style>
+          <a:lnRef idx="2">
+            <a:schemeClr val="accent1">
+              <a:shade val="50000"/>
+            </a:schemeClr>
+          </a:lnRef>
+          <a:fillRef idx="1">
+            <a:schemeClr val="accent1"/>
+          </a:fillRef>
+          <a:effectRef idx="0">
+            <a:schemeClr val="accent1"/>
+          </a:effectRef>
+          <a:fontRef idx="minor">
+            <a:schemeClr val="lt1"/>
+          </a:fontRef>
+        </p:style>
+        <p:txBody>
+          <a:bodyPr rtlCol="0" anchor="ctr"/>
+          <a:lstStyle/>
+          <a:p>
+            <a:pPr algn="ctr"/>
+            <a:endParaRPr lang="en-GB" sz="1600" b="1">
+              <a:latin typeface="Consolas" panose="020B0609020204030204" pitchFamily="49" charset="0"/>
+              <a:cs typeface="Consolas" panose="020B0609020204030204" pitchFamily="49" charset="0"/>
+            </a:endParaRPr>
+          </a:p>
+        </p:txBody>
+      </p:sp>
+      <p:sp>
+        <p:nvSpPr>
+          <p:cNvPr id="17" name="Rectangle 16"/>
+          <p:cNvSpPr/>
+          <p:nvPr/>
+        </p:nvSpPr>
+        <p:spPr>
+          <a:xfrm>
+            <a:off x="6230164" y="4063355"/>
+            <a:ext cx="1296144" cy="360040"/>
+          </a:xfrm>
+          <a:prstGeom prst="rect">
+            <a:avLst/>
+          </a:prstGeom>
+          <a:solidFill>
+            <a:schemeClr val="bg1"/>
+          </a:solidFill>
+        </p:spPr>
+        <p:style>
+          <a:lnRef idx="2">
+            <a:schemeClr val="accent1">
+              <a:shade val="50000"/>
+            </a:schemeClr>
+          </a:lnRef>
+          <a:fillRef idx="1">
+            <a:schemeClr val="accent1"/>
+          </a:fillRef>
+          <a:effectRef idx="0">
+            <a:schemeClr val="accent1"/>
+          </a:effectRef>
+          <a:fontRef idx="minor">
+            <a:schemeClr val="lt1"/>
+          </a:fontRef>
+        </p:style>
+        <p:txBody>
+          <a:bodyPr rtlCol="0" anchor="ctr"/>
+          <a:lstStyle/>
+          <a:p>
+            <a:pPr algn="ctr"/>
+            <a:endParaRPr lang="en-GB" sz="1600" b="1">
+              <a:latin typeface="Consolas" panose="020B0609020204030204" pitchFamily="49" charset="0"/>
+              <a:cs typeface="Consolas" panose="020B0609020204030204" pitchFamily="49" charset="0"/>
+            </a:endParaRPr>
+          </a:p>
+        </p:txBody>
+      </p:sp>
+      <p:sp>
+        <p:nvSpPr>
+          <p:cNvPr id="18" name="TextBox 17"/>
+          <p:cNvSpPr txBox="1"/>
+          <p:nvPr/>
+        </p:nvSpPr>
+        <p:spPr>
+          <a:xfrm>
+            <a:off x="7526308" y="3703315"/>
+            <a:ext cx="1368152" cy="338554"/>
+          </a:xfrm>
+          <a:prstGeom prst="rect">
+            <a:avLst/>
+          </a:prstGeom>
+          <a:noFill/>
+        </p:spPr>
+        <p:txBody>
+          <a:bodyPr wrap="square" rtlCol="0">
+            <a:spAutoFit/>
+          </a:bodyPr>
+          <a:lstStyle/>
+          <a:p>
+            <a:pPr algn="ctr"/>
+            <a:r>
+              <a:rPr lang="en-GB" sz="1600" b="1" dirty="0">
+                <a:latin typeface="Consolas" panose="020B0609020204030204" pitchFamily="49" charset="0"/>
+                <a:cs typeface="Consolas" panose="020B0609020204030204" pitchFamily="49" charset="0"/>
+              </a:rPr>
+              <a:t>0x200001FC</a:t>
+            </a:r>
+          </a:p>
+        </p:txBody>
+      </p:sp>
+      <p:sp>
+        <p:nvSpPr>
+          <p:cNvPr id="19" name="TextBox 18"/>
+          <p:cNvSpPr txBox="1"/>
+          <p:nvPr/>
+        </p:nvSpPr>
+        <p:spPr>
+          <a:xfrm>
+            <a:off x="7526308" y="4063355"/>
+            <a:ext cx="1368152" cy="338554"/>
+          </a:xfrm>
+          <a:prstGeom prst="rect">
+            <a:avLst/>
+          </a:prstGeom>
+          <a:noFill/>
+        </p:spPr>
+        <p:txBody>
+          <a:bodyPr wrap="square" rtlCol="0">
+            <a:spAutoFit/>
+          </a:bodyPr>
+          <a:lstStyle/>
+          <a:p>
+            <a:pPr algn="ctr"/>
+            <a:r>
+              <a:rPr lang="en-GB" sz="1600" b="1" dirty="0">
+                <a:latin typeface="Consolas" panose="020B0609020204030204" pitchFamily="49" charset="0"/>
+                <a:cs typeface="Consolas" panose="020B0609020204030204" pitchFamily="49" charset="0"/>
+              </a:rPr>
+              <a:t>0x200001F8</a:t>
+            </a:r>
+          </a:p>
+        </p:txBody>
+      </p:sp>
+      <p:sp>
+        <p:nvSpPr>
+          <p:cNvPr id="20" name="TextBox 19"/>
+          <p:cNvSpPr txBox="1"/>
+          <p:nvPr/>
+        </p:nvSpPr>
+        <p:spPr>
+          <a:xfrm>
+            <a:off x="4127376" y="2708920"/>
+            <a:ext cx="1368152" cy="338554"/>
+          </a:xfrm>
+          <a:prstGeom prst="rect">
+            <a:avLst/>
+          </a:prstGeom>
+          <a:noFill/>
+        </p:spPr>
+        <p:txBody>
+          <a:bodyPr wrap="square" rtlCol="0">
+            <a:spAutoFit/>
+          </a:bodyPr>
+          <a:lstStyle/>
+          <a:p>
+            <a:pPr algn="ctr"/>
+            <a:r>
+              <a:rPr lang="en-GB" sz="1600" b="1" dirty="0">
+                <a:latin typeface="Consolas" panose="020B0609020204030204" pitchFamily="49" charset="0"/>
+                <a:cs typeface="Consolas" panose="020B0609020204030204" pitchFamily="49" charset="0"/>
+              </a:rPr>
+              <a:t>0x20000200</a:t>
+            </a:r>
+          </a:p>
+        </p:txBody>
+      </p:sp>
+      <p:sp>
+        <p:nvSpPr>
+          <p:cNvPr id="21" name="TextBox 20"/>
+          <p:cNvSpPr txBox="1"/>
+          <p:nvPr/>
+        </p:nvSpPr>
+        <p:spPr>
+          <a:xfrm>
+            <a:off x="4127376" y="1988840"/>
+            <a:ext cx="1296144" cy="338554"/>
+          </a:xfrm>
+          <a:prstGeom prst="rect">
+            <a:avLst/>
+          </a:prstGeom>
+          <a:noFill/>
+        </p:spPr>
+        <p:txBody>
+          <a:bodyPr wrap="square" rtlCol="0">
+            <a:spAutoFit/>
+          </a:bodyPr>
+          <a:lstStyle/>
+          <a:p>
+            <a:pPr algn="r"/>
+            <a:r>
+              <a:rPr lang="en-GB" sz="1600" b="1" dirty="0" err="1">
+                <a:latin typeface="Consolas" panose="020B0609020204030204" pitchFamily="49" charset="0"/>
+                <a:cs typeface="Consolas" panose="020B0609020204030204" pitchFamily="49" charset="0"/>
+              </a:rPr>
+              <a:t>0x22222222</a:t>
+            </a:r>
+            <a:endParaRPr lang="en-GB" sz="1600" b="1" dirty="0">
+              <a:latin typeface="Consolas" panose="020B0609020204030204" pitchFamily="49" charset="0"/>
+              <a:cs typeface="Consolas" panose="020B0609020204030204" pitchFamily="49" charset="0"/>
+            </a:endParaRPr>
+          </a:p>
+        </p:txBody>
+      </p:sp>
+      <p:sp>
+        <p:nvSpPr>
+          <p:cNvPr id="22" name="TextBox 21"/>
+          <p:cNvSpPr txBox="1"/>
+          <p:nvPr/>
+        </p:nvSpPr>
+        <p:spPr>
+          <a:xfrm>
+            <a:off x="4127376" y="1628800"/>
+            <a:ext cx="1296144" cy="338554"/>
+          </a:xfrm>
+          <a:prstGeom prst="rect">
+            <a:avLst/>
+          </a:prstGeom>
+          <a:noFill/>
+        </p:spPr>
+        <p:txBody>
+          <a:bodyPr wrap="square" rtlCol="0">
+            <a:spAutoFit/>
+          </a:bodyPr>
+          <a:lstStyle/>
+          <a:p>
+            <a:pPr algn="r"/>
+            <a:r>
+              <a:rPr lang="en-GB" sz="1600" b="1" dirty="0" err="1">
+                <a:latin typeface="Consolas" panose="020B0609020204030204" pitchFamily="49" charset="0"/>
+                <a:cs typeface="Consolas" panose="020B0609020204030204" pitchFamily="49" charset="0"/>
+              </a:rPr>
+              <a:t>0x11111111</a:t>
+            </a:r>
+            <a:endParaRPr lang="en-GB" sz="1600" b="1" dirty="0">
+              <a:latin typeface="Consolas" panose="020B0609020204030204" pitchFamily="49" charset="0"/>
+              <a:cs typeface="Consolas" panose="020B0609020204030204" pitchFamily="49" charset="0"/>
+            </a:endParaRPr>
+          </a:p>
+        </p:txBody>
+      </p:sp>
+      <p:cxnSp>
+        <p:nvCxnSpPr>
+          <p:cNvPr id="24" name="Straight Arrow Connector 23"/>
+          <p:cNvCxnSpPr/>
+          <p:nvPr/>
+        </p:nvCxnSpPr>
+        <p:spPr>
+          <a:xfrm>
+            <a:off x="5429517" y="2891802"/>
+            <a:ext cx="819965" cy="630275"/>
+          </a:xfrm>
+          <a:prstGeom prst="straightConnector1">
+            <a:avLst/>
+          </a:prstGeom>
+          <a:ln w="19050">
+            <a:solidFill>
+              <a:srgbClr val="C00000"/>
+            </a:solidFill>
+            <a:tailEnd type="arrow"/>
+          </a:ln>
+        </p:spPr>
+        <p:style>
+          <a:lnRef idx="1">
+            <a:schemeClr val="accent1"/>
+          </a:lnRef>
+          <a:fillRef idx="0">
+            <a:schemeClr val="accent1"/>
+          </a:fillRef>
+          <a:effectRef idx="0">
+            <a:schemeClr val="accent1"/>
+          </a:effectRef>
+          <a:fontRef idx="minor">
+            <a:schemeClr val="tx1"/>
+          </a:fontRef>
+        </p:style>
+      </p:cxnSp>
+      <p:sp>
+        <p:nvSpPr>
+          <p:cNvPr id="4" name="Slide Number Placeholder 3"/>
+          <p:cNvSpPr>
+            <a:spLocks noGrp="1"/>
+          </p:cNvSpPr>
+          <p:nvPr>
+            <p:ph type="sldNum" sz="quarter" idx="12"/>
+          </p:nvPr>
+        </p:nvSpPr>
+        <p:spPr/>
+        <p:txBody>
+          <a:bodyPr/>
+          <a:lstStyle/>
+          <a:p>
+            <a:fld id="{EA7C8D44-3667-46F6-9772-CC52308E2A7F}" type="slidenum">
+              <a:rPr kumimoji="0" lang="en-US" smtClean="0"/>
+              <a:pPr/>
+              <a:t>10</a:t>
+            </a:fld>
+            <a:endParaRPr kumimoji="0" lang="en-US"/>
+          </a:p>
+        </p:txBody>
+      </p:sp>
+      <p:sp>
+        <p:nvSpPr>
+          <p:cNvPr id="23" name="TextBox 22"/>
+          <p:cNvSpPr txBox="1"/>
+          <p:nvPr/>
+        </p:nvSpPr>
+        <p:spPr>
+          <a:xfrm>
+            <a:off x="6230165" y="3352800"/>
+            <a:ext cx="1296142" cy="338554"/>
+          </a:xfrm>
+          <a:prstGeom prst="rect">
+            <a:avLst/>
+          </a:prstGeom>
+          <a:noFill/>
+        </p:spPr>
+        <p:txBody>
+          <a:bodyPr wrap="square" rtlCol="0">
+            <a:spAutoFit/>
+          </a:bodyPr>
+          <a:lstStyle/>
+          <a:p>
+            <a:pPr algn="ctr"/>
+            <a:r>
+              <a:rPr lang="en-US" sz="1600" b="1" dirty="0" err="1">
+                <a:latin typeface="Consolas" panose="020B0609020204030204" pitchFamily="49" charset="0"/>
+                <a:cs typeface="Consolas" panose="020B0609020204030204" pitchFamily="49" charset="0"/>
+              </a:rPr>
+              <a:t>xxxxxxxx</a:t>
+            </a:r>
+            <a:endParaRPr lang="en-US" sz="1600" b="1" dirty="0">
+              <a:latin typeface="Consolas" panose="020B0609020204030204" pitchFamily="49" charset="0"/>
+              <a:cs typeface="Consolas" panose="020B0609020204030204" pitchFamily="49" charset="0"/>
+            </a:endParaRPr>
+          </a:p>
+        </p:txBody>
+      </p:sp>
+      <p:sp>
+        <p:nvSpPr>
+          <p:cNvPr id="25" name="Rounded Rectangle 24"/>
+          <p:cNvSpPr/>
+          <p:nvPr/>
+        </p:nvSpPr>
+        <p:spPr>
+          <a:xfrm>
+            <a:off x="381000" y="2528900"/>
+            <a:ext cx="2438400" cy="2078360"/>
+          </a:xfrm>
+          <a:prstGeom prst="roundRect">
+            <a:avLst/>
+          </a:prstGeom>
+          <a:noFill/>
+          <a:ln>
+            <a:solidFill>
+              <a:schemeClr val="tx1"/>
+            </a:solidFill>
+          </a:ln>
+        </p:spPr>
+        <p:style>
+          <a:lnRef idx="2">
+            <a:schemeClr val="accent1">
+              <a:shade val="50000"/>
+            </a:schemeClr>
+          </a:lnRef>
+          <a:fillRef idx="1">
+            <a:schemeClr val="accent1"/>
+          </a:fillRef>
+          <a:effectRef idx="0">
+            <a:schemeClr val="accent1"/>
+          </a:effectRef>
+          <a:fontRef idx="minor">
+            <a:schemeClr val="lt1"/>
+          </a:fontRef>
+        </p:style>
+        <p:txBody>
+          <a:bodyPr rtlCol="0" anchor="ctr"/>
+          <a:lstStyle/>
+          <a:p>
+            <a:pPr>
+              <a:buNone/>
+            </a:pPr>
+            <a:r>
+              <a:rPr lang="en-GB" sz="2400" dirty="0">
+                <a:solidFill>
+                  <a:schemeClr val="tx1"/>
+                </a:solidFill>
+                <a:latin typeface="Consolas" panose="020B0609020204030204" pitchFamily="49" charset="0"/>
+                <a:cs typeface="Consolas" panose="020B0609020204030204" pitchFamily="49" charset="0"/>
+              </a:rPr>
+              <a:t>PUSH </a:t>
+            </a:r>
+            <a:r>
+              <a:rPr lang="en-GB" sz="2400">
+                <a:solidFill>
+                  <a:schemeClr val="tx1"/>
+                </a:solidFill>
+                <a:latin typeface="Consolas" panose="020B0609020204030204" pitchFamily="49" charset="0"/>
+                <a:cs typeface="Consolas" panose="020B0609020204030204" pitchFamily="49" charset="0"/>
+              </a:rPr>
+              <a:t>{R1,R2}</a:t>
+            </a:r>
+            <a:endParaRPr lang="en-GB" sz="2400" dirty="0">
+              <a:solidFill>
+                <a:schemeClr val="tx1"/>
+              </a:solidFill>
+              <a:latin typeface="Consolas" panose="020B0609020204030204" pitchFamily="49" charset="0"/>
+              <a:cs typeface="Consolas" panose="020B0609020204030204" pitchFamily="49" charset="0"/>
+            </a:endParaRPr>
+          </a:p>
+          <a:p>
+            <a:pPr>
+              <a:buNone/>
+            </a:pPr>
+            <a:r>
+              <a:rPr lang="en-GB" sz="2400" dirty="0">
+                <a:solidFill>
+                  <a:schemeClr val="tx1"/>
+                </a:solidFill>
+                <a:latin typeface="Consolas" panose="020B0609020204030204" pitchFamily="49" charset="0"/>
+                <a:cs typeface="Consolas" panose="020B0609020204030204" pitchFamily="49" charset="0"/>
+              </a:rPr>
+              <a:t>POP  {R1}</a:t>
+            </a:r>
+          </a:p>
+          <a:p>
+            <a:pPr>
+              <a:buNone/>
+            </a:pPr>
+            <a:r>
+              <a:rPr lang="en-GB" sz="2400" dirty="0">
+                <a:solidFill>
+                  <a:schemeClr val="tx1"/>
+                </a:solidFill>
+                <a:latin typeface="Consolas" panose="020B0609020204030204" pitchFamily="49" charset="0"/>
+                <a:cs typeface="Consolas" panose="020B0609020204030204" pitchFamily="49" charset="0"/>
+              </a:rPr>
+              <a:t>POP  {</a:t>
+            </a:r>
+            <a:r>
+              <a:rPr lang="en-GB" sz="2400" dirty="0" err="1">
+                <a:solidFill>
+                  <a:schemeClr val="tx1"/>
+                </a:solidFill>
+                <a:latin typeface="Consolas" panose="020B0609020204030204" pitchFamily="49" charset="0"/>
+                <a:cs typeface="Consolas" panose="020B0609020204030204" pitchFamily="49" charset="0"/>
+              </a:rPr>
+              <a:t>R2</a:t>
+            </a:r>
+            <a:r>
+              <a:rPr lang="en-GB" sz="2400" dirty="0">
+                <a:solidFill>
+                  <a:schemeClr val="tx1"/>
+                </a:solidFill>
+                <a:latin typeface="Consolas" panose="020B0609020204030204" pitchFamily="49" charset="0"/>
+                <a:cs typeface="Consolas" panose="020B0609020204030204" pitchFamily="49" charset="0"/>
+              </a:rPr>
+              <a:t>}</a:t>
+            </a:r>
+          </a:p>
+        </p:txBody>
+      </p:sp>
+      <p:sp>
+        <p:nvSpPr>
+          <p:cNvPr id="3" name="TextBox 2"/>
+          <p:cNvSpPr txBox="1"/>
+          <p:nvPr/>
+        </p:nvSpPr>
+        <p:spPr>
+          <a:xfrm>
+            <a:off x="6230164" y="4736068"/>
+            <a:ext cx="1298123" cy="369332"/>
+          </a:xfrm>
+          <a:prstGeom prst="rect">
+            <a:avLst/>
+          </a:prstGeom>
+          <a:noFill/>
+        </p:spPr>
+        <p:txBody>
+          <a:bodyPr wrap="square" rtlCol="0">
+            <a:spAutoFit/>
+          </a:bodyPr>
+          <a:lstStyle/>
+          <a:p>
+            <a:pPr algn="ctr"/>
+            <a:r>
+              <a:rPr lang="en-US" dirty="0"/>
+              <a:t>memory</a:t>
+            </a:r>
+          </a:p>
+        </p:txBody>
+      </p:sp>
+      <p:sp>
+        <p:nvSpPr>
+          <p:cNvPr id="28" name="TextBox 27"/>
+          <p:cNvSpPr txBox="1"/>
+          <p:nvPr/>
+        </p:nvSpPr>
+        <p:spPr>
+          <a:xfrm>
+            <a:off x="7738363" y="2615348"/>
+            <a:ext cx="944041" cy="369332"/>
+          </a:xfrm>
+          <a:prstGeom prst="rect">
+            <a:avLst/>
+          </a:prstGeom>
+          <a:noFill/>
+        </p:spPr>
+        <p:txBody>
+          <a:bodyPr wrap="none" rtlCol="0">
+            <a:spAutoFit/>
+          </a:bodyPr>
+          <a:lstStyle/>
+          <a:p>
+            <a:r>
+              <a:rPr lang="en-US" dirty="0"/>
+              <a:t>Address</a:t>
+            </a:r>
+          </a:p>
+        </p:txBody>
+      </p:sp>
+      <p:sp>
+        <p:nvSpPr>
+          <p:cNvPr id="34" name="TextBox 33"/>
+          <p:cNvSpPr txBox="1"/>
+          <p:nvPr/>
+        </p:nvSpPr>
+        <p:spPr>
+          <a:xfrm>
+            <a:off x="6232145" y="3724801"/>
+            <a:ext cx="1296142" cy="338554"/>
+          </a:xfrm>
+          <a:prstGeom prst="rect">
+            <a:avLst/>
+          </a:prstGeom>
+          <a:noFill/>
+        </p:spPr>
+        <p:txBody>
+          <a:bodyPr wrap="square" rtlCol="0">
+            <a:spAutoFit/>
+          </a:bodyPr>
+          <a:lstStyle/>
+          <a:p>
+            <a:pPr algn="ctr"/>
+            <a:r>
+              <a:rPr lang="en-US" sz="1600" b="1" dirty="0" err="1">
+                <a:latin typeface="Consolas" panose="020B0609020204030204" pitchFamily="49" charset="0"/>
+                <a:cs typeface="Consolas" panose="020B0609020204030204" pitchFamily="49" charset="0"/>
+              </a:rPr>
+              <a:t>xxxxxxxx</a:t>
+            </a:r>
+            <a:endParaRPr lang="en-US" sz="1600" b="1" dirty="0">
+              <a:latin typeface="Consolas" panose="020B0609020204030204" pitchFamily="49" charset="0"/>
+              <a:cs typeface="Consolas" panose="020B0609020204030204" pitchFamily="49" charset="0"/>
+            </a:endParaRPr>
+          </a:p>
+        </p:txBody>
+      </p:sp>
+      <p:sp>
+        <p:nvSpPr>
+          <p:cNvPr id="35" name="TextBox 34"/>
+          <p:cNvSpPr txBox="1"/>
+          <p:nvPr/>
+        </p:nvSpPr>
+        <p:spPr>
+          <a:xfrm>
+            <a:off x="6232145" y="4063355"/>
+            <a:ext cx="1296142" cy="338554"/>
+          </a:xfrm>
+          <a:prstGeom prst="rect">
+            <a:avLst/>
+          </a:prstGeom>
+          <a:noFill/>
+        </p:spPr>
+        <p:txBody>
+          <a:bodyPr wrap="square" rtlCol="0">
+            <a:spAutoFit/>
+          </a:bodyPr>
+          <a:lstStyle/>
+          <a:p>
+            <a:pPr algn="ctr"/>
+            <a:r>
+              <a:rPr lang="en-US" sz="1600" b="1" dirty="0" err="1">
+                <a:latin typeface="Consolas" panose="020B0609020204030204" pitchFamily="49" charset="0"/>
+                <a:cs typeface="Consolas" panose="020B0609020204030204" pitchFamily="49" charset="0"/>
+              </a:rPr>
+              <a:t>xxxxxxxx</a:t>
+            </a:r>
+            <a:endParaRPr lang="en-US" sz="1600" b="1" dirty="0">
+              <a:latin typeface="Consolas" panose="020B0609020204030204" pitchFamily="49" charset="0"/>
+              <a:cs typeface="Consolas" panose="020B0609020204030204" pitchFamily="49" charset="0"/>
+            </a:endParaRPr>
+          </a:p>
+        </p:txBody>
+      </p:sp>
+      <p:sp>
+        <p:nvSpPr>
+          <p:cNvPr id="30" name="Rectangle 29"/>
+          <p:cNvSpPr/>
+          <p:nvPr/>
+        </p:nvSpPr>
+        <p:spPr>
+          <a:xfrm>
+            <a:off x="443880" y="1675288"/>
+            <a:ext cx="2819400" cy="685274"/>
+          </a:xfrm>
+          <a:prstGeom prst="rect">
+            <a:avLst/>
+          </a:prstGeom>
+        </p:spPr>
+        <p:style>
+          <a:lnRef idx="1">
+            <a:schemeClr val="accent1"/>
+          </a:lnRef>
+          <a:fillRef idx="2">
+            <a:schemeClr val="accent1"/>
+          </a:fillRef>
+          <a:effectRef idx="1">
+            <a:schemeClr val="accent1"/>
+          </a:effectRef>
+          <a:fontRef idx="minor">
+            <a:schemeClr val="dk1"/>
+          </a:fontRef>
+        </p:style>
+        <p:txBody>
+          <a:bodyPr rtlCol="0" anchor="ctr"/>
+          <a:lstStyle/>
+          <a:p>
+            <a:pPr algn="ctr"/>
+            <a:r>
+              <a:rPr lang="en-US" sz="2400" dirty="0">
+                <a:solidFill>
+                  <a:schemeClr val="tx1"/>
+                </a:solidFill>
+                <a:latin typeface="Consolas" panose="020B0609020204030204" pitchFamily="49" charset="0"/>
+                <a:cs typeface="Consolas" panose="020B0609020204030204" pitchFamily="49" charset="0"/>
+              </a:rPr>
+              <a:t>R1==0x11111111</a:t>
+            </a:r>
+          </a:p>
+          <a:p>
+            <a:pPr algn="ctr"/>
+            <a:r>
+              <a:rPr lang="en-US" sz="2400" dirty="0">
+                <a:solidFill>
+                  <a:schemeClr val="tx1"/>
+                </a:solidFill>
+                <a:latin typeface="Consolas" panose="020B0609020204030204" pitchFamily="49" charset="0"/>
+                <a:cs typeface="Consolas" panose="020B0609020204030204" pitchFamily="49" charset="0"/>
+              </a:rPr>
+              <a:t>R2==0x22222222</a:t>
+            </a:r>
+          </a:p>
+        </p:txBody>
+      </p:sp>
+      <p:sp>
+        <p:nvSpPr>
+          <p:cNvPr id="31" name="Rectangle 30"/>
+          <p:cNvSpPr/>
+          <p:nvPr/>
+        </p:nvSpPr>
+        <p:spPr>
+          <a:xfrm>
+            <a:off x="677570" y="1237054"/>
+            <a:ext cx="2441694" cy="400110"/>
+          </a:xfrm>
+          <a:prstGeom prst="rect">
+            <a:avLst/>
+          </a:prstGeom>
+        </p:spPr>
+        <p:txBody>
+          <a:bodyPr wrap="none">
+            <a:spAutoFit/>
+          </a:bodyPr>
+          <a:lstStyle/>
+          <a:p>
+            <a:r>
+              <a:rPr lang="en-US" sz="2000" dirty="0">
+                <a:latin typeface="Consolas" panose="020B0609020204030204" pitchFamily="49" charset="0"/>
+                <a:cs typeface="Consolas" panose="020B0609020204030204" pitchFamily="49" charset="0"/>
+              </a:rPr>
+              <a:t>Before execution</a:t>
+            </a:r>
+            <a:endParaRPr lang="en-US" sz="2000" dirty="0"/>
+          </a:p>
+        </p:txBody>
+      </p:sp>
+      <p:sp>
+        <p:nvSpPr>
+          <p:cNvPr id="32" name="Content Placeholder 3"/>
+          <p:cNvSpPr>
+            <a:spLocks noGrp="1"/>
+          </p:cNvSpPr>
+          <p:nvPr>
+            <p:ph sz="quarter" idx="1"/>
+          </p:nvPr>
+        </p:nvSpPr>
+        <p:spPr>
+          <a:xfrm>
+            <a:off x="443880" y="5044440"/>
+            <a:ext cx="8229600" cy="1404500"/>
+          </a:xfrm>
+        </p:spPr>
+        <p:txBody>
+          <a:bodyPr/>
+          <a:lstStyle/>
+          <a:p>
+            <a:r>
+              <a:rPr lang="en-US" dirty="0"/>
+              <a:t>What is content of stack, and position of SP, after PUSH {R2,R1}?</a:t>
+            </a:r>
+          </a:p>
+          <a:p>
+            <a:r>
+              <a:rPr lang="en-US" dirty="0"/>
+              <a:t>What are the values of R1/R2 after POP {R2}?</a:t>
+            </a:r>
+          </a:p>
+        </p:txBody>
+      </p:sp>
+    </p:spTree>
+    <p:extLst>
+      <p:ext uri="{BB962C8B-B14F-4D97-AF65-F5344CB8AC3E}">
+        <p14:creationId xmlns:p14="http://schemas.microsoft.com/office/powerpoint/2010/main" val="245926897"/>
+      </p:ext>
+    </p:extLst>
+  </p:cSld>
+  <p:clrMapOvr>
+    <a:masterClrMapping/>
+  </p:clrMapOvr>
+</p:sld>
+</file>
+
+<file path=ppt/slides/slide11.xml><?xml version="1.0" encoding="utf-8"?>
+<p:sld xmlns:a="http://schemas.openxmlformats.org/drawingml/2006/main" xmlns:r="http://schemas.openxmlformats.org/officeDocument/2006/relationships" xmlns:p="http://schemas.openxmlformats.org/presentationml/2006/main">
+  <p:cSld>
+    <p:spTree>
+      <p:nvGrpSpPr>
+        <p:cNvPr id="1" name=""/>
+        <p:cNvGrpSpPr/>
+        <p:nvPr/>
+      </p:nvGrpSpPr>
+      <p:grpSpPr>
+        <a:xfrm>
+          <a:off x="0" y="0"/>
+          <a:ext cx="0" cy="0"/>
+          <a:chOff x="0" y="0"/>
+          <a:chExt cx="0" cy="0"/>
+        </a:xfrm>
+      </p:grpSpPr>
+      <p:sp>
+        <p:nvSpPr>
+          <p:cNvPr id="41" name="Rectangle 40"/>
+          <p:cNvSpPr/>
+          <p:nvPr/>
+        </p:nvSpPr>
+        <p:spPr>
+          <a:xfrm>
+            <a:off x="4127376" y="2348880"/>
+            <a:ext cx="1296144" cy="360040"/>
+          </a:xfrm>
+          <a:prstGeom prst="rect">
+            <a:avLst/>
+          </a:prstGeom>
+          <a:solidFill>
+            <a:schemeClr val="bg1"/>
+          </a:solidFill>
+          <a:ln>
+            <a:prstDash val="dash"/>
+          </a:ln>
+        </p:spPr>
+        <p:style>
+          <a:lnRef idx="2">
+            <a:schemeClr val="accent1">
+              <a:shade val="50000"/>
+            </a:schemeClr>
+          </a:lnRef>
+          <a:fillRef idx="1">
+            <a:schemeClr val="accent1"/>
+          </a:fillRef>
+          <a:effectRef idx="0">
+            <a:schemeClr val="accent1"/>
+          </a:effectRef>
+          <a:fontRef idx="minor">
+            <a:schemeClr val="lt1"/>
+          </a:fontRef>
+        </p:style>
+        <p:txBody>
+          <a:bodyPr rtlCol="0" anchor="ctr"/>
+          <a:lstStyle/>
+          <a:p>
+            <a:pPr algn="ctr"/>
+            <a:endParaRPr lang="en-GB" sz="1600" b="1">
+              <a:latin typeface="Consolas" panose="020B0609020204030204" pitchFamily="49" charset="0"/>
+              <a:cs typeface="Consolas" panose="020B0609020204030204" pitchFamily="49" charset="0"/>
+            </a:endParaRPr>
+          </a:p>
+        </p:txBody>
+      </p:sp>
+      <p:sp>
+        <p:nvSpPr>
+          <p:cNvPr id="29" name="Rectangle 28"/>
+          <p:cNvSpPr/>
+          <p:nvPr/>
+        </p:nvSpPr>
+        <p:spPr>
+          <a:xfrm>
+            <a:off x="6230164" y="2984680"/>
+            <a:ext cx="1296144" cy="360040"/>
+          </a:xfrm>
+          <a:prstGeom prst="rect">
+            <a:avLst/>
+          </a:prstGeom>
+          <a:solidFill>
+            <a:schemeClr val="bg1"/>
+          </a:solidFill>
+          <a:ln>
+            <a:prstDash val="dash"/>
+          </a:ln>
+        </p:spPr>
+        <p:style>
+          <a:lnRef idx="2">
+            <a:schemeClr val="accent1">
+              <a:shade val="50000"/>
+            </a:schemeClr>
+          </a:lnRef>
+          <a:fillRef idx="1">
+            <a:schemeClr val="accent1"/>
+          </a:fillRef>
+          <a:effectRef idx="0">
+            <a:schemeClr val="accent1"/>
+          </a:effectRef>
+          <a:fontRef idx="minor">
+            <a:schemeClr val="lt1"/>
+          </a:fontRef>
+        </p:style>
+        <p:txBody>
+          <a:bodyPr rtlCol="0" anchor="ctr"/>
+          <a:lstStyle/>
+          <a:p>
+            <a:pPr algn="ctr"/>
+            <a:endParaRPr lang="en-GB" sz="1600" b="1">
+              <a:latin typeface="Consolas" panose="020B0609020204030204" pitchFamily="49" charset="0"/>
+              <a:cs typeface="Consolas" panose="020B0609020204030204" pitchFamily="49" charset="0"/>
+            </a:endParaRPr>
+          </a:p>
+        </p:txBody>
+      </p:sp>
+      <p:sp>
+        <p:nvSpPr>
+          <p:cNvPr id="27" name="Rectangle 26"/>
+          <p:cNvSpPr/>
+          <p:nvPr/>
+        </p:nvSpPr>
+        <p:spPr>
+          <a:xfrm>
+            <a:off x="6230164" y="4423395"/>
+            <a:ext cx="1296144" cy="360040"/>
+          </a:xfrm>
+          <a:prstGeom prst="rect">
+            <a:avLst/>
+          </a:prstGeom>
+          <a:solidFill>
+            <a:schemeClr val="bg1"/>
+          </a:solidFill>
+          <a:ln>
+            <a:prstDash val="dash"/>
+          </a:ln>
+        </p:spPr>
+        <p:style>
+          <a:lnRef idx="2">
+            <a:schemeClr val="accent1">
+              <a:shade val="50000"/>
+            </a:schemeClr>
+          </a:lnRef>
+          <a:fillRef idx="1">
+            <a:schemeClr val="accent1"/>
+          </a:fillRef>
+          <a:effectRef idx="0">
+            <a:schemeClr val="accent1"/>
+          </a:effectRef>
+          <a:fontRef idx="minor">
+            <a:schemeClr val="lt1"/>
+          </a:fontRef>
+        </p:style>
+        <p:txBody>
+          <a:bodyPr rtlCol="0" anchor="ctr"/>
+          <a:lstStyle/>
+          <a:p>
+            <a:pPr algn="ctr"/>
+            <a:endParaRPr lang="en-GB" sz="1600" b="1">
+              <a:latin typeface="Consolas" panose="020B0609020204030204" pitchFamily="49" charset="0"/>
+              <a:cs typeface="Consolas" panose="020B0609020204030204" pitchFamily="49" charset="0"/>
+            </a:endParaRPr>
+          </a:p>
+        </p:txBody>
+      </p:sp>
+      <p:sp>
+        <p:nvSpPr>
+          <p:cNvPr id="2" name="Title 1"/>
+          <p:cNvSpPr>
+            <a:spLocks noGrp="1"/>
+          </p:cNvSpPr>
+          <p:nvPr>
+            <p:ph type="title"/>
+          </p:nvPr>
+        </p:nvSpPr>
+        <p:spPr/>
+        <p:txBody>
+          <a:bodyPr/>
+          <a:lstStyle/>
+          <a:p>
+            <a:r>
+              <a:rPr lang="en-GB" dirty="0"/>
               <a:t>Stack ANS</a:t>
             </a:r>
           </a:p>
@@ -8229,7 +9522,7 @@
             <a:fld id="{EA7C8D44-3667-46F6-9772-CC52308E2A7F}" type="slidenum">
               <a:rPr kumimoji="0" lang="en-US" smtClean="0"/>
               <a:pPr/>
-              <a:t>10</a:t>
+              <a:t>11</a:t>
             </a:fld>
             <a:endParaRPr kumimoji="0" lang="en-US"/>
           </a:p>
@@ -8658,7 +9951,7 @@
 </p:sld>
 </file>
 
-<file path=ppt/slides/slide11.xml><?xml version="1.0" encoding="utf-8"?>
+<file path=ppt/slides/slide12.xml><?xml version="1.0" encoding="utf-8"?>
 <p:sld xmlns:a="http://schemas.openxmlformats.org/drawingml/2006/main" xmlns:r="http://schemas.openxmlformats.org/officeDocument/2006/relationships" xmlns:p="http://schemas.openxmlformats.org/presentationml/2006/main">
   <p:cSld>
     <p:spTree>
@@ -9517,7 +10810,7 @@
             <a:fld id="{EA7C8D44-3667-46F6-9772-CC52308E2A7F}" type="slidenum">
               <a:rPr kumimoji="0" lang="en-US" smtClean="0"/>
               <a:pPr/>
-              <a:t>11</a:t>
+              <a:t>12</a:t>
             </a:fld>
             <a:endParaRPr kumimoji="0" lang="en-US"/>
           </a:p>
@@ -9976,116 +11269,6 @@
 </p:sld>
 </file>
 
-<file path=ppt/slides/slide12.xml><?xml version="1.0" encoding="utf-8"?>
-<p:sld xmlns:a="http://schemas.openxmlformats.org/drawingml/2006/main" xmlns:r="http://schemas.openxmlformats.org/officeDocument/2006/relationships" xmlns:p="http://schemas.openxmlformats.org/presentationml/2006/main">
-  <p:cSld>
-    <p:spTree>
-      <p:nvGrpSpPr>
-        <p:cNvPr id="1" name=""/>
-        <p:cNvGrpSpPr/>
-        <p:nvPr/>
-      </p:nvGrpSpPr>
-      <p:grpSpPr>
-        <a:xfrm>
-          <a:off x="0" y="0"/>
-          <a:ext cx="0" cy="0"/>
-          <a:chOff x="0" y="0"/>
-          <a:chExt cx="0" cy="0"/>
-        </a:xfrm>
-      </p:grpSpPr>
-      <p:sp>
-        <p:nvSpPr>
-          <p:cNvPr id="2" name="Title 1">
-            <a:extLst>
-              <a:ext uri="{FF2B5EF4-FFF2-40B4-BE49-F238E27FC236}">
-                <a16:creationId xmlns:a16="http://schemas.microsoft.com/office/drawing/2014/main" id="{5A8CE7FB-D6EA-91FF-145A-7E9C61E5FF5B}"/>
-              </a:ext>
-            </a:extLst>
-          </p:cNvPr>
-          <p:cNvSpPr>
-            <a:spLocks noGrp="1"/>
-          </p:cNvSpPr>
-          <p:nvPr>
-            <p:ph type="title"/>
-          </p:nvPr>
-        </p:nvSpPr>
-        <p:spPr/>
-        <p:txBody>
-          <a:bodyPr/>
-          <a:lstStyle/>
-          <a:p>
-            <a:endParaRPr lang="en-US"/>
-          </a:p>
-        </p:txBody>
-      </p:sp>
-      <p:sp>
-        <p:nvSpPr>
-          <p:cNvPr id="3" name="Slide Number Placeholder 2">
-            <a:extLst>
-              <a:ext uri="{FF2B5EF4-FFF2-40B4-BE49-F238E27FC236}">
-                <a16:creationId xmlns:a16="http://schemas.microsoft.com/office/drawing/2014/main" id="{678C8752-847F-B682-ACE3-F232BF18A861}"/>
-              </a:ext>
-            </a:extLst>
-          </p:cNvPr>
-          <p:cNvSpPr>
-            <a:spLocks noGrp="1"/>
-          </p:cNvSpPr>
-          <p:nvPr>
-            <p:ph type="sldNum" sz="quarter" idx="12"/>
-          </p:nvPr>
-        </p:nvSpPr>
-        <p:spPr/>
-        <p:txBody>
-          <a:bodyPr/>
-          <a:lstStyle/>
-          <a:p>
-            <a:fld id="{EA7C8D44-3667-46F6-9772-CC52308E2A7F}" type="slidenum">
-              <a:rPr kumimoji="0" lang="en-US" smtClean="0"/>
-              <a:pPr/>
-              <a:t>12</a:t>
-            </a:fld>
-            <a:endParaRPr kumimoji="0" lang="en-US" dirty="0"/>
-          </a:p>
-        </p:txBody>
-      </p:sp>
-      <p:sp>
-        <p:nvSpPr>
-          <p:cNvPr id="4" name="Content Placeholder 3">
-            <a:extLst>
-              <a:ext uri="{FF2B5EF4-FFF2-40B4-BE49-F238E27FC236}">
-                <a16:creationId xmlns:a16="http://schemas.microsoft.com/office/drawing/2014/main" id="{49EB078B-EDB9-9761-61A0-2C9E94C4CEB7}"/>
-              </a:ext>
-            </a:extLst>
-          </p:cNvPr>
-          <p:cNvSpPr>
-            <a:spLocks noGrp="1"/>
-          </p:cNvSpPr>
-          <p:nvPr>
-            <p:ph sz="quarter" idx="1"/>
-          </p:nvPr>
-        </p:nvSpPr>
-        <p:spPr/>
-        <p:txBody>
-          <a:bodyPr/>
-          <a:lstStyle/>
-          <a:p>
-            <a:endParaRPr lang="en-US"/>
-          </a:p>
-        </p:txBody>
-      </p:sp>
-    </p:spTree>
-    <p:extLst>
-      <p:ext uri="{BB962C8B-B14F-4D97-AF65-F5344CB8AC3E}">
-        <p14:creationId xmlns:p14="http://schemas.microsoft.com/office/powerpoint/2010/main" val="1273994328"/>
-      </p:ext>
-    </p:extLst>
-  </p:cSld>
-  <p:clrMapOvr>
-    <a:masterClrMapping/>
-  </p:clrMapOvr>
-</p:sld>
-</file>
-
 <file path=ppt/slides/slide13.xml><?xml version="1.0" encoding="utf-8"?>
 <p:sld xmlns:a="http://schemas.openxmlformats.org/drawingml/2006/main" xmlns:r="http://schemas.openxmlformats.org/officeDocument/2006/relationships" xmlns:p="http://schemas.openxmlformats.org/presentationml/2006/main">
   <p:cSld>
@@ -10105,6 +11288,116 @@
       </p:grpSpPr>
       <p:sp>
         <p:nvSpPr>
+          <p:cNvPr id="2" name="Title 1">
+            <a:extLst>
+              <a:ext uri="{FF2B5EF4-FFF2-40B4-BE49-F238E27FC236}">
+                <a16:creationId xmlns:a16="http://schemas.microsoft.com/office/drawing/2014/main" id="{5A8CE7FB-D6EA-91FF-145A-7E9C61E5FF5B}"/>
+              </a:ext>
+            </a:extLst>
+          </p:cNvPr>
+          <p:cNvSpPr>
+            <a:spLocks noGrp="1"/>
+          </p:cNvSpPr>
+          <p:nvPr>
+            <p:ph type="title"/>
+          </p:nvPr>
+        </p:nvSpPr>
+        <p:spPr/>
+        <p:txBody>
+          <a:bodyPr/>
+          <a:lstStyle/>
+          <a:p>
+            <a:endParaRPr lang="en-US"/>
+          </a:p>
+        </p:txBody>
+      </p:sp>
+      <p:sp>
+        <p:nvSpPr>
+          <p:cNvPr id="3" name="Slide Number Placeholder 2">
+            <a:extLst>
+              <a:ext uri="{FF2B5EF4-FFF2-40B4-BE49-F238E27FC236}">
+                <a16:creationId xmlns:a16="http://schemas.microsoft.com/office/drawing/2014/main" id="{678C8752-847F-B682-ACE3-F232BF18A861}"/>
+              </a:ext>
+            </a:extLst>
+          </p:cNvPr>
+          <p:cNvSpPr>
+            <a:spLocks noGrp="1"/>
+          </p:cNvSpPr>
+          <p:nvPr>
+            <p:ph type="sldNum" sz="quarter" idx="12"/>
+          </p:nvPr>
+        </p:nvSpPr>
+        <p:spPr/>
+        <p:txBody>
+          <a:bodyPr/>
+          <a:lstStyle/>
+          <a:p>
+            <a:fld id="{EA7C8D44-3667-46F6-9772-CC52308E2A7F}" type="slidenum">
+              <a:rPr kumimoji="0" lang="en-US" smtClean="0"/>
+              <a:pPr/>
+              <a:t>13</a:t>
+            </a:fld>
+            <a:endParaRPr kumimoji="0" lang="en-US" dirty="0"/>
+          </a:p>
+        </p:txBody>
+      </p:sp>
+      <p:sp>
+        <p:nvSpPr>
+          <p:cNvPr id="4" name="Content Placeholder 3">
+            <a:extLst>
+              <a:ext uri="{FF2B5EF4-FFF2-40B4-BE49-F238E27FC236}">
+                <a16:creationId xmlns:a16="http://schemas.microsoft.com/office/drawing/2014/main" id="{49EB078B-EDB9-9761-61A0-2C9E94C4CEB7}"/>
+              </a:ext>
+            </a:extLst>
+          </p:cNvPr>
+          <p:cNvSpPr>
+            <a:spLocks noGrp="1"/>
+          </p:cNvSpPr>
+          <p:nvPr>
+            <p:ph sz="quarter" idx="1"/>
+          </p:nvPr>
+        </p:nvSpPr>
+        <p:spPr/>
+        <p:txBody>
+          <a:bodyPr/>
+          <a:lstStyle/>
+          <a:p>
+            <a:endParaRPr lang="en-US"/>
+          </a:p>
+        </p:txBody>
+      </p:sp>
+    </p:spTree>
+    <p:extLst>
+      <p:ext uri="{BB962C8B-B14F-4D97-AF65-F5344CB8AC3E}">
+        <p14:creationId xmlns:p14="http://schemas.microsoft.com/office/powerpoint/2010/main" val="1273994328"/>
+      </p:ext>
+    </p:extLst>
+  </p:cSld>
+  <p:clrMapOvr>
+    <a:masterClrMapping/>
+  </p:clrMapOvr>
+</p:sld>
+</file>
+
+<file path=ppt/slides/slide14.xml><?xml version="1.0" encoding="utf-8"?>
+<p:sld xmlns:a="http://schemas.openxmlformats.org/drawingml/2006/main" xmlns:r="http://schemas.openxmlformats.org/officeDocument/2006/relationships" xmlns:p="http://schemas.openxmlformats.org/presentationml/2006/main">
+  <p:cSld>
+    <p:spTree>
+      <p:nvGrpSpPr>
+        <p:cNvPr id="1" name=""/>
+        <p:cNvGrpSpPr/>
+        <p:nvPr/>
+      </p:nvGrpSpPr>
+      <p:grpSpPr>
+        <a:xfrm>
+          <a:off x="0" y="0"/>
+          <a:ext cx="0" cy="0"/>
+          <a:chOff x="0" y="0"/>
+          <a:chExt cx="0" cy="0"/>
+        </a:xfrm>
+      </p:grpSpPr>
+      <p:sp>
+        <p:nvSpPr>
           <p:cNvPr id="2" name="Title 1"/>
           <p:cNvSpPr>
             <a:spLocks noGrp="1"/>
@@ -10143,7 +11436,7 @@
             <a:fld id="{EA7C8D44-3667-46F6-9772-CC52308E2A7F}" type="slidenum">
               <a:rPr kumimoji="0" lang="en-US" smtClean="0"/>
               <a:pPr/>
-              <a:t>13</a:t>
+              <a:t>14</a:t>
             </a:fld>
             <a:endParaRPr kumimoji="0" lang="en-US" dirty="0"/>
           </a:p>
@@ -10572,7 +11865,7 @@
 </p:sld>
 </file>
 
-<file path=ppt/slides/slide14.xml><?xml version="1.0" encoding="utf-8"?>
+<file path=ppt/slides/slide15.xml><?xml version="1.0" encoding="utf-8"?>
 <p:sld xmlns:a="http://schemas.openxmlformats.org/drawingml/2006/main" xmlns:r="http://schemas.openxmlformats.org/officeDocument/2006/relationships" xmlns:p="http://schemas.openxmlformats.org/presentationml/2006/main">
   <p:cSld>
     <p:spTree>
@@ -10629,7 +11922,7 @@
             <a:fld id="{EA7C8D44-3667-46F6-9772-CC52308E2A7F}" type="slidenum">
               <a:rPr kumimoji="0" lang="en-US" smtClean="0"/>
               <a:pPr/>
-              <a:t>14</a:t>
+              <a:t>15</a:t>
             </a:fld>
             <a:endParaRPr kumimoji="0" lang="en-US" dirty="0"/>
           </a:p>
@@ -11082,7 +12375,7 @@
 </p:sld>
 </file>
 
-<file path=ppt/slides/slide15.xml><?xml version="1.0" encoding="utf-8"?>
+<file path=ppt/slides/slide16.xml><?xml version="1.0" encoding="utf-8"?>
 <p:sld xmlns:a="http://schemas.openxmlformats.org/drawingml/2006/main" xmlns:r="http://schemas.openxmlformats.org/officeDocument/2006/relationships" xmlns:p="http://schemas.openxmlformats.org/presentationml/2006/main">
   <p:cSld>
     <p:spTree>
@@ -11159,7 +12452,7 @@
             <a:fld id="{EA7C8D44-3667-46F6-9772-CC52308E2A7F}" type="slidenum">
               <a:rPr kumimoji="0" lang="en-US" smtClean="0"/>
               <a:pPr/>
-              <a:t>15</a:t>
+              <a:t>16</a:t>
             </a:fld>
             <a:endParaRPr kumimoji="0" lang="en-US" dirty="0"/>
           </a:p>
@@ -11640,632 +12933,6 @@
     <p:extLst>
       <p:ext uri="{BB962C8B-B14F-4D97-AF65-F5344CB8AC3E}">
         <p14:creationId xmlns:p14="http://schemas.microsoft.com/office/powerpoint/2010/main" val="3970213323"/>
-      </p:ext>
-    </p:extLst>
-  </p:cSld>
-  <p:clrMapOvr>
-    <a:masterClrMapping/>
-  </p:clrMapOvr>
-</p:sld>
-</file>
-
-<file path=ppt/slides/slide16.xml><?xml version="1.0" encoding="utf-8"?>
-<p:sld xmlns:a="http://schemas.openxmlformats.org/drawingml/2006/main" xmlns:r="http://schemas.openxmlformats.org/officeDocument/2006/relationships" xmlns:p="http://schemas.openxmlformats.org/presentationml/2006/main">
-  <p:cSld>
-    <p:spTree>
-      <p:nvGrpSpPr>
-        <p:cNvPr id="1" name=""/>
-        <p:cNvGrpSpPr/>
-        <p:nvPr/>
-      </p:nvGrpSpPr>
-      <p:grpSpPr>
-        <a:xfrm>
-          <a:off x="0" y="0"/>
-          <a:ext cx="0" cy="0"/>
-          <a:chOff x="0" y="0"/>
-          <a:chExt cx="0" cy="0"/>
-        </a:xfrm>
-      </p:grpSpPr>
-      <p:sp>
-        <p:nvSpPr>
-          <p:cNvPr id="2" name="Title 1"/>
-          <p:cNvSpPr>
-            <a:spLocks noGrp="1"/>
-          </p:cNvSpPr>
-          <p:nvPr>
-            <p:ph type="title"/>
-          </p:nvPr>
-        </p:nvSpPr>
-        <p:spPr/>
-        <p:txBody>
-          <a:bodyPr>
-            <a:normAutofit fontScale="90000"/>
-          </a:bodyPr>
-          <a:lstStyle/>
-          <a:p>
-            <a:r>
-              <a:rPr lang="en-US" dirty="0"/>
-              <a:t>What’s wrong? Passing arguments and Returning Value ANS</a:t>
-            </a:r>
-          </a:p>
-        </p:txBody>
-      </p:sp>
-      <p:sp>
-        <p:nvSpPr>
-          <p:cNvPr id="3" name="Slide Number Placeholder 2"/>
-          <p:cNvSpPr>
-            <a:spLocks noGrp="1"/>
-          </p:cNvSpPr>
-          <p:nvPr>
-            <p:ph type="sldNum" sz="quarter" idx="12"/>
-          </p:nvPr>
-        </p:nvSpPr>
-        <p:spPr/>
-        <p:txBody>
-          <a:bodyPr/>
-          <a:lstStyle/>
-          <a:p>
-            <a:fld id="{EA7C8D44-3667-46F6-9772-CC52308E2A7F}" type="slidenum">
-              <a:rPr kumimoji="0" lang="en-US" smtClean="0"/>
-              <a:pPr/>
-              <a:t>16</a:t>
-            </a:fld>
-            <a:endParaRPr kumimoji="0" lang="en-US" dirty="0"/>
-          </a:p>
-        </p:txBody>
-      </p:sp>
-      <p:sp>
-        <p:nvSpPr>
-          <p:cNvPr id="11" name="Rectangle 10"/>
-          <p:cNvSpPr/>
-          <p:nvPr/>
-        </p:nvSpPr>
-        <p:spPr>
-          <a:xfrm>
-            <a:off x="76200" y="1593468"/>
-            <a:ext cx="9163050" cy="646331"/>
-          </a:xfrm>
-          <a:prstGeom prst="rect">
-            <a:avLst/>
-          </a:prstGeom>
-        </p:spPr>
-        <p:txBody>
-          <a:bodyPr wrap="square">
-            <a:spAutoFit/>
-          </a:bodyPr>
-          <a:lstStyle/>
-          <a:p>
-            <a:r>
-              <a:rPr lang="en-US" b="1" dirty="0">
-                <a:latin typeface="Consolas" panose="020B0609020204030204" pitchFamily="49" charset="0"/>
-              </a:rPr>
-              <a:t>uint32_t sum(uint8_t a8, uint8_t b8, uint16_t c16, uint16_t d16, </a:t>
-            </a:r>
-            <a:r>
-              <a:rPr lang="en-US" b="1" dirty="0">
-                <a:solidFill>
-                  <a:srgbClr val="FF0000"/>
-                </a:solidFill>
-                <a:latin typeface="Consolas" panose="020B0609020204030204" pitchFamily="49" charset="0"/>
-              </a:rPr>
-              <a:t>uint32_t e32</a:t>
-            </a:r>
-            <a:r>
-              <a:rPr lang="en-US" b="1" dirty="0">
-                <a:latin typeface="Consolas" panose="020B0609020204030204" pitchFamily="49" charset="0"/>
-              </a:rPr>
-              <a:t>);</a:t>
-            </a:r>
-          </a:p>
-        </p:txBody>
-      </p:sp>
-      <p:sp>
-        <p:nvSpPr>
-          <p:cNvPr id="4" name="TextBox 3"/>
-          <p:cNvSpPr txBox="1"/>
-          <p:nvPr/>
-        </p:nvSpPr>
-        <p:spPr>
-          <a:xfrm>
-            <a:off x="304800" y="2754035"/>
-            <a:ext cx="750526" cy="369332"/>
-          </a:xfrm>
-          <a:prstGeom prst="rect">
-            <a:avLst/>
-          </a:prstGeom>
-          <a:noFill/>
-        </p:spPr>
-        <p:txBody>
-          <a:bodyPr wrap="none" rtlCol="0">
-            <a:spAutoFit/>
-          </a:bodyPr>
-          <a:lstStyle/>
-          <a:p>
-            <a:r>
-              <a:rPr lang="en-US" dirty="0"/>
-              <a:t>Caller</a:t>
-            </a:r>
-          </a:p>
-        </p:txBody>
-      </p:sp>
-      <p:sp>
-        <p:nvSpPr>
-          <p:cNvPr id="23" name="Rectangle 22"/>
-          <p:cNvSpPr/>
-          <p:nvPr/>
-        </p:nvSpPr>
-        <p:spPr>
-          <a:xfrm>
-            <a:off x="33528" y="2251948"/>
-            <a:ext cx="9163050" cy="369332"/>
-          </a:xfrm>
-          <a:prstGeom prst="rect">
-            <a:avLst/>
-          </a:prstGeom>
-        </p:spPr>
-        <p:txBody>
-          <a:bodyPr wrap="square">
-            <a:spAutoFit/>
-          </a:bodyPr>
-          <a:lstStyle/>
-          <a:p>
-            <a:r>
-              <a:rPr lang="en-US" b="1" dirty="0">
-                <a:solidFill>
-                  <a:srgbClr val="FF0000"/>
-                </a:solidFill>
-                <a:latin typeface="Consolas" panose="020B0609020204030204" pitchFamily="49" charset="0"/>
-              </a:rPr>
-              <a:t>s = sum(1, 2, 3, 4, 5);</a:t>
-            </a:r>
-          </a:p>
-        </p:txBody>
-      </p:sp>
-      <p:sp>
-        <p:nvSpPr>
-          <p:cNvPr id="15" name="TextBox 14"/>
-          <p:cNvSpPr txBox="1"/>
-          <p:nvPr/>
-        </p:nvSpPr>
-        <p:spPr>
-          <a:xfrm>
-            <a:off x="449580" y="3256122"/>
-            <a:ext cx="2464136" cy="2585323"/>
-          </a:xfrm>
-          <a:prstGeom prst="rect">
-            <a:avLst/>
-          </a:prstGeom>
-        </p:spPr>
-        <p:style>
-          <a:lnRef idx="2">
-            <a:schemeClr val="accent1"/>
-          </a:lnRef>
-          <a:fillRef idx="1">
-            <a:schemeClr val="lt1"/>
-          </a:fillRef>
-          <a:effectRef idx="0">
-            <a:schemeClr val="accent1"/>
-          </a:effectRef>
-          <a:fontRef idx="minor">
-            <a:schemeClr val="dk1"/>
-          </a:fontRef>
-        </p:style>
-        <p:txBody>
-          <a:bodyPr wrap="none" rtlCol="0">
-            <a:spAutoFit/>
-          </a:bodyPr>
-          <a:lstStyle/>
-          <a:p>
-            <a:r>
-              <a:rPr lang="en-US" dirty="0">
-                <a:latin typeface="Consolas" panose="020B0609020204030204" pitchFamily="49" charset="0"/>
-              </a:rPr>
-              <a:t>  MOV r0, #5 </a:t>
-            </a:r>
-            <a:r>
-              <a:rPr lang="en-US" dirty="0">
-                <a:solidFill>
-                  <a:schemeClr val="bg1">
-                    <a:lumMod val="50000"/>
-                  </a:schemeClr>
-                </a:solidFill>
-                <a:latin typeface="Consolas" panose="020B0609020204030204" pitchFamily="49" charset="0"/>
-              </a:rPr>
-              <a:t>; e32</a:t>
-            </a:r>
-          </a:p>
-          <a:p>
-            <a:r>
-              <a:rPr lang="en-US" dirty="0">
-                <a:latin typeface="Consolas" panose="020B0609020204030204" pitchFamily="49" charset="0"/>
-              </a:rPr>
-              <a:t>  </a:t>
-            </a:r>
-            <a:r>
-              <a:rPr lang="en-US" b="1" dirty="0">
-                <a:solidFill>
-                  <a:srgbClr val="FF0000"/>
-                </a:solidFill>
-                <a:latin typeface="Consolas" panose="020B0609020204030204" pitchFamily="49" charset="0"/>
-              </a:rPr>
-              <a:t>PUSH {r0}</a:t>
-            </a:r>
-          </a:p>
-          <a:p>
-            <a:r>
-              <a:rPr lang="en-US" dirty="0">
-                <a:solidFill>
-                  <a:schemeClr val="tx1"/>
-                </a:solidFill>
-                <a:latin typeface="Consolas" panose="020B0609020204030204" pitchFamily="49" charset="0"/>
-              </a:rPr>
-              <a:t>  MOV r0, #1 </a:t>
-            </a:r>
-            <a:r>
-              <a:rPr lang="en-US" dirty="0">
-                <a:solidFill>
-                  <a:schemeClr val="bg1">
-                    <a:lumMod val="50000"/>
-                  </a:schemeClr>
-                </a:solidFill>
-                <a:latin typeface="Consolas" panose="020B0609020204030204" pitchFamily="49" charset="0"/>
-              </a:rPr>
-              <a:t>; a8</a:t>
-            </a:r>
-          </a:p>
-          <a:p>
-            <a:r>
-              <a:rPr lang="en-US" dirty="0">
-                <a:latin typeface="Consolas" panose="020B0609020204030204" pitchFamily="49" charset="0"/>
-              </a:rPr>
-              <a:t>  MOV r1, #2 </a:t>
-            </a:r>
-            <a:r>
-              <a:rPr lang="en-US" dirty="0">
-                <a:solidFill>
-                  <a:schemeClr val="bg1">
-                    <a:lumMod val="50000"/>
-                  </a:schemeClr>
-                </a:solidFill>
-                <a:latin typeface="Consolas" panose="020B0609020204030204" pitchFamily="49" charset="0"/>
-              </a:rPr>
-              <a:t>; b8</a:t>
-            </a:r>
-          </a:p>
-          <a:p>
-            <a:r>
-              <a:rPr lang="en-US" dirty="0">
-                <a:latin typeface="Consolas" panose="020B0609020204030204" pitchFamily="49" charset="0"/>
-              </a:rPr>
-              <a:t>  MOV r2, #3 </a:t>
-            </a:r>
-            <a:r>
-              <a:rPr lang="en-US" dirty="0">
-                <a:solidFill>
-                  <a:schemeClr val="bg1">
-                    <a:lumMod val="50000"/>
-                  </a:schemeClr>
-                </a:solidFill>
-                <a:latin typeface="Consolas" panose="020B0609020204030204" pitchFamily="49" charset="0"/>
-              </a:rPr>
-              <a:t>; c16</a:t>
-            </a:r>
-          </a:p>
-          <a:p>
-            <a:r>
-              <a:rPr lang="en-US" dirty="0">
-                <a:latin typeface="Consolas" panose="020B0609020204030204" pitchFamily="49" charset="0"/>
-              </a:rPr>
-              <a:t>  MOV r3, #4 </a:t>
-            </a:r>
-            <a:r>
-              <a:rPr lang="en-US" dirty="0">
-                <a:solidFill>
-                  <a:schemeClr val="bg1">
-                    <a:lumMod val="50000"/>
-                  </a:schemeClr>
-                </a:solidFill>
-                <a:latin typeface="Consolas" panose="020B0609020204030204" pitchFamily="49" charset="0"/>
-              </a:rPr>
-              <a:t>; d16</a:t>
-            </a:r>
-          </a:p>
-          <a:p>
-            <a:r>
-              <a:rPr lang="en-US" dirty="0">
-                <a:latin typeface="Consolas" panose="020B0609020204030204" pitchFamily="49" charset="0"/>
-              </a:rPr>
-              <a:t>  BL  sum</a:t>
-            </a:r>
-          </a:p>
-          <a:p>
-            <a:r>
-              <a:rPr lang="en-US" dirty="0">
-                <a:latin typeface="Consolas" panose="020B0609020204030204" pitchFamily="49" charset="0"/>
-              </a:rPr>
-              <a:t>  ...</a:t>
-            </a:r>
-          </a:p>
-          <a:p>
-            <a:r>
-              <a:rPr lang="en-US" dirty="0">
-                <a:latin typeface="Consolas" panose="020B0609020204030204" pitchFamily="49" charset="0"/>
-              </a:rPr>
-              <a:t>  </a:t>
-            </a:r>
-            <a:r>
-              <a:rPr lang="en-US" b="1" dirty="0">
-                <a:solidFill>
-                  <a:srgbClr val="FF0000"/>
-                </a:solidFill>
-                <a:latin typeface="Consolas" panose="020B0609020204030204" pitchFamily="49" charset="0"/>
-              </a:rPr>
-              <a:t>POP {r0}</a:t>
-            </a:r>
-          </a:p>
-        </p:txBody>
-      </p:sp>
-      <p:sp>
-        <p:nvSpPr>
-          <p:cNvPr id="27" name="TextBox 26"/>
-          <p:cNvSpPr txBox="1"/>
-          <p:nvPr/>
-        </p:nvSpPr>
-        <p:spPr>
-          <a:xfrm>
-            <a:off x="3581400" y="2840938"/>
-            <a:ext cx="769763" cy="369332"/>
-          </a:xfrm>
-          <a:prstGeom prst="rect">
-            <a:avLst/>
-          </a:prstGeom>
-          <a:noFill/>
-        </p:spPr>
-        <p:txBody>
-          <a:bodyPr wrap="none" rtlCol="0">
-            <a:spAutoFit/>
-          </a:bodyPr>
-          <a:lstStyle/>
-          <a:p>
-            <a:r>
-              <a:rPr lang="en-US" dirty="0" err="1"/>
-              <a:t>Callee</a:t>
-            </a:r>
-            <a:endParaRPr lang="en-US" dirty="0"/>
-          </a:p>
-        </p:txBody>
-      </p:sp>
-      <p:sp>
-        <p:nvSpPr>
-          <p:cNvPr id="28" name="TextBox 27"/>
-          <p:cNvSpPr txBox="1"/>
-          <p:nvPr/>
-        </p:nvSpPr>
-        <p:spPr>
-          <a:xfrm>
-            <a:off x="3607914" y="3305718"/>
-            <a:ext cx="4996881" cy="2308324"/>
-          </a:xfrm>
-          <a:prstGeom prst="rect">
-            <a:avLst/>
-          </a:prstGeom>
-        </p:spPr>
-        <p:style>
-          <a:lnRef idx="2">
-            <a:schemeClr val="accent1"/>
-          </a:lnRef>
-          <a:fillRef idx="1">
-            <a:schemeClr val="lt1"/>
-          </a:fillRef>
-          <a:effectRef idx="0">
-            <a:schemeClr val="accent1"/>
-          </a:effectRef>
-          <a:fontRef idx="minor">
-            <a:schemeClr val="dk1"/>
-          </a:fontRef>
-        </p:style>
-        <p:txBody>
-          <a:bodyPr wrap="none" rtlCol="0">
-            <a:spAutoFit/>
-          </a:bodyPr>
-          <a:lstStyle/>
-          <a:p>
-            <a:r>
-              <a:rPr lang="en-US" b="1" dirty="0">
-                <a:solidFill>
-                  <a:srgbClr val="0000FF"/>
-                </a:solidFill>
-                <a:latin typeface="Consolas" panose="020B0609020204030204" pitchFamily="49" charset="0"/>
-              </a:rPr>
-              <a:t>sum</a:t>
-            </a:r>
-            <a:r>
-              <a:rPr lang="en-US" dirty="0">
-                <a:latin typeface="Consolas" panose="020B0609020204030204" pitchFamily="49" charset="0"/>
-              </a:rPr>
-              <a:t> PROC    </a:t>
-            </a:r>
-          </a:p>
-          <a:p>
-            <a:r>
-              <a:rPr lang="en-US" dirty="0">
-                <a:latin typeface="Consolas" panose="020B0609020204030204" pitchFamily="49" charset="0"/>
-              </a:rPr>
-              <a:t>  ADD r0, r0, r1   </a:t>
-            </a:r>
-            <a:r>
-              <a:rPr lang="en-US" dirty="0">
-                <a:solidFill>
-                  <a:schemeClr val="bg1">
-                    <a:lumMod val="50000"/>
-                  </a:schemeClr>
-                </a:solidFill>
-                <a:latin typeface="Consolas" panose="020B0609020204030204" pitchFamily="49" charset="0"/>
-              </a:rPr>
-              <a:t>; a8 + b8</a:t>
-            </a:r>
-          </a:p>
-          <a:p>
-            <a:r>
-              <a:rPr lang="en-US" dirty="0">
-                <a:latin typeface="Consolas" panose="020B0609020204030204" pitchFamily="49" charset="0"/>
-              </a:rPr>
-              <a:t>  ADD r0, r0, r2   </a:t>
-            </a:r>
-            <a:r>
-              <a:rPr lang="en-US" dirty="0">
-                <a:solidFill>
-                  <a:schemeClr val="bg1">
-                    <a:lumMod val="50000"/>
-                  </a:schemeClr>
-                </a:solidFill>
-                <a:latin typeface="Consolas" panose="020B0609020204030204" pitchFamily="49" charset="0"/>
-              </a:rPr>
-              <a:t>; add c16</a:t>
-            </a:r>
-          </a:p>
-          <a:p>
-            <a:r>
-              <a:rPr lang="en-US" dirty="0">
-                <a:latin typeface="Consolas" panose="020B0609020204030204" pitchFamily="49" charset="0"/>
-              </a:rPr>
-              <a:t>  ADD r0, r0, r3   </a:t>
-            </a:r>
-            <a:r>
-              <a:rPr lang="en-US" dirty="0">
-                <a:solidFill>
-                  <a:schemeClr val="bg1">
-                    <a:lumMod val="50000"/>
-                  </a:schemeClr>
-                </a:solidFill>
-                <a:latin typeface="Consolas" panose="020B0609020204030204" pitchFamily="49" charset="0"/>
-              </a:rPr>
-              <a:t>; add d16</a:t>
-            </a:r>
-          </a:p>
-          <a:p>
-            <a:r>
-              <a:rPr lang="en-US" b="1" dirty="0">
-                <a:solidFill>
-                  <a:srgbClr val="FF0000"/>
-                </a:solidFill>
-                <a:latin typeface="Consolas" panose="020B0609020204030204" pitchFamily="49" charset="0"/>
-              </a:rPr>
-              <a:t>  LDR r1, [</a:t>
-            </a:r>
-            <a:r>
-              <a:rPr lang="en-US" b="1" dirty="0" err="1">
-                <a:solidFill>
-                  <a:srgbClr val="FF0000"/>
-                </a:solidFill>
-                <a:latin typeface="Consolas" panose="020B0609020204030204" pitchFamily="49" charset="0"/>
-              </a:rPr>
-              <a:t>sp</a:t>
-            </a:r>
-            <a:r>
-              <a:rPr lang="en-US" b="1" dirty="0">
-                <a:solidFill>
-                  <a:srgbClr val="FF0000"/>
-                </a:solidFill>
-                <a:latin typeface="Consolas" panose="020B0609020204030204" pitchFamily="49" charset="0"/>
-              </a:rPr>
-              <a:t>, #0] </a:t>
-            </a:r>
-            <a:r>
-              <a:rPr lang="en-US" b="1" dirty="0">
-                <a:solidFill>
-                  <a:schemeClr val="bg1">
-                    <a:lumMod val="50000"/>
-                  </a:schemeClr>
-                </a:solidFill>
-                <a:latin typeface="Consolas" panose="020B0609020204030204" pitchFamily="49" charset="0"/>
-              </a:rPr>
-              <a:t>; read argument e32</a:t>
-            </a:r>
-          </a:p>
-          <a:p>
-            <a:r>
-              <a:rPr lang="en-US" dirty="0">
-                <a:solidFill>
-                  <a:schemeClr val="bg1">
-                    <a:lumMod val="50000"/>
-                  </a:schemeClr>
-                </a:solidFill>
-                <a:latin typeface="Consolas" panose="020B0609020204030204" pitchFamily="49" charset="0"/>
-              </a:rPr>
-              <a:t>  </a:t>
-            </a:r>
-            <a:r>
-              <a:rPr lang="en-US" dirty="0">
-                <a:solidFill>
-                  <a:schemeClr val="tx1"/>
-                </a:solidFill>
-                <a:latin typeface="Consolas" panose="020B0609020204030204" pitchFamily="49" charset="0"/>
-              </a:rPr>
-              <a:t>ADD r0, r0, r1   </a:t>
-            </a:r>
-            <a:r>
-              <a:rPr lang="en-US" dirty="0">
-                <a:solidFill>
-                  <a:schemeClr val="bg1">
-                    <a:lumMod val="50000"/>
-                  </a:schemeClr>
-                </a:solidFill>
-                <a:latin typeface="Consolas" panose="020B0609020204030204" pitchFamily="49" charset="0"/>
-              </a:rPr>
-              <a:t>; add e32</a:t>
-            </a:r>
-          </a:p>
-          <a:p>
-            <a:r>
-              <a:rPr lang="en-US" dirty="0">
-                <a:latin typeface="Consolas" panose="020B0609020204030204" pitchFamily="49" charset="0"/>
-              </a:rPr>
-              <a:t>  BX  LR</a:t>
-            </a:r>
-          </a:p>
-          <a:p>
-            <a:r>
-              <a:rPr lang="en-US" dirty="0">
-                <a:latin typeface="Consolas" panose="020B0609020204030204" pitchFamily="49" charset="0"/>
-              </a:rPr>
-              <a:t>  ENDP</a:t>
-            </a:r>
-          </a:p>
-        </p:txBody>
-      </p:sp>
-      <p:sp>
-        <p:nvSpPr>
-          <p:cNvPr id="6" name="Rectangle 5"/>
-          <p:cNvSpPr/>
-          <p:nvPr/>
-        </p:nvSpPr>
-        <p:spPr>
-          <a:xfrm>
-            <a:off x="914400" y="5854799"/>
-            <a:ext cx="4861560" cy="646331"/>
-          </a:xfrm>
-          <a:prstGeom prst="rect">
-            <a:avLst/>
-          </a:prstGeom>
-        </p:spPr>
-        <p:txBody>
-          <a:bodyPr wrap="square">
-            <a:spAutoFit/>
-          </a:bodyPr>
-          <a:lstStyle/>
-          <a:p>
-            <a:r>
-              <a:rPr lang="en-US" dirty="0"/>
-              <a:t>The caller is responsible to pop extra arguments out of the stack after the subroutine returns.</a:t>
-            </a:r>
-          </a:p>
-        </p:txBody>
-      </p:sp>
-    </p:spTree>
-    <p:extLst>
-      <p:ext uri="{BB962C8B-B14F-4D97-AF65-F5344CB8AC3E}">
-        <p14:creationId xmlns:p14="http://schemas.microsoft.com/office/powerpoint/2010/main" val="2345755417"/>
       </p:ext>
     </p:extLst>
   </p:cSld>
@@ -12311,7 +12978,7 @@
           <a:p>
             <a:r>
               <a:rPr lang="en-US" dirty="0"/>
-              <a:t>Passing arguments and Returning Value</a:t>
+              <a:t>What’s wrong? Passing arguments and Returning Value ANS</a:t>
             </a:r>
           </a:p>
         </p:txBody>
@@ -12335,6 +13002,632 @@
               <a:rPr kumimoji="0" lang="en-US" smtClean="0"/>
               <a:pPr/>
               <a:t>17</a:t>
+            </a:fld>
+            <a:endParaRPr kumimoji="0" lang="en-US" dirty="0"/>
+          </a:p>
+        </p:txBody>
+      </p:sp>
+      <p:sp>
+        <p:nvSpPr>
+          <p:cNvPr id="11" name="Rectangle 10"/>
+          <p:cNvSpPr/>
+          <p:nvPr/>
+        </p:nvSpPr>
+        <p:spPr>
+          <a:xfrm>
+            <a:off x="76200" y="1593468"/>
+            <a:ext cx="9163050" cy="646331"/>
+          </a:xfrm>
+          <a:prstGeom prst="rect">
+            <a:avLst/>
+          </a:prstGeom>
+        </p:spPr>
+        <p:txBody>
+          <a:bodyPr wrap="square">
+            <a:spAutoFit/>
+          </a:bodyPr>
+          <a:lstStyle/>
+          <a:p>
+            <a:r>
+              <a:rPr lang="en-US" b="1" dirty="0">
+                <a:latin typeface="Consolas" panose="020B0609020204030204" pitchFamily="49" charset="0"/>
+              </a:rPr>
+              <a:t>uint32_t sum(uint8_t a8, uint8_t b8, uint16_t c16, uint16_t d16, </a:t>
+            </a:r>
+            <a:r>
+              <a:rPr lang="en-US" b="1" dirty="0">
+                <a:solidFill>
+                  <a:srgbClr val="FF0000"/>
+                </a:solidFill>
+                <a:latin typeface="Consolas" panose="020B0609020204030204" pitchFamily="49" charset="0"/>
+              </a:rPr>
+              <a:t>uint32_t e32</a:t>
+            </a:r>
+            <a:r>
+              <a:rPr lang="en-US" b="1" dirty="0">
+                <a:latin typeface="Consolas" panose="020B0609020204030204" pitchFamily="49" charset="0"/>
+              </a:rPr>
+              <a:t>);</a:t>
+            </a:r>
+          </a:p>
+        </p:txBody>
+      </p:sp>
+      <p:sp>
+        <p:nvSpPr>
+          <p:cNvPr id="4" name="TextBox 3"/>
+          <p:cNvSpPr txBox="1"/>
+          <p:nvPr/>
+        </p:nvSpPr>
+        <p:spPr>
+          <a:xfrm>
+            <a:off x="304800" y="2754035"/>
+            <a:ext cx="750526" cy="369332"/>
+          </a:xfrm>
+          <a:prstGeom prst="rect">
+            <a:avLst/>
+          </a:prstGeom>
+          <a:noFill/>
+        </p:spPr>
+        <p:txBody>
+          <a:bodyPr wrap="none" rtlCol="0">
+            <a:spAutoFit/>
+          </a:bodyPr>
+          <a:lstStyle/>
+          <a:p>
+            <a:r>
+              <a:rPr lang="en-US" dirty="0"/>
+              <a:t>Caller</a:t>
+            </a:r>
+          </a:p>
+        </p:txBody>
+      </p:sp>
+      <p:sp>
+        <p:nvSpPr>
+          <p:cNvPr id="23" name="Rectangle 22"/>
+          <p:cNvSpPr/>
+          <p:nvPr/>
+        </p:nvSpPr>
+        <p:spPr>
+          <a:xfrm>
+            <a:off x="33528" y="2251948"/>
+            <a:ext cx="9163050" cy="369332"/>
+          </a:xfrm>
+          <a:prstGeom prst="rect">
+            <a:avLst/>
+          </a:prstGeom>
+        </p:spPr>
+        <p:txBody>
+          <a:bodyPr wrap="square">
+            <a:spAutoFit/>
+          </a:bodyPr>
+          <a:lstStyle/>
+          <a:p>
+            <a:r>
+              <a:rPr lang="en-US" b="1" dirty="0">
+                <a:solidFill>
+                  <a:srgbClr val="FF0000"/>
+                </a:solidFill>
+                <a:latin typeface="Consolas" panose="020B0609020204030204" pitchFamily="49" charset="0"/>
+              </a:rPr>
+              <a:t>s = sum(1, 2, 3, 4, 5);</a:t>
+            </a:r>
+          </a:p>
+        </p:txBody>
+      </p:sp>
+      <p:sp>
+        <p:nvSpPr>
+          <p:cNvPr id="15" name="TextBox 14"/>
+          <p:cNvSpPr txBox="1"/>
+          <p:nvPr/>
+        </p:nvSpPr>
+        <p:spPr>
+          <a:xfrm>
+            <a:off x="449580" y="3256122"/>
+            <a:ext cx="2464136" cy="2585323"/>
+          </a:xfrm>
+          <a:prstGeom prst="rect">
+            <a:avLst/>
+          </a:prstGeom>
+        </p:spPr>
+        <p:style>
+          <a:lnRef idx="2">
+            <a:schemeClr val="accent1"/>
+          </a:lnRef>
+          <a:fillRef idx="1">
+            <a:schemeClr val="lt1"/>
+          </a:fillRef>
+          <a:effectRef idx="0">
+            <a:schemeClr val="accent1"/>
+          </a:effectRef>
+          <a:fontRef idx="minor">
+            <a:schemeClr val="dk1"/>
+          </a:fontRef>
+        </p:style>
+        <p:txBody>
+          <a:bodyPr wrap="none" rtlCol="0">
+            <a:spAutoFit/>
+          </a:bodyPr>
+          <a:lstStyle/>
+          <a:p>
+            <a:r>
+              <a:rPr lang="en-US" dirty="0">
+                <a:latin typeface="Consolas" panose="020B0609020204030204" pitchFamily="49" charset="0"/>
+              </a:rPr>
+              <a:t>  MOV r0, #5 </a:t>
+            </a:r>
+            <a:r>
+              <a:rPr lang="en-US" dirty="0">
+                <a:solidFill>
+                  <a:schemeClr val="bg1">
+                    <a:lumMod val="50000"/>
+                  </a:schemeClr>
+                </a:solidFill>
+                <a:latin typeface="Consolas" panose="020B0609020204030204" pitchFamily="49" charset="0"/>
+              </a:rPr>
+              <a:t>; e32</a:t>
+            </a:r>
+          </a:p>
+          <a:p>
+            <a:r>
+              <a:rPr lang="en-US" dirty="0">
+                <a:latin typeface="Consolas" panose="020B0609020204030204" pitchFamily="49" charset="0"/>
+              </a:rPr>
+              <a:t>  </a:t>
+            </a:r>
+            <a:r>
+              <a:rPr lang="en-US" b="1" dirty="0">
+                <a:solidFill>
+                  <a:srgbClr val="FF0000"/>
+                </a:solidFill>
+                <a:latin typeface="Consolas" panose="020B0609020204030204" pitchFamily="49" charset="0"/>
+              </a:rPr>
+              <a:t>PUSH {r0}</a:t>
+            </a:r>
+          </a:p>
+          <a:p>
+            <a:r>
+              <a:rPr lang="en-US" dirty="0">
+                <a:solidFill>
+                  <a:schemeClr val="tx1"/>
+                </a:solidFill>
+                <a:latin typeface="Consolas" panose="020B0609020204030204" pitchFamily="49" charset="0"/>
+              </a:rPr>
+              <a:t>  MOV r0, #1 </a:t>
+            </a:r>
+            <a:r>
+              <a:rPr lang="en-US" dirty="0">
+                <a:solidFill>
+                  <a:schemeClr val="bg1">
+                    <a:lumMod val="50000"/>
+                  </a:schemeClr>
+                </a:solidFill>
+                <a:latin typeface="Consolas" panose="020B0609020204030204" pitchFamily="49" charset="0"/>
+              </a:rPr>
+              <a:t>; a8</a:t>
+            </a:r>
+          </a:p>
+          <a:p>
+            <a:r>
+              <a:rPr lang="en-US" dirty="0">
+                <a:latin typeface="Consolas" panose="020B0609020204030204" pitchFamily="49" charset="0"/>
+              </a:rPr>
+              <a:t>  MOV r1, #2 </a:t>
+            </a:r>
+            <a:r>
+              <a:rPr lang="en-US" dirty="0">
+                <a:solidFill>
+                  <a:schemeClr val="bg1">
+                    <a:lumMod val="50000"/>
+                  </a:schemeClr>
+                </a:solidFill>
+                <a:latin typeface="Consolas" panose="020B0609020204030204" pitchFamily="49" charset="0"/>
+              </a:rPr>
+              <a:t>; b8</a:t>
+            </a:r>
+          </a:p>
+          <a:p>
+            <a:r>
+              <a:rPr lang="en-US" dirty="0">
+                <a:latin typeface="Consolas" panose="020B0609020204030204" pitchFamily="49" charset="0"/>
+              </a:rPr>
+              <a:t>  MOV r2, #3 </a:t>
+            </a:r>
+            <a:r>
+              <a:rPr lang="en-US" dirty="0">
+                <a:solidFill>
+                  <a:schemeClr val="bg1">
+                    <a:lumMod val="50000"/>
+                  </a:schemeClr>
+                </a:solidFill>
+                <a:latin typeface="Consolas" panose="020B0609020204030204" pitchFamily="49" charset="0"/>
+              </a:rPr>
+              <a:t>; c16</a:t>
+            </a:r>
+          </a:p>
+          <a:p>
+            <a:r>
+              <a:rPr lang="en-US" dirty="0">
+                <a:latin typeface="Consolas" panose="020B0609020204030204" pitchFamily="49" charset="0"/>
+              </a:rPr>
+              <a:t>  MOV r3, #4 </a:t>
+            </a:r>
+            <a:r>
+              <a:rPr lang="en-US" dirty="0">
+                <a:solidFill>
+                  <a:schemeClr val="bg1">
+                    <a:lumMod val="50000"/>
+                  </a:schemeClr>
+                </a:solidFill>
+                <a:latin typeface="Consolas" panose="020B0609020204030204" pitchFamily="49" charset="0"/>
+              </a:rPr>
+              <a:t>; d16</a:t>
+            </a:r>
+          </a:p>
+          <a:p>
+            <a:r>
+              <a:rPr lang="en-US" dirty="0">
+                <a:latin typeface="Consolas" panose="020B0609020204030204" pitchFamily="49" charset="0"/>
+              </a:rPr>
+              <a:t>  BL  sum</a:t>
+            </a:r>
+          </a:p>
+          <a:p>
+            <a:r>
+              <a:rPr lang="en-US" dirty="0">
+                <a:latin typeface="Consolas" panose="020B0609020204030204" pitchFamily="49" charset="0"/>
+              </a:rPr>
+              <a:t>  ...</a:t>
+            </a:r>
+          </a:p>
+          <a:p>
+            <a:r>
+              <a:rPr lang="en-US" dirty="0">
+                <a:latin typeface="Consolas" panose="020B0609020204030204" pitchFamily="49" charset="0"/>
+              </a:rPr>
+              <a:t>  </a:t>
+            </a:r>
+            <a:r>
+              <a:rPr lang="en-US" b="1" dirty="0">
+                <a:solidFill>
+                  <a:srgbClr val="FF0000"/>
+                </a:solidFill>
+                <a:latin typeface="Consolas" panose="020B0609020204030204" pitchFamily="49" charset="0"/>
+              </a:rPr>
+              <a:t>POP {r0}</a:t>
+            </a:r>
+          </a:p>
+        </p:txBody>
+      </p:sp>
+      <p:sp>
+        <p:nvSpPr>
+          <p:cNvPr id="27" name="TextBox 26"/>
+          <p:cNvSpPr txBox="1"/>
+          <p:nvPr/>
+        </p:nvSpPr>
+        <p:spPr>
+          <a:xfrm>
+            <a:off x="3581400" y="2840938"/>
+            <a:ext cx="769763" cy="369332"/>
+          </a:xfrm>
+          <a:prstGeom prst="rect">
+            <a:avLst/>
+          </a:prstGeom>
+          <a:noFill/>
+        </p:spPr>
+        <p:txBody>
+          <a:bodyPr wrap="none" rtlCol="0">
+            <a:spAutoFit/>
+          </a:bodyPr>
+          <a:lstStyle/>
+          <a:p>
+            <a:r>
+              <a:rPr lang="en-US" dirty="0" err="1"/>
+              <a:t>Callee</a:t>
+            </a:r>
+            <a:endParaRPr lang="en-US" dirty="0"/>
+          </a:p>
+        </p:txBody>
+      </p:sp>
+      <p:sp>
+        <p:nvSpPr>
+          <p:cNvPr id="28" name="TextBox 27"/>
+          <p:cNvSpPr txBox="1"/>
+          <p:nvPr/>
+        </p:nvSpPr>
+        <p:spPr>
+          <a:xfrm>
+            <a:off x="3607914" y="3305718"/>
+            <a:ext cx="4996881" cy="2308324"/>
+          </a:xfrm>
+          <a:prstGeom prst="rect">
+            <a:avLst/>
+          </a:prstGeom>
+        </p:spPr>
+        <p:style>
+          <a:lnRef idx="2">
+            <a:schemeClr val="accent1"/>
+          </a:lnRef>
+          <a:fillRef idx="1">
+            <a:schemeClr val="lt1"/>
+          </a:fillRef>
+          <a:effectRef idx="0">
+            <a:schemeClr val="accent1"/>
+          </a:effectRef>
+          <a:fontRef idx="minor">
+            <a:schemeClr val="dk1"/>
+          </a:fontRef>
+        </p:style>
+        <p:txBody>
+          <a:bodyPr wrap="none" rtlCol="0">
+            <a:spAutoFit/>
+          </a:bodyPr>
+          <a:lstStyle/>
+          <a:p>
+            <a:r>
+              <a:rPr lang="en-US" b="1" dirty="0">
+                <a:solidFill>
+                  <a:srgbClr val="0000FF"/>
+                </a:solidFill>
+                <a:latin typeface="Consolas" panose="020B0609020204030204" pitchFamily="49" charset="0"/>
+              </a:rPr>
+              <a:t>sum</a:t>
+            </a:r>
+            <a:r>
+              <a:rPr lang="en-US" dirty="0">
+                <a:latin typeface="Consolas" panose="020B0609020204030204" pitchFamily="49" charset="0"/>
+              </a:rPr>
+              <a:t> PROC    </a:t>
+            </a:r>
+          </a:p>
+          <a:p>
+            <a:r>
+              <a:rPr lang="en-US" dirty="0">
+                <a:latin typeface="Consolas" panose="020B0609020204030204" pitchFamily="49" charset="0"/>
+              </a:rPr>
+              <a:t>  ADD r0, r0, r1   </a:t>
+            </a:r>
+            <a:r>
+              <a:rPr lang="en-US" dirty="0">
+                <a:solidFill>
+                  <a:schemeClr val="bg1">
+                    <a:lumMod val="50000"/>
+                  </a:schemeClr>
+                </a:solidFill>
+                <a:latin typeface="Consolas" panose="020B0609020204030204" pitchFamily="49" charset="0"/>
+              </a:rPr>
+              <a:t>; a8 + b8</a:t>
+            </a:r>
+          </a:p>
+          <a:p>
+            <a:r>
+              <a:rPr lang="en-US" dirty="0">
+                <a:latin typeface="Consolas" panose="020B0609020204030204" pitchFamily="49" charset="0"/>
+              </a:rPr>
+              <a:t>  ADD r0, r0, r2   </a:t>
+            </a:r>
+            <a:r>
+              <a:rPr lang="en-US" dirty="0">
+                <a:solidFill>
+                  <a:schemeClr val="bg1">
+                    <a:lumMod val="50000"/>
+                  </a:schemeClr>
+                </a:solidFill>
+                <a:latin typeface="Consolas" panose="020B0609020204030204" pitchFamily="49" charset="0"/>
+              </a:rPr>
+              <a:t>; add c16</a:t>
+            </a:r>
+          </a:p>
+          <a:p>
+            <a:r>
+              <a:rPr lang="en-US" dirty="0">
+                <a:latin typeface="Consolas" panose="020B0609020204030204" pitchFamily="49" charset="0"/>
+              </a:rPr>
+              <a:t>  ADD r0, r0, r3   </a:t>
+            </a:r>
+            <a:r>
+              <a:rPr lang="en-US" dirty="0">
+                <a:solidFill>
+                  <a:schemeClr val="bg1">
+                    <a:lumMod val="50000"/>
+                  </a:schemeClr>
+                </a:solidFill>
+                <a:latin typeface="Consolas" panose="020B0609020204030204" pitchFamily="49" charset="0"/>
+              </a:rPr>
+              <a:t>; add d16</a:t>
+            </a:r>
+          </a:p>
+          <a:p>
+            <a:r>
+              <a:rPr lang="en-US" b="1" dirty="0">
+                <a:solidFill>
+                  <a:srgbClr val="FF0000"/>
+                </a:solidFill>
+                <a:latin typeface="Consolas" panose="020B0609020204030204" pitchFamily="49" charset="0"/>
+              </a:rPr>
+              <a:t>  LDR r1, [</a:t>
+            </a:r>
+            <a:r>
+              <a:rPr lang="en-US" b="1" dirty="0" err="1">
+                <a:solidFill>
+                  <a:srgbClr val="FF0000"/>
+                </a:solidFill>
+                <a:latin typeface="Consolas" panose="020B0609020204030204" pitchFamily="49" charset="0"/>
+              </a:rPr>
+              <a:t>sp</a:t>
+            </a:r>
+            <a:r>
+              <a:rPr lang="en-US" b="1" dirty="0">
+                <a:solidFill>
+                  <a:srgbClr val="FF0000"/>
+                </a:solidFill>
+                <a:latin typeface="Consolas" panose="020B0609020204030204" pitchFamily="49" charset="0"/>
+              </a:rPr>
+              <a:t>, #0] </a:t>
+            </a:r>
+            <a:r>
+              <a:rPr lang="en-US" b="1" dirty="0">
+                <a:solidFill>
+                  <a:schemeClr val="bg1">
+                    <a:lumMod val="50000"/>
+                  </a:schemeClr>
+                </a:solidFill>
+                <a:latin typeface="Consolas" panose="020B0609020204030204" pitchFamily="49" charset="0"/>
+              </a:rPr>
+              <a:t>; read argument e32</a:t>
+            </a:r>
+          </a:p>
+          <a:p>
+            <a:r>
+              <a:rPr lang="en-US" dirty="0">
+                <a:solidFill>
+                  <a:schemeClr val="bg1">
+                    <a:lumMod val="50000"/>
+                  </a:schemeClr>
+                </a:solidFill>
+                <a:latin typeface="Consolas" panose="020B0609020204030204" pitchFamily="49" charset="0"/>
+              </a:rPr>
+              <a:t>  </a:t>
+            </a:r>
+            <a:r>
+              <a:rPr lang="en-US" dirty="0">
+                <a:solidFill>
+                  <a:schemeClr val="tx1"/>
+                </a:solidFill>
+                <a:latin typeface="Consolas" panose="020B0609020204030204" pitchFamily="49" charset="0"/>
+              </a:rPr>
+              <a:t>ADD r0, r0, r1   </a:t>
+            </a:r>
+            <a:r>
+              <a:rPr lang="en-US" dirty="0">
+                <a:solidFill>
+                  <a:schemeClr val="bg1">
+                    <a:lumMod val="50000"/>
+                  </a:schemeClr>
+                </a:solidFill>
+                <a:latin typeface="Consolas" panose="020B0609020204030204" pitchFamily="49" charset="0"/>
+              </a:rPr>
+              <a:t>; add e32</a:t>
+            </a:r>
+          </a:p>
+          <a:p>
+            <a:r>
+              <a:rPr lang="en-US" dirty="0">
+                <a:latin typeface="Consolas" panose="020B0609020204030204" pitchFamily="49" charset="0"/>
+              </a:rPr>
+              <a:t>  BX  LR</a:t>
+            </a:r>
+          </a:p>
+          <a:p>
+            <a:r>
+              <a:rPr lang="en-US" dirty="0">
+                <a:latin typeface="Consolas" panose="020B0609020204030204" pitchFamily="49" charset="0"/>
+              </a:rPr>
+              <a:t>  ENDP</a:t>
+            </a:r>
+          </a:p>
+        </p:txBody>
+      </p:sp>
+      <p:sp>
+        <p:nvSpPr>
+          <p:cNvPr id="6" name="Rectangle 5"/>
+          <p:cNvSpPr/>
+          <p:nvPr/>
+        </p:nvSpPr>
+        <p:spPr>
+          <a:xfrm>
+            <a:off x="914400" y="5854799"/>
+            <a:ext cx="4861560" cy="646331"/>
+          </a:xfrm>
+          <a:prstGeom prst="rect">
+            <a:avLst/>
+          </a:prstGeom>
+        </p:spPr>
+        <p:txBody>
+          <a:bodyPr wrap="square">
+            <a:spAutoFit/>
+          </a:bodyPr>
+          <a:lstStyle/>
+          <a:p>
+            <a:r>
+              <a:rPr lang="en-US" dirty="0"/>
+              <a:t>The caller is responsible to pop extra arguments out of the stack after the subroutine returns.</a:t>
+            </a:r>
+          </a:p>
+        </p:txBody>
+      </p:sp>
+    </p:spTree>
+    <p:extLst>
+      <p:ext uri="{BB962C8B-B14F-4D97-AF65-F5344CB8AC3E}">
+        <p14:creationId xmlns:p14="http://schemas.microsoft.com/office/powerpoint/2010/main" val="2345755417"/>
+      </p:ext>
+    </p:extLst>
+  </p:cSld>
+  <p:clrMapOvr>
+    <a:masterClrMapping/>
+  </p:clrMapOvr>
+</p:sld>
+</file>
+
+<file path=ppt/slides/slide18.xml><?xml version="1.0" encoding="utf-8"?>
+<p:sld xmlns:a="http://schemas.openxmlformats.org/drawingml/2006/main" xmlns:r="http://schemas.openxmlformats.org/officeDocument/2006/relationships" xmlns:p="http://schemas.openxmlformats.org/presentationml/2006/main">
+  <p:cSld>
+    <p:spTree>
+      <p:nvGrpSpPr>
+        <p:cNvPr id="1" name=""/>
+        <p:cNvGrpSpPr/>
+        <p:nvPr/>
+      </p:nvGrpSpPr>
+      <p:grpSpPr>
+        <a:xfrm>
+          <a:off x="0" y="0"/>
+          <a:ext cx="0" cy="0"/>
+          <a:chOff x="0" y="0"/>
+          <a:chExt cx="0" cy="0"/>
+        </a:xfrm>
+      </p:grpSpPr>
+      <p:sp>
+        <p:nvSpPr>
+          <p:cNvPr id="2" name="Title 1"/>
+          <p:cNvSpPr>
+            <a:spLocks noGrp="1"/>
+          </p:cNvSpPr>
+          <p:nvPr>
+            <p:ph type="title"/>
+          </p:nvPr>
+        </p:nvSpPr>
+        <p:spPr/>
+        <p:txBody>
+          <a:bodyPr>
+            <a:normAutofit fontScale="90000"/>
+          </a:bodyPr>
+          <a:lstStyle/>
+          <a:p>
+            <a:r>
+              <a:rPr lang="en-US" dirty="0"/>
+              <a:t>Passing arguments and Returning Value</a:t>
+            </a:r>
+          </a:p>
+        </p:txBody>
+      </p:sp>
+      <p:sp>
+        <p:nvSpPr>
+          <p:cNvPr id="3" name="Slide Number Placeholder 2"/>
+          <p:cNvSpPr>
+            <a:spLocks noGrp="1"/>
+          </p:cNvSpPr>
+          <p:nvPr>
+            <p:ph type="sldNum" sz="quarter" idx="12"/>
+          </p:nvPr>
+        </p:nvSpPr>
+        <p:spPr/>
+        <p:txBody>
+          <a:bodyPr/>
+          <a:lstStyle/>
+          <a:p>
+            <a:fld id="{EA7C8D44-3667-46F6-9772-CC52308E2A7F}" type="slidenum">
+              <a:rPr kumimoji="0" lang="en-US" smtClean="0"/>
+              <a:pPr/>
+              <a:t>18</a:t>
             </a:fld>
             <a:endParaRPr kumimoji="0" lang="en-US" dirty="0"/>
           </a:p>
@@ -13149,7 +14442,7 @@
 </p:sld>
 </file>
 
-<file path=ppt/slides/slide18.xml><?xml version="1.0" encoding="utf-8"?>
+<file path=ppt/slides/slide19.xml><?xml version="1.0" encoding="utf-8"?>
 <p:sld xmlns:a="http://schemas.openxmlformats.org/drawingml/2006/main" xmlns:r="http://schemas.openxmlformats.org/officeDocument/2006/relationships" xmlns:p="http://schemas.openxmlformats.org/presentationml/2006/main">
   <p:cSld>
     <p:spTree>
@@ -13226,7 +14519,7 @@
             <a:fld id="{EA7C8D44-3667-46F6-9772-CC52308E2A7F}" type="slidenum">
               <a:rPr kumimoji="0" lang="en-US" smtClean="0"/>
               <a:pPr/>
-              <a:t>18</a:t>
+              <a:t>19</a:t>
             </a:fld>
             <a:endParaRPr kumimoji="0" lang="en-US" dirty="0"/>
           </a:p>
@@ -14105,7 +15398,7 @@
 </p:sld>
 </file>
 
-<file path=ppt/slides/slide19.xml><?xml version="1.0" encoding="utf-8"?>
+<file path=ppt/slides/slide2.xml><?xml version="1.0" encoding="utf-8"?>
 <p:sld xmlns:a="http://schemas.openxmlformats.org/drawingml/2006/main" xmlns:r="http://schemas.openxmlformats.org/officeDocument/2006/relationships" xmlns:p="http://schemas.openxmlformats.org/presentationml/2006/main">
   <p:cSld>
     <p:spTree>
@@ -14124,6 +15417,760 @@
       </p:grpSpPr>
       <p:sp>
         <p:nvSpPr>
+          <p:cNvPr id="2" name="Title 1"/>
+          <p:cNvSpPr>
+            <a:spLocks noGrp="1"/>
+          </p:cNvSpPr>
+          <p:nvPr>
+            <p:ph type="title"/>
+          </p:nvPr>
+        </p:nvSpPr>
+        <p:spPr/>
+        <p:txBody>
+          <a:bodyPr/>
+          <a:lstStyle/>
+          <a:p>
+            <a:r>
+              <a:rPr lang="en-GB" dirty="0"/>
+              <a:t>Stack</a:t>
+            </a:r>
+          </a:p>
+        </p:txBody>
+      </p:sp>
+      <p:sp>
+        <p:nvSpPr>
+          <p:cNvPr id="3" name="Content Placeholder 2"/>
+          <p:cNvSpPr>
+            <a:spLocks noGrp="1"/>
+          </p:cNvSpPr>
+          <p:nvPr>
+            <p:ph idx="1"/>
+          </p:nvPr>
+        </p:nvSpPr>
+        <p:spPr>
+          <a:xfrm>
+            <a:off x="457200" y="1219200"/>
+            <a:ext cx="8229600" cy="3200400"/>
+          </a:xfrm>
+        </p:spPr>
+        <p:txBody>
+          <a:bodyPr/>
+          <a:lstStyle/>
+          <a:p>
+            <a:pPr>
+              <a:buNone/>
+            </a:pPr>
+            <a:r>
+              <a:rPr lang="en-GB" sz="2800" b="1" dirty="0">
+                <a:solidFill>
+                  <a:srgbClr val="FF0000"/>
+                </a:solidFill>
+                <a:latin typeface="Consolas" panose="020B0609020204030204" pitchFamily="49" charset="0"/>
+                <a:cs typeface="Consolas" panose="020B0609020204030204" pitchFamily="49" charset="0"/>
+              </a:rPr>
+              <a:t>PUSH</a:t>
+            </a:r>
+            <a:r>
+              <a:rPr lang="en-GB" sz="2800" dirty="0">
+                <a:solidFill>
+                  <a:srgbClr val="FF0000"/>
+                </a:solidFill>
+                <a:latin typeface="Consolas" panose="020B0609020204030204" pitchFamily="49" charset="0"/>
+                <a:cs typeface="Consolas" panose="020B0609020204030204" pitchFamily="49" charset="0"/>
+              </a:rPr>
+              <a:t> </a:t>
+            </a:r>
+            <a:r>
+              <a:rPr lang="en-GB" sz="2800" dirty="0">
+                <a:latin typeface="Consolas" panose="020B0609020204030204" pitchFamily="49" charset="0"/>
+                <a:cs typeface="Consolas" panose="020B0609020204030204" pitchFamily="49" charset="0"/>
+              </a:rPr>
+              <a:t>{</a:t>
+            </a:r>
+            <a:r>
+              <a:rPr lang="en-GB" sz="2800" i="1" dirty="0">
+                <a:latin typeface="Consolas" panose="020B0609020204030204" pitchFamily="49" charset="0"/>
+                <a:cs typeface="Consolas" panose="020B0609020204030204" pitchFamily="49" charset="0"/>
+              </a:rPr>
+              <a:t>Rd</a:t>
+            </a:r>
+            <a:r>
+              <a:rPr lang="en-GB" sz="2800" dirty="0">
+                <a:latin typeface="Consolas" panose="020B0609020204030204" pitchFamily="49" charset="0"/>
+                <a:cs typeface="Consolas" panose="020B0609020204030204" pitchFamily="49" charset="0"/>
+              </a:rPr>
+              <a:t>} </a:t>
+            </a:r>
+          </a:p>
+          <a:p>
+            <a:pPr lvl="1"/>
+            <a:r>
+              <a:rPr lang="en-GB" sz="2400" dirty="0" err="1">
+                <a:latin typeface="Consolas" panose="020B0609020204030204" pitchFamily="49" charset="0"/>
+                <a:cs typeface="Consolas" panose="020B0609020204030204" pitchFamily="49" charset="0"/>
+              </a:rPr>
+              <a:t>SP</a:t>
+            </a:r>
+            <a:r>
+              <a:rPr lang="en-GB" sz="2400" dirty="0">
+                <a:latin typeface="Consolas" panose="020B0609020204030204" pitchFamily="49" charset="0"/>
+                <a:cs typeface="Consolas" panose="020B0609020204030204" pitchFamily="49" charset="0"/>
+              </a:rPr>
+              <a:t> = </a:t>
+            </a:r>
+            <a:r>
+              <a:rPr lang="en-GB" sz="2400" dirty="0" err="1">
+                <a:latin typeface="Consolas" panose="020B0609020204030204" pitchFamily="49" charset="0"/>
+                <a:cs typeface="Consolas" panose="020B0609020204030204" pitchFamily="49" charset="0"/>
+              </a:rPr>
+              <a:t>SP</a:t>
+            </a:r>
+            <a:r>
+              <a:rPr lang="en-GB" sz="2400" dirty="0">
+                <a:latin typeface="Consolas" panose="020B0609020204030204" pitchFamily="49" charset="0"/>
+                <a:cs typeface="Consolas" panose="020B0609020204030204" pitchFamily="49" charset="0"/>
+              </a:rPr>
+              <a:t>-4   </a:t>
+            </a:r>
+            <a:r>
+              <a:rPr lang="en-GB" sz="2400" dirty="0">
+                <a:latin typeface="Cambria Math"/>
+                <a:ea typeface="Cambria Math"/>
+                <a:cs typeface="Consolas" panose="020B0609020204030204" pitchFamily="49" charset="0"/>
+              </a:rPr>
+              <a:t>⟶    descending stack</a:t>
+            </a:r>
+            <a:endParaRPr lang="en-GB" sz="2400" dirty="0">
+              <a:latin typeface="Consolas" panose="020B0609020204030204" pitchFamily="49" charset="0"/>
+              <a:cs typeface="Consolas" panose="020B0609020204030204" pitchFamily="49" charset="0"/>
+            </a:endParaRPr>
+          </a:p>
+          <a:p>
+            <a:pPr lvl="1"/>
+            <a:r>
+              <a:rPr lang="en-GB" sz="2400" dirty="0">
+                <a:latin typeface="Consolas" panose="020B0609020204030204" pitchFamily="49" charset="0"/>
+                <a:cs typeface="Consolas" panose="020B0609020204030204" pitchFamily="49" charset="0"/>
+              </a:rPr>
+              <a:t>(*SP) = </a:t>
+            </a:r>
+            <a:r>
+              <a:rPr lang="en-GB" sz="2400" i="1" dirty="0">
+                <a:latin typeface="Consolas" panose="020B0609020204030204" pitchFamily="49" charset="0"/>
+                <a:cs typeface="Consolas" panose="020B0609020204030204" pitchFamily="49" charset="0"/>
+              </a:rPr>
+              <a:t>Rd</a:t>
+            </a:r>
+            <a:r>
+              <a:rPr lang="en-GB" sz="2400" dirty="0">
+                <a:latin typeface="Cambria Math"/>
+                <a:ea typeface="Cambria Math"/>
+                <a:cs typeface="Consolas" panose="020B0609020204030204" pitchFamily="49" charset="0"/>
+              </a:rPr>
+              <a:t>     ⟶    full stack</a:t>
+            </a:r>
+          </a:p>
+          <a:p>
+            <a:pPr marL="0" indent="0">
+              <a:buNone/>
+            </a:pPr>
+            <a:endParaRPr lang="en-GB" sz="2700" i="1" dirty="0">
+              <a:latin typeface="Consolas" panose="020B0609020204030204" pitchFamily="49" charset="0"/>
+              <a:cs typeface="Consolas" panose="020B0609020204030204" pitchFamily="49" charset="0"/>
+            </a:endParaRPr>
+          </a:p>
+          <a:p>
+            <a:pPr marL="0" indent="0">
+              <a:buNone/>
+            </a:pPr>
+            <a:r>
+              <a:rPr lang="en-GB" sz="2700" dirty="0">
+                <a:cs typeface="Consolas" panose="020B0609020204030204" pitchFamily="49" charset="0"/>
+              </a:rPr>
+              <a:t>Push multiple registers</a:t>
+            </a:r>
+          </a:p>
+          <a:p>
+            <a:pPr marL="0" indent="0">
+              <a:buNone/>
+            </a:pPr>
+            <a:endParaRPr lang="en-GB" sz="2800" dirty="0"/>
+          </a:p>
+          <a:p>
+            <a:endParaRPr lang="en-GB" sz="2400" dirty="0"/>
+          </a:p>
+          <a:p>
+            <a:pPr>
+              <a:buNone/>
+            </a:pPr>
+            <a:endParaRPr lang="en-GB" dirty="0"/>
+          </a:p>
+        </p:txBody>
+      </p:sp>
+      <p:sp>
+        <p:nvSpPr>
+          <p:cNvPr id="4" name="Slide Number Placeholder 3"/>
+          <p:cNvSpPr>
+            <a:spLocks noGrp="1"/>
+          </p:cNvSpPr>
+          <p:nvPr>
+            <p:ph type="sldNum" sz="quarter" idx="12"/>
+          </p:nvPr>
+        </p:nvSpPr>
+        <p:spPr/>
+        <p:txBody>
+          <a:bodyPr/>
+          <a:lstStyle/>
+          <a:p>
+            <a:fld id="{EA7C8D44-3667-46F6-9772-CC52308E2A7F}" type="slidenum">
+              <a:rPr kumimoji="0" lang="en-US" smtClean="0"/>
+              <a:pPr/>
+              <a:t>2</a:t>
+            </a:fld>
+            <a:endParaRPr kumimoji="0" lang="en-US" dirty="0"/>
+          </a:p>
+        </p:txBody>
+      </p:sp>
+      <p:sp>
+        <p:nvSpPr>
+          <p:cNvPr id="5" name="Rectangle 4"/>
+          <p:cNvSpPr/>
+          <p:nvPr/>
+        </p:nvSpPr>
+        <p:spPr>
+          <a:xfrm>
+            <a:off x="410688" y="3848146"/>
+            <a:ext cx="2488850" cy="369332"/>
+          </a:xfrm>
+          <a:prstGeom prst="rect">
+            <a:avLst/>
+          </a:prstGeom>
+        </p:spPr>
+        <p:txBody>
+          <a:bodyPr wrap="square">
+            <a:spAutoFit/>
+          </a:bodyPr>
+          <a:lstStyle/>
+          <a:p>
+            <a:r>
+              <a:rPr lang="en-GB" b="1" dirty="0">
+                <a:solidFill>
+                  <a:srgbClr val="FF0000"/>
+                </a:solidFill>
+                <a:latin typeface="Consolas" panose="020B0609020204030204" pitchFamily="49" charset="0"/>
+                <a:cs typeface="Consolas" panose="020B0609020204030204" pitchFamily="49" charset="0"/>
+              </a:rPr>
+              <a:t>PUSH {r6, r7, </a:t>
+            </a:r>
+            <a:r>
+              <a:rPr lang="en-GB" b="1" dirty="0" err="1">
+                <a:solidFill>
+                  <a:srgbClr val="FF0000"/>
+                </a:solidFill>
+                <a:latin typeface="Consolas" panose="020B0609020204030204" pitchFamily="49" charset="0"/>
+                <a:cs typeface="Consolas" panose="020B0609020204030204" pitchFamily="49" charset="0"/>
+              </a:rPr>
+              <a:t>r8</a:t>
+            </a:r>
+            <a:r>
+              <a:rPr lang="en-GB" b="1" dirty="0">
+                <a:solidFill>
+                  <a:srgbClr val="FF0000"/>
+                </a:solidFill>
+                <a:latin typeface="Consolas" panose="020B0609020204030204" pitchFamily="49" charset="0"/>
+                <a:cs typeface="Consolas" panose="020B0609020204030204" pitchFamily="49" charset="0"/>
+              </a:rPr>
+              <a:t>}</a:t>
+            </a:r>
+          </a:p>
+        </p:txBody>
+      </p:sp>
+      <p:sp>
+        <p:nvSpPr>
+          <p:cNvPr id="6" name="TextBox 5"/>
+          <p:cNvSpPr txBox="1"/>
+          <p:nvPr/>
+        </p:nvSpPr>
+        <p:spPr>
+          <a:xfrm>
+            <a:off x="3611088" y="3465945"/>
+            <a:ext cx="1969129" cy="369332"/>
+          </a:xfrm>
+          <a:prstGeom prst="rect">
+            <a:avLst/>
+          </a:prstGeom>
+          <a:noFill/>
+        </p:spPr>
+        <p:txBody>
+          <a:bodyPr wrap="none" rtlCol="0">
+            <a:spAutoFit/>
+          </a:bodyPr>
+          <a:lstStyle/>
+          <a:p>
+            <a:r>
+              <a:rPr lang="en-US" i="1" dirty="0"/>
+              <a:t>They are equivalent. </a:t>
+            </a:r>
+          </a:p>
+        </p:txBody>
+      </p:sp>
+      <p:sp>
+        <p:nvSpPr>
+          <p:cNvPr id="8" name="Rectangle 7"/>
+          <p:cNvSpPr/>
+          <p:nvPr/>
+        </p:nvSpPr>
+        <p:spPr>
+          <a:xfrm>
+            <a:off x="7040088" y="3568140"/>
+            <a:ext cx="1324402" cy="923330"/>
+          </a:xfrm>
+          <a:prstGeom prst="rect">
+            <a:avLst/>
+          </a:prstGeom>
+        </p:spPr>
+        <p:txBody>
+          <a:bodyPr wrap="none">
+            <a:spAutoFit/>
+          </a:bodyPr>
+          <a:lstStyle/>
+          <a:p>
+            <a:r>
+              <a:rPr lang="en-GB" b="1" dirty="0">
+                <a:solidFill>
+                  <a:srgbClr val="FF0000"/>
+                </a:solidFill>
+                <a:latin typeface="Consolas" panose="020B0609020204030204" pitchFamily="49" charset="0"/>
+                <a:cs typeface="Consolas" panose="020B0609020204030204" pitchFamily="49" charset="0"/>
+              </a:rPr>
+              <a:t>PUSH {r8}</a:t>
+            </a:r>
+          </a:p>
+          <a:p>
+            <a:r>
+              <a:rPr lang="en-GB" b="1" dirty="0">
+                <a:solidFill>
+                  <a:srgbClr val="FF0000"/>
+                </a:solidFill>
+                <a:latin typeface="Consolas" panose="020B0609020204030204" pitchFamily="49" charset="0"/>
+                <a:cs typeface="Consolas" panose="020B0609020204030204" pitchFamily="49" charset="0"/>
+              </a:rPr>
+              <a:t>PUSH {r7}</a:t>
+            </a:r>
+          </a:p>
+          <a:p>
+            <a:r>
+              <a:rPr lang="en-GB" b="1" dirty="0">
+                <a:solidFill>
+                  <a:srgbClr val="FF0000"/>
+                </a:solidFill>
+                <a:latin typeface="Consolas" panose="020B0609020204030204" pitchFamily="49" charset="0"/>
+                <a:cs typeface="Consolas" panose="020B0609020204030204" pitchFamily="49" charset="0"/>
+              </a:rPr>
+              <a:t>PUSH {r6}</a:t>
+            </a:r>
+          </a:p>
+        </p:txBody>
+      </p:sp>
+      <p:sp>
+        <p:nvSpPr>
+          <p:cNvPr id="10" name="Rectangle 9"/>
+          <p:cNvSpPr/>
+          <p:nvPr/>
+        </p:nvSpPr>
+        <p:spPr>
+          <a:xfrm>
+            <a:off x="3611088" y="3848146"/>
+            <a:ext cx="2337499" cy="369332"/>
+          </a:xfrm>
+          <a:prstGeom prst="rect">
+            <a:avLst/>
+          </a:prstGeom>
+        </p:spPr>
+        <p:txBody>
+          <a:bodyPr wrap="none">
+            <a:spAutoFit/>
+          </a:bodyPr>
+          <a:lstStyle/>
+          <a:p>
+            <a:r>
+              <a:rPr lang="en-GB" b="1" dirty="0">
+                <a:solidFill>
+                  <a:srgbClr val="FF0000"/>
+                </a:solidFill>
+                <a:latin typeface="Consolas" panose="020B0609020204030204" pitchFamily="49" charset="0"/>
+                <a:cs typeface="Consolas" panose="020B0609020204030204" pitchFamily="49" charset="0"/>
+              </a:rPr>
+              <a:t>PUSH {</a:t>
+            </a:r>
+            <a:r>
+              <a:rPr lang="en-GB" b="1" dirty="0" err="1">
+                <a:solidFill>
+                  <a:srgbClr val="FF0000"/>
+                </a:solidFill>
+                <a:latin typeface="Consolas" panose="020B0609020204030204" pitchFamily="49" charset="0"/>
+                <a:cs typeface="Consolas" panose="020B0609020204030204" pitchFamily="49" charset="0"/>
+              </a:rPr>
+              <a:t>r8</a:t>
+            </a:r>
+            <a:r>
+              <a:rPr lang="en-GB" b="1" dirty="0">
+                <a:solidFill>
+                  <a:srgbClr val="FF0000"/>
+                </a:solidFill>
+                <a:latin typeface="Consolas" panose="020B0609020204030204" pitchFamily="49" charset="0"/>
+                <a:cs typeface="Consolas" panose="020B0609020204030204" pitchFamily="49" charset="0"/>
+              </a:rPr>
+              <a:t>, </a:t>
+            </a:r>
+            <a:r>
+              <a:rPr lang="en-GB" b="1" dirty="0" err="1">
+                <a:solidFill>
+                  <a:srgbClr val="FF0000"/>
+                </a:solidFill>
+                <a:latin typeface="Consolas" panose="020B0609020204030204" pitchFamily="49" charset="0"/>
+                <a:cs typeface="Consolas" panose="020B0609020204030204" pitchFamily="49" charset="0"/>
+              </a:rPr>
+              <a:t>r7</a:t>
+            </a:r>
+            <a:r>
+              <a:rPr lang="en-GB" b="1" dirty="0">
+                <a:solidFill>
+                  <a:srgbClr val="FF0000"/>
+                </a:solidFill>
+                <a:latin typeface="Consolas" panose="020B0609020204030204" pitchFamily="49" charset="0"/>
+                <a:cs typeface="Consolas" panose="020B0609020204030204" pitchFamily="49" charset="0"/>
+              </a:rPr>
+              <a:t>, </a:t>
+            </a:r>
+            <a:r>
+              <a:rPr lang="en-GB" b="1" dirty="0" err="1">
+                <a:solidFill>
+                  <a:srgbClr val="FF0000"/>
+                </a:solidFill>
+                <a:latin typeface="Consolas" panose="020B0609020204030204" pitchFamily="49" charset="0"/>
+                <a:cs typeface="Consolas" panose="020B0609020204030204" pitchFamily="49" charset="0"/>
+              </a:rPr>
+              <a:t>r6</a:t>
+            </a:r>
+            <a:r>
+              <a:rPr lang="en-GB" b="1" dirty="0">
+                <a:solidFill>
+                  <a:srgbClr val="FF0000"/>
+                </a:solidFill>
+                <a:latin typeface="Consolas" panose="020B0609020204030204" pitchFamily="49" charset="0"/>
+                <a:cs typeface="Consolas" panose="020B0609020204030204" pitchFamily="49" charset="0"/>
+              </a:rPr>
+              <a:t>}</a:t>
+            </a:r>
+          </a:p>
+        </p:txBody>
+      </p:sp>
+      <p:sp>
+        <p:nvSpPr>
+          <p:cNvPr id="11" name="Left-Right Arrow 10"/>
+          <p:cNvSpPr/>
+          <p:nvPr/>
+        </p:nvSpPr>
+        <p:spPr>
+          <a:xfrm>
+            <a:off x="3001488" y="3976346"/>
+            <a:ext cx="482950" cy="197882"/>
+          </a:xfrm>
+          <a:prstGeom prst="leftRightArrow">
+            <a:avLst/>
+          </a:prstGeom>
+        </p:spPr>
+        <p:style>
+          <a:lnRef idx="2">
+            <a:schemeClr val="accent1">
+              <a:shade val="50000"/>
+            </a:schemeClr>
+          </a:lnRef>
+          <a:fillRef idx="1">
+            <a:schemeClr val="accent1"/>
+          </a:fillRef>
+          <a:effectRef idx="0">
+            <a:schemeClr val="accent1"/>
+          </a:effectRef>
+          <a:fontRef idx="minor">
+            <a:schemeClr val="lt1"/>
+          </a:fontRef>
+        </p:style>
+        <p:txBody>
+          <a:bodyPr rtlCol="0" anchor="ctr"/>
+          <a:lstStyle/>
+          <a:p>
+            <a:pPr algn="ctr"/>
+            <a:endParaRPr lang="en-US"/>
+          </a:p>
+        </p:txBody>
+      </p:sp>
+      <p:sp>
+        <p:nvSpPr>
+          <p:cNvPr id="12" name="Left-Right Arrow 11"/>
+          <p:cNvSpPr/>
+          <p:nvPr/>
+        </p:nvSpPr>
+        <p:spPr>
+          <a:xfrm>
+            <a:off x="6278088" y="3930864"/>
+            <a:ext cx="482950" cy="197882"/>
+          </a:xfrm>
+          <a:prstGeom prst="leftRightArrow">
+            <a:avLst/>
+          </a:prstGeom>
+        </p:spPr>
+        <p:style>
+          <a:lnRef idx="2">
+            <a:schemeClr val="accent1">
+              <a:shade val="50000"/>
+            </a:schemeClr>
+          </a:lnRef>
+          <a:fillRef idx="1">
+            <a:schemeClr val="accent1"/>
+          </a:fillRef>
+          <a:effectRef idx="0">
+            <a:schemeClr val="accent1"/>
+          </a:effectRef>
+          <a:fontRef idx="minor">
+            <a:schemeClr val="lt1"/>
+          </a:fontRef>
+        </p:style>
+        <p:txBody>
+          <a:bodyPr rtlCol="0" anchor="ctr"/>
+          <a:lstStyle/>
+          <a:p>
+            <a:pPr algn="ctr"/>
+            <a:endParaRPr lang="en-US"/>
+          </a:p>
+        </p:txBody>
+      </p:sp>
+      <p:sp>
+        <p:nvSpPr>
+          <p:cNvPr id="13" name="Rectangle 12"/>
+          <p:cNvSpPr/>
+          <p:nvPr/>
+        </p:nvSpPr>
+        <p:spPr>
+          <a:xfrm>
+            <a:off x="758953" y="4504339"/>
+            <a:ext cx="7772399" cy="1938992"/>
+          </a:xfrm>
+          <a:prstGeom prst="rect">
+            <a:avLst/>
+          </a:prstGeom>
+        </p:spPr>
+        <p:txBody>
+          <a:bodyPr wrap="square">
+            <a:spAutoFit/>
+          </a:bodyPr>
+          <a:lstStyle/>
+          <a:p>
+            <a:pPr marL="285750" indent="-285750">
+              <a:buFont typeface="Arial" panose="020B0604020202020204" pitchFamily="34" charset="0"/>
+              <a:buChar char="•"/>
+            </a:pPr>
+            <a:r>
+              <a:rPr lang="en-US" sz="2000" dirty="0"/>
+              <a:t>SP is decremented before PUSH (pre-decrement), and incremented after POP (post-increment). </a:t>
+            </a:r>
+          </a:p>
+          <a:p>
+            <a:pPr marL="285750" indent="-285750">
+              <a:buFont typeface="Arial" panose="020B0604020202020204" pitchFamily="34" charset="0"/>
+              <a:buChar char="•"/>
+            </a:pPr>
+            <a:r>
+              <a:rPr lang="en-US" sz="2000" dirty="0"/>
+              <a:t>The order in which registers listed in the register list does not matter. </a:t>
+            </a:r>
+          </a:p>
+          <a:p>
+            <a:pPr marL="285750" indent="-285750">
+              <a:buFont typeface="Arial" panose="020B0604020202020204" pitchFamily="34" charset="0"/>
+              <a:buChar char="•"/>
+            </a:pPr>
+            <a:r>
+              <a:rPr lang="en-US" sz="2000" dirty="0"/>
+              <a:t>When pushing multiple registers, these registers are automatically </a:t>
+            </a:r>
+            <a:r>
+              <a:rPr lang="en-US" sz="2000" dirty="0">
+                <a:solidFill>
+                  <a:srgbClr val="3333FF"/>
+                </a:solidFill>
+              </a:rPr>
+              <a:t>sorted by name </a:t>
+            </a:r>
+            <a:r>
+              <a:rPr lang="en-US" sz="2000" dirty="0"/>
+              <a:t>and </a:t>
+            </a:r>
+            <a:r>
+              <a:rPr lang="en-US" sz="2000" dirty="0">
+                <a:solidFill>
+                  <a:srgbClr val="3333FF"/>
+                </a:solidFill>
+              </a:rPr>
+              <a:t>the lowest-numbered register </a:t>
+            </a:r>
+            <a:r>
+              <a:rPr lang="en-US" sz="2000" dirty="0"/>
+              <a:t>is stored to the lowest memory address, </a:t>
+            </a:r>
+            <a:r>
+              <a:rPr lang="en-US" sz="2000" i="1" dirty="0"/>
+              <a:t>i.e. </a:t>
+            </a:r>
+            <a:r>
+              <a:rPr lang="en-US" sz="2000" dirty="0">
+                <a:solidFill>
+                  <a:srgbClr val="3333FF"/>
+                </a:solidFill>
+              </a:rPr>
+              <a:t>is stored last</a:t>
+            </a:r>
+            <a:r>
+              <a:rPr lang="en-US" sz="2000" dirty="0"/>
+              <a:t>. </a:t>
+            </a:r>
+          </a:p>
+        </p:txBody>
+      </p:sp>
+      <p:sp>
+        <p:nvSpPr>
+          <p:cNvPr id="7" name="Horizontal Scroll 15">
+            <a:extLst>
+              <a:ext uri="{FF2B5EF4-FFF2-40B4-BE49-F238E27FC236}">
+                <a16:creationId xmlns:a16="http://schemas.microsoft.com/office/drawing/2014/main" id="{CA1DAB37-747D-183E-CAAD-AD690621F135}"/>
+              </a:ext>
+            </a:extLst>
+          </p:cNvPr>
+          <p:cNvSpPr/>
+          <p:nvPr/>
+        </p:nvSpPr>
+        <p:spPr>
+          <a:xfrm>
+            <a:off x="76200" y="-23210"/>
+            <a:ext cx="1265712" cy="762000"/>
+          </a:xfrm>
+          <a:prstGeom prst="horizontalScroll">
+            <a:avLst/>
+          </a:prstGeom>
+          <a:gradFill rotWithShape="1">
+            <a:gsLst>
+              <a:gs pos="0">
+                <a:srgbClr val="4F81BD">
+                  <a:tint val="50000"/>
+                  <a:satMod val="300000"/>
+                </a:srgbClr>
+              </a:gs>
+              <a:gs pos="35000">
+                <a:srgbClr val="4F81BD">
+                  <a:tint val="37000"/>
+                  <a:satMod val="300000"/>
+                </a:srgbClr>
+              </a:gs>
+              <a:gs pos="100000">
+                <a:srgbClr val="4F81BD">
+                  <a:tint val="15000"/>
+                  <a:satMod val="350000"/>
+                </a:srgbClr>
+              </a:gs>
+            </a:gsLst>
+            <a:lin ang="16200000" scaled="1"/>
+          </a:gradFill>
+          <a:ln w="9525" cap="flat" cmpd="sng" algn="ctr">
+            <a:solidFill>
+              <a:srgbClr val="4F81BD">
+                <a:shade val="95000"/>
+                <a:satMod val="105000"/>
+              </a:srgbClr>
+            </a:solidFill>
+            <a:prstDash val="solid"/>
+          </a:ln>
+          <a:effectLst>
+            <a:outerShdw blurRad="40000" dist="20000" dir="5400000" rotWithShape="0">
+              <a:srgbClr val="000000">
+                <a:alpha val="38000"/>
+              </a:srgbClr>
+            </a:outerShdw>
+          </a:effectLst>
+        </p:spPr>
+        <p:txBody>
+          <a:bodyPr rtlCol="0" anchor="ctr"/>
+          <a:lstStyle/>
+          <a:p>
+            <a:pPr marL="0" marR="0" lvl="0" indent="0" algn="ctr" defTabSz="457200" eaLnBrk="1" fontAlgn="auto" latinLnBrk="0" hangingPunct="1">
+              <a:lnSpc>
+                <a:spcPct val="100000"/>
+              </a:lnSpc>
+              <a:spcBef>
+                <a:spcPts val="0"/>
+              </a:spcBef>
+              <a:spcAft>
+                <a:spcPts val="0"/>
+              </a:spcAft>
+              <a:buClrTx/>
+              <a:buSzTx/>
+              <a:buFontTx/>
+              <a:buNone/>
+              <a:tabLst/>
+              <a:defRPr/>
+            </a:pPr>
+            <a:r>
+              <a:rPr kumimoji="0" lang="en-US" sz="2400" b="0" i="0" u="none" strike="noStrike" kern="0" cap="none" spc="0" normalizeH="0" baseline="0" noProof="0" dirty="0">
+                <a:ln>
+                  <a:noFill/>
+                </a:ln>
+                <a:solidFill>
+                  <a:prstClr val="black"/>
+                </a:solidFill>
+                <a:effectLst/>
+                <a:uLnTx/>
+                <a:uFillTx/>
+                <a:latin typeface="Calibri"/>
+                <a:ea typeface="+mn-ea"/>
+                <a:cs typeface="+mn-cs"/>
+              </a:rPr>
+              <a:t>Review</a:t>
+            </a:r>
+          </a:p>
+        </p:txBody>
+      </p:sp>
+    </p:spTree>
+    <p:extLst>
+      <p:ext uri="{BB962C8B-B14F-4D97-AF65-F5344CB8AC3E}">
+        <p14:creationId xmlns:p14="http://schemas.microsoft.com/office/powerpoint/2010/main" val="1120632604"/>
+      </p:ext>
+    </p:extLst>
+  </p:cSld>
+  <p:clrMapOvr>
+    <a:masterClrMapping/>
+  </p:clrMapOvr>
+</p:sld>
+</file>
+
+<file path=ppt/slides/slide20.xml><?xml version="1.0" encoding="utf-8"?>
+<p:sld xmlns:a="http://schemas.openxmlformats.org/drawingml/2006/main" xmlns:r="http://schemas.openxmlformats.org/officeDocument/2006/relationships" xmlns:p="http://schemas.openxmlformats.org/presentationml/2006/main">
+  <p:cSld>
+    <p:spTree>
+      <p:nvGrpSpPr>
+        <p:cNvPr id="1" name=""/>
+        <p:cNvGrpSpPr/>
+        <p:nvPr/>
+      </p:nvGrpSpPr>
+      <p:grpSpPr>
+        <a:xfrm>
+          <a:off x="0" y="0"/>
+          <a:ext cx="0" cy="0"/>
+          <a:chOff x="0" y="0"/>
+          <a:chExt cx="0" cy="0"/>
+        </a:xfrm>
+      </p:grpSpPr>
+      <p:sp>
+        <p:nvSpPr>
           <p:cNvPr id="2" name="Title 1">
             <a:extLst>
               <a:ext uri="{FF2B5EF4-FFF2-40B4-BE49-F238E27FC236}">
@@ -14179,7 +16226,7 @@
             <a:fld id="{EA7C8D44-3667-46F6-9772-CC52308E2A7F}" type="slidenum">
               <a:rPr kumimoji="0" lang="en-US" smtClean="0"/>
               <a:pPr/>
-              <a:t>19</a:t>
+              <a:t>20</a:t>
             </a:fld>
             <a:endParaRPr kumimoji="0" lang="en-US" dirty="0"/>
           </a:p>
@@ -14773,761 +16820,7 @@
 </p:sld>
 </file>
 
-<file path=ppt/slides/slide2.xml><?xml version="1.0" encoding="utf-8"?>
-<p:sld xmlns:a="http://schemas.openxmlformats.org/drawingml/2006/main" xmlns:r="http://schemas.openxmlformats.org/officeDocument/2006/relationships" xmlns:p="http://schemas.openxmlformats.org/presentationml/2006/main">
-  <p:cSld>
-    <p:spTree>
-      <p:nvGrpSpPr>
-        <p:cNvPr id="1" name=""/>
-        <p:cNvGrpSpPr/>
-        <p:nvPr/>
-      </p:nvGrpSpPr>
-      <p:grpSpPr>
-        <a:xfrm>
-          <a:off x="0" y="0"/>
-          <a:ext cx="0" cy="0"/>
-          <a:chOff x="0" y="0"/>
-          <a:chExt cx="0" cy="0"/>
-        </a:xfrm>
-      </p:grpSpPr>
-      <p:sp>
-        <p:nvSpPr>
-          <p:cNvPr id="2" name="Title 1"/>
-          <p:cNvSpPr>
-            <a:spLocks noGrp="1"/>
-          </p:cNvSpPr>
-          <p:nvPr>
-            <p:ph type="title"/>
-          </p:nvPr>
-        </p:nvSpPr>
-        <p:spPr/>
-        <p:txBody>
-          <a:bodyPr/>
-          <a:lstStyle/>
-          <a:p>
-            <a:r>
-              <a:rPr lang="en-GB" dirty="0"/>
-              <a:t>Stack</a:t>
-            </a:r>
-          </a:p>
-        </p:txBody>
-      </p:sp>
-      <p:sp>
-        <p:nvSpPr>
-          <p:cNvPr id="3" name="Content Placeholder 2"/>
-          <p:cNvSpPr>
-            <a:spLocks noGrp="1"/>
-          </p:cNvSpPr>
-          <p:nvPr>
-            <p:ph idx="1"/>
-          </p:nvPr>
-        </p:nvSpPr>
-        <p:spPr>
-          <a:xfrm>
-            <a:off x="457200" y="1219200"/>
-            <a:ext cx="8229600" cy="3200400"/>
-          </a:xfrm>
-        </p:spPr>
-        <p:txBody>
-          <a:bodyPr/>
-          <a:lstStyle/>
-          <a:p>
-            <a:pPr>
-              <a:buNone/>
-            </a:pPr>
-            <a:r>
-              <a:rPr lang="en-GB" sz="2800" b="1" dirty="0">
-                <a:solidFill>
-                  <a:srgbClr val="FF0000"/>
-                </a:solidFill>
-                <a:latin typeface="Consolas" panose="020B0609020204030204" pitchFamily="49" charset="0"/>
-                <a:cs typeface="Consolas" panose="020B0609020204030204" pitchFamily="49" charset="0"/>
-              </a:rPr>
-              <a:t>PUSH</a:t>
-            </a:r>
-            <a:r>
-              <a:rPr lang="en-GB" sz="2800" dirty="0">
-                <a:solidFill>
-                  <a:srgbClr val="FF0000"/>
-                </a:solidFill>
-                <a:latin typeface="Consolas" panose="020B0609020204030204" pitchFamily="49" charset="0"/>
-                <a:cs typeface="Consolas" panose="020B0609020204030204" pitchFamily="49" charset="0"/>
-              </a:rPr>
-              <a:t> </a:t>
-            </a:r>
-            <a:r>
-              <a:rPr lang="en-GB" sz="2800" dirty="0">
-                <a:latin typeface="Consolas" panose="020B0609020204030204" pitchFamily="49" charset="0"/>
-                <a:cs typeface="Consolas" panose="020B0609020204030204" pitchFamily="49" charset="0"/>
-              </a:rPr>
-              <a:t>{</a:t>
-            </a:r>
-            <a:r>
-              <a:rPr lang="en-GB" sz="2800" i="1" dirty="0">
-                <a:latin typeface="Consolas" panose="020B0609020204030204" pitchFamily="49" charset="0"/>
-                <a:cs typeface="Consolas" panose="020B0609020204030204" pitchFamily="49" charset="0"/>
-              </a:rPr>
-              <a:t>Rd</a:t>
-            </a:r>
-            <a:r>
-              <a:rPr lang="en-GB" sz="2800" dirty="0">
-                <a:latin typeface="Consolas" panose="020B0609020204030204" pitchFamily="49" charset="0"/>
-                <a:cs typeface="Consolas" panose="020B0609020204030204" pitchFamily="49" charset="0"/>
-              </a:rPr>
-              <a:t>} </a:t>
-            </a:r>
-          </a:p>
-          <a:p>
-            <a:pPr lvl="1"/>
-            <a:r>
-              <a:rPr lang="en-GB" sz="2400" dirty="0" err="1">
-                <a:latin typeface="Consolas" panose="020B0609020204030204" pitchFamily="49" charset="0"/>
-                <a:cs typeface="Consolas" panose="020B0609020204030204" pitchFamily="49" charset="0"/>
-              </a:rPr>
-              <a:t>SP</a:t>
-            </a:r>
-            <a:r>
-              <a:rPr lang="en-GB" sz="2400" dirty="0">
-                <a:latin typeface="Consolas" panose="020B0609020204030204" pitchFamily="49" charset="0"/>
-                <a:cs typeface="Consolas" panose="020B0609020204030204" pitchFamily="49" charset="0"/>
-              </a:rPr>
-              <a:t> = </a:t>
-            </a:r>
-            <a:r>
-              <a:rPr lang="en-GB" sz="2400" dirty="0" err="1">
-                <a:latin typeface="Consolas" panose="020B0609020204030204" pitchFamily="49" charset="0"/>
-                <a:cs typeface="Consolas" panose="020B0609020204030204" pitchFamily="49" charset="0"/>
-              </a:rPr>
-              <a:t>SP</a:t>
-            </a:r>
-            <a:r>
-              <a:rPr lang="en-GB" sz="2400" dirty="0">
-                <a:latin typeface="Consolas" panose="020B0609020204030204" pitchFamily="49" charset="0"/>
-                <a:cs typeface="Consolas" panose="020B0609020204030204" pitchFamily="49" charset="0"/>
-              </a:rPr>
-              <a:t>-4   </a:t>
-            </a:r>
-            <a:r>
-              <a:rPr lang="en-GB" sz="2400" dirty="0">
-                <a:latin typeface="Cambria Math"/>
-                <a:ea typeface="Cambria Math"/>
-                <a:cs typeface="Consolas" panose="020B0609020204030204" pitchFamily="49" charset="0"/>
-              </a:rPr>
-              <a:t>⟶    descending stack</a:t>
-            </a:r>
-            <a:endParaRPr lang="en-GB" sz="2400" dirty="0">
-              <a:latin typeface="Consolas" panose="020B0609020204030204" pitchFamily="49" charset="0"/>
-              <a:cs typeface="Consolas" panose="020B0609020204030204" pitchFamily="49" charset="0"/>
-            </a:endParaRPr>
-          </a:p>
-          <a:p>
-            <a:pPr lvl="1"/>
-            <a:r>
-              <a:rPr lang="en-GB" sz="2400" dirty="0">
-                <a:latin typeface="Consolas" panose="020B0609020204030204" pitchFamily="49" charset="0"/>
-                <a:cs typeface="Consolas" panose="020B0609020204030204" pitchFamily="49" charset="0"/>
-              </a:rPr>
-              <a:t>(*SP) = </a:t>
-            </a:r>
-            <a:r>
-              <a:rPr lang="en-GB" sz="2400" i="1" dirty="0">
-                <a:latin typeface="Consolas" panose="020B0609020204030204" pitchFamily="49" charset="0"/>
-                <a:cs typeface="Consolas" panose="020B0609020204030204" pitchFamily="49" charset="0"/>
-              </a:rPr>
-              <a:t>Rd</a:t>
-            </a:r>
-            <a:r>
-              <a:rPr lang="en-GB" sz="2400" dirty="0">
-                <a:latin typeface="Cambria Math"/>
-                <a:ea typeface="Cambria Math"/>
-                <a:cs typeface="Consolas" panose="020B0609020204030204" pitchFamily="49" charset="0"/>
-              </a:rPr>
-              <a:t>     ⟶    full stack</a:t>
-            </a:r>
-          </a:p>
-          <a:p>
-            <a:pPr marL="0" indent="0">
-              <a:buNone/>
-            </a:pPr>
-            <a:endParaRPr lang="en-GB" sz="2700" i="1" dirty="0">
-              <a:latin typeface="Consolas" panose="020B0609020204030204" pitchFamily="49" charset="0"/>
-              <a:cs typeface="Consolas" panose="020B0609020204030204" pitchFamily="49" charset="0"/>
-            </a:endParaRPr>
-          </a:p>
-          <a:p>
-            <a:pPr marL="0" indent="0">
-              <a:buNone/>
-            </a:pPr>
-            <a:r>
-              <a:rPr lang="en-GB" sz="2700" dirty="0">
-                <a:cs typeface="Consolas" panose="020B0609020204030204" pitchFamily="49" charset="0"/>
-              </a:rPr>
-              <a:t>Push multiple registers</a:t>
-            </a:r>
-          </a:p>
-          <a:p>
-            <a:pPr marL="0" indent="0">
-              <a:buNone/>
-            </a:pPr>
-            <a:endParaRPr lang="en-GB" sz="2800" dirty="0"/>
-          </a:p>
-          <a:p>
-            <a:endParaRPr lang="en-GB" sz="2400" dirty="0"/>
-          </a:p>
-          <a:p>
-            <a:pPr>
-              <a:buNone/>
-            </a:pPr>
-            <a:endParaRPr lang="en-GB" dirty="0"/>
-          </a:p>
-        </p:txBody>
-      </p:sp>
-      <p:sp>
-        <p:nvSpPr>
-          <p:cNvPr id="4" name="Slide Number Placeholder 3"/>
-          <p:cNvSpPr>
-            <a:spLocks noGrp="1"/>
-          </p:cNvSpPr>
-          <p:nvPr>
-            <p:ph type="sldNum" sz="quarter" idx="12"/>
-          </p:nvPr>
-        </p:nvSpPr>
-        <p:spPr/>
-        <p:txBody>
-          <a:bodyPr/>
-          <a:lstStyle/>
-          <a:p>
-            <a:fld id="{EA7C8D44-3667-46F6-9772-CC52308E2A7F}" type="slidenum">
-              <a:rPr kumimoji="0" lang="en-US" smtClean="0"/>
-              <a:pPr/>
-              <a:t>2</a:t>
-            </a:fld>
-            <a:endParaRPr kumimoji="0" lang="en-US" dirty="0"/>
-          </a:p>
-        </p:txBody>
-      </p:sp>
-      <p:sp>
-        <p:nvSpPr>
-          <p:cNvPr id="5" name="Rectangle 4"/>
-          <p:cNvSpPr/>
-          <p:nvPr/>
-        </p:nvSpPr>
-        <p:spPr>
-          <a:xfrm>
-            <a:off x="410688" y="3848146"/>
-            <a:ext cx="2488850" cy="369332"/>
-          </a:xfrm>
-          <a:prstGeom prst="rect">
-            <a:avLst/>
-          </a:prstGeom>
-        </p:spPr>
-        <p:txBody>
-          <a:bodyPr wrap="square">
-            <a:spAutoFit/>
-          </a:bodyPr>
-          <a:lstStyle/>
-          <a:p>
-            <a:r>
-              <a:rPr lang="en-GB" b="1" dirty="0">
-                <a:solidFill>
-                  <a:srgbClr val="FF0000"/>
-                </a:solidFill>
-                <a:latin typeface="Consolas" panose="020B0609020204030204" pitchFamily="49" charset="0"/>
-                <a:cs typeface="Consolas" panose="020B0609020204030204" pitchFamily="49" charset="0"/>
-              </a:rPr>
-              <a:t>PUSH {r6, r7, </a:t>
-            </a:r>
-            <a:r>
-              <a:rPr lang="en-GB" b="1" dirty="0" err="1">
-                <a:solidFill>
-                  <a:srgbClr val="FF0000"/>
-                </a:solidFill>
-                <a:latin typeface="Consolas" panose="020B0609020204030204" pitchFamily="49" charset="0"/>
-                <a:cs typeface="Consolas" panose="020B0609020204030204" pitchFamily="49" charset="0"/>
-              </a:rPr>
-              <a:t>r8</a:t>
-            </a:r>
-            <a:r>
-              <a:rPr lang="en-GB" b="1" dirty="0">
-                <a:solidFill>
-                  <a:srgbClr val="FF0000"/>
-                </a:solidFill>
-                <a:latin typeface="Consolas" panose="020B0609020204030204" pitchFamily="49" charset="0"/>
-                <a:cs typeface="Consolas" panose="020B0609020204030204" pitchFamily="49" charset="0"/>
-              </a:rPr>
-              <a:t>}</a:t>
-            </a:r>
-          </a:p>
-        </p:txBody>
-      </p:sp>
-      <p:sp>
-        <p:nvSpPr>
-          <p:cNvPr id="6" name="TextBox 5"/>
-          <p:cNvSpPr txBox="1"/>
-          <p:nvPr/>
-        </p:nvSpPr>
-        <p:spPr>
-          <a:xfrm>
-            <a:off x="3611088" y="3465945"/>
-            <a:ext cx="1969129" cy="369332"/>
-          </a:xfrm>
-          <a:prstGeom prst="rect">
-            <a:avLst/>
-          </a:prstGeom>
-          <a:noFill/>
-        </p:spPr>
-        <p:txBody>
-          <a:bodyPr wrap="none" rtlCol="0">
-            <a:spAutoFit/>
-          </a:bodyPr>
-          <a:lstStyle/>
-          <a:p>
-            <a:r>
-              <a:rPr lang="en-US" i="1" dirty="0"/>
-              <a:t>They are equivalent. </a:t>
-            </a:r>
-          </a:p>
-        </p:txBody>
-      </p:sp>
-      <p:sp>
-        <p:nvSpPr>
-          <p:cNvPr id="8" name="Rectangle 7"/>
-          <p:cNvSpPr/>
-          <p:nvPr/>
-        </p:nvSpPr>
-        <p:spPr>
-          <a:xfrm>
-            <a:off x="7040088" y="3568140"/>
-            <a:ext cx="1324402" cy="923330"/>
-          </a:xfrm>
-          <a:prstGeom prst="rect">
-            <a:avLst/>
-          </a:prstGeom>
-        </p:spPr>
-        <p:txBody>
-          <a:bodyPr wrap="none">
-            <a:spAutoFit/>
-          </a:bodyPr>
-          <a:lstStyle/>
-          <a:p>
-            <a:r>
-              <a:rPr lang="en-GB" b="1" dirty="0">
-                <a:solidFill>
-                  <a:srgbClr val="FF0000"/>
-                </a:solidFill>
-                <a:latin typeface="Consolas" panose="020B0609020204030204" pitchFamily="49" charset="0"/>
-                <a:cs typeface="Consolas" panose="020B0609020204030204" pitchFamily="49" charset="0"/>
-              </a:rPr>
-              <a:t>PUSH {r8}</a:t>
-            </a:r>
-          </a:p>
-          <a:p>
-            <a:r>
-              <a:rPr lang="en-GB" b="1" dirty="0">
-                <a:solidFill>
-                  <a:srgbClr val="FF0000"/>
-                </a:solidFill>
-                <a:latin typeface="Consolas" panose="020B0609020204030204" pitchFamily="49" charset="0"/>
-                <a:cs typeface="Consolas" panose="020B0609020204030204" pitchFamily="49" charset="0"/>
-              </a:rPr>
-              <a:t>PUSH {r7}</a:t>
-            </a:r>
-          </a:p>
-          <a:p>
-            <a:r>
-              <a:rPr lang="en-GB" b="1" dirty="0">
-                <a:solidFill>
-                  <a:srgbClr val="FF0000"/>
-                </a:solidFill>
-                <a:latin typeface="Consolas" panose="020B0609020204030204" pitchFamily="49" charset="0"/>
-                <a:cs typeface="Consolas" panose="020B0609020204030204" pitchFamily="49" charset="0"/>
-              </a:rPr>
-              <a:t>PUSH {r6}</a:t>
-            </a:r>
-          </a:p>
-        </p:txBody>
-      </p:sp>
-      <p:sp>
-        <p:nvSpPr>
-          <p:cNvPr id="10" name="Rectangle 9"/>
-          <p:cNvSpPr/>
-          <p:nvPr/>
-        </p:nvSpPr>
-        <p:spPr>
-          <a:xfrm>
-            <a:off x="3611088" y="3848146"/>
-            <a:ext cx="2337499" cy="369332"/>
-          </a:xfrm>
-          <a:prstGeom prst="rect">
-            <a:avLst/>
-          </a:prstGeom>
-        </p:spPr>
-        <p:txBody>
-          <a:bodyPr wrap="none">
-            <a:spAutoFit/>
-          </a:bodyPr>
-          <a:lstStyle/>
-          <a:p>
-            <a:r>
-              <a:rPr lang="en-GB" b="1" dirty="0">
-                <a:solidFill>
-                  <a:srgbClr val="FF0000"/>
-                </a:solidFill>
-                <a:latin typeface="Consolas" panose="020B0609020204030204" pitchFamily="49" charset="0"/>
-                <a:cs typeface="Consolas" panose="020B0609020204030204" pitchFamily="49" charset="0"/>
-              </a:rPr>
-              <a:t>PUSH {</a:t>
-            </a:r>
-            <a:r>
-              <a:rPr lang="en-GB" b="1" dirty="0" err="1">
-                <a:solidFill>
-                  <a:srgbClr val="FF0000"/>
-                </a:solidFill>
-                <a:latin typeface="Consolas" panose="020B0609020204030204" pitchFamily="49" charset="0"/>
-                <a:cs typeface="Consolas" panose="020B0609020204030204" pitchFamily="49" charset="0"/>
-              </a:rPr>
-              <a:t>r8</a:t>
-            </a:r>
-            <a:r>
-              <a:rPr lang="en-GB" b="1" dirty="0">
-                <a:solidFill>
-                  <a:srgbClr val="FF0000"/>
-                </a:solidFill>
-                <a:latin typeface="Consolas" panose="020B0609020204030204" pitchFamily="49" charset="0"/>
-                <a:cs typeface="Consolas" panose="020B0609020204030204" pitchFamily="49" charset="0"/>
-              </a:rPr>
-              <a:t>, </a:t>
-            </a:r>
-            <a:r>
-              <a:rPr lang="en-GB" b="1" dirty="0" err="1">
-                <a:solidFill>
-                  <a:srgbClr val="FF0000"/>
-                </a:solidFill>
-                <a:latin typeface="Consolas" panose="020B0609020204030204" pitchFamily="49" charset="0"/>
-                <a:cs typeface="Consolas" panose="020B0609020204030204" pitchFamily="49" charset="0"/>
-              </a:rPr>
-              <a:t>r7</a:t>
-            </a:r>
-            <a:r>
-              <a:rPr lang="en-GB" b="1" dirty="0">
-                <a:solidFill>
-                  <a:srgbClr val="FF0000"/>
-                </a:solidFill>
-                <a:latin typeface="Consolas" panose="020B0609020204030204" pitchFamily="49" charset="0"/>
-                <a:cs typeface="Consolas" panose="020B0609020204030204" pitchFamily="49" charset="0"/>
-              </a:rPr>
-              <a:t>, </a:t>
-            </a:r>
-            <a:r>
-              <a:rPr lang="en-GB" b="1" dirty="0" err="1">
-                <a:solidFill>
-                  <a:srgbClr val="FF0000"/>
-                </a:solidFill>
-                <a:latin typeface="Consolas" panose="020B0609020204030204" pitchFamily="49" charset="0"/>
-                <a:cs typeface="Consolas" panose="020B0609020204030204" pitchFamily="49" charset="0"/>
-              </a:rPr>
-              <a:t>r6</a:t>
-            </a:r>
-            <a:r>
-              <a:rPr lang="en-GB" b="1" dirty="0">
-                <a:solidFill>
-                  <a:srgbClr val="FF0000"/>
-                </a:solidFill>
-                <a:latin typeface="Consolas" panose="020B0609020204030204" pitchFamily="49" charset="0"/>
-                <a:cs typeface="Consolas" panose="020B0609020204030204" pitchFamily="49" charset="0"/>
-              </a:rPr>
-              <a:t>}</a:t>
-            </a:r>
-          </a:p>
-        </p:txBody>
-      </p:sp>
-      <p:sp>
-        <p:nvSpPr>
-          <p:cNvPr id="11" name="Left-Right Arrow 10"/>
-          <p:cNvSpPr/>
-          <p:nvPr/>
-        </p:nvSpPr>
-        <p:spPr>
-          <a:xfrm>
-            <a:off x="3001488" y="3976346"/>
-            <a:ext cx="482950" cy="197882"/>
-          </a:xfrm>
-          <a:prstGeom prst="leftRightArrow">
-            <a:avLst/>
-          </a:prstGeom>
-        </p:spPr>
-        <p:style>
-          <a:lnRef idx="2">
-            <a:schemeClr val="accent1">
-              <a:shade val="50000"/>
-            </a:schemeClr>
-          </a:lnRef>
-          <a:fillRef idx="1">
-            <a:schemeClr val="accent1"/>
-          </a:fillRef>
-          <a:effectRef idx="0">
-            <a:schemeClr val="accent1"/>
-          </a:effectRef>
-          <a:fontRef idx="minor">
-            <a:schemeClr val="lt1"/>
-          </a:fontRef>
-        </p:style>
-        <p:txBody>
-          <a:bodyPr rtlCol="0" anchor="ctr"/>
-          <a:lstStyle/>
-          <a:p>
-            <a:pPr algn="ctr"/>
-            <a:endParaRPr lang="en-US"/>
-          </a:p>
-        </p:txBody>
-      </p:sp>
-      <p:sp>
-        <p:nvSpPr>
-          <p:cNvPr id="12" name="Left-Right Arrow 11"/>
-          <p:cNvSpPr/>
-          <p:nvPr/>
-        </p:nvSpPr>
-        <p:spPr>
-          <a:xfrm>
-            <a:off x="6278088" y="3930864"/>
-            <a:ext cx="482950" cy="197882"/>
-          </a:xfrm>
-          <a:prstGeom prst="leftRightArrow">
-            <a:avLst/>
-          </a:prstGeom>
-        </p:spPr>
-        <p:style>
-          <a:lnRef idx="2">
-            <a:schemeClr val="accent1">
-              <a:shade val="50000"/>
-            </a:schemeClr>
-          </a:lnRef>
-          <a:fillRef idx="1">
-            <a:schemeClr val="accent1"/>
-          </a:fillRef>
-          <a:effectRef idx="0">
-            <a:schemeClr val="accent1"/>
-          </a:effectRef>
-          <a:fontRef idx="minor">
-            <a:schemeClr val="lt1"/>
-          </a:fontRef>
-        </p:style>
-        <p:txBody>
-          <a:bodyPr rtlCol="0" anchor="ctr"/>
-          <a:lstStyle/>
-          <a:p>
-            <a:pPr algn="ctr"/>
-            <a:endParaRPr lang="en-US"/>
-          </a:p>
-        </p:txBody>
-      </p:sp>
-      <p:sp>
-        <p:nvSpPr>
-          <p:cNvPr id="13" name="Rectangle 12"/>
-          <p:cNvSpPr/>
-          <p:nvPr/>
-        </p:nvSpPr>
-        <p:spPr>
-          <a:xfrm>
-            <a:off x="758953" y="4504339"/>
-            <a:ext cx="7772399" cy="1938992"/>
-          </a:xfrm>
-          <a:prstGeom prst="rect">
-            <a:avLst/>
-          </a:prstGeom>
-        </p:spPr>
-        <p:txBody>
-          <a:bodyPr wrap="square">
-            <a:spAutoFit/>
-          </a:bodyPr>
-          <a:lstStyle/>
-          <a:p>
-            <a:pPr marL="285750" indent="-285750">
-              <a:buFont typeface="Arial" panose="020B0604020202020204" pitchFamily="34" charset="0"/>
-              <a:buChar char="•"/>
-            </a:pPr>
-            <a:r>
-              <a:rPr lang="en-US" sz="2000" dirty="0"/>
-              <a:t>SP is decremented before PUSH (pre-decrement), and incremented after POP (post-increment). </a:t>
-            </a:r>
-          </a:p>
-          <a:p>
-            <a:pPr marL="285750" indent="-285750">
-              <a:buFont typeface="Arial" panose="020B0604020202020204" pitchFamily="34" charset="0"/>
-              <a:buChar char="•"/>
-            </a:pPr>
-            <a:r>
-              <a:rPr lang="en-US" sz="2000" dirty="0"/>
-              <a:t>The order in which registers listed in the register list does not matter. </a:t>
-            </a:r>
-          </a:p>
-          <a:p>
-            <a:pPr marL="285750" indent="-285750">
-              <a:buFont typeface="Arial" panose="020B0604020202020204" pitchFamily="34" charset="0"/>
-              <a:buChar char="•"/>
-            </a:pPr>
-            <a:r>
-              <a:rPr lang="en-US" sz="2000" dirty="0"/>
-              <a:t>When pushing multiple registers, these registers are automatically </a:t>
-            </a:r>
-            <a:r>
-              <a:rPr lang="en-US" sz="2000" dirty="0">
-                <a:solidFill>
-                  <a:srgbClr val="3333FF"/>
-                </a:solidFill>
-              </a:rPr>
-              <a:t>sorted by name </a:t>
-            </a:r>
-            <a:r>
-              <a:rPr lang="en-US" sz="2000" dirty="0"/>
-              <a:t>and </a:t>
-            </a:r>
-            <a:r>
-              <a:rPr lang="en-US" sz="2000" dirty="0">
-                <a:solidFill>
-                  <a:srgbClr val="3333FF"/>
-                </a:solidFill>
-              </a:rPr>
-              <a:t>the lowest-numbered register </a:t>
-            </a:r>
-            <a:r>
-              <a:rPr lang="en-US" sz="2000" dirty="0"/>
-              <a:t>is stored to the lowest memory address, </a:t>
-            </a:r>
-            <a:r>
-              <a:rPr lang="en-US" sz="2000" i="1" dirty="0"/>
-              <a:t>i.e. </a:t>
-            </a:r>
-            <a:r>
-              <a:rPr lang="en-US" sz="2000" dirty="0">
-                <a:solidFill>
-                  <a:srgbClr val="3333FF"/>
-                </a:solidFill>
-              </a:rPr>
-              <a:t>is stored last</a:t>
-            </a:r>
-            <a:r>
-              <a:rPr lang="en-US" sz="2000" dirty="0"/>
-              <a:t>. </a:t>
-            </a:r>
-          </a:p>
-        </p:txBody>
-      </p:sp>
-      <p:sp>
-        <p:nvSpPr>
-          <p:cNvPr id="7" name="Horizontal Scroll 15">
-            <a:extLst>
-              <a:ext uri="{FF2B5EF4-FFF2-40B4-BE49-F238E27FC236}">
-                <a16:creationId xmlns:a16="http://schemas.microsoft.com/office/drawing/2014/main" id="{CA1DAB37-747D-183E-CAAD-AD690621F135}"/>
-              </a:ext>
-            </a:extLst>
-          </p:cNvPr>
-          <p:cNvSpPr/>
-          <p:nvPr/>
-        </p:nvSpPr>
-        <p:spPr>
-          <a:xfrm>
-            <a:off x="76200" y="-23210"/>
-            <a:ext cx="1265712" cy="762000"/>
-          </a:xfrm>
-          <a:prstGeom prst="horizontalScroll">
-            <a:avLst/>
-          </a:prstGeom>
-          <a:gradFill rotWithShape="1">
-            <a:gsLst>
-              <a:gs pos="0">
-                <a:srgbClr val="4F81BD">
-                  <a:tint val="50000"/>
-                  <a:satMod val="300000"/>
-                </a:srgbClr>
-              </a:gs>
-              <a:gs pos="35000">
-                <a:srgbClr val="4F81BD">
-                  <a:tint val="37000"/>
-                  <a:satMod val="300000"/>
-                </a:srgbClr>
-              </a:gs>
-              <a:gs pos="100000">
-                <a:srgbClr val="4F81BD">
-                  <a:tint val="15000"/>
-                  <a:satMod val="350000"/>
-                </a:srgbClr>
-              </a:gs>
-            </a:gsLst>
-            <a:lin ang="16200000" scaled="1"/>
-          </a:gradFill>
-          <a:ln w="9525" cap="flat" cmpd="sng" algn="ctr">
-            <a:solidFill>
-              <a:srgbClr val="4F81BD">
-                <a:shade val="95000"/>
-                <a:satMod val="105000"/>
-              </a:srgbClr>
-            </a:solidFill>
-            <a:prstDash val="solid"/>
-          </a:ln>
-          <a:effectLst>
-            <a:outerShdw blurRad="40000" dist="20000" dir="5400000" rotWithShape="0">
-              <a:srgbClr val="000000">
-                <a:alpha val="38000"/>
-              </a:srgbClr>
-            </a:outerShdw>
-          </a:effectLst>
-        </p:spPr>
-        <p:txBody>
-          <a:bodyPr rtlCol="0" anchor="ctr"/>
-          <a:lstStyle/>
-          <a:p>
-            <a:pPr marL="0" marR="0" lvl="0" indent="0" algn="ctr" defTabSz="457200" eaLnBrk="1" fontAlgn="auto" latinLnBrk="0" hangingPunct="1">
-              <a:lnSpc>
-                <a:spcPct val="100000"/>
-              </a:lnSpc>
-              <a:spcBef>
-                <a:spcPts val="0"/>
-              </a:spcBef>
-              <a:spcAft>
-                <a:spcPts val="0"/>
-              </a:spcAft>
-              <a:buClrTx/>
-              <a:buSzTx/>
-              <a:buFontTx/>
-              <a:buNone/>
-              <a:tabLst/>
-              <a:defRPr/>
-            </a:pPr>
-            <a:r>
-              <a:rPr kumimoji="0" lang="en-US" sz="2400" b="0" i="0" u="none" strike="noStrike" kern="0" cap="none" spc="0" normalizeH="0" baseline="0" noProof="0" dirty="0">
-                <a:ln>
-                  <a:noFill/>
-                </a:ln>
-                <a:solidFill>
-                  <a:prstClr val="black"/>
-                </a:solidFill>
-                <a:effectLst/>
-                <a:uLnTx/>
-                <a:uFillTx/>
-                <a:latin typeface="Calibri"/>
-                <a:ea typeface="+mn-ea"/>
-                <a:cs typeface="+mn-cs"/>
-              </a:rPr>
-              <a:t>Review</a:t>
-            </a:r>
-          </a:p>
-        </p:txBody>
-      </p:sp>
-    </p:spTree>
-    <p:extLst>
-      <p:ext uri="{BB962C8B-B14F-4D97-AF65-F5344CB8AC3E}">
-        <p14:creationId xmlns:p14="http://schemas.microsoft.com/office/powerpoint/2010/main" val="1120632604"/>
-      </p:ext>
-    </p:extLst>
-  </p:cSld>
-  <p:clrMapOvr>
-    <a:masterClrMapping/>
-  </p:clrMapOvr>
-</p:sld>
-</file>
-
-<file path=ppt/slides/slide20.xml><?xml version="1.0" encoding="utf-8"?>
+<file path=ppt/slides/slide21.xml><?xml version="1.0" encoding="utf-8"?>
 <p:sld xmlns:a="http://schemas.openxmlformats.org/drawingml/2006/main" xmlns:r="http://schemas.openxmlformats.org/officeDocument/2006/relationships" xmlns:p="http://schemas.openxmlformats.org/presentationml/2006/main">
   <p:cSld>
     <p:spTree>
@@ -15603,7 +16896,7 @@
             <a:fld id="{EA7C8D44-3667-46F6-9772-CC52308E2A7F}" type="slidenum">
               <a:rPr kumimoji="0" lang="en-US" smtClean="0"/>
               <a:pPr/>
-              <a:t>20</a:t>
+              <a:t>21</a:t>
             </a:fld>
             <a:endParaRPr kumimoji="0" lang="en-US" dirty="0"/>
           </a:p>
@@ -16238,7 +17531,7 @@
 </p:sld>
 </file>
 
-<file path=ppt/slides/slide21.xml><?xml version="1.0" encoding="utf-8"?>
+<file path=ppt/slides/slide22.xml><?xml version="1.0" encoding="utf-8"?>
 <p:sld xmlns:a="http://schemas.openxmlformats.org/drawingml/2006/main" xmlns:r="http://schemas.openxmlformats.org/officeDocument/2006/relationships" xmlns:p="http://schemas.openxmlformats.org/presentationml/2006/main">
   <p:cSld>
     <p:spTree>
@@ -16308,7 +17601,7 @@
             <a:fld id="{EA7C8D44-3667-46F6-9772-CC52308E2A7F}" type="slidenum">
               <a:rPr kumimoji="0" lang="en-US" smtClean="0"/>
               <a:pPr/>
-              <a:t>21</a:t>
+              <a:t>22</a:t>
             </a:fld>
             <a:endParaRPr kumimoji="0" lang="en-US" dirty="0"/>
           </a:p>
@@ -18071,7 +19364,7 @@
 </p:sld>
 </file>
 
-<file path=ppt/slides/slide22.xml><?xml version="1.0" encoding="utf-8"?>
+<file path=ppt/slides/slide23.xml><?xml version="1.0" encoding="utf-8"?>
 <p:sld xmlns:a="http://schemas.openxmlformats.org/drawingml/2006/main" xmlns:r="http://schemas.openxmlformats.org/officeDocument/2006/relationships" xmlns:p="http://schemas.openxmlformats.org/presentationml/2006/main">
   <p:cSld>
     <p:spTree>
@@ -18150,7 +19443,7 @@
             <a:fld id="{EA7C8D44-3667-46F6-9772-CC52308E2A7F}" type="slidenum">
               <a:rPr kumimoji="0" lang="en-US" smtClean="0"/>
               <a:pPr/>
-              <a:t>22</a:t>
+              <a:t>23</a:t>
             </a:fld>
             <a:endParaRPr kumimoji="0" lang="en-US" dirty="0"/>
           </a:p>
@@ -18939,7 +20232,7 @@
 </p:sld>
 </file>
 
-<file path=ppt/slides/slide23.xml><?xml version="1.0" encoding="utf-8"?>
+<file path=ppt/slides/slide24.xml><?xml version="1.0" encoding="utf-8"?>
 <p:sld xmlns:a="http://schemas.openxmlformats.org/drawingml/2006/main" xmlns:r="http://schemas.openxmlformats.org/officeDocument/2006/relationships" xmlns:p="http://schemas.openxmlformats.org/presentationml/2006/main">
   <p:cSld>
     <p:spTree>
@@ -19008,7 +20301,7 @@
             <a:fld id="{EA7C8D44-3667-46F6-9772-CC52308E2A7F}" type="slidenum">
               <a:rPr kumimoji="0" lang="en-US" smtClean="0"/>
               <a:pPr/>
-              <a:t>23</a:t>
+              <a:t>24</a:t>
             </a:fld>
             <a:endParaRPr kumimoji="0" lang="en-US" dirty="0"/>
           </a:p>
@@ -19302,7 +20595,7 @@
 </p:sld>
 </file>
 
-<file path=ppt/slides/slide24.xml><?xml version="1.0" encoding="utf-8"?>
+<file path=ppt/slides/slide25.xml><?xml version="1.0" encoding="utf-8"?>
 <p:sld xmlns:a="http://schemas.openxmlformats.org/drawingml/2006/main" xmlns:r="http://schemas.openxmlformats.org/officeDocument/2006/relationships" xmlns:p="http://schemas.openxmlformats.org/presentationml/2006/main">
   <p:cSld>
     <p:spTree>
@@ -19378,7 +20671,7 @@
             <a:fld id="{EA7C8D44-3667-46F6-9772-CC52308E2A7F}" type="slidenum">
               <a:rPr kumimoji="0" lang="en-US" smtClean="0"/>
               <a:pPr/>
-              <a:t>24</a:t>
+              <a:t>25</a:t>
             </a:fld>
             <a:endParaRPr kumimoji="0" lang="en-US" dirty="0"/>
           </a:p>
@@ -20234,7 +21527,7 @@
 </p:sld>
 </file>
 
-<file path=ppt/slides/slide25.xml><?xml version="1.0" encoding="utf-8"?>
+<file path=ppt/slides/slide26.xml><?xml version="1.0" encoding="utf-8"?>
 <p:sld xmlns:a="http://schemas.openxmlformats.org/drawingml/2006/main" xmlns:r="http://schemas.openxmlformats.org/officeDocument/2006/relationships" xmlns:p="http://schemas.openxmlformats.org/presentationml/2006/main">
   <p:cSld>
     <p:spTree>
@@ -20303,7 +21596,7 @@
             <a:fld id="{EA7C8D44-3667-46F6-9772-CC52308E2A7F}" type="slidenum">
               <a:rPr kumimoji="0" lang="en-US" smtClean="0"/>
               <a:pPr/>
-              <a:t>25</a:t>
+              <a:t>26</a:t>
             </a:fld>
             <a:endParaRPr kumimoji="0" lang="en-US" dirty="0"/>
           </a:p>
@@ -21032,7 +22325,7 @@
 </p:sld>
 </file>
 
-<file path=ppt/slides/slide26.xml><?xml version="1.0" encoding="utf-8"?>
+<file path=ppt/slides/slide27.xml><?xml version="1.0" encoding="utf-8"?>
 <p:sld xmlns:a="http://schemas.openxmlformats.org/drawingml/2006/main" xmlns:r="http://schemas.openxmlformats.org/officeDocument/2006/relationships" xmlns:p="http://schemas.openxmlformats.org/presentationml/2006/main">
   <p:cSld>
     <p:spTree>
@@ -21101,7 +22394,7 @@
             <a:fld id="{EA7C8D44-3667-46F6-9772-CC52308E2A7F}" type="slidenum">
               <a:rPr kumimoji="0" lang="en-US" smtClean="0"/>
               <a:pPr/>
-              <a:t>26</a:t>
+              <a:t>27</a:t>
             </a:fld>
             <a:endParaRPr kumimoji="0" lang="en-US" dirty="0"/>
           </a:p>
@@ -21786,7 +23079,7 @@
 </p:sld>
 </file>
 
-<file path=ppt/slides/slide27.xml><?xml version="1.0" encoding="utf-8"?>
+<file path=ppt/slides/slide28.xml><?xml version="1.0" encoding="utf-8"?>
 <p:sld xmlns:a="http://schemas.openxmlformats.org/drawingml/2006/main" xmlns:r="http://schemas.openxmlformats.org/officeDocument/2006/relationships" xmlns:p="http://schemas.openxmlformats.org/presentationml/2006/main">
   <p:cSld>
     <p:spTree>
@@ -21861,7 +23154,7 @@
             <a:fld id="{EA7C8D44-3667-46F6-9772-CC52308E2A7F}" type="slidenum">
               <a:rPr kumimoji="0" lang="en-US" smtClean="0"/>
               <a:pPr/>
-              <a:t>27</a:t>
+              <a:t>28</a:t>
             </a:fld>
             <a:endParaRPr kumimoji="0" lang="en-US" dirty="0"/>
           </a:p>
@@ -22679,7 +23972,7 @@
 </p:sld>
 </file>
 
-<file path=ppt/slides/slide28.xml><?xml version="1.0" encoding="utf-8"?>
+<file path=ppt/slides/slide29.xml><?xml version="1.0" encoding="utf-8"?>
 <p:sld xmlns:a="http://schemas.openxmlformats.org/drawingml/2006/main" xmlns:r="http://schemas.openxmlformats.org/officeDocument/2006/relationships" xmlns:p="http://schemas.openxmlformats.org/presentationml/2006/main">
   <p:cSld>
     <p:spTree>
@@ -22750,7 +24043,7 @@
             <a:fld id="{EA7C8D44-3667-46F6-9772-CC52308E2A7F}" type="slidenum">
               <a:rPr kumimoji="0" lang="en-US" smtClean="0"/>
               <a:pPr/>
-              <a:t>28</a:t>
+              <a:t>29</a:t>
             </a:fld>
             <a:endParaRPr kumimoji="0" lang="en-US" dirty="0"/>
           </a:p>
@@ -23338,1040 +24631,6 @@
     <p:extLst>
       <p:ext uri="{BB962C8B-B14F-4D97-AF65-F5344CB8AC3E}">
         <p14:creationId xmlns:p14="http://schemas.microsoft.com/office/powerpoint/2010/main" val="2017314449"/>
-      </p:ext>
-    </p:extLst>
-  </p:cSld>
-  <p:clrMapOvr>
-    <a:masterClrMapping/>
-  </p:clrMapOvr>
-</p:sld>
-</file>
-
-<file path=ppt/slides/slide29.xml><?xml version="1.0" encoding="utf-8"?>
-<p:sld xmlns:a="http://schemas.openxmlformats.org/drawingml/2006/main" xmlns:r="http://schemas.openxmlformats.org/officeDocument/2006/relationships" xmlns:p="http://schemas.openxmlformats.org/presentationml/2006/main">
-  <p:cSld>
-    <p:spTree>
-      <p:nvGrpSpPr>
-        <p:cNvPr id="1" name=""/>
-        <p:cNvGrpSpPr/>
-        <p:nvPr/>
-      </p:nvGrpSpPr>
-      <p:grpSpPr>
-        <a:xfrm>
-          <a:off x="0" y="0"/>
-          <a:ext cx="0" cy="0"/>
-          <a:chOff x="0" y="0"/>
-          <a:chExt cx="0" cy="0"/>
-        </a:xfrm>
-      </p:grpSpPr>
-      <p:sp>
-        <p:nvSpPr>
-          <p:cNvPr id="2" name="Title 1">
-            <a:extLst>
-              <a:ext uri="{FF2B5EF4-FFF2-40B4-BE49-F238E27FC236}">
-                <a16:creationId xmlns:a16="http://schemas.microsoft.com/office/drawing/2014/main" id="{27B41483-7081-C44C-81EF-D92F00104765}"/>
-              </a:ext>
-            </a:extLst>
-          </p:cNvPr>
-          <p:cNvSpPr>
-            <a:spLocks noGrp="1"/>
-          </p:cNvSpPr>
-          <p:nvPr>
-            <p:ph type="title"/>
-          </p:nvPr>
-        </p:nvSpPr>
-        <p:spPr/>
-        <p:txBody>
-          <a:bodyPr>
-            <a:normAutofit/>
-          </a:bodyPr>
-          <a:lstStyle/>
-          <a:p>
-            <a:r>
-              <a:rPr lang="en-US" dirty="0"/>
-              <a:t>What is wrong? ANS</a:t>
-            </a:r>
-          </a:p>
-        </p:txBody>
-      </p:sp>
-      <p:sp>
-        <p:nvSpPr>
-          <p:cNvPr id="3" name="Slide Number Placeholder 2">
-            <a:extLst>
-              <a:ext uri="{FF2B5EF4-FFF2-40B4-BE49-F238E27FC236}">
-                <a16:creationId xmlns:a16="http://schemas.microsoft.com/office/drawing/2014/main" id="{3D15817A-DD66-D447-B2D9-5646440481EB}"/>
-              </a:ext>
-            </a:extLst>
-          </p:cNvPr>
-          <p:cNvSpPr>
-            <a:spLocks noGrp="1"/>
-          </p:cNvSpPr>
-          <p:nvPr>
-            <p:ph type="sldNum" sz="quarter" idx="12"/>
-          </p:nvPr>
-        </p:nvSpPr>
-        <p:spPr/>
-        <p:txBody>
-          <a:bodyPr/>
-          <a:lstStyle/>
-          <a:p>
-            <a:fld id="{EA7C8D44-3667-46F6-9772-CC52308E2A7F}" type="slidenum">
-              <a:rPr kumimoji="0" lang="en-US" smtClean="0"/>
-              <a:pPr/>
-              <a:t>29</a:t>
-            </a:fld>
-            <a:endParaRPr kumimoji="0" lang="en-US" dirty="0"/>
-          </a:p>
-        </p:txBody>
-      </p:sp>
-      <p:sp>
-        <p:nvSpPr>
-          <p:cNvPr id="5" name="TextBox 4">
-            <a:extLst>
-              <a:ext uri="{FF2B5EF4-FFF2-40B4-BE49-F238E27FC236}">
-                <a16:creationId xmlns:a16="http://schemas.microsoft.com/office/drawing/2014/main" id="{67609315-49B9-8548-BA54-379B42B31ADB}"/>
-              </a:ext>
-            </a:extLst>
-          </p:cNvPr>
-          <p:cNvSpPr txBox="1"/>
-          <p:nvPr/>
-        </p:nvSpPr>
-        <p:spPr>
-          <a:xfrm>
-            <a:off x="457200" y="2006188"/>
-            <a:ext cx="3752950" cy="1384995"/>
-          </a:xfrm>
-          <a:prstGeom prst="rect">
-            <a:avLst/>
-          </a:prstGeom>
-        </p:spPr>
-        <p:style>
-          <a:lnRef idx="2">
-            <a:schemeClr val="accent1"/>
-          </a:lnRef>
-          <a:fillRef idx="1">
-            <a:schemeClr val="lt1"/>
-          </a:fillRef>
-          <a:effectRef idx="0">
-            <a:schemeClr val="accent1"/>
-          </a:effectRef>
-          <a:fontRef idx="minor">
-            <a:schemeClr val="dk1"/>
-          </a:fontRef>
-        </p:style>
-        <p:txBody>
-          <a:bodyPr wrap="none" rtlCol="0">
-            <a:spAutoFit/>
-          </a:bodyPr>
-          <a:lstStyle/>
-          <a:p>
-            <a:r>
-              <a:rPr lang="en-US" sz="1200" dirty="0">
-                <a:latin typeface="Consolas" panose="020B0609020204030204" pitchFamily="49" charset="0"/>
-                <a:cs typeface="Consolas" panose="020B0609020204030204" pitchFamily="49" charset="0"/>
-              </a:rPr>
-              <a:t>int16_t </a:t>
-            </a:r>
-            <a:r>
-              <a:rPr lang="en-US" sz="1200" b="1" dirty="0" err="1">
-                <a:solidFill>
-                  <a:schemeClr val="accent1"/>
-                </a:solidFill>
-                <a:latin typeface="Consolas" panose="020B0609020204030204" pitchFamily="49" charset="0"/>
-                <a:cs typeface="Consolas" panose="020B0609020204030204" pitchFamily="49" charset="0"/>
-              </a:rPr>
-              <a:t>sum_of_array</a:t>
-            </a:r>
-            <a:r>
-              <a:rPr lang="en-US" sz="1200" dirty="0">
-                <a:latin typeface="Consolas" panose="020B0609020204030204" pitchFamily="49" charset="0"/>
-                <a:cs typeface="Consolas" panose="020B0609020204030204" pitchFamily="49" charset="0"/>
-              </a:rPr>
-              <a:t>(int16_t *</a:t>
-            </a:r>
-            <a:r>
-              <a:rPr lang="en-US" sz="1200" dirty="0" err="1">
-                <a:latin typeface="Consolas" panose="020B0609020204030204" pitchFamily="49" charset="0"/>
-                <a:cs typeface="Consolas" panose="020B0609020204030204" pitchFamily="49" charset="0"/>
-              </a:rPr>
-              <a:t>pArray</a:t>
-            </a:r>
-            <a:r>
-              <a:rPr lang="en-US" sz="1200" dirty="0">
-                <a:latin typeface="Consolas" panose="020B0609020204030204" pitchFamily="49" charset="0"/>
-                <a:cs typeface="Consolas" panose="020B0609020204030204" pitchFamily="49" charset="0"/>
-              </a:rPr>
-              <a:t>){</a:t>
-            </a:r>
-          </a:p>
-          <a:p>
-            <a:r>
-              <a:rPr lang="en-US" sz="1200" dirty="0">
-                <a:latin typeface="Consolas" panose="020B0609020204030204" pitchFamily="49" charset="0"/>
-                <a:cs typeface="Consolas" panose="020B0609020204030204" pitchFamily="49" charset="0"/>
-              </a:rPr>
-              <a:t>    uint32_t </a:t>
-            </a:r>
-            <a:r>
-              <a:rPr lang="en-US" sz="1200" dirty="0" err="1">
-                <a:latin typeface="Consolas" panose="020B0609020204030204" pitchFamily="49" charset="0"/>
-                <a:cs typeface="Consolas" panose="020B0609020204030204" pitchFamily="49" charset="0"/>
-              </a:rPr>
-              <a:t>i</a:t>
-            </a:r>
-            <a:r>
-              <a:rPr lang="en-US" sz="1200" dirty="0">
-                <a:latin typeface="Consolas" panose="020B0609020204030204" pitchFamily="49" charset="0"/>
-                <a:cs typeface="Consolas" panose="020B0609020204030204" pitchFamily="49" charset="0"/>
-              </a:rPr>
-              <a:t>;</a:t>
-            </a:r>
-          </a:p>
-          <a:p>
-            <a:r>
-              <a:rPr lang="en-US" sz="1200" dirty="0">
-                <a:latin typeface="Consolas" panose="020B0609020204030204" pitchFamily="49" charset="0"/>
-                <a:cs typeface="Consolas" panose="020B0609020204030204" pitchFamily="49" charset="0"/>
-              </a:rPr>
-              <a:t>    int32_t sum = 0;</a:t>
-            </a:r>
-          </a:p>
-          <a:p>
-            <a:r>
-              <a:rPr lang="en-US" sz="1200" dirty="0">
-                <a:latin typeface="Consolas" panose="020B0609020204030204" pitchFamily="49" charset="0"/>
-                <a:cs typeface="Consolas" panose="020B0609020204030204" pitchFamily="49" charset="0"/>
-              </a:rPr>
-              <a:t>    for(</a:t>
-            </a:r>
-            <a:r>
-              <a:rPr lang="en-US" sz="1200" dirty="0" err="1">
-                <a:latin typeface="Consolas" panose="020B0609020204030204" pitchFamily="49" charset="0"/>
-                <a:cs typeface="Consolas" panose="020B0609020204030204" pitchFamily="49" charset="0"/>
-              </a:rPr>
-              <a:t>i</a:t>
-            </a:r>
-            <a:r>
-              <a:rPr lang="en-US" sz="1200" dirty="0">
-                <a:latin typeface="Consolas" panose="020B0609020204030204" pitchFamily="49" charset="0"/>
-                <a:cs typeface="Consolas" panose="020B0609020204030204" pitchFamily="49" charset="0"/>
-              </a:rPr>
-              <a:t>=0; </a:t>
-            </a:r>
-            <a:r>
-              <a:rPr lang="en-US" sz="1200" dirty="0" err="1">
-                <a:latin typeface="Consolas" panose="020B0609020204030204" pitchFamily="49" charset="0"/>
-                <a:cs typeface="Consolas" panose="020B0609020204030204" pitchFamily="49" charset="0"/>
-              </a:rPr>
-              <a:t>i</a:t>
-            </a:r>
-            <a:r>
-              <a:rPr lang="en-US" sz="1200" dirty="0">
-                <a:latin typeface="Consolas" panose="020B0609020204030204" pitchFamily="49" charset="0"/>
-                <a:cs typeface="Consolas" panose="020B0609020204030204" pitchFamily="49" charset="0"/>
-              </a:rPr>
-              <a:t>&lt;64; </a:t>
-            </a:r>
-            <a:r>
-              <a:rPr lang="en-US" sz="1200" dirty="0" err="1">
-                <a:latin typeface="Consolas" panose="020B0609020204030204" pitchFamily="49" charset="0"/>
-                <a:cs typeface="Consolas" panose="020B0609020204030204" pitchFamily="49" charset="0"/>
-              </a:rPr>
-              <a:t>i</a:t>
-            </a:r>
-            <a:r>
-              <a:rPr lang="en-US" sz="1200" dirty="0">
-                <a:latin typeface="Consolas" panose="020B0609020204030204" pitchFamily="49" charset="0"/>
-                <a:cs typeface="Consolas" panose="020B0609020204030204" pitchFamily="49" charset="0"/>
-              </a:rPr>
-              <a:t>++) </a:t>
-            </a:r>
-            <a:r>
-              <a:rPr lang="en-US" sz="1200" dirty="0">
-                <a:solidFill>
-                  <a:schemeClr val="bg1">
-                    <a:lumMod val="50000"/>
-                  </a:schemeClr>
-                </a:solidFill>
-                <a:latin typeface="Consolas" panose="020B0609020204030204" pitchFamily="49" charset="0"/>
-                <a:cs typeface="Consolas" panose="020B0609020204030204" pitchFamily="49" charset="0"/>
-              </a:rPr>
-              <a:t>// array size = 64</a:t>
-            </a:r>
-          </a:p>
-          <a:p>
-            <a:r>
-              <a:rPr lang="en-US" sz="1200" dirty="0">
-                <a:latin typeface="Consolas" panose="020B0609020204030204" pitchFamily="49" charset="0"/>
-                <a:cs typeface="Consolas" panose="020B0609020204030204" pitchFamily="49" charset="0"/>
-              </a:rPr>
-              <a:t>        sum += </a:t>
-            </a:r>
-            <a:r>
-              <a:rPr lang="en-US" sz="1200" dirty="0" err="1">
-                <a:latin typeface="Consolas" panose="020B0609020204030204" pitchFamily="49" charset="0"/>
-                <a:cs typeface="Consolas" panose="020B0609020204030204" pitchFamily="49" charset="0"/>
-              </a:rPr>
-              <a:t>pArray</a:t>
-            </a:r>
-            <a:r>
-              <a:rPr lang="en-US" sz="1200" dirty="0">
-                <a:latin typeface="Consolas" panose="020B0609020204030204" pitchFamily="49" charset="0"/>
-                <a:cs typeface="Consolas" panose="020B0609020204030204" pitchFamily="49" charset="0"/>
-              </a:rPr>
-              <a:t>[</a:t>
-            </a:r>
-            <a:r>
-              <a:rPr lang="en-US" sz="1200" dirty="0" err="1">
-                <a:latin typeface="Consolas" panose="020B0609020204030204" pitchFamily="49" charset="0"/>
-                <a:cs typeface="Consolas" panose="020B0609020204030204" pitchFamily="49" charset="0"/>
-              </a:rPr>
-              <a:t>i</a:t>
-            </a:r>
-            <a:r>
-              <a:rPr lang="en-US" sz="1200" dirty="0">
-                <a:latin typeface="Consolas" panose="020B0609020204030204" pitchFamily="49" charset="0"/>
-                <a:cs typeface="Consolas" panose="020B0609020204030204" pitchFamily="49" charset="0"/>
-              </a:rPr>
-              <a:t>];</a:t>
-            </a:r>
-          </a:p>
-          <a:p>
-            <a:r>
-              <a:rPr lang="en-US" sz="1200" dirty="0">
-                <a:latin typeface="Consolas" panose="020B0609020204030204" pitchFamily="49" charset="0"/>
-                <a:cs typeface="Consolas" panose="020B0609020204030204" pitchFamily="49" charset="0"/>
-              </a:rPr>
-              <a:t>    return (int16_t) sum;</a:t>
-            </a:r>
-          </a:p>
-          <a:p>
-            <a:r>
-              <a:rPr lang="en-US" sz="1200" dirty="0">
-                <a:latin typeface="Consolas" panose="020B0609020204030204" pitchFamily="49" charset="0"/>
-                <a:cs typeface="Consolas" panose="020B0609020204030204" pitchFamily="49" charset="0"/>
-              </a:rPr>
-              <a:t>}</a:t>
-            </a:r>
-          </a:p>
-        </p:txBody>
-      </p:sp>
-      <p:sp>
-        <p:nvSpPr>
-          <p:cNvPr id="6" name="TextBox 5">
-            <a:extLst>
-              <a:ext uri="{FF2B5EF4-FFF2-40B4-BE49-F238E27FC236}">
-                <a16:creationId xmlns:a16="http://schemas.microsoft.com/office/drawing/2014/main" id="{4F4F6D7F-4E8E-4748-B8BF-4AEBF2493640}"/>
-              </a:ext>
-            </a:extLst>
-          </p:cNvPr>
-          <p:cNvSpPr txBox="1"/>
-          <p:nvPr/>
-        </p:nvSpPr>
-        <p:spPr>
-          <a:xfrm>
-            <a:off x="4340418" y="2006187"/>
-            <a:ext cx="4432624" cy="2492990"/>
-          </a:xfrm>
-          <a:prstGeom prst="rect">
-            <a:avLst/>
-          </a:prstGeom>
-        </p:spPr>
-        <p:style>
-          <a:lnRef idx="2">
-            <a:schemeClr val="accent1"/>
-          </a:lnRef>
-          <a:fillRef idx="1">
-            <a:schemeClr val="lt1"/>
-          </a:fillRef>
-          <a:effectRef idx="0">
-            <a:schemeClr val="accent1"/>
-          </a:effectRef>
-          <a:fontRef idx="minor">
-            <a:schemeClr val="dk1"/>
-          </a:fontRef>
-        </p:style>
-        <p:txBody>
-          <a:bodyPr wrap="none" rtlCol="0">
-            <a:spAutoFit/>
-          </a:bodyPr>
-          <a:lstStyle/>
-          <a:p>
-            <a:r>
-              <a:rPr lang="en-US" sz="1200" b="1" dirty="0" err="1">
-                <a:solidFill>
-                  <a:schemeClr val="accent1"/>
-                </a:solidFill>
-                <a:latin typeface="Consolas" panose="020B0609020204030204" pitchFamily="49" charset="0"/>
-                <a:cs typeface="Consolas" panose="020B0609020204030204" pitchFamily="49" charset="0"/>
-              </a:rPr>
-              <a:t>sum_of_array</a:t>
-            </a:r>
-            <a:r>
-              <a:rPr lang="en-US" sz="1200" b="1" dirty="0">
-                <a:solidFill>
-                  <a:schemeClr val="accent1"/>
-                </a:solidFill>
-                <a:latin typeface="Consolas" panose="020B0609020204030204" pitchFamily="49" charset="0"/>
-                <a:cs typeface="Consolas" panose="020B0609020204030204" pitchFamily="49" charset="0"/>
-              </a:rPr>
-              <a:t> </a:t>
-            </a:r>
-            <a:r>
-              <a:rPr lang="en-US" sz="1200" dirty="0">
-                <a:latin typeface="Consolas" panose="020B0609020204030204" pitchFamily="49" charset="0"/>
-                <a:cs typeface="Consolas" panose="020B0609020204030204" pitchFamily="49" charset="0"/>
-              </a:rPr>
-              <a:t>PROC</a:t>
-            </a:r>
-          </a:p>
-          <a:p>
-            <a:r>
-              <a:rPr lang="en-US" sz="1200" dirty="0">
-                <a:latin typeface="Consolas" panose="020B0609020204030204" pitchFamily="49" charset="0"/>
-                <a:cs typeface="Consolas" panose="020B0609020204030204" pitchFamily="49" charset="0"/>
-              </a:rPr>
-              <a:t>      MOV   r2, #0  </a:t>
-            </a:r>
-            <a:r>
-              <a:rPr lang="en-US" sz="1200" dirty="0">
-                <a:solidFill>
-                  <a:schemeClr val="bg1">
-                    <a:lumMod val="50000"/>
-                  </a:schemeClr>
-                </a:solidFill>
-                <a:latin typeface="Consolas" panose="020B0609020204030204" pitchFamily="49" charset="0"/>
-                <a:cs typeface="Consolas" panose="020B0609020204030204" pitchFamily="49" charset="0"/>
-              </a:rPr>
-              <a:t>; loop index</a:t>
-            </a:r>
-          </a:p>
-          <a:p>
-            <a:r>
-              <a:rPr lang="en-US" sz="1200" dirty="0">
-                <a:latin typeface="Consolas" panose="020B0609020204030204" pitchFamily="49" charset="0"/>
-                <a:cs typeface="Consolas" panose="020B0609020204030204" pitchFamily="49" charset="0"/>
-              </a:rPr>
-              <a:t>      MOV   r3, #0  </a:t>
-            </a:r>
-            <a:r>
-              <a:rPr lang="en-US" sz="1200" dirty="0">
-                <a:solidFill>
-                  <a:schemeClr val="bg1">
-                    <a:lumMod val="50000"/>
-                  </a:schemeClr>
-                </a:solidFill>
-                <a:latin typeface="Consolas" panose="020B0609020204030204" pitchFamily="49" charset="0"/>
-                <a:cs typeface="Consolas" panose="020B0609020204030204" pitchFamily="49" charset="0"/>
-              </a:rPr>
-              <a:t>; sum </a:t>
-            </a:r>
-          </a:p>
-          <a:p>
-            <a:r>
-              <a:rPr lang="en-US" sz="1200" dirty="0">
-                <a:latin typeface="Consolas" panose="020B0609020204030204" pitchFamily="49" charset="0"/>
-                <a:cs typeface="Consolas" panose="020B0609020204030204" pitchFamily="49" charset="0"/>
-              </a:rPr>
-              <a:t>      B     check</a:t>
-            </a:r>
-          </a:p>
-          <a:p>
-            <a:r>
-              <a:rPr lang="en-US" sz="1200" dirty="0">
-                <a:latin typeface="Consolas" panose="020B0609020204030204" pitchFamily="49" charset="0"/>
-                <a:cs typeface="Consolas" panose="020B0609020204030204" pitchFamily="49" charset="0"/>
-              </a:rPr>
-              <a:t>loop  LDRSH r1, [r0], #2 </a:t>
-            </a:r>
-          </a:p>
-          <a:p>
-            <a:r>
-              <a:rPr lang="en-US" sz="1200" dirty="0">
-                <a:latin typeface="Consolas" panose="020B0609020204030204" pitchFamily="49" charset="0"/>
-                <a:cs typeface="Consolas" panose="020B0609020204030204" pitchFamily="49" charset="0"/>
-              </a:rPr>
-              <a:t>      ADD   r3, r3, r1  </a:t>
-            </a:r>
-            <a:r>
-              <a:rPr lang="en-US" sz="1200" dirty="0">
-                <a:solidFill>
-                  <a:schemeClr val="bg1">
-                    <a:lumMod val="50000"/>
-                  </a:schemeClr>
-                </a:solidFill>
-                <a:latin typeface="Consolas" panose="020B0609020204030204" pitchFamily="49" charset="0"/>
-                <a:cs typeface="Consolas" panose="020B0609020204030204" pitchFamily="49" charset="0"/>
-              </a:rPr>
-              <a:t>; sum += </a:t>
-            </a:r>
-            <a:r>
-              <a:rPr lang="en-US" sz="1200" dirty="0" err="1">
-                <a:solidFill>
-                  <a:schemeClr val="bg1">
-                    <a:lumMod val="50000"/>
-                  </a:schemeClr>
-                </a:solidFill>
-                <a:latin typeface="Consolas" panose="020B0609020204030204" pitchFamily="49" charset="0"/>
-                <a:cs typeface="Consolas" panose="020B0609020204030204" pitchFamily="49" charset="0"/>
-              </a:rPr>
-              <a:t>pArray</a:t>
-            </a:r>
-            <a:r>
-              <a:rPr lang="en-US" sz="1200" dirty="0">
-                <a:solidFill>
-                  <a:schemeClr val="bg1">
-                    <a:lumMod val="50000"/>
-                  </a:schemeClr>
-                </a:solidFill>
-                <a:latin typeface="Consolas" panose="020B0609020204030204" pitchFamily="49" charset="0"/>
-                <a:cs typeface="Consolas" panose="020B0609020204030204" pitchFamily="49" charset="0"/>
-              </a:rPr>
-              <a:t>[</a:t>
-            </a:r>
-            <a:r>
-              <a:rPr lang="en-US" sz="1200" dirty="0" err="1">
-                <a:solidFill>
-                  <a:schemeClr val="bg1">
-                    <a:lumMod val="50000"/>
-                  </a:schemeClr>
-                </a:solidFill>
-                <a:latin typeface="Consolas" panose="020B0609020204030204" pitchFamily="49" charset="0"/>
-                <a:cs typeface="Consolas" panose="020B0609020204030204" pitchFamily="49" charset="0"/>
-              </a:rPr>
-              <a:t>i</a:t>
-            </a:r>
-            <a:r>
-              <a:rPr lang="en-US" sz="1200" dirty="0">
-                <a:solidFill>
-                  <a:schemeClr val="bg1">
-                    <a:lumMod val="50000"/>
-                  </a:schemeClr>
-                </a:solidFill>
-                <a:latin typeface="Consolas" panose="020B0609020204030204" pitchFamily="49" charset="0"/>
-                <a:cs typeface="Consolas" panose="020B0609020204030204" pitchFamily="49" charset="0"/>
-              </a:rPr>
-              <a:t>]</a:t>
-            </a:r>
-          </a:p>
-          <a:p>
-            <a:r>
-              <a:rPr lang="en-US" sz="1200" dirty="0">
-                <a:latin typeface="Consolas" panose="020B0609020204030204" pitchFamily="49" charset="0"/>
-                <a:cs typeface="Consolas" panose="020B0609020204030204" pitchFamily="49" charset="0"/>
-              </a:rPr>
-              <a:t>      ADD   r2, r2, #1  </a:t>
-            </a:r>
-            <a:r>
-              <a:rPr lang="en-US" sz="1200" dirty="0">
-                <a:solidFill>
-                  <a:schemeClr val="bg1">
-                    <a:lumMod val="50000"/>
-                  </a:schemeClr>
-                </a:solidFill>
-                <a:latin typeface="Consolas" panose="020B0609020204030204" pitchFamily="49" charset="0"/>
-                <a:cs typeface="Consolas" panose="020B0609020204030204" pitchFamily="49" charset="0"/>
-              </a:rPr>
-              <a:t>; </a:t>
-            </a:r>
-            <a:r>
-              <a:rPr lang="en-US" sz="1200" dirty="0" err="1">
-                <a:solidFill>
-                  <a:schemeClr val="bg1">
-                    <a:lumMod val="50000"/>
-                  </a:schemeClr>
-                </a:solidFill>
-                <a:latin typeface="Consolas" panose="020B0609020204030204" pitchFamily="49" charset="0"/>
-                <a:cs typeface="Consolas" panose="020B0609020204030204" pitchFamily="49" charset="0"/>
-              </a:rPr>
-              <a:t>i</a:t>
-            </a:r>
-            <a:r>
-              <a:rPr lang="en-US" sz="1200" dirty="0">
-                <a:solidFill>
-                  <a:schemeClr val="bg1">
-                    <a:lumMod val="50000"/>
-                  </a:schemeClr>
-                </a:solidFill>
-                <a:latin typeface="Consolas" panose="020B0609020204030204" pitchFamily="49" charset="0"/>
-                <a:cs typeface="Consolas" panose="020B0609020204030204" pitchFamily="49" charset="0"/>
-              </a:rPr>
-              <a:t>++</a:t>
-            </a:r>
-          </a:p>
-          <a:p>
-            <a:r>
-              <a:rPr lang="en-US" sz="1200" dirty="0">
-                <a:latin typeface="Consolas" panose="020B0609020204030204" pitchFamily="49" charset="0"/>
-                <a:cs typeface="Consolas" panose="020B0609020204030204" pitchFamily="49" charset="0"/>
-              </a:rPr>
-              <a:t>check CMP   r2, #64</a:t>
-            </a:r>
-          </a:p>
-          <a:p>
-            <a:r>
-              <a:rPr lang="en-US" sz="1200" dirty="0">
-                <a:latin typeface="Consolas" panose="020B0609020204030204" pitchFamily="49" charset="0"/>
-                <a:cs typeface="Consolas" panose="020B0609020204030204" pitchFamily="49" charset="0"/>
-              </a:rPr>
-              <a:t>      BLO   loop        </a:t>
-            </a:r>
-            <a:r>
-              <a:rPr lang="en-US" sz="1200" dirty="0">
-                <a:solidFill>
-                  <a:schemeClr val="bg1">
-                    <a:lumMod val="50000"/>
-                  </a:schemeClr>
-                </a:solidFill>
-                <a:latin typeface="Consolas" panose="020B0609020204030204" pitchFamily="49" charset="0"/>
-                <a:cs typeface="Consolas" panose="020B0609020204030204" pitchFamily="49" charset="0"/>
-              </a:rPr>
-              <a:t>; branch if unsigned </a:t>
-            </a:r>
-            <a:r>
-              <a:rPr lang="en-US" sz="1200" dirty="0" err="1">
-                <a:solidFill>
-                  <a:schemeClr val="bg1">
-                    <a:lumMod val="50000"/>
-                  </a:schemeClr>
-                </a:solidFill>
-                <a:latin typeface="Consolas" panose="020B0609020204030204" pitchFamily="49" charset="0"/>
-                <a:cs typeface="Consolas" panose="020B0609020204030204" pitchFamily="49" charset="0"/>
-              </a:rPr>
-              <a:t>LOwer</a:t>
-            </a:r>
-            <a:endParaRPr lang="en-US" sz="1200" dirty="0">
-              <a:solidFill>
-                <a:schemeClr val="bg1">
-                  <a:lumMod val="50000"/>
-                </a:schemeClr>
-              </a:solidFill>
-              <a:latin typeface="Consolas" panose="020B0609020204030204" pitchFamily="49" charset="0"/>
-              <a:cs typeface="Consolas" panose="020B0609020204030204" pitchFamily="49" charset="0"/>
-            </a:endParaRPr>
-          </a:p>
-          <a:p>
-            <a:r>
-              <a:rPr lang="en-US" sz="1200" dirty="0">
-                <a:solidFill>
-                  <a:srgbClr val="C00000"/>
-                </a:solidFill>
-                <a:latin typeface="Consolas" panose="020B0609020204030204" pitchFamily="49" charset="0"/>
-                <a:cs typeface="Consolas" panose="020B0609020204030204" pitchFamily="49" charset="0"/>
-              </a:rPr>
-              <a:t>      </a:t>
-            </a:r>
-            <a:r>
-              <a:rPr lang="en-US" sz="1200" b="1" dirty="0">
-                <a:solidFill>
-                  <a:srgbClr val="C00000"/>
-                </a:solidFill>
-                <a:latin typeface="Consolas" panose="020B0609020204030204" pitchFamily="49" charset="0"/>
-                <a:cs typeface="Consolas" panose="020B0609020204030204" pitchFamily="49" charset="0"/>
-              </a:rPr>
-              <a:t>MOV   r0, r3, LSL #16</a:t>
-            </a:r>
-          </a:p>
-          <a:p>
-            <a:r>
-              <a:rPr lang="en-US" sz="1200" dirty="0">
-                <a:solidFill>
-                  <a:srgbClr val="C00000"/>
-                </a:solidFill>
-                <a:latin typeface="Consolas" panose="020B0609020204030204" pitchFamily="49" charset="0"/>
-                <a:cs typeface="Consolas" panose="020B0609020204030204" pitchFamily="49" charset="0"/>
-              </a:rPr>
-              <a:t>      </a:t>
-            </a:r>
-            <a:r>
-              <a:rPr lang="en-US" sz="1200" b="1" dirty="0">
-                <a:solidFill>
-                  <a:srgbClr val="C00000"/>
-                </a:solidFill>
-                <a:latin typeface="Consolas" panose="020B0609020204030204" pitchFamily="49" charset="0"/>
-                <a:cs typeface="Consolas" panose="020B0609020204030204" pitchFamily="49" charset="0"/>
-              </a:rPr>
-              <a:t>MOV   r0, r0, ASR #16  </a:t>
-            </a:r>
-            <a:r>
-              <a:rPr lang="en-US" sz="1200" dirty="0">
-                <a:solidFill>
-                  <a:srgbClr val="C00000"/>
-                </a:solidFill>
-                <a:latin typeface="Consolas" panose="020B0609020204030204" pitchFamily="49" charset="0"/>
-                <a:cs typeface="Consolas" panose="020B0609020204030204" pitchFamily="49" charset="0"/>
-              </a:rPr>
-              <a:t>; r0 = (short) r3 </a:t>
-            </a:r>
-          </a:p>
-          <a:p>
-            <a:r>
-              <a:rPr lang="en-US" sz="1200" dirty="0">
-                <a:latin typeface="Consolas" panose="020B0609020204030204" pitchFamily="49" charset="0"/>
-                <a:cs typeface="Consolas" panose="020B0609020204030204" pitchFamily="49" charset="0"/>
-              </a:rPr>
-              <a:t>      BX    </a:t>
-            </a:r>
-            <a:r>
-              <a:rPr lang="en-US" sz="1200" dirty="0" err="1">
-                <a:latin typeface="Consolas" panose="020B0609020204030204" pitchFamily="49" charset="0"/>
-                <a:cs typeface="Consolas" panose="020B0609020204030204" pitchFamily="49" charset="0"/>
-              </a:rPr>
-              <a:t>lr</a:t>
-            </a:r>
-            <a:endParaRPr lang="en-US" sz="1200" dirty="0">
-              <a:latin typeface="Consolas" panose="020B0609020204030204" pitchFamily="49" charset="0"/>
-              <a:cs typeface="Consolas" panose="020B0609020204030204" pitchFamily="49" charset="0"/>
-            </a:endParaRPr>
-          </a:p>
-          <a:p>
-            <a:r>
-              <a:rPr lang="en-US" sz="1200" dirty="0">
-                <a:latin typeface="Consolas" panose="020B0609020204030204" pitchFamily="49" charset="0"/>
-                <a:cs typeface="Consolas" panose="020B0609020204030204" pitchFamily="49" charset="0"/>
-              </a:rPr>
-              <a:t>      ENDP</a:t>
-            </a:r>
-          </a:p>
-        </p:txBody>
-      </p:sp>
-      <p:sp>
-        <p:nvSpPr>
-          <p:cNvPr id="4" name="TextBox 3">
-            <a:extLst>
-              <a:ext uri="{FF2B5EF4-FFF2-40B4-BE49-F238E27FC236}">
-                <a16:creationId xmlns:a16="http://schemas.microsoft.com/office/drawing/2014/main" id="{97230E48-4625-B845-9B62-549F2F03DD9E}"/>
-              </a:ext>
-            </a:extLst>
-          </p:cNvPr>
-          <p:cNvSpPr txBox="1"/>
-          <p:nvPr/>
-        </p:nvSpPr>
-        <p:spPr>
-          <a:xfrm>
-            <a:off x="5543551" y="4851813"/>
-            <a:ext cx="2241319" cy="300082"/>
-          </a:xfrm>
-          <a:prstGeom prst="rect">
-            <a:avLst/>
-          </a:prstGeom>
-        </p:spPr>
-        <p:style>
-          <a:lnRef idx="2">
-            <a:schemeClr val="accent1">
-              <a:shade val="50000"/>
-            </a:schemeClr>
-          </a:lnRef>
-          <a:fillRef idx="1">
-            <a:schemeClr val="accent1"/>
-          </a:fillRef>
-          <a:effectRef idx="0">
-            <a:schemeClr val="accent1"/>
-          </a:effectRef>
-          <a:fontRef idx="minor">
-            <a:schemeClr val="lt1"/>
-          </a:fontRef>
-        </p:style>
-        <p:txBody>
-          <a:bodyPr wrap="none" rtlCol="0">
-            <a:spAutoFit/>
-          </a:bodyPr>
-          <a:lstStyle/>
-          <a:p>
-            <a:r>
-              <a:rPr lang="en-US" sz="1350" dirty="0"/>
-              <a:t>The sum is limited to 16 bits!</a:t>
-            </a:r>
-          </a:p>
-        </p:txBody>
-      </p:sp>
-      <p:sp>
-        <p:nvSpPr>
-          <p:cNvPr id="7" name="TextBox 6">
-            <a:extLst>
-              <a:ext uri="{FF2B5EF4-FFF2-40B4-BE49-F238E27FC236}">
-                <a16:creationId xmlns:a16="http://schemas.microsoft.com/office/drawing/2014/main" id="{FFE75029-A370-C947-92AB-86784A3F88C0}"/>
-              </a:ext>
-            </a:extLst>
-          </p:cNvPr>
-          <p:cNvSpPr txBox="1"/>
-          <p:nvPr/>
-        </p:nvSpPr>
-        <p:spPr>
-          <a:xfrm>
-            <a:off x="285750" y="4574814"/>
-            <a:ext cx="1130438" cy="300082"/>
-          </a:xfrm>
-          <a:prstGeom prst="rect">
-            <a:avLst/>
-          </a:prstGeom>
-          <a:noFill/>
-        </p:spPr>
-        <p:txBody>
-          <a:bodyPr wrap="none" rtlCol="0">
-            <a:spAutoFit/>
-          </a:bodyPr>
-          <a:lstStyle/>
-          <a:p>
-            <a:r>
-              <a:rPr lang="en-US" sz="1350" dirty="0">
-                <a:latin typeface="Consolas" panose="020B0609020204030204" pitchFamily="49" charset="0"/>
-                <a:cs typeface="Consolas" panose="020B0609020204030204" pitchFamily="49" charset="0"/>
-              </a:rPr>
-              <a:t>0x12345678</a:t>
-            </a:r>
-          </a:p>
-        </p:txBody>
-      </p:sp>
-      <p:cxnSp>
-        <p:nvCxnSpPr>
-          <p:cNvPr id="9" name="Straight Arrow Connector 8">
-            <a:extLst>
-              <a:ext uri="{FF2B5EF4-FFF2-40B4-BE49-F238E27FC236}">
-                <a16:creationId xmlns:a16="http://schemas.microsoft.com/office/drawing/2014/main" id="{38C06581-F221-454A-B957-F8258EBDE837}"/>
-              </a:ext>
-            </a:extLst>
-          </p:cNvPr>
-          <p:cNvCxnSpPr/>
-          <p:nvPr/>
-        </p:nvCxnSpPr>
-        <p:spPr>
-          <a:xfrm>
-            <a:off x="1485900" y="4713314"/>
-            <a:ext cx="285750" cy="0"/>
-          </a:xfrm>
-          <a:prstGeom prst="straightConnector1">
-            <a:avLst/>
-          </a:prstGeom>
-          <a:ln>
-            <a:tailEnd type="triangle"/>
-          </a:ln>
-        </p:spPr>
-        <p:style>
-          <a:lnRef idx="1">
-            <a:schemeClr val="accent1"/>
-          </a:lnRef>
-          <a:fillRef idx="0">
-            <a:schemeClr val="accent1"/>
-          </a:fillRef>
-          <a:effectRef idx="0">
-            <a:schemeClr val="accent1"/>
-          </a:effectRef>
-          <a:fontRef idx="minor">
-            <a:schemeClr val="tx1"/>
-          </a:fontRef>
-        </p:style>
-      </p:cxnSp>
-      <p:sp>
-        <p:nvSpPr>
-          <p:cNvPr id="10" name="TextBox 9">
-            <a:extLst>
-              <a:ext uri="{FF2B5EF4-FFF2-40B4-BE49-F238E27FC236}">
-                <a16:creationId xmlns:a16="http://schemas.microsoft.com/office/drawing/2014/main" id="{4580A862-E780-3041-A52F-CEC03FE2AA6F}"/>
-              </a:ext>
-            </a:extLst>
-          </p:cNvPr>
-          <p:cNvSpPr txBox="1"/>
-          <p:nvPr/>
-        </p:nvSpPr>
-        <p:spPr>
-          <a:xfrm>
-            <a:off x="1882879" y="4574814"/>
-            <a:ext cx="1130438" cy="300082"/>
-          </a:xfrm>
-          <a:prstGeom prst="rect">
-            <a:avLst/>
-          </a:prstGeom>
-          <a:noFill/>
-        </p:spPr>
-        <p:txBody>
-          <a:bodyPr wrap="none" rtlCol="0">
-            <a:spAutoFit/>
-          </a:bodyPr>
-          <a:lstStyle/>
-          <a:p>
-            <a:r>
-              <a:rPr lang="en-US" sz="1350" dirty="0">
-                <a:latin typeface="Consolas" panose="020B0609020204030204" pitchFamily="49" charset="0"/>
-                <a:cs typeface="Consolas" panose="020B0609020204030204" pitchFamily="49" charset="0"/>
-              </a:rPr>
-              <a:t>0x00005678</a:t>
-            </a:r>
-          </a:p>
-        </p:txBody>
-      </p:sp>
-      <p:sp>
-        <p:nvSpPr>
-          <p:cNvPr id="11" name="TextBox 10">
-            <a:extLst>
-              <a:ext uri="{FF2B5EF4-FFF2-40B4-BE49-F238E27FC236}">
-                <a16:creationId xmlns:a16="http://schemas.microsoft.com/office/drawing/2014/main" id="{F73CED4B-2CEE-5847-B651-71C8F701F73C}"/>
-              </a:ext>
-            </a:extLst>
-          </p:cNvPr>
-          <p:cNvSpPr txBox="1"/>
-          <p:nvPr/>
-        </p:nvSpPr>
-        <p:spPr>
-          <a:xfrm>
-            <a:off x="290245" y="4961164"/>
-            <a:ext cx="1130438" cy="300082"/>
-          </a:xfrm>
-          <a:prstGeom prst="rect">
-            <a:avLst/>
-          </a:prstGeom>
-          <a:noFill/>
-        </p:spPr>
-        <p:txBody>
-          <a:bodyPr wrap="none" rtlCol="0">
-            <a:spAutoFit/>
-          </a:bodyPr>
-          <a:lstStyle/>
-          <a:p>
-            <a:r>
-              <a:rPr lang="en-US" sz="1350" dirty="0">
-                <a:latin typeface="Consolas" panose="020B0609020204030204" pitchFamily="49" charset="0"/>
-                <a:cs typeface="Consolas" panose="020B0609020204030204" pitchFamily="49" charset="0"/>
-              </a:rPr>
-              <a:t>0x1234ABCD</a:t>
-            </a:r>
-          </a:p>
-        </p:txBody>
-      </p:sp>
-      <p:cxnSp>
-        <p:nvCxnSpPr>
-          <p:cNvPr id="12" name="Straight Arrow Connector 11">
-            <a:extLst>
-              <a:ext uri="{FF2B5EF4-FFF2-40B4-BE49-F238E27FC236}">
-                <a16:creationId xmlns:a16="http://schemas.microsoft.com/office/drawing/2014/main" id="{FD215319-D751-D24D-83E5-80D4E6FB9D69}"/>
-              </a:ext>
-            </a:extLst>
-          </p:cNvPr>
-          <p:cNvCxnSpPr/>
-          <p:nvPr/>
-        </p:nvCxnSpPr>
-        <p:spPr>
-          <a:xfrm>
-            <a:off x="1490395" y="5099663"/>
-            <a:ext cx="285750" cy="0"/>
-          </a:xfrm>
-          <a:prstGeom prst="straightConnector1">
-            <a:avLst/>
-          </a:prstGeom>
-          <a:ln>
-            <a:tailEnd type="triangle"/>
-          </a:ln>
-        </p:spPr>
-        <p:style>
-          <a:lnRef idx="1">
-            <a:schemeClr val="accent1"/>
-          </a:lnRef>
-          <a:fillRef idx="0">
-            <a:schemeClr val="accent1"/>
-          </a:fillRef>
-          <a:effectRef idx="0">
-            <a:schemeClr val="accent1"/>
-          </a:effectRef>
-          <a:fontRef idx="minor">
-            <a:schemeClr val="tx1"/>
-          </a:fontRef>
-        </p:style>
-      </p:cxnSp>
-      <p:sp>
-        <p:nvSpPr>
-          <p:cNvPr id="13" name="TextBox 12">
-            <a:extLst>
-              <a:ext uri="{FF2B5EF4-FFF2-40B4-BE49-F238E27FC236}">
-                <a16:creationId xmlns:a16="http://schemas.microsoft.com/office/drawing/2014/main" id="{61396BB7-6492-2C46-A6BE-EF731ECF740B}"/>
-              </a:ext>
-            </a:extLst>
-          </p:cNvPr>
-          <p:cNvSpPr txBox="1"/>
-          <p:nvPr/>
-        </p:nvSpPr>
-        <p:spPr>
-          <a:xfrm>
-            <a:off x="1887374" y="4961164"/>
-            <a:ext cx="1130438" cy="300082"/>
-          </a:xfrm>
-          <a:prstGeom prst="rect">
-            <a:avLst/>
-          </a:prstGeom>
-          <a:noFill/>
-        </p:spPr>
-        <p:txBody>
-          <a:bodyPr wrap="none" rtlCol="0">
-            <a:spAutoFit/>
-          </a:bodyPr>
-          <a:lstStyle/>
-          <a:p>
-            <a:r>
-              <a:rPr lang="en-US" sz="1350" dirty="0">
-                <a:latin typeface="Consolas" panose="020B0609020204030204" pitchFamily="49" charset="0"/>
-                <a:cs typeface="Consolas" panose="020B0609020204030204" pitchFamily="49" charset="0"/>
-              </a:rPr>
-              <a:t>0xFFFFABCD</a:t>
-            </a:r>
-          </a:p>
-        </p:txBody>
-      </p:sp>
-      <p:sp>
-        <p:nvSpPr>
-          <p:cNvPr id="14" name="TextBox 13">
-            <a:extLst>
-              <a:ext uri="{FF2B5EF4-FFF2-40B4-BE49-F238E27FC236}">
-                <a16:creationId xmlns:a16="http://schemas.microsoft.com/office/drawing/2014/main" id="{37AC389A-52DF-BA4B-B78C-31E43AB8F715}"/>
-              </a:ext>
-            </a:extLst>
-          </p:cNvPr>
-          <p:cNvSpPr txBox="1"/>
-          <p:nvPr/>
-        </p:nvSpPr>
-        <p:spPr>
-          <a:xfrm>
-            <a:off x="285750" y="3986192"/>
-            <a:ext cx="2454518" cy="507831"/>
-          </a:xfrm>
-          <a:prstGeom prst="rect">
-            <a:avLst/>
-          </a:prstGeom>
-          <a:noFill/>
-        </p:spPr>
-        <p:txBody>
-          <a:bodyPr wrap="none" rtlCol="0">
-            <a:spAutoFit/>
-          </a:bodyPr>
-          <a:lstStyle/>
-          <a:p>
-            <a:r>
-              <a:rPr lang="en-US" sz="1350" dirty="0">
-                <a:solidFill>
-                  <a:srgbClr val="C00000"/>
-                </a:solidFill>
-                <a:latin typeface="Consolas" panose="020B0609020204030204" pitchFamily="49" charset="0"/>
-                <a:cs typeface="Consolas" panose="020B0609020204030204" pitchFamily="49" charset="0"/>
-              </a:rPr>
-              <a:t>int32_t x = 0x12345678;</a:t>
-            </a:r>
-          </a:p>
-          <a:p>
-            <a:r>
-              <a:rPr lang="en-US" sz="1350" dirty="0">
-                <a:solidFill>
-                  <a:srgbClr val="C00000"/>
-                </a:solidFill>
-                <a:latin typeface="Consolas" panose="020B0609020204030204" pitchFamily="49" charset="0"/>
-                <a:cs typeface="Consolas" panose="020B0609020204030204" pitchFamily="49" charset="0"/>
-              </a:rPr>
-              <a:t>int16_t y = (int16_t) x;</a:t>
-            </a:r>
-          </a:p>
-        </p:txBody>
-      </p:sp>
-    </p:spTree>
-    <p:extLst>
-      <p:ext uri="{BB962C8B-B14F-4D97-AF65-F5344CB8AC3E}">
-        <p14:creationId xmlns:p14="http://schemas.microsoft.com/office/powerpoint/2010/main" val="658532706"/>
       </p:ext>
     </p:extLst>
   </p:cSld>
@@ -25169,6 +25428,1040 @@
           <p:cNvPr id="2" name="Title 1">
             <a:extLst>
               <a:ext uri="{FF2B5EF4-FFF2-40B4-BE49-F238E27FC236}">
+                <a16:creationId xmlns:a16="http://schemas.microsoft.com/office/drawing/2014/main" id="{27B41483-7081-C44C-81EF-D92F00104765}"/>
+              </a:ext>
+            </a:extLst>
+          </p:cNvPr>
+          <p:cNvSpPr>
+            <a:spLocks noGrp="1"/>
+          </p:cNvSpPr>
+          <p:nvPr>
+            <p:ph type="title"/>
+          </p:nvPr>
+        </p:nvSpPr>
+        <p:spPr/>
+        <p:txBody>
+          <a:bodyPr>
+            <a:normAutofit/>
+          </a:bodyPr>
+          <a:lstStyle/>
+          <a:p>
+            <a:r>
+              <a:rPr lang="en-US" dirty="0"/>
+              <a:t>What is wrong? ANS</a:t>
+            </a:r>
+          </a:p>
+        </p:txBody>
+      </p:sp>
+      <p:sp>
+        <p:nvSpPr>
+          <p:cNvPr id="3" name="Slide Number Placeholder 2">
+            <a:extLst>
+              <a:ext uri="{FF2B5EF4-FFF2-40B4-BE49-F238E27FC236}">
+                <a16:creationId xmlns:a16="http://schemas.microsoft.com/office/drawing/2014/main" id="{3D15817A-DD66-D447-B2D9-5646440481EB}"/>
+              </a:ext>
+            </a:extLst>
+          </p:cNvPr>
+          <p:cNvSpPr>
+            <a:spLocks noGrp="1"/>
+          </p:cNvSpPr>
+          <p:nvPr>
+            <p:ph type="sldNum" sz="quarter" idx="12"/>
+          </p:nvPr>
+        </p:nvSpPr>
+        <p:spPr/>
+        <p:txBody>
+          <a:bodyPr/>
+          <a:lstStyle/>
+          <a:p>
+            <a:fld id="{EA7C8D44-3667-46F6-9772-CC52308E2A7F}" type="slidenum">
+              <a:rPr kumimoji="0" lang="en-US" smtClean="0"/>
+              <a:pPr/>
+              <a:t>30</a:t>
+            </a:fld>
+            <a:endParaRPr kumimoji="0" lang="en-US" dirty="0"/>
+          </a:p>
+        </p:txBody>
+      </p:sp>
+      <p:sp>
+        <p:nvSpPr>
+          <p:cNvPr id="5" name="TextBox 4">
+            <a:extLst>
+              <a:ext uri="{FF2B5EF4-FFF2-40B4-BE49-F238E27FC236}">
+                <a16:creationId xmlns:a16="http://schemas.microsoft.com/office/drawing/2014/main" id="{67609315-49B9-8548-BA54-379B42B31ADB}"/>
+              </a:ext>
+            </a:extLst>
+          </p:cNvPr>
+          <p:cNvSpPr txBox="1"/>
+          <p:nvPr/>
+        </p:nvSpPr>
+        <p:spPr>
+          <a:xfrm>
+            <a:off x="457200" y="2006188"/>
+            <a:ext cx="3752950" cy="1384995"/>
+          </a:xfrm>
+          <a:prstGeom prst="rect">
+            <a:avLst/>
+          </a:prstGeom>
+        </p:spPr>
+        <p:style>
+          <a:lnRef idx="2">
+            <a:schemeClr val="accent1"/>
+          </a:lnRef>
+          <a:fillRef idx="1">
+            <a:schemeClr val="lt1"/>
+          </a:fillRef>
+          <a:effectRef idx="0">
+            <a:schemeClr val="accent1"/>
+          </a:effectRef>
+          <a:fontRef idx="minor">
+            <a:schemeClr val="dk1"/>
+          </a:fontRef>
+        </p:style>
+        <p:txBody>
+          <a:bodyPr wrap="none" rtlCol="0">
+            <a:spAutoFit/>
+          </a:bodyPr>
+          <a:lstStyle/>
+          <a:p>
+            <a:r>
+              <a:rPr lang="en-US" sz="1200" dirty="0">
+                <a:latin typeface="Consolas" panose="020B0609020204030204" pitchFamily="49" charset="0"/>
+                <a:cs typeface="Consolas" panose="020B0609020204030204" pitchFamily="49" charset="0"/>
+              </a:rPr>
+              <a:t>int16_t </a:t>
+            </a:r>
+            <a:r>
+              <a:rPr lang="en-US" sz="1200" b="1" dirty="0" err="1">
+                <a:solidFill>
+                  <a:schemeClr val="accent1"/>
+                </a:solidFill>
+                <a:latin typeface="Consolas" panose="020B0609020204030204" pitchFamily="49" charset="0"/>
+                <a:cs typeface="Consolas" panose="020B0609020204030204" pitchFamily="49" charset="0"/>
+              </a:rPr>
+              <a:t>sum_of_array</a:t>
+            </a:r>
+            <a:r>
+              <a:rPr lang="en-US" sz="1200" dirty="0">
+                <a:latin typeface="Consolas" panose="020B0609020204030204" pitchFamily="49" charset="0"/>
+                <a:cs typeface="Consolas" panose="020B0609020204030204" pitchFamily="49" charset="0"/>
+              </a:rPr>
+              <a:t>(int16_t *</a:t>
+            </a:r>
+            <a:r>
+              <a:rPr lang="en-US" sz="1200" dirty="0" err="1">
+                <a:latin typeface="Consolas" panose="020B0609020204030204" pitchFamily="49" charset="0"/>
+                <a:cs typeface="Consolas" panose="020B0609020204030204" pitchFamily="49" charset="0"/>
+              </a:rPr>
+              <a:t>pArray</a:t>
+            </a:r>
+            <a:r>
+              <a:rPr lang="en-US" sz="1200" dirty="0">
+                <a:latin typeface="Consolas" panose="020B0609020204030204" pitchFamily="49" charset="0"/>
+                <a:cs typeface="Consolas" panose="020B0609020204030204" pitchFamily="49" charset="0"/>
+              </a:rPr>
+              <a:t>){</a:t>
+            </a:r>
+          </a:p>
+          <a:p>
+            <a:r>
+              <a:rPr lang="en-US" sz="1200" dirty="0">
+                <a:latin typeface="Consolas" panose="020B0609020204030204" pitchFamily="49" charset="0"/>
+                <a:cs typeface="Consolas" panose="020B0609020204030204" pitchFamily="49" charset="0"/>
+              </a:rPr>
+              <a:t>    uint32_t </a:t>
+            </a:r>
+            <a:r>
+              <a:rPr lang="en-US" sz="1200" dirty="0" err="1">
+                <a:latin typeface="Consolas" panose="020B0609020204030204" pitchFamily="49" charset="0"/>
+                <a:cs typeface="Consolas" panose="020B0609020204030204" pitchFamily="49" charset="0"/>
+              </a:rPr>
+              <a:t>i</a:t>
+            </a:r>
+            <a:r>
+              <a:rPr lang="en-US" sz="1200" dirty="0">
+                <a:latin typeface="Consolas" panose="020B0609020204030204" pitchFamily="49" charset="0"/>
+                <a:cs typeface="Consolas" panose="020B0609020204030204" pitchFamily="49" charset="0"/>
+              </a:rPr>
+              <a:t>;</a:t>
+            </a:r>
+          </a:p>
+          <a:p>
+            <a:r>
+              <a:rPr lang="en-US" sz="1200" dirty="0">
+                <a:latin typeface="Consolas" panose="020B0609020204030204" pitchFamily="49" charset="0"/>
+                <a:cs typeface="Consolas" panose="020B0609020204030204" pitchFamily="49" charset="0"/>
+              </a:rPr>
+              <a:t>    int32_t sum = 0;</a:t>
+            </a:r>
+          </a:p>
+          <a:p>
+            <a:r>
+              <a:rPr lang="en-US" sz="1200" dirty="0">
+                <a:latin typeface="Consolas" panose="020B0609020204030204" pitchFamily="49" charset="0"/>
+                <a:cs typeface="Consolas" panose="020B0609020204030204" pitchFamily="49" charset="0"/>
+              </a:rPr>
+              <a:t>    for(</a:t>
+            </a:r>
+            <a:r>
+              <a:rPr lang="en-US" sz="1200" dirty="0" err="1">
+                <a:latin typeface="Consolas" panose="020B0609020204030204" pitchFamily="49" charset="0"/>
+                <a:cs typeface="Consolas" panose="020B0609020204030204" pitchFamily="49" charset="0"/>
+              </a:rPr>
+              <a:t>i</a:t>
+            </a:r>
+            <a:r>
+              <a:rPr lang="en-US" sz="1200" dirty="0">
+                <a:latin typeface="Consolas" panose="020B0609020204030204" pitchFamily="49" charset="0"/>
+                <a:cs typeface="Consolas" panose="020B0609020204030204" pitchFamily="49" charset="0"/>
+              </a:rPr>
+              <a:t>=0; </a:t>
+            </a:r>
+            <a:r>
+              <a:rPr lang="en-US" sz="1200" dirty="0" err="1">
+                <a:latin typeface="Consolas" panose="020B0609020204030204" pitchFamily="49" charset="0"/>
+                <a:cs typeface="Consolas" panose="020B0609020204030204" pitchFamily="49" charset="0"/>
+              </a:rPr>
+              <a:t>i</a:t>
+            </a:r>
+            <a:r>
+              <a:rPr lang="en-US" sz="1200" dirty="0">
+                <a:latin typeface="Consolas" panose="020B0609020204030204" pitchFamily="49" charset="0"/>
+                <a:cs typeface="Consolas" panose="020B0609020204030204" pitchFamily="49" charset="0"/>
+              </a:rPr>
+              <a:t>&lt;64; </a:t>
+            </a:r>
+            <a:r>
+              <a:rPr lang="en-US" sz="1200" dirty="0" err="1">
+                <a:latin typeface="Consolas" panose="020B0609020204030204" pitchFamily="49" charset="0"/>
+                <a:cs typeface="Consolas" panose="020B0609020204030204" pitchFamily="49" charset="0"/>
+              </a:rPr>
+              <a:t>i</a:t>
+            </a:r>
+            <a:r>
+              <a:rPr lang="en-US" sz="1200" dirty="0">
+                <a:latin typeface="Consolas" panose="020B0609020204030204" pitchFamily="49" charset="0"/>
+                <a:cs typeface="Consolas" panose="020B0609020204030204" pitchFamily="49" charset="0"/>
+              </a:rPr>
+              <a:t>++) </a:t>
+            </a:r>
+            <a:r>
+              <a:rPr lang="en-US" sz="1200" dirty="0">
+                <a:solidFill>
+                  <a:schemeClr val="bg1">
+                    <a:lumMod val="50000"/>
+                  </a:schemeClr>
+                </a:solidFill>
+                <a:latin typeface="Consolas" panose="020B0609020204030204" pitchFamily="49" charset="0"/>
+                <a:cs typeface="Consolas" panose="020B0609020204030204" pitchFamily="49" charset="0"/>
+              </a:rPr>
+              <a:t>// array size = 64</a:t>
+            </a:r>
+          </a:p>
+          <a:p>
+            <a:r>
+              <a:rPr lang="en-US" sz="1200" dirty="0">
+                <a:latin typeface="Consolas" panose="020B0609020204030204" pitchFamily="49" charset="0"/>
+                <a:cs typeface="Consolas" panose="020B0609020204030204" pitchFamily="49" charset="0"/>
+              </a:rPr>
+              <a:t>        sum += </a:t>
+            </a:r>
+            <a:r>
+              <a:rPr lang="en-US" sz="1200" dirty="0" err="1">
+                <a:latin typeface="Consolas" panose="020B0609020204030204" pitchFamily="49" charset="0"/>
+                <a:cs typeface="Consolas" panose="020B0609020204030204" pitchFamily="49" charset="0"/>
+              </a:rPr>
+              <a:t>pArray</a:t>
+            </a:r>
+            <a:r>
+              <a:rPr lang="en-US" sz="1200" dirty="0">
+                <a:latin typeface="Consolas" panose="020B0609020204030204" pitchFamily="49" charset="0"/>
+                <a:cs typeface="Consolas" panose="020B0609020204030204" pitchFamily="49" charset="0"/>
+              </a:rPr>
+              <a:t>[</a:t>
+            </a:r>
+            <a:r>
+              <a:rPr lang="en-US" sz="1200" dirty="0" err="1">
+                <a:latin typeface="Consolas" panose="020B0609020204030204" pitchFamily="49" charset="0"/>
+                <a:cs typeface="Consolas" panose="020B0609020204030204" pitchFamily="49" charset="0"/>
+              </a:rPr>
+              <a:t>i</a:t>
+            </a:r>
+            <a:r>
+              <a:rPr lang="en-US" sz="1200" dirty="0">
+                <a:latin typeface="Consolas" panose="020B0609020204030204" pitchFamily="49" charset="0"/>
+                <a:cs typeface="Consolas" panose="020B0609020204030204" pitchFamily="49" charset="0"/>
+              </a:rPr>
+              <a:t>];</a:t>
+            </a:r>
+          </a:p>
+          <a:p>
+            <a:r>
+              <a:rPr lang="en-US" sz="1200" dirty="0">
+                <a:latin typeface="Consolas" panose="020B0609020204030204" pitchFamily="49" charset="0"/>
+                <a:cs typeface="Consolas" panose="020B0609020204030204" pitchFamily="49" charset="0"/>
+              </a:rPr>
+              <a:t>    return (int16_t) sum;</a:t>
+            </a:r>
+          </a:p>
+          <a:p>
+            <a:r>
+              <a:rPr lang="en-US" sz="1200" dirty="0">
+                <a:latin typeface="Consolas" panose="020B0609020204030204" pitchFamily="49" charset="0"/>
+                <a:cs typeface="Consolas" panose="020B0609020204030204" pitchFamily="49" charset="0"/>
+              </a:rPr>
+              <a:t>}</a:t>
+            </a:r>
+          </a:p>
+        </p:txBody>
+      </p:sp>
+      <p:sp>
+        <p:nvSpPr>
+          <p:cNvPr id="6" name="TextBox 5">
+            <a:extLst>
+              <a:ext uri="{FF2B5EF4-FFF2-40B4-BE49-F238E27FC236}">
+                <a16:creationId xmlns:a16="http://schemas.microsoft.com/office/drawing/2014/main" id="{4F4F6D7F-4E8E-4748-B8BF-4AEBF2493640}"/>
+              </a:ext>
+            </a:extLst>
+          </p:cNvPr>
+          <p:cNvSpPr txBox="1"/>
+          <p:nvPr/>
+        </p:nvSpPr>
+        <p:spPr>
+          <a:xfrm>
+            <a:off x="4340418" y="2006187"/>
+            <a:ext cx="4432624" cy="2492990"/>
+          </a:xfrm>
+          <a:prstGeom prst="rect">
+            <a:avLst/>
+          </a:prstGeom>
+        </p:spPr>
+        <p:style>
+          <a:lnRef idx="2">
+            <a:schemeClr val="accent1"/>
+          </a:lnRef>
+          <a:fillRef idx="1">
+            <a:schemeClr val="lt1"/>
+          </a:fillRef>
+          <a:effectRef idx="0">
+            <a:schemeClr val="accent1"/>
+          </a:effectRef>
+          <a:fontRef idx="minor">
+            <a:schemeClr val="dk1"/>
+          </a:fontRef>
+        </p:style>
+        <p:txBody>
+          <a:bodyPr wrap="none" rtlCol="0">
+            <a:spAutoFit/>
+          </a:bodyPr>
+          <a:lstStyle/>
+          <a:p>
+            <a:r>
+              <a:rPr lang="en-US" sz="1200" b="1" dirty="0" err="1">
+                <a:solidFill>
+                  <a:schemeClr val="accent1"/>
+                </a:solidFill>
+                <a:latin typeface="Consolas" panose="020B0609020204030204" pitchFamily="49" charset="0"/>
+                <a:cs typeface="Consolas" panose="020B0609020204030204" pitchFamily="49" charset="0"/>
+              </a:rPr>
+              <a:t>sum_of_array</a:t>
+            </a:r>
+            <a:r>
+              <a:rPr lang="en-US" sz="1200" b="1" dirty="0">
+                <a:solidFill>
+                  <a:schemeClr val="accent1"/>
+                </a:solidFill>
+                <a:latin typeface="Consolas" panose="020B0609020204030204" pitchFamily="49" charset="0"/>
+                <a:cs typeface="Consolas" panose="020B0609020204030204" pitchFamily="49" charset="0"/>
+              </a:rPr>
+              <a:t> </a:t>
+            </a:r>
+            <a:r>
+              <a:rPr lang="en-US" sz="1200" dirty="0">
+                <a:latin typeface="Consolas" panose="020B0609020204030204" pitchFamily="49" charset="0"/>
+                <a:cs typeface="Consolas" panose="020B0609020204030204" pitchFamily="49" charset="0"/>
+              </a:rPr>
+              <a:t>PROC</a:t>
+            </a:r>
+          </a:p>
+          <a:p>
+            <a:r>
+              <a:rPr lang="en-US" sz="1200" dirty="0">
+                <a:latin typeface="Consolas" panose="020B0609020204030204" pitchFamily="49" charset="0"/>
+                <a:cs typeface="Consolas" panose="020B0609020204030204" pitchFamily="49" charset="0"/>
+              </a:rPr>
+              <a:t>      MOV   r2, #0  </a:t>
+            </a:r>
+            <a:r>
+              <a:rPr lang="en-US" sz="1200" dirty="0">
+                <a:solidFill>
+                  <a:schemeClr val="bg1">
+                    <a:lumMod val="50000"/>
+                  </a:schemeClr>
+                </a:solidFill>
+                <a:latin typeface="Consolas" panose="020B0609020204030204" pitchFamily="49" charset="0"/>
+                <a:cs typeface="Consolas" panose="020B0609020204030204" pitchFamily="49" charset="0"/>
+              </a:rPr>
+              <a:t>; loop index</a:t>
+            </a:r>
+          </a:p>
+          <a:p>
+            <a:r>
+              <a:rPr lang="en-US" sz="1200" dirty="0">
+                <a:latin typeface="Consolas" panose="020B0609020204030204" pitchFamily="49" charset="0"/>
+                <a:cs typeface="Consolas" panose="020B0609020204030204" pitchFamily="49" charset="0"/>
+              </a:rPr>
+              <a:t>      MOV   r3, #0  </a:t>
+            </a:r>
+            <a:r>
+              <a:rPr lang="en-US" sz="1200" dirty="0">
+                <a:solidFill>
+                  <a:schemeClr val="bg1">
+                    <a:lumMod val="50000"/>
+                  </a:schemeClr>
+                </a:solidFill>
+                <a:latin typeface="Consolas" panose="020B0609020204030204" pitchFamily="49" charset="0"/>
+                <a:cs typeface="Consolas" panose="020B0609020204030204" pitchFamily="49" charset="0"/>
+              </a:rPr>
+              <a:t>; sum </a:t>
+            </a:r>
+          </a:p>
+          <a:p>
+            <a:r>
+              <a:rPr lang="en-US" sz="1200" dirty="0">
+                <a:latin typeface="Consolas" panose="020B0609020204030204" pitchFamily="49" charset="0"/>
+                <a:cs typeface="Consolas" panose="020B0609020204030204" pitchFamily="49" charset="0"/>
+              </a:rPr>
+              <a:t>      B     check</a:t>
+            </a:r>
+          </a:p>
+          <a:p>
+            <a:r>
+              <a:rPr lang="en-US" sz="1200" dirty="0">
+                <a:latin typeface="Consolas" panose="020B0609020204030204" pitchFamily="49" charset="0"/>
+                <a:cs typeface="Consolas" panose="020B0609020204030204" pitchFamily="49" charset="0"/>
+              </a:rPr>
+              <a:t>loop  LDRSH r1, [r0], #2 </a:t>
+            </a:r>
+          </a:p>
+          <a:p>
+            <a:r>
+              <a:rPr lang="en-US" sz="1200" dirty="0">
+                <a:latin typeface="Consolas" panose="020B0609020204030204" pitchFamily="49" charset="0"/>
+                <a:cs typeface="Consolas" panose="020B0609020204030204" pitchFamily="49" charset="0"/>
+              </a:rPr>
+              <a:t>      ADD   r3, r3, r1  </a:t>
+            </a:r>
+            <a:r>
+              <a:rPr lang="en-US" sz="1200" dirty="0">
+                <a:solidFill>
+                  <a:schemeClr val="bg1">
+                    <a:lumMod val="50000"/>
+                  </a:schemeClr>
+                </a:solidFill>
+                <a:latin typeface="Consolas" panose="020B0609020204030204" pitchFamily="49" charset="0"/>
+                <a:cs typeface="Consolas" panose="020B0609020204030204" pitchFamily="49" charset="0"/>
+              </a:rPr>
+              <a:t>; sum += </a:t>
+            </a:r>
+            <a:r>
+              <a:rPr lang="en-US" sz="1200" dirty="0" err="1">
+                <a:solidFill>
+                  <a:schemeClr val="bg1">
+                    <a:lumMod val="50000"/>
+                  </a:schemeClr>
+                </a:solidFill>
+                <a:latin typeface="Consolas" panose="020B0609020204030204" pitchFamily="49" charset="0"/>
+                <a:cs typeface="Consolas" panose="020B0609020204030204" pitchFamily="49" charset="0"/>
+              </a:rPr>
+              <a:t>pArray</a:t>
+            </a:r>
+            <a:r>
+              <a:rPr lang="en-US" sz="1200" dirty="0">
+                <a:solidFill>
+                  <a:schemeClr val="bg1">
+                    <a:lumMod val="50000"/>
+                  </a:schemeClr>
+                </a:solidFill>
+                <a:latin typeface="Consolas" panose="020B0609020204030204" pitchFamily="49" charset="0"/>
+                <a:cs typeface="Consolas" panose="020B0609020204030204" pitchFamily="49" charset="0"/>
+              </a:rPr>
+              <a:t>[</a:t>
+            </a:r>
+            <a:r>
+              <a:rPr lang="en-US" sz="1200" dirty="0" err="1">
+                <a:solidFill>
+                  <a:schemeClr val="bg1">
+                    <a:lumMod val="50000"/>
+                  </a:schemeClr>
+                </a:solidFill>
+                <a:latin typeface="Consolas" panose="020B0609020204030204" pitchFamily="49" charset="0"/>
+                <a:cs typeface="Consolas" panose="020B0609020204030204" pitchFamily="49" charset="0"/>
+              </a:rPr>
+              <a:t>i</a:t>
+            </a:r>
+            <a:r>
+              <a:rPr lang="en-US" sz="1200" dirty="0">
+                <a:solidFill>
+                  <a:schemeClr val="bg1">
+                    <a:lumMod val="50000"/>
+                  </a:schemeClr>
+                </a:solidFill>
+                <a:latin typeface="Consolas" panose="020B0609020204030204" pitchFamily="49" charset="0"/>
+                <a:cs typeface="Consolas" panose="020B0609020204030204" pitchFamily="49" charset="0"/>
+              </a:rPr>
+              <a:t>]</a:t>
+            </a:r>
+          </a:p>
+          <a:p>
+            <a:r>
+              <a:rPr lang="en-US" sz="1200" dirty="0">
+                <a:latin typeface="Consolas" panose="020B0609020204030204" pitchFamily="49" charset="0"/>
+                <a:cs typeface="Consolas" panose="020B0609020204030204" pitchFamily="49" charset="0"/>
+              </a:rPr>
+              <a:t>      ADD   r2, r2, #1  </a:t>
+            </a:r>
+            <a:r>
+              <a:rPr lang="en-US" sz="1200" dirty="0">
+                <a:solidFill>
+                  <a:schemeClr val="bg1">
+                    <a:lumMod val="50000"/>
+                  </a:schemeClr>
+                </a:solidFill>
+                <a:latin typeface="Consolas" panose="020B0609020204030204" pitchFamily="49" charset="0"/>
+                <a:cs typeface="Consolas" panose="020B0609020204030204" pitchFamily="49" charset="0"/>
+              </a:rPr>
+              <a:t>; </a:t>
+            </a:r>
+            <a:r>
+              <a:rPr lang="en-US" sz="1200" dirty="0" err="1">
+                <a:solidFill>
+                  <a:schemeClr val="bg1">
+                    <a:lumMod val="50000"/>
+                  </a:schemeClr>
+                </a:solidFill>
+                <a:latin typeface="Consolas" panose="020B0609020204030204" pitchFamily="49" charset="0"/>
+                <a:cs typeface="Consolas" panose="020B0609020204030204" pitchFamily="49" charset="0"/>
+              </a:rPr>
+              <a:t>i</a:t>
+            </a:r>
+            <a:r>
+              <a:rPr lang="en-US" sz="1200" dirty="0">
+                <a:solidFill>
+                  <a:schemeClr val="bg1">
+                    <a:lumMod val="50000"/>
+                  </a:schemeClr>
+                </a:solidFill>
+                <a:latin typeface="Consolas" panose="020B0609020204030204" pitchFamily="49" charset="0"/>
+                <a:cs typeface="Consolas" panose="020B0609020204030204" pitchFamily="49" charset="0"/>
+              </a:rPr>
+              <a:t>++</a:t>
+            </a:r>
+          </a:p>
+          <a:p>
+            <a:r>
+              <a:rPr lang="en-US" sz="1200" dirty="0">
+                <a:latin typeface="Consolas" panose="020B0609020204030204" pitchFamily="49" charset="0"/>
+                <a:cs typeface="Consolas" panose="020B0609020204030204" pitchFamily="49" charset="0"/>
+              </a:rPr>
+              <a:t>check CMP   r2, #64</a:t>
+            </a:r>
+          </a:p>
+          <a:p>
+            <a:r>
+              <a:rPr lang="en-US" sz="1200" dirty="0">
+                <a:latin typeface="Consolas" panose="020B0609020204030204" pitchFamily="49" charset="0"/>
+                <a:cs typeface="Consolas" panose="020B0609020204030204" pitchFamily="49" charset="0"/>
+              </a:rPr>
+              <a:t>      BLO   loop        </a:t>
+            </a:r>
+            <a:r>
+              <a:rPr lang="en-US" sz="1200" dirty="0">
+                <a:solidFill>
+                  <a:schemeClr val="bg1">
+                    <a:lumMod val="50000"/>
+                  </a:schemeClr>
+                </a:solidFill>
+                <a:latin typeface="Consolas" panose="020B0609020204030204" pitchFamily="49" charset="0"/>
+                <a:cs typeface="Consolas" panose="020B0609020204030204" pitchFamily="49" charset="0"/>
+              </a:rPr>
+              <a:t>; branch if unsigned </a:t>
+            </a:r>
+            <a:r>
+              <a:rPr lang="en-US" sz="1200" dirty="0" err="1">
+                <a:solidFill>
+                  <a:schemeClr val="bg1">
+                    <a:lumMod val="50000"/>
+                  </a:schemeClr>
+                </a:solidFill>
+                <a:latin typeface="Consolas" panose="020B0609020204030204" pitchFamily="49" charset="0"/>
+                <a:cs typeface="Consolas" panose="020B0609020204030204" pitchFamily="49" charset="0"/>
+              </a:rPr>
+              <a:t>LOwer</a:t>
+            </a:r>
+            <a:endParaRPr lang="en-US" sz="1200" dirty="0">
+              <a:solidFill>
+                <a:schemeClr val="bg1">
+                  <a:lumMod val="50000"/>
+                </a:schemeClr>
+              </a:solidFill>
+              <a:latin typeface="Consolas" panose="020B0609020204030204" pitchFamily="49" charset="0"/>
+              <a:cs typeface="Consolas" panose="020B0609020204030204" pitchFamily="49" charset="0"/>
+            </a:endParaRPr>
+          </a:p>
+          <a:p>
+            <a:r>
+              <a:rPr lang="en-US" sz="1200" dirty="0">
+                <a:solidFill>
+                  <a:srgbClr val="C00000"/>
+                </a:solidFill>
+                <a:latin typeface="Consolas" panose="020B0609020204030204" pitchFamily="49" charset="0"/>
+                <a:cs typeface="Consolas" panose="020B0609020204030204" pitchFamily="49" charset="0"/>
+              </a:rPr>
+              <a:t>      </a:t>
+            </a:r>
+            <a:r>
+              <a:rPr lang="en-US" sz="1200" b="1" dirty="0">
+                <a:solidFill>
+                  <a:srgbClr val="C00000"/>
+                </a:solidFill>
+                <a:latin typeface="Consolas" panose="020B0609020204030204" pitchFamily="49" charset="0"/>
+                <a:cs typeface="Consolas" panose="020B0609020204030204" pitchFamily="49" charset="0"/>
+              </a:rPr>
+              <a:t>MOV   r0, r3, LSL #16</a:t>
+            </a:r>
+          </a:p>
+          <a:p>
+            <a:r>
+              <a:rPr lang="en-US" sz="1200" dirty="0">
+                <a:solidFill>
+                  <a:srgbClr val="C00000"/>
+                </a:solidFill>
+                <a:latin typeface="Consolas" panose="020B0609020204030204" pitchFamily="49" charset="0"/>
+                <a:cs typeface="Consolas" panose="020B0609020204030204" pitchFamily="49" charset="0"/>
+              </a:rPr>
+              <a:t>      </a:t>
+            </a:r>
+            <a:r>
+              <a:rPr lang="en-US" sz="1200" b="1" dirty="0">
+                <a:solidFill>
+                  <a:srgbClr val="C00000"/>
+                </a:solidFill>
+                <a:latin typeface="Consolas" panose="020B0609020204030204" pitchFamily="49" charset="0"/>
+                <a:cs typeface="Consolas" panose="020B0609020204030204" pitchFamily="49" charset="0"/>
+              </a:rPr>
+              <a:t>MOV   r0, r0, ASR #16  </a:t>
+            </a:r>
+            <a:r>
+              <a:rPr lang="en-US" sz="1200" dirty="0">
+                <a:solidFill>
+                  <a:srgbClr val="C00000"/>
+                </a:solidFill>
+                <a:latin typeface="Consolas" panose="020B0609020204030204" pitchFamily="49" charset="0"/>
+                <a:cs typeface="Consolas" panose="020B0609020204030204" pitchFamily="49" charset="0"/>
+              </a:rPr>
+              <a:t>; r0 = (short) r3 </a:t>
+            </a:r>
+          </a:p>
+          <a:p>
+            <a:r>
+              <a:rPr lang="en-US" sz="1200" dirty="0">
+                <a:latin typeface="Consolas" panose="020B0609020204030204" pitchFamily="49" charset="0"/>
+                <a:cs typeface="Consolas" panose="020B0609020204030204" pitchFamily="49" charset="0"/>
+              </a:rPr>
+              <a:t>      BX    </a:t>
+            </a:r>
+            <a:r>
+              <a:rPr lang="en-US" sz="1200" dirty="0" err="1">
+                <a:latin typeface="Consolas" panose="020B0609020204030204" pitchFamily="49" charset="0"/>
+                <a:cs typeface="Consolas" panose="020B0609020204030204" pitchFamily="49" charset="0"/>
+              </a:rPr>
+              <a:t>lr</a:t>
+            </a:r>
+            <a:endParaRPr lang="en-US" sz="1200" dirty="0">
+              <a:latin typeface="Consolas" panose="020B0609020204030204" pitchFamily="49" charset="0"/>
+              <a:cs typeface="Consolas" panose="020B0609020204030204" pitchFamily="49" charset="0"/>
+            </a:endParaRPr>
+          </a:p>
+          <a:p>
+            <a:r>
+              <a:rPr lang="en-US" sz="1200" dirty="0">
+                <a:latin typeface="Consolas" panose="020B0609020204030204" pitchFamily="49" charset="0"/>
+                <a:cs typeface="Consolas" panose="020B0609020204030204" pitchFamily="49" charset="0"/>
+              </a:rPr>
+              <a:t>      ENDP</a:t>
+            </a:r>
+          </a:p>
+        </p:txBody>
+      </p:sp>
+      <p:sp>
+        <p:nvSpPr>
+          <p:cNvPr id="4" name="TextBox 3">
+            <a:extLst>
+              <a:ext uri="{FF2B5EF4-FFF2-40B4-BE49-F238E27FC236}">
+                <a16:creationId xmlns:a16="http://schemas.microsoft.com/office/drawing/2014/main" id="{97230E48-4625-B845-9B62-549F2F03DD9E}"/>
+              </a:ext>
+            </a:extLst>
+          </p:cNvPr>
+          <p:cNvSpPr txBox="1"/>
+          <p:nvPr/>
+        </p:nvSpPr>
+        <p:spPr>
+          <a:xfrm>
+            <a:off x="5543551" y="4851813"/>
+            <a:ext cx="2241319" cy="300082"/>
+          </a:xfrm>
+          <a:prstGeom prst="rect">
+            <a:avLst/>
+          </a:prstGeom>
+        </p:spPr>
+        <p:style>
+          <a:lnRef idx="2">
+            <a:schemeClr val="accent1">
+              <a:shade val="50000"/>
+            </a:schemeClr>
+          </a:lnRef>
+          <a:fillRef idx="1">
+            <a:schemeClr val="accent1"/>
+          </a:fillRef>
+          <a:effectRef idx="0">
+            <a:schemeClr val="accent1"/>
+          </a:effectRef>
+          <a:fontRef idx="minor">
+            <a:schemeClr val="lt1"/>
+          </a:fontRef>
+        </p:style>
+        <p:txBody>
+          <a:bodyPr wrap="none" rtlCol="0">
+            <a:spAutoFit/>
+          </a:bodyPr>
+          <a:lstStyle/>
+          <a:p>
+            <a:r>
+              <a:rPr lang="en-US" sz="1350" dirty="0"/>
+              <a:t>The sum is limited to 16 bits!</a:t>
+            </a:r>
+          </a:p>
+        </p:txBody>
+      </p:sp>
+      <p:sp>
+        <p:nvSpPr>
+          <p:cNvPr id="7" name="TextBox 6">
+            <a:extLst>
+              <a:ext uri="{FF2B5EF4-FFF2-40B4-BE49-F238E27FC236}">
+                <a16:creationId xmlns:a16="http://schemas.microsoft.com/office/drawing/2014/main" id="{FFE75029-A370-C947-92AB-86784A3F88C0}"/>
+              </a:ext>
+            </a:extLst>
+          </p:cNvPr>
+          <p:cNvSpPr txBox="1"/>
+          <p:nvPr/>
+        </p:nvSpPr>
+        <p:spPr>
+          <a:xfrm>
+            <a:off x="285750" y="4574814"/>
+            <a:ext cx="1130438" cy="300082"/>
+          </a:xfrm>
+          <a:prstGeom prst="rect">
+            <a:avLst/>
+          </a:prstGeom>
+          <a:noFill/>
+        </p:spPr>
+        <p:txBody>
+          <a:bodyPr wrap="none" rtlCol="0">
+            <a:spAutoFit/>
+          </a:bodyPr>
+          <a:lstStyle/>
+          <a:p>
+            <a:r>
+              <a:rPr lang="en-US" sz="1350" dirty="0">
+                <a:latin typeface="Consolas" panose="020B0609020204030204" pitchFamily="49" charset="0"/>
+                <a:cs typeface="Consolas" panose="020B0609020204030204" pitchFamily="49" charset="0"/>
+              </a:rPr>
+              <a:t>0x12345678</a:t>
+            </a:r>
+          </a:p>
+        </p:txBody>
+      </p:sp>
+      <p:cxnSp>
+        <p:nvCxnSpPr>
+          <p:cNvPr id="9" name="Straight Arrow Connector 8">
+            <a:extLst>
+              <a:ext uri="{FF2B5EF4-FFF2-40B4-BE49-F238E27FC236}">
+                <a16:creationId xmlns:a16="http://schemas.microsoft.com/office/drawing/2014/main" id="{38C06581-F221-454A-B957-F8258EBDE837}"/>
+              </a:ext>
+            </a:extLst>
+          </p:cNvPr>
+          <p:cNvCxnSpPr/>
+          <p:nvPr/>
+        </p:nvCxnSpPr>
+        <p:spPr>
+          <a:xfrm>
+            <a:off x="1485900" y="4713314"/>
+            <a:ext cx="285750" cy="0"/>
+          </a:xfrm>
+          <a:prstGeom prst="straightConnector1">
+            <a:avLst/>
+          </a:prstGeom>
+          <a:ln>
+            <a:tailEnd type="triangle"/>
+          </a:ln>
+        </p:spPr>
+        <p:style>
+          <a:lnRef idx="1">
+            <a:schemeClr val="accent1"/>
+          </a:lnRef>
+          <a:fillRef idx="0">
+            <a:schemeClr val="accent1"/>
+          </a:fillRef>
+          <a:effectRef idx="0">
+            <a:schemeClr val="accent1"/>
+          </a:effectRef>
+          <a:fontRef idx="minor">
+            <a:schemeClr val="tx1"/>
+          </a:fontRef>
+        </p:style>
+      </p:cxnSp>
+      <p:sp>
+        <p:nvSpPr>
+          <p:cNvPr id="10" name="TextBox 9">
+            <a:extLst>
+              <a:ext uri="{FF2B5EF4-FFF2-40B4-BE49-F238E27FC236}">
+                <a16:creationId xmlns:a16="http://schemas.microsoft.com/office/drawing/2014/main" id="{4580A862-E780-3041-A52F-CEC03FE2AA6F}"/>
+              </a:ext>
+            </a:extLst>
+          </p:cNvPr>
+          <p:cNvSpPr txBox="1"/>
+          <p:nvPr/>
+        </p:nvSpPr>
+        <p:spPr>
+          <a:xfrm>
+            <a:off x="1882879" y="4574814"/>
+            <a:ext cx="1130438" cy="300082"/>
+          </a:xfrm>
+          <a:prstGeom prst="rect">
+            <a:avLst/>
+          </a:prstGeom>
+          <a:noFill/>
+        </p:spPr>
+        <p:txBody>
+          <a:bodyPr wrap="none" rtlCol="0">
+            <a:spAutoFit/>
+          </a:bodyPr>
+          <a:lstStyle/>
+          <a:p>
+            <a:r>
+              <a:rPr lang="en-US" sz="1350" dirty="0">
+                <a:latin typeface="Consolas" panose="020B0609020204030204" pitchFamily="49" charset="0"/>
+                <a:cs typeface="Consolas" panose="020B0609020204030204" pitchFamily="49" charset="0"/>
+              </a:rPr>
+              <a:t>0x00005678</a:t>
+            </a:r>
+          </a:p>
+        </p:txBody>
+      </p:sp>
+      <p:sp>
+        <p:nvSpPr>
+          <p:cNvPr id="11" name="TextBox 10">
+            <a:extLst>
+              <a:ext uri="{FF2B5EF4-FFF2-40B4-BE49-F238E27FC236}">
+                <a16:creationId xmlns:a16="http://schemas.microsoft.com/office/drawing/2014/main" id="{F73CED4B-2CEE-5847-B651-71C8F701F73C}"/>
+              </a:ext>
+            </a:extLst>
+          </p:cNvPr>
+          <p:cNvSpPr txBox="1"/>
+          <p:nvPr/>
+        </p:nvSpPr>
+        <p:spPr>
+          <a:xfrm>
+            <a:off x="290245" y="4961164"/>
+            <a:ext cx="1130438" cy="300082"/>
+          </a:xfrm>
+          <a:prstGeom prst="rect">
+            <a:avLst/>
+          </a:prstGeom>
+          <a:noFill/>
+        </p:spPr>
+        <p:txBody>
+          <a:bodyPr wrap="none" rtlCol="0">
+            <a:spAutoFit/>
+          </a:bodyPr>
+          <a:lstStyle/>
+          <a:p>
+            <a:r>
+              <a:rPr lang="en-US" sz="1350" dirty="0">
+                <a:latin typeface="Consolas" panose="020B0609020204030204" pitchFamily="49" charset="0"/>
+                <a:cs typeface="Consolas" panose="020B0609020204030204" pitchFamily="49" charset="0"/>
+              </a:rPr>
+              <a:t>0x1234ABCD</a:t>
+            </a:r>
+          </a:p>
+        </p:txBody>
+      </p:sp>
+      <p:cxnSp>
+        <p:nvCxnSpPr>
+          <p:cNvPr id="12" name="Straight Arrow Connector 11">
+            <a:extLst>
+              <a:ext uri="{FF2B5EF4-FFF2-40B4-BE49-F238E27FC236}">
+                <a16:creationId xmlns:a16="http://schemas.microsoft.com/office/drawing/2014/main" id="{FD215319-D751-D24D-83E5-80D4E6FB9D69}"/>
+              </a:ext>
+            </a:extLst>
+          </p:cNvPr>
+          <p:cNvCxnSpPr/>
+          <p:nvPr/>
+        </p:nvCxnSpPr>
+        <p:spPr>
+          <a:xfrm>
+            <a:off x="1490395" y="5099663"/>
+            <a:ext cx="285750" cy="0"/>
+          </a:xfrm>
+          <a:prstGeom prst="straightConnector1">
+            <a:avLst/>
+          </a:prstGeom>
+          <a:ln>
+            <a:tailEnd type="triangle"/>
+          </a:ln>
+        </p:spPr>
+        <p:style>
+          <a:lnRef idx="1">
+            <a:schemeClr val="accent1"/>
+          </a:lnRef>
+          <a:fillRef idx="0">
+            <a:schemeClr val="accent1"/>
+          </a:fillRef>
+          <a:effectRef idx="0">
+            <a:schemeClr val="accent1"/>
+          </a:effectRef>
+          <a:fontRef idx="minor">
+            <a:schemeClr val="tx1"/>
+          </a:fontRef>
+        </p:style>
+      </p:cxnSp>
+      <p:sp>
+        <p:nvSpPr>
+          <p:cNvPr id="13" name="TextBox 12">
+            <a:extLst>
+              <a:ext uri="{FF2B5EF4-FFF2-40B4-BE49-F238E27FC236}">
+                <a16:creationId xmlns:a16="http://schemas.microsoft.com/office/drawing/2014/main" id="{61396BB7-6492-2C46-A6BE-EF731ECF740B}"/>
+              </a:ext>
+            </a:extLst>
+          </p:cNvPr>
+          <p:cNvSpPr txBox="1"/>
+          <p:nvPr/>
+        </p:nvSpPr>
+        <p:spPr>
+          <a:xfrm>
+            <a:off x="1887374" y="4961164"/>
+            <a:ext cx="1130438" cy="300082"/>
+          </a:xfrm>
+          <a:prstGeom prst="rect">
+            <a:avLst/>
+          </a:prstGeom>
+          <a:noFill/>
+        </p:spPr>
+        <p:txBody>
+          <a:bodyPr wrap="none" rtlCol="0">
+            <a:spAutoFit/>
+          </a:bodyPr>
+          <a:lstStyle/>
+          <a:p>
+            <a:r>
+              <a:rPr lang="en-US" sz="1350" dirty="0">
+                <a:latin typeface="Consolas" panose="020B0609020204030204" pitchFamily="49" charset="0"/>
+                <a:cs typeface="Consolas" panose="020B0609020204030204" pitchFamily="49" charset="0"/>
+              </a:rPr>
+              <a:t>0xFFFFABCD</a:t>
+            </a:r>
+          </a:p>
+        </p:txBody>
+      </p:sp>
+      <p:sp>
+        <p:nvSpPr>
+          <p:cNvPr id="14" name="TextBox 13">
+            <a:extLst>
+              <a:ext uri="{FF2B5EF4-FFF2-40B4-BE49-F238E27FC236}">
+                <a16:creationId xmlns:a16="http://schemas.microsoft.com/office/drawing/2014/main" id="{37AC389A-52DF-BA4B-B78C-31E43AB8F715}"/>
+              </a:ext>
+            </a:extLst>
+          </p:cNvPr>
+          <p:cNvSpPr txBox="1"/>
+          <p:nvPr/>
+        </p:nvSpPr>
+        <p:spPr>
+          <a:xfrm>
+            <a:off x="285750" y="3986192"/>
+            <a:ext cx="2454518" cy="507831"/>
+          </a:xfrm>
+          <a:prstGeom prst="rect">
+            <a:avLst/>
+          </a:prstGeom>
+          <a:noFill/>
+        </p:spPr>
+        <p:txBody>
+          <a:bodyPr wrap="none" rtlCol="0">
+            <a:spAutoFit/>
+          </a:bodyPr>
+          <a:lstStyle/>
+          <a:p>
+            <a:r>
+              <a:rPr lang="en-US" sz="1350" dirty="0">
+                <a:solidFill>
+                  <a:srgbClr val="C00000"/>
+                </a:solidFill>
+                <a:latin typeface="Consolas" panose="020B0609020204030204" pitchFamily="49" charset="0"/>
+                <a:cs typeface="Consolas" panose="020B0609020204030204" pitchFamily="49" charset="0"/>
+              </a:rPr>
+              <a:t>int32_t x = 0x12345678;</a:t>
+            </a:r>
+          </a:p>
+          <a:p>
+            <a:r>
+              <a:rPr lang="en-US" sz="1350" dirty="0">
+                <a:solidFill>
+                  <a:srgbClr val="C00000"/>
+                </a:solidFill>
+                <a:latin typeface="Consolas" panose="020B0609020204030204" pitchFamily="49" charset="0"/>
+                <a:cs typeface="Consolas" panose="020B0609020204030204" pitchFamily="49" charset="0"/>
+              </a:rPr>
+              <a:t>int16_t y = (int16_t) x;</a:t>
+            </a:r>
+          </a:p>
+        </p:txBody>
+      </p:sp>
+    </p:spTree>
+    <p:extLst>
+      <p:ext uri="{BB962C8B-B14F-4D97-AF65-F5344CB8AC3E}">
+        <p14:creationId xmlns:p14="http://schemas.microsoft.com/office/powerpoint/2010/main" val="658532706"/>
+      </p:ext>
+    </p:extLst>
+  </p:cSld>
+  <p:clrMapOvr>
+    <a:masterClrMapping/>
+  </p:clrMapOvr>
+</p:sld>
+</file>
+
+<file path=ppt/slides/slide31.xml><?xml version="1.0" encoding="utf-8"?>
+<p:sld xmlns:a="http://schemas.openxmlformats.org/drawingml/2006/main" xmlns:r="http://schemas.openxmlformats.org/officeDocument/2006/relationships" xmlns:p="http://schemas.openxmlformats.org/presentationml/2006/main">
+  <p:cSld>
+    <p:spTree>
+      <p:nvGrpSpPr>
+        <p:cNvPr id="1" name=""/>
+        <p:cNvGrpSpPr/>
+        <p:nvPr/>
+      </p:nvGrpSpPr>
+      <p:grpSpPr>
+        <a:xfrm>
+          <a:off x="0" y="0"/>
+          <a:ext cx="0" cy="0"/>
+          <a:chOff x="0" y="0"/>
+          <a:chExt cx="0" cy="0"/>
+        </a:xfrm>
+      </p:grpSpPr>
+      <p:sp>
+        <p:nvSpPr>
+          <p:cNvPr id="2" name="Title 1">
+            <a:extLst>
+              <a:ext uri="{FF2B5EF4-FFF2-40B4-BE49-F238E27FC236}">
                 <a16:creationId xmlns:a16="http://schemas.microsoft.com/office/drawing/2014/main" id="{0B680E2F-C62E-EF54-5DBD-340196E1CA5F}"/>
               </a:ext>
             </a:extLst>
@@ -25216,7 +26509,7 @@
             <a:fld id="{EA7C8D44-3667-46F6-9772-CC52308E2A7F}" type="slidenum">
               <a:rPr kumimoji="0" lang="en-US" smtClean="0"/>
               <a:pPr/>
-              <a:t>30</a:t>
+              <a:t>31</a:t>
             </a:fld>
             <a:endParaRPr kumimoji="0" lang="en-US" dirty="0"/>
           </a:p>
@@ -25398,6 +26691,939 @@
       </p:grpSpPr>
       <p:sp>
         <p:nvSpPr>
+          <p:cNvPr id="2" name="Title 1"/>
+          <p:cNvSpPr>
+            <a:spLocks noGrp="1"/>
+          </p:cNvSpPr>
+          <p:nvPr>
+            <p:ph type="title"/>
+          </p:nvPr>
+        </p:nvSpPr>
+        <p:spPr/>
+        <p:txBody>
+          <a:bodyPr/>
+          <a:lstStyle/>
+          <a:p>
+            <a:r>
+              <a:rPr lang="en-GB" dirty="0"/>
+              <a:t>PUSH/POP Multiple Registers</a:t>
+            </a:r>
+          </a:p>
+        </p:txBody>
+      </p:sp>
+      <p:sp>
+        <p:nvSpPr>
+          <p:cNvPr id="3" name="Content Placeholder 2"/>
+          <p:cNvSpPr>
+            <a:spLocks noGrp="1"/>
+          </p:cNvSpPr>
+          <p:nvPr>
+            <p:ph idx="1"/>
+          </p:nvPr>
+        </p:nvSpPr>
+        <p:spPr>
+          <a:xfrm>
+            <a:off x="381000" y="1406604"/>
+            <a:ext cx="8229600" cy="1905000"/>
+          </a:xfrm>
+        </p:spPr>
+        <p:txBody>
+          <a:bodyPr/>
+          <a:lstStyle/>
+          <a:p>
+            <a:pPr>
+              <a:buNone/>
+            </a:pPr>
+            <a:endParaRPr lang="en-GB" dirty="0"/>
+          </a:p>
+        </p:txBody>
+      </p:sp>
+      <p:sp>
+        <p:nvSpPr>
+          <p:cNvPr id="4" name="Slide Number Placeholder 3"/>
+          <p:cNvSpPr>
+            <a:spLocks noGrp="1"/>
+          </p:cNvSpPr>
+          <p:nvPr>
+            <p:ph type="sldNum" sz="quarter" idx="12"/>
+          </p:nvPr>
+        </p:nvSpPr>
+        <p:spPr/>
+        <p:txBody>
+          <a:bodyPr/>
+          <a:lstStyle/>
+          <a:p>
+            <a:fld id="{EA7C8D44-3667-46F6-9772-CC52308E2A7F}" type="slidenum">
+              <a:rPr kumimoji="0" lang="en-US" smtClean="0"/>
+              <a:pPr/>
+              <a:t>4</a:t>
+            </a:fld>
+            <a:endParaRPr kumimoji="0" lang="en-US" dirty="0"/>
+          </a:p>
+        </p:txBody>
+      </p:sp>
+      <p:sp>
+        <p:nvSpPr>
+          <p:cNvPr id="5" name="Rectangle 4"/>
+          <p:cNvSpPr/>
+          <p:nvPr/>
+        </p:nvSpPr>
+        <p:spPr>
+          <a:xfrm>
+            <a:off x="410688" y="1788805"/>
+            <a:ext cx="2488850" cy="369332"/>
+          </a:xfrm>
+          <a:prstGeom prst="rect">
+            <a:avLst/>
+          </a:prstGeom>
+        </p:spPr>
+        <p:txBody>
+          <a:bodyPr wrap="square">
+            <a:spAutoFit/>
+          </a:bodyPr>
+          <a:lstStyle/>
+          <a:p>
+            <a:r>
+              <a:rPr lang="en-GB" b="1" dirty="0">
+                <a:solidFill>
+                  <a:srgbClr val="FF0000"/>
+                </a:solidFill>
+                <a:latin typeface="Consolas" panose="020B0609020204030204" pitchFamily="49" charset="0"/>
+                <a:cs typeface="Consolas" panose="020B0609020204030204" pitchFamily="49" charset="0"/>
+              </a:rPr>
+              <a:t>PUSH {r6, r7, </a:t>
+            </a:r>
+            <a:r>
+              <a:rPr lang="en-GB" b="1" dirty="0" err="1">
+                <a:solidFill>
+                  <a:srgbClr val="FF0000"/>
+                </a:solidFill>
+                <a:latin typeface="Consolas" panose="020B0609020204030204" pitchFamily="49" charset="0"/>
+                <a:cs typeface="Consolas" panose="020B0609020204030204" pitchFamily="49" charset="0"/>
+              </a:rPr>
+              <a:t>r8</a:t>
+            </a:r>
+            <a:r>
+              <a:rPr lang="en-GB" b="1" dirty="0">
+                <a:solidFill>
+                  <a:srgbClr val="FF0000"/>
+                </a:solidFill>
+                <a:latin typeface="Consolas" panose="020B0609020204030204" pitchFamily="49" charset="0"/>
+                <a:cs typeface="Consolas" panose="020B0609020204030204" pitchFamily="49" charset="0"/>
+              </a:rPr>
+              <a:t>}</a:t>
+            </a:r>
+          </a:p>
+        </p:txBody>
+      </p:sp>
+      <p:sp>
+        <p:nvSpPr>
+          <p:cNvPr id="6" name="TextBox 5"/>
+          <p:cNvSpPr txBox="1"/>
+          <p:nvPr/>
+        </p:nvSpPr>
+        <p:spPr>
+          <a:xfrm>
+            <a:off x="3611088" y="1406604"/>
+            <a:ext cx="1969129" cy="369332"/>
+          </a:xfrm>
+          <a:prstGeom prst="rect">
+            <a:avLst/>
+          </a:prstGeom>
+          <a:noFill/>
+        </p:spPr>
+        <p:txBody>
+          <a:bodyPr wrap="none" rtlCol="0">
+            <a:spAutoFit/>
+          </a:bodyPr>
+          <a:lstStyle/>
+          <a:p>
+            <a:r>
+              <a:rPr lang="en-US" i="1" dirty="0"/>
+              <a:t>They are equivalent. </a:t>
+            </a:r>
+          </a:p>
+        </p:txBody>
+      </p:sp>
+      <p:sp>
+        <p:nvSpPr>
+          <p:cNvPr id="8" name="Rectangle 7"/>
+          <p:cNvSpPr/>
+          <p:nvPr/>
+        </p:nvSpPr>
+        <p:spPr>
+          <a:xfrm>
+            <a:off x="6963888" y="1508799"/>
+            <a:ext cx="1324402" cy="923330"/>
+          </a:xfrm>
+          <a:prstGeom prst="rect">
+            <a:avLst/>
+          </a:prstGeom>
+        </p:spPr>
+        <p:txBody>
+          <a:bodyPr wrap="none">
+            <a:spAutoFit/>
+          </a:bodyPr>
+          <a:lstStyle/>
+          <a:p>
+            <a:r>
+              <a:rPr lang="en-GB" b="1" dirty="0">
+                <a:solidFill>
+                  <a:srgbClr val="FF0000"/>
+                </a:solidFill>
+                <a:latin typeface="Consolas" panose="020B0609020204030204" pitchFamily="49" charset="0"/>
+                <a:cs typeface="Consolas" panose="020B0609020204030204" pitchFamily="49" charset="0"/>
+              </a:rPr>
+              <a:t>PUSH {r8}</a:t>
+            </a:r>
+          </a:p>
+          <a:p>
+            <a:r>
+              <a:rPr lang="en-GB" b="1" dirty="0">
+                <a:solidFill>
+                  <a:srgbClr val="FF0000"/>
+                </a:solidFill>
+                <a:latin typeface="Consolas" panose="020B0609020204030204" pitchFamily="49" charset="0"/>
+                <a:cs typeface="Consolas" panose="020B0609020204030204" pitchFamily="49" charset="0"/>
+              </a:rPr>
+              <a:t>PUSH {r7}</a:t>
+            </a:r>
+          </a:p>
+          <a:p>
+            <a:r>
+              <a:rPr lang="en-GB" b="1" dirty="0">
+                <a:solidFill>
+                  <a:srgbClr val="FF0000"/>
+                </a:solidFill>
+                <a:latin typeface="Consolas" panose="020B0609020204030204" pitchFamily="49" charset="0"/>
+                <a:cs typeface="Consolas" panose="020B0609020204030204" pitchFamily="49" charset="0"/>
+              </a:rPr>
+              <a:t>PUSH {r6}</a:t>
+            </a:r>
+          </a:p>
+        </p:txBody>
+      </p:sp>
+      <p:sp>
+        <p:nvSpPr>
+          <p:cNvPr id="10" name="Rectangle 9"/>
+          <p:cNvSpPr/>
+          <p:nvPr/>
+        </p:nvSpPr>
+        <p:spPr>
+          <a:xfrm>
+            <a:off x="3611088" y="1788805"/>
+            <a:ext cx="2337499" cy="369332"/>
+          </a:xfrm>
+          <a:prstGeom prst="rect">
+            <a:avLst/>
+          </a:prstGeom>
+        </p:spPr>
+        <p:txBody>
+          <a:bodyPr wrap="none">
+            <a:spAutoFit/>
+          </a:bodyPr>
+          <a:lstStyle/>
+          <a:p>
+            <a:r>
+              <a:rPr lang="en-GB" b="1" dirty="0">
+                <a:solidFill>
+                  <a:srgbClr val="FF0000"/>
+                </a:solidFill>
+                <a:latin typeface="Consolas" panose="020B0609020204030204" pitchFamily="49" charset="0"/>
+                <a:cs typeface="Consolas" panose="020B0609020204030204" pitchFamily="49" charset="0"/>
+              </a:rPr>
+              <a:t>PUSH {</a:t>
+            </a:r>
+            <a:r>
+              <a:rPr lang="en-GB" b="1" dirty="0" err="1">
+                <a:solidFill>
+                  <a:srgbClr val="FF0000"/>
+                </a:solidFill>
+                <a:latin typeface="Consolas" panose="020B0609020204030204" pitchFamily="49" charset="0"/>
+                <a:cs typeface="Consolas" panose="020B0609020204030204" pitchFamily="49" charset="0"/>
+              </a:rPr>
+              <a:t>r8</a:t>
+            </a:r>
+            <a:r>
+              <a:rPr lang="en-GB" b="1" dirty="0">
+                <a:solidFill>
+                  <a:srgbClr val="FF0000"/>
+                </a:solidFill>
+                <a:latin typeface="Consolas" panose="020B0609020204030204" pitchFamily="49" charset="0"/>
+                <a:cs typeface="Consolas" panose="020B0609020204030204" pitchFamily="49" charset="0"/>
+              </a:rPr>
+              <a:t>, </a:t>
+            </a:r>
+            <a:r>
+              <a:rPr lang="en-GB" b="1" dirty="0" err="1">
+                <a:solidFill>
+                  <a:srgbClr val="FF0000"/>
+                </a:solidFill>
+                <a:latin typeface="Consolas" panose="020B0609020204030204" pitchFamily="49" charset="0"/>
+                <a:cs typeface="Consolas" panose="020B0609020204030204" pitchFamily="49" charset="0"/>
+              </a:rPr>
+              <a:t>r7</a:t>
+            </a:r>
+            <a:r>
+              <a:rPr lang="en-GB" b="1" dirty="0">
+                <a:solidFill>
+                  <a:srgbClr val="FF0000"/>
+                </a:solidFill>
+                <a:latin typeface="Consolas" panose="020B0609020204030204" pitchFamily="49" charset="0"/>
+                <a:cs typeface="Consolas" panose="020B0609020204030204" pitchFamily="49" charset="0"/>
+              </a:rPr>
+              <a:t>, </a:t>
+            </a:r>
+            <a:r>
+              <a:rPr lang="en-GB" b="1" dirty="0" err="1">
+                <a:solidFill>
+                  <a:srgbClr val="FF0000"/>
+                </a:solidFill>
+                <a:latin typeface="Consolas" panose="020B0609020204030204" pitchFamily="49" charset="0"/>
+                <a:cs typeface="Consolas" panose="020B0609020204030204" pitchFamily="49" charset="0"/>
+              </a:rPr>
+              <a:t>r6</a:t>
+            </a:r>
+            <a:r>
+              <a:rPr lang="en-GB" b="1" dirty="0">
+                <a:solidFill>
+                  <a:srgbClr val="FF0000"/>
+                </a:solidFill>
+                <a:latin typeface="Consolas" panose="020B0609020204030204" pitchFamily="49" charset="0"/>
+                <a:cs typeface="Consolas" panose="020B0609020204030204" pitchFamily="49" charset="0"/>
+              </a:rPr>
+              <a:t>}</a:t>
+            </a:r>
+          </a:p>
+        </p:txBody>
+      </p:sp>
+      <p:sp>
+        <p:nvSpPr>
+          <p:cNvPr id="11" name="Left-Right Arrow 10"/>
+          <p:cNvSpPr/>
+          <p:nvPr/>
+        </p:nvSpPr>
+        <p:spPr>
+          <a:xfrm>
+            <a:off x="3001488" y="1917005"/>
+            <a:ext cx="482950" cy="197882"/>
+          </a:xfrm>
+          <a:prstGeom prst="leftRightArrow">
+            <a:avLst/>
+          </a:prstGeom>
+        </p:spPr>
+        <p:style>
+          <a:lnRef idx="2">
+            <a:schemeClr val="accent1">
+              <a:shade val="50000"/>
+            </a:schemeClr>
+          </a:lnRef>
+          <a:fillRef idx="1">
+            <a:schemeClr val="accent1"/>
+          </a:fillRef>
+          <a:effectRef idx="0">
+            <a:schemeClr val="accent1"/>
+          </a:effectRef>
+          <a:fontRef idx="minor">
+            <a:schemeClr val="lt1"/>
+          </a:fontRef>
+        </p:style>
+        <p:txBody>
+          <a:bodyPr rtlCol="0" anchor="ctr"/>
+          <a:lstStyle/>
+          <a:p>
+            <a:pPr algn="ctr"/>
+            <a:endParaRPr lang="en-US"/>
+          </a:p>
+        </p:txBody>
+      </p:sp>
+      <p:sp>
+        <p:nvSpPr>
+          <p:cNvPr id="12" name="Left-Right Arrow 11"/>
+          <p:cNvSpPr/>
+          <p:nvPr/>
+        </p:nvSpPr>
+        <p:spPr>
+          <a:xfrm>
+            <a:off x="6278088" y="1871523"/>
+            <a:ext cx="482950" cy="197882"/>
+          </a:xfrm>
+          <a:prstGeom prst="leftRightArrow">
+            <a:avLst/>
+          </a:prstGeom>
+        </p:spPr>
+        <p:style>
+          <a:lnRef idx="2">
+            <a:schemeClr val="accent1">
+              <a:shade val="50000"/>
+            </a:schemeClr>
+          </a:lnRef>
+          <a:fillRef idx="1">
+            <a:schemeClr val="accent1"/>
+          </a:fillRef>
+          <a:effectRef idx="0">
+            <a:schemeClr val="accent1"/>
+          </a:effectRef>
+          <a:fontRef idx="minor">
+            <a:schemeClr val="lt1"/>
+          </a:fontRef>
+        </p:style>
+        <p:txBody>
+          <a:bodyPr rtlCol="0" anchor="ctr"/>
+          <a:lstStyle/>
+          <a:p>
+            <a:pPr algn="ctr"/>
+            <a:endParaRPr lang="en-US"/>
+          </a:p>
+        </p:txBody>
+      </p:sp>
+      <p:sp>
+        <p:nvSpPr>
+          <p:cNvPr id="13" name="Rectangle 12"/>
+          <p:cNvSpPr/>
+          <p:nvPr/>
+        </p:nvSpPr>
+        <p:spPr>
+          <a:xfrm>
+            <a:off x="300923" y="3771722"/>
+            <a:ext cx="8309677" cy="2862322"/>
+          </a:xfrm>
+          <a:prstGeom prst="rect">
+            <a:avLst/>
+          </a:prstGeom>
+        </p:spPr>
+        <p:txBody>
+          <a:bodyPr wrap="square">
+            <a:spAutoFit/>
+          </a:bodyPr>
+          <a:lstStyle/>
+          <a:p>
+            <a:pPr marL="285750" indent="-285750">
+              <a:buFont typeface="Arial" panose="020B0604020202020204" pitchFamily="34" charset="0"/>
+              <a:buChar char="•"/>
+            </a:pPr>
+            <a:r>
+              <a:rPr lang="en-US" sz="2000" dirty="0"/>
+              <a:t>PUSH/POP multiple registers in a single statement: the order in which registers listed in the {register list} does not matter</a:t>
+            </a:r>
+          </a:p>
+          <a:p>
+            <a:pPr marL="285750" indent="-285750">
+              <a:buFont typeface="Arial" panose="020B0604020202020204" pitchFamily="34" charset="0"/>
+              <a:buChar char="•"/>
+            </a:pPr>
+            <a:r>
+              <a:rPr lang="en-US" sz="2000" dirty="0"/>
+              <a:t>When pushing multiple registers, these registers are automatically </a:t>
+            </a:r>
+            <a:r>
+              <a:rPr lang="en-US" sz="2000" dirty="0">
+                <a:solidFill>
+                  <a:srgbClr val="3333FF"/>
+                </a:solidFill>
+              </a:rPr>
+              <a:t>sorted by name </a:t>
+            </a:r>
+            <a:r>
+              <a:rPr lang="en-US" sz="2000" dirty="0"/>
+              <a:t>and </a:t>
+            </a:r>
+            <a:r>
+              <a:rPr lang="en-US" sz="2000" dirty="0">
+                <a:solidFill>
+                  <a:srgbClr val="3333FF"/>
+                </a:solidFill>
+              </a:rPr>
+              <a:t>the lowest-numbered register </a:t>
+            </a:r>
+            <a:r>
+              <a:rPr lang="en-US" sz="2000" dirty="0"/>
+              <a:t>is stored to the lowest memory address, </a:t>
+            </a:r>
+            <a:r>
+              <a:rPr lang="en-US" sz="2000" i="1" dirty="0"/>
+              <a:t>i.e. </a:t>
+            </a:r>
+            <a:r>
+              <a:rPr lang="en-US" sz="2000" dirty="0">
+                <a:solidFill>
+                  <a:srgbClr val="3333FF"/>
+                </a:solidFill>
+              </a:rPr>
+              <a:t>is stored last</a:t>
+            </a:r>
+            <a:r>
+              <a:rPr lang="en-US" sz="2000" dirty="0"/>
+              <a:t>. </a:t>
+            </a:r>
+          </a:p>
+          <a:p>
+            <a:pPr marL="285750" indent="-285750">
+              <a:buFont typeface="Arial" panose="020B0604020202020204" pitchFamily="34" charset="0"/>
+              <a:buChar char="•"/>
+            </a:pPr>
+            <a:r>
+              <a:rPr lang="en-US" sz="2000" dirty="0"/>
+              <a:t>When popping multiple registers, these registers are automatically </a:t>
+            </a:r>
+            <a:r>
+              <a:rPr lang="en-US" sz="2000" dirty="0">
+                <a:solidFill>
+                  <a:srgbClr val="3333FF"/>
+                </a:solidFill>
+              </a:rPr>
+              <a:t>sorted by name </a:t>
+            </a:r>
+            <a:r>
+              <a:rPr lang="en-US" sz="2000" dirty="0"/>
+              <a:t>and </a:t>
+            </a:r>
+            <a:r>
+              <a:rPr lang="en-US" sz="2000" dirty="0">
+                <a:solidFill>
+                  <a:srgbClr val="3333FF"/>
+                </a:solidFill>
+              </a:rPr>
+              <a:t>the lowest-numbered register</a:t>
+            </a:r>
+            <a:r>
+              <a:rPr lang="en-US" sz="2000" dirty="0"/>
+              <a:t> is loaded from the lowest memory address, </a:t>
+            </a:r>
+            <a:r>
+              <a:rPr lang="en-US" sz="2000" i="1" dirty="0"/>
+              <a:t>i.e. </a:t>
+            </a:r>
+            <a:r>
+              <a:rPr lang="en-US" sz="2000" dirty="0">
+                <a:solidFill>
+                  <a:srgbClr val="3333FF"/>
+                </a:solidFill>
+              </a:rPr>
+              <a:t>is loaded first</a:t>
+            </a:r>
+            <a:r>
+              <a:rPr lang="en-US" sz="2000" dirty="0"/>
+              <a:t>. </a:t>
+            </a:r>
+          </a:p>
+          <a:p>
+            <a:pPr marL="285750" indent="-285750">
+              <a:buFont typeface="Arial" panose="020B0604020202020204" pitchFamily="34" charset="0"/>
+              <a:buChar char="•"/>
+            </a:pPr>
+            <a:endParaRPr lang="en-US" sz="2000" dirty="0"/>
+          </a:p>
+        </p:txBody>
+      </p:sp>
+      <p:sp>
+        <p:nvSpPr>
+          <p:cNvPr id="14" name="Rectangle 13"/>
+          <p:cNvSpPr/>
+          <p:nvPr/>
+        </p:nvSpPr>
+        <p:spPr>
+          <a:xfrm>
+            <a:off x="3679858" y="2831068"/>
+            <a:ext cx="2286000" cy="369332"/>
+          </a:xfrm>
+          <a:prstGeom prst="rect">
+            <a:avLst/>
+          </a:prstGeom>
+        </p:spPr>
+        <p:txBody>
+          <a:bodyPr wrap="square">
+            <a:spAutoFit/>
+          </a:bodyPr>
+          <a:lstStyle/>
+          <a:p>
+            <a:r>
+              <a:rPr lang="en-GB" b="1" dirty="0">
+                <a:solidFill>
+                  <a:srgbClr val="FF0000"/>
+                </a:solidFill>
+                <a:latin typeface="Consolas" panose="020B0609020204030204" pitchFamily="49" charset="0"/>
+                <a:cs typeface="Consolas" panose="020B0609020204030204" pitchFamily="49" charset="0"/>
+              </a:rPr>
+              <a:t>POP {r8, r7, r6}</a:t>
+            </a:r>
+          </a:p>
+        </p:txBody>
+      </p:sp>
+      <p:sp>
+        <p:nvSpPr>
+          <p:cNvPr id="15" name="TextBox 14"/>
+          <p:cNvSpPr txBox="1"/>
+          <p:nvPr/>
+        </p:nvSpPr>
+        <p:spPr>
+          <a:xfrm>
+            <a:off x="3680557" y="2397204"/>
+            <a:ext cx="1969129" cy="369332"/>
+          </a:xfrm>
+          <a:prstGeom prst="rect">
+            <a:avLst/>
+          </a:prstGeom>
+          <a:noFill/>
+        </p:spPr>
+        <p:txBody>
+          <a:bodyPr wrap="none" rtlCol="0">
+            <a:spAutoFit/>
+          </a:bodyPr>
+          <a:lstStyle/>
+          <a:p>
+            <a:r>
+              <a:rPr lang="en-US" i="1" dirty="0"/>
+              <a:t>They are equivalent. </a:t>
+            </a:r>
+          </a:p>
+        </p:txBody>
+      </p:sp>
+      <p:sp>
+        <p:nvSpPr>
+          <p:cNvPr id="16" name="Rectangle 15"/>
+          <p:cNvSpPr/>
+          <p:nvPr/>
+        </p:nvSpPr>
+        <p:spPr>
+          <a:xfrm>
+            <a:off x="6955636" y="2581870"/>
+            <a:ext cx="1197764" cy="923330"/>
+          </a:xfrm>
+          <a:prstGeom prst="rect">
+            <a:avLst/>
+          </a:prstGeom>
+        </p:spPr>
+        <p:txBody>
+          <a:bodyPr wrap="none">
+            <a:spAutoFit/>
+          </a:bodyPr>
+          <a:lstStyle/>
+          <a:p>
+            <a:r>
+              <a:rPr lang="en-GB" b="1" dirty="0">
+                <a:solidFill>
+                  <a:srgbClr val="FF0000"/>
+                </a:solidFill>
+                <a:latin typeface="Consolas" panose="020B0609020204030204" pitchFamily="49" charset="0"/>
+                <a:cs typeface="Consolas" panose="020B0609020204030204" pitchFamily="49" charset="0"/>
+              </a:rPr>
+              <a:t>POP {</a:t>
+            </a:r>
+            <a:r>
+              <a:rPr lang="en-GB" b="1" dirty="0" err="1">
+                <a:solidFill>
+                  <a:srgbClr val="FF0000"/>
+                </a:solidFill>
+                <a:latin typeface="Consolas" panose="020B0609020204030204" pitchFamily="49" charset="0"/>
+                <a:cs typeface="Consolas" panose="020B0609020204030204" pitchFamily="49" charset="0"/>
+              </a:rPr>
+              <a:t>r6</a:t>
+            </a:r>
+            <a:r>
+              <a:rPr lang="en-GB" b="1" dirty="0">
+                <a:solidFill>
+                  <a:srgbClr val="FF0000"/>
+                </a:solidFill>
+                <a:latin typeface="Consolas" panose="020B0609020204030204" pitchFamily="49" charset="0"/>
+                <a:cs typeface="Consolas" panose="020B0609020204030204" pitchFamily="49" charset="0"/>
+              </a:rPr>
+              <a:t>}</a:t>
+            </a:r>
+          </a:p>
+          <a:p>
+            <a:r>
+              <a:rPr lang="en-GB" b="1" dirty="0">
+                <a:solidFill>
+                  <a:srgbClr val="FF0000"/>
+                </a:solidFill>
+                <a:latin typeface="Consolas" panose="020B0609020204030204" pitchFamily="49" charset="0"/>
+                <a:cs typeface="Consolas" panose="020B0609020204030204" pitchFamily="49" charset="0"/>
+              </a:rPr>
+              <a:t>POP {r7}</a:t>
+            </a:r>
+          </a:p>
+          <a:p>
+            <a:r>
+              <a:rPr lang="en-GB" b="1" dirty="0">
+                <a:solidFill>
+                  <a:srgbClr val="FF0000"/>
+                </a:solidFill>
+                <a:latin typeface="Consolas" panose="020B0609020204030204" pitchFamily="49" charset="0"/>
+                <a:cs typeface="Consolas" panose="020B0609020204030204" pitchFamily="49" charset="0"/>
+              </a:rPr>
+              <a:t>POP {</a:t>
+            </a:r>
+            <a:r>
+              <a:rPr lang="en-GB" b="1" dirty="0" err="1">
+                <a:solidFill>
+                  <a:srgbClr val="FF0000"/>
+                </a:solidFill>
+                <a:latin typeface="Consolas" panose="020B0609020204030204" pitchFamily="49" charset="0"/>
+                <a:cs typeface="Consolas" panose="020B0609020204030204" pitchFamily="49" charset="0"/>
+              </a:rPr>
+              <a:t>r8</a:t>
+            </a:r>
+            <a:r>
+              <a:rPr lang="en-GB" b="1" dirty="0">
+                <a:solidFill>
+                  <a:srgbClr val="FF0000"/>
+                </a:solidFill>
+                <a:latin typeface="Consolas" panose="020B0609020204030204" pitchFamily="49" charset="0"/>
+                <a:cs typeface="Consolas" panose="020B0609020204030204" pitchFamily="49" charset="0"/>
+              </a:rPr>
+              <a:t>}</a:t>
+            </a:r>
+          </a:p>
+        </p:txBody>
+      </p:sp>
+      <p:sp>
+        <p:nvSpPr>
+          <p:cNvPr id="17" name="Rectangle 16"/>
+          <p:cNvSpPr/>
+          <p:nvPr/>
+        </p:nvSpPr>
+        <p:spPr>
+          <a:xfrm>
+            <a:off x="457200" y="2831068"/>
+            <a:ext cx="2210862" cy="369332"/>
+          </a:xfrm>
+          <a:prstGeom prst="rect">
+            <a:avLst/>
+          </a:prstGeom>
+        </p:spPr>
+        <p:txBody>
+          <a:bodyPr wrap="none">
+            <a:spAutoFit/>
+          </a:bodyPr>
+          <a:lstStyle/>
+          <a:p>
+            <a:r>
+              <a:rPr lang="en-GB" b="1" dirty="0">
+                <a:solidFill>
+                  <a:srgbClr val="FF0000"/>
+                </a:solidFill>
+                <a:latin typeface="Consolas" panose="020B0609020204030204" pitchFamily="49" charset="0"/>
+                <a:cs typeface="Consolas" panose="020B0609020204030204" pitchFamily="49" charset="0"/>
+              </a:rPr>
+              <a:t>POP {</a:t>
+            </a:r>
+            <a:r>
+              <a:rPr lang="en-GB" b="1" dirty="0" err="1">
+                <a:solidFill>
+                  <a:srgbClr val="FF0000"/>
+                </a:solidFill>
+                <a:latin typeface="Consolas" panose="020B0609020204030204" pitchFamily="49" charset="0"/>
+                <a:cs typeface="Consolas" panose="020B0609020204030204" pitchFamily="49" charset="0"/>
+              </a:rPr>
+              <a:t>r6</a:t>
+            </a:r>
+            <a:r>
+              <a:rPr lang="en-GB" b="1" dirty="0">
+                <a:solidFill>
+                  <a:srgbClr val="FF0000"/>
+                </a:solidFill>
+                <a:latin typeface="Consolas" panose="020B0609020204030204" pitchFamily="49" charset="0"/>
+                <a:cs typeface="Consolas" panose="020B0609020204030204" pitchFamily="49" charset="0"/>
+              </a:rPr>
+              <a:t>, </a:t>
+            </a:r>
+            <a:r>
+              <a:rPr lang="en-GB" b="1" dirty="0" err="1">
+                <a:solidFill>
+                  <a:srgbClr val="FF0000"/>
+                </a:solidFill>
+                <a:latin typeface="Consolas" panose="020B0609020204030204" pitchFamily="49" charset="0"/>
+                <a:cs typeface="Consolas" panose="020B0609020204030204" pitchFamily="49" charset="0"/>
+              </a:rPr>
+              <a:t>r7</a:t>
+            </a:r>
+            <a:r>
+              <a:rPr lang="en-GB" b="1" dirty="0">
+                <a:solidFill>
+                  <a:srgbClr val="FF0000"/>
+                </a:solidFill>
+                <a:latin typeface="Consolas" panose="020B0609020204030204" pitchFamily="49" charset="0"/>
+                <a:cs typeface="Consolas" panose="020B0609020204030204" pitchFamily="49" charset="0"/>
+              </a:rPr>
+              <a:t>, </a:t>
+            </a:r>
+            <a:r>
+              <a:rPr lang="en-GB" b="1" dirty="0" err="1">
+                <a:solidFill>
+                  <a:srgbClr val="FF0000"/>
+                </a:solidFill>
+                <a:latin typeface="Consolas" panose="020B0609020204030204" pitchFamily="49" charset="0"/>
+                <a:cs typeface="Consolas" panose="020B0609020204030204" pitchFamily="49" charset="0"/>
+              </a:rPr>
+              <a:t>r8</a:t>
+            </a:r>
+            <a:r>
+              <a:rPr lang="en-GB" b="1" dirty="0">
+                <a:solidFill>
+                  <a:srgbClr val="FF0000"/>
+                </a:solidFill>
+                <a:latin typeface="Consolas" panose="020B0609020204030204" pitchFamily="49" charset="0"/>
+                <a:cs typeface="Consolas" panose="020B0609020204030204" pitchFamily="49" charset="0"/>
+              </a:rPr>
+              <a:t>}</a:t>
+            </a:r>
+          </a:p>
+        </p:txBody>
+      </p:sp>
+      <p:sp>
+        <p:nvSpPr>
+          <p:cNvPr id="18" name="Left-Right Arrow 17"/>
+          <p:cNvSpPr/>
+          <p:nvPr/>
+        </p:nvSpPr>
+        <p:spPr>
+          <a:xfrm>
+            <a:off x="2971800" y="2947600"/>
+            <a:ext cx="482950" cy="197882"/>
+          </a:xfrm>
+          <a:prstGeom prst="leftRightArrow">
+            <a:avLst/>
+          </a:prstGeom>
+        </p:spPr>
+        <p:style>
+          <a:lnRef idx="2">
+            <a:schemeClr val="accent1">
+              <a:shade val="50000"/>
+            </a:schemeClr>
+          </a:lnRef>
+          <a:fillRef idx="1">
+            <a:schemeClr val="accent1"/>
+          </a:fillRef>
+          <a:effectRef idx="0">
+            <a:schemeClr val="accent1"/>
+          </a:effectRef>
+          <a:fontRef idx="minor">
+            <a:schemeClr val="lt1"/>
+          </a:fontRef>
+        </p:style>
+        <p:txBody>
+          <a:bodyPr rtlCol="0" anchor="ctr"/>
+          <a:lstStyle/>
+          <a:p>
+            <a:pPr algn="ctr"/>
+            <a:endParaRPr lang="en-US"/>
+          </a:p>
+        </p:txBody>
+      </p:sp>
+      <p:sp>
+        <p:nvSpPr>
+          <p:cNvPr id="19" name="Left-Right Arrow 18"/>
+          <p:cNvSpPr/>
+          <p:nvPr/>
+        </p:nvSpPr>
+        <p:spPr>
+          <a:xfrm>
+            <a:off x="6248400" y="2902118"/>
+            <a:ext cx="482950" cy="197882"/>
+          </a:xfrm>
+          <a:prstGeom prst="leftRightArrow">
+            <a:avLst/>
+          </a:prstGeom>
+        </p:spPr>
+        <p:style>
+          <a:lnRef idx="2">
+            <a:schemeClr val="accent1">
+              <a:shade val="50000"/>
+            </a:schemeClr>
+          </a:lnRef>
+          <a:fillRef idx="1">
+            <a:schemeClr val="accent1"/>
+          </a:fillRef>
+          <a:effectRef idx="0">
+            <a:schemeClr val="accent1"/>
+          </a:effectRef>
+          <a:fontRef idx="minor">
+            <a:schemeClr val="lt1"/>
+          </a:fontRef>
+        </p:style>
+        <p:txBody>
+          <a:bodyPr rtlCol="0" anchor="ctr"/>
+          <a:lstStyle/>
+          <a:p>
+            <a:pPr algn="ctr"/>
+            <a:endParaRPr lang="en-US"/>
+          </a:p>
+        </p:txBody>
+      </p:sp>
+      <p:sp>
+        <p:nvSpPr>
+          <p:cNvPr id="7" name="Horizontal Scroll 6"/>
+          <p:cNvSpPr/>
+          <p:nvPr/>
+        </p:nvSpPr>
+        <p:spPr>
+          <a:xfrm>
+            <a:off x="152400" y="64334"/>
+            <a:ext cx="1265712" cy="762000"/>
+          </a:xfrm>
+          <a:prstGeom prst="horizontalScroll">
+            <a:avLst/>
+          </a:prstGeom>
+        </p:spPr>
+        <p:style>
+          <a:lnRef idx="1">
+            <a:schemeClr val="accent1"/>
+          </a:lnRef>
+          <a:fillRef idx="2">
+            <a:schemeClr val="accent1"/>
+          </a:fillRef>
+          <a:effectRef idx="1">
+            <a:schemeClr val="accent1"/>
+          </a:effectRef>
+          <a:fontRef idx="minor">
+            <a:schemeClr val="dk1"/>
+          </a:fontRef>
+        </p:style>
+        <p:txBody>
+          <a:bodyPr rtlCol="0" anchor="ctr"/>
+          <a:lstStyle/>
+          <a:p>
+            <a:pPr algn="ctr"/>
+            <a:r>
+              <a:rPr lang="en-US" sz="2400" dirty="0"/>
+              <a:t>Review</a:t>
+            </a:r>
+          </a:p>
+        </p:txBody>
+      </p:sp>
+    </p:spTree>
+    <p:extLst>
+      <p:ext uri="{BB962C8B-B14F-4D97-AF65-F5344CB8AC3E}">
+        <p14:creationId xmlns:p14="http://schemas.microsoft.com/office/powerpoint/2010/main" val="850150354"/>
+      </p:ext>
+    </p:extLst>
+  </p:cSld>
+  <p:clrMapOvr>
+    <a:masterClrMapping/>
+  </p:clrMapOvr>
+</p:sld>
+</file>
+
+<file path=ppt/slides/slide5.xml><?xml version="1.0" encoding="utf-8"?>
+<p:sld xmlns:a="http://schemas.openxmlformats.org/drawingml/2006/main" xmlns:r="http://schemas.openxmlformats.org/officeDocument/2006/relationships" xmlns:p="http://schemas.openxmlformats.org/presentationml/2006/main">
+  <p:cSld>
+    <p:spTree>
+      <p:nvGrpSpPr>
+        <p:cNvPr id="1" name=""/>
+        <p:cNvGrpSpPr/>
+        <p:nvPr/>
+      </p:nvGrpSpPr>
+      <p:grpSpPr>
+        <a:xfrm>
+          <a:off x="0" y="0"/>
+          <a:ext cx="0" cy="0"/>
+          <a:chOff x="0" y="0"/>
+          <a:chExt cx="0" cy="0"/>
+        </a:xfrm>
+      </p:grpSpPr>
+      <p:sp>
+        <p:nvSpPr>
           <p:cNvPr id="14339" name="Rectangle 3"/>
           <p:cNvSpPr>
             <a:spLocks noGrp="1" noChangeArrowheads="1"/>
@@ -25450,7 +27676,7 @@
             <a:fld id="{AEE14D4A-FE32-40AF-B06D-E9622816B101}" type="slidenum">
               <a:rPr lang="en-US" smtClean="0"/>
               <a:pPr/>
-              <a:t>4</a:t>
+              <a:t>5</a:t>
             </a:fld>
             <a:endParaRPr lang="en-US"/>
           </a:p>
@@ -28085,7 +30311,7 @@
 </p:sld>
 </file>
 
-<file path=ppt/slides/slide5.xml><?xml version="1.0" encoding="utf-8"?>
+<file path=ppt/slides/slide6.xml><?xml version="1.0" encoding="utf-8"?>
 <p:sld xmlns:a="http://schemas.openxmlformats.org/drawingml/2006/main" xmlns:r="http://schemas.openxmlformats.org/officeDocument/2006/relationships" xmlns:p="http://schemas.openxmlformats.org/presentationml/2006/main">
   <p:cSld>
     <p:spTree>
@@ -28154,7 +30380,7 @@
             <a:fld id="{EA7C8D44-3667-46F6-9772-CC52308E2A7F}" type="slidenum">
               <a:rPr kumimoji="0" lang="en-US" smtClean="0"/>
               <a:pPr/>
-              <a:t>5</a:t>
+              <a:t>6</a:t>
             </a:fld>
             <a:endParaRPr kumimoji="0" lang="en-US" dirty="0"/>
           </a:p>
@@ -28787,7 +31013,7 @@
 </p:sld>
 </file>
 
-<file path=ppt/slides/slide6.xml><?xml version="1.0" encoding="utf-8"?>
+<file path=ppt/slides/slide7.xml><?xml version="1.0" encoding="utf-8"?>
 <p:sld xmlns:a="http://schemas.openxmlformats.org/drawingml/2006/main" xmlns:r="http://schemas.openxmlformats.org/officeDocument/2006/relationships" xmlns:p="http://schemas.openxmlformats.org/presentationml/2006/main">
   <p:cSld>
     <p:spTree>
@@ -28862,7 +31088,7 @@
             <a:fld id="{EA7C8D44-3667-46F6-9772-CC52308E2A7F}" type="slidenum">
               <a:rPr kumimoji="0" lang="en-US" smtClean="0"/>
               <a:pPr/>
-              <a:t>6</a:t>
+              <a:t>7</a:t>
             </a:fld>
             <a:endParaRPr kumimoji="0" lang="en-US" dirty="0"/>
           </a:p>
@@ -29722,7 +31948,7 @@
 </p:sld>
 </file>
 
-<file path=ppt/slides/slide7.xml><?xml version="1.0" encoding="utf-8"?>
+<file path=ppt/slides/slide8.xml><?xml version="1.0" encoding="utf-8"?>
 <p:sld xmlns:a="http://schemas.openxmlformats.org/drawingml/2006/main" xmlns:r="http://schemas.openxmlformats.org/officeDocument/2006/relationships" xmlns:p="http://schemas.openxmlformats.org/presentationml/2006/main">
   <p:cSld>
     <p:spTree>
@@ -29797,7 +32023,7 @@
             <a:fld id="{EA7C8D44-3667-46F6-9772-CC52308E2A7F}" type="slidenum">
               <a:rPr kumimoji="0" lang="en-US" smtClean="0"/>
               <a:pPr/>
-              <a:t>7</a:t>
+              <a:t>8</a:t>
             </a:fld>
             <a:endParaRPr kumimoji="0" lang="en-US" dirty="0"/>
           </a:p>
@@ -30660,7 +32886,7 @@
 </p:sld>
 </file>
 
-<file path=ppt/slides/slide8.xml><?xml version="1.0" encoding="utf-8"?>
+<file path=ppt/slides/slide9.xml><?xml version="1.0" encoding="utf-8"?>
 <p:sld xmlns:a="http://schemas.openxmlformats.org/drawingml/2006/main" xmlns:r="http://schemas.openxmlformats.org/officeDocument/2006/relationships" xmlns:p="http://schemas.openxmlformats.org/presentationml/2006/main">
   <p:cSld>
     <p:spTree>
@@ -30735,7 +32961,7 @@
             <a:fld id="{EA7C8D44-3667-46F6-9772-CC52308E2A7F}" type="slidenum">
               <a:rPr kumimoji="0" lang="en-US" smtClean="0"/>
               <a:pPr/>
-              <a:t>8</a:t>
+              <a:t>9</a:t>
             </a:fld>
             <a:endParaRPr kumimoji="0" lang="en-US" dirty="0"/>
           </a:p>
@@ -31864,1284 +34090,6 @@
     <p:extLst>
       <p:ext uri="{BB962C8B-B14F-4D97-AF65-F5344CB8AC3E}">
         <p14:creationId xmlns:p14="http://schemas.microsoft.com/office/powerpoint/2010/main" val="3884894996"/>
-      </p:ext>
-    </p:extLst>
-  </p:cSld>
-  <p:clrMapOvr>
-    <a:masterClrMapping/>
-  </p:clrMapOvr>
-</p:sld>
-</file>
-
-<file path=ppt/slides/slide9.xml><?xml version="1.0" encoding="utf-8"?>
-<p:sld xmlns:a="http://schemas.openxmlformats.org/drawingml/2006/main" xmlns:r="http://schemas.openxmlformats.org/officeDocument/2006/relationships" xmlns:p="http://schemas.openxmlformats.org/presentationml/2006/main">
-  <p:cSld>
-    <p:spTree>
-      <p:nvGrpSpPr>
-        <p:cNvPr id="1" name=""/>
-        <p:cNvGrpSpPr/>
-        <p:nvPr/>
-      </p:nvGrpSpPr>
-      <p:grpSpPr>
-        <a:xfrm>
-          <a:off x="0" y="0"/>
-          <a:ext cx="0" cy="0"/>
-          <a:chOff x="0" y="0"/>
-          <a:chExt cx="0" cy="0"/>
-        </a:xfrm>
-      </p:grpSpPr>
-      <p:sp>
-        <p:nvSpPr>
-          <p:cNvPr id="41" name="Rectangle 40"/>
-          <p:cNvSpPr/>
-          <p:nvPr/>
-        </p:nvSpPr>
-        <p:spPr>
-          <a:xfrm>
-            <a:off x="4127376" y="2348880"/>
-            <a:ext cx="1296144" cy="360040"/>
-          </a:xfrm>
-          <a:prstGeom prst="rect">
-            <a:avLst/>
-          </a:prstGeom>
-          <a:solidFill>
-            <a:schemeClr val="bg1"/>
-          </a:solidFill>
-          <a:ln>
-            <a:prstDash val="dash"/>
-          </a:ln>
-        </p:spPr>
-        <p:style>
-          <a:lnRef idx="2">
-            <a:schemeClr val="accent1">
-              <a:shade val="50000"/>
-            </a:schemeClr>
-          </a:lnRef>
-          <a:fillRef idx="1">
-            <a:schemeClr val="accent1"/>
-          </a:fillRef>
-          <a:effectRef idx="0">
-            <a:schemeClr val="accent1"/>
-          </a:effectRef>
-          <a:fontRef idx="minor">
-            <a:schemeClr val="lt1"/>
-          </a:fontRef>
-        </p:style>
-        <p:txBody>
-          <a:bodyPr rtlCol="0" anchor="ctr"/>
-          <a:lstStyle/>
-          <a:p>
-            <a:pPr algn="ctr"/>
-            <a:endParaRPr lang="en-GB" sz="1600" b="1">
-              <a:latin typeface="Consolas" panose="020B0609020204030204" pitchFamily="49" charset="0"/>
-              <a:cs typeface="Consolas" panose="020B0609020204030204" pitchFamily="49" charset="0"/>
-            </a:endParaRPr>
-          </a:p>
-        </p:txBody>
-      </p:sp>
-      <p:sp>
-        <p:nvSpPr>
-          <p:cNvPr id="29" name="Rectangle 28"/>
-          <p:cNvSpPr/>
-          <p:nvPr/>
-        </p:nvSpPr>
-        <p:spPr>
-          <a:xfrm>
-            <a:off x="6230164" y="2984680"/>
-            <a:ext cx="1296144" cy="360040"/>
-          </a:xfrm>
-          <a:prstGeom prst="rect">
-            <a:avLst/>
-          </a:prstGeom>
-          <a:solidFill>
-            <a:schemeClr val="bg1"/>
-          </a:solidFill>
-          <a:ln>
-            <a:prstDash val="dash"/>
-          </a:ln>
-        </p:spPr>
-        <p:style>
-          <a:lnRef idx="2">
-            <a:schemeClr val="accent1">
-              <a:shade val="50000"/>
-            </a:schemeClr>
-          </a:lnRef>
-          <a:fillRef idx="1">
-            <a:schemeClr val="accent1"/>
-          </a:fillRef>
-          <a:effectRef idx="0">
-            <a:schemeClr val="accent1"/>
-          </a:effectRef>
-          <a:fontRef idx="minor">
-            <a:schemeClr val="lt1"/>
-          </a:fontRef>
-        </p:style>
-        <p:txBody>
-          <a:bodyPr rtlCol="0" anchor="ctr"/>
-          <a:lstStyle/>
-          <a:p>
-            <a:pPr algn="ctr"/>
-            <a:endParaRPr lang="en-GB" sz="1600" b="1">
-              <a:latin typeface="Consolas" panose="020B0609020204030204" pitchFamily="49" charset="0"/>
-              <a:cs typeface="Consolas" panose="020B0609020204030204" pitchFamily="49" charset="0"/>
-            </a:endParaRPr>
-          </a:p>
-        </p:txBody>
-      </p:sp>
-      <p:sp>
-        <p:nvSpPr>
-          <p:cNvPr id="27" name="Rectangle 26"/>
-          <p:cNvSpPr/>
-          <p:nvPr/>
-        </p:nvSpPr>
-        <p:spPr>
-          <a:xfrm>
-            <a:off x="6230164" y="4423395"/>
-            <a:ext cx="1296144" cy="360040"/>
-          </a:xfrm>
-          <a:prstGeom prst="rect">
-            <a:avLst/>
-          </a:prstGeom>
-          <a:solidFill>
-            <a:schemeClr val="bg1"/>
-          </a:solidFill>
-          <a:ln>
-            <a:prstDash val="dash"/>
-          </a:ln>
-        </p:spPr>
-        <p:style>
-          <a:lnRef idx="2">
-            <a:schemeClr val="accent1">
-              <a:shade val="50000"/>
-            </a:schemeClr>
-          </a:lnRef>
-          <a:fillRef idx="1">
-            <a:schemeClr val="accent1"/>
-          </a:fillRef>
-          <a:effectRef idx="0">
-            <a:schemeClr val="accent1"/>
-          </a:effectRef>
-          <a:fontRef idx="minor">
-            <a:schemeClr val="lt1"/>
-          </a:fontRef>
-        </p:style>
-        <p:txBody>
-          <a:bodyPr rtlCol="0" anchor="ctr"/>
-          <a:lstStyle/>
-          <a:p>
-            <a:pPr algn="ctr"/>
-            <a:endParaRPr lang="en-GB" sz="1600" b="1">
-              <a:latin typeface="Consolas" panose="020B0609020204030204" pitchFamily="49" charset="0"/>
-              <a:cs typeface="Consolas" panose="020B0609020204030204" pitchFamily="49" charset="0"/>
-            </a:endParaRPr>
-          </a:p>
-        </p:txBody>
-      </p:sp>
-      <p:sp>
-        <p:nvSpPr>
-          <p:cNvPr id="2" name="Title 1"/>
-          <p:cNvSpPr>
-            <a:spLocks noGrp="1"/>
-          </p:cNvSpPr>
-          <p:nvPr>
-            <p:ph type="title"/>
-          </p:nvPr>
-        </p:nvSpPr>
-        <p:spPr/>
-        <p:txBody>
-          <a:bodyPr/>
-          <a:lstStyle/>
-          <a:p>
-            <a:r>
-              <a:rPr lang="en-GB" dirty="0"/>
-              <a:t>Stack</a:t>
-            </a:r>
-          </a:p>
-        </p:txBody>
-      </p:sp>
-      <p:sp>
-        <p:nvSpPr>
-          <p:cNvPr id="6" name="Rectangle 5"/>
-          <p:cNvSpPr/>
-          <p:nvPr/>
-        </p:nvSpPr>
-        <p:spPr>
-          <a:xfrm>
-            <a:off x="4127376" y="1628800"/>
-            <a:ext cx="1296144" cy="360040"/>
-          </a:xfrm>
-          <a:prstGeom prst="rect">
-            <a:avLst/>
-          </a:prstGeom>
-          <a:solidFill>
-            <a:schemeClr val="bg1"/>
-          </a:solidFill>
-        </p:spPr>
-        <p:style>
-          <a:lnRef idx="2">
-            <a:schemeClr val="accent1">
-              <a:shade val="50000"/>
-            </a:schemeClr>
-          </a:lnRef>
-          <a:fillRef idx="1">
-            <a:schemeClr val="accent1"/>
-          </a:fillRef>
-          <a:effectRef idx="0">
-            <a:schemeClr val="accent1"/>
-          </a:effectRef>
-          <a:fontRef idx="minor">
-            <a:schemeClr val="lt1"/>
-          </a:fontRef>
-        </p:style>
-        <p:txBody>
-          <a:bodyPr rtlCol="0" anchor="ctr"/>
-          <a:lstStyle/>
-          <a:p>
-            <a:pPr algn="ctr"/>
-            <a:endParaRPr lang="en-GB" sz="1600" b="1">
-              <a:latin typeface="Consolas" panose="020B0609020204030204" pitchFamily="49" charset="0"/>
-              <a:cs typeface="Consolas" panose="020B0609020204030204" pitchFamily="49" charset="0"/>
-            </a:endParaRPr>
-          </a:p>
-        </p:txBody>
-      </p:sp>
-      <p:sp>
-        <p:nvSpPr>
-          <p:cNvPr id="7" name="TextBox 6"/>
-          <p:cNvSpPr txBox="1"/>
-          <p:nvPr/>
-        </p:nvSpPr>
-        <p:spPr>
-          <a:xfrm>
-            <a:off x="3551312" y="1628800"/>
-            <a:ext cx="576064" cy="338554"/>
-          </a:xfrm>
-          <a:prstGeom prst="rect">
-            <a:avLst/>
-          </a:prstGeom>
-          <a:noFill/>
-        </p:spPr>
-        <p:txBody>
-          <a:bodyPr wrap="square" rtlCol="0">
-            <a:spAutoFit/>
-          </a:bodyPr>
-          <a:lstStyle/>
-          <a:p>
-            <a:r>
-              <a:rPr lang="en-GB" sz="1600" b="1" dirty="0">
-                <a:latin typeface="Consolas" panose="020B0609020204030204" pitchFamily="49" charset="0"/>
-                <a:cs typeface="Consolas" panose="020B0609020204030204" pitchFamily="49" charset="0"/>
-              </a:rPr>
-              <a:t>R1</a:t>
-            </a:r>
-          </a:p>
-        </p:txBody>
-      </p:sp>
-      <p:sp>
-        <p:nvSpPr>
-          <p:cNvPr id="9" name="Rectangle 8"/>
-          <p:cNvSpPr/>
-          <p:nvPr/>
-        </p:nvSpPr>
-        <p:spPr>
-          <a:xfrm>
-            <a:off x="4127376" y="1988840"/>
-            <a:ext cx="1296144" cy="360040"/>
-          </a:xfrm>
-          <a:prstGeom prst="rect">
-            <a:avLst/>
-          </a:prstGeom>
-          <a:solidFill>
-            <a:schemeClr val="bg1"/>
-          </a:solidFill>
-        </p:spPr>
-        <p:style>
-          <a:lnRef idx="2">
-            <a:schemeClr val="accent1">
-              <a:shade val="50000"/>
-            </a:schemeClr>
-          </a:lnRef>
-          <a:fillRef idx="1">
-            <a:schemeClr val="accent1"/>
-          </a:fillRef>
-          <a:effectRef idx="0">
-            <a:schemeClr val="accent1"/>
-          </a:effectRef>
-          <a:fontRef idx="minor">
-            <a:schemeClr val="lt1"/>
-          </a:fontRef>
-        </p:style>
-        <p:txBody>
-          <a:bodyPr rtlCol="0" anchor="ctr"/>
-          <a:lstStyle/>
-          <a:p>
-            <a:pPr algn="ctr"/>
-            <a:endParaRPr lang="en-GB" sz="1600" b="1">
-              <a:latin typeface="Consolas" panose="020B0609020204030204" pitchFamily="49" charset="0"/>
-              <a:cs typeface="Consolas" panose="020B0609020204030204" pitchFamily="49" charset="0"/>
-            </a:endParaRPr>
-          </a:p>
-        </p:txBody>
-      </p:sp>
-      <p:sp>
-        <p:nvSpPr>
-          <p:cNvPr id="10" name="TextBox 9"/>
-          <p:cNvSpPr txBox="1"/>
-          <p:nvPr/>
-        </p:nvSpPr>
-        <p:spPr>
-          <a:xfrm>
-            <a:off x="3551312" y="1988840"/>
-            <a:ext cx="576064" cy="338554"/>
-          </a:xfrm>
-          <a:prstGeom prst="rect">
-            <a:avLst/>
-          </a:prstGeom>
-          <a:noFill/>
-        </p:spPr>
-        <p:txBody>
-          <a:bodyPr wrap="square" rtlCol="0">
-            <a:spAutoFit/>
-          </a:bodyPr>
-          <a:lstStyle/>
-          <a:p>
-            <a:r>
-              <a:rPr lang="en-GB" sz="1600" b="1" dirty="0">
-                <a:latin typeface="Consolas" panose="020B0609020204030204" pitchFamily="49" charset="0"/>
-                <a:cs typeface="Consolas" panose="020B0609020204030204" pitchFamily="49" charset="0"/>
-              </a:rPr>
-              <a:t>R2</a:t>
-            </a:r>
-          </a:p>
-        </p:txBody>
-      </p:sp>
-      <p:sp>
-        <p:nvSpPr>
-          <p:cNvPr id="12" name="Rectangle 11"/>
-          <p:cNvSpPr/>
-          <p:nvPr/>
-        </p:nvSpPr>
-        <p:spPr>
-          <a:xfrm>
-            <a:off x="4127376" y="2708920"/>
-            <a:ext cx="1296144" cy="360040"/>
-          </a:xfrm>
-          <a:prstGeom prst="rect">
-            <a:avLst/>
-          </a:prstGeom>
-          <a:solidFill>
-            <a:schemeClr val="bg1"/>
-          </a:solidFill>
-        </p:spPr>
-        <p:style>
-          <a:lnRef idx="2">
-            <a:schemeClr val="accent1">
-              <a:shade val="50000"/>
-            </a:schemeClr>
-          </a:lnRef>
-          <a:fillRef idx="1">
-            <a:schemeClr val="accent1"/>
-          </a:fillRef>
-          <a:effectRef idx="0">
-            <a:schemeClr val="accent1"/>
-          </a:effectRef>
-          <a:fontRef idx="minor">
-            <a:schemeClr val="lt1"/>
-          </a:fontRef>
-        </p:style>
-        <p:txBody>
-          <a:bodyPr rtlCol="0" anchor="ctr"/>
-          <a:lstStyle/>
-          <a:p>
-            <a:pPr algn="ctr"/>
-            <a:endParaRPr lang="en-GB" sz="1600" b="1">
-              <a:latin typeface="Consolas" panose="020B0609020204030204" pitchFamily="49" charset="0"/>
-              <a:cs typeface="Consolas" panose="020B0609020204030204" pitchFamily="49" charset="0"/>
-            </a:endParaRPr>
-          </a:p>
-        </p:txBody>
-      </p:sp>
-      <p:sp>
-        <p:nvSpPr>
-          <p:cNvPr id="13" name="TextBox 12"/>
-          <p:cNvSpPr txBox="1"/>
-          <p:nvPr/>
-        </p:nvSpPr>
-        <p:spPr>
-          <a:xfrm>
-            <a:off x="2971800" y="2708920"/>
-            <a:ext cx="1155576" cy="338554"/>
-          </a:xfrm>
-          <a:prstGeom prst="rect">
-            <a:avLst/>
-          </a:prstGeom>
-          <a:noFill/>
-        </p:spPr>
-        <p:txBody>
-          <a:bodyPr wrap="square" rtlCol="0">
-            <a:spAutoFit/>
-          </a:bodyPr>
-          <a:lstStyle/>
-          <a:p>
-            <a:pPr algn="r"/>
-            <a:r>
-              <a:rPr lang="en-GB" sz="1600" b="1" dirty="0" err="1">
-                <a:latin typeface="Consolas" panose="020B0609020204030204" pitchFamily="49" charset="0"/>
-                <a:cs typeface="Consolas" panose="020B0609020204030204" pitchFamily="49" charset="0"/>
-              </a:rPr>
-              <a:t>R13</a:t>
-            </a:r>
-            <a:r>
-              <a:rPr lang="en-GB" sz="1600" b="1" dirty="0">
-                <a:latin typeface="Consolas" panose="020B0609020204030204" pitchFamily="49" charset="0"/>
-                <a:cs typeface="Consolas" panose="020B0609020204030204" pitchFamily="49" charset="0"/>
-              </a:rPr>
-              <a:t> (</a:t>
-            </a:r>
-            <a:r>
-              <a:rPr lang="en-GB" sz="1600" b="1" dirty="0" err="1">
-                <a:latin typeface="Consolas" panose="020B0609020204030204" pitchFamily="49" charset="0"/>
-                <a:cs typeface="Consolas" panose="020B0609020204030204" pitchFamily="49" charset="0"/>
-              </a:rPr>
-              <a:t>SP</a:t>
-            </a:r>
-            <a:r>
-              <a:rPr lang="en-GB" sz="1600" b="1" dirty="0">
-                <a:latin typeface="Consolas" panose="020B0609020204030204" pitchFamily="49" charset="0"/>
-                <a:cs typeface="Consolas" panose="020B0609020204030204" pitchFamily="49" charset="0"/>
-              </a:rPr>
-              <a:t>)</a:t>
-            </a:r>
-          </a:p>
-        </p:txBody>
-      </p:sp>
-      <p:sp>
-        <p:nvSpPr>
-          <p:cNvPr id="14" name="Rectangle 13"/>
-          <p:cNvSpPr/>
-          <p:nvPr/>
-        </p:nvSpPr>
-        <p:spPr>
-          <a:xfrm>
-            <a:off x="6230164" y="3343275"/>
-            <a:ext cx="1296144" cy="360040"/>
-          </a:xfrm>
-          <a:prstGeom prst="rect">
-            <a:avLst/>
-          </a:prstGeom>
-          <a:solidFill>
-            <a:schemeClr val="bg1"/>
-          </a:solidFill>
-        </p:spPr>
-        <p:style>
-          <a:lnRef idx="2">
-            <a:schemeClr val="accent1">
-              <a:shade val="50000"/>
-            </a:schemeClr>
-          </a:lnRef>
-          <a:fillRef idx="1">
-            <a:schemeClr val="accent1"/>
-          </a:fillRef>
-          <a:effectRef idx="0">
-            <a:schemeClr val="accent1"/>
-          </a:effectRef>
-          <a:fontRef idx="minor">
-            <a:schemeClr val="lt1"/>
-          </a:fontRef>
-        </p:style>
-        <p:txBody>
-          <a:bodyPr rtlCol="0" anchor="ctr"/>
-          <a:lstStyle/>
-          <a:p>
-            <a:pPr algn="ctr"/>
-            <a:endParaRPr lang="en-GB" sz="1600" b="1">
-              <a:latin typeface="Consolas" panose="020B0609020204030204" pitchFamily="49" charset="0"/>
-              <a:cs typeface="Consolas" panose="020B0609020204030204" pitchFamily="49" charset="0"/>
-            </a:endParaRPr>
-          </a:p>
-        </p:txBody>
-      </p:sp>
-      <p:sp>
-        <p:nvSpPr>
-          <p:cNvPr id="15" name="TextBox 14"/>
-          <p:cNvSpPr txBox="1"/>
-          <p:nvPr/>
-        </p:nvSpPr>
-        <p:spPr>
-          <a:xfrm>
-            <a:off x="7526308" y="3343275"/>
-            <a:ext cx="1368152" cy="338554"/>
-          </a:xfrm>
-          <a:prstGeom prst="rect">
-            <a:avLst/>
-          </a:prstGeom>
-          <a:noFill/>
-        </p:spPr>
-        <p:txBody>
-          <a:bodyPr wrap="square" rtlCol="0">
-            <a:spAutoFit/>
-          </a:bodyPr>
-          <a:lstStyle/>
-          <a:p>
-            <a:pPr algn="ctr"/>
-            <a:r>
-              <a:rPr lang="en-GB" sz="1600" b="1" dirty="0">
-                <a:latin typeface="Consolas" panose="020B0609020204030204" pitchFamily="49" charset="0"/>
-                <a:cs typeface="Consolas" panose="020B0609020204030204" pitchFamily="49" charset="0"/>
-              </a:rPr>
-              <a:t>0x20000200</a:t>
-            </a:r>
-          </a:p>
-        </p:txBody>
-      </p:sp>
-      <p:sp>
-        <p:nvSpPr>
-          <p:cNvPr id="16" name="Rectangle 15"/>
-          <p:cNvSpPr/>
-          <p:nvPr/>
-        </p:nvSpPr>
-        <p:spPr>
-          <a:xfrm>
-            <a:off x="6230164" y="3703315"/>
-            <a:ext cx="1296144" cy="360040"/>
-          </a:xfrm>
-          <a:prstGeom prst="rect">
-            <a:avLst/>
-          </a:prstGeom>
-          <a:solidFill>
-            <a:schemeClr val="bg1"/>
-          </a:solidFill>
-        </p:spPr>
-        <p:style>
-          <a:lnRef idx="2">
-            <a:schemeClr val="accent1">
-              <a:shade val="50000"/>
-            </a:schemeClr>
-          </a:lnRef>
-          <a:fillRef idx="1">
-            <a:schemeClr val="accent1"/>
-          </a:fillRef>
-          <a:effectRef idx="0">
-            <a:schemeClr val="accent1"/>
-          </a:effectRef>
-          <a:fontRef idx="minor">
-            <a:schemeClr val="lt1"/>
-          </a:fontRef>
-        </p:style>
-        <p:txBody>
-          <a:bodyPr rtlCol="0" anchor="ctr"/>
-          <a:lstStyle/>
-          <a:p>
-            <a:pPr algn="ctr"/>
-            <a:endParaRPr lang="en-GB" sz="1600" b="1">
-              <a:latin typeface="Consolas" panose="020B0609020204030204" pitchFamily="49" charset="0"/>
-              <a:cs typeface="Consolas" panose="020B0609020204030204" pitchFamily="49" charset="0"/>
-            </a:endParaRPr>
-          </a:p>
-        </p:txBody>
-      </p:sp>
-      <p:sp>
-        <p:nvSpPr>
-          <p:cNvPr id="17" name="Rectangle 16"/>
-          <p:cNvSpPr/>
-          <p:nvPr/>
-        </p:nvSpPr>
-        <p:spPr>
-          <a:xfrm>
-            <a:off x="6230164" y="4063355"/>
-            <a:ext cx="1296144" cy="360040"/>
-          </a:xfrm>
-          <a:prstGeom prst="rect">
-            <a:avLst/>
-          </a:prstGeom>
-          <a:solidFill>
-            <a:schemeClr val="bg1"/>
-          </a:solidFill>
-        </p:spPr>
-        <p:style>
-          <a:lnRef idx="2">
-            <a:schemeClr val="accent1">
-              <a:shade val="50000"/>
-            </a:schemeClr>
-          </a:lnRef>
-          <a:fillRef idx="1">
-            <a:schemeClr val="accent1"/>
-          </a:fillRef>
-          <a:effectRef idx="0">
-            <a:schemeClr val="accent1"/>
-          </a:effectRef>
-          <a:fontRef idx="minor">
-            <a:schemeClr val="lt1"/>
-          </a:fontRef>
-        </p:style>
-        <p:txBody>
-          <a:bodyPr rtlCol="0" anchor="ctr"/>
-          <a:lstStyle/>
-          <a:p>
-            <a:pPr algn="ctr"/>
-            <a:endParaRPr lang="en-GB" sz="1600" b="1">
-              <a:latin typeface="Consolas" panose="020B0609020204030204" pitchFamily="49" charset="0"/>
-              <a:cs typeface="Consolas" panose="020B0609020204030204" pitchFamily="49" charset="0"/>
-            </a:endParaRPr>
-          </a:p>
-        </p:txBody>
-      </p:sp>
-      <p:sp>
-        <p:nvSpPr>
-          <p:cNvPr id="18" name="TextBox 17"/>
-          <p:cNvSpPr txBox="1"/>
-          <p:nvPr/>
-        </p:nvSpPr>
-        <p:spPr>
-          <a:xfrm>
-            <a:off x="7526308" y="3703315"/>
-            <a:ext cx="1368152" cy="338554"/>
-          </a:xfrm>
-          <a:prstGeom prst="rect">
-            <a:avLst/>
-          </a:prstGeom>
-          <a:noFill/>
-        </p:spPr>
-        <p:txBody>
-          <a:bodyPr wrap="square" rtlCol="0">
-            <a:spAutoFit/>
-          </a:bodyPr>
-          <a:lstStyle/>
-          <a:p>
-            <a:pPr algn="ctr"/>
-            <a:r>
-              <a:rPr lang="en-GB" sz="1600" b="1" dirty="0">
-                <a:latin typeface="Consolas" panose="020B0609020204030204" pitchFamily="49" charset="0"/>
-                <a:cs typeface="Consolas" panose="020B0609020204030204" pitchFamily="49" charset="0"/>
-              </a:rPr>
-              <a:t>0x200001FC</a:t>
-            </a:r>
-          </a:p>
-        </p:txBody>
-      </p:sp>
-      <p:sp>
-        <p:nvSpPr>
-          <p:cNvPr id="19" name="TextBox 18"/>
-          <p:cNvSpPr txBox="1"/>
-          <p:nvPr/>
-        </p:nvSpPr>
-        <p:spPr>
-          <a:xfrm>
-            <a:off x="7526308" y="4063355"/>
-            <a:ext cx="1368152" cy="338554"/>
-          </a:xfrm>
-          <a:prstGeom prst="rect">
-            <a:avLst/>
-          </a:prstGeom>
-          <a:noFill/>
-        </p:spPr>
-        <p:txBody>
-          <a:bodyPr wrap="square" rtlCol="0">
-            <a:spAutoFit/>
-          </a:bodyPr>
-          <a:lstStyle/>
-          <a:p>
-            <a:pPr algn="ctr"/>
-            <a:r>
-              <a:rPr lang="en-GB" sz="1600" b="1" dirty="0">
-                <a:latin typeface="Consolas" panose="020B0609020204030204" pitchFamily="49" charset="0"/>
-                <a:cs typeface="Consolas" panose="020B0609020204030204" pitchFamily="49" charset="0"/>
-              </a:rPr>
-              <a:t>0x200001F8</a:t>
-            </a:r>
-          </a:p>
-        </p:txBody>
-      </p:sp>
-      <p:sp>
-        <p:nvSpPr>
-          <p:cNvPr id="20" name="TextBox 19"/>
-          <p:cNvSpPr txBox="1"/>
-          <p:nvPr/>
-        </p:nvSpPr>
-        <p:spPr>
-          <a:xfrm>
-            <a:off x="4127376" y="2708920"/>
-            <a:ext cx="1368152" cy="338554"/>
-          </a:xfrm>
-          <a:prstGeom prst="rect">
-            <a:avLst/>
-          </a:prstGeom>
-          <a:noFill/>
-        </p:spPr>
-        <p:txBody>
-          <a:bodyPr wrap="square" rtlCol="0">
-            <a:spAutoFit/>
-          </a:bodyPr>
-          <a:lstStyle/>
-          <a:p>
-            <a:pPr algn="ctr"/>
-            <a:r>
-              <a:rPr lang="en-GB" sz="1600" b="1" dirty="0">
-                <a:latin typeface="Consolas" panose="020B0609020204030204" pitchFamily="49" charset="0"/>
-                <a:cs typeface="Consolas" panose="020B0609020204030204" pitchFamily="49" charset="0"/>
-              </a:rPr>
-              <a:t>0x20000200</a:t>
-            </a:r>
-          </a:p>
-        </p:txBody>
-      </p:sp>
-      <p:sp>
-        <p:nvSpPr>
-          <p:cNvPr id="21" name="TextBox 20"/>
-          <p:cNvSpPr txBox="1"/>
-          <p:nvPr/>
-        </p:nvSpPr>
-        <p:spPr>
-          <a:xfrm>
-            <a:off x="4127376" y="1988840"/>
-            <a:ext cx="1296144" cy="338554"/>
-          </a:xfrm>
-          <a:prstGeom prst="rect">
-            <a:avLst/>
-          </a:prstGeom>
-          <a:noFill/>
-        </p:spPr>
-        <p:txBody>
-          <a:bodyPr wrap="square" rtlCol="0">
-            <a:spAutoFit/>
-          </a:bodyPr>
-          <a:lstStyle/>
-          <a:p>
-            <a:pPr algn="r"/>
-            <a:r>
-              <a:rPr lang="en-GB" sz="1600" b="1" dirty="0" err="1">
-                <a:latin typeface="Consolas" panose="020B0609020204030204" pitchFamily="49" charset="0"/>
-                <a:cs typeface="Consolas" panose="020B0609020204030204" pitchFamily="49" charset="0"/>
-              </a:rPr>
-              <a:t>0x22222222</a:t>
-            </a:r>
-            <a:endParaRPr lang="en-GB" sz="1600" b="1" dirty="0">
-              <a:latin typeface="Consolas" panose="020B0609020204030204" pitchFamily="49" charset="0"/>
-              <a:cs typeface="Consolas" panose="020B0609020204030204" pitchFamily="49" charset="0"/>
-            </a:endParaRPr>
-          </a:p>
-        </p:txBody>
-      </p:sp>
-      <p:sp>
-        <p:nvSpPr>
-          <p:cNvPr id="22" name="TextBox 21"/>
-          <p:cNvSpPr txBox="1"/>
-          <p:nvPr/>
-        </p:nvSpPr>
-        <p:spPr>
-          <a:xfrm>
-            <a:off x="4127376" y="1628800"/>
-            <a:ext cx="1296144" cy="338554"/>
-          </a:xfrm>
-          <a:prstGeom prst="rect">
-            <a:avLst/>
-          </a:prstGeom>
-          <a:noFill/>
-        </p:spPr>
-        <p:txBody>
-          <a:bodyPr wrap="square" rtlCol="0">
-            <a:spAutoFit/>
-          </a:bodyPr>
-          <a:lstStyle/>
-          <a:p>
-            <a:pPr algn="r"/>
-            <a:r>
-              <a:rPr lang="en-GB" sz="1600" b="1" dirty="0" err="1">
-                <a:latin typeface="Consolas" panose="020B0609020204030204" pitchFamily="49" charset="0"/>
-                <a:cs typeface="Consolas" panose="020B0609020204030204" pitchFamily="49" charset="0"/>
-              </a:rPr>
-              <a:t>0x11111111</a:t>
-            </a:r>
-            <a:endParaRPr lang="en-GB" sz="1600" b="1" dirty="0">
-              <a:latin typeface="Consolas" panose="020B0609020204030204" pitchFamily="49" charset="0"/>
-              <a:cs typeface="Consolas" panose="020B0609020204030204" pitchFamily="49" charset="0"/>
-            </a:endParaRPr>
-          </a:p>
-        </p:txBody>
-      </p:sp>
-      <p:cxnSp>
-        <p:nvCxnSpPr>
-          <p:cNvPr id="24" name="Straight Arrow Connector 23"/>
-          <p:cNvCxnSpPr/>
-          <p:nvPr/>
-        </p:nvCxnSpPr>
-        <p:spPr>
-          <a:xfrm>
-            <a:off x="5429517" y="2891802"/>
-            <a:ext cx="819965" cy="630275"/>
-          </a:xfrm>
-          <a:prstGeom prst="straightConnector1">
-            <a:avLst/>
-          </a:prstGeom>
-          <a:ln w="19050">
-            <a:solidFill>
-              <a:srgbClr val="C00000"/>
-            </a:solidFill>
-            <a:tailEnd type="arrow"/>
-          </a:ln>
-        </p:spPr>
-        <p:style>
-          <a:lnRef idx="1">
-            <a:schemeClr val="accent1"/>
-          </a:lnRef>
-          <a:fillRef idx="0">
-            <a:schemeClr val="accent1"/>
-          </a:fillRef>
-          <a:effectRef idx="0">
-            <a:schemeClr val="accent1"/>
-          </a:effectRef>
-          <a:fontRef idx="minor">
-            <a:schemeClr val="tx1"/>
-          </a:fontRef>
-        </p:style>
-      </p:cxnSp>
-      <p:sp>
-        <p:nvSpPr>
-          <p:cNvPr id="4" name="Slide Number Placeholder 3"/>
-          <p:cNvSpPr>
-            <a:spLocks noGrp="1"/>
-          </p:cNvSpPr>
-          <p:nvPr>
-            <p:ph type="sldNum" sz="quarter" idx="12"/>
-          </p:nvPr>
-        </p:nvSpPr>
-        <p:spPr/>
-        <p:txBody>
-          <a:bodyPr/>
-          <a:lstStyle/>
-          <a:p>
-            <a:fld id="{EA7C8D44-3667-46F6-9772-CC52308E2A7F}" type="slidenum">
-              <a:rPr kumimoji="0" lang="en-US" smtClean="0"/>
-              <a:pPr/>
-              <a:t>9</a:t>
-            </a:fld>
-            <a:endParaRPr kumimoji="0" lang="en-US"/>
-          </a:p>
-        </p:txBody>
-      </p:sp>
-      <p:sp>
-        <p:nvSpPr>
-          <p:cNvPr id="23" name="TextBox 22"/>
-          <p:cNvSpPr txBox="1"/>
-          <p:nvPr/>
-        </p:nvSpPr>
-        <p:spPr>
-          <a:xfrm>
-            <a:off x="6230165" y="3352800"/>
-            <a:ext cx="1296142" cy="338554"/>
-          </a:xfrm>
-          <a:prstGeom prst="rect">
-            <a:avLst/>
-          </a:prstGeom>
-          <a:noFill/>
-        </p:spPr>
-        <p:txBody>
-          <a:bodyPr wrap="square" rtlCol="0">
-            <a:spAutoFit/>
-          </a:bodyPr>
-          <a:lstStyle/>
-          <a:p>
-            <a:pPr algn="ctr"/>
-            <a:r>
-              <a:rPr lang="en-US" sz="1600" b="1" dirty="0" err="1">
-                <a:latin typeface="Consolas" panose="020B0609020204030204" pitchFamily="49" charset="0"/>
-                <a:cs typeface="Consolas" panose="020B0609020204030204" pitchFamily="49" charset="0"/>
-              </a:rPr>
-              <a:t>xxxxxxxx</a:t>
-            </a:r>
-            <a:endParaRPr lang="en-US" sz="1600" b="1" dirty="0">
-              <a:latin typeface="Consolas" panose="020B0609020204030204" pitchFamily="49" charset="0"/>
-              <a:cs typeface="Consolas" panose="020B0609020204030204" pitchFamily="49" charset="0"/>
-            </a:endParaRPr>
-          </a:p>
-        </p:txBody>
-      </p:sp>
-      <p:sp>
-        <p:nvSpPr>
-          <p:cNvPr id="25" name="Rounded Rectangle 24"/>
-          <p:cNvSpPr/>
-          <p:nvPr/>
-        </p:nvSpPr>
-        <p:spPr>
-          <a:xfrm>
-            <a:off x="381000" y="2528900"/>
-            <a:ext cx="2438400" cy="2078360"/>
-          </a:xfrm>
-          <a:prstGeom prst="roundRect">
-            <a:avLst/>
-          </a:prstGeom>
-          <a:noFill/>
-          <a:ln>
-            <a:solidFill>
-              <a:schemeClr val="tx1"/>
-            </a:solidFill>
-          </a:ln>
-        </p:spPr>
-        <p:style>
-          <a:lnRef idx="2">
-            <a:schemeClr val="accent1">
-              <a:shade val="50000"/>
-            </a:schemeClr>
-          </a:lnRef>
-          <a:fillRef idx="1">
-            <a:schemeClr val="accent1"/>
-          </a:fillRef>
-          <a:effectRef idx="0">
-            <a:schemeClr val="accent1"/>
-          </a:effectRef>
-          <a:fontRef idx="minor">
-            <a:schemeClr val="lt1"/>
-          </a:fontRef>
-        </p:style>
-        <p:txBody>
-          <a:bodyPr rtlCol="0" anchor="ctr"/>
-          <a:lstStyle/>
-          <a:p>
-            <a:pPr>
-              <a:buNone/>
-            </a:pPr>
-            <a:r>
-              <a:rPr lang="en-GB" sz="2400" dirty="0">
-                <a:solidFill>
-                  <a:schemeClr val="tx1"/>
-                </a:solidFill>
-                <a:latin typeface="Consolas" panose="020B0609020204030204" pitchFamily="49" charset="0"/>
-                <a:cs typeface="Consolas" panose="020B0609020204030204" pitchFamily="49" charset="0"/>
-              </a:rPr>
-              <a:t>PUSH </a:t>
-            </a:r>
-            <a:r>
-              <a:rPr lang="en-GB" sz="2400">
-                <a:solidFill>
-                  <a:schemeClr val="tx1"/>
-                </a:solidFill>
-                <a:latin typeface="Consolas" panose="020B0609020204030204" pitchFamily="49" charset="0"/>
-                <a:cs typeface="Consolas" panose="020B0609020204030204" pitchFamily="49" charset="0"/>
-              </a:rPr>
-              <a:t>{R1,R2}</a:t>
-            </a:r>
-            <a:endParaRPr lang="en-GB" sz="2400" dirty="0">
-              <a:solidFill>
-                <a:schemeClr val="tx1"/>
-              </a:solidFill>
-              <a:latin typeface="Consolas" panose="020B0609020204030204" pitchFamily="49" charset="0"/>
-              <a:cs typeface="Consolas" panose="020B0609020204030204" pitchFamily="49" charset="0"/>
-            </a:endParaRPr>
-          </a:p>
-          <a:p>
-            <a:pPr>
-              <a:buNone/>
-            </a:pPr>
-            <a:r>
-              <a:rPr lang="en-GB" sz="2400" dirty="0">
-                <a:solidFill>
-                  <a:schemeClr val="tx1"/>
-                </a:solidFill>
-                <a:latin typeface="Consolas" panose="020B0609020204030204" pitchFamily="49" charset="0"/>
-                <a:cs typeface="Consolas" panose="020B0609020204030204" pitchFamily="49" charset="0"/>
-              </a:rPr>
-              <a:t>POP  {R1}</a:t>
-            </a:r>
-          </a:p>
-          <a:p>
-            <a:pPr>
-              <a:buNone/>
-            </a:pPr>
-            <a:r>
-              <a:rPr lang="en-GB" sz="2400" dirty="0">
-                <a:solidFill>
-                  <a:schemeClr val="tx1"/>
-                </a:solidFill>
-                <a:latin typeface="Consolas" panose="020B0609020204030204" pitchFamily="49" charset="0"/>
-                <a:cs typeface="Consolas" panose="020B0609020204030204" pitchFamily="49" charset="0"/>
-              </a:rPr>
-              <a:t>POP  {</a:t>
-            </a:r>
-            <a:r>
-              <a:rPr lang="en-GB" sz="2400" dirty="0" err="1">
-                <a:solidFill>
-                  <a:schemeClr val="tx1"/>
-                </a:solidFill>
-                <a:latin typeface="Consolas" panose="020B0609020204030204" pitchFamily="49" charset="0"/>
-                <a:cs typeface="Consolas" panose="020B0609020204030204" pitchFamily="49" charset="0"/>
-              </a:rPr>
-              <a:t>R2</a:t>
-            </a:r>
-            <a:r>
-              <a:rPr lang="en-GB" sz="2400" dirty="0">
-                <a:solidFill>
-                  <a:schemeClr val="tx1"/>
-                </a:solidFill>
-                <a:latin typeface="Consolas" panose="020B0609020204030204" pitchFamily="49" charset="0"/>
-                <a:cs typeface="Consolas" panose="020B0609020204030204" pitchFamily="49" charset="0"/>
-              </a:rPr>
-              <a:t>}</a:t>
-            </a:r>
-          </a:p>
-        </p:txBody>
-      </p:sp>
-      <p:sp>
-        <p:nvSpPr>
-          <p:cNvPr id="3" name="TextBox 2"/>
-          <p:cNvSpPr txBox="1"/>
-          <p:nvPr/>
-        </p:nvSpPr>
-        <p:spPr>
-          <a:xfrm>
-            <a:off x="6230164" y="4736068"/>
-            <a:ext cx="1298123" cy="369332"/>
-          </a:xfrm>
-          <a:prstGeom prst="rect">
-            <a:avLst/>
-          </a:prstGeom>
-          <a:noFill/>
-        </p:spPr>
-        <p:txBody>
-          <a:bodyPr wrap="square" rtlCol="0">
-            <a:spAutoFit/>
-          </a:bodyPr>
-          <a:lstStyle/>
-          <a:p>
-            <a:pPr algn="ctr"/>
-            <a:r>
-              <a:rPr lang="en-US" dirty="0"/>
-              <a:t>memory</a:t>
-            </a:r>
-          </a:p>
-        </p:txBody>
-      </p:sp>
-      <p:sp>
-        <p:nvSpPr>
-          <p:cNvPr id="28" name="TextBox 27"/>
-          <p:cNvSpPr txBox="1"/>
-          <p:nvPr/>
-        </p:nvSpPr>
-        <p:spPr>
-          <a:xfrm>
-            <a:off x="7738363" y="2615348"/>
-            <a:ext cx="944041" cy="369332"/>
-          </a:xfrm>
-          <a:prstGeom prst="rect">
-            <a:avLst/>
-          </a:prstGeom>
-          <a:noFill/>
-        </p:spPr>
-        <p:txBody>
-          <a:bodyPr wrap="none" rtlCol="0">
-            <a:spAutoFit/>
-          </a:bodyPr>
-          <a:lstStyle/>
-          <a:p>
-            <a:r>
-              <a:rPr lang="en-US" dirty="0"/>
-              <a:t>Address</a:t>
-            </a:r>
-          </a:p>
-        </p:txBody>
-      </p:sp>
-      <p:sp>
-        <p:nvSpPr>
-          <p:cNvPr id="34" name="TextBox 33"/>
-          <p:cNvSpPr txBox="1"/>
-          <p:nvPr/>
-        </p:nvSpPr>
-        <p:spPr>
-          <a:xfrm>
-            <a:off x="6232145" y="3724801"/>
-            <a:ext cx="1296142" cy="338554"/>
-          </a:xfrm>
-          <a:prstGeom prst="rect">
-            <a:avLst/>
-          </a:prstGeom>
-          <a:noFill/>
-        </p:spPr>
-        <p:txBody>
-          <a:bodyPr wrap="square" rtlCol="0">
-            <a:spAutoFit/>
-          </a:bodyPr>
-          <a:lstStyle/>
-          <a:p>
-            <a:pPr algn="ctr"/>
-            <a:r>
-              <a:rPr lang="en-US" sz="1600" b="1" dirty="0" err="1">
-                <a:latin typeface="Consolas" panose="020B0609020204030204" pitchFamily="49" charset="0"/>
-                <a:cs typeface="Consolas" panose="020B0609020204030204" pitchFamily="49" charset="0"/>
-              </a:rPr>
-              <a:t>xxxxxxxx</a:t>
-            </a:r>
-            <a:endParaRPr lang="en-US" sz="1600" b="1" dirty="0">
-              <a:latin typeface="Consolas" panose="020B0609020204030204" pitchFamily="49" charset="0"/>
-              <a:cs typeface="Consolas" panose="020B0609020204030204" pitchFamily="49" charset="0"/>
-            </a:endParaRPr>
-          </a:p>
-        </p:txBody>
-      </p:sp>
-      <p:sp>
-        <p:nvSpPr>
-          <p:cNvPr id="35" name="TextBox 34"/>
-          <p:cNvSpPr txBox="1"/>
-          <p:nvPr/>
-        </p:nvSpPr>
-        <p:spPr>
-          <a:xfrm>
-            <a:off x="6232145" y="4063355"/>
-            <a:ext cx="1296142" cy="338554"/>
-          </a:xfrm>
-          <a:prstGeom prst="rect">
-            <a:avLst/>
-          </a:prstGeom>
-          <a:noFill/>
-        </p:spPr>
-        <p:txBody>
-          <a:bodyPr wrap="square" rtlCol="0">
-            <a:spAutoFit/>
-          </a:bodyPr>
-          <a:lstStyle/>
-          <a:p>
-            <a:pPr algn="ctr"/>
-            <a:r>
-              <a:rPr lang="en-US" sz="1600" b="1" dirty="0" err="1">
-                <a:latin typeface="Consolas" panose="020B0609020204030204" pitchFamily="49" charset="0"/>
-                <a:cs typeface="Consolas" panose="020B0609020204030204" pitchFamily="49" charset="0"/>
-              </a:rPr>
-              <a:t>xxxxxxxx</a:t>
-            </a:r>
-            <a:endParaRPr lang="en-US" sz="1600" b="1" dirty="0">
-              <a:latin typeface="Consolas" panose="020B0609020204030204" pitchFamily="49" charset="0"/>
-              <a:cs typeface="Consolas" panose="020B0609020204030204" pitchFamily="49" charset="0"/>
-            </a:endParaRPr>
-          </a:p>
-        </p:txBody>
-      </p:sp>
-      <p:sp>
-        <p:nvSpPr>
-          <p:cNvPr id="30" name="Rectangle 29"/>
-          <p:cNvSpPr/>
-          <p:nvPr/>
-        </p:nvSpPr>
-        <p:spPr>
-          <a:xfrm>
-            <a:off x="443880" y="1675288"/>
-            <a:ext cx="2819400" cy="685274"/>
-          </a:xfrm>
-          <a:prstGeom prst="rect">
-            <a:avLst/>
-          </a:prstGeom>
-        </p:spPr>
-        <p:style>
-          <a:lnRef idx="1">
-            <a:schemeClr val="accent1"/>
-          </a:lnRef>
-          <a:fillRef idx="2">
-            <a:schemeClr val="accent1"/>
-          </a:fillRef>
-          <a:effectRef idx="1">
-            <a:schemeClr val="accent1"/>
-          </a:effectRef>
-          <a:fontRef idx="minor">
-            <a:schemeClr val="dk1"/>
-          </a:fontRef>
-        </p:style>
-        <p:txBody>
-          <a:bodyPr rtlCol="0" anchor="ctr"/>
-          <a:lstStyle/>
-          <a:p>
-            <a:pPr algn="ctr"/>
-            <a:r>
-              <a:rPr lang="en-US" sz="2400" dirty="0">
-                <a:solidFill>
-                  <a:schemeClr val="tx1"/>
-                </a:solidFill>
-                <a:latin typeface="Consolas" panose="020B0609020204030204" pitchFamily="49" charset="0"/>
-                <a:cs typeface="Consolas" panose="020B0609020204030204" pitchFamily="49" charset="0"/>
-              </a:rPr>
-              <a:t>R1==0x11111111</a:t>
-            </a:r>
-          </a:p>
-          <a:p>
-            <a:pPr algn="ctr"/>
-            <a:r>
-              <a:rPr lang="en-US" sz="2400" dirty="0">
-                <a:solidFill>
-                  <a:schemeClr val="tx1"/>
-                </a:solidFill>
-                <a:latin typeface="Consolas" panose="020B0609020204030204" pitchFamily="49" charset="0"/>
-                <a:cs typeface="Consolas" panose="020B0609020204030204" pitchFamily="49" charset="0"/>
-              </a:rPr>
-              <a:t>R2==0x22222222</a:t>
-            </a:r>
-          </a:p>
-        </p:txBody>
-      </p:sp>
-      <p:sp>
-        <p:nvSpPr>
-          <p:cNvPr id="31" name="Rectangle 30"/>
-          <p:cNvSpPr/>
-          <p:nvPr/>
-        </p:nvSpPr>
-        <p:spPr>
-          <a:xfrm>
-            <a:off x="677570" y="1237054"/>
-            <a:ext cx="2441694" cy="400110"/>
-          </a:xfrm>
-          <a:prstGeom prst="rect">
-            <a:avLst/>
-          </a:prstGeom>
-        </p:spPr>
-        <p:txBody>
-          <a:bodyPr wrap="none">
-            <a:spAutoFit/>
-          </a:bodyPr>
-          <a:lstStyle/>
-          <a:p>
-            <a:r>
-              <a:rPr lang="en-US" sz="2000" dirty="0">
-                <a:latin typeface="Consolas" panose="020B0609020204030204" pitchFamily="49" charset="0"/>
-                <a:cs typeface="Consolas" panose="020B0609020204030204" pitchFamily="49" charset="0"/>
-              </a:rPr>
-              <a:t>Before execution</a:t>
-            </a:r>
-            <a:endParaRPr lang="en-US" sz="2000" dirty="0"/>
-          </a:p>
-        </p:txBody>
-      </p:sp>
-      <p:sp>
-        <p:nvSpPr>
-          <p:cNvPr id="32" name="Content Placeholder 3"/>
-          <p:cNvSpPr>
-            <a:spLocks noGrp="1"/>
-          </p:cNvSpPr>
-          <p:nvPr>
-            <p:ph sz="quarter" idx="1"/>
-          </p:nvPr>
-        </p:nvSpPr>
-        <p:spPr>
-          <a:xfrm>
-            <a:off x="443880" y="5044440"/>
-            <a:ext cx="8229600" cy="1404500"/>
-          </a:xfrm>
-        </p:spPr>
-        <p:txBody>
-          <a:bodyPr/>
-          <a:lstStyle/>
-          <a:p>
-            <a:r>
-              <a:rPr lang="en-US" dirty="0"/>
-              <a:t>What is content of stack, and position of SP, after PUSH {R2,R1}?</a:t>
-            </a:r>
-          </a:p>
-          <a:p>
-            <a:r>
-              <a:rPr lang="en-US" dirty="0"/>
-              <a:t>What are the values of R1/R2 after POP {R2}?</a:t>
-            </a:r>
-          </a:p>
-        </p:txBody>
-      </p:sp>
-    </p:spTree>
-    <p:extLst>
-      <p:ext uri="{BB962C8B-B14F-4D97-AF65-F5344CB8AC3E}">
-        <p14:creationId xmlns:p14="http://schemas.microsoft.com/office/powerpoint/2010/main" val="245926897"/>
       </p:ext>
     </p:extLst>
   </p:cSld>

--- a/PPTs/Ch8_ARM_Subroutines_Exercises ANS.pptx
+++ b/PPTs/Ch8_ARM_Subroutines_Exercises ANS.pptx
@@ -5,10 +5,10 @@
     <p:sldMasterId id="2147483660" r:id="rId1"/>
   </p:sldMasterIdLst>
   <p:notesMasterIdLst>
-    <p:notesMasterId r:id="rId33"/>
+    <p:notesMasterId r:id="rId34"/>
   </p:notesMasterIdLst>
   <p:handoutMasterIdLst>
-    <p:handoutMasterId r:id="rId34"/>
+    <p:handoutMasterId r:id="rId35"/>
   </p:handoutMasterIdLst>
   <p:sldIdLst>
     <p:sldId id="256" r:id="rId2"/>
@@ -23,25 +23,26 @@
     <p:sldId id="264" r:id="rId11"/>
     <p:sldId id="268" r:id="rId12"/>
     <p:sldId id="762" r:id="rId13"/>
-    <p:sldId id="761" r:id="rId14"/>
-    <p:sldId id="760" r:id="rId15"/>
-    <p:sldId id="759" r:id="rId16"/>
-    <p:sldId id="371" r:id="rId17"/>
-    <p:sldId id="369" r:id="rId18"/>
-    <p:sldId id="367" r:id="rId19"/>
-    <p:sldId id="374" r:id="rId20"/>
-    <p:sldId id="257" r:id="rId21"/>
-    <p:sldId id="258" r:id="rId22"/>
-    <p:sldId id="281" r:id="rId23"/>
-    <p:sldId id="282" r:id="rId24"/>
-    <p:sldId id="283" r:id="rId25"/>
-    <p:sldId id="286" r:id="rId26"/>
-    <p:sldId id="353" r:id="rId27"/>
-    <p:sldId id="354" r:id="rId28"/>
-    <p:sldId id="757" r:id="rId29"/>
-    <p:sldId id="751" r:id="rId30"/>
-    <p:sldId id="752" r:id="rId31"/>
-    <p:sldId id="756" r:id="rId32"/>
+    <p:sldId id="760" r:id="rId14"/>
+    <p:sldId id="759" r:id="rId15"/>
+    <p:sldId id="371" r:id="rId16"/>
+    <p:sldId id="369" r:id="rId17"/>
+    <p:sldId id="367" r:id="rId18"/>
+    <p:sldId id="374" r:id="rId19"/>
+    <p:sldId id="257" r:id="rId20"/>
+    <p:sldId id="258" r:id="rId21"/>
+    <p:sldId id="281" r:id="rId22"/>
+    <p:sldId id="282" r:id="rId23"/>
+    <p:sldId id="283" r:id="rId24"/>
+    <p:sldId id="286" r:id="rId25"/>
+    <p:sldId id="353" r:id="rId26"/>
+    <p:sldId id="354" r:id="rId27"/>
+    <p:sldId id="757" r:id="rId28"/>
+    <p:sldId id="751" r:id="rId29"/>
+    <p:sldId id="752" r:id="rId30"/>
+    <p:sldId id="756" r:id="rId31"/>
+    <p:sldId id="763" r:id="rId32"/>
+    <p:sldId id="764" r:id="rId33"/>
   </p:sldIdLst>
   <p:sldSz cx="9144000" cy="6858000" type="screen4x3"/>
   <p:notesSz cx="6950075" cy="9236075"/>
@@ -162,7 +163,7 @@
 <file path=ppt/revisionInfo.xml><?xml version="1.0" encoding="utf-8"?>
 <p1510:revInfo xmlns:a="http://schemas.openxmlformats.org/drawingml/2006/main" xmlns:r="http://schemas.openxmlformats.org/officeDocument/2006/relationships" xmlns:p1510="http://schemas.microsoft.com/office/powerpoint/2015/10/main">
   <p1510:revLst>
-    <p1510:client id="{26DF0AC7-7898-4CAF-8C74-9051912ABD73}" v="195" dt="2025-10-14T21:25:49.853"/>
+    <p1510:client id="{26DF0AC7-7898-4CAF-8C74-9051912ABD73}" v="205" dt="2025-10-21T18:53:12.096"/>
   </p1510:revLst>
 </p1510:revInfo>
 </file>
@@ -172,7 +173,7 @@
   <pc:docChgLst>
     <pc:chgData name="Zonghua Gu" userId="9a7e1853e1951ef5" providerId="LiveId" clId="{CF1FAA12-072C-4ED5-BA76-0FFFAEFDB88A}"/>
     <pc:docChg chg="undo redo custSel addSld delSld modSld">
-      <pc:chgData name="Zonghua Gu" userId="9a7e1853e1951ef5" providerId="LiveId" clId="{CF1FAA12-072C-4ED5-BA76-0FFFAEFDB88A}" dt="2025-10-14T21:25:51.586" v="2922" actId="47"/>
+      <pc:chgData name="Zonghua Gu" userId="9a7e1853e1951ef5" providerId="LiveId" clId="{CF1FAA12-072C-4ED5-BA76-0FFFAEFDB88A}" dt="2025-10-21T19:03:17.053" v="3283" actId="20577"/>
       <pc:docMkLst>
         <pc:docMk/>
       </pc:docMkLst>
@@ -276,13 +277,6 @@
             <ac:graphicFrameMk id="7" creationId="{63F81107-A59E-5244-C57F-4AFF69A7D613}"/>
           </ac:graphicFrameMkLst>
         </pc:graphicFrameChg>
-      </pc:sldChg>
-      <pc:sldChg chg="addSp delSp modSp new del mod">
-        <pc:chgData name="Zonghua Gu" userId="9a7e1853e1951ef5" providerId="LiveId" clId="{CF1FAA12-072C-4ED5-BA76-0FFFAEFDB88A}" dt="2025-09-25T15:30:56.049" v="2336" actId="47"/>
-        <pc:sldMkLst>
-          <pc:docMk/>
-          <pc:sldMk cId="2724411605" sldId="259"/>
-        </pc:sldMkLst>
       </pc:sldChg>
       <pc:sldChg chg="addSp delSp modSp add mod">
         <pc:chgData name="Zonghua Gu" userId="9a7e1853e1951ef5" providerId="LiveId" clId="{CF1FAA12-072C-4ED5-BA76-0FFFAEFDB88A}" dt="2025-09-22T19:33:58.510" v="660" actId="478"/>
@@ -506,13 +500,6 @@
           </ac:graphicFrameMkLst>
         </pc:graphicFrameChg>
       </pc:sldChg>
-      <pc:sldChg chg="modSp add del mod">
-        <pc:chgData name="Zonghua Gu" userId="9a7e1853e1951ef5" providerId="LiveId" clId="{CF1FAA12-072C-4ED5-BA76-0FFFAEFDB88A}" dt="2025-09-22T19:33:49.397" v="659" actId="47"/>
-        <pc:sldMkLst>
-          <pc:docMk/>
-          <pc:sldMk cId="811408396" sldId="262"/>
-        </pc:sldMkLst>
-      </pc:sldChg>
       <pc:sldChg chg="addSp modSp add mod">
         <pc:chgData name="Zonghua Gu" userId="9a7e1853e1951ef5" providerId="LiveId" clId="{CF1FAA12-072C-4ED5-BA76-0FFFAEFDB88A}" dt="2025-09-22T19:38:04.649" v="819" actId="20577"/>
         <pc:sldMkLst>
@@ -556,13 +543,6 @@
         <pc:sldMkLst>
           <pc:docMk/>
           <pc:sldMk cId="850150354" sldId="266"/>
-        </pc:sldMkLst>
-      </pc:sldChg>
-      <pc:sldChg chg="del">
-        <pc:chgData name="Zonghua Gu" userId="9a7e1853e1951ef5" providerId="LiveId" clId="{CF1FAA12-072C-4ED5-BA76-0FFFAEFDB88A}" dt="2025-09-22T00:19:08.642" v="112" actId="47"/>
-        <pc:sldMkLst>
-          <pc:docMk/>
-          <pc:sldMk cId="2949426341" sldId="266"/>
         </pc:sldMkLst>
       </pc:sldChg>
       <pc:sldChg chg="modSp add mod">
@@ -743,13 +723,6 @@
           </ac:graphicFrameMkLst>
         </pc:graphicFrameChg>
       </pc:sldChg>
-      <pc:sldChg chg="modSp new del mod">
-        <pc:chgData name="Zonghua Gu" userId="9a7e1853e1951ef5" providerId="LiveId" clId="{CF1FAA12-072C-4ED5-BA76-0FFFAEFDB88A}" dt="2025-09-23T02:35:32.497" v="1076" actId="47"/>
-        <pc:sldMkLst>
-          <pc:docMk/>
-          <pc:sldMk cId="1063931100" sldId="282"/>
-        </pc:sldMkLst>
-      </pc:sldChg>
       <pc:sldChg chg="addSp modSp new mod">
         <pc:chgData name="Zonghua Gu" userId="9a7e1853e1951ef5" providerId="LiveId" clId="{CF1FAA12-072C-4ED5-BA76-0FFFAEFDB88A}" dt="2025-10-05T02:43:53.863" v="2639" actId="20577"/>
         <pc:sldMkLst>
@@ -780,20 +753,6 @@
             <ac:graphicFrameMk id="5" creationId="{D029E53D-EF51-C81E-B5A8-ACE61F697AF7}"/>
           </ac:graphicFrameMkLst>
         </pc:graphicFrameChg>
-      </pc:sldChg>
-      <pc:sldChg chg="modSp add del mod">
-        <pc:chgData name="Zonghua Gu" userId="9a7e1853e1951ef5" providerId="LiveId" clId="{CF1FAA12-072C-4ED5-BA76-0FFFAEFDB88A}" dt="2025-09-24T22:43:52.740" v="1805" actId="47"/>
-        <pc:sldMkLst>
-          <pc:docMk/>
-          <pc:sldMk cId="2969345435" sldId="284"/>
-        </pc:sldMkLst>
-      </pc:sldChg>
-      <pc:sldChg chg="addSp delSp modSp new del mod">
-        <pc:chgData name="Zonghua Gu" userId="9a7e1853e1951ef5" providerId="LiveId" clId="{CF1FAA12-072C-4ED5-BA76-0FFFAEFDB88A}" dt="2025-09-24T22:17:27.877" v="1438" actId="47"/>
-        <pc:sldMkLst>
-          <pc:docMk/>
-          <pc:sldMk cId="3647343664" sldId="285"/>
-        </pc:sldMkLst>
       </pc:sldChg>
       <pc:sldChg chg="addSp delSp modSp new mod modNotesTx">
         <pc:chgData name="Zonghua Gu" userId="9a7e1853e1951ef5" providerId="LiveId" clId="{CF1FAA12-072C-4ED5-BA76-0FFFAEFDB88A}" dt="2025-10-05T02:46:32.991" v="2673" actId="20577"/>
@@ -850,104 +809,6 @@
           </ac:graphicFrameMkLst>
         </pc:graphicFrameChg>
       </pc:sldChg>
-      <pc:sldChg chg="modSp new del">
-        <pc:chgData name="Zonghua Gu" userId="9a7e1853e1951ef5" providerId="LiveId" clId="{CF1FAA12-072C-4ED5-BA76-0FFFAEFDB88A}" dt="2025-09-24T22:40:05.085" v="1773" actId="47"/>
-        <pc:sldMkLst>
-          <pc:docMk/>
-          <pc:sldMk cId="836989917" sldId="287"/>
-        </pc:sldMkLst>
-      </pc:sldChg>
-      <pc:sldChg chg="modSp new del mod">
-        <pc:chgData name="Zonghua Gu" userId="9a7e1853e1951ef5" providerId="LiveId" clId="{CF1FAA12-072C-4ED5-BA76-0FFFAEFDB88A}" dt="2025-09-24T23:48:12" v="1930" actId="2696"/>
-        <pc:sldMkLst>
-          <pc:docMk/>
-          <pc:sldMk cId="3365210863" sldId="287"/>
-        </pc:sldMkLst>
-      </pc:sldChg>
-      <pc:sldChg chg="del">
-        <pc:chgData name="Zonghua Gu" userId="9a7e1853e1951ef5" providerId="LiveId" clId="{CF1FAA12-072C-4ED5-BA76-0FFFAEFDB88A}" dt="2025-09-22T00:19:08.642" v="112" actId="47"/>
-        <pc:sldMkLst>
-          <pc:docMk/>
-          <pc:sldMk cId="301613006" sldId="305"/>
-        </pc:sldMkLst>
-      </pc:sldChg>
-      <pc:sldChg chg="add del">
-        <pc:chgData name="Zonghua Gu" userId="9a7e1853e1951ef5" providerId="LiveId" clId="{CF1FAA12-072C-4ED5-BA76-0FFFAEFDB88A}" dt="2025-09-22T00:07:57.409" v="83" actId="47"/>
-        <pc:sldMkLst>
-          <pc:docMk/>
-          <pc:sldMk cId="1269508663" sldId="307"/>
-        </pc:sldMkLst>
-      </pc:sldChg>
-      <pc:sldChg chg="del">
-        <pc:chgData name="Zonghua Gu" userId="9a7e1853e1951ef5" providerId="LiveId" clId="{CF1FAA12-072C-4ED5-BA76-0FFFAEFDB88A}" dt="2025-09-22T00:19:08.642" v="112" actId="47"/>
-        <pc:sldMkLst>
-          <pc:docMk/>
-          <pc:sldMk cId="3925431262" sldId="342"/>
-        </pc:sldMkLst>
-      </pc:sldChg>
-      <pc:sldChg chg="del">
-        <pc:chgData name="Zonghua Gu" userId="9a7e1853e1951ef5" providerId="LiveId" clId="{CF1FAA12-072C-4ED5-BA76-0FFFAEFDB88A}" dt="2025-09-22T00:19:08.642" v="112" actId="47"/>
-        <pc:sldMkLst>
-          <pc:docMk/>
-          <pc:sldMk cId="2149817380" sldId="343"/>
-        </pc:sldMkLst>
-      </pc:sldChg>
-      <pc:sldChg chg="del">
-        <pc:chgData name="Zonghua Gu" userId="9a7e1853e1951ef5" providerId="LiveId" clId="{CF1FAA12-072C-4ED5-BA76-0FFFAEFDB88A}" dt="2025-09-22T00:19:08.642" v="112" actId="47"/>
-        <pc:sldMkLst>
-          <pc:docMk/>
-          <pc:sldMk cId="2764170415" sldId="344"/>
-        </pc:sldMkLst>
-      </pc:sldChg>
-      <pc:sldChg chg="del">
-        <pc:chgData name="Zonghua Gu" userId="9a7e1853e1951ef5" providerId="LiveId" clId="{CF1FAA12-072C-4ED5-BA76-0FFFAEFDB88A}" dt="2025-09-22T00:19:08.642" v="112" actId="47"/>
-        <pc:sldMkLst>
-          <pc:docMk/>
-          <pc:sldMk cId="2797949745" sldId="345"/>
-        </pc:sldMkLst>
-      </pc:sldChg>
-      <pc:sldChg chg="del">
-        <pc:chgData name="Zonghua Gu" userId="9a7e1853e1951ef5" providerId="LiveId" clId="{CF1FAA12-072C-4ED5-BA76-0FFFAEFDB88A}" dt="2025-09-22T00:19:08.642" v="112" actId="47"/>
-        <pc:sldMkLst>
-          <pc:docMk/>
-          <pc:sldMk cId="2700529691" sldId="346"/>
-        </pc:sldMkLst>
-      </pc:sldChg>
-      <pc:sldChg chg="del">
-        <pc:chgData name="Zonghua Gu" userId="9a7e1853e1951ef5" providerId="LiveId" clId="{CF1FAA12-072C-4ED5-BA76-0FFFAEFDB88A}" dt="2025-09-22T00:19:08.642" v="112" actId="47"/>
-        <pc:sldMkLst>
-          <pc:docMk/>
-          <pc:sldMk cId="2089084448" sldId="347"/>
-        </pc:sldMkLst>
-      </pc:sldChg>
-      <pc:sldChg chg="delSp modSp del mod delAnim">
-        <pc:chgData name="Zonghua Gu" userId="9a7e1853e1951ef5" providerId="LiveId" clId="{CF1FAA12-072C-4ED5-BA76-0FFFAEFDB88A}" dt="2025-09-22T00:19:08.642" v="112" actId="47"/>
-        <pc:sldMkLst>
-          <pc:docMk/>
-          <pc:sldMk cId="3919809568" sldId="348"/>
-        </pc:sldMkLst>
-      </pc:sldChg>
-      <pc:sldChg chg="del">
-        <pc:chgData name="Zonghua Gu" userId="9a7e1853e1951ef5" providerId="LiveId" clId="{CF1FAA12-072C-4ED5-BA76-0FFFAEFDB88A}" dt="2025-09-22T00:19:08.642" v="112" actId="47"/>
-        <pc:sldMkLst>
-          <pc:docMk/>
-          <pc:sldMk cId="1684260842" sldId="349"/>
-        </pc:sldMkLst>
-      </pc:sldChg>
-      <pc:sldChg chg="del">
-        <pc:chgData name="Zonghua Gu" userId="9a7e1853e1951ef5" providerId="LiveId" clId="{CF1FAA12-072C-4ED5-BA76-0FFFAEFDB88A}" dt="2025-09-22T00:19:08.642" v="112" actId="47"/>
-        <pc:sldMkLst>
-          <pc:docMk/>
-          <pc:sldMk cId="756723717" sldId="350"/>
-        </pc:sldMkLst>
-      </pc:sldChg>
-      <pc:sldChg chg="del">
-        <pc:chgData name="Zonghua Gu" userId="9a7e1853e1951ef5" providerId="LiveId" clId="{CF1FAA12-072C-4ED5-BA76-0FFFAEFDB88A}" dt="2025-09-22T00:19:08.642" v="112" actId="47"/>
-        <pc:sldMkLst>
-          <pc:docMk/>
-          <pc:sldMk cId="1602140629" sldId="351"/>
-        </pc:sldMkLst>
-      </pc:sldChg>
       <pc:sldChg chg="addSp modSp add mod">
         <pc:chgData name="Zonghua Gu" userId="9a7e1853e1951ef5" providerId="LiveId" clId="{CF1FAA12-072C-4ED5-BA76-0FFFAEFDB88A}" dt="2025-09-24T22:59:39.527" v="1859" actId="14100"/>
         <pc:sldMkLst>
@@ -970,20 +831,6 @@
             <ac:spMk id="14339" creationId="{00000000-0000-0000-0000-000000000000}"/>
           </ac:spMkLst>
         </pc:spChg>
-      </pc:sldChg>
-      <pc:sldChg chg="delSp modSp del mod delAnim">
-        <pc:chgData name="Zonghua Gu" userId="9a7e1853e1951ef5" providerId="LiveId" clId="{CF1FAA12-072C-4ED5-BA76-0FFFAEFDB88A}" dt="2025-09-22T00:19:08.642" v="112" actId="47"/>
-        <pc:sldMkLst>
-          <pc:docMk/>
-          <pc:sldMk cId="2521967986" sldId="352"/>
-        </pc:sldMkLst>
-      </pc:sldChg>
-      <pc:sldChg chg="del">
-        <pc:chgData name="Zonghua Gu" userId="9a7e1853e1951ef5" providerId="LiveId" clId="{CF1FAA12-072C-4ED5-BA76-0FFFAEFDB88A}" dt="2025-09-22T00:19:08.642" v="112" actId="47"/>
-        <pc:sldMkLst>
-          <pc:docMk/>
-          <pc:sldMk cId="4051972" sldId="353"/>
-        </pc:sldMkLst>
       </pc:sldChg>
       <pc:sldChg chg="addSp modSp new mod">
         <pc:chgData name="Zonghua Gu" userId="9a7e1853e1951ef5" providerId="LiveId" clId="{CF1FAA12-072C-4ED5-BA76-0FFFAEFDB88A}" dt="2025-10-05T02:52:41.917" v="2822" actId="20577"/>
@@ -1024,13 +871,6 @@
           </ac:spMkLst>
         </pc:spChg>
       </pc:sldChg>
-      <pc:sldChg chg="del">
-        <pc:chgData name="Zonghua Gu" userId="9a7e1853e1951ef5" providerId="LiveId" clId="{CF1FAA12-072C-4ED5-BA76-0FFFAEFDB88A}" dt="2025-09-22T00:19:08.642" v="112" actId="47"/>
-        <pc:sldMkLst>
-          <pc:docMk/>
-          <pc:sldMk cId="786387890" sldId="354"/>
-        </pc:sldMkLst>
-      </pc:sldChg>
       <pc:sldChg chg="addSp delSp modSp new mod">
         <pc:chgData name="Zonghua Gu" userId="9a7e1853e1951ef5" providerId="LiveId" clId="{CF1FAA12-072C-4ED5-BA76-0FFFAEFDB88A}" dt="2025-10-05T02:53:11.715" v="2838" actId="20577"/>
         <pc:sldMkLst>
@@ -1061,104 +901,6 @@
             <ac:spMk id="5" creationId="{B60DE175-89CF-1980-2FF5-09D118299DF7}"/>
           </ac:spMkLst>
         </pc:spChg>
-      </pc:sldChg>
-      <pc:sldChg chg="new del">
-        <pc:chgData name="Zonghua Gu" userId="9a7e1853e1951ef5" providerId="LiveId" clId="{CF1FAA12-072C-4ED5-BA76-0FFFAEFDB88A}" dt="2025-10-05T02:24:08.824" v="2426" actId="47"/>
-        <pc:sldMkLst>
-          <pc:docMk/>
-          <pc:sldMk cId="186365128" sldId="355"/>
-        </pc:sldMkLst>
-      </pc:sldChg>
-      <pc:sldChg chg="add del">
-        <pc:chgData name="Zonghua Gu" userId="9a7e1853e1951ef5" providerId="LiveId" clId="{CF1FAA12-072C-4ED5-BA76-0FFFAEFDB88A}" dt="2025-09-25T00:43:43.393" v="2199" actId="47"/>
-        <pc:sldMkLst>
-          <pc:docMk/>
-          <pc:sldMk cId="821456373" sldId="355"/>
-        </pc:sldMkLst>
-      </pc:sldChg>
-      <pc:sldChg chg="del">
-        <pc:chgData name="Zonghua Gu" userId="9a7e1853e1951ef5" providerId="LiveId" clId="{CF1FAA12-072C-4ED5-BA76-0FFFAEFDB88A}" dt="2025-09-22T00:19:08.642" v="112" actId="47"/>
-        <pc:sldMkLst>
-          <pc:docMk/>
-          <pc:sldMk cId="2243604080" sldId="355"/>
-        </pc:sldMkLst>
-      </pc:sldChg>
-      <pc:sldChg chg="del">
-        <pc:chgData name="Zonghua Gu" userId="9a7e1853e1951ef5" providerId="LiveId" clId="{CF1FAA12-072C-4ED5-BA76-0FFFAEFDB88A}" dt="2025-09-22T00:19:08.642" v="112" actId="47"/>
-        <pc:sldMkLst>
-          <pc:docMk/>
-          <pc:sldMk cId="356605136" sldId="356"/>
-        </pc:sldMkLst>
-      </pc:sldChg>
-      <pc:sldChg chg="del">
-        <pc:chgData name="Zonghua Gu" userId="9a7e1853e1951ef5" providerId="LiveId" clId="{CF1FAA12-072C-4ED5-BA76-0FFFAEFDB88A}" dt="2025-09-22T00:19:08.642" v="112" actId="47"/>
-        <pc:sldMkLst>
-          <pc:docMk/>
-          <pc:sldMk cId="528642001" sldId="357"/>
-        </pc:sldMkLst>
-      </pc:sldChg>
-      <pc:sldChg chg="del">
-        <pc:chgData name="Zonghua Gu" userId="9a7e1853e1951ef5" providerId="LiveId" clId="{CF1FAA12-072C-4ED5-BA76-0FFFAEFDB88A}" dt="2025-09-22T00:19:08.642" v="112" actId="47"/>
-        <pc:sldMkLst>
-          <pc:docMk/>
-          <pc:sldMk cId="4090467183" sldId="358"/>
-        </pc:sldMkLst>
-      </pc:sldChg>
-      <pc:sldChg chg="del">
-        <pc:chgData name="Zonghua Gu" userId="9a7e1853e1951ef5" providerId="LiveId" clId="{CF1FAA12-072C-4ED5-BA76-0FFFAEFDB88A}" dt="2025-09-22T00:19:08.642" v="112" actId="47"/>
-        <pc:sldMkLst>
-          <pc:docMk/>
-          <pc:sldMk cId="4225043602" sldId="359"/>
-        </pc:sldMkLst>
-      </pc:sldChg>
-      <pc:sldChg chg="del">
-        <pc:chgData name="Zonghua Gu" userId="9a7e1853e1951ef5" providerId="LiveId" clId="{CF1FAA12-072C-4ED5-BA76-0FFFAEFDB88A}" dt="2025-09-22T00:19:08.642" v="112" actId="47"/>
-        <pc:sldMkLst>
-          <pc:docMk/>
-          <pc:sldMk cId="758336846" sldId="360"/>
-        </pc:sldMkLst>
-      </pc:sldChg>
-      <pc:sldChg chg="del">
-        <pc:chgData name="Zonghua Gu" userId="9a7e1853e1951ef5" providerId="LiveId" clId="{CF1FAA12-072C-4ED5-BA76-0FFFAEFDB88A}" dt="2025-09-22T00:19:08.642" v="112" actId="47"/>
-        <pc:sldMkLst>
-          <pc:docMk/>
-          <pc:sldMk cId="1964014419" sldId="361"/>
-        </pc:sldMkLst>
-      </pc:sldChg>
-      <pc:sldChg chg="del">
-        <pc:chgData name="Zonghua Gu" userId="9a7e1853e1951ef5" providerId="LiveId" clId="{CF1FAA12-072C-4ED5-BA76-0FFFAEFDB88A}" dt="2025-09-22T00:19:08.642" v="112" actId="47"/>
-        <pc:sldMkLst>
-          <pc:docMk/>
-          <pc:sldMk cId="2532744146" sldId="362"/>
-        </pc:sldMkLst>
-      </pc:sldChg>
-      <pc:sldChg chg="del">
-        <pc:chgData name="Zonghua Gu" userId="9a7e1853e1951ef5" providerId="LiveId" clId="{CF1FAA12-072C-4ED5-BA76-0FFFAEFDB88A}" dt="2025-09-22T00:19:08.642" v="112" actId="47"/>
-        <pc:sldMkLst>
-          <pc:docMk/>
-          <pc:sldMk cId="3642339193" sldId="363"/>
-        </pc:sldMkLst>
-      </pc:sldChg>
-      <pc:sldChg chg="del">
-        <pc:chgData name="Zonghua Gu" userId="9a7e1853e1951ef5" providerId="LiveId" clId="{CF1FAA12-072C-4ED5-BA76-0FFFAEFDB88A}" dt="2025-09-22T00:19:08.642" v="112" actId="47"/>
-        <pc:sldMkLst>
-          <pc:docMk/>
-          <pc:sldMk cId="922012841" sldId="364"/>
-        </pc:sldMkLst>
-      </pc:sldChg>
-      <pc:sldChg chg="del">
-        <pc:chgData name="Zonghua Gu" userId="9a7e1853e1951ef5" providerId="LiveId" clId="{CF1FAA12-072C-4ED5-BA76-0FFFAEFDB88A}" dt="2025-09-22T00:19:08.642" v="112" actId="47"/>
-        <pc:sldMkLst>
-          <pc:docMk/>
-          <pc:sldMk cId="2952842660" sldId="365"/>
-        </pc:sldMkLst>
-      </pc:sldChg>
-      <pc:sldChg chg="del">
-        <pc:chgData name="Zonghua Gu" userId="9a7e1853e1951ef5" providerId="LiveId" clId="{CF1FAA12-072C-4ED5-BA76-0FFFAEFDB88A}" dt="2025-09-22T00:19:08.642" v="112" actId="47"/>
-        <pc:sldMkLst>
-          <pc:docMk/>
-          <pc:sldMk cId="720361167" sldId="366"/>
-        </pc:sldMkLst>
       </pc:sldChg>
       <pc:sldChg chg="addSp modSp add del mod">
         <pc:chgData name="Zonghua Gu" userId="9a7e1853e1951ef5" providerId="LiveId" clId="{CF1FAA12-072C-4ED5-BA76-0FFFAEFDB88A}" dt="2025-10-05T02:28:26.358" v="2494" actId="1076"/>
@@ -1215,13 +957,6 @@
           </ac:spMkLst>
         </pc:spChg>
       </pc:sldChg>
-      <pc:sldChg chg="del">
-        <pc:chgData name="Zonghua Gu" userId="9a7e1853e1951ef5" providerId="LiveId" clId="{CF1FAA12-072C-4ED5-BA76-0FFFAEFDB88A}" dt="2025-09-22T00:19:08.642" v="112" actId="47"/>
-        <pc:sldMkLst>
-          <pc:docMk/>
-          <pc:sldMk cId="4063778610" sldId="368"/>
-        </pc:sldMkLst>
-      </pc:sldChg>
       <pc:sldChg chg="modSp add del mod">
         <pc:chgData name="Zonghua Gu" userId="9a7e1853e1951ef5" providerId="LiveId" clId="{CF1FAA12-072C-4ED5-BA76-0FFFAEFDB88A}" dt="2025-10-05T02:24:06.560" v="2425" actId="20577"/>
         <pc:sldMkLst>
@@ -1244,27 +979,6 @@
             <ac:spMk id="15" creationId="{00000000-0000-0000-0000-000000000000}"/>
           </ac:spMkLst>
         </pc:spChg>
-      </pc:sldChg>
-      <pc:sldChg chg="del">
-        <pc:chgData name="Zonghua Gu" userId="9a7e1853e1951ef5" providerId="LiveId" clId="{CF1FAA12-072C-4ED5-BA76-0FFFAEFDB88A}" dt="2025-09-22T00:19:08.642" v="112" actId="47"/>
-        <pc:sldMkLst>
-          <pc:docMk/>
-          <pc:sldMk cId="682337926" sldId="370"/>
-        </pc:sldMkLst>
-      </pc:sldChg>
-      <pc:sldChg chg="delSp modSp add del mod">
-        <pc:chgData name="Zonghua Gu" userId="9a7e1853e1951ef5" providerId="LiveId" clId="{CF1FAA12-072C-4ED5-BA76-0FFFAEFDB88A}" dt="2025-10-05T02:23:05.594" v="2384" actId="47"/>
-        <pc:sldMkLst>
-          <pc:docMk/>
-          <pc:sldMk cId="945339359" sldId="370"/>
-        </pc:sldMkLst>
-      </pc:sldChg>
-      <pc:sldChg chg="del">
-        <pc:chgData name="Zonghua Gu" userId="9a7e1853e1951ef5" providerId="LiveId" clId="{CF1FAA12-072C-4ED5-BA76-0FFFAEFDB88A}" dt="2025-09-22T00:19:08.642" v="112" actId="47"/>
-        <pc:sldMkLst>
-          <pc:docMk/>
-          <pc:sldMk cId="1126003200" sldId="371"/>
-        </pc:sldMkLst>
       </pc:sldChg>
       <pc:sldChg chg="delSp modSp add mod">
         <pc:chgData name="Zonghua Gu" userId="9a7e1853e1951ef5" providerId="LiveId" clId="{CF1FAA12-072C-4ED5-BA76-0FFFAEFDB88A}" dt="2025-10-05T02:24:01.145" v="2420" actId="313"/>
@@ -1296,41 +1010,6 @@
             <ac:spMk id="28" creationId="{5A07EE5F-FDFB-4DFD-A418-4743BE043075}"/>
           </ac:spMkLst>
         </pc:spChg>
-      </pc:sldChg>
-      <pc:sldChg chg="new del">
-        <pc:chgData name="Zonghua Gu" userId="9a7e1853e1951ef5" providerId="LiveId" clId="{CF1FAA12-072C-4ED5-BA76-0FFFAEFDB88A}" dt="2025-10-05T02:27:32.390" v="2474" actId="47"/>
-        <pc:sldMkLst>
-          <pc:docMk/>
-          <pc:sldMk cId="2436608324" sldId="372"/>
-        </pc:sldMkLst>
-      </pc:sldChg>
-      <pc:sldChg chg="del">
-        <pc:chgData name="Zonghua Gu" userId="9a7e1853e1951ef5" providerId="LiveId" clId="{CF1FAA12-072C-4ED5-BA76-0FFFAEFDB88A}" dt="2025-09-22T00:19:08.642" v="112" actId="47"/>
-        <pc:sldMkLst>
-          <pc:docMk/>
-          <pc:sldMk cId="3349032829" sldId="372"/>
-        </pc:sldMkLst>
-      </pc:sldChg>
-      <pc:sldChg chg="del">
-        <pc:chgData name="Zonghua Gu" userId="9a7e1853e1951ef5" providerId="LiveId" clId="{CF1FAA12-072C-4ED5-BA76-0FFFAEFDB88A}" dt="2025-09-22T00:19:08.642" v="112" actId="47"/>
-        <pc:sldMkLst>
-          <pc:docMk/>
-          <pc:sldMk cId="1055677735" sldId="373"/>
-        </pc:sldMkLst>
-      </pc:sldChg>
-      <pc:sldChg chg="modSp new del mod">
-        <pc:chgData name="Zonghua Gu" userId="9a7e1853e1951ef5" providerId="LiveId" clId="{CF1FAA12-072C-4ED5-BA76-0FFFAEFDB88A}" dt="2025-10-05T02:37:30.012" v="2515" actId="47"/>
-        <pc:sldMkLst>
-          <pc:docMk/>
-          <pc:sldMk cId="1233805222" sldId="373"/>
-        </pc:sldMkLst>
-      </pc:sldChg>
-      <pc:sldChg chg="addSp delSp modSp new del mod">
-        <pc:chgData name="Zonghua Gu" userId="9a7e1853e1951ef5" providerId="LiveId" clId="{CF1FAA12-072C-4ED5-BA76-0FFFAEFDB88A}" dt="2025-09-22T00:19:08.642" v="112" actId="47"/>
-        <pc:sldMkLst>
-          <pc:docMk/>
-          <pc:sldMk cId="75619375" sldId="374"/>
-        </pc:sldMkLst>
       </pc:sldChg>
       <pc:sldChg chg="modSp add mod">
         <pc:chgData name="Zonghua Gu" userId="9a7e1853e1951ef5" providerId="LiveId" clId="{CF1FAA12-072C-4ED5-BA76-0FFFAEFDB88A}" dt="2025-10-05T02:28:53.216" v="2506" actId="20577"/>
@@ -1370,27 +1049,6 @@
             <ac:spMk id="13" creationId="{92808386-3B22-1A70-1D2E-E9457F9ACA75}"/>
           </ac:spMkLst>
         </pc:spChg>
-      </pc:sldChg>
-      <pc:sldChg chg="modSp add del mod">
-        <pc:chgData name="Zonghua Gu" userId="9a7e1853e1951ef5" providerId="LiveId" clId="{CF1FAA12-072C-4ED5-BA76-0FFFAEFDB88A}" dt="2025-09-22T00:19:08.642" v="112" actId="47"/>
-        <pc:sldMkLst>
-          <pc:docMk/>
-          <pc:sldMk cId="831910973" sldId="375"/>
-        </pc:sldMkLst>
-      </pc:sldChg>
-      <pc:sldChg chg="modSp new del mod">
-        <pc:chgData name="Zonghua Gu" userId="9a7e1853e1951ef5" providerId="LiveId" clId="{CF1FAA12-072C-4ED5-BA76-0FFFAEFDB88A}" dt="2025-09-22T00:19:08.642" v="112" actId="47"/>
-        <pc:sldMkLst>
-          <pc:docMk/>
-          <pc:sldMk cId="3663400516" sldId="376"/>
-        </pc:sldMkLst>
-      </pc:sldChg>
-      <pc:sldChg chg="add del">
-        <pc:chgData name="Zonghua Gu" userId="9a7e1853e1951ef5" providerId="LiveId" clId="{CF1FAA12-072C-4ED5-BA76-0FFFAEFDB88A}" dt="2025-10-14T21:25:51.586" v="2922" actId="47"/>
-        <pc:sldMkLst>
-          <pc:docMk/>
-          <pc:sldMk cId="3812285226" sldId="747"/>
-        </pc:sldMkLst>
       </pc:sldChg>
       <pc:sldChg chg="modSp add mod">
         <pc:chgData name="Zonghua Gu" userId="9a7e1853e1951ef5" providerId="LiveId" clId="{CF1FAA12-072C-4ED5-BA76-0FFFAEFDB88A}" dt="2025-10-05T02:35:31.975" v="2511" actId="20577"/>
@@ -1468,13 +1126,6 @@
           </ac:spMkLst>
         </pc:spChg>
       </pc:sldChg>
-      <pc:sldChg chg="new del modNotesTx">
-        <pc:chgData name="Zonghua Gu" userId="9a7e1853e1951ef5" providerId="LiveId" clId="{CF1FAA12-072C-4ED5-BA76-0FFFAEFDB88A}" dt="2025-10-14T21:08:41.639" v="2872" actId="47"/>
-        <pc:sldMkLst>
-          <pc:docMk/>
-          <pc:sldMk cId="3281418012" sldId="758"/>
-        </pc:sldMkLst>
-      </pc:sldChg>
       <pc:sldChg chg="modSp add mod">
         <pc:chgData name="Zonghua Gu" userId="9a7e1853e1951ef5" providerId="LiveId" clId="{CF1FAA12-072C-4ED5-BA76-0FFFAEFDB88A}" dt="2025-10-14T21:08:29.941" v="2870" actId="20577"/>
         <pc:sldMkLst>
@@ -1505,8 +1156,8 @@
           </ac:spMkLst>
         </pc:spChg>
       </pc:sldChg>
-      <pc:sldChg chg="new">
-        <pc:chgData name="Zonghua Gu" userId="9a7e1853e1951ef5" providerId="LiveId" clId="{CF1FAA12-072C-4ED5-BA76-0FFFAEFDB88A}" dt="2025-10-14T21:10:10.888" v="2878" actId="680"/>
+      <pc:sldChg chg="new del">
+        <pc:chgData name="Zonghua Gu" userId="9a7e1853e1951ef5" providerId="LiveId" clId="{CF1FAA12-072C-4ED5-BA76-0FFFAEFDB88A}" dt="2025-10-21T18:46:30.892" v="2923" actId="47"/>
         <pc:sldMkLst>
           <pc:docMk/>
           <pc:sldMk cId="1273994328" sldId="761"/>
@@ -1518,6 +1169,68 @@
           <pc:docMk/>
           <pc:sldMk cId="734650997" sldId="762"/>
         </pc:sldMkLst>
+      </pc:sldChg>
+      <pc:sldChg chg="addSp modSp new mod">
+        <pc:chgData name="Zonghua Gu" userId="9a7e1853e1951ef5" providerId="LiveId" clId="{CF1FAA12-072C-4ED5-BA76-0FFFAEFDB88A}" dt="2025-10-21T19:03:17.053" v="3283" actId="20577"/>
+        <pc:sldMkLst>
+          <pc:docMk/>
+          <pc:sldMk cId="4214831448" sldId="763"/>
+        </pc:sldMkLst>
+        <pc:spChg chg="mod">
+          <ac:chgData name="Zonghua Gu" userId="9a7e1853e1951ef5" providerId="LiveId" clId="{CF1FAA12-072C-4ED5-BA76-0FFFAEFDB88A}" dt="2025-10-21T18:47:00.528" v="2962" actId="20577"/>
+          <ac:spMkLst>
+            <pc:docMk/>
+            <pc:sldMk cId="4214831448" sldId="763"/>
+            <ac:spMk id="2" creationId="{0CCDC4F0-89D8-54C1-7B5F-442BB66DAAA7}"/>
+          </ac:spMkLst>
+        </pc:spChg>
+        <pc:spChg chg="mod">
+          <ac:chgData name="Zonghua Gu" userId="9a7e1853e1951ef5" providerId="LiveId" clId="{CF1FAA12-072C-4ED5-BA76-0FFFAEFDB88A}" dt="2025-10-21T19:03:17.053" v="3283" actId="20577"/>
+          <ac:spMkLst>
+            <pc:docMk/>
+            <pc:sldMk cId="4214831448" sldId="763"/>
+            <ac:spMk id="4" creationId="{4C97CD4C-D1B7-839F-818C-C650C0AA8892}"/>
+          </ac:spMkLst>
+        </pc:spChg>
+        <pc:spChg chg="add mod">
+          <ac:chgData name="Zonghua Gu" userId="9a7e1853e1951ef5" providerId="LiveId" clId="{CF1FAA12-072C-4ED5-BA76-0FFFAEFDB88A}" dt="2025-10-21T19:03:02.485" v="3252" actId="1076"/>
+          <ac:spMkLst>
+            <pc:docMk/>
+            <pc:sldMk cId="4214831448" sldId="763"/>
+            <ac:spMk id="5" creationId="{E5333230-46BA-8663-0449-A907C073A049}"/>
+          </ac:spMkLst>
+        </pc:spChg>
+      </pc:sldChg>
+      <pc:sldChg chg="modSp add mod">
+        <pc:chgData name="Zonghua Gu" userId="9a7e1853e1951ef5" providerId="LiveId" clId="{CF1FAA12-072C-4ED5-BA76-0FFFAEFDB88A}" dt="2025-10-21T18:54:07.097" v="3250" actId="1036"/>
+        <pc:sldMkLst>
+          <pc:docMk/>
+          <pc:sldMk cId="3848203700" sldId="764"/>
+        </pc:sldMkLst>
+        <pc:spChg chg="mod">
+          <ac:chgData name="Zonghua Gu" userId="9a7e1853e1951ef5" providerId="LiveId" clId="{CF1FAA12-072C-4ED5-BA76-0FFFAEFDB88A}" dt="2025-10-21T18:51:30.416" v="3128" actId="20577"/>
+          <ac:spMkLst>
+            <pc:docMk/>
+            <pc:sldMk cId="3848203700" sldId="764"/>
+            <ac:spMk id="2" creationId="{5BB67A95-DEC2-DAE0-E275-60B265AA044E}"/>
+          </ac:spMkLst>
+        </pc:spChg>
+        <pc:spChg chg="mod">
+          <ac:chgData name="Zonghua Gu" userId="9a7e1853e1951ef5" providerId="LiveId" clId="{CF1FAA12-072C-4ED5-BA76-0FFFAEFDB88A}" dt="2025-10-21T18:54:07.097" v="3250" actId="1036"/>
+          <ac:spMkLst>
+            <pc:docMk/>
+            <pc:sldMk cId="3848203700" sldId="764"/>
+            <ac:spMk id="4" creationId="{0707AC2E-44F3-B02C-EC23-E5EB61FA94EB}"/>
+          </ac:spMkLst>
+        </pc:spChg>
+        <pc:spChg chg="mod">
+          <ac:chgData name="Zonghua Gu" userId="9a7e1853e1951ef5" providerId="LiveId" clId="{CF1FAA12-072C-4ED5-BA76-0FFFAEFDB88A}" dt="2025-10-21T18:53:55.482" v="3247" actId="1076"/>
+          <ac:spMkLst>
+            <pc:docMk/>
+            <pc:sldMk cId="3848203700" sldId="764"/>
+            <ac:spMk id="5" creationId="{A84A8A79-412F-4394-2139-FF1AAAAEDB7A}"/>
+          </ac:spMkLst>
+        </pc:spChg>
       </pc:sldChg>
     </pc:docChg>
   </pc:docChgLst>
@@ -1618,7 +1331,7 @@
           <a:p>
             <a:fld id="{3B161579-C726-4AFD-89FC-66D961EAF8EA}" type="datetimeFigureOut">
               <a:rPr lang="en-US" smtClean="0"/>
-              <a:t>10/14/2025</a:t>
+              <a:t>10/21/2025</a:t>
             </a:fld>
             <a:endParaRPr lang="en-US"/>
           </a:p>
@@ -1796,7 +1509,7 @@
             <a:fld id="{0C5DCA7A-C3FD-4606-A3AD-864BD96433D4}" type="datetimeFigureOut">
               <a:rPr lang="en-US" smtClean="0"/>
               <a:pPr/>
-              <a:t>10/14/2025</a:t>
+              <a:t>10/21/2025</a:t>
             </a:fld>
             <a:endParaRPr lang="en-US"/>
           </a:p>
@@ -2671,7 +2384,7 @@
             <a:fld id="{D46F4F04-2BB1-473A-9274-1B455085D21A}" type="slidenum">
               <a:rPr lang="en-US" smtClean="0"/>
               <a:pPr/>
-              <a:t>22</a:t>
+              <a:t>21</a:t>
             </a:fld>
             <a:endParaRPr lang="en-US"/>
           </a:p>
@@ -2898,7 +2611,7 @@
             <a:fld id="{D46F4F04-2BB1-473A-9274-1B455085D21A}" type="slidenum">
               <a:rPr lang="en-US" smtClean="0"/>
               <a:pPr/>
-              <a:t>23</a:t>
+              <a:t>22</a:t>
             </a:fld>
             <a:endParaRPr lang="en-US"/>
           </a:p>
@@ -3249,7 +2962,7 @@
             <a:fld id="{D46F4F04-2BB1-473A-9274-1B455085D21A}" type="slidenum">
               <a:rPr lang="en-US" smtClean="0"/>
               <a:pPr/>
-              <a:t>25</a:t>
+              <a:t>24</a:t>
             </a:fld>
             <a:endParaRPr lang="en-US"/>
           </a:p>
@@ -3357,7 +3070,7 @@
             <a:fld id="{D46F4F04-2BB1-473A-9274-1B455085D21A}" type="slidenum">
               <a:rPr lang="en-US" smtClean="0"/>
               <a:pPr/>
-              <a:t>26</a:t>
+              <a:t>25</a:t>
             </a:fld>
             <a:endParaRPr lang="en-US"/>
           </a:p>
@@ -3367,6 +3080,672 @@
     <p:extLst>
       <p:ext uri="{BB962C8B-B14F-4D97-AF65-F5344CB8AC3E}">
         <p14:creationId xmlns:p14="http://schemas.microsoft.com/office/powerpoint/2010/main" val="2816329202"/>
+      </p:ext>
+    </p:extLst>
+  </p:cSld>
+  <p:clrMapOvr>
+    <a:masterClrMapping/>
+  </p:clrMapOvr>
+</p:notes>
+</file>
+
+<file path=ppt/notesSlides/notesSlide7.xml><?xml version="1.0" encoding="utf-8"?>
+<p:notes xmlns:a="http://schemas.openxmlformats.org/drawingml/2006/main" xmlns:r="http://schemas.openxmlformats.org/officeDocument/2006/relationships" xmlns:p="http://schemas.openxmlformats.org/presentationml/2006/main">
+  <p:cSld>
+    <p:spTree>
+      <p:nvGrpSpPr>
+        <p:cNvPr id="1" name=""/>
+        <p:cNvGrpSpPr/>
+        <p:nvPr/>
+      </p:nvGrpSpPr>
+      <p:grpSpPr>
+        <a:xfrm>
+          <a:off x="0" y="0"/>
+          <a:ext cx="0" cy="0"/>
+          <a:chOff x="0" y="0"/>
+          <a:chExt cx="0" cy="0"/>
+        </a:xfrm>
+      </p:grpSpPr>
+      <p:sp>
+        <p:nvSpPr>
+          <p:cNvPr id="2" name="Slide Image Placeholder 1"/>
+          <p:cNvSpPr>
+            <a:spLocks noGrp="1" noRot="1" noChangeAspect="1"/>
+          </p:cNvSpPr>
+          <p:nvPr>
+            <p:ph type="sldImg"/>
+          </p:nvPr>
+        </p:nvSpPr>
+        <p:spPr/>
+      </p:sp>
+      <p:sp>
+        <p:nvSpPr>
+          <p:cNvPr id="3" name="Notes Placeholder 2"/>
+          <p:cNvSpPr>
+            <a:spLocks noGrp="1"/>
+          </p:cNvSpPr>
+          <p:nvPr>
+            <p:ph type="body" idx="1"/>
+          </p:nvPr>
+        </p:nvSpPr>
+        <p:spPr/>
+        <p:txBody>
+          <a:bodyPr/>
+          <a:lstStyle/>
+          <a:p>
+            <a:r>
+              <a:rPr lang="en-US" dirty="0"/>
+              <a:t>Here’s what the program </a:t>
+            </a:r>
+            <a:r>
+              <a:rPr lang="en-US" i="1" dirty="0"/>
+              <a:t>does in practice</a:t>
+            </a:r>
+            <a:r>
+              <a:rPr lang="en-US" dirty="0"/>
+              <a:t>:</a:t>
+            </a:r>
+          </a:p>
+          <a:p>
+            <a:r>
+              <a:rPr lang="en-US" dirty="0"/>
+              <a:t>It starts with </a:t>
+            </a:r>
+            <a:r>
+              <a:rPr lang="en-US" sz="1200" kern="1200" dirty="0">
+                <a:solidFill>
+                  <a:schemeClr val="tx1"/>
+                </a:solidFill>
+                <a:latin typeface="+mn-lt"/>
+                <a:ea typeface="+mn-ea"/>
+                <a:cs typeface="+mn-cs"/>
+              </a:rPr>
+              <a:t>x0 = 1</a:t>
+            </a:r>
+            <a:r>
+              <a:rPr lang="en-US" dirty="0"/>
+              <a:t>.</a:t>
+            </a:r>
+          </a:p>
+          <a:p>
+            <a:r>
+              <a:rPr lang="en-US" dirty="0"/>
+              <a:t>It loops, incrementing </a:t>
+            </a:r>
+            <a:r>
+              <a:rPr lang="en-US" sz="1200" kern="1200" dirty="0">
+                <a:solidFill>
+                  <a:schemeClr val="tx1"/>
+                </a:solidFill>
+                <a:latin typeface="+mn-lt"/>
+                <a:ea typeface="+mn-ea"/>
+                <a:cs typeface="+mn-cs"/>
+              </a:rPr>
+              <a:t>x0</a:t>
+            </a:r>
+            <a:r>
+              <a:rPr lang="en-US" dirty="0"/>
+              <a:t> each time.</a:t>
+            </a:r>
+          </a:p>
+          <a:p>
+            <a:r>
+              <a:rPr lang="en-US" dirty="0"/>
+              <a:t>When </a:t>
+            </a:r>
+            <a:r>
+              <a:rPr lang="en-US" sz="1200" kern="1200" dirty="0">
+                <a:solidFill>
+                  <a:schemeClr val="tx1"/>
+                </a:solidFill>
+                <a:latin typeface="+mn-lt"/>
+                <a:ea typeface="+mn-ea"/>
+                <a:cs typeface="+mn-cs"/>
+              </a:rPr>
+              <a:t>x0</a:t>
+            </a:r>
+            <a:r>
+              <a:rPr lang="en-US" dirty="0"/>
+              <a:t> reaches </a:t>
+            </a:r>
+            <a:r>
+              <a:rPr lang="en-US" sz="1200" kern="1200" dirty="0">
+                <a:solidFill>
+                  <a:schemeClr val="tx1"/>
+                </a:solidFill>
+                <a:latin typeface="+mn-lt"/>
+                <a:ea typeface="+mn-ea"/>
+                <a:cs typeface="+mn-cs"/>
+              </a:rPr>
+              <a:t>5</a:t>
+            </a:r>
+            <a:r>
+              <a:rPr lang="en-US" dirty="0"/>
+              <a:t>, it calls </a:t>
+            </a:r>
+            <a:r>
+              <a:rPr lang="en-US" sz="1200" kern="1200" dirty="0">
+                <a:solidFill>
+                  <a:schemeClr val="tx1"/>
+                </a:solidFill>
+                <a:latin typeface="+mn-lt"/>
+                <a:ea typeface="+mn-ea"/>
+                <a:cs typeface="+mn-cs"/>
+              </a:rPr>
+              <a:t>call</a:t>
+            </a:r>
+            <a:r>
+              <a:rPr lang="en-US" dirty="0"/>
+              <a:t>.</a:t>
+            </a:r>
+          </a:p>
+          <a:p>
+            <a:r>
+              <a:rPr lang="en-US" sz="1200" kern="1200" dirty="0">
+                <a:solidFill>
+                  <a:schemeClr val="tx1"/>
+                </a:solidFill>
+                <a:latin typeface="+mn-lt"/>
+                <a:ea typeface="+mn-ea"/>
+                <a:cs typeface="+mn-cs"/>
+              </a:rPr>
+              <a:t>call</a:t>
+            </a:r>
+            <a:r>
+              <a:rPr lang="en-US" dirty="0"/>
+              <a:t> adds </a:t>
+            </a:r>
+            <a:r>
+              <a:rPr lang="en-US" sz="1200" kern="1200" dirty="0">
+                <a:solidFill>
+                  <a:schemeClr val="tx1"/>
+                </a:solidFill>
+                <a:latin typeface="+mn-lt"/>
+                <a:ea typeface="+mn-ea"/>
+                <a:cs typeface="+mn-cs"/>
+              </a:rPr>
+              <a:t>255</a:t>
+            </a:r>
+            <a:r>
+              <a:rPr lang="en-US" dirty="0"/>
+              <a:t> to </a:t>
+            </a:r>
+            <a:r>
+              <a:rPr lang="en-US" sz="1200" kern="1200" dirty="0">
+                <a:solidFill>
+                  <a:schemeClr val="tx1"/>
+                </a:solidFill>
+                <a:latin typeface="+mn-lt"/>
+                <a:ea typeface="+mn-ea"/>
+                <a:cs typeface="+mn-cs"/>
+              </a:rPr>
+              <a:t>x7</a:t>
+            </a:r>
+            <a:r>
+              <a:rPr lang="en-US" dirty="0"/>
+              <a:t> and resets </a:t>
+            </a:r>
+            <a:r>
+              <a:rPr lang="en-US" sz="1200" kern="1200" dirty="0">
+                <a:solidFill>
+                  <a:schemeClr val="tx1"/>
+                </a:solidFill>
+                <a:latin typeface="+mn-lt"/>
+                <a:ea typeface="+mn-ea"/>
+                <a:cs typeface="+mn-cs"/>
+              </a:rPr>
+              <a:t>x0</a:t>
+            </a:r>
+            <a:r>
+              <a:rPr lang="en-US" dirty="0"/>
+              <a:t> to </a:t>
+            </a:r>
+            <a:r>
+              <a:rPr lang="en-US" sz="1200" kern="1200" dirty="0">
+                <a:solidFill>
+                  <a:schemeClr val="tx1"/>
+                </a:solidFill>
+                <a:latin typeface="+mn-lt"/>
+                <a:ea typeface="+mn-ea"/>
+                <a:cs typeface="+mn-cs"/>
+              </a:rPr>
+              <a:t>1</a:t>
+            </a:r>
+            <a:r>
+              <a:rPr lang="en-US" dirty="0"/>
+              <a:t>.</a:t>
+            </a:r>
+          </a:p>
+          <a:p>
+            <a:r>
+              <a:rPr lang="en-US" dirty="0"/>
+              <a:t>Control returns to </a:t>
+            </a:r>
+            <a:r>
+              <a:rPr lang="en-US" sz="1200" kern="1200" dirty="0">
+                <a:solidFill>
+                  <a:schemeClr val="tx1"/>
+                </a:solidFill>
+                <a:latin typeface="+mn-lt"/>
+                <a:ea typeface="+mn-ea"/>
+                <a:cs typeface="+mn-cs"/>
+              </a:rPr>
+              <a:t>main</a:t>
+            </a:r>
+            <a:r>
+              <a:rPr lang="en-US" dirty="0"/>
+              <a:t>, and the cycle repeats.</a:t>
+            </a:r>
+          </a:p>
+          <a:p>
+            <a:r>
+              <a:rPr lang="en-US" dirty="0"/>
+              <a:t>So the pattern goes like this:</a:t>
+            </a:r>
+          </a:p>
+          <a:p>
+            <a:pPr rtl="0"/>
+            <a:r>
+              <a:rPr lang="en-US" sz="1200" kern="1200" dirty="0">
+                <a:solidFill>
+                  <a:schemeClr val="tx1"/>
+                </a:solidFill>
+                <a:latin typeface="+mn-lt"/>
+                <a:ea typeface="+mn-ea"/>
+                <a:cs typeface="+mn-cs"/>
+              </a:rPr>
+              <a:t>x0: 1 → 2 → 3 → 4 → 5 → (call resets to 1)</a:t>
+            </a:r>
+          </a:p>
+          <a:p>
+            <a:pPr rtl="0"/>
+            <a:r>
+              <a:rPr lang="en-US" sz="1200" kern="1200" dirty="0">
+                <a:solidFill>
+                  <a:schemeClr val="tx1"/>
+                </a:solidFill>
+                <a:latin typeface="+mn-lt"/>
+                <a:ea typeface="+mn-ea"/>
+                <a:cs typeface="+mn-cs"/>
+              </a:rPr>
+              <a:t>x7: +255 each time x0 reaches 5</a:t>
+            </a:r>
+          </a:p>
+        </p:txBody>
+      </p:sp>
+      <p:sp>
+        <p:nvSpPr>
+          <p:cNvPr id="4" name="Slide Number Placeholder 3"/>
+          <p:cNvSpPr>
+            <a:spLocks noGrp="1"/>
+          </p:cNvSpPr>
+          <p:nvPr>
+            <p:ph type="sldNum" sz="quarter" idx="5"/>
+          </p:nvPr>
+        </p:nvSpPr>
+        <p:spPr/>
+        <p:txBody>
+          <a:bodyPr/>
+          <a:lstStyle/>
+          <a:p>
+            <a:fld id="{D46F4F04-2BB1-473A-9274-1B455085D21A}" type="slidenum">
+              <a:rPr lang="en-US" smtClean="0"/>
+              <a:pPr/>
+              <a:t>31</a:t>
+            </a:fld>
+            <a:endParaRPr lang="en-US"/>
+          </a:p>
+        </p:txBody>
+      </p:sp>
+    </p:spTree>
+    <p:extLst>
+      <p:ext uri="{BB962C8B-B14F-4D97-AF65-F5344CB8AC3E}">
+        <p14:creationId xmlns:p14="http://schemas.microsoft.com/office/powerpoint/2010/main" val="260489798"/>
+      </p:ext>
+    </p:extLst>
+  </p:cSld>
+  <p:clrMapOvr>
+    <a:masterClrMapping/>
+  </p:clrMapOvr>
+</p:notes>
+</file>
+
+<file path=ppt/notesSlides/notesSlide8.xml><?xml version="1.0" encoding="utf-8"?>
+<p:notes xmlns:a="http://schemas.openxmlformats.org/drawingml/2006/main" xmlns:r="http://schemas.openxmlformats.org/officeDocument/2006/relationships" xmlns:p="http://schemas.openxmlformats.org/presentationml/2006/main">
+  <p:cSld>
+    <p:spTree>
+      <p:nvGrpSpPr>
+        <p:cNvPr id="1" name="">
+          <a:extLst>
+            <a:ext uri="{FF2B5EF4-FFF2-40B4-BE49-F238E27FC236}">
+              <a16:creationId xmlns:a16="http://schemas.microsoft.com/office/drawing/2014/main" id="{8D17C537-0F01-0DCA-2284-5B6554C4A3FD}"/>
+            </a:ext>
+          </a:extLst>
+        </p:cNvPr>
+        <p:cNvGrpSpPr/>
+        <p:nvPr/>
+      </p:nvGrpSpPr>
+      <p:grpSpPr>
+        <a:xfrm>
+          <a:off x="0" y="0"/>
+          <a:ext cx="0" cy="0"/>
+          <a:chOff x="0" y="0"/>
+          <a:chExt cx="0" cy="0"/>
+        </a:xfrm>
+      </p:grpSpPr>
+      <p:sp>
+        <p:nvSpPr>
+          <p:cNvPr id="2" name="Slide Image Placeholder 1">
+            <a:extLst>
+              <a:ext uri="{FF2B5EF4-FFF2-40B4-BE49-F238E27FC236}">
+                <a16:creationId xmlns:a16="http://schemas.microsoft.com/office/drawing/2014/main" id="{AFD3AD5C-C850-531A-91F6-BCF6A2A1F1B2}"/>
+              </a:ext>
+            </a:extLst>
+          </p:cNvPr>
+          <p:cNvSpPr>
+            <a:spLocks noGrp="1" noRot="1" noChangeAspect="1"/>
+          </p:cNvSpPr>
+          <p:nvPr>
+            <p:ph type="sldImg"/>
+          </p:nvPr>
+        </p:nvSpPr>
+        <p:spPr/>
+      </p:sp>
+      <p:sp>
+        <p:nvSpPr>
+          <p:cNvPr id="3" name="Notes Placeholder 2">
+            <a:extLst>
+              <a:ext uri="{FF2B5EF4-FFF2-40B4-BE49-F238E27FC236}">
+                <a16:creationId xmlns:a16="http://schemas.microsoft.com/office/drawing/2014/main" id="{C5A54735-AC8D-E1A4-D4D6-D561E501E42C}"/>
+              </a:ext>
+            </a:extLst>
+          </p:cNvPr>
+          <p:cNvSpPr>
+            <a:spLocks noGrp="1"/>
+          </p:cNvSpPr>
+          <p:nvPr>
+            <p:ph type="body" idx="1"/>
+          </p:nvPr>
+        </p:nvSpPr>
+        <p:spPr/>
+        <p:txBody>
+          <a:bodyPr/>
+          <a:lstStyle/>
+          <a:p>
+            <a:r>
+              <a:rPr lang="en-US" dirty="0"/>
+              <a:t>Here’s what the program </a:t>
+            </a:r>
+            <a:r>
+              <a:rPr lang="en-US" i="1" dirty="0"/>
+              <a:t>does in practice</a:t>
+            </a:r>
+            <a:r>
+              <a:rPr lang="en-US" dirty="0"/>
+              <a:t>:</a:t>
+            </a:r>
+          </a:p>
+          <a:p>
+            <a:r>
+              <a:rPr lang="en-US" dirty="0"/>
+              <a:t>It starts with </a:t>
+            </a:r>
+            <a:r>
+              <a:rPr lang="en-US" sz="1200" kern="1200" dirty="0">
+                <a:solidFill>
+                  <a:schemeClr val="tx1"/>
+                </a:solidFill>
+                <a:latin typeface="+mn-lt"/>
+                <a:ea typeface="+mn-ea"/>
+                <a:cs typeface="+mn-cs"/>
+              </a:rPr>
+              <a:t>x0 = 1</a:t>
+            </a:r>
+            <a:r>
+              <a:rPr lang="en-US" dirty="0"/>
+              <a:t>.</a:t>
+            </a:r>
+          </a:p>
+          <a:p>
+            <a:r>
+              <a:rPr lang="en-US" dirty="0"/>
+              <a:t>It loops, incrementing </a:t>
+            </a:r>
+            <a:r>
+              <a:rPr lang="en-US" sz="1200" kern="1200" dirty="0">
+                <a:solidFill>
+                  <a:schemeClr val="tx1"/>
+                </a:solidFill>
+                <a:latin typeface="+mn-lt"/>
+                <a:ea typeface="+mn-ea"/>
+                <a:cs typeface="+mn-cs"/>
+              </a:rPr>
+              <a:t>x0</a:t>
+            </a:r>
+            <a:r>
+              <a:rPr lang="en-US" dirty="0"/>
+              <a:t> each time.</a:t>
+            </a:r>
+          </a:p>
+          <a:p>
+            <a:r>
+              <a:rPr lang="en-US" dirty="0"/>
+              <a:t>When </a:t>
+            </a:r>
+            <a:r>
+              <a:rPr lang="en-US" sz="1200" kern="1200" dirty="0">
+                <a:solidFill>
+                  <a:schemeClr val="tx1"/>
+                </a:solidFill>
+                <a:latin typeface="+mn-lt"/>
+                <a:ea typeface="+mn-ea"/>
+                <a:cs typeface="+mn-cs"/>
+              </a:rPr>
+              <a:t>x0</a:t>
+            </a:r>
+            <a:r>
+              <a:rPr lang="en-US" dirty="0"/>
+              <a:t> reaches </a:t>
+            </a:r>
+            <a:r>
+              <a:rPr lang="en-US" sz="1200" kern="1200" dirty="0">
+                <a:solidFill>
+                  <a:schemeClr val="tx1"/>
+                </a:solidFill>
+                <a:latin typeface="+mn-lt"/>
+                <a:ea typeface="+mn-ea"/>
+                <a:cs typeface="+mn-cs"/>
+              </a:rPr>
+              <a:t>5</a:t>
+            </a:r>
+            <a:r>
+              <a:rPr lang="en-US" dirty="0"/>
+              <a:t>, it calls </a:t>
+            </a:r>
+            <a:r>
+              <a:rPr lang="en-US" sz="1200" kern="1200" dirty="0">
+                <a:solidFill>
+                  <a:schemeClr val="tx1"/>
+                </a:solidFill>
+                <a:latin typeface="+mn-lt"/>
+                <a:ea typeface="+mn-ea"/>
+                <a:cs typeface="+mn-cs"/>
+              </a:rPr>
+              <a:t>call</a:t>
+            </a:r>
+            <a:r>
+              <a:rPr lang="en-US" dirty="0"/>
+              <a:t>.</a:t>
+            </a:r>
+          </a:p>
+          <a:p>
+            <a:r>
+              <a:rPr lang="en-US" sz="1200" kern="1200" dirty="0">
+                <a:solidFill>
+                  <a:schemeClr val="tx1"/>
+                </a:solidFill>
+                <a:latin typeface="+mn-lt"/>
+                <a:ea typeface="+mn-ea"/>
+                <a:cs typeface="+mn-cs"/>
+              </a:rPr>
+              <a:t>call</a:t>
+            </a:r>
+            <a:r>
+              <a:rPr lang="en-US" dirty="0"/>
+              <a:t> adds </a:t>
+            </a:r>
+            <a:r>
+              <a:rPr lang="en-US" sz="1200" kern="1200" dirty="0">
+                <a:solidFill>
+                  <a:schemeClr val="tx1"/>
+                </a:solidFill>
+                <a:latin typeface="+mn-lt"/>
+                <a:ea typeface="+mn-ea"/>
+                <a:cs typeface="+mn-cs"/>
+              </a:rPr>
+              <a:t>255</a:t>
+            </a:r>
+            <a:r>
+              <a:rPr lang="en-US" dirty="0"/>
+              <a:t> to </a:t>
+            </a:r>
+            <a:r>
+              <a:rPr lang="en-US" sz="1200" kern="1200" dirty="0">
+                <a:solidFill>
+                  <a:schemeClr val="tx1"/>
+                </a:solidFill>
+                <a:latin typeface="+mn-lt"/>
+                <a:ea typeface="+mn-ea"/>
+                <a:cs typeface="+mn-cs"/>
+              </a:rPr>
+              <a:t>x7</a:t>
+            </a:r>
+            <a:r>
+              <a:rPr lang="en-US" dirty="0"/>
+              <a:t> and resets </a:t>
+            </a:r>
+            <a:r>
+              <a:rPr lang="en-US" sz="1200" kern="1200" dirty="0">
+                <a:solidFill>
+                  <a:schemeClr val="tx1"/>
+                </a:solidFill>
+                <a:latin typeface="+mn-lt"/>
+                <a:ea typeface="+mn-ea"/>
+                <a:cs typeface="+mn-cs"/>
+              </a:rPr>
+              <a:t>x0</a:t>
+            </a:r>
+            <a:r>
+              <a:rPr lang="en-US" dirty="0"/>
+              <a:t> to </a:t>
+            </a:r>
+            <a:r>
+              <a:rPr lang="en-US" sz="1200" kern="1200" dirty="0">
+                <a:solidFill>
+                  <a:schemeClr val="tx1"/>
+                </a:solidFill>
+                <a:latin typeface="+mn-lt"/>
+                <a:ea typeface="+mn-ea"/>
+                <a:cs typeface="+mn-cs"/>
+              </a:rPr>
+              <a:t>1</a:t>
+            </a:r>
+            <a:r>
+              <a:rPr lang="en-US" dirty="0"/>
+              <a:t>.</a:t>
+            </a:r>
+          </a:p>
+          <a:p>
+            <a:r>
+              <a:rPr lang="en-US" dirty="0"/>
+              <a:t>Control returns to </a:t>
+            </a:r>
+            <a:r>
+              <a:rPr lang="en-US" sz="1200" kern="1200" dirty="0">
+                <a:solidFill>
+                  <a:schemeClr val="tx1"/>
+                </a:solidFill>
+                <a:latin typeface="+mn-lt"/>
+                <a:ea typeface="+mn-ea"/>
+                <a:cs typeface="+mn-cs"/>
+              </a:rPr>
+              <a:t>main</a:t>
+            </a:r>
+            <a:r>
+              <a:rPr lang="en-US" dirty="0"/>
+              <a:t>, and the cycle repeats.</a:t>
+            </a:r>
+          </a:p>
+          <a:p>
+            <a:r>
+              <a:rPr lang="en-US" dirty="0"/>
+              <a:t>So the pattern goes like this:</a:t>
+            </a:r>
+          </a:p>
+          <a:p>
+            <a:pPr rtl="0"/>
+            <a:r>
+              <a:rPr lang="en-US" sz="1200" kern="1200" dirty="0">
+                <a:solidFill>
+                  <a:schemeClr val="tx1"/>
+                </a:solidFill>
+                <a:latin typeface="+mn-lt"/>
+                <a:ea typeface="+mn-ea"/>
+                <a:cs typeface="+mn-cs"/>
+              </a:rPr>
+              <a:t>x0: 1 → 2 → 3 → 4 → 5 → (call resets to 1)</a:t>
+            </a:r>
+          </a:p>
+          <a:p>
+            <a:pPr rtl="0"/>
+            <a:r>
+              <a:rPr lang="en-US" sz="1200" kern="1200" dirty="0">
+                <a:solidFill>
+                  <a:schemeClr val="tx1"/>
+                </a:solidFill>
+                <a:latin typeface="+mn-lt"/>
+                <a:ea typeface="+mn-ea"/>
+                <a:cs typeface="+mn-cs"/>
+              </a:rPr>
+              <a:t>x7: +255 each time x0 reaches 5</a:t>
+            </a:r>
+          </a:p>
+        </p:txBody>
+      </p:sp>
+      <p:sp>
+        <p:nvSpPr>
+          <p:cNvPr id="4" name="Slide Number Placeholder 3">
+            <a:extLst>
+              <a:ext uri="{FF2B5EF4-FFF2-40B4-BE49-F238E27FC236}">
+                <a16:creationId xmlns:a16="http://schemas.microsoft.com/office/drawing/2014/main" id="{AFBE590A-94DE-53D9-D55F-DBC7B7287FF3}"/>
+              </a:ext>
+            </a:extLst>
+          </p:cNvPr>
+          <p:cNvSpPr>
+            <a:spLocks noGrp="1"/>
+          </p:cNvSpPr>
+          <p:nvPr>
+            <p:ph type="sldNum" sz="quarter" idx="5"/>
+          </p:nvPr>
+        </p:nvSpPr>
+        <p:spPr/>
+        <p:txBody>
+          <a:bodyPr/>
+          <a:lstStyle/>
+          <a:p>
+            <a:fld id="{D46F4F04-2BB1-473A-9274-1B455085D21A}" type="slidenum">
+              <a:rPr lang="en-US" smtClean="0"/>
+              <a:pPr/>
+              <a:t>32</a:t>
+            </a:fld>
+            <a:endParaRPr lang="en-US"/>
+          </a:p>
+        </p:txBody>
+      </p:sp>
+    </p:spTree>
+    <p:extLst>
+      <p:ext uri="{BB962C8B-B14F-4D97-AF65-F5344CB8AC3E}">
+        <p14:creationId xmlns:p14="http://schemas.microsoft.com/office/powerpoint/2010/main" val="1966348516"/>
       </p:ext>
     </p:extLst>
   </p:cSld>
@@ -3518,7 +3897,7 @@
             <a:pPr eaLnBrk="1" latinLnBrk="0" hangingPunct="1"/>
             <a:fld id="{7966D375-7FE4-4861-9EA3-8493E3E81506}" type="datetime1">
               <a:rPr lang="en-US" smtClean="0"/>
-              <a:t>10/14/2025</a:t>
+              <a:t>10/21/2025</a:t>
             </a:fld>
             <a:endParaRPr lang="en-US" sz="1600" dirty="0"/>
           </a:p>
@@ -3878,7 +4257,7 @@
             <a:pPr eaLnBrk="1" latinLnBrk="0" hangingPunct="1"/>
             <a:fld id="{A9C54BE0-D5FE-4C7B-88A7-8835FDA599B1}" type="datetime1">
               <a:rPr lang="en-US" smtClean="0"/>
-              <a:t>10/14/2025</a:t>
+              <a:t>10/21/2025</a:t>
             </a:fld>
             <a:endParaRPr lang="en-US"/>
           </a:p>
@@ -4054,7 +4433,7 @@
             <a:pPr eaLnBrk="1" latinLnBrk="0" hangingPunct="1"/>
             <a:fld id="{F132153C-039A-48A4-AC9F-CEC24D5C2B7A}" type="datetime1">
               <a:rPr lang="en-US" smtClean="0"/>
-              <a:t>10/14/2025</a:t>
+              <a:t>10/21/2025</a:t>
             </a:fld>
             <a:endParaRPr lang="en-US"/>
           </a:p>
@@ -4435,7 +4814,7 @@
             <a:pPr eaLnBrk="1" latinLnBrk="0" hangingPunct="1"/>
             <a:fld id="{00065D69-4622-413E-9E09-6A2509001B66}" type="datetime1">
               <a:rPr lang="en-US" smtClean="0"/>
-              <a:t>10/14/2025</a:t>
+              <a:t>10/21/2025</a:t>
             </a:fld>
             <a:endParaRPr lang="en-US" dirty="0"/>
           </a:p>
@@ -4705,7 +5084,7 @@
             <a:pPr eaLnBrk="1" latinLnBrk="0" hangingPunct="1"/>
             <a:fld id="{26D84756-85D3-4017-90AB-B482945A0CB0}" type="datetime1">
               <a:rPr lang="en-US" smtClean="0"/>
-              <a:t>10/14/2025</a:t>
+              <a:t>10/21/2025</a:t>
             </a:fld>
             <a:endParaRPr lang="en-US" dirty="0"/>
           </a:p>
@@ -4926,7 +5305,7 @@
             <a:pPr eaLnBrk="1" latinLnBrk="0" hangingPunct="1"/>
             <a:fld id="{1359E9A9-3822-4D57-8A64-831B26641011}" type="datetime1">
               <a:rPr lang="en-US" smtClean="0"/>
-              <a:t>10/14/2025</a:t>
+              <a:t>10/21/2025</a:t>
             </a:fld>
             <a:endParaRPr lang="en-US"/>
           </a:p>
@@ -5279,7 +5658,7 @@
             <a:pPr eaLnBrk="1" latinLnBrk="0" hangingPunct="1"/>
             <a:fld id="{F96C45A0-00E6-4B4B-A1A7-CF1486D67AF4}" type="datetime1">
               <a:rPr lang="en-US" smtClean="0"/>
-              <a:t>10/14/2025</a:t>
+              <a:t>10/21/2025</a:t>
             </a:fld>
             <a:endParaRPr lang="en-US"/>
           </a:p>
@@ -5512,7 +5891,7 @@
             <a:pPr eaLnBrk="1" latinLnBrk="0" hangingPunct="1"/>
             <a:fld id="{B88C3861-EF45-4815-A76E-294671FAB405}" type="datetime1">
               <a:rPr lang="en-US" smtClean="0"/>
-              <a:t>10/14/2025</a:t>
+              <a:t>10/21/2025</a:t>
             </a:fld>
             <a:endParaRPr lang="en-US"/>
           </a:p>
@@ -5654,7 +6033,7 @@
             <a:pPr eaLnBrk="1" latinLnBrk="0" hangingPunct="1"/>
             <a:fld id="{0F0B8080-ED7A-45A9-A704-76D750342F93}" type="datetime1">
               <a:rPr lang="en-US" smtClean="0"/>
-              <a:t>10/14/2025</a:t>
+              <a:t>10/21/2025</a:t>
             </a:fld>
             <a:endParaRPr lang="en-US"/>
           </a:p>
@@ -5932,7 +6311,7 @@
             <a:pPr eaLnBrk="1" latinLnBrk="0" hangingPunct="1"/>
             <a:fld id="{D1503A19-0780-4B28-9CCB-B5B1820188BD}" type="datetime1">
               <a:rPr lang="en-US" smtClean="0"/>
-              <a:t>10/14/2025</a:t>
+              <a:t>10/21/2025</a:t>
             </a:fld>
             <a:endParaRPr lang="en-US"/>
           </a:p>
@@ -6340,7 +6719,7 @@
             <a:pPr eaLnBrk="1" latinLnBrk="0" hangingPunct="1"/>
             <a:fld id="{2142A9E5-AE71-46A9-A65E-9BA279401128}" type="datetime1">
               <a:rPr lang="en-US" smtClean="0"/>
-              <a:t>10/14/2025</a:t>
+              <a:t>10/21/2025</a:t>
             </a:fld>
             <a:endParaRPr lang="en-US"/>
           </a:p>
@@ -6678,7 +7057,7 @@
             <a:pPr eaLnBrk="1" latinLnBrk="0" hangingPunct="1"/>
             <a:fld id="{4087DD3F-948A-46ED-B3EC-5D68A963D0B7}" type="datetime1">
               <a:rPr lang="en-US" smtClean="0"/>
-              <a:t>10/14/2025</a:t>
+              <a:t>10/21/2025</a:t>
             </a:fld>
             <a:endParaRPr lang="en-US" sz="1400" dirty="0">
               <a:solidFill>
@@ -11288,116 +11667,6 @@
       </p:grpSpPr>
       <p:sp>
         <p:nvSpPr>
-          <p:cNvPr id="2" name="Title 1">
-            <a:extLst>
-              <a:ext uri="{FF2B5EF4-FFF2-40B4-BE49-F238E27FC236}">
-                <a16:creationId xmlns:a16="http://schemas.microsoft.com/office/drawing/2014/main" id="{5A8CE7FB-D6EA-91FF-145A-7E9C61E5FF5B}"/>
-              </a:ext>
-            </a:extLst>
-          </p:cNvPr>
-          <p:cNvSpPr>
-            <a:spLocks noGrp="1"/>
-          </p:cNvSpPr>
-          <p:nvPr>
-            <p:ph type="title"/>
-          </p:nvPr>
-        </p:nvSpPr>
-        <p:spPr/>
-        <p:txBody>
-          <a:bodyPr/>
-          <a:lstStyle/>
-          <a:p>
-            <a:endParaRPr lang="en-US"/>
-          </a:p>
-        </p:txBody>
-      </p:sp>
-      <p:sp>
-        <p:nvSpPr>
-          <p:cNvPr id="3" name="Slide Number Placeholder 2">
-            <a:extLst>
-              <a:ext uri="{FF2B5EF4-FFF2-40B4-BE49-F238E27FC236}">
-                <a16:creationId xmlns:a16="http://schemas.microsoft.com/office/drawing/2014/main" id="{678C8752-847F-B682-ACE3-F232BF18A861}"/>
-              </a:ext>
-            </a:extLst>
-          </p:cNvPr>
-          <p:cNvSpPr>
-            <a:spLocks noGrp="1"/>
-          </p:cNvSpPr>
-          <p:nvPr>
-            <p:ph type="sldNum" sz="quarter" idx="12"/>
-          </p:nvPr>
-        </p:nvSpPr>
-        <p:spPr/>
-        <p:txBody>
-          <a:bodyPr/>
-          <a:lstStyle/>
-          <a:p>
-            <a:fld id="{EA7C8D44-3667-46F6-9772-CC52308E2A7F}" type="slidenum">
-              <a:rPr kumimoji="0" lang="en-US" smtClean="0"/>
-              <a:pPr/>
-              <a:t>13</a:t>
-            </a:fld>
-            <a:endParaRPr kumimoji="0" lang="en-US" dirty="0"/>
-          </a:p>
-        </p:txBody>
-      </p:sp>
-      <p:sp>
-        <p:nvSpPr>
-          <p:cNvPr id="4" name="Content Placeholder 3">
-            <a:extLst>
-              <a:ext uri="{FF2B5EF4-FFF2-40B4-BE49-F238E27FC236}">
-                <a16:creationId xmlns:a16="http://schemas.microsoft.com/office/drawing/2014/main" id="{49EB078B-EDB9-9761-61A0-2C9E94C4CEB7}"/>
-              </a:ext>
-            </a:extLst>
-          </p:cNvPr>
-          <p:cNvSpPr>
-            <a:spLocks noGrp="1"/>
-          </p:cNvSpPr>
-          <p:nvPr>
-            <p:ph sz="quarter" idx="1"/>
-          </p:nvPr>
-        </p:nvSpPr>
-        <p:spPr/>
-        <p:txBody>
-          <a:bodyPr/>
-          <a:lstStyle/>
-          <a:p>
-            <a:endParaRPr lang="en-US"/>
-          </a:p>
-        </p:txBody>
-      </p:sp>
-    </p:spTree>
-    <p:extLst>
-      <p:ext uri="{BB962C8B-B14F-4D97-AF65-F5344CB8AC3E}">
-        <p14:creationId xmlns:p14="http://schemas.microsoft.com/office/powerpoint/2010/main" val="1273994328"/>
-      </p:ext>
-    </p:extLst>
-  </p:cSld>
-  <p:clrMapOvr>
-    <a:masterClrMapping/>
-  </p:clrMapOvr>
-</p:sld>
-</file>
-
-<file path=ppt/slides/slide14.xml><?xml version="1.0" encoding="utf-8"?>
-<p:sld xmlns:a="http://schemas.openxmlformats.org/drawingml/2006/main" xmlns:r="http://schemas.openxmlformats.org/officeDocument/2006/relationships" xmlns:p="http://schemas.openxmlformats.org/presentationml/2006/main">
-  <p:cSld>
-    <p:spTree>
-      <p:nvGrpSpPr>
-        <p:cNvPr id="1" name=""/>
-        <p:cNvGrpSpPr/>
-        <p:nvPr/>
-      </p:nvGrpSpPr>
-      <p:grpSpPr>
-        <a:xfrm>
-          <a:off x="0" y="0"/>
-          <a:ext cx="0" cy="0"/>
-          <a:chOff x="0" y="0"/>
-          <a:chExt cx="0" cy="0"/>
-        </a:xfrm>
-      </p:grpSpPr>
-      <p:sp>
-        <p:nvSpPr>
           <p:cNvPr id="2" name="Title 1"/>
           <p:cNvSpPr>
             <a:spLocks noGrp="1"/>
@@ -11436,7 +11705,7 @@
             <a:fld id="{EA7C8D44-3667-46F6-9772-CC52308E2A7F}" type="slidenum">
               <a:rPr kumimoji="0" lang="en-US" smtClean="0"/>
               <a:pPr/>
-              <a:t>14</a:t>
+              <a:t>13</a:t>
             </a:fld>
             <a:endParaRPr kumimoji="0" lang="en-US" dirty="0"/>
           </a:p>
@@ -11865,7 +12134,7 @@
 </p:sld>
 </file>
 
-<file path=ppt/slides/slide15.xml><?xml version="1.0" encoding="utf-8"?>
+<file path=ppt/slides/slide14.xml><?xml version="1.0" encoding="utf-8"?>
 <p:sld xmlns:a="http://schemas.openxmlformats.org/drawingml/2006/main" xmlns:r="http://schemas.openxmlformats.org/officeDocument/2006/relationships" xmlns:p="http://schemas.openxmlformats.org/presentationml/2006/main">
   <p:cSld>
     <p:spTree>
@@ -11922,7 +12191,7 @@
             <a:fld id="{EA7C8D44-3667-46F6-9772-CC52308E2A7F}" type="slidenum">
               <a:rPr kumimoji="0" lang="en-US" smtClean="0"/>
               <a:pPr/>
-              <a:t>15</a:t>
+              <a:t>14</a:t>
             </a:fld>
             <a:endParaRPr kumimoji="0" lang="en-US" dirty="0"/>
           </a:p>
@@ -12375,7 +12644,7 @@
 </p:sld>
 </file>
 
-<file path=ppt/slides/slide16.xml><?xml version="1.0" encoding="utf-8"?>
+<file path=ppt/slides/slide15.xml><?xml version="1.0" encoding="utf-8"?>
 <p:sld xmlns:a="http://schemas.openxmlformats.org/drawingml/2006/main" xmlns:r="http://schemas.openxmlformats.org/officeDocument/2006/relationships" xmlns:p="http://schemas.openxmlformats.org/presentationml/2006/main">
   <p:cSld>
     <p:spTree>
@@ -12452,7 +12721,7 @@
             <a:fld id="{EA7C8D44-3667-46F6-9772-CC52308E2A7F}" type="slidenum">
               <a:rPr kumimoji="0" lang="en-US" smtClean="0"/>
               <a:pPr/>
-              <a:t>16</a:t>
+              <a:t>15</a:t>
             </a:fld>
             <a:endParaRPr kumimoji="0" lang="en-US" dirty="0"/>
           </a:p>
@@ -12933,6 +13202,632 @@
     <p:extLst>
       <p:ext uri="{BB962C8B-B14F-4D97-AF65-F5344CB8AC3E}">
         <p14:creationId xmlns:p14="http://schemas.microsoft.com/office/powerpoint/2010/main" val="3970213323"/>
+      </p:ext>
+    </p:extLst>
+  </p:cSld>
+  <p:clrMapOvr>
+    <a:masterClrMapping/>
+  </p:clrMapOvr>
+</p:sld>
+</file>
+
+<file path=ppt/slides/slide16.xml><?xml version="1.0" encoding="utf-8"?>
+<p:sld xmlns:a="http://schemas.openxmlformats.org/drawingml/2006/main" xmlns:r="http://schemas.openxmlformats.org/officeDocument/2006/relationships" xmlns:p="http://schemas.openxmlformats.org/presentationml/2006/main">
+  <p:cSld>
+    <p:spTree>
+      <p:nvGrpSpPr>
+        <p:cNvPr id="1" name=""/>
+        <p:cNvGrpSpPr/>
+        <p:nvPr/>
+      </p:nvGrpSpPr>
+      <p:grpSpPr>
+        <a:xfrm>
+          <a:off x="0" y="0"/>
+          <a:ext cx="0" cy="0"/>
+          <a:chOff x="0" y="0"/>
+          <a:chExt cx="0" cy="0"/>
+        </a:xfrm>
+      </p:grpSpPr>
+      <p:sp>
+        <p:nvSpPr>
+          <p:cNvPr id="2" name="Title 1"/>
+          <p:cNvSpPr>
+            <a:spLocks noGrp="1"/>
+          </p:cNvSpPr>
+          <p:nvPr>
+            <p:ph type="title"/>
+          </p:nvPr>
+        </p:nvSpPr>
+        <p:spPr/>
+        <p:txBody>
+          <a:bodyPr>
+            <a:normAutofit fontScale="90000"/>
+          </a:bodyPr>
+          <a:lstStyle/>
+          <a:p>
+            <a:r>
+              <a:rPr lang="en-US" dirty="0"/>
+              <a:t>What’s wrong? Passing arguments and Returning Value ANS</a:t>
+            </a:r>
+          </a:p>
+        </p:txBody>
+      </p:sp>
+      <p:sp>
+        <p:nvSpPr>
+          <p:cNvPr id="3" name="Slide Number Placeholder 2"/>
+          <p:cNvSpPr>
+            <a:spLocks noGrp="1"/>
+          </p:cNvSpPr>
+          <p:nvPr>
+            <p:ph type="sldNum" sz="quarter" idx="12"/>
+          </p:nvPr>
+        </p:nvSpPr>
+        <p:spPr/>
+        <p:txBody>
+          <a:bodyPr/>
+          <a:lstStyle/>
+          <a:p>
+            <a:fld id="{EA7C8D44-3667-46F6-9772-CC52308E2A7F}" type="slidenum">
+              <a:rPr kumimoji="0" lang="en-US" smtClean="0"/>
+              <a:pPr/>
+              <a:t>16</a:t>
+            </a:fld>
+            <a:endParaRPr kumimoji="0" lang="en-US" dirty="0"/>
+          </a:p>
+        </p:txBody>
+      </p:sp>
+      <p:sp>
+        <p:nvSpPr>
+          <p:cNvPr id="11" name="Rectangle 10"/>
+          <p:cNvSpPr/>
+          <p:nvPr/>
+        </p:nvSpPr>
+        <p:spPr>
+          <a:xfrm>
+            <a:off x="76200" y="1593468"/>
+            <a:ext cx="9163050" cy="646331"/>
+          </a:xfrm>
+          <a:prstGeom prst="rect">
+            <a:avLst/>
+          </a:prstGeom>
+        </p:spPr>
+        <p:txBody>
+          <a:bodyPr wrap="square">
+            <a:spAutoFit/>
+          </a:bodyPr>
+          <a:lstStyle/>
+          <a:p>
+            <a:r>
+              <a:rPr lang="en-US" b="1" dirty="0">
+                <a:latin typeface="Consolas" panose="020B0609020204030204" pitchFamily="49" charset="0"/>
+              </a:rPr>
+              <a:t>uint32_t sum(uint8_t a8, uint8_t b8, uint16_t c16, uint16_t d16, </a:t>
+            </a:r>
+            <a:r>
+              <a:rPr lang="en-US" b="1" dirty="0">
+                <a:solidFill>
+                  <a:srgbClr val="FF0000"/>
+                </a:solidFill>
+                <a:latin typeface="Consolas" panose="020B0609020204030204" pitchFamily="49" charset="0"/>
+              </a:rPr>
+              <a:t>uint32_t e32</a:t>
+            </a:r>
+            <a:r>
+              <a:rPr lang="en-US" b="1" dirty="0">
+                <a:latin typeface="Consolas" panose="020B0609020204030204" pitchFamily="49" charset="0"/>
+              </a:rPr>
+              <a:t>);</a:t>
+            </a:r>
+          </a:p>
+        </p:txBody>
+      </p:sp>
+      <p:sp>
+        <p:nvSpPr>
+          <p:cNvPr id="4" name="TextBox 3"/>
+          <p:cNvSpPr txBox="1"/>
+          <p:nvPr/>
+        </p:nvSpPr>
+        <p:spPr>
+          <a:xfrm>
+            <a:off x="304800" y="2754035"/>
+            <a:ext cx="750526" cy="369332"/>
+          </a:xfrm>
+          <a:prstGeom prst="rect">
+            <a:avLst/>
+          </a:prstGeom>
+          <a:noFill/>
+        </p:spPr>
+        <p:txBody>
+          <a:bodyPr wrap="none" rtlCol="0">
+            <a:spAutoFit/>
+          </a:bodyPr>
+          <a:lstStyle/>
+          <a:p>
+            <a:r>
+              <a:rPr lang="en-US" dirty="0"/>
+              <a:t>Caller</a:t>
+            </a:r>
+          </a:p>
+        </p:txBody>
+      </p:sp>
+      <p:sp>
+        <p:nvSpPr>
+          <p:cNvPr id="23" name="Rectangle 22"/>
+          <p:cNvSpPr/>
+          <p:nvPr/>
+        </p:nvSpPr>
+        <p:spPr>
+          <a:xfrm>
+            <a:off x="33528" y="2251948"/>
+            <a:ext cx="9163050" cy="369332"/>
+          </a:xfrm>
+          <a:prstGeom prst="rect">
+            <a:avLst/>
+          </a:prstGeom>
+        </p:spPr>
+        <p:txBody>
+          <a:bodyPr wrap="square">
+            <a:spAutoFit/>
+          </a:bodyPr>
+          <a:lstStyle/>
+          <a:p>
+            <a:r>
+              <a:rPr lang="en-US" b="1" dirty="0">
+                <a:solidFill>
+                  <a:srgbClr val="FF0000"/>
+                </a:solidFill>
+                <a:latin typeface="Consolas" panose="020B0609020204030204" pitchFamily="49" charset="0"/>
+              </a:rPr>
+              <a:t>s = sum(1, 2, 3, 4, 5);</a:t>
+            </a:r>
+          </a:p>
+        </p:txBody>
+      </p:sp>
+      <p:sp>
+        <p:nvSpPr>
+          <p:cNvPr id="15" name="TextBox 14"/>
+          <p:cNvSpPr txBox="1"/>
+          <p:nvPr/>
+        </p:nvSpPr>
+        <p:spPr>
+          <a:xfrm>
+            <a:off x="449580" y="3256122"/>
+            <a:ext cx="2464136" cy="2585323"/>
+          </a:xfrm>
+          <a:prstGeom prst="rect">
+            <a:avLst/>
+          </a:prstGeom>
+        </p:spPr>
+        <p:style>
+          <a:lnRef idx="2">
+            <a:schemeClr val="accent1"/>
+          </a:lnRef>
+          <a:fillRef idx="1">
+            <a:schemeClr val="lt1"/>
+          </a:fillRef>
+          <a:effectRef idx="0">
+            <a:schemeClr val="accent1"/>
+          </a:effectRef>
+          <a:fontRef idx="minor">
+            <a:schemeClr val="dk1"/>
+          </a:fontRef>
+        </p:style>
+        <p:txBody>
+          <a:bodyPr wrap="none" rtlCol="0">
+            <a:spAutoFit/>
+          </a:bodyPr>
+          <a:lstStyle/>
+          <a:p>
+            <a:r>
+              <a:rPr lang="en-US" dirty="0">
+                <a:latin typeface="Consolas" panose="020B0609020204030204" pitchFamily="49" charset="0"/>
+              </a:rPr>
+              <a:t>  MOV r0, #5 </a:t>
+            </a:r>
+            <a:r>
+              <a:rPr lang="en-US" dirty="0">
+                <a:solidFill>
+                  <a:schemeClr val="bg1">
+                    <a:lumMod val="50000"/>
+                  </a:schemeClr>
+                </a:solidFill>
+                <a:latin typeface="Consolas" panose="020B0609020204030204" pitchFamily="49" charset="0"/>
+              </a:rPr>
+              <a:t>; e32</a:t>
+            </a:r>
+          </a:p>
+          <a:p>
+            <a:r>
+              <a:rPr lang="en-US" dirty="0">
+                <a:latin typeface="Consolas" panose="020B0609020204030204" pitchFamily="49" charset="0"/>
+              </a:rPr>
+              <a:t>  </a:t>
+            </a:r>
+            <a:r>
+              <a:rPr lang="en-US" b="1" dirty="0">
+                <a:solidFill>
+                  <a:srgbClr val="FF0000"/>
+                </a:solidFill>
+                <a:latin typeface="Consolas" panose="020B0609020204030204" pitchFamily="49" charset="0"/>
+              </a:rPr>
+              <a:t>PUSH {r0}</a:t>
+            </a:r>
+          </a:p>
+          <a:p>
+            <a:r>
+              <a:rPr lang="en-US" dirty="0">
+                <a:solidFill>
+                  <a:schemeClr val="tx1"/>
+                </a:solidFill>
+                <a:latin typeface="Consolas" panose="020B0609020204030204" pitchFamily="49" charset="0"/>
+              </a:rPr>
+              <a:t>  MOV r0, #1 </a:t>
+            </a:r>
+            <a:r>
+              <a:rPr lang="en-US" dirty="0">
+                <a:solidFill>
+                  <a:schemeClr val="bg1">
+                    <a:lumMod val="50000"/>
+                  </a:schemeClr>
+                </a:solidFill>
+                <a:latin typeface="Consolas" panose="020B0609020204030204" pitchFamily="49" charset="0"/>
+              </a:rPr>
+              <a:t>; a8</a:t>
+            </a:r>
+          </a:p>
+          <a:p>
+            <a:r>
+              <a:rPr lang="en-US" dirty="0">
+                <a:latin typeface="Consolas" panose="020B0609020204030204" pitchFamily="49" charset="0"/>
+              </a:rPr>
+              <a:t>  MOV r1, #2 </a:t>
+            </a:r>
+            <a:r>
+              <a:rPr lang="en-US" dirty="0">
+                <a:solidFill>
+                  <a:schemeClr val="bg1">
+                    <a:lumMod val="50000"/>
+                  </a:schemeClr>
+                </a:solidFill>
+                <a:latin typeface="Consolas" panose="020B0609020204030204" pitchFamily="49" charset="0"/>
+              </a:rPr>
+              <a:t>; b8</a:t>
+            </a:r>
+          </a:p>
+          <a:p>
+            <a:r>
+              <a:rPr lang="en-US" dirty="0">
+                <a:latin typeface="Consolas" panose="020B0609020204030204" pitchFamily="49" charset="0"/>
+              </a:rPr>
+              <a:t>  MOV r2, #3 </a:t>
+            </a:r>
+            <a:r>
+              <a:rPr lang="en-US" dirty="0">
+                <a:solidFill>
+                  <a:schemeClr val="bg1">
+                    <a:lumMod val="50000"/>
+                  </a:schemeClr>
+                </a:solidFill>
+                <a:latin typeface="Consolas" panose="020B0609020204030204" pitchFamily="49" charset="0"/>
+              </a:rPr>
+              <a:t>; c16</a:t>
+            </a:r>
+          </a:p>
+          <a:p>
+            <a:r>
+              <a:rPr lang="en-US" dirty="0">
+                <a:latin typeface="Consolas" panose="020B0609020204030204" pitchFamily="49" charset="0"/>
+              </a:rPr>
+              <a:t>  MOV r3, #4 </a:t>
+            </a:r>
+            <a:r>
+              <a:rPr lang="en-US" dirty="0">
+                <a:solidFill>
+                  <a:schemeClr val="bg1">
+                    <a:lumMod val="50000"/>
+                  </a:schemeClr>
+                </a:solidFill>
+                <a:latin typeface="Consolas" panose="020B0609020204030204" pitchFamily="49" charset="0"/>
+              </a:rPr>
+              <a:t>; d16</a:t>
+            </a:r>
+          </a:p>
+          <a:p>
+            <a:r>
+              <a:rPr lang="en-US" dirty="0">
+                <a:latin typeface="Consolas" panose="020B0609020204030204" pitchFamily="49" charset="0"/>
+              </a:rPr>
+              <a:t>  BL  sum</a:t>
+            </a:r>
+          </a:p>
+          <a:p>
+            <a:r>
+              <a:rPr lang="en-US" dirty="0">
+                <a:latin typeface="Consolas" panose="020B0609020204030204" pitchFamily="49" charset="0"/>
+              </a:rPr>
+              <a:t>  ...</a:t>
+            </a:r>
+          </a:p>
+          <a:p>
+            <a:r>
+              <a:rPr lang="en-US" dirty="0">
+                <a:latin typeface="Consolas" panose="020B0609020204030204" pitchFamily="49" charset="0"/>
+              </a:rPr>
+              <a:t>  </a:t>
+            </a:r>
+            <a:r>
+              <a:rPr lang="en-US" b="1" dirty="0">
+                <a:solidFill>
+                  <a:srgbClr val="FF0000"/>
+                </a:solidFill>
+                <a:latin typeface="Consolas" panose="020B0609020204030204" pitchFamily="49" charset="0"/>
+              </a:rPr>
+              <a:t>POP {r0}</a:t>
+            </a:r>
+          </a:p>
+        </p:txBody>
+      </p:sp>
+      <p:sp>
+        <p:nvSpPr>
+          <p:cNvPr id="27" name="TextBox 26"/>
+          <p:cNvSpPr txBox="1"/>
+          <p:nvPr/>
+        </p:nvSpPr>
+        <p:spPr>
+          <a:xfrm>
+            <a:off x="3581400" y="2840938"/>
+            <a:ext cx="769763" cy="369332"/>
+          </a:xfrm>
+          <a:prstGeom prst="rect">
+            <a:avLst/>
+          </a:prstGeom>
+          <a:noFill/>
+        </p:spPr>
+        <p:txBody>
+          <a:bodyPr wrap="none" rtlCol="0">
+            <a:spAutoFit/>
+          </a:bodyPr>
+          <a:lstStyle/>
+          <a:p>
+            <a:r>
+              <a:rPr lang="en-US" dirty="0" err="1"/>
+              <a:t>Callee</a:t>
+            </a:r>
+            <a:endParaRPr lang="en-US" dirty="0"/>
+          </a:p>
+        </p:txBody>
+      </p:sp>
+      <p:sp>
+        <p:nvSpPr>
+          <p:cNvPr id="28" name="TextBox 27"/>
+          <p:cNvSpPr txBox="1"/>
+          <p:nvPr/>
+        </p:nvSpPr>
+        <p:spPr>
+          <a:xfrm>
+            <a:off x="3607914" y="3305718"/>
+            <a:ext cx="4996881" cy="2308324"/>
+          </a:xfrm>
+          <a:prstGeom prst="rect">
+            <a:avLst/>
+          </a:prstGeom>
+        </p:spPr>
+        <p:style>
+          <a:lnRef idx="2">
+            <a:schemeClr val="accent1"/>
+          </a:lnRef>
+          <a:fillRef idx="1">
+            <a:schemeClr val="lt1"/>
+          </a:fillRef>
+          <a:effectRef idx="0">
+            <a:schemeClr val="accent1"/>
+          </a:effectRef>
+          <a:fontRef idx="minor">
+            <a:schemeClr val="dk1"/>
+          </a:fontRef>
+        </p:style>
+        <p:txBody>
+          <a:bodyPr wrap="none" rtlCol="0">
+            <a:spAutoFit/>
+          </a:bodyPr>
+          <a:lstStyle/>
+          <a:p>
+            <a:r>
+              <a:rPr lang="en-US" b="1" dirty="0">
+                <a:solidFill>
+                  <a:srgbClr val="0000FF"/>
+                </a:solidFill>
+                <a:latin typeface="Consolas" panose="020B0609020204030204" pitchFamily="49" charset="0"/>
+              </a:rPr>
+              <a:t>sum</a:t>
+            </a:r>
+            <a:r>
+              <a:rPr lang="en-US" dirty="0">
+                <a:latin typeface="Consolas" panose="020B0609020204030204" pitchFamily="49" charset="0"/>
+              </a:rPr>
+              <a:t> PROC    </a:t>
+            </a:r>
+          </a:p>
+          <a:p>
+            <a:r>
+              <a:rPr lang="en-US" dirty="0">
+                <a:latin typeface="Consolas" panose="020B0609020204030204" pitchFamily="49" charset="0"/>
+              </a:rPr>
+              <a:t>  ADD r0, r0, r1   </a:t>
+            </a:r>
+            <a:r>
+              <a:rPr lang="en-US" dirty="0">
+                <a:solidFill>
+                  <a:schemeClr val="bg1">
+                    <a:lumMod val="50000"/>
+                  </a:schemeClr>
+                </a:solidFill>
+                <a:latin typeface="Consolas" panose="020B0609020204030204" pitchFamily="49" charset="0"/>
+              </a:rPr>
+              <a:t>; a8 + b8</a:t>
+            </a:r>
+          </a:p>
+          <a:p>
+            <a:r>
+              <a:rPr lang="en-US" dirty="0">
+                <a:latin typeface="Consolas" panose="020B0609020204030204" pitchFamily="49" charset="0"/>
+              </a:rPr>
+              <a:t>  ADD r0, r0, r2   </a:t>
+            </a:r>
+            <a:r>
+              <a:rPr lang="en-US" dirty="0">
+                <a:solidFill>
+                  <a:schemeClr val="bg1">
+                    <a:lumMod val="50000"/>
+                  </a:schemeClr>
+                </a:solidFill>
+                <a:latin typeface="Consolas" panose="020B0609020204030204" pitchFamily="49" charset="0"/>
+              </a:rPr>
+              <a:t>; add c16</a:t>
+            </a:r>
+          </a:p>
+          <a:p>
+            <a:r>
+              <a:rPr lang="en-US" dirty="0">
+                <a:latin typeface="Consolas" panose="020B0609020204030204" pitchFamily="49" charset="0"/>
+              </a:rPr>
+              <a:t>  ADD r0, r0, r3   </a:t>
+            </a:r>
+            <a:r>
+              <a:rPr lang="en-US" dirty="0">
+                <a:solidFill>
+                  <a:schemeClr val="bg1">
+                    <a:lumMod val="50000"/>
+                  </a:schemeClr>
+                </a:solidFill>
+                <a:latin typeface="Consolas" panose="020B0609020204030204" pitchFamily="49" charset="0"/>
+              </a:rPr>
+              <a:t>; add d16</a:t>
+            </a:r>
+          </a:p>
+          <a:p>
+            <a:r>
+              <a:rPr lang="en-US" b="1" dirty="0">
+                <a:solidFill>
+                  <a:srgbClr val="FF0000"/>
+                </a:solidFill>
+                <a:latin typeface="Consolas" panose="020B0609020204030204" pitchFamily="49" charset="0"/>
+              </a:rPr>
+              <a:t>  LDR r1, [</a:t>
+            </a:r>
+            <a:r>
+              <a:rPr lang="en-US" b="1" dirty="0" err="1">
+                <a:solidFill>
+                  <a:srgbClr val="FF0000"/>
+                </a:solidFill>
+                <a:latin typeface="Consolas" panose="020B0609020204030204" pitchFamily="49" charset="0"/>
+              </a:rPr>
+              <a:t>sp</a:t>
+            </a:r>
+            <a:r>
+              <a:rPr lang="en-US" b="1" dirty="0">
+                <a:solidFill>
+                  <a:srgbClr val="FF0000"/>
+                </a:solidFill>
+                <a:latin typeface="Consolas" panose="020B0609020204030204" pitchFamily="49" charset="0"/>
+              </a:rPr>
+              <a:t>, #0] </a:t>
+            </a:r>
+            <a:r>
+              <a:rPr lang="en-US" b="1" dirty="0">
+                <a:solidFill>
+                  <a:schemeClr val="bg1">
+                    <a:lumMod val="50000"/>
+                  </a:schemeClr>
+                </a:solidFill>
+                <a:latin typeface="Consolas" panose="020B0609020204030204" pitchFamily="49" charset="0"/>
+              </a:rPr>
+              <a:t>; read argument e32</a:t>
+            </a:r>
+          </a:p>
+          <a:p>
+            <a:r>
+              <a:rPr lang="en-US" dirty="0">
+                <a:solidFill>
+                  <a:schemeClr val="bg1">
+                    <a:lumMod val="50000"/>
+                  </a:schemeClr>
+                </a:solidFill>
+                <a:latin typeface="Consolas" panose="020B0609020204030204" pitchFamily="49" charset="0"/>
+              </a:rPr>
+              <a:t>  </a:t>
+            </a:r>
+            <a:r>
+              <a:rPr lang="en-US" dirty="0">
+                <a:solidFill>
+                  <a:schemeClr val="tx1"/>
+                </a:solidFill>
+                <a:latin typeface="Consolas" panose="020B0609020204030204" pitchFamily="49" charset="0"/>
+              </a:rPr>
+              <a:t>ADD r0, r0, r1   </a:t>
+            </a:r>
+            <a:r>
+              <a:rPr lang="en-US" dirty="0">
+                <a:solidFill>
+                  <a:schemeClr val="bg1">
+                    <a:lumMod val="50000"/>
+                  </a:schemeClr>
+                </a:solidFill>
+                <a:latin typeface="Consolas" panose="020B0609020204030204" pitchFamily="49" charset="0"/>
+              </a:rPr>
+              <a:t>; add e32</a:t>
+            </a:r>
+          </a:p>
+          <a:p>
+            <a:r>
+              <a:rPr lang="en-US" dirty="0">
+                <a:latin typeface="Consolas" panose="020B0609020204030204" pitchFamily="49" charset="0"/>
+              </a:rPr>
+              <a:t>  BX  LR</a:t>
+            </a:r>
+          </a:p>
+          <a:p>
+            <a:r>
+              <a:rPr lang="en-US" dirty="0">
+                <a:latin typeface="Consolas" panose="020B0609020204030204" pitchFamily="49" charset="0"/>
+              </a:rPr>
+              <a:t>  ENDP</a:t>
+            </a:r>
+          </a:p>
+        </p:txBody>
+      </p:sp>
+      <p:sp>
+        <p:nvSpPr>
+          <p:cNvPr id="6" name="Rectangle 5"/>
+          <p:cNvSpPr/>
+          <p:nvPr/>
+        </p:nvSpPr>
+        <p:spPr>
+          <a:xfrm>
+            <a:off x="914400" y="5854799"/>
+            <a:ext cx="4861560" cy="646331"/>
+          </a:xfrm>
+          <a:prstGeom prst="rect">
+            <a:avLst/>
+          </a:prstGeom>
+        </p:spPr>
+        <p:txBody>
+          <a:bodyPr wrap="square">
+            <a:spAutoFit/>
+          </a:bodyPr>
+          <a:lstStyle/>
+          <a:p>
+            <a:r>
+              <a:rPr lang="en-US" dirty="0"/>
+              <a:t>The caller is responsible to pop extra arguments out of the stack after the subroutine returns.</a:t>
+            </a:r>
+          </a:p>
+        </p:txBody>
+      </p:sp>
+    </p:spTree>
+    <p:extLst>
+      <p:ext uri="{BB962C8B-B14F-4D97-AF65-F5344CB8AC3E}">
+        <p14:creationId xmlns:p14="http://schemas.microsoft.com/office/powerpoint/2010/main" val="2345755417"/>
       </p:ext>
     </p:extLst>
   </p:cSld>
@@ -12978,7 +13873,7 @@
           <a:p>
             <a:r>
               <a:rPr lang="en-US" dirty="0"/>
-              <a:t>What’s wrong? Passing arguments and Returning Value ANS</a:t>
+              <a:t>Passing arguments and Returning Value</a:t>
             </a:r>
           </a:p>
         </p:txBody>
@@ -13002,632 +13897,6 @@
               <a:rPr kumimoji="0" lang="en-US" smtClean="0"/>
               <a:pPr/>
               <a:t>17</a:t>
-            </a:fld>
-            <a:endParaRPr kumimoji="0" lang="en-US" dirty="0"/>
-          </a:p>
-        </p:txBody>
-      </p:sp>
-      <p:sp>
-        <p:nvSpPr>
-          <p:cNvPr id="11" name="Rectangle 10"/>
-          <p:cNvSpPr/>
-          <p:nvPr/>
-        </p:nvSpPr>
-        <p:spPr>
-          <a:xfrm>
-            <a:off x="76200" y="1593468"/>
-            <a:ext cx="9163050" cy="646331"/>
-          </a:xfrm>
-          <a:prstGeom prst="rect">
-            <a:avLst/>
-          </a:prstGeom>
-        </p:spPr>
-        <p:txBody>
-          <a:bodyPr wrap="square">
-            <a:spAutoFit/>
-          </a:bodyPr>
-          <a:lstStyle/>
-          <a:p>
-            <a:r>
-              <a:rPr lang="en-US" b="1" dirty="0">
-                <a:latin typeface="Consolas" panose="020B0609020204030204" pitchFamily="49" charset="0"/>
-              </a:rPr>
-              <a:t>uint32_t sum(uint8_t a8, uint8_t b8, uint16_t c16, uint16_t d16, </a:t>
-            </a:r>
-            <a:r>
-              <a:rPr lang="en-US" b="1" dirty="0">
-                <a:solidFill>
-                  <a:srgbClr val="FF0000"/>
-                </a:solidFill>
-                <a:latin typeface="Consolas" panose="020B0609020204030204" pitchFamily="49" charset="0"/>
-              </a:rPr>
-              <a:t>uint32_t e32</a:t>
-            </a:r>
-            <a:r>
-              <a:rPr lang="en-US" b="1" dirty="0">
-                <a:latin typeface="Consolas" panose="020B0609020204030204" pitchFamily="49" charset="0"/>
-              </a:rPr>
-              <a:t>);</a:t>
-            </a:r>
-          </a:p>
-        </p:txBody>
-      </p:sp>
-      <p:sp>
-        <p:nvSpPr>
-          <p:cNvPr id="4" name="TextBox 3"/>
-          <p:cNvSpPr txBox="1"/>
-          <p:nvPr/>
-        </p:nvSpPr>
-        <p:spPr>
-          <a:xfrm>
-            <a:off x="304800" y="2754035"/>
-            <a:ext cx="750526" cy="369332"/>
-          </a:xfrm>
-          <a:prstGeom prst="rect">
-            <a:avLst/>
-          </a:prstGeom>
-          <a:noFill/>
-        </p:spPr>
-        <p:txBody>
-          <a:bodyPr wrap="none" rtlCol="0">
-            <a:spAutoFit/>
-          </a:bodyPr>
-          <a:lstStyle/>
-          <a:p>
-            <a:r>
-              <a:rPr lang="en-US" dirty="0"/>
-              <a:t>Caller</a:t>
-            </a:r>
-          </a:p>
-        </p:txBody>
-      </p:sp>
-      <p:sp>
-        <p:nvSpPr>
-          <p:cNvPr id="23" name="Rectangle 22"/>
-          <p:cNvSpPr/>
-          <p:nvPr/>
-        </p:nvSpPr>
-        <p:spPr>
-          <a:xfrm>
-            <a:off x="33528" y="2251948"/>
-            <a:ext cx="9163050" cy="369332"/>
-          </a:xfrm>
-          <a:prstGeom prst="rect">
-            <a:avLst/>
-          </a:prstGeom>
-        </p:spPr>
-        <p:txBody>
-          <a:bodyPr wrap="square">
-            <a:spAutoFit/>
-          </a:bodyPr>
-          <a:lstStyle/>
-          <a:p>
-            <a:r>
-              <a:rPr lang="en-US" b="1" dirty="0">
-                <a:solidFill>
-                  <a:srgbClr val="FF0000"/>
-                </a:solidFill>
-                <a:latin typeface="Consolas" panose="020B0609020204030204" pitchFamily="49" charset="0"/>
-              </a:rPr>
-              <a:t>s = sum(1, 2, 3, 4, 5);</a:t>
-            </a:r>
-          </a:p>
-        </p:txBody>
-      </p:sp>
-      <p:sp>
-        <p:nvSpPr>
-          <p:cNvPr id="15" name="TextBox 14"/>
-          <p:cNvSpPr txBox="1"/>
-          <p:nvPr/>
-        </p:nvSpPr>
-        <p:spPr>
-          <a:xfrm>
-            <a:off x="449580" y="3256122"/>
-            <a:ext cx="2464136" cy="2585323"/>
-          </a:xfrm>
-          <a:prstGeom prst="rect">
-            <a:avLst/>
-          </a:prstGeom>
-        </p:spPr>
-        <p:style>
-          <a:lnRef idx="2">
-            <a:schemeClr val="accent1"/>
-          </a:lnRef>
-          <a:fillRef idx="1">
-            <a:schemeClr val="lt1"/>
-          </a:fillRef>
-          <a:effectRef idx="0">
-            <a:schemeClr val="accent1"/>
-          </a:effectRef>
-          <a:fontRef idx="minor">
-            <a:schemeClr val="dk1"/>
-          </a:fontRef>
-        </p:style>
-        <p:txBody>
-          <a:bodyPr wrap="none" rtlCol="0">
-            <a:spAutoFit/>
-          </a:bodyPr>
-          <a:lstStyle/>
-          <a:p>
-            <a:r>
-              <a:rPr lang="en-US" dirty="0">
-                <a:latin typeface="Consolas" panose="020B0609020204030204" pitchFamily="49" charset="0"/>
-              </a:rPr>
-              <a:t>  MOV r0, #5 </a:t>
-            </a:r>
-            <a:r>
-              <a:rPr lang="en-US" dirty="0">
-                <a:solidFill>
-                  <a:schemeClr val="bg1">
-                    <a:lumMod val="50000"/>
-                  </a:schemeClr>
-                </a:solidFill>
-                <a:latin typeface="Consolas" panose="020B0609020204030204" pitchFamily="49" charset="0"/>
-              </a:rPr>
-              <a:t>; e32</a:t>
-            </a:r>
-          </a:p>
-          <a:p>
-            <a:r>
-              <a:rPr lang="en-US" dirty="0">
-                <a:latin typeface="Consolas" panose="020B0609020204030204" pitchFamily="49" charset="0"/>
-              </a:rPr>
-              <a:t>  </a:t>
-            </a:r>
-            <a:r>
-              <a:rPr lang="en-US" b="1" dirty="0">
-                <a:solidFill>
-                  <a:srgbClr val="FF0000"/>
-                </a:solidFill>
-                <a:latin typeface="Consolas" panose="020B0609020204030204" pitchFamily="49" charset="0"/>
-              </a:rPr>
-              <a:t>PUSH {r0}</a:t>
-            </a:r>
-          </a:p>
-          <a:p>
-            <a:r>
-              <a:rPr lang="en-US" dirty="0">
-                <a:solidFill>
-                  <a:schemeClr val="tx1"/>
-                </a:solidFill>
-                <a:latin typeface="Consolas" panose="020B0609020204030204" pitchFamily="49" charset="0"/>
-              </a:rPr>
-              <a:t>  MOV r0, #1 </a:t>
-            </a:r>
-            <a:r>
-              <a:rPr lang="en-US" dirty="0">
-                <a:solidFill>
-                  <a:schemeClr val="bg1">
-                    <a:lumMod val="50000"/>
-                  </a:schemeClr>
-                </a:solidFill>
-                <a:latin typeface="Consolas" panose="020B0609020204030204" pitchFamily="49" charset="0"/>
-              </a:rPr>
-              <a:t>; a8</a:t>
-            </a:r>
-          </a:p>
-          <a:p>
-            <a:r>
-              <a:rPr lang="en-US" dirty="0">
-                <a:latin typeface="Consolas" panose="020B0609020204030204" pitchFamily="49" charset="0"/>
-              </a:rPr>
-              <a:t>  MOV r1, #2 </a:t>
-            </a:r>
-            <a:r>
-              <a:rPr lang="en-US" dirty="0">
-                <a:solidFill>
-                  <a:schemeClr val="bg1">
-                    <a:lumMod val="50000"/>
-                  </a:schemeClr>
-                </a:solidFill>
-                <a:latin typeface="Consolas" panose="020B0609020204030204" pitchFamily="49" charset="0"/>
-              </a:rPr>
-              <a:t>; b8</a:t>
-            </a:r>
-          </a:p>
-          <a:p>
-            <a:r>
-              <a:rPr lang="en-US" dirty="0">
-                <a:latin typeface="Consolas" panose="020B0609020204030204" pitchFamily="49" charset="0"/>
-              </a:rPr>
-              <a:t>  MOV r2, #3 </a:t>
-            </a:r>
-            <a:r>
-              <a:rPr lang="en-US" dirty="0">
-                <a:solidFill>
-                  <a:schemeClr val="bg1">
-                    <a:lumMod val="50000"/>
-                  </a:schemeClr>
-                </a:solidFill>
-                <a:latin typeface="Consolas" panose="020B0609020204030204" pitchFamily="49" charset="0"/>
-              </a:rPr>
-              <a:t>; c16</a:t>
-            </a:r>
-          </a:p>
-          <a:p>
-            <a:r>
-              <a:rPr lang="en-US" dirty="0">
-                <a:latin typeface="Consolas" panose="020B0609020204030204" pitchFamily="49" charset="0"/>
-              </a:rPr>
-              <a:t>  MOV r3, #4 </a:t>
-            </a:r>
-            <a:r>
-              <a:rPr lang="en-US" dirty="0">
-                <a:solidFill>
-                  <a:schemeClr val="bg1">
-                    <a:lumMod val="50000"/>
-                  </a:schemeClr>
-                </a:solidFill>
-                <a:latin typeface="Consolas" panose="020B0609020204030204" pitchFamily="49" charset="0"/>
-              </a:rPr>
-              <a:t>; d16</a:t>
-            </a:r>
-          </a:p>
-          <a:p>
-            <a:r>
-              <a:rPr lang="en-US" dirty="0">
-                <a:latin typeface="Consolas" panose="020B0609020204030204" pitchFamily="49" charset="0"/>
-              </a:rPr>
-              <a:t>  BL  sum</a:t>
-            </a:r>
-          </a:p>
-          <a:p>
-            <a:r>
-              <a:rPr lang="en-US" dirty="0">
-                <a:latin typeface="Consolas" panose="020B0609020204030204" pitchFamily="49" charset="0"/>
-              </a:rPr>
-              <a:t>  ...</a:t>
-            </a:r>
-          </a:p>
-          <a:p>
-            <a:r>
-              <a:rPr lang="en-US" dirty="0">
-                <a:latin typeface="Consolas" panose="020B0609020204030204" pitchFamily="49" charset="0"/>
-              </a:rPr>
-              <a:t>  </a:t>
-            </a:r>
-            <a:r>
-              <a:rPr lang="en-US" b="1" dirty="0">
-                <a:solidFill>
-                  <a:srgbClr val="FF0000"/>
-                </a:solidFill>
-                <a:latin typeface="Consolas" panose="020B0609020204030204" pitchFamily="49" charset="0"/>
-              </a:rPr>
-              <a:t>POP {r0}</a:t>
-            </a:r>
-          </a:p>
-        </p:txBody>
-      </p:sp>
-      <p:sp>
-        <p:nvSpPr>
-          <p:cNvPr id="27" name="TextBox 26"/>
-          <p:cNvSpPr txBox="1"/>
-          <p:nvPr/>
-        </p:nvSpPr>
-        <p:spPr>
-          <a:xfrm>
-            <a:off x="3581400" y="2840938"/>
-            <a:ext cx="769763" cy="369332"/>
-          </a:xfrm>
-          <a:prstGeom prst="rect">
-            <a:avLst/>
-          </a:prstGeom>
-          <a:noFill/>
-        </p:spPr>
-        <p:txBody>
-          <a:bodyPr wrap="none" rtlCol="0">
-            <a:spAutoFit/>
-          </a:bodyPr>
-          <a:lstStyle/>
-          <a:p>
-            <a:r>
-              <a:rPr lang="en-US" dirty="0" err="1"/>
-              <a:t>Callee</a:t>
-            </a:r>
-            <a:endParaRPr lang="en-US" dirty="0"/>
-          </a:p>
-        </p:txBody>
-      </p:sp>
-      <p:sp>
-        <p:nvSpPr>
-          <p:cNvPr id="28" name="TextBox 27"/>
-          <p:cNvSpPr txBox="1"/>
-          <p:nvPr/>
-        </p:nvSpPr>
-        <p:spPr>
-          <a:xfrm>
-            <a:off x="3607914" y="3305718"/>
-            <a:ext cx="4996881" cy="2308324"/>
-          </a:xfrm>
-          <a:prstGeom prst="rect">
-            <a:avLst/>
-          </a:prstGeom>
-        </p:spPr>
-        <p:style>
-          <a:lnRef idx="2">
-            <a:schemeClr val="accent1"/>
-          </a:lnRef>
-          <a:fillRef idx="1">
-            <a:schemeClr val="lt1"/>
-          </a:fillRef>
-          <a:effectRef idx="0">
-            <a:schemeClr val="accent1"/>
-          </a:effectRef>
-          <a:fontRef idx="minor">
-            <a:schemeClr val="dk1"/>
-          </a:fontRef>
-        </p:style>
-        <p:txBody>
-          <a:bodyPr wrap="none" rtlCol="0">
-            <a:spAutoFit/>
-          </a:bodyPr>
-          <a:lstStyle/>
-          <a:p>
-            <a:r>
-              <a:rPr lang="en-US" b="1" dirty="0">
-                <a:solidFill>
-                  <a:srgbClr val="0000FF"/>
-                </a:solidFill>
-                <a:latin typeface="Consolas" panose="020B0609020204030204" pitchFamily="49" charset="0"/>
-              </a:rPr>
-              <a:t>sum</a:t>
-            </a:r>
-            <a:r>
-              <a:rPr lang="en-US" dirty="0">
-                <a:latin typeface="Consolas" panose="020B0609020204030204" pitchFamily="49" charset="0"/>
-              </a:rPr>
-              <a:t> PROC    </a:t>
-            </a:r>
-          </a:p>
-          <a:p>
-            <a:r>
-              <a:rPr lang="en-US" dirty="0">
-                <a:latin typeface="Consolas" panose="020B0609020204030204" pitchFamily="49" charset="0"/>
-              </a:rPr>
-              <a:t>  ADD r0, r0, r1   </a:t>
-            </a:r>
-            <a:r>
-              <a:rPr lang="en-US" dirty="0">
-                <a:solidFill>
-                  <a:schemeClr val="bg1">
-                    <a:lumMod val="50000"/>
-                  </a:schemeClr>
-                </a:solidFill>
-                <a:latin typeface="Consolas" panose="020B0609020204030204" pitchFamily="49" charset="0"/>
-              </a:rPr>
-              <a:t>; a8 + b8</a:t>
-            </a:r>
-          </a:p>
-          <a:p>
-            <a:r>
-              <a:rPr lang="en-US" dirty="0">
-                <a:latin typeface="Consolas" panose="020B0609020204030204" pitchFamily="49" charset="0"/>
-              </a:rPr>
-              <a:t>  ADD r0, r0, r2   </a:t>
-            </a:r>
-            <a:r>
-              <a:rPr lang="en-US" dirty="0">
-                <a:solidFill>
-                  <a:schemeClr val="bg1">
-                    <a:lumMod val="50000"/>
-                  </a:schemeClr>
-                </a:solidFill>
-                <a:latin typeface="Consolas" panose="020B0609020204030204" pitchFamily="49" charset="0"/>
-              </a:rPr>
-              <a:t>; add c16</a:t>
-            </a:r>
-          </a:p>
-          <a:p>
-            <a:r>
-              <a:rPr lang="en-US" dirty="0">
-                <a:latin typeface="Consolas" panose="020B0609020204030204" pitchFamily="49" charset="0"/>
-              </a:rPr>
-              <a:t>  ADD r0, r0, r3   </a:t>
-            </a:r>
-            <a:r>
-              <a:rPr lang="en-US" dirty="0">
-                <a:solidFill>
-                  <a:schemeClr val="bg1">
-                    <a:lumMod val="50000"/>
-                  </a:schemeClr>
-                </a:solidFill>
-                <a:latin typeface="Consolas" panose="020B0609020204030204" pitchFamily="49" charset="0"/>
-              </a:rPr>
-              <a:t>; add d16</a:t>
-            </a:r>
-          </a:p>
-          <a:p>
-            <a:r>
-              <a:rPr lang="en-US" b="1" dirty="0">
-                <a:solidFill>
-                  <a:srgbClr val="FF0000"/>
-                </a:solidFill>
-                <a:latin typeface="Consolas" panose="020B0609020204030204" pitchFamily="49" charset="0"/>
-              </a:rPr>
-              <a:t>  LDR r1, [</a:t>
-            </a:r>
-            <a:r>
-              <a:rPr lang="en-US" b="1" dirty="0" err="1">
-                <a:solidFill>
-                  <a:srgbClr val="FF0000"/>
-                </a:solidFill>
-                <a:latin typeface="Consolas" panose="020B0609020204030204" pitchFamily="49" charset="0"/>
-              </a:rPr>
-              <a:t>sp</a:t>
-            </a:r>
-            <a:r>
-              <a:rPr lang="en-US" b="1" dirty="0">
-                <a:solidFill>
-                  <a:srgbClr val="FF0000"/>
-                </a:solidFill>
-                <a:latin typeface="Consolas" panose="020B0609020204030204" pitchFamily="49" charset="0"/>
-              </a:rPr>
-              <a:t>, #0] </a:t>
-            </a:r>
-            <a:r>
-              <a:rPr lang="en-US" b="1" dirty="0">
-                <a:solidFill>
-                  <a:schemeClr val="bg1">
-                    <a:lumMod val="50000"/>
-                  </a:schemeClr>
-                </a:solidFill>
-                <a:latin typeface="Consolas" panose="020B0609020204030204" pitchFamily="49" charset="0"/>
-              </a:rPr>
-              <a:t>; read argument e32</a:t>
-            </a:r>
-          </a:p>
-          <a:p>
-            <a:r>
-              <a:rPr lang="en-US" dirty="0">
-                <a:solidFill>
-                  <a:schemeClr val="bg1">
-                    <a:lumMod val="50000"/>
-                  </a:schemeClr>
-                </a:solidFill>
-                <a:latin typeface="Consolas" panose="020B0609020204030204" pitchFamily="49" charset="0"/>
-              </a:rPr>
-              <a:t>  </a:t>
-            </a:r>
-            <a:r>
-              <a:rPr lang="en-US" dirty="0">
-                <a:solidFill>
-                  <a:schemeClr val="tx1"/>
-                </a:solidFill>
-                <a:latin typeface="Consolas" panose="020B0609020204030204" pitchFamily="49" charset="0"/>
-              </a:rPr>
-              <a:t>ADD r0, r0, r1   </a:t>
-            </a:r>
-            <a:r>
-              <a:rPr lang="en-US" dirty="0">
-                <a:solidFill>
-                  <a:schemeClr val="bg1">
-                    <a:lumMod val="50000"/>
-                  </a:schemeClr>
-                </a:solidFill>
-                <a:latin typeface="Consolas" panose="020B0609020204030204" pitchFamily="49" charset="0"/>
-              </a:rPr>
-              <a:t>; add e32</a:t>
-            </a:r>
-          </a:p>
-          <a:p>
-            <a:r>
-              <a:rPr lang="en-US" dirty="0">
-                <a:latin typeface="Consolas" panose="020B0609020204030204" pitchFamily="49" charset="0"/>
-              </a:rPr>
-              <a:t>  BX  LR</a:t>
-            </a:r>
-          </a:p>
-          <a:p>
-            <a:r>
-              <a:rPr lang="en-US" dirty="0">
-                <a:latin typeface="Consolas" panose="020B0609020204030204" pitchFamily="49" charset="0"/>
-              </a:rPr>
-              <a:t>  ENDP</a:t>
-            </a:r>
-          </a:p>
-        </p:txBody>
-      </p:sp>
-      <p:sp>
-        <p:nvSpPr>
-          <p:cNvPr id="6" name="Rectangle 5"/>
-          <p:cNvSpPr/>
-          <p:nvPr/>
-        </p:nvSpPr>
-        <p:spPr>
-          <a:xfrm>
-            <a:off x="914400" y="5854799"/>
-            <a:ext cx="4861560" cy="646331"/>
-          </a:xfrm>
-          <a:prstGeom prst="rect">
-            <a:avLst/>
-          </a:prstGeom>
-        </p:spPr>
-        <p:txBody>
-          <a:bodyPr wrap="square">
-            <a:spAutoFit/>
-          </a:bodyPr>
-          <a:lstStyle/>
-          <a:p>
-            <a:r>
-              <a:rPr lang="en-US" dirty="0"/>
-              <a:t>The caller is responsible to pop extra arguments out of the stack after the subroutine returns.</a:t>
-            </a:r>
-          </a:p>
-        </p:txBody>
-      </p:sp>
-    </p:spTree>
-    <p:extLst>
-      <p:ext uri="{BB962C8B-B14F-4D97-AF65-F5344CB8AC3E}">
-        <p14:creationId xmlns:p14="http://schemas.microsoft.com/office/powerpoint/2010/main" val="2345755417"/>
-      </p:ext>
-    </p:extLst>
-  </p:cSld>
-  <p:clrMapOvr>
-    <a:masterClrMapping/>
-  </p:clrMapOvr>
-</p:sld>
-</file>
-
-<file path=ppt/slides/slide18.xml><?xml version="1.0" encoding="utf-8"?>
-<p:sld xmlns:a="http://schemas.openxmlformats.org/drawingml/2006/main" xmlns:r="http://schemas.openxmlformats.org/officeDocument/2006/relationships" xmlns:p="http://schemas.openxmlformats.org/presentationml/2006/main">
-  <p:cSld>
-    <p:spTree>
-      <p:nvGrpSpPr>
-        <p:cNvPr id="1" name=""/>
-        <p:cNvGrpSpPr/>
-        <p:nvPr/>
-      </p:nvGrpSpPr>
-      <p:grpSpPr>
-        <a:xfrm>
-          <a:off x="0" y="0"/>
-          <a:ext cx="0" cy="0"/>
-          <a:chOff x="0" y="0"/>
-          <a:chExt cx="0" cy="0"/>
-        </a:xfrm>
-      </p:grpSpPr>
-      <p:sp>
-        <p:nvSpPr>
-          <p:cNvPr id="2" name="Title 1"/>
-          <p:cNvSpPr>
-            <a:spLocks noGrp="1"/>
-          </p:cNvSpPr>
-          <p:nvPr>
-            <p:ph type="title"/>
-          </p:nvPr>
-        </p:nvSpPr>
-        <p:spPr/>
-        <p:txBody>
-          <a:bodyPr>
-            <a:normAutofit fontScale="90000"/>
-          </a:bodyPr>
-          <a:lstStyle/>
-          <a:p>
-            <a:r>
-              <a:rPr lang="en-US" dirty="0"/>
-              <a:t>Passing arguments and Returning Value</a:t>
-            </a:r>
-          </a:p>
-        </p:txBody>
-      </p:sp>
-      <p:sp>
-        <p:nvSpPr>
-          <p:cNvPr id="3" name="Slide Number Placeholder 2"/>
-          <p:cNvSpPr>
-            <a:spLocks noGrp="1"/>
-          </p:cNvSpPr>
-          <p:nvPr>
-            <p:ph type="sldNum" sz="quarter" idx="12"/>
-          </p:nvPr>
-        </p:nvSpPr>
-        <p:spPr/>
-        <p:txBody>
-          <a:bodyPr/>
-          <a:lstStyle/>
-          <a:p>
-            <a:fld id="{EA7C8D44-3667-46F6-9772-CC52308E2A7F}" type="slidenum">
-              <a:rPr kumimoji="0" lang="en-US" smtClean="0"/>
-              <a:pPr/>
-              <a:t>18</a:t>
             </a:fld>
             <a:endParaRPr kumimoji="0" lang="en-US" dirty="0"/>
           </a:p>
@@ -14442,7 +14711,7 @@
 </p:sld>
 </file>
 
-<file path=ppt/slides/slide19.xml><?xml version="1.0" encoding="utf-8"?>
+<file path=ppt/slides/slide18.xml><?xml version="1.0" encoding="utf-8"?>
 <p:sld xmlns:a="http://schemas.openxmlformats.org/drawingml/2006/main" xmlns:r="http://schemas.openxmlformats.org/officeDocument/2006/relationships" xmlns:p="http://schemas.openxmlformats.org/presentationml/2006/main">
   <p:cSld>
     <p:spTree>
@@ -14519,7 +14788,7 @@
             <a:fld id="{EA7C8D44-3667-46F6-9772-CC52308E2A7F}" type="slidenum">
               <a:rPr kumimoji="0" lang="en-US" smtClean="0"/>
               <a:pPr/>
-              <a:t>19</a:t>
+              <a:t>18</a:t>
             </a:fld>
             <a:endParaRPr kumimoji="0" lang="en-US" dirty="0"/>
           </a:p>
@@ -15398,7 +15667,7 @@
 </p:sld>
 </file>
 
-<file path=ppt/slides/slide2.xml><?xml version="1.0" encoding="utf-8"?>
+<file path=ppt/slides/slide19.xml><?xml version="1.0" encoding="utf-8"?>
 <p:sld xmlns:a="http://schemas.openxmlformats.org/drawingml/2006/main" xmlns:r="http://schemas.openxmlformats.org/officeDocument/2006/relationships" xmlns:p="http://schemas.openxmlformats.org/presentationml/2006/main">
   <p:cSld>
     <p:spTree>
@@ -15417,760 +15686,6 @@
       </p:grpSpPr>
       <p:sp>
         <p:nvSpPr>
-          <p:cNvPr id="2" name="Title 1"/>
-          <p:cNvSpPr>
-            <a:spLocks noGrp="1"/>
-          </p:cNvSpPr>
-          <p:nvPr>
-            <p:ph type="title"/>
-          </p:nvPr>
-        </p:nvSpPr>
-        <p:spPr/>
-        <p:txBody>
-          <a:bodyPr/>
-          <a:lstStyle/>
-          <a:p>
-            <a:r>
-              <a:rPr lang="en-GB" dirty="0"/>
-              <a:t>Stack</a:t>
-            </a:r>
-          </a:p>
-        </p:txBody>
-      </p:sp>
-      <p:sp>
-        <p:nvSpPr>
-          <p:cNvPr id="3" name="Content Placeholder 2"/>
-          <p:cNvSpPr>
-            <a:spLocks noGrp="1"/>
-          </p:cNvSpPr>
-          <p:nvPr>
-            <p:ph idx="1"/>
-          </p:nvPr>
-        </p:nvSpPr>
-        <p:spPr>
-          <a:xfrm>
-            <a:off x="457200" y="1219200"/>
-            <a:ext cx="8229600" cy="3200400"/>
-          </a:xfrm>
-        </p:spPr>
-        <p:txBody>
-          <a:bodyPr/>
-          <a:lstStyle/>
-          <a:p>
-            <a:pPr>
-              <a:buNone/>
-            </a:pPr>
-            <a:r>
-              <a:rPr lang="en-GB" sz="2800" b="1" dirty="0">
-                <a:solidFill>
-                  <a:srgbClr val="FF0000"/>
-                </a:solidFill>
-                <a:latin typeface="Consolas" panose="020B0609020204030204" pitchFamily="49" charset="0"/>
-                <a:cs typeface="Consolas" panose="020B0609020204030204" pitchFamily="49" charset="0"/>
-              </a:rPr>
-              <a:t>PUSH</a:t>
-            </a:r>
-            <a:r>
-              <a:rPr lang="en-GB" sz="2800" dirty="0">
-                <a:solidFill>
-                  <a:srgbClr val="FF0000"/>
-                </a:solidFill>
-                <a:latin typeface="Consolas" panose="020B0609020204030204" pitchFamily="49" charset="0"/>
-                <a:cs typeface="Consolas" panose="020B0609020204030204" pitchFamily="49" charset="0"/>
-              </a:rPr>
-              <a:t> </a:t>
-            </a:r>
-            <a:r>
-              <a:rPr lang="en-GB" sz="2800" dirty="0">
-                <a:latin typeface="Consolas" panose="020B0609020204030204" pitchFamily="49" charset="0"/>
-                <a:cs typeface="Consolas" panose="020B0609020204030204" pitchFamily="49" charset="0"/>
-              </a:rPr>
-              <a:t>{</a:t>
-            </a:r>
-            <a:r>
-              <a:rPr lang="en-GB" sz="2800" i="1" dirty="0">
-                <a:latin typeface="Consolas" panose="020B0609020204030204" pitchFamily="49" charset="0"/>
-                <a:cs typeface="Consolas" panose="020B0609020204030204" pitchFamily="49" charset="0"/>
-              </a:rPr>
-              <a:t>Rd</a:t>
-            </a:r>
-            <a:r>
-              <a:rPr lang="en-GB" sz="2800" dirty="0">
-                <a:latin typeface="Consolas" panose="020B0609020204030204" pitchFamily="49" charset="0"/>
-                <a:cs typeface="Consolas" panose="020B0609020204030204" pitchFamily="49" charset="0"/>
-              </a:rPr>
-              <a:t>} </a:t>
-            </a:r>
-          </a:p>
-          <a:p>
-            <a:pPr lvl="1"/>
-            <a:r>
-              <a:rPr lang="en-GB" sz="2400" dirty="0" err="1">
-                <a:latin typeface="Consolas" panose="020B0609020204030204" pitchFamily="49" charset="0"/>
-                <a:cs typeface="Consolas" panose="020B0609020204030204" pitchFamily="49" charset="0"/>
-              </a:rPr>
-              <a:t>SP</a:t>
-            </a:r>
-            <a:r>
-              <a:rPr lang="en-GB" sz="2400" dirty="0">
-                <a:latin typeface="Consolas" panose="020B0609020204030204" pitchFamily="49" charset="0"/>
-                <a:cs typeface="Consolas" panose="020B0609020204030204" pitchFamily="49" charset="0"/>
-              </a:rPr>
-              <a:t> = </a:t>
-            </a:r>
-            <a:r>
-              <a:rPr lang="en-GB" sz="2400" dirty="0" err="1">
-                <a:latin typeface="Consolas" panose="020B0609020204030204" pitchFamily="49" charset="0"/>
-                <a:cs typeface="Consolas" panose="020B0609020204030204" pitchFamily="49" charset="0"/>
-              </a:rPr>
-              <a:t>SP</a:t>
-            </a:r>
-            <a:r>
-              <a:rPr lang="en-GB" sz="2400" dirty="0">
-                <a:latin typeface="Consolas" panose="020B0609020204030204" pitchFamily="49" charset="0"/>
-                <a:cs typeface="Consolas" panose="020B0609020204030204" pitchFamily="49" charset="0"/>
-              </a:rPr>
-              <a:t>-4   </a:t>
-            </a:r>
-            <a:r>
-              <a:rPr lang="en-GB" sz="2400" dirty="0">
-                <a:latin typeface="Cambria Math"/>
-                <a:ea typeface="Cambria Math"/>
-                <a:cs typeface="Consolas" panose="020B0609020204030204" pitchFamily="49" charset="0"/>
-              </a:rPr>
-              <a:t>⟶    descending stack</a:t>
-            </a:r>
-            <a:endParaRPr lang="en-GB" sz="2400" dirty="0">
-              <a:latin typeface="Consolas" panose="020B0609020204030204" pitchFamily="49" charset="0"/>
-              <a:cs typeface="Consolas" panose="020B0609020204030204" pitchFamily="49" charset="0"/>
-            </a:endParaRPr>
-          </a:p>
-          <a:p>
-            <a:pPr lvl="1"/>
-            <a:r>
-              <a:rPr lang="en-GB" sz="2400" dirty="0">
-                <a:latin typeface="Consolas" panose="020B0609020204030204" pitchFamily="49" charset="0"/>
-                <a:cs typeface="Consolas" panose="020B0609020204030204" pitchFamily="49" charset="0"/>
-              </a:rPr>
-              <a:t>(*SP) = </a:t>
-            </a:r>
-            <a:r>
-              <a:rPr lang="en-GB" sz="2400" i="1" dirty="0">
-                <a:latin typeface="Consolas" panose="020B0609020204030204" pitchFamily="49" charset="0"/>
-                <a:cs typeface="Consolas" panose="020B0609020204030204" pitchFamily="49" charset="0"/>
-              </a:rPr>
-              <a:t>Rd</a:t>
-            </a:r>
-            <a:r>
-              <a:rPr lang="en-GB" sz="2400" dirty="0">
-                <a:latin typeface="Cambria Math"/>
-                <a:ea typeface="Cambria Math"/>
-                <a:cs typeface="Consolas" panose="020B0609020204030204" pitchFamily="49" charset="0"/>
-              </a:rPr>
-              <a:t>     ⟶    full stack</a:t>
-            </a:r>
-          </a:p>
-          <a:p>
-            <a:pPr marL="0" indent="0">
-              <a:buNone/>
-            </a:pPr>
-            <a:endParaRPr lang="en-GB" sz="2700" i="1" dirty="0">
-              <a:latin typeface="Consolas" panose="020B0609020204030204" pitchFamily="49" charset="0"/>
-              <a:cs typeface="Consolas" panose="020B0609020204030204" pitchFamily="49" charset="0"/>
-            </a:endParaRPr>
-          </a:p>
-          <a:p>
-            <a:pPr marL="0" indent="0">
-              <a:buNone/>
-            </a:pPr>
-            <a:r>
-              <a:rPr lang="en-GB" sz="2700" dirty="0">
-                <a:cs typeface="Consolas" panose="020B0609020204030204" pitchFamily="49" charset="0"/>
-              </a:rPr>
-              <a:t>Push multiple registers</a:t>
-            </a:r>
-          </a:p>
-          <a:p>
-            <a:pPr marL="0" indent="0">
-              <a:buNone/>
-            </a:pPr>
-            <a:endParaRPr lang="en-GB" sz="2800" dirty="0"/>
-          </a:p>
-          <a:p>
-            <a:endParaRPr lang="en-GB" sz="2400" dirty="0"/>
-          </a:p>
-          <a:p>
-            <a:pPr>
-              <a:buNone/>
-            </a:pPr>
-            <a:endParaRPr lang="en-GB" dirty="0"/>
-          </a:p>
-        </p:txBody>
-      </p:sp>
-      <p:sp>
-        <p:nvSpPr>
-          <p:cNvPr id="4" name="Slide Number Placeholder 3"/>
-          <p:cNvSpPr>
-            <a:spLocks noGrp="1"/>
-          </p:cNvSpPr>
-          <p:nvPr>
-            <p:ph type="sldNum" sz="quarter" idx="12"/>
-          </p:nvPr>
-        </p:nvSpPr>
-        <p:spPr/>
-        <p:txBody>
-          <a:bodyPr/>
-          <a:lstStyle/>
-          <a:p>
-            <a:fld id="{EA7C8D44-3667-46F6-9772-CC52308E2A7F}" type="slidenum">
-              <a:rPr kumimoji="0" lang="en-US" smtClean="0"/>
-              <a:pPr/>
-              <a:t>2</a:t>
-            </a:fld>
-            <a:endParaRPr kumimoji="0" lang="en-US" dirty="0"/>
-          </a:p>
-        </p:txBody>
-      </p:sp>
-      <p:sp>
-        <p:nvSpPr>
-          <p:cNvPr id="5" name="Rectangle 4"/>
-          <p:cNvSpPr/>
-          <p:nvPr/>
-        </p:nvSpPr>
-        <p:spPr>
-          <a:xfrm>
-            <a:off x="410688" y="3848146"/>
-            <a:ext cx="2488850" cy="369332"/>
-          </a:xfrm>
-          <a:prstGeom prst="rect">
-            <a:avLst/>
-          </a:prstGeom>
-        </p:spPr>
-        <p:txBody>
-          <a:bodyPr wrap="square">
-            <a:spAutoFit/>
-          </a:bodyPr>
-          <a:lstStyle/>
-          <a:p>
-            <a:r>
-              <a:rPr lang="en-GB" b="1" dirty="0">
-                <a:solidFill>
-                  <a:srgbClr val="FF0000"/>
-                </a:solidFill>
-                <a:latin typeface="Consolas" panose="020B0609020204030204" pitchFamily="49" charset="0"/>
-                <a:cs typeface="Consolas" panose="020B0609020204030204" pitchFamily="49" charset="0"/>
-              </a:rPr>
-              <a:t>PUSH {r6, r7, </a:t>
-            </a:r>
-            <a:r>
-              <a:rPr lang="en-GB" b="1" dirty="0" err="1">
-                <a:solidFill>
-                  <a:srgbClr val="FF0000"/>
-                </a:solidFill>
-                <a:latin typeface="Consolas" panose="020B0609020204030204" pitchFamily="49" charset="0"/>
-                <a:cs typeface="Consolas" panose="020B0609020204030204" pitchFamily="49" charset="0"/>
-              </a:rPr>
-              <a:t>r8</a:t>
-            </a:r>
-            <a:r>
-              <a:rPr lang="en-GB" b="1" dirty="0">
-                <a:solidFill>
-                  <a:srgbClr val="FF0000"/>
-                </a:solidFill>
-                <a:latin typeface="Consolas" panose="020B0609020204030204" pitchFamily="49" charset="0"/>
-                <a:cs typeface="Consolas" panose="020B0609020204030204" pitchFamily="49" charset="0"/>
-              </a:rPr>
-              <a:t>}</a:t>
-            </a:r>
-          </a:p>
-        </p:txBody>
-      </p:sp>
-      <p:sp>
-        <p:nvSpPr>
-          <p:cNvPr id="6" name="TextBox 5"/>
-          <p:cNvSpPr txBox="1"/>
-          <p:nvPr/>
-        </p:nvSpPr>
-        <p:spPr>
-          <a:xfrm>
-            <a:off x="3611088" y="3465945"/>
-            <a:ext cx="1969129" cy="369332"/>
-          </a:xfrm>
-          <a:prstGeom prst="rect">
-            <a:avLst/>
-          </a:prstGeom>
-          <a:noFill/>
-        </p:spPr>
-        <p:txBody>
-          <a:bodyPr wrap="none" rtlCol="0">
-            <a:spAutoFit/>
-          </a:bodyPr>
-          <a:lstStyle/>
-          <a:p>
-            <a:r>
-              <a:rPr lang="en-US" i="1" dirty="0"/>
-              <a:t>They are equivalent. </a:t>
-            </a:r>
-          </a:p>
-        </p:txBody>
-      </p:sp>
-      <p:sp>
-        <p:nvSpPr>
-          <p:cNvPr id="8" name="Rectangle 7"/>
-          <p:cNvSpPr/>
-          <p:nvPr/>
-        </p:nvSpPr>
-        <p:spPr>
-          <a:xfrm>
-            <a:off x="7040088" y="3568140"/>
-            <a:ext cx="1324402" cy="923330"/>
-          </a:xfrm>
-          <a:prstGeom prst="rect">
-            <a:avLst/>
-          </a:prstGeom>
-        </p:spPr>
-        <p:txBody>
-          <a:bodyPr wrap="none">
-            <a:spAutoFit/>
-          </a:bodyPr>
-          <a:lstStyle/>
-          <a:p>
-            <a:r>
-              <a:rPr lang="en-GB" b="1" dirty="0">
-                <a:solidFill>
-                  <a:srgbClr val="FF0000"/>
-                </a:solidFill>
-                <a:latin typeface="Consolas" panose="020B0609020204030204" pitchFamily="49" charset="0"/>
-                <a:cs typeface="Consolas" panose="020B0609020204030204" pitchFamily="49" charset="0"/>
-              </a:rPr>
-              <a:t>PUSH {r8}</a:t>
-            </a:r>
-          </a:p>
-          <a:p>
-            <a:r>
-              <a:rPr lang="en-GB" b="1" dirty="0">
-                <a:solidFill>
-                  <a:srgbClr val="FF0000"/>
-                </a:solidFill>
-                <a:latin typeface="Consolas" panose="020B0609020204030204" pitchFamily="49" charset="0"/>
-                <a:cs typeface="Consolas" panose="020B0609020204030204" pitchFamily="49" charset="0"/>
-              </a:rPr>
-              <a:t>PUSH {r7}</a:t>
-            </a:r>
-          </a:p>
-          <a:p>
-            <a:r>
-              <a:rPr lang="en-GB" b="1" dirty="0">
-                <a:solidFill>
-                  <a:srgbClr val="FF0000"/>
-                </a:solidFill>
-                <a:latin typeface="Consolas" panose="020B0609020204030204" pitchFamily="49" charset="0"/>
-                <a:cs typeface="Consolas" panose="020B0609020204030204" pitchFamily="49" charset="0"/>
-              </a:rPr>
-              <a:t>PUSH {r6}</a:t>
-            </a:r>
-          </a:p>
-        </p:txBody>
-      </p:sp>
-      <p:sp>
-        <p:nvSpPr>
-          <p:cNvPr id="10" name="Rectangle 9"/>
-          <p:cNvSpPr/>
-          <p:nvPr/>
-        </p:nvSpPr>
-        <p:spPr>
-          <a:xfrm>
-            <a:off x="3611088" y="3848146"/>
-            <a:ext cx="2337499" cy="369332"/>
-          </a:xfrm>
-          <a:prstGeom prst="rect">
-            <a:avLst/>
-          </a:prstGeom>
-        </p:spPr>
-        <p:txBody>
-          <a:bodyPr wrap="none">
-            <a:spAutoFit/>
-          </a:bodyPr>
-          <a:lstStyle/>
-          <a:p>
-            <a:r>
-              <a:rPr lang="en-GB" b="1" dirty="0">
-                <a:solidFill>
-                  <a:srgbClr val="FF0000"/>
-                </a:solidFill>
-                <a:latin typeface="Consolas" panose="020B0609020204030204" pitchFamily="49" charset="0"/>
-                <a:cs typeface="Consolas" panose="020B0609020204030204" pitchFamily="49" charset="0"/>
-              </a:rPr>
-              <a:t>PUSH {</a:t>
-            </a:r>
-            <a:r>
-              <a:rPr lang="en-GB" b="1" dirty="0" err="1">
-                <a:solidFill>
-                  <a:srgbClr val="FF0000"/>
-                </a:solidFill>
-                <a:latin typeface="Consolas" panose="020B0609020204030204" pitchFamily="49" charset="0"/>
-                <a:cs typeface="Consolas" panose="020B0609020204030204" pitchFamily="49" charset="0"/>
-              </a:rPr>
-              <a:t>r8</a:t>
-            </a:r>
-            <a:r>
-              <a:rPr lang="en-GB" b="1" dirty="0">
-                <a:solidFill>
-                  <a:srgbClr val="FF0000"/>
-                </a:solidFill>
-                <a:latin typeface="Consolas" panose="020B0609020204030204" pitchFamily="49" charset="0"/>
-                <a:cs typeface="Consolas" panose="020B0609020204030204" pitchFamily="49" charset="0"/>
-              </a:rPr>
-              <a:t>, </a:t>
-            </a:r>
-            <a:r>
-              <a:rPr lang="en-GB" b="1" dirty="0" err="1">
-                <a:solidFill>
-                  <a:srgbClr val="FF0000"/>
-                </a:solidFill>
-                <a:latin typeface="Consolas" panose="020B0609020204030204" pitchFamily="49" charset="0"/>
-                <a:cs typeface="Consolas" panose="020B0609020204030204" pitchFamily="49" charset="0"/>
-              </a:rPr>
-              <a:t>r7</a:t>
-            </a:r>
-            <a:r>
-              <a:rPr lang="en-GB" b="1" dirty="0">
-                <a:solidFill>
-                  <a:srgbClr val="FF0000"/>
-                </a:solidFill>
-                <a:latin typeface="Consolas" panose="020B0609020204030204" pitchFamily="49" charset="0"/>
-                <a:cs typeface="Consolas" panose="020B0609020204030204" pitchFamily="49" charset="0"/>
-              </a:rPr>
-              <a:t>, </a:t>
-            </a:r>
-            <a:r>
-              <a:rPr lang="en-GB" b="1" dirty="0" err="1">
-                <a:solidFill>
-                  <a:srgbClr val="FF0000"/>
-                </a:solidFill>
-                <a:latin typeface="Consolas" panose="020B0609020204030204" pitchFamily="49" charset="0"/>
-                <a:cs typeface="Consolas" panose="020B0609020204030204" pitchFamily="49" charset="0"/>
-              </a:rPr>
-              <a:t>r6</a:t>
-            </a:r>
-            <a:r>
-              <a:rPr lang="en-GB" b="1" dirty="0">
-                <a:solidFill>
-                  <a:srgbClr val="FF0000"/>
-                </a:solidFill>
-                <a:latin typeface="Consolas" panose="020B0609020204030204" pitchFamily="49" charset="0"/>
-                <a:cs typeface="Consolas" panose="020B0609020204030204" pitchFamily="49" charset="0"/>
-              </a:rPr>
-              <a:t>}</a:t>
-            </a:r>
-          </a:p>
-        </p:txBody>
-      </p:sp>
-      <p:sp>
-        <p:nvSpPr>
-          <p:cNvPr id="11" name="Left-Right Arrow 10"/>
-          <p:cNvSpPr/>
-          <p:nvPr/>
-        </p:nvSpPr>
-        <p:spPr>
-          <a:xfrm>
-            <a:off x="3001488" y="3976346"/>
-            <a:ext cx="482950" cy="197882"/>
-          </a:xfrm>
-          <a:prstGeom prst="leftRightArrow">
-            <a:avLst/>
-          </a:prstGeom>
-        </p:spPr>
-        <p:style>
-          <a:lnRef idx="2">
-            <a:schemeClr val="accent1">
-              <a:shade val="50000"/>
-            </a:schemeClr>
-          </a:lnRef>
-          <a:fillRef idx="1">
-            <a:schemeClr val="accent1"/>
-          </a:fillRef>
-          <a:effectRef idx="0">
-            <a:schemeClr val="accent1"/>
-          </a:effectRef>
-          <a:fontRef idx="minor">
-            <a:schemeClr val="lt1"/>
-          </a:fontRef>
-        </p:style>
-        <p:txBody>
-          <a:bodyPr rtlCol="0" anchor="ctr"/>
-          <a:lstStyle/>
-          <a:p>
-            <a:pPr algn="ctr"/>
-            <a:endParaRPr lang="en-US"/>
-          </a:p>
-        </p:txBody>
-      </p:sp>
-      <p:sp>
-        <p:nvSpPr>
-          <p:cNvPr id="12" name="Left-Right Arrow 11"/>
-          <p:cNvSpPr/>
-          <p:nvPr/>
-        </p:nvSpPr>
-        <p:spPr>
-          <a:xfrm>
-            <a:off x="6278088" y="3930864"/>
-            <a:ext cx="482950" cy="197882"/>
-          </a:xfrm>
-          <a:prstGeom prst="leftRightArrow">
-            <a:avLst/>
-          </a:prstGeom>
-        </p:spPr>
-        <p:style>
-          <a:lnRef idx="2">
-            <a:schemeClr val="accent1">
-              <a:shade val="50000"/>
-            </a:schemeClr>
-          </a:lnRef>
-          <a:fillRef idx="1">
-            <a:schemeClr val="accent1"/>
-          </a:fillRef>
-          <a:effectRef idx="0">
-            <a:schemeClr val="accent1"/>
-          </a:effectRef>
-          <a:fontRef idx="minor">
-            <a:schemeClr val="lt1"/>
-          </a:fontRef>
-        </p:style>
-        <p:txBody>
-          <a:bodyPr rtlCol="0" anchor="ctr"/>
-          <a:lstStyle/>
-          <a:p>
-            <a:pPr algn="ctr"/>
-            <a:endParaRPr lang="en-US"/>
-          </a:p>
-        </p:txBody>
-      </p:sp>
-      <p:sp>
-        <p:nvSpPr>
-          <p:cNvPr id="13" name="Rectangle 12"/>
-          <p:cNvSpPr/>
-          <p:nvPr/>
-        </p:nvSpPr>
-        <p:spPr>
-          <a:xfrm>
-            <a:off x="758953" y="4504339"/>
-            <a:ext cx="7772399" cy="1938992"/>
-          </a:xfrm>
-          <a:prstGeom prst="rect">
-            <a:avLst/>
-          </a:prstGeom>
-        </p:spPr>
-        <p:txBody>
-          <a:bodyPr wrap="square">
-            <a:spAutoFit/>
-          </a:bodyPr>
-          <a:lstStyle/>
-          <a:p>
-            <a:pPr marL="285750" indent="-285750">
-              <a:buFont typeface="Arial" panose="020B0604020202020204" pitchFamily="34" charset="0"/>
-              <a:buChar char="•"/>
-            </a:pPr>
-            <a:r>
-              <a:rPr lang="en-US" sz="2000" dirty="0"/>
-              <a:t>SP is decremented before PUSH (pre-decrement), and incremented after POP (post-increment). </a:t>
-            </a:r>
-          </a:p>
-          <a:p>
-            <a:pPr marL="285750" indent="-285750">
-              <a:buFont typeface="Arial" panose="020B0604020202020204" pitchFamily="34" charset="0"/>
-              <a:buChar char="•"/>
-            </a:pPr>
-            <a:r>
-              <a:rPr lang="en-US" sz="2000" dirty="0"/>
-              <a:t>The order in which registers listed in the register list does not matter. </a:t>
-            </a:r>
-          </a:p>
-          <a:p>
-            <a:pPr marL="285750" indent="-285750">
-              <a:buFont typeface="Arial" panose="020B0604020202020204" pitchFamily="34" charset="0"/>
-              <a:buChar char="•"/>
-            </a:pPr>
-            <a:r>
-              <a:rPr lang="en-US" sz="2000" dirty="0"/>
-              <a:t>When pushing multiple registers, these registers are automatically </a:t>
-            </a:r>
-            <a:r>
-              <a:rPr lang="en-US" sz="2000" dirty="0">
-                <a:solidFill>
-                  <a:srgbClr val="3333FF"/>
-                </a:solidFill>
-              </a:rPr>
-              <a:t>sorted by name </a:t>
-            </a:r>
-            <a:r>
-              <a:rPr lang="en-US" sz="2000" dirty="0"/>
-              <a:t>and </a:t>
-            </a:r>
-            <a:r>
-              <a:rPr lang="en-US" sz="2000" dirty="0">
-                <a:solidFill>
-                  <a:srgbClr val="3333FF"/>
-                </a:solidFill>
-              </a:rPr>
-              <a:t>the lowest-numbered register </a:t>
-            </a:r>
-            <a:r>
-              <a:rPr lang="en-US" sz="2000" dirty="0"/>
-              <a:t>is stored to the lowest memory address, </a:t>
-            </a:r>
-            <a:r>
-              <a:rPr lang="en-US" sz="2000" i="1" dirty="0"/>
-              <a:t>i.e. </a:t>
-            </a:r>
-            <a:r>
-              <a:rPr lang="en-US" sz="2000" dirty="0">
-                <a:solidFill>
-                  <a:srgbClr val="3333FF"/>
-                </a:solidFill>
-              </a:rPr>
-              <a:t>is stored last</a:t>
-            </a:r>
-            <a:r>
-              <a:rPr lang="en-US" sz="2000" dirty="0"/>
-              <a:t>. </a:t>
-            </a:r>
-          </a:p>
-        </p:txBody>
-      </p:sp>
-      <p:sp>
-        <p:nvSpPr>
-          <p:cNvPr id="7" name="Horizontal Scroll 15">
-            <a:extLst>
-              <a:ext uri="{FF2B5EF4-FFF2-40B4-BE49-F238E27FC236}">
-                <a16:creationId xmlns:a16="http://schemas.microsoft.com/office/drawing/2014/main" id="{CA1DAB37-747D-183E-CAAD-AD690621F135}"/>
-              </a:ext>
-            </a:extLst>
-          </p:cNvPr>
-          <p:cNvSpPr/>
-          <p:nvPr/>
-        </p:nvSpPr>
-        <p:spPr>
-          <a:xfrm>
-            <a:off x="76200" y="-23210"/>
-            <a:ext cx="1265712" cy="762000"/>
-          </a:xfrm>
-          <a:prstGeom prst="horizontalScroll">
-            <a:avLst/>
-          </a:prstGeom>
-          <a:gradFill rotWithShape="1">
-            <a:gsLst>
-              <a:gs pos="0">
-                <a:srgbClr val="4F81BD">
-                  <a:tint val="50000"/>
-                  <a:satMod val="300000"/>
-                </a:srgbClr>
-              </a:gs>
-              <a:gs pos="35000">
-                <a:srgbClr val="4F81BD">
-                  <a:tint val="37000"/>
-                  <a:satMod val="300000"/>
-                </a:srgbClr>
-              </a:gs>
-              <a:gs pos="100000">
-                <a:srgbClr val="4F81BD">
-                  <a:tint val="15000"/>
-                  <a:satMod val="350000"/>
-                </a:srgbClr>
-              </a:gs>
-            </a:gsLst>
-            <a:lin ang="16200000" scaled="1"/>
-          </a:gradFill>
-          <a:ln w="9525" cap="flat" cmpd="sng" algn="ctr">
-            <a:solidFill>
-              <a:srgbClr val="4F81BD">
-                <a:shade val="95000"/>
-                <a:satMod val="105000"/>
-              </a:srgbClr>
-            </a:solidFill>
-            <a:prstDash val="solid"/>
-          </a:ln>
-          <a:effectLst>
-            <a:outerShdw blurRad="40000" dist="20000" dir="5400000" rotWithShape="0">
-              <a:srgbClr val="000000">
-                <a:alpha val="38000"/>
-              </a:srgbClr>
-            </a:outerShdw>
-          </a:effectLst>
-        </p:spPr>
-        <p:txBody>
-          <a:bodyPr rtlCol="0" anchor="ctr"/>
-          <a:lstStyle/>
-          <a:p>
-            <a:pPr marL="0" marR="0" lvl="0" indent="0" algn="ctr" defTabSz="457200" eaLnBrk="1" fontAlgn="auto" latinLnBrk="0" hangingPunct="1">
-              <a:lnSpc>
-                <a:spcPct val="100000"/>
-              </a:lnSpc>
-              <a:spcBef>
-                <a:spcPts val="0"/>
-              </a:spcBef>
-              <a:spcAft>
-                <a:spcPts val="0"/>
-              </a:spcAft>
-              <a:buClrTx/>
-              <a:buSzTx/>
-              <a:buFontTx/>
-              <a:buNone/>
-              <a:tabLst/>
-              <a:defRPr/>
-            </a:pPr>
-            <a:r>
-              <a:rPr kumimoji="0" lang="en-US" sz="2400" b="0" i="0" u="none" strike="noStrike" kern="0" cap="none" spc="0" normalizeH="0" baseline="0" noProof="0" dirty="0">
-                <a:ln>
-                  <a:noFill/>
-                </a:ln>
-                <a:solidFill>
-                  <a:prstClr val="black"/>
-                </a:solidFill>
-                <a:effectLst/>
-                <a:uLnTx/>
-                <a:uFillTx/>
-                <a:latin typeface="Calibri"/>
-                <a:ea typeface="+mn-ea"/>
-                <a:cs typeface="+mn-cs"/>
-              </a:rPr>
-              <a:t>Review</a:t>
-            </a:r>
-          </a:p>
-        </p:txBody>
-      </p:sp>
-    </p:spTree>
-    <p:extLst>
-      <p:ext uri="{BB962C8B-B14F-4D97-AF65-F5344CB8AC3E}">
-        <p14:creationId xmlns:p14="http://schemas.microsoft.com/office/powerpoint/2010/main" val="1120632604"/>
-      </p:ext>
-    </p:extLst>
-  </p:cSld>
-  <p:clrMapOvr>
-    <a:masterClrMapping/>
-  </p:clrMapOvr>
-</p:sld>
-</file>
-
-<file path=ppt/slides/slide20.xml><?xml version="1.0" encoding="utf-8"?>
-<p:sld xmlns:a="http://schemas.openxmlformats.org/drawingml/2006/main" xmlns:r="http://schemas.openxmlformats.org/officeDocument/2006/relationships" xmlns:p="http://schemas.openxmlformats.org/presentationml/2006/main">
-  <p:cSld>
-    <p:spTree>
-      <p:nvGrpSpPr>
-        <p:cNvPr id="1" name=""/>
-        <p:cNvGrpSpPr/>
-        <p:nvPr/>
-      </p:nvGrpSpPr>
-      <p:grpSpPr>
-        <a:xfrm>
-          <a:off x="0" y="0"/>
-          <a:ext cx="0" cy="0"/>
-          <a:chOff x="0" y="0"/>
-          <a:chExt cx="0" cy="0"/>
-        </a:xfrm>
-      </p:grpSpPr>
-      <p:sp>
-        <p:nvSpPr>
           <p:cNvPr id="2" name="Title 1">
             <a:extLst>
               <a:ext uri="{FF2B5EF4-FFF2-40B4-BE49-F238E27FC236}">
@@ -16226,7 +15741,7 @@
             <a:fld id="{EA7C8D44-3667-46F6-9772-CC52308E2A7F}" type="slidenum">
               <a:rPr kumimoji="0" lang="en-US" smtClean="0"/>
               <a:pPr/>
-              <a:t>20</a:t>
+              <a:t>19</a:t>
             </a:fld>
             <a:endParaRPr kumimoji="0" lang="en-US" dirty="0"/>
           </a:p>
@@ -16820,7 +16335,761 @@
 </p:sld>
 </file>
 
-<file path=ppt/slides/slide21.xml><?xml version="1.0" encoding="utf-8"?>
+<file path=ppt/slides/slide2.xml><?xml version="1.0" encoding="utf-8"?>
+<p:sld xmlns:a="http://schemas.openxmlformats.org/drawingml/2006/main" xmlns:r="http://schemas.openxmlformats.org/officeDocument/2006/relationships" xmlns:p="http://schemas.openxmlformats.org/presentationml/2006/main">
+  <p:cSld>
+    <p:spTree>
+      <p:nvGrpSpPr>
+        <p:cNvPr id="1" name=""/>
+        <p:cNvGrpSpPr/>
+        <p:nvPr/>
+      </p:nvGrpSpPr>
+      <p:grpSpPr>
+        <a:xfrm>
+          <a:off x="0" y="0"/>
+          <a:ext cx="0" cy="0"/>
+          <a:chOff x="0" y="0"/>
+          <a:chExt cx="0" cy="0"/>
+        </a:xfrm>
+      </p:grpSpPr>
+      <p:sp>
+        <p:nvSpPr>
+          <p:cNvPr id="2" name="Title 1"/>
+          <p:cNvSpPr>
+            <a:spLocks noGrp="1"/>
+          </p:cNvSpPr>
+          <p:nvPr>
+            <p:ph type="title"/>
+          </p:nvPr>
+        </p:nvSpPr>
+        <p:spPr/>
+        <p:txBody>
+          <a:bodyPr/>
+          <a:lstStyle/>
+          <a:p>
+            <a:r>
+              <a:rPr lang="en-GB" dirty="0"/>
+              <a:t>Stack</a:t>
+            </a:r>
+          </a:p>
+        </p:txBody>
+      </p:sp>
+      <p:sp>
+        <p:nvSpPr>
+          <p:cNvPr id="3" name="Content Placeholder 2"/>
+          <p:cNvSpPr>
+            <a:spLocks noGrp="1"/>
+          </p:cNvSpPr>
+          <p:nvPr>
+            <p:ph idx="1"/>
+          </p:nvPr>
+        </p:nvSpPr>
+        <p:spPr>
+          <a:xfrm>
+            <a:off x="457200" y="1219200"/>
+            <a:ext cx="8229600" cy="3200400"/>
+          </a:xfrm>
+        </p:spPr>
+        <p:txBody>
+          <a:bodyPr/>
+          <a:lstStyle/>
+          <a:p>
+            <a:pPr>
+              <a:buNone/>
+            </a:pPr>
+            <a:r>
+              <a:rPr lang="en-GB" sz="2800" b="1" dirty="0">
+                <a:solidFill>
+                  <a:srgbClr val="FF0000"/>
+                </a:solidFill>
+                <a:latin typeface="Consolas" panose="020B0609020204030204" pitchFamily="49" charset="0"/>
+                <a:cs typeface="Consolas" panose="020B0609020204030204" pitchFamily="49" charset="0"/>
+              </a:rPr>
+              <a:t>PUSH</a:t>
+            </a:r>
+            <a:r>
+              <a:rPr lang="en-GB" sz="2800" dirty="0">
+                <a:solidFill>
+                  <a:srgbClr val="FF0000"/>
+                </a:solidFill>
+                <a:latin typeface="Consolas" panose="020B0609020204030204" pitchFamily="49" charset="0"/>
+                <a:cs typeface="Consolas" panose="020B0609020204030204" pitchFamily="49" charset="0"/>
+              </a:rPr>
+              <a:t> </a:t>
+            </a:r>
+            <a:r>
+              <a:rPr lang="en-GB" sz="2800" dirty="0">
+                <a:latin typeface="Consolas" panose="020B0609020204030204" pitchFamily="49" charset="0"/>
+                <a:cs typeface="Consolas" panose="020B0609020204030204" pitchFamily="49" charset="0"/>
+              </a:rPr>
+              <a:t>{</a:t>
+            </a:r>
+            <a:r>
+              <a:rPr lang="en-GB" sz="2800" i="1" dirty="0">
+                <a:latin typeface="Consolas" panose="020B0609020204030204" pitchFamily="49" charset="0"/>
+                <a:cs typeface="Consolas" panose="020B0609020204030204" pitchFamily="49" charset="0"/>
+              </a:rPr>
+              <a:t>Rd</a:t>
+            </a:r>
+            <a:r>
+              <a:rPr lang="en-GB" sz="2800" dirty="0">
+                <a:latin typeface="Consolas" panose="020B0609020204030204" pitchFamily="49" charset="0"/>
+                <a:cs typeface="Consolas" panose="020B0609020204030204" pitchFamily="49" charset="0"/>
+              </a:rPr>
+              <a:t>} </a:t>
+            </a:r>
+          </a:p>
+          <a:p>
+            <a:pPr lvl="1"/>
+            <a:r>
+              <a:rPr lang="en-GB" sz="2400" dirty="0" err="1">
+                <a:latin typeface="Consolas" panose="020B0609020204030204" pitchFamily="49" charset="0"/>
+                <a:cs typeface="Consolas" panose="020B0609020204030204" pitchFamily="49" charset="0"/>
+              </a:rPr>
+              <a:t>SP</a:t>
+            </a:r>
+            <a:r>
+              <a:rPr lang="en-GB" sz="2400" dirty="0">
+                <a:latin typeface="Consolas" panose="020B0609020204030204" pitchFamily="49" charset="0"/>
+                <a:cs typeface="Consolas" panose="020B0609020204030204" pitchFamily="49" charset="0"/>
+              </a:rPr>
+              <a:t> = </a:t>
+            </a:r>
+            <a:r>
+              <a:rPr lang="en-GB" sz="2400" dirty="0" err="1">
+                <a:latin typeface="Consolas" panose="020B0609020204030204" pitchFamily="49" charset="0"/>
+                <a:cs typeface="Consolas" panose="020B0609020204030204" pitchFamily="49" charset="0"/>
+              </a:rPr>
+              <a:t>SP</a:t>
+            </a:r>
+            <a:r>
+              <a:rPr lang="en-GB" sz="2400" dirty="0">
+                <a:latin typeface="Consolas" panose="020B0609020204030204" pitchFamily="49" charset="0"/>
+                <a:cs typeface="Consolas" panose="020B0609020204030204" pitchFamily="49" charset="0"/>
+              </a:rPr>
+              <a:t>-4   </a:t>
+            </a:r>
+            <a:r>
+              <a:rPr lang="en-GB" sz="2400" dirty="0">
+                <a:latin typeface="Cambria Math"/>
+                <a:ea typeface="Cambria Math"/>
+                <a:cs typeface="Consolas" panose="020B0609020204030204" pitchFamily="49" charset="0"/>
+              </a:rPr>
+              <a:t>⟶    descending stack</a:t>
+            </a:r>
+            <a:endParaRPr lang="en-GB" sz="2400" dirty="0">
+              <a:latin typeface="Consolas" panose="020B0609020204030204" pitchFamily="49" charset="0"/>
+              <a:cs typeface="Consolas" panose="020B0609020204030204" pitchFamily="49" charset="0"/>
+            </a:endParaRPr>
+          </a:p>
+          <a:p>
+            <a:pPr lvl="1"/>
+            <a:r>
+              <a:rPr lang="en-GB" sz="2400" dirty="0">
+                <a:latin typeface="Consolas" panose="020B0609020204030204" pitchFamily="49" charset="0"/>
+                <a:cs typeface="Consolas" panose="020B0609020204030204" pitchFamily="49" charset="0"/>
+              </a:rPr>
+              <a:t>(*SP) = </a:t>
+            </a:r>
+            <a:r>
+              <a:rPr lang="en-GB" sz="2400" i="1" dirty="0">
+                <a:latin typeface="Consolas" panose="020B0609020204030204" pitchFamily="49" charset="0"/>
+                <a:cs typeface="Consolas" panose="020B0609020204030204" pitchFamily="49" charset="0"/>
+              </a:rPr>
+              <a:t>Rd</a:t>
+            </a:r>
+            <a:r>
+              <a:rPr lang="en-GB" sz="2400" dirty="0">
+                <a:latin typeface="Cambria Math"/>
+                <a:ea typeface="Cambria Math"/>
+                <a:cs typeface="Consolas" panose="020B0609020204030204" pitchFamily="49" charset="0"/>
+              </a:rPr>
+              <a:t>     ⟶    full stack</a:t>
+            </a:r>
+          </a:p>
+          <a:p>
+            <a:pPr marL="0" indent="0">
+              <a:buNone/>
+            </a:pPr>
+            <a:endParaRPr lang="en-GB" sz="2700" i="1" dirty="0">
+              <a:latin typeface="Consolas" panose="020B0609020204030204" pitchFamily="49" charset="0"/>
+              <a:cs typeface="Consolas" panose="020B0609020204030204" pitchFamily="49" charset="0"/>
+            </a:endParaRPr>
+          </a:p>
+          <a:p>
+            <a:pPr marL="0" indent="0">
+              <a:buNone/>
+            </a:pPr>
+            <a:r>
+              <a:rPr lang="en-GB" sz="2700" dirty="0">
+                <a:cs typeface="Consolas" panose="020B0609020204030204" pitchFamily="49" charset="0"/>
+              </a:rPr>
+              <a:t>Push multiple registers</a:t>
+            </a:r>
+          </a:p>
+          <a:p>
+            <a:pPr marL="0" indent="0">
+              <a:buNone/>
+            </a:pPr>
+            <a:endParaRPr lang="en-GB" sz="2800" dirty="0"/>
+          </a:p>
+          <a:p>
+            <a:endParaRPr lang="en-GB" sz="2400" dirty="0"/>
+          </a:p>
+          <a:p>
+            <a:pPr>
+              <a:buNone/>
+            </a:pPr>
+            <a:endParaRPr lang="en-GB" dirty="0"/>
+          </a:p>
+        </p:txBody>
+      </p:sp>
+      <p:sp>
+        <p:nvSpPr>
+          <p:cNvPr id="4" name="Slide Number Placeholder 3"/>
+          <p:cNvSpPr>
+            <a:spLocks noGrp="1"/>
+          </p:cNvSpPr>
+          <p:nvPr>
+            <p:ph type="sldNum" sz="quarter" idx="12"/>
+          </p:nvPr>
+        </p:nvSpPr>
+        <p:spPr/>
+        <p:txBody>
+          <a:bodyPr/>
+          <a:lstStyle/>
+          <a:p>
+            <a:fld id="{EA7C8D44-3667-46F6-9772-CC52308E2A7F}" type="slidenum">
+              <a:rPr kumimoji="0" lang="en-US" smtClean="0"/>
+              <a:pPr/>
+              <a:t>2</a:t>
+            </a:fld>
+            <a:endParaRPr kumimoji="0" lang="en-US" dirty="0"/>
+          </a:p>
+        </p:txBody>
+      </p:sp>
+      <p:sp>
+        <p:nvSpPr>
+          <p:cNvPr id="5" name="Rectangle 4"/>
+          <p:cNvSpPr/>
+          <p:nvPr/>
+        </p:nvSpPr>
+        <p:spPr>
+          <a:xfrm>
+            <a:off x="410688" y="3848146"/>
+            <a:ext cx="2488850" cy="369332"/>
+          </a:xfrm>
+          <a:prstGeom prst="rect">
+            <a:avLst/>
+          </a:prstGeom>
+        </p:spPr>
+        <p:txBody>
+          <a:bodyPr wrap="square">
+            <a:spAutoFit/>
+          </a:bodyPr>
+          <a:lstStyle/>
+          <a:p>
+            <a:r>
+              <a:rPr lang="en-GB" b="1" dirty="0">
+                <a:solidFill>
+                  <a:srgbClr val="FF0000"/>
+                </a:solidFill>
+                <a:latin typeface="Consolas" panose="020B0609020204030204" pitchFamily="49" charset="0"/>
+                <a:cs typeface="Consolas" panose="020B0609020204030204" pitchFamily="49" charset="0"/>
+              </a:rPr>
+              <a:t>PUSH {r6, r7, </a:t>
+            </a:r>
+            <a:r>
+              <a:rPr lang="en-GB" b="1" dirty="0" err="1">
+                <a:solidFill>
+                  <a:srgbClr val="FF0000"/>
+                </a:solidFill>
+                <a:latin typeface="Consolas" panose="020B0609020204030204" pitchFamily="49" charset="0"/>
+                <a:cs typeface="Consolas" panose="020B0609020204030204" pitchFamily="49" charset="0"/>
+              </a:rPr>
+              <a:t>r8</a:t>
+            </a:r>
+            <a:r>
+              <a:rPr lang="en-GB" b="1" dirty="0">
+                <a:solidFill>
+                  <a:srgbClr val="FF0000"/>
+                </a:solidFill>
+                <a:latin typeface="Consolas" panose="020B0609020204030204" pitchFamily="49" charset="0"/>
+                <a:cs typeface="Consolas" panose="020B0609020204030204" pitchFamily="49" charset="0"/>
+              </a:rPr>
+              <a:t>}</a:t>
+            </a:r>
+          </a:p>
+        </p:txBody>
+      </p:sp>
+      <p:sp>
+        <p:nvSpPr>
+          <p:cNvPr id="6" name="TextBox 5"/>
+          <p:cNvSpPr txBox="1"/>
+          <p:nvPr/>
+        </p:nvSpPr>
+        <p:spPr>
+          <a:xfrm>
+            <a:off x="3611088" y="3465945"/>
+            <a:ext cx="1969129" cy="369332"/>
+          </a:xfrm>
+          <a:prstGeom prst="rect">
+            <a:avLst/>
+          </a:prstGeom>
+          <a:noFill/>
+        </p:spPr>
+        <p:txBody>
+          <a:bodyPr wrap="none" rtlCol="0">
+            <a:spAutoFit/>
+          </a:bodyPr>
+          <a:lstStyle/>
+          <a:p>
+            <a:r>
+              <a:rPr lang="en-US" i="1" dirty="0"/>
+              <a:t>They are equivalent. </a:t>
+            </a:r>
+          </a:p>
+        </p:txBody>
+      </p:sp>
+      <p:sp>
+        <p:nvSpPr>
+          <p:cNvPr id="8" name="Rectangle 7"/>
+          <p:cNvSpPr/>
+          <p:nvPr/>
+        </p:nvSpPr>
+        <p:spPr>
+          <a:xfrm>
+            <a:off x="7040088" y="3568140"/>
+            <a:ext cx="1324402" cy="923330"/>
+          </a:xfrm>
+          <a:prstGeom prst="rect">
+            <a:avLst/>
+          </a:prstGeom>
+        </p:spPr>
+        <p:txBody>
+          <a:bodyPr wrap="none">
+            <a:spAutoFit/>
+          </a:bodyPr>
+          <a:lstStyle/>
+          <a:p>
+            <a:r>
+              <a:rPr lang="en-GB" b="1" dirty="0">
+                <a:solidFill>
+                  <a:srgbClr val="FF0000"/>
+                </a:solidFill>
+                <a:latin typeface="Consolas" panose="020B0609020204030204" pitchFamily="49" charset="0"/>
+                <a:cs typeface="Consolas" panose="020B0609020204030204" pitchFamily="49" charset="0"/>
+              </a:rPr>
+              <a:t>PUSH {r8}</a:t>
+            </a:r>
+          </a:p>
+          <a:p>
+            <a:r>
+              <a:rPr lang="en-GB" b="1" dirty="0">
+                <a:solidFill>
+                  <a:srgbClr val="FF0000"/>
+                </a:solidFill>
+                <a:latin typeface="Consolas" panose="020B0609020204030204" pitchFamily="49" charset="0"/>
+                <a:cs typeface="Consolas" panose="020B0609020204030204" pitchFamily="49" charset="0"/>
+              </a:rPr>
+              <a:t>PUSH {r7}</a:t>
+            </a:r>
+          </a:p>
+          <a:p>
+            <a:r>
+              <a:rPr lang="en-GB" b="1" dirty="0">
+                <a:solidFill>
+                  <a:srgbClr val="FF0000"/>
+                </a:solidFill>
+                <a:latin typeface="Consolas" panose="020B0609020204030204" pitchFamily="49" charset="0"/>
+                <a:cs typeface="Consolas" panose="020B0609020204030204" pitchFamily="49" charset="0"/>
+              </a:rPr>
+              <a:t>PUSH {r6}</a:t>
+            </a:r>
+          </a:p>
+        </p:txBody>
+      </p:sp>
+      <p:sp>
+        <p:nvSpPr>
+          <p:cNvPr id="10" name="Rectangle 9"/>
+          <p:cNvSpPr/>
+          <p:nvPr/>
+        </p:nvSpPr>
+        <p:spPr>
+          <a:xfrm>
+            <a:off x="3611088" y="3848146"/>
+            <a:ext cx="2337499" cy="369332"/>
+          </a:xfrm>
+          <a:prstGeom prst="rect">
+            <a:avLst/>
+          </a:prstGeom>
+        </p:spPr>
+        <p:txBody>
+          <a:bodyPr wrap="none">
+            <a:spAutoFit/>
+          </a:bodyPr>
+          <a:lstStyle/>
+          <a:p>
+            <a:r>
+              <a:rPr lang="en-GB" b="1" dirty="0">
+                <a:solidFill>
+                  <a:srgbClr val="FF0000"/>
+                </a:solidFill>
+                <a:latin typeface="Consolas" panose="020B0609020204030204" pitchFamily="49" charset="0"/>
+                <a:cs typeface="Consolas" panose="020B0609020204030204" pitchFamily="49" charset="0"/>
+              </a:rPr>
+              <a:t>PUSH {</a:t>
+            </a:r>
+            <a:r>
+              <a:rPr lang="en-GB" b="1" dirty="0" err="1">
+                <a:solidFill>
+                  <a:srgbClr val="FF0000"/>
+                </a:solidFill>
+                <a:latin typeface="Consolas" panose="020B0609020204030204" pitchFamily="49" charset="0"/>
+                <a:cs typeface="Consolas" panose="020B0609020204030204" pitchFamily="49" charset="0"/>
+              </a:rPr>
+              <a:t>r8</a:t>
+            </a:r>
+            <a:r>
+              <a:rPr lang="en-GB" b="1" dirty="0">
+                <a:solidFill>
+                  <a:srgbClr val="FF0000"/>
+                </a:solidFill>
+                <a:latin typeface="Consolas" panose="020B0609020204030204" pitchFamily="49" charset="0"/>
+                <a:cs typeface="Consolas" panose="020B0609020204030204" pitchFamily="49" charset="0"/>
+              </a:rPr>
+              <a:t>, </a:t>
+            </a:r>
+            <a:r>
+              <a:rPr lang="en-GB" b="1" dirty="0" err="1">
+                <a:solidFill>
+                  <a:srgbClr val="FF0000"/>
+                </a:solidFill>
+                <a:latin typeface="Consolas" panose="020B0609020204030204" pitchFamily="49" charset="0"/>
+                <a:cs typeface="Consolas" panose="020B0609020204030204" pitchFamily="49" charset="0"/>
+              </a:rPr>
+              <a:t>r7</a:t>
+            </a:r>
+            <a:r>
+              <a:rPr lang="en-GB" b="1" dirty="0">
+                <a:solidFill>
+                  <a:srgbClr val="FF0000"/>
+                </a:solidFill>
+                <a:latin typeface="Consolas" panose="020B0609020204030204" pitchFamily="49" charset="0"/>
+                <a:cs typeface="Consolas" panose="020B0609020204030204" pitchFamily="49" charset="0"/>
+              </a:rPr>
+              <a:t>, </a:t>
+            </a:r>
+            <a:r>
+              <a:rPr lang="en-GB" b="1" dirty="0" err="1">
+                <a:solidFill>
+                  <a:srgbClr val="FF0000"/>
+                </a:solidFill>
+                <a:latin typeface="Consolas" panose="020B0609020204030204" pitchFamily="49" charset="0"/>
+                <a:cs typeface="Consolas" panose="020B0609020204030204" pitchFamily="49" charset="0"/>
+              </a:rPr>
+              <a:t>r6</a:t>
+            </a:r>
+            <a:r>
+              <a:rPr lang="en-GB" b="1" dirty="0">
+                <a:solidFill>
+                  <a:srgbClr val="FF0000"/>
+                </a:solidFill>
+                <a:latin typeface="Consolas" panose="020B0609020204030204" pitchFamily="49" charset="0"/>
+                <a:cs typeface="Consolas" panose="020B0609020204030204" pitchFamily="49" charset="0"/>
+              </a:rPr>
+              <a:t>}</a:t>
+            </a:r>
+          </a:p>
+        </p:txBody>
+      </p:sp>
+      <p:sp>
+        <p:nvSpPr>
+          <p:cNvPr id="11" name="Left-Right Arrow 10"/>
+          <p:cNvSpPr/>
+          <p:nvPr/>
+        </p:nvSpPr>
+        <p:spPr>
+          <a:xfrm>
+            <a:off x="3001488" y="3976346"/>
+            <a:ext cx="482950" cy="197882"/>
+          </a:xfrm>
+          <a:prstGeom prst="leftRightArrow">
+            <a:avLst/>
+          </a:prstGeom>
+        </p:spPr>
+        <p:style>
+          <a:lnRef idx="2">
+            <a:schemeClr val="accent1">
+              <a:shade val="50000"/>
+            </a:schemeClr>
+          </a:lnRef>
+          <a:fillRef idx="1">
+            <a:schemeClr val="accent1"/>
+          </a:fillRef>
+          <a:effectRef idx="0">
+            <a:schemeClr val="accent1"/>
+          </a:effectRef>
+          <a:fontRef idx="minor">
+            <a:schemeClr val="lt1"/>
+          </a:fontRef>
+        </p:style>
+        <p:txBody>
+          <a:bodyPr rtlCol="0" anchor="ctr"/>
+          <a:lstStyle/>
+          <a:p>
+            <a:pPr algn="ctr"/>
+            <a:endParaRPr lang="en-US"/>
+          </a:p>
+        </p:txBody>
+      </p:sp>
+      <p:sp>
+        <p:nvSpPr>
+          <p:cNvPr id="12" name="Left-Right Arrow 11"/>
+          <p:cNvSpPr/>
+          <p:nvPr/>
+        </p:nvSpPr>
+        <p:spPr>
+          <a:xfrm>
+            <a:off x="6278088" y="3930864"/>
+            <a:ext cx="482950" cy="197882"/>
+          </a:xfrm>
+          <a:prstGeom prst="leftRightArrow">
+            <a:avLst/>
+          </a:prstGeom>
+        </p:spPr>
+        <p:style>
+          <a:lnRef idx="2">
+            <a:schemeClr val="accent1">
+              <a:shade val="50000"/>
+            </a:schemeClr>
+          </a:lnRef>
+          <a:fillRef idx="1">
+            <a:schemeClr val="accent1"/>
+          </a:fillRef>
+          <a:effectRef idx="0">
+            <a:schemeClr val="accent1"/>
+          </a:effectRef>
+          <a:fontRef idx="minor">
+            <a:schemeClr val="lt1"/>
+          </a:fontRef>
+        </p:style>
+        <p:txBody>
+          <a:bodyPr rtlCol="0" anchor="ctr"/>
+          <a:lstStyle/>
+          <a:p>
+            <a:pPr algn="ctr"/>
+            <a:endParaRPr lang="en-US"/>
+          </a:p>
+        </p:txBody>
+      </p:sp>
+      <p:sp>
+        <p:nvSpPr>
+          <p:cNvPr id="13" name="Rectangle 12"/>
+          <p:cNvSpPr/>
+          <p:nvPr/>
+        </p:nvSpPr>
+        <p:spPr>
+          <a:xfrm>
+            <a:off x="758953" y="4504339"/>
+            <a:ext cx="7772399" cy="1938992"/>
+          </a:xfrm>
+          <a:prstGeom prst="rect">
+            <a:avLst/>
+          </a:prstGeom>
+        </p:spPr>
+        <p:txBody>
+          <a:bodyPr wrap="square">
+            <a:spAutoFit/>
+          </a:bodyPr>
+          <a:lstStyle/>
+          <a:p>
+            <a:pPr marL="285750" indent="-285750">
+              <a:buFont typeface="Arial" panose="020B0604020202020204" pitchFamily="34" charset="0"/>
+              <a:buChar char="•"/>
+            </a:pPr>
+            <a:r>
+              <a:rPr lang="en-US" sz="2000" dirty="0"/>
+              <a:t>SP is decremented before PUSH (pre-decrement), and incremented after POP (post-increment). </a:t>
+            </a:r>
+          </a:p>
+          <a:p>
+            <a:pPr marL="285750" indent="-285750">
+              <a:buFont typeface="Arial" panose="020B0604020202020204" pitchFamily="34" charset="0"/>
+              <a:buChar char="•"/>
+            </a:pPr>
+            <a:r>
+              <a:rPr lang="en-US" sz="2000" dirty="0"/>
+              <a:t>The order in which registers listed in the register list does not matter. </a:t>
+            </a:r>
+          </a:p>
+          <a:p>
+            <a:pPr marL="285750" indent="-285750">
+              <a:buFont typeface="Arial" panose="020B0604020202020204" pitchFamily="34" charset="0"/>
+              <a:buChar char="•"/>
+            </a:pPr>
+            <a:r>
+              <a:rPr lang="en-US" sz="2000" dirty="0"/>
+              <a:t>When pushing multiple registers, these registers are automatically </a:t>
+            </a:r>
+            <a:r>
+              <a:rPr lang="en-US" sz="2000" dirty="0">
+                <a:solidFill>
+                  <a:srgbClr val="3333FF"/>
+                </a:solidFill>
+              </a:rPr>
+              <a:t>sorted by name </a:t>
+            </a:r>
+            <a:r>
+              <a:rPr lang="en-US" sz="2000" dirty="0"/>
+              <a:t>and </a:t>
+            </a:r>
+            <a:r>
+              <a:rPr lang="en-US" sz="2000" dirty="0">
+                <a:solidFill>
+                  <a:srgbClr val="3333FF"/>
+                </a:solidFill>
+              </a:rPr>
+              <a:t>the lowest-numbered register </a:t>
+            </a:r>
+            <a:r>
+              <a:rPr lang="en-US" sz="2000" dirty="0"/>
+              <a:t>is stored to the lowest memory address, </a:t>
+            </a:r>
+            <a:r>
+              <a:rPr lang="en-US" sz="2000" i="1" dirty="0"/>
+              <a:t>i.e. </a:t>
+            </a:r>
+            <a:r>
+              <a:rPr lang="en-US" sz="2000" dirty="0">
+                <a:solidFill>
+                  <a:srgbClr val="3333FF"/>
+                </a:solidFill>
+              </a:rPr>
+              <a:t>is stored last</a:t>
+            </a:r>
+            <a:r>
+              <a:rPr lang="en-US" sz="2000" dirty="0"/>
+              <a:t>. </a:t>
+            </a:r>
+          </a:p>
+        </p:txBody>
+      </p:sp>
+      <p:sp>
+        <p:nvSpPr>
+          <p:cNvPr id="7" name="Horizontal Scroll 15">
+            <a:extLst>
+              <a:ext uri="{FF2B5EF4-FFF2-40B4-BE49-F238E27FC236}">
+                <a16:creationId xmlns:a16="http://schemas.microsoft.com/office/drawing/2014/main" id="{CA1DAB37-747D-183E-CAAD-AD690621F135}"/>
+              </a:ext>
+            </a:extLst>
+          </p:cNvPr>
+          <p:cNvSpPr/>
+          <p:nvPr/>
+        </p:nvSpPr>
+        <p:spPr>
+          <a:xfrm>
+            <a:off x="76200" y="-23210"/>
+            <a:ext cx="1265712" cy="762000"/>
+          </a:xfrm>
+          <a:prstGeom prst="horizontalScroll">
+            <a:avLst/>
+          </a:prstGeom>
+          <a:gradFill rotWithShape="1">
+            <a:gsLst>
+              <a:gs pos="0">
+                <a:srgbClr val="4F81BD">
+                  <a:tint val="50000"/>
+                  <a:satMod val="300000"/>
+                </a:srgbClr>
+              </a:gs>
+              <a:gs pos="35000">
+                <a:srgbClr val="4F81BD">
+                  <a:tint val="37000"/>
+                  <a:satMod val="300000"/>
+                </a:srgbClr>
+              </a:gs>
+              <a:gs pos="100000">
+                <a:srgbClr val="4F81BD">
+                  <a:tint val="15000"/>
+                  <a:satMod val="350000"/>
+                </a:srgbClr>
+              </a:gs>
+            </a:gsLst>
+            <a:lin ang="16200000" scaled="1"/>
+          </a:gradFill>
+          <a:ln w="9525" cap="flat" cmpd="sng" algn="ctr">
+            <a:solidFill>
+              <a:srgbClr val="4F81BD">
+                <a:shade val="95000"/>
+                <a:satMod val="105000"/>
+              </a:srgbClr>
+            </a:solidFill>
+            <a:prstDash val="solid"/>
+          </a:ln>
+          <a:effectLst>
+            <a:outerShdw blurRad="40000" dist="20000" dir="5400000" rotWithShape="0">
+              <a:srgbClr val="000000">
+                <a:alpha val="38000"/>
+              </a:srgbClr>
+            </a:outerShdw>
+          </a:effectLst>
+        </p:spPr>
+        <p:txBody>
+          <a:bodyPr rtlCol="0" anchor="ctr"/>
+          <a:lstStyle/>
+          <a:p>
+            <a:pPr marL="0" marR="0" lvl="0" indent="0" algn="ctr" defTabSz="457200" eaLnBrk="1" fontAlgn="auto" latinLnBrk="0" hangingPunct="1">
+              <a:lnSpc>
+                <a:spcPct val="100000"/>
+              </a:lnSpc>
+              <a:spcBef>
+                <a:spcPts val="0"/>
+              </a:spcBef>
+              <a:spcAft>
+                <a:spcPts val="0"/>
+              </a:spcAft>
+              <a:buClrTx/>
+              <a:buSzTx/>
+              <a:buFontTx/>
+              <a:buNone/>
+              <a:tabLst/>
+              <a:defRPr/>
+            </a:pPr>
+            <a:r>
+              <a:rPr kumimoji="0" lang="en-US" sz="2400" b="0" i="0" u="none" strike="noStrike" kern="0" cap="none" spc="0" normalizeH="0" baseline="0" noProof="0" dirty="0">
+                <a:ln>
+                  <a:noFill/>
+                </a:ln>
+                <a:solidFill>
+                  <a:prstClr val="black"/>
+                </a:solidFill>
+                <a:effectLst/>
+                <a:uLnTx/>
+                <a:uFillTx/>
+                <a:latin typeface="Calibri"/>
+                <a:ea typeface="+mn-ea"/>
+                <a:cs typeface="+mn-cs"/>
+              </a:rPr>
+              <a:t>Review</a:t>
+            </a:r>
+          </a:p>
+        </p:txBody>
+      </p:sp>
+    </p:spTree>
+    <p:extLst>
+      <p:ext uri="{BB962C8B-B14F-4D97-AF65-F5344CB8AC3E}">
+        <p14:creationId xmlns:p14="http://schemas.microsoft.com/office/powerpoint/2010/main" val="1120632604"/>
+      </p:ext>
+    </p:extLst>
+  </p:cSld>
+  <p:clrMapOvr>
+    <a:masterClrMapping/>
+  </p:clrMapOvr>
+</p:sld>
+</file>
+
+<file path=ppt/slides/slide20.xml><?xml version="1.0" encoding="utf-8"?>
 <p:sld xmlns:a="http://schemas.openxmlformats.org/drawingml/2006/main" xmlns:r="http://schemas.openxmlformats.org/officeDocument/2006/relationships" xmlns:p="http://schemas.openxmlformats.org/presentationml/2006/main">
   <p:cSld>
     <p:spTree>
@@ -16896,7 +17165,7 @@
             <a:fld id="{EA7C8D44-3667-46F6-9772-CC52308E2A7F}" type="slidenum">
               <a:rPr kumimoji="0" lang="en-US" smtClean="0"/>
               <a:pPr/>
-              <a:t>21</a:t>
+              <a:t>20</a:t>
             </a:fld>
             <a:endParaRPr kumimoji="0" lang="en-US" dirty="0"/>
           </a:p>
@@ -17531,7 +17800,7 @@
 </p:sld>
 </file>
 
-<file path=ppt/slides/slide22.xml><?xml version="1.0" encoding="utf-8"?>
+<file path=ppt/slides/slide21.xml><?xml version="1.0" encoding="utf-8"?>
 <p:sld xmlns:a="http://schemas.openxmlformats.org/drawingml/2006/main" xmlns:r="http://schemas.openxmlformats.org/officeDocument/2006/relationships" xmlns:p="http://schemas.openxmlformats.org/presentationml/2006/main">
   <p:cSld>
     <p:spTree>
@@ -17601,7 +17870,7 @@
             <a:fld id="{EA7C8D44-3667-46F6-9772-CC52308E2A7F}" type="slidenum">
               <a:rPr kumimoji="0" lang="en-US" smtClean="0"/>
               <a:pPr/>
-              <a:t>22</a:t>
+              <a:t>21</a:t>
             </a:fld>
             <a:endParaRPr kumimoji="0" lang="en-US" dirty="0"/>
           </a:p>
@@ -19364,7 +19633,7 @@
 </p:sld>
 </file>
 
-<file path=ppt/slides/slide23.xml><?xml version="1.0" encoding="utf-8"?>
+<file path=ppt/slides/slide22.xml><?xml version="1.0" encoding="utf-8"?>
 <p:sld xmlns:a="http://schemas.openxmlformats.org/drawingml/2006/main" xmlns:r="http://schemas.openxmlformats.org/officeDocument/2006/relationships" xmlns:p="http://schemas.openxmlformats.org/presentationml/2006/main">
   <p:cSld>
     <p:spTree>
@@ -19443,7 +19712,7 @@
             <a:fld id="{EA7C8D44-3667-46F6-9772-CC52308E2A7F}" type="slidenum">
               <a:rPr kumimoji="0" lang="en-US" smtClean="0"/>
               <a:pPr/>
-              <a:t>23</a:t>
+              <a:t>22</a:t>
             </a:fld>
             <a:endParaRPr kumimoji="0" lang="en-US" dirty="0"/>
           </a:p>
@@ -20232,7 +20501,7 @@
 </p:sld>
 </file>
 
-<file path=ppt/slides/slide24.xml><?xml version="1.0" encoding="utf-8"?>
+<file path=ppt/slides/slide23.xml><?xml version="1.0" encoding="utf-8"?>
 <p:sld xmlns:a="http://schemas.openxmlformats.org/drawingml/2006/main" xmlns:r="http://schemas.openxmlformats.org/officeDocument/2006/relationships" xmlns:p="http://schemas.openxmlformats.org/presentationml/2006/main">
   <p:cSld>
     <p:spTree>
@@ -20301,7 +20570,7 @@
             <a:fld id="{EA7C8D44-3667-46F6-9772-CC52308E2A7F}" type="slidenum">
               <a:rPr kumimoji="0" lang="en-US" smtClean="0"/>
               <a:pPr/>
-              <a:t>24</a:t>
+              <a:t>23</a:t>
             </a:fld>
             <a:endParaRPr kumimoji="0" lang="en-US" dirty="0"/>
           </a:p>
@@ -20595,7 +20864,7 @@
 </p:sld>
 </file>
 
-<file path=ppt/slides/slide25.xml><?xml version="1.0" encoding="utf-8"?>
+<file path=ppt/slides/slide24.xml><?xml version="1.0" encoding="utf-8"?>
 <p:sld xmlns:a="http://schemas.openxmlformats.org/drawingml/2006/main" xmlns:r="http://schemas.openxmlformats.org/officeDocument/2006/relationships" xmlns:p="http://schemas.openxmlformats.org/presentationml/2006/main">
   <p:cSld>
     <p:spTree>
@@ -20671,7 +20940,7 @@
             <a:fld id="{EA7C8D44-3667-46F6-9772-CC52308E2A7F}" type="slidenum">
               <a:rPr kumimoji="0" lang="en-US" smtClean="0"/>
               <a:pPr/>
-              <a:t>25</a:t>
+              <a:t>24</a:t>
             </a:fld>
             <a:endParaRPr kumimoji="0" lang="en-US" dirty="0"/>
           </a:p>
@@ -21527,7 +21796,7 @@
 </p:sld>
 </file>
 
-<file path=ppt/slides/slide26.xml><?xml version="1.0" encoding="utf-8"?>
+<file path=ppt/slides/slide25.xml><?xml version="1.0" encoding="utf-8"?>
 <p:sld xmlns:a="http://schemas.openxmlformats.org/drawingml/2006/main" xmlns:r="http://schemas.openxmlformats.org/officeDocument/2006/relationships" xmlns:p="http://schemas.openxmlformats.org/presentationml/2006/main">
   <p:cSld>
     <p:spTree>
@@ -21596,7 +21865,7 @@
             <a:fld id="{EA7C8D44-3667-46F6-9772-CC52308E2A7F}" type="slidenum">
               <a:rPr kumimoji="0" lang="en-US" smtClean="0"/>
               <a:pPr/>
-              <a:t>26</a:t>
+              <a:t>25</a:t>
             </a:fld>
             <a:endParaRPr kumimoji="0" lang="en-US" dirty="0"/>
           </a:p>
@@ -22325,7 +22594,7 @@
 </p:sld>
 </file>
 
-<file path=ppt/slides/slide27.xml><?xml version="1.0" encoding="utf-8"?>
+<file path=ppt/slides/slide26.xml><?xml version="1.0" encoding="utf-8"?>
 <p:sld xmlns:a="http://schemas.openxmlformats.org/drawingml/2006/main" xmlns:r="http://schemas.openxmlformats.org/officeDocument/2006/relationships" xmlns:p="http://schemas.openxmlformats.org/presentationml/2006/main">
   <p:cSld>
     <p:spTree>
@@ -22394,7 +22663,7 @@
             <a:fld id="{EA7C8D44-3667-46F6-9772-CC52308E2A7F}" type="slidenum">
               <a:rPr kumimoji="0" lang="en-US" smtClean="0"/>
               <a:pPr/>
-              <a:t>27</a:t>
+              <a:t>26</a:t>
             </a:fld>
             <a:endParaRPr kumimoji="0" lang="en-US" dirty="0"/>
           </a:p>
@@ -23079,7 +23348,7 @@
 </p:sld>
 </file>
 
-<file path=ppt/slides/slide28.xml><?xml version="1.0" encoding="utf-8"?>
+<file path=ppt/slides/slide27.xml><?xml version="1.0" encoding="utf-8"?>
 <p:sld xmlns:a="http://schemas.openxmlformats.org/drawingml/2006/main" xmlns:r="http://schemas.openxmlformats.org/officeDocument/2006/relationships" xmlns:p="http://schemas.openxmlformats.org/presentationml/2006/main">
   <p:cSld>
     <p:spTree>
@@ -23154,7 +23423,7 @@
             <a:fld id="{EA7C8D44-3667-46F6-9772-CC52308E2A7F}" type="slidenum">
               <a:rPr kumimoji="0" lang="en-US" smtClean="0"/>
               <a:pPr/>
-              <a:t>28</a:t>
+              <a:t>27</a:t>
             </a:fld>
             <a:endParaRPr kumimoji="0" lang="en-US" dirty="0"/>
           </a:p>
@@ -23972,7 +24241,7 @@
 </p:sld>
 </file>
 
-<file path=ppt/slides/slide29.xml><?xml version="1.0" encoding="utf-8"?>
+<file path=ppt/slides/slide28.xml><?xml version="1.0" encoding="utf-8"?>
 <p:sld xmlns:a="http://schemas.openxmlformats.org/drawingml/2006/main" xmlns:r="http://schemas.openxmlformats.org/officeDocument/2006/relationships" xmlns:p="http://schemas.openxmlformats.org/presentationml/2006/main">
   <p:cSld>
     <p:spTree>
@@ -24043,7 +24312,7 @@
             <a:fld id="{EA7C8D44-3667-46F6-9772-CC52308E2A7F}" type="slidenum">
               <a:rPr kumimoji="0" lang="en-US" smtClean="0"/>
               <a:pPr/>
-              <a:t>29</a:t>
+              <a:t>28</a:t>
             </a:fld>
             <a:endParaRPr kumimoji="0" lang="en-US" dirty="0"/>
           </a:p>
@@ -24631,6 +24900,1040 @@
     <p:extLst>
       <p:ext uri="{BB962C8B-B14F-4D97-AF65-F5344CB8AC3E}">
         <p14:creationId xmlns:p14="http://schemas.microsoft.com/office/powerpoint/2010/main" val="2017314449"/>
+      </p:ext>
+    </p:extLst>
+  </p:cSld>
+  <p:clrMapOvr>
+    <a:masterClrMapping/>
+  </p:clrMapOvr>
+</p:sld>
+</file>
+
+<file path=ppt/slides/slide29.xml><?xml version="1.0" encoding="utf-8"?>
+<p:sld xmlns:a="http://schemas.openxmlformats.org/drawingml/2006/main" xmlns:r="http://schemas.openxmlformats.org/officeDocument/2006/relationships" xmlns:p="http://schemas.openxmlformats.org/presentationml/2006/main">
+  <p:cSld>
+    <p:spTree>
+      <p:nvGrpSpPr>
+        <p:cNvPr id="1" name=""/>
+        <p:cNvGrpSpPr/>
+        <p:nvPr/>
+      </p:nvGrpSpPr>
+      <p:grpSpPr>
+        <a:xfrm>
+          <a:off x="0" y="0"/>
+          <a:ext cx="0" cy="0"/>
+          <a:chOff x="0" y="0"/>
+          <a:chExt cx="0" cy="0"/>
+        </a:xfrm>
+      </p:grpSpPr>
+      <p:sp>
+        <p:nvSpPr>
+          <p:cNvPr id="2" name="Title 1">
+            <a:extLst>
+              <a:ext uri="{FF2B5EF4-FFF2-40B4-BE49-F238E27FC236}">
+                <a16:creationId xmlns:a16="http://schemas.microsoft.com/office/drawing/2014/main" id="{27B41483-7081-C44C-81EF-D92F00104765}"/>
+              </a:ext>
+            </a:extLst>
+          </p:cNvPr>
+          <p:cNvSpPr>
+            <a:spLocks noGrp="1"/>
+          </p:cNvSpPr>
+          <p:nvPr>
+            <p:ph type="title"/>
+          </p:nvPr>
+        </p:nvSpPr>
+        <p:spPr/>
+        <p:txBody>
+          <a:bodyPr>
+            <a:normAutofit/>
+          </a:bodyPr>
+          <a:lstStyle/>
+          <a:p>
+            <a:r>
+              <a:rPr lang="en-US" dirty="0"/>
+              <a:t>What is wrong? ANS</a:t>
+            </a:r>
+          </a:p>
+        </p:txBody>
+      </p:sp>
+      <p:sp>
+        <p:nvSpPr>
+          <p:cNvPr id="3" name="Slide Number Placeholder 2">
+            <a:extLst>
+              <a:ext uri="{FF2B5EF4-FFF2-40B4-BE49-F238E27FC236}">
+                <a16:creationId xmlns:a16="http://schemas.microsoft.com/office/drawing/2014/main" id="{3D15817A-DD66-D447-B2D9-5646440481EB}"/>
+              </a:ext>
+            </a:extLst>
+          </p:cNvPr>
+          <p:cNvSpPr>
+            <a:spLocks noGrp="1"/>
+          </p:cNvSpPr>
+          <p:nvPr>
+            <p:ph type="sldNum" sz="quarter" idx="12"/>
+          </p:nvPr>
+        </p:nvSpPr>
+        <p:spPr/>
+        <p:txBody>
+          <a:bodyPr/>
+          <a:lstStyle/>
+          <a:p>
+            <a:fld id="{EA7C8D44-3667-46F6-9772-CC52308E2A7F}" type="slidenum">
+              <a:rPr kumimoji="0" lang="en-US" smtClean="0"/>
+              <a:pPr/>
+              <a:t>29</a:t>
+            </a:fld>
+            <a:endParaRPr kumimoji="0" lang="en-US" dirty="0"/>
+          </a:p>
+        </p:txBody>
+      </p:sp>
+      <p:sp>
+        <p:nvSpPr>
+          <p:cNvPr id="5" name="TextBox 4">
+            <a:extLst>
+              <a:ext uri="{FF2B5EF4-FFF2-40B4-BE49-F238E27FC236}">
+                <a16:creationId xmlns:a16="http://schemas.microsoft.com/office/drawing/2014/main" id="{67609315-49B9-8548-BA54-379B42B31ADB}"/>
+              </a:ext>
+            </a:extLst>
+          </p:cNvPr>
+          <p:cNvSpPr txBox="1"/>
+          <p:nvPr/>
+        </p:nvSpPr>
+        <p:spPr>
+          <a:xfrm>
+            <a:off x="457200" y="2006188"/>
+            <a:ext cx="3752950" cy="1384995"/>
+          </a:xfrm>
+          <a:prstGeom prst="rect">
+            <a:avLst/>
+          </a:prstGeom>
+        </p:spPr>
+        <p:style>
+          <a:lnRef idx="2">
+            <a:schemeClr val="accent1"/>
+          </a:lnRef>
+          <a:fillRef idx="1">
+            <a:schemeClr val="lt1"/>
+          </a:fillRef>
+          <a:effectRef idx="0">
+            <a:schemeClr val="accent1"/>
+          </a:effectRef>
+          <a:fontRef idx="minor">
+            <a:schemeClr val="dk1"/>
+          </a:fontRef>
+        </p:style>
+        <p:txBody>
+          <a:bodyPr wrap="none" rtlCol="0">
+            <a:spAutoFit/>
+          </a:bodyPr>
+          <a:lstStyle/>
+          <a:p>
+            <a:r>
+              <a:rPr lang="en-US" sz="1200" dirty="0">
+                <a:latin typeface="Consolas" panose="020B0609020204030204" pitchFamily="49" charset="0"/>
+                <a:cs typeface="Consolas" panose="020B0609020204030204" pitchFamily="49" charset="0"/>
+              </a:rPr>
+              <a:t>int16_t </a:t>
+            </a:r>
+            <a:r>
+              <a:rPr lang="en-US" sz="1200" b="1" dirty="0" err="1">
+                <a:solidFill>
+                  <a:schemeClr val="accent1"/>
+                </a:solidFill>
+                <a:latin typeface="Consolas" panose="020B0609020204030204" pitchFamily="49" charset="0"/>
+                <a:cs typeface="Consolas" panose="020B0609020204030204" pitchFamily="49" charset="0"/>
+              </a:rPr>
+              <a:t>sum_of_array</a:t>
+            </a:r>
+            <a:r>
+              <a:rPr lang="en-US" sz="1200" dirty="0">
+                <a:latin typeface="Consolas" panose="020B0609020204030204" pitchFamily="49" charset="0"/>
+                <a:cs typeface="Consolas" panose="020B0609020204030204" pitchFamily="49" charset="0"/>
+              </a:rPr>
+              <a:t>(int16_t *</a:t>
+            </a:r>
+            <a:r>
+              <a:rPr lang="en-US" sz="1200" dirty="0" err="1">
+                <a:latin typeface="Consolas" panose="020B0609020204030204" pitchFamily="49" charset="0"/>
+                <a:cs typeface="Consolas" panose="020B0609020204030204" pitchFamily="49" charset="0"/>
+              </a:rPr>
+              <a:t>pArray</a:t>
+            </a:r>
+            <a:r>
+              <a:rPr lang="en-US" sz="1200" dirty="0">
+                <a:latin typeface="Consolas" panose="020B0609020204030204" pitchFamily="49" charset="0"/>
+                <a:cs typeface="Consolas" panose="020B0609020204030204" pitchFamily="49" charset="0"/>
+              </a:rPr>
+              <a:t>){</a:t>
+            </a:r>
+          </a:p>
+          <a:p>
+            <a:r>
+              <a:rPr lang="en-US" sz="1200" dirty="0">
+                <a:latin typeface="Consolas" panose="020B0609020204030204" pitchFamily="49" charset="0"/>
+                <a:cs typeface="Consolas" panose="020B0609020204030204" pitchFamily="49" charset="0"/>
+              </a:rPr>
+              <a:t>    uint32_t </a:t>
+            </a:r>
+            <a:r>
+              <a:rPr lang="en-US" sz="1200" dirty="0" err="1">
+                <a:latin typeface="Consolas" panose="020B0609020204030204" pitchFamily="49" charset="0"/>
+                <a:cs typeface="Consolas" panose="020B0609020204030204" pitchFamily="49" charset="0"/>
+              </a:rPr>
+              <a:t>i</a:t>
+            </a:r>
+            <a:r>
+              <a:rPr lang="en-US" sz="1200" dirty="0">
+                <a:latin typeface="Consolas" panose="020B0609020204030204" pitchFamily="49" charset="0"/>
+                <a:cs typeface="Consolas" panose="020B0609020204030204" pitchFamily="49" charset="0"/>
+              </a:rPr>
+              <a:t>;</a:t>
+            </a:r>
+          </a:p>
+          <a:p>
+            <a:r>
+              <a:rPr lang="en-US" sz="1200" dirty="0">
+                <a:latin typeface="Consolas" panose="020B0609020204030204" pitchFamily="49" charset="0"/>
+                <a:cs typeface="Consolas" panose="020B0609020204030204" pitchFamily="49" charset="0"/>
+              </a:rPr>
+              <a:t>    int32_t sum = 0;</a:t>
+            </a:r>
+          </a:p>
+          <a:p>
+            <a:r>
+              <a:rPr lang="en-US" sz="1200" dirty="0">
+                <a:latin typeface="Consolas" panose="020B0609020204030204" pitchFamily="49" charset="0"/>
+                <a:cs typeface="Consolas" panose="020B0609020204030204" pitchFamily="49" charset="0"/>
+              </a:rPr>
+              <a:t>    for(</a:t>
+            </a:r>
+            <a:r>
+              <a:rPr lang="en-US" sz="1200" dirty="0" err="1">
+                <a:latin typeface="Consolas" panose="020B0609020204030204" pitchFamily="49" charset="0"/>
+                <a:cs typeface="Consolas" panose="020B0609020204030204" pitchFamily="49" charset="0"/>
+              </a:rPr>
+              <a:t>i</a:t>
+            </a:r>
+            <a:r>
+              <a:rPr lang="en-US" sz="1200" dirty="0">
+                <a:latin typeface="Consolas" panose="020B0609020204030204" pitchFamily="49" charset="0"/>
+                <a:cs typeface="Consolas" panose="020B0609020204030204" pitchFamily="49" charset="0"/>
+              </a:rPr>
+              <a:t>=0; </a:t>
+            </a:r>
+            <a:r>
+              <a:rPr lang="en-US" sz="1200" dirty="0" err="1">
+                <a:latin typeface="Consolas" panose="020B0609020204030204" pitchFamily="49" charset="0"/>
+                <a:cs typeface="Consolas" panose="020B0609020204030204" pitchFamily="49" charset="0"/>
+              </a:rPr>
+              <a:t>i</a:t>
+            </a:r>
+            <a:r>
+              <a:rPr lang="en-US" sz="1200" dirty="0">
+                <a:latin typeface="Consolas" panose="020B0609020204030204" pitchFamily="49" charset="0"/>
+                <a:cs typeface="Consolas" panose="020B0609020204030204" pitchFamily="49" charset="0"/>
+              </a:rPr>
+              <a:t>&lt;64; </a:t>
+            </a:r>
+            <a:r>
+              <a:rPr lang="en-US" sz="1200" dirty="0" err="1">
+                <a:latin typeface="Consolas" panose="020B0609020204030204" pitchFamily="49" charset="0"/>
+                <a:cs typeface="Consolas" panose="020B0609020204030204" pitchFamily="49" charset="0"/>
+              </a:rPr>
+              <a:t>i</a:t>
+            </a:r>
+            <a:r>
+              <a:rPr lang="en-US" sz="1200" dirty="0">
+                <a:latin typeface="Consolas" panose="020B0609020204030204" pitchFamily="49" charset="0"/>
+                <a:cs typeface="Consolas" panose="020B0609020204030204" pitchFamily="49" charset="0"/>
+              </a:rPr>
+              <a:t>++) </a:t>
+            </a:r>
+            <a:r>
+              <a:rPr lang="en-US" sz="1200" dirty="0">
+                <a:solidFill>
+                  <a:schemeClr val="bg1">
+                    <a:lumMod val="50000"/>
+                  </a:schemeClr>
+                </a:solidFill>
+                <a:latin typeface="Consolas" panose="020B0609020204030204" pitchFamily="49" charset="0"/>
+                <a:cs typeface="Consolas" panose="020B0609020204030204" pitchFamily="49" charset="0"/>
+              </a:rPr>
+              <a:t>// array size = 64</a:t>
+            </a:r>
+          </a:p>
+          <a:p>
+            <a:r>
+              <a:rPr lang="en-US" sz="1200" dirty="0">
+                <a:latin typeface="Consolas" panose="020B0609020204030204" pitchFamily="49" charset="0"/>
+                <a:cs typeface="Consolas" panose="020B0609020204030204" pitchFamily="49" charset="0"/>
+              </a:rPr>
+              <a:t>        sum += </a:t>
+            </a:r>
+            <a:r>
+              <a:rPr lang="en-US" sz="1200" dirty="0" err="1">
+                <a:latin typeface="Consolas" panose="020B0609020204030204" pitchFamily="49" charset="0"/>
+                <a:cs typeface="Consolas" panose="020B0609020204030204" pitchFamily="49" charset="0"/>
+              </a:rPr>
+              <a:t>pArray</a:t>
+            </a:r>
+            <a:r>
+              <a:rPr lang="en-US" sz="1200" dirty="0">
+                <a:latin typeface="Consolas" panose="020B0609020204030204" pitchFamily="49" charset="0"/>
+                <a:cs typeface="Consolas" panose="020B0609020204030204" pitchFamily="49" charset="0"/>
+              </a:rPr>
+              <a:t>[</a:t>
+            </a:r>
+            <a:r>
+              <a:rPr lang="en-US" sz="1200" dirty="0" err="1">
+                <a:latin typeface="Consolas" panose="020B0609020204030204" pitchFamily="49" charset="0"/>
+                <a:cs typeface="Consolas" panose="020B0609020204030204" pitchFamily="49" charset="0"/>
+              </a:rPr>
+              <a:t>i</a:t>
+            </a:r>
+            <a:r>
+              <a:rPr lang="en-US" sz="1200" dirty="0">
+                <a:latin typeface="Consolas" panose="020B0609020204030204" pitchFamily="49" charset="0"/>
+                <a:cs typeface="Consolas" panose="020B0609020204030204" pitchFamily="49" charset="0"/>
+              </a:rPr>
+              <a:t>];</a:t>
+            </a:r>
+          </a:p>
+          <a:p>
+            <a:r>
+              <a:rPr lang="en-US" sz="1200" dirty="0">
+                <a:latin typeface="Consolas" panose="020B0609020204030204" pitchFamily="49" charset="0"/>
+                <a:cs typeface="Consolas" panose="020B0609020204030204" pitchFamily="49" charset="0"/>
+              </a:rPr>
+              <a:t>    return (int16_t) sum;</a:t>
+            </a:r>
+          </a:p>
+          <a:p>
+            <a:r>
+              <a:rPr lang="en-US" sz="1200" dirty="0">
+                <a:latin typeface="Consolas" panose="020B0609020204030204" pitchFamily="49" charset="0"/>
+                <a:cs typeface="Consolas" panose="020B0609020204030204" pitchFamily="49" charset="0"/>
+              </a:rPr>
+              <a:t>}</a:t>
+            </a:r>
+          </a:p>
+        </p:txBody>
+      </p:sp>
+      <p:sp>
+        <p:nvSpPr>
+          <p:cNvPr id="6" name="TextBox 5">
+            <a:extLst>
+              <a:ext uri="{FF2B5EF4-FFF2-40B4-BE49-F238E27FC236}">
+                <a16:creationId xmlns:a16="http://schemas.microsoft.com/office/drawing/2014/main" id="{4F4F6D7F-4E8E-4748-B8BF-4AEBF2493640}"/>
+              </a:ext>
+            </a:extLst>
+          </p:cNvPr>
+          <p:cNvSpPr txBox="1"/>
+          <p:nvPr/>
+        </p:nvSpPr>
+        <p:spPr>
+          <a:xfrm>
+            <a:off x="4340418" y="2006187"/>
+            <a:ext cx="4432624" cy="2492990"/>
+          </a:xfrm>
+          <a:prstGeom prst="rect">
+            <a:avLst/>
+          </a:prstGeom>
+        </p:spPr>
+        <p:style>
+          <a:lnRef idx="2">
+            <a:schemeClr val="accent1"/>
+          </a:lnRef>
+          <a:fillRef idx="1">
+            <a:schemeClr val="lt1"/>
+          </a:fillRef>
+          <a:effectRef idx="0">
+            <a:schemeClr val="accent1"/>
+          </a:effectRef>
+          <a:fontRef idx="minor">
+            <a:schemeClr val="dk1"/>
+          </a:fontRef>
+        </p:style>
+        <p:txBody>
+          <a:bodyPr wrap="none" rtlCol="0">
+            <a:spAutoFit/>
+          </a:bodyPr>
+          <a:lstStyle/>
+          <a:p>
+            <a:r>
+              <a:rPr lang="en-US" sz="1200" b="1" dirty="0" err="1">
+                <a:solidFill>
+                  <a:schemeClr val="accent1"/>
+                </a:solidFill>
+                <a:latin typeface="Consolas" panose="020B0609020204030204" pitchFamily="49" charset="0"/>
+                <a:cs typeface="Consolas" panose="020B0609020204030204" pitchFamily="49" charset="0"/>
+              </a:rPr>
+              <a:t>sum_of_array</a:t>
+            </a:r>
+            <a:r>
+              <a:rPr lang="en-US" sz="1200" b="1" dirty="0">
+                <a:solidFill>
+                  <a:schemeClr val="accent1"/>
+                </a:solidFill>
+                <a:latin typeface="Consolas" panose="020B0609020204030204" pitchFamily="49" charset="0"/>
+                <a:cs typeface="Consolas" panose="020B0609020204030204" pitchFamily="49" charset="0"/>
+              </a:rPr>
+              <a:t> </a:t>
+            </a:r>
+            <a:r>
+              <a:rPr lang="en-US" sz="1200" dirty="0">
+                <a:latin typeface="Consolas" panose="020B0609020204030204" pitchFamily="49" charset="0"/>
+                <a:cs typeface="Consolas" panose="020B0609020204030204" pitchFamily="49" charset="0"/>
+              </a:rPr>
+              <a:t>PROC</a:t>
+            </a:r>
+          </a:p>
+          <a:p>
+            <a:r>
+              <a:rPr lang="en-US" sz="1200" dirty="0">
+                <a:latin typeface="Consolas" panose="020B0609020204030204" pitchFamily="49" charset="0"/>
+                <a:cs typeface="Consolas" panose="020B0609020204030204" pitchFamily="49" charset="0"/>
+              </a:rPr>
+              <a:t>      MOV   r2, #0  </a:t>
+            </a:r>
+            <a:r>
+              <a:rPr lang="en-US" sz="1200" dirty="0">
+                <a:solidFill>
+                  <a:schemeClr val="bg1">
+                    <a:lumMod val="50000"/>
+                  </a:schemeClr>
+                </a:solidFill>
+                <a:latin typeface="Consolas" panose="020B0609020204030204" pitchFamily="49" charset="0"/>
+                <a:cs typeface="Consolas" panose="020B0609020204030204" pitchFamily="49" charset="0"/>
+              </a:rPr>
+              <a:t>; loop index</a:t>
+            </a:r>
+          </a:p>
+          <a:p>
+            <a:r>
+              <a:rPr lang="en-US" sz="1200" dirty="0">
+                <a:latin typeface="Consolas" panose="020B0609020204030204" pitchFamily="49" charset="0"/>
+                <a:cs typeface="Consolas" panose="020B0609020204030204" pitchFamily="49" charset="0"/>
+              </a:rPr>
+              <a:t>      MOV   r3, #0  </a:t>
+            </a:r>
+            <a:r>
+              <a:rPr lang="en-US" sz="1200" dirty="0">
+                <a:solidFill>
+                  <a:schemeClr val="bg1">
+                    <a:lumMod val="50000"/>
+                  </a:schemeClr>
+                </a:solidFill>
+                <a:latin typeface="Consolas" panose="020B0609020204030204" pitchFamily="49" charset="0"/>
+                <a:cs typeface="Consolas" panose="020B0609020204030204" pitchFamily="49" charset="0"/>
+              </a:rPr>
+              <a:t>; sum </a:t>
+            </a:r>
+          </a:p>
+          <a:p>
+            <a:r>
+              <a:rPr lang="en-US" sz="1200" dirty="0">
+                <a:latin typeface="Consolas" panose="020B0609020204030204" pitchFamily="49" charset="0"/>
+                <a:cs typeface="Consolas" panose="020B0609020204030204" pitchFamily="49" charset="0"/>
+              </a:rPr>
+              <a:t>      B     check</a:t>
+            </a:r>
+          </a:p>
+          <a:p>
+            <a:r>
+              <a:rPr lang="en-US" sz="1200" dirty="0">
+                <a:latin typeface="Consolas" panose="020B0609020204030204" pitchFamily="49" charset="0"/>
+                <a:cs typeface="Consolas" panose="020B0609020204030204" pitchFamily="49" charset="0"/>
+              </a:rPr>
+              <a:t>loop  LDRSH r1, [r0], #2 </a:t>
+            </a:r>
+          </a:p>
+          <a:p>
+            <a:r>
+              <a:rPr lang="en-US" sz="1200" dirty="0">
+                <a:latin typeface="Consolas" panose="020B0609020204030204" pitchFamily="49" charset="0"/>
+                <a:cs typeface="Consolas" panose="020B0609020204030204" pitchFamily="49" charset="0"/>
+              </a:rPr>
+              <a:t>      ADD   r3, r3, r1  </a:t>
+            </a:r>
+            <a:r>
+              <a:rPr lang="en-US" sz="1200" dirty="0">
+                <a:solidFill>
+                  <a:schemeClr val="bg1">
+                    <a:lumMod val="50000"/>
+                  </a:schemeClr>
+                </a:solidFill>
+                <a:latin typeface="Consolas" panose="020B0609020204030204" pitchFamily="49" charset="0"/>
+                <a:cs typeface="Consolas" panose="020B0609020204030204" pitchFamily="49" charset="0"/>
+              </a:rPr>
+              <a:t>; sum += </a:t>
+            </a:r>
+            <a:r>
+              <a:rPr lang="en-US" sz="1200" dirty="0" err="1">
+                <a:solidFill>
+                  <a:schemeClr val="bg1">
+                    <a:lumMod val="50000"/>
+                  </a:schemeClr>
+                </a:solidFill>
+                <a:latin typeface="Consolas" panose="020B0609020204030204" pitchFamily="49" charset="0"/>
+                <a:cs typeface="Consolas" panose="020B0609020204030204" pitchFamily="49" charset="0"/>
+              </a:rPr>
+              <a:t>pArray</a:t>
+            </a:r>
+            <a:r>
+              <a:rPr lang="en-US" sz="1200" dirty="0">
+                <a:solidFill>
+                  <a:schemeClr val="bg1">
+                    <a:lumMod val="50000"/>
+                  </a:schemeClr>
+                </a:solidFill>
+                <a:latin typeface="Consolas" panose="020B0609020204030204" pitchFamily="49" charset="0"/>
+                <a:cs typeface="Consolas" panose="020B0609020204030204" pitchFamily="49" charset="0"/>
+              </a:rPr>
+              <a:t>[</a:t>
+            </a:r>
+            <a:r>
+              <a:rPr lang="en-US" sz="1200" dirty="0" err="1">
+                <a:solidFill>
+                  <a:schemeClr val="bg1">
+                    <a:lumMod val="50000"/>
+                  </a:schemeClr>
+                </a:solidFill>
+                <a:latin typeface="Consolas" panose="020B0609020204030204" pitchFamily="49" charset="0"/>
+                <a:cs typeface="Consolas" panose="020B0609020204030204" pitchFamily="49" charset="0"/>
+              </a:rPr>
+              <a:t>i</a:t>
+            </a:r>
+            <a:r>
+              <a:rPr lang="en-US" sz="1200" dirty="0">
+                <a:solidFill>
+                  <a:schemeClr val="bg1">
+                    <a:lumMod val="50000"/>
+                  </a:schemeClr>
+                </a:solidFill>
+                <a:latin typeface="Consolas" panose="020B0609020204030204" pitchFamily="49" charset="0"/>
+                <a:cs typeface="Consolas" panose="020B0609020204030204" pitchFamily="49" charset="0"/>
+              </a:rPr>
+              <a:t>]</a:t>
+            </a:r>
+          </a:p>
+          <a:p>
+            <a:r>
+              <a:rPr lang="en-US" sz="1200" dirty="0">
+                <a:latin typeface="Consolas" panose="020B0609020204030204" pitchFamily="49" charset="0"/>
+                <a:cs typeface="Consolas" panose="020B0609020204030204" pitchFamily="49" charset="0"/>
+              </a:rPr>
+              <a:t>      ADD   r2, r2, #1  </a:t>
+            </a:r>
+            <a:r>
+              <a:rPr lang="en-US" sz="1200" dirty="0">
+                <a:solidFill>
+                  <a:schemeClr val="bg1">
+                    <a:lumMod val="50000"/>
+                  </a:schemeClr>
+                </a:solidFill>
+                <a:latin typeface="Consolas" panose="020B0609020204030204" pitchFamily="49" charset="0"/>
+                <a:cs typeface="Consolas" panose="020B0609020204030204" pitchFamily="49" charset="0"/>
+              </a:rPr>
+              <a:t>; </a:t>
+            </a:r>
+            <a:r>
+              <a:rPr lang="en-US" sz="1200" dirty="0" err="1">
+                <a:solidFill>
+                  <a:schemeClr val="bg1">
+                    <a:lumMod val="50000"/>
+                  </a:schemeClr>
+                </a:solidFill>
+                <a:latin typeface="Consolas" panose="020B0609020204030204" pitchFamily="49" charset="0"/>
+                <a:cs typeface="Consolas" panose="020B0609020204030204" pitchFamily="49" charset="0"/>
+              </a:rPr>
+              <a:t>i</a:t>
+            </a:r>
+            <a:r>
+              <a:rPr lang="en-US" sz="1200" dirty="0">
+                <a:solidFill>
+                  <a:schemeClr val="bg1">
+                    <a:lumMod val="50000"/>
+                  </a:schemeClr>
+                </a:solidFill>
+                <a:latin typeface="Consolas" panose="020B0609020204030204" pitchFamily="49" charset="0"/>
+                <a:cs typeface="Consolas" panose="020B0609020204030204" pitchFamily="49" charset="0"/>
+              </a:rPr>
+              <a:t>++</a:t>
+            </a:r>
+          </a:p>
+          <a:p>
+            <a:r>
+              <a:rPr lang="en-US" sz="1200" dirty="0">
+                <a:latin typeface="Consolas" panose="020B0609020204030204" pitchFamily="49" charset="0"/>
+                <a:cs typeface="Consolas" panose="020B0609020204030204" pitchFamily="49" charset="0"/>
+              </a:rPr>
+              <a:t>check CMP   r2, #64</a:t>
+            </a:r>
+          </a:p>
+          <a:p>
+            <a:r>
+              <a:rPr lang="en-US" sz="1200" dirty="0">
+                <a:latin typeface="Consolas" panose="020B0609020204030204" pitchFamily="49" charset="0"/>
+                <a:cs typeface="Consolas" panose="020B0609020204030204" pitchFamily="49" charset="0"/>
+              </a:rPr>
+              <a:t>      BLO   loop        </a:t>
+            </a:r>
+            <a:r>
+              <a:rPr lang="en-US" sz="1200" dirty="0">
+                <a:solidFill>
+                  <a:schemeClr val="bg1">
+                    <a:lumMod val="50000"/>
+                  </a:schemeClr>
+                </a:solidFill>
+                <a:latin typeface="Consolas" panose="020B0609020204030204" pitchFamily="49" charset="0"/>
+                <a:cs typeface="Consolas" panose="020B0609020204030204" pitchFamily="49" charset="0"/>
+              </a:rPr>
+              <a:t>; branch if unsigned </a:t>
+            </a:r>
+            <a:r>
+              <a:rPr lang="en-US" sz="1200" dirty="0" err="1">
+                <a:solidFill>
+                  <a:schemeClr val="bg1">
+                    <a:lumMod val="50000"/>
+                  </a:schemeClr>
+                </a:solidFill>
+                <a:latin typeface="Consolas" panose="020B0609020204030204" pitchFamily="49" charset="0"/>
+                <a:cs typeface="Consolas" panose="020B0609020204030204" pitchFamily="49" charset="0"/>
+              </a:rPr>
+              <a:t>LOwer</a:t>
+            </a:r>
+            <a:endParaRPr lang="en-US" sz="1200" dirty="0">
+              <a:solidFill>
+                <a:schemeClr val="bg1">
+                  <a:lumMod val="50000"/>
+                </a:schemeClr>
+              </a:solidFill>
+              <a:latin typeface="Consolas" panose="020B0609020204030204" pitchFamily="49" charset="0"/>
+              <a:cs typeface="Consolas" panose="020B0609020204030204" pitchFamily="49" charset="0"/>
+            </a:endParaRPr>
+          </a:p>
+          <a:p>
+            <a:r>
+              <a:rPr lang="en-US" sz="1200" dirty="0">
+                <a:solidFill>
+                  <a:srgbClr val="C00000"/>
+                </a:solidFill>
+                <a:latin typeface="Consolas" panose="020B0609020204030204" pitchFamily="49" charset="0"/>
+                <a:cs typeface="Consolas" panose="020B0609020204030204" pitchFamily="49" charset="0"/>
+              </a:rPr>
+              <a:t>      </a:t>
+            </a:r>
+            <a:r>
+              <a:rPr lang="en-US" sz="1200" b="1" dirty="0">
+                <a:solidFill>
+                  <a:srgbClr val="C00000"/>
+                </a:solidFill>
+                <a:latin typeface="Consolas" panose="020B0609020204030204" pitchFamily="49" charset="0"/>
+                <a:cs typeface="Consolas" panose="020B0609020204030204" pitchFamily="49" charset="0"/>
+              </a:rPr>
+              <a:t>MOV   r0, r3, LSL #16</a:t>
+            </a:r>
+          </a:p>
+          <a:p>
+            <a:r>
+              <a:rPr lang="en-US" sz="1200" dirty="0">
+                <a:solidFill>
+                  <a:srgbClr val="C00000"/>
+                </a:solidFill>
+                <a:latin typeface="Consolas" panose="020B0609020204030204" pitchFamily="49" charset="0"/>
+                <a:cs typeface="Consolas" panose="020B0609020204030204" pitchFamily="49" charset="0"/>
+              </a:rPr>
+              <a:t>      </a:t>
+            </a:r>
+            <a:r>
+              <a:rPr lang="en-US" sz="1200" b="1" dirty="0">
+                <a:solidFill>
+                  <a:srgbClr val="C00000"/>
+                </a:solidFill>
+                <a:latin typeface="Consolas" panose="020B0609020204030204" pitchFamily="49" charset="0"/>
+                <a:cs typeface="Consolas" panose="020B0609020204030204" pitchFamily="49" charset="0"/>
+              </a:rPr>
+              <a:t>MOV   r0, r0, ASR #16  </a:t>
+            </a:r>
+            <a:r>
+              <a:rPr lang="en-US" sz="1200" dirty="0">
+                <a:solidFill>
+                  <a:srgbClr val="C00000"/>
+                </a:solidFill>
+                <a:latin typeface="Consolas" panose="020B0609020204030204" pitchFamily="49" charset="0"/>
+                <a:cs typeface="Consolas" panose="020B0609020204030204" pitchFamily="49" charset="0"/>
+              </a:rPr>
+              <a:t>; r0 = (short) r3 </a:t>
+            </a:r>
+          </a:p>
+          <a:p>
+            <a:r>
+              <a:rPr lang="en-US" sz="1200" dirty="0">
+                <a:latin typeface="Consolas" panose="020B0609020204030204" pitchFamily="49" charset="0"/>
+                <a:cs typeface="Consolas" panose="020B0609020204030204" pitchFamily="49" charset="0"/>
+              </a:rPr>
+              <a:t>      BX    </a:t>
+            </a:r>
+            <a:r>
+              <a:rPr lang="en-US" sz="1200" dirty="0" err="1">
+                <a:latin typeface="Consolas" panose="020B0609020204030204" pitchFamily="49" charset="0"/>
+                <a:cs typeface="Consolas" panose="020B0609020204030204" pitchFamily="49" charset="0"/>
+              </a:rPr>
+              <a:t>lr</a:t>
+            </a:r>
+            <a:endParaRPr lang="en-US" sz="1200" dirty="0">
+              <a:latin typeface="Consolas" panose="020B0609020204030204" pitchFamily="49" charset="0"/>
+              <a:cs typeface="Consolas" panose="020B0609020204030204" pitchFamily="49" charset="0"/>
+            </a:endParaRPr>
+          </a:p>
+          <a:p>
+            <a:r>
+              <a:rPr lang="en-US" sz="1200" dirty="0">
+                <a:latin typeface="Consolas" panose="020B0609020204030204" pitchFamily="49" charset="0"/>
+                <a:cs typeface="Consolas" panose="020B0609020204030204" pitchFamily="49" charset="0"/>
+              </a:rPr>
+              <a:t>      ENDP</a:t>
+            </a:r>
+          </a:p>
+        </p:txBody>
+      </p:sp>
+      <p:sp>
+        <p:nvSpPr>
+          <p:cNvPr id="4" name="TextBox 3">
+            <a:extLst>
+              <a:ext uri="{FF2B5EF4-FFF2-40B4-BE49-F238E27FC236}">
+                <a16:creationId xmlns:a16="http://schemas.microsoft.com/office/drawing/2014/main" id="{97230E48-4625-B845-9B62-549F2F03DD9E}"/>
+              </a:ext>
+            </a:extLst>
+          </p:cNvPr>
+          <p:cNvSpPr txBox="1"/>
+          <p:nvPr/>
+        </p:nvSpPr>
+        <p:spPr>
+          <a:xfrm>
+            <a:off x="5543551" y="4851813"/>
+            <a:ext cx="2241319" cy="300082"/>
+          </a:xfrm>
+          <a:prstGeom prst="rect">
+            <a:avLst/>
+          </a:prstGeom>
+        </p:spPr>
+        <p:style>
+          <a:lnRef idx="2">
+            <a:schemeClr val="accent1">
+              <a:shade val="50000"/>
+            </a:schemeClr>
+          </a:lnRef>
+          <a:fillRef idx="1">
+            <a:schemeClr val="accent1"/>
+          </a:fillRef>
+          <a:effectRef idx="0">
+            <a:schemeClr val="accent1"/>
+          </a:effectRef>
+          <a:fontRef idx="minor">
+            <a:schemeClr val="lt1"/>
+          </a:fontRef>
+        </p:style>
+        <p:txBody>
+          <a:bodyPr wrap="none" rtlCol="0">
+            <a:spAutoFit/>
+          </a:bodyPr>
+          <a:lstStyle/>
+          <a:p>
+            <a:r>
+              <a:rPr lang="en-US" sz="1350" dirty="0"/>
+              <a:t>The sum is limited to 16 bits!</a:t>
+            </a:r>
+          </a:p>
+        </p:txBody>
+      </p:sp>
+      <p:sp>
+        <p:nvSpPr>
+          <p:cNvPr id="7" name="TextBox 6">
+            <a:extLst>
+              <a:ext uri="{FF2B5EF4-FFF2-40B4-BE49-F238E27FC236}">
+                <a16:creationId xmlns:a16="http://schemas.microsoft.com/office/drawing/2014/main" id="{FFE75029-A370-C947-92AB-86784A3F88C0}"/>
+              </a:ext>
+            </a:extLst>
+          </p:cNvPr>
+          <p:cNvSpPr txBox="1"/>
+          <p:nvPr/>
+        </p:nvSpPr>
+        <p:spPr>
+          <a:xfrm>
+            <a:off x="285750" y="4574814"/>
+            <a:ext cx="1130438" cy="300082"/>
+          </a:xfrm>
+          <a:prstGeom prst="rect">
+            <a:avLst/>
+          </a:prstGeom>
+          <a:noFill/>
+        </p:spPr>
+        <p:txBody>
+          <a:bodyPr wrap="none" rtlCol="0">
+            <a:spAutoFit/>
+          </a:bodyPr>
+          <a:lstStyle/>
+          <a:p>
+            <a:r>
+              <a:rPr lang="en-US" sz="1350" dirty="0">
+                <a:latin typeface="Consolas" panose="020B0609020204030204" pitchFamily="49" charset="0"/>
+                <a:cs typeface="Consolas" panose="020B0609020204030204" pitchFamily="49" charset="0"/>
+              </a:rPr>
+              <a:t>0x12345678</a:t>
+            </a:r>
+          </a:p>
+        </p:txBody>
+      </p:sp>
+      <p:cxnSp>
+        <p:nvCxnSpPr>
+          <p:cNvPr id="9" name="Straight Arrow Connector 8">
+            <a:extLst>
+              <a:ext uri="{FF2B5EF4-FFF2-40B4-BE49-F238E27FC236}">
+                <a16:creationId xmlns:a16="http://schemas.microsoft.com/office/drawing/2014/main" id="{38C06581-F221-454A-B957-F8258EBDE837}"/>
+              </a:ext>
+            </a:extLst>
+          </p:cNvPr>
+          <p:cNvCxnSpPr/>
+          <p:nvPr/>
+        </p:nvCxnSpPr>
+        <p:spPr>
+          <a:xfrm>
+            <a:off x="1485900" y="4713314"/>
+            <a:ext cx="285750" cy="0"/>
+          </a:xfrm>
+          <a:prstGeom prst="straightConnector1">
+            <a:avLst/>
+          </a:prstGeom>
+          <a:ln>
+            <a:tailEnd type="triangle"/>
+          </a:ln>
+        </p:spPr>
+        <p:style>
+          <a:lnRef idx="1">
+            <a:schemeClr val="accent1"/>
+          </a:lnRef>
+          <a:fillRef idx="0">
+            <a:schemeClr val="accent1"/>
+          </a:fillRef>
+          <a:effectRef idx="0">
+            <a:schemeClr val="accent1"/>
+          </a:effectRef>
+          <a:fontRef idx="minor">
+            <a:schemeClr val="tx1"/>
+          </a:fontRef>
+        </p:style>
+      </p:cxnSp>
+      <p:sp>
+        <p:nvSpPr>
+          <p:cNvPr id="10" name="TextBox 9">
+            <a:extLst>
+              <a:ext uri="{FF2B5EF4-FFF2-40B4-BE49-F238E27FC236}">
+                <a16:creationId xmlns:a16="http://schemas.microsoft.com/office/drawing/2014/main" id="{4580A862-E780-3041-A52F-CEC03FE2AA6F}"/>
+              </a:ext>
+            </a:extLst>
+          </p:cNvPr>
+          <p:cNvSpPr txBox="1"/>
+          <p:nvPr/>
+        </p:nvSpPr>
+        <p:spPr>
+          <a:xfrm>
+            <a:off x="1882879" y="4574814"/>
+            <a:ext cx="1130438" cy="300082"/>
+          </a:xfrm>
+          <a:prstGeom prst="rect">
+            <a:avLst/>
+          </a:prstGeom>
+          <a:noFill/>
+        </p:spPr>
+        <p:txBody>
+          <a:bodyPr wrap="none" rtlCol="0">
+            <a:spAutoFit/>
+          </a:bodyPr>
+          <a:lstStyle/>
+          <a:p>
+            <a:r>
+              <a:rPr lang="en-US" sz="1350" dirty="0">
+                <a:latin typeface="Consolas" panose="020B0609020204030204" pitchFamily="49" charset="0"/>
+                <a:cs typeface="Consolas" panose="020B0609020204030204" pitchFamily="49" charset="0"/>
+              </a:rPr>
+              <a:t>0x00005678</a:t>
+            </a:r>
+          </a:p>
+        </p:txBody>
+      </p:sp>
+      <p:sp>
+        <p:nvSpPr>
+          <p:cNvPr id="11" name="TextBox 10">
+            <a:extLst>
+              <a:ext uri="{FF2B5EF4-FFF2-40B4-BE49-F238E27FC236}">
+                <a16:creationId xmlns:a16="http://schemas.microsoft.com/office/drawing/2014/main" id="{F73CED4B-2CEE-5847-B651-71C8F701F73C}"/>
+              </a:ext>
+            </a:extLst>
+          </p:cNvPr>
+          <p:cNvSpPr txBox="1"/>
+          <p:nvPr/>
+        </p:nvSpPr>
+        <p:spPr>
+          <a:xfrm>
+            <a:off x="290245" y="4961164"/>
+            <a:ext cx="1130438" cy="300082"/>
+          </a:xfrm>
+          <a:prstGeom prst="rect">
+            <a:avLst/>
+          </a:prstGeom>
+          <a:noFill/>
+        </p:spPr>
+        <p:txBody>
+          <a:bodyPr wrap="none" rtlCol="0">
+            <a:spAutoFit/>
+          </a:bodyPr>
+          <a:lstStyle/>
+          <a:p>
+            <a:r>
+              <a:rPr lang="en-US" sz="1350" dirty="0">
+                <a:latin typeface="Consolas" panose="020B0609020204030204" pitchFamily="49" charset="0"/>
+                <a:cs typeface="Consolas" panose="020B0609020204030204" pitchFamily="49" charset="0"/>
+              </a:rPr>
+              <a:t>0x1234ABCD</a:t>
+            </a:r>
+          </a:p>
+        </p:txBody>
+      </p:sp>
+      <p:cxnSp>
+        <p:nvCxnSpPr>
+          <p:cNvPr id="12" name="Straight Arrow Connector 11">
+            <a:extLst>
+              <a:ext uri="{FF2B5EF4-FFF2-40B4-BE49-F238E27FC236}">
+                <a16:creationId xmlns:a16="http://schemas.microsoft.com/office/drawing/2014/main" id="{FD215319-D751-D24D-83E5-80D4E6FB9D69}"/>
+              </a:ext>
+            </a:extLst>
+          </p:cNvPr>
+          <p:cNvCxnSpPr/>
+          <p:nvPr/>
+        </p:nvCxnSpPr>
+        <p:spPr>
+          <a:xfrm>
+            <a:off x="1490395" y="5099663"/>
+            <a:ext cx="285750" cy="0"/>
+          </a:xfrm>
+          <a:prstGeom prst="straightConnector1">
+            <a:avLst/>
+          </a:prstGeom>
+          <a:ln>
+            <a:tailEnd type="triangle"/>
+          </a:ln>
+        </p:spPr>
+        <p:style>
+          <a:lnRef idx="1">
+            <a:schemeClr val="accent1"/>
+          </a:lnRef>
+          <a:fillRef idx="0">
+            <a:schemeClr val="accent1"/>
+          </a:fillRef>
+          <a:effectRef idx="0">
+            <a:schemeClr val="accent1"/>
+          </a:effectRef>
+          <a:fontRef idx="minor">
+            <a:schemeClr val="tx1"/>
+          </a:fontRef>
+        </p:style>
+      </p:cxnSp>
+      <p:sp>
+        <p:nvSpPr>
+          <p:cNvPr id="13" name="TextBox 12">
+            <a:extLst>
+              <a:ext uri="{FF2B5EF4-FFF2-40B4-BE49-F238E27FC236}">
+                <a16:creationId xmlns:a16="http://schemas.microsoft.com/office/drawing/2014/main" id="{61396BB7-6492-2C46-A6BE-EF731ECF740B}"/>
+              </a:ext>
+            </a:extLst>
+          </p:cNvPr>
+          <p:cNvSpPr txBox="1"/>
+          <p:nvPr/>
+        </p:nvSpPr>
+        <p:spPr>
+          <a:xfrm>
+            <a:off x="1887374" y="4961164"/>
+            <a:ext cx="1130438" cy="300082"/>
+          </a:xfrm>
+          <a:prstGeom prst="rect">
+            <a:avLst/>
+          </a:prstGeom>
+          <a:noFill/>
+        </p:spPr>
+        <p:txBody>
+          <a:bodyPr wrap="none" rtlCol="0">
+            <a:spAutoFit/>
+          </a:bodyPr>
+          <a:lstStyle/>
+          <a:p>
+            <a:r>
+              <a:rPr lang="en-US" sz="1350" dirty="0">
+                <a:latin typeface="Consolas" panose="020B0609020204030204" pitchFamily="49" charset="0"/>
+                <a:cs typeface="Consolas" panose="020B0609020204030204" pitchFamily="49" charset="0"/>
+              </a:rPr>
+              <a:t>0xFFFFABCD</a:t>
+            </a:r>
+          </a:p>
+        </p:txBody>
+      </p:sp>
+      <p:sp>
+        <p:nvSpPr>
+          <p:cNvPr id="14" name="TextBox 13">
+            <a:extLst>
+              <a:ext uri="{FF2B5EF4-FFF2-40B4-BE49-F238E27FC236}">
+                <a16:creationId xmlns:a16="http://schemas.microsoft.com/office/drawing/2014/main" id="{37AC389A-52DF-BA4B-B78C-31E43AB8F715}"/>
+              </a:ext>
+            </a:extLst>
+          </p:cNvPr>
+          <p:cNvSpPr txBox="1"/>
+          <p:nvPr/>
+        </p:nvSpPr>
+        <p:spPr>
+          <a:xfrm>
+            <a:off x="285750" y="3986192"/>
+            <a:ext cx="2454518" cy="507831"/>
+          </a:xfrm>
+          <a:prstGeom prst="rect">
+            <a:avLst/>
+          </a:prstGeom>
+          <a:noFill/>
+        </p:spPr>
+        <p:txBody>
+          <a:bodyPr wrap="none" rtlCol="0">
+            <a:spAutoFit/>
+          </a:bodyPr>
+          <a:lstStyle/>
+          <a:p>
+            <a:r>
+              <a:rPr lang="en-US" sz="1350" dirty="0">
+                <a:solidFill>
+                  <a:srgbClr val="C00000"/>
+                </a:solidFill>
+                <a:latin typeface="Consolas" panose="020B0609020204030204" pitchFamily="49" charset="0"/>
+                <a:cs typeface="Consolas" panose="020B0609020204030204" pitchFamily="49" charset="0"/>
+              </a:rPr>
+              <a:t>int32_t x = 0x12345678;</a:t>
+            </a:r>
+          </a:p>
+          <a:p>
+            <a:r>
+              <a:rPr lang="en-US" sz="1350" dirty="0">
+                <a:solidFill>
+                  <a:srgbClr val="C00000"/>
+                </a:solidFill>
+                <a:latin typeface="Consolas" panose="020B0609020204030204" pitchFamily="49" charset="0"/>
+                <a:cs typeface="Consolas" panose="020B0609020204030204" pitchFamily="49" charset="0"/>
+              </a:rPr>
+              <a:t>int16_t y = (int16_t) x;</a:t>
+            </a:r>
+          </a:p>
+        </p:txBody>
+      </p:sp>
+    </p:spTree>
+    <p:extLst>
+      <p:ext uri="{BB962C8B-B14F-4D97-AF65-F5344CB8AC3E}">
+        <p14:creationId xmlns:p14="http://schemas.microsoft.com/office/powerpoint/2010/main" val="658532706"/>
       </p:ext>
     </p:extLst>
   </p:cSld>
@@ -25428,7 +26731,7 @@
           <p:cNvPr id="2" name="Title 1">
             <a:extLst>
               <a:ext uri="{FF2B5EF4-FFF2-40B4-BE49-F238E27FC236}">
-                <a16:creationId xmlns:a16="http://schemas.microsoft.com/office/drawing/2014/main" id="{27B41483-7081-C44C-81EF-D92F00104765}"/>
+                <a16:creationId xmlns:a16="http://schemas.microsoft.com/office/drawing/2014/main" id="{0B680E2F-C62E-EF54-5DBD-340196E1CA5F}"/>
               </a:ext>
             </a:extLst>
           </p:cNvPr>
@@ -25441,14 +26744,12 @@
         </p:nvSpPr>
         <p:spPr/>
         <p:txBody>
-          <a:bodyPr>
-            <a:normAutofit/>
-          </a:bodyPr>
+          <a:bodyPr/>
           <a:lstStyle/>
           <a:p>
             <a:r>
               <a:rPr lang="en-US" dirty="0"/>
-              <a:t>What is wrong? ANS</a:t>
+              <a:t>Explanations</a:t>
             </a:r>
           </a:p>
         </p:txBody>
@@ -25458,7 +26759,7 @@
           <p:cNvPr id="3" name="Slide Number Placeholder 2">
             <a:extLst>
               <a:ext uri="{FF2B5EF4-FFF2-40B4-BE49-F238E27FC236}">
-                <a16:creationId xmlns:a16="http://schemas.microsoft.com/office/drawing/2014/main" id="{3D15817A-DD66-D447-B2D9-5646440481EB}"/>
+                <a16:creationId xmlns:a16="http://schemas.microsoft.com/office/drawing/2014/main" id="{9ECF1D85-43EB-71B3-363D-9FF339EE4AA2}"/>
               </a:ext>
             </a:extLst>
           </p:cNvPr>
@@ -25485,952 +26786,152 @@
       </p:sp>
       <p:sp>
         <p:nvSpPr>
-          <p:cNvPr id="5" name="TextBox 4">
+          <p:cNvPr id="4" name="Content Placeholder 3">
             <a:extLst>
               <a:ext uri="{FF2B5EF4-FFF2-40B4-BE49-F238E27FC236}">
-                <a16:creationId xmlns:a16="http://schemas.microsoft.com/office/drawing/2014/main" id="{67609315-49B9-8548-BA54-379B42B31ADB}"/>
+                <a16:creationId xmlns:a16="http://schemas.microsoft.com/office/drawing/2014/main" id="{E4F57FE1-A328-6D2A-AFB7-A6C1600FE210}"/>
               </a:ext>
             </a:extLst>
           </p:cNvPr>
-          <p:cNvSpPr txBox="1"/>
-          <p:nvPr/>
-        </p:nvSpPr>
-        <p:spPr>
-          <a:xfrm>
-            <a:off x="457200" y="2006188"/>
-            <a:ext cx="3752950" cy="1384995"/>
-          </a:xfrm>
-          <a:prstGeom prst="rect">
-            <a:avLst/>
-          </a:prstGeom>
-        </p:spPr>
-        <p:style>
-          <a:lnRef idx="2">
-            <a:schemeClr val="accent1"/>
-          </a:lnRef>
-          <a:fillRef idx="1">
-            <a:schemeClr val="lt1"/>
-          </a:fillRef>
-          <a:effectRef idx="0">
-            <a:schemeClr val="accent1"/>
-          </a:effectRef>
-          <a:fontRef idx="minor">
-            <a:schemeClr val="dk1"/>
-          </a:fontRef>
-        </p:style>
-        <p:txBody>
-          <a:bodyPr wrap="none" rtlCol="0">
-            <a:spAutoFit/>
+          <p:cNvSpPr>
+            <a:spLocks noGrp="1"/>
+          </p:cNvSpPr>
+          <p:nvPr>
+            <p:ph sz="quarter" idx="1"/>
+          </p:nvPr>
+        </p:nvSpPr>
+        <p:spPr/>
+        <p:txBody>
+          <a:bodyPr>
+            <a:normAutofit fontScale="70000" lnSpcReduction="20000"/>
           </a:bodyPr>
           <a:lstStyle/>
           <a:p>
             <a:r>
-              <a:rPr lang="en-US" sz="1200" dirty="0">
-                <a:latin typeface="Consolas" panose="020B0609020204030204" pitchFamily="49" charset="0"/>
-                <a:cs typeface="Consolas" panose="020B0609020204030204" pitchFamily="49" charset="0"/>
-              </a:rPr>
-              <a:t>int16_t </a:t>
-            </a:r>
-            <a:r>
-              <a:rPr lang="en-US" sz="1200" b="1" dirty="0" err="1">
-                <a:solidFill>
-                  <a:schemeClr val="accent1"/>
-                </a:solidFill>
-                <a:latin typeface="Consolas" panose="020B0609020204030204" pitchFamily="49" charset="0"/>
-                <a:cs typeface="Consolas" panose="020B0609020204030204" pitchFamily="49" charset="0"/>
-              </a:rPr>
-              <a:t>sum_of_array</a:t>
-            </a:r>
-            <a:r>
-              <a:rPr lang="en-US" sz="1200" dirty="0">
-                <a:latin typeface="Consolas" panose="020B0609020204030204" pitchFamily="49" charset="0"/>
-                <a:cs typeface="Consolas" panose="020B0609020204030204" pitchFamily="49" charset="0"/>
-              </a:rPr>
-              <a:t>(int16_t *</a:t>
-            </a:r>
-            <a:r>
-              <a:rPr lang="en-US" sz="1200" dirty="0" err="1">
-                <a:latin typeface="Consolas" panose="020B0609020204030204" pitchFamily="49" charset="0"/>
-                <a:cs typeface="Consolas" panose="020B0609020204030204" pitchFamily="49" charset="0"/>
-              </a:rPr>
-              <a:t>pArray</a:t>
-            </a:r>
-            <a:r>
-              <a:rPr lang="en-US" sz="1200" dirty="0">
-                <a:latin typeface="Consolas" panose="020B0609020204030204" pitchFamily="49" charset="0"/>
-                <a:cs typeface="Consolas" panose="020B0609020204030204" pitchFamily="49" charset="0"/>
-              </a:rPr>
-              <a:t>){</a:t>
-            </a:r>
-          </a:p>
-          <a:p>
-            <a:r>
-              <a:rPr lang="en-US" sz="1200" dirty="0">
-                <a:latin typeface="Consolas" panose="020B0609020204030204" pitchFamily="49" charset="0"/>
-                <a:cs typeface="Consolas" panose="020B0609020204030204" pitchFamily="49" charset="0"/>
-              </a:rPr>
-              <a:t>    uint32_t </a:t>
-            </a:r>
-            <a:r>
-              <a:rPr lang="en-US" sz="1200" dirty="0" err="1">
-                <a:latin typeface="Consolas" panose="020B0609020204030204" pitchFamily="49" charset="0"/>
-                <a:cs typeface="Consolas" panose="020B0609020204030204" pitchFamily="49" charset="0"/>
-              </a:rPr>
-              <a:t>i</a:t>
-            </a:r>
-            <a:r>
-              <a:rPr lang="en-US" sz="1200" dirty="0">
-                <a:latin typeface="Consolas" panose="020B0609020204030204" pitchFamily="49" charset="0"/>
-                <a:cs typeface="Consolas" panose="020B0609020204030204" pitchFamily="49" charset="0"/>
-              </a:rPr>
-              <a:t>;</a:t>
-            </a:r>
-          </a:p>
-          <a:p>
-            <a:r>
-              <a:rPr lang="en-US" sz="1200" dirty="0">
-                <a:latin typeface="Consolas" panose="020B0609020204030204" pitchFamily="49" charset="0"/>
-                <a:cs typeface="Consolas" panose="020B0609020204030204" pitchFamily="49" charset="0"/>
-              </a:rPr>
-              <a:t>    int32_t sum = 0;</a:t>
-            </a:r>
-          </a:p>
-          <a:p>
-            <a:r>
-              <a:rPr lang="en-US" sz="1200" dirty="0">
-                <a:latin typeface="Consolas" panose="020B0609020204030204" pitchFamily="49" charset="0"/>
-                <a:cs typeface="Consolas" panose="020B0609020204030204" pitchFamily="49" charset="0"/>
-              </a:rPr>
-              <a:t>    for(</a:t>
-            </a:r>
-            <a:r>
-              <a:rPr lang="en-US" sz="1200" dirty="0" err="1">
-                <a:latin typeface="Consolas" panose="020B0609020204030204" pitchFamily="49" charset="0"/>
-                <a:cs typeface="Consolas" panose="020B0609020204030204" pitchFamily="49" charset="0"/>
-              </a:rPr>
-              <a:t>i</a:t>
-            </a:r>
-            <a:r>
-              <a:rPr lang="en-US" sz="1200" dirty="0">
-                <a:latin typeface="Consolas" panose="020B0609020204030204" pitchFamily="49" charset="0"/>
-                <a:cs typeface="Consolas" panose="020B0609020204030204" pitchFamily="49" charset="0"/>
-              </a:rPr>
-              <a:t>=0; </a:t>
-            </a:r>
-            <a:r>
-              <a:rPr lang="en-US" sz="1200" dirty="0" err="1">
-                <a:latin typeface="Consolas" panose="020B0609020204030204" pitchFamily="49" charset="0"/>
-                <a:cs typeface="Consolas" panose="020B0609020204030204" pitchFamily="49" charset="0"/>
-              </a:rPr>
-              <a:t>i</a:t>
-            </a:r>
-            <a:r>
-              <a:rPr lang="en-US" sz="1200" dirty="0">
-                <a:latin typeface="Consolas" panose="020B0609020204030204" pitchFamily="49" charset="0"/>
-                <a:cs typeface="Consolas" panose="020B0609020204030204" pitchFamily="49" charset="0"/>
-              </a:rPr>
-              <a:t>&lt;64; </a:t>
-            </a:r>
-            <a:r>
-              <a:rPr lang="en-US" sz="1200" dirty="0" err="1">
-                <a:latin typeface="Consolas" panose="020B0609020204030204" pitchFamily="49" charset="0"/>
-                <a:cs typeface="Consolas" panose="020B0609020204030204" pitchFamily="49" charset="0"/>
-              </a:rPr>
-              <a:t>i</a:t>
-            </a:r>
-            <a:r>
-              <a:rPr lang="en-US" sz="1200" dirty="0">
-                <a:latin typeface="Consolas" panose="020B0609020204030204" pitchFamily="49" charset="0"/>
-                <a:cs typeface="Consolas" panose="020B0609020204030204" pitchFamily="49" charset="0"/>
-              </a:rPr>
-              <a:t>++) </a:t>
-            </a:r>
-            <a:r>
-              <a:rPr lang="en-US" sz="1200" dirty="0">
-                <a:solidFill>
-                  <a:schemeClr val="bg1">
-                    <a:lumMod val="50000"/>
-                  </a:schemeClr>
-                </a:solidFill>
-                <a:latin typeface="Consolas" panose="020B0609020204030204" pitchFamily="49" charset="0"/>
-                <a:cs typeface="Consolas" panose="020B0609020204030204" pitchFamily="49" charset="0"/>
-              </a:rPr>
-              <a:t>// array size = 64</a:t>
-            </a:r>
-          </a:p>
-          <a:p>
-            <a:r>
-              <a:rPr lang="en-US" sz="1200" dirty="0">
-                <a:latin typeface="Consolas" panose="020B0609020204030204" pitchFamily="49" charset="0"/>
-                <a:cs typeface="Consolas" panose="020B0609020204030204" pitchFamily="49" charset="0"/>
-              </a:rPr>
-              <a:t>        sum += </a:t>
-            </a:r>
-            <a:r>
-              <a:rPr lang="en-US" sz="1200" dirty="0" err="1">
-                <a:latin typeface="Consolas" panose="020B0609020204030204" pitchFamily="49" charset="0"/>
-                <a:cs typeface="Consolas" panose="020B0609020204030204" pitchFamily="49" charset="0"/>
-              </a:rPr>
-              <a:t>pArray</a:t>
-            </a:r>
-            <a:r>
-              <a:rPr lang="en-US" sz="1200" dirty="0">
-                <a:latin typeface="Consolas" panose="020B0609020204030204" pitchFamily="49" charset="0"/>
-                <a:cs typeface="Consolas" panose="020B0609020204030204" pitchFamily="49" charset="0"/>
-              </a:rPr>
-              <a:t>[</a:t>
-            </a:r>
-            <a:r>
-              <a:rPr lang="en-US" sz="1200" dirty="0" err="1">
-                <a:latin typeface="Consolas" panose="020B0609020204030204" pitchFamily="49" charset="0"/>
-                <a:cs typeface="Consolas" panose="020B0609020204030204" pitchFamily="49" charset="0"/>
-              </a:rPr>
-              <a:t>i</a:t>
-            </a:r>
-            <a:r>
-              <a:rPr lang="en-US" sz="1200" dirty="0">
-                <a:latin typeface="Consolas" panose="020B0609020204030204" pitchFamily="49" charset="0"/>
-                <a:cs typeface="Consolas" panose="020B0609020204030204" pitchFamily="49" charset="0"/>
-              </a:rPr>
-              <a:t>];</a:t>
-            </a:r>
-          </a:p>
-          <a:p>
-            <a:r>
-              <a:rPr lang="en-US" sz="1200" dirty="0">
-                <a:latin typeface="Consolas" panose="020B0609020204030204" pitchFamily="49" charset="0"/>
-                <a:cs typeface="Consolas" panose="020B0609020204030204" pitchFamily="49" charset="0"/>
-              </a:rPr>
-              <a:t>    return (int16_t) sum;</a:t>
-            </a:r>
-          </a:p>
-          <a:p>
-            <a:r>
-              <a:rPr lang="en-US" sz="1200" dirty="0">
-                <a:latin typeface="Consolas" panose="020B0609020204030204" pitchFamily="49" charset="0"/>
-                <a:cs typeface="Consolas" panose="020B0609020204030204" pitchFamily="49" charset="0"/>
-              </a:rPr>
-              <a:t>}</a:t>
-            </a:r>
-          </a:p>
-        </p:txBody>
-      </p:sp>
-      <p:sp>
-        <p:nvSpPr>
-          <p:cNvPr id="6" name="TextBox 5">
-            <a:extLst>
-              <a:ext uri="{FF2B5EF4-FFF2-40B4-BE49-F238E27FC236}">
-                <a16:creationId xmlns:a16="http://schemas.microsoft.com/office/drawing/2014/main" id="{4F4F6D7F-4E8E-4748-B8BF-4AEBF2493640}"/>
-              </a:ext>
-            </a:extLst>
-          </p:cNvPr>
-          <p:cNvSpPr txBox="1"/>
-          <p:nvPr/>
-        </p:nvSpPr>
-        <p:spPr>
-          <a:xfrm>
-            <a:off x="4340418" y="2006187"/>
-            <a:ext cx="4432624" cy="2492990"/>
-          </a:xfrm>
-          <a:prstGeom prst="rect">
-            <a:avLst/>
-          </a:prstGeom>
-        </p:spPr>
-        <p:style>
-          <a:lnRef idx="2">
-            <a:schemeClr val="accent1"/>
-          </a:lnRef>
-          <a:fillRef idx="1">
-            <a:schemeClr val="lt1"/>
-          </a:fillRef>
-          <a:effectRef idx="0">
-            <a:schemeClr val="accent1"/>
-          </a:effectRef>
-          <a:fontRef idx="minor">
-            <a:schemeClr val="dk1"/>
-          </a:fontRef>
-        </p:style>
-        <p:txBody>
-          <a:bodyPr wrap="none" rtlCol="0">
-            <a:spAutoFit/>
-          </a:bodyPr>
-          <a:lstStyle/>
-          <a:p>
-            <a:r>
-              <a:rPr lang="en-US" sz="1200" b="1" dirty="0" err="1">
-                <a:solidFill>
-                  <a:schemeClr val="accent1"/>
-                </a:solidFill>
-                <a:latin typeface="Consolas" panose="020B0609020204030204" pitchFamily="49" charset="0"/>
-                <a:cs typeface="Consolas" panose="020B0609020204030204" pitchFamily="49" charset="0"/>
-              </a:rPr>
-              <a:t>sum_of_array</a:t>
-            </a:r>
-            <a:r>
-              <a:rPr lang="en-US" sz="1200" b="1" dirty="0">
-                <a:solidFill>
-                  <a:schemeClr val="accent1"/>
-                </a:solidFill>
-                <a:latin typeface="Consolas" panose="020B0609020204030204" pitchFamily="49" charset="0"/>
-                <a:cs typeface="Consolas" panose="020B0609020204030204" pitchFamily="49" charset="0"/>
-              </a:rPr>
-              <a:t> </a:t>
-            </a:r>
-            <a:r>
-              <a:rPr lang="en-US" sz="1200" dirty="0">
-                <a:latin typeface="Consolas" panose="020B0609020204030204" pitchFamily="49" charset="0"/>
-                <a:cs typeface="Consolas" panose="020B0609020204030204" pitchFamily="49" charset="0"/>
-              </a:rPr>
-              <a:t>PROC</a:t>
-            </a:r>
-          </a:p>
-          <a:p>
-            <a:r>
-              <a:rPr lang="en-US" sz="1200" dirty="0">
-                <a:latin typeface="Consolas" panose="020B0609020204030204" pitchFamily="49" charset="0"/>
-                <a:cs typeface="Consolas" panose="020B0609020204030204" pitchFamily="49" charset="0"/>
-              </a:rPr>
-              <a:t>      MOV   r2, #0  </a:t>
-            </a:r>
-            <a:r>
-              <a:rPr lang="en-US" sz="1200" dirty="0">
-                <a:solidFill>
-                  <a:schemeClr val="bg1">
-                    <a:lumMod val="50000"/>
-                  </a:schemeClr>
-                </a:solidFill>
-                <a:latin typeface="Consolas" panose="020B0609020204030204" pitchFamily="49" charset="0"/>
-                <a:cs typeface="Consolas" panose="020B0609020204030204" pitchFamily="49" charset="0"/>
-              </a:rPr>
-              <a:t>; loop index</a:t>
-            </a:r>
-          </a:p>
-          <a:p>
-            <a:r>
-              <a:rPr lang="en-US" sz="1200" dirty="0">
-                <a:latin typeface="Consolas" panose="020B0609020204030204" pitchFamily="49" charset="0"/>
-                <a:cs typeface="Consolas" panose="020B0609020204030204" pitchFamily="49" charset="0"/>
-              </a:rPr>
-              <a:t>      MOV   r3, #0  </a:t>
-            </a:r>
-            <a:r>
-              <a:rPr lang="en-US" sz="1200" dirty="0">
-                <a:solidFill>
-                  <a:schemeClr val="bg1">
-                    <a:lumMod val="50000"/>
-                  </a:schemeClr>
-                </a:solidFill>
-                <a:latin typeface="Consolas" panose="020B0609020204030204" pitchFamily="49" charset="0"/>
-                <a:cs typeface="Consolas" panose="020B0609020204030204" pitchFamily="49" charset="0"/>
-              </a:rPr>
-              <a:t>; sum </a:t>
-            </a:r>
-          </a:p>
-          <a:p>
-            <a:r>
-              <a:rPr lang="en-US" sz="1200" dirty="0">
-                <a:latin typeface="Consolas" panose="020B0609020204030204" pitchFamily="49" charset="0"/>
-                <a:cs typeface="Consolas" panose="020B0609020204030204" pitchFamily="49" charset="0"/>
-              </a:rPr>
-              <a:t>      B     check</a:t>
-            </a:r>
-          </a:p>
-          <a:p>
-            <a:r>
-              <a:rPr lang="en-US" sz="1200" dirty="0">
-                <a:latin typeface="Consolas" panose="020B0609020204030204" pitchFamily="49" charset="0"/>
-                <a:cs typeface="Consolas" panose="020B0609020204030204" pitchFamily="49" charset="0"/>
-              </a:rPr>
-              <a:t>loop  LDRSH r1, [r0], #2 </a:t>
-            </a:r>
-          </a:p>
-          <a:p>
-            <a:r>
-              <a:rPr lang="en-US" sz="1200" dirty="0">
-                <a:latin typeface="Consolas" panose="020B0609020204030204" pitchFamily="49" charset="0"/>
-                <a:cs typeface="Consolas" panose="020B0609020204030204" pitchFamily="49" charset="0"/>
-              </a:rPr>
-              <a:t>      ADD   r3, r3, r1  </a:t>
-            </a:r>
-            <a:r>
-              <a:rPr lang="en-US" sz="1200" dirty="0">
-                <a:solidFill>
-                  <a:schemeClr val="bg1">
-                    <a:lumMod val="50000"/>
-                  </a:schemeClr>
-                </a:solidFill>
-                <a:latin typeface="Consolas" panose="020B0609020204030204" pitchFamily="49" charset="0"/>
-                <a:cs typeface="Consolas" panose="020B0609020204030204" pitchFamily="49" charset="0"/>
-              </a:rPr>
-              <a:t>; sum += </a:t>
-            </a:r>
-            <a:r>
-              <a:rPr lang="en-US" sz="1200" dirty="0" err="1">
-                <a:solidFill>
-                  <a:schemeClr val="bg1">
-                    <a:lumMod val="50000"/>
-                  </a:schemeClr>
-                </a:solidFill>
-                <a:latin typeface="Consolas" panose="020B0609020204030204" pitchFamily="49" charset="0"/>
-                <a:cs typeface="Consolas" panose="020B0609020204030204" pitchFamily="49" charset="0"/>
-              </a:rPr>
-              <a:t>pArray</a:t>
-            </a:r>
-            <a:r>
-              <a:rPr lang="en-US" sz="1200" dirty="0">
-                <a:solidFill>
-                  <a:schemeClr val="bg1">
-                    <a:lumMod val="50000"/>
-                  </a:schemeClr>
-                </a:solidFill>
-                <a:latin typeface="Consolas" panose="020B0609020204030204" pitchFamily="49" charset="0"/>
-                <a:cs typeface="Consolas" panose="020B0609020204030204" pitchFamily="49" charset="0"/>
-              </a:rPr>
-              <a:t>[</a:t>
-            </a:r>
-            <a:r>
-              <a:rPr lang="en-US" sz="1200" dirty="0" err="1">
-                <a:solidFill>
-                  <a:schemeClr val="bg1">
-                    <a:lumMod val="50000"/>
-                  </a:schemeClr>
-                </a:solidFill>
-                <a:latin typeface="Consolas" panose="020B0609020204030204" pitchFamily="49" charset="0"/>
-                <a:cs typeface="Consolas" panose="020B0609020204030204" pitchFamily="49" charset="0"/>
-              </a:rPr>
-              <a:t>i</a:t>
-            </a:r>
-            <a:r>
-              <a:rPr lang="en-US" sz="1200" dirty="0">
-                <a:solidFill>
-                  <a:schemeClr val="bg1">
-                    <a:lumMod val="50000"/>
-                  </a:schemeClr>
-                </a:solidFill>
-                <a:latin typeface="Consolas" panose="020B0609020204030204" pitchFamily="49" charset="0"/>
-                <a:cs typeface="Consolas" panose="020B0609020204030204" pitchFamily="49" charset="0"/>
-              </a:rPr>
-              <a:t>]</a:t>
-            </a:r>
-          </a:p>
-          <a:p>
-            <a:r>
-              <a:rPr lang="en-US" sz="1200" dirty="0">
-                <a:latin typeface="Consolas" panose="020B0609020204030204" pitchFamily="49" charset="0"/>
-                <a:cs typeface="Consolas" panose="020B0609020204030204" pitchFamily="49" charset="0"/>
-              </a:rPr>
-              <a:t>      ADD   r2, r2, #1  </a:t>
-            </a:r>
-            <a:r>
-              <a:rPr lang="en-US" sz="1200" dirty="0">
-                <a:solidFill>
-                  <a:schemeClr val="bg1">
-                    <a:lumMod val="50000"/>
-                  </a:schemeClr>
-                </a:solidFill>
-                <a:latin typeface="Consolas" panose="020B0609020204030204" pitchFamily="49" charset="0"/>
-                <a:cs typeface="Consolas" panose="020B0609020204030204" pitchFamily="49" charset="0"/>
-              </a:rPr>
-              <a:t>; </a:t>
-            </a:r>
-            <a:r>
-              <a:rPr lang="en-US" sz="1200" dirty="0" err="1">
-                <a:solidFill>
-                  <a:schemeClr val="bg1">
-                    <a:lumMod val="50000"/>
-                  </a:schemeClr>
-                </a:solidFill>
-                <a:latin typeface="Consolas" panose="020B0609020204030204" pitchFamily="49" charset="0"/>
-                <a:cs typeface="Consolas" panose="020B0609020204030204" pitchFamily="49" charset="0"/>
-              </a:rPr>
-              <a:t>i</a:t>
-            </a:r>
-            <a:r>
-              <a:rPr lang="en-US" sz="1200" dirty="0">
-                <a:solidFill>
-                  <a:schemeClr val="bg1">
-                    <a:lumMod val="50000"/>
-                  </a:schemeClr>
-                </a:solidFill>
-                <a:latin typeface="Consolas" panose="020B0609020204030204" pitchFamily="49" charset="0"/>
-                <a:cs typeface="Consolas" panose="020B0609020204030204" pitchFamily="49" charset="0"/>
-              </a:rPr>
-              <a:t>++</a:t>
-            </a:r>
-          </a:p>
-          <a:p>
-            <a:r>
-              <a:rPr lang="en-US" sz="1200" dirty="0">
-                <a:latin typeface="Consolas" panose="020B0609020204030204" pitchFamily="49" charset="0"/>
-                <a:cs typeface="Consolas" panose="020B0609020204030204" pitchFamily="49" charset="0"/>
-              </a:rPr>
-              <a:t>check CMP   r2, #64</a:t>
-            </a:r>
-          </a:p>
-          <a:p>
-            <a:r>
-              <a:rPr lang="en-US" sz="1200" dirty="0">
-                <a:latin typeface="Consolas" panose="020B0609020204030204" pitchFamily="49" charset="0"/>
-                <a:cs typeface="Consolas" panose="020B0609020204030204" pitchFamily="49" charset="0"/>
-              </a:rPr>
-              <a:t>      BLO   loop        </a:t>
-            </a:r>
-            <a:r>
-              <a:rPr lang="en-US" sz="1200" dirty="0">
-                <a:solidFill>
-                  <a:schemeClr val="bg1">
-                    <a:lumMod val="50000"/>
-                  </a:schemeClr>
-                </a:solidFill>
-                <a:latin typeface="Consolas" panose="020B0609020204030204" pitchFamily="49" charset="0"/>
-                <a:cs typeface="Consolas" panose="020B0609020204030204" pitchFamily="49" charset="0"/>
-              </a:rPr>
-              <a:t>; branch if unsigned </a:t>
-            </a:r>
-            <a:r>
-              <a:rPr lang="en-US" sz="1200" dirty="0" err="1">
-                <a:solidFill>
-                  <a:schemeClr val="bg1">
-                    <a:lumMod val="50000"/>
-                  </a:schemeClr>
-                </a:solidFill>
-                <a:latin typeface="Consolas" panose="020B0609020204030204" pitchFamily="49" charset="0"/>
-                <a:cs typeface="Consolas" panose="020B0609020204030204" pitchFamily="49" charset="0"/>
-              </a:rPr>
-              <a:t>LOwer</a:t>
-            </a:r>
-            <a:endParaRPr lang="en-US" sz="1200" dirty="0">
-              <a:solidFill>
-                <a:schemeClr val="bg1">
-                  <a:lumMod val="50000"/>
-                </a:schemeClr>
-              </a:solidFill>
-              <a:latin typeface="Consolas" panose="020B0609020204030204" pitchFamily="49" charset="0"/>
-              <a:cs typeface="Consolas" panose="020B0609020204030204" pitchFamily="49" charset="0"/>
-            </a:endParaRPr>
-          </a:p>
-          <a:p>
-            <a:r>
-              <a:rPr lang="en-US" sz="1200" dirty="0">
-                <a:solidFill>
-                  <a:srgbClr val="C00000"/>
-                </a:solidFill>
-                <a:latin typeface="Consolas" panose="020B0609020204030204" pitchFamily="49" charset="0"/>
-                <a:cs typeface="Consolas" panose="020B0609020204030204" pitchFamily="49" charset="0"/>
-              </a:rPr>
-              <a:t>      </a:t>
-            </a:r>
-            <a:r>
-              <a:rPr lang="en-US" sz="1200" b="1" dirty="0">
-                <a:solidFill>
-                  <a:srgbClr val="C00000"/>
-                </a:solidFill>
-                <a:latin typeface="Consolas" panose="020B0609020204030204" pitchFamily="49" charset="0"/>
-                <a:cs typeface="Consolas" panose="020B0609020204030204" pitchFamily="49" charset="0"/>
-              </a:rPr>
-              <a:t>MOV   r0, r3, LSL #16</a:t>
-            </a:r>
-          </a:p>
-          <a:p>
-            <a:r>
-              <a:rPr lang="en-US" sz="1200" dirty="0">
-                <a:solidFill>
-                  <a:srgbClr val="C00000"/>
-                </a:solidFill>
-                <a:latin typeface="Consolas" panose="020B0609020204030204" pitchFamily="49" charset="0"/>
-                <a:cs typeface="Consolas" panose="020B0609020204030204" pitchFamily="49" charset="0"/>
-              </a:rPr>
-              <a:t>      </a:t>
-            </a:r>
-            <a:r>
-              <a:rPr lang="en-US" sz="1200" b="1" dirty="0">
-                <a:solidFill>
-                  <a:srgbClr val="C00000"/>
-                </a:solidFill>
-                <a:latin typeface="Consolas" panose="020B0609020204030204" pitchFamily="49" charset="0"/>
-                <a:cs typeface="Consolas" panose="020B0609020204030204" pitchFamily="49" charset="0"/>
-              </a:rPr>
-              <a:t>MOV   r0, r0, ASR #16  </a:t>
-            </a:r>
-            <a:r>
-              <a:rPr lang="en-US" sz="1200" dirty="0">
-                <a:solidFill>
-                  <a:srgbClr val="C00000"/>
-                </a:solidFill>
-                <a:latin typeface="Consolas" panose="020B0609020204030204" pitchFamily="49" charset="0"/>
-                <a:cs typeface="Consolas" panose="020B0609020204030204" pitchFamily="49" charset="0"/>
-              </a:rPr>
-              <a:t>; r0 = (short) r3 </a:t>
-            </a:r>
-          </a:p>
-          <a:p>
-            <a:r>
-              <a:rPr lang="en-US" sz="1200" dirty="0">
-                <a:latin typeface="Consolas" panose="020B0609020204030204" pitchFamily="49" charset="0"/>
-                <a:cs typeface="Consolas" panose="020B0609020204030204" pitchFamily="49" charset="0"/>
-              </a:rPr>
-              <a:t>      BX    </a:t>
-            </a:r>
-            <a:r>
-              <a:rPr lang="en-US" sz="1200" dirty="0" err="1">
-                <a:latin typeface="Consolas" panose="020B0609020204030204" pitchFamily="49" charset="0"/>
-                <a:cs typeface="Consolas" panose="020B0609020204030204" pitchFamily="49" charset="0"/>
-              </a:rPr>
-              <a:t>lr</a:t>
-            </a:r>
-            <a:endParaRPr lang="en-US" sz="1200" dirty="0">
-              <a:latin typeface="Consolas" panose="020B0609020204030204" pitchFamily="49" charset="0"/>
-              <a:cs typeface="Consolas" panose="020B0609020204030204" pitchFamily="49" charset="0"/>
-            </a:endParaRPr>
-          </a:p>
-          <a:p>
-            <a:r>
-              <a:rPr lang="en-US" sz="1200" dirty="0">
-                <a:latin typeface="Consolas" panose="020B0609020204030204" pitchFamily="49" charset="0"/>
-                <a:cs typeface="Consolas" panose="020B0609020204030204" pitchFamily="49" charset="0"/>
-              </a:rPr>
-              <a:t>      ENDP</a:t>
-            </a:r>
-          </a:p>
-        </p:txBody>
-      </p:sp>
-      <p:sp>
-        <p:nvSpPr>
-          <p:cNvPr id="4" name="TextBox 3">
-            <a:extLst>
-              <a:ext uri="{FF2B5EF4-FFF2-40B4-BE49-F238E27FC236}">
-                <a16:creationId xmlns:a16="http://schemas.microsoft.com/office/drawing/2014/main" id="{97230E48-4625-B845-9B62-549F2F03DD9E}"/>
-              </a:ext>
-            </a:extLst>
-          </p:cNvPr>
-          <p:cNvSpPr txBox="1"/>
-          <p:nvPr/>
-        </p:nvSpPr>
-        <p:spPr>
-          <a:xfrm>
-            <a:off x="5543551" y="4851813"/>
-            <a:ext cx="2241319" cy="300082"/>
-          </a:xfrm>
-          <a:prstGeom prst="rect">
-            <a:avLst/>
-          </a:prstGeom>
-        </p:spPr>
-        <p:style>
-          <a:lnRef idx="2">
-            <a:schemeClr val="accent1">
-              <a:shade val="50000"/>
-            </a:schemeClr>
-          </a:lnRef>
-          <a:fillRef idx="1">
-            <a:schemeClr val="accent1"/>
-          </a:fillRef>
-          <a:effectRef idx="0">
-            <a:schemeClr val="accent1"/>
-          </a:effectRef>
-          <a:fontRef idx="minor">
-            <a:schemeClr val="lt1"/>
-          </a:fontRef>
-        </p:style>
-        <p:txBody>
-          <a:bodyPr wrap="none" rtlCol="0">
-            <a:spAutoFit/>
-          </a:bodyPr>
-          <a:lstStyle/>
-          <a:p>
-            <a:r>
-              <a:rPr lang="en-US" sz="1350" dirty="0"/>
-              <a:t>The sum is limited to 16 bits!</a:t>
-            </a:r>
-          </a:p>
-        </p:txBody>
-      </p:sp>
-      <p:sp>
-        <p:nvSpPr>
-          <p:cNvPr id="7" name="TextBox 6">
-            <a:extLst>
-              <a:ext uri="{FF2B5EF4-FFF2-40B4-BE49-F238E27FC236}">
-                <a16:creationId xmlns:a16="http://schemas.microsoft.com/office/drawing/2014/main" id="{FFE75029-A370-C947-92AB-86784A3F88C0}"/>
-              </a:ext>
-            </a:extLst>
-          </p:cNvPr>
-          <p:cNvSpPr txBox="1"/>
-          <p:nvPr/>
-        </p:nvSpPr>
-        <p:spPr>
-          <a:xfrm>
-            <a:off x="285750" y="4574814"/>
-            <a:ext cx="1130438" cy="300082"/>
-          </a:xfrm>
-          <a:prstGeom prst="rect">
-            <a:avLst/>
-          </a:prstGeom>
-          <a:noFill/>
-        </p:spPr>
-        <p:txBody>
-          <a:bodyPr wrap="none" rtlCol="0">
-            <a:spAutoFit/>
-          </a:bodyPr>
-          <a:lstStyle/>
-          <a:p>
-            <a:r>
-              <a:rPr lang="en-US" sz="1350" dirty="0">
-                <a:latin typeface="Consolas" panose="020B0609020204030204" pitchFamily="49" charset="0"/>
-                <a:cs typeface="Consolas" panose="020B0609020204030204" pitchFamily="49" charset="0"/>
-              </a:rPr>
-              <a:t>0x12345678</a:t>
-            </a:r>
-          </a:p>
-        </p:txBody>
-      </p:sp>
-      <p:cxnSp>
-        <p:nvCxnSpPr>
-          <p:cNvPr id="9" name="Straight Arrow Connector 8">
-            <a:extLst>
-              <a:ext uri="{FF2B5EF4-FFF2-40B4-BE49-F238E27FC236}">
-                <a16:creationId xmlns:a16="http://schemas.microsoft.com/office/drawing/2014/main" id="{38C06581-F221-454A-B957-F8258EBDE837}"/>
-              </a:ext>
-            </a:extLst>
-          </p:cNvPr>
-          <p:cNvCxnSpPr/>
-          <p:nvPr/>
-        </p:nvCxnSpPr>
-        <p:spPr>
-          <a:xfrm>
-            <a:off x="1485900" y="4713314"/>
-            <a:ext cx="285750" cy="0"/>
-          </a:xfrm>
-          <a:prstGeom prst="straightConnector1">
-            <a:avLst/>
-          </a:prstGeom>
-          <a:ln>
-            <a:tailEnd type="triangle"/>
-          </a:ln>
-        </p:spPr>
-        <p:style>
-          <a:lnRef idx="1">
-            <a:schemeClr val="accent1"/>
-          </a:lnRef>
-          <a:fillRef idx="0">
-            <a:schemeClr val="accent1"/>
-          </a:fillRef>
-          <a:effectRef idx="0">
-            <a:schemeClr val="accent1"/>
-          </a:effectRef>
-          <a:fontRef idx="minor">
-            <a:schemeClr val="tx1"/>
-          </a:fontRef>
-        </p:style>
-      </p:cxnSp>
-      <p:sp>
-        <p:nvSpPr>
-          <p:cNvPr id="10" name="TextBox 9">
-            <a:extLst>
-              <a:ext uri="{FF2B5EF4-FFF2-40B4-BE49-F238E27FC236}">
-                <a16:creationId xmlns:a16="http://schemas.microsoft.com/office/drawing/2014/main" id="{4580A862-E780-3041-A52F-CEC03FE2AA6F}"/>
-              </a:ext>
-            </a:extLst>
-          </p:cNvPr>
-          <p:cNvSpPr txBox="1"/>
-          <p:nvPr/>
-        </p:nvSpPr>
-        <p:spPr>
-          <a:xfrm>
-            <a:off x="1882879" y="4574814"/>
-            <a:ext cx="1130438" cy="300082"/>
-          </a:xfrm>
-          <a:prstGeom prst="rect">
-            <a:avLst/>
-          </a:prstGeom>
-          <a:noFill/>
-        </p:spPr>
-        <p:txBody>
-          <a:bodyPr wrap="none" rtlCol="0">
-            <a:spAutoFit/>
-          </a:bodyPr>
-          <a:lstStyle/>
-          <a:p>
-            <a:r>
-              <a:rPr lang="en-US" sz="1350" dirty="0">
-                <a:latin typeface="Consolas" panose="020B0609020204030204" pitchFamily="49" charset="0"/>
-                <a:cs typeface="Consolas" panose="020B0609020204030204" pitchFamily="49" charset="0"/>
-              </a:rPr>
-              <a:t>0x00005678</a:t>
-            </a:r>
-          </a:p>
-        </p:txBody>
-      </p:sp>
-      <p:sp>
-        <p:nvSpPr>
-          <p:cNvPr id="11" name="TextBox 10">
-            <a:extLst>
-              <a:ext uri="{FF2B5EF4-FFF2-40B4-BE49-F238E27FC236}">
-                <a16:creationId xmlns:a16="http://schemas.microsoft.com/office/drawing/2014/main" id="{F73CED4B-2CEE-5847-B651-71C8F701F73C}"/>
-              </a:ext>
-            </a:extLst>
-          </p:cNvPr>
-          <p:cNvSpPr txBox="1"/>
-          <p:nvPr/>
-        </p:nvSpPr>
-        <p:spPr>
-          <a:xfrm>
-            <a:off x="290245" y="4961164"/>
-            <a:ext cx="1130438" cy="300082"/>
-          </a:xfrm>
-          <a:prstGeom prst="rect">
-            <a:avLst/>
-          </a:prstGeom>
-          <a:noFill/>
-        </p:spPr>
-        <p:txBody>
-          <a:bodyPr wrap="none" rtlCol="0">
-            <a:spAutoFit/>
-          </a:bodyPr>
-          <a:lstStyle/>
-          <a:p>
-            <a:r>
-              <a:rPr lang="en-US" sz="1350" dirty="0">
-                <a:latin typeface="Consolas" panose="020B0609020204030204" pitchFamily="49" charset="0"/>
-                <a:cs typeface="Consolas" panose="020B0609020204030204" pitchFamily="49" charset="0"/>
-              </a:rPr>
-              <a:t>0x1234ABCD</a:t>
-            </a:r>
-          </a:p>
-        </p:txBody>
-      </p:sp>
-      <p:cxnSp>
-        <p:nvCxnSpPr>
-          <p:cNvPr id="12" name="Straight Arrow Connector 11">
-            <a:extLst>
-              <a:ext uri="{FF2B5EF4-FFF2-40B4-BE49-F238E27FC236}">
-                <a16:creationId xmlns:a16="http://schemas.microsoft.com/office/drawing/2014/main" id="{FD215319-D751-D24D-83E5-80D4E6FB9D69}"/>
-              </a:ext>
-            </a:extLst>
-          </p:cNvPr>
-          <p:cNvCxnSpPr/>
-          <p:nvPr/>
-        </p:nvCxnSpPr>
-        <p:spPr>
-          <a:xfrm>
-            <a:off x="1490395" y="5099663"/>
-            <a:ext cx="285750" cy="0"/>
-          </a:xfrm>
-          <a:prstGeom prst="straightConnector1">
-            <a:avLst/>
-          </a:prstGeom>
-          <a:ln>
-            <a:tailEnd type="triangle"/>
-          </a:ln>
-        </p:spPr>
-        <p:style>
-          <a:lnRef idx="1">
-            <a:schemeClr val="accent1"/>
-          </a:lnRef>
-          <a:fillRef idx="0">
-            <a:schemeClr val="accent1"/>
-          </a:fillRef>
-          <a:effectRef idx="0">
-            <a:schemeClr val="accent1"/>
-          </a:effectRef>
-          <a:fontRef idx="minor">
-            <a:schemeClr val="tx1"/>
-          </a:fontRef>
-        </p:style>
-      </p:cxnSp>
-      <p:sp>
-        <p:nvSpPr>
-          <p:cNvPr id="13" name="TextBox 12">
-            <a:extLst>
-              <a:ext uri="{FF2B5EF4-FFF2-40B4-BE49-F238E27FC236}">
-                <a16:creationId xmlns:a16="http://schemas.microsoft.com/office/drawing/2014/main" id="{61396BB7-6492-2C46-A6BE-EF731ECF740B}"/>
-              </a:ext>
-            </a:extLst>
-          </p:cNvPr>
-          <p:cNvSpPr txBox="1"/>
-          <p:nvPr/>
-        </p:nvSpPr>
-        <p:spPr>
-          <a:xfrm>
-            <a:off x="1887374" y="4961164"/>
-            <a:ext cx="1130438" cy="300082"/>
-          </a:xfrm>
-          <a:prstGeom prst="rect">
-            <a:avLst/>
-          </a:prstGeom>
-          <a:noFill/>
-        </p:spPr>
-        <p:txBody>
-          <a:bodyPr wrap="none" rtlCol="0">
-            <a:spAutoFit/>
-          </a:bodyPr>
-          <a:lstStyle/>
-          <a:p>
-            <a:r>
-              <a:rPr lang="en-US" sz="1350" dirty="0">
-                <a:latin typeface="Consolas" panose="020B0609020204030204" pitchFamily="49" charset="0"/>
-                <a:cs typeface="Consolas" panose="020B0609020204030204" pitchFamily="49" charset="0"/>
-              </a:rPr>
-              <a:t>0xFFFFABCD</a:t>
-            </a:r>
-          </a:p>
-        </p:txBody>
-      </p:sp>
-      <p:sp>
-        <p:nvSpPr>
-          <p:cNvPr id="14" name="TextBox 13">
-            <a:extLst>
-              <a:ext uri="{FF2B5EF4-FFF2-40B4-BE49-F238E27FC236}">
-                <a16:creationId xmlns:a16="http://schemas.microsoft.com/office/drawing/2014/main" id="{37AC389A-52DF-BA4B-B78C-31E43AB8F715}"/>
-              </a:ext>
-            </a:extLst>
-          </p:cNvPr>
-          <p:cNvSpPr txBox="1"/>
-          <p:nvPr/>
-        </p:nvSpPr>
-        <p:spPr>
-          <a:xfrm>
-            <a:off x="285750" y="3986192"/>
-            <a:ext cx="2454518" cy="507831"/>
-          </a:xfrm>
-          <a:prstGeom prst="rect">
-            <a:avLst/>
-          </a:prstGeom>
-          <a:noFill/>
-        </p:spPr>
-        <p:txBody>
-          <a:bodyPr wrap="none" rtlCol="0">
-            <a:spAutoFit/>
-          </a:bodyPr>
-          <a:lstStyle/>
-          <a:p>
-            <a:r>
-              <a:rPr lang="en-US" sz="1350" dirty="0">
-                <a:solidFill>
-                  <a:srgbClr val="C00000"/>
-                </a:solidFill>
-                <a:latin typeface="Consolas" panose="020B0609020204030204" pitchFamily="49" charset="0"/>
-                <a:cs typeface="Consolas" panose="020B0609020204030204" pitchFamily="49" charset="0"/>
-              </a:rPr>
-              <a:t>int32_t x = 0x12345678;</a:t>
-            </a:r>
-          </a:p>
-          <a:p>
-            <a:r>
-              <a:rPr lang="en-US" sz="1350" dirty="0">
-                <a:solidFill>
-                  <a:srgbClr val="C00000"/>
-                </a:solidFill>
-                <a:latin typeface="Consolas" panose="020B0609020204030204" pitchFamily="49" charset="0"/>
-                <a:cs typeface="Consolas" panose="020B0609020204030204" pitchFamily="49" charset="0"/>
-              </a:rPr>
-              <a:t>int16_t y = (int16_t) x;</a:t>
-            </a:r>
+              <a:rPr lang="en-US" dirty="0"/>
+              <a:t>These two lines sign-extend the lower 16 bits of r3 into a full 32-bit value in r0.</a:t>
+            </a:r>
+          </a:p>
+          <a:p>
+            <a:r>
+              <a:rPr lang="en-US" dirty="0"/>
+              <a:t>MOV r0, r3, LSL #16</a:t>
+            </a:r>
+          </a:p>
+          <a:p>
+            <a:pPr lvl="1"/>
+            <a:r>
+              <a:rPr lang="en-US" dirty="0"/>
+              <a:t>Shifts the value in r3 left by 16 bits.</a:t>
+            </a:r>
+          </a:p>
+          <a:p>
+            <a:pPr lvl="1"/>
+            <a:r>
+              <a:rPr lang="en-US" dirty="0"/>
+              <a:t>The lower 16 bits of r3 (the part we care about) move up into the upper 16 bits of r0.</a:t>
+            </a:r>
+          </a:p>
+          <a:p>
+            <a:pPr lvl="1"/>
+            <a:r>
+              <a:rPr lang="en-US" dirty="0"/>
+              <a:t>The bottom 16 bits of r0 become 0.</a:t>
+            </a:r>
+          </a:p>
+          <a:p>
+            <a:r>
+              <a:rPr lang="en-US" dirty="0"/>
+              <a:t>MOV r0, r0, ASR #16</a:t>
+            </a:r>
+          </a:p>
+          <a:p>
+            <a:pPr lvl="1"/>
+            <a:r>
+              <a:rPr lang="en-US" dirty="0"/>
+              <a:t>Shifts the value right by 16 bits, but preserves the sign (arithmetic shift).</a:t>
+            </a:r>
+          </a:p>
+          <a:p>
+            <a:pPr lvl="1"/>
+            <a:r>
+              <a:rPr lang="en-US" dirty="0"/>
+              <a:t>That means if bit 31 (the sign bit after the first shift) is 1, it fills with 1s; if 0, it fills with 0s.</a:t>
+            </a:r>
+          </a:p>
+          <a:p>
+            <a:pPr lvl="1"/>
+            <a:r>
+              <a:rPr lang="en-US" dirty="0"/>
+              <a:t>The result is a sign-extended 16-bit value from the original lower half of r3.</a:t>
+            </a:r>
+          </a:p>
+          <a:p>
+            <a:r>
+              <a:rPr lang="en-US" dirty="0"/>
+              <a:t>Examples: </a:t>
+            </a:r>
+          </a:p>
+          <a:p>
+            <a:r>
+              <a:rPr lang="en-US" dirty="0"/>
+              <a:t>r3 = 0x00001234</a:t>
+            </a:r>
+          </a:p>
+          <a:p>
+            <a:pPr lvl="1"/>
+            <a:r>
+              <a:rPr lang="en-US" dirty="0"/>
+              <a:t>LSL #16 → 0x12340000</a:t>
+            </a:r>
+          </a:p>
+          <a:p>
+            <a:pPr lvl="1"/>
+            <a:r>
+              <a:rPr lang="en-US" dirty="0"/>
+              <a:t>ASR #16 → 0x00001234</a:t>
+            </a:r>
+          </a:p>
+          <a:p>
+            <a:r>
+              <a:rPr lang="en-US" dirty="0"/>
+              <a:t>r3 = 0x0000ABCD</a:t>
+            </a:r>
+          </a:p>
+          <a:p>
+            <a:pPr lvl="1"/>
+            <a:r>
+              <a:rPr lang="en-US" dirty="0"/>
+              <a:t>LSL #16 → 0xABCD0000</a:t>
+            </a:r>
+          </a:p>
+          <a:p>
+            <a:pPr lvl="1"/>
+            <a:r>
+              <a:rPr lang="en-US" dirty="0"/>
+              <a:t>ASR #16 → 0xFFFFABCD</a:t>
+            </a:r>
+          </a:p>
+          <a:p>
+            <a:r>
+              <a:rPr lang="pt-BR" dirty="0"/>
+              <a:t>Can be replaced with a single instruction:</a:t>
+            </a:r>
+          </a:p>
+          <a:p>
+            <a:pPr lvl="1"/>
+            <a:r>
+              <a:rPr lang="pt-BR" dirty="0"/>
+              <a:t>SXTH  r0, r3   ; r0 = (int16_t) r3, sign-extend</a:t>
+            </a:r>
+            <a:endParaRPr lang="en-US" dirty="0"/>
           </a:p>
         </p:txBody>
       </p:sp>
     </p:spTree>
     <p:extLst>
       <p:ext uri="{BB962C8B-B14F-4D97-AF65-F5344CB8AC3E}">
-        <p14:creationId xmlns:p14="http://schemas.microsoft.com/office/powerpoint/2010/main" val="658532706"/>
+        <p14:creationId xmlns:p14="http://schemas.microsoft.com/office/powerpoint/2010/main" val="1757812227"/>
       </p:ext>
     </p:extLst>
   </p:cSld>
@@ -26462,7 +26963,7 @@
           <p:cNvPr id="2" name="Title 1">
             <a:extLst>
               <a:ext uri="{FF2B5EF4-FFF2-40B4-BE49-F238E27FC236}">
-                <a16:creationId xmlns:a16="http://schemas.microsoft.com/office/drawing/2014/main" id="{0B680E2F-C62E-EF54-5DBD-340196E1CA5F}"/>
+                <a16:creationId xmlns:a16="http://schemas.microsoft.com/office/drawing/2014/main" id="{0CCDC4F0-89D8-54C1-7B5F-442BB66DAAA7}"/>
               </a:ext>
             </a:extLst>
           </p:cNvPr>
@@ -26480,7 +26981,7 @@
           <a:p>
             <a:r>
               <a:rPr lang="en-US" dirty="0"/>
-              <a:t>Explanations</a:t>
+              <a:t>Program Understanding</a:t>
             </a:r>
           </a:p>
         </p:txBody>
@@ -26490,7 +26991,7 @@
           <p:cNvPr id="3" name="Slide Number Placeholder 2">
             <a:extLst>
               <a:ext uri="{FF2B5EF4-FFF2-40B4-BE49-F238E27FC236}">
-                <a16:creationId xmlns:a16="http://schemas.microsoft.com/office/drawing/2014/main" id="{9ECF1D85-43EB-71B3-363D-9FF339EE4AA2}"/>
+                <a16:creationId xmlns:a16="http://schemas.microsoft.com/office/drawing/2014/main" id="{04ACEC4B-05BD-C502-9FB9-FEB63BA9F5F4}"/>
               </a:ext>
             </a:extLst>
           </p:cNvPr>
@@ -26520,7 +27021,7 @@
           <p:cNvPr id="4" name="Content Placeholder 3">
             <a:extLst>
               <a:ext uri="{FF2B5EF4-FFF2-40B4-BE49-F238E27FC236}">
-                <a16:creationId xmlns:a16="http://schemas.microsoft.com/office/drawing/2014/main" id="{E4F57FE1-A328-6D2A-AFB7-A6C1600FE210}"/>
+                <a16:creationId xmlns:a16="http://schemas.microsoft.com/office/drawing/2014/main" id="{4C97CD4C-D1B7-839F-818C-C650C0AA8892}"/>
               </a:ext>
             </a:extLst>
           </p:cNvPr>
@@ -26533,136 +27034,604 @@
         </p:nvSpPr>
         <p:spPr/>
         <p:txBody>
-          <a:bodyPr>
-            <a:normAutofit fontScale="70000" lnSpcReduction="20000"/>
+          <a:bodyPr/>
+          <a:lstStyle/>
+          <a:p>
+            <a:r>
+              <a:rPr lang="en-US" dirty="0"/>
+              <a:t>Write out the sequence of values of r0 and r7 after </a:t>
+            </a:r>
+            <a:r>
+              <a:rPr lang="en-US"/>
+              <a:t>running this program. </a:t>
+            </a:r>
+            <a:endParaRPr lang="en-US" dirty="0"/>
+          </a:p>
+        </p:txBody>
+      </p:sp>
+      <p:sp>
+        <p:nvSpPr>
+          <p:cNvPr id="5" name="TextBox 4">
+            <a:extLst>
+              <a:ext uri="{FF2B5EF4-FFF2-40B4-BE49-F238E27FC236}">
+                <a16:creationId xmlns:a16="http://schemas.microsoft.com/office/drawing/2014/main" id="{E5333230-46BA-8663-0449-A907C073A049}"/>
+              </a:ext>
+            </a:extLst>
+          </p:cNvPr>
+          <p:cNvSpPr txBox="1"/>
+          <p:nvPr/>
+        </p:nvSpPr>
+        <p:spPr>
+          <a:xfrm>
+            <a:off x="866618" y="2125087"/>
+            <a:ext cx="3454460" cy="4031873"/>
+          </a:xfrm>
+          <a:prstGeom prst="rect">
+            <a:avLst/>
+          </a:prstGeom>
+        </p:spPr>
+        <p:style>
+          <a:lnRef idx="2">
+            <a:schemeClr val="accent1"/>
+          </a:lnRef>
+          <a:fillRef idx="1">
+            <a:schemeClr val="lt1"/>
+          </a:fillRef>
+          <a:effectRef idx="0">
+            <a:schemeClr val="accent1"/>
+          </a:effectRef>
+          <a:fontRef idx="minor">
+            <a:schemeClr val="dk1"/>
+          </a:fontRef>
+        </p:style>
+        <p:txBody>
+          <a:bodyPr wrap="square" rtlCol="0">
+            <a:spAutoFit/>
           </a:bodyPr>
           <a:lstStyle/>
           <a:p>
             <a:r>
-              <a:rPr lang="en-US" dirty="0"/>
-              <a:t>These two lines sign-extend the lower 16 bits of r3 into a full 32-bit value in r0.</a:t>
-            </a:r>
-          </a:p>
-          <a:p>
-            <a:r>
-              <a:rPr lang="en-US" dirty="0"/>
-              <a:t>MOV r0, r3, LSL #16</a:t>
-            </a:r>
-          </a:p>
-          <a:p>
-            <a:pPr lvl="1"/>
-            <a:r>
-              <a:rPr lang="en-US" dirty="0"/>
-              <a:t>Shifts the value in r3 left by 16 bits.</a:t>
-            </a:r>
-          </a:p>
-          <a:p>
-            <a:pPr lvl="1"/>
-            <a:r>
-              <a:rPr lang="en-US" dirty="0"/>
-              <a:t>The lower 16 bits of r3 (the part we care about) move up into the upper 16 bits of r0.</a:t>
-            </a:r>
-          </a:p>
-          <a:p>
-            <a:pPr lvl="1"/>
-            <a:r>
-              <a:rPr lang="en-US" dirty="0"/>
-              <a:t>The bottom 16 bits of r0 become 0.</a:t>
-            </a:r>
-          </a:p>
-          <a:p>
-            <a:r>
-              <a:rPr lang="en-US" dirty="0"/>
-              <a:t>MOV r0, r0, ASR #16</a:t>
-            </a:r>
-          </a:p>
-          <a:p>
-            <a:pPr lvl="1"/>
-            <a:r>
-              <a:rPr lang="en-US" dirty="0"/>
-              <a:t>Shifts the value right by 16 bits, but preserves the sign (arithmetic shift).</a:t>
-            </a:r>
-          </a:p>
-          <a:p>
-            <a:pPr lvl="1"/>
-            <a:r>
-              <a:rPr lang="en-US" dirty="0"/>
-              <a:t>That means if bit 31 (the sign bit after the first shift) is 1, it fills with 1s; if 0, it fills with 0s.</a:t>
-            </a:r>
-          </a:p>
-          <a:p>
-            <a:pPr lvl="1"/>
-            <a:r>
-              <a:rPr lang="en-US" dirty="0"/>
-              <a:t>The result is a sign-extended 16-bit value from the original lower half of r3.</a:t>
-            </a:r>
-          </a:p>
-          <a:p>
-            <a:r>
-              <a:rPr lang="en-US" dirty="0"/>
-              <a:t>Examples: </a:t>
-            </a:r>
-          </a:p>
-          <a:p>
-            <a:r>
-              <a:rPr lang="en-US" dirty="0"/>
-              <a:t>r3 = 0x00001234</a:t>
-            </a:r>
-          </a:p>
-          <a:p>
-            <a:pPr lvl="1"/>
-            <a:r>
-              <a:rPr lang="en-US" dirty="0"/>
-              <a:t>LSL #16 → 0x12340000</a:t>
-            </a:r>
-          </a:p>
-          <a:p>
-            <a:pPr lvl="1"/>
-            <a:r>
-              <a:rPr lang="en-US" dirty="0"/>
-              <a:t>ASR #16 → 0x00001234</a:t>
-            </a:r>
-          </a:p>
-          <a:p>
-            <a:r>
-              <a:rPr lang="en-US" dirty="0"/>
-              <a:t>r3 = 0x0000ABCD</a:t>
-            </a:r>
-          </a:p>
-          <a:p>
-            <a:pPr lvl="1"/>
-            <a:r>
-              <a:rPr lang="en-US" dirty="0"/>
-              <a:t>LSL #16 → 0xABCD0000</a:t>
-            </a:r>
-          </a:p>
-          <a:p>
-            <a:pPr lvl="1"/>
-            <a:r>
-              <a:rPr lang="en-US" dirty="0"/>
-              <a:t>ASR #16 → 0xFFFFABCD</a:t>
-            </a:r>
-          </a:p>
-          <a:p>
-            <a:r>
-              <a:rPr lang="pt-BR" dirty="0"/>
-              <a:t>Can be replaced with a single instruction:</a:t>
-            </a:r>
-          </a:p>
-          <a:p>
-            <a:pPr lvl="1"/>
-            <a:r>
-              <a:rPr lang="pt-BR" dirty="0"/>
-              <a:t>SXTH  r0, r3   ; r0 = (int16_t) r3, sign-extend</a:t>
-            </a:r>
-            <a:endParaRPr lang="en-US" dirty="0"/>
+              <a:rPr lang="en-US" sz="1600" dirty="0">
+                <a:latin typeface="Consolas" panose="020B0609020204030204" pitchFamily="49" charset="0"/>
+                <a:cs typeface="Consolas" panose="020B0609020204030204" pitchFamily="49" charset="0"/>
+              </a:rPr>
+              <a:t>start:</a:t>
+            </a:r>
+          </a:p>
+          <a:p>
+            <a:r>
+              <a:rPr lang="en-US" sz="1600" dirty="0">
+                <a:latin typeface="Consolas" panose="020B0609020204030204" pitchFamily="49" charset="0"/>
+                <a:cs typeface="Consolas" panose="020B0609020204030204" pitchFamily="49" charset="0"/>
+              </a:rPr>
+              <a:t>        mov     r0, #1       </a:t>
+            </a:r>
+          </a:p>
+          <a:p>
+            <a:endParaRPr lang="en-US" sz="1600" dirty="0">
+              <a:latin typeface="Consolas" panose="020B0609020204030204" pitchFamily="49" charset="0"/>
+              <a:cs typeface="Consolas" panose="020B0609020204030204" pitchFamily="49" charset="0"/>
+            </a:endParaRPr>
+          </a:p>
+          <a:p>
+            <a:r>
+              <a:rPr lang="en-US" sz="1600" dirty="0">
+                <a:latin typeface="Consolas" panose="020B0609020204030204" pitchFamily="49" charset="0"/>
+                <a:cs typeface="Consolas" panose="020B0609020204030204" pitchFamily="49" charset="0"/>
+              </a:rPr>
+              <a:t>main:</a:t>
+            </a:r>
+          </a:p>
+          <a:p>
+            <a:r>
+              <a:rPr lang="en-US" sz="1600" dirty="0">
+                <a:latin typeface="Consolas" panose="020B0609020204030204" pitchFamily="49" charset="0"/>
+                <a:cs typeface="Consolas" panose="020B0609020204030204" pitchFamily="49" charset="0"/>
+              </a:rPr>
+              <a:t>        add     r0, r0, #1</a:t>
+            </a:r>
+          </a:p>
+          <a:p>
+            <a:r>
+              <a:rPr lang="en-US" sz="1600" dirty="0">
+                <a:latin typeface="Consolas" panose="020B0609020204030204" pitchFamily="49" charset="0"/>
+                <a:cs typeface="Consolas" panose="020B0609020204030204" pitchFamily="49" charset="0"/>
+              </a:rPr>
+              <a:t>        </a:t>
+            </a:r>
+            <a:r>
+              <a:rPr lang="en-US" sz="1600" dirty="0" err="1">
+                <a:latin typeface="Consolas" panose="020B0609020204030204" pitchFamily="49" charset="0"/>
+                <a:cs typeface="Consolas" panose="020B0609020204030204" pitchFamily="49" charset="0"/>
+              </a:rPr>
+              <a:t>cmp</a:t>
+            </a:r>
+            <a:r>
+              <a:rPr lang="en-US" sz="1600" dirty="0">
+                <a:latin typeface="Consolas" panose="020B0609020204030204" pitchFamily="49" charset="0"/>
+                <a:cs typeface="Consolas" panose="020B0609020204030204" pitchFamily="49" charset="0"/>
+              </a:rPr>
+              <a:t>     r0, #5       </a:t>
+            </a:r>
+          </a:p>
+          <a:p>
+            <a:r>
+              <a:rPr lang="en-US" sz="1600" dirty="0">
+                <a:latin typeface="Consolas" panose="020B0609020204030204" pitchFamily="49" charset="0"/>
+                <a:cs typeface="Consolas" panose="020B0609020204030204" pitchFamily="49" charset="0"/>
+              </a:rPr>
+              <a:t>        </a:t>
+            </a:r>
+            <a:r>
+              <a:rPr lang="en-US" sz="1600" dirty="0" err="1">
+                <a:latin typeface="Consolas" panose="020B0609020204030204" pitchFamily="49" charset="0"/>
+                <a:cs typeface="Consolas" panose="020B0609020204030204" pitchFamily="49" charset="0"/>
+              </a:rPr>
+              <a:t>bne</a:t>
+            </a:r>
+            <a:r>
+              <a:rPr lang="en-US" sz="1600" dirty="0">
+                <a:latin typeface="Consolas" panose="020B0609020204030204" pitchFamily="49" charset="0"/>
+                <a:cs typeface="Consolas" panose="020B0609020204030204" pitchFamily="49" charset="0"/>
+              </a:rPr>
+              <a:t>     skip         </a:t>
+            </a:r>
+          </a:p>
+          <a:p>
+            <a:r>
+              <a:rPr lang="en-US" sz="1600" dirty="0">
+                <a:latin typeface="Consolas" panose="020B0609020204030204" pitchFamily="49" charset="0"/>
+                <a:cs typeface="Consolas" panose="020B0609020204030204" pitchFamily="49" charset="0"/>
+              </a:rPr>
+              <a:t>        bl      call</a:t>
+            </a:r>
+          </a:p>
+          <a:p>
+            <a:endParaRPr lang="en-US" sz="1600" dirty="0">
+              <a:latin typeface="Consolas" panose="020B0609020204030204" pitchFamily="49" charset="0"/>
+              <a:cs typeface="Consolas" panose="020B0609020204030204" pitchFamily="49" charset="0"/>
+            </a:endParaRPr>
+          </a:p>
+          <a:p>
+            <a:r>
+              <a:rPr lang="en-US" sz="1600" dirty="0">
+                <a:latin typeface="Consolas" panose="020B0609020204030204" pitchFamily="49" charset="0"/>
+                <a:cs typeface="Consolas" panose="020B0609020204030204" pitchFamily="49" charset="0"/>
+              </a:rPr>
+              <a:t>skip:</a:t>
+            </a:r>
+          </a:p>
+          <a:p>
+            <a:r>
+              <a:rPr lang="en-US" sz="1600" dirty="0">
+                <a:latin typeface="Consolas" panose="020B0609020204030204" pitchFamily="49" charset="0"/>
+                <a:cs typeface="Consolas" panose="020B0609020204030204" pitchFamily="49" charset="0"/>
+              </a:rPr>
+              <a:t>        b       main         </a:t>
+            </a:r>
+          </a:p>
+          <a:p>
+            <a:endParaRPr lang="en-US" sz="1600" dirty="0">
+              <a:latin typeface="Consolas" panose="020B0609020204030204" pitchFamily="49" charset="0"/>
+              <a:cs typeface="Consolas" panose="020B0609020204030204" pitchFamily="49" charset="0"/>
+            </a:endParaRPr>
+          </a:p>
+          <a:p>
+            <a:r>
+              <a:rPr lang="en-US" sz="1600" dirty="0">
+                <a:latin typeface="Consolas" panose="020B0609020204030204" pitchFamily="49" charset="0"/>
+                <a:cs typeface="Consolas" panose="020B0609020204030204" pitchFamily="49" charset="0"/>
+              </a:rPr>
+              <a:t>call:</a:t>
+            </a:r>
+          </a:p>
+          <a:p>
+            <a:r>
+              <a:rPr lang="en-US" sz="1600" dirty="0">
+                <a:latin typeface="Consolas" panose="020B0609020204030204" pitchFamily="49" charset="0"/>
+                <a:cs typeface="Consolas" panose="020B0609020204030204" pitchFamily="49" charset="0"/>
+              </a:rPr>
+              <a:t>        add     r7, r7, #255</a:t>
+            </a:r>
+          </a:p>
+          <a:p>
+            <a:r>
+              <a:rPr lang="en-US" sz="1600" dirty="0">
+                <a:latin typeface="Consolas" panose="020B0609020204030204" pitchFamily="49" charset="0"/>
+                <a:cs typeface="Consolas" panose="020B0609020204030204" pitchFamily="49" charset="0"/>
+              </a:rPr>
+              <a:t>        mov     r0, #1       </a:t>
+            </a:r>
+          </a:p>
+          <a:p>
+            <a:r>
+              <a:rPr lang="en-US" sz="1600" dirty="0">
+                <a:latin typeface="Consolas" panose="020B0609020204030204" pitchFamily="49" charset="0"/>
+                <a:cs typeface="Consolas" panose="020B0609020204030204" pitchFamily="49" charset="0"/>
+              </a:rPr>
+              <a:t>        bx      </a:t>
+            </a:r>
+            <a:r>
+              <a:rPr lang="en-US" sz="1600" dirty="0" err="1">
+                <a:latin typeface="Consolas" panose="020B0609020204030204" pitchFamily="49" charset="0"/>
+                <a:cs typeface="Consolas" panose="020B0609020204030204" pitchFamily="49" charset="0"/>
+              </a:rPr>
+              <a:t>lr</a:t>
+            </a:r>
+            <a:r>
+              <a:rPr lang="en-US" sz="1600" dirty="0">
+                <a:latin typeface="Consolas" panose="020B0609020204030204" pitchFamily="49" charset="0"/>
+                <a:cs typeface="Consolas" panose="020B0609020204030204" pitchFamily="49" charset="0"/>
+              </a:rPr>
+              <a:t>         </a:t>
+            </a:r>
           </a:p>
         </p:txBody>
       </p:sp>
     </p:spTree>
     <p:extLst>
       <p:ext uri="{BB962C8B-B14F-4D97-AF65-F5344CB8AC3E}">
-        <p14:creationId xmlns:p14="http://schemas.microsoft.com/office/powerpoint/2010/main" val="1757812227"/>
+        <p14:creationId xmlns:p14="http://schemas.microsoft.com/office/powerpoint/2010/main" val="4214831448"/>
+      </p:ext>
+    </p:extLst>
+  </p:cSld>
+  <p:clrMapOvr>
+    <a:masterClrMapping/>
+  </p:clrMapOvr>
+</p:sld>
+</file>
+
+<file path=ppt/slides/slide32.xml><?xml version="1.0" encoding="utf-8"?>
+<p:sld xmlns:a="http://schemas.openxmlformats.org/drawingml/2006/main" xmlns:r="http://schemas.openxmlformats.org/officeDocument/2006/relationships" xmlns:p="http://schemas.openxmlformats.org/presentationml/2006/main">
+  <p:cSld>
+    <p:spTree>
+      <p:nvGrpSpPr>
+        <p:cNvPr id="1" name="">
+          <a:extLst>
+            <a:ext uri="{FF2B5EF4-FFF2-40B4-BE49-F238E27FC236}">
+              <a16:creationId xmlns:a16="http://schemas.microsoft.com/office/drawing/2014/main" id="{4E3CD278-9055-1654-5493-D4D5C252F8DD}"/>
+            </a:ext>
+          </a:extLst>
+        </p:cNvPr>
+        <p:cNvGrpSpPr/>
+        <p:nvPr/>
+      </p:nvGrpSpPr>
+      <p:grpSpPr>
+        <a:xfrm>
+          <a:off x="0" y="0"/>
+          <a:ext cx="0" cy="0"/>
+          <a:chOff x="0" y="0"/>
+          <a:chExt cx="0" cy="0"/>
+        </a:xfrm>
+      </p:grpSpPr>
+      <p:sp>
+        <p:nvSpPr>
+          <p:cNvPr id="2" name="Title 1">
+            <a:extLst>
+              <a:ext uri="{FF2B5EF4-FFF2-40B4-BE49-F238E27FC236}">
+                <a16:creationId xmlns:a16="http://schemas.microsoft.com/office/drawing/2014/main" id="{5BB67A95-DEC2-DAE0-E275-60B265AA044E}"/>
+              </a:ext>
+            </a:extLst>
+          </p:cNvPr>
+          <p:cNvSpPr>
+            <a:spLocks noGrp="1"/>
+          </p:cNvSpPr>
+          <p:nvPr>
+            <p:ph type="title"/>
+          </p:nvPr>
+        </p:nvSpPr>
+        <p:spPr/>
+        <p:txBody>
+          <a:bodyPr/>
+          <a:lstStyle/>
+          <a:p>
+            <a:r>
+              <a:rPr lang="en-US" dirty="0"/>
+              <a:t>Program Understanding ANS</a:t>
+            </a:r>
+          </a:p>
+        </p:txBody>
+      </p:sp>
+      <p:sp>
+        <p:nvSpPr>
+          <p:cNvPr id="3" name="Slide Number Placeholder 2">
+            <a:extLst>
+              <a:ext uri="{FF2B5EF4-FFF2-40B4-BE49-F238E27FC236}">
+                <a16:creationId xmlns:a16="http://schemas.microsoft.com/office/drawing/2014/main" id="{74502889-1E6F-132B-00E5-EBBFD6734866}"/>
+              </a:ext>
+            </a:extLst>
+          </p:cNvPr>
+          <p:cNvSpPr>
+            <a:spLocks noGrp="1"/>
+          </p:cNvSpPr>
+          <p:nvPr>
+            <p:ph type="sldNum" sz="quarter" idx="12"/>
+          </p:nvPr>
+        </p:nvSpPr>
+        <p:spPr/>
+        <p:txBody>
+          <a:bodyPr/>
+          <a:lstStyle/>
+          <a:p>
+            <a:fld id="{EA7C8D44-3667-46F6-9772-CC52308E2A7F}" type="slidenum">
+              <a:rPr kumimoji="0" lang="en-US" smtClean="0"/>
+              <a:pPr/>
+              <a:t>32</a:t>
+            </a:fld>
+            <a:endParaRPr kumimoji="0" lang="en-US" dirty="0"/>
+          </a:p>
+        </p:txBody>
+      </p:sp>
+      <p:sp>
+        <p:nvSpPr>
+          <p:cNvPr id="4" name="Content Placeholder 3">
+            <a:extLst>
+              <a:ext uri="{FF2B5EF4-FFF2-40B4-BE49-F238E27FC236}">
+                <a16:creationId xmlns:a16="http://schemas.microsoft.com/office/drawing/2014/main" id="{0707AC2E-44F3-B02C-EC23-E5EB61FA94EB}"/>
+              </a:ext>
+            </a:extLst>
+          </p:cNvPr>
+          <p:cNvSpPr>
+            <a:spLocks noGrp="1"/>
+          </p:cNvSpPr>
+          <p:nvPr>
+            <p:ph sz="quarter" idx="1"/>
+          </p:nvPr>
+        </p:nvSpPr>
+        <p:spPr>
+          <a:xfrm>
+            <a:off x="473765" y="1082040"/>
+            <a:ext cx="8229600" cy="4937760"/>
+          </a:xfrm>
+        </p:spPr>
+        <p:txBody>
+          <a:bodyPr>
+            <a:normAutofit/>
+          </a:bodyPr>
+          <a:lstStyle/>
+          <a:p>
+            <a:r>
+              <a:rPr lang="en-US" sz="1800" dirty="0"/>
+              <a:t>It starts with x0 = 1. It loops, incrementing x0 each time. When x0 reaches 5, it calls subroutine call, which adds 255 to x7 and resets x0 to 1. Control returns to main, and the cycle repeats. So the pattern goes like this:</a:t>
+            </a:r>
+          </a:p>
+          <a:p>
+            <a:r>
+              <a:rPr lang="en-US" sz="1800" dirty="0"/>
+              <a:t>x0: 1 → 2 → 3 → 4 → 5 → (call resets to 1)</a:t>
+            </a:r>
+          </a:p>
+          <a:p>
+            <a:r>
+              <a:rPr lang="en-US" sz="1800" dirty="0"/>
+              <a:t>x7: +255 each time x0 reaches 5</a:t>
+            </a:r>
+          </a:p>
+        </p:txBody>
+      </p:sp>
+      <p:sp>
+        <p:nvSpPr>
+          <p:cNvPr id="5" name="TextBox 4">
+            <a:extLst>
+              <a:ext uri="{FF2B5EF4-FFF2-40B4-BE49-F238E27FC236}">
+                <a16:creationId xmlns:a16="http://schemas.microsoft.com/office/drawing/2014/main" id="{A84A8A79-412F-4394-2139-FF1AAAAEDB7A}"/>
+              </a:ext>
+            </a:extLst>
+          </p:cNvPr>
+          <p:cNvSpPr txBox="1"/>
+          <p:nvPr/>
+        </p:nvSpPr>
+        <p:spPr>
+          <a:xfrm>
+            <a:off x="888940" y="2690237"/>
+            <a:ext cx="7366119" cy="4031873"/>
+          </a:xfrm>
+          <a:prstGeom prst="rect">
+            <a:avLst/>
+          </a:prstGeom>
+        </p:spPr>
+        <p:style>
+          <a:lnRef idx="2">
+            <a:schemeClr val="accent1"/>
+          </a:lnRef>
+          <a:fillRef idx="1">
+            <a:schemeClr val="lt1"/>
+          </a:fillRef>
+          <a:effectRef idx="0">
+            <a:schemeClr val="accent1"/>
+          </a:effectRef>
+          <a:fontRef idx="minor">
+            <a:schemeClr val="dk1"/>
+          </a:fontRef>
+        </p:style>
+        <p:txBody>
+          <a:bodyPr wrap="none" rtlCol="0">
+            <a:spAutoFit/>
+          </a:bodyPr>
+          <a:lstStyle/>
+          <a:p>
+            <a:r>
+              <a:rPr lang="en-US" sz="1600" dirty="0">
+                <a:latin typeface="Consolas" panose="020B0609020204030204" pitchFamily="49" charset="0"/>
+                <a:cs typeface="Consolas" panose="020B0609020204030204" pitchFamily="49" charset="0"/>
+              </a:rPr>
+              <a:t>start:</a:t>
+            </a:r>
+          </a:p>
+          <a:p>
+            <a:r>
+              <a:rPr lang="en-US" sz="1600" dirty="0">
+                <a:latin typeface="Consolas" panose="020B0609020204030204" pitchFamily="49" charset="0"/>
+                <a:cs typeface="Consolas" panose="020B0609020204030204" pitchFamily="49" charset="0"/>
+              </a:rPr>
+              <a:t>        mov     r0, #1       @ start: r0 = 1</a:t>
+            </a:r>
+          </a:p>
+          <a:p>
+            <a:endParaRPr lang="en-US" sz="1600" dirty="0">
+              <a:latin typeface="Consolas" panose="020B0609020204030204" pitchFamily="49" charset="0"/>
+              <a:cs typeface="Consolas" panose="020B0609020204030204" pitchFamily="49" charset="0"/>
+            </a:endParaRPr>
+          </a:p>
+          <a:p>
+            <a:r>
+              <a:rPr lang="en-US" sz="1600" dirty="0">
+                <a:latin typeface="Consolas" panose="020B0609020204030204" pitchFamily="49" charset="0"/>
+                <a:cs typeface="Consolas" panose="020B0609020204030204" pitchFamily="49" charset="0"/>
+              </a:rPr>
+              <a:t>main:</a:t>
+            </a:r>
+          </a:p>
+          <a:p>
+            <a:r>
+              <a:rPr lang="en-US" sz="1600" dirty="0">
+                <a:latin typeface="Consolas" panose="020B0609020204030204" pitchFamily="49" charset="0"/>
+                <a:cs typeface="Consolas" panose="020B0609020204030204" pitchFamily="49" charset="0"/>
+              </a:rPr>
+              <a:t>        add     r0, r0, #1   @ increment r0</a:t>
+            </a:r>
+          </a:p>
+          <a:p>
+            <a:r>
+              <a:rPr lang="en-US" sz="1600" dirty="0">
+                <a:latin typeface="Consolas" panose="020B0609020204030204" pitchFamily="49" charset="0"/>
+                <a:cs typeface="Consolas" panose="020B0609020204030204" pitchFamily="49" charset="0"/>
+              </a:rPr>
+              <a:t>        </a:t>
+            </a:r>
+            <a:r>
+              <a:rPr lang="en-US" sz="1600" dirty="0" err="1">
+                <a:latin typeface="Consolas" panose="020B0609020204030204" pitchFamily="49" charset="0"/>
+                <a:cs typeface="Consolas" panose="020B0609020204030204" pitchFamily="49" charset="0"/>
+              </a:rPr>
+              <a:t>cmp</a:t>
+            </a:r>
+            <a:r>
+              <a:rPr lang="en-US" sz="1600" dirty="0">
+                <a:latin typeface="Consolas" panose="020B0609020204030204" pitchFamily="49" charset="0"/>
+                <a:cs typeface="Consolas" panose="020B0609020204030204" pitchFamily="49" charset="0"/>
+              </a:rPr>
+              <a:t>     r0, #5       @ compare r0 to 5</a:t>
+            </a:r>
+          </a:p>
+          <a:p>
+            <a:r>
+              <a:rPr lang="en-US" sz="1600" dirty="0">
+                <a:latin typeface="Consolas" panose="020B0609020204030204" pitchFamily="49" charset="0"/>
+                <a:cs typeface="Consolas" panose="020B0609020204030204" pitchFamily="49" charset="0"/>
+              </a:rPr>
+              <a:t>        </a:t>
+            </a:r>
+            <a:r>
+              <a:rPr lang="en-US" sz="1600" dirty="0" err="1">
+                <a:latin typeface="Consolas" panose="020B0609020204030204" pitchFamily="49" charset="0"/>
+                <a:cs typeface="Consolas" panose="020B0609020204030204" pitchFamily="49" charset="0"/>
+              </a:rPr>
+              <a:t>bne</a:t>
+            </a:r>
+            <a:r>
+              <a:rPr lang="en-US" sz="1600" dirty="0">
+                <a:latin typeface="Consolas" panose="020B0609020204030204" pitchFamily="49" charset="0"/>
+                <a:cs typeface="Consolas" panose="020B0609020204030204" pitchFamily="49" charset="0"/>
+              </a:rPr>
+              <a:t>     skip         @ if not equal, go to skip</a:t>
+            </a:r>
+          </a:p>
+          <a:p>
+            <a:r>
+              <a:rPr lang="en-US" sz="1600" dirty="0">
+                <a:latin typeface="Consolas" panose="020B0609020204030204" pitchFamily="49" charset="0"/>
+                <a:cs typeface="Consolas" panose="020B0609020204030204" pitchFamily="49" charset="0"/>
+              </a:rPr>
+              <a:t>        bl      call         @ if equal, branch-and-link to call</a:t>
+            </a:r>
+          </a:p>
+          <a:p>
+            <a:endParaRPr lang="en-US" sz="1600" dirty="0">
+              <a:latin typeface="Consolas" panose="020B0609020204030204" pitchFamily="49" charset="0"/>
+              <a:cs typeface="Consolas" panose="020B0609020204030204" pitchFamily="49" charset="0"/>
+            </a:endParaRPr>
+          </a:p>
+          <a:p>
+            <a:r>
+              <a:rPr lang="en-US" sz="1600" dirty="0">
+                <a:latin typeface="Consolas" panose="020B0609020204030204" pitchFamily="49" charset="0"/>
+                <a:cs typeface="Consolas" panose="020B0609020204030204" pitchFamily="49" charset="0"/>
+              </a:rPr>
+              <a:t>skip:</a:t>
+            </a:r>
+          </a:p>
+          <a:p>
+            <a:r>
+              <a:rPr lang="en-US" sz="1600" dirty="0">
+                <a:latin typeface="Consolas" panose="020B0609020204030204" pitchFamily="49" charset="0"/>
+                <a:cs typeface="Consolas" panose="020B0609020204030204" pitchFamily="49" charset="0"/>
+              </a:rPr>
+              <a:t>        b       main         @ unconditional branch back to main</a:t>
+            </a:r>
+          </a:p>
+          <a:p>
+            <a:endParaRPr lang="en-US" sz="1600" dirty="0">
+              <a:latin typeface="Consolas" panose="020B0609020204030204" pitchFamily="49" charset="0"/>
+              <a:cs typeface="Consolas" panose="020B0609020204030204" pitchFamily="49" charset="0"/>
+            </a:endParaRPr>
+          </a:p>
+          <a:p>
+            <a:r>
+              <a:rPr lang="en-US" sz="1600" dirty="0">
+                <a:latin typeface="Consolas" panose="020B0609020204030204" pitchFamily="49" charset="0"/>
+                <a:cs typeface="Consolas" panose="020B0609020204030204" pitchFamily="49" charset="0"/>
+              </a:rPr>
+              <a:t>call:</a:t>
+            </a:r>
+          </a:p>
+          <a:p>
+            <a:r>
+              <a:rPr lang="en-US" sz="1600" dirty="0">
+                <a:latin typeface="Consolas" panose="020B0609020204030204" pitchFamily="49" charset="0"/>
+                <a:cs typeface="Consolas" panose="020B0609020204030204" pitchFamily="49" charset="0"/>
+              </a:rPr>
+              <a:t>        add     r7, r7, #255 @ add 255 to r7 (side-effect)</a:t>
+            </a:r>
+          </a:p>
+          <a:p>
+            <a:r>
+              <a:rPr lang="en-US" sz="1600" dirty="0">
+                <a:latin typeface="Consolas" panose="020B0609020204030204" pitchFamily="49" charset="0"/>
+                <a:cs typeface="Consolas" panose="020B0609020204030204" pitchFamily="49" charset="0"/>
+              </a:rPr>
+              <a:t>        mov     r0, #1       @ reset r0 to 1</a:t>
+            </a:r>
+          </a:p>
+          <a:p>
+            <a:r>
+              <a:rPr lang="en-US" sz="1600" dirty="0">
+                <a:latin typeface="Consolas" panose="020B0609020204030204" pitchFamily="49" charset="0"/>
+                <a:cs typeface="Consolas" panose="020B0609020204030204" pitchFamily="49" charset="0"/>
+              </a:rPr>
+              <a:t>        bx      </a:t>
+            </a:r>
+            <a:r>
+              <a:rPr lang="en-US" sz="1600" dirty="0" err="1">
+                <a:latin typeface="Consolas" panose="020B0609020204030204" pitchFamily="49" charset="0"/>
+                <a:cs typeface="Consolas" panose="020B0609020204030204" pitchFamily="49" charset="0"/>
+              </a:rPr>
+              <a:t>lr</a:t>
+            </a:r>
+            <a:r>
+              <a:rPr lang="en-US" sz="1600" dirty="0">
+                <a:latin typeface="Consolas" panose="020B0609020204030204" pitchFamily="49" charset="0"/>
+                <a:cs typeface="Consolas" panose="020B0609020204030204" pitchFamily="49" charset="0"/>
+              </a:rPr>
+              <a:t>           @ return (branch to link register)</a:t>
+            </a:r>
+          </a:p>
+        </p:txBody>
+      </p:sp>
+    </p:spTree>
+    <p:extLst>
+      <p:ext uri="{BB962C8B-B14F-4D97-AF65-F5344CB8AC3E}">
+        <p14:creationId xmlns:p14="http://schemas.microsoft.com/office/powerpoint/2010/main" val="3848203700"/>
       </p:ext>
     </p:extLst>
   </p:cSld>

--- a/PPTs/Ch8_ARM_Subroutines_Exercises ANS.pptx
+++ b/PPTs/Ch8_ARM_Subroutines_Exercises ANS.pptx
@@ -6,10 +6,10 @@
     <p:sldMasterId id="2147483673" r:id="rId2"/>
   </p:sldMasterIdLst>
   <p:notesMasterIdLst>
-    <p:notesMasterId r:id="rId35"/>
+    <p:notesMasterId r:id="rId38"/>
   </p:notesMasterIdLst>
   <p:handoutMasterIdLst>
-    <p:handoutMasterId r:id="rId36"/>
+    <p:handoutMasterId r:id="rId39"/>
   </p:handoutMasterIdLst>
   <p:sldIdLst>
     <p:sldId id="256" r:id="rId3"/>
@@ -24,12 +24,12 @@
     <p:sldId id="762" r:id="rId12"/>
     <p:sldId id="816" r:id="rId13"/>
     <p:sldId id="817" r:id="rId14"/>
-    <p:sldId id="760" r:id="rId15"/>
-    <p:sldId id="759" r:id="rId16"/>
-    <p:sldId id="371" r:id="rId17"/>
-    <p:sldId id="369" r:id="rId18"/>
-    <p:sldId id="367" r:id="rId19"/>
-    <p:sldId id="374" r:id="rId20"/>
+    <p:sldId id="367" r:id="rId15"/>
+    <p:sldId id="374" r:id="rId16"/>
+    <p:sldId id="760" r:id="rId17"/>
+    <p:sldId id="759" r:id="rId18"/>
+    <p:sldId id="371" r:id="rId19"/>
+    <p:sldId id="369" r:id="rId20"/>
     <p:sldId id="257" r:id="rId21"/>
     <p:sldId id="258" r:id="rId22"/>
     <p:sldId id="281" r:id="rId23"/>
@@ -44,6 +44,9 @@
     <p:sldId id="756" r:id="rId32"/>
     <p:sldId id="763" r:id="rId33"/>
     <p:sldId id="764" r:id="rId34"/>
+    <p:sldId id="818" r:id="rId35"/>
+    <p:sldId id="819" r:id="rId36"/>
+    <p:sldId id="820" r:id="rId37"/>
   </p:sldIdLst>
   <p:sldSz cx="9144000" cy="6858000" type="screen4x3"/>
   <p:notesSz cx="6950075" cy="9236075"/>
@@ -164,7 +167,7 @@
 <file path=ppt/revisionInfo.xml><?xml version="1.0" encoding="utf-8"?>
 <p1510:revInfo xmlns:a="http://schemas.openxmlformats.org/drawingml/2006/main" xmlns:r="http://schemas.openxmlformats.org/officeDocument/2006/relationships" xmlns:p1510="http://schemas.microsoft.com/office/powerpoint/2015/10/main">
   <p1510:revLst>
-    <p1510:client id="{26DF0AC7-7898-4CAF-8C74-9051912ABD73}" v="232" dt="2025-10-21T21:00:56.009"/>
+    <p1510:client id="{26DF0AC7-7898-4CAF-8C74-9051912ABD73}" v="261" dt="2025-10-23T20:22:17.423"/>
   </p1510:revLst>
 </p1510:revInfo>
 </file>
@@ -174,125 +177,16 @@
   <pc:docChgLst>
     <pc:chgData name="Zonghua Gu" userId="9a7e1853e1951ef5" providerId="LiveId" clId="{CF1FAA12-072C-4ED5-BA76-0FFFAEFDB88A}"/>
     <pc:docChg chg="undo redo custSel addSld delSld modSld">
-      <pc:chgData name="Zonghua Gu" userId="9a7e1853e1951ef5" providerId="LiveId" clId="{CF1FAA12-072C-4ED5-BA76-0FFFAEFDB88A}" dt="2025-10-21T21:01:43.150" v="3721" actId="20577"/>
+      <pc:chgData name="Zonghua Gu" userId="9a7e1853e1951ef5" providerId="LiveId" clId="{CF1FAA12-072C-4ED5-BA76-0FFFAEFDB88A}" dt="2025-10-23T20:22:22.597" v="4275" actId="27636"/>
       <pc:docMkLst>
         <pc:docMk/>
       </pc:docMkLst>
-      <pc:sldChg chg="modSp mod">
-        <pc:chgData name="Zonghua Gu" userId="9a7e1853e1951ef5" providerId="LiveId" clId="{CF1FAA12-072C-4ED5-BA76-0FFFAEFDB88A}" dt="2025-09-22T00:19:03.232" v="111" actId="20577"/>
-        <pc:sldMkLst>
-          <pc:docMk/>
-          <pc:sldMk cId="1683281344" sldId="256"/>
-        </pc:sldMkLst>
-        <pc:spChg chg="mod">
-          <ac:chgData name="Zonghua Gu" userId="9a7e1853e1951ef5" providerId="LiveId" clId="{CF1FAA12-072C-4ED5-BA76-0FFFAEFDB88A}" dt="2025-09-21T23:15:22.214" v="24" actId="20577"/>
-          <ac:spMkLst>
-            <pc:docMk/>
-            <pc:sldMk cId="1683281344" sldId="256"/>
-            <ac:spMk id="2" creationId="{00000000-0000-0000-0000-000000000000}"/>
-          </ac:spMkLst>
-        </pc:spChg>
-        <pc:spChg chg="mod">
-          <ac:chgData name="Zonghua Gu" userId="9a7e1853e1951ef5" providerId="LiveId" clId="{CF1FAA12-072C-4ED5-BA76-0FFFAEFDB88A}" dt="2025-09-21T23:15:26.630" v="29" actId="20577"/>
-          <ac:spMkLst>
-            <pc:docMk/>
-            <pc:sldMk cId="1683281344" sldId="256"/>
-            <ac:spMk id="3" creationId="{00000000-0000-0000-0000-000000000000}"/>
-          </ac:spMkLst>
-        </pc:spChg>
-        <pc:spChg chg="mod">
-          <ac:chgData name="Zonghua Gu" userId="9a7e1853e1951ef5" providerId="LiveId" clId="{CF1FAA12-072C-4ED5-BA76-0FFFAEFDB88A}" dt="2025-09-22T00:19:03.232" v="111" actId="20577"/>
-          <ac:spMkLst>
-            <pc:docMk/>
-            <pc:sldMk cId="1683281344" sldId="256"/>
-            <ac:spMk id="6" creationId="{00000000-0000-0000-0000-000000000000}"/>
-          </ac:spMkLst>
-        </pc:spChg>
-      </pc:sldChg>
-      <pc:sldChg chg="addSp delSp modSp new mod">
-        <pc:chgData name="Zonghua Gu" userId="9a7e1853e1951ef5" providerId="LiveId" clId="{CF1FAA12-072C-4ED5-BA76-0FFFAEFDB88A}" dt="2025-09-22T19:01:29.316" v="303" actId="20577"/>
-        <pc:sldMkLst>
-          <pc:docMk/>
-          <pc:sldMk cId="4120051107" sldId="257"/>
-        </pc:sldMkLst>
-        <pc:spChg chg="mod">
-          <ac:chgData name="Zonghua Gu" userId="9a7e1853e1951ef5" providerId="LiveId" clId="{CF1FAA12-072C-4ED5-BA76-0FFFAEFDB88A}" dt="2025-09-22T00:20:22.744" v="131" actId="20577"/>
-          <ac:spMkLst>
-            <pc:docMk/>
-            <pc:sldMk cId="4120051107" sldId="257"/>
-            <ac:spMk id="2" creationId="{53769777-22BA-A4F2-A717-CA88FA78E82B}"/>
-          </ac:spMkLst>
-        </pc:spChg>
-        <pc:spChg chg="mod">
-          <ac:chgData name="Zonghua Gu" userId="9a7e1853e1951ef5" providerId="LiveId" clId="{CF1FAA12-072C-4ED5-BA76-0FFFAEFDB88A}" dt="2025-09-22T19:01:29.316" v="303" actId="20577"/>
-          <ac:spMkLst>
-            <pc:docMk/>
-            <pc:sldMk cId="4120051107" sldId="257"/>
-            <ac:spMk id="4" creationId="{5998200F-E2E0-2FC9-A24B-3D85B65165B0}"/>
-          </ac:spMkLst>
-        </pc:spChg>
-        <pc:graphicFrameChg chg="add mod modGraphic">
-          <ac:chgData name="Zonghua Gu" userId="9a7e1853e1951ef5" providerId="LiveId" clId="{CF1FAA12-072C-4ED5-BA76-0FFFAEFDB88A}" dt="2025-09-22T00:24:02.177" v="170" actId="1076"/>
-          <ac:graphicFrameMkLst>
-            <pc:docMk/>
-            <pc:sldMk cId="4120051107" sldId="257"/>
-            <ac:graphicFrameMk id="5" creationId="{A554D579-850A-433C-2F4C-D7CBDE33F5FD}"/>
-          </ac:graphicFrameMkLst>
-        </pc:graphicFrameChg>
-        <pc:graphicFrameChg chg="add mod modGraphic">
-          <ac:chgData name="Zonghua Gu" userId="9a7e1853e1951ef5" providerId="LiveId" clId="{CF1FAA12-072C-4ED5-BA76-0FFFAEFDB88A}" dt="2025-09-22T00:25:52.962" v="266" actId="20577"/>
-          <ac:graphicFrameMkLst>
-            <pc:docMk/>
-            <pc:sldMk cId="4120051107" sldId="257"/>
-            <ac:graphicFrameMk id="7" creationId="{7F3EEF33-13EC-BB93-CE67-9DD4DBFC221D}"/>
-          </ac:graphicFrameMkLst>
-        </pc:graphicFrameChg>
-      </pc:sldChg>
-      <pc:sldChg chg="modSp add mod">
-        <pc:chgData name="Zonghua Gu" userId="9a7e1853e1951ef5" providerId="LiveId" clId="{CF1FAA12-072C-4ED5-BA76-0FFFAEFDB88A}" dt="2025-09-22T00:26:13.917" v="268" actId="207"/>
-        <pc:sldMkLst>
-          <pc:docMk/>
-          <pc:sldMk cId="1814278120" sldId="258"/>
-        </pc:sldMkLst>
-        <pc:spChg chg="mod">
-          <ac:chgData name="Zonghua Gu" userId="9a7e1853e1951ef5" providerId="LiveId" clId="{CF1FAA12-072C-4ED5-BA76-0FFFAEFDB88A}" dt="2025-09-22T00:24:43.848" v="185" actId="20577"/>
-          <ac:spMkLst>
-            <pc:docMk/>
-            <pc:sldMk cId="1814278120" sldId="258"/>
-            <ac:spMk id="2" creationId="{26AB2E9D-CA3F-A924-BCF5-E675F73BE73B}"/>
-          </ac:spMkLst>
-        </pc:spChg>
-        <pc:spChg chg="mod">
-          <ac:chgData name="Zonghua Gu" userId="9a7e1853e1951ef5" providerId="LiveId" clId="{CF1FAA12-072C-4ED5-BA76-0FFFAEFDB88A}" dt="2025-09-22T00:26:11.430" v="267" actId="14100"/>
-          <ac:spMkLst>
-            <pc:docMk/>
-            <pc:sldMk cId="1814278120" sldId="258"/>
-            <ac:spMk id="4" creationId="{888CA4B8-E23A-61B6-D388-BD1EFFC38D5F}"/>
-          </ac:spMkLst>
-        </pc:spChg>
-        <pc:graphicFrameChg chg="mod modGraphic">
-          <ac:chgData name="Zonghua Gu" userId="9a7e1853e1951ef5" providerId="LiveId" clId="{CF1FAA12-072C-4ED5-BA76-0FFFAEFDB88A}" dt="2025-09-22T00:26:13.917" v="268" actId="207"/>
-          <ac:graphicFrameMkLst>
-            <pc:docMk/>
-            <pc:sldMk cId="1814278120" sldId="258"/>
-            <ac:graphicFrameMk id="7" creationId="{63F81107-A59E-5244-C57F-4AFF69A7D613}"/>
-          </ac:graphicFrameMkLst>
-        </pc:graphicFrameChg>
-      </pc:sldChg>
       <pc:sldChg chg="addSp delSp modSp add mod">
         <pc:chgData name="Zonghua Gu" userId="9a7e1853e1951ef5" providerId="LiveId" clId="{CF1FAA12-072C-4ED5-BA76-0FFFAEFDB88A}" dt="2025-10-21T19:42:10.489" v="3386" actId="404"/>
         <pc:sldMkLst>
           <pc:docMk/>
           <pc:sldMk cId="3884894996" sldId="260"/>
         </pc:sldMkLst>
-        <pc:spChg chg="mod">
-          <ac:chgData name="Zonghua Gu" userId="9a7e1853e1951ef5" providerId="LiveId" clId="{CF1FAA12-072C-4ED5-BA76-0FFFAEFDB88A}" dt="2025-09-22T19:04:35.554" v="335" actId="20577"/>
-          <ac:spMkLst>
-            <pc:docMk/>
-            <pc:sldMk cId="3884894996" sldId="260"/>
-            <ac:spMk id="2" creationId="{24322505-1263-8867-CBD4-3845DB776BF0}"/>
-          </ac:spMkLst>
-        </pc:spChg>
         <pc:spChg chg="mod">
           <ac:chgData name="Zonghua Gu" userId="9a7e1853e1951ef5" providerId="LiveId" clId="{CF1FAA12-072C-4ED5-BA76-0FFFAEFDB88A}" dt="2025-10-21T19:42:10.489" v="3386" actId="404"/>
           <ac:spMkLst>
@@ -301,205 +195,6 @@
             <ac:spMk id="4" creationId="{36843E04-780F-8745-F7A3-B8C73E674D4A}"/>
           </ac:spMkLst>
         </pc:spChg>
-        <pc:spChg chg="add mod">
-          <ac:chgData name="Zonghua Gu" userId="9a7e1853e1951ef5" providerId="LiveId" clId="{CF1FAA12-072C-4ED5-BA76-0FFFAEFDB88A}" dt="2025-09-22T19:29:15.294" v="609" actId="1038"/>
-          <ac:spMkLst>
-            <pc:docMk/>
-            <pc:sldMk cId="3884894996" sldId="260"/>
-            <ac:spMk id="9" creationId="{FBE0A9DC-0F13-5E17-C834-D68F85D8A1B9}"/>
-          </ac:spMkLst>
-        </pc:spChg>
-        <pc:spChg chg="add mod">
-          <ac:chgData name="Zonghua Gu" userId="9a7e1853e1951ef5" providerId="LiveId" clId="{CF1FAA12-072C-4ED5-BA76-0FFFAEFDB88A}" dt="2025-09-22T19:30:14.892" v="628" actId="1076"/>
-          <ac:spMkLst>
-            <pc:docMk/>
-            <pc:sldMk cId="3884894996" sldId="260"/>
-            <ac:spMk id="10" creationId="{DE97FC87-43CF-4901-CF7A-C5C93E8F3712}"/>
-          </ac:spMkLst>
-        </pc:spChg>
-        <pc:spChg chg="add mod">
-          <ac:chgData name="Zonghua Gu" userId="9a7e1853e1951ef5" providerId="LiveId" clId="{CF1FAA12-072C-4ED5-BA76-0FFFAEFDB88A}" dt="2025-09-22T19:30:14.892" v="628" actId="1076"/>
-          <ac:spMkLst>
-            <pc:docMk/>
-            <pc:sldMk cId="3884894996" sldId="260"/>
-            <ac:spMk id="12" creationId="{B243B488-2D7A-A8C2-598C-7289DABA24B7}"/>
-          </ac:spMkLst>
-        </pc:spChg>
-        <pc:spChg chg="add mod">
-          <ac:chgData name="Zonghua Gu" userId="9a7e1853e1951ef5" providerId="LiveId" clId="{CF1FAA12-072C-4ED5-BA76-0FFFAEFDB88A}" dt="2025-09-22T19:30:14.892" v="628" actId="1076"/>
-          <ac:spMkLst>
-            <pc:docMk/>
-            <pc:sldMk cId="3884894996" sldId="260"/>
-            <ac:spMk id="13" creationId="{EA6F7C4A-B9A7-2468-84A3-CDFC9A75A5CB}"/>
-          </ac:spMkLst>
-        </pc:spChg>
-        <pc:spChg chg="add mod">
-          <ac:chgData name="Zonghua Gu" userId="9a7e1853e1951ef5" providerId="LiveId" clId="{CF1FAA12-072C-4ED5-BA76-0FFFAEFDB88A}" dt="2025-09-22T19:30:14.892" v="628" actId="1076"/>
-          <ac:spMkLst>
-            <pc:docMk/>
-            <pc:sldMk cId="3884894996" sldId="260"/>
-            <ac:spMk id="15" creationId="{89C82B0B-D220-355C-C11A-2B105F6B47A5}"/>
-          </ac:spMkLst>
-        </pc:spChg>
-        <pc:spChg chg="add mod">
-          <ac:chgData name="Zonghua Gu" userId="9a7e1853e1951ef5" providerId="LiveId" clId="{CF1FAA12-072C-4ED5-BA76-0FFFAEFDB88A}" dt="2025-09-22T19:30:14.892" v="628" actId="1076"/>
-          <ac:spMkLst>
-            <pc:docMk/>
-            <pc:sldMk cId="3884894996" sldId="260"/>
-            <ac:spMk id="16" creationId="{AB622E9D-674E-4337-516D-F1611B40B59F}"/>
-          </ac:spMkLst>
-        </pc:spChg>
-        <pc:spChg chg="add mod">
-          <ac:chgData name="Zonghua Gu" userId="9a7e1853e1951ef5" providerId="LiveId" clId="{CF1FAA12-072C-4ED5-BA76-0FFFAEFDB88A}" dt="2025-09-22T19:30:14.892" v="628" actId="1076"/>
-          <ac:spMkLst>
-            <pc:docMk/>
-            <pc:sldMk cId="3884894996" sldId="260"/>
-            <ac:spMk id="17" creationId="{89FABA7E-D88F-B22C-2671-4103A5520001}"/>
-          </ac:spMkLst>
-        </pc:spChg>
-        <pc:spChg chg="add mod">
-          <ac:chgData name="Zonghua Gu" userId="9a7e1853e1951ef5" providerId="LiveId" clId="{CF1FAA12-072C-4ED5-BA76-0FFFAEFDB88A}" dt="2025-09-22T19:30:14.892" v="628" actId="1076"/>
-          <ac:spMkLst>
-            <pc:docMk/>
-            <pc:sldMk cId="3884894996" sldId="260"/>
-            <ac:spMk id="18" creationId="{575A4558-8CD1-5604-11F5-98FCE4191B47}"/>
-          </ac:spMkLst>
-        </pc:spChg>
-        <pc:spChg chg="add mod">
-          <ac:chgData name="Zonghua Gu" userId="9a7e1853e1951ef5" providerId="LiveId" clId="{CF1FAA12-072C-4ED5-BA76-0FFFAEFDB88A}" dt="2025-09-22T19:30:33.802" v="632" actId="1076"/>
-          <ac:spMkLst>
-            <pc:docMk/>
-            <pc:sldMk cId="3884894996" sldId="260"/>
-            <ac:spMk id="20" creationId="{2F85393E-30E2-EDCD-D332-A91D6B997220}"/>
-          </ac:spMkLst>
-        </pc:spChg>
-        <pc:spChg chg="add mod">
-          <ac:chgData name="Zonghua Gu" userId="9a7e1853e1951ef5" providerId="LiveId" clId="{CF1FAA12-072C-4ED5-BA76-0FFFAEFDB88A}" dt="2025-09-22T19:30:33.802" v="632" actId="1076"/>
-          <ac:spMkLst>
-            <pc:docMk/>
-            <pc:sldMk cId="3884894996" sldId="260"/>
-            <ac:spMk id="21" creationId="{4524FD91-BDC9-DC17-142A-13AD5F27DA31}"/>
-          </ac:spMkLst>
-        </pc:spChg>
-        <pc:spChg chg="add mod">
-          <ac:chgData name="Zonghua Gu" userId="9a7e1853e1951ef5" providerId="LiveId" clId="{CF1FAA12-072C-4ED5-BA76-0FFFAEFDB88A}" dt="2025-09-22T19:31:17.989" v="655" actId="1076"/>
-          <ac:spMkLst>
-            <pc:docMk/>
-            <pc:sldMk cId="3884894996" sldId="260"/>
-            <ac:spMk id="22" creationId="{875DABEC-3EAE-282B-99E0-5AD8630AFE37}"/>
-          </ac:spMkLst>
-        </pc:spChg>
-        <pc:graphicFrameChg chg="add mod">
-          <ac:chgData name="Zonghua Gu" userId="9a7e1853e1951ef5" providerId="LiveId" clId="{CF1FAA12-072C-4ED5-BA76-0FFFAEFDB88A}" dt="2025-09-22T19:28:38.019" v="598" actId="1076"/>
-          <ac:graphicFrameMkLst>
-            <pc:docMk/>
-            <pc:sldMk cId="3884894996" sldId="260"/>
-            <ac:graphicFrameMk id="8" creationId="{03308E94-A0F6-359D-717D-891E2E630EAB}"/>
-          </ac:graphicFrameMkLst>
-        </pc:graphicFrameChg>
-        <pc:graphicFrameChg chg="mod">
-          <ac:chgData name="Zonghua Gu" userId="9a7e1853e1951ef5" providerId="LiveId" clId="{CF1FAA12-072C-4ED5-BA76-0FFFAEFDB88A}" dt="2025-09-22T19:30:02.517" v="626" actId="1076"/>
-          <ac:graphicFrameMkLst>
-            <pc:docMk/>
-            <pc:sldMk cId="3884894996" sldId="260"/>
-            <ac:graphicFrameMk id="11" creationId="{F41DF45E-6835-8E25-656C-8E8DC4631F0E}"/>
-          </ac:graphicFrameMkLst>
-        </pc:graphicFrameChg>
-        <pc:graphicFrameChg chg="add mod">
-          <ac:chgData name="Zonghua Gu" userId="9a7e1853e1951ef5" providerId="LiveId" clId="{CF1FAA12-072C-4ED5-BA76-0FFFAEFDB88A}" dt="2025-09-22T19:29:58.746" v="625" actId="1076"/>
-          <ac:graphicFrameMkLst>
-            <pc:docMk/>
-            <pc:sldMk cId="3884894996" sldId="260"/>
-            <ac:graphicFrameMk id="14" creationId="{D915B79B-0559-150B-208E-D718B7EC52C1}"/>
-          </ac:graphicFrameMkLst>
-        </pc:graphicFrameChg>
-        <pc:graphicFrameChg chg="add mod modGraphic">
-          <ac:chgData name="Zonghua Gu" userId="9a7e1853e1951ef5" providerId="LiveId" clId="{CF1FAA12-072C-4ED5-BA76-0FFFAEFDB88A}" dt="2025-09-22T19:30:37.736" v="633" actId="6549"/>
-          <ac:graphicFrameMkLst>
-            <pc:docMk/>
-            <pc:sldMk cId="3884894996" sldId="260"/>
-            <ac:graphicFrameMk id="19" creationId="{138764CE-BAA4-9C81-9732-4DD4B550914C}"/>
-          </ac:graphicFrameMkLst>
-        </pc:graphicFrameChg>
-      </pc:sldChg>
-      <pc:sldChg chg="addSp delSp modSp new mod">
-        <pc:chgData name="Zonghua Gu" userId="9a7e1853e1951ef5" providerId="LiveId" clId="{CF1FAA12-072C-4ED5-BA76-0FFFAEFDB88A}" dt="2025-09-22T19:27:41.816" v="549"/>
-        <pc:sldMkLst>
-          <pc:docMk/>
-          <pc:sldMk cId="437885179" sldId="261"/>
-        </pc:sldMkLst>
-        <pc:spChg chg="mod">
-          <ac:chgData name="Zonghua Gu" userId="9a7e1853e1951ef5" providerId="LiveId" clId="{CF1FAA12-072C-4ED5-BA76-0FFFAEFDB88A}" dt="2025-09-22T19:27:14.223" v="541" actId="20577"/>
-          <ac:spMkLst>
-            <pc:docMk/>
-            <pc:sldMk cId="437885179" sldId="261"/>
-            <ac:spMk id="2" creationId="{A840350A-DE76-846E-5AB2-1DE2EDB0E9E9}"/>
-          </ac:spMkLst>
-        </pc:spChg>
-        <pc:spChg chg="add del mod">
-          <ac:chgData name="Zonghua Gu" userId="9a7e1853e1951ef5" providerId="LiveId" clId="{CF1FAA12-072C-4ED5-BA76-0FFFAEFDB88A}" dt="2025-09-22T19:22:58.977" v="495" actId="14100"/>
-          <ac:spMkLst>
-            <pc:docMk/>
-            <pc:sldMk cId="437885179" sldId="261"/>
-            <ac:spMk id="4" creationId="{F8B814FC-F419-027A-EA4D-935437EEAA0E}"/>
-          </ac:spMkLst>
-        </pc:spChg>
-        <pc:spChg chg="add mod">
-          <ac:chgData name="Zonghua Gu" userId="9a7e1853e1951ef5" providerId="LiveId" clId="{CF1FAA12-072C-4ED5-BA76-0FFFAEFDB88A}" dt="2025-09-22T19:23:54.528" v="512" actId="1076"/>
-          <ac:spMkLst>
-            <pc:docMk/>
-            <pc:sldMk cId="437885179" sldId="261"/>
-            <ac:spMk id="8" creationId="{21C00B18-AB39-00EF-930D-94A66B3DBEEE}"/>
-          </ac:spMkLst>
-        </pc:spChg>
-        <pc:spChg chg="add mod">
-          <ac:chgData name="Zonghua Gu" userId="9a7e1853e1951ef5" providerId="LiveId" clId="{CF1FAA12-072C-4ED5-BA76-0FFFAEFDB88A}" dt="2025-09-22T19:23:54.528" v="512" actId="1076"/>
-          <ac:spMkLst>
-            <pc:docMk/>
-            <pc:sldMk cId="437885179" sldId="261"/>
-            <ac:spMk id="9" creationId="{2D771397-E6F5-FBB8-542D-C5B13309CE80}"/>
-          </ac:spMkLst>
-        </pc:spChg>
-        <pc:spChg chg="add mod">
-          <ac:chgData name="Zonghua Gu" userId="9a7e1853e1951ef5" providerId="LiveId" clId="{CF1FAA12-072C-4ED5-BA76-0FFFAEFDB88A}" dt="2025-09-22T19:23:58.413" v="513" actId="1076"/>
-          <ac:spMkLst>
-            <pc:docMk/>
-            <pc:sldMk cId="437885179" sldId="261"/>
-            <ac:spMk id="16" creationId="{F8C9E426-19B3-C381-5E30-7C2FF94F96E8}"/>
-          </ac:spMkLst>
-        </pc:spChg>
-        <pc:spChg chg="add mod">
-          <ac:chgData name="Zonghua Gu" userId="9a7e1853e1951ef5" providerId="LiveId" clId="{CF1FAA12-072C-4ED5-BA76-0FFFAEFDB88A}" dt="2025-09-22T19:27:41.816" v="549"/>
-          <ac:spMkLst>
-            <pc:docMk/>
-            <pc:sldMk cId="437885179" sldId="261"/>
-            <ac:spMk id="22" creationId="{8C3A0F5D-E35F-6473-85B4-E60E6B15F6BA}"/>
-          </ac:spMkLst>
-        </pc:spChg>
-        <pc:graphicFrameChg chg="add mod modGraphic">
-          <ac:chgData name="Zonghua Gu" userId="9a7e1853e1951ef5" providerId="LiveId" clId="{CF1FAA12-072C-4ED5-BA76-0FFFAEFDB88A}" dt="2025-09-22T19:23:54.528" v="512" actId="1076"/>
-          <ac:graphicFrameMkLst>
-            <pc:docMk/>
-            <pc:sldMk cId="437885179" sldId="261"/>
-            <ac:graphicFrameMk id="7" creationId="{9CA273F4-CE16-CD49-EA0C-05FC3BE81836}"/>
-          </ac:graphicFrameMkLst>
-        </pc:graphicFrameChg>
-        <pc:graphicFrameChg chg="add mod modGraphic">
-          <ac:chgData name="Zonghua Gu" userId="9a7e1853e1951ef5" providerId="LiveId" clId="{CF1FAA12-072C-4ED5-BA76-0FFFAEFDB88A}" dt="2025-09-22T19:27:24.138" v="543" actId="6549"/>
-          <ac:graphicFrameMkLst>
-            <pc:docMk/>
-            <pc:sldMk cId="437885179" sldId="261"/>
-            <ac:graphicFrameMk id="10" creationId="{769E05C3-D653-26B3-A1FA-DB8D01C197A6}"/>
-          </ac:graphicFrameMkLst>
-        </pc:graphicFrameChg>
-        <pc:graphicFrameChg chg="add mod">
-          <ac:chgData name="Zonghua Gu" userId="9a7e1853e1951ef5" providerId="LiveId" clId="{CF1FAA12-072C-4ED5-BA76-0FFFAEFDB88A}" dt="2025-09-22T19:24:02.176" v="514" actId="1076"/>
-          <ac:graphicFrameMkLst>
-            <pc:docMk/>
-            <pc:sldMk cId="437885179" sldId="261"/>
-            <ac:graphicFrameMk id="13" creationId="{E2800F77-7DAB-31B4-1921-A01DE4EBD781}"/>
-          </ac:graphicFrameMkLst>
-        </pc:graphicFrameChg>
       </pc:sldChg>
       <pc:sldChg chg="addSp modSp add mod">
         <pc:chgData name="Zonghua Gu" userId="9a7e1853e1951ef5" providerId="LiveId" clId="{CF1FAA12-072C-4ED5-BA76-0FFFAEFDB88A}" dt="2025-10-21T19:37:33.325" v="3284" actId="20577"/>
@@ -544,21 +239,6 @@
             <pc:docMk/>
             <pc:sldMk cId="245926897" sldId="264"/>
             <ac:spMk id="32" creationId="{00000000-0000-0000-0000-000000000000}"/>
-          </ac:spMkLst>
-        </pc:spChg>
-      </pc:sldChg>
-      <pc:sldChg chg="addSp modSp add del">
-        <pc:chgData name="Zonghua Gu" userId="9a7e1853e1951ef5" providerId="LiveId" clId="{CF1FAA12-072C-4ED5-BA76-0FFFAEFDB88A}" dt="2025-10-21T20:14:22.017" v="3564" actId="47"/>
-        <pc:sldMkLst>
-          <pc:docMk/>
-          <pc:sldMk cId="850150354" sldId="266"/>
-        </pc:sldMkLst>
-        <pc:spChg chg="add mod">
-          <ac:chgData name="Zonghua Gu" userId="9a7e1853e1951ef5" providerId="LiveId" clId="{CF1FAA12-072C-4ED5-BA76-0FFFAEFDB88A}" dt="2025-10-21T20:10:00.961" v="3560"/>
-          <ac:spMkLst>
-            <pc:docMk/>
-            <pc:sldMk cId="850150354" sldId="266"/>
-            <ac:spMk id="9" creationId="{131F50E9-CB9C-E683-5DE6-2789F9C0D245}"/>
           </ac:spMkLst>
         </pc:spChg>
       </pc:sldChg>
@@ -630,14 +310,6 @@
           <pc:sldMk cId="465749855" sldId="280"/>
         </pc:sldMkLst>
         <pc:spChg chg="mod">
-          <ac:chgData name="Zonghua Gu" userId="9a7e1853e1951ef5" providerId="LiveId" clId="{CF1FAA12-072C-4ED5-BA76-0FFFAEFDB88A}" dt="2025-09-22T19:35:22.290" v="662" actId="20577"/>
-          <ac:spMkLst>
-            <pc:docMk/>
-            <pc:sldMk cId="465749855" sldId="280"/>
-            <ac:spMk id="2" creationId="{8CE305BA-4383-D05A-A09F-E8888E979ED1}"/>
-          </ac:spMkLst>
-        </pc:spChg>
-        <pc:spChg chg="mod">
           <ac:chgData name="Zonghua Gu" userId="9a7e1853e1951ef5" providerId="LiveId" clId="{CF1FAA12-072C-4ED5-BA76-0FFFAEFDB88A}" dt="2025-09-25T15:30:53.953" v="2335" actId="27636"/>
           <ac:spMkLst>
             <pc:docMk/>
@@ -645,30 +317,6 @@
             <ac:spMk id="4" creationId="{D196B1B3-16B9-7552-E252-1625434D0362}"/>
           </ac:spMkLst>
         </pc:spChg>
-        <pc:spChg chg="mod">
-          <ac:chgData name="Zonghua Gu" userId="9a7e1853e1951ef5" providerId="LiveId" clId="{CF1FAA12-072C-4ED5-BA76-0FFFAEFDB88A}" dt="2025-09-22T19:35:54.081" v="674"/>
-          <ac:spMkLst>
-            <pc:docMk/>
-            <pc:sldMk cId="465749855" sldId="280"/>
-            <ac:spMk id="22" creationId="{48B69D91-DFE6-88E9-7060-DADED4F5332B}"/>
-          </ac:spMkLst>
-        </pc:spChg>
-        <pc:graphicFrameChg chg="modGraphic">
-          <ac:chgData name="Zonghua Gu" userId="9a7e1853e1951ef5" providerId="LiveId" clId="{CF1FAA12-072C-4ED5-BA76-0FFFAEFDB88A}" dt="2025-09-22T19:35:40.019" v="666" actId="6549"/>
-          <ac:graphicFrameMkLst>
-            <pc:docMk/>
-            <pc:sldMk cId="465749855" sldId="280"/>
-            <ac:graphicFrameMk id="11" creationId="{048D6398-3761-E3BF-934F-679B116555DD}"/>
-          </ac:graphicFrameMkLst>
-        </pc:graphicFrameChg>
-        <pc:graphicFrameChg chg="modGraphic">
-          <ac:chgData name="Zonghua Gu" userId="9a7e1853e1951ef5" providerId="LiveId" clId="{CF1FAA12-072C-4ED5-BA76-0FFFAEFDB88A}" dt="2025-09-22T19:35:44.420" v="670" actId="6549"/>
-          <ac:graphicFrameMkLst>
-            <pc:docMk/>
-            <pc:sldMk cId="465749855" sldId="280"/>
-            <ac:graphicFrameMk id="14" creationId="{CC6440A4-115E-9454-B8B0-2DAC5F2E8E85}"/>
-          </ac:graphicFrameMkLst>
-        </pc:graphicFrameChg>
       </pc:sldChg>
       <pc:sldChg chg="addSp delSp modSp new mod modNotes">
         <pc:chgData name="Zonghua Gu" userId="9a7e1853e1951ef5" providerId="LiveId" clId="{CF1FAA12-072C-4ED5-BA76-0FFFAEFDB88A}" dt="2025-09-23T02:41:07.197" v="1176" actId="1076"/>
@@ -834,13 +482,6 @@
           </ac:graphicFrameMkLst>
         </pc:graphicFrameChg>
       </pc:sldChg>
-      <pc:sldChg chg="addSp modSp add del mod">
-        <pc:chgData name="Zonghua Gu" userId="9a7e1853e1951ef5" providerId="LiveId" clId="{CF1FAA12-072C-4ED5-BA76-0FFFAEFDB88A}" dt="2025-10-21T20:14:37.833" v="3565" actId="2696"/>
-        <pc:sldMkLst>
-          <pc:docMk/>
-          <pc:sldMk cId="2083494270" sldId="352"/>
-        </pc:sldMkLst>
-      </pc:sldChg>
       <pc:sldChg chg="addSp modSp new mod">
         <pc:chgData name="Zonghua Gu" userId="9a7e1853e1951ef5" providerId="LiveId" clId="{CF1FAA12-072C-4ED5-BA76-0FFFAEFDB88A}" dt="2025-10-05T02:52:41.917" v="2822" actId="20577"/>
         <pc:sldMkLst>
@@ -911,60 +552,19 @@
           </ac:spMkLst>
         </pc:spChg>
       </pc:sldChg>
+      <pc:sldChg chg="add">
+        <pc:chgData name="Zonghua Gu" userId="9a7e1853e1951ef5" providerId="LiveId" clId="{CF1FAA12-072C-4ED5-BA76-0FFFAEFDB88A}" dt="2025-10-23T19:57:26.363" v="4078"/>
+        <pc:sldMkLst>
+          <pc:docMk/>
+          <pc:sldMk cId="1735197848" sldId="367"/>
+        </pc:sldMkLst>
+      </pc:sldChg>
       <pc:sldChg chg="addSp modSp add del mod">
-        <pc:chgData name="Zonghua Gu" userId="9a7e1853e1951ef5" providerId="LiveId" clId="{CF1FAA12-072C-4ED5-BA76-0FFFAEFDB88A}" dt="2025-10-05T02:28:26.358" v="2494" actId="1076"/>
+        <pc:chgData name="Zonghua Gu" userId="9a7e1853e1951ef5" providerId="LiveId" clId="{CF1FAA12-072C-4ED5-BA76-0FFFAEFDB88A}" dt="2025-10-23T19:57:23.420" v="4077" actId="2696"/>
         <pc:sldMkLst>
           <pc:docMk/>
           <pc:sldMk cId="4257716461" sldId="367"/>
         </pc:sldMkLst>
-        <pc:spChg chg="mod">
-          <ac:chgData name="Zonghua Gu" userId="9a7e1853e1951ef5" providerId="LiveId" clId="{CF1FAA12-072C-4ED5-BA76-0FFFAEFDB88A}" dt="2025-10-05T02:27:35.787" v="2478" actId="20577"/>
-          <ac:spMkLst>
-            <pc:docMk/>
-            <pc:sldMk cId="4257716461" sldId="367"/>
-            <ac:spMk id="2" creationId="{00000000-0000-0000-0000-000000000000}"/>
-          </ac:spMkLst>
-        </pc:spChg>
-        <pc:spChg chg="add mod">
-          <ac:chgData name="Zonghua Gu" userId="9a7e1853e1951ef5" providerId="LiveId" clId="{CF1FAA12-072C-4ED5-BA76-0FFFAEFDB88A}" dt="2025-10-05T02:27:40.746" v="2479" actId="14100"/>
-          <ac:spMkLst>
-            <pc:docMk/>
-            <pc:sldMk cId="4257716461" sldId="367"/>
-            <ac:spMk id="4" creationId="{42BCDBB7-71A9-FB4A-2F12-ED2860D67D85}"/>
-          </ac:spMkLst>
-        </pc:spChg>
-        <pc:spChg chg="mod">
-          <ac:chgData name="Zonghua Gu" userId="9a7e1853e1951ef5" providerId="LiveId" clId="{CF1FAA12-072C-4ED5-BA76-0FFFAEFDB88A}" dt="2025-10-05T02:28:26.358" v="2494" actId="1076"/>
-          <ac:spMkLst>
-            <pc:docMk/>
-            <pc:sldMk cId="4257716461" sldId="367"/>
-            <ac:spMk id="10" creationId="{00000000-0000-0000-0000-000000000000}"/>
-          </ac:spMkLst>
-        </pc:spChg>
-        <pc:spChg chg="mod">
-          <ac:chgData name="Zonghua Gu" userId="9a7e1853e1951ef5" providerId="LiveId" clId="{CF1FAA12-072C-4ED5-BA76-0FFFAEFDB88A}" dt="2025-10-05T02:28:20.362" v="2492" actId="555"/>
-          <ac:spMkLst>
-            <pc:docMk/>
-            <pc:sldMk cId="4257716461" sldId="367"/>
-            <ac:spMk id="12" creationId="{00000000-0000-0000-0000-000000000000}"/>
-          </ac:spMkLst>
-        </pc:spChg>
-        <pc:spChg chg="mod">
-          <ac:chgData name="Zonghua Gu" userId="9a7e1853e1951ef5" providerId="LiveId" clId="{CF1FAA12-072C-4ED5-BA76-0FFFAEFDB88A}" dt="2025-10-05T02:28:20.362" v="2492" actId="555"/>
-          <ac:spMkLst>
-            <pc:docMk/>
-            <pc:sldMk cId="4257716461" sldId="367"/>
-            <ac:spMk id="13" creationId="{00000000-0000-0000-0000-000000000000}"/>
-          </ac:spMkLst>
-        </pc:spChg>
-        <pc:spChg chg="add mod">
-          <ac:chgData name="Zonghua Gu" userId="9a7e1853e1951ef5" providerId="LiveId" clId="{CF1FAA12-072C-4ED5-BA76-0FFFAEFDB88A}" dt="2025-10-05T02:28:20.362" v="2492" actId="555"/>
-          <ac:spMkLst>
-            <pc:docMk/>
-            <pc:sldMk cId="4257716461" sldId="367"/>
-            <ac:spMk id="14" creationId="{778CF141-54B6-E918-D23B-B3681FDA3C22}"/>
-          </ac:spMkLst>
-        </pc:spChg>
       </pc:sldChg>
       <pc:sldChg chg="modSp add del mod">
         <pc:chgData name="Zonghua Gu" userId="9a7e1853e1951ef5" providerId="LiveId" clId="{CF1FAA12-072C-4ED5-BA76-0FFFAEFDB88A}" dt="2025-10-05T02:24:06.560" v="2425" actId="20577"/>
@@ -1020,47 +620,30 @@
           </ac:spMkLst>
         </pc:spChg>
       </pc:sldChg>
-      <pc:sldChg chg="modSp add mod">
-        <pc:chgData name="Zonghua Gu" userId="9a7e1853e1951ef5" providerId="LiveId" clId="{CF1FAA12-072C-4ED5-BA76-0FFFAEFDB88A}" dt="2025-10-05T02:28:53.216" v="2506" actId="20577"/>
+      <pc:sldChg chg="modSp add del mod">
+        <pc:chgData name="Zonghua Gu" userId="9a7e1853e1951ef5" providerId="LiveId" clId="{CF1FAA12-072C-4ED5-BA76-0FFFAEFDB88A}" dt="2025-10-23T19:57:23.420" v="4077" actId="2696"/>
         <pc:sldMkLst>
           <pc:docMk/>
           <pc:sldMk cId="2574940037" sldId="374"/>
         </pc:sldMkLst>
         <pc:spChg chg="mod">
-          <ac:chgData name="Zonghua Gu" userId="9a7e1853e1951ef5" providerId="LiveId" clId="{CF1FAA12-072C-4ED5-BA76-0FFFAEFDB88A}" dt="2025-10-05T02:28:42.006" v="2496" actId="14100"/>
+          <ac:chgData name="Zonghua Gu" userId="9a7e1853e1951ef5" providerId="LiveId" clId="{CF1FAA12-072C-4ED5-BA76-0FFFAEFDB88A}" dt="2025-10-23T19:56:49.108" v="4075" actId="20577"/>
           <ac:spMkLst>
             <pc:docMk/>
             <pc:sldMk cId="2574940037" sldId="374"/>
-            <ac:spMk id="4" creationId="{72717BE0-5FBD-4A0E-563C-52EA77FE0BE1}"/>
-          </ac:spMkLst>
-        </pc:spChg>
-        <pc:spChg chg="mod">
-          <ac:chgData name="Zonghua Gu" userId="9a7e1853e1951ef5" providerId="LiveId" clId="{CF1FAA12-072C-4ED5-BA76-0FFFAEFDB88A}" dt="2025-10-05T02:28:46.147" v="2498" actId="20577"/>
-          <ac:spMkLst>
-            <pc:docMk/>
-            <pc:sldMk cId="2574940037" sldId="374"/>
-            <ac:spMk id="10" creationId="{0CE50D12-7EEF-2322-4458-9E6BB251A31B}"/>
-          </ac:spMkLst>
-        </pc:spChg>
-        <pc:spChg chg="mod">
-          <ac:chgData name="Zonghua Gu" userId="9a7e1853e1951ef5" providerId="LiveId" clId="{CF1FAA12-072C-4ED5-BA76-0FFFAEFDB88A}" dt="2025-10-05T02:28:48.069" v="2500" actId="20577"/>
-          <ac:spMkLst>
-            <pc:docMk/>
-            <pc:sldMk cId="2574940037" sldId="374"/>
-            <ac:spMk id="12" creationId="{1BF6FCE4-B778-D891-A539-32C9F31C665C}"/>
-          </ac:spMkLst>
-        </pc:spChg>
-        <pc:spChg chg="mod">
-          <ac:chgData name="Zonghua Gu" userId="9a7e1853e1951ef5" providerId="LiveId" clId="{CF1FAA12-072C-4ED5-BA76-0FFFAEFDB88A}" dt="2025-10-05T02:28:53.216" v="2506" actId="20577"/>
-          <ac:spMkLst>
-            <pc:docMk/>
-            <pc:sldMk cId="2574940037" sldId="374"/>
-            <ac:spMk id="13" creationId="{92808386-3B22-1A70-1D2E-E9457F9ACA75}"/>
+            <ac:spMk id="23" creationId="{2A09A543-6103-44EB-8B1D-8744EF784763}"/>
           </ac:spMkLst>
         </pc:spChg>
       </pc:sldChg>
+      <pc:sldChg chg="add">
+        <pc:chgData name="Zonghua Gu" userId="9a7e1853e1951ef5" providerId="LiveId" clId="{CF1FAA12-072C-4ED5-BA76-0FFFAEFDB88A}" dt="2025-10-23T19:57:26.363" v="4078"/>
+        <pc:sldMkLst>
+          <pc:docMk/>
+          <pc:sldMk cId="2918065515" sldId="374"/>
+        </pc:sldMkLst>
+      </pc:sldChg>
       <pc:sldChg chg="modSp add mod">
-        <pc:chgData name="Zonghua Gu" userId="9a7e1853e1951ef5" providerId="LiveId" clId="{CF1FAA12-072C-4ED5-BA76-0FFFAEFDB88A}" dt="2025-10-05T02:35:31.975" v="2511" actId="20577"/>
+        <pc:chgData name="Zonghua Gu" userId="9a7e1853e1951ef5" providerId="LiveId" clId="{CF1FAA12-072C-4ED5-BA76-0FFFAEFDB88A}" dt="2025-10-23T20:19:59.757" v="4231" actId="6549"/>
         <pc:sldMkLst>
           <pc:docMk/>
           <pc:sldMk cId="2017314449" sldId="751"/>
@@ -1073,9 +656,17 @@
             <ac:spMk id="2" creationId="{27B41483-7081-C44C-81EF-D92F00104765}"/>
           </ac:spMkLst>
         </pc:spChg>
+        <pc:spChg chg="mod">
+          <ac:chgData name="Zonghua Gu" userId="9a7e1853e1951ef5" providerId="LiveId" clId="{CF1FAA12-072C-4ED5-BA76-0FFFAEFDB88A}" dt="2025-10-23T20:19:59.757" v="4231" actId="6549"/>
+          <ac:spMkLst>
+            <pc:docMk/>
+            <pc:sldMk cId="2017314449" sldId="751"/>
+            <ac:spMk id="7" creationId="{B2D23A4E-8569-6941-84A9-89F1C41E64AF}"/>
+          </ac:spMkLst>
+        </pc:spChg>
       </pc:sldChg>
-      <pc:sldChg chg="modSp add mod">
-        <pc:chgData name="Zonghua Gu" userId="9a7e1853e1951ef5" providerId="LiveId" clId="{CF1FAA12-072C-4ED5-BA76-0FFFAEFDB88A}" dt="2025-10-05T02:35:44.949" v="2514" actId="20577"/>
+      <pc:sldChg chg="addSp delSp modSp add mod">
+        <pc:chgData name="Zonghua Gu" userId="9a7e1853e1951ef5" providerId="LiveId" clId="{CF1FAA12-072C-4ED5-BA76-0FFFAEFDB88A}" dt="2025-10-23T20:22:22.597" v="4275" actId="27636"/>
         <pc:sldMkLst>
           <pc:docMk/>
           <pc:sldMk cId="658532706" sldId="752"/>
@@ -1088,13 +679,109 @@
             <ac:spMk id="2" creationId="{27B41483-7081-C44C-81EF-D92F00104765}"/>
           </ac:spMkLst>
         </pc:spChg>
+        <pc:spChg chg="del mod">
+          <ac:chgData name="Zonghua Gu" userId="9a7e1853e1951ef5" providerId="LiveId" clId="{CF1FAA12-072C-4ED5-BA76-0FFFAEFDB88A}" dt="2025-10-23T20:10:26.135" v="4110" actId="478"/>
+          <ac:spMkLst>
+            <pc:docMk/>
+            <pc:sldMk cId="658532706" sldId="752"/>
+            <ac:spMk id="4" creationId="{97230E48-4625-B845-9B62-549F2F03DD9E}"/>
+          </ac:spMkLst>
+        </pc:spChg>
+        <pc:spChg chg="mod">
+          <ac:chgData name="Zonghua Gu" userId="9a7e1853e1951ef5" providerId="LiveId" clId="{CF1FAA12-072C-4ED5-BA76-0FFFAEFDB88A}" dt="2025-10-23T20:09:26.034" v="4090" actId="1076"/>
+          <ac:spMkLst>
+            <pc:docMk/>
+            <pc:sldMk cId="658532706" sldId="752"/>
+            <ac:spMk id="5" creationId="{67609315-49B9-8548-BA54-379B42B31ADB}"/>
+          </ac:spMkLst>
+        </pc:spChg>
+        <pc:spChg chg="mod">
+          <ac:chgData name="Zonghua Gu" userId="9a7e1853e1951ef5" providerId="LiveId" clId="{CF1FAA12-072C-4ED5-BA76-0FFFAEFDB88A}" dt="2025-10-23T20:19:45.170" v="4229" actId="6549"/>
+          <ac:spMkLst>
+            <pc:docMk/>
+            <pc:sldMk cId="658532706" sldId="752"/>
+            <ac:spMk id="6" creationId="{4F4F6D7F-4E8E-4748-B8BF-4AEBF2493640}"/>
+          </ac:spMkLst>
+        </pc:spChg>
+        <pc:spChg chg="mod">
+          <ac:chgData name="Zonghua Gu" userId="9a7e1853e1951ef5" providerId="LiveId" clId="{CF1FAA12-072C-4ED5-BA76-0FFFAEFDB88A}" dt="2025-10-23T20:11:00.466" v="4115" actId="1076"/>
+          <ac:spMkLst>
+            <pc:docMk/>
+            <pc:sldMk cId="658532706" sldId="752"/>
+            <ac:spMk id="7" creationId="{FFE75029-A370-C947-92AB-86784A3F88C0}"/>
+          </ac:spMkLst>
+        </pc:spChg>
+        <pc:spChg chg="add mod">
+          <ac:chgData name="Zonghua Gu" userId="9a7e1853e1951ef5" providerId="LiveId" clId="{CF1FAA12-072C-4ED5-BA76-0FFFAEFDB88A}" dt="2025-10-23T20:22:22.597" v="4275" actId="27636"/>
+          <ac:spMkLst>
+            <pc:docMk/>
+            <pc:sldMk cId="658532706" sldId="752"/>
+            <ac:spMk id="8" creationId="{B310A4C8-2DBE-3062-F639-E120AE1AC4CB}"/>
+          </ac:spMkLst>
+        </pc:spChg>
+        <pc:spChg chg="mod">
+          <ac:chgData name="Zonghua Gu" userId="9a7e1853e1951ef5" providerId="LiveId" clId="{CF1FAA12-072C-4ED5-BA76-0FFFAEFDB88A}" dt="2025-10-23T20:11:00.466" v="4115" actId="1076"/>
+          <ac:spMkLst>
+            <pc:docMk/>
+            <pc:sldMk cId="658532706" sldId="752"/>
+            <ac:spMk id="10" creationId="{4580A862-E780-3041-A52F-CEC03FE2AA6F}"/>
+          </ac:spMkLst>
+        </pc:spChg>
+        <pc:spChg chg="mod">
+          <ac:chgData name="Zonghua Gu" userId="9a7e1853e1951ef5" providerId="LiveId" clId="{CF1FAA12-072C-4ED5-BA76-0FFFAEFDB88A}" dt="2025-10-23T20:11:00.466" v="4115" actId="1076"/>
+          <ac:spMkLst>
+            <pc:docMk/>
+            <pc:sldMk cId="658532706" sldId="752"/>
+            <ac:spMk id="11" creationId="{F73CED4B-2CEE-5847-B651-71C8F701F73C}"/>
+          </ac:spMkLst>
+        </pc:spChg>
+        <pc:spChg chg="mod">
+          <ac:chgData name="Zonghua Gu" userId="9a7e1853e1951ef5" providerId="LiveId" clId="{CF1FAA12-072C-4ED5-BA76-0FFFAEFDB88A}" dt="2025-10-23T20:11:00.466" v="4115" actId="1076"/>
+          <ac:spMkLst>
+            <pc:docMk/>
+            <pc:sldMk cId="658532706" sldId="752"/>
+            <ac:spMk id="13" creationId="{61396BB7-6492-2C46-A6BE-EF731ECF740B}"/>
+          </ac:spMkLst>
+        </pc:spChg>
+        <pc:spChg chg="mod">
+          <ac:chgData name="Zonghua Gu" userId="9a7e1853e1951ef5" providerId="LiveId" clId="{CF1FAA12-072C-4ED5-BA76-0FFFAEFDB88A}" dt="2025-10-23T20:11:00.466" v="4115" actId="1076"/>
+          <ac:spMkLst>
+            <pc:docMk/>
+            <pc:sldMk cId="658532706" sldId="752"/>
+            <ac:spMk id="14" creationId="{37AC389A-52DF-BA4B-B78C-31E43AB8F715}"/>
+          </ac:spMkLst>
+        </pc:spChg>
+        <pc:cxnChg chg="mod">
+          <ac:chgData name="Zonghua Gu" userId="9a7e1853e1951ef5" providerId="LiveId" clId="{CF1FAA12-072C-4ED5-BA76-0FFFAEFDB88A}" dt="2025-10-23T20:11:00.466" v="4115" actId="1076"/>
+          <ac:cxnSpMkLst>
+            <pc:docMk/>
+            <pc:sldMk cId="658532706" sldId="752"/>
+            <ac:cxnSpMk id="9" creationId="{38C06581-F221-454A-B957-F8258EBDE837}"/>
+          </ac:cxnSpMkLst>
+        </pc:cxnChg>
+        <pc:cxnChg chg="mod">
+          <ac:chgData name="Zonghua Gu" userId="9a7e1853e1951ef5" providerId="LiveId" clId="{CF1FAA12-072C-4ED5-BA76-0FFFAEFDB88A}" dt="2025-10-23T20:11:00.466" v="4115" actId="1076"/>
+          <ac:cxnSpMkLst>
+            <pc:docMk/>
+            <pc:sldMk cId="658532706" sldId="752"/>
+            <ac:cxnSpMk id="12" creationId="{FD215319-D751-D24D-83E5-80D4E6FB9D69}"/>
+          </ac:cxnSpMkLst>
+        </pc:cxnChg>
       </pc:sldChg>
-      <pc:sldChg chg="add">
-        <pc:chgData name="Zonghua Gu" userId="9a7e1853e1951ef5" providerId="LiveId" clId="{CF1FAA12-072C-4ED5-BA76-0FFFAEFDB88A}" dt="2025-10-05T02:35:22.466" v="2507"/>
+      <pc:sldChg chg="modSp add mod">
+        <pc:chgData name="Zonghua Gu" userId="9a7e1853e1951ef5" providerId="LiveId" clId="{CF1FAA12-072C-4ED5-BA76-0FFFAEFDB88A}" dt="2025-10-23T20:04:09.336" v="4089" actId="14100"/>
         <pc:sldMkLst>
           <pc:docMk/>
           <pc:sldMk cId="1757812227" sldId="756"/>
         </pc:sldMkLst>
+        <pc:spChg chg="mod">
+          <ac:chgData name="Zonghua Gu" userId="9a7e1853e1951ef5" providerId="LiveId" clId="{CF1FAA12-072C-4ED5-BA76-0FFFAEFDB88A}" dt="2025-10-23T20:04:09.336" v="4089" actId="14100"/>
+          <ac:spMkLst>
+            <pc:docMk/>
+            <pc:sldMk cId="1757812227" sldId="756"/>
+            <ac:spMk id="4" creationId="{E4F57FE1-A328-6D2A-AFB7-A6C1600FE210}"/>
+          </ac:spMkLst>
+        </pc:spChg>
       </pc:sldChg>
       <pc:sldChg chg="addSp modSp add mod">
         <pc:chgData name="Zonghua Gu" userId="9a7e1853e1951ef5" providerId="LiveId" clId="{CF1FAA12-072C-4ED5-BA76-0FFFAEFDB88A}" dt="2025-10-05T03:07:25.511" v="2862" actId="1076"/>
@@ -1136,7 +823,7 @@
         </pc:spChg>
       </pc:sldChg>
       <pc:sldChg chg="modSp add mod">
-        <pc:chgData name="Zonghua Gu" userId="9a7e1853e1951ef5" providerId="LiveId" clId="{CF1FAA12-072C-4ED5-BA76-0FFFAEFDB88A}" dt="2025-10-14T21:08:29.941" v="2870" actId="20577"/>
+        <pc:chgData name="Zonghua Gu" userId="9a7e1853e1951ef5" providerId="LiveId" clId="{CF1FAA12-072C-4ED5-BA76-0FFFAEFDB88A}" dt="2025-10-23T19:59:35.852" v="4079" actId="798"/>
         <pc:sldMkLst>
           <pc:docMk/>
           <pc:sldMk cId="414796749" sldId="759"/>
@@ -1149,9 +836,57 @@
             <ac:spMk id="2" creationId="{00000000-0000-0000-0000-000000000000}"/>
           </ac:spMkLst>
         </pc:spChg>
+        <pc:spChg chg="mod">
+          <ac:chgData name="Zonghua Gu" userId="9a7e1853e1951ef5" providerId="LiveId" clId="{CF1FAA12-072C-4ED5-BA76-0FFFAEFDB88A}" dt="2025-10-23T19:53:15.353" v="4067" actId="20577"/>
+          <ac:spMkLst>
+            <pc:docMk/>
+            <pc:sldMk cId="414796749" sldId="759"/>
+            <ac:spMk id="4" creationId="{00000000-0000-0000-0000-000000000000}"/>
+          </ac:spMkLst>
+        </pc:spChg>
+        <pc:spChg chg="mod">
+          <ac:chgData name="Zonghua Gu" userId="9a7e1853e1951ef5" providerId="LiveId" clId="{CF1FAA12-072C-4ED5-BA76-0FFFAEFDB88A}" dt="2025-10-23T19:53:09.692" v="4061" actId="1076"/>
+          <ac:spMkLst>
+            <pc:docMk/>
+            <pc:sldMk cId="414796749" sldId="759"/>
+            <ac:spMk id="5" creationId="{00000000-0000-0000-0000-000000000000}"/>
+          </ac:spMkLst>
+        </pc:spChg>
+        <pc:spChg chg="mod">
+          <ac:chgData name="Zonghua Gu" userId="9a7e1853e1951ef5" providerId="LiveId" clId="{CF1FAA12-072C-4ED5-BA76-0FFFAEFDB88A}" dt="2025-10-23T19:53:09.692" v="4061" actId="1076"/>
+          <ac:spMkLst>
+            <pc:docMk/>
+            <pc:sldMk cId="414796749" sldId="759"/>
+            <ac:spMk id="8" creationId="{00000000-0000-0000-0000-000000000000}"/>
+          </ac:spMkLst>
+        </pc:spChg>
+        <pc:spChg chg="mod">
+          <ac:chgData name="Zonghua Gu" userId="9a7e1853e1951ef5" providerId="LiveId" clId="{CF1FAA12-072C-4ED5-BA76-0FFFAEFDB88A}" dt="2025-10-23T19:53:09.692" v="4061" actId="1076"/>
+          <ac:spMkLst>
+            <pc:docMk/>
+            <pc:sldMk cId="414796749" sldId="759"/>
+            <ac:spMk id="9" creationId="{00000000-0000-0000-0000-000000000000}"/>
+          </ac:spMkLst>
+        </pc:spChg>
+        <pc:graphicFrameChg chg="mod">
+          <ac:chgData name="Zonghua Gu" userId="9a7e1853e1951ef5" providerId="LiveId" clId="{CF1FAA12-072C-4ED5-BA76-0FFFAEFDB88A}" dt="2025-10-23T19:53:09.692" v="4061" actId="1076"/>
+          <ac:graphicFrameMkLst>
+            <pc:docMk/>
+            <pc:sldMk cId="414796749" sldId="759"/>
+            <ac:graphicFrameMk id="6" creationId="{00000000-0000-0000-0000-000000000000}"/>
+          </ac:graphicFrameMkLst>
+        </pc:graphicFrameChg>
+        <pc:graphicFrameChg chg="mod modGraphic">
+          <ac:chgData name="Zonghua Gu" userId="9a7e1853e1951ef5" providerId="LiveId" clId="{CF1FAA12-072C-4ED5-BA76-0FFFAEFDB88A}" dt="2025-10-23T19:59:35.852" v="4079" actId="798"/>
+          <ac:graphicFrameMkLst>
+            <pc:docMk/>
+            <pc:sldMk cId="414796749" sldId="759"/>
+            <ac:graphicFrameMk id="7" creationId="{00000000-0000-0000-0000-000000000000}"/>
+          </ac:graphicFrameMkLst>
+        </pc:graphicFrameChg>
       </pc:sldChg>
       <pc:sldChg chg="modSp add mod">
-        <pc:chgData name="Zonghua Gu" userId="9a7e1853e1951ef5" providerId="LiveId" clId="{CF1FAA12-072C-4ED5-BA76-0FFFAEFDB88A}" dt="2025-10-14T21:08:46.973" v="2877" actId="20577"/>
+        <pc:chgData name="Zonghua Gu" userId="9a7e1853e1951ef5" providerId="LiveId" clId="{CF1FAA12-072C-4ED5-BA76-0FFFAEFDB88A}" dt="2025-10-23T19:59:40.750" v="4080" actId="798"/>
         <pc:sldMkLst>
           <pc:docMk/>
           <pc:sldMk cId="3252337491" sldId="760"/>
@@ -1164,13 +899,46 @@
             <ac:spMk id="2" creationId="{00000000-0000-0000-0000-000000000000}"/>
           </ac:spMkLst>
         </pc:spChg>
-      </pc:sldChg>
-      <pc:sldChg chg="new del">
-        <pc:chgData name="Zonghua Gu" userId="9a7e1853e1951ef5" providerId="LiveId" clId="{CF1FAA12-072C-4ED5-BA76-0FFFAEFDB88A}" dt="2025-10-21T18:46:30.892" v="2923" actId="47"/>
-        <pc:sldMkLst>
-          <pc:docMk/>
-          <pc:sldMk cId="1273994328" sldId="761"/>
-        </pc:sldMkLst>
+        <pc:spChg chg="mod">
+          <ac:chgData name="Zonghua Gu" userId="9a7e1853e1951ef5" providerId="LiveId" clId="{CF1FAA12-072C-4ED5-BA76-0FFFAEFDB88A}" dt="2025-10-23T19:53:56.779" v="4068" actId="1076"/>
+          <ac:spMkLst>
+            <pc:docMk/>
+            <pc:sldMk cId="3252337491" sldId="760"/>
+            <ac:spMk id="5" creationId="{00000000-0000-0000-0000-000000000000}"/>
+          </ac:spMkLst>
+        </pc:spChg>
+        <pc:spChg chg="mod">
+          <ac:chgData name="Zonghua Gu" userId="9a7e1853e1951ef5" providerId="LiveId" clId="{CF1FAA12-072C-4ED5-BA76-0FFFAEFDB88A}" dt="2025-10-23T19:53:56.779" v="4068" actId="1076"/>
+          <ac:spMkLst>
+            <pc:docMk/>
+            <pc:sldMk cId="3252337491" sldId="760"/>
+            <ac:spMk id="8" creationId="{00000000-0000-0000-0000-000000000000}"/>
+          </ac:spMkLst>
+        </pc:spChg>
+        <pc:spChg chg="mod">
+          <ac:chgData name="Zonghua Gu" userId="9a7e1853e1951ef5" providerId="LiveId" clId="{CF1FAA12-072C-4ED5-BA76-0FFFAEFDB88A}" dt="2025-10-23T19:53:56.779" v="4068" actId="1076"/>
+          <ac:spMkLst>
+            <pc:docMk/>
+            <pc:sldMk cId="3252337491" sldId="760"/>
+            <ac:spMk id="9" creationId="{00000000-0000-0000-0000-000000000000}"/>
+          </ac:spMkLst>
+        </pc:spChg>
+        <pc:graphicFrameChg chg="mod modGraphic">
+          <ac:chgData name="Zonghua Gu" userId="9a7e1853e1951ef5" providerId="LiveId" clId="{CF1FAA12-072C-4ED5-BA76-0FFFAEFDB88A}" dt="2025-10-23T19:53:56.779" v="4068" actId="1076"/>
+          <ac:graphicFrameMkLst>
+            <pc:docMk/>
+            <pc:sldMk cId="3252337491" sldId="760"/>
+            <ac:graphicFrameMk id="6" creationId="{00000000-0000-0000-0000-000000000000}"/>
+          </ac:graphicFrameMkLst>
+        </pc:graphicFrameChg>
+        <pc:graphicFrameChg chg="mod modGraphic">
+          <ac:chgData name="Zonghua Gu" userId="9a7e1853e1951ef5" providerId="LiveId" clId="{CF1FAA12-072C-4ED5-BA76-0FFFAEFDB88A}" dt="2025-10-23T19:59:40.750" v="4080" actId="798"/>
+          <ac:graphicFrameMkLst>
+            <pc:docMk/>
+            <pc:sldMk cId="3252337491" sldId="760"/>
+            <ac:graphicFrameMk id="7" creationId="{00000000-0000-0000-0000-000000000000}"/>
+          </ac:graphicFrameMkLst>
+        </pc:graphicFrameChg>
       </pc:sldChg>
       <pc:sldChg chg="modSp add mod">
         <pc:chgData name="Zonghua Gu" userId="9a7e1853e1951ef5" providerId="LiveId" clId="{CF1FAA12-072C-4ED5-BA76-0FFFAEFDB88A}" dt="2025-10-21T19:44:58.062" v="3485" actId="20577"/>
@@ -1286,14 +1054,6 @@
             <ac:spMk id="4" creationId="{F0DD5A71-7F69-8C31-5C46-0FF1815F2840}"/>
           </ac:spMkLst>
         </pc:spChg>
-        <pc:spChg chg="del">
-          <ac:chgData name="Zonghua Gu" userId="9a7e1853e1951ef5" providerId="LiveId" clId="{CF1FAA12-072C-4ED5-BA76-0FFFAEFDB88A}" dt="2025-10-21T19:45:45.708" v="3488" actId="478"/>
-          <ac:spMkLst>
-            <pc:docMk/>
-            <pc:sldMk cId="436543705" sldId="817"/>
-            <ac:spMk id="10" creationId="{CADA20C5-94EA-D2BC-F9C4-1384F4ACFE2E}"/>
-          </ac:spMkLst>
-        </pc:spChg>
         <pc:spChg chg="mod">
           <ac:chgData name="Zonghua Gu" userId="9a7e1853e1951ef5" providerId="LiveId" clId="{CF1FAA12-072C-4ED5-BA76-0FFFAEFDB88A}" dt="2025-10-21T21:01:43.150" v="3721" actId="20577"/>
           <ac:spMkLst>
@@ -1310,106 +1070,136 @@
             <ac:graphicFrameMk id="7" creationId="{34E32F45-A466-4D81-2CAD-4DBC2C6742BC}"/>
           </ac:graphicFrameMkLst>
         </pc:graphicFrameChg>
+      </pc:sldChg>
+      <pc:sldChg chg="new del">
+        <pc:chgData name="Zonghua Gu" userId="9a7e1853e1951ef5" providerId="LiveId" clId="{CF1FAA12-072C-4ED5-BA76-0FFFAEFDB88A}" dt="2025-10-23T19:12:00.062" v="3723" actId="680"/>
+        <pc:sldMkLst>
+          <pc:docMk/>
+          <pc:sldMk cId="578757023" sldId="818"/>
+        </pc:sldMkLst>
+      </pc:sldChg>
+      <pc:sldChg chg="addSp modSp new mod">
+        <pc:chgData name="Zonghua Gu" userId="9a7e1853e1951ef5" providerId="LiveId" clId="{CF1FAA12-072C-4ED5-BA76-0FFFAEFDB88A}" dt="2025-10-23T19:51:31.426" v="4021" actId="20577"/>
+        <pc:sldMkLst>
+          <pc:docMk/>
+          <pc:sldMk cId="1762553256" sldId="818"/>
+        </pc:sldMkLst>
+        <pc:spChg chg="mod">
+          <ac:chgData name="Zonghua Gu" userId="9a7e1853e1951ef5" providerId="LiveId" clId="{CF1FAA12-072C-4ED5-BA76-0FFFAEFDB88A}" dt="2025-10-23T19:12:20.841" v="3725"/>
+          <ac:spMkLst>
+            <pc:docMk/>
+            <pc:sldMk cId="1762553256" sldId="818"/>
+            <ac:spMk id="2" creationId="{6234EC6E-B891-AF83-E66F-8217385C54F6}"/>
+          </ac:spMkLst>
+        </pc:spChg>
+        <pc:spChg chg="mod">
+          <ac:chgData name="Zonghua Gu" userId="9a7e1853e1951ef5" providerId="LiveId" clId="{CF1FAA12-072C-4ED5-BA76-0FFFAEFDB88A}" dt="2025-10-23T19:17:34.674" v="3769" actId="27636"/>
+          <ac:spMkLst>
+            <pc:docMk/>
+            <pc:sldMk cId="1762553256" sldId="818"/>
+            <ac:spMk id="4" creationId="{3DC23136-53FC-2BF5-8C7C-A3096D3761E3}"/>
+          </ac:spMkLst>
+        </pc:spChg>
+        <pc:spChg chg="add mod">
+          <ac:chgData name="Zonghua Gu" userId="9a7e1853e1951ef5" providerId="LiveId" clId="{CF1FAA12-072C-4ED5-BA76-0FFFAEFDB88A}" dt="2025-10-23T19:51:31.426" v="4021" actId="20577"/>
+          <ac:spMkLst>
+            <pc:docMk/>
+            <pc:sldMk cId="1762553256" sldId="818"/>
+            <ac:spMk id="5" creationId="{080C4AE5-B126-9162-362F-24C26D91D6E5}"/>
+          </ac:spMkLst>
+        </pc:spChg>
+      </pc:sldChg>
+      <pc:sldChg chg="addSp delSp modSp add mod">
+        <pc:chgData name="Zonghua Gu" userId="9a7e1853e1951ef5" providerId="LiveId" clId="{CF1FAA12-072C-4ED5-BA76-0FFFAEFDB88A}" dt="2025-10-23T19:35:16.892" v="4010" actId="1076"/>
+        <pc:sldMkLst>
+          <pc:docMk/>
+          <pc:sldMk cId="4286255382" sldId="819"/>
+        </pc:sldMkLst>
+        <pc:spChg chg="mod">
+          <ac:chgData name="Zonghua Gu" userId="9a7e1853e1951ef5" providerId="LiveId" clId="{CF1FAA12-072C-4ED5-BA76-0FFFAEFDB88A}" dt="2025-10-23T19:17:47.402" v="3775" actId="20577"/>
+          <ac:spMkLst>
+            <pc:docMk/>
+            <pc:sldMk cId="4286255382" sldId="819"/>
+            <ac:spMk id="2" creationId="{BBCA5A9E-A770-8E75-1A17-1AA527EAD98D}"/>
+          </ac:spMkLst>
+        </pc:spChg>
+        <pc:spChg chg="mod">
+          <ac:chgData name="Zonghua Gu" userId="9a7e1853e1951ef5" providerId="LiveId" clId="{CF1FAA12-072C-4ED5-BA76-0FFFAEFDB88A}" dt="2025-10-23T19:35:16.892" v="4010" actId="1076"/>
+          <ac:spMkLst>
+            <pc:docMk/>
+            <pc:sldMk cId="4286255382" sldId="819"/>
+            <ac:spMk id="5" creationId="{667005E6-B78A-DE6F-E3EA-2180A0B55757}"/>
+          </ac:spMkLst>
+        </pc:spChg>
         <pc:picChg chg="add del mod">
-          <ac:chgData name="Zonghua Gu" userId="9a7e1853e1951ef5" providerId="LiveId" clId="{CF1FAA12-072C-4ED5-BA76-0FFFAEFDB88A}" dt="2025-10-21T20:15:09.073" v="3566" actId="478"/>
+          <ac:chgData name="Zonghua Gu" userId="9a7e1853e1951ef5" providerId="LiveId" clId="{CF1FAA12-072C-4ED5-BA76-0FFFAEFDB88A}" dt="2025-10-23T19:25:27.434" v="3920" actId="478"/>
           <ac:picMkLst>
             <pc:docMk/>
-            <pc:sldMk cId="436543705" sldId="817"/>
-            <ac:picMk id="6" creationId="{08A79456-46C4-2F9C-802E-CE3FD8962BD9}"/>
-          </ac:picMkLst>
-        </pc:picChg>
-        <pc:picChg chg="add del mod">
-          <ac:chgData name="Zonghua Gu" userId="9a7e1853e1951ef5" providerId="LiveId" clId="{CF1FAA12-072C-4ED5-BA76-0FFFAEFDB88A}" dt="2025-10-21T20:22:13.572" v="3604" actId="478"/>
-          <ac:picMkLst>
-            <pc:docMk/>
-            <pc:sldMk cId="436543705" sldId="817"/>
-            <ac:picMk id="14" creationId="{528125F5-8B7F-2C2B-2C9A-B7A429ADA045}"/>
-          </ac:picMkLst>
-        </pc:picChg>
-        <pc:picChg chg="add del mod">
-          <ac:chgData name="Zonghua Gu" userId="9a7e1853e1951ef5" providerId="LiveId" clId="{CF1FAA12-072C-4ED5-BA76-0FFFAEFDB88A}" dt="2025-10-21T20:48:20.905" v="3652" actId="478"/>
-          <ac:picMkLst>
-            <pc:docMk/>
-            <pc:sldMk cId="436543705" sldId="817"/>
-            <ac:picMk id="16" creationId="{4E44D98E-B2B7-4B5C-05FD-64B1F209F44A}"/>
+            <pc:sldMk cId="4286255382" sldId="819"/>
+            <ac:picMk id="7" creationId="{D527C467-1204-8437-B97A-AFD3A47E2EE5}"/>
           </ac:picMkLst>
         </pc:picChg>
       </pc:sldChg>
-      <pc:sldChg chg="addSp modSp add del mod">
-        <pc:chgData name="Zonghua Gu" userId="9a7e1853e1951ef5" providerId="LiveId" clId="{CF1FAA12-072C-4ED5-BA76-0FFFAEFDB88A}" dt="2025-10-21T20:30:15.728" v="3614" actId="47"/>
+      <pc:sldChg chg="modSp new mod">
+        <pc:chgData name="Zonghua Gu" userId="9a7e1853e1951ef5" providerId="LiveId" clId="{CF1FAA12-072C-4ED5-BA76-0FFFAEFDB88A}" dt="2025-10-23T19:33:29.650" v="4009" actId="20577"/>
         <pc:sldMkLst>
           <pc:docMk/>
-          <pc:sldMk cId="103388536" sldId="818"/>
+          <pc:sldMk cId="1599510770" sldId="820"/>
         </pc:sldMkLst>
         <pc:spChg chg="mod">
-          <ac:chgData name="Zonghua Gu" userId="9a7e1853e1951ef5" providerId="LiveId" clId="{CF1FAA12-072C-4ED5-BA76-0FFFAEFDB88A}" dt="2025-10-21T20:23:08.608" v="3608" actId="20577"/>
+          <ac:chgData name="Zonghua Gu" userId="9a7e1853e1951ef5" providerId="LiveId" clId="{CF1FAA12-072C-4ED5-BA76-0FFFAEFDB88A}" dt="2025-10-23T19:30:35.783" v="3952" actId="20577"/>
           <ac:spMkLst>
             <pc:docMk/>
-            <pc:sldMk cId="103388536" sldId="818"/>
-            <ac:spMk id="3" creationId="{00000000-0000-0000-0000-000000000000}"/>
+            <pc:sldMk cId="1599510770" sldId="820"/>
+            <ac:spMk id="2" creationId="{66BC4FE6-4AA6-4480-9C1A-B149B1641A6D}"/>
+          </ac:spMkLst>
+        </pc:spChg>
+        <pc:spChg chg="mod">
+          <ac:chgData name="Zonghua Gu" userId="9a7e1853e1951ef5" providerId="LiveId" clId="{CF1FAA12-072C-4ED5-BA76-0FFFAEFDB88A}" dt="2025-10-23T19:33:29.650" v="4009" actId="20577"/>
+          <ac:spMkLst>
+            <pc:docMk/>
+            <pc:sldMk cId="1599510770" sldId="820"/>
+            <ac:spMk id="4" creationId="{0D3349F2-AD23-9931-E5C9-567BF200C2ED}"/>
+          </ac:spMkLst>
+        </pc:spChg>
+      </pc:sldChg>
+      <pc:sldChg chg="modSp new del mod">
+        <pc:chgData name="Zonghua Gu" userId="9a7e1853e1951ef5" providerId="LiveId" clId="{CF1FAA12-072C-4ED5-BA76-0FFFAEFDB88A}" dt="2025-10-23T20:10:35.308" v="4114" actId="47"/>
+        <pc:sldMkLst>
+          <pc:docMk/>
+          <pc:sldMk cId="3074872043" sldId="821"/>
+        </pc:sldMkLst>
+        <pc:spChg chg="mod">
+          <ac:chgData name="Zonghua Gu" userId="9a7e1853e1951ef5" providerId="LiveId" clId="{CF1FAA12-072C-4ED5-BA76-0FFFAEFDB88A}" dt="2025-10-23T20:10:12.486" v="4108" actId="20577"/>
+          <ac:spMkLst>
+            <pc:docMk/>
+            <pc:sldMk cId="3074872043" sldId="821"/>
+            <ac:spMk id="4" creationId="{F4F62F9A-6DF8-D709-2497-B82F30CA91E7}"/>
+          </ac:spMkLst>
+        </pc:spChg>
+      </pc:sldChg>
+      <pc:sldChg chg="addSp modSp add del mod">
+        <pc:chgData name="Zonghua Gu" userId="9a7e1853e1951ef5" providerId="LiveId" clId="{CF1FAA12-072C-4ED5-BA76-0FFFAEFDB88A}" dt="2025-10-23T19:56:58.502" v="4076" actId="47"/>
+        <pc:sldMkLst>
+          <pc:docMk/>
+          <pc:sldMk cId="4157902731" sldId="821"/>
+        </pc:sldMkLst>
+        <pc:spChg chg="mod">
+          <ac:chgData name="Zonghua Gu" userId="9a7e1853e1951ef5" providerId="LiveId" clId="{CF1FAA12-072C-4ED5-BA76-0FFFAEFDB88A}" dt="2025-10-23T19:56:14.613" v="4071" actId="27636"/>
+          <ac:spMkLst>
+            <pc:docMk/>
+            <pc:sldMk cId="4157902731" sldId="821"/>
+            <ac:spMk id="2" creationId="{00000000-0000-0000-0000-000000000000}"/>
           </ac:spMkLst>
         </pc:spChg>
         <pc:spChg chg="add mod">
-          <ac:chgData name="Zonghua Gu" userId="9a7e1853e1951ef5" providerId="LiveId" clId="{CF1FAA12-072C-4ED5-BA76-0FFFAEFDB88A}" dt="2025-10-21T20:09:59.688" v="3559"/>
+          <ac:chgData name="Zonghua Gu" userId="9a7e1853e1951ef5" providerId="LiveId" clId="{CF1FAA12-072C-4ED5-BA76-0FFFAEFDB88A}" dt="2025-10-23T19:56:14.585" v="4070"/>
           <ac:spMkLst>
             <pc:docMk/>
-            <pc:sldMk cId="103388536" sldId="818"/>
-            <ac:spMk id="7" creationId="{7098B899-C71A-0E82-C0A3-01ADA28806C5}"/>
+            <pc:sldMk cId="4157902731" sldId="821"/>
+            <ac:spMk id="15" creationId="{23A2C4D0-C83C-9988-8112-4C535274FC53}"/>
           </ac:spMkLst>
         </pc:spChg>
-        <pc:spChg chg="add mod">
-          <ac:chgData name="Zonghua Gu" userId="9a7e1853e1951ef5" providerId="LiveId" clId="{CF1FAA12-072C-4ED5-BA76-0FFFAEFDB88A}" dt="2025-10-21T20:10:08.176" v="3561"/>
-          <ac:spMkLst>
-            <pc:docMk/>
-            <pc:sldMk cId="103388536" sldId="818"/>
-            <ac:spMk id="9" creationId="{C72E95DE-CDDD-31CF-4C7A-176E167217AE}"/>
-          </ac:spMkLst>
-        </pc:spChg>
-      </pc:sldChg>
-      <pc:sldChg chg="addSp delSp modSp add del mod">
-        <pc:chgData name="Zonghua Gu" userId="9a7e1853e1951ef5" providerId="LiveId" clId="{CF1FAA12-072C-4ED5-BA76-0FFFAEFDB88A}" dt="2025-10-21T19:57:24.650" v="3557"/>
-        <pc:sldMkLst>
-          <pc:docMk/>
-          <pc:sldMk cId="3411889660" sldId="818"/>
-        </pc:sldMkLst>
-        <pc:picChg chg="add del mod">
-          <ac:chgData name="Zonghua Gu" userId="9a7e1853e1951ef5" providerId="LiveId" clId="{CF1FAA12-072C-4ED5-BA76-0FFFAEFDB88A}" dt="2025-10-21T19:57:23.033" v="3556" actId="22"/>
-          <ac:picMkLst>
-            <pc:docMk/>
-            <pc:sldMk cId="3411889660" sldId="818"/>
-            <ac:picMk id="9" creationId="{583927E4-6995-47E6-85DD-42BA4C83291B}"/>
-          </ac:picMkLst>
-        </pc:picChg>
-      </pc:sldChg>
-      <pc:sldChg chg="addSp modSp add del mod">
-        <pc:chgData name="Zonghua Gu" userId="9a7e1853e1951ef5" providerId="LiveId" clId="{CF1FAA12-072C-4ED5-BA76-0FFFAEFDB88A}" dt="2025-10-21T20:30:15.728" v="3614" actId="47"/>
-        <pc:sldMkLst>
-          <pc:docMk/>
-          <pc:sldMk cId="3220100315" sldId="819"/>
-        </pc:sldMkLst>
-        <pc:spChg chg="mod">
-          <ac:chgData name="Zonghua Gu" userId="9a7e1853e1951ef5" providerId="LiveId" clId="{CF1FAA12-072C-4ED5-BA76-0FFFAEFDB88A}" dt="2025-10-21T20:23:12.258" v="3610" actId="20577"/>
-          <ac:spMkLst>
-            <pc:docMk/>
-            <pc:sldMk cId="3220100315" sldId="819"/>
-            <ac:spMk id="3" creationId="{00000000-0000-0000-0000-000000000000}"/>
-          </ac:spMkLst>
-        </pc:spChg>
-        <pc:spChg chg="add mod">
-          <ac:chgData name="Zonghua Gu" userId="9a7e1853e1951ef5" providerId="LiveId" clId="{CF1FAA12-072C-4ED5-BA76-0FFFAEFDB88A}" dt="2025-10-21T20:10:09.380" v="3562"/>
-          <ac:spMkLst>
-            <pc:docMk/>
-            <pc:sldMk cId="3220100315" sldId="819"/>
-            <ac:spMk id="8" creationId="{BD681538-63DE-C30E-1A83-6F39DAFA438E}"/>
-          </ac:spMkLst>
-        </pc:spChg>
-      </pc:sldChg>
-      <pc:sldChg chg="add del">
-        <pc:chgData name="Zonghua Gu" userId="9a7e1853e1951ef5" providerId="LiveId" clId="{CF1FAA12-072C-4ED5-BA76-0FFFAEFDB88A}" dt="2025-10-21T19:57:24.650" v="3557"/>
-        <pc:sldMkLst>
-          <pc:docMk/>
-          <pc:sldMk cId="3666475066" sldId="819"/>
-        </pc:sldMkLst>
       </pc:sldChg>
     </pc:docChg>
   </pc:docChgLst>
@@ -1510,7 +1300,7 @@
           <a:p>
             <a:fld id="{3B161579-C726-4AFD-89FC-66D961EAF8EA}" type="datetimeFigureOut">
               <a:rPr lang="en-US" smtClean="0"/>
-              <a:t>10/21/2025</a:t>
+              <a:t>10/23/2025</a:t>
             </a:fld>
             <a:endParaRPr lang="en-US"/>
           </a:p>
@@ -1688,7 +1478,7 @@
             <a:fld id="{0C5DCA7A-C3FD-4606-A3AD-864BD96433D4}" type="datetimeFigureOut">
               <a:rPr lang="en-US" smtClean="0"/>
               <a:pPr/>
-              <a:t>10/21/2025</a:t>
+              <a:t>10/23/2025</a:t>
             </a:fld>
             <a:endParaRPr lang="en-US"/>
           </a:p>
@@ -3200,6 +2990,122 @@
           <a:bodyPr/>
           <a:lstStyle/>
           <a:p>
+            <a:pPr marL="0" marR="0" lvl="0" indent="0" algn="l" defTabSz="914400" rtl="0" eaLnBrk="1" fontAlgn="auto" latinLnBrk="0" hangingPunct="1">
+              <a:lnSpc>
+                <a:spcPct val="100000"/>
+              </a:lnSpc>
+              <a:spcBef>
+                <a:spcPts val="0"/>
+              </a:spcBef>
+              <a:spcAft>
+                <a:spcPts val="0"/>
+              </a:spcAft>
+              <a:buClrTx/>
+              <a:buSzTx/>
+              <a:buFontTx/>
+              <a:buNone/>
+              <a:tabLst/>
+              <a:defRPr/>
+            </a:pPr>
+            <a:r>
+              <a:rPr lang="en-US" dirty="0"/>
+              <a:t>C function returns an int16_t, but the assembly returns the full 32-bit sum in r0.  Caller will see a 32-bit value; the correct behavior when the C function is declared to return int16_t is to return the 16-bit value </a:t>
+            </a:r>
+            <a:r>
+              <a:rPr lang="en-US" i="1" dirty="0"/>
+              <a:t>sign-extended</a:t>
+            </a:r>
+            <a:r>
+              <a:rPr lang="en-US" dirty="0"/>
+              <a:t> to 32 bits. </a:t>
+            </a:r>
+          </a:p>
+          <a:p>
+            <a:endParaRPr lang="en-US" dirty="0"/>
+          </a:p>
+        </p:txBody>
+      </p:sp>
+      <p:sp>
+        <p:nvSpPr>
+          <p:cNvPr id="4" name="Slide Number Placeholder 3"/>
+          <p:cNvSpPr>
+            <a:spLocks noGrp="1"/>
+          </p:cNvSpPr>
+          <p:nvPr>
+            <p:ph type="sldNum" sz="quarter" idx="5"/>
+          </p:nvPr>
+        </p:nvSpPr>
+        <p:spPr/>
+        <p:txBody>
+          <a:bodyPr/>
+          <a:lstStyle/>
+          <a:p>
+            <a:fld id="{D46F4F04-2BB1-473A-9274-1B455085D21A}" type="slidenum">
+              <a:rPr lang="en-US" smtClean="0"/>
+              <a:pPr/>
+              <a:t>29</a:t>
+            </a:fld>
+            <a:endParaRPr lang="en-US"/>
+          </a:p>
+        </p:txBody>
+      </p:sp>
+    </p:spTree>
+    <p:extLst>
+      <p:ext uri="{BB962C8B-B14F-4D97-AF65-F5344CB8AC3E}">
+        <p14:creationId xmlns:p14="http://schemas.microsoft.com/office/powerpoint/2010/main" val="2274727731"/>
+      </p:ext>
+    </p:extLst>
+  </p:cSld>
+  <p:clrMapOvr>
+    <a:masterClrMapping/>
+  </p:clrMapOvr>
+</p:notes>
+</file>
+
+<file path=ppt/notesSlides/notesSlide7.xml><?xml version="1.0" encoding="utf-8"?>
+<p:notes xmlns:a="http://schemas.openxmlformats.org/drawingml/2006/main" xmlns:r="http://schemas.openxmlformats.org/officeDocument/2006/relationships" xmlns:p="http://schemas.openxmlformats.org/presentationml/2006/main">
+  <p:cSld>
+    <p:spTree>
+      <p:nvGrpSpPr>
+        <p:cNvPr id="1" name=""/>
+        <p:cNvGrpSpPr/>
+        <p:nvPr/>
+      </p:nvGrpSpPr>
+      <p:grpSpPr>
+        <a:xfrm>
+          <a:off x="0" y="0"/>
+          <a:ext cx="0" cy="0"/>
+          <a:chOff x="0" y="0"/>
+          <a:chExt cx="0" cy="0"/>
+        </a:xfrm>
+      </p:grpSpPr>
+      <p:sp>
+        <p:nvSpPr>
+          <p:cNvPr id="2" name="Slide Image Placeholder 1"/>
+          <p:cNvSpPr>
+            <a:spLocks noGrp="1" noRot="1" noChangeAspect="1"/>
+          </p:cNvSpPr>
+          <p:nvPr>
+            <p:ph type="sldImg"/>
+          </p:nvPr>
+        </p:nvSpPr>
+        <p:spPr/>
+      </p:sp>
+      <p:sp>
+        <p:nvSpPr>
+          <p:cNvPr id="3" name="Notes Placeholder 2"/>
+          <p:cNvSpPr>
+            <a:spLocks noGrp="1"/>
+          </p:cNvSpPr>
+          <p:nvPr>
+            <p:ph type="body" idx="1"/>
+          </p:nvPr>
+        </p:nvSpPr>
+        <p:spPr/>
+        <p:txBody>
+          <a:bodyPr/>
+          <a:lstStyle/>
+          <a:p>
             <a:r>
               <a:rPr lang="en-US" dirty="0"/>
               <a:t>Here’s what the program </a:t>
@@ -3477,7 +3383,7 @@
 </p:notes>
 </file>
 
-<file path=ppt/notesSlides/notesSlide7.xml><?xml version="1.0" encoding="utf-8"?>
+<file path=ppt/notesSlides/notesSlide8.xml><?xml version="1.0" encoding="utf-8"?>
 <p:notes xmlns:a="http://schemas.openxmlformats.org/drawingml/2006/main" xmlns:r="http://schemas.openxmlformats.org/officeDocument/2006/relationships" xmlns:p="http://schemas.openxmlformats.org/presentationml/2006/main">
   <p:cSld>
     <p:spTree>
@@ -3964,7 +3870,7 @@
             <a:pPr eaLnBrk="1" latinLnBrk="0" hangingPunct="1"/>
             <a:fld id="{7966D375-7FE4-4861-9EA3-8493E3E81506}" type="datetime1">
               <a:rPr lang="en-US" smtClean="0"/>
-              <a:t>10/21/2025</a:t>
+              <a:t>10/23/2025</a:t>
             </a:fld>
             <a:endParaRPr lang="en-US" sz="1600" dirty="0"/>
           </a:p>
@@ -4324,7 +4230,7 @@
             <a:pPr eaLnBrk="1" latinLnBrk="0" hangingPunct="1"/>
             <a:fld id="{A9C54BE0-D5FE-4C7B-88A7-8835FDA599B1}" type="datetime1">
               <a:rPr lang="en-US" smtClean="0"/>
-              <a:t>10/21/2025</a:t>
+              <a:t>10/23/2025</a:t>
             </a:fld>
             <a:endParaRPr lang="en-US"/>
           </a:p>
@@ -4500,7 +4406,7 @@
             <a:pPr eaLnBrk="1" latinLnBrk="0" hangingPunct="1"/>
             <a:fld id="{F132153C-039A-48A4-AC9F-CEC24D5C2B7A}" type="datetime1">
               <a:rPr lang="en-US" smtClean="0"/>
-              <a:t>10/21/2025</a:t>
+              <a:t>10/23/2025</a:t>
             </a:fld>
             <a:endParaRPr lang="en-US"/>
           </a:p>
@@ -4967,7 +4873,7 @@
             <a:fld id="{DFAD6F50-E977-4162-8DF4-4DA1E6F19796}" type="datetime1">
               <a:rPr lang="en-US" smtClean="0"/>
               <a:pPr eaLnBrk="1" latinLnBrk="0" hangingPunct="1"/>
-              <a:t>10/21/2025</a:t>
+              <a:t>10/23/2025</a:t>
             </a:fld>
             <a:endParaRPr lang="en-US" sz="1200" dirty="0"/>
           </a:p>
@@ -5281,7 +5187,7 @@
             <a:fld id="{42A4D53F-573F-4718-BBA0-A86965028093}" type="datetime1">
               <a:rPr lang="en-US" smtClean="0"/>
               <a:pPr eaLnBrk="1" latinLnBrk="0" hangingPunct="1"/>
-              <a:t>10/21/2025</a:t>
+              <a:t>10/23/2025</a:t>
             </a:fld>
             <a:endParaRPr lang="en-US" dirty="0"/>
           </a:p>
@@ -5557,7 +5463,7 @@
             <a:fld id="{C9B206E1-2545-4E30-92FD-1E4787463A36}" type="datetime1">
               <a:rPr lang="en-US" smtClean="0"/>
               <a:pPr eaLnBrk="1" latinLnBrk="0" hangingPunct="1"/>
-              <a:t>10/21/2025</a:t>
+              <a:t>10/23/2025</a:t>
             </a:fld>
             <a:endParaRPr lang="en-US" dirty="0"/>
           </a:p>
@@ -5784,7 +5690,7 @@
             <a:fld id="{BD37D9B0-1E14-464D-94B0-F2A8C2E324E7}" type="datetime1">
               <a:rPr lang="en-US" smtClean="0"/>
               <a:pPr eaLnBrk="1" latinLnBrk="0" hangingPunct="1"/>
-              <a:t>10/21/2025</a:t>
+              <a:t>10/23/2025</a:t>
             </a:fld>
             <a:endParaRPr lang="en-US"/>
           </a:p>
@@ -6143,7 +6049,7 @@
             <a:fld id="{17A47E1E-3281-48F5-9487-561BBC0DE61A}" type="datetime1">
               <a:rPr lang="en-US" smtClean="0"/>
               <a:pPr eaLnBrk="1" latinLnBrk="0" hangingPunct="1"/>
-              <a:t>10/21/2025</a:t>
+              <a:t>10/23/2025</a:t>
             </a:fld>
             <a:endParaRPr lang="en-US"/>
           </a:p>
@@ -6382,7 +6288,7 @@
             <a:fld id="{457778AC-3F47-4322-9871-235CA71C9FB7}" type="datetime1">
               <a:rPr lang="en-US" smtClean="0"/>
               <a:pPr eaLnBrk="1" latinLnBrk="0" hangingPunct="1"/>
-              <a:t>10/21/2025</a:t>
+              <a:t>10/23/2025</a:t>
             </a:fld>
             <a:endParaRPr lang="en-US"/>
           </a:p>
@@ -6530,7 +6436,7 @@
             <a:fld id="{8FC852DA-BC9D-4962-84E0-49DDC95967D0}" type="datetime1">
               <a:rPr lang="en-US" smtClean="0"/>
               <a:pPr eaLnBrk="1" latinLnBrk="0" hangingPunct="1"/>
-              <a:t>10/21/2025</a:t>
+              <a:t>10/23/2025</a:t>
             </a:fld>
             <a:endParaRPr lang="en-US"/>
           </a:p>
@@ -6735,7 +6641,7 @@
             <a:pPr eaLnBrk="1" latinLnBrk="0" hangingPunct="1"/>
             <a:fld id="{00065D69-4622-413E-9E09-6A2509001B66}" type="datetime1">
               <a:rPr lang="en-US" smtClean="0"/>
-              <a:t>10/21/2025</a:t>
+              <a:t>10/23/2025</a:t>
             </a:fld>
             <a:endParaRPr lang="en-US" dirty="0"/>
           </a:p>
@@ -6985,7 +6891,7 @@
             <a:fld id="{BD8CDB30-0989-475F-BD84-F28125E3B4A3}" type="datetime1">
               <a:rPr lang="en-US" smtClean="0"/>
               <a:pPr eaLnBrk="1" latinLnBrk="0" hangingPunct="1"/>
-              <a:t>10/21/2025</a:t>
+              <a:t>10/23/2025</a:t>
             </a:fld>
             <a:endParaRPr lang="en-US"/>
           </a:p>
@@ -7399,7 +7305,7 @@
             <a:fld id="{3D268D79-62AD-4C50-8718-03ED52036E43}" type="datetime1">
               <a:rPr lang="en-US" smtClean="0"/>
               <a:pPr eaLnBrk="1" latinLnBrk="0" hangingPunct="1"/>
-              <a:t>10/21/2025</a:t>
+              <a:t>10/23/2025</a:t>
             </a:fld>
             <a:endParaRPr lang="en-US"/>
           </a:p>
@@ -7703,7 +7609,7 @@
             <a:fld id="{362A8F80-F1FC-4E19-AF0E-2AEA7F0226D7}" type="datetime1">
               <a:rPr lang="en-US" smtClean="0"/>
               <a:pPr eaLnBrk="1" latinLnBrk="0" hangingPunct="1"/>
-              <a:t>10/21/2025</a:t>
+              <a:t>10/23/2025</a:t>
             </a:fld>
             <a:endParaRPr lang="en-US"/>
           </a:p>
@@ -7885,7 +7791,7 @@
             <a:fld id="{84EF3758-DF7B-4347-89DE-ED0416D762CD}" type="datetime1">
               <a:rPr lang="en-US" smtClean="0"/>
               <a:pPr eaLnBrk="1" latinLnBrk="0" hangingPunct="1"/>
-              <a:t>10/21/2025</a:t>
+              <a:t>10/23/2025</a:t>
             </a:fld>
             <a:endParaRPr lang="en-US"/>
           </a:p>
@@ -8225,7 +8131,7 @@
             <a:pPr eaLnBrk="1" latinLnBrk="0" hangingPunct="1"/>
             <a:fld id="{26D84756-85D3-4017-90AB-B482945A0CB0}" type="datetime1">
               <a:rPr lang="en-US" smtClean="0"/>
-              <a:t>10/21/2025</a:t>
+              <a:t>10/23/2025</a:t>
             </a:fld>
             <a:endParaRPr lang="en-US" dirty="0"/>
           </a:p>
@@ -8446,7 +8352,7 @@
             <a:pPr eaLnBrk="1" latinLnBrk="0" hangingPunct="1"/>
             <a:fld id="{1359E9A9-3822-4D57-8A64-831B26641011}" type="datetime1">
               <a:rPr lang="en-US" smtClean="0"/>
-              <a:t>10/21/2025</a:t>
+              <a:t>10/23/2025</a:t>
             </a:fld>
             <a:endParaRPr lang="en-US"/>
           </a:p>
@@ -8799,7 +8705,7 @@
             <a:pPr eaLnBrk="1" latinLnBrk="0" hangingPunct="1"/>
             <a:fld id="{F96C45A0-00E6-4B4B-A1A7-CF1486D67AF4}" type="datetime1">
               <a:rPr lang="en-US" smtClean="0"/>
-              <a:t>10/21/2025</a:t>
+              <a:t>10/23/2025</a:t>
             </a:fld>
             <a:endParaRPr lang="en-US"/>
           </a:p>
@@ -9032,7 +8938,7 @@
             <a:pPr eaLnBrk="1" latinLnBrk="0" hangingPunct="1"/>
             <a:fld id="{B88C3861-EF45-4815-A76E-294671FAB405}" type="datetime1">
               <a:rPr lang="en-US" smtClean="0"/>
-              <a:t>10/21/2025</a:t>
+              <a:t>10/23/2025</a:t>
             </a:fld>
             <a:endParaRPr lang="en-US"/>
           </a:p>
@@ -9174,7 +9080,7 @@
             <a:pPr eaLnBrk="1" latinLnBrk="0" hangingPunct="1"/>
             <a:fld id="{0F0B8080-ED7A-45A9-A704-76D750342F93}" type="datetime1">
               <a:rPr lang="en-US" smtClean="0"/>
-              <a:t>10/21/2025</a:t>
+              <a:t>10/23/2025</a:t>
             </a:fld>
             <a:endParaRPr lang="en-US"/>
           </a:p>
@@ -9452,7 +9358,7 @@
             <a:pPr eaLnBrk="1" latinLnBrk="0" hangingPunct="1"/>
             <a:fld id="{D1503A19-0780-4B28-9CCB-B5B1820188BD}" type="datetime1">
               <a:rPr lang="en-US" smtClean="0"/>
-              <a:t>10/21/2025</a:t>
+              <a:t>10/23/2025</a:t>
             </a:fld>
             <a:endParaRPr lang="en-US"/>
           </a:p>
@@ -9860,7 +9766,7 @@
             <a:pPr eaLnBrk="1" latinLnBrk="0" hangingPunct="1"/>
             <a:fld id="{2142A9E5-AE71-46A9-A65E-9BA279401128}" type="datetime1">
               <a:rPr lang="en-US" smtClean="0"/>
-              <a:t>10/21/2025</a:t>
+              <a:t>10/23/2025</a:t>
             </a:fld>
             <a:endParaRPr lang="en-US"/>
           </a:p>
@@ -10198,7 +10104,7 @@
             <a:pPr eaLnBrk="1" latinLnBrk="0" hangingPunct="1"/>
             <a:fld id="{4087DD3F-948A-46ED-B3EC-5D68A963D0B7}" type="datetime1">
               <a:rPr lang="en-US" smtClean="0"/>
-              <a:t>10/21/2025</a:t>
+              <a:t>10/23/2025</a:t>
             </a:fld>
             <a:endParaRPr lang="en-US" sz="1400" dirty="0">
               <a:solidFill>
@@ -10879,7 +10785,7 @@
             <a:fld id="{A1DC5B07-A42E-4D40-A069-384595D56939}" type="datetime1">
               <a:rPr lang="en-US" smtClean="0"/>
               <a:pPr eaLnBrk="1" latinLnBrk="0" hangingPunct="1"/>
-              <a:t>10/21/2025</a:t>
+              <a:t>10/23/2025</a:t>
             </a:fld>
             <a:endParaRPr lang="en-US" sz="1050" dirty="0">
               <a:solidFill>
@@ -17524,12 +17430,14 @@
         </p:nvSpPr>
         <p:spPr/>
         <p:txBody>
-          <a:bodyPr/>
+          <a:bodyPr>
+            <a:normAutofit fontScale="90000"/>
+          </a:bodyPr>
           <a:lstStyle/>
           <a:p>
             <a:r>
               <a:rPr lang="en-US" dirty="0"/>
-              <a:t>Argument Passing</a:t>
+              <a:t>Passing arguments and Returning Value</a:t>
             </a:r>
           </a:p>
         </p:txBody>
@@ -17553,2197 +17461,6 @@
               <a:rPr kumimoji="0" lang="en-US" smtClean="0"/>
               <a:pPr/>
               <a:t>13</a:t>
-            </a:fld>
-            <a:endParaRPr kumimoji="0" lang="en-US" dirty="0"/>
-          </a:p>
-        </p:txBody>
-      </p:sp>
-      <p:sp>
-        <p:nvSpPr>
-          <p:cNvPr id="4" name="Content Placeholder 3"/>
-          <p:cNvSpPr>
-            <a:spLocks noGrp="1"/>
-          </p:cNvSpPr>
-          <p:nvPr>
-            <p:ph sz="quarter" idx="1"/>
-          </p:nvPr>
-        </p:nvSpPr>
-        <p:spPr/>
-        <p:txBody>
-          <a:bodyPr/>
-          <a:lstStyle/>
-          <a:p>
-            <a:r>
-              <a:rPr lang="en-US" altLang="zh-CN" dirty="0"/>
-              <a:t>W</a:t>
-            </a:r>
-            <a:r>
-              <a:rPr lang="en-US" dirty="0"/>
-              <a:t>hich registers are used to pass the arguments and return the result? </a:t>
-            </a:r>
-          </a:p>
-        </p:txBody>
-      </p:sp>
-      <p:sp>
-        <p:nvSpPr>
-          <p:cNvPr id="5" name="Rectangle 4"/>
-          <p:cNvSpPr/>
-          <p:nvPr/>
-        </p:nvSpPr>
-        <p:spPr>
-          <a:xfrm>
-            <a:off x="304800" y="2279674"/>
-            <a:ext cx="5582234" cy="369332"/>
-          </a:xfrm>
-          <a:prstGeom prst="rect">
-            <a:avLst/>
-          </a:prstGeom>
-        </p:spPr>
-        <p:style>
-          <a:lnRef idx="1">
-            <a:schemeClr val="accent1"/>
-          </a:lnRef>
-          <a:fillRef idx="2">
-            <a:schemeClr val="accent1"/>
-          </a:fillRef>
-          <a:effectRef idx="1">
-            <a:schemeClr val="accent1"/>
-          </a:effectRef>
-          <a:fontRef idx="minor">
-            <a:schemeClr val="dk1"/>
-          </a:fontRef>
-        </p:style>
-        <p:txBody>
-          <a:bodyPr wrap="none">
-            <a:spAutoFit/>
-          </a:bodyPr>
-          <a:lstStyle/>
-          <a:p>
-            <a:r>
-              <a:rPr lang="en-US" dirty="0">
-                <a:solidFill>
-                  <a:srgbClr val="333333"/>
-                </a:solidFill>
-                <a:latin typeface="Segoe UI" panose="020B0502040204020203" pitchFamily="34" charset="0"/>
-              </a:rPr>
-              <a:t>long fun (short a1, char a2, double a3, </a:t>
-            </a:r>
-            <a:r>
-              <a:rPr lang="en-US" dirty="0" err="1">
-                <a:solidFill>
-                  <a:srgbClr val="333333"/>
-                </a:solidFill>
-                <a:latin typeface="Segoe UI" panose="020B0502040204020203" pitchFamily="34" charset="0"/>
-              </a:rPr>
-              <a:t>int</a:t>
-            </a:r>
-            <a:r>
-              <a:rPr lang="en-US" dirty="0">
-                <a:solidFill>
-                  <a:srgbClr val="333333"/>
-                </a:solidFill>
-                <a:latin typeface="Segoe UI" panose="020B0502040204020203" pitchFamily="34" charset="0"/>
-              </a:rPr>
-              <a:t> a4, char a5)</a:t>
-            </a:r>
-          </a:p>
-        </p:txBody>
-      </p:sp>
-      <p:graphicFrame>
-        <p:nvGraphicFramePr>
-          <p:cNvPr id="6" name="Content Placeholder 12"/>
-          <p:cNvGraphicFramePr>
-            <a:graphicFrameLocks/>
-          </p:cNvGraphicFramePr>
-          <p:nvPr/>
-        </p:nvGraphicFramePr>
-        <p:xfrm>
-          <a:off x="685800" y="2981960"/>
-          <a:ext cx="2971800" cy="370840"/>
-        </p:xfrm>
-        <a:graphic>
-          <a:graphicData uri="http://schemas.openxmlformats.org/drawingml/2006/table">
-            <a:tbl>
-              <a:tblPr firstRow="1" bandRow="1">
-                <a:tableStyleId>{5940675A-B579-460E-94D1-54222C63F5DA}</a:tableStyleId>
-              </a:tblPr>
-              <a:tblGrid>
-                <a:gridCol w="742950">
-                  <a:extLst>
-                    <a:ext uri="{9D8B030D-6E8A-4147-A177-3AD203B41FA5}">
-                      <a16:colId xmlns:a16="http://schemas.microsoft.com/office/drawing/2014/main" val="242172939"/>
-                    </a:ext>
-                  </a:extLst>
-                </a:gridCol>
-                <a:gridCol w="742950">
-                  <a:extLst>
-                    <a:ext uri="{9D8B030D-6E8A-4147-A177-3AD203B41FA5}">
-                      <a16:colId xmlns:a16="http://schemas.microsoft.com/office/drawing/2014/main" val="2188387863"/>
-                    </a:ext>
-                  </a:extLst>
-                </a:gridCol>
-                <a:gridCol w="742950">
-                  <a:extLst>
-                    <a:ext uri="{9D8B030D-6E8A-4147-A177-3AD203B41FA5}">
-                      <a16:colId xmlns:a16="http://schemas.microsoft.com/office/drawing/2014/main" val="85967061"/>
-                    </a:ext>
-                  </a:extLst>
-                </a:gridCol>
-                <a:gridCol w="742950">
-                  <a:extLst>
-                    <a:ext uri="{9D8B030D-6E8A-4147-A177-3AD203B41FA5}">
-                      <a16:colId xmlns:a16="http://schemas.microsoft.com/office/drawing/2014/main" val="2525421763"/>
-                    </a:ext>
-                  </a:extLst>
-                </a:gridCol>
-              </a:tblGrid>
-              <a:tr h="370840">
-                <a:tc>
-                  <a:txBody>
-                    <a:bodyPr/>
-                    <a:lstStyle/>
-                    <a:p>
-                      <a:pPr algn="ctr"/>
-                      <a:endParaRPr lang="en-US" dirty="0"/>
-                    </a:p>
-                  </a:txBody>
-                  <a:tcPr/>
-                </a:tc>
-                <a:tc>
-                  <a:txBody>
-                    <a:bodyPr/>
-                    <a:lstStyle/>
-                    <a:p>
-                      <a:pPr algn="ctr"/>
-                      <a:endParaRPr lang="en-US" dirty="0"/>
-                    </a:p>
-                  </a:txBody>
-                  <a:tcPr/>
-                </a:tc>
-                <a:tc>
-                  <a:txBody>
-                    <a:bodyPr/>
-                    <a:lstStyle/>
-                    <a:p>
-                      <a:pPr algn="ctr"/>
-                      <a:endParaRPr lang="en-US" dirty="0"/>
-                    </a:p>
-                  </a:txBody>
-                  <a:tcPr/>
-                </a:tc>
-                <a:tc>
-                  <a:txBody>
-                    <a:bodyPr/>
-                    <a:lstStyle/>
-                    <a:p>
-                      <a:pPr algn="ctr"/>
-                      <a:endParaRPr lang="en-US" dirty="0"/>
-                    </a:p>
-                  </a:txBody>
-                  <a:tcPr/>
-                </a:tc>
-                <a:extLst>
-                  <a:ext uri="{0D108BD9-81ED-4DB2-BD59-A6C34878D82A}">
-                    <a16:rowId xmlns:a16="http://schemas.microsoft.com/office/drawing/2014/main" val="3892313521"/>
-                  </a:ext>
-                </a:extLst>
-              </a:tr>
-            </a:tbl>
-          </a:graphicData>
-        </a:graphic>
-      </p:graphicFrame>
-      <p:graphicFrame>
-        <p:nvGraphicFramePr>
-          <p:cNvPr id="7" name="Content Placeholder 12"/>
-          <p:cNvGraphicFramePr>
-            <a:graphicFrameLocks/>
-          </p:cNvGraphicFramePr>
-          <p:nvPr/>
-        </p:nvGraphicFramePr>
-        <p:xfrm>
-          <a:off x="3962397" y="2981960"/>
-          <a:ext cx="4648203" cy="370840"/>
-        </p:xfrm>
-        <a:graphic>
-          <a:graphicData uri="http://schemas.openxmlformats.org/drawingml/2006/table">
-            <a:tbl>
-              <a:tblPr firstRow="1" bandRow="1">
-                <a:tableStyleId>{5940675A-B579-460E-94D1-54222C63F5DA}</a:tableStyleId>
-              </a:tblPr>
-              <a:tblGrid>
-                <a:gridCol w="664029">
-                  <a:extLst>
-                    <a:ext uri="{9D8B030D-6E8A-4147-A177-3AD203B41FA5}">
-                      <a16:colId xmlns:a16="http://schemas.microsoft.com/office/drawing/2014/main" val="242172939"/>
-                    </a:ext>
-                  </a:extLst>
-                </a:gridCol>
-                <a:gridCol w="664029">
-                  <a:extLst>
-                    <a:ext uri="{9D8B030D-6E8A-4147-A177-3AD203B41FA5}">
-                      <a16:colId xmlns:a16="http://schemas.microsoft.com/office/drawing/2014/main" val="2188387863"/>
-                    </a:ext>
-                  </a:extLst>
-                </a:gridCol>
-                <a:gridCol w="664029">
-                  <a:extLst>
-                    <a:ext uri="{9D8B030D-6E8A-4147-A177-3AD203B41FA5}">
-                      <a16:colId xmlns:a16="http://schemas.microsoft.com/office/drawing/2014/main" val="85967061"/>
-                    </a:ext>
-                  </a:extLst>
-                </a:gridCol>
-                <a:gridCol w="664029">
-                  <a:extLst>
-                    <a:ext uri="{9D8B030D-6E8A-4147-A177-3AD203B41FA5}">
-                      <a16:colId xmlns:a16="http://schemas.microsoft.com/office/drawing/2014/main" val="2525421763"/>
-                    </a:ext>
-                  </a:extLst>
-                </a:gridCol>
-                <a:gridCol w="664029">
-                  <a:extLst>
-                    <a:ext uri="{9D8B030D-6E8A-4147-A177-3AD203B41FA5}">
-                      <a16:colId xmlns:a16="http://schemas.microsoft.com/office/drawing/2014/main" val="620484926"/>
-                    </a:ext>
-                  </a:extLst>
-                </a:gridCol>
-                <a:gridCol w="664029">
-                  <a:extLst>
-                    <a:ext uri="{9D8B030D-6E8A-4147-A177-3AD203B41FA5}">
-                      <a16:colId xmlns:a16="http://schemas.microsoft.com/office/drawing/2014/main" val="1648192157"/>
-                    </a:ext>
-                  </a:extLst>
-                </a:gridCol>
-                <a:gridCol w="664029">
-                  <a:extLst>
-                    <a:ext uri="{9D8B030D-6E8A-4147-A177-3AD203B41FA5}">
-                      <a16:colId xmlns:a16="http://schemas.microsoft.com/office/drawing/2014/main" val="3500636327"/>
-                    </a:ext>
-                  </a:extLst>
-                </a:gridCol>
-              </a:tblGrid>
-              <a:tr h="370840">
-                <a:tc>
-                  <a:txBody>
-                    <a:bodyPr/>
-                    <a:lstStyle/>
-                    <a:p>
-                      <a:endParaRPr lang="en-US" dirty="0"/>
-                    </a:p>
-                  </a:txBody>
-                  <a:tcPr/>
-                </a:tc>
-                <a:tc>
-                  <a:txBody>
-                    <a:bodyPr/>
-                    <a:lstStyle/>
-                    <a:p>
-                      <a:endParaRPr lang="en-US" dirty="0"/>
-                    </a:p>
-                  </a:txBody>
-                  <a:tcPr/>
-                </a:tc>
-                <a:tc>
-                  <a:txBody>
-                    <a:bodyPr/>
-                    <a:lstStyle/>
-                    <a:p>
-                      <a:endParaRPr lang="en-US" dirty="0"/>
-                    </a:p>
-                  </a:txBody>
-                  <a:tcPr/>
-                </a:tc>
-                <a:tc>
-                  <a:txBody>
-                    <a:bodyPr/>
-                    <a:lstStyle/>
-                    <a:p>
-                      <a:endParaRPr lang="en-US" dirty="0"/>
-                    </a:p>
-                  </a:txBody>
-                  <a:tcPr/>
-                </a:tc>
-                <a:tc>
-                  <a:txBody>
-                    <a:bodyPr/>
-                    <a:lstStyle/>
-                    <a:p>
-                      <a:endParaRPr lang="en-US" dirty="0"/>
-                    </a:p>
-                  </a:txBody>
-                  <a:tcPr/>
-                </a:tc>
-                <a:tc>
-                  <a:txBody>
-                    <a:bodyPr/>
-                    <a:lstStyle/>
-                    <a:p>
-                      <a:endParaRPr lang="en-US" dirty="0"/>
-                    </a:p>
-                  </a:txBody>
-                  <a:tcPr/>
-                </a:tc>
-                <a:tc>
-                  <a:txBody>
-                    <a:bodyPr/>
-                    <a:lstStyle/>
-                    <a:p>
-                      <a:endParaRPr lang="en-US" dirty="0"/>
-                    </a:p>
-                  </a:txBody>
-                  <a:tcPr/>
-                </a:tc>
-                <a:extLst>
-                  <a:ext uri="{0D108BD9-81ED-4DB2-BD59-A6C34878D82A}">
-                    <a16:rowId xmlns:a16="http://schemas.microsoft.com/office/drawing/2014/main" val="3892313521"/>
-                  </a:ext>
-                </a:extLst>
-              </a:tr>
-            </a:tbl>
-          </a:graphicData>
-        </a:graphic>
-      </p:graphicFrame>
-      <p:sp>
-        <p:nvSpPr>
-          <p:cNvPr id="8" name="TextBox 7"/>
-          <p:cNvSpPr txBox="1"/>
-          <p:nvPr/>
-        </p:nvSpPr>
-        <p:spPr>
-          <a:xfrm>
-            <a:off x="1905000" y="2626900"/>
-            <a:ext cx="1039067" cy="369332"/>
-          </a:xfrm>
-          <a:prstGeom prst="rect">
-            <a:avLst/>
-          </a:prstGeom>
-          <a:noFill/>
-        </p:spPr>
-        <p:txBody>
-          <a:bodyPr wrap="none" rtlCol="0">
-            <a:spAutoFit/>
-          </a:bodyPr>
-          <a:lstStyle/>
-          <a:p>
-            <a:r>
-              <a:rPr lang="en-US" dirty="0"/>
-              <a:t>Registers</a:t>
-            </a:r>
-          </a:p>
-        </p:txBody>
-      </p:sp>
-      <p:sp>
-        <p:nvSpPr>
-          <p:cNvPr id="9" name="TextBox 8"/>
-          <p:cNvSpPr txBox="1"/>
-          <p:nvPr/>
-        </p:nvSpPr>
-        <p:spPr>
-          <a:xfrm>
-            <a:off x="5334000" y="2626900"/>
-            <a:ext cx="1765676" cy="646331"/>
-          </a:xfrm>
-          <a:prstGeom prst="rect">
-            <a:avLst/>
-          </a:prstGeom>
-          <a:noFill/>
-        </p:spPr>
-        <p:txBody>
-          <a:bodyPr wrap="none" rtlCol="0">
-            <a:spAutoFit/>
-          </a:bodyPr>
-          <a:lstStyle/>
-          <a:p>
-            <a:r>
-              <a:rPr lang="en-US" dirty="0"/>
-              <a:t>Stack </a:t>
-            </a:r>
-            <a:r>
-              <a:rPr lang="en-US" altLang="zh-CN" dirty="0"/>
-              <a:t>in Memory</a:t>
-            </a:r>
-            <a:endParaRPr lang="en-US" dirty="0"/>
-          </a:p>
-          <a:p>
-            <a:endParaRPr lang="en-US" dirty="0"/>
-          </a:p>
-        </p:txBody>
-      </p:sp>
-    </p:spTree>
-    <p:extLst>
-      <p:ext uri="{BB962C8B-B14F-4D97-AF65-F5344CB8AC3E}">
-        <p14:creationId xmlns:p14="http://schemas.microsoft.com/office/powerpoint/2010/main" val="3252337491"/>
-      </p:ext>
-    </p:extLst>
-  </p:cSld>
-  <p:clrMapOvr>
-    <a:masterClrMapping/>
-  </p:clrMapOvr>
-</p:sld>
-</file>
-
-<file path=ppt/slides/slide14.xml><?xml version="1.0" encoding="utf-8"?>
-<p:sld xmlns:a="http://schemas.openxmlformats.org/drawingml/2006/main" xmlns:r="http://schemas.openxmlformats.org/officeDocument/2006/relationships" xmlns:p="http://schemas.openxmlformats.org/presentationml/2006/main">
-  <p:cSld>
-    <p:spTree>
-      <p:nvGrpSpPr>
-        <p:cNvPr id="1" name=""/>
-        <p:cNvGrpSpPr/>
-        <p:nvPr/>
-      </p:nvGrpSpPr>
-      <p:grpSpPr>
-        <a:xfrm>
-          <a:off x="0" y="0"/>
-          <a:ext cx="0" cy="0"/>
-          <a:chOff x="0" y="0"/>
-          <a:chExt cx="0" cy="0"/>
-        </a:xfrm>
-      </p:grpSpPr>
-      <p:sp>
-        <p:nvSpPr>
-          <p:cNvPr id="2" name="Title 1"/>
-          <p:cNvSpPr>
-            <a:spLocks noGrp="1"/>
-          </p:cNvSpPr>
-          <p:nvPr>
-            <p:ph type="title"/>
-          </p:nvPr>
-        </p:nvSpPr>
-        <p:spPr/>
-        <p:txBody>
-          <a:bodyPr/>
-          <a:lstStyle/>
-          <a:p>
-            <a:r>
-              <a:rPr lang="en-US" dirty="0"/>
-              <a:t>Argument Passing ANS</a:t>
-            </a:r>
-          </a:p>
-        </p:txBody>
-      </p:sp>
-      <p:sp>
-        <p:nvSpPr>
-          <p:cNvPr id="3" name="Slide Number Placeholder 2"/>
-          <p:cNvSpPr>
-            <a:spLocks noGrp="1"/>
-          </p:cNvSpPr>
-          <p:nvPr>
-            <p:ph type="sldNum" sz="quarter" idx="12"/>
-          </p:nvPr>
-        </p:nvSpPr>
-        <p:spPr/>
-        <p:txBody>
-          <a:bodyPr/>
-          <a:lstStyle/>
-          <a:p>
-            <a:fld id="{EA7C8D44-3667-46F6-9772-CC52308E2A7F}" type="slidenum">
-              <a:rPr kumimoji="0" lang="en-US" smtClean="0"/>
-              <a:pPr/>
-              <a:t>14</a:t>
-            </a:fld>
-            <a:endParaRPr kumimoji="0" lang="en-US" dirty="0"/>
-          </a:p>
-        </p:txBody>
-      </p:sp>
-      <p:sp>
-        <p:nvSpPr>
-          <p:cNvPr id="4" name="Content Placeholder 3"/>
-          <p:cNvSpPr>
-            <a:spLocks noGrp="1"/>
-          </p:cNvSpPr>
-          <p:nvPr>
-            <p:ph sz="quarter" idx="1"/>
-          </p:nvPr>
-        </p:nvSpPr>
-        <p:spPr/>
-        <p:txBody>
-          <a:bodyPr/>
-          <a:lstStyle/>
-          <a:p>
-            <a:r>
-              <a:rPr lang="en-US" altLang="zh-CN" dirty="0"/>
-              <a:t>W</a:t>
-            </a:r>
-            <a:r>
-              <a:rPr lang="en-US" dirty="0"/>
-              <a:t>hich registers are used to pass the arguments and return the result? </a:t>
-            </a:r>
-          </a:p>
-          <a:p>
-            <a:endParaRPr lang="en-US" dirty="0"/>
-          </a:p>
-          <a:p>
-            <a:endParaRPr lang="en-US" dirty="0"/>
-          </a:p>
-          <a:p>
-            <a:endParaRPr lang="en-US" dirty="0"/>
-          </a:p>
-          <a:p>
-            <a:r>
-              <a:rPr lang="en-US" dirty="0"/>
-              <a:t>Each argument of 8-bit char, or 16-bit short, is passed in 1 32-bit register; cannot use 1 register to pass more than 1 arguments</a:t>
-            </a:r>
-          </a:p>
-          <a:p>
-            <a:endParaRPr lang="en-US" dirty="0"/>
-          </a:p>
-        </p:txBody>
-      </p:sp>
-      <p:sp>
-        <p:nvSpPr>
-          <p:cNvPr id="5" name="Rectangle 4"/>
-          <p:cNvSpPr/>
-          <p:nvPr/>
-        </p:nvSpPr>
-        <p:spPr>
-          <a:xfrm>
-            <a:off x="304800" y="2279674"/>
-            <a:ext cx="5582234" cy="369332"/>
-          </a:xfrm>
-          <a:prstGeom prst="rect">
-            <a:avLst/>
-          </a:prstGeom>
-        </p:spPr>
-        <p:style>
-          <a:lnRef idx="1">
-            <a:schemeClr val="accent1"/>
-          </a:lnRef>
-          <a:fillRef idx="2">
-            <a:schemeClr val="accent1"/>
-          </a:fillRef>
-          <a:effectRef idx="1">
-            <a:schemeClr val="accent1"/>
-          </a:effectRef>
-          <a:fontRef idx="minor">
-            <a:schemeClr val="dk1"/>
-          </a:fontRef>
-        </p:style>
-        <p:txBody>
-          <a:bodyPr wrap="none">
-            <a:spAutoFit/>
-          </a:bodyPr>
-          <a:lstStyle/>
-          <a:p>
-            <a:r>
-              <a:rPr lang="en-US" dirty="0">
-                <a:solidFill>
-                  <a:srgbClr val="333333"/>
-                </a:solidFill>
-                <a:latin typeface="Segoe UI" panose="020B0502040204020203" pitchFamily="34" charset="0"/>
-              </a:rPr>
-              <a:t>long fun (short a1, char a2, double a3, </a:t>
-            </a:r>
-            <a:r>
-              <a:rPr lang="en-US" dirty="0" err="1">
-                <a:solidFill>
-                  <a:srgbClr val="333333"/>
-                </a:solidFill>
-                <a:latin typeface="Segoe UI" panose="020B0502040204020203" pitchFamily="34" charset="0"/>
-              </a:rPr>
-              <a:t>int</a:t>
-            </a:r>
-            <a:r>
-              <a:rPr lang="en-US" dirty="0">
-                <a:solidFill>
-                  <a:srgbClr val="333333"/>
-                </a:solidFill>
-                <a:latin typeface="Segoe UI" panose="020B0502040204020203" pitchFamily="34" charset="0"/>
-              </a:rPr>
-              <a:t> a4, char a5)</a:t>
-            </a:r>
-          </a:p>
-        </p:txBody>
-      </p:sp>
-      <p:graphicFrame>
-        <p:nvGraphicFramePr>
-          <p:cNvPr id="6" name="Content Placeholder 12"/>
-          <p:cNvGraphicFramePr>
-            <a:graphicFrameLocks/>
-          </p:cNvGraphicFramePr>
-          <p:nvPr/>
-        </p:nvGraphicFramePr>
-        <p:xfrm>
-          <a:off x="685800" y="2981960"/>
-          <a:ext cx="2971800" cy="370840"/>
-        </p:xfrm>
-        <a:graphic>
-          <a:graphicData uri="http://schemas.openxmlformats.org/drawingml/2006/table">
-            <a:tbl>
-              <a:tblPr firstRow="1" bandRow="1">
-                <a:tableStyleId>{5940675A-B579-460E-94D1-54222C63F5DA}</a:tableStyleId>
-              </a:tblPr>
-              <a:tblGrid>
-                <a:gridCol w="742950">
-                  <a:extLst>
-                    <a:ext uri="{9D8B030D-6E8A-4147-A177-3AD203B41FA5}">
-                      <a16:colId xmlns:a16="http://schemas.microsoft.com/office/drawing/2014/main" val="242172939"/>
-                    </a:ext>
-                  </a:extLst>
-                </a:gridCol>
-                <a:gridCol w="742950">
-                  <a:extLst>
-                    <a:ext uri="{9D8B030D-6E8A-4147-A177-3AD203B41FA5}">
-                      <a16:colId xmlns:a16="http://schemas.microsoft.com/office/drawing/2014/main" val="2188387863"/>
-                    </a:ext>
-                  </a:extLst>
-                </a:gridCol>
-                <a:gridCol w="1485900">
-                  <a:extLst>
-                    <a:ext uri="{9D8B030D-6E8A-4147-A177-3AD203B41FA5}">
-                      <a16:colId xmlns:a16="http://schemas.microsoft.com/office/drawing/2014/main" val="85967061"/>
-                    </a:ext>
-                  </a:extLst>
-                </a:gridCol>
-              </a:tblGrid>
-              <a:tr h="370840">
-                <a:tc>
-                  <a:txBody>
-                    <a:bodyPr/>
-                    <a:lstStyle/>
-                    <a:p>
-                      <a:pPr algn="ctr"/>
-                      <a:r>
-                        <a:rPr lang="en-US" altLang="zh-CN" dirty="0"/>
-                        <a:t>a1</a:t>
-                      </a:r>
-                      <a:endParaRPr lang="en-US" dirty="0"/>
-                    </a:p>
-                  </a:txBody>
-                  <a:tcPr/>
-                </a:tc>
-                <a:tc>
-                  <a:txBody>
-                    <a:bodyPr/>
-                    <a:lstStyle/>
-                    <a:p>
-                      <a:pPr algn="ctr"/>
-                      <a:r>
-                        <a:rPr lang="en-US" dirty="0"/>
-                        <a:t>a2</a:t>
-                      </a:r>
-                    </a:p>
-                  </a:txBody>
-                  <a:tcPr/>
-                </a:tc>
-                <a:tc>
-                  <a:txBody>
-                    <a:bodyPr/>
-                    <a:lstStyle/>
-                    <a:p>
-                      <a:pPr algn="ctr"/>
-                      <a:r>
-                        <a:rPr lang="en-US" dirty="0"/>
-                        <a:t>a3</a:t>
-                      </a:r>
-                    </a:p>
-                  </a:txBody>
-                  <a:tcPr/>
-                </a:tc>
-                <a:extLst>
-                  <a:ext uri="{0D108BD9-81ED-4DB2-BD59-A6C34878D82A}">
-                    <a16:rowId xmlns:a16="http://schemas.microsoft.com/office/drawing/2014/main" val="3892313521"/>
-                  </a:ext>
-                </a:extLst>
-              </a:tr>
-            </a:tbl>
-          </a:graphicData>
-        </a:graphic>
-      </p:graphicFrame>
-      <p:graphicFrame>
-        <p:nvGraphicFramePr>
-          <p:cNvPr id="7" name="Content Placeholder 12"/>
-          <p:cNvGraphicFramePr>
-            <a:graphicFrameLocks/>
-          </p:cNvGraphicFramePr>
-          <p:nvPr/>
-        </p:nvGraphicFramePr>
-        <p:xfrm>
-          <a:off x="3962397" y="2981960"/>
-          <a:ext cx="4648203" cy="370840"/>
-        </p:xfrm>
-        <a:graphic>
-          <a:graphicData uri="http://schemas.openxmlformats.org/drawingml/2006/table">
-            <a:tbl>
-              <a:tblPr firstRow="1" bandRow="1">
-                <a:tableStyleId>{5940675A-B579-460E-94D1-54222C63F5DA}</a:tableStyleId>
-              </a:tblPr>
-              <a:tblGrid>
-                <a:gridCol w="664029">
-                  <a:extLst>
-                    <a:ext uri="{9D8B030D-6E8A-4147-A177-3AD203B41FA5}">
-                      <a16:colId xmlns:a16="http://schemas.microsoft.com/office/drawing/2014/main" val="242172939"/>
-                    </a:ext>
-                  </a:extLst>
-                </a:gridCol>
-                <a:gridCol w="664029">
-                  <a:extLst>
-                    <a:ext uri="{9D8B030D-6E8A-4147-A177-3AD203B41FA5}">
-                      <a16:colId xmlns:a16="http://schemas.microsoft.com/office/drawing/2014/main" val="2188387863"/>
-                    </a:ext>
-                  </a:extLst>
-                </a:gridCol>
-                <a:gridCol w="664029">
-                  <a:extLst>
-                    <a:ext uri="{9D8B030D-6E8A-4147-A177-3AD203B41FA5}">
-                      <a16:colId xmlns:a16="http://schemas.microsoft.com/office/drawing/2014/main" val="85967061"/>
-                    </a:ext>
-                  </a:extLst>
-                </a:gridCol>
-                <a:gridCol w="664029">
-                  <a:extLst>
-                    <a:ext uri="{9D8B030D-6E8A-4147-A177-3AD203B41FA5}">
-                      <a16:colId xmlns:a16="http://schemas.microsoft.com/office/drawing/2014/main" val="2525421763"/>
-                    </a:ext>
-                  </a:extLst>
-                </a:gridCol>
-                <a:gridCol w="664029">
-                  <a:extLst>
-                    <a:ext uri="{9D8B030D-6E8A-4147-A177-3AD203B41FA5}">
-                      <a16:colId xmlns:a16="http://schemas.microsoft.com/office/drawing/2014/main" val="620484926"/>
-                    </a:ext>
-                  </a:extLst>
-                </a:gridCol>
-                <a:gridCol w="664029">
-                  <a:extLst>
-                    <a:ext uri="{9D8B030D-6E8A-4147-A177-3AD203B41FA5}">
-                      <a16:colId xmlns:a16="http://schemas.microsoft.com/office/drawing/2014/main" val="1648192157"/>
-                    </a:ext>
-                  </a:extLst>
-                </a:gridCol>
-                <a:gridCol w="664029">
-                  <a:extLst>
-                    <a:ext uri="{9D8B030D-6E8A-4147-A177-3AD203B41FA5}">
-                      <a16:colId xmlns:a16="http://schemas.microsoft.com/office/drawing/2014/main" val="3500636327"/>
-                    </a:ext>
-                  </a:extLst>
-                </a:gridCol>
-              </a:tblGrid>
-              <a:tr h="370840">
-                <a:tc>
-                  <a:txBody>
-                    <a:bodyPr/>
-                    <a:lstStyle/>
-                    <a:p>
-                      <a:pPr algn="ctr"/>
-                      <a:r>
-                        <a:rPr lang="en-US"/>
-                        <a:t>a4</a:t>
-                      </a:r>
-                      <a:endParaRPr lang="en-US" dirty="0"/>
-                    </a:p>
-                  </a:txBody>
-                  <a:tcPr/>
-                </a:tc>
-                <a:tc>
-                  <a:txBody>
-                    <a:bodyPr/>
-                    <a:lstStyle/>
-                    <a:p>
-                      <a:pPr algn="ctr"/>
-                      <a:r>
-                        <a:rPr lang="en-US" dirty="0"/>
-                        <a:t>a5</a:t>
-                      </a:r>
-                    </a:p>
-                  </a:txBody>
-                  <a:tcPr/>
-                </a:tc>
-                <a:tc>
-                  <a:txBody>
-                    <a:bodyPr/>
-                    <a:lstStyle/>
-                    <a:p>
-                      <a:pPr algn="ctr"/>
-                      <a:endParaRPr lang="en-US" dirty="0"/>
-                    </a:p>
-                  </a:txBody>
-                  <a:tcPr/>
-                </a:tc>
-                <a:tc>
-                  <a:txBody>
-                    <a:bodyPr/>
-                    <a:lstStyle/>
-                    <a:p>
-                      <a:pPr algn="ctr"/>
-                      <a:endParaRPr lang="en-US" dirty="0"/>
-                    </a:p>
-                  </a:txBody>
-                  <a:tcPr/>
-                </a:tc>
-                <a:tc>
-                  <a:txBody>
-                    <a:bodyPr/>
-                    <a:lstStyle/>
-                    <a:p>
-                      <a:pPr algn="ctr"/>
-                      <a:endParaRPr lang="en-US" dirty="0"/>
-                    </a:p>
-                  </a:txBody>
-                  <a:tcPr/>
-                </a:tc>
-                <a:tc>
-                  <a:txBody>
-                    <a:bodyPr/>
-                    <a:lstStyle/>
-                    <a:p>
-                      <a:pPr algn="ctr"/>
-                      <a:endParaRPr lang="en-US" dirty="0"/>
-                    </a:p>
-                  </a:txBody>
-                  <a:tcPr/>
-                </a:tc>
-                <a:tc>
-                  <a:txBody>
-                    <a:bodyPr/>
-                    <a:lstStyle/>
-                    <a:p>
-                      <a:pPr algn="ctr"/>
-                      <a:endParaRPr lang="en-US" dirty="0"/>
-                    </a:p>
-                  </a:txBody>
-                  <a:tcPr/>
-                </a:tc>
-                <a:extLst>
-                  <a:ext uri="{0D108BD9-81ED-4DB2-BD59-A6C34878D82A}">
-                    <a16:rowId xmlns:a16="http://schemas.microsoft.com/office/drawing/2014/main" val="3892313521"/>
-                  </a:ext>
-                </a:extLst>
-              </a:tr>
-            </a:tbl>
-          </a:graphicData>
-        </a:graphic>
-      </p:graphicFrame>
-      <p:sp>
-        <p:nvSpPr>
-          <p:cNvPr id="8" name="TextBox 7"/>
-          <p:cNvSpPr txBox="1"/>
-          <p:nvPr/>
-        </p:nvSpPr>
-        <p:spPr>
-          <a:xfrm>
-            <a:off x="1905000" y="2626900"/>
-            <a:ext cx="1039067" cy="369332"/>
-          </a:xfrm>
-          <a:prstGeom prst="rect">
-            <a:avLst/>
-          </a:prstGeom>
-          <a:noFill/>
-        </p:spPr>
-        <p:txBody>
-          <a:bodyPr wrap="none" rtlCol="0">
-            <a:spAutoFit/>
-          </a:bodyPr>
-          <a:lstStyle/>
-          <a:p>
-            <a:r>
-              <a:rPr lang="en-US" dirty="0"/>
-              <a:t>Registers</a:t>
-            </a:r>
-          </a:p>
-        </p:txBody>
-      </p:sp>
-      <p:sp>
-        <p:nvSpPr>
-          <p:cNvPr id="9" name="TextBox 8"/>
-          <p:cNvSpPr txBox="1"/>
-          <p:nvPr/>
-        </p:nvSpPr>
-        <p:spPr>
-          <a:xfrm>
-            <a:off x="5334000" y="2626900"/>
-            <a:ext cx="1765676" cy="646331"/>
-          </a:xfrm>
-          <a:prstGeom prst="rect">
-            <a:avLst/>
-          </a:prstGeom>
-          <a:noFill/>
-        </p:spPr>
-        <p:txBody>
-          <a:bodyPr wrap="none" rtlCol="0">
-            <a:spAutoFit/>
-          </a:bodyPr>
-          <a:lstStyle/>
-          <a:p>
-            <a:r>
-              <a:rPr lang="en-US" dirty="0"/>
-              <a:t>Stack </a:t>
-            </a:r>
-            <a:r>
-              <a:rPr lang="en-US" altLang="zh-CN" dirty="0"/>
-              <a:t>in Memory</a:t>
-            </a:r>
-            <a:endParaRPr lang="en-US" dirty="0"/>
-          </a:p>
-          <a:p>
-            <a:endParaRPr lang="en-US" dirty="0"/>
-          </a:p>
-        </p:txBody>
-      </p:sp>
-    </p:spTree>
-    <p:extLst>
-      <p:ext uri="{BB962C8B-B14F-4D97-AF65-F5344CB8AC3E}">
-        <p14:creationId xmlns:p14="http://schemas.microsoft.com/office/powerpoint/2010/main" val="414796749"/>
-      </p:ext>
-    </p:extLst>
-  </p:cSld>
-  <p:clrMapOvr>
-    <a:masterClrMapping/>
-  </p:clrMapOvr>
-</p:sld>
-</file>
-
-<file path=ppt/slides/slide15.xml><?xml version="1.0" encoding="utf-8"?>
-<p:sld xmlns:a="http://schemas.openxmlformats.org/drawingml/2006/main" xmlns:r="http://schemas.openxmlformats.org/officeDocument/2006/relationships" xmlns:p="http://schemas.openxmlformats.org/presentationml/2006/main">
-  <p:cSld>
-    <p:spTree>
-      <p:nvGrpSpPr>
-        <p:cNvPr id="1" name="">
-          <a:extLst>
-            <a:ext uri="{FF2B5EF4-FFF2-40B4-BE49-F238E27FC236}">
-              <a16:creationId xmlns:a16="http://schemas.microsoft.com/office/drawing/2014/main" id="{18DFCAEB-CD92-F6E6-96EC-622670592FF2}"/>
-            </a:ext>
-          </a:extLst>
-        </p:cNvPr>
-        <p:cNvGrpSpPr/>
-        <p:nvPr/>
-      </p:nvGrpSpPr>
-      <p:grpSpPr>
-        <a:xfrm>
-          <a:off x="0" y="0"/>
-          <a:ext cx="0" cy="0"/>
-          <a:chOff x="0" y="0"/>
-          <a:chExt cx="0" cy="0"/>
-        </a:xfrm>
-      </p:grpSpPr>
-      <p:sp>
-        <p:nvSpPr>
-          <p:cNvPr id="2" name="Title 1">
-            <a:extLst>
-              <a:ext uri="{FF2B5EF4-FFF2-40B4-BE49-F238E27FC236}">
-                <a16:creationId xmlns:a16="http://schemas.microsoft.com/office/drawing/2014/main" id="{B8B35D03-E63B-948E-7B28-FE2BC0D48EA8}"/>
-              </a:ext>
-            </a:extLst>
-          </p:cNvPr>
-          <p:cNvSpPr>
-            <a:spLocks noGrp="1"/>
-          </p:cNvSpPr>
-          <p:nvPr>
-            <p:ph type="title"/>
-          </p:nvPr>
-        </p:nvSpPr>
-        <p:spPr/>
-        <p:txBody>
-          <a:bodyPr>
-            <a:normAutofit fontScale="90000"/>
-          </a:bodyPr>
-          <a:lstStyle/>
-          <a:p>
-            <a:r>
-              <a:rPr lang="en-US" dirty="0"/>
-              <a:t>What’s wrong? Passing arguments and Returning Value</a:t>
-            </a:r>
-          </a:p>
-        </p:txBody>
-      </p:sp>
-      <p:sp>
-        <p:nvSpPr>
-          <p:cNvPr id="3" name="Slide Number Placeholder 2">
-            <a:extLst>
-              <a:ext uri="{FF2B5EF4-FFF2-40B4-BE49-F238E27FC236}">
-                <a16:creationId xmlns:a16="http://schemas.microsoft.com/office/drawing/2014/main" id="{F2A24FAD-DC69-0014-9A87-E1D9B0AFB91E}"/>
-              </a:ext>
-            </a:extLst>
-          </p:cNvPr>
-          <p:cNvSpPr>
-            <a:spLocks noGrp="1"/>
-          </p:cNvSpPr>
-          <p:nvPr>
-            <p:ph type="sldNum" sz="quarter" idx="12"/>
-          </p:nvPr>
-        </p:nvSpPr>
-        <p:spPr/>
-        <p:txBody>
-          <a:bodyPr/>
-          <a:lstStyle/>
-          <a:p>
-            <a:fld id="{EA7C8D44-3667-46F6-9772-CC52308E2A7F}" type="slidenum">
-              <a:rPr kumimoji="0" lang="en-US" smtClean="0"/>
-              <a:pPr/>
-              <a:t>15</a:t>
-            </a:fld>
-            <a:endParaRPr kumimoji="0" lang="en-US" dirty="0"/>
-          </a:p>
-        </p:txBody>
-      </p:sp>
-      <p:sp>
-        <p:nvSpPr>
-          <p:cNvPr id="11" name="Rectangle 10">
-            <a:extLst>
-              <a:ext uri="{FF2B5EF4-FFF2-40B4-BE49-F238E27FC236}">
-                <a16:creationId xmlns:a16="http://schemas.microsoft.com/office/drawing/2014/main" id="{41B1B8CA-B3E7-1ACE-322F-D0B4A4D4E57D}"/>
-              </a:ext>
-            </a:extLst>
-          </p:cNvPr>
-          <p:cNvSpPr/>
-          <p:nvPr/>
-        </p:nvSpPr>
-        <p:spPr>
-          <a:xfrm>
-            <a:off x="76200" y="1593468"/>
-            <a:ext cx="9163050" cy="646331"/>
-          </a:xfrm>
-          <a:prstGeom prst="rect">
-            <a:avLst/>
-          </a:prstGeom>
-        </p:spPr>
-        <p:txBody>
-          <a:bodyPr wrap="square">
-            <a:spAutoFit/>
-          </a:bodyPr>
-          <a:lstStyle/>
-          <a:p>
-            <a:r>
-              <a:rPr lang="en-US" b="1" dirty="0">
-                <a:latin typeface="Consolas" panose="020B0609020204030204" pitchFamily="49" charset="0"/>
-              </a:rPr>
-              <a:t>uint32_t sum(uint8_t a8, uint8_t b8, uint16_t c16, uint16_t d16, </a:t>
-            </a:r>
-            <a:r>
-              <a:rPr lang="en-US" b="1" dirty="0">
-                <a:solidFill>
-                  <a:srgbClr val="FF0000"/>
-                </a:solidFill>
-                <a:latin typeface="Consolas" panose="020B0609020204030204" pitchFamily="49" charset="0"/>
-              </a:rPr>
-              <a:t>uint32_t e32</a:t>
-            </a:r>
-            <a:r>
-              <a:rPr lang="en-US" b="1" dirty="0">
-                <a:latin typeface="Consolas" panose="020B0609020204030204" pitchFamily="49" charset="0"/>
-              </a:rPr>
-              <a:t>);</a:t>
-            </a:r>
-          </a:p>
-        </p:txBody>
-      </p:sp>
-      <p:sp>
-        <p:nvSpPr>
-          <p:cNvPr id="4" name="TextBox 3">
-            <a:extLst>
-              <a:ext uri="{FF2B5EF4-FFF2-40B4-BE49-F238E27FC236}">
-                <a16:creationId xmlns:a16="http://schemas.microsoft.com/office/drawing/2014/main" id="{9BD5669A-1FE1-C6BC-0617-481BE80F1863}"/>
-              </a:ext>
-            </a:extLst>
-          </p:cNvPr>
-          <p:cNvSpPr txBox="1"/>
-          <p:nvPr/>
-        </p:nvSpPr>
-        <p:spPr>
-          <a:xfrm>
-            <a:off x="304800" y="2754035"/>
-            <a:ext cx="750526" cy="369332"/>
-          </a:xfrm>
-          <a:prstGeom prst="rect">
-            <a:avLst/>
-          </a:prstGeom>
-          <a:noFill/>
-        </p:spPr>
-        <p:txBody>
-          <a:bodyPr wrap="none" rtlCol="0">
-            <a:spAutoFit/>
-          </a:bodyPr>
-          <a:lstStyle/>
-          <a:p>
-            <a:r>
-              <a:rPr lang="en-US" dirty="0"/>
-              <a:t>Caller</a:t>
-            </a:r>
-          </a:p>
-        </p:txBody>
-      </p:sp>
-      <p:sp>
-        <p:nvSpPr>
-          <p:cNvPr id="23" name="Rectangle 22">
-            <a:extLst>
-              <a:ext uri="{FF2B5EF4-FFF2-40B4-BE49-F238E27FC236}">
-                <a16:creationId xmlns:a16="http://schemas.microsoft.com/office/drawing/2014/main" id="{B5A46639-51AC-D259-C3DB-1521D258BD49}"/>
-              </a:ext>
-            </a:extLst>
-          </p:cNvPr>
-          <p:cNvSpPr/>
-          <p:nvPr/>
-        </p:nvSpPr>
-        <p:spPr>
-          <a:xfrm>
-            <a:off x="33528" y="2251948"/>
-            <a:ext cx="9163050" cy="369332"/>
-          </a:xfrm>
-          <a:prstGeom prst="rect">
-            <a:avLst/>
-          </a:prstGeom>
-        </p:spPr>
-        <p:txBody>
-          <a:bodyPr wrap="square">
-            <a:spAutoFit/>
-          </a:bodyPr>
-          <a:lstStyle/>
-          <a:p>
-            <a:r>
-              <a:rPr lang="en-US" b="1" dirty="0">
-                <a:solidFill>
-                  <a:srgbClr val="FF0000"/>
-                </a:solidFill>
-                <a:latin typeface="Consolas" panose="020B0609020204030204" pitchFamily="49" charset="0"/>
-              </a:rPr>
-              <a:t>s = sum(1, 2, 3, 4, 5);</a:t>
-            </a:r>
-          </a:p>
-        </p:txBody>
-      </p:sp>
-      <p:sp>
-        <p:nvSpPr>
-          <p:cNvPr id="15" name="TextBox 14">
-            <a:extLst>
-              <a:ext uri="{FF2B5EF4-FFF2-40B4-BE49-F238E27FC236}">
-                <a16:creationId xmlns:a16="http://schemas.microsoft.com/office/drawing/2014/main" id="{D4F04556-2048-4F19-A763-9BBFFFCAD277}"/>
-              </a:ext>
-            </a:extLst>
-          </p:cNvPr>
-          <p:cNvSpPr txBox="1"/>
-          <p:nvPr/>
-        </p:nvSpPr>
-        <p:spPr>
-          <a:xfrm>
-            <a:off x="449580" y="3256122"/>
-            <a:ext cx="2464136" cy="2031325"/>
-          </a:xfrm>
-          <a:prstGeom prst="rect">
-            <a:avLst/>
-          </a:prstGeom>
-        </p:spPr>
-        <p:style>
-          <a:lnRef idx="2">
-            <a:schemeClr val="accent1"/>
-          </a:lnRef>
-          <a:fillRef idx="1">
-            <a:schemeClr val="lt1"/>
-          </a:fillRef>
-          <a:effectRef idx="0">
-            <a:schemeClr val="accent1"/>
-          </a:effectRef>
-          <a:fontRef idx="minor">
-            <a:schemeClr val="dk1"/>
-          </a:fontRef>
-        </p:style>
-        <p:txBody>
-          <a:bodyPr wrap="none" rtlCol="0">
-            <a:spAutoFit/>
-          </a:bodyPr>
-          <a:lstStyle/>
-          <a:p>
-            <a:r>
-              <a:rPr lang="en-US" dirty="0">
-                <a:latin typeface="Consolas" panose="020B0609020204030204" pitchFamily="49" charset="0"/>
-              </a:rPr>
-              <a:t>  MOV r0, #5 </a:t>
-            </a:r>
-            <a:r>
-              <a:rPr lang="en-US" dirty="0">
-                <a:solidFill>
-                  <a:schemeClr val="bg1">
-                    <a:lumMod val="50000"/>
-                  </a:schemeClr>
-                </a:solidFill>
-                <a:latin typeface="Consolas" panose="020B0609020204030204" pitchFamily="49" charset="0"/>
-              </a:rPr>
-              <a:t>; e32</a:t>
-            </a:r>
-          </a:p>
-          <a:p>
-            <a:r>
-              <a:rPr lang="en-US" dirty="0">
-                <a:solidFill>
-                  <a:schemeClr val="tx1"/>
-                </a:solidFill>
-                <a:latin typeface="Consolas" panose="020B0609020204030204" pitchFamily="49" charset="0"/>
-              </a:rPr>
-              <a:t>  MOV r0, #1 </a:t>
-            </a:r>
-            <a:r>
-              <a:rPr lang="en-US" dirty="0">
-                <a:solidFill>
-                  <a:schemeClr val="bg1">
-                    <a:lumMod val="50000"/>
-                  </a:schemeClr>
-                </a:solidFill>
-                <a:latin typeface="Consolas" panose="020B0609020204030204" pitchFamily="49" charset="0"/>
-              </a:rPr>
-              <a:t>; a8</a:t>
-            </a:r>
-          </a:p>
-          <a:p>
-            <a:r>
-              <a:rPr lang="en-US" dirty="0">
-                <a:latin typeface="Consolas" panose="020B0609020204030204" pitchFamily="49" charset="0"/>
-              </a:rPr>
-              <a:t>  MOV r1, #2 </a:t>
-            </a:r>
-            <a:r>
-              <a:rPr lang="en-US" dirty="0">
-                <a:solidFill>
-                  <a:schemeClr val="bg1">
-                    <a:lumMod val="50000"/>
-                  </a:schemeClr>
-                </a:solidFill>
-                <a:latin typeface="Consolas" panose="020B0609020204030204" pitchFamily="49" charset="0"/>
-              </a:rPr>
-              <a:t>; b8</a:t>
-            </a:r>
-          </a:p>
-          <a:p>
-            <a:r>
-              <a:rPr lang="en-US" dirty="0">
-                <a:latin typeface="Consolas" panose="020B0609020204030204" pitchFamily="49" charset="0"/>
-              </a:rPr>
-              <a:t>  MOV r2, #3 </a:t>
-            </a:r>
-            <a:r>
-              <a:rPr lang="en-US" dirty="0">
-                <a:solidFill>
-                  <a:schemeClr val="bg1">
-                    <a:lumMod val="50000"/>
-                  </a:schemeClr>
-                </a:solidFill>
-                <a:latin typeface="Consolas" panose="020B0609020204030204" pitchFamily="49" charset="0"/>
-              </a:rPr>
-              <a:t>; c16</a:t>
-            </a:r>
-          </a:p>
-          <a:p>
-            <a:r>
-              <a:rPr lang="en-US" dirty="0">
-                <a:latin typeface="Consolas" panose="020B0609020204030204" pitchFamily="49" charset="0"/>
-              </a:rPr>
-              <a:t>  MOV r3, #4 </a:t>
-            </a:r>
-            <a:r>
-              <a:rPr lang="en-US" dirty="0">
-                <a:solidFill>
-                  <a:schemeClr val="bg1">
-                    <a:lumMod val="50000"/>
-                  </a:schemeClr>
-                </a:solidFill>
-                <a:latin typeface="Consolas" panose="020B0609020204030204" pitchFamily="49" charset="0"/>
-              </a:rPr>
-              <a:t>; d16</a:t>
-            </a:r>
-          </a:p>
-          <a:p>
-            <a:r>
-              <a:rPr lang="en-US" dirty="0">
-                <a:latin typeface="Consolas" panose="020B0609020204030204" pitchFamily="49" charset="0"/>
-              </a:rPr>
-              <a:t>  BL  sum</a:t>
-            </a:r>
-          </a:p>
-          <a:p>
-            <a:r>
-              <a:rPr lang="en-US" dirty="0">
-                <a:latin typeface="Consolas" panose="020B0609020204030204" pitchFamily="49" charset="0"/>
-              </a:rPr>
-              <a:t>  ...</a:t>
-            </a:r>
-          </a:p>
-        </p:txBody>
-      </p:sp>
-      <p:sp>
-        <p:nvSpPr>
-          <p:cNvPr id="27" name="TextBox 26">
-            <a:extLst>
-              <a:ext uri="{FF2B5EF4-FFF2-40B4-BE49-F238E27FC236}">
-                <a16:creationId xmlns:a16="http://schemas.microsoft.com/office/drawing/2014/main" id="{6AC2BFAF-703A-1607-3F8B-C3C6EAC24548}"/>
-              </a:ext>
-            </a:extLst>
-          </p:cNvPr>
-          <p:cNvSpPr txBox="1"/>
-          <p:nvPr/>
-        </p:nvSpPr>
-        <p:spPr>
-          <a:xfrm>
-            <a:off x="3581400" y="2840938"/>
-            <a:ext cx="769763" cy="369332"/>
-          </a:xfrm>
-          <a:prstGeom prst="rect">
-            <a:avLst/>
-          </a:prstGeom>
-          <a:noFill/>
-        </p:spPr>
-        <p:txBody>
-          <a:bodyPr wrap="none" rtlCol="0">
-            <a:spAutoFit/>
-          </a:bodyPr>
-          <a:lstStyle/>
-          <a:p>
-            <a:r>
-              <a:rPr lang="en-US" dirty="0" err="1"/>
-              <a:t>Callee</a:t>
-            </a:r>
-            <a:endParaRPr lang="en-US" dirty="0"/>
-          </a:p>
-        </p:txBody>
-      </p:sp>
-      <p:sp>
-        <p:nvSpPr>
-          <p:cNvPr id="28" name="TextBox 27">
-            <a:extLst>
-              <a:ext uri="{FF2B5EF4-FFF2-40B4-BE49-F238E27FC236}">
-                <a16:creationId xmlns:a16="http://schemas.microsoft.com/office/drawing/2014/main" id="{5A07EE5F-FDFB-4DFD-A418-4743BE043075}"/>
-              </a:ext>
-            </a:extLst>
-          </p:cNvPr>
-          <p:cNvSpPr txBox="1"/>
-          <p:nvPr/>
-        </p:nvSpPr>
-        <p:spPr>
-          <a:xfrm>
-            <a:off x="3607914" y="3305718"/>
-            <a:ext cx="3730508" cy="2031325"/>
-          </a:xfrm>
-          <a:prstGeom prst="rect">
-            <a:avLst/>
-          </a:prstGeom>
-        </p:spPr>
-        <p:style>
-          <a:lnRef idx="2">
-            <a:schemeClr val="accent1"/>
-          </a:lnRef>
-          <a:fillRef idx="1">
-            <a:schemeClr val="lt1"/>
-          </a:fillRef>
-          <a:effectRef idx="0">
-            <a:schemeClr val="accent1"/>
-          </a:effectRef>
-          <a:fontRef idx="minor">
-            <a:schemeClr val="dk1"/>
-          </a:fontRef>
-        </p:style>
-        <p:txBody>
-          <a:bodyPr wrap="none" rtlCol="0">
-            <a:spAutoFit/>
-          </a:bodyPr>
-          <a:lstStyle/>
-          <a:p>
-            <a:r>
-              <a:rPr lang="en-US" b="1" dirty="0">
-                <a:solidFill>
-                  <a:srgbClr val="0000FF"/>
-                </a:solidFill>
-                <a:latin typeface="Consolas" panose="020B0609020204030204" pitchFamily="49" charset="0"/>
-              </a:rPr>
-              <a:t>sum</a:t>
-            </a:r>
-            <a:r>
-              <a:rPr lang="en-US" dirty="0">
-                <a:latin typeface="Consolas" panose="020B0609020204030204" pitchFamily="49" charset="0"/>
-              </a:rPr>
-              <a:t> PROC    </a:t>
-            </a:r>
-          </a:p>
-          <a:p>
-            <a:r>
-              <a:rPr lang="en-US" dirty="0">
-                <a:latin typeface="Consolas" panose="020B0609020204030204" pitchFamily="49" charset="0"/>
-              </a:rPr>
-              <a:t>  ADD r0, r0, r1   </a:t>
-            </a:r>
-            <a:r>
-              <a:rPr lang="en-US" dirty="0">
-                <a:solidFill>
-                  <a:schemeClr val="bg1">
-                    <a:lumMod val="50000"/>
-                  </a:schemeClr>
-                </a:solidFill>
-                <a:latin typeface="Consolas" panose="020B0609020204030204" pitchFamily="49" charset="0"/>
-              </a:rPr>
-              <a:t>; a8 + b8</a:t>
-            </a:r>
-          </a:p>
-          <a:p>
-            <a:r>
-              <a:rPr lang="en-US" dirty="0">
-                <a:latin typeface="Consolas" panose="020B0609020204030204" pitchFamily="49" charset="0"/>
-              </a:rPr>
-              <a:t>  ADD r0, r0, r2   </a:t>
-            </a:r>
-            <a:r>
-              <a:rPr lang="en-US" dirty="0">
-                <a:solidFill>
-                  <a:schemeClr val="bg1">
-                    <a:lumMod val="50000"/>
-                  </a:schemeClr>
-                </a:solidFill>
-                <a:latin typeface="Consolas" panose="020B0609020204030204" pitchFamily="49" charset="0"/>
-              </a:rPr>
-              <a:t>; add c16</a:t>
-            </a:r>
-          </a:p>
-          <a:p>
-            <a:r>
-              <a:rPr lang="en-US" dirty="0">
-                <a:latin typeface="Consolas" panose="020B0609020204030204" pitchFamily="49" charset="0"/>
-              </a:rPr>
-              <a:t>  ADD r0, r0, r3   </a:t>
-            </a:r>
-            <a:r>
-              <a:rPr lang="en-US" dirty="0">
-                <a:solidFill>
-                  <a:schemeClr val="bg1">
-                    <a:lumMod val="50000"/>
-                  </a:schemeClr>
-                </a:solidFill>
-                <a:latin typeface="Consolas" panose="020B0609020204030204" pitchFamily="49" charset="0"/>
-              </a:rPr>
-              <a:t>; add d16</a:t>
-            </a:r>
-          </a:p>
-          <a:p>
-            <a:r>
-              <a:rPr lang="en-US" dirty="0">
-                <a:solidFill>
-                  <a:schemeClr val="tx1"/>
-                </a:solidFill>
-                <a:latin typeface="Consolas" panose="020B0609020204030204" pitchFamily="49" charset="0"/>
-              </a:rPr>
-              <a:t>  ADD r0, r0, r1   </a:t>
-            </a:r>
-            <a:r>
-              <a:rPr lang="en-US" dirty="0">
-                <a:solidFill>
-                  <a:schemeClr val="bg1">
-                    <a:lumMod val="50000"/>
-                  </a:schemeClr>
-                </a:solidFill>
-                <a:latin typeface="Consolas" panose="020B0609020204030204" pitchFamily="49" charset="0"/>
-              </a:rPr>
-              <a:t>; add e32</a:t>
-            </a:r>
-          </a:p>
-          <a:p>
-            <a:r>
-              <a:rPr lang="en-US" dirty="0">
-                <a:latin typeface="Consolas" panose="020B0609020204030204" pitchFamily="49" charset="0"/>
-              </a:rPr>
-              <a:t>  BX  LR</a:t>
-            </a:r>
-          </a:p>
-          <a:p>
-            <a:r>
-              <a:rPr lang="en-US" dirty="0">
-                <a:latin typeface="Consolas" panose="020B0609020204030204" pitchFamily="49" charset="0"/>
-              </a:rPr>
-              <a:t>  ENDP</a:t>
-            </a:r>
-          </a:p>
-        </p:txBody>
-      </p:sp>
-    </p:spTree>
-    <p:extLst>
-      <p:ext uri="{BB962C8B-B14F-4D97-AF65-F5344CB8AC3E}">
-        <p14:creationId xmlns:p14="http://schemas.microsoft.com/office/powerpoint/2010/main" val="3970213323"/>
-      </p:ext>
-    </p:extLst>
-  </p:cSld>
-  <p:clrMapOvr>
-    <a:masterClrMapping/>
-  </p:clrMapOvr>
-</p:sld>
-</file>
-
-<file path=ppt/slides/slide16.xml><?xml version="1.0" encoding="utf-8"?>
-<p:sld xmlns:a="http://schemas.openxmlformats.org/drawingml/2006/main" xmlns:r="http://schemas.openxmlformats.org/officeDocument/2006/relationships" xmlns:p="http://schemas.openxmlformats.org/presentationml/2006/main">
-  <p:cSld>
-    <p:spTree>
-      <p:nvGrpSpPr>
-        <p:cNvPr id="1" name=""/>
-        <p:cNvGrpSpPr/>
-        <p:nvPr/>
-      </p:nvGrpSpPr>
-      <p:grpSpPr>
-        <a:xfrm>
-          <a:off x="0" y="0"/>
-          <a:ext cx="0" cy="0"/>
-          <a:chOff x="0" y="0"/>
-          <a:chExt cx="0" cy="0"/>
-        </a:xfrm>
-      </p:grpSpPr>
-      <p:sp>
-        <p:nvSpPr>
-          <p:cNvPr id="2" name="Title 1"/>
-          <p:cNvSpPr>
-            <a:spLocks noGrp="1"/>
-          </p:cNvSpPr>
-          <p:nvPr>
-            <p:ph type="title"/>
-          </p:nvPr>
-        </p:nvSpPr>
-        <p:spPr/>
-        <p:txBody>
-          <a:bodyPr>
-            <a:normAutofit fontScale="90000"/>
-          </a:bodyPr>
-          <a:lstStyle/>
-          <a:p>
-            <a:r>
-              <a:rPr lang="en-US" dirty="0"/>
-              <a:t>What’s wrong? Passing arguments and Returning Value ANS</a:t>
-            </a:r>
-          </a:p>
-        </p:txBody>
-      </p:sp>
-      <p:sp>
-        <p:nvSpPr>
-          <p:cNvPr id="3" name="Slide Number Placeholder 2"/>
-          <p:cNvSpPr>
-            <a:spLocks noGrp="1"/>
-          </p:cNvSpPr>
-          <p:nvPr>
-            <p:ph type="sldNum" sz="quarter" idx="12"/>
-          </p:nvPr>
-        </p:nvSpPr>
-        <p:spPr/>
-        <p:txBody>
-          <a:bodyPr/>
-          <a:lstStyle/>
-          <a:p>
-            <a:fld id="{EA7C8D44-3667-46F6-9772-CC52308E2A7F}" type="slidenum">
-              <a:rPr kumimoji="0" lang="en-US" smtClean="0"/>
-              <a:pPr/>
-              <a:t>16</a:t>
-            </a:fld>
-            <a:endParaRPr kumimoji="0" lang="en-US" dirty="0"/>
-          </a:p>
-        </p:txBody>
-      </p:sp>
-      <p:sp>
-        <p:nvSpPr>
-          <p:cNvPr id="11" name="Rectangle 10"/>
-          <p:cNvSpPr/>
-          <p:nvPr/>
-        </p:nvSpPr>
-        <p:spPr>
-          <a:xfrm>
-            <a:off x="76200" y="1593468"/>
-            <a:ext cx="9163050" cy="646331"/>
-          </a:xfrm>
-          <a:prstGeom prst="rect">
-            <a:avLst/>
-          </a:prstGeom>
-        </p:spPr>
-        <p:txBody>
-          <a:bodyPr wrap="square">
-            <a:spAutoFit/>
-          </a:bodyPr>
-          <a:lstStyle/>
-          <a:p>
-            <a:r>
-              <a:rPr lang="en-US" b="1" dirty="0">
-                <a:latin typeface="Consolas" panose="020B0609020204030204" pitchFamily="49" charset="0"/>
-              </a:rPr>
-              <a:t>uint32_t sum(uint8_t a8, uint8_t b8, uint16_t c16, uint16_t d16, </a:t>
-            </a:r>
-            <a:r>
-              <a:rPr lang="en-US" b="1" dirty="0">
-                <a:solidFill>
-                  <a:srgbClr val="FF0000"/>
-                </a:solidFill>
-                <a:latin typeface="Consolas" panose="020B0609020204030204" pitchFamily="49" charset="0"/>
-              </a:rPr>
-              <a:t>uint32_t e32</a:t>
-            </a:r>
-            <a:r>
-              <a:rPr lang="en-US" b="1" dirty="0">
-                <a:latin typeface="Consolas" panose="020B0609020204030204" pitchFamily="49" charset="0"/>
-              </a:rPr>
-              <a:t>);</a:t>
-            </a:r>
-          </a:p>
-        </p:txBody>
-      </p:sp>
-      <p:sp>
-        <p:nvSpPr>
-          <p:cNvPr id="4" name="TextBox 3"/>
-          <p:cNvSpPr txBox="1"/>
-          <p:nvPr/>
-        </p:nvSpPr>
-        <p:spPr>
-          <a:xfrm>
-            <a:off x="304800" y="2754035"/>
-            <a:ext cx="750526" cy="369332"/>
-          </a:xfrm>
-          <a:prstGeom prst="rect">
-            <a:avLst/>
-          </a:prstGeom>
-          <a:noFill/>
-        </p:spPr>
-        <p:txBody>
-          <a:bodyPr wrap="none" rtlCol="0">
-            <a:spAutoFit/>
-          </a:bodyPr>
-          <a:lstStyle/>
-          <a:p>
-            <a:r>
-              <a:rPr lang="en-US" dirty="0"/>
-              <a:t>Caller</a:t>
-            </a:r>
-          </a:p>
-        </p:txBody>
-      </p:sp>
-      <p:sp>
-        <p:nvSpPr>
-          <p:cNvPr id="23" name="Rectangle 22"/>
-          <p:cNvSpPr/>
-          <p:nvPr/>
-        </p:nvSpPr>
-        <p:spPr>
-          <a:xfrm>
-            <a:off x="33528" y="2251948"/>
-            <a:ext cx="9163050" cy="369332"/>
-          </a:xfrm>
-          <a:prstGeom prst="rect">
-            <a:avLst/>
-          </a:prstGeom>
-        </p:spPr>
-        <p:txBody>
-          <a:bodyPr wrap="square">
-            <a:spAutoFit/>
-          </a:bodyPr>
-          <a:lstStyle/>
-          <a:p>
-            <a:r>
-              <a:rPr lang="en-US" b="1" dirty="0">
-                <a:solidFill>
-                  <a:srgbClr val="FF0000"/>
-                </a:solidFill>
-                <a:latin typeface="Consolas" panose="020B0609020204030204" pitchFamily="49" charset="0"/>
-              </a:rPr>
-              <a:t>s = sum(1, 2, 3, 4, 5);</a:t>
-            </a:r>
-          </a:p>
-        </p:txBody>
-      </p:sp>
-      <p:sp>
-        <p:nvSpPr>
-          <p:cNvPr id="15" name="TextBox 14"/>
-          <p:cNvSpPr txBox="1"/>
-          <p:nvPr/>
-        </p:nvSpPr>
-        <p:spPr>
-          <a:xfrm>
-            <a:off x="449580" y="3256122"/>
-            <a:ext cx="2464136" cy="2585323"/>
-          </a:xfrm>
-          <a:prstGeom prst="rect">
-            <a:avLst/>
-          </a:prstGeom>
-        </p:spPr>
-        <p:style>
-          <a:lnRef idx="2">
-            <a:schemeClr val="accent1"/>
-          </a:lnRef>
-          <a:fillRef idx="1">
-            <a:schemeClr val="lt1"/>
-          </a:fillRef>
-          <a:effectRef idx="0">
-            <a:schemeClr val="accent1"/>
-          </a:effectRef>
-          <a:fontRef idx="minor">
-            <a:schemeClr val="dk1"/>
-          </a:fontRef>
-        </p:style>
-        <p:txBody>
-          <a:bodyPr wrap="none" rtlCol="0">
-            <a:spAutoFit/>
-          </a:bodyPr>
-          <a:lstStyle/>
-          <a:p>
-            <a:r>
-              <a:rPr lang="en-US" dirty="0">
-                <a:latin typeface="Consolas" panose="020B0609020204030204" pitchFamily="49" charset="0"/>
-              </a:rPr>
-              <a:t>  MOV r0, #5 </a:t>
-            </a:r>
-            <a:r>
-              <a:rPr lang="en-US" dirty="0">
-                <a:solidFill>
-                  <a:schemeClr val="bg1">
-                    <a:lumMod val="50000"/>
-                  </a:schemeClr>
-                </a:solidFill>
-                <a:latin typeface="Consolas" panose="020B0609020204030204" pitchFamily="49" charset="0"/>
-              </a:rPr>
-              <a:t>; e32</a:t>
-            </a:r>
-          </a:p>
-          <a:p>
-            <a:r>
-              <a:rPr lang="en-US" dirty="0">
-                <a:latin typeface="Consolas" panose="020B0609020204030204" pitchFamily="49" charset="0"/>
-              </a:rPr>
-              <a:t>  </a:t>
-            </a:r>
-            <a:r>
-              <a:rPr lang="en-US" b="1" dirty="0">
-                <a:solidFill>
-                  <a:srgbClr val="FF0000"/>
-                </a:solidFill>
-                <a:latin typeface="Consolas" panose="020B0609020204030204" pitchFamily="49" charset="0"/>
-              </a:rPr>
-              <a:t>PUSH {r0}</a:t>
-            </a:r>
-          </a:p>
-          <a:p>
-            <a:r>
-              <a:rPr lang="en-US" dirty="0">
-                <a:solidFill>
-                  <a:schemeClr val="tx1"/>
-                </a:solidFill>
-                <a:latin typeface="Consolas" panose="020B0609020204030204" pitchFamily="49" charset="0"/>
-              </a:rPr>
-              <a:t>  MOV r0, #1 </a:t>
-            </a:r>
-            <a:r>
-              <a:rPr lang="en-US" dirty="0">
-                <a:solidFill>
-                  <a:schemeClr val="bg1">
-                    <a:lumMod val="50000"/>
-                  </a:schemeClr>
-                </a:solidFill>
-                <a:latin typeface="Consolas" panose="020B0609020204030204" pitchFamily="49" charset="0"/>
-              </a:rPr>
-              <a:t>; a8</a:t>
-            </a:r>
-          </a:p>
-          <a:p>
-            <a:r>
-              <a:rPr lang="en-US" dirty="0">
-                <a:latin typeface="Consolas" panose="020B0609020204030204" pitchFamily="49" charset="0"/>
-              </a:rPr>
-              <a:t>  MOV r1, #2 </a:t>
-            </a:r>
-            <a:r>
-              <a:rPr lang="en-US" dirty="0">
-                <a:solidFill>
-                  <a:schemeClr val="bg1">
-                    <a:lumMod val="50000"/>
-                  </a:schemeClr>
-                </a:solidFill>
-                <a:latin typeface="Consolas" panose="020B0609020204030204" pitchFamily="49" charset="0"/>
-              </a:rPr>
-              <a:t>; b8</a:t>
-            </a:r>
-          </a:p>
-          <a:p>
-            <a:r>
-              <a:rPr lang="en-US" dirty="0">
-                <a:latin typeface="Consolas" panose="020B0609020204030204" pitchFamily="49" charset="0"/>
-              </a:rPr>
-              <a:t>  MOV r2, #3 </a:t>
-            </a:r>
-            <a:r>
-              <a:rPr lang="en-US" dirty="0">
-                <a:solidFill>
-                  <a:schemeClr val="bg1">
-                    <a:lumMod val="50000"/>
-                  </a:schemeClr>
-                </a:solidFill>
-                <a:latin typeface="Consolas" panose="020B0609020204030204" pitchFamily="49" charset="0"/>
-              </a:rPr>
-              <a:t>; c16</a:t>
-            </a:r>
-          </a:p>
-          <a:p>
-            <a:r>
-              <a:rPr lang="en-US" dirty="0">
-                <a:latin typeface="Consolas" panose="020B0609020204030204" pitchFamily="49" charset="0"/>
-              </a:rPr>
-              <a:t>  MOV r3, #4 </a:t>
-            </a:r>
-            <a:r>
-              <a:rPr lang="en-US" dirty="0">
-                <a:solidFill>
-                  <a:schemeClr val="bg1">
-                    <a:lumMod val="50000"/>
-                  </a:schemeClr>
-                </a:solidFill>
-                <a:latin typeface="Consolas" panose="020B0609020204030204" pitchFamily="49" charset="0"/>
-              </a:rPr>
-              <a:t>; d16</a:t>
-            </a:r>
-          </a:p>
-          <a:p>
-            <a:r>
-              <a:rPr lang="en-US" dirty="0">
-                <a:latin typeface="Consolas" panose="020B0609020204030204" pitchFamily="49" charset="0"/>
-              </a:rPr>
-              <a:t>  BL  sum</a:t>
-            </a:r>
-          </a:p>
-          <a:p>
-            <a:r>
-              <a:rPr lang="en-US" dirty="0">
-                <a:latin typeface="Consolas" panose="020B0609020204030204" pitchFamily="49" charset="0"/>
-              </a:rPr>
-              <a:t>  ...</a:t>
-            </a:r>
-          </a:p>
-          <a:p>
-            <a:r>
-              <a:rPr lang="en-US" dirty="0">
-                <a:latin typeface="Consolas" panose="020B0609020204030204" pitchFamily="49" charset="0"/>
-              </a:rPr>
-              <a:t>  </a:t>
-            </a:r>
-            <a:r>
-              <a:rPr lang="en-US" b="1" dirty="0">
-                <a:solidFill>
-                  <a:srgbClr val="FF0000"/>
-                </a:solidFill>
-                <a:latin typeface="Consolas" panose="020B0609020204030204" pitchFamily="49" charset="0"/>
-              </a:rPr>
-              <a:t>POP {r0}</a:t>
-            </a:r>
-          </a:p>
-        </p:txBody>
-      </p:sp>
-      <p:sp>
-        <p:nvSpPr>
-          <p:cNvPr id="27" name="TextBox 26"/>
-          <p:cNvSpPr txBox="1"/>
-          <p:nvPr/>
-        </p:nvSpPr>
-        <p:spPr>
-          <a:xfrm>
-            <a:off x="3581400" y="2840938"/>
-            <a:ext cx="769763" cy="369332"/>
-          </a:xfrm>
-          <a:prstGeom prst="rect">
-            <a:avLst/>
-          </a:prstGeom>
-          <a:noFill/>
-        </p:spPr>
-        <p:txBody>
-          <a:bodyPr wrap="none" rtlCol="0">
-            <a:spAutoFit/>
-          </a:bodyPr>
-          <a:lstStyle/>
-          <a:p>
-            <a:r>
-              <a:rPr lang="en-US" dirty="0" err="1"/>
-              <a:t>Callee</a:t>
-            </a:r>
-            <a:endParaRPr lang="en-US" dirty="0"/>
-          </a:p>
-        </p:txBody>
-      </p:sp>
-      <p:sp>
-        <p:nvSpPr>
-          <p:cNvPr id="28" name="TextBox 27"/>
-          <p:cNvSpPr txBox="1"/>
-          <p:nvPr/>
-        </p:nvSpPr>
-        <p:spPr>
-          <a:xfrm>
-            <a:off x="3607914" y="3305718"/>
-            <a:ext cx="4996881" cy="2308324"/>
-          </a:xfrm>
-          <a:prstGeom prst="rect">
-            <a:avLst/>
-          </a:prstGeom>
-        </p:spPr>
-        <p:style>
-          <a:lnRef idx="2">
-            <a:schemeClr val="accent1"/>
-          </a:lnRef>
-          <a:fillRef idx="1">
-            <a:schemeClr val="lt1"/>
-          </a:fillRef>
-          <a:effectRef idx="0">
-            <a:schemeClr val="accent1"/>
-          </a:effectRef>
-          <a:fontRef idx="minor">
-            <a:schemeClr val="dk1"/>
-          </a:fontRef>
-        </p:style>
-        <p:txBody>
-          <a:bodyPr wrap="none" rtlCol="0">
-            <a:spAutoFit/>
-          </a:bodyPr>
-          <a:lstStyle/>
-          <a:p>
-            <a:r>
-              <a:rPr lang="en-US" b="1" dirty="0">
-                <a:solidFill>
-                  <a:srgbClr val="0000FF"/>
-                </a:solidFill>
-                <a:latin typeface="Consolas" panose="020B0609020204030204" pitchFamily="49" charset="0"/>
-              </a:rPr>
-              <a:t>sum</a:t>
-            </a:r>
-            <a:r>
-              <a:rPr lang="en-US" dirty="0">
-                <a:latin typeface="Consolas" panose="020B0609020204030204" pitchFamily="49" charset="0"/>
-              </a:rPr>
-              <a:t> PROC    </a:t>
-            </a:r>
-          </a:p>
-          <a:p>
-            <a:r>
-              <a:rPr lang="en-US" dirty="0">
-                <a:latin typeface="Consolas" panose="020B0609020204030204" pitchFamily="49" charset="0"/>
-              </a:rPr>
-              <a:t>  ADD r0, r0, r1   </a:t>
-            </a:r>
-            <a:r>
-              <a:rPr lang="en-US" dirty="0">
-                <a:solidFill>
-                  <a:schemeClr val="bg1">
-                    <a:lumMod val="50000"/>
-                  </a:schemeClr>
-                </a:solidFill>
-                <a:latin typeface="Consolas" panose="020B0609020204030204" pitchFamily="49" charset="0"/>
-              </a:rPr>
-              <a:t>; a8 + b8</a:t>
-            </a:r>
-          </a:p>
-          <a:p>
-            <a:r>
-              <a:rPr lang="en-US" dirty="0">
-                <a:latin typeface="Consolas" panose="020B0609020204030204" pitchFamily="49" charset="0"/>
-              </a:rPr>
-              <a:t>  ADD r0, r0, r2   </a:t>
-            </a:r>
-            <a:r>
-              <a:rPr lang="en-US" dirty="0">
-                <a:solidFill>
-                  <a:schemeClr val="bg1">
-                    <a:lumMod val="50000"/>
-                  </a:schemeClr>
-                </a:solidFill>
-                <a:latin typeface="Consolas" panose="020B0609020204030204" pitchFamily="49" charset="0"/>
-              </a:rPr>
-              <a:t>; add c16</a:t>
-            </a:r>
-          </a:p>
-          <a:p>
-            <a:r>
-              <a:rPr lang="en-US" dirty="0">
-                <a:latin typeface="Consolas" panose="020B0609020204030204" pitchFamily="49" charset="0"/>
-              </a:rPr>
-              <a:t>  ADD r0, r0, r3   </a:t>
-            </a:r>
-            <a:r>
-              <a:rPr lang="en-US" dirty="0">
-                <a:solidFill>
-                  <a:schemeClr val="bg1">
-                    <a:lumMod val="50000"/>
-                  </a:schemeClr>
-                </a:solidFill>
-                <a:latin typeface="Consolas" panose="020B0609020204030204" pitchFamily="49" charset="0"/>
-              </a:rPr>
-              <a:t>; add d16</a:t>
-            </a:r>
-          </a:p>
-          <a:p>
-            <a:r>
-              <a:rPr lang="en-US" b="1" dirty="0">
-                <a:solidFill>
-                  <a:srgbClr val="FF0000"/>
-                </a:solidFill>
-                <a:latin typeface="Consolas" panose="020B0609020204030204" pitchFamily="49" charset="0"/>
-              </a:rPr>
-              <a:t>  LDR r1, [</a:t>
-            </a:r>
-            <a:r>
-              <a:rPr lang="en-US" b="1" dirty="0" err="1">
-                <a:solidFill>
-                  <a:srgbClr val="FF0000"/>
-                </a:solidFill>
-                <a:latin typeface="Consolas" panose="020B0609020204030204" pitchFamily="49" charset="0"/>
-              </a:rPr>
-              <a:t>sp</a:t>
-            </a:r>
-            <a:r>
-              <a:rPr lang="en-US" b="1" dirty="0">
-                <a:solidFill>
-                  <a:srgbClr val="FF0000"/>
-                </a:solidFill>
-                <a:latin typeface="Consolas" panose="020B0609020204030204" pitchFamily="49" charset="0"/>
-              </a:rPr>
-              <a:t>, #0] </a:t>
-            </a:r>
-            <a:r>
-              <a:rPr lang="en-US" b="1" dirty="0">
-                <a:solidFill>
-                  <a:schemeClr val="bg1">
-                    <a:lumMod val="50000"/>
-                  </a:schemeClr>
-                </a:solidFill>
-                <a:latin typeface="Consolas" panose="020B0609020204030204" pitchFamily="49" charset="0"/>
-              </a:rPr>
-              <a:t>; read argument e32</a:t>
-            </a:r>
-          </a:p>
-          <a:p>
-            <a:r>
-              <a:rPr lang="en-US" dirty="0">
-                <a:solidFill>
-                  <a:schemeClr val="bg1">
-                    <a:lumMod val="50000"/>
-                  </a:schemeClr>
-                </a:solidFill>
-                <a:latin typeface="Consolas" panose="020B0609020204030204" pitchFamily="49" charset="0"/>
-              </a:rPr>
-              <a:t>  </a:t>
-            </a:r>
-            <a:r>
-              <a:rPr lang="en-US" dirty="0">
-                <a:solidFill>
-                  <a:schemeClr val="tx1"/>
-                </a:solidFill>
-                <a:latin typeface="Consolas" panose="020B0609020204030204" pitchFamily="49" charset="0"/>
-              </a:rPr>
-              <a:t>ADD r0, r0, r1   </a:t>
-            </a:r>
-            <a:r>
-              <a:rPr lang="en-US" dirty="0">
-                <a:solidFill>
-                  <a:schemeClr val="bg1">
-                    <a:lumMod val="50000"/>
-                  </a:schemeClr>
-                </a:solidFill>
-                <a:latin typeface="Consolas" panose="020B0609020204030204" pitchFamily="49" charset="0"/>
-              </a:rPr>
-              <a:t>; add e32</a:t>
-            </a:r>
-          </a:p>
-          <a:p>
-            <a:r>
-              <a:rPr lang="en-US" dirty="0">
-                <a:latin typeface="Consolas" panose="020B0609020204030204" pitchFamily="49" charset="0"/>
-              </a:rPr>
-              <a:t>  BX  LR</a:t>
-            </a:r>
-          </a:p>
-          <a:p>
-            <a:r>
-              <a:rPr lang="en-US" dirty="0">
-                <a:latin typeface="Consolas" panose="020B0609020204030204" pitchFamily="49" charset="0"/>
-              </a:rPr>
-              <a:t>  ENDP</a:t>
-            </a:r>
-          </a:p>
-        </p:txBody>
-      </p:sp>
-      <p:sp>
-        <p:nvSpPr>
-          <p:cNvPr id="6" name="Rectangle 5"/>
-          <p:cNvSpPr/>
-          <p:nvPr/>
-        </p:nvSpPr>
-        <p:spPr>
-          <a:xfrm>
-            <a:off x="914400" y="5854799"/>
-            <a:ext cx="4861560" cy="646331"/>
-          </a:xfrm>
-          <a:prstGeom prst="rect">
-            <a:avLst/>
-          </a:prstGeom>
-        </p:spPr>
-        <p:txBody>
-          <a:bodyPr wrap="square">
-            <a:spAutoFit/>
-          </a:bodyPr>
-          <a:lstStyle/>
-          <a:p>
-            <a:r>
-              <a:rPr lang="en-US" dirty="0"/>
-              <a:t>The caller is responsible to pop extra arguments out of the stack after the subroutine returns.</a:t>
-            </a:r>
-          </a:p>
-        </p:txBody>
-      </p:sp>
-    </p:spTree>
-    <p:extLst>
-      <p:ext uri="{BB962C8B-B14F-4D97-AF65-F5344CB8AC3E}">
-        <p14:creationId xmlns:p14="http://schemas.microsoft.com/office/powerpoint/2010/main" val="2345755417"/>
-      </p:ext>
-    </p:extLst>
-  </p:cSld>
-  <p:clrMapOvr>
-    <a:masterClrMapping/>
-  </p:clrMapOvr>
-</p:sld>
-</file>
-
-<file path=ppt/slides/slide17.xml><?xml version="1.0" encoding="utf-8"?>
-<p:sld xmlns:a="http://schemas.openxmlformats.org/drawingml/2006/main" xmlns:r="http://schemas.openxmlformats.org/officeDocument/2006/relationships" xmlns:p="http://schemas.openxmlformats.org/presentationml/2006/main">
-  <p:cSld>
-    <p:spTree>
-      <p:nvGrpSpPr>
-        <p:cNvPr id="1" name=""/>
-        <p:cNvGrpSpPr/>
-        <p:nvPr/>
-      </p:nvGrpSpPr>
-      <p:grpSpPr>
-        <a:xfrm>
-          <a:off x="0" y="0"/>
-          <a:ext cx="0" cy="0"/>
-          <a:chOff x="0" y="0"/>
-          <a:chExt cx="0" cy="0"/>
-        </a:xfrm>
-      </p:grpSpPr>
-      <p:sp>
-        <p:nvSpPr>
-          <p:cNvPr id="2" name="Title 1"/>
-          <p:cNvSpPr>
-            <a:spLocks noGrp="1"/>
-          </p:cNvSpPr>
-          <p:nvPr>
-            <p:ph type="title"/>
-          </p:nvPr>
-        </p:nvSpPr>
-        <p:spPr/>
-        <p:txBody>
-          <a:bodyPr>
-            <a:normAutofit fontScale="90000"/>
-          </a:bodyPr>
-          <a:lstStyle/>
-          <a:p>
-            <a:r>
-              <a:rPr lang="en-US" dirty="0"/>
-              <a:t>Passing arguments and Returning Value</a:t>
-            </a:r>
-          </a:p>
-        </p:txBody>
-      </p:sp>
-      <p:sp>
-        <p:nvSpPr>
-          <p:cNvPr id="3" name="Slide Number Placeholder 2"/>
-          <p:cNvSpPr>
-            <a:spLocks noGrp="1"/>
-          </p:cNvSpPr>
-          <p:nvPr>
-            <p:ph type="sldNum" sz="quarter" idx="12"/>
-          </p:nvPr>
-        </p:nvSpPr>
-        <p:spPr/>
-        <p:txBody>
-          <a:bodyPr/>
-          <a:lstStyle/>
-          <a:p>
-            <a:fld id="{EA7C8D44-3667-46F6-9772-CC52308E2A7F}" type="slidenum">
-              <a:rPr kumimoji="0" lang="en-US" smtClean="0"/>
-              <a:pPr/>
-              <a:t>17</a:t>
             </a:fld>
             <a:endParaRPr kumimoji="0" lang="en-US" dirty="0"/>
           </a:p>
@@ -20470,7 +18187,7 @@
     </p:spTree>
     <p:extLst>
       <p:ext uri="{BB962C8B-B14F-4D97-AF65-F5344CB8AC3E}">
-        <p14:creationId xmlns:p14="http://schemas.microsoft.com/office/powerpoint/2010/main" val="4257716461"/>
+        <p14:creationId xmlns:p14="http://schemas.microsoft.com/office/powerpoint/2010/main" val="1735197848"/>
       </p:ext>
     </p:extLst>
   </p:cSld>
@@ -20558,7 +18275,7 @@
 </p:sld>
 </file>
 
-<file path=ppt/slides/slide18.xml><?xml version="1.0" encoding="utf-8"?>
+<file path=ppt/slides/slide14.xml><?xml version="1.0" encoding="utf-8"?>
 <p:sld xmlns:a="http://schemas.openxmlformats.org/drawingml/2006/main" xmlns:r="http://schemas.openxmlformats.org/officeDocument/2006/relationships" xmlns:p="http://schemas.openxmlformats.org/presentationml/2006/main">
   <p:cSld>
     <p:spTree>
@@ -20635,7 +18352,7 @@
             <a:fld id="{EA7C8D44-3667-46F6-9772-CC52308E2A7F}" type="slidenum">
               <a:rPr kumimoji="0" lang="en-US" smtClean="0"/>
               <a:pPr/>
-              <a:t>18</a:t>
+              <a:t>14</a:t>
             </a:fld>
             <a:endParaRPr kumimoji="0" lang="en-US" dirty="0"/>
           </a:p>
@@ -21385,7 +19102,7 @@
                   <a:srgbClr val="FF0000"/>
                 </a:solidFill>
               </a:rPr>
-              <a:t>Callee reads d16 from stack</a:t>
+              <a:t>Callee pops d16 from stack</a:t>
             </a:r>
           </a:p>
         </p:txBody>
@@ -21426,7 +19143,7 @@
     </p:spTree>
     <p:extLst>
       <p:ext uri="{BB962C8B-B14F-4D97-AF65-F5344CB8AC3E}">
-        <p14:creationId xmlns:p14="http://schemas.microsoft.com/office/powerpoint/2010/main" val="2574940037"/>
+        <p14:creationId xmlns:p14="http://schemas.microsoft.com/office/powerpoint/2010/main" val="2918065515"/>
       </p:ext>
     </p:extLst>
   </p:cSld>
@@ -21511,6 +19228,2097 @@
       <p:bldP spid="23" grpId="0"/>
     </p:bldLst>
   </p:timing>
+</p:sld>
+</file>
+
+<file path=ppt/slides/slide15.xml><?xml version="1.0" encoding="utf-8"?>
+<p:sld xmlns:a="http://schemas.openxmlformats.org/drawingml/2006/main" xmlns:r="http://schemas.openxmlformats.org/officeDocument/2006/relationships" xmlns:p="http://schemas.openxmlformats.org/presentationml/2006/main">
+  <p:cSld>
+    <p:spTree>
+      <p:nvGrpSpPr>
+        <p:cNvPr id="1" name=""/>
+        <p:cNvGrpSpPr/>
+        <p:nvPr/>
+      </p:nvGrpSpPr>
+      <p:grpSpPr>
+        <a:xfrm>
+          <a:off x="0" y="0"/>
+          <a:ext cx="0" cy="0"/>
+          <a:chOff x="0" y="0"/>
+          <a:chExt cx="0" cy="0"/>
+        </a:xfrm>
+      </p:grpSpPr>
+      <p:sp>
+        <p:nvSpPr>
+          <p:cNvPr id="2" name="Title 1"/>
+          <p:cNvSpPr>
+            <a:spLocks noGrp="1"/>
+          </p:cNvSpPr>
+          <p:nvPr>
+            <p:ph type="title"/>
+          </p:nvPr>
+        </p:nvSpPr>
+        <p:spPr/>
+        <p:txBody>
+          <a:bodyPr/>
+          <a:lstStyle/>
+          <a:p>
+            <a:r>
+              <a:rPr lang="en-US" dirty="0"/>
+              <a:t>Argument Passing</a:t>
+            </a:r>
+          </a:p>
+        </p:txBody>
+      </p:sp>
+      <p:sp>
+        <p:nvSpPr>
+          <p:cNvPr id="3" name="Slide Number Placeholder 2"/>
+          <p:cNvSpPr>
+            <a:spLocks noGrp="1"/>
+          </p:cNvSpPr>
+          <p:nvPr>
+            <p:ph type="sldNum" sz="quarter" idx="12"/>
+          </p:nvPr>
+        </p:nvSpPr>
+        <p:spPr/>
+        <p:txBody>
+          <a:bodyPr/>
+          <a:lstStyle/>
+          <a:p>
+            <a:fld id="{EA7C8D44-3667-46F6-9772-CC52308E2A7F}" type="slidenum">
+              <a:rPr kumimoji="0" lang="en-US" smtClean="0"/>
+              <a:pPr/>
+              <a:t>15</a:t>
+            </a:fld>
+            <a:endParaRPr kumimoji="0" lang="en-US" dirty="0"/>
+          </a:p>
+        </p:txBody>
+      </p:sp>
+      <p:sp>
+        <p:nvSpPr>
+          <p:cNvPr id="4" name="Content Placeholder 3"/>
+          <p:cNvSpPr>
+            <a:spLocks noGrp="1"/>
+          </p:cNvSpPr>
+          <p:nvPr>
+            <p:ph sz="quarter" idx="1"/>
+          </p:nvPr>
+        </p:nvSpPr>
+        <p:spPr/>
+        <p:txBody>
+          <a:bodyPr/>
+          <a:lstStyle/>
+          <a:p>
+            <a:r>
+              <a:rPr lang="en-US" altLang="zh-CN" dirty="0"/>
+              <a:t>W</a:t>
+            </a:r>
+            <a:r>
+              <a:rPr lang="en-US" dirty="0"/>
+              <a:t>hich registers are used to pass the arguments and return the result? </a:t>
+            </a:r>
+          </a:p>
+        </p:txBody>
+      </p:sp>
+      <p:sp>
+        <p:nvSpPr>
+          <p:cNvPr id="5" name="Rectangle 4"/>
+          <p:cNvSpPr/>
+          <p:nvPr/>
+        </p:nvSpPr>
+        <p:spPr>
+          <a:xfrm>
+            <a:off x="304800" y="2133600"/>
+            <a:ext cx="5582234" cy="369332"/>
+          </a:xfrm>
+          <a:prstGeom prst="rect">
+            <a:avLst/>
+          </a:prstGeom>
+        </p:spPr>
+        <p:style>
+          <a:lnRef idx="1">
+            <a:schemeClr val="accent1"/>
+          </a:lnRef>
+          <a:fillRef idx="2">
+            <a:schemeClr val="accent1"/>
+          </a:fillRef>
+          <a:effectRef idx="1">
+            <a:schemeClr val="accent1"/>
+          </a:effectRef>
+          <a:fontRef idx="minor">
+            <a:schemeClr val="dk1"/>
+          </a:fontRef>
+        </p:style>
+        <p:txBody>
+          <a:bodyPr wrap="none">
+            <a:spAutoFit/>
+          </a:bodyPr>
+          <a:lstStyle/>
+          <a:p>
+            <a:r>
+              <a:rPr lang="en-US" dirty="0">
+                <a:solidFill>
+                  <a:srgbClr val="333333"/>
+                </a:solidFill>
+                <a:latin typeface="Segoe UI" panose="020B0502040204020203" pitchFamily="34" charset="0"/>
+              </a:rPr>
+              <a:t>long fun (short a1, char a2, double a3, </a:t>
+            </a:r>
+            <a:r>
+              <a:rPr lang="en-US" dirty="0" err="1">
+                <a:solidFill>
+                  <a:srgbClr val="333333"/>
+                </a:solidFill>
+                <a:latin typeface="Segoe UI" panose="020B0502040204020203" pitchFamily="34" charset="0"/>
+              </a:rPr>
+              <a:t>int</a:t>
+            </a:r>
+            <a:r>
+              <a:rPr lang="en-US" dirty="0">
+                <a:solidFill>
+                  <a:srgbClr val="333333"/>
+                </a:solidFill>
+                <a:latin typeface="Segoe UI" panose="020B0502040204020203" pitchFamily="34" charset="0"/>
+              </a:rPr>
+              <a:t> a4, char a5)</a:t>
+            </a:r>
+          </a:p>
+        </p:txBody>
+      </p:sp>
+      <p:graphicFrame>
+        <p:nvGraphicFramePr>
+          <p:cNvPr id="6" name="Content Placeholder 12"/>
+          <p:cNvGraphicFramePr>
+            <a:graphicFrameLocks/>
+          </p:cNvGraphicFramePr>
+          <p:nvPr>
+            <p:extLst>
+              <p:ext uri="{D42A27DB-BD31-4B8C-83A1-F6EECF244321}">
+                <p14:modId xmlns:p14="http://schemas.microsoft.com/office/powerpoint/2010/main" val="2965774675"/>
+              </p:ext>
+            </p:extLst>
+          </p:nvPr>
+        </p:nvGraphicFramePr>
+        <p:xfrm>
+          <a:off x="685800" y="2835886"/>
+          <a:ext cx="2971800" cy="370840"/>
+        </p:xfrm>
+        <a:graphic>
+          <a:graphicData uri="http://schemas.openxmlformats.org/drawingml/2006/table">
+            <a:tbl>
+              <a:tblPr firstRow="1" bandRow="1">
+                <a:tableStyleId>{5940675A-B579-460E-94D1-54222C63F5DA}</a:tableStyleId>
+              </a:tblPr>
+              <a:tblGrid>
+                <a:gridCol w="742950">
+                  <a:extLst>
+                    <a:ext uri="{9D8B030D-6E8A-4147-A177-3AD203B41FA5}">
+                      <a16:colId xmlns:a16="http://schemas.microsoft.com/office/drawing/2014/main" val="242172939"/>
+                    </a:ext>
+                  </a:extLst>
+                </a:gridCol>
+                <a:gridCol w="742950">
+                  <a:extLst>
+                    <a:ext uri="{9D8B030D-6E8A-4147-A177-3AD203B41FA5}">
+                      <a16:colId xmlns:a16="http://schemas.microsoft.com/office/drawing/2014/main" val="2188387863"/>
+                    </a:ext>
+                  </a:extLst>
+                </a:gridCol>
+                <a:gridCol w="742950">
+                  <a:extLst>
+                    <a:ext uri="{9D8B030D-6E8A-4147-A177-3AD203B41FA5}">
+                      <a16:colId xmlns:a16="http://schemas.microsoft.com/office/drawing/2014/main" val="85967061"/>
+                    </a:ext>
+                  </a:extLst>
+                </a:gridCol>
+                <a:gridCol w="742950">
+                  <a:extLst>
+                    <a:ext uri="{9D8B030D-6E8A-4147-A177-3AD203B41FA5}">
+                      <a16:colId xmlns:a16="http://schemas.microsoft.com/office/drawing/2014/main" val="2525421763"/>
+                    </a:ext>
+                  </a:extLst>
+                </a:gridCol>
+              </a:tblGrid>
+              <a:tr h="370840">
+                <a:tc>
+                  <a:txBody>
+                    <a:bodyPr/>
+                    <a:lstStyle/>
+                    <a:p>
+                      <a:pPr algn="ctr"/>
+                      <a:r>
+                        <a:rPr lang="en-US" dirty="0"/>
+                        <a:t>R0</a:t>
+                      </a:r>
+                    </a:p>
+                  </a:txBody>
+                  <a:tcPr/>
+                </a:tc>
+                <a:tc>
+                  <a:txBody>
+                    <a:bodyPr/>
+                    <a:lstStyle/>
+                    <a:p>
+                      <a:pPr algn="ctr"/>
+                      <a:r>
+                        <a:rPr lang="en-US" dirty="0"/>
+                        <a:t>R1</a:t>
+                      </a:r>
+                    </a:p>
+                  </a:txBody>
+                  <a:tcPr/>
+                </a:tc>
+                <a:tc>
+                  <a:txBody>
+                    <a:bodyPr/>
+                    <a:lstStyle/>
+                    <a:p>
+                      <a:pPr algn="ctr"/>
+                      <a:r>
+                        <a:rPr lang="en-US" dirty="0"/>
+                        <a:t>R2</a:t>
+                      </a:r>
+                    </a:p>
+                  </a:txBody>
+                  <a:tcPr/>
+                </a:tc>
+                <a:tc>
+                  <a:txBody>
+                    <a:bodyPr/>
+                    <a:lstStyle/>
+                    <a:p>
+                      <a:pPr algn="ctr"/>
+                      <a:r>
+                        <a:rPr lang="en-US" dirty="0"/>
+                        <a:t>R3</a:t>
+                      </a:r>
+                    </a:p>
+                  </a:txBody>
+                  <a:tcPr/>
+                </a:tc>
+                <a:extLst>
+                  <a:ext uri="{0D108BD9-81ED-4DB2-BD59-A6C34878D82A}">
+                    <a16:rowId xmlns:a16="http://schemas.microsoft.com/office/drawing/2014/main" val="3892313521"/>
+                  </a:ext>
+                </a:extLst>
+              </a:tr>
+            </a:tbl>
+          </a:graphicData>
+        </a:graphic>
+      </p:graphicFrame>
+      <p:graphicFrame>
+        <p:nvGraphicFramePr>
+          <p:cNvPr id="7" name="Content Placeholder 12"/>
+          <p:cNvGraphicFramePr>
+            <a:graphicFrameLocks/>
+          </p:cNvGraphicFramePr>
+          <p:nvPr>
+            <p:extLst>
+              <p:ext uri="{D42A27DB-BD31-4B8C-83A1-F6EECF244321}">
+                <p14:modId xmlns:p14="http://schemas.microsoft.com/office/powerpoint/2010/main" val="429716298"/>
+              </p:ext>
+            </p:extLst>
+          </p:nvPr>
+        </p:nvGraphicFramePr>
+        <p:xfrm>
+          <a:off x="3962397" y="2835886"/>
+          <a:ext cx="4648203" cy="370840"/>
+        </p:xfrm>
+        <a:graphic>
+          <a:graphicData uri="http://schemas.openxmlformats.org/drawingml/2006/table">
+            <a:tbl>
+              <a:tblPr firstRow="1" bandRow="1">
+                <a:tableStyleId>{5940675A-B579-460E-94D1-54222C63F5DA}</a:tableStyleId>
+              </a:tblPr>
+              <a:tblGrid>
+                <a:gridCol w="4648203">
+                  <a:extLst>
+                    <a:ext uri="{9D8B030D-6E8A-4147-A177-3AD203B41FA5}">
+                      <a16:colId xmlns:a16="http://schemas.microsoft.com/office/drawing/2014/main" val="242172939"/>
+                    </a:ext>
+                  </a:extLst>
+                </a:gridCol>
+              </a:tblGrid>
+              <a:tr h="370840">
+                <a:tc>
+                  <a:txBody>
+                    <a:bodyPr/>
+                    <a:lstStyle/>
+                    <a:p>
+                      <a:endParaRPr lang="en-US" dirty="0"/>
+                    </a:p>
+                  </a:txBody>
+                  <a:tcPr/>
+                </a:tc>
+                <a:extLst>
+                  <a:ext uri="{0D108BD9-81ED-4DB2-BD59-A6C34878D82A}">
+                    <a16:rowId xmlns:a16="http://schemas.microsoft.com/office/drawing/2014/main" val="3892313521"/>
+                  </a:ext>
+                </a:extLst>
+              </a:tr>
+            </a:tbl>
+          </a:graphicData>
+        </a:graphic>
+      </p:graphicFrame>
+      <p:sp>
+        <p:nvSpPr>
+          <p:cNvPr id="8" name="TextBox 7"/>
+          <p:cNvSpPr txBox="1"/>
+          <p:nvPr/>
+        </p:nvSpPr>
+        <p:spPr>
+          <a:xfrm>
+            <a:off x="1905000" y="2480826"/>
+            <a:ext cx="1039067" cy="369332"/>
+          </a:xfrm>
+          <a:prstGeom prst="rect">
+            <a:avLst/>
+          </a:prstGeom>
+          <a:noFill/>
+        </p:spPr>
+        <p:txBody>
+          <a:bodyPr wrap="none" rtlCol="0">
+            <a:spAutoFit/>
+          </a:bodyPr>
+          <a:lstStyle/>
+          <a:p>
+            <a:r>
+              <a:rPr lang="en-US" dirty="0"/>
+              <a:t>Registers</a:t>
+            </a:r>
+          </a:p>
+        </p:txBody>
+      </p:sp>
+      <p:sp>
+        <p:nvSpPr>
+          <p:cNvPr id="9" name="TextBox 8"/>
+          <p:cNvSpPr txBox="1"/>
+          <p:nvPr/>
+        </p:nvSpPr>
+        <p:spPr>
+          <a:xfrm>
+            <a:off x="5334000" y="2480826"/>
+            <a:ext cx="1765676" cy="646331"/>
+          </a:xfrm>
+          <a:prstGeom prst="rect">
+            <a:avLst/>
+          </a:prstGeom>
+          <a:noFill/>
+        </p:spPr>
+        <p:txBody>
+          <a:bodyPr wrap="none" rtlCol="0">
+            <a:spAutoFit/>
+          </a:bodyPr>
+          <a:lstStyle/>
+          <a:p>
+            <a:r>
+              <a:rPr lang="en-US" dirty="0"/>
+              <a:t>Stack </a:t>
+            </a:r>
+            <a:r>
+              <a:rPr lang="en-US" altLang="zh-CN" dirty="0"/>
+              <a:t>in Memory</a:t>
+            </a:r>
+            <a:endParaRPr lang="en-US" dirty="0"/>
+          </a:p>
+          <a:p>
+            <a:endParaRPr lang="en-US" dirty="0"/>
+          </a:p>
+        </p:txBody>
+      </p:sp>
+    </p:spTree>
+    <p:extLst>
+      <p:ext uri="{BB962C8B-B14F-4D97-AF65-F5344CB8AC3E}">
+        <p14:creationId xmlns:p14="http://schemas.microsoft.com/office/powerpoint/2010/main" val="3252337491"/>
+      </p:ext>
+    </p:extLst>
+  </p:cSld>
+  <p:clrMapOvr>
+    <a:masterClrMapping/>
+  </p:clrMapOvr>
+</p:sld>
+</file>
+
+<file path=ppt/slides/slide16.xml><?xml version="1.0" encoding="utf-8"?>
+<p:sld xmlns:a="http://schemas.openxmlformats.org/drawingml/2006/main" xmlns:r="http://schemas.openxmlformats.org/officeDocument/2006/relationships" xmlns:p="http://schemas.openxmlformats.org/presentationml/2006/main">
+  <p:cSld>
+    <p:spTree>
+      <p:nvGrpSpPr>
+        <p:cNvPr id="1" name=""/>
+        <p:cNvGrpSpPr/>
+        <p:nvPr/>
+      </p:nvGrpSpPr>
+      <p:grpSpPr>
+        <a:xfrm>
+          <a:off x="0" y="0"/>
+          <a:ext cx="0" cy="0"/>
+          <a:chOff x="0" y="0"/>
+          <a:chExt cx="0" cy="0"/>
+        </a:xfrm>
+      </p:grpSpPr>
+      <p:sp>
+        <p:nvSpPr>
+          <p:cNvPr id="2" name="Title 1"/>
+          <p:cNvSpPr>
+            <a:spLocks noGrp="1"/>
+          </p:cNvSpPr>
+          <p:nvPr>
+            <p:ph type="title"/>
+          </p:nvPr>
+        </p:nvSpPr>
+        <p:spPr/>
+        <p:txBody>
+          <a:bodyPr/>
+          <a:lstStyle/>
+          <a:p>
+            <a:r>
+              <a:rPr lang="en-US" dirty="0"/>
+              <a:t>Argument Passing ANS</a:t>
+            </a:r>
+          </a:p>
+        </p:txBody>
+      </p:sp>
+      <p:sp>
+        <p:nvSpPr>
+          <p:cNvPr id="3" name="Slide Number Placeholder 2"/>
+          <p:cNvSpPr>
+            <a:spLocks noGrp="1"/>
+          </p:cNvSpPr>
+          <p:nvPr>
+            <p:ph type="sldNum" sz="quarter" idx="12"/>
+          </p:nvPr>
+        </p:nvSpPr>
+        <p:spPr/>
+        <p:txBody>
+          <a:bodyPr/>
+          <a:lstStyle/>
+          <a:p>
+            <a:fld id="{EA7C8D44-3667-46F6-9772-CC52308E2A7F}" type="slidenum">
+              <a:rPr kumimoji="0" lang="en-US" smtClean="0"/>
+              <a:pPr/>
+              <a:t>16</a:t>
+            </a:fld>
+            <a:endParaRPr kumimoji="0" lang="en-US" dirty="0"/>
+          </a:p>
+        </p:txBody>
+      </p:sp>
+      <p:sp>
+        <p:nvSpPr>
+          <p:cNvPr id="4" name="Content Placeholder 3"/>
+          <p:cNvSpPr>
+            <a:spLocks noGrp="1"/>
+          </p:cNvSpPr>
+          <p:nvPr>
+            <p:ph sz="quarter" idx="1"/>
+          </p:nvPr>
+        </p:nvSpPr>
+        <p:spPr/>
+        <p:txBody>
+          <a:bodyPr>
+            <a:normAutofit fontScale="92500" lnSpcReduction="20000"/>
+          </a:bodyPr>
+          <a:lstStyle/>
+          <a:p>
+            <a:r>
+              <a:rPr lang="en-US" altLang="zh-CN" dirty="0"/>
+              <a:t>W</a:t>
+            </a:r>
+            <a:r>
+              <a:rPr lang="en-US" dirty="0"/>
+              <a:t>hich registers are used to pass the arguments and return the result? </a:t>
+            </a:r>
+          </a:p>
+          <a:p>
+            <a:endParaRPr lang="en-US" dirty="0"/>
+          </a:p>
+          <a:p>
+            <a:endParaRPr lang="en-US" dirty="0"/>
+          </a:p>
+          <a:p>
+            <a:endParaRPr lang="en-US" dirty="0"/>
+          </a:p>
+          <a:p>
+            <a:endParaRPr lang="en-US" dirty="0"/>
+          </a:p>
+          <a:p>
+            <a:r>
+              <a:rPr lang="en-US" dirty="0"/>
+              <a:t>Each argument of 8-bit char, or 16-bit short, is passed in one 32-bit register; cannot use 1 register to pass more than 1 arguments</a:t>
+            </a:r>
+          </a:p>
+          <a:p>
+            <a:pPr lvl="1"/>
+            <a:r>
+              <a:rPr lang="en-US" dirty="0"/>
+              <a:t>a1 (short) in R0.</a:t>
+            </a:r>
+          </a:p>
+          <a:p>
+            <a:pPr lvl="1"/>
+            <a:r>
+              <a:rPr lang="en-US" dirty="0"/>
+              <a:t>a2 (char) in R1.</a:t>
+            </a:r>
+          </a:p>
+          <a:p>
+            <a:pPr lvl="1"/>
+            <a:r>
+              <a:rPr lang="en-US" dirty="0"/>
+              <a:t>a3 (double) in R2 and R3.</a:t>
+            </a:r>
+          </a:p>
+          <a:p>
+            <a:pPr lvl="1"/>
+            <a:r>
+              <a:rPr lang="en-US" dirty="0"/>
+              <a:t>a4 (int) on the stack.</a:t>
+            </a:r>
+          </a:p>
+          <a:p>
+            <a:pPr lvl="1"/>
+            <a:r>
+              <a:rPr lang="en-US" dirty="0"/>
+              <a:t>a5 (char) on the stack.</a:t>
+            </a:r>
+          </a:p>
+          <a:p>
+            <a:endParaRPr lang="en-US" dirty="0"/>
+          </a:p>
+        </p:txBody>
+      </p:sp>
+      <p:sp>
+        <p:nvSpPr>
+          <p:cNvPr id="5" name="Rectangle 4"/>
+          <p:cNvSpPr/>
+          <p:nvPr/>
+        </p:nvSpPr>
+        <p:spPr>
+          <a:xfrm>
+            <a:off x="372140" y="2057400"/>
+            <a:ext cx="5582234" cy="369332"/>
+          </a:xfrm>
+          <a:prstGeom prst="rect">
+            <a:avLst/>
+          </a:prstGeom>
+        </p:spPr>
+        <p:style>
+          <a:lnRef idx="1">
+            <a:schemeClr val="accent1"/>
+          </a:lnRef>
+          <a:fillRef idx="2">
+            <a:schemeClr val="accent1"/>
+          </a:fillRef>
+          <a:effectRef idx="1">
+            <a:schemeClr val="accent1"/>
+          </a:effectRef>
+          <a:fontRef idx="minor">
+            <a:schemeClr val="dk1"/>
+          </a:fontRef>
+        </p:style>
+        <p:txBody>
+          <a:bodyPr wrap="none">
+            <a:spAutoFit/>
+          </a:bodyPr>
+          <a:lstStyle/>
+          <a:p>
+            <a:r>
+              <a:rPr lang="en-US" dirty="0">
+                <a:solidFill>
+                  <a:srgbClr val="333333"/>
+                </a:solidFill>
+                <a:latin typeface="Segoe UI" panose="020B0502040204020203" pitchFamily="34" charset="0"/>
+              </a:rPr>
+              <a:t>long fun (short a1, char a2, double a3, </a:t>
+            </a:r>
+            <a:r>
+              <a:rPr lang="en-US" dirty="0" err="1">
+                <a:solidFill>
+                  <a:srgbClr val="333333"/>
+                </a:solidFill>
+                <a:latin typeface="Segoe UI" panose="020B0502040204020203" pitchFamily="34" charset="0"/>
+              </a:rPr>
+              <a:t>int</a:t>
+            </a:r>
+            <a:r>
+              <a:rPr lang="en-US" dirty="0">
+                <a:solidFill>
+                  <a:srgbClr val="333333"/>
+                </a:solidFill>
+                <a:latin typeface="Segoe UI" panose="020B0502040204020203" pitchFamily="34" charset="0"/>
+              </a:rPr>
+              <a:t> a4, char a5)</a:t>
+            </a:r>
+          </a:p>
+        </p:txBody>
+      </p:sp>
+      <p:graphicFrame>
+        <p:nvGraphicFramePr>
+          <p:cNvPr id="6" name="Content Placeholder 12"/>
+          <p:cNvGraphicFramePr>
+            <a:graphicFrameLocks/>
+          </p:cNvGraphicFramePr>
+          <p:nvPr>
+            <p:extLst>
+              <p:ext uri="{D42A27DB-BD31-4B8C-83A1-F6EECF244321}">
+                <p14:modId xmlns:p14="http://schemas.microsoft.com/office/powerpoint/2010/main" val="4156475260"/>
+              </p:ext>
+            </p:extLst>
+          </p:nvPr>
+        </p:nvGraphicFramePr>
+        <p:xfrm>
+          <a:off x="753140" y="2759686"/>
+          <a:ext cx="2971800" cy="370840"/>
+        </p:xfrm>
+        <a:graphic>
+          <a:graphicData uri="http://schemas.openxmlformats.org/drawingml/2006/table">
+            <a:tbl>
+              <a:tblPr firstRow="1" bandRow="1">
+                <a:tableStyleId>{5940675A-B579-460E-94D1-54222C63F5DA}</a:tableStyleId>
+              </a:tblPr>
+              <a:tblGrid>
+                <a:gridCol w="742950">
+                  <a:extLst>
+                    <a:ext uri="{9D8B030D-6E8A-4147-A177-3AD203B41FA5}">
+                      <a16:colId xmlns:a16="http://schemas.microsoft.com/office/drawing/2014/main" val="242172939"/>
+                    </a:ext>
+                  </a:extLst>
+                </a:gridCol>
+                <a:gridCol w="742950">
+                  <a:extLst>
+                    <a:ext uri="{9D8B030D-6E8A-4147-A177-3AD203B41FA5}">
+                      <a16:colId xmlns:a16="http://schemas.microsoft.com/office/drawing/2014/main" val="2188387863"/>
+                    </a:ext>
+                  </a:extLst>
+                </a:gridCol>
+                <a:gridCol w="1485900">
+                  <a:extLst>
+                    <a:ext uri="{9D8B030D-6E8A-4147-A177-3AD203B41FA5}">
+                      <a16:colId xmlns:a16="http://schemas.microsoft.com/office/drawing/2014/main" val="85967061"/>
+                    </a:ext>
+                  </a:extLst>
+                </a:gridCol>
+              </a:tblGrid>
+              <a:tr h="370840">
+                <a:tc>
+                  <a:txBody>
+                    <a:bodyPr/>
+                    <a:lstStyle/>
+                    <a:p>
+                      <a:pPr algn="ctr"/>
+                      <a:r>
+                        <a:rPr lang="en-US" altLang="zh-CN" dirty="0"/>
+                        <a:t>a1</a:t>
+                      </a:r>
+                      <a:endParaRPr lang="en-US" dirty="0"/>
+                    </a:p>
+                  </a:txBody>
+                  <a:tcPr/>
+                </a:tc>
+                <a:tc>
+                  <a:txBody>
+                    <a:bodyPr/>
+                    <a:lstStyle/>
+                    <a:p>
+                      <a:pPr algn="ctr"/>
+                      <a:r>
+                        <a:rPr lang="en-US" dirty="0"/>
+                        <a:t>a2</a:t>
+                      </a:r>
+                    </a:p>
+                  </a:txBody>
+                  <a:tcPr/>
+                </a:tc>
+                <a:tc>
+                  <a:txBody>
+                    <a:bodyPr/>
+                    <a:lstStyle/>
+                    <a:p>
+                      <a:pPr algn="ctr"/>
+                      <a:r>
+                        <a:rPr lang="en-US" dirty="0"/>
+                        <a:t>a3</a:t>
+                      </a:r>
+                    </a:p>
+                  </a:txBody>
+                  <a:tcPr/>
+                </a:tc>
+                <a:extLst>
+                  <a:ext uri="{0D108BD9-81ED-4DB2-BD59-A6C34878D82A}">
+                    <a16:rowId xmlns:a16="http://schemas.microsoft.com/office/drawing/2014/main" val="3892313521"/>
+                  </a:ext>
+                </a:extLst>
+              </a:tr>
+            </a:tbl>
+          </a:graphicData>
+        </a:graphic>
+      </p:graphicFrame>
+      <p:graphicFrame>
+        <p:nvGraphicFramePr>
+          <p:cNvPr id="7" name="Content Placeholder 12"/>
+          <p:cNvGraphicFramePr>
+            <a:graphicFrameLocks/>
+          </p:cNvGraphicFramePr>
+          <p:nvPr>
+            <p:extLst>
+              <p:ext uri="{D42A27DB-BD31-4B8C-83A1-F6EECF244321}">
+                <p14:modId xmlns:p14="http://schemas.microsoft.com/office/powerpoint/2010/main" val="855738313"/>
+              </p:ext>
+            </p:extLst>
+          </p:nvPr>
+        </p:nvGraphicFramePr>
+        <p:xfrm>
+          <a:off x="4029737" y="2759686"/>
+          <a:ext cx="4648203" cy="370840"/>
+        </p:xfrm>
+        <a:graphic>
+          <a:graphicData uri="http://schemas.openxmlformats.org/drawingml/2006/table">
+            <a:tbl>
+              <a:tblPr firstRow="1" bandRow="1">
+                <a:tableStyleId>{5940675A-B579-460E-94D1-54222C63F5DA}</a:tableStyleId>
+              </a:tblPr>
+              <a:tblGrid>
+                <a:gridCol w="664029">
+                  <a:extLst>
+                    <a:ext uri="{9D8B030D-6E8A-4147-A177-3AD203B41FA5}">
+                      <a16:colId xmlns:a16="http://schemas.microsoft.com/office/drawing/2014/main" val="242172939"/>
+                    </a:ext>
+                  </a:extLst>
+                </a:gridCol>
+                <a:gridCol w="664029">
+                  <a:extLst>
+                    <a:ext uri="{9D8B030D-6E8A-4147-A177-3AD203B41FA5}">
+                      <a16:colId xmlns:a16="http://schemas.microsoft.com/office/drawing/2014/main" val="2188387863"/>
+                    </a:ext>
+                  </a:extLst>
+                </a:gridCol>
+                <a:gridCol w="3320145">
+                  <a:extLst>
+                    <a:ext uri="{9D8B030D-6E8A-4147-A177-3AD203B41FA5}">
+                      <a16:colId xmlns:a16="http://schemas.microsoft.com/office/drawing/2014/main" val="85967061"/>
+                    </a:ext>
+                  </a:extLst>
+                </a:gridCol>
+              </a:tblGrid>
+              <a:tr h="370840">
+                <a:tc>
+                  <a:txBody>
+                    <a:bodyPr/>
+                    <a:lstStyle/>
+                    <a:p>
+                      <a:pPr algn="ctr"/>
+                      <a:r>
+                        <a:rPr lang="en-US"/>
+                        <a:t>a4</a:t>
+                      </a:r>
+                      <a:endParaRPr lang="en-US" dirty="0"/>
+                    </a:p>
+                  </a:txBody>
+                  <a:tcPr/>
+                </a:tc>
+                <a:tc>
+                  <a:txBody>
+                    <a:bodyPr/>
+                    <a:lstStyle/>
+                    <a:p>
+                      <a:pPr algn="ctr"/>
+                      <a:r>
+                        <a:rPr lang="en-US" dirty="0"/>
+                        <a:t>a5</a:t>
+                      </a:r>
+                    </a:p>
+                  </a:txBody>
+                  <a:tcPr/>
+                </a:tc>
+                <a:tc>
+                  <a:txBody>
+                    <a:bodyPr/>
+                    <a:lstStyle/>
+                    <a:p>
+                      <a:pPr algn="ctr"/>
+                      <a:endParaRPr lang="en-US" dirty="0"/>
+                    </a:p>
+                  </a:txBody>
+                  <a:tcPr/>
+                </a:tc>
+                <a:extLst>
+                  <a:ext uri="{0D108BD9-81ED-4DB2-BD59-A6C34878D82A}">
+                    <a16:rowId xmlns:a16="http://schemas.microsoft.com/office/drawing/2014/main" val="3892313521"/>
+                  </a:ext>
+                </a:extLst>
+              </a:tr>
+            </a:tbl>
+          </a:graphicData>
+        </a:graphic>
+      </p:graphicFrame>
+      <p:sp>
+        <p:nvSpPr>
+          <p:cNvPr id="8" name="TextBox 7"/>
+          <p:cNvSpPr txBox="1"/>
+          <p:nvPr/>
+        </p:nvSpPr>
+        <p:spPr>
+          <a:xfrm>
+            <a:off x="1972340" y="2404626"/>
+            <a:ext cx="1039067" cy="369332"/>
+          </a:xfrm>
+          <a:prstGeom prst="rect">
+            <a:avLst/>
+          </a:prstGeom>
+          <a:noFill/>
+        </p:spPr>
+        <p:txBody>
+          <a:bodyPr wrap="none" rtlCol="0">
+            <a:spAutoFit/>
+          </a:bodyPr>
+          <a:lstStyle/>
+          <a:p>
+            <a:r>
+              <a:rPr lang="en-US" dirty="0"/>
+              <a:t>Registers</a:t>
+            </a:r>
+          </a:p>
+        </p:txBody>
+      </p:sp>
+      <p:sp>
+        <p:nvSpPr>
+          <p:cNvPr id="9" name="TextBox 8"/>
+          <p:cNvSpPr txBox="1"/>
+          <p:nvPr/>
+        </p:nvSpPr>
+        <p:spPr>
+          <a:xfrm>
+            <a:off x="5401340" y="2404626"/>
+            <a:ext cx="1765676" cy="646331"/>
+          </a:xfrm>
+          <a:prstGeom prst="rect">
+            <a:avLst/>
+          </a:prstGeom>
+          <a:noFill/>
+        </p:spPr>
+        <p:txBody>
+          <a:bodyPr wrap="none" rtlCol="0">
+            <a:spAutoFit/>
+          </a:bodyPr>
+          <a:lstStyle/>
+          <a:p>
+            <a:r>
+              <a:rPr lang="en-US" dirty="0"/>
+              <a:t>Stack </a:t>
+            </a:r>
+            <a:r>
+              <a:rPr lang="en-US" altLang="zh-CN" dirty="0"/>
+              <a:t>in Memory</a:t>
+            </a:r>
+            <a:endParaRPr lang="en-US" dirty="0"/>
+          </a:p>
+          <a:p>
+            <a:endParaRPr lang="en-US" dirty="0"/>
+          </a:p>
+        </p:txBody>
+      </p:sp>
+    </p:spTree>
+    <p:extLst>
+      <p:ext uri="{BB962C8B-B14F-4D97-AF65-F5344CB8AC3E}">
+        <p14:creationId xmlns:p14="http://schemas.microsoft.com/office/powerpoint/2010/main" val="414796749"/>
+      </p:ext>
+    </p:extLst>
+  </p:cSld>
+  <p:clrMapOvr>
+    <a:masterClrMapping/>
+  </p:clrMapOvr>
+</p:sld>
+</file>
+
+<file path=ppt/slides/slide17.xml><?xml version="1.0" encoding="utf-8"?>
+<p:sld xmlns:a="http://schemas.openxmlformats.org/drawingml/2006/main" xmlns:r="http://schemas.openxmlformats.org/officeDocument/2006/relationships" xmlns:p="http://schemas.openxmlformats.org/presentationml/2006/main">
+  <p:cSld>
+    <p:spTree>
+      <p:nvGrpSpPr>
+        <p:cNvPr id="1" name="">
+          <a:extLst>
+            <a:ext uri="{FF2B5EF4-FFF2-40B4-BE49-F238E27FC236}">
+              <a16:creationId xmlns:a16="http://schemas.microsoft.com/office/drawing/2014/main" id="{18DFCAEB-CD92-F6E6-96EC-622670592FF2}"/>
+            </a:ext>
+          </a:extLst>
+        </p:cNvPr>
+        <p:cNvGrpSpPr/>
+        <p:nvPr/>
+      </p:nvGrpSpPr>
+      <p:grpSpPr>
+        <a:xfrm>
+          <a:off x="0" y="0"/>
+          <a:ext cx="0" cy="0"/>
+          <a:chOff x="0" y="0"/>
+          <a:chExt cx="0" cy="0"/>
+        </a:xfrm>
+      </p:grpSpPr>
+      <p:sp>
+        <p:nvSpPr>
+          <p:cNvPr id="2" name="Title 1">
+            <a:extLst>
+              <a:ext uri="{FF2B5EF4-FFF2-40B4-BE49-F238E27FC236}">
+                <a16:creationId xmlns:a16="http://schemas.microsoft.com/office/drawing/2014/main" id="{B8B35D03-E63B-948E-7B28-FE2BC0D48EA8}"/>
+              </a:ext>
+            </a:extLst>
+          </p:cNvPr>
+          <p:cNvSpPr>
+            <a:spLocks noGrp="1"/>
+          </p:cNvSpPr>
+          <p:nvPr>
+            <p:ph type="title"/>
+          </p:nvPr>
+        </p:nvSpPr>
+        <p:spPr/>
+        <p:txBody>
+          <a:bodyPr>
+            <a:normAutofit fontScale="90000"/>
+          </a:bodyPr>
+          <a:lstStyle/>
+          <a:p>
+            <a:r>
+              <a:rPr lang="en-US" dirty="0"/>
+              <a:t>What’s wrong? Passing arguments and Returning Value</a:t>
+            </a:r>
+          </a:p>
+        </p:txBody>
+      </p:sp>
+      <p:sp>
+        <p:nvSpPr>
+          <p:cNvPr id="3" name="Slide Number Placeholder 2">
+            <a:extLst>
+              <a:ext uri="{FF2B5EF4-FFF2-40B4-BE49-F238E27FC236}">
+                <a16:creationId xmlns:a16="http://schemas.microsoft.com/office/drawing/2014/main" id="{F2A24FAD-DC69-0014-9A87-E1D9B0AFB91E}"/>
+              </a:ext>
+            </a:extLst>
+          </p:cNvPr>
+          <p:cNvSpPr>
+            <a:spLocks noGrp="1"/>
+          </p:cNvSpPr>
+          <p:nvPr>
+            <p:ph type="sldNum" sz="quarter" idx="12"/>
+          </p:nvPr>
+        </p:nvSpPr>
+        <p:spPr/>
+        <p:txBody>
+          <a:bodyPr/>
+          <a:lstStyle/>
+          <a:p>
+            <a:fld id="{EA7C8D44-3667-46F6-9772-CC52308E2A7F}" type="slidenum">
+              <a:rPr kumimoji="0" lang="en-US" smtClean="0"/>
+              <a:pPr/>
+              <a:t>17</a:t>
+            </a:fld>
+            <a:endParaRPr kumimoji="0" lang="en-US" dirty="0"/>
+          </a:p>
+        </p:txBody>
+      </p:sp>
+      <p:sp>
+        <p:nvSpPr>
+          <p:cNvPr id="11" name="Rectangle 10">
+            <a:extLst>
+              <a:ext uri="{FF2B5EF4-FFF2-40B4-BE49-F238E27FC236}">
+                <a16:creationId xmlns:a16="http://schemas.microsoft.com/office/drawing/2014/main" id="{41B1B8CA-B3E7-1ACE-322F-D0B4A4D4E57D}"/>
+              </a:ext>
+            </a:extLst>
+          </p:cNvPr>
+          <p:cNvSpPr/>
+          <p:nvPr/>
+        </p:nvSpPr>
+        <p:spPr>
+          <a:xfrm>
+            <a:off x="76200" y="1593468"/>
+            <a:ext cx="9163050" cy="646331"/>
+          </a:xfrm>
+          <a:prstGeom prst="rect">
+            <a:avLst/>
+          </a:prstGeom>
+        </p:spPr>
+        <p:txBody>
+          <a:bodyPr wrap="square">
+            <a:spAutoFit/>
+          </a:bodyPr>
+          <a:lstStyle/>
+          <a:p>
+            <a:r>
+              <a:rPr lang="en-US" b="1" dirty="0">
+                <a:latin typeface="Consolas" panose="020B0609020204030204" pitchFamily="49" charset="0"/>
+              </a:rPr>
+              <a:t>uint32_t sum(uint8_t a8, uint8_t b8, uint16_t c16, uint16_t d16, </a:t>
+            </a:r>
+            <a:r>
+              <a:rPr lang="en-US" b="1" dirty="0">
+                <a:solidFill>
+                  <a:srgbClr val="FF0000"/>
+                </a:solidFill>
+                <a:latin typeface="Consolas" panose="020B0609020204030204" pitchFamily="49" charset="0"/>
+              </a:rPr>
+              <a:t>uint32_t e32</a:t>
+            </a:r>
+            <a:r>
+              <a:rPr lang="en-US" b="1" dirty="0">
+                <a:latin typeface="Consolas" panose="020B0609020204030204" pitchFamily="49" charset="0"/>
+              </a:rPr>
+              <a:t>);</a:t>
+            </a:r>
+          </a:p>
+        </p:txBody>
+      </p:sp>
+      <p:sp>
+        <p:nvSpPr>
+          <p:cNvPr id="4" name="TextBox 3">
+            <a:extLst>
+              <a:ext uri="{FF2B5EF4-FFF2-40B4-BE49-F238E27FC236}">
+                <a16:creationId xmlns:a16="http://schemas.microsoft.com/office/drawing/2014/main" id="{9BD5669A-1FE1-C6BC-0617-481BE80F1863}"/>
+              </a:ext>
+            </a:extLst>
+          </p:cNvPr>
+          <p:cNvSpPr txBox="1"/>
+          <p:nvPr/>
+        </p:nvSpPr>
+        <p:spPr>
+          <a:xfrm>
+            <a:off x="304800" y="2754035"/>
+            <a:ext cx="750526" cy="369332"/>
+          </a:xfrm>
+          <a:prstGeom prst="rect">
+            <a:avLst/>
+          </a:prstGeom>
+          <a:noFill/>
+        </p:spPr>
+        <p:txBody>
+          <a:bodyPr wrap="none" rtlCol="0">
+            <a:spAutoFit/>
+          </a:bodyPr>
+          <a:lstStyle/>
+          <a:p>
+            <a:r>
+              <a:rPr lang="en-US" dirty="0"/>
+              <a:t>Caller</a:t>
+            </a:r>
+          </a:p>
+        </p:txBody>
+      </p:sp>
+      <p:sp>
+        <p:nvSpPr>
+          <p:cNvPr id="23" name="Rectangle 22">
+            <a:extLst>
+              <a:ext uri="{FF2B5EF4-FFF2-40B4-BE49-F238E27FC236}">
+                <a16:creationId xmlns:a16="http://schemas.microsoft.com/office/drawing/2014/main" id="{B5A46639-51AC-D259-C3DB-1521D258BD49}"/>
+              </a:ext>
+            </a:extLst>
+          </p:cNvPr>
+          <p:cNvSpPr/>
+          <p:nvPr/>
+        </p:nvSpPr>
+        <p:spPr>
+          <a:xfrm>
+            <a:off x="33528" y="2251948"/>
+            <a:ext cx="9163050" cy="369332"/>
+          </a:xfrm>
+          <a:prstGeom prst="rect">
+            <a:avLst/>
+          </a:prstGeom>
+        </p:spPr>
+        <p:txBody>
+          <a:bodyPr wrap="square">
+            <a:spAutoFit/>
+          </a:bodyPr>
+          <a:lstStyle/>
+          <a:p>
+            <a:r>
+              <a:rPr lang="en-US" b="1" dirty="0">
+                <a:solidFill>
+                  <a:srgbClr val="FF0000"/>
+                </a:solidFill>
+                <a:latin typeface="Consolas" panose="020B0609020204030204" pitchFamily="49" charset="0"/>
+              </a:rPr>
+              <a:t>s = sum(1, 2, 3, 4, 5);</a:t>
+            </a:r>
+          </a:p>
+        </p:txBody>
+      </p:sp>
+      <p:sp>
+        <p:nvSpPr>
+          <p:cNvPr id="15" name="TextBox 14">
+            <a:extLst>
+              <a:ext uri="{FF2B5EF4-FFF2-40B4-BE49-F238E27FC236}">
+                <a16:creationId xmlns:a16="http://schemas.microsoft.com/office/drawing/2014/main" id="{D4F04556-2048-4F19-A763-9BBFFFCAD277}"/>
+              </a:ext>
+            </a:extLst>
+          </p:cNvPr>
+          <p:cNvSpPr txBox="1"/>
+          <p:nvPr/>
+        </p:nvSpPr>
+        <p:spPr>
+          <a:xfrm>
+            <a:off x="449580" y="3256122"/>
+            <a:ext cx="2464136" cy="2031325"/>
+          </a:xfrm>
+          <a:prstGeom prst="rect">
+            <a:avLst/>
+          </a:prstGeom>
+        </p:spPr>
+        <p:style>
+          <a:lnRef idx="2">
+            <a:schemeClr val="accent1"/>
+          </a:lnRef>
+          <a:fillRef idx="1">
+            <a:schemeClr val="lt1"/>
+          </a:fillRef>
+          <a:effectRef idx="0">
+            <a:schemeClr val="accent1"/>
+          </a:effectRef>
+          <a:fontRef idx="minor">
+            <a:schemeClr val="dk1"/>
+          </a:fontRef>
+        </p:style>
+        <p:txBody>
+          <a:bodyPr wrap="none" rtlCol="0">
+            <a:spAutoFit/>
+          </a:bodyPr>
+          <a:lstStyle/>
+          <a:p>
+            <a:r>
+              <a:rPr lang="en-US" dirty="0">
+                <a:latin typeface="Consolas" panose="020B0609020204030204" pitchFamily="49" charset="0"/>
+              </a:rPr>
+              <a:t>  MOV r0, #5 </a:t>
+            </a:r>
+            <a:r>
+              <a:rPr lang="en-US" dirty="0">
+                <a:solidFill>
+                  <a:schemeClr val="bg1">
+                    <a:lumMod val="50000"/>
+                  </a:schemeClr>
+                </a:solidFill>
+                <a:latin typeface="Consolas" panose="020B0609020204030204" pitchFamily="49" charset="0"/>
+              </a:rPr>
+              <a:t>; e32</a:t>
+            </a:r>
+          </a:p>
+          <a:p>
+            <a:r>
+              <a:rPr lang="en-US" dirty="0">
+                <a:solidFill>
+                  <a:schemeClr val="tx1"/>
+                </a:solidFill>
+                <a:latin typeface="Consolas" panose="020B0609020204030204" pitchFamily="49" charset="0"/>
+              </a:rPr>
+              <a:t>  MOV r0, #1 </a:t>
+            </a:r>
+            <a:r>
+              <a:rPr lang="en-US" dirty="0">
+                <a:solidFill>
+                  <a:schemeClr val="bg1">
+                    <a:lumMod val="50000"/>
+                  </a:schemeClr>
+                </a:solidFill>
+                <a:latin typeface="Consolas" panose="020B0609020204030204" pitchFamily="49" charset="0"/>
+              </a:rPr>
+              <a:t>; a8</a:t>
+            </a:r>
+          </a:p>
+          <a:p>
+            <a:r>
+              <a:rPr lang="en-US" dirty="0">
+                <a:latin typeface="Consolas" panose="020B0609020204030204" pitchFamily="49" charset="0"/>
+              </a:rPr>
+              <a:t>  MOV r1, #2 </a:t>
+            </a:r>
+            <a:r>
+              <a:rPr lang="en-US" dirty="0">
+                <a:solidFill>
+                  <a:schemeClr val="bg1">
+                    <a:lumMod val="50000"/>
+                  </a:schemeClr>
+                </a:solidFill>
+                <a:latin typeface="Consolas" panose="020B0609020204030204" pitchFamily="49" charset="0"/>
+              </a:rPr>
+              <a:t>; b8</a:t>
+            </a:r>
+          </a:p>
+          <a:p>
+            <a:r>
+              <a:rPr lang="en-US" dirty="0">
+                <a:latin typeface="Consolas" panose="020B0609020204030204" pitchFamily="49" charset="0"/>
+              </a:rPr>
+              <a:t>  MOV r2, #3 </a:t>
+            </a:r>
+            <a:r>
+              <a:rPr lang="en-US" dirty="0">
+                <a:solidFill>
+                  <a:schemeClr val="bg1">
+                    <a:lumMod val="50000"/>
+                  </a:schemeClr>
+                </a:solidFill>
+                <a:latin typeface="Consolas" panose="020B0609020204030204" pitchFamily="49" charset="0"/>
+              </a:rPr>
+              <a:t>; c16</a:t>
+            </a:r>
+          </a:p>
+          <a:p>
+            <a:r>
+              <a:rPr lang="en-US" dirty="0">
+                <a:latin typeface="Consolas" panose="020B0609020204030204" pitchFamily="49" charset="0"/>
+              </a:rPr>
+              <a:t>  MOV r3, #4 </a:t>
+            </a:r>
+            <a:r>
+              <a:rPr lang="en-US" dirty="0">
+                <a:solidFill>
+                  <a:schemeClr val="bg1">
+                    <a:lumMod val="50000"/>
+                  </a:schemeClr>
+                </a:solidFill>
+                <a:latin typeface="Consolas" panose="020B0609020204030204" pitchFamily="49" charset="0"/>
+              </a:rPr>
+              <a:t>; d16</a:t>
+            </a:r>
+          </a:p>
+          <a:p>
+            <a:r>
+              <a:rPr lang="en-US" dirty="0">
+                <a:latin typeface="Consolas" panose="020B0609020204030204" pitchFamily="49" charset="0"/>
+              </a:rPr>
+              <a:t>  BL  sum</a:t>
+            </a:r>
+          </a:p>
+          <a:p>
+            <a:r>
+              <a:rPr lang="en-US" dirty="0">
+                <a:latin typeface="Consolas" panose="020B0609020204030204" pitchFamily="49" charset="0"/>
+              </a:rPr>
+              <a:t>  ...</a:t>
+            </a:r>
+          </a:p>
+        </p:txBody>
+      </p:sp>
+      <p:sp>
+        <p:nvSpPr>
+          <p:cNvPr id="27" name="TextBox 26">
+            <a:extLst>
+              <a:ext uri="{FF2B5EF4-FFF2-40B4-BE49-F238E27FC236}">
+                <a16:creationId xmlns:a16="http://schemas.microsoft.com/office/drawing/2014/main" id="{6AC2BFAF-703A-1607-3F8B-C3C6EAC24548}"/>
+              </a:ext>
+            </a:extLst>
+          </p:cNvPr>
+          <p:cNvSpPr txBox="1"/>
+          <p:nvPr/>
+        </p:nvSpPr>
+        <p:spPr>
+          <a:xfrm>
+            <a:off x="3581400" y="2840938"/>
+            <a:ext cx="769763" cy="369332"/>
+          </a:xfrm>
+          <a:prstGeom prst="rect">
+            <a:avLst/>
+          </a:prstGeom>
+          <a:noFill/>
+        </p:spPr>
+        <p:txBody>
+          <a:bodyPr wrap="none" rtlCol="0">
+            <a:spAutoFit/>
+          </a:bodyPr>
+          <a:lstStyle/>
+          <a:p>
+            <a:r>
+              <a:rPr lang="en-US" dirty="0" err="1"/>
+              <a:t>Callee</a:t>
+            </a:r>
+            <a:endParaRPr lang="en-US" dirty="0"/>
+          </a:p>
+        </p:txBody>
+      </p:sp>
+      <p:sp>
+        <p:nvSpPr>
+          <p:cNvPr id="28" name="TextBox 27">
+            <a:extLst>
+              <a:ext uri="{FF2B5EF4-FFF2-40B4-BE49-F238E27FC236}">
+                <a16:creationId xmlns:a16="http://schemas.microsoft.com/office/drawing/2014/main" id="{5A07EE5F-FDFB-4DFD-A418-4743BE043075}"/>
+              </a:ext>
+            </a:extLst>
+          </p:cNvPr>
+          <p:cNvSpPr txBox="1"/>
+          <p:nvPr/>
+        </p:nvSpPr>
+        <p:spPr>
+          <a:xfrm>
+            <a:off x="3607914" y="3305718"/>
+            <a:ext cx="3730508" cy="2031325"/>
+          </a:xfrm>
+          <a:prstGeom prst="rect">
+            <a:avLst/>
+          </a:prstGeom>
+        </p:spPr>
+        <p:style>
+          <a:lnRef idx="2">
+            <a:schemeClr val="accent1"/>
+          </a:lnRef>
+          <a:fillRef idx="1">
+            <a:schemeClr val="lt1"/>
+          </a:fillRef>
+          <a:effectRef idx="0">
+            <a:schemeClr val="accent1"/>
+          </a:effectRef>
+          <a:fontRef idx="minor">
+            <a:schemeClr val="dk1"/>
+          </a:fontRef>
+        </p:style>
+        <p:txBody>
+          <a:bodyPr wrap="none" rtlCol="0">
+            <a:spAutoFit/>
+          </a:bodyPr>
+          <a:lstStyle/>
+          <a:p>
+            <a:r>
+              <a:rPr lang="en-US" b="1" dirty="0">
+                <a:solidFill>
+                  <a:srgbClr val="0000FF"/>
+                </a:solidFill>
+                <a:latin typeface="Consolas" panose="020B0609020204030204" pitchFamily="49" charset="0"/>
+              </a:rPr>
+              <a:t>sum</a:t>
+            </a:r>
+            <a:r>
+              <a:rPr lang="en-US" dirty="0">
+                <a:latin typeface="Consolas" panose="020B0609020204030204" pitchFamily="49" charset="0"/>
+              </a:rPr>
+              <a:t> PROC    </a:t>
+            </a:r>
+          </a:p>
+          <a:p>
+            <a:r>
+              <a:rPr lang="en-US" dirty="0">
+                <a:latin typeface="Consolas" panose="020B0609020204030204" pitchFamily="49" charset="0"/>
+              </a:rPr>
+              <a:t>  ADD r0, r0, r1   </a:t>
+            </a:r>
+            <a:r>
+              <a:rPr lang="en-US" dirty="0">
+                <a:solidFill>
+                  <a:schemeClr val="bg1">
+                    <a:lumMod val="50000"/>
+                  </a:schemeClr>
+                </a:solidFill>
+                <a:latin typeface="Consolas" panose="020B0609020204030204" pitchFamily="49" charset="0"/>
+              </a:rPr>
+              <a:t>; a8 + b8</a:t>
+            </a:r>
+          </a:p>
+          <a:p>
+            <a:r>
+              <a:rPr lang="en-US" dirty="0">
+                <a:latin typeface="Consolas" panose="020B0609020204030204" pitchFamily="49" charset="0"/>
+              </a:rPr>
+              <a:t>  ADD r0, r0, r2   </a:t>
+            </a:r>
+            <a:r>
+              <a:rPr lang="en-US" dirty="0">
+                <a:solidFill>
+                  <a:schemeClr val="bg1">
+                    <a:lumMod val="50000"/>
+                  </a:schemeClr>
+                </a:solidFill>
+                <a:latin typeface="Consolas" panose="020B0609020204030204" pitchFamily="49" charset="0"/>
+              </a:rPr>
+              <a:t>; add c16</a:t>
+            </a:r>
+          </a:p>
+          <a:p>
+            <a:r>
+              <a:rPr lang="en-US" dirty="0">
+                <a:latin typeface="Consolas" panose="020B0609020204030204" pitchFamily="49" charset="0"/>
+              </a:rPr>
+              <a:t>  ADD r0, r0, r3   </a:t>
+            </a:r>
+            <a:r>
+              <a:rPr lang="en-US" dirty="0">
+                <a:solidFill>
+                  <a:schemeClr val="bg1">
+                    <a:lumMod val="50000"/>
+                  </a:schemeClr>
+                </a:solidFill>
+                <a:latin typeface="Consolas" panose="020B0609020204030204" pitchFamily="49" charset="0"/>
+              </a:rPr>
+              <a:t>; add d16</a:t>
+            </a:r>
+          </a:p>
+          <a:p>
+            <a:r>
+              <a:rPr lang="en-US" dirty="0">
+                <a:solidFill>
+                  <a:schemeClr val="tx1"/>
+                </a:solidFill>
+                <a:latin typeface="Consolas" panose="020B0609020204030204" pitchFamily="49" charset="0"/>
+              </a:rPr>
+              <a:t>  ADD r0, r0, r1   </a:t>
+            </a:r>
+            <a:r>
+              <a:rPr lang="en-US" dirty="0">
+                <a:solidFill>
+                  <a:schemeClr val="bg1">
+                    <a:lumMod val="50000"/>
+                  </a:schemeClr>
+                </a:solidFill>
+                <a:latin typeface="Consolas" panose="020B0609020204030204" pitchFamily="49" charset="0"/>
+              </a:rPr>
+              <a:t>; add e32</a:t>
+            </a:r>
+          </a:p>
+          <a:p>
+            <a:r>
+              <a:rPr lang="en-US" dirty="0">
+                <a:latin typeface="Consolas" panose="020B0609020204030204" pitchFamily="49" charset="0"/>
+              </a:rPr>
+              <a:t>  BX  LR</a:t>
+            </a:r>
+          </a:p>
+          <a:p>
+            <a:r>
+              <a:rPr lang="en-US" dirty="0">
+                <a:latin typeface="Consolas" panose="020B0609020204030204" pitchFamily="49" charset="0"/>
+              </a:rPr>
+              <a:t>  ENDP</a:t>
+            </a:r>
+          </a:p>
+        </p:txBody>
+      </p:sp>
+    </p:spTree>
+    <p:extLst>
+      <p:ext uri="{BB962C8B-B14F-4D97-AF65-F5344CB8AC3E}">
+        <p14:creationId xmlns:p14="http://schemas.microsoft.com/office/powerpoint/2010/main" val="3970213323"/>
+      </p:ext>
+    </p:extLst>
+  </p:cSld>
+  <p:clrMapOvr>
+    <a:masterClrMapping/>
+  </p:clrMapOvr>
+</p:sld>
+</file>
+
+<file path=ppt/slides/slide18.xml><?xml version="1.0" encoding="utf-8"?>
+<p:sld xmlns:a="http://schemas.openxmlformats.org/drawingml/2006/main" xmlns:r="http://schemas.openxmlformats.org/officeDocument/2006/relationships" xmlns:p="http://schemas.openxmlformats.org/presentationml/2006/main">
+  <p:cSld>
+    <p:spTree>
+      <p:nvGrpSpPr>
+        <p:cNvPr id="1" name=""/>
+        <p:cNvGrpSpPr/>
+        <p:nvPr/>
+      </p:nvGrpSpPr>
+      <p:grpSpPr>
+        <a:xfrm>
+          <a:off x="0" y="0"/>
+          <a:ext cx="0" cy="0"/>
+          <a:chOff x="0" y="0"/>
+          <a:chExt cx="0" cy="0"/>
+        </a:xfrm>
+      </p:grpSpPr>
+      <p:sp>
+        <p:nvSpPr>
+          <p:cNvPr id="2" name="Title 1"/>
+          <p:cNvSpPr>
+            <a:spLocks noGrp="1"/>
+          </p:cNvSpPr>
+          <p:nvPr>
+            <p:ph type="title"/>
+          </p:nvPr>
+        </p:nvSpPr>
+        <p:spPr/>
+        <p:txBody>
+          <a:bodyPr>
+            <a:normAutofit fontScale="90000"/>
+          </a:bodyPr>
+          <a:lstStyle/>
+          <a:p>
+            <a:r>
+              <a:rPr lang="en-US" dirty="0"/>
+              <a:t>What’s wrong? Passing arguments and Returning Value ANS</a:t>
+            </a:r>
+          </a:p>
+        </p:txBody>
+      </p:sp>
+      <p:sp>
+        <p:nvSpPr>
+          <p:cNvPr id="3" name="Slide Number Placeholder 2"/>
+          <p:cNvSpPr>
+            <a:spLocks noGrp="1"/>
+          </p:cNvSpPr>
+          <p:nvPr>
+            <p:ph type="sldNum" sz="quarter" idx="12"/>
+          </p:nvPr>
+        </p:nvSpPr>
+        <p:spPr/>
+        <p:txBody>
+          <a:bodyPr/>
+          <a:lstStyle/>
+          <a:p>
+            <a:fld id="{EA7C8D44-3667-46F6-9772-CC52308E2A7F}" type="slidenum">
+              <a:rPr kumimoji="0" lang="en-US" smtClean="0"/>
+              <a:pPr/>
+              <a:t>18</a:t>
+            </a:fld>
+            <a:endParaRPr kumimoji="0" lang="en-US" dirty="0"/>
+          </a:p>
+        </p:txBody>
+      </p:sp>
+      <p:sp>
+        <p:nvSpPr>
+          <p:cNvPr id="11" name="Rectangle 10"/>
+          <p:cNvSpPr/>
+          <p:nvPr/>
+        </p:nvSpPr>
+        <p:spPr>
+          <a:xfrm>
+            <a:off x="76200" y="1593468"/>
+            <a:ext cx="9163050" cy="646331"/>
+          </a:xfrm>
+          <a:prstGeom prst="rect">
+            <a:avLst/>
+          </a:prstGeom>
+        </p:spPr>
+        <p:txBody>
+          <a:bodyPr wrap="square">
+            <a:spAutoFit/>
+          </a:bodyPr>
+          <a:lstStyle/>
+          <a:p>
+            <a:r>
+              <a:rPr lang="en-US" b="1" dirty="0">
+                <a:latin typeface="Consolas" panose="020B0609020204030204" pitchFamily="49" charset="0"/>
+              </a:rPr>
+              <a:t>uint32_t sum(uint8_t a8, uint8_t b8, uint16_t c16, uint16_t d16, </a:t>
+            </a:r>
+            <a:r>
+              <a:rPr lang="en-US" b="1" dirty="0">
+                <a:solidFill>
+                  <a:srgbClr val="FF0000"/>
+                </a:solidFill>
+                <a:latin typeface="Consolas" panose="020B0609020204030204" pitchFamily="49" charset="0"/>
+              </a:rPr>
+              <a:t>uint32_t e32</a:t>
+            </a:r>
+            <a:r>
+              <a:rPr lang="en-US" b="1" dirty="0">
+                <a:latin typeface="Consolas" panose="020B0609020204030204" pitchFamily="49" charset="0"/>
+              </a:rPr>
+              <a:t>);</a:t>
+            </a:r>
+          </a:p>
+        </p:txBody>
+      </p:sp>
+      <p:sp>
+        <p:nvSpPr>
+          <p:cNvPr id="4" name="TextBox 3"/>
+          <p:cNvSpPr txBox="1"/>
+          <p:nvPr/>
+        </p:nvSpPr>
+        <p:spPr>
+          <a:xfrm>
+            <a:off x="304800" y="2754035"/>
+            <a:ext cx="750526" cy="369332"/>
+          </a:xfrm>
+          <a:prstGeom prst="rect">
+            <a:avLst/>
+          </a:prstGeom>
+          <a:noFill/>
+        </p:spPr>
+        <p:txBody>
+          <a:bodyPr wrap="none" rtlCol="0">
+            <a:spAutoFit/>
+          </a:bodyPr>
+          <a:lstStyle/>
+          <a:p>
+            <a:r>
+              <a:rPr lang="en-US" dirty="0"/>
+              <a:t>Caller</a:t>
+            </a:r>
+          </a:p>
+        </p:txBody>
+      </p:sp>
+      <p:sp>
+        <p:nvSpPr>
+          <p:cNvPr id="23" name="Rectangle 22"/>
+          <p:cNvSpPr/>
+          <p:nvPr/>
+        </p:nvSpPr>
+        <p:spPr>
+          <a:xfrm>
+            <a:off x="33528" y="2251948"/>
+            <a:ext cx="9163050" cy="369332"/>
+          </a:xfrm>
+          <a:prstGeom prst="rect">
+            <a:avLst/>
+          </a:prstGeom>
+        </p:spPr>
+        <p:txBody>
+          <a:bodyPr wrap="square">
+            <a:spAutoFit/>
+          </a:bodyPr>
+          <a:lstStyle/>
+          <a:p>
+            <a:r>
+              <a:rPr lang="en-US" b="1" dirty="0">
+                <a:solidFill>
+                  <a:srgbClr val="FF0000"/>
+                </a:solidFill>
+                <a:latin typeface="Consolas" panose="020B0609020204030204" pitchFamily="49" charset="0"/>
+              </a:rPr>
+              <a:t>s = sum(1, 2, 3, 4, 5);</a:t>
+            </a:r>
+          </a:p>
+        </p:txBody>
+      </p:sp>
+      <p:sp>
+        <p:nvSpPr>
+          <p:cNvPr id="15" name="TextBox 14"/>
+          <p:cNvSpPr txBox="1"/>
+          <p:nvPr/>
+        </p:nvSpPr>
+        <p:spPr>
+          <a:xfrm>
+            <a:off x="449580" y="3256122"/>
+            <a:ext cx="2464136" cy="2585323"/>
+          </a:xfrm>
+          <a:prstGeom prst="rect">
+            <a:avLst/>
+          </a:prstGeom>
+        </p:spPr>
+        <p:style>
+          <a:lnRef idx="2">
+            <a:schemeClr val="accent1"/>
+          </a:lnRef>
+          <a:fillRef idx="1">
+            <a:schemeClr val="lt1"/>
+          </a:fillRef>
+          <a:effectRef idx="0">
+            <a:schemeClr val="accent1"/>
+          </a:effectRef>
+          <a:fontRef idx="minor">
+            <a:schemeClr val="dk1"/>
+          </a:fontRef>
+        </p:style>
+        <p:txBody>
+          <a:bodyPr wrap="none" rtlCol="0">
+            <a:spAutoFit/>
+          </a:bodyPr>
+          <a:lstStyle/>
+          <a:p>
+            <a:r>
+              <a:rPr lang="en-US" dirty="0">
+                <a:latin typeface="Consolas" panose="020B0609020204030204" pitchFamily="49" charset="0"/>
+              </a:rPr>
+              <a:t>  MOV r0, #5 </a:t>
+            </a:r>
+            <a:r>
+              <a:rPr lang="en-US" dirty="0">
+                <a:solidFill>
+                  <a:schemeClr val="bg1">
+                    <a:lumMod val="50000"/>
+                  </a:schemeClr>
+                </a:solidFill>
+                <a:latin typeface="Consolas" panose="020B0609020204030204" pitchFamily="49" charset="0"/>
+              </a:rPr>
+              <a:t>; e32</a:t>
+            </a:r>
+          </a:p>
+          <a:p>
+            <a:r>
+              <a:rPr lang="en-US" dirty="0">
+                <a:latin typeface="Consolas" panose="020B0609020204030204" pitchFamily="49" charset="0"/>
+              </a:rPr>
+              <a:t>  </a:t>
+            </a:r>
+            <a:r>
+              <a:rPr lang="en-US" b="1" dirty="0">
+                <a:solidFill>
+                  <a:srgbClr val="FF0000"/>
+                </a:solidFill>
+                <a:latin typeface="Consolas" panose="020B0609020204030204" pitchFamily="49" charset="0"/>
+              </a:rPr>
+              <a:t>PUSH {r0}</a:t>
+            </a:r>
+          </a:p>
+          <a:p>
+            <a:r>
+              <a:rPr lang="en-US" dirty="0">
+                <a:solidFill>
+                  <a:schemeClr val="tx1"/>
+                </a:solidFill>
+                <a:latin typeface="Consolas" panose="020B0609020204030204" pitchFamily="49" charset="0"/>
+              </a:rPr>
+              <a:t>  MOV r0, #1 </a:t>
+            </a:r>
+            <a:r>
+              <a:rPr lang="en-US" dirty="0">
+                <a:solidFill>
+                  <a:schemeClr val="bg1">
+                    <a:lumMod val="50000"/>
+                  </a:schemeClr>
+                </a:solidFill>
+                <a:latin typeface="Consolas" panose="020B0609020204030204" pitchFamily="49" charset="0"/>
+              </a:rPr>
+              <a:t>; a8</a:t>
+            </a:r>
+          </a:p>
+          <a:p>
+            <a:r>
+              <a:rPr lang="en-US" dirty="0">
+                <a:latin typeface="Consolas" panose="020B0609020204030204" pitchFamily="49" charset="0"/>
+              </a:rPr>
+              <a:t>  MOV r1, #2 </a:t>
+            </a:r>
+            <a:r>
+              <a:rPr lang="en-US" dirty="0">
+                <a:solidFill>
+                  <a:schemeClr val="bg1">
+                    <a:lumMod val="50000"/>
+                  </a:schemeClr>
+                </a:solidFill>
+                <a:latin typeface="Consolas" panose="020B0609020204030204" pitchFamily="49" charset="0"/>
+              </a:rPr>
+              <a:t>; b8</a:t>
+            </a:r>
+          </a:p>
+          <a:p>
+            <a:r>
+              <a:rPr lang="en-US" dirty="0">
+                <a:latin typeface="Consolas" panose="020B0609020204030204" pitchFamily="49" charset="0"/>
+              </a:rPr>
+              <a:t>  MOV r2, #3 </a:t>
+            </a:r>
+            <a:r>
+              <a:rPr lang="en-US" dirty="0">
+                <a:solidFill>
+                  <a:schemeClr val="bg1">
+                    <a:lumMod val="50000"/>
+                  </a:schemeClr>
+                </a:solidFill>
+                <a:latin typeface="Consolas" panose="020B0609020204030204" pitchFamily="49" charset="0"/>
+              </a:rPr>
+              <a:t>; c16</a:t>
+            </a:r>
+          </a:p>
+          <a:p>
+            <a:r>
+              <a:rPr lang="en-US" dirty="0">
+                <a:latin typeface="Consolas" panose="020B0609020204030204" pitchFamily="49" charset="0"/>
+              </a:rPr>
+              <a:t>  MOV r3, #4 </a:t>
+            </a:r>
+            <a:r>
+              <a:rPr lang="en-US" dirty="0">
+                <a:solidFill>
+                  <a:schemeClr val="bg1">
+                    <a:lumMod val="50000"/>
+                  </a:schemeClr>
+                </a:solidFill>
+                <a:latin typeface="Consolas" panose="020B0609020204030204" pitchFamily="49" charset="0"/>
+              </a:rPr>
+              <a:t>; d16</a:t>
+            </a:r>
+          </a:p>
+          <a:p>
+            <a:r>
+              <a:rPr lang="en-US" dirty="0">
+                <a:latin typeface="Consolas" panose="020B0609020204030204" pitchFamily="49" charset="0"/>
+              </a:rPr>
+              <a:t>  BL  sum</a:t>
+            </a:r>
+          </a:p>
+          <a:p>
+            <a:r>
+              <a:rPr lang="en-US" dirty="0">
+                <a:latin typeface="Consolas" panose="020B0609020204030204" pitchFamily="49" charset="0"/>
+              </a:rPr>
+              <a:t>  ...</a:t>
+            </a:r>
+          </a:p>
+          <a:p>
+            <a:r>
+              <a:rPr lang="en-US" dirty="0">
+                <a:latin typeface="Consolas" panose="020B0609020204030204" pitchFamily="49" charset="0"/>
+              </a:rPr>
+              <a:t>  </a:t>
+            </a:r>
+            <a:r>
+              <a:rPr lang="en-US" b="1" dirty="0">
+                <a:solidFill>
+                  <a:srgbClr val="FF0000"/>
+                </a:solidFill>
+                <a:latin typeface="Consolas" panose="020B0609020204030204" pitchFamily="49" charset="0"/>
+              </a:rPr>
+              <a:t>POP {r0}</a:t>
+            </a:r>
+          </a:p>
+        </p:txBody>
+      </p:sp>
+      <p:sp>
+        <p:nvSpPr>
+          <p:cNvPr id="27" name="TextBox 26"/>
+          <p:cNvSpPr txBox="1"/>
+          <p:nvPr/>
+        </p:nvSpPr>
+        <p:spPr>
+          <a:xfrm>
+            <a:off x="3581400" y="2840938"/>
+            <a:ext cx="769763" cy="369332"/>
+          </a:xfrm>
+          <a:prstGeom prst="rect">
+            <a:avLst/>
+          </a:prstGeom>
+          <a:noFill/>
+        </p:spPr>
+        <p:txBody>
+          <a:bodyPr wrap="none" rtlCol="0">
+            <a:spAutoFit/>
+          </a:bodyPr>
+          <a:lstStyle/>
+          <a:p>
+            <a:r>
+              <a:rPr lang="en-US" dirty="0" err="1"/>
+              <a:t>Callee</a:t>
+            </a:r>
+            <a:endParaRPr lang="en-US" dirty="0"/>
+          </a:p>
+        </p:txBody>
+      </p:sp>
+      <p:sp>
+        <p:nvSpPr>
+          <p:cNvPr id="28" name="TextBox 27"/>
+          <p:cNvSpPr txBox="1"/>
+          <p:nvPr/>
+        </p:nvSpPr>
+        <p:spPr>
+          <a:xfrm>
+            <a:off x="3607914" y="3305718"/>
+            <a:ext cx="4996881" cy="2308324"/>
+          </a:xfrm>
+          <a:prstGeom prst="rect">
+            <a:avLst/>
+          </a:prstGeom>
+        </p:spPr>
+        <p:style>
+          <a:lnRef idx="2">
+            <a:schemeClr val="accent1"/>
+          </a:lnRef>
+          <a:fillRef idx="1">
+            <a:schemeClr val="lt1"/>
+          </a:fillRef>
+          <a:effectRef idx="0">
+            <a:schemeClr val="accent1"/>
+          </a:effectRef>
+          <a:fontRef idx="minor">
+            <a:schemeClr val="dk1"/>
+          </a:fontRef>
+        </p:style>
+        <p:txBody>
+          <a:bodyPr wrap="none" rtlCol="0">
+            <a:spAutoFit/>
+          </a:bodyPr>
+          <a:lstStyle/>
+          <a:p>
+            <a:r>
+              <a:rPr lang="en-US" b="1" dirty="0">
+                <a:solidFill>
+                  <a:srgbClr val="0000FF"/>
+                </a:solidFill>
+                <a:latin typeface="Consolas" panose="020B0609020204030204" pitchFamily="49" charset="0"/>
+              </a:rPr>
+              <a:t>sum</a:t>
+            </a:r>
+            <a:r>
+              <a:rPr lang="en-US" dirty="0">
+                <a:latin typeface="Consolas" panose="020B0609020204030204" pitchFamily="49" charset="0"/>
+              </a:rPr>
+              <a:t> PROC    </a:t>
+            </a:r>
+          </a:p>
+          <a:p>
+            <a:r>
+              <a:rPr lang="en-US" dirty="0">
+                <a:latin typeface="Consolas" panose="020B0609020204030204" pitchFamily="49" charset="0"/>
+              </a:rPr>
+              <a:t>  ADD r0, r0, r1   </a:t>
+            </a:r>
+            <a:r>
+              <a:rPr lang="en-US" dirty="0">
+                <a:solidFill>
+                  <a:schemeClr val="bg1">
+                    <a:lumMod val="50000"/>
+                  </a:schemeClr>
+                </a:solidFill>
+                <a:latin typeface="Consolas" panose="020B0609020204030204" pitchFamily="49" charset="0"/>
+              </a:rPr>
+              <a:t>; a8 + b8</a:t>
+            </a:r>
+          </a:p>
+          <a:p>
+            <a:r>
+              <a:rPr lang="en-US" dirty="0">
+                <a:latin typeface="Consolas" panose="020B0609020204030204" pitchFamily="49" charset="0"/>
+              </a:rPr>
+              <a:t>  ADD r0, r0, r2   </a:t>
+            </a:r>
+            <a:r>
+              <a:rPr lang="en-US" dirty="0">
+                <a:solidFill>
+                  <a:schemeClr val="bg1">
+                    <a:lumMod val="50000"/>
+                  </a:schemeClr>
+                </a:solidFill>
+                <a:latin typeface="Consolas" panose="020B0609020204030204" pitchFamily="49" charset="0"/>
+              </a:rPr>
+              <a:t>; add c16</a:t>
+            </a:r>
+          </a:p>
+          <a:p>
+            <a:r>
+              <a:rPr lang="en-US" dirty="0">
+                <a:latin typeface="Consolas" panose="020B0609020204030204" pitchFamily="49" charset="0"/>
+              </a:rPr>
+              <a:t>  ADD r0, r0, r3   </a:t>
+            </a:r>
+            <a:r>
+              <a:rPr lang="en-US" dirty="0">
+                <a:solidFill>
+                  <a:schemeClr val="bg1">
+                    <a:lumMod val="50000"/>
+                  </a:schemeClr>
+                </a:solidFill>
+                <a:latin typeface="Consolas" panose="020B0609020204030204" pitchFamily="49" charset="0"/>
+              </a:rPr>
+              <a:t>; add d16</a:t>
+            </a:r>
+          </a:p>
+          <a:p>
+            <a:r>
+              <a:rPr lang="en-US" b="1" dirty="0">
+                <a:solidFill>
+                  <a:srgbClr val="FF0000"/>
+                </a:solidFill>
+                <a:latin typeface="Consolas" panose="020B0609020204030204" pitchFamily="49" charset="0"/>
+              </a:rPr>
+              <a:t>  LDR r1, [</a:t>
+            </a:r>
+            <a:r>
+              <a:rPr lang="en-US" b="1" dirty="0" err="1">
+                <a:solidFill>
+                  <a:srgbClr val="FF0000"/>
+                </a:solidFill>
+                <a:latin typeface="Consolas" panose="020B0609020204030204" pitchFamily="49" charset="0"/>
+              </a:rPr>
+              <a:t>sp</a:t>
+            </a:r>
+            <a:r>
+              <a:rPr lang="en-US" b="1" dirty="0">
+                <a:solidFill>
+                  <a:srgbClr val="FF0000"/>
+                </a:solidFill>
+                <a:latin typeface="Consolas" panose="020B0609020204030204" pitchFamily="49" charset="0"/>
+              </a:rPr>
+              <a:t>, #0] </a:t>
+            </a:r>
+            <a:r>
+              <a:rPr lang="en-US" b="1" dirty="0">
+                <a:solidFill>
+                  <a:schemeClr val="bg1">
+                    <a:lumMod val="50000"/>
+                  </a:schemeClr>
+                </a:solidFill>
+                <a:latin typeface="Consolas" panose="020B0609020204030204" pitchFamily="49" charset="0"/>
+              </a:rPr>
+              <a:t>; read argument e32</a:t>
+            </a:r>
+          </a:p>
+          <a:p>
+            <a:r>
+              <a:rPr lang="en-US" dirty="0">
+                <a:solidFill>
+                  <a:schemeClr val="bg1">
+                    <a:lumMod val="50000"/>
+                  </a:schemeClr>
+                </a:solidFill>
+                <a:latin typeface="Consolas" panose="020B0609020204030204" pitchFamily="49" charset="0"/>
+              </a:rPr>
+              <a:t>  </a:t>
+            </a:r>
+            <a:r>
+              <a:rPr lang="en-US" dirty="0">
+                <a:solidFill>
+                  <a:schemeClr val="tx1"/>
+                </a:solidFill>
+                <a:latin typeface="Consolas" panose="020B0609020204030204" pitchFamily="49" charset="0"/>
+              </a:rPr>
+              <a:t>ADD r0, r0, r1   </a:t>
+            </a:r>
+            <a:r>
+              <a:rPr lang="en-US" dirty="0">
+                <a:solidFill>
+                  <a:schemeClr val="bg1">
+                    <a:lumMod val="50000"/>
+                  </a:schemeClr>
+                </a:solidFill>
+                <a:latin typeface="Consolas" panose="020B0609020204030204" pitchFamily="49" charset="0"/>
+              </a:rPr>
+              <a:t>; add e32</a:t>
+            </a:r>
+          </a:p>
+          <a:p>
+            <a:r>
+              <a:rPr lang="en-US" dirty="0">
+                <a:latin typeface="Consolas" panose="020B0609020204030204" pitchFamily="49" charset="0"/>
+              </a:rPr>
+              <a:t>  BX  LR</a:t>
+            </a:r>
+          </a:p>
+          <a:p>
+            <a:r>
+              <a:rPr lang="en-US" dirty="0">
+                <a:latin typeface="Consolas" panose="020B0609020204030204" pitchFamily="49" charset="0"/>
+              </a:rPr>
+              <a:t>  ENDP</a:t>
+            </a:r>
+          </a:p>
+        </p:txBody>
+      </p:sp>
+      <p:sp>
+        <p:nvSpPr>
+          <p:cNvPr id="6" name="Rectangle 5"/>
+          <p:cNvSpPr/>
+          <p:nvPr/>
+        </p:nvSpPr>
+        <p:spPr>
+          <a:xfrm>
+            <a:off x="914400" y="5854799"/>
+            <a:ext cx="4861560" cy="646331"/>
+          </a:xfrm>
+          <a:prstGeom prst="rect">
+            <a:avLst/>
+          </a:prstGeom>
+        </p:spPr>
+        <p:txBody>
+          <a:bodyPr wrap="square">
+            <a:spAutoFit/>
+          </a:bodyPr>
+          <a:lstStyle/>
+          <a:p>
+            <a:r>
+              <a:rPr lang="en-US" dirty="0"/>
+              <a:t>The caller is responsible to pop extra arguments out of the stack after the subroutine returns.</a:t>
+            </a:r>
+          </a:p>
+        </p:txBody>
+      </p:sp>
+    </p:spTree>
+    <p:extLst>
+      <p:ext uri="{BB962C8B-B14F-4D97-AF65-F5344CB8AC3E}">
+        <p14:creationId xmlns:p14="http://schemas.microsoft.com/office/powerpoint/2010/main" val="2345755417"/>
+      </p:ext>
+    </p:extLst>
+  </p:cSld>
+  <p:clrMapOvr>
+    <a:masterClrMapping/>
+  </p:clrMapOvr>
 </p:sld>
 </file>
 
@@ -30514,7 +30322,14 @@
                 <a:latin typeface="Consolas" panose="020B0609020204030204" pitchFamily="49" charset="0"/>
                 <a:cs typeface="Consolas" panose="020B0609020204030204" pitchFamily="49" charset="0"/>
               </a:rPr>
-              <a:t>loop  LDRSH r1, [r0], #2 </a:t>
+              <a:t>loop  </a:t>
+            </a:r>
+            <a:r>
+              <a:rPr lang="pt-BR" sz="1200" dirty="0">
+                <a:latin typeface="Consolas" panose="020B0609020204030204" pitchFamily="49" charset="0"/>
+                <a:cs typeface="Consolas" panose="020B0609020204030204" pitchFamily="49" charset="0"/>
+              </a:rPr>
+              <a:t>LDRSH r1, [r0, r2, LSL #1]</a:t>
             </a:r>
           </a:p>
           <a:p>
@@ -30838,7 +30653,7 @@
         </p:nvSpPr>
         <p:spPr>
           <a:xfrm>
-            <a:off x="457200" y="2006188"/>
+            <a:off x="370958" y="1295401"/>
             <a:ext cx="3752950" cy="1384995"/>
           </a:xfrm>
           <a:prstGeom prst="rect">
@@ -31070,7 +30885,7 @@
         </p:nvSpPr>
         <p:spPr>
           <a:xfrm>
-            <a:off x="4340418" y="2006187"/>
+            <a:off x="4254176" y="1295400"/>
             <a:ext cx="4432624" cy="2492990"/>
           </a:xfrm>
           <a:prstGeom prst="rect">
@@ -31182,7 +30997,14 @@
                 <a:latin typeface="Consolas" panose="020B0609020204030204" pitchFamily="49" charset="0"/>
                 <a:cs typeface="Consolas" panose="020B0609020204030204" pitchFamily="49" charset="0"/>
               </a:rPr>
-              <a:t>loop  LDRSH r1, [r0], #2 </a:t>
+              <a:t>loop  </a:t>
+            </a:r>
+            <a:r>
+              <a:rPr lang="pt-BR" sz="1200" dirty="0">
+                <a:latin typeface="Consolas" panose="020B0609020204030204" pitchFamily="49" charset="0"/>
+                <a:cs typeface="Consolas" panose="020B0609020204030204" pitchFamily="49" charset="0"/>
+              </a:rPr>
+              <a:t>LDRSH r1, [r0, r2, LSL #1]</a:t>
             </a:r>
           </a:p>
           <a:p>
@@ -31437,56 +31259,6 @@
       </p:sp>
       <p:sp>
         <p:nvSpPr>
-          <p:cNvPr id="4" name="TextBox 3">
-            <a:extLst>
-              <a:ext uri="{FF2B5EF4-FFF2-40B4-BE49-F238E27FC236}">
-                <a16:creationId xmlns:a16="http://schemas.microsoft.com/office/drawing/2014/main" id="{97230E48-4625-B845-9B62-549F2F03DD9E}"/>
-              </a:ext>
-            </a:extLst>
-          </p:cNvPr>
-          <p:cNvSpPr txBox="1"/>
-          <p:nvPr/>
-        </p:nvSpPr>
-        <p:spPr>
-          <a:xfrm>
-            <a:off x="5543551" y="4851813"/>
-            <a:ext cx="2241319" cy="300082"/>
-          </a:xfrm>
-          <a:prstGeom prst="rect">
-            <a:avLst/>
-          </a:prstGeom>
-        </p:spPr>
-        <p:style>
-          <a:lnRef idx="2">
-            <a:schemeClr val="accent1">
-              <a:shade val="50000"/>
-            </a:schemeClr>
-          </a:lnRef>
-          <a:fillRef idx="1">
-            <a:schemeClr val="accent1"/>
-          </a:fillRef>
-          <a:effectRef idx="0">
-            <a:schemeClr val="accent1"/>
-          </a:effectRef>
-          <a:fontRef idx="minor">
-            <a:schemeClr val="lt1"/>
-          </a:fontRef>
-        </p:style>
-        <p:txBody>
-          <a:bodyPr wrap="none" rtlCol="0">
-            <a:spAutoFit/>
-          </a:bodyPr>
-          <a:lstStyle/>
-          <a:p>
-            <a:r>
-              <a:rPr lang="en-US" sz="1350" dirty="0"/>
-              <a:t>The sum is limited to 16 bits!</a:t>
-            </a:r>
-          </a:p>
-        </p:txBody>
-      </p:sp>
-      <p:sp>
-        <p:nvSpPr>
           <p:cNvPr id="7" name="TextBox 6">
             <a:extLst>
               <a:ext uri="{FF2B5EF4-FFF2-40B4-BE49-F238E27FC236}">
@@ -31499,7 +31271,7 @@
         </p:nvSpPr>
         <p:spPr>
           <a:xfrm>
-            <a:off x="285750" y="4574814"/>
+            <a:off x="990600" y="3364487"/>
             <a:ext cx="1130438" cy="300082"/>
           </a:xfrm>
           <a:prstGeom prst="rect">
@@ -31537,7 +31309,7 @@
         </p:nvCxnSpPr>
         <p:spPr>
           <a:xfrm>
-            <a:off x="1485900" y="4713314"/>
+            <a:off x="2190750" y="3502987"/>
             <a:ext cx="285750" cy="0"/>
           </a:xfrm>
           <a:prstGeom prst="straightConnector1">
@@ -31576,7 +31348,7 @@
         </p:nvSpPr>
         <p:spPr>
           <a:xfrm>
-            <a:off x="1882879" y="4574814"/>
+            <a:off x="2587729" y="3364487"/>
             <a:ext cx="1130438" cy="300082"/>
           </a:xfrm>
           <a:prstGeom prst="rect">
@@ -31614,7 +31386,7 @@
         </p:nvSpPr>
         <p:spPr>
           <a:xfrm>
-            <a:off x="290245" y="4961164"/>
+            <a:off x="995095" y="3750837"/>
             <a:ext cx="1130438" cy="300082"/>
           </a:xfrm>
           <a:prstGeom prst="rect">
@@ -31652,7 +31424,7 @@
         </p:nvCxnSpPr>
         <p:spPr>
           <a:xfrm>
-            <a:off x="1490395" y="5099663"/>
+            <a:off x="2195245" y="3889336"/>
             <a:ext cx="285750" cy="0"/>
           </a:xfrm>
           <a:prstGeom prst="straightConnector1">
@@ -31691,7 +31463,7 @@
         </p:nvSpPr>
         <p:spPr>
           <a:xfrm>
-            <a:off x="1887374" y="4961164"/>
+            <a:off x="2592224" y="3750837"/>
             <a:ext cx="1130438" cy="300082"/>
           </a:xfrm>
           <a:prstGeom prst="rect">
@@ -31729,7 +31501,7 @@
         </p:nvSpPr>
         <p:spPr>
           <a:xfrm>
-            <a:off x="285750" y="3986192"/>
+            <a:off x="990600" y="2775865"/>
             <a:ext cx="2454518" cy="507831"/>
           </a:xfrm>
           <a:prstGeom prst="rect">
@@ -31764,6 +31536,62 @@
                 <a:cs typeface="Consolas" panose="020B0609020204030204" pitchFamily="49" charset="0"/>
               </a:rPr>
               <a:t>int16_t y = (int16_t) x;</a:t>
+            </a:r>
+          </a:p>
+        </p:txBody>
+      </p:sp>
+      <p:sp>
+        <p:nvSpPr>
+          <p:cNvPr id="8" name="Content Placeholder 3">
+            <a:extLst>
+              <a:ext uri="{FF2B5EF4-FFF2-40B4-BE49-F238E27FC236}">
+                <a16:creationId xmlns:a16="http://schemas.microsoft.com/office/drawing/2014/main" id="{B310A4C8-2DBE-3062-F639-E120AE1AC4CB}"/>
+              </a:ext>
+            </a:extLst>
+          </p:cNvPr>
+          <p:cNvSpPr>
+            <a:spLocks noGrp="1"/>
+          </p:cNvSpPr>
+          <p:nvPr>
+            <p:ph sz="quarter" idx="1"/>
+          </p:nvPr>
+        </p:nvSpPr>
+        <p:spPr>
+          <a:xfrm>
+            <a:off x="439479" y="4085114"/>
+            <a:ext cx="8229600" cy="2432817"/>
+          </a:xfrm>
+        </p:spPr>
+        <p:txBody>
+          <a:bodyPr>
+            <a:normAutofit fontScale="85000" lnSpcReduction="20000"/>
+          </a:bodyPr>
+          <a:lstStyle/>
+          <a:p>
+            <a:r>
+              <a:rPr lang="en-US" dirty="0"/>
+              <a:t>C function returns int16_t, but the assembly code puts the return in r0 as a 32-bit word, so that 16-bit value in r3 must be sign-extended to 32 bits before returning</a:t>
+            </a:r>
+          </a:p>
+          <a:p>
+            <a:pPr lvl="1"/>
+            <a:r>
+              <a:rPr lang="en-US" dirty="0"/>
+              <a:t>While r3 is 32 bits, the meaningful 16-bit result is in r3[15:0]</a:t>
+            </a:r>
+          </a:p>
+          <a:p>
+            <a:pPr lvl="1"/>
+            <a:r>
+              <a:rPr lang="en-US" dirty="0"/>
+              <a:t>r3[31:16] may contain carry-over bits and must be replaced by copies of the sign bit before returning. </a:t>
+            </a:r>
+          </a:p>
+          <a:p>
+            <a:pPr lvl="1"/>
+            <a:r>
+              <a:rPr lang="en-US" dirty="0"/>
+              <a:t>Casting an int32_t to int16_t keeps only the low 16 bits and produces 32-bit sign-extended result in r0 (e.g. with SXTH)</a:t>
             </a:r>
           </a:p>
         </p:txBody>
@@ -32630,7 +32458,12 @@
             <p:ph sz="quarter" idx="1"/>
           </p:nvPr>
         </p:nvSpPr>
-        <p:spPr/>
+        <p:spPr>
+          <a:xfrm>
+            <a:off x="457200" y="1219200"/>
+            <a:ext cx="8229600" cy="5334000"/>
+          </a:xfrm>
+        </p:spPr>
         <p:txBody>
           <a:bodyPr>
             <a:normAutofit fontScale="70000" lnSpcReduction="20000"/>
@@ -32754,7 +32587,13 @@
               <a:rPr lang="pt-BR" dirty="0"/>
               <a:t>SXTH  r0, r3   ; r0 = (int16_t) r3, sign-extend</a:t>
             </a:r>
-            <a:endParaRPr lang="en-US" dirty="0"/>
+          </a:p>
+          <a:p>
+            <a:pPr lvl="2"/>
+            <a:r>
+              <a:rPr lang="en-US" dirty="0"/>
+              <a:t>Take the low 16 bits of r3, sign-extend them to 32 bits, and store the result in r0.</a:t>
+            </a:r>
           </a:p>
         </p:txBody>
       </p:sp>
@@ -33462,6 +33301,957 @@
     <p:extLst>
       <p:ext uri="{BB962C8B-B14F-4D97-AF65-F5344CB8AC3E}">
         <p14:creationId xmlns:p14="http://schemas.microsoft.com/office/powerpoint/2010/main" val="3848203700"/>
+      </p:ext>
+    </p:extLst>
+  </p:cSld>
+  <p:clrMapOvr>
+    <a:masterClrMapping/>
+  </p:clrMapOvr>
+</p:sld>
+</file>
+
+<file path=ppt/slides/slide33.xml><?xml version="1.0" encoding="utf-8"?>
+<p:sld xmlns:a="http://schemas.openxmlformats.org/drawingml/2006/main" xmlns:r="http://schemas.openxmlformats.org/officeDocument/2006/relationships" xmlns:p="http://schemas.openxmlformats.org/presentationml/2006/main">
+  <p:cSld>
+    <p:spTree>
+      <p:nvGrpSpPr>
+        <p:cNvPr id="1" name=""/>
+        <p:cNvGrpSpPr/>
+        <p:nvPr/>
+      </p:nvGrpSpPr>
+      <p:grpSpPr>
+        <a:xfrm>
+          <a:off x="0" y="0"/>
+          <a:ext cx="0" cy="0"/>
+          <a:chOff x="0" y="0"/>
+          <a:chExt cx="0" cy="0"/>
+        </a:xfrm>
+      </p:grpSpPr>
+      <p:sp>
+        <p:nvSpPr>
+          <p:cNvPr id="2" name="Title 1">
+            <a:extLst>
+              <a:ext uri="{FF2B5EF4-FFF2-40B4-BE49-F238E27FC236}">
+                <a16:creationId xmlns:a16="http://schemas.microsoft.com/office/drawing/2014/main" id="{6234EC6E-B891-AF83-E66F-8217385C54F6}"/>
+              </a:ext>
+            </a:extLst>
+          </p:cNvPr>
+          <p:cNvSpPr>
+            <a:spLocks noGrp="1"/>
+          </p:cNvSpPr>
+          <p:nvPr>
+            <p:ph type="title"/>
+          </p:nvPr>
+        </p:nvSpPr>
+        <p:spPr/>
+        <p:txBody>
+          <a:bodyPr/>
+          <a:lstStyle/>
+          <a:p>
+            <a:r>
+              <a:rPr lang="en-US" dirty="0"/>
+              <a:t>Program Understanding</a:t>
+            </a:r>
+          </a:p>
+        </p:txBody>
+      </p:sp>
+      <p:sp>
+        <p:nvSpPr>
+          <p:cNvPr id="3" name="Slide Number Placeholder 2">
+            <a:extLst>
+              <a:ext uri="{FF2B5EF4-FFF2-40B4-BE49-F238E27FC236}">
+                <a16:creationId xmlns:a16="http://schemas.microsoft.com/office/drawing/2014/main" id="{5959EC02-DF33-1CB3-210F-7D09C20A83C0}"/>
+              </a:ext>
+            </a:extLst>
+          </p:cNvPr>
+          <p:cNvSpPr>
+            <a:spLocks noGrp="1"/>
+          </p:cNvSpPr>
+          <p:nvPr>
+            <p:ph type="sldNum" sz="quarter" idx="12"/>
+          </p:nvPr>
+        </p:nvSpPr>
+        <p:spPr/>
+        <p:txBody>
+          <a:bodyPr/>
+          <a:lstStyle/>
+          <a:p>
+            <a:fld id="{EA7C8D44-3667-46F6-9772-CC52308E2A7F}" type="slidenum">
+              <a:rPr kumimoji="0" lang="en-US" smtClean="0"/>
+              <a:pPr/>
+              <a:t>33</a:t>
+            </a:fld>
+            <a:endParaRPr kumimoji="0" lang="en-US" dirty="0"/>
+          </a:p>
+        </p:txBody>
+      </p:sp>
+      <p:sp>
+        <p:nvSpPr>
+          <p:cNvPr id="4" name="Content Placeholder 3">
+            <a:extLst>
+              <a:ext uri="{FF2B5EF4-FFF2-40B4-BE49-F238E27FC236}">
+                <a16:creationId xmlns:a16="http://schemas.microsoft.com/office/drawing/2014/main" id="{3DC23136-53FC-2BF5-8C7C-A3096D3761E3}"/>
+              </a:ext>
+            </a:extLst>
+          </p:cNvPr>
+          <p:cNvSpPr>
+            <a:spLocks noGrp="1"/>
+          </p:cNvSpPr>
+          <p:nvPr>
+            <p:ph sz="quarter" idx="1"/>
+          </p:nvPr>
+        </p:nvSpPr>
+        <p:spPr>
+          <a:xfrm>
+            <a:off x="457200" y="1219200"/>
+            <a:ext cx="8229600" cy="1066800"/>
+          </a:xfrm>
+        </p:spPr>
+        <p:txBody>
+          <a:bodyPr>
+            <a:normAutofit fontScale="70000" lnSpcReduction="20000"/>
+          </a:bodyPr>
+          <a:lstStyle/>
+          <a:p>
+            <a:r>
+              <a:rPr lang="en-US" dirty="0"/>
+              <a:t>Given the following code, fill in the blanks listed next to each instruction with the values that would be in each register or status bit after the instruction executes. Instruction addresses are given to the left of each assembly instruction (not part of the code).  Assume that SP = 0x10000200 at the start of the program.</a:t>
+            </a:r>
+          </a:p>
+        </p:txBody>
+      </p:sp>
+      <p:sp>
+        <p:nvSpPr>
+          <p:cNvPr id="5" name="TextBox 4">
+            <a:extLst>
+              <a:ext uri="{FF2B5EF4-FFF2-40B4-BE49-F238E27FC236}">
+                <a16:creationId xmlns:a16="http://schemas.microsoft.com/office/drawing/2014/main" id="{080C4AE5-B126-9162-362F-24C26D91D6E5}"/>
+              </a:ext>
+            </a:extLst>
+          </p:cNvPr>
+          <p:cNvSpPr txBox="1"/>
+          <p:nvPr/>
+        </p:nvSpPr>
+        <p:spPr>
+          <a:xfrm>
+            <a:off x="641001" y="2182128"/>
+            <a:ext cx="7927170" cy="4278094"/>
+          </a:xfrm>
+          <a:prstGeom prst="rect">
+            <a:avLst/>
+          </a:prstGeom>
+        </p:spPr>
+        <p:style>
+          <a:lnRef idx="2">
+            <a:schemeClr val="accent1"/>
+          </a:lnRef>
+          <a:fillRef idx="1">
+            <a:schemeClr val="lt1"/>
+          </a:fillRef>
+          <a:effectRef idx="0">
+            <a:schemeClr val="accent1"/>
+          </a:effectRef>
+          <a:fontRef idx="minor">
+            <a:schemeClr val="dk1"/>
+          </a:fontRef>
+        </p:style>
+        <p:txBody>
+          <a:bodyPr wrap="none" rtlCol="0">
+            <a:spAutoFit/>
+          </a:bodyPr>
+          <a:lstStyle/>
+          <a:p>
+            <a:r>
+              <a:rPr lang="en-US" sz="1600" dirty="0">
+                <a:latin typeface="Consolas" panose="020B0609020204030204" pitchFamily="49" charset="0"/>
+                <a:cs typeface="Consolas" panose="020B0609020204030204" pitchFamily="49" charset="0"/>
+              </a:rPr>
+              <a:t>          AREA </a:t>
+            </a:r>
+            <a:r>
+              <a:rPr lang="en-US" sz="1600" dirty="0" err="1">
+                <a:latin typeface="Consolas" panose="020B0609020204030204" pitchFamily="49" charset="0"/>
+                <a:cs typeface="Consolas" panose="020B0609020204030204" pitchFamily="49" charset="0"/>
+              </a:rPr>
+              <a:t>mycode</a:t>
+            </a:r>
+            <a:r>
+              <a:rPr lang="en-US" sz="1600" dirty="0">
+                <a:latin typeface="Consolas" panose="020B0609020204030204" pitchFamily="49" charset="0"/>
+                <a:cs typeface="Consolas" panose="020B0609020204030204" pitchFamily="49" charset="0"/>
+              </a:rPr>
+              <a:t>, CODE, READONLY</a:t>
+            </a:r>
+          </a:p>
+          <a:p>
+            <a:r>
+              <a:rPr lang="en-US" sz="1600" dirty="0">
+                <a:latin typeface="Consolas" panose="020B0609020204030204" pitchFamily="49" charset="0"/>
+                <a:cs typeface="Consolas" panose="020B0609020204030204" pitchFamily="49" charset="0"/>
+              </a:rPr>
+              <a:t>          EXPORT __main</a:t>
+            </a:r>
+          </a:p>
+          <a:p>
+            <a:r>
+              <a:rPr lang="en-US" sz="1600" dirty="0">
+                <a:latin typeface="Consolas" panose="020B0609020204030204" pitchFamily="49" charset="0"/>
+                <a:cs typeface="Consolas" panose="020B0609020204030204" pitchFamily="49" charset="0"/>
+              </a:rPr>
+              <a:t>__main    PROC</a:t>
+            </a:r>
+          </a:p>
+          <a:p>
+            <a:r>
+              <a:rPr lang="en-US" sz="1600" dirty="0">
+                <a:latin typeface="Consolas" panose="020B0609020204030204" pitchFamily="49" charset="0"/>
+                <a:cs typeface="Consolas" panose="020B0609020204030204" pitchFamily="49" charset="0"/>
+              </a:rPr>
+              <a:t>0x250     MOV R0, #5</a:t>
+            </a:r>
+          </a:p>
+          <a:p>
+            <a:r>
+              <a:rPr lang="en-US" sz="1600" dirty="0">
+                <a:latin typeface="Consolas" panose="020B0609020204030204" pitchFamily="49" charset="0"/>
+                <a:cs typeface="Consolas" panose="020B0609020204030204" pitchFamily="49" charset="0"/>
+              </a:rPr>
+              <a:t>0x254     MOV R1, #10</a:t>
+            </a:r>
+          </a:p>
+          <a:p>
+            <a:r>
+              <a:rPr lang="en-US" sz="1600" dirty="0">
+                <a:latin typeface="Consolas" panose="020B0609020204030204" pitchFamily="49" charset="0"/>
+                <a:cs typeface="Consolas" panose="020B0609020204030204" pitchFamily="49" charset="0"/>
+              </a:rPr>
+              <a:t>0x258     CMP R0, R1           ; NZCV = ____________</a:t>
+            </a:r>
+          </a:p>
+          <a:p>
+            <a:r>
+              <a:rPr lang="en-US" sz="1600" dirty="0">
+                <a:latin typeface="Consolas" panose="020B0609020204030204" pitchFamily="49" charset="0"/>
+                <a:cs typeface="Consolas" panose="020B0609020204030204" pitchFamily="49" charset="0"/>
+              </a:rPr>
+              <a:t>0x25A     BGE loop             ; PC = ____________</a:t>
+            </a:r>
+          </a:p>
+          <a:p>
+            <a:r>
+              <a:rPr lang="en-US" sz="1600" dirty="0">
+                <a:latin typeface="Consolas" panose="020B0609020204030204" pitchFamily="49" charset="0"/>
+                <a:cs typeface="Consolas" panose="020B0609020204030204" pitchFamily="49" charset="0"/>
+              </a:rPr>
+              <a:t>0x25C     BL foo               ; LR = ____________, PC = ____________</a:t>
+            </a:r>
+          </a:p>
+          <a:p>
+            <a:r>
+              <a:rPr lang="en-US" sz="1600" dirty="0">
+                <a:latin typeface="Consolas" panose="020B0609020204030204" pitchFamily="49" charset="0"/>
+                <a:cs typeface="Consolas" panose="020B0609020204030204" pitchFamily="49" charset="0"/>
+              </a:rPr>
+              <a:t>0x260 loop B loop</a:t>
+            </a:r>
+          </a:p>
+          <a:p>
+            <a:r>
+              <a:rPr lang="en-US" sz="1600" dirty="0">
+                <a:latin typeface="Consolas" panose="020B0609020204030204" pitchFamily="49" charset="0"/>
+                <a:cs typeface="Consolas" panose="020B0609020204030204" pitchFamily="49" charset="0"/>
+              </a:rPr>
+              <a:t>          ENDP</a:t>
+            </a:r>
+          </a:p>
+          <a:p>
+            <a:endParaRPr lang="en-US" sz="1600" dirty="0">
+              <a:latin typeface="Consolas" panose="020B0609020204030204" pitchFamily="49" charset="0"/>
+              <a:cs typeface="Consolas" panose="020B0609020204030204" pitchFamily="49" charset="0"/>
+            </a:endParaRPr>
+          </a:p>
+          <a:p>
+            <a:r>
+              <a:rPr lang="en-US" sz="1600" dirty="0">
+                <a:latin typeface="Consolas" panose="020B0609020204030204" pitchFamily="49" charset="0"/>
+                <a:cs typeface="Consolas" panose="020B0609020204030204" pitchFamily="49" charset="0"/>
+              </a:rPr>
+              <a:t>foo       PROC</a:t>
+            </a:r>
+          </a:p>
+          <a:p>
+            <a:r>
+              <a:rPr lang="en-US" sz="1600" dirty="0">
+                <a:latin typeface="Consolas" panose="020B0609020204030204" pitchFamily="49" charset="0"/>
+                <a:cs typeface="Consolas" panose="020B0609020204030204" pitchFamily="49" charset="0"/>
+              </a:rPr>
+              <a:t>0x262     PUSH{R0, R1}         ; SP = ____________</a:t>
+            </a:r>
+          </a:p>
+          <a:p>
+            <a:r>
+              <a:rPr lang="en-US" sz="1600" dirty="0">
+                <a:latin typeface="Consolas" panose="020B0609020204030204" pitchFamily="49" charset="0"/>
+                <a:cs typeface="Consolas" panose="020B0609020204030204" pitchFamily="49" charset="0"/>
+              </a:rPr>
+              <a:t>0x264     POP{R1}</a:t>
+            </a:r>
+          </a:p>
+          <a:p>
+            <a:r>
+              <a:rPr lang="en-US" sz="1600" dirty="0">
+                <a:latin typeface="Consolas" panose="020B0609020204030204" pitchFamily="49" charset="0"/>
+                <a:cs typeface="Consolas" panose="020B0609020204030204" pitchFamily="49" charset="0"/>
+              </a:rPr>
+              <a:t>0x266     POP{R0}              ; R0 = __________, SP = ____________</a:t>
+            </a:r>
+          </a:p>
+          <a:p>
+            <a:r>
+              <a:rPr lang="en-US" sz="1600" dirty="0">
+                <a:latin typeface="Consolas" panose="020B0609020204030204" pitchFamily="49" charset="0"/>
+                <a:cs typeface="Consolas" panose="020B0609020204030204" pitchFamily="49" charset="0"/>
+              </a:rPr>
+              <a:t>0x268     BX LR                ; LR = ___________, PC = ____________</a:t>
+            </a:r>
+          </a:p>
+          <a:p>
+            <a:r>
+              <a:rPr lang="en-US" sz="1600" dirty="0">
+                <a:latin typeface="Consolas" panose="020B0609020204030204" pitchFamily="49" charset="0"/>
+                <a:cs typeface="Consolas" panose="020B0609020204030204" pitchFamily="49" charset="0"/>
+              </a:rPr>
+              <a:t>          ENDP</a:t>
+            </a:r>
+          </a:p>
+        </p:txBody>
+      </p:sp>
+    </p:spTree>
+    <p:extLst>
+      <p:ext uri="{BB962C8B-B14F-4D97-AF65-F5344CB8AC3E}">
+        <p14:creationId xmlns:p14="http://schemas.microsoft.com/office/powerpoint/2010/main" val="1762553256"/>
+      </p:ext>
+    </p:extLst>
+  </p:cSld>
+  <p:clrMapOvr>
+    <a:masterClrMapping/>
+  </p:clrMapOvr>
+</p:sld>
+</file>
+
+<file path=ppt/slides/slide34.xml><?xml version="1.0" encoding="utf-8"?>
+<p:sld xmlns:a="http://schemas.openxmlformats.org/drawingml/2006/main" xmlns:r="http://schemas.openxmlformats.org/officeDocument/2006/relationships" xmlns:p="http://schemas.openxmlformats.org/presentationml/2006/main">
+  <p:cSld>
+    <p:spTree>
+      <p:nvGrpSpPr>
+        <p:cNvPr id="1" name="">
+          <a:extLst>
+            <a:ext uri="{FF2B5EF4-FFF2-40B4-BE49-F238E27FC236}">
+              <a16:creationId xmlns:a16="http://schemas.microsoft.com/office/drawing/2014/main" id="{FC0EE055-2D92-9967-6D5A-5CAE67FAA979}"/>
+            </a:ext>
+          </a:extLst>
+        </p:cNvPr>
+        <p:cNvGrpSpPr/>
+        <p:nvPr/>
+      </p:nvGrpSpPr>
+      <p:grpSpPr>
+        <a:xfrm>
+          <a:off x="0" y="0"/>
+          <a:ext cx="0" cy="0"/>
+          <a:chOff x="0" y="0"/>
+          <a:chExt cx="0" cy="0"/>
+        </a:xfrm>
+      </p:grpSpPr>
+      <p:sp>
+        <p:nvSpPr>
+          <p:cNvPr id="2" name="Title 1">
+            <a:extLst>
+              <a:ext uri="{FF2B5EF4-FFF2-40B4-BE49-F238E27FC236}">
+                <a16:creationId xmlns:a16="http://schemas.microsoft.com/office/drawing/2014/main" id="{BBCA5A9E-A770-8E75-1A17-1AA527EAD98D}"/>
+              </a:ext>
+            </a:extLst>
+          </p:cNvPr>
+          <p:cNvSpPr>
+            <a:spLocks noGrp="1"/>
+          </p:cNvSpPr>
+          <p:nvPr>
+            <p:ph type="title"/>
+          </p:nvPr>
+        </p:nvSpPr>
+        <p:spPr/>
+        <p:txBody>
+          <a:bodyPr/>
+          <a:lstStyle/>
+          <a:p>
+            <a:r>
+              <a:rPr lang="en-US" dirty="0"/>
+              <a:t>Program Understanding ANS</a:t>
+            </a:r>
+          </a:p>
+        </p:txBody>
+      </p:sp>
+      <p:sp>
+        <p:nvSpPr>
+          <p:cNvPr id="3" name="Slide Number Placeholder 2">
+            <a:extLst>
+              <a:ext uri="{FF2B5EF4-FFF2-40B4-BE49-F238E27FC236}">
+                <a16:creationId xmlns:a16="http://schemas.microsoft.com/office/drawing/2014/main" id="{E6EB26F8-63B8-7FD8-7173-F712D1EEF322}"/>
+              </a:ext>
+            </a:extLst>
+          </p:cNvPr>
+          <p:cNvSpPr>
+            <a:spLocks noGrp="1"/>
+          </p:cNvSpPr>
+          <p:nvPr>
+            <p:ph type="sldNum" sz="quarter" idx="12"/>
+          </p:nvPr>
+        </p:nvSpPr>
+        <p:spPr/>
+        <p:txBody>
+          <a:bodyPr/>
+          <a:lstStyle/>
+          <a:p>
+            <a:fld id="{EA7C8D44-3667-46F6-9772-CC52308E2A7F}" type="slidenum">
+              <a:rPr kumimoji="0" lang="en-US" smtClean="0"/>
+              <a:pPr/>
+              <a:t>34</a:t>
+            </a:fld>
+            <a:endParaRPr kumimoji="0" lang="en-US" dirty="0"/>
+          </a:p>
+        </p:txBody>
+      </p:sp>
+      <p:sp>
+        <p:nvSpPr>
+          <p:cNvPr id="4" name="Content Placeholder 3">
+            <a:extLst>
+              <a:ext uri="{FF2B5EF4-FFF2-40B4-BE49-F238E27FC236}">
+                <a16:creationId xmlns:a16="http://schemas.microsoft.com/office/drawing/2014/main" id="{6887EA07-332E-3EE5-6B34-92FAAEF7BA60}"/>
+              </a:ext>
+            </a:extLst>
+          </p:cNvPr>
+          <p:cNvSpPr>
+            <a:spLocks noGrp="1"/>
+          </p:cNvSpPr>
+          <p:nvPr>
+            <p:ph sz="quarter" idx="1"/>
+          </p:nvPr>
+        </p:nvSpPr>
+        <p:spPr>
+          <a:xfrm>
+            <a:off x="457200" y="1219200"/>
+            <a:ext cx="8229600" cy="1066800"/>
+          </a:xfrm>
+        </p:spPr>
+        <p:txBody>
+          <a:bodyPr>
+            <a:normAutofit fontScale="70000" lnSpcReduction="20000"/>
+          </a:bodyPr>
+          <a:lstStyle/>
+          <a:p>
+            <a:r>
+              <a:rPr lang="en-US" dirty="0"/>
+              <a:t>Given the following code, fill in the blanks listed next to each instruction with the values that would be in each register or status bit after the instruction executes. Instruction addresses are given to the left of each assembly instruction (not part of the code).  Assume that SP = 0x10000200 at the start of the program.</a:t>
+            </a:r>
+          </a:p>
+        </p:txBody>
+      </p:sp>
+      <p:sp>
+        <p:nvSpPr>
+          <p:cNvPr id="5" name="TextBox 4">
+            <a:extLst>
+              <a:ext uri="{FF2B5EF4-FFF2-40B4-BE49-F238E27FC236}">
+                <a16:creationId xmlns:a16="http://schemas.microsoft.com/office/drawing/2014/main" id="{667005E6-B78A-DE6F-E3EA-2180A0B55757}"/>
+              </a:ext>
+            </a:extLst>
+          </p:cNvPr>
+          <p:cNvSpPr txBox="1"/>
+          <p:nvPr/>
+        </p:nvSpPr>
+        <p:spPr>
+          <a:xfrm>
+            <a:off x="304800" y="2078256"/>
+            <a:ext cx="8534400" cy="4278094"/>
+          </a:xfrm>
+          <a:prstGeom prst="rect">
+            <a:avLst/>
+          </a:prstGeom>
+        </p:spPr>
+        <p:style>
+          <a:lnRef idx="2">
+            <a:schemeClr val="accent1"/>
+          </a:lnRef>
+          <a:fillRef idx="1">
+            <a:schemeClr val="lt1"/>
+          </a:fillRef>
+          <a:effectRef idx="0">
+            <a:schemeClr val="accent1"/>
+          </a:effectRef>
+          <a:fontRef idx="minor">
+            <a:schemeClr val="dk1"/>
+          </a:fontRef>
+        </p:style>
+        <p:txBody>
+          <a:bodyPr wrap="square" rtlCol="0">
+            <a:spAutoFit/>
+          </a:bodyPr>
+          <a:lstStyle/>
+          <a:p>
+            <a:r>
+              <a:rPr lang="en-US" sz="1600" dirty="0">
+                <a:latin typeface="Consolas" panose="020B0609020204030204" pitchFamily="49" charset="0"/>
+                <a:cs typeface="Consolas" panose="020B0609020204030204" pitchFamily="49" charset="0"/>
+              </a:rPr>
+              <a:t>          AREA </a:t>
+            </a:r>
+            <a:r>
+              <a:rPr lang="en-US" sz="1600" dirty="0" err="1">
+                <a:latin typeface="Consolas" panose="020B0609020204030204" pitchFamily="49" charset="0"/>
+                <a:cs typeface="Consolas" panose="020B0609020204030204" pitchFamily="49" charset="0"/>
+              </a:rPr>
+              <a:t>mycode</a:t>
+            </a:r>
+            <a:r>
+              <a:rPr lang="en-US" sz="1600" dirty="0">
+                <a:latin typeface="Consolas" panose="020B0609020204030204" pitchFamily="49" charset="0"/>
+                <a:cs typeface="Consolas" panose="020B0609020204030204" pitchFamily="49" charset="0"/>
+              </a:rPr>
+              <a:t>, CODE, READONLY</a:t>
+            </a:r>
+          </a:p>
+          <a:p>
+            <a:r>
+              <a:rPr lang="en-US" sz="1600" dirty="0">
+                <a:latin typeface="Consolas" panose="020B0609020204030204" pitchFamily="49" charset="0"/>
+                <a:cs typeface="Consolas" panose="020B0609020204030204" pitchFamily="49" charset="0"/>
+              </a:rPr>
+              <a:t>          EXPORT __main</a:t>
+            </a:r>
+          </a:p>
+          <a:p>
+            <a:r>
+              <a:rPr lang="en-US" sz="1600" dirty="0">
+                <a:latin typeface="Consolas" panose="020B0609020204030204" pitchFamily="49" charset="0"/>
+                <a:cs typeface="Consolas" panose="020B0609020204030204" pitchFamily="49" charset="0"/>
+              </a:rPr>
+              <a:t>__main    PROC</a:t>
+            </a:r>
+          </a:p>
+          <a:p>
+            <a:r>
+              <a:rPr lang="en-US" sz="1600" dirty="0">
+                <a:latin typeface="Consolas" panose="020B0609020204030204" pitchFamily="49" charset="0"/>
+                <a:cs typeface="Consolas" panose="020B0609020204030204" pitchFamily="49" charset="0"/>
+              </a:rPr>
+              <a:t>0x250     MOV R0, #5</a:t>
+            </a:r>
+          </a:p>
+          <a:p>
+            <a:r>
+              <a:rPr lang="en-US" sz="1600" dirty="0">
+                <a:latin typeface="Consolas" panose="020B0609020204030204" pitchFamily="49" charset="0"/>
+                <a:cs typeface="Consolas" panose="020B0609020204030204" pitchFamily="49" charset="0"/>
+              </a:rPr>
+              <a:t>0x254     MOV R1, #10</a:t>
+            </a:r>
+          </a:p>
+          <a:p>
+            <a:r>
+              <a:rPr lang="en-US" sz="1600" dirty="0">
+                <a:latin typeface="Consolas" panose="020B0609020204030204" pitchFamily="49" charset="0"/>
+                <a:cs typeface="Consolas" panose="020B0609020204030204" pitchFamily="49" charset="0"/>
+              </a:rPr>
+              <a:t>0x258     CMP R0, R1           ; NZCV = 1000</a:t>
+            </a:r>
+          </a:p>
+          <a:p>
+            <a:r>
+              <a:rPr lang="en-US" sz="1600" dirty="0">
+                <a:latin typeface="Consolas" panose="020B0609020204030204" pitchFamily="49" charset="0"/>
+                <a:cs typeface="Consolas" panose="020B0609020204030204" pitchFamily="49" charset="0"/>
+              </a:rPr>
+              <a:t>0x25A     BGE loop             ; PC = 0x25C (after this instruction)</a:t>
+            </a:r>
+          </a:p>
+          <a:p>
+            <a:r>
+              <a:rPr lang="en-US" sz="1600" dirty="0">
+                <a:latin typeface="Consolas" panose="020B0609020204030204" pitchFamily="49" charset="0"/>
+                <a:cs typeface="Consolas" panose="020B0609020204030204" pitchFamily="49" charset="0"/>
+              </a:rPr>
+              <a:t>0x25C     BL foo               ; LR = 0x260, PC = 0x262 (after this inst.)</a:t>
+            </a:r>
+          </a:p>
+          <a:p>
+            <a:r>
+              <a:rPr lang="en-US" sz="1600" dirty="0">
+                <a:latin typeface="Consolas" panose="020B0609020204030204" pitchFamily="49" charset="0"/>
+                <a:cs typeface="Consolas" panose="020B0609020204030204" pitchFamily="49" charset="0"/>
+              </a:rPr>
+              <a:t>0x260 loop B loop</a:t>
+            </a:r>
+          </a:p>
+          <a:p>
+            <a:r>
+              <a:rPr lang="en-US" sz="1600" dirty="0">
+                <a:latin typeface="Consolas" panose="020B0609020204030204" pitchFamily="49" charset="0"/>
+                <a:cs typeface="Consolas" panose="020B0609020204030204" pitchFamily="49" charset="0"/>
+              </a:rPr>
+              <a:t>          ENDP</a:t>
+            </a:r>
+          </a:p>
+          <a:p>
+            <a:endParaRPr lang="en-US" sz="1600" dirty="0">
+              <a:latin typeface="Consolas" panose="020B0609020204030204" pitchFamily="49" charset="0"/>
+              <a:cs typeface="Consolas" panose="020B0609020204030204" pitchFamily="49" charset="0"/>
+            </a:endParaRPr>
+          </a:p>
+          <a:p>
+            <a:r>
+              <a:rPr lang="en-US" sz="1600" dirty="0">
+                <a:latin typeface="Consolas" panose="020B0609020204030204" pitchFamily="49" charset="0"/>
+                <a:cs typeface="Consolas" panose="020B0609020204030204" pitchFamily="49" charset="0"/>
+              </a:rPr>
+              <a:t>foo       PROC</a:t>
+            </a:r>
+          </a:p>
+          <a:p>
+            <a:r>
+              <a:rPr lang="en-US" sz="1600" dirty="0">
+                <a:latin typeface="Consolas" panose="020B0609020204030204" pitchFamily="49" charset="0"/>
+                <a:cs typeface="Consolas" panose="020B0609020204030204" pitchFamily="49" charset="0"/>
+              </a:rPr>
+              <a:t>0x262     PUSH{R0, R1}         ; SP = </a:t>
+            </a:r>
+            <a:r>
+              <a:rPr lang="en-US" sz="1600" dirty="0"/>
+              <a:t>0x100001F8</a:t>
+            </a:r>
+            <a:endParaRPr lang="en-US" sz="1600" dirty="0">
+              <a:latin typeface="Consolas" panose="020B0609020204030204" pitchFamily="49" charset="0"/>
+              <a:cs typeface="Consolas" panose="020B0609020204030204" pitchFamily="49" charset="0"/>
+            </a:endParaRPr>
+          </a:p>
+          <a:p>
+            <a:r>
+              <a:rPr lang="en-US" sz="1600" dirty="0">
+                <a:latin typeface="Consolas" panose="020B0609020204030204" pitchFamily="49" charset="0"/>
+                <a:cs typeface="Consolas" panose="020B0609020204030204" pitchFamily="49" charset="0"/>
+              </a:rPr>
+              <a:t>0x264     POP{R1}              ; R1 = 5</a:t>
+            </a:r>
+          </a:p>
+          <a:p>
+            <a:r>
+              <a:rPr lang="en-US" sz="1600" dirty="0">
+                <a:latin typeface="Consolas" panose="020B0609020204030204" pitchFamily="49" charset="0"/>
+                <a:cs typeface="Consolas" panose="020B0609020204030204" pitchFamily="49" charset="0"/>
+              </a:rPr>
+              <a:t>0x266     POP{R0}              ; R0 = 10, SP = </a:t>
+            </a:r>
+            <a:r>
+              <a:rPr lang="en-US" sz="1600" dirty="0"/>
+              <a:t>0x10000200</a:t>
+            </a:r>
+            <a:endParaRPr lang="en-US" sz="1600" dirty="0">
+              <a:latin typeface="Consolas" panose="020B0609020204030204" pitchFamily="49" charset="0"/>
+              <a:cs typeface="Consolas" panose="020B0609020204030204" pitchFamily="49" charset="0"/>
+            </a:endParaRPr>
+          </a:p>
+          <a:p>
+            <a:r>
+              <a:rPr lang="en-US" sz="1600" dirty="0">
+                <a:latin typeface="Consolas" panose="020B0609020204030204" pitchFamily="49" charset="0"/>
+                <a:cs typeface="Consolas" panose="020B0609020204030204" pitchFamily="49" charset="0"/>
+              </a:rPr>
+              <a:t>0x268     BX LR                ; LR = 0x260, PC = 0x260 (after this inst.)</a:t>
+            </a:r>
+          </a:p>
+          <a:p>
+            <a:r>
+              <a:rPr lang="en-US" sz="1600" dirty="0">
+                <a:latin typeface="Consolas" panose="020B0609020204030204" pitchFamily="49" charset="0"/>
+                <a:cs typeface="Consolas" panose="020B0609020204030204" pitchFamily="49" charset="0"/>
+              </a:rPr>
+              <a:t>          ENDP</a:t>
+            </a:r>
+          </a:p>
+        </p:txBody>
+      </p:sp>
+    </p:spTree>
+    <p:extLst>
+      <p:ext uri="{BB962C8B-B14F-4D97-AF65-F5344CB8AC3E}">
+        <p14:creationId xmlns:p14="http://schemas.microsoft.com/office/powerpoint/2010/main" val="4286255382"/>
+      </p:ext>
+    </p:extLst>
+  </p:cSld>
+  <p:clrMapOvr>
+    <a:masterClrMapping/>
+  </p:clrMapOvr>
+</p:sld>
+</file>
+
+<file path=ppt/slides/slide35.xml><?xml version="1.0" encoding="utf-8"?>
+<p:sld xmlns:a="http://schemas.openxmlformats.org/drawingml/2006/main" xmlns:r="http://schemas.openxmlformats.org/officeDocument/2006/relationships" xmlns:p="http://schemas.openxmlformats.org/presentationml/2006/main">
+  <p:cSld>
+    <p:spTree>
+      <p:nvGrpSpPr>
+        <p:cNvPr id="1" name=""/>
+        <p:cNvGrpSpPr/>
+        <p:nvPr/>
+      </p:nvGrpSpPr>
+      <p:grpSpPr>
+        <a:xfrm>
+          <a:off x="0" y="0"/>
+          <a:ext cx="0" cy="0"/>
+          <a:chOff x="0" y="0"/>
+          <a:chExt cx="0" cy="0"/>
+        </a:xfrm>
+      </p:grpSpPr>
+      <p:sp>
+        <p:nvSpPr>
+          <p:cNvPr id="2" name="Title 1">
+            <a:extLst>
+              <a:ext uri="{FF2B5EF4-FFF2-40B4-BE49-F238E27FC236}">
+                <a16:creationId xmlns:a16="http://schemas.microsoft.com/office/drawing/2014/main" id="{66BC4FE6-4AA6-4480-9C1A-B149B1641A6D}"/>
+              </a:ext>
+            </a:extLst>
+          </p:cNvPr>
+          <p:cNvSpPr>
+            <a:spLocks noGrp="1"/>
+          </p:cNvSpPr>
+          <p:nvPr>
+            <p:ph type="title"/>
+          </p:nvPr>
+        </p:nvSpPr>
+        <p:spPr/>
+        <p:txBody>
+          <a:bodyPr/>
+          <a:lstStyle/>
+          <a:p>
+            <a:r>
+              <a:rPr lang="en-US" dirty="0"/>
+              <a:t>Detailed Explanations</a:t>
+            </a:r>
+          </a:p>
+        </p:txBody>
+      </p:sp>
+      <p:sp>
+        <p:nvSpPr>
+          <p:cNvPr id="3" name="Slide Number Placeholder 2">
+            <a:extLst>
+              <a:ext uri="{FF2B5EF4-FFF2-40B4-BE49-F238E27FC236}">
+                <a16:creationId xmlns:a16="http://schemas.microsoft.com/office/drawing/2014/main" id="{BD64E820-1675-B2B0-054F-FAA01CAC05B1}"/>
+              </a:ext>
+            </a:extLst>
+          </p:cNvPr>
+          <p:cNvSpPr>
+            <a:spLocks noGrp="1"/>
+          </p:cNvSpPr>
+          <p:nvPr>
+            <p:ph type="sldNum" sz="quarter" idx="12"/>
+          </p:nvPr>
+        </p:nvSpPr>
+        <p:spPr/>
+        <p:txBody>
+          <a:bodyPr/>
+          <a:lstStyle/>
+          <a:p>
+            <a:fld id="{EA7C8D44-3667-46F6-9772-CC52308E2A7F}" type="slidenum">
+              <a:rPr kumimoji="0" lang="en-US" smtClean="0"/>
+              <a:pPr/>
+              <a:t>35</a:t>
+            </a:fld>
+            <a:endParaRPr kumimoji="0" lang="en-US" dirty="0"/>
+          </a:p>
+        </p:txBody>
+      </p:sp>
+      <p:sp>
+        <p:nvSpPr>
+          <p:cNvPr id="4" name="Content Placeholder 3">
+            <a:extLst>
+              <a:ext uri="{FF2B5EF4-FFF2-40B4-BE49-F238E27FC236}">
+                <a16:creationId xmlns:a16="http://schemas.microsoft.com/office/drawing/2014/main" id="{0D3349F2-AD23-9931-E5C9-567BF200C2ED}"/>
+              </a:ext>
+            </a:extLst>
+          </p:cNvPr>
+          <p:cNvSpPr>
+            <a:spLocks noGrp="1"/>
+          </p:cNvSpPr>
+          <p:nvPr>
+            <p:ph sz="quarter" idx="1"/>
+          </p:nvPr>
+        </p:nvSpPr>
+        <p:spPr>
+          <a:xfrm>
+            <a:off x="457200" y="1143000"/>
+            <a:ext cx="8229600" cy="5334000"/>
+          </a:xfrm>
+        </p:spPr>
+        <p:txBody>
+          <a:bodyPr>
+            <a:normAutofit fontScale="55000" lnSpcReduction="20000"/>
+          </a:bodyPr>
+          <a:lstStyle/>
+          <a:p>
+            <a:r>
+              <a:rPr lang="en-US" dirty="0"/>
+              <a:t>1. CMP R0, R1 (0x858/0x258)</a:t>
+            </a:r>
+          </a:p>
+          <a:p>
+            <a:pPr lvl="1"/>
+            <a:r>
+              <a:rPr lang="en-US" dirty="0"/>
+              <a:t>Performs: 8 - 10</a:t>
+            </a:r>
+          </a:p>
+          <a:p>
+            <a:pPr lvl="1"/>
+            <a:r>
+              <a:rPr lang="en-US" dirty="0"/>
+              <a:t>NZCV = 1000 (Negative=1, Zero=0, Carry=0, Overflow=0)</a:t>
+            </a:r>
+          </a:p>
+          <a:p>
+            <a:r>
+              <a:rPr lang="en-US" dirty="0"/>
+              <a:t>2. BGE loop (0x25A)</a:t>
+            </a:r>
+          </a:p>
+          <a:p>
+            <a:pPr lvl="1"/>
+            <a:r>
+              <a:rPr lang="en-US" dirty="0"/>
+              <a:t>BGE checks if N == V (Greater or Equal in signed comparison)</a:t>
+            </a:r>
+          </a:p>
+          <a:p>
+            <a:pPr lvl="1"/>
+            <a:r>
+              <a:rPr lang="en-US" dirty="0"/>
+              <a:t>Since N=1 and V=0, condition is FALSE</a:t>
+            </a:r>
+          </a:p>
+          <a:p>
+            <a:r>
+              <a:rPr lang="en-US" dirty="0"/>
+              <a:t>Branch NOT taken, continues to next instruction</a:t>
+            </a:r>
+          </a:p>
+          <a:p>
+            <a:pPr lvl="1"/>
+            <a:r>
+              <a:rPr lang="en-US" dirty="0"/>
+              <a:t>PC = 0x25C</a:t>
+            </a:r>
+          </a:p>
+          <a:p>
+            <a:r>
+              <a:rPr lang="en-US" dirty="0"/>
+              <a:t>3. BL foo (0x25C)</a:t>
+            </a:r>
+          </a:p>
+          <a:p>
+            <a:pPr lvl="1"/>
+            <a:r>
+              <a:rPr lang="en-US" dirty="0"/>
+              <a:t>Saves return address in LR and branches to foo</a:t>
+            </a:r>
+          </a:p>
+          <a:p>
+            <a:pPr lvl="1"/>
+            <a:r>
+              <a:rPr lang="en-US" dirty="0"/>
+              <a:t>LR = 0x260 (next instruction after BL)</a:t>
+            </a:r>
+          </a:p>
+          <a:p>
+            <a:pPr lvl="1"/>
+            <a:r>
+              <a:rPr lang="en-US" dirty="0"/>
+              <a:t>PC = 0x262 (address of foo)</a:t>
+            </a:r>
+          </a:p>
+          <a:p>
+            <a:r>
+              <a:rPr lang="en-US" dirty="0"/>
+              <a:t>4. PUSH {R0, R1} (0x262)</a:t>
+            </a:r>
+          </a:p>
+          <a:p>
+            <a:pPr lvl="1"/>
+            <a:r>
+              <a:rPr lang="en-US" dirty="0"/>
+              <a:t>Stack is descending and full, so SP decrements by 8 bytes (2 registers × 4 bytes)</a:t>
+            </a:r>
+          </a:p>
+          <a:p>
+            <a:pPr lvl="1"/>
+            <a:r>
+              <a:rPr lang="en-US" dirty="0"/>
+              <a:t>SP = 0x10000200 - 8 = 0x100001F8</a:t>
+            </a:r>
+          </a:p>
+          <a:p>
+            <a:r>
+              <a:rPr lang="en-US" dirty="0"/>
+              <a:t>5. POP {R0} (0x266)</a:t>
+            </a:r>
+          </a:p>
+          <a:p>
+            <a:pPr lvl="1"/>
+            <a:r>
+              <a:rPr lang="en-US" dirty="0"/>
+              <a:t>After popping both registers, R0 and R1 are swapped</a:t>
+            </a:r>
+          </a:p>
+          <a:p>
+            <a:pPr lvl="1"/>
+            <a:r>
+              <a:rPr lang="en-US" dirty="0"/>
+              <a:t>R0 = 10 (original R1 value)</a:t>
+            </a:r>
+          </a:p>
+          <a:p>
+            <a:pPr lvl="1"/>
+            <a:r>
+              <a:rPr lang="en-US" dirty="0"/>
+              <a:t>SP = 0x10000200 (back to original)</a:t>
+            </a:r>
+          </a:p>
+          <a:p>
+            <a:r>
+              <a:rPr lang="en-US" dirty="0"/>
+              <a:t>6. BX LR (0x268)</a:t>
+            </a:r>
+          </a:p>
+          <a:p>
+            <a:pPr lvl="1"/>
+            <a:r>
+              <a:rPr lang="en-US" dirty="0"/>
+              <a:t>Returns to address stored in LR</a:t>
+            </a:r>
+          </a:p>
+          <a:p>
+            <a:pPr lvl="1"/>
+            <a:r>
+              <a:rPr lang="en-US" dirty="0"/>
+              <a:t>LR = 0x260 (unchanged)</a:t>
+            </a:r>
+          </a:p>
+          <a:p>
+            <a:pPr lvl="1"/>
+            <a:r>
+              <a:rPr lang="en-US" dirty="0"/>
+              <a:t>PC = 0x260 (returns to caller)</a:t>
+            </a:r>
+          </a:p>
+        </p:txBody>
+      </p:sp>
+    </p:spTree>
+    <p:extLst>
+      <p:ext uri="{BB962C8B-B14F-4D97-AF65-F5344CB8AC3E}">
+        <p14:creationId xmlns:p14="http://schemas.microsoft.com/office/powerpoint/2010/main" val="1599510770"/>
       </p:ext>
     </p:extLst>
   </p:cSld>

--- a/PPTs/Ch8_ARM_Subroutines_Exercises ANS.pptx
+++ b/PPTs/Ch8_ARM_Subroutines_Exercises ANS.pptx
@@ -6,10 +6,10 @@
     <p:sldMasterId id="2147483673" r:id="rId2"/>
   </p:sldMasterIdLst>
   <p:notesMasterIdLst>
-    <p:notesMasterId r:id="rId38"/>
+    <p:notesMasterId r:id="rId39"/>
   </p:notesMasterIdLst>
   <p:handoutMasterIdLst>
-    <p:handoutMasterId r:id="rId39"/>
+    <p:handoutMasterId r:id="rId40"/>
   </p:handoutMasterIdLst>
   <p:sldIdLst>
     <p:sldId id="256" r:id="rId3"/>
@@ -32,21 +32,22 @@
     <p:sldId id="369" r:id="rId20"/>
     <p:sldId id="257" r:id="rId21"/>
     <p:sldId id="258" r:id="rId22"/>
-    <p:sldId id="281" r:id="rId23"/>
-    <p:sldId id="282" r:id="rId24"/>
-    <p:sldId id="283" r:id="rId25"/>
-    <p:sldId id="286" r:id="rId26"/>
-    <p:sldId id="353" r:id="rId27"/>
-    <p:sldId id="354" r:id="rId28"/>
-    <p:sldId id="757" r:id="rId29"/>
-    <p:sldId id="751" r:id="rId30"/>
-    <p:sldId id="752" r:id="rId31"/>
-    <p:sldId id="756" r:id="rId32"/>
-    <p:sldId id="763" r:id="rId33"/>
-    <p:sldId id="764" r:id="rId34"/>
-    <p:sldId id="818" r:id="rId35"/>
-    <p:sldId id="819" r:id="rId36"/>
-    <p:sldId id="820" r:id="rId37"/>
+    <p:sldId id="763" r:id="rId23"/>
+    <p:sldId id="764" r:id="rId24"/>
+    <p:sldId id="281" r:id="rId25"/>
+    <p:sldId id="282" r:id="rId26"/>
+    <p:sldId id="821" r:id="rId27"/>
+    <p:sldId id="283" r:id="rId28"/>
+    <p:sldId id="286" r:id="rId29"/>
+    <p:sldId id="353" r:id="rId30"/>
+    <p:sldId id="354" r:id="rId31"/>
+    <p:sldId id="757" r:id="rId32"/>
+    <p:sldId id="751" r:id="rId33"/>
+    <p:sldId id="752" r:id="rId34"/>
+    <p:sldId id="756" r:id="rId35"/>
+    <p:sldId id="818" r:id="rId36"/>
+    <p:sldId id="819" r:id="rId37"/>
+    <p:sldId id="820" r:id="rId38"/>
   </p:sldIdLst>
   <p:sldSz cx="9144000" cy="6858000" type="screen4x3"/>
   <p:notesSz cx="6950075" cy="9236075"/>
@@ -167,7 +168,7 @@
 <file path=ppt/revisionInfo.xml><?xml version="1.0" encoding="utf-8"?>
 <p1510:revInfo xmlns:a="http://schemas.openxmlformats.org/drawingml/2006/main" xmlns:r="http://schemas.openxmlformats.org/officeDocument/2006/relationships" xmlns:p1510="http://schemas.microsoft.com/office/powerpoint/2015/10/main">
   <p1510:revLst>
-    <p1510:client id="{26DF0AC7-7898-4CAF-8C74-9051912ABD73}" v="261" dt="2025-10-23T20:22:17.423"/>
+    <p1510:client id="{5041633D-0D65-4A33-A002-41B0B2F0F46B}" v="22" dt="2025-12-03T01:57:24.095"/>
   </p1510:revLst>
 </p1510:revInfo>
 </file>
@@ -176,219 +177,57 @@
 <pc:chgInfo xmlns:a="http://schemas.openxmlformats.org/drawingml/2006/main" xmlns:r="http://schemas.openxmlformats.org/officeDocument/2006/relationships" xmlns:ac="http://schemas.microsoft.com/office/drawing/2013/main/command" xmlns:pc="http://schemas.microsoft.com/office/powerpoint/2013/main/command">
   <pc:docChgLst>
     <pc:chgData name="Zonghua Gu" userId="9a7e1853e1951ef5" providerId="LiveId" clId="{CF1FAA12-072C-4ED5-BA76-0FFFAEFDB88A}"/>
-    <pc:docChg chg="undo redo custSel addSld delSld modSld">
-      <pc:chgData name="Zonghua Gu" userId="9a7e1853e1951ef5" providerId="LiveId" clId="{CF1FAA12-072C-4ED5-BA76-0FFFAEFDB88A}" dt="2025-10-23T20:22:22.597" v="4275" actId="27636"/>
+    <pc:docChg chg="undo redo custSel addSld delSld modSld sldOrd">
+      <pc:chgData name="Zonghua Gu" userId="9a7e1853e1951ef5" providerId="LiveId" clId="{CF1FAA12-072C-4ED5-BA76-0FFFAEFDB88A}" dt="2025-12-03T01:57:29.826" v="4879" actId="1076"/>
       <pc:docMkLst>
         <pc:docMk/>
       </pc:docMkLst>
-      <pc:sldChg chg="addSp delSp modSp add mod">
-        <pc:chgData name="Zonghua Gu" userId="9a7e1853e1951ef5" providerId="LiveId" clId="{CF1FAA12-072C-4ED5-BA76-0FFFAEFDB88A}" dt="2025-10-21T19:42:10.489" v="3386" actId="404"/>
+      <pc:sldChg chg="modSp mod">
+        <pc:chgData name="Zonghua Gu" userId="9a7e1853e1951ef5" providerId="LiveId" clId="{CF1FAA12-072C-4ED5-BA76-0FFFAEFDB88A}" dt="2025-12-03T01:41:30.064" v="4749"/>
         <pc:sldMkLst>
           <pc:docMk/>
-          <pc:sldMk cId="3884894996" sldId="260"/>
+          <pc:sldMk cId="1814278120" sldId="258"/>
         </pc:sldMkLst>
         <pc:spChg chg="mod">
-          <ac:chgData name="Zonghua Gu" userId="9a7e1853e1951ef5" providerId="LiveId" clId="{CF1FAA12-072C-4ED5-BA76-0FFFAEFDB88A}" dt="2025-10-21T19:42:10.489" v="3386" actId="404"/>
+          <ac:chgData name="Zonghua Gu" userId="9a7e1853e1951ef5" providerId="LiveId" clId="{CF1FAA12-072C-4ED5-BA76-0FFFAEFDB88A}" dt="2025-12-03T01:41:30.064" v="4749"/>
           <ac:spMkLst>
             <pc:docMk/>
-            <pc:sldMk cId="3884894996" sldId="260"/>
-            <ac:spMk id="4" creationId="{36843E04-780F-8745-F7A3-B8C73E674D4A}"/>
+            <pc:sldMk cId="1814278120" sldId="258"/>
+            <ac:spMk id="4" creationId="{888CA4B8-E23A-61B6-D388-BD1EFFC38D5F}"/>
           </ac:spMkLst>
         </pc:spChg>
       </pc:sldChg>
-      <pc:sldChg chg="addSp modSp add mod">
-        <pc:chgData name="Zonghua Gu" userId="9a7e1853e1951ef5" providerId="LiveId" clId="{CF1FAA12-072C-4ED5-BA76-0FFFAEFDB88A}" dt="2025-10-21T19:37:33.325" v="3284" actId="20577"/>
-        <pc:sldMkLst>
-          <pc:docMk/>
-          <pc:sldMk cId="2007294765" sldId="263"/>
-        </pc:sldMkLst>
-        <pc:spChg chg="add mod">
-          <ac:chgData name="Zonghua Gu" userId="9a7e1853e1951ef5" providerId="LiveId" clId="{CF1FAA12-072C-4ED5-BA76-0FFFAEFDB88A}" dt="2025-10-21T19:37:33.325" v="3284" actId="20577"/>
-          <ac:spMkLst>
-            <pc:docMk/>
-            <pc:sldMk cId="2007294765" sldId="263"/>
-            <ac:spMk id="5" creationId="{E934273F-86D4-4FCA-7A42-387A88B6F17F}"/>
-          </ac:spMkLst>
-        </pc:spChg>
-      </pc:sldChg>
-      <pc:sldChg chg="modSp add mod">
-        <pc:chgData name="Zonghua Gu" userId="9a7e1853e1951ef5" providerId="LiveId" clId="{CF1FAA12-072C-4ED5-BA76-0FFFAEFDB88A}" dt="2025-10-21T19:44:46.856" v="3479" actId="20577"/>
-        <pc:sldMkLst>
-          <pc:docMk/>
-          <pc:sldMk cId="245926897" sldId="264"/>
-        </pc:sldMkLst>
-        <pc:spChg chg="mod">
-          <ac:chgData name="Zonghua Gu" userId="9a7e1853e1951ef5" providerId="LiveId" clId="{CF1FAA12-072C-4ED5-BA76-0FFFAEFDB88A}" dt="2025-10-14T21:11:45.950" v="2885" actId="20577"/>
-          <ac:spMkLst>
-            <pc:docMk/>
-            <pc:sldMk cId="245926897" sldId="264"/>
-            <ac:spMk id="2" creationId="{00000000-0000-0000-0000-000000000000}"/>
-          </ac:spMkLst>
-        </pc:spChg>
-        <pc:spChg chg="mod">
-          <ac:chgData name="Zonghua Gu" userId="9a7e1853e1951ef5" providerId="LiveId" clId="{CF1FAA12-072C-4ED5-BA76-0FFFAEFDB88A}" dt="2025-10-21T19:43:00.171" v="3389"/>
-          <ac:spMkLst>
-            <pc:docMk/>
-            <pc:sldMk cId="245926897" sldId="264"/>
-            <ac:spMk id="30" creationId="{00000000-0000-0000-0000-000000000000}"/>
-          </ac:spMkLst>
-        </pc:spChg>
-        <pc:spChg chg="mod">
-          <ac:chgData name="Zonghua Gu" userId="9a7e1853e1951ef5" providerId="LiveId" clId="{CF1FAA12-072C-4ED5-BA76-0FFFAEFDB88A}" dt="2025-10-21T19:44:46.856" v="3479" actId="20577"/>
-          <ac:spMkLst>
-            <pc:docMk/>
-            <pc:sldMk cId="245926897" sldId="264"/>
-            <ac:spMk id="32" creationId="{00000000-0000-0000-0000-000000000000}"/>
-          </ac:spMkLst>
-        </pc:spChg>
-      </pc:sldChg>
-      <pc:sldChg chg="modSp add mod">
-        <pc:chgData name="Zonghua Gu" userId="9a7e1853e1951ef5" providerId="LiveId" clId="{CF1FAA12-072C-4ED5-BA76-0FFFAEFDB88A}" dt="2025-10-21T19:43:00.171" v="3389"/>
-        <pc:sldMkLst>
-          <pc:docMk/>
-          <pc:sldMk cId="2098831747" sldId="268"/>
-        </pc:sldMkLst>
-        <pc:spChg chg="mod">
-          <ac:chgData name="Zonghua Gu" userId="9a7e1853e1951ef5" providerId="LiveId" clId="{CF1FAA12-072C-4ED5-BA76-0FFFAEFDB88A}" dt="2025-10-14T21:11:51.484" v="2892" actId="20577"/>
-          <ac:spMkLst>
-            <pc:docMk/>
-            <pc:sldMk cId="2098831747" sldId="268"/>
-            <ac:spMk id="2" creationId="{00000000-0000-0000-0000-000000000000}"/>
-          </ac:spMkLst>
-        </pc:spChg>
-        <pc:spChg chg="mod">
-          <ac:chgData name="Zonghua Gu" userId="9a7e1853e1951ef5" providerId="LiveId" clId="{CF1FAA12-072C-4ED5-BA76-0FFFAEFDB88A}" dt="2025-10-21T19:43:00.171" v="3389"/>
-          <ac:spMkLst>
-            <pc:docMk/>
-            <pc:sldMk cId="2098831747" sldId="268"/>
-            <ac:spMk id="30" creationId="{00000000-0000-0000-0000-000000000000}"/>
-          </ac:spMkLst>
-        </pc:spChg>
-        <pc:spChg chg="mod">
-          <ac:chgData name="Zonghua Gu" userId="9a7e1853e1951ef5" providerId="LiveId" clId="{CF1FAA12-072C-4ED5-BA76-0FFFAEFDB88A}" dt="2025-10-21T19:43:00.171" v="3389"/>
-          <ac:spMkLst>
-            <pc:docMk/>
-            <pc:sldMk cId="2098831747" sldId="268"/>
-            <ac:spMk id="32" creationId="{00000000-0000-0000-0000-000000000000}"/>
-          </ac:spMkLst>
-        </pc:spChg>
-      </pc:sldChg>
-      <pc:sldChg chg="addSp modSp add del">
-        <pc:chgData name="Zonghua Gu" userId="9a7e1853e1951ef5" providerId="LiveId" clId="{CF1FAA12-072C-4ED5-BA76-0FFFAEFDB88A}" dt="2025-10-21T20:30:06.929" v="3612"/>
-        <pc:sldMkLst>
-          <pc:docMk/>
-          <pc:sldMk cId="1120632604" sldId="278"/>
-        </pc:sldMkLst>
-        <pc:spChg chg="add mod">
-          <ac:chgData name="Zonghua Gu" userId="9a7e1853e1951ef5" providerId="LiveId" clId="{CF1FAA12-072C-4ED5-BA76-0FFFAEFDB88A}" dt="2025-10-21T20:30:06.929" v="3612"/>
-          <ac:spMkLst>
-            <pc:docMk/>
-            <pc:sldMk cId="1120632604" sldId="278"/>
-            <ac:spMk id="7" creationId="{FB75E523-7548-E904-AAD1-699C9A7D59D2}"/>
-          </ac:spMkLst>
-        </pc:spChg>
-      </pc:sldChg>
-      <pc:sldChg chg="addSp modSp add del">
-        <pc:chgData name="Zonghua Gu" userId="9a7e1853e1951ef5" providerId="LiveId" clId="{CF1FAA12-072C-4ED5-BA76-0FFFAEFDB88A}" dt="2025-10-21T20:30:08.557" v="3613"/>
-        <pc:sldMkLst>
-          <pc:docMk/>
-          <pc:sldMk cId="424972285" sldId="279"/>
-        </pc:sldMkLst>
-        <pc:spChg chg="add mod">
-          <ac:chgData name="Zonghua Gu" userId="9a7e1853e1951ef5" providerId="LiveId" clId="{CF1FAA12-072C-4ED5-BA76-0FFFAEFDB88A}" dt="2025-10-21T20:30:08.557" v="3613"/>
-          <ac:spMkLst>
-            <pc:docMk/>
-            <pc:sldMk cId="424972285" sldId="279"/>
-            <ac:spMk id="8" creationId="{510E2E53-03DD-57F0-F850-07FD9C250CEA}"/>
-          </ac:spMkLst>
-        </pc:spChg>
-      </pc:sldChg>
-      <pc:sldChg chg="delSp modSp add mod">
-        <pc:chgData name="Zonghua Gu" userId="9a7e1853e1951ef5" providerId="LiveId" clId="{CF1FAA12-072C-4ED5-BA76-0FFFAEFDB88A}" dt="2025-09-25T15:30:53.953" v="2335" actId="27636"/>
-        <pc:sldMkLst>
-          <pc:docMk/>
-          <pc:sldMk cId="465749855" sldId="280"/>
-        </pc:sldMkLst>
-        <pc:spChg chg="mod">
-          <ac:chgData name="Zonghua Gu" userId="9a7e1853e1951ef5" providerId="LiveId" clId="{CF1FAA12-072C-4ED5-BA76-0FFFAEFDB88A}" dt="2025-09-25T15:30:53.953" v="2335" actId="27636"/>
-          <ac:spMkLst>
-            <pc:docMk/>
-            <pc:sldMk cId="465749855" sldId="280"/>
-            <ac:spMk id="4" creationId="{D196B1B3-16B9-7552-E252-1625434D0362}"/>
-          </ac:spMkLst>
-        </pc:spChg>
-      </pc:sldChg>
-      <pc:sldChg chg="addSp delSp modSp new mod modNotes">
-        <pc:chgData name="Zonghua Gu" userId="9a7e1853e1951ef5" providerId="LiveId" clId="{CF1FAA12-072C-4ED5-BA76-0FFFAEFDB88A}" dt="2025-09-23T02:41:07.197" v="1176" actId="1076"/>
+      <pc:sldChg chg="modSp mod">
+        <pc:chgData name="Zonghua Gu" userId="9a7e1853e1951ef5" providerId="LiveId" clId="{CF1FAA12-072C-4ED5-BA76-0FFFAEFDB88A}" dt="2025-12-03T01:32:35.930" v="4745" actId="20577"/>
         <pc:sldMkLst>
           <pc:docMk/>
           <pc:sldMk cId="4018749421" sldId="281"/>
         </pc:sldMkLst>
-        <pc:spChg chg="mod">
-          <ac:chgData name="Zonghua Gu" userId="9a7e1853e1951ef5" providerId="LiveId" clId="{CF1FAA12-072C-4ED5-BA76-0FFFAEFDB88A}" dt="2025-09-23T02:35:25.491" v="1075"/>
-          <ac:spMkLst>
-            <pc:docMk/>
-            <pc:sldMk cId="4018749421" sldId="281"/>
-            <ac:spMk id="2" creationId="{9F91FAD6-E4B6-9B88-FA7A-9F38A7C51248}"/>
-          </ac:spMkLst>
-        </pc:spChg>
-        <pc:spChg chg="add mod">
-          <ac:chgData name="Zonghua Gu" userId="9a7e1853e1951ef5" providerId="LiveId" clId="{CF1FAA12-072C-4ED5-BA76-0FFFAEFDB88A}" dt="2025-09-23T02:41:07.197" v="1176" actId="1076"/>
-          <ac:spMkLst>
-            <pc:docMk/>
-            <pc:sldMk cId="4018749421" sldId="281"/>
-            <ac:spMk id="7" creationId="{A8877E1E-4738-45CE-9CC3-2C75B88FD72F}"/>
-          </ac:spMkLst>
-        </pc:spChg>
-        <pc:graphicFrameChg chg="add mod modGraphic">
-          <ac:chgData name="Zonghua Gu" userId="9a7e1853e1951ef5" providerId="LiveId" clId="{CF1FAA12-072C-4ED5-BA76-0FFFAEFDB88A}" dt="2025-09-23T02:23:22.820" v="911" actId="14100"/>
-          <ac:graphicFrameMkLst>
-            <pc:docMk/>
-            <pc:sldMk cId="4018749421" sldId="281"/>
-            <ac:graphicFrameMk id="5" creationId="{B1EBE5EF-493B-E11A-1B1D-CCABF51AA9D7}"/>
-          </ac:graphicFrameMkLst>
-        </pc:graphicFrameChg>
-        <pc:graphicFrameChg chg="add mod modGraphic">
-          <ac:chgData name="Zonghua Gu" userId="9a7e1853e1951ef5" providerId="LiveId" clId="{CF1FAA12-072C-4ED5-BA76-0FFFAEFDB88A}" dt="2025-09-23T02:34:06.941" v="1054" actId="14100"/>
+        <pc:graphicFrameChg chg="mod modGraphic">
+          <ac:chgData name="Zonghua Gu" userId="9a7e1853e1951ef5" providerId="LiveId" clId="{CF1FAA12-072C-4ED5-BA76-0FFFAEFDB88A}" dt="2025-12-03T01:32:35.930" v="4745" actId="20577"/>
           <ac:graphicFrameMkLst>
             <pc:docMk/>
             <pc:sldMk cId="4018749421" sldId="281"/>
             <ac:graphicFrameMk id="6" creationId="{441ADC90-ADB8-D7DD-0AC3-9F57EB29BD9E}"/>
           </ac:graphicFrameMkLst>
         </pc:graphicFrameChg>
-        <pc:graphicFrameChg chg="add mod modGraphic">
-          <ac:chgData name="Zonghua Gu" userId="9a7e1853e1951ef5" providerId="LiveId" clId="{CF1FAA12-072C-4ED5-BA76-0FFFAEFDB88A}" dt="2025-09-23T02:35:57.472" v="1095" actId="20577"/>
-          <ac:graphicFrameMkLst>
-            <pc:docMk/>
-            <pc:sldMk cId="4018749421" sldId="281"/>
-            <ac:graphicFrameMk id="8" creationId="{AA01F272-373C-24EF-CF3E-2DDED1980174}"/>
-          </ac:graphicFrameMkLst>
-        </pc:graphicFrameChg>
       </pc:sldChg>
-      <pc:sldChg chg="addSp delSp modSp add mod modNotes">
-        <pc:chgData name="Zonghua Gu" userId="9a7e1853e1951ef5" providerId="LiveId" clId="{CF1FAA12-072C-4ED5-BA76-0FFFAEFDB88A}" dt="2025-09-23T02:41:47.791" v="1178" actId="478"/>
+      <pc:sldChg chg="modSp mod">
+        <pc:chgData name="Zonghua Gu" userId="9a7e1853e1951ef5" providerId="LiveId" clId="{CF1FAA12-072C-4ED5-BA76-0FFFAEFDB88A}" dt="2025-12-03T01:32:53.391" v="4747" actId="20577"/>
         <pc:sldMkLst>
           <pc:docMk/>
           <pc:sldMk cId="623618619" sldId="282"/>
         </pc:sldMkLst>
-        <pc:spChg chg="mod">
-          <ac:chgData name="Zonghua Gu" userId="9a7e1853e1951ef5" providerId="LiveId" clId="{CF1FAA12-072C-4ED5-BA76-0FFFAEFDB88A}" dt="2025-09-23T02:35:36.581" v="1081" actId="20577"/>
-          <ac:spMkLst>
-            <pc:docMk/>
-            <pc:sldMk cId="623618619" sldId="282"/>
-            <ac:spMk id="2" creationId="{25E58B75-95E0-2541-7E04-055CF0C60C5B}"/>
-          </ac:spMkLst>
-        </pc:spChg>
-        <pc:graphicFrameChg chg="add mod modGraphic">
-          <ac:chgData name="Zonghua Gu" userId="9a7e1853e1951ef5" providerId="LiveId" clId="{CF1FAA12-072C-4ED5-BA76-0FFFAEFDB88A}" dt="2025-09-23T02:40:41.243" v="1175" actId="6549"/>
+        <pc:graphicFrameChg chg="mod modGraphic">
+          <ac:chgData name="Zonghua Gu" userId="9a7e1853e1951ef5" providerId="LiveId" clId="{CF1FAA12-072C-4ED5-BA76-0FFFAEFDB88A}" dt="2025-12-03T01:01:57.301" v="4459" actId="20577"/>
           <ac:graphicFrameMkLst>
             <pc:docMk/>
             <pc:sldMk cId="623618619" sldId="282"/>
             <ac:graphicFrameMk id="4" creationId="{058C7988-0F62-036F-DDF3-1121F4620528}"/>
           </ac:graphicFrameMkLst>
         </pc:graphicFrameChg>
-        <pc:graphicFrameChg chg="mod">
-          <ac:chgData name="Zonghua Gu" userId="9a7e1853e1951ef5" providerId="LiveId" clId="{CF1FAA12-072C-4ED5-BA76-0FFFAEFDB88A}" dt="2025-09-23T02:35:50.482" v="1083" actId="1076"/>
+        <pc:graphicFrameChg chg="modGraphic">
+          <ac:chgData name="Zonghua Gu" userId="9a7e1853e1951ef5" providerId="LiveId" clId="{CF1FAA12-072C-4ED5-BA76-0FFFAEFDB88A}" dt="2025-12-03T01:32:53.391" v="4747" actId="20577"/>
           <ac:graphicFrameMkLst>
             <pc:docMk/>
             <pc:sldMk cId="623618619" sldId="282"/>
@@ -396,30 +235,14 @@
           </ac:graphicFrameMkLst>
         </pc:graphicFrameChg>
       </pc:sldChg>
-      <pc:sldChg chg="addSp modSp new mod">
-        <pc:chgData name="Zonghua Gu" userId="9a7e1853e1951ef5" providerId="LiveId" clId="{CF1FAA12-072C-4ED5-BA76-0FFFAEFDB88A}" dt="2025-10-05T02:43:53.863" v="2639" actId="20577"/>
+      <pc:sldChg chg="modSp mod">
+        <pc:chgData name="Zonghua Gu" userId="9a7e1853e1951ef5" providerId="LiveId" clId="{CF1FAA12-072C-4ED5-BA76-0FFFAEFDB88A}" dt="2025-12-03T00:42:12.102" v="4402" actId="20577"/>
         <pc:sldMkLst>
           <pc:docMk/>
           <pc:sldMk cId="1767069891" sldId="283"/>
         </pc:sldMkLst>
-        <pc:spChg chg="mod">
-          <ac:chgData name="Zonghua Gu" userId="9a7e1853e1951ef5" providerId="LiveId" clId="{CF1FAA12-072C-4ED5-BA76-0FFFAEFDB88A}" dt="2025-09-24T22:40:29.276" v="1778" actId="20577"/>
-          <ac:spMkLst>
-            <pc:docMk/>
-            <pc:sldMk cId="1767069891" sldId="283"/>
-            <ac:spMk id="2" creationId="{440EADDE-B5E4-F571-7D39-10F7E6EFD50E}"/>
-          </ac:spMkLst>
-        </pc:spChg>
-        <pc:spChg chg="mod">
-          <ac:chgData name="Zonghua Gu" userId="9a7e1853e1951ef5" providerId="LiveId" clId="{CF1FAA12-072C-4ED5-BA76-0FFFAEFDB88A}" dt="2025-10-05T02:43:39.091" v="2634" actId="20577"/>
-          <ac:spMkLst>
-            <pc:docMk/>
-            <pc:sldMk cId="1767069891" sldId="283"/>
-            <ac:spMk id="4" creationId="{86CB5709-ADC9-6526-7743-1565742B86E0}"/>
-          </ac:spMkLst>
-        </pc:spChg>
-        <pc:graphicFrameChg chg="add mod modGraphic">
-          <ac:chgData name="Zonghua Gu" userId="9a7e1853e1951ef5" providerId="LiveId" clId="{CF1FAA12-072C-4ED5-BA76-0FFFAEFDB88A}" dt="2025-10-05T02:43:53.863" v="2639" actId="20577"/>
+        <pc:graphicFrameChg chg="modGraphic">
+          <ac:chgData name="Zonghua Gu" userId="9a7e1853e1951ef5" providerId="LiveId" clId="{CF1FAA12-072C-4ED5-BA76-0FFFAEFDB88A}" dt="2025-12-03T00:42:12.102" v="4402" actId="20577"/>
           <ac:graphicFrameMkLst>
             <pc:docMk/>
             <pc:sldMk cId="1767069891" sldId="283"/>
@@ -427,93 +250,30 @@
           </ac:graphicFrameMkLst>
         </pc:graphicFrameChg>
       </pc:sldChg>
-      <pc:sldChg chg="addSp delSp modSp new mod modNotesTx">
-        <pc:chgData name="Zonghua Gu" userId="9a7e1853e1951ef5" providerId="LiveId" clId="{CF1FAA12-072C-4ED5-BA76-0FFFAEFDB88A}" dt="2025-10-21T19:43:00.171" v="3389"/>
-        <pc:sldMkLst>
-          <pc:docMk/>
-          <pc:sldMk cId="3387447015" sldId="286"/>
-        </pc:sldMkLst>
-        <pc:spChg chg="mod">
-          <ac:chgData name="Zonghua Gu" userId="9a7e1853e1951ef5" providerId="LiveId" clId="{CF1FAA12-072C-4ED5-BA76-0FFFAEFDB88A}" dt="2025-09-24T22:40:26.731" v="1777"/>
-          <ac:spMkLst>
-            <pc:docMk/>
-            <pc:sldMk cId="3387447015" sldId="286"/>
-            <ac:spMk id="2" creationId="{B94D12DC-0F10-83D1-ABB7-CBAA3C868C79}"/>
-          </ac:spMkLst>
-        </pc:spChg>
-        <pc:graphicFrameChg chg="add mod modGraphic">
-          <ac:chgData name="Zonghua Gu" userId="9a7e1853e1951ef5" providerId="LiveId" clId="{CF1FAA12-072C-4ED5-BA76-0FFFAEFDB88A}" dt="2025-10-05T02:45:19.878" v="2656" actId="1076"/>
-          <ac:graphicFrameMkLst>
-            <pc:docMk/>
-            <pc:sldMk cId="3387447015" sldId="286"/>
-            <ac:graphicFrameMk id="5" creationId="{93A61E9E-B8DB-6D7F-89B8-C01FADC19FE2}"/>
-          </ac:graphicFrameMkLst>
-        </pc:graphicFrameChg>
-        <pc:graphicFrameChg chg="add mod modGraphic">
-          <ac:chgData name="Zonghua Gu" userId="9a7e1853e1951ef5" providerId="LiveId" clId="{CF1FAA12-072C-4ED5-BA76-0FFFAEFDB88A}" dt="2025-10-05T02:46:27.958" v="2665" actId="20577"/>
-          <ac:graphicFrameMkLst>
-            <pc:docMk/>
-            <pc:sldMk cId="3387447015" sldId="286"/>
-            <ac:graphicFrameMk id="6" creationId="{08860993-5A4A-FDF2-164A-269A21C1476C}"/>
-          </ac:graphicFrameMkLst>
-        </pc:graphicFrameChg>
-        <pc:graphicFrameChg chg="add mod modGraphic">
-          <ac:chgData name="Zonghua Gu" userId="9a7e1853e1951ef5" providerId="LiveId" clId="{CF1FAA12-072C-4ED5-BA76-0FFFAEFDB88A}" dt="2025-10-21T19:43:00.171" v="3389"/>
-          <ac:graphicFrameMkLst>
-            <pc:docMk/>
-            <pc:sldMk cId="3387447015" sldId="286"/>
-            <ac:graphicFrameMk id="8" creationId="{4FA0E8AC-8701-8160-EFCF-45E03B551C1C}"/>
-          </ac:graphicFrameMkLst>
-        </pc:graphicFrameChg>
-        <pc:graphicFrameChg chg="add mod modGraphic">
-          <ac:chgData name="Zonghua Gu" userId="9a7e1853e1951ef5" providerId="LiveId" clId="{CF1FAA12-072C-4ED5-BA76-0FFFAEFDB88A}" dt="2025-10-05T02:45:11.673" v="2655" actId="1035"/>
-          <ac:graphicFrameMkLst>
-            <pc:docMk/>
-            <pc:sldMk cId="3387447015" sldId="286"/>
-            <ac:graphicFrameMk id="9" creationId="{744A4DBD-405A-5BB5-8DFC-2B3CDF03BE0C}"/>
-          </ac:graphicFrameMkLst>
-        </pc:graphicFrameChg>
-        <pc:graphicFrameChg chg="add mod modGraphic">
-          <ac:chgData name="Zonghua Gu" userId="9a7e1853e1951ef5" providerId="LiveId" clId="{CF1FAA12-072C-4ED5-BA76-0FFFAEFDB88A}" dt="2025-10-05T02:46:32.991" v="2673" actId="20577"/>
-          <ac:graphicFrameMkLst>
-            <pc:docMk/>
-            <pc:sldMk cId="3387447015" sldId="286"/>
-            <ac:graphicFrameMk id="10" creationId="{26CF4D69-C211-B553-B73A-1E1C0BCFC6C4}"/>
-          </ac:graphicFrameMkLst>
-        </pc:graphicFrameChg>
-      </pc:sldChg>
-      <pc:sldChg chg="addSp modSp new mod">
-        <pc:chgData name="Zonghua Gu" userId="9a7e1853e1951ef5" providerId="LiveId" clId="{CF1FAA12-072C-4ED5-BA76-0FFFAEFDB88A}" dt="2025-10-05T02:52:41.917" v="2822" actId="20577"/>
+      <pc:sldChg chg="modSp mod">
+        <pc:chgData name="Zonghua Gu" userId="9a7e1853e1951ef5" providerId="LiveId" clId="{CF1FAA12-072C-4ED5-BA76-0FFFAEFDB88A}" dt="2025-12-03T01:15:39.007" v="4557" actId="14100"/>
         <pc:sldMkLst>
           <pc:docMk/>
           <pc:sldMk cId="2707139683" sldId="353"/>
         </pc:sldMkLst>
         <pc:spChg chg="mod">
-          <ac:chgData name="Zonghua Gu" userId="9a7e1853e1951ef5" providerId="LiveId" clId="{CF1FAA12-072C-4ED5-BA76-0FFFAEFDB88A}" dt="2025-10-05T02:52:41.917" v="2822" actId="20577"/>
-          <ac:spMkLst>
-            <pc:docMk/>
-            <pc:sldMk cId="2707139683" sldId="353"/>
-            <ac:spMk id="2" creationId="{C56DF89D-8DCD-F432-1E58-FAB096FB80C5}"/>
-          </ac:spMkLst>
-        </pc:spChg>
-        <pc:spChg chg="mod">
-          <ac:chgData name="Zonghua Gu" userId="9a7e1853e1951ef5" providerId="LiveId" clId="{CF1FAA12-072C-4ED5-BA76-0FFFAEFDB88A}" dt="2025-10-05T02:51:03.914" v="2761" actId="20577"/>
+          <ac:chgData name="Zonghua Gu" userId="9a7e1853e1951ef5" providerId="LiveId" clId="{CF1FAA12-072C-4ED5-BA76-0FFFAEFDB88A}" dt="2025-12-03T01:15:29.437" v="4555" actId="20577"/>
           <ac:spMkLst>
             <pc:docMk/>
             <pc:sldMk cId="2707139683" sldId="353"/>
             <ac:spMk id="4" creationId="{591F8C61-3E91-895F-2C57-5743F12F4706}"/>
           </ac:spMkLst>
         </pc:spChg>
-        <pc:spChg chg="add mod">
-          <ac:chgData name="Zonghua Gu" userId="9a7e1853e1951ef5" providerId="LiveId" clId="{CF1FAA12-072C-4ED5-BA76-0FFFAEFDB88A}" dt="2025-09-25T00:43:55.145" v="2202" actId="1076"/>
+        <pc:spChg chg="mod">
+          <ac:chgData name="Zonghua Gu" userId="9a7e1853e1951ef5" providerId="LiveId" clId="{CF1FAA12-072C-4ED5-BA76-0FFFAEFDB88A}" dt="2025-12-03T01:15:39.007" v="4557" actId="14100"/>
           <ac:spMkLst>
             <pc:docMk/>
             <pc:sldMk cId="2707139683" sldId="353"/>
             <ac:spMk id="5" creationId="{8A76ECE7-0B5A-383E-0091-ADC927BEEC87}"/>
           </ac:spMkLst>
         </pc:spChg>
-        <pc:spChg chg="add mod">
-          <ac:chgData name="Zonghua Gu" userId="9a7e1853e1951ef5" providerId="LiveId" clId="{CF1FAA12-072C-4ED5-BA76-0FFFAEFDB88A}" dt="2025-09-25T00:44:02.939" v="2205" actId="1076"/>
+        <pc:spChg chg="mod">
+          <ac:chgData name="Zonghua Gu" userId="9a7e1853e1951ef5" providerId="LiveId" clId="{CF1FAA12-072C-4ED5-BA76-0FFFAEFDB88A}" dt="2025-12-03T01:15:36.622" v="4556" actId="14100"/>
           <ac:spMkLst>
             <pc:docMk/>
             <pc:sldMk cId="2707139683" sldId="353"/>
@@ -521,30 +281,22 @@
           </ac:spMkLst>
         </pc:spChg>
       </pc:sldChg>
-      <pc:sldChg chg="addSp delSp modSp new mod">
-        <pc:chgData name="Zonghua Gu" userId="9a7e1853e1951ef5" providerId="LiveId" clId="{CF1FAA12-072C-4ED5-BA76-0FFFAEFDB88A}" dt="2025-10-05T02:53:11.715" v="2838" actId="20577"/>
+      <pc:sldChg chg="modSp mod">
+        <pc:chgData name="Zonghua Gu" userId="9a7e1853e1951ef5" providerId="LiveId" clId="{CF1FAA12-072C-4ED5-BA76-0FFFAEFDB88A}" dt="2025-12-03T01:29:14.742" v="4719" actId="20577"/>
         <pc:sldMkLst>
           <pc:docMk/>
           <pc:sldMk cId="4056115254" sldId="354"/>
         </pc:sldMkLst>
         <pc:spChg chg="mod">
-          <ac:chgData name="Zonghua Gu" userId="9a7e1853e1951ef5" providerId="LiveId" clId="{CF1FAA12-072C-4ED5-BA76-0FFFAEFDB88A}" dt="2025-10-05T02:53:11.715" v="2838" actId="20577"/>
-          <ac:spMkLst>
-            <pc:docMk/>
-            <pc:sldMk cId="4056115254" sldId="354"/>
-            <ac:spMk id="2" creationId="{CAB26404-63EE-CB5A-481A-AD6B0B09C23D}"/>
-          </ac:spMkLst>
-        </pc:spChg>
-        <pc:spChg chg="mod">
-          <ac:chgData name="Zonghua Gu" userId="9a7e1853e1951ef5" providerId="LiveId" clId="{CF1FAA12-072C-4ED5-BA76-0FFFAEFDB88A}" dt="2025-10-05T02:52:53.663" v="2828" actId="20577"/>
+          <ac:chgData name="Zonghua Gu" userId="9a7e1853e1951ef5" providerId="LiveId" clId="{CF1FAA12-072C-4ED5-BA76-0FFFAEFDB88A}" dt="2025-12-03T01:24:17.090" v="4711" actId="20577"/>
           <ac:spMkLst>
             <pc:docMk/>
             <pc:sldMk cId="4056115254" sldId="354"/>
             <ac:spMk id="4" creationId="{C2EFFC15-913C-F5C8-F67E-5B2B5295992D}"/>
           </ac:spMkLst>
         </pc:spChg>
-        <pc:spChg chg="add mod">
-          <ac:chgData name="Zonghua Gu" userId="9a7e1853e1951ef5" providerId="LiveId" clId="{CF1FAA12-072C-4ED5-BA76-0FFFAEFDB88A}" dt="2025-10-05T02:53:01.198" v="2834" actId="20577"/>
+        <pc:spChg chg="mod">
+          <ac:chgData name="Zonghua Gu" userId="9a7e1853e1951ef5" providerId="LiveId" clId="{CF1FAA12-072C-4ED5-BA76-0FFFAEFDB88A}" dt="2025-12-03T01:29:14.742" v="4719" actId="20577"/>
           <ac:spMkLst>
             <pc:docMk/>
             <pc:sldMk cId="4056115254" sldId="354"/>
@@ -552,253 +304,14 @@
           </ac:spMkLst>
         </pc:spChg>
       </pc:sldChg>
-      <pc:sldChg chg="add">
-        <pc:chgData name="Zonghua Gu" userId="9a7e1853e1951ef5" providerId="LiveId" clId="{CF1FAA12-072C-4ED5-BA76-0FFFAEFDB88A}" dt="2025-10-23T19:57:26.363" v="4078"/>
-        <pc:sldMkLst>
-          <pc:docMk/>
-          <pc:sldMk cId="1735197848" sldId="367"/>
-        </pc:sldMkLst>
-      </pc:sldChg>
-      <pc:sldChg chg="addSp modSp add del mod">
-        <pc:chgData name="Zonghua Gu" userId="9a7e1853e1951ef5" providerId="LiveId" clId="{CF1FAA12-072C-4ED5-BA76-0FFFAEFDB88A}" dt="2025-10-23T19:57:23.420" v="4077" actId="2696"/>
-        <pc:sldMkLst>
-          <pc:docMk/>
-          <pc:sldMk cId="4257716461" sldId="367"/>
-        </pc:sldMkLst>
-      </pc:sldChg>
-      <pc:sldChg chg="modSp add del mod">
-        <pc:chgData name="Zonghua Gu" userId="9a7e1853e1951ef5" providerId="LiveId" clId="{CF1FAA12-072C-4ED5-BA76-0FFFAEFDB88A}" dt="2025-10-05T02:24:06.560" v="2425" actId="20577"/>
-        <pc:sldMkLst>
-          <pc:docMk/>
-          <pc:sldMk cId="2345755417" sldId="369"/>
-        </pc:sldMkLst>
-        <pc:spChg chg="mod">
-          <ac:chgData name="Zonghua Gu" userId="9a7e1853e1951ef5" providerId="LiveId" clId="{CF1FAA12-072C-4ED5-BA76-0FFFAEFDB88A}" dt="2025-10-05T02:24:06.560" v="2425" actId="20577"/>
-          <ac:spMkLst>
-            <pc:docMk/>
-            <pc:sldMk cId="2345755417" sldId="369"/>
-            <ac:spMk id="2" creationId="{00000000-0000-0000-0000-000000000000}"/>
-          </ac:spMkLst>
-        </pc:spChg>
-        <pc:spChg chg="mod">
-          <ac:chgData name="Zonghua Gu" userId="9a7e1853e1951ef5" providerId="LiveId" clId="{CF1FAA12-072C-4ED5-BA76-0FFFAEFDB88A}" dt="2025-10-05T02:21:31.559" v="2351" actId="6549"/>
-          <ac:spMkLst>
-            <pc:docMk/>
-            <pc:sldMk cId="2345755417" sldId="369"/>
-            <ac:spMk id="15" creationId="{00000000-0000-0000-0000-000000000000}"/>
-          </ac:spMkLst>
-        </pc:spChg>
-      </pc:sldChg>
-      <pc:sldChg chg="delSp modSp add mod">
-        <pc:chgData name="Zonghua Gu" userId="9a7e1853e1951ef5" providerId="LiveId" clId="{CF1FAA12-072C-4ED5-BA76-0FFFAEFDB88A}" dt="2025-10-05T02:24:01.145" v="2420" actId="313"/>
-        <pc:sldMkLst>
-          <pc:docMk/>
-          <pc:sldMk cId="3970213323" sldId="371"/>
-        </pc:sldMkLst>
-        <pc:spChg chg="mod">
-          <ac:chgData name="Zonghua Gu" userId="9a7e1853e1951ef5" providerId="LiveId" clId="{CF1FAA12-072C-4ED5-BA76-0FFFAEFDB88A}" dt="2025-10-05T02:24:01.145" v="2420" actId="313"/>
-          <ac:spMkLst>
-            <pc:docMk/>
-            <pc:sldMk cId="3970213323" sldId="371"/>
-            <ac:spMk id="2" creationId="{B8B35D03-E63B-948E-7B28-FE2BC0D48EA8}"/>
-          </ac:spMkLst>
-        </pc:spChg>
-        <pc:spChg chg="mod">
-          <ac:chgData name="Zonghua Gu" userId="9a7e1853e1951ef5" providerId="LiveId" clId="{CF1FAA12-072C-4ED5-BA76-0FFFAEFDB88A}" dt="2025-10-05T02:23:19.033" v="2389" actId="20577"/>
-          <ac:spMkLst>
-            <pc:docMk/>
-            <pc:sldMk cId="3970213323" sldId="371"/>
-            <ac:spMk id="15" creationId="{D4F04556-2048-4F19-A763-9BBFFFCAD277}"/>
-          </ac:spMkLst>
-        </pc:spChg>
-        <pc:spChg chg="mod">
-          <ac:chgData name="Zonghua Gu" userId="9a7e1853e1951ef5" providerId="LiveId" clId="{CF1FAA12-072C-4ED5-BA76-0FFFAEFDB88A}" dt="2025-10-05T02:23:28.502" v="2392" actId="20577"/>
-          <ac:spMkLst>
-            <pc:docMk/>
-            <pc:sldMk cId="3970213323" sldId="371"/>
-            <ac:spMk id="28" creationId="{5A07EE5F-FDFB-4DFD-A418-4743BE043075}"/>
-          </ac:spMkLst>
-        </pc:spChg>
-      </pc:sldChg>
-      <pc:sldChg chg="modSp add del mod">
-        <pc:chgData name="Zonghua Gu" userId="9a7e1853e1951ef5" providerId="LiveId" clId="{CF1FAA12-072C-4ED5-BA76-0FFFAEFDB88A}" dt="2025-10-23T19:57:23.420" v="4077" actId="2696"/>
-        <pc:sldMkLst>
-          <pc:docMk/>
-          <pc:sldMk cId="2574940037" sldId="374"/>
-        </pc:sldMkLst>
-        <pc:spChg chg="mod">
-          <ac:chgData name="Zonghua Gu" userId="9a7e1853e1951ef5" providerId="LiveId" clId="{CF1FAA12-072C-4ED5-BA76-0FFFAEFDB88A}" dt="2025-10-23T19:56:49.108" v="4075" actId="20577"/>
-          <ac:spMkLst>
-            <pc:docMk/>
-            <pc:sldMk cId="2574940037" sldId="374"/>
-            <ac:spMk id="23" creationId="{2A09A543-6103-44EB-8B1D-8744EF784763}"/>
-          </ac:spMkLst>
-        </pc:spChg>
-      </pc:sldChg>
-      <pc:sldChg chg="add">
-        <pc:chgData name="Zonghua Gu" userId="9a7e1853e1951ef5" providerId="LiveId" clId="{CF1FAA12-072C-4ED5-BA76-0FFFAEFDB88A}" dt="2025-10-23T19:57:26.363" v="4078"/>
-        <pc:sldMkLst>
-          <pc:docMk/>
-          <pc:sldMk cId="2918065515" sldId="374"/>
-        </pc:sldMkLst>
-      </pc:sldChg>
-      <pc:sldChg chg="modSp add mod">
-        <pc:chgData name="Zonghua Gu" userId="9a7e1853e1951ef5" providerId="LiveId" clId="{CF1FAA12-072C-4ED5-BA76-0FFFAEFDB88A}" dt="2025-10-23T20:19:59.757" v="4231" actId="6549"/>
-        <pc:sldMkLst>
-          <pc:docMk/>
-          <pc:sldMk cId="2017314449" sldId="751"/>
-        </pc:sldMkLst>
-        <pc:spChg chg="mod">
-          <ac:chgData name="Zonghua Gu" userId="9a7e1853e1951ef5" providerId="LiveId" clId="{CF1FAA12-072C-4ED5-BA76-0FFFAEFDB88A}" dt="2025-10-05T02:35:31.975" v="2511" actId="20577"/>
-          <ac:spMkLst>
-            <pc:docMk/>
-            <pc:sldMk cId="2017314449" sldId="751"/>
-            <ac:spMk id="2" creationId="{27B41483-7081-C44C-81EF-D92F00104765}"/>
-          </ac:spMkLst>
-        </pc:spChg>
-        <pc:spChg chg="mod">
-          <ac:chgData name="Zonghua Gu" userId="9a7e1853e1951ef5" providerId="LiveId" clId="{CF1FAA12-072C-4ED5-BA76-0FFFAEFDB88A}" dt="2025-10-23T20:19:59.757" v="4231" actId="6549"/>
-          <ac:spMkLst>
-            <pc:docMk/>
-            <pc:sldMk cId="2017314449" sldId="751"/>
-            <ac:spMk id="7" creationId="{B2D23A4E-8569-6941-84A9-89F1C41E64AF}"/>
-          </ac:spMkLst>
-        </pc:spChg>
-      </pc:sldChg>
-      <pc:sldChg chg="addSp delSp modSp add mod">
-        <pc:chgData name="Zonghua Gu" userId="9a7e1853e1951ef5" providerId="LiveId" clId="{CF1FAA12-072C-4ED5-BA76-0FFFAEFDB88A}" dt="2025-10-23T20:22:22.597" v="4275" actId="27636"/>
-        <pc:sldMkLst>
-          <pc:docMk/>
-          <pc:sldMk cId="658532706" sldId="752"/>
-        </pc:sldMkLst>
-        <pc:spChg chg="mod">
-          <ac:chgData name="Zonghua Gu" userId="9a7e1853e1951ef5" providerId="LiveId" clId="{CF1FAA12-072C-4ED5-BA76-0FFFAEFDB88A}" dt="2025-10-05T02:35:44.949" v="2514" actId="20577"/>
-          <ac:spMkLst>
-            <pc:docMk/>
-            <pc:sldMk cId="658532706" sldId="752"/>
-            <ac:spMk id="2" creationId="{27B41483-7081-C44C-81EF-D92F00104765}"/>
-          </ac:spMkLst>
-        </pc:spChg>
-        <pc:spChg chg="del mod">
-          <ac:chgData name="Zonghua Gu" userId="9a7e1853e1951ef5" providerId="LiveId" clId="{CF1FAA12-072C-4ED5-BA76-0FFFAEFDB88A}" dt="2025-10-23T20:10:26.135" v="4110" actId="478"/>
-          <ac:spMkLst>
-            <pc:docMk/>
-            <pc:sldMk cId="658532706" sldId="752"/>
-            <ac:spMk id="4" creationId="{97230E48-4625-B845-9B62-549F2F03DD9E}"/>
-          </ac:spMkLst>
-        </pc:spChg>
-        <pc:spChg chg="mod">
-          <ac:chgData name="Zonghua Gu" userId="9a7e1853e1951ef5" providerId="LiveId" clId="{CF1FAA12-072C-4ED5-BA76-0FFFAEFDB88A}" dt="2025-10-23T20:09:26.034" v="4090" actId="1076"/>
-          <ac:spMkLst>
-            <pc:docMk/>
-            <pc:sldMk cId="658532706" sldId="752"/>
-            <ac:spMk id="5" creationId="{67609315-49B9-8548-BA54-379B42B31ADB}"/>
-          </ac:spMkLst>
-        </pc:spChg>
-        <pc:spChg chg="mod">
-          <ac:chgData name="Zonghua Gu" userId="9a7e1853e1951ef5" providerId="LiveId" clId="{CF1FAA12-072C-4ED5-BA76-0FFFAEFDB88A}" dt="2025-10-23T20:19:45.170" v="4229" actId="6549"/>
-          <ac:spMkLst>
-            <pc:docMk/>
-            <pc:sldMk cId="658532706" sldId="752"/>
-            <ac:spMk id="6" creationId="{4F4F6D7F-4E8E-4748-B8BF-4AEBF2493640}"/>
-          </ac:spMkLst>
-        </pc:spChg>
-        <pc:spChg chg="mod">
-          <ac:chgData name="Zonghua Gu" userId="9a7e1853e1951ef5" providerId="LiveId" clId="{CF1FAA12-072C-4ED5-BA76-0FFFAEFDB88A}" dt="2025-10-23T20:11:00.466" v="4115" actId="1076"/>
-          <ac:spMkLst>
-            <pc:docMk/>
-            <pc:sldMk cId="658532706" sldId="752"/>
-            <ac:spMk id="7" creationId="{FFE75029-A370-C947-92AB-86784A3F88C0}"/>
-          </ac:spMkLst>
-        </pc:spChg>
-        <pc:spChg chg="add mod">
-          <ac:chgData name="Zonghua Gu" userId="9a7e1853e1951ef5" providerId="LiveId" clId="{CF1FAA12-072C-4ED5-BA76-0FFFAEFDB88A}" dt="2025-10-23T20:22:22.597" v="4275" actId="27636"/>
-          <ac:spMkLst>
-            <pc:docMk/>
-            <pc:sldMk cId="658532706" sldId="752"/>
-            <ac:spMk id="8" creationId="{B310A4C8-2DBE-3062-F639-E120AE1AC4CB}"/>
-          </ac:spMkLst>
-        </pc:spChg>
-        <pc:spChg chg="mod">
-          <ac:chgData name="Zonghua Gu" userId="9a7e1853e1951ef5" providerId="LiveId" clId="{CF1FAA12-072C-4ED5-BA76-0FFFAEFDB88A}" dt="2025-10-23T20:11:00.466" v="4115" actId="1076"/>
-          <ac:spMkLst>
-            <pc:docMk/>
-            <pc:sldMk cId="658532706" sldId="752"/>
-            <ac:spMk id="10" creationId="{4580A862-E780-3041-A52F-CEC03FE2AA6F}"/>
-          </ac:spMkLst>
-        </pc:spChg>
-        <pc:spChg chg="mod">
-          <ac:chgData name="Zonghua Gu" userId="9a7e1853e1951ef5" providerId="LiveId" clId="{CF1FAA12-072C-4ED5-BA76-0FFFAEFDB88A}" dt="2025-10-23T20:11:00.466" v="4115" actId="1076"/>
-          <ac:spMkLst>
-            <pc:docMk/>
-            <pc:sldMk cId="658532706" sldId="752"/>
-            <ac:spMk id="11" creationId="{F73CED4B-2CEE-5847-B651-71C8F701F73C}"/>
-          </ac:spMkLst>
-        </pc:spChg>
-        <pc:spChg chg="mod">
-          <ac:chgData name="Zonghua Gu" userId="9a7e1853e1951ef5" providerId="LiveId" clId="{CF1FAA12-072C-4ED5-BA76-0FFFAEFDB88A}" dt="2025-10-23T20:11:00.466" v="4115" actId="1076"/>
-          <ac:spMkLst>
-            <pc:docMk/>
-            <pc:sldMk cId="658532706" sldId="752"/>
-            <ac:spMk id="13" creationId="{61396BB7-6492-2C46-A6BE-EF731ECF740B}"/>
-          </ac:spMkLst>
-        </pc:spChg>
-        <pc:spChg chg="mod">
-          <ac:chgData name="Zonghua Gu" userId="9a7e1853e1951ef5" providerId="LiveId" clId="{CF1FAA12-072C-4ED5-BA76-0FFFAEFDB88A}" dt="2025-10-23T20:11:00.466" v="4115" actId="1076"/>
-          <ac:spMkLst>
-            <pc:docMk/>
-            <pc:sldMk cId="658532706" sldId="752"/>
-            <ac:spMk id="14" creationId="{37AC389A-52DF-BA4B-B78C-31E43AB8F715}"/>
-          </ac:spMkLst>
-        </pc:spChg>
-        <pc:cxnChg chg="mod">
-          <ac:chgData name="Zonghua Gu" userId="9a7e1853e1951ef5" providerId="LiveId" clId="{CF1FAA12-072C-4ED5-BA76-0FFFAEFDB88A}" dt="2025-10-23T20:11:00.466" v="4115" actId="1076"/>
-          <ac:cxnSpMkLst>
-            <pc:docMk/>
-            <pc:sldMk cId="658532706" sldId="752"/>
-            <ac:cxnSpMk id="9" creationId="{38C06581-F221-454A-B957-F8258EBDE837}"/>
-          </ac:cxnSpMkLst>
-        </pc:cxnChg>
-        <pc:cxnChg chg="mod">
-          <ac:chgData name="Zonghua Gu" userId="9a7e1853e1951ef5" providerId="LiveId" clId="{CF1FAA12-072C-4ED5-BA76-0FFFAEFDB88A}" dt="2025-10-23T20:11:00.466" v="4115" actId="1076"/>
-          <ac:cxnSpMkLst>
-            <pc:docMk/>
-            <pc:sldMk cId="658532706" sldId="752"/>
-            <ac:cxnSpMk id="12" creationId="{FD215319-D751-D24D-83E5-80D4E6FB9D69}"/>
-          </ac:cxnSpMkLst>
-        </pc:cxnChg>
-      </pc:sldChg>
-      <pc:sldChg chg="modSp add mod">
-        <pc:chgData name="Zonghua Gu" userId="9a7e1853e1951ef5" providerId="LiveId" clId="{CF1FAA12-072C-4ED5-BA76-0FFFAEFDB88A}" dt="2025-10-23T20:04:09.336" v="4089" actId="14100"/>
-        <pc:sldMkLst>
-          <pc:docMk/>
-          <pc:sldMk cId="1757812227" sldId="756"/>
-        </pc:sldMkLst>
-        <pc:spChg chg="mod">
-          <ac:chgData name="Zonghua Gu" userId="9a7e1853e1951ef5" providerId="LiveId" clId="{CF1FAA12-072C-4ED5-BA76-0FFFAEFDB88A}" dt="2025-10-23T20:04:09.336" v="4089" actId="14100"/>
-          <ac:spMkLst>
-            <pc:docMk/>
-            <pc:sldMk cId="1757812227" sldId="756"/>
-            <ac:spMk id="4" creationId="{E4F57FE1-A328-6D2A-AFB7-A6C1600FE210}"/>
-          </ac:spMkLst>
-        </pc:spChg>
-      </pc:sldChg>
-      <pc:sldChg chg="addSp modSp add mod">
-        <pc:chgData name="Zonghua Gu" userId="9a7e1853e1951ef5" providerId="LiveId" clId="{CF1FAA12-072C-4ED5-BA76-0FFFAEFDB88A}" dt="2025-10-05T03:07:25.511" v="2862" actId="1076"/>
+      <pc:sldChg chg="modSp mod">
+        <pc:chgData name="Zonghua Gu" userId="9a7e1853e1951ef5" providerId="LiveId" clId="{CF1FAA12-072C-4ED5-BA76-0FFFAEFDB88A}" dt="2025-12-03T01:29:28.334" v="4722"/>
         <pc:sldMkLst>
           <pc:docMk/>
           <pc:sldMk cId="3049968880" sldId="757"/>
         </pc:sldMkLst>
         <pc:spChg chg="mod">
-          <ac:chgData name="Zonghua Gu" userId="9a7e1853e1951ef5" providerId="LiveId" clId="{CF1FAA12-072C-4ED5-BA76-0FFFAEFDB88A}" dt="2025-10-05T02:53:16.848" v="2848" actId="6549"/>
-          <ac:spMkLst>
-            <pc:docMk/>
-            <pc:sldMk cId="3049968880" sldId="757"/>
-            <ac:spMk id="2" creationId="{C37345B3-FBD4-2D39-F1EB-5F9D94C74C8C}"/>
-          </ac:spMkLst>
-        </pc:spChg>
-        <pc:spChg chg="mod">
-          <ac:chgData name="Zonghua Gu" userId="9a7e1853e1951ef5" providerId="LiveId" clId="{CF1FAA12-072C-4ED5-BA76-0FFFAEFDB88A}" dt="2025-10-05T02:51:57.547" v="2804" actId="313"/>
+          <ac:chgData name="Zonghua Gu" userId="9a7e1853e1951ef5" providerId="LiveId" clId="{CF1FAA12-072C-4ED5-BA76-0FFFAEFDB88A}" dt="2025-12-03T01:24:28.805" v="4713" actId="20577"/>
           <ac:spMkLst>
             <pc:docMk/>
             <pc:sldMk cId="3049968880" sldId="757"/>
@@ -806,15 +319,15 @@
           </ac:spMkLst>
         </pc:spChg>
         <pc:spChg chg="mod">
-          <ac:chgData name="Zonghua Gu" userId="9a7e1853e1951ef5" providerId="LiveId" clId="{CF1FAA12-072C-4ED5-BA76-0FFFAEFDB88A}" dt="2025-10-05T02:52:01.291" v="2819" actId="313"/>
+          <ac:chgData name="Zonghua Gu" userId="9a7e1853e1951ef5" providerId="LiveId" clId="{CF1FAA12-072C-4ED5-BA76-0FFFAEFDB88A}" dt="2025-12-03T01:29:28.334" v="4722"/>
           <ac:spMkLst>
             <pc:docMk/>
             <pc:sldMk cId="3049968880" sldId="757"/>
             <ac:spMk id="5" creationId="{B0B60CED-9D05-2D49-66A9-FB9AB6E901FB}"/>
           </ac:spMkLst>
         </pc:spChg>
-        <pc:spChg chg="add mod">
-          <ac:chgData name="Zonghua Gu" userId="9a7e1853e1951ef5" providerId="LiveId" clId="{CF1FAA12-072C-4ED5-BA76-0FFFAEFDB88A}" dt="2025-10-05T03:07:25.511" v="2862" actId="1076"/>
+        <pc:spChg chg="mod">
+          <ac:chgData name="Zonghua Gu" userId="9a7e1853e1951ef5" providerId="LiveId" clId="{CF1FAA12-072C-4ED5-BA76-0FFFAEFDB88A}" dt="2025-12-03T01:13:32.179" v="4513" actId="1036"/>
           <ac:spMkLst>
             <pc:docMk/>
             <pc:sldMk cId="3049968880" sldId="757"/>
@@ -822,286 +335,145 @@
           </ac:spMkLst>
         </pc:spChg>
       </pc:sldChg>
-      <pc:sldChg chg="modSp add mod">
-        <pc:chgData name="Zonghua Gu" userId="9a7e1853e1951ef5" providerId="LiveId" clId="{CF1FAA12-072C-4ED5-BA76-0FFFAEFDB88A}" dt="2025-10-23T19:59:35.852" v="4079" actId="798"/>
+      <pc:sldChg chg="add">
+        <pc:chgData name="Zonghua Gu" userId="9a7e1853e1951ef5" providerId="LiveId" clId="{CF1FAA12-072C-4ED5-BA76-0FFFAEFDB88A}" dt="2025-12-03T01:44:59.935" v="4770"/>
         <pc:sldMkLst>
           <pc:docMk/>
-          <pc:sldMk cId="414796749" sldId="759"/>
+          <pc:sldMk cId="2937750711" sldId="763"/>
         </pc:sldMkLst>
-        <pc:spChg chg="mod">
-          <ac:chgData name="Zonghua Gu" userId="9a7e1853e1951ef5" providerId="LiveId" clId="{CF1FAA12-072C-4ED5-BA76-0FFFAEFDB88A}" dt="2025-10-14T21:08:29.941" v="2870" actId="20577"/>
-          <ac:spMkLst>
-            <pc:docMk/>
-            <pc:sldMk cId="414796749" sldId="759"/>
-            <ac:spMk id="2" creationId="{00000000-0000-0000-0000-000000000000}"/>
-          </ac:spMkLst>
-        </pc:spChg>
-        <pc:spChg chg="mod">
-          <ac:chgData name="Zonghua Gu" userId="9a7e1853e1951ef5" providerId="LiveId" clId="{CF1FAA12-072C-4ED5-BA76-0FFFAEFDB88A}" dt="2025-10-23T19:53:15.353" v="4067" actId="20577"/>
-          <ac:spMkLst>
-            <pc:docMk/>
-            <pc:sldMk cId="414796749" sldId="759"/>
-            <ac:spMk id="4" creationId="{00000000-0000-0000-0000-000000000000}"/>
-          </ac:spMkLst>
-        </pc:spChg>
-        <pc:spChg chg="mod">
-          <ac:chgData name="Zonghua Gu" userId="9a7e1853e1951ef5" providerId="LiveId" clId="{CF1FAA12-072C-4ED5-BA76-0FFFAEFDB88A}" dt="2025-10-23T19:53:09.692" v="4061" actId="1076"/>
-          <ac:spMkLst>
-            <pc:docMk/>
-            <pc:sldMk cId="414796749" sldId="759"/>
-            <ac:spMk id="5" creationId="{00000000-0000-0000-0000-000000000000}"/>
-          </ac:spMkLst>
-        </pc:spChg>
-        <pc:spChg chg="mod">
-          <ac:chgData name="Zonghua Gu" userId="9a7e1853e1951ef5" providerId="LiveId" clId="{CF1FAA12-072C-4ED5-BA76-0FFFAEFDB88A}" dt="2025-10-23T19:53:09.692" v="4061" actId="1076"/>
-          <ac:spMkLst>
-            <pc:docMk/>
-            <pc:sldMk cId="414796749" sldId="759"/>
-            <ac:spMk id="8" creationId="{00000000-0000-0000-0000-000000000000}"/>
-          </ac:spMkLst>
-        </pc:spChg>
-        <pc:spChg chg="mod">
-          <ac:chgData name="Zonghua Gu" userId="9a7e1853e1951ef5" providerId="LiveId" clId="{CF1FAA12-072C-4ED5-BA76-0FFFAEFDB88A}" dt="2025-10-23T19:53:09.692" v="4061" actId="1076"/>
-          <ac:spMkLst>
-            <pc:docMk/>
-            <pc:sldMk cId="414796749" sldId="759"/>
-            <ac:spMk id="9" creationId="{00000000-0000-0000-0000-000000000000}"/>
-          </ac:spMkLst>
-        </pc:spChg>
-        <pc:graphicFrameChg chg="mod">
-          <ac:chgData name="Zonghua Gu" userId="9a7e1853e1951ef5" providerId="LiveId" clId="{CF1FAA12-072C-4ED5-BA76-0FFFAEFDB88A}" dt="2025-10-23T19:53:09.692" v="4061" actId="1076"/>
-          <ac:graphicFrameMkLst>
-            <pc:docMk/>
-            <pc:sldMk cId="414796749" sldId="759"/>
-            <ac:graphicFrameMk id="6" creationId="{00000000-0000-0000-0000-000000000000}"/>
-          </ac:graphicFrameMkLst>
-        </pc:graphicFrameChg>
-        <pc:graphicFrameChg chg="mod modGraphic">
-          <ac:chgData name="Zonghua Gu" userId="9a7e1853e1951ef5" providerId="LiveId" clId="{CF1FAA12-072C-4ED5-BA76-0FFFAEFDB88A}" dt="2025-10-23T19:59:35.852" v="4079" actId="798"/>
-          <ac:graphicFrameMkLst>
-            <pc:docMk/>
-            <pc:sldMk cId="414796749" sldId="759"/>
-            <ac:graphicFrameMk id="7" creationId="{00000000-0000-0000-0000-000000000000}"/>
-          </ac:graphicFrameMkLst>
-        </pc:graphicFrameChg>
       </pc:sldChg>
-      <pc:sldChg chg="modSp add mod">
-        <pc:chgData name="Zonghua Gu" userId="9a7e1853e1951ef5" providerId="LiveId" clId="{CF1FAA12-072C-4ED5-BA76-0FFFAEFDB88A}" dt="2025-10-23T19:59:40.750" v="4080" actId="798"/>
-        <pc:sldMkLst>
-          <pc:docMk/>
-          <pc:sldMk cId="3252337491" sldId="760"/>
-        </pc:sldMkLst>
-        <pc:spChg chg="mod">
-          <ac:chgData name="Zonghua Gu" userId="9a7e1853e1951ef5" providerId="LiveId" clId="{CF1FAA12-072C-4ED5-BA76-0FFFAEFDB88A}" dt="2025-10-14T21:08:46.973" v="2877" actId="20577"/>
-          <ac:spMkLst>
-            <pc:docMk/>
-            <pc:sldMk cId="3252337491" sldId="760"/>
-            <ac:spMk id="2" creationId="{00000000-0000-0000-0000-000000000000}"/>
-          </ac:spMkLst>
-        </pc:spChg>
-        <pc:spChg chg="mod">
-          <ac:chgData name="Zonghua Gu" userId="9a7e1853e1951ef5" providerId="LiveId" clId="{CF1FAA12-072C-4ED5-BA76-0FFFAEFDB88A}" dt="2025-10-23T19:53:56.779" v="4068" actId="1076"/>
-          <ac:spMkLst>
-            <pc:docMk/>
-            <pc:sldMk cId="3252337491" sldId="760"/>
-            <ac:spMk id="5" creationId="{00000000-0000-0000-0000-000000000000}"/>
-          </ac:spMkLst>
-        </pc:spChg>
-        <pc:spChg chg="mod">
-          <ac:chgData name="Zonghua Gu" userId="9a7e1853e1951ef5" providerId="LiveId" clId="{CF1FAA12-072C-4ED5-BA76-0FFFAEFDB88A}" dt="2025-10-23T19:53:56.779" v="4068" actId="1076"/>
-          <ac:spMkLst>
-            <pc:docMk/>
-            <pc:sldMk cId="3252337491" sldId="760"/>
-            <ac:spMk id="8" creationId="{00000000-0000-0000-0000-000000000000}"/>
-          </ac:spMkLst>
-        </pc:spChg>
-        <pc:spChg chg="mod">
-          <ac:chgData name="Zonghua Gu" userId="9a7e1853e1951ef5" providerId="LiveId" clId="{CF1FAA12-072C-4ED5-BA76-0FFFAEFDB88A}" dt="2025-10-23T19:53:56.779" v="4068" actId="1076"/>
-          <ac:spMkLst>
-            <pc:docMk/>
-            <pc:sldMk cId="3252337491" sldId="760"/>
-            <ac:spMk id="9" creationId="{00000000-0000-0000-0000-000000000000}"/>
-          </ac:spMkLst>
-        </pc:spChg>
-        <pc:graphicFrameChg chg="mod modGraphic">
-          <ac:chgData name="Zonghua Gu" userId="9a7e1853e1951ef5" providerId="LiveId" clId="{CF1FAA12-072C-4ED5-BA76-0FFFAEFDB88A}" dt="2025-10-23T19:53:56.779" v="4068" actId="1076"/>
-          <ac:graphicFrameMkLst>
-            <pc:docMk/>
-            <pc:sldMk cId="3252337491" sldId="760"/>
-            <ac:graphicFrameMk id="6" creationId="{00000000-0000-0000-0000-000000000000}"/>
-          </ac:graphicFrameMkLst>
-        </pc:graphicFrameChg>
-        <pc:graphicFrameChg chg="mod modGraphic">
-          <ac:chgData name="Zonghua Gu" userId="9a7e1853e1951ef5" providerId="LiveId" clId="{CF1FAA12-072C-4ED5-BA76-0FFFAEFDB88A}" dt="2025-10-23T19:59:40.750" v="4080" actId="798"/>
-          <ac:graphicFrameMkLst>
-            <pc:docMk/>
-            <pc:sldMk cId="3252337491" sldId="760"/>
-            <ac:graphicFrameMk id="7" creationId="{00000000-0000-0000-0000-000000000000}"/>
-          </ac:graphicFrameMkLst>
-        </pc:graphicFrameChg>
-      </pc:sldChg>
-      <pc:sldChg chg="modSp add mod">
-        <pc:chgData name="Zonghua Gu" userId="9a7e1853e1951ef5" providerId="LiveId" clId="{CF1FAA12-072C-4ED5-BA76-0FFFAEFDB88A}" dt="2025-10-21T19:44:58.062" v="3485" actId="20577"/>
-        <pc:sldMkLst>
-          <pc:docMk/>
-          <pc:sldMk cId="734650997" sldId="762"/>
-        </pc:sldMkLst>
-        <pc:spChg chg="mod">
-          <ac:chgData name="Zonghua Gu" userId="9a7e1853e1951ef5" providerId="LiveId" clId="{CF1FAA12-072C-4ED5-BA76-0FFFAEFDB88A}" dt="2025-10-21T19:44:58.062" v="3485" actId="20577"/>
-          <ac:spMkLst>
-            <pc:docMk/>
-            <pc:sldMk cId="734650997" sldId="762"/>
-            <ac:spMk id="2" creationId="{00000000-0000-0000-0000-000000000000}"/>
-          </ac:spMkLst>
-        </pc:spChg>
-      </pc:sldChg>
-      <pc:sldChg chg="addSp modSp new mod">
-        <pc:chgData name="Zonghua Gu" userId="9a7e1853e1951ef5" providerId="LiveId" clId="{CF1FAA12-072C-4ED5-BA76-0FFFAEFDB88A}" dt="2025-10-21T19:03:17.053" v="3283" actId="20577"/>
+      <pc:sldChg chg="del">
+        <pc:chgData name="Zonghua Gu" userId="9a7e1853e1951ef5" providerId="LiveId" clId="{CF1FAA12-072C-4ED5-BA76-0FFFAEFDB88A}" dt="2025-12-03T01:44:36.866" v="4769" actId="2696"/>
         <pc:sldMkLst>
           <pc:docMk/>
           <pc:sldMk cId="4214831448" sldId="763"/>
         </pc:sldMkLst>
-        <pc:spChg chg="mod">
-          <ac:chgData name="Zonghua Gu" userId="9a7e1853e1951ef5" providerId="LiveId" clId="{CF1FAA12-072C-4ED5-BA76-0FFFAEFDB88A}" dt="2025-10-21T18:47:00.528" v="2962" actId="20577"/>
-          <ac:spMkLst>
-            <pc:docMk/>
-            <pc:sldMk cId="4214831448" sldId="763"/>
-            <ac:spMk id="2" creationId="{0CCDC4F0-89D8-54C1-7B5F-442BB66DAAA7}"/>
-          </ac:spMkLst>
-        </pc:spChg>
-        <pc:spChg chg="mod">
-          <ac:chgData name="Zonghua Gu" userId="9a7e1853e1951ef5" providerId="LiveId" clId="{CF1FAA12-072C-4ED5-BA76-0FFFAEFDB88A}" dt="2025-10-21T19:03:17.053" v="3283" actId="20577"/>
-          <ac:spMkLst>
-            <pc:docMk/>
-            <pc:sldMk cId="4214831448" sldId="763"/>
-            <ac:spMk id="4" creationId="{4C97CD4C-D1B7-839F-818C-C650C0AA8892}"/>
-          </ac:spMkLst>
-        </pc:spChg>
-        <pc:spChg chg="add mod">
-          <ac:chgData name="Zonghua Gu" userId="9a7e1853e1951ef5" providerId="LiveId" clId="{CF1FAA12-072C-4ED5-BA76-0FFFAEFDB88A}" dt="2025-10-21T19:03:02.485" v="3252" actId="1076"/>
-          <ac:spMkLst>
-            <pc:docMk/>
-            <pc:sldMk cId="4214831448" sldId="763"/>
-            <ac:spMk id="5" creationId="{E5333230-46BA-8663-0449-A907C073A049}"/>
-          </ac:spMkLst>
-        </pc:spChg>
       </pc:sldChg>
-      <pc:sldChg chg="modSp add mod">
-        <pc:chgData name="Zonghua Gu" userId="9a7e1853e1951ef5" providerId="LiveId" clId="{CF1FAA12-072C-4ED5-BA76-0FFFAEFDB88A}" dt="2025-10-21T18:54:07.097" v="3250" actId="1036"/>
+      <pc:sldChg chg="add">
+        <pc:chgData name="Zonghua Gu" userId="9a7e1853e1951ef5" providerId="LiveId" clId="{CF1FAA12-072C-4ED5-BA76-0FFFAEFDB88A}" dt="2025-12-03T01:44:59.935" v="4770"/>
+        <pc:sldMkLst>
+          <pc:docMk/>
+          <pc:sldMk cId="3110859270" sldId="764"/>
+        </pc:sldMkLst>
+      </pc:sldChg>
+      <pc:sldChg chg="modSp del mod">
+        <pc:chgData name="Zonghua Gu" userId="9a7e1853e1951ef5" providerId="LiveId" clId="{CF1FAA12-072C-4ED5-BA76-0FFFAEFDB88A}" dt="2025-12-03T01:44:36.866" v="4769" actId="2696"/>
         <pc:sldMkLst>
           <pc:docMk/>
           <pc:sldMk cId="3848203700" sldId="764"/>
         </pc:sldMkLst>
         <pc:spChg chg="mod">
-          <ac:chgData name="Zonghua Gu" userId="9a7e1853e1951ef5" providerId="LiveId" clId="{CF1FAA12-072C-4ED5-BA76-0FFFAEFDB88A}" dt="2025-10-21T18:51:30.416" v="3128" actId="20577"/>
-          <ac:spMkLst>
-            <pc:docMk/>
-            <pc:sldMk cId="3848203700" sldId="764"/>
-            <ac:spMk id="2" creationId="{5BB67A95-DEC2-DAE0-E275-60B265AA044E}"/>
-          </ac:spMkLst>
-        </pc:spChg>
-        <pc:spChg chg="mod">
-          <ac:chgData name="Zonghua Gu" userId="9a7e1853e1951ef5" providerId="LiveId" clId="{CF1FAA12-072C-4ED5-BA76-0FFFAEFDB88A}" dt="2025-10-21T18:54:07.097" v="3250" actId="1036"/>
+          <ac:chgData name="Zonghua Gu" userId="9a7e1853e1951ef5" providerId="LiveId" clId="{CF1FAA12-072C-4ED5-BA76-0FFFAEFDB88A}" dt="2025-12-03T01:43:46.439" v="4768" actId="20577"/>
           <ac:spMkLst>
             <pc:docMk/>
             <pc:sldMk cId="3848203700" sldId="764"/>
             <ac:spMk id="4" creationId="{0707AC2E-44F3-B02C-EC23-E5EB61FA94EB}"/>
           </ac:spMkLst>
         </pc:spChg>
-        <pc:spChg chg="mod">
-          <ac:chgData name="Zonghua Gu" userId="9a7e1853e1951ef5" providerId="LiveId" clId="{CF1FAA12-072C-4ED5-BA76-0FFFAEFDB88A}" dt="2025-10-21T18:53:55.482" v="3247" actId="1076"/>
-          <ac:spMkLst>
-            <pc:docMk/>
-            <pc:sldMk cId="3848203700" sldId="764"/>
-            <ac:spMk id="5" creationId="{A84A8A79-412F-4394-2139-FF1AAAAEDB7A}"/>
-          </ac:spMkLst>
-        </pc:spChg>
-      </pc:sldChg>
-      <pc:sldChg chg="modSp add mod modTransition">
-        <pc:chgData name="Zonghua Gu" userId="9a7e1853e1951ef5" providerId="LiveId" clId="{CF1FAA12-072C-4ED5-BA76-0FFFAEFDB88A}" dt="2025-10-21T19:46:08.541" v="3536" actId="20577"/>
-        <pc:sldMkLst>
-          <pc:docMk/>
-          <pc:sldMk cId="811401925" sldId="816"/>
-        </pc:sldMkLst>
-        <pc:spChg chg="mod">
-          <ac:chgData name="Zonghua Gu" userId="9a7e1853e1951ef5" providerId="LiveId" clId="{CF1FAA12-072C-4ED5-BA76-0FFFAEFDB88A}" dt="2025-10-21T19:45:41.338" v="3487" actId="1076"/>
-          <ac:spMkLst>
-            <pc:docMk/>
-            <pc:sldMk cId="811401925" sldId="816"/>
-            <ac:spMk id="10" creationId="{1E914C08-96CB-135B-1433-52624F812AD9}"/>
-          </ac:spMkLst>
-        </pc:spChg>
-        <pc:spChg chg="mod">
-          <ac:chgData name="Zonghua Gu" userId="9a7e1853e1951ef5" providerId="LiveId" clId="{CF1FAA12-072C-4ED5-BA76-0FFFAEFDB88A}" dt="2025-10-21T19:46:08.541" v="3536" actId="20577"/>
-          <ac:spMkLst>
-            <pc:docMk/>
-            <pc:sldMk cId="811401925" sldId="816"/>
-            <ac:spMk id="11" creationId="{E0C303F2-641E-019B-CA34-0B02E8722206}"/>
-          </ac:spMkLst>
-        </pc:spChg>
       </pc:sldChg>
       <pc:sldChg chg="addSp delSp modSp add mod modTransition">
-        <pc:chgData name="Zonghua Gu" userId="9a7e1853e1951ef5" providerId="LiveId" clId="{CF1FAA12-072C-4ED5-BA76-0FFFAEFDB88A}" dt="2025-10-21T21:01:43.150" v="3721" actId="20577"/>
+        <pc:chgData name="Zonghua Gu" userId="9a7e1853e1951ef5" providerId="LiveId" clId="{CF1FAA12-072C-4ED5-BA76-0FFFAEFDB88A}" dt="2025-12-03T01:57:29.826" v="4879" actId="1076"/>
         <pc:sldMkLst>
           <pc:docMk/>
           <pc:sldMk cId="436543705" sldId="817"/>
         </pc:sldMkLst>
         <pc:spChg chg="add mod">
-          <ac:chgData name="Zonghua Gu" userId="9a7e1853e1951ef5" providerId="LiveId" clId="{CF1FAA12-072C-4ED5-BA76-0FFFAEFDB88A}" dt="2025-10-21T19:45:45.925" v="3489"/>
+          <ac:chgData name="Zonghua Gu" userId="9a7e1853e1951ef5" providerId="LiveId" clId="{CF1FAA12-072C-4ED5-BA76-0FFFAEFDB88A}" dt="2025-12-03T00:17:23.412" v="4288" actId="1076"/>
           <ac:spMkLst>
             <pc:docMk/>
             <pc:sldMk cId="436543705" sldId="817"/>
-            <ac:spMk id="4" creationId="{F0DD5A71-7F69-8C31-5C46-0FF1815F2840}"/>
+            <ac:spMk id="6" creationId="{7F0BEA20-3647-D290-9E8E-0B4B87DD74F4}"/>
           </ac:spMkLst>
         </pc:spChg>
         <pc:spChg chg="mod">
-          <ac:chgData name="Zonghua Gu" userId="9a7e1853e1951ef5" providerId="LiveId" clId="{CF1FAA12-072C-4ED5-BA76-0FFFAEFDB88A}" dt="2025-10-21T21:01:43.150" v="3721" actId="20577"/>
+          <ac:chgData name="Zonghua Gu" userId="9a7e1853e1951ef5" providerId="LiveId" clId="{CF1FAA12-072C-4ED5-BA76-0FFFAEFDB88A}" dt="2025-12-03T00:21:12.627" v="4392" actId="14100"/>
           <ac:spMkLst>
             <pc:docMk/>
             <pc:sldMk cId="436543705" sldId="817"/>
             <ac:spMk id="11" creationId="{722AEABA-ECF0-EE34-D92D-0B9E8214F92E}"/>
           </ac:spMkLst>
         </pc:spChg>
-        <pc:graphicFrameChg chg="modGraphic">
-          <ac:chgData name="Zonghua Gu" userId="9a7e1853e1951ef5" providerId="LiveId" clId="{CF1FAA12-072C-4ED5-BA76-0FFFAEFDB88A}" dt="2025-10-21T20:22:12.071" v="3603" actId="207"/>
+        <pc:spChg chg="mod">
+          <ac:chgData name="Zonghua Gu" userId="9a7e1853e1951ef5" providerId="LiveId" clId="{CF1FAA12-072C-4ED5-BA76-0FFFAEFDB88A}" dt="2025-12-03T01:57:29.826" v="4879" actId="1076"/>
+          <ac:spMkLst>
+            <pc:docMk/>
+            <pc:sldMk cId="436543705" sldId="817"/>
+            <ac:spMk id="12" creationId="{A8FE334F-F18A-EB69-90F3-94DB53A49559}"/>
+          </ac:spMkLst>
+        </pc:spChg>
+        <pc:spChg chg="add mod">
+          <ac:chgData name="Zonghua Gu" userId="9a7e1853e1951ef5" providerId="LiveId" clId="{CF1FAA12-072C-4ED5-BA76-0FFFAEFDB88A}" dt="2025-12-03T00:19:38.603" v="4343" actId="1037"/>
+          <ac:spMkLst>
+            <pc:docMk/>
+            <pc:sldMk cId="436543705" sldId="817"/>
+            <ac:spMk id="16" creationId="{FC91C62F-544E-446B-5E37-EBD8C0F26C5E}"/>
+          </ac:spMkLst>
+        </pc:spChg>
+        <pc:spChg chg="add mod">
+          <ac:chgData name="Zonghua Gu" userId="9a7e1853e1951ef5" providerId="LiveId" clId="{CF1FAA12-072C-4ED5-BA76-0FFFAEFDB88A}" dt="2025-12-03T01:48:42.495" v="4868" actId="1076"/>
+          <ac:spMkLst>
+            <pc:docMk/>
+            <pc:sldMk cId="436543705" sldId="817"/>
+            <ac:spMk id="20" creationId="{6A32EAF7-51C8-6C8C-E34F-3D982CFA9042}"/>
+          </ac:spMkLst>
+        </pc:spChg>
+        <pc:graphicFrameChg chg="mod">
+          <ac:chgData name="Zonghua Gu" userId="9a7e1853e1951ef5" providerId="LiveId" clId="{CF1FAA12-072C-4ED5-BA76-0FFFAEFDB88A}" dt="2025-12-03T01:48:40.217" v="4867" actId="1076"/>
           <ac:graphicFrameMkLst>
             <pc:docMk/>
             <pc:sldMk cId="436543705" sldId="817"/>
             <ac:graphicFrameMk id="7" creationId="{34E32F45-A466-4D81-2CAD-4DBC2C6742BC}"/>
           </ac:graphicFrameMkLst>
         </pc:graphicFrameChg>
+        <pc:graphicFrameChg chg="mod modGraphic">
+          <ac:chgData name="Zonghua Gu" userId="9a7e1853e1951ef5" providerId="LiveId" clId="{CF1FAA12-072C-4ED5-BA76-0FFFAEFDB88A}" dt="2025-12-03T01:57:19.678" v="4873" actId="207"/>
+          <ac:graphicFrameMkLst>
+            <pc:docMk/>
+            <pc:sldMk cId="436543705" sldId="817"/>
+            <ac:graphicFrameMk id="8" creationId="{9770AA11-4F5C-66E5-32E6-746A87733451}"/>
+          </ac:graphicFrameMkLst>
+        </pc:graphicFrameChg>
+        <pc:cxnChg chg="add mod">
+          <ac:chgData name="Zonghua Gu" userId="9a7e1853e1951ef5" providerId="LiveId" clId="{CF1FAA12-072C-4ED5-BA76-0FFFAEFDB88A}" dt="2025-12-03T00:17:23.412" v="4288" actId="1076"/>
+          <ac:cxnSpMkLst>
+            <pc:docMk/>
+            <pc:sldMk cId="436543705" sldId="817"/>
+            <ac:cxnSpMk id="10" creationId="{83A70247-FCDE-B34D-0418-AD0E73C544B3}"/>
+          </ac:cxnSpMkLst>
+        </pc:cxnChg>
+        <pc:cxnChg chg="add mod">
+          <ac:chgData name="Zonghua Gu" userId="9a7e1853e1951ef5" providerId="LiveId" clId="{CF1FAA12-072C-4ED5-BA76-0FFFAEFDB88A}" dt="2025-12-03T00:18:18.731" v="4317" actId="14100"/>
+          <ac:cxnSpMkLst>
+            <pc:docMk/>
+            <pc:sldMk cId="436543705" sldId="817"/>
+            <ac:cxnSpMk id="17" creationId="{98C581BD-5415-4240-5CDE-EE805D176DFD}"/>
+          </ac:cxnSpMkLst>
+        </pc:cxnChg>
+        <pc:cxnChg chg="add mod">
+          <ac:chgData name="Zonghua Gu" userId="9a7e1853e1951ef5" providerId="LiveId" clId="{CF1FAA12-072C-4ED5-BA76-0FFFAEFDB88A}" dt="2025-12-03T00:18:59.072" v="4330" actId="1076"/>
+          <ac:cxnSpMkLst>
+            <pc:docMk/>
+            <pc:sldMk cId="436543705" sldId="817"/>
+            <ac:cxnSpMk id="21" creationId="{50BCB6B3-8463-2EB8-C9F4-91B6D04C1A17}"/>
+          </ac:cxnSpMkLst>
+        </pc:cxnChg>
       </pc:sldChg>
-      <pc:sldChg chg="new del">
-        <pc:chgData name="Zonghua Gu" userId="9a7e1853e1951ef5" providerId="LiveId" clId="{CF1FAA12-072C-4ED5-BA76-0FFFAEFDB88A}" dt="2025-10-23T19:12:00.062" v="3723" actId="680"/>
-        <pc:sldMkLst>
-          <pc:docMk/>
-          <pc:sldMk cId="578757023" sldId="818"/>
-        </pc:sldMkLst>
-      </pc:sldChg>
-      <pc:sldChg chg="addSp modSp new mod">
-        <pc:chgData name="Zonghua Gu" userId="9a7e1853e1951ef5" providerId="LiveId" clId="{CF1FAA12-072C-4ED5-BA76-0FFFAEFDB88A}" dt="2025-10-23T19:51:31.426" v="4021" actId="20577"/>
+      <pc:sldChg chg="modSp del mod">
+        <pc:chgData name="Zonghua Gu" userId="9a7e1853e1951ef5" providerId="LiveId" clId="{CF1FAA12-072C-4ED5-BA76-0FFFAEFDB88A}" dt="2025-12-03T00:54:50.240" v="4439" actId="2696"/>
         <pc:sldMkLst>
           <pc:docMk/>
           <pc:sldMk cId="1762553256" sldId="818"/>
         </pc:sldMkLst>
         <pc:spChg chg="mod">
-          <ac:chgData name="Zonghua Gu" userId="9a7e1853e1951ef5" providerId="LiveId" clId="{CF1FAA12-072C-4ED5-BA76-0FFFAEFDB88A}" dt="2025-10-23T19:12:20.841" v="3725"/>
-          <ac:spMkLst>
-            <pc:docMk/>
-            <pc:sldMk cId="1762553256" sldId="818"/>
-            <ac:spMk id="2" creationId="{6234EC6E-B891-AF83-E66F-8217385C54F6}"/>
-          </ac:spMkLst>
-        </pc:spChg>
-        <pc:spChg chg="mod">
-          <ac:chgData name="Zonghua Gu" userId="9a7e1853e1951ef5" providerId="LiveId" clId="{CF1FAA12-072C-4ED5-BA76-0FFFAEFDB88A}" dt="2025-10-23T19:17:34.674" v="3769" actId="27636"/>
+          <ac:chgData name="Zonghua Gu" userId="9a7e1853e1951ef5" providerId="LiveId" clId="{CF1FAA12-072C-4ED5-BA76-0FFFAEFDB88A}" dt="2025-12-03T00:54:33.958" v="4438" actId="207"/>
           <ac:spMkLst>
             <pc:docMk/>
             <pc:sldMk cId="1762553256" sldId="818"/>
             <ac:spMk id="4" creationId="{3DC23136-53FC-2BF5-8C7C-A3096D3761E3}"/>
           </ac:spMkLst>
         </pc:spChg>
-        <pc:spChg chg="add mod">
-          <ac:chgData name="Zonghua Gu" userId="9a7e1853e1951ef5" providerId="LiveId" clId="{CF1FAA12-072C-4ED5-BA76-0FFFAEFDB88A}" dt="2025-10-23T19:51:31.426" v="4021" actId="20577"/>
+        <pc:spChg chg="mod">
+          <ac:chgData name="Zonghua Gu" userId="9a7e1853e1951ef5" providerId="LiveId" clId="{CF1FAA12-072C-4ED5-BA76-0FFFAEFDB88A}" dt="2025-12-03T00:54:09.365" v="4433" actId="20577"/>
           <ac:spMkLst>
             <pc:docMk/>
             <pc:sldMk cId="1762553256" sldId="818"/>
@@ -1109,95 +481,90 @@
           </ac:spMkLst>
         </pc:spChg>
       </pc:sldChg>
-      <pc:sldChg chg="addSp delSp modSp add mod">
-        <pc:chgData name="Zonghua Gu" userId="9a7e1853e1951ef5" providerId="LiveId" clId="{CF1FAA12-072C-4ED5-BA76-0FFFAEFDB88A}" dt="2025-10-23T19:35:16.892" v="4010" actId="1076"/>
+      <pc:sldChg chg="add">
+        <pc:chgData name="Zonghua Gu" userId="9a7e1853e1951ef5" providerId="LiveId" clId="{CF1FAA12-072C-4ED5-BA76-0FFFAEFDB88A}" dt="2025-12-03T01:45:44.565" v="4772"/>
+        <pc:sldMkLst>
+          <pc:docMk/>
+          <pc:sldMk cId="1829076800" sldId="818"/>
+        </pc:sldMkLst>
+      </pc:sldChg>
+      <pc:sldChg chg="add del">
+        <pc:chgData name="Zonghua Gu" userId="9a7e1853e1951ef5" providerId="LiveId" clId="{CF1FAA12-072C-4ED5-BA76-0FFFAEFDB88A}" dt="2025-12-03T01:45:39.993" v="4771" actId="2696"/>
+        <pc:sldMkLst>
+          <pc:docMk/>
+          <pc:sldMk cId="3867596834" sldId="818"/>
+        </pc:sldMkLst>
+      </pc:sldChg>
+      <pc:sldChg chg="add del">
+        <pc:chgData name="Zonghua Gu" userId="9a7e1853e1951ef5" providerId="LiveId" clId="{CF1FAA12-072C-4ED5-BA76-0FFFAEFDB88A}" dt="2025-12-03T01:45:39.993" v="4771" actId="2696"/>
+        <pc:sldMkLst>
+          <pc:docMk/>
+          <pc:sldMk cId="698050531" sldId="819"/>
+        </pc:sldMkLst>
+      </pc:sldChg>
+      <pc:sldChg chg="add">
+        <pc:chgData name="Zonghua Gu" userId="9a7e1853e1951ef5" providerId="LiveId" clId="{CF1FAA12-072C-4ED5-BA76-0FFFAEFDB88A}" dt="2025-12-03T01:45:44.565" v="4772"/>
+        <pc:sldMkLst>
+          <pc:docMk/>
+          <pc:sldMk cId="2287290416" sldId="819"/>
+        </pc:sldMkLst>
+      </pc:sldChg>
+      <pc:sldChg chg="modSp del mod">
+        <pc:chgData name="Zonghua Gu" userId="9a7e1853e1951ef5" providerId="LiveId" clId="{CF1FAA12-072C-4ED5-BA76-0FFFAEFDB88A}" dt="2025-12-03T00:54:50.240" v="4439" actId="2696"/>
         <pc:sldMkLst>
           <pc:docMk/>
           <pc:sldMk cId="4286255382" sldId="819"/>
         </pc:sldMkLst>
         <pc:spChg chg="mod">
-          <ac:chgData name="Zonghua Gu" userId="9a7e1853e1951ef5" providerId="LiveId" clId="{CF1FAA12-072C-4ED5-BA76-0FFFAEFDB88A}" dt="2025-10-23T19:17:47.402" v="3775" actId="20577"/>
-          <ac:spMkLst>
-            <pc:docMk/>
-            <pc:sldMk cId="4286255382" sldId="819"/>
-            <ac:spMk id="2" creationId="{BBCA5A9E-A770-8E75-1A17-1AA527EAD98D}"/>
-          </ac:spMkLst>
-        </pc:spChg>
-        <pc:spChg chg="mod">
-          <ac:chgData name="Zonghua Gu" userId="9a7e1853e1951ef5" providerId="LiveId" clId="{CF1FAA12-072C-4ED5-BA76-0FFFAEFDB88A}" dt="2025-10-23T19:35:16.892" v="4010" actId="1076"/>
+          <ac:chgData name="Zonghua Gu" userId="9a7e1853e1951ef5" providerId="LiveId" clId="{CF1FAA12-072C-4ED5-BA76-0FFFAEFDB88A}" dt="2025-12-03T00:28:54.368" v="4393" actId="1036"/>
           <ac:spMkLst>
             <pc:docMk/>
             <pc:sldMk cId="4286255382" sldId="819"/>
             <ac:spMk id="5" creationId="{667005E6-B78A-DE6F-E3EA-2180A0B55757}"/>
           </ac:spMkLst>
         </pc:spChg>
-        <pc:picChg chg="add del mod">
-          <ac:chgData name="Zonghua Gu" userId="9a7e1853e1951ef5" providerId="LiveId" clId="{CF1FAA12-072C-4ED5-BA76-0FFFAEFDB88A}" dt="2025-10-23T19:25:27.434" v="3920" actId="478"/>
-          <ac:picMkLst>
-            <pc:docMk/>
-            <pc:sldMk cId="4286255382" sldId="819"/>
-            <ac:picMk id="7" creationId="{D527C467-1204-8437-B97A-AFD3A47E2EE5}"/>
-          </ac:picMkLst>
-        </pc:picChg>
       </pc:sldChg>
-      <pc:sldChg chg="modSp new mod">
-        <pc:chgData name="Zonghua Gu" userId="9a7e1853e1951ef5" providerId="LiveId" clId="{CF1FAA12-072C-4ED5-BA76-0FFFAEFDB88A}" dt="2025-10-23T19:33:29.650" v="4009" actId="20577"/>
+      <pc:sldChg chg="add del">
+        <pc:chgData name="Zonghua Gu" userId="9a7e1853e1951ef5" providerId="LiveId" clId="{CF1FAA12-072C-4ED5-BA76-0FFFAEFDB88A}" dt="2025-12-03T01:45:39.993" v="4771" actId="2696"/>
+        <pc:sldMkLst>
+          <pc:docMk/>
+          <pc:sldMk cId="1237979943" sldId="820"/>
+        </pc:sldMkLst>
+      </pc:sldChg>
+      <pc:sldChg chg="add">
+        <pc:chgData name="Zonghua Gu" userId="9a7e1853e1951ef5" providerId="LiveId" clId="{CF1FAA12-072C-4ED5-BA76-0FFFAEFDB88A}" dt="2025-12-03T01:45:44.565" v="4772"/>
+        <pc:sldMkLst>
+          <pc:docMk/>
+          <pc:sldMk cId="1555766300" sldId="820"/>
+        </pc:sldMkLst>
+      </pc:sldChg>
+      <pc:sldChg chg="del">
+        <pc:chgData name="Zonghua Gu" userId="9a7e1853e1951ef5" providerId="LiveId" clId="{CF1FAA12-072C-4ED5-BA76-0FFFAEFDB88A}" dt="2025-12-03T00:54:50.240" v="4439" actId="2696"/>
         <pc:sldMkLst>
           <pc:docMk/>
           <pc:sldMk cId="1599510770" sldId="820"/>
         </pc:sldMkLst>
+      </pc:sldChg>
+      <pc:sldChg chg="modSp new mod ord">
+        <pc:chgData name="Zonghua Gu" userId="9a7e1853e1951ef5" providerId="LiveId" clId="{CF1FAA12-072C-4ED5-BA76-0FFFAEFDB88A}" dt="2025-12-03T01:47:40.611" v="4862" actId="122"/>
+        <pc:sldMkLst>
+          <pc:docMk/>
+          <pc:sldMk cId="780454370" sldId="821"/>
+        </pc:sldMkLst>
         <pc:spChg chg="mod">
-          <ac:chgData name="Zonghua Gu" userId="9a7e1853e1951ef5" providerId="LiveId" clId="{CF1FAA12-072C-4ED5-BA76-0FFFAEFDB88A}" dt="2025-10-23T19:30:35.783" v="3952" actId="20577"/>
+          <ac:chgData name="Zonghua Gu" userId="9a7e1853e1951ef5" providerId="LiveId" clId="{CF1FAA12-072C-4ED5-BA76-0FFFAEFDB88A}" dt="2025-12-03T01:47:40.611" v="4862" actId="122"/>
           <ac:spMkLst>
             <pc:docMk/>
-            <pc:sldMk cId="1599510770" sldId="820"/>
-            <ac:spMk id="2" creationId="{66BC4FE6-4AA6-4480-9C1A-B149B1641A6D}"/>
+            <pc:sldMk cId="780454370" sldId="821"/>
+            <ac:spMk id="2" creationId="{2D6E065B-6E1F-B821-412C-FD0AA6D6FFAC}"/>
           </ac:spMkLst>
         </pc:spChg>
         <pc:spChg chg="mod">
-          <ac:chgData name="Zonghua Gu" userId="9a7e1853e1951ef5" providerId="LiveId" clId="{CF1FAA12-072C-4ED5-BA76-0FFFAEFDB88A}" dt="2025-10-23T19:33:29.650" v="4009" actId="20577"/>
+          <ac:chgData name="Zonghua Gu" userId="9a7e1853e1951ef5" providerId="LiveId" clId="{CF1FAA12-072C-4ED5-BA76-0FFFAEFDB88A}" dt="2025-12-03T01:46:57.893" v="4860" actId="207"/>
           <ac:spMkLst>
             <pc:docMk/>
-            <pc:sldMk cId="1599510770" sldId="820"/>
-            <ac:spMk id="4" creationId="{0D3349F2-AD23-9931-E5C9-567BF200C2ED}"/>
-          </ac:spMkLst>
-        </pc:spChg>
-      </pc:sldChg>
-      <pc:sldChg chg="modSp new del mod">
-        <pc:chgData name="Zonghua Gu" userId="9a7e1853e1951ef5" providerId="LiveId" clId="{CF1FAA12-072C-4ED5-BA76-0FFFAEFDB88A}" dt="2025-10-23T20:10:35.308" v="4114" actId="47"/>
-        <pc:sldMkLst>
-          <pc:docMk/>
-          <pc:sldMk cId="3074872043" sldId="821"/>
-        </pc:sldMkLst>
-        <pc:spChg chg="mod">
-          <ac:chgData name="Zonghua Gu" userId="9a7e1853e1951ef5" providerId="LiveId" clId="{CF1FAA12-072C-4ED5-BA76-0FFFAEFDB88A}" dt="2025-10-23T20:10:12.486" v="4108" actId="20577"/>
-          <ac:spMkLst>
-            <pc:docMk/>
-            <pc:sldMk cId="3074872043" sldId="821"/>
-            <ac:spMk id="4" creationId="{F4F62F9A-6DF8-D709-2497-B82F30CA91E7}"/>
-          </ac:spMkLst>
-        </pc:spChg>
-      </pc:sldChg>
-      <pc:sldChg chg="addSp modSp add del mod">
-        <pc:chgData name="Zonghua Gu" userId="9a7e1853e1951ef5" providerId="LiveId" clId="{CF1FAA12-072C-4ED5-BA76-0FFFAEFDB88A}" dt="2025-10-23T19:56:58.502" v="4076" actId="47"/>
-        <pc:sldMkLst>
-          <pc:docMk/>
-          <pc:sldMk cId="4157902731" sldId="821"/>
-        </pc:sldMkLst>
-        <pc:spChg chg="mod">
-          <ac:chgData name="Zonghua Gu" userId="9a7e1853e1951ef5" providerId="LiveId" clId="{CF1FAA12-072C-4ED5-BA76-0FFFAEFDB88A}" dt="2025-10-23T19:56:14.613" v="4071" actId="27636"/>
-          <ac:spMkLst>
-            <pc:docMk/>
-            <pc:sldMk cId="4157902731" sldId="821"/>
-            <ac:spMk id="2" creationId="{00000000-0000-0000-0000-000000000000}"/>
-          </ac:spMkLst>
-        </pc:spChg>
-        <pc:spChg chg="add mod">
-          <ac:chgData name="Zonghua Gu" userId="9a7e1853e1951ef5" providerId="LiveId" clId="{CF1FAA12-072C-4ED5-BA76-0FFFAEFDB88A}" dt="2025-10-23T19:56:14.585" v="4070"/>
-          <ac:spMkLst>
-            <pc:docMk/>
-            <pc:sldMk cId="4157902731" sldId="821"/>
-            <ac:spMk id="15" creationId="{23A2C4D0-C83C-9988-8112-4C535274FC53}"/>
+            <pc:sldMk cId="780454370" sldId="821"/>
+            <ac:spMk id="4" creationId="{0C9C6FA3-D066-E5DA-E405-23B7F5B00998}"/>
           </ac:spMkLst>
         </pc:spChg>
       </pc:sldChg>
@@ -1300,7 +667,7 @@
           <a:p>
             <a:fld id="{3B161579-C726-4AFD-89FC-66D961EAF8EA}" type="datetimeFigureOut">
               <a:rPr lang="en-US" smtClean="0"/>
-              <a:t>10/23/2025</a:t>
+              <a:t>12/2/2025</a:t>
             </a:fld>
             <a:endParaRPr lang="en-US"/>
           </a:p>
@@ -1478,7 +845,7 @@
             <a:fld id="{0C5DCA7A-C3FD-4606-A3AD-864BD96433D4}" type="datetimeFigureOut">
               <a:rPr lang="en-US" smtClean="0"/>
               <a:pPr/>
-              <a:t>10/23/2025</a:t>
+              <a:t>12/2/2025</a:t>
             </a:fld>
             <a:endParaRPr lang="en-US"/>
           </a:p>
@@ -2103,122 +1470,240 @@
           <a:p>
             <a:r>
               <a:rPr lang="en-US" dirty="0"/>
-              <a:t> @ int mystery2(int c)</a:t>
-            </a:r>
-          </a:p>
-          <a:p>
+              <a:t>Here’s what the program </a:t>
+            </a:r>
+            <a:r>
+              <a:rPr lang="en-US" i="1" dirty="0"/>
+              <a:t>does in practice</a:t>
+            </a:r>
             <a:r>
               <a:rPr lang="en-US" dirty="0"/>
-              <a:t>    @ r0: c  -&gt; returns r0</a:t>
-            </a:r>
-          </a:p>
-          <a:p>
-            <a:endParaRPr lang="en-US" dirty="0"/>
+              <a:t>:</a:t>
+            </a:r>
           </a:p>
           <a:p>
             <a:r>
               <a:rPr lang="en-US" dirty="0"/>
-              <a:t>    .text</a:t>
-            </a:r>
-          </a:p>
-          <a:p>
+              <a:t>It starts with </a:t>
+            </a:r>
+            <a:r>
+              <a:rPr lang="en-US" sz="1200" kern="1200" dirty="0">
+                <a:solidFill>
+                  <a:schemeClr val="tx1"/>
+                </a:solidFill>
+                <a:latin typeface="+mn-lt"/>
+                <a:ea typeface="+mn-ea"/>
+                <a:cs typeface="+mn-cs"/>
+              </a:rPr>
+              <a:t>x0 = 1</a:t>
+            </a:r>
             <a:r>
               <a:rPr lang="en-US" dirty="0"/>
-              <a:t>    .align 2</a:t>
+              <a:t>.</a:t>
             </a:r>
           </a:p>
           <a:p>
             <a:r>
               <a:rPr lang="en-US" dirty="0"/>
-              <a:t>    .global mystery2</a:t>
-            </a:r>
-          </a:p>
-          <a:p>
+              <a:t>It loops, incrementing </a:t>
+            </a:r>
+            <a:r>
+              <a:rPr lang="en-US" sz="1200" kern="1200" dirty="0">
+                <a:solidFill>
+                  <a:schemeClr val="tx1"/>
+                </a:solidFill>
+                <a:latin typeface="+mn-lt"/>
+                <a:ea typeface="+mn-ea"/>
+                <a:cs typeface="+mn-cs"/>
+              </a:rPr>
+              <a:t>x0</a:t>
+            </a:r>
             <a:r>
               <a:rPr lang="en-US" dirty="0"/>
-              <a:t>mystery2:</a:t>
+              <a:t> each time.</a:t>
             </a:r>
           </a:p>
           <a:p>
             <a:r>
               <a:rPr lang="en-US" dirty="0"/>
-              <a:t>    </a:t>
-            </a:r>
-            <a:r>
-              <a:rPr lang="en-US" dirty="0" err="1"/>
-              <a:t>cmp</a:t>
+              <a:t>When </a:t>
+            </a:r>
+            <a:r>
+              <a:rPr lang="en-US" sz="1200" kern="1200" dirty="0">
+                <a:solidFill>
+                  <a:schemeClr val="tx1"/>
+                </a:solidFill>
+                <a:latin typeface="+mn-lt"/>
+                <a:ea typeface="+mn-ea"/>
+                <a:cs typeface="+mn-cs"/>
+              </a:rPr>
+              <a:t>x0</a:t>
             </a:r>
             <a:r>
               <a:rPr lang="en-US" dirty="0"/>
-              <a:t>     r0, #'A'                @ c ? 'A'</a:t>
-            </a:r>
-          </a:p>
-          <a:p>
+              <a:t> reaches </a:t>
+            </a:r>
+            <a:r>
+              <a:rPr lang="en-US" sz="1200" kern="1200" dirty="0">
+                <a:solidFill>
+                  <a:schemeClr val="tx1"/>
+                </a:solidFill>
+                <a:latin typeface="+mn-lt"/>
+                <a:ea typeface="+mn-ea"/>
+                <a:cs typeface="+mn-cs"/>
+              </a:rPr>
+              <a:t>5</a:t>
+            </a:r>
             <a:r>
               <a:rPr lang="en-US" dirty="0"/>
-              <a:t>    </a:t>
-            </a:r>
-            <a:r>
-              <a:rPr lang="en-US" dirty="0" err="1"/>
-              <a:t>blt</a:t>
+              <a:t>, it calls </a:t>
+            </a:r>
+            <a:r>
+              <a:rPr lang="en-US" sz="1200" kern="1200" dirty="0">
+                <a:solidFill>
+                  <a:schemeClr val="tx1"/>
+                </a:solidFill>
+                <a:latin typeface="+mn-lt"/>
+                <a:ea typeface="+mn-ea"/>
+                <a:cs typeface="+mn-cs"/>
+              </a:rPr>
+              <a:t>call</a:t>
             </a:r>
             <a:r>
               <a:rPr lang="en-US" dirty="0"/>
-              <a:t>     1f                      @ if c &lt; 'A' -&gt; skip add</a:t>
-            </a:r>
-          </a:p>
-          <a:p>
+              <a:t>.</a:t>
+            </a:r>
+          </a:p>
+          <a:p>
+            <a:r>
+              <a:rPr lang="en-US" sz="1200" kern="1200" dirty="0">
+                <a:solidFill>
+                  <a:schemeClr val="tx1"/>
+                </a:solidFill>
+                <a:latin typeface="+mn-lt"/>
+                <a:ea typeface="+mn-ea"/>
+                <a:cs typeface="+mn-cs"/>
+              </a:rPr>
+              <a:t>call</a:t>
+            </a:r>
             <a:r>
               <a:rPr lang="en-US" dirty="0"/>
-              <a:t>    </a:t>
-            </a:r>
-            <a:r>
-              <a:rPr lang="en-US" dirty="0" err="1"/>
-              <a:t>cmp</a:t>
+              <a:t> adds </a:t>
+            </a:r>
+            <a:r>
+              <a:rPr lang="en-US" sz="1200" kern="1200" dirty="0">
+                <a:solidFill>
+                  <a:schemeClr val="tx1"/>
+                </a:solidFill>
+                <a:latin typeface="+mn-lt"/>
+                <a:ea typeface="+mn-ea"/>
+                <a:cs typeface="+mn-cs"/>
+              </a:rPr>
+              <a:t>255</a:t>
             </a:r>
             <a:r>
               <a:rPr lang="en-US" dirty="0"/>
-              <a:t>     r0, #'Z'                @ c ? 'Z'</a:t>
-            </a:r>
-          </a:p>
-          <a:p>
+              <a:t> to </a:t>
+            </a:r>
+            <a:r>
+              <a:rPr lang="en-US" sz="1200" kern="1200" dirty="0">
+                <a:solidFill>
+                  <a:schemeClr val="tx1"/>
+                </a:solidFill>
+                <a:latin typeface="+mn-lt"/>
+                <a:ea typeface="+mn-ea"/>
+                <a:cs typeface="+mn-cs"/>
+              </a:rPr>
+              <a:t>x7</a:t>
+            </a:r>
             <a:r>
               <a:rPr lang="en-US" dirty="0"/>
-              <a:t>    </a:t>
-            </a:r>
-            <a:r>
-              <a:rPr lang="en-US" dirty="0" err="1"/>
-              <a:t>bgt</a:t>
+              <a:t> and resets </a:t>
+            </a:r>
+            <a:r>
+              <a:rPr lang="en-US" sz="1200" kern="1200" dirty="0">
+                <a:solidFill>
+                  <a:schemeClr val="tx1"/>
+                </a:solidFill>
+                <a:latin typeface="+mn-lt"/>
+                <a:ea typeface="+mn-ea"/>
+                <a:cs typeface="+mn-cs"/>
+              </a:rPr>
+              <a:t>x0</a:t>
             </a:r>
             <a:r>
               <a:rPr lang="en-US" dirty="0"/>
-              <a:t>     1f                      @ if c &gt; 'Z' -&gt; skip add</a:t>
-            </a:r>
-          </a:p>
-          <a:p>
+              <a:t> to </a:t>
+            </a:r>
+            <a:r>
+              <a:rPr lang="en-US" sz="1200" kern="1200" dirty="0">
+                <a:solidFill>
+                  <a:schemeClr val="tx1"/>
+                </a:solidFill>
+                <a:latin typeface="+mn-lt"/>
+                <a:ea typeface="+mn-ea"/>
+                <a:cs typeface="+mn-cs"/>
+              </a:rPr>
+              <a:t>1</a:t>
+            </a:r>
             <a:r>
               <a:rPr lang="en-US" dirty="0"/>
-              <a:t>    add     r0, r0, #('a' - 'A')    @ c += 32 (ASCII delta)</a:t>
+              <a:t>.</a:t>
             </a:r>
           </a:p>
           <a:p>
             <a:r>
               <a:rPr lang="en-US" dirty="0"/>
-              <a:t>1:</a:t>
-            </a:r>
-          </a:p>
-          <a:p>
+              <a:t>Control returns to </a:t>
+            </a:r>
+            <a:r>
+              <a:rPr lang="en-US" sz="1200" kern="1200" dirty="0">
+                <a:solidFill>
+                  <a:schemeClr val="tx1"/>
+                </a:solidFill>
+                <a:latin typeface="+mn-lt"/>
+                <a:ea typeface="+mn-ea"/>
+                <a:cs typeface="+mn-cs"/>
+              </a:rPr>
+              <a:t>main</a:t>
+            </a:r>
             <a:r>
               <a:rPr lang="en-US" dirty="0"/>
-              <a:t>    bx      </a:t>
-            </a:r>
-            <a:r>
-              <a:rPr lang="en-US" dirty="0" err="1"/>
-              <a:t>lr</a:t>
-            </a:r>
+              <a:t>, and the cycle repeats.</a:t>
+            </a:r>
+          </a:p>
+          <a:p>
             <a:r>
               <a:rPr lang="en-US" dirty="0"/>
-              <a:t>                      @ return c (possibly adjusted)</a:t>
+              <a:t>So the pattern goes like this:</a:t>
+            </a:r>
+          </a:p>
+          <a:p>
+            <a:pPr rtl="0"/>
+            <a:r>
+              <a:rPr lang="en-US" sz="1200" kern="1200" dirty="0">
+                <a:solidFill>
+                  <a:schemeClr val="tx1"/>
+                </a:solidFill>
+                <a:latin typeface="+mn-lt"/>
+                <a:ea typeface="+mn-ea"/>
+                <a:cs typeface="+mn-cs"/>
+              </a:rPr>
+              <a:t>x0: 1 → 2 → 3 → 4 → 5 → (call resets to 1)</a:t>
+            </a:r>
+          </a:p>
+          <a:p>
+            <a:pPr rtl="0"/>
+            <a:r>
+              <a:rPr lang="en-US" sz="1200" kern="1200" dirty="0">
+                <a:solidFill>
+                  <a:schemeClr val="tx1"/>
+                </a:solidFill>
+                <a:latin typeface="+mn-lt"/>
+                <a:ea typeface="+mn-ea"/>
+                <a:cs typeface="+mn-cs"/>
+              </a:rPr>
+              <a:t>x7: +255 each time x0 reaches 5</a:t>
             </a:r>
           </a:p>
         </p:txBody>
@@ -2250,7 +1735,7 @@
     </p:spTree>
     <p:extLst>
       <p:ext uri="{BB962C8B-B14F-4D97-AF65-F5344CB8AC3E}">
-        <p14:creationId xmlns:p14="http://schemas.microsoft.com/office/powerpoint/2010/main" val="388830642"/>
+        <p14:creationId xmlns:p14="http://schemas.microsoft.com/office/powerpoint/2010/main" val="2433729361"/>
       </p:ext>
     </p:extLst>
   </p:cSld>
@@ -2268,7 +1753,7 @@
         <p:cNvPr id="1" name="">
           <a:extLst>
             <a:ext uri="{FF2B5EF4-FFF2-40B4-BE49-F238E27FC236}">
-              <a16:creationId xmlns:a16="http://schemas.microsoft.com/office/drawing/2014/main" id="{37150F2D-B710-7C2B-F932-9CA73BD177B8}"/>
+              <a16:creationId xmlns:a16="http://schemas.microsoft.com/office/drawing/2014/main" id="{8D17C537-0F01-0DCA-2284-5B6554C4A3FD}"/>
             </a:ext>
           </a:extLst>
         </p:cNvPr>
@@ -2288,7 +1773,7 @@
           <p:cNvPr id="2" name="Slide Image Placeholder 1">
             <a:extLst>
               <a:ext uri="{FF2B5EF4-FFF2-40B4-BE49-F238E27FC236}">
-                <a16:creationId xmlns:a16="http://schemas.microsoft.com/office/drawing/2014/main" id="{8E32C7E1-AE8A-FAD0-696A-6424492F1A96}"/>
+                <a16:creationId xmlns:a16="http://schemas.microsoft.com/office/drawing/2014/main" id="{AFD3AD5C-C850-531A-91F6-BCF6A2A1F1B2}"/>
               </a:ext>
             </a:extLst>
           </p:cNvPr>
@@ -2306,7 +1791,7 @@
           <p:cNvPr id="3" name="Notes Placeholder 2">
             <a:extLst>
               <a:ext uri="{FF2B5EF4-FFF2-40B4-BE49-F238E27FC236}">
-                <a16:creationId xmlns:a16="http://schemas.microsoft.com/office/drawing/2014/main" id="{23F8D7F5-51E1-6057-8428-AB4BEC5BD9BA}"/>
+                <a16:creationId xmlns:a16="http://schemas.microsoft.com/office/drawing/2014/main" id="{C5A54735-AC8D-E1A4-D4D6-D561E501E42C}"/>
               </a:ext>
             </a:extLst>
           </p:cNvPr>
@@ -2324,122 +1809,240 @@
           <a:p>
             <a:r>
               <a:rPr lang="en-US" dirty="0"/>
-              <a:t> @ int mystery2(int c)</a:t>
-            </a:r>
-          </a:p>
-          <a:p>
+              <a:t>Here’s what the program </a:t>
+            </a:r>
+            <a:r>
+              <a:rPr lang="en-US" i="1" dirty="0"/>
+              <a:t>does in practice</a:t>
+            </a:r>
             <a:r>
               <a:rPr lang="en-US" dirty="0"/>
-              <a:t>    @ r0: c  -&gt; returns r0</a:t>
-            </a:r>
-          </a:p>
-          <a:p>
-            <a:endParaRPr lang="en-US" dirty="0"/>
+              <a:t>:</a:t>
+            </a:r>
           </a:p>
           <a:p>
             <a:r>
               <a:rPr lang="en-US" dirty="0"/>
-              <a:t>    .text</a:t>
-            </a:r>
-          </a:p>
-          <a:p>
+              <a:t>It starts with </a:t>
+            </a:r>
+            <a:r>
+              <a:rPr lang="en-US" sz="1200" kern="1200" dirty="0">
+                <a:solidFill>
+                  <a:schemeClr val="tx1"/>
+                </a:solidFill>
+                <a:latin typeface="+mn-lt"/>
+                <a:ea typeface="+mn-ea"/>
+                <a:cs typeface="+mn-cs"/>
+              </a:rPr>
+              <a:t>x0 = 1</a:t>
+            </a:r>
             <a:r>
               <a:rPr lang="en-US" dirty="0"/>
-              <a:t>    .align 2</a:t>
+              <a:t>.</a:t>
             </a:r>
           </a:p>
           <a:p>
             <a:r>
               <a:rPr lang="en-US" dirty="0"/>
-              <a:t>    .global mystery2</a:t>
-            </a:r>
-          </a:p>
-          <a:p>
+              <a:t>It loops, incrementing </a:t>
+            </a:r>
+            <a:r>
+              <a:rPr lang="en-US" sz="1200" kern="1200" dirty="0">
+                <a:solidFill>
+                  <a:schemeClr val="tx1"/>
+                </a:solidFill>
+                <a:latin typeface="+mn-lt"/>
+                <a:ea typeface="+mn-ea"/>
+                <a:cs typeface="+mn-cs"/>
+              </a:rPr>
+              <a:t>x0</a:t>
+            </a:r>
             <a:r>
               <a:rPr lang="en-US" dirty="0"/>
-              <a:t>mystery2:</a:t>
+              <a:t> each time.</a:t>
             </a:r>
           </a:p>
           <a:p>
             <a:r>
               <a:rPr lang="en-US" dirty="0"/>
-              <a:t>    </a:t>
-            </a:r>
-            <a:r>
-              <a:rPr lang="en-US" dirty="0" err="1"/>
-              <a:t>cmp</a:t>
+              <a:t>When </a:t>
+            </a:r>
+            <a:r>
+              <a:rPr lang="en-US" sz="1200" kern="1200" dirty="0">
+                <a:solidFill>
+                  <a:schemeClr val="tx1"/>
+                </a:solidFill>
+                <a:latin typeface="+mn-lt"/>
+                <a:ea typeface="+mn-ea"/>
+                <a:cs typeface="+mn-cs"/>
+              </a:rPr>
+              <a:t>x0</a:t>
             </a:r>
             <a:r>
               <a:rPr lang="en-US" dirty="0"/>
-              <a:t>     r0, #'A'                @ c ? 'A'</a:t>
-            </a:r>
-          </a:p>
-          <a:p>
+              <a:t> reaches </a:t>
+            </a:r>
+            <a:r>
+              <a:rPr lang="en-US" sz="1200" kern="1200" dirty="0">
+                <a:solidFill>
+                  <a:schemeClr val="tx1"/>
+                </a:solidFill>
+                <a:latin typeface="+mn-lt"/>
+                <a:ea typeface="+mn-ea"/>
+                <a:cs typeface="+mn-cs"/>
+              </a:rPr>
+              <a:t>5</a:t>
+            </a:r>
             <a:r>
               <a:rPr lang="en-US" dirty="0"/>
-              <a:t>    </a:t>
-            </a:r>
-            <a:r>
-              <a:rPr lang="en-US" dirty="0" err="1"/>
-              <a:t>blt</a:t>
+              <a:t>, it calls </a:t>
+            </a:r>
+            <a:r>
+              <a:rPr lang="en-US" sz="1200" kern="1200" dirty="0">
+                <a:solidFill>
+                  <a:schemeClr val="tx1"/>
+                </a:solidFill>
+                <a:latin typeface="+mn-lt"/>
+                <a:ea typeface="+mn-ea"/>
+                <a:cs typeface="+mn-cs"/>
+              </a:rPr>
+              <a:t>call</a:t>
             </a:r>
             <a:r>
               <a:rPr lang="en-US" dirty="0"/>
-              <a:t>     1f                      @ if c &lt; 'A' -&gt; skip add</a:t>
-            </a:r>
-          </a:p>
-          <a:p>
+              <a:t>.</a:t>
+            </a:r>
+          </a:p>
+          <a:p>
+            <a:r>
+              <a:rPr lang="en-US" sz="1200" kern="1200" dirty="0">
+                <a:solidFill>
+                  <a:schemeClr val="tx1"/>
+                </a:solidFill>
+                <a:latin typeface="+mn-lt"/>
+                <a:ea typeface="+mn-ea"/>
+                <a:cs typeface="+mn-cs"/>
+              </a:rPr>
+              <a:t>call</a:t>
+            </a:r>
             <a:r>
               <a:rPr lang="en-US" dirty="0"/>
-              <a:t>    </a:t>
-            </a:r>
-            <a:r>
-              <a:rPr lang="en-US" dirty="0" err="1"/>
-              <a:t>cmp</a:t>
+              <a:t> adds </a:t>
+            </a:r>
+            <a:r>
+              <a:rPr lang="en-US" sz="1200" kern="1200" dirty="0">
+                <a:solidFill>
+                  <a:schemeClr val="tx1"/>
+                </a:solidFill>
+                <a:latin typeface="+mn-lt"/>
+                <a:ea typeface="+mn-ea"/>
+                <a:cs typeface="+mn-cs"/>
+              </a:rPr>
+              <a:t>255</a:t>
             </a:r>
             <a:r>
               <a:rPr lang="en-US" dirty="0"/>
-              <a:t>     r0, #'Z'                @ c ? 'Z'</a:t>
-            </a:r>
-          </a:p>
-          <a:p>
+              <a:t> to </a:t>
+            </a:r>
+            <a:r>
+              <a:rPr lang="en-US" sz="1200" kern="1200" dirty="0">
+                <a:solidFill>
+                  <a:schemeClr val="tx1"/>
+                </a:solidFill>
+                <a:latin typeface="+mn-lt"/>
+                <a:ea typeface="+mn-ea"/>
+                <a:cs typeface="+mn-cs"/>
+              </a:rPr>
+              <a:t>x7</a:t>
+            </a:r>
             <a:r>
               <a:rPr lang="en-US" dirty="0"/>
-              <a:t>    </a:t>
-            </a:r>
-            <a:r>
-              <a:rPr lang="en-US" dirty="0" err="1"/>
-              <a:t>bgt</a:t>
+              <a:t> and resets </a:t>
+            </a:r>
+            <a:r>
+              <a:rPr lang="en-US" sz="1200" kern="1200" dirty="0">
+                <a:solidFill>
+                  <a:schemeClr val="tx1"/>
+                </a:solidFill>
+                <a:latin typeface="+mn-lt"/>
+                <a:ea typeface="+mn-ea"/>
+                <a:cs typeface="+mn-cs"/>
+              </a:rPr>
+              <a:t>x0</a:t>
             </a:r>
             <a:r>
               <a:rPr lang="en-US" dirty="0"/>
-              <a:t>     1f                      @ if c &gt; 'Z' -&gt; skip add</a:t>
-            </a:r>
-          </a:p>
-          <a:p>
+              <a:t> to </a:t>
+            </a:r>
+            <a:r>
+              <a:rPr lang="en-US" sz="1200" kern="1200" dirty="0">
+                <a:solidFill>
+                  <a:schemeClr val="tx1"/>
+                </a:solidFill>
+                <a:latin typeface="+mn-lt"/>
+                <a:ea typeface="+mn-ea"/>
+                <a:cs typeface="+mn-cs"/>
+              </a:rPr>
+              <a:t>1</a:t>
+            </a:r>
             <a:r>
               <a:rPr lang="en-US" dirty="0"/>
-              <a:t>    add     r0, r0, #('a' - 'A')    @ c += 32 (ASCII delta)</a:t>
+              <a:t>.</a:t>
             </a:r>
           </a:p>
           <a:p>
             <a:r>
               <a:rPr lang="en-US" dirty="0"/>
-              <a:t>1:</a:t>
-            </a:r>
-          </a:p>
-          <a:p>
+              <a:t>Control returns to </a:t>
+            </a:r>
+            <a:r>
+              <a:rPr lang="en-US" sz="1200" kern="1200" dirty="0">
+                <a:solidFill>
+                  <a:schemeClr val="tx1"/>
+                </a:solidFill>
+                <a:latin typeface="+mn-lt"/>
+                <a:ea typeface="+mn-ea"/>
+                <a:cs typeface="+mn-cs"/>
+              </a:rPr>
+              <a:t>main</a:t>
+            </a:r>
             <a:r>
               <a:rPr lang="en-US" dirty="0"/>
-              <a:t>    bx      </a:t>
-            </a:r>
-            <a:r>
-              <a:rPr lang="en-US" dirty="0" err="1"/>
-              <a:t>lr</a:t>
-            </a:r>
+              <a:t>, and the cycle repeats.</a:t>
+            </a:r>
+          </a:p>
+          <a:p>
             <a:r>
               <a:rPr lang="en-US" dirty="0"/>
-              <a:t>                      @ return c (possibly adjusted)</a:t>
+              <a:t>So the pattern goes like this:</a:t>
+            </a:r>
+          </a:p>
+          <a:p>
+            <a:pPr rtl="0"/>
+            <a:r>
+              <a:rPr lang="en-US" sz="1200" kern="1200" dirty="0">
+                <a:solidFill>
+                  <a:schemeClr val="tx1"/>
+                </a:solidFill>
+                <a:latin typeface="+mn-lt"/>
+                <a:ea typeface="+mn-ea"/>
+                <a:cs typeface="+mn-cs"/>
+              </a:rPr>
+              <a:t>x0: 1 → 2 → 3 → 4 → 5 → (call resets to 1)</a:t>
+            </a:r>
+          </a:p>
+          <a:p>
+            <a:pPr rtl="0"/>
+            <a:r>
+              <a:rPr lang="en-US" sz="1200" kern="1200" dirty="0">
+                <a:solidFill>
+                  <a:schemeClr val="tx1"/>
+                </a:solidFill>
+                <a:latin typeface="+mn-lt"/>
+                <a:ea typeface="+mn-ea"/>
+                <a:cs typeface="+mn-cs"/>
+              </a:rPr>
+              <a:t>x7: +255 each time x0 reaches 5</a:t>
             </a:r>
           </a:p>
         </p:txBody>
@@ -2449,7 +2052,7 @@
           <p:cNvPr id="4" name="Slide Number Placeholder 3">
             <a:extLst>
               <a:ext uri="{FF2B5EF4-FFF2-40B4-BE49-F238E27FC236}">
-                <a16:creationId xmlns:a16="http://schemas.microsoft.com/office/drawing/2014/main" id="{AA788E4B-BC69-55C9-4689-173165A5E7DA}"/>
+                <a16:creationId xmlns:a16="http://schemas.microsoft.com/office/drawing/2014/main" id="{AFBE590A-94DE-53D9-D55F-DBC7B7287FF3}"/>
               </a:ext>
             </a:extLst>
           </p:cNvPr>
@@ -2477,7 +2080,7 @@
     </p:spTree>
     <p:extLst>
       <p:ext uri="{BB962C8B-B14F-4D97-AF65-F5344CB8AC3E}">
-        <p14:creationId xmlns:p14="http://schemas.microsoft.com/office/powerpoint/2010/main" val="1972380797"/>
+        <p14:creationId xmlns:p14="http://schemas.microsoft.com/office/powerpoint/2010/main" val="1773790553"/>
       </p:ext>
     </p:extLst>
   </p:cSld>
@@ -2532,272 +2135,124 @@
           <a:lstStyle/>
           <a:p>
             <a:r>
-              <a:rPr lang="en-US" sz="1200" dirty="0"/>
-              <a:t>Straight-line with conditional execution</a:t>
-            </a:r>
-          </a:p>
-          <a:p>
-            <a:r>
-              <a:rPr lang="en-US" sz="1200" dirty="0"/>
-              <a:t>foo:</a:t>
-            </a:r>
-            <a:br>
-              <a:rPr lang="en-US" sz="1200" dirty="0"/>
-            </a:br>
-            <a:r>
-              <a:rPr lang="en-US" sz="1200" dirty="0"/>
-              <a:t>    ADD     r2, r0, r1      ; r2 = x + y</a:t>
-            </a:r>
-            <a:br>
-              <a:rPr lang="en-US" sz="1200" dirty="0"/>
-            </a:br>
-            <a:r>
-              <a:rPr lang="en-US" sz="1200" dirty="0"/>
-              <a:t>    CMP     r2, #0          ; sets N,Z,V,C for signed compare to 0</a:t>
-            </a:r>
-            <a:br>
-              <a:rPr lang="en-US" sz="1200" dirty="0"/>
-            </a:br>
-            <a:r>
-              <a:rPr lang="en-US" sz="1200" dirty="0"/>
-              <a:t>    MOVLT   r0, #0        ; if (</a:t>
-            </a:r>
-            <a:r>
-              <a:rPr lang="en-US" sz="1200" dirty="0" err="1"/>
-              <a:t>x+y</a:t>
-            </a:r>
-            <a:r>
-              <a:rPr lang="en-US" sz="1200" dirty="0"/>
-              <a:t>) &lt; 0 -&gt; r0 = 0</a:t>
-            </a:r>
-            <a:br>
-              <a:rPr lang="en-US" sz="1200" dirty="0"/>
-            </a:br>
-            <a:r>
-              <a:rPr lang="en-US" sz="1200" dirty="0"/>
-              <a:t>    MOVGE   r0, #1       ; else r0 = 1</a:t>
-            </a:r>
-            <a:br>
-              <a:rPr lang="en-US" sz="1200" dirty="0"/>
-            </a:br>
-            <a:r>
-              <a:rPr lang="en-US" sz="1200" dirty="0"/>
-              <a:t>    BX      </a:t>
-            </a:r>
-            <a:r>
-              <a:rPr lang="en-US" sz="1200" dirty="0" err="1"/>
+              <a:rPr lang="en-US" dirty="0"/>
+              <a:t> @ int mystery2(int c)</a:t>
+            </a:r>
+          </a:p>
+          <a:p>
+            <a:r>
+              <a:rPr lang="en-US" dirty="0"/>
+              <a:t>    @ r0: c  -&gt; returns r0</a:t>
+            </a:r>
+          </a:p>
+          <a:p>
+            <a:endParaRPr lang="en-US" dirty="0"/>
+          </a:p>
+          <a:p>
+            <a:r>
+              <a:rPr lang="en-US" dirty="0"/>
+              <a:t>    .text</a:t>
+            </a:r>
+          </a:p>
+          <a:p>
+            <a:r>
+              <a:rPr lang="en-US" dirty="0"/>
+              <a:t>    .align 2</a:t>
+            </a:r>
+          </a:p>
+          <a:p>
+            <a:r>
+              <a:rPr lang="en-US" dirty="0"/>
+              <a:t>    .global mystery2</a:t>
+            </a:r>
+          </a:p>
+          <a:p>
+            <a:r>
+              <a:rPr lang="en-US" dirty="0"/>
+              <a:t>mystery2:</a:t>
+            </a:r>
+          </a:p>
+          <a:p>
+            <a:r>
+              <a:rPr lang="en-US" dirty="0"/>
+              <a:t>    </a:t>
+            </a:r>
+            <a:r>
+              <a:rPr lang="en-US" dirty="0" err="1"/>
+              <a:t>cmp</a:t>
+            </a:r>
+            <a:r>
+              <a:rPr lang="en-US" dirty="0"/>
+              <a:t>     r0, #'A'                @ c ? 'A'</a:t>
+            </a:r>
+          </a:p>
+          <a:p>
+            <a:r>
+              <a:rPr lang="en-US" dirty="0"/>
+              <a:t>    </a:t>
+            </a:r>
+            <a:r>
+              <a:rPr lang="en-US" dirty="0" err="1"/>
+              <a:t>blt</a:t>
+            </a:r>
+            <a:r>
+              <a:rPr lang="en-US" dirty="0"/>
+              <a:t>     1f                      @ if c &lt; 'A' -&gt; skip add</a:t>
+            </a:r>
+          </a:p>
+          <a:p>
+            <a:r>
+              <a:rPr lang="en-US" dirty="0"/>
+              <a:t>    </a:t>
+            </a:r>
+            <a:r>
+              <a:rPr lang="en-US" dirty="0" err="1"/>
+              <a:t>cmp</a:t>
+            </a:r>
+            <a:r>
+              <a:rPr lang="en-US" dirty="0"/>
+              <a:t>     r0, #'Z'                @ c ? 'Z'</a:t>
+            </a:r>
+          </a:p>
+          <a:p>
+            <a:r>
+              <a:rPr lang="en-US" dirty="0"/>
+              <a:t>    </a:t>
+            </a:r>
+            <a:r>
+              <a:rPr lang="en-US" dirty="0" err="1"/>
+              <a:t>bgt</a:t>
+            </a:r>
+            <a:r>
+              <a:rPr lang="en-US" dirty="0"/>
+              <a:t>     1f                      @ if c &gt; 'Z' -&gt; skip add</a:t>
+            </a:r>
+          </a:p>
+          <a:p>
+            <a:r>
+              <a:rPr lang="en-US" dirty="0"/>
+              <a:t>    add     r0, r0, #('a' - 'A')    @ c += 32 (ASCII delta)</a:t>
+            </a:r>
+          </a:p>
+          <a:p>
+            <a:r>
+              <a:rPr lang="en-US" dirty="0"/>
+              <a:t>1:</a:t>
+            </a:r>
+          </a:p>
+          <a:p>
+            <a:r>
+              <a:rPr lang="en-US" dirty="0"/>
+              <a:t>    bx      </a:t>
+            </a:r>
+            <a:r>
+              <a:rPr lang="en-US" dirty="0" err="1"/>
               <a:t>lr</a:t>
             </a:r>
-            <a:endParaRPr lang="en-US" sz="1200" dirty="0"/>
-          </a:p>
-          <a:p>
-            <a:pPr lvl="0"/>
-            <a:endParaRPr lang="en-US" sz="1200" kern="1200" dirty="0">
-              <a:solidFill>
-                <a:schemeClr val="tx1"/>
-              </a:solidFill>
-              <a:effectLst/>
-              <a:latin typeface="+mn-lt"/>
-              <a:ea typeface="+mn-ea"/>
-              <a:cs typeface="+mn-cs"/>
-            </a:endParaRPr>
-          </a:p>
-          <a:p>
-            <a:r>
-              <a:rPr lang="en-US" sz="1200" dirty="0"/>
-              <a:t>Conditional branch to label</a:t>
-            </a:r>
-          </a:p>
-          <a:p>
-            <a:r>
-              <a:rPr lang="en-US" sz="1200" dirty="0"/>
-              <a:t>foo:</a:t>
-            </a:r>
-            <a:br>
-              <a:rPr lang="en-US" sz="1200" dirty="0"/>
-            </a:br>
-            <a:r>
-              <a:rPr lang="en-US" sz="1200" dirty="0"/>
-              <a:t>    ADD     r2, r0, r1</a:t>
-            </a:r>
-            <a:br>
-              <a:rPr lang="en-US" sz="1200" dirty="0"/>
-            </a:br>
-            <a:r>
-              <a:rPr lang="en-US" sz="1200" dirty="0"/>
-              <a:t>    CMP     r2, #0</a:t>
-            </a:r>
-            <a:br>
-              <a:rPr lang="en-US" sz="1200" dirty="0"/>
-            </a:br>
-            <a:r>
-              <a:rPr lang="en-US" sz="1200" dirty="0"/>
-              <a:t>    BLT     .</a:t>
-            </a:r>
-            <a:r>
-              <a:rPr lang="en-US" sz="1200" dirty="0" err="1"/>
-              <a:t>Lneg</a:t>
-            </a:r>
-            <a:br>
-              <a:rPr lang="en-US" sz="1200" dirty="0"/>
-            </a:br>
-            <a:r>
-              <a:rPr lang="en-US" sz="1200" dirty="0"/>
-              <a:t>    MOV     r0, #1</a:t>
-            </a:r>
-            <a:br>
-              <a:rPr lang="en-US" sz="1200" dirty="0"/>
-            </a:br>
-            <a:r>
-              <a:rPr lang="en-US" sz="1200" dirty="0"/>
-              <a:t>    BX      </a:t>
-            </a:r>
-            <a:r>
-              <a:rPr lang="en-US" sz="1200" dirty="0" err="1"/>
-              <a:t>lr</a:t>
-            </a:r>
-            <a:br>
-              <a:rPr lang="en-US" sz="1200" dirty="0"/>
-            </a:br>
-            <a:r>
-              <a:rPr lang="en-US" sz="1200" dirty="0"/>
-              <a:t>.</a:t>
-            </a:r>
-            <a:r>
-              <a:rPr lang="en-US" sz="1200" dirty="0" err="1"/>
-              <a:t>Lneg</a:t>
-            </a:r>
-            <a:r>
-              <a:rPr lang="en-US" sz="1200" dirty="0"/>
-              <a:t>:</a:t>
-            </a:r>
-            <a:br>
-              <a:rPr lang="en-US" sz="1200" dirty="0"/>
-            </a:br>
-            <a:r>
-              <a:rPr lang="en-US" sz="1200" dirty="0"/>
-              <a:t>    MOV     r0, #0</a:t>
-            </a:r>
-            <a:br>
-              <a:rPr lang="en-US" sz="1200" dirty="0"/>
-            </a:br>
-            <a:r>
-              <a:rPr lang="en-US" sz="1200" dirty="0"/>
-              <a:t>    BX      </a:t>
-            </a:r>
-            <a:r>
-              <a:rPr lang="en-US" sz="1200" dirty="0" err="1"/>
-              <a:t>lr</a:t>
-            </a:r>
-            <a:endParaRPr lang="pt-BR" sz="1200" dirty="0"/>
-          </a:p>
-          <a:p>
-            <a:pPr lvl="0"/>
-            <a:endParaRPr lang="en-US" sz="1200" kern="1200" dirty="0">
-              <a:solidFill>
-                <a:schemeClr val="tx1"/>
-              </a:solidFill>
-              <a:effectLst/>
-              <a:latin typeface="+mn-lt"/>
-              <a:ea typeface="+mn-ea"/>
-              <a:cs typeface="+mn-cs"/>
-            </a:endParaRPr>
-          </a:p>
-          <a:p>
-            <a:pPr lvl="0"/>
-            <a:r>
-              <a:rPr lang="en-US" sz="1200" kern="1200" dirty="0">
-                <a:solidFill>
-                  <a:schemeClr val="tx1"/>
-                </a:solidFill>
-                <a:effectLst/>
-                <a:latin typeface="+mn-lt"/>
-                <a:ea typeface="+mn-ea"/>
-                <a:cs typeface="+mn-cs"/>
-              </a:rPr>
-              <a:t>Calling convention: inputs </a:t>
-            </a:r>
-            <a:r>
-              <a:rPr lang="en-US" sz="1200" kern="1200" dirty="0" err="1">
-                <a:solidFill>
-                  <a:schemeClr val="tx1"/>
-                </a:solidFill>
-                <a:effectLst/>
-                <a:latin typeface="+mn-lt"/>
-                <a:ea typeface="+mn-ea"/>
-                <a:cs typeface="+mn-cs"/>
-              </a:rPr>
-              <a:t>x,y</a:t>
-            </a:r>
-            <a:r>
-              <a:rPr lang="en-US" sz="1200" kern="1200" dirty="0">
-                <a:solidFill>
-                  <a:schemeClr val="tx1"/>
-                </a:solidFill>
-                <a:effectLst/>
-                <a:latin typeface="+mn-lt"/>
-                <a:ea typeface="+mn-ea"/>
-                <a:cs typeface="+mn-cs"/>
-              </a:rPr>
-              <a:t> in r0,r1; result in r0; </a:t>
-            </a:r>
-            <a:r>
-              <a:rPr lang="en-US" sz="1200" kern="1200" dirty="0" err="1">
-                <a:solidFill>
-                  <a:schemeClr val="tx1"/>
-                </a:solidFill>
-                <a:effectLst/>
-                <a:latin typeface="+mn-lt"/>
-                <a:ea typeface="+mn-ea"/>
-                <a:cs typeface="+mn-cs"/>
-              </a:rPr>
-              <a:t>lr</a:t>
-            </a:r>
-            <a:r>
-              <a:rPr lang="en-US" sz="1200" kern="1200" dirty="0">
-                <a:solidFill>
-                  <a:schemeClr val="tx1"/>
-                </a:solidFill>
-                <a:effectLst/>
-                <a:latin typeface="+mn-lt"/>
-                <a:ea typeface="+mn-ea"/>
-                <a:cs typeface="+mn-cs"/>
-              </a:rPr>
-              <a:t> holds return address; no callee-saved registers are clobbered.</a:t>
-            </a:r>
-          </a:p>
-          <a:p>
-            <a:pPr lvl="0"/>
-            <a:r>
-              <a:rPr lang="en-US" sz="1200" kern="1200" dirty="0">
-                <a:solidFill>
-                  <a:schemeClr val="tx1"/>
-                </a:solidFill>
-                <a:effectLst/>
-                <a:latin typeface="+mn-lt"/>
-                <a:ea typeface="+mn-ea"/>
-                <a:cs typeface="+mn-cs"/>
-              </a:rPr>
-              <a:t>Choose MI/PL (based on N) or LT/GE (signed) consistently; both are correct when flags come from the sum or a compare to zero.</a:t>
-            </a:r>
-          </a:p>
-          <a:p>
-            <a:pPr lvl="0"/>
-            <a:r>
-              <a:rPr lang="en-US" sz="1200" kern="1200" dirty="0">
-                <a:solidFill>
-                  <a:schemeClr val="tx1"/>
-                </a:solidFill>
-                <a:effectLst/>
-                <a:latin typeface="+mn-lt"/>
-                <a:ea typeface="+mn-ea"/>
-                <a:cs typeface="+mn-cs"/>
-              </a:rPr>
-              <a:t>For Thumb-2, prefer conditional branches or the IT block variant if permitted by assembler; for classic ARM state, full conditional MOVs avoid branches.</a:t>
-            </a:r>
-          </a:p>
-          <a:p>
-            <a:endParaRPr lang="en-US" dirty="0"/>
+            <a:r>
+              <a:rPr lang="en-US" dirty="0"/>
+              <a:t>                      @ return c (possibly adjusted)</a:t>
+            </a:r>
           </a:p>
         </p:txBody>
       </p:sp>
@@ -2819,7 +2274,7 @@
             <a:fld id="{D46F4F04-2BB1-473A-9274-1B455085D21A}" type="slidenum">
               <a:rPr lang="en-US" smtClean="0"/>
               <a:pPr/>
-              <a:t>24</a:t>
+              <a:t>23</a:t>
             </a:fld>
             <a:endParaRPr lang="en-US"/>
           </a:p>
@@ -2828,7 +2283,7 @@
     </p:spTree>
     <p:extLst>
       <p:ext uri="{BB962C8B-B14F-4D97-AF65-F5344CB8AC3E}">
-        <p14:creationId xmlns:p14="http://schemas.microsoft.com/office/powerpoint/2010/main" val="297106540"/>
+        <p14:creationId xmlns:p14="http://schemas.microsoft.com/office/powerpoint/2010/main" val="388830642"/>
       </p:ext>
     </p:extLst>
   </p:cSld>
@@ -2843,7 +2298,13 @@
   <p:cSld>
     <p:spTree>
       <p:nvGrpSpPr>
-        <p:cNvPr id="1" name=""/>
+        <p:cNvPr id="1" name="">
+          <a:extLst>
+            <a:ext uri="{FF2B5EF4-FFF2-40B4-BE49-F238E27FC236}">
+              <a16:creationId xmlns:a16="http://schemas.microsoft.com/office/drawing/2014/main" id="{37150F2D-B710-7C2B-F932-9CA73BD177B8}"/>
+            </a:ext>
+          </a:extLst>
+        </p:cNvPr>
         <p:cNvGrpSpPr/>
         <p:nvPr/>
       </p:nvGrpSpPr>
@@ -2857,7 +2318,13 @@
       </p:grpSpPr>
       <p:sp>
         <p:nvSpPr>
-          <p:cNvPr id="2" name="Slide Image Placeholder 1"/>
+          <p:cNvPr id="2" name="Slide Image Placeholder 1">
+            <a:extLst>
+              <a:ext uri="{FF2B5EF4-FFF2-40B4-BE49-F238E27FC236}">
+                <a16:creationId xmlns:a16="http://schemas.microsoft.com/office/drawing/2014/main" id="{8E32C7E1-AE8A-FAD0-696A-6424492F1A96}"/>
+              </a:ext>
+            </a:extLst>
+          </p:cNvPr>
           <p:cNvSpPr>
             <a:spLocks noGrp="1" noRot="1" noChangeAspect="1"/>
           </p:cNvSpPr>
@@ -2869,7 +2336,13 @@
       </p:sp>
       <p:sp>
         <p:nvSpPr>
-          <p:cNvPr id="3" name="Notes Placeholder 2"/>
+          <p:cNvPr id="3" name="Notes Placeholder 2">
+            <a:extLst>
+              <a:ext uri="{FF2B5EF4-FFF2-40B4-BE49-F238E27FC236}">
+                <a16:creationId xmlns:a16="http://schemas.microsoft.com/office/drawing/2014/main" id="{23F8D7F5-51E1-6057-8428-AB4BEC5BD9BA}"/>
+              </a:ext>
+            </a:extLst>
+          </p:cNvPr>
           <p:cNvSpPr>
             <a:spLocks noGrp="1"/>
           </p:cNvSpPr>
@@ -2882,36 +2355,137 @@
           <a:bodyPr/>
           <a:lstStyle/>
           <a:p>
-            <a:pPr marL="0" marR="0" lvl="0" indent="0" algn="l" defTabSz="914400" rtl="0" eaLnBrk="1" fontAlgn="auto" latinLnBrk="0" hangingPunct="1">
-              <a:lnSpc>
-                <a:spcPct val="100000"/>
-              </a:lnSpc>
-              <a:spcBef>
-                <a:spcPts val="0"/>
-              </a:spcBef>
-              <a:spcAft>
-                <a:spcPts val="0"/>
-              </a:spcAft>
-              <a:buClrTx/>
-              <a:buSzTx/>
-              <a:buFontTx/>
-              <a:buNone/>
-              <a:tabLst/>
-              <a:defRPr/>
-            </a:pPr>
             <a:r>
               <a:rPr lang="en-US" dirty="0"/>
-              <a:t>(In the exams, I may provide most of the code and let you fill in the blanks.)</a:t>
+              <a:t> @ int mystery2(int c)</a:t>
+            </a:r>
+          </a:p>
+          <a:p>
+            <a:r>
+              <a:rPr lang="en-US" dirty="0"/>
+              <a:t>    @ r0: c  -&gt; returns r0</a:t>
             </a:r>
           </a:p>
           <a:p>
             <a:endParaRPr lang="en-US" dirty="0"/>
           </a:p>
-        </p:txBody>
-      </p:sp>
-      <p:sp>
-        <p:nvSpPr>
-          <p:cNvPr id="4" name="Slide Number Placeholder 3"/>
+          <a:p>
+            <a:r>
+              <a:rPr lang="en-US" dirty="0"/>
+              <a:t>    .text</a:t>
+            </a:r>
+          </a:p>
+          <a:p>
+            <a:r>
+              <a:rPr lang="en-US" dirty="0"/>
+              <a:t>    .align 2</a:t>
+            </a:r>
+          </a:p>
+          <a:p>
+            <a:r>
+              <a:rPr lang="en-US" dirty="0"/>
+              <a:t>    .global mystery2</a:t>
+            </a:r>
+          </a:p>
+          <a:p>
+            <a:r>
+              <a:rPr lang="en-US" dirty="0"/>
+              <a:t>mystery2:</a:t>
+            </a:r>
+          </a:p>
+          <a:p>
+            <a:r>
+              <a:rPr lang="en-US" dirty="0"/>
+              <a:t>    </a:t>
+            </a:r>
+            <a:r>
+              <a:rPr lang="en-US" dirty="0" err="1"/>
+              <a:t>cmp</a:t>
+            </a:r>
+            <a:r>
+              <a:rPr lang="en-US" dirty="0"/>
+              <a:t>     r0, #'A'                @ c ? 'A'</a:t>
+            </a:r>
+          </a:p>
+          <a:p>
+            <a:r>
+              <a:rPr lang="en-US" dirty="0"/>
+              <a:t>    </a:t>
+            </a:r>
+            <a:r>
+              <a:rPr lang="en-US" dirty="0" err="1"/>
+              <a:t>blt</a:t>
+            </a:r>
+            <a:r>
+              <a:rPr lang="en-US" dirty="0"/>
+              <a:t>     1f                      @ if c &lt; 'A' -&gt; skip add</a:t>
+            </a:r>
+          </a:p>
+          <a:p>
+            <a:r>
+              <a:rPr lang="en-US" dirty="0"/>
+              <a:t>    </a:t>
+            </a:r>
+            <a:r>
+              <a:rPr lang="en-US" dirty="0" err="1"/>
+              <a:t>cmp</a:t>
+            </a:r>
+            <a:r>
+              <a:rPr lang="en-US" dirty="0"/>
+              <a:t>     r0, #'Z'                @ c ? 'Z'</a:t>
+            </a:r>
+          </a:p>
+          <a:p>
+            <a:r>
+              <a:rPr lang="en-US" dirty="0"/>
+              <a:t>    </a:t>
+            </a:r>
+            <a:r>
+              <a:rPr lang="en-US" dirty="0" err="1"/>
+              <a:t>bgt</a:t>
+            </a:r>
+            <a:r>
+              <a:rPr lang="en-US" dirty="0"/>
+              <a:t>     1f                      @ if c &gt; 'Z' -&gt; skip add</a:t>
+            </a:r>
+          </a:p>
+          <a:p>
+            <a:r>
+              <a:rPr lang="en-US" dirty="0"/>
+              <a:t>    add     r0, r0, #('a' - 'A')    @ c += 32 (ASCII delta)</a:t>
+            </a:r>
+          </a:p>
+          <a:p>
+            <a:r>
+              <a:rPr lang="en-US" dirty="0"/>
+              <a:t>1:</a:t>
+            </a:r>
+          </a:p>
+          <a:p>
+            <a:r>
+              <a:rPr lang="en-US" dirty="0"/>
+              <a:t>    bx      </a:t>
+            </a:r>
+            <a:r>
+              <a:rPr lang="en-US" dirty="0" err="1"/>
+              <a:t>lr</a:t>
+            </a:r>
+            <a:r>
+              <a:rPr lang="en-US" dirty="0"/>
+              <a:t>                      @ return c (possibly adjusted)</a:t>
+            </a:r>
+          </a:p>
+        </p:txBody>
+      </p:sp>
+      <p:sp>
+        <p:nvSpPr>
+          <p:cNvPr id="4" name="Slide Number Placeholder 3">
+            <a:extLst>
+              <a:ext uri="{FF2B5EF4-FFF2-40B4-BE49-F238E27FC236}">
+                <a16:creationId xmlns:a16="http://schemas.microsoft.com/office/drawing/2014/main" id="{AA788E4B-BC69-55C9-4689-173165A5E7DA}"/>
+              </a:ext>
+            </a:extLst>
+          </p:cNvPr>
           <p:cNvSpPr>
             <a:spLocks noGrp="1"/>
           </p:cNvSpPr>
@@ -2927,7 +2501,7 @@
             <a:fld id="{D46F4F04-2BB1-473A-9274-1B455085D21A}" type="slidenum">
               <a:rPr lang="en-US" smtClean="0"/>
               <a:pPr/>
-              <a:t>25</a:t>
+              <a:t>24</a:t>
             </a:fld>
             <a:endParaRPr lang="en-US"/>
           </a:p>
@@ -2936,7 +2510,7 @@
     </p:spTree>
     <p:extLst>
       <p:ext uri="{BB962C8B-B14F-4D97-AF65-F5344CB8AC3E}">
-        <p14:creationId xmlns:p14="http://schemas.microsoft.com/office/powerpoint/2010/main" val="2816329202"/>
+        <p14:creationId xmlns:p14="http://schemas.microsoft.com/office/powerpoint/2010/main" val="1972380797"/>
       </p:ext>
     </p:extLst>
   </p:cSld>
@@ -2990,34 +2564,269 @@
           <a:bodyPr/>
           <a:lstStyle/>
           <a:p>
-            <a:pPr marL="0" marR="0" lvl="0" indent="0" algn="l" defTabSz="914400" rtl="0" eaLnBrk="1" fontAlgn="auto" latinLnBrk="0" hangingPunct="1">
-              <a:lnSpc>
-                <a:spcPct val="100000"/>
-              </a:lnSpc>
-              <a:spcBef>
-                <a:spcPts val="0"/>
-              </a:spcBef>
-              <a:spcAft>
-                <a:spcPts val="0"/>
-              </a:spcAft>
-              <a:buClrTx/>
-              <a:buSzTx/>
-              <a:buFontTx/>
-              <a:buNone/>
-              <a:tabLst/>
-              <a:defRPr/>
-            </a:pPr>
-            <a:r>
-              <a:rPr lang="en-US" dirty="0"/>
-              <a:t>C function returns an int16_t, but the assembly returns the full 32-bit sum in r0.  Caller will see a 32-bit value; the correct behavior when the C function is declared to return int16_t is to return the 16-bit value </a:t>
-            </a:r>
-            <a:r>
-              <a:rPr lang="en-US" i="1" dirty="0"/>
-              <a:t>sign-extended</a:t>
-            </a:r>
-            <a:r>
-              <a:rPr lang="en-US" dirty="0"/>
-              <a:t> to 32 bits. </a:t>
+            <a:r>
+              <a:rPr lang="en-US" sz="1200" dirty="0"/>
+              <a:t>Straight-line with conditional execution</a:t>
+            </a:r>
+          </a:p>
+          <a:p>
+            <a:r>
+              <a:rPr lang="en-US" sz="1200" dirty="0"/>
+              <a:t>foo:</a:t>
+            </a:r>
+            <a:br>
+              <a:rPr lang="en-US" sz="1200" dirty="0"/>
+            </a:br>
+            <a:r>
+              <a:rPr lang="en-US" sz="1200" dirty="0"/>
+              <a:t>    ADD     r2, r0, r1      ; r2 = x + y</a:t>
+            </a:r>
+            <a:br>
+              <a:rPr lang="en-US" sz="1200" dirty="0"/>
+            </a:br>
+            <a:r>
+              <a:rPr lang="en-US" sz="1200" dirty="0"/>
+              <a:t>    CMP     r2, #0          ; sets N,Z,V,C for signed compare to 0</a:t>
+            </a:r>
+            <a:br>
+              <a:rPr lang="en-US" sz="1200" dirty="0"/>
+            </a:br>
+            <a:r>
+              <a:rPr lang="en-US" sz="1200" dirty="0"/>
+              <a:t>    MOVLT   r0, #0        ; if (</a:t>
+            </a:r>
+            <a:r>
+              <a:rPr lang="en-US" sz="1200" dirty="0" err="1"/>
+              <a:t>x+y</a:t>
+            </a:r>
+            <a:r>
+              <a:rPr lang="en-US" sz="1200" dirty="0"/>
+              <a:t>) &lt; 0 -&gt; r0 = 0</a:t>
+            </a:r>
+            <a:br>
+              <a:rPr lang="en-US" sz="1200" dirty="0"/>
+            </a:br>
+            <a:r>
+              <a:rPr lang="en-US" sz="1200" dirty="0"/>
+              <a:t>    MOVGE   r0, #1       ; else r0 = 1</a:t>
+            </a:r>
+            <a:br>
+              <a:rPr lang="en-US" sz="1200" dirty="0"/>
+            </a:br>
+            <a:r>
+              <a:rPr lang="en-US" sz="1200" dirty="0"/>
+              <a:t>    BX      </a:t>
+            </a:r>
+            <a:r>
+              <a:rPr lang="en-US" sz="1200" dirty="0" err="1"/>
+              <a:t>lr</a:t>
+            </a:r>
+            <a:endParaRPr lang="en-US" sz="1200" dirty="0"/>
+          </a:p>
+          <a:p>
+            <a:pPr lvl="0"/>
+            <a:endParaRPr lang="en-US" sz="1200" kern="1200" dirty="0">
+              <a:solidFill>
+                <a:schemeClr val="tx1"/>
+              </a:solidFill>
+              <a:effectLst/>
+              <a:latin typeface="+mn-lt"/>
+              <a:ea typeface="+mn-ea"/>
+              <a:cs typeface="+mn-cs"/>
+            </a:endParaRPr>
+          </a:p>
+          <a:p>
+            <a:r>
+              <a:rPr lang="en-US" sz="1200" dirty="0"/>
+              <a:t>Conditional branch to label</a:t>
+            </a:r>
+          </a:p>
+          <a:p>
+            <a:r>
+              <a:rPr lang="en-US" sz="1200" dirty="0"/>
+              <a:t>foo:</a:t>
+            </a:r>
+            <a:br>
+              <a:rPr lang="en-US" sz="1200" dirty="0"/>
+            </a:br>
+            <a:r>
+              <a:rPr lang="en-US" sz="1200" dirty="0"/>
+              <a:t>    ADD     r2, r0, r1</a:t>
+            </a:r>
+            <a:br>
+              <a:rPr lang="en-US" sz="1200" dirty="0"/>
+            </a:br>
+            <a:r>
+              <a:rPr lang="en-US" sz="1200" dirty="0"/>
+              <a:t>    CMP     r2, #0</a:t>
+            </a:r>
+            <a:br>
+              <a:rPr lang="en-US" sz="1200" dirty="0"/>
+            </a:br>
+            <a:r>
+              <a:rPr lang="en-US" sz="1200" dirty="0"/>
+              <a:t>    BLT     .</a:t>
+            </a:r>
+            <a:r>
+              <a:rPr lang="en-US" sz="1200" dirty="0" err="1"/>
+              <a:t>Lneg</a:t>
+            </a:r>
+            <a:br>
+              <a:rPr lang="en-US" sz="1200" dirty="0"/>
+            </a:br>
+            <a:r>
+              <a:rPr lang="en-US" sz="1200" dirty="0"/>
+              <a:t>    MOV     r0, #1</a:t>
+            </a:r>
+            <a:br>
+              <a:rPr lang="en-US" sz="1200" dirty="0"/>
+            </a:br>
+            <a:r>
+              <a:rPr lang="en-US" sz="1200" dirty="0"/>
+              <a:t>    BX      </a:t>
+            </a:r>
+            <a:r>
+              <a:rPr lang="en-US" sz="1200" dirty="0" err="1"/>
+              <a:t>lr</a:t>
+            </a:r>
+            <a:br>
+              <a:rPr lang="en-US" sz="1200" dirty="0"/>
+            </a:br>
+            <a:r>
+              <a:rPr lang="en-US" sz="1200" dirty="0"/>
+              <a:t>.</a:t>
+            </a:r>
+            <a:r>
+              <a:rPr lang="en-US" sz="1200" dirty="0" err="1"/>
+              <a:t>Lneg</a:t>
+            </a:r>
+            <a:r>
+              <a:rPr lang="en-US" sz="1200" dirty="0"/>
+              <a:t>:</a:t>
+            </a:r>
+            <a:br>
+              <a:rPr lang="en-US" sz="1200" dirty="0"/>
+            </a:br>
+            <a:r>
+              <a:rPr lang="en-US" sz="1200" dirty="0"/>
+              <a:t>    MOV     r0, #0</a:t>
+            </a:r>
+            <a:br>
+              <a:rPr lang="en-US" sz="1200" dirty="0"/>
+            </a:br>
+            <a:r>
+              <a:rPr lang="en-US" sz="1200" dirty="0"/>
+              <a:t>    BX      </a:t>
+            </a:r>
+            <a:r>
+              <a:rPr lang="en-US" sz="1200" dirty="0" err="1"/>
+              <a:t>lr</a:t>
+            </a:r>
+            <a:endParaRPr lang="pt-BR" sz="1200" dirty="0"/>
+          </a:p>
+          <a:p>
+            <a:pPr lvl="0"/>
+            <a:endParaRPr lang="en-US" sz="1200" kern="1200" dirty="0">
+              <a:solidFill>
+                <a:schemeClr val="tx1"/>
+              </a:solidFill>
+              <a:effectLst/>
+              <a:latin typeface="+mn-lt"/>
+              <a:ea typeface="+mn-ea"/>
+              <a:cs typeface="+mn-cs"/>
+            </a:endParaRPr>
+          </a:p>
+          <a:p>
+            <a:pPr lvl="0"/>
+            <a:r>
+              <a:rPr lang="en-US" sz="1200" kern="1200" dirty="0">
+                <a:solidFill>
+                  <a:schemeClr val="tx1"/>
+                </a:solidFill>
+                <a:effectLst/>
+                <a:latin typeface="+mn-lt"/>
+                <a:ea typeface="+mn-ea"/>
+                <a:cs typeface="+mn-cs"/>
+              </a:rPr>
+              <a:t>Calling convention: inputs </a:t>
+            </a:r>
+            <a:r>
+              <a:rPr lang="en-US" sz="1200" kern="1200" dirty="0" err="1">
+                <a:solidFill>
+                  <a:schemeClr val="tx1"/>
+                </a:solidFill>
+                <a:effectLst/>
+                <a:latin typeface="+mn-lt"/>
+                <a:ea typeface="+mn-ea"/>
+                <a:cs typeface="+mn-cs"/>
+              </a:rPr>
+              <a:t>x,y</a:t>
+            </a:r>
+            <a:r>
+              <a:rPr lang="en-US" sz="1200" kern="1200" dirty="0">
+                <a:solidFill>
+                  <a:schemeClr val="tx1"/>
+                </a:solidFill>
+                <a:effectLst/>
+                <a:latin typeface="+mn-lt"/>
+                <a:ea typeface="+mn-ea"/>
+                <a:cs typeface="+mn-cs"/>
+              </a:rPr>
+              <a:t> in r0,r1; result in r0; </a:t>
+            </a:r>
+            <a:r>
+              <a:rPr lang="en-US" sz="1200" kern="1200" dirty="0" err="1">
+                <a:solidFill>
+                  <a:schemeClr val="tx1"/>
+                </a:solidFill>
+                <a:effectLst/>
+                <a:latin typeface="+mn-lt"/>
+                <a:ea typeface="+mn-ea"/>
+                <a:cs typeface="+mn-cs"/>
+              </a:rPr>
+              <a:t>lr</a:t>
+            </a:r>
+            <a:r>
+              <a:rPr lang="en-US" sz="1200" kern="1200" dirty="0">
+                <a:solidFill>
+                  <a:schemeClr val="tx1"/>
+                </a:solidFill>
+                <a:effectLst/>
+                <a:latin typeface="+mn-lt"/>
+                <a:ea typeface="+mn-ea"/>
+                <a:cs typeface="+mn-cs"/>
+              </a:rPr>
+              <a:t> holds return address; no callee-saved registers are clobbered.</a:t>
+            </a:r>
+          </a:p>
+          <a:p>
+            <a:pPr lvl="0"/>
+            <a:r>
+              <a:rPr lang="en-US" sz="1200" kern="1200" dirty="0">
+                <a:solidFill>
+                  <a:schemeClr val="tx1"/>
+                </a:solidFill>
+                <a:effectLst/>
+                <a:latin typeface="+mn-lt"/>
+                <a:ea typeface="+mn-ea"/>
+                <a:cs typeface="+mn-cs"/>
+              </a:rPr>
+              <a:t>Choose MI/PL (based on N) or LT/GE (signed) consistently; both are correct when flags come from the sum or a compare to zero.</a:t>
+            </a:r>
+          </a:p>
+          <a:p>
+            <a:pPr lvl="0"/>
+            <a:r>
+              <a:rPr lang="en-US" sz="1200" kern="1200" dirty="0">
+                <a:solidFill>
+                  <a:schemeClr val="tx1"/>
+                </a:solidFill>
+                <a:effectLst/>
+                <a:latin typeface="+mn-lt"/>
+                <a:ea typeface="+mn-ea"/>
+                <a:cs typeface="+mn-cs"/>
+              </a:rPr>
+              <a:t>For Thumb-2, prefer conditional branches or the IT block variant if permitted by assembler; for classic ARM state, full conditional MOVs avoid branches.</a:t>
             </a:r>
           </a:p>
           <a:p>
@@ -3043,7 +2852,7 @@
             <a:fld id="{D46F4F04-2BB1-473A-9274-1B455085D21A}" type="slidenum">
               <a:rPr lang="en-US" smtClean="0"/>
               <a:pPr/>
-              <a:t>29</a:t>
+              <a:t>27</a:t>
             </a:fld>
             <a:endParaRPr lang="en-US"/>
           </a:p>
@@ -3052,7 +2861,7 @@
     </p:spTree>
     <p:extLst>
       <p:ext uri="{BB962C8B-B14F-4D97-AF65-F5344CB8AC3E}">
-        <p14:creationId xmlns:p14="http://schemas.microsoft.com/office/powerpoint/2010/main" val="2274727731"/>
+        <p14:creationId xmlns:p14="http://schemas.microsoft.com/office/powerpoint/2010/main" val="297106540"/>
       </p:ext>
     </p:extLst>
   </p:cSld>
@@ -3106,243 +2915,30 @@
           <a:bodyPr/>
           <a:lstStyle/>
           <a:p>
+            <a:pPr marL="0" marR="0" lvl="0" indent="0" algn="l" defTabSz="914400" rtl="0" eaLnBrk="1" fontAlgn="auto" latinLnBrk="0" hangingPunct="1">
+              <a:lnSpc>
+                <a:spcPct val="100000"/>
+              </a:lnSpc>
+              <a:spcBef>
+                <a:spcPts val="0"/>
+              </a:spcBef>
+              <a:spcAft>
+                <a:spcPts val="0"/>
+              </a:spcAft>
+              <a:buClrTx/>
+              <a:buSzTx/>
+              <a:buFontTx/>
+              <a:buNone/>
+              <a:tabLst/>
+              <a:defRPr/>
+            </a:pPr>
             <a:r>
               <a:rPr lang="en-US" dirty="0"/>
-              <a:t>Here’s what the program </a:t>
-            </a:r>
-            <a:r>
-              <a:rPr lang="en-US" i="1" dirty="0"/>
-              <a:t>does in practice</a:t>
-            </a:r>
-            <a:r>
-              <a:rPr lang="en-US" dirty="0"/>
-              <a:t>:</a:t>
-            </a:r>
-          </a:p>
-          <a:p>
-            <a:r>
-              <a:rPr lang="en-US" dirty="0"/>
-              <a:t>It starts with </a:t>
-            </a:r>
-            <a:r>
-              <a:rPr lang="en-US" sz="1200" kern="1200" dirty="0">
-                <a:solidFill>
-                  <a:schemeClr val="tx1"/>
-                </a:solidFill>
-                <a:latin typeface="+mn-lt"/>
-                <a:ea typeface="+mn-ea"/>
-                <a:cs typeface="+mn-cs"/>
-              </a:rPr>
-              <a:t>x0 = 1</a:t>
-            </a:r>
-            <a:r>
-              <a:rPr lang="en-US" dirty="0"/>
-              <a:t>.</a:t>
-            </a:r>
-          </a:p>
-          <a:p>
-            <a:r>
-              <a:rPr lang="en-US" dirty="0"/>
-              <a:t>It loops, incrementing </a:t>
-            </a:r>
-            <a:r>
-              <a:rPr lang="en-US" sz="1200" kern="1200" dirty="0">
-                <a:solidFill>
-                  <a:schemeClr val="tx1"/>
-                </a:solidFill>
-                <a:latin typeface="+mn-lt"/>
-                <a:ea typeface="+mn-ea"/>
-                <a:cs typeface="+mn-cs"/>
-              </a:rPr>
-              <a:t>x0</a:t>
-            </a:r>
-            <a:r>
-              <a:rPr lang="en-US" dirty="0"/>
-              <a:t> each time.</a:t>
-            </a:r>
-          </a:p>
-          <a:p>
-            <a:r>
-              <a:rPr lang="en-US" dirty="0"/>
-              <a:t>When </a:t>
-            </a:r>
-            <a:r>
-              <a:rPr lang="en-US" sz="1200" kern="1200" dirty="0">
-                <a:solidFill>
-                  <a:schemeClr val="tx1"/>
-                </a:solidFill>
-                <a:latin typeface="+mn-lt"/>
-                <a:ea typeface="+mn-ea"/>
-                <a:cs typeface="+mn-cs"/>
-              </a:rPr>
-              <a:t>x0</a:t>
-            </a:r>
-            <a:r>
-              <a:rPr lang="en-US" dirty="0"/>
-              <a:t> reaches </a:t>
-            </a:r>
-            <a:r>
-              <a:rPr lang="en-US" sz="1200" kern="1200" dirty="0">
-                <a:solidFill>
-                  <a:schemeClr val="tx1"/>
-                </a:solidFill>
-                <a:latin typeface="+mn-lt"/>
-                <a:ea typeface="+mn-ea"/>
-                <a:cs typeface="+mn-cs"/>
-              </a:rPr>
-              <a:t>5</a:t>
-            </a:r>
-            <a:r>
-              <a:rPr lang="en-US" dirty="0"/>
-              <a:t>, it calls </a:t>
-            </a:r>
-            <a:r>
-              <a:rPr lang="en-US" sz="1200" kern="1200" dirty="0">
-                <a:solidFill>
-                  <a:schemeClr val="tx1"/>
-                </a:solidFill>
-                <a:latin typeface="+mn-lt"/>
-                <a:ea typeface="+mn-ea"/>
-                <a:cs typeface="+mn-cs"/>
-              </a:rPr>
-              <a:t>call</a:t>
-            </a:r>
-            <a:r>
-              <a:rPr lang="en-US" dirty="0"/>
-              <a:t>.</a:t>
-            </a:r>
-          </a:p>
-          <a:p>
-            <a:r>
-              <a:rPr lang="en-US" sz="1200" kern="1200" dirty="0">
-                <a:solidFill>
-                  <a:schemeClr val="tx1"/>
-                </a:solidFill>
-                <a:latin typeface="+mn-lt"/>
-                <a:ea typeface="+mn-ea"/>
-                <a:cs typeface="+mn-cs"/>
-              </a:rPr>
-              <a:t>call</a:t>
-            </a:r>
-            <a:r>
-              <a:rPr lang="en-US" dirty="0"/>
-              <a:t> adds </a:t>
-            </a:r>
-            <a:r>
-              <a:rPr lang="en-US" sz="1200" kern="1200" dirty="0">
-                <a:solidFill>
-                  <a:schemeClr val="tx1"/>
-                </a:solidFill>
-                <a:latin typeface="+mn-lt"/>
-                <a:ea typeface="+mn-ea"/>
-                <a:cs typeface="+mn-cs"/>
-              </a:rPr>
-              <a:t>255</a:t>
-            </a:r>
-            <a:r>
-              <a:rPr lang="en-US" dirty="0"/>
-              <a:t> to </a:t>
-            </a:r>
-            <a:r>
-              <a:rPr lang="en-US" sz="1200" kern="1200" dirty="0">
-                <a:solidFill>
-                  <a:schemeClr val="tx1"/>
-                </a:solidFill>
-                <a:latin typeface="+mn-lt"/>
-                <a:ea typeface="+mn-ea"/>
-                <a:cs typeface="+mn-cs"/>
-              </a:rPr>
-              <a:t>x7</a:t>
-            </a:r>
-            <a:r>
-              <a:rPr lang="en-US" dirty="0"/>
-              <a:t> and resets </a:t>
-            </a:r>
-            <a:r>
-              <a:rPr lang="en-US" sz="1200" kern="1200" dirty="0">
-                <a:solidFill>
-                  <a:schemeClr val="tx1"/>
-                </a:solidFill>
-                <a:latin typeface="+mn-lt"/>
-                <a:ea typeface="+mn-ea"/>
-                <a:cs typeface="+mn-cs"/>
-              </a:rPr>
-              <a:t>x0</a:t>
-            </a:r>
-            <a:r>
-              <a:rPr lang="en-US" dirty="0"/>
-              <a:t> to </a:t>
-            </a:r>
-            <a:r>
-              <a:rPr lang="en-US" sz="1200" kern="1200" dirty="0">
-                <a:solidFill>
-                  <a:schemeClr val="tx1"/>
-                </a:solidFill>
-                <a:latin typeface="+mn-lt"/>
-                <a:ea typeface="+mn-ea"/>
-                <a:cs typeface="+mn-cs"/>
-              </a:rPr>
-              <a:t>1</a:t>
-            </a:r>
-            <a:r>
-              <a:rPr lang="en-US" dirty="0"/>
-              <a:t>.</a:t>
-            </a:r>
-          </a:p>
-          <a:p>
-            <a:r>
-              <a:rPr lang="en-US" dirty="0"/>
-              <a:t>Control returns to </a:t>
-            </a:r>
-            <a:r>
-              <a:rPr lang="en-US" sz="1200" kern="1200" dirty="0">
-                <a:solidFill>
-                  <a:schemeClr val="tx1"/>
-                </a:solidFill>
-                <a:latin typeface="+mn-lt"/>
-                <a:ea typeface="+mn-ea"/>
-                <a:cs typeface="+mn-cs"/>
-              </a:rPr>
-              <a:t>main</a:t>
-            </a:r>
-            <a:r>
-              <a:rPr lang="en-US" dirty="0"/>
-              <a:t>, and the cycle repeats.</a:t>
-            </a:r>
-          </a:p>
-          <a:p>
-            <a:r>
-              <a:rPr lang="en-US" dirty="0"/>
-              <a:t>So the pattern goes like this:</a:t>
-            </a:r>
-          </a:p>
-          <a:p>
-            <a:pPr rtl="0"/>
-            <a:r>
-              <a:rPr lang="en-US" sz="1200" kern="1200" dirty="0">
-                <a:solidFill>
-                  <a:schemeClr val="tx1"/>
-                </a:solidFill>
-                <a:latin typeface="+mn-lt"/>
-                <a:ea typeface="+mn-ea"/>
-                <a:cs typeface="+mn-cs"/>
-              </a:rPr>
-              <a:t>x0: 1 → 2 → 3 → 4 → 5 → (call resets to 1)</a:t>
-            </a:r>
-          </a:p>
-          <a:p>
-            <a:pPr rtl="0"/>
-            <a:r>
-              <a:rPr lang="en-US" sz="1200" kern="1200" dirty="0">
-                <a:solidFill>
-                  <a:schemeClr val="tx1"/>
-                </a:solidFill>
-                <a:latin typeface="+mn-lt"/>
-                <a:ea typeface="+mn-ea"/>
-                <a:cs typeface="+mn-cs"/>
-              </a:rPr>
-              <a:t>x7: +255 each time x0 reaches 5</a:t>
-            </a:r>
+              <a:t>(In the exams, I may provide most of the code and let you fill in the blanks.)</a:t>
+            </a:r>
+          </a:p>
+          <a:p>
+            <a:endParaRPr lang="en-US" dirty="0"/>
           </a:p>
         </p:txBody>
       </p:sp>
@@ -3364,7 +2960,7 @@
             <a:fld id="{D46F4F04-2BB1-473A-9274-1B455085D21A}" type="slidenum">
               <a:rPr lang="en-US" smtClean="0"/>
               <a:pPr/>
-              <a:t>31</a:t>
+              <a:t>28</a:t>
             </a:fld>
             <a:endParaRPr lang="en-US"/>
           </a:p>
@@ -3373,7 +2969,7 @@
     </p:spTree>
     <p:extLst>
       <p:ext uri="{BB962C8B-B14F-4D97-AF65-F5344CB8AC3E}">
-        <p14:creationId xmlns:p14="http://schemas.microsoft.com/office/powerpoint/2010/main" val="260489798"/>
+        <p14:creationId xmlns:p14="http://schemas.microsoft.com/office/powerpoint/2010/main" val="2816329202"/>
       </p:ext>
     </p:extLst>
   </p:cSld>
@@ -3388,13 +2984,7 @@
   <p:cSld>
     <p:spTree>
       <p:nvGrpSpPr>
-        <p:cNvPr id="1" name="">
-          <a:extLst>
-            <a:ext uri="{FF2B5EF4-FFF2-40B4-BE49-F238E27FC236}">
-              <a16:creationId xmlns:a16="http://schemas.microsoft.com/office/drawing/2014/main" id="{8D17C537-0F01-0DCA-2284-5B6554C4A3FD}"/>
-            </a:ext>
-          </a:extLst>
-        </p:cNvPr>
+        <p:cNvPr id="1" name=""/>
         <p:cNvGrpSpPr/>
         <p:nvPr/>
       </p:nvGrpSpPr>
@@ -3408,13 +2998,7 @@
       </p:grpSpPr>
       <p:sp>
         <p:nvSpPr>
-          <p:cNvPr id="2" name="Slide Image Placeholder 1">
-            <a:extLst>
-              <a:ext uri="{FF2B5EF4-FFF2-40B4-BE49-F238E27FC236}">
-                <a16:creationId xmlns:a16="http://schemas.microsoft.com/office/drawing/2014/main" id="{AFD3AD5C-C850-531A-91F6-BCF6A2A1F1B2}"/>
-              </a:ext>
-            </a:extLst>
-          </p:cNvPr>
+          <p:cNvPr id="2" name="Slide Image Placeholder 1"/>
           <p:cNvSpPr>
             <a:spLocks noGrp="1" noRot="1" noChangeAspect="1"/>
           </p:cNvSpPr>
@@ -3426,13 +3010,7 @@
       </p:sp>
       <p:sp>
         <p:nvSpPr>
-          <p:cNvPr id="3" name="Notes Placeholder 2">
-            <a:extLst>
-              <a:ext uri="{FF2B5EF4-FFF2-40B4-BE49-F238E27FC236}">
-                <a16:creationId xmlns:a16="http://schemas.microsoft.com/office/drawing/2014/main" id="{C5A54735-AC8D-E1A4-D4D6-D561E501E42C}"/>
-              </a:ext>
-            </a:extLst>
-          </p:cNvPr>
+          <p:cNvPr id="3" name="Notes Placeholder 2"/>
           <p:cNvSpPr>
             <a:spLocks noGrp="1"/>
           </p:cNvSpPr>
@@ -3445,255 +3023,44 @@
           <a:bodyPr/>
           <a:lstStyle/>
           <a:p>
+            <a:pPr marL="0" marR="0" lvl="0" indent="0" algn="l" defTabSz="914400" rtl="0" eaLnBrk="1" fontAlgn="auto" latinLnBrk="0" hangingPunct="1">
+              <a:lnSpc>
+                <a:spcPct val="100000"/>
+              </a:lnSpc>
+              <a:spcBef>
+                <a:spcPts val="0"/>
+              </a:spcBef>
+              <a:spcAft>
+                <a:spcPts val="0"/>
+              </a:spcAft>
+              <a:buClrTx/>
+              <a:buSzTx/>
+              <a:buFontTx/>
+              <a:buNone/>
+              <a:tabLst/>
+              <a:defRPr/>
+            </a:pPr>
             <a:r>
               <a:rPr lang="en-US" dirty="0"/>
-              <a:t>Here’s what the program </a:t>
+              <a:t>C function returns an int16_t, but the assembly returns the full 32-bit sum in r0.  Caller will see a 32-bit value; the correct behavior when the C function is declared to return int16_t is to return the 16-bit value </a:t>
             </a:r>
             <a:r>
               <a:rPr lang="en-US" i="1" dirty="0"/>
-              <a:t>does in practice</a:t>
+              <a:t>sign-extended</a:t>
             </a:r>
             <a:r>
               <a:rPr lang="en-US" dirty="0"/>
-              <a:t>:</a:t>
-            </a:r>
-          </a:p>
-          <a:p>
-            <a:r>
-              <a:rPr lang="en-US" dirty="0"/>
-              <a:t>It starts with </a:t>
-            </a:r>
-            <a:r>
-              <a:rPr lang="en-US" sz="1200" kern="1200" dirty="0">
-                <a:solidFill>
-                  <a:schemeClr val="tx1"/>
-                </a:solidFill>
-                <a:latin typeface="+mn-lt"/>
-                <a:ea typeface="+mn-ea"/>
-                <a:cs typeface="+mn-cs"/>
-              </a:rPr>
-              <a:t>x0 = 1</a:t>
-            </a:r>
-            <a:r>
-              <a:rPr lang="en-US" dirty="0"/>
-              <a:t>.</a:t>
-            </a:r>
-          </a:p>
-          <a:p>
-            <a:r>
-              <a:rPr lang="en-US" dirty="0"/>
-              <a:t>It loops, incrementing </a:t>
-            </a:r>
-            <a:r>
-              <a:rPr lang="en-US" sz="1200" kern="1200" dirty="0">
-                <a:solidFill>
-                  <a:schemeClr val="tx1"/>
-                </a:solidFill>
-                <a:latin typeface="+mn-lt"/>
-                <a:ea typeface="+mn-ea"/>
-                <a:cs typeface="+mn-cs"/>
-              </a:rPr>
-              <a:t>x0</a:t>
-            </a:r>
-            <a:r>
-              <a:rPr lang="en-US" dirty="0"/>
-              <a:t> each time.</a:t>
-            </a:r>
-          </a:p>
-          <a:p>
-            <a:r>
-              <a:rPr lang="en-US" dirty="0"/>
-              <a:t>When </a:t>
-            </a:r>
-            <a:r>
-              <a:rPr lang="en-US" sz="1200" kern="1200" dirty="0">
-                <a:solidFill>
-                  <a:schemeClr val="tx1"/>
-                </a:solidFill>
-                <a:latin typeface="+mn-lt"/>
-                <a:ea typeface="+mn-ea"/>
-                <a:cs typeface="+mn-cs"/>
-              </a:rPr>
-              <a:t>x0</a:t>
-            </a:r>
-            <a:r>
-              <a:rPr lang="en-US" dirty="0"/>
-              <a:t> reaches </a:t>
-            </a:r>
-            <a:r>
-              <a:rPr lang="en-US" sz="1200" kern="1200" dirty="0">
-                <a:solidFill>
-                  <a:schemeClr val="tx1"/>
-                </a:solidFill>
-                <a:latin typeface="+mn-lt"/>
-                <a:ea typeface="+mn-ea"/>
-                <a:cs typeface="+mn-cs"/>
-              </a:rPr>
-              <a:t>5</a:t>
-            </a:r>
-            <a:r>
-              <a:rPr lang="en-US" dirty="0"/>
-              <a:t>, it calls </a:t>
-            </a:r>
-            <a:r>
-              <a:rPr lang="en-US" sz="1200" kern="1200" dirty="0">
-                <a:solidFill>
-                  <a:schemeClr val="tx1"/>
-                </a:solidFill>
-                <a:latin typeface="+mn-lt"/>
-                <a:ea typeface="+mn-ea"/>
-                <a:cs typeface="+mn-cs"/>
-              </a:rPr>
-              <a:t>call</a:t>
-            </a:r>
-            <a:r>
-              <a:rPr lang="en-US" dirty="0"/>
-              <a:t>.</a:t>
-            </a:r>
-          </a:p>
-          <a:p>
-            <a:r>
-              <a:rPr lang="en-US" sz="1200" kern="1200" dirty="0">
-                <a:solidFill>
-                  <a:schemeClr val="tx1"/>
-                </a:solidFill>
-                <a:latin typeface="+mn-lt"/>
-                <a:ea typeface="+mn-ea"/>
-                <a:cs typeface="+mn-cs"/>
-              </a:rPr>
-              <a:t>call</a:t>
-            </a:r>
-            <a:r>
-              <a:rPr lang="en-US" dirty="0"/>
-              <a:t> adds </a:t>
-            </a:r>
-            <a:r>
-              <a:rPr lang="en-US" sz="1200" kern="1200" dirty="0">
-                <a:solidFill>
-                  <a:schemeClr val="tx1"/>
-                </a:solidFill>
-                <a:latin typeface="+mn-lt"/>
-                <a:ea typeface="+mn-ea"/>
-                <a:cs typeface="+mn-cs"/>
-              </a:rPr>
-              <a:t>255</a:t>
-            </a:r>
-            <a:r>
-              <a:rPr lang="en-US" dirty="0"/>
-              <a:t> to </a:t>
-            </a:r>
-            <a:r>
-              <a:rPr lang="en-US" sz="1200" kern="1200" dirty="0">
-                <a:solidFill>
-                  <a:schemeClr val="tx1"/>
-                </a:solidFill>
-                <a:latin typeface="+mn-lt"/>
-                <a:ea typeface="+mn-ea"/>
-                <a:cs typeface="+mn-cs"/>
-              </a:rPr>
-              <a:t>x7</a:t>
-            </a:r>
-            <a:r>
-              <a:rPr lang="en-US" dirty="0"/>
-              <a:t> and resets </a:t>
-            </a:r>
-            <a:r>
-              <a:rPr lang="en-US" sz="1200" kern="1200" dirty="0">
-                <a:solidFill>
-                  <a:schemeClr val="tx1"/>
-                </a:solidFill>
-                <a:latin typeface="+mn-lt"/>
-                <a:ea typeface="+mn-ea"/>
-                <a:cs typeface="+mn-cs"/>
-              </a:rPr>
-              <a:t>x0</a:t>
-            </a:r>
-            <a:r>
-              <a:rPr lang="en-US" dirty="0"/>
-              <a:t> to </a:t>
-            </a:r>
-            <a:r>
-              <a:rPr lang="en-US" sz="1200" kern="1200" dirty="0">
-                <a:solidFill>
-                  <a:schemeClr val="tx1"/>
-                </a:solidFill>
-                <a:latin typeface="+mn-lt"/>
-                <a:ea typeface="+mn-ea"/>
-                <a:cs typeface="+mn-cs"/>
-              </a:rPr>
-              <a:t>1</a:t>
-            </a:r>
-            <a:r>
-              <a:rPr lang="en-US" dirty="0"/>
-              <a:t>.</a:t>
-            </a:r>
-          </a:p>
-          <a:p>
-            <a:r>
-              <a:rPr lang="en-US" dirty="0"/>
-              <a:t>Control returns to </a:t>
-            </a:r>
-            <a:r>
-              <a:rPr lang="en-US" sz="1200" kern="1200" dirty="0">
-                <a:solidFill>
-                  <a:schemeClr val="tx1"/>
-                </a:solidFill>
-                <a:latin typeface="+mn-lt"/>
-                <a:ea typeface="+mn-ea"/>
-                <a:cs typeface="+mn-cs"/>
-              </a:rPr>
-              <a:t>main</a:t>
-            </a:r>
-            <a:r>
-              <a:rPr lang="en-US" dirty="0"/>
-              <a:t>, and the cycle repeats.</a:t>
-            </a:r>
-          </a:p>
-          <a:p>
-            <a:r>
-              <a:rPr lang="en-US" dirty="0"/>
-              <a:t>So the pattern goes like this:</a:t>
-            </a:r>
-          </a:p>
-          <a:p>
-            <a:pPr rtl="0"/>
-            <a:r>
-              <a:rPr lang="en-US" sz="1200" kern="1200" dirty="0">
-                <a:solidFill>
-                  <a:schemeClr val="tx1"/>
-                </a:solidFill>
-                <a:latin typeface="+mn-lt"/>
-                <a:ea typeface="+mn-ea"/>
-                <a:cs typeface="+mn-cs"/>
-              </a:rPr>
-              <a:t>x0: 1 → 2 → 3 → 4 → 5 → (call resets to 1)</a:t>
-            </a:r>
-          </a:p>
-          <a:p>
-            <a:pPr rtl="0"/>
-            <a:r>
-              <a:rPr lang="en-US" sz="1200" kern="1200" dirty="0">
-                <a:solidFill>
-                  <a:schemeClr val="tx1"/>
-                </a:solidFill>
-                <a:latin typeface="+mn-lt"/>
-                <a:ea typeface="+mn-ea"/>
-                <a:cs typeface="+mn-cs"/>
-              </a:rPr>
-              <a:t>x7: +255 each time x0 reaches 5</a:t>
-            </a:r>
-          </a:p>
-        </p:txBody>
-      </p:sp>
-      <p:sp>
-        <p:nvSpPr>
-          <p:cNvPr id="4" name="Slide Number Placeholder 3">
-            <a:extLst>
-              <a:ext uri="{FF2B5EF4-FFF2-40B4-BE49-F238E27FC236}">
-                <a16:creationId xmlns:a16="http://schemas.microsoft.com/office/drawing/2014/main" id="{AFBE590A-94DE-53D9-D55F-DBC7B7287FF3}"/>
-              </a:ext>
-            </a:extLst>
-          </p:cNvPr>
+              <a:t> to 32 bits. </a:t>
+            </a:r>
+          </a:p>
+          <a:p>
+            <a:endParaRPr lang="en-US" dirty="0"/>
+          </a:p>
+        </p:txBody>
+      </p:sp>
+      <p:sp>
+        <p:nvSpPr>
+          <p:cNvPr id="4" name="Slide Number Placeholder 3"/>
           <p:cNvSpPr>
             <a:spLocks noGrp="1"/>
           </p:cNvSpPr>
@@ -3718,7 +3085,7 @@
     </p:spTree>
     <p:extLst>
       <p:ext uri="{BB962C8B-B14F-4D97-AF65-F5344CB8AC3E}">
-        <p14:creationId xmlns:p14="http://schemas.microsoft.com/office/powerpoint/2010/main" val="1966348516"/>
+        <p14:creationId xmlns:p14="http://schemas.microsoft.com/office/powerpoint/2010/main" val="2274727731"/>
       </p:ext>
     </p:extLst>
   </p:cSld>
@@ -3870,7 +3237,7 @@
             <a:pPr eaLnBrk="1" latinLnBrk="0" hangingPunct="1"/>
             <a:fld id="{7966D375-7FE4-4861-9EA3-8493E3E81506}" type="datetime1">
               <a:rPr lang="en-US" smtClean="0"/>
-              <a:t>10/23/2025</a:t>
+              <a:t>12/2/2025</a:t>
             </a:fld>
             <a:endParaRPr lang="en-US" sz="1600" dirty="0"/>
           </a:p>
@@ -4230,7 +3597,7 @@
             <a:pPr eaLnBrk="1" latinLnBrk="0" hangingPunct="1"/>
             <a:fld id="{A9C54BE0-D5FE-4C7B-88A7-8835FDA599B1}" type="datetime1">
               <a:rPr lang="en-US" smtClean="0"/>
-              <a:t>10/23/2025</a:t>
+              <a:t>12/2/2025</a:t>
             </a:fld>
             <a:endParaRPr lang="en-US"/>
           </a:p>
@@ -4406,7 +3773,7 @@
             <a:pPr eaLnBrk="1" latinLnBrk="0" hangingPunct="1"/>
             <a:fld id="{F132153C-039A-48A4-AC9F-CEC24D5C2B7A}" type="datetime1">
               <a:rPr lang="en-US" smtClean="0"/>
-              <a:t>10/23/2025</a:t>
+              <a:t>12/2/2025</a:t>
             </a:fld>
             <a:endParaRPr lang="en-US"/>
           </a:p>
@@ -4873,7 +4240,7 @@
             <a:fld id="{DFAD6F50-E977-4162-8DF4-4DA1E6F19796}" type="datetime1">
               <a:rPr lang="en-US" smtClean="0"/>
               <a:pPr eaLnBrk="1" latinLnBrk="0" hangingPunct="1"/>
-              <a:t>10/23/2025</a:t>
+              <a:t>12/2/2025</a:t>
             </a:fld>
             <a:endParaRPr lang="en-US" sz="1200" dirty="0"/>
           </a:p>
@@ -5187,7 +4554,7 @@
             <a:fld id="{42A4D53F-573F-4718-BBA0-A86965028093}" type="datetime1">
               <a:rPr lang="en-US" smtClean="0"/>
               <a:pPr eaLnBrk="1" latinLnBrk="0" hangingPunct="1"/>
-              <a:t>10/23/2025</a:t>
+              <a:t>12/2/2025</a:t>
             </a:fld>
             <a:endParaRPr lang="en-US" dirty="0"/>
           </a:p>
@@ -5463,7 +4830,7 @@
             <a:fld id="{C9B206E1-2545-4E30-92FD-1E4787463A36}" type="datetime1">
               <a:rPr lang="en-US" smtClean="0"/>
               <a:pPr eaLnBrk="1" latinLnBrk="0" hangingPunct="1"/>
-              <a:t>10/23/2025</a:t>
+              <a:t>12/2/2025</a:t>
             </a:fld>
             <a:endParaRPr lang="en-US" dirty="0"/>
           </a:p>
@@ -5690,7 +5057,7 @@
             <a:fld id="{BD37D9B0-1E14-464D-94B0-F2A8C2E324E7}" type="datetime1">
               <a:rPr lang="en-US" smtClean="0"/>
               <a:pPr eaLnBrk="1" latinLnBrk="0" hangingPunct="1"/>
-              <a:t>10/23/2025</a:t>
+              <a:t>12/2/2025</a:t>
             </a:fld>
             <a:endParaRPr lang="en-US"/>
           </a:p>
@@ -6049,7 +5416,7 @@
             <a:fld id="{17A47E1E-3281-48F5-9487-561BBC0DE61A}" type="datetime1">
               <a:rPr lang="en-US" smtClean="0"/>
               <a:pPr eaLnBrk="1" latinLnBrk="0" hangingPunct="1"/>
-              <a:t>10/23/2025</a:t>
+              <a:t>12/2/2025</a:t>
             </a:fld>
             <a:endParaRPr lang="en-US"/>
           </a:p>
@@ -6288,7 +5655,7 @@
             <a:fld id="{457778AC-3F47-4322-9871-235CA71C9FB7}" type="datetime1">
               <a:rPr lang="en-US" smtClean="0"/>
               <a:pPr eaLnBrk="1" latinLnBrk="0" hangingPunct="1"/>
-              <a:t>10/23/2025</a:t>
+              <a:t>12/2/2025</a:t>
             </a:fld>
             <a:endParaRPr lang="en-US"/>
           </a:p>
@@ -6436,7 +5803,7 @@
             <a:fld id="{8FC852DA-BC9D-4962-84E0-49DDC95967D0}" type="datetime1">
               <a:rPr lang="en-US" smtClean="0"/>
               <a:pPr eaLnBrk="1" latinLnBrk="0" hangingPunct="1"/>
-              <a:t>10/23/2025</a:t>
+              <a:t>12/2/2025</a:t>
             </a:fld>
             <a:endParaRPr lang="en-US"/>
           </a:p>
@@ -6641,7 +6008,7 @@
             <a:pPr eaLnBrk="1" latinLnBrk="0" hangingPunct="1"/>
             <a:fld id="{00065D69-4622-413E-9E09-6A2509001B66}" type="datetime1">
               <a:rPr lang="en-US" smtClean="0"/>
-              <a:t>10/23/2025</a:t>
+              <a:t>12/2/2025</a:t>
             </a:fld>
             <a:endParaRPr lang="en-US" dirty="0"/>
           </a:p>
@@ -6891,7 +6258,7 @@
             <a:fld id="{BD8CDB30-0989-475F-BD84-F28125E3B4A3}" type="datetime1">
               <a:rPr lang="en-US" smtClean="0"/>
               <a:pPr eaLnBrk="1" latinLnBrk="0" hangingPunct="1"/>
-              <a:t>10/23/2025</a:t>
+              <a:t>12/2/2025</a:t>
             </a:fld>
             <a:endParaRPr lang="en-US"/>
           </a:p>
@@ -7305,7 +6672,7 @@
             <a:fld id="{3D268D79-62AD-4C50-8718-03ED52036E43}" type="datetime1">
               <a:rPr lang="en-US" smtClean="0"/>
               <a:pPr eaLnBrk="1" latinLnBrk="0" hangingPunct="1"/>
-              <a:t>10/23/2025</a:t>
+              <a:t>12/2/2025</a:t>
             </a:fld>
             <a:endParaRPr lang="en-US"/>
           </a:p>
@@ -7609,7 +6976,7 @@
             <a:fld id="{362A8F80-F1FC-4E19-AF0E-2AEA7F0226D7}" type="datetime1">
               <a:rPr lang="en-US" smtClean="0"/>
               <a:pPr eaLnBrk="1" latinLnBrk="0" hangingPunct="1"/>
-              <a:t>10/23/2025</a:t>
+              <a:t>12/2/2025</a:t>
             </a:fld>
             <a:endParaRPr lang="en-US"/>
           </a:p>
@@ -7791,7 +7158,7 @@
             <a:fld id="{84EF3758-DF7B-4347-89DE-ED0416D762CD}" type="datetime1">
               <a:rPr lang="en-US" smtClean="0"/>
               <a:pPr eaLnBrk="1" latinLnBrk="0" hangingPunct="1"/>
-              <a:t>10/23/2025</a:t>
+              <a:t>12/2/2025</a:t>
             </a:fld>
             <a:endParaRPr lang="en-US"/>
           </a:p>
@@ -8131,7 +7498,7 @@
             <a:pPr eaLnBrk="1" latinLnBrk="0" hangingPunct="1"/>
             <a:fld id="{26D84756-85D3-4017-90AB-B482945A0CB0}" type="datetime1">
               <a:rPr lang="en-US" smtClean="0"/>
-              <a:t>10/23/2025</a:t>
+              <a:t>12/2/2025</a:t>
             </a:fld>
             <a:endParaRPr lang="en-US" dirty="0"/>
           </a:p>
@@ -8352,7 +7719,7 @@
             <a:pPr eaLnBrk="1" latinLnBrk="0" hangingPunct="1"/>
             <a:fld id="{1359E9A9-3822-4D57-8A64-831B26641011}" type="datetime1">
               <a:rPr lang="en-US" smtClean="0"/>
-              <a:t>10/23/2025</a:t>
+              <a:t>12/2/2025</a:t>
             </a:fld>
             <a:endParaRPr lang="en-US"/>
           </a:p>
@@ -8705,7 +8072,7 @@
             <a:pPr eaLnBrk="1" latinLnBrk="0" hangingPunct="1"/>
             <a:fld id="{F96C45A0-00E6-4B4B-A1A7-CF1486D67AF4}" type="datetime1">
               <a:rPr lang="en-US" smtClean="0"/>
-              <a:t>10/23/2025</a:t>
+              <a:t>12/2/2025</a:t>
             </a:fld>
             <a:endParaRPr lang="en-US"/>
           </a:p>
@@ -8938,7 +8305,7 @@
             <a:pPr eaLnBrk="1" latinLnBrk="0" hangingPunct="1"/>
             <a:fld id="{B88C3861-EF45-4815-A76E-294671FAB405}" type="datetime1">
               <a:rPr lang="en-US" smtClean="0"/>
-              <a:t>10/23/2025</a:t>
+              <a:t>12/2/2025</a:t>
             </a:fld>
             <a:endParaRPr lang="en-US"/>
           </a:p>
@@ -9080,7 +8447,7 @@
             <a:pPr eaLnBrk="1" latinLnBrk="0" hangingPunct="1"/>
             <a:fld id="{0F0B8080-ED7A-45A9-A704-76D750342F93}" type="datetime1">
               <a:rPr lang="en-US" smtClean="0"/>
-              <a:t>10/23/2025</a:t>
+              <a:t>12/2/2025</a:t>
             </a:fld>
             <a:endParaRPr lang="en-US"/>
           </a:p>
@@ -9358,7 +8725,7 @@
             <a:pPr eaLnBrk="1" latinLnBrk="0" hangingPunct="1"/>
             <a:fld id="{D1503A19-0780-4B28-9CCB-B5B1820188BD}" type="datetime1">
               <a:rPr lang="en-US" smtClean="0"/>
-              <a:t>10/23/2025</a:t>
+              <a:t>12/2/2025</a:t>
             </a:fld>
             <a:endParaRPr lang="en-US"/>
           </a:p>
@@ -9766,7 +9133,7 @@
             <a:pPr eaLnBrk="1" latinLnBrk="0" hangingPunct="1"/>
             <a:fld id="{2142A9E5-AE71-46A9-A65E-9BA279401128}" type="datetime1">
               <a:rPr lang="en-US" smtClean="0"/>
-              <a:t>10/23/2025</a:t>
+              <a:t>12/2/2025</a:t>
             </a:fld>
             <a:endParaRPr lang="en-US"/>
           </a:p>
@@ -10104,7 +9471,7 @@
             <a:pPr eaLnBrk="1" latinLnBrk="0" hangingPunct="1"/>
             <a:fld id="{4087DD3F-948A-46ED-B3EC-5D68A963D0B7}" type="datetime1">
               <a:rPr lang="en-US" smtClean="0"/>
-              <a:t>10/23/2025</a:t>
+              <a:t>12/2/2025</a:t>
             </a:fld>
             <a:endParaRPr lang="en-US" sz="1400" dirty="0">
               <a:solidFill>
@@ -10785,7 +10152,7 @@
             <a:fld id="{A1DC5B07-A42E-4D40-A069-384595D56939}" type="datetime1">
               <a:rPr lang="en-US" smtClean="0"/>
               <a:pPr eaLnBrk="1" latinLnBrk="0" hangingPunct="1"/>
-              <a:t>10/23/2025</a:t>
+              <a:t>12/2/2025</a:t>
             </a:fld>
             <a:endParaRPr lang="en-US" sz="1050" dirty="0">
               <a:solidFill>
@@ -15181,7 +14548,7 @@
             <p:ph sz="quarter" idx="1"/>
             <p:extLst>
               <p:ext uri="{D42A27DB-BD31-4B8C-83A1-F6EECF244321}">
-                <p14:modId xmlns:p14="http://schemas.microsoft.com/office/powerpoint/2010/main" val="3326727463"/>
+                <p14:modId xmlns:p14="http://schemas.microsoft.com/office/powerpoint/2010/main" val="66918043"/>
               </p:ext>
             </p:extLst>
           </p:nvPr>
@@ -16425,7 +15792,13 @@
           <p:cNvGraphicFramePr>
             <a:graphicFrameLocks/>
           </p:cNvGraphicFramePr>
-          <p:nvPr/>
+          <p:nvPr>
+            <p:extLst>
+              <p:ext uri="{D42A27DB-BD31-4B8C-83A1-F6EECF244321}">
+                <p14:modId xmlns:p14="http://schemas.microsoft.com/office/powerpoint/2010/main" val="1428665056"/>
+              </p:ext>
+            </p:extLst>
+          </p:nvPr>
         </p:nvGraphicFramePr>
         <p:xfrm>
           <a:off x="6707997" y="1945640"/>
@@ -16773,18 +16146,18 @@
                       <a:r>
                         <a:rPr lang="pt-BR" sz="1800" b="0" i="0" kern="1200" dirty="0">
                           <a:solidFill>
-                            <a:schemeClr val="tx1"/>
+                            <a:srgbClr val="FF0000"/>
                           </a:solidFill>
                           <a:effectLst/>
                           <a:latin typeface="Times New Roman" pitchFamily="18" charset="0"/>
                           <a:ea typeface="+mn-ea"/>
                           <a:cs typeface="+mn-cs"/>
                         </a:rPr>
-                        <a:t>0x00000000</a:t>
+                        <a:t>0x10000200</a:t>
                       </a:r>
                       <a:endParaRPr kumimoji="0" lang="en-US" b="0" kern="1200" dirty="0">
                         <a:solidFill>
-                          <a:schemeClr val="tx1"/>
+                          <a:srgbClr val="FF0000"/>
                         </a:solidFill>
                         <a:latin typeface="+mn-lt"/>
                         <a:ea typeface="+mn-ea"/>
@@ -16925,7 +16298,7 @@
         <p:spPr>
           <a:xfrm>
             <a:off x="457200" y="1219200"/>
-            <a:ext cx="8229600" cy="2649864"/>
+            <a:ext cx="8229600" cy="2790576"/>
           </a:xfrm>
           <a:prstGeom prst="rect">
             <a:avLst/>
@@ -16933,7 +16306,7 @@
         </p:spPr>
         <p:txBody>
           <a:bodyPr vert="horz">
-            <a:normAutofit/>
+            <a:normAutofit lnSpcReduction="10000"/>
           </a:bodyPr>
           <a:lstStyle>
             <a:lvl1pPr marL="274320" indent="-274320" algn="l" rtl="0" eaLnBrk="1" latinLnBrk="0" hangingPunct="1">
@@ -17154,7 +16527,7 @@
             </a:r>
             <a:r>
               <a:rPr lang="en-US" sz="2000" dirty="0"/>
-              <a:t>= 0x100001F8</a:t>
+              <a:t>= 0x100001F8. Each PUSH is:</a:t>
             </a:r>
             <a:endParaRPr lang="en-US" sz="2000" b="0" dirty="0"/>
           </a:p>
@@ -17179,12 +16552,12 @@
               </a:spcAft>
             </a:pPr>
             <a:r>
-              <a:rPr lang="en-US" sz="2000" b="0"/>
+              <a:rPr lang="en-US" sz="2000" b="0" dirty="0"/>
               <a:t>After one POP</a:t>
             </a:r>
             <a:r>
-              <a:rPr lang="en-US" sz="2000"/>
-              <a:t>, SP = 0x100001FC</a:t>
+              <a:rPr lang="en-US" sz="2000" dirty="0"/>
+              <a:t>, SP = 0x100001FC:</a:t>
             </a:r>
             <a:endParaRPr lang="en-US" sz="2000" b="0" dirty="0"/>
           </a:p>
@@ -17201,6 +16574,13 @@
               <a:rPr lang="en-US" sz="1700" b="0" dirty="0"/>
               <a:t>ADD SP, #4   @ SP = SP + 4   (Stack shrinks)</a:t>
             </a:r>
+          </a:p>
+          <a:p>
+            <a:r>
+              <a:rPr lang="en-US" sz="2000" dirty="0"/>
+              <a:t>R5 = 0x10000200 (value of R1)</a:t>
+            </a:r>
+            <a:endParaRPr lang="en-US" sz="2000" b="0" dirty="0"/>
           </a:p>
         </p:txBody>
       </p:sp>
@@ -17218,8 +16598,8 @@
         </p:nvSpPr>
         <p:spPr>
           <a:xfrm>
-            <a:off x="4357032" y="4507329"/>
-            <a:ext cx="2350965" cy="400110"/>
+            <a:off x="4485167" y="4209831"/>
+            <a:ext cx="2266005" cy="400110"/>
           </a:xfrm>
           <a:prstGeom prst="rect">
             <a:avLst/>
@@ -17236,7 +16616,19 @@
               <a:rPr lang="en-US" sz="2000" b="0" dirty="0">
                 <a:latin typeface="+mn-lt"/>
               </a:rPr>
-              <a:t>Initial Register Values</a:t>
+              <a:t>F</a:t>
+            </a:r>
+            <a:r>
+              <a:rPr lang="en-US" altLang="zh-CN" sz="2000" b="0" dirty="0">
+                <a:latin typeface="+mn-lt"/>
+              </a:rPr>
+              <a:t>inal</a:t>
+            </a:r>
+            <a:r>
+              <a:rPr lang="en-US" sz="2000" b="0" dirty="0">
+                <a:latin typeface="+mn-lt"/>
+              </a:rPr>
+              <a:t> Register Values</a:t>
             </a:r>
           </a:p>
         </p:txBody>
@@ -17388,6 +16780,269 @@
           </a:p>
         </p:txBody>
       </p:sp>
+      <p:sp>
+        <p:nvSpPr>
+          <p:cNvPr id="6" name="TextBox 5">
+            <a:extLst>
+              <a:ext uri="{FF2B5EF4-FFF2-40B4-BE49-F238E27FC236}">
+                <a16:creationId xmlns:a16="http://schemas.microsoft.com/office/drawing/2014/main" id="{7F0BEA20-3647-D290-9E8E-0B4B87DD74F4}"/>
+              </a:ext>
+            </a:extLst>
+          </p:cNvPr>
+          <p:cNvSpPr txBox="1"/>
+          <p:nvPr/>
+        </p:nvSpPr>
+        <p:spPr>
+          <a:xfrm>
+            <a:off x="964404" y="4745484"/>
+            <a:ext cx="534459" cy="369332"/>
+          </a:xfrm>
+          <a:prstGeom prst="rect">
+            <a:avLst/>
+          </a:prstGeom>
+          <a:noFill/>
+        </p:spPr>
+        <p:txBody>
+          <a:bodyPr wrap="square">
+            <a:spAutoFit/>
+          </a:bodyPr>
+          <a:lstStyle/>
+          <a:p>
+            <a:r>
+              <a:rPr lang="en-US" sz="1800" b="0" dirty="0">
+                <a:solidFill>
+                  <a:srgbClr val="C00000"/>
+                </a:solidFill>
+              </a:rPr>
+              <a:t>SP</a:t>
+            </a:r>
+            <a:endParaRPr lang="en-US" dirty="0">
+              <a:solidFill>
+                <a:srgbClr val="C00000"/>
+              </a:solidFill>
+            </a:endParaRPr>
+          </a:p>
+        </p:txBody>
+      </p:sp>
+      <p:cxnSp>
+        <p:nvCxnSpPr>
+          <p:cNvPr id="10" name="Straight Arrow Connector 9">
+            <a:extLst>
+              <a:ext uri="{FF2B5EF4-FFF2-40B4-BE49-F238E27FC236}">
+                <a16:creationId xmlns:a16="http://schemas.microsoft.com/office/drawing/2014/main" id="{83A70247-FCDE-B34D-0418-AD0E73C544B3}"/>
+              </a:ext>
+            </a:extLst>
+          </p:cNvPr>
+          <p:cNvCxnSpPr>
+            <a:cxnSpLocks/>
+          </p:cNvCxnSpPr>
+          <p:nvPr/>
+        </p:nvCxnSpPr>
+        <p:spPr>
+          <a:xfrm>
+            <a:off x="1298734" y="4920586"/>
+            <a:ext cx="478733" cy="194230"/>
+          </a:xfrm>
+          <a:prstGeom prst="straightConnector1">
+            <a:avLst/>
+          </a:prstGeom>
+          <a:ln>
+            <a:tailEnd type="triangle"/>
+          </a:ln>
+        </p:spPr>
+        <p:style>
+          <a:lnRef idx="2">
+            <a:schemeClr val="accent2"/>
+          </a:lnRef>
+          <a:fillRef idx="0">
+            <a:schemeClr val="accent2"/>
+          </a:fillRef>
+          <a:effectRef idx="1">
+            <a:schemeClr val="accent2"/>
+          </a:effectRef>
+          <a:fontRef idx="minor">
+            <a:schemeClr val="tx1"/>
+          </a:fontRef>
+        </p:style>
+      </p:cxnSp>
+      <p:sp>
+        <p:nvSpPr>
+          <p:cNvPr id="16" name="TextBox 15">
+            <a:extLst>
+              <a:ext uri="{FF2B5EF4-FFF2-40B4-BE49-F238E27FC236}">
+                <a16:creationId xmlns:a16="http://schemas.microsoft.com/office/drawing/2014/main" id="{FC91C62F-544E-446B-5E37-EBD8C0F26C5E}"/>
+              </a:ext>
+            </a:extLst>
+          </p:cNvPr>
+          <p:cNvSpPr txBox="1"/>
+          <p:nvPr/>
+        </p:nvSpPr>
+        <p:spPr>
+          <a:xfrm>
+            <a:off x="4495800" y="4736068"/>
+            <a:ext cx="1897823" cy="369332"/>
+          </a:xfrm>
+          <a:prstGeom prst="rect">
+            <a:avLst/>
+          </a:prstGeom>
+          <a:noFill/>
+        </p:spPr>
+        <p:txBody>
+          <a:bodyPr wrap="square">
+            <a:spAutoFit/>
+          </a:bodyPr>
+          <a:lstStyle/>
+          <a:p>
+            <a:r>
+              <a:rPr lang="en-US" sz="1800" b="0" dirty="0">
+                <a:solidFill>
+                  <a:srgbClr val="C00000"/>
+                </a:solidFill>
+              </a:rPr>
+              <a:t>SP after 2 </a:t>
+            </a:r>
+            <a:r>
+              <a:rPr lang="en-US" sz="1800" b="0" dirty="0" err="1">
+                <a:solidFill>
+                  <a:srgbClr val="C00000"/>
+                </a:solidFill>
+              </a:rPr>
+              <a:t>PUSHes</a:t>
+            </a:r>
+            <a:endParaRPr lang="en-US" dirty="0">
+              <a:solidFill>
+                <a:srgbClr val="C00000"/>
+              </a:solidFill>
+            </a:endParaRPr>
+          </a:p>
+        </p:txBody>
+      </p:sp>
+      <p:cxnSp>
+        <p:nvCxnSpPr>
+          <p:cNvPr id="17" name="Straight Arrow Connector 16">
+            <a:extLst>
+              <a:ext uri="{FF2B5EF4-FFF2-40B4-BE49-F238E27FC236}">
+                <a16:creationId xmlns:a16="http://schemas.microsoft.com/office/drawing/2014/main" id="{98C581BD-5415-4240-5CDE-EE805D176DFD}"/>
+              </a:ext>
+            </a:extLst>
+          </p:cNvPr>
+          <p:cNvCxnSpPr>
+            <a:cxnSpLocks/>
+          </p:cNvCxnSpPr>
+          <p:nvPr/>
+        </p:nvCxnSpPr>
+        <p:spPr>
+          <a:xfrm>
+            <a:off x="5417949" y="5029200"/>
+            <a:ext cx="0" cy="609600"/>
+          </a:xfrm>
+          <a:prstGeom prst="straightConnector1">
+            <a:avLst/>
+          </a:prstGeom>
+          <a:ln>
+            <a:tailEnd type="triangle"/>
+          </a:ln>
+        </p:spPr>
+        <p:style>
+          <a:lnRef idx="2">
+            <a:schemeClr val="accent2"/>
+          </a:lnRef>
+          <a:fillRef idx="0">
+            <a:schemeClr val="accent2"/>
+          </a:fillRef>
+          <a:effectRef idx="1">
+            <a:schemeClr val="accent2"/>
+          </a:effectRef>
+          <a:fontRef idx="minor">
+            <a:schemeClr val="tx1"/>
+          </a:fontRef>
+        </p:style>
+      </p:cxnSp>
+      <p:sp>
+        <p:nvSpPr>
+          <p:cNvPr id="20" name="TextBox 19">
+            <a:extLst>
+              <a:ext uri="{FF2B5EF4-FFF2-40B4-BE49-F238E27FC236}">
+                <a16:creationId xmlns:a16="http://schemas.microsoft.com/office/drawing/2014/main" id="{6A32EAF7-51C8-6C8C-E34F-3D982CFA9042}"/>
+              </a:ext>
+            </a:extLst>
+          </p:cNvPr>
+          <p:cNvSpPr txBox="1"/>
+          <p:nvPr/>
+        </p:nvSpPr>
+        <p:spPr>
+          <a:xfrm>
+            <a:off x="6583204" y="6473008"/>
+            <a:ext cx="1562100" cy="369332"/>
+          </a:xfrm>
+          <a:prstGeom prst="rect">
+            <a:avLst/>
+          </a:prstGeom>
+          <a:noFill/>
+        </p:spPr>
+        <p:txBody>
+          <a:bodyPr wrap="square">
+            <a:spAutoFit/>
+          </a:bodyPr>
+          <a:lstStyle/>
+          <a:p>
+            <a:r>
+              <a:rPr lang="en-US" sz="1800" b="0" dirty="0">
+                <a:solidFill>
+                  <a:srgbClr val="C00000"/>
+                </a:solidFill>
+              </a:rPr>
+              <a:t>SP after 1 POP</a:t>
+            </a:r>
+            <a:endParaRPr lang="en-US" dirty="0">
+              <a:solidFill>
+                <a:srgbClr val="C00000"/>
+              </a:solidFill>
+            </a:endParaRPr>
+          </a:p>
+        </p:txBody>
+      </p:sp>
+      <p:cxnSp>
+        <p:nvCxnSpPr>
+          <p:cNvPr id="21" name="Straight Arrow Connector 20">
+            <a:extLst>
+              <a:ext uri="{FF2B5EF4-FFF2-40B4-BE49-F238E27FC236}">
+                <a16:creationId xmlns:a16="http://schemas.microsoft.com/office/drawing/2014/main" id="{50BCB6B3-8463-2EB8-C9F4-91B6D04C1A17}"/>
+              </a:ext>
+            </a:extLst>
+          </p:cNvPr>
+          <p:cNvCxnSpPr>
+            <a:cxnSpLocks/>
+          </p:cNvCxnSpPr>
+          <p:nvPr/>
+        </p:nvCxnSpPr>
+        <p:spPr>
+          <a:xfrm flipV="1">
+            <a:off x="7391400" y="5823284"/>
+            <a:ext cx="0" cy="660028"/>
+          </a:xfrm>
+          <a:prstGeom prst="straightConnector1">
+            <a:avLst/>
+          </a:prstGeom>
+          <a:ln>
+            <a:tailEnd type="triangle"/>
+          </a:ln>
+        </p:spPr>
+        <p:style>
+          <a:lnRef idx="2">
+            <a:schemeClr val="accent2"/>
+          </a:lnRef>
+          <a:fillRef idx="0">
+            <a:schemeClr val="accent2"/>
+          </a:fillRef>
+          <a:effectRef idx="1">
+            <a:schemeClr val="accent2"/>
+          </a:effectRef>
+          <a:fontRef idx="minor">
+            <a:schemeClr val="tx1"/>
+          </a:fontRef>
+        </p:style>
+      </p:cxnSp>
     </p:spTree>
     <p:extLst>
       <p:ext uri="{BB962C8B-B14F-4D97-AF65-F5344CB8AC3E}">
@@ -22836,7 +22491,7 @@
         <p:spPr>
           <a:xfrm>
             <a:off x="152400" y="1270963"/>
-            <a:ext cx="2667000" cy="4937760"/>
+            <a:ext cx="2544097" cy="4937760"/>
           </a:xfrm>
         </p:spPr>
         <p:txBody>
@@ -22860,6 +22515,12 @@
             <a:r>
               <a:rPr lang="en-US" dirty="0"/>
               <a:t> returns to caller</a:t>
+            </a:r>
+          </a:p>
+          <a:p>
+            <a:r>
+              <a:rPr lang="en-US" dirty="0"/>
+              <a:t>BX pc is not a return and will re-execute at the PC value</a:t>
             </a:r>
           </a:p>
         </p:txBody>
@@ -23468,6 +23129,706 @@
           <p:cNvPr id="2" name="Title 1">
             <a:extLst>
               <a:ext uri="{FF2B5EF4-FFF2-40B4-BE49-F238E27FC236}">
+                <a16:creationId xmlns:a16="http://schemas.microsoft.com/office/drawing/2014/main" id="{0CCDC4F0-89D8-54C1-7B5F-442BB66DAAA7}"/>
+              </a:ext>
+            </a:extLst>
+          </p:cNvPr>
+          <p:cNvSpPr>
+            <a:spLocks noGrp="1"/>
+          </p:cNvSpPr>
+          <p:nvPr>
+            <p:ph type="title"/>
+          </p:nvPr>
+        </p:nvSpPr>
+        <p:spPr/>
+        <p:txBody>
+          <a:bodyPr/>
+          <a:lstStyle/>
+          <a:p>
+            <a:r>
+              <a:rPr lang="en-US" dirty="0"/>
+              <a:t>Program Understanding</a:t>
+            </a:r>
+          </a:p>
+        </p:txBody>
+      </p:sp>
+      <p:sp>
+        <p:nvSpPr>
+          <p:cNvPr id="3" name="Slide Number Placeholder 2">
+            <a:extLst>
+              <a:ext uri="{FF2B5EF4-FFF2-40B4-BE49-F238E27FC236}">
+                <a16:creationId xmlns:a16="http://schemas.microsoft.com/office/drawing/2014/main" id="{04ACEC4B-05BD-C502-9FB9-FEB63BA9F5F4}"/>
+              </a:ext>
+            </a:extLst>
+          </p:cNvPr>
+          <p:cNvSpPr>
+            <a:spLocks noGrp="1"/>
+          </p:cNvSpPr>
+          <p:nvPr>
+            <p:ph type="sldNum" sz="quarter" idx="12"/>
+          </p:nvPr>
+        </p:nvSpPr>
+        <p:spPr/>
+        <p:txBody>
+          <a:bodyPr/>
+          <a:lstStyle/>
+          <a:p>
+            <a:fld id="{EA7C8D44-3667-46F6-9772-CC52308E2A7F}" type="slidenum">
+              <a:rPr kumimoji="0" lang="en-US" smtClean="0"/>
+              <a:pPr/>
+              <a:t>21</a:t>
+            </a:fld>
+            <a:endParaRPr kumimoji="0" lang="en-US" dirty="0"/>
+          </a:p>
+        </p:txBody>
+      </p:sp>
+      <p:sp>
+        <p:nvSpPr>
+          <p:cNvPr id="4" name="Content Placeholder 3">
+            <a:extLst>
+              <a:ext uri="{FF2B5EF4-FFF2-40B4-BE49-F238E27FC236}">
+                <a16:creationId xmlns:a16="http://schemas.microsoft.com/office/drawing/2014/main" id="{4C97CD4C-D1B7-839F-818C-C650C0AA8892}"/>
+              </a:ext>
+            </a:extLst>
+          </p:cNvPr>
+          <p:cNvSpPr>
+            <a:spLocks noGrp="1"/>
+          </p:cNvSpPr>
+          <p:nvPr>
+            <p:ph sz="quarter" idx="1"/>
+          </p:nvPr>
+        </p:nvSpPr>
+        <p:spPr/>
+        <p:txBody>
+          <a:bodyPr/>
+          <a:lstStyle/>
+          <a:p>
+            <a:r>
+              <a:rPr lang="en-US" dirty="0"/>
+              <a:t>Write out the sequence of values of r0 and r7 after </a:t>
+            </a:r>
+            <a:r>
+              <a:rPr lang="en-US"/>
+              <a:t>running this program. </a:t>
+            </a:r>
+            <a:endParaRPr lang="en-US" dirty="0"/>
+          </a:p>
+        </p:txBody>
+      </p:sp>
+      <p:sp>
+        <p:nvSpPr>
+          <p:cNvPr id="5" name="TextBox 4">
+            <a:extLst>
+              <a:ext uri="{FF2B5EF4-FFF2-40B4-BE49-F238E27FC236}">
+                <a16:creationId xmlns:a16="http://schemas.microsoft.com/office/drawing/2014/main" id="{E5333230-46BA-8663-0449-A907C073A049}"/>
+              </a:ext>
+            </a:extLst>
+          </p:cNvPr>
+          <p:cNvSpPr txBox="1"/>
+          <p:nvPr/>
+        </p:nvSpPr>
+        <p:spPr>
+          <a:xfrm>
+            <a:off x="866618" y="2125087"/>
+            <a:ext cx="3454460" cy="4031873"/>
+          </a:xfrm>
+          <a:prstGeom prst="rect">
+            <a:avLst/>
+          </a:prstGeom>
+        </p:spPr>
+        <p:style>
+          <a:lnRef idx="2">
+            <a:schemeClr val="accent1"/>
+          </a:lnRef>
+          <a:fillRef idx="1">
+            <a:schemeClr val="lt1"/>
+          </a:fillRef>
+          <a:effectRef idx="0">
+            <a:schemeClr val="accent1"/>
+          </a:effectRef>
+          <a:fontRef idx="minor">
+            <a:schemeClr val="dk1"/>
+          </a:fontRef>
+        </p:style>
+        <p:txBody>
+          <a:bodyPr wrap="square" rtlCol="0">
+            <a:spAutoFit/>
+          </a:bodyPr>
+          <a:lstStyle/>
+          <a:p>
+            <a:r>
+              <a:rPr lang="en-US" sz="1600" dirty="0">
+                <a:latin typeface="Consolas" panose="020B0609020204030204" pitchFamily="49" charset="0"/>
+                <a:cs typeface="Consolas" panose="020B0609020204030204" pitchFamily="49" charset="0"/>
+              </a:rPr>
+              <a:t>start:</a:t>
+            </a:r>
+          </a:p>
+          <a:p>
+            <a:r>
+              <a:rPr lang="en-US" sz="1600" dirty="0">
+                <a:latin typeface="Consolas" panose="020B0609020204030204" pitchFamily="49" charset="0"/>
+                <a:cs typeface="Consolas" panose="020B0609020204030204" pitchFamily="49" charset="0"/>
+              </a:rPr>
+              <a:t>        mov     r0, #1       </a:t>
+            </a:r>
+          </a:p>
+          <a:p>
+            <a:endParaRPr lang="en-US" sz="1600" dirty="0">
+              <a:latin typeface="Consolas" panose="020B0609020204030204" pitchFamily="49" charset="0"/>
+              <a:cs typeface="Consolas" panose="020B0609020204030204" pitchFamily="49" charset="0"/>
+            </a:endParaRPr>
+          </a:p>
+          <a:p>
+            <a:r>
+              <a:rPr lang="en-US" sz="1600" dirty="0">
+                <a:latin typeface="Consolas" panose="020B0609020204030204" pitchFamily="49" charset="0"/>
+                <a:cs typeface="Consolas" panose="020B0609020204030204" pitchFamily="49" charset="0"/>
+              </a:rPr>
+              <a:t>main:</a:t>
+            </a:r>
+          </a:p>
+          <a:p>
+            <a:r>
+              <a:rPr lang="en-US" sz="1600" dirty="0">
+                <a:latin typeface="Consolas" panose="020B0609020204030204" pitchFamily="49" charset="0"/>
+                <a:cs typeface="Consolas" panose="020B0609020204030204" pitchFamily="49" charset="0"/>
+              </a:rPr>
+              <a:t>        add     r0, r0, #1</a:t>
+            </a:r>
+          </a:p>
+          <a:p>
+            <a:r>
+              <a:rPr lang="en-US" sz="1600" dirty="0">
+                <a:latin typeface="Consolas" panose="020B0609020204030204" pitchFamily="49" charset="0"/>
+                <a:cs typeface="Consolas" panose="020B0609020204030204" pitchFamily="49" charset="0"/>
+              </a:rPr>
+              <a:t>        </a:t>
+            </a:r>
+            <a:r>
+              <a:rPr lang="en-US" sz="1600" dirty="0" err="1">
+                <a:latin typeface="Consolas" panose="020B0609020204030204" pitchFamily="49" charset="0"/>
+                <a:cs typeface="Consolas" panose="020B0609020204030204" pitchFamily="49" charset="0"/>
+              </a:rPr>
+              <a:t>cmp</a:t>
+            </a:r>
+            <a:r>
+              <a:rPr lang="en-US" sz="1600" dirty="0">
+                <a:latin typeface="Consolas" panose="020B0609020204030204" pitchFamily="49" charset="0"/>
+                <a:cs typeface="Consolas" panose="020B0609020204030204" pitchFamily="49" charset="0"/>
+              </a:rPr>
+              <a:t>     r0, #5       </a:t>
+            </a:r>
+          </a:p>
+          <a:p>
+            <a:r>
+              <a:rPr lang="en-US" sz="1600" dirty="0">
+                <a:latin typeface="Consolas" panose="020B0609020204030204" pitchFamily="49" charset="0"/>
+                <a:cs typeface="Consolas" panose="020B0609020204030204" pitchFamily="49" charset="0"/>
+              </a:rPr>
+              <a:t>        </a:t>
+            </a:r>
+            <a:r>
+              <a:rPr lang="en-US" sz="1600" dirty="0" err="1">
+                <a:latin typeface="Consolas" panose="020B0609020204030204" pitchFamily="49" charset="0"/>
+                <a:cs typeface="Consolas" panose="020B0609020204030204" pitchFamily="49" charset="0"/>
+              </a:rPr>
+              <a:t>bne</a:t>
+            </a:r>
+            <a:r>
+              <a:rPr lang="en-US" sz="1600" dirty="0">
+                <a:latin typeface="Consolas" panose="020B0609020204030204" pitchFamily="49" charset="0"/>
+                <a:cs typeface="Consolas" panose="020B0609020204030204" pitchFamily="49" charset="0"/>
+              </a:rPr>
+              <a:t>     skip         </a:t>
+            </a:r>
+          </a:p>
+          <a:p>
+            <a:r>
+              <a:rPr lang="en-US" sz="1600" dirty="0">
+                <a:latin typeface="Consolas" panose="020B0609020204030204" pitchFamily="49" charset="0"/>
+                <a:cs typeface="Consolas" panose="020B0609020204030204" pitchFamily="49" charset="0"/>
+              </a:rPr>
+              <a:t>        bl      call</a:t>
+            </a:r>
+          </a:p>
+          <a:p>
+            <a:endParaRPr lang="en-US" sz="1600" dirty="0">
+              <a:latin typeface="Consolas" panose="020B0609020204030204" pitchFamily="49" charset="0"/>
+              <a:cs typeface="Consolas" panose="020B0609020204030204" pitchFamily="49" charset="0"/>
+            </a:endParaRPr>
+          </a:p>
+          <a:p>
+            <a:r>
+              <a:rPr lang="en-US" sz="1600" dirty="0">
+                <a:latin typeface="Consolas" panose="020B0609020204030204" pitchFamily="49" charset="0"/>
+                <a:cs typeface="Consolas" panose="020B0609020204030204" pitchFamily="49" charset="0"/>
+              </a:rPr>
+              <a:t>skip:</a:t>
+            </a:r>
+          </a:p>
+          <a:p>
+            <a:r>
+              <a:rPr lang="en-US" sz="1600" dirty="0">
+                <a:latin typeface="Consolas" panose="020B0609020204030204" pitchFamily="49" charset="0"/>
+                <a:cs typeface="Consolas" panose="020B0609020204030204" pitchFamily="49" charset="0"/>
+              </a:rPr>
+              <a:t>        b       main         </a:t>
+            </a:r>
+          </a:p>
+          <a:p>
+            <a:endParaRPr lang="en-US" sz="1600" dirty="0">
+              <a:latin typeface="Consolas" panose="020B0609020204030204" pitchFamily="49" charset="0"/>
+              <a:cs typeface="Consolas" panose="020B0609020204030204" pitchFamily="49" charset="0"/>
+            </a:endParaRPr>
+          </a:p>
+          <a:p>
+            <a:r>
+              <a:rPr lang="en-US" sz="1600" dirty="0">
+                <a:latin typeface="Consolas" panose="020B0609020204030204" pitchFamily="49" charset="0"/>
+                <a:cs typeface="Consolas" panose="020B0609020204030204" pitchFamily="49" charset="0"/>
+              </a:rPr>
+              <a:t>call:</a:t>
+            </a:r>
+          </a:p>
+          <a:p>
+            <a:r>
+              <a:rPr lang="en-US" sz="1600" dirty="0">
+                <a:latin typeface="Consolas" panose="020B0609020204030204" pitchFamily="49" charset="0"/>
+                <a:cs typeface="Consolas" panose="020B0609020204030204" pitchFamily="49" charset="0"/>
+              </a:rPr>
+              <a:t>        add     r7, r7, #255</a:t>
+            </a:r>
+          </a:p>
+          <a:p>
+            <a:r>
+              <a:rPr lang="en-US" sz="1600" dirty="0">
+                <a:latin typeface="Consolas" panose="020B0609020204030204" pitchFamily="49" charset="0"/>
+                <a:cs typeface="Consolas" panose="020B0609020204030204" pitchFamily="49" charset="0"/>
+              </a:rPr>
+              <a:t>        mov     r0, #1       </a:t>
+            </a:r>
+          </a:p>
+          <a:p>
+            <a:r>
+              <a:rPr lang="en-US" sz="1600" dirty="0">
+                <a:latin typeface="Consolas" panose="020B0609020204030204" pitchFamily="49" charset="0"/>
+                <a:cs typeface="Consolas" panose="020B0609020204030204" pitchFamily="49" charset="0"/>
+              </a:rPr>
+              <a:t>        bx      </a:t>
+            </a:r>
+            <a:r>
+              <a:rPr lang="en-US" sz="1600" dirty="0" err="1">
+                <a:latin typeface="Consolas" panose="020B0609020204030204" pitchFamily="49" charset="0"/>
+                <a:cs typeface="Consolas" panose="020B0609020204030204" pitchFamily="49" charset="0"/>
+              </a:rPr>
+              <a:t>lr</a:t>
+            </a:r>
+            <a:r>
+              <a:rPr lang="en-US" sz="1600" dirty="0">
+                <a:latin typeface="Consolas" panose="020B0609020204030204" pitchFamily="49" charset="0"/>
+                <a:cs typeface="Consolas" panose="020B0609020204030204" pitchFamily="49" charset="0"/>
+              </a:rPr>
+              <a:t>         </a:t>
+            </a:r>
+          </a:p>
+        </p:txBody>
+      </p:sp>
+    </p:spTree>
+    <p:extLst>
+      <p:ext uri="{BB962C8B-B14F-4D97-AF65-F5344CB8AC3E}">
+        <p14:creationId xmlns:p14="http://schemas.microsoft.com/office/powerpoint/2010/main" val="2937750711"/>
+      </p:ext>
+    </p:extLst>
+  </p:cSld>
+  <p:clrMapOvr>
+    <a:masterClrMapping/>
+  </p:clrMapOvr>
+</p:sld>
+</file>
+
+<file path=ppt/slides/slide22.xml><?xml version="1.0" encoding="utf-8"?>
+<p:sld xmlns:a="http://schemas.openxmlformats.org/drawingml/2006/main" xmlns:r="http://schemas.openxmlformats.org/officeDocument/2006/relationships" xmlns:p="http://schemas.openxmlformats.org/presentationml/2006/main">
+  <p:cSld>
+    <p:spTree>
+      <p:nvGrpSpPr>
+        <p:cNvPr id="1" name="">
+          <a:extLst>
+            <a:ext uri="{FF2B5EF4-FFF2-40B4-BE49-F238E27FC236}">
+              <a16:creationId xmlns:a16="http://schemas.microsoft.com/office/drawing/2014/main" id="{4E3CD278-9055-1654-5493-D4D5C252F8DD}"/>
+            </a:ext>
+          </a:extLst>
+        </p:cNvPr>
+        <p:cNvGrpSpPr/>
+        <p:nvPr/>
+      </p:nvGrpSpPr>
+      <p:grpSpPr>
+        <a:xfrm>
+          <a:off x="0" y="0"/>
+          <a:ext cx="0" cy="0"/>
+          <a:chOff x="0" y="0"/>
+          <a:chExt cx="0" cy="0"/>
+        </a:xfrm>
+      </p:grpSpPr>
+      <p:sp>
+        <p:nvSpPr>
+          <p:cNvPr id="2" name="Title 1">
+            <a:extLst>
+              <a:ext uri="{FF2B5EF4-FFF2-40B4-BE49-F238E27FC236}">
+                <a16:creationId xmlns:a16="http://schemas.microsoft.com/office/drawing/2014/main" id="{5BB67A95-DEC2-DAE0-E275-60B265AA044E}"/>
+              </a:ext>
+            </a:extLst>
+          </p:cNvPr>
+          <p:cNvSpPr>
+            <a:spLocks noGrp="1"/>
+          </p:cNvSpPr>
+          <p:nvPr>
+            <p:ph type="title"/>
+          </p:nvPr>
+        </p:nvSpPr>
+        <p:spPr/>
+        <p:txBody>
+          <a:bodyPr/>
+          <a:lstStyle/>
+          <a:p>
+            <a:r>
+              <a:rPr lang="en-US" dirty="0"/>
+              <a:t>Program Understanding ANS</a:t>
+            </a:r>
+          </a:p>
+        </p:txBody>
+      </p:sp>
+      <p:sp>
+        <p:nvSpPr>
+          <p:cNvPr id="3" name="Slide Number Placeholder 2">
+            <a:extLst>
+              <a:ext uri="{FF2B5EF4-FFF2-40B4-BE49-F238E27FC236}">
+                <a16:creationId xmlns:a16="http://schemas.microsoft.com/office/drawing/2014/main" id="{74502889-1E6F-132B-00E5-EBBFD6734866}"/>
+              </a:ext>
+            </a:extLst>
+          </p:cNvPr>
+          <p:cNvSpPr>
+            <a:spLocks noGrp="1"/>
+          </p:cNvSpPr>
+          <p:nvPr>
+            <p:ph type="sldNum" sz="quarter" idx="12"/>
+          </p:nvPr>
+        </p:nvSpPr>
+        <p:spPr/>
+        <p:txBody>
+          <a:bodyPr/>
+          <a:lstStyle/>
+          <a:p>
+            <a:fld id="{EA7C8D44-3667-46F6-9772-CC52308E2A7F}" type="slidenum">
+              <a:rPr kumimoji="0" lang="en-US" smtClean="0"/>
+              <a:pPr/>
+              <a:t>22</a:t>
+            </a:fld>
+            <a:endParaRPr kumimoji="0" lang="en-US" dirty="0"/>
+          </a:p>
+        </p:txBody>
+      </p:sp>
+      <p:sp>
+        <p:nvSpPr>
+          <p:cNvPr id="4" name="Content Placeholder 3">
+            <a:extLst>
+              <a:ext uri="{FF2B5EF4-FFF2-40B4-BE49-F238E27FC236}">
+                <a16:creationId xmlns:a16="http://schemas.microsoft.com/office/drawing/2014/main" id="{0707AC2E-44F3-B02C-EC23-E5EB61FA94EB}"/>
+              </a:ext>
+            </a:extLst>
+          </p:cNvPr>
+          <p:cNvSpPr>
+            <a:spLocks noGrp="1"/>
+          </p:cNvSpPr>
+          <p:nvPr>
+            <p:ph sz="quarter" idx="1"/>
+          </p:nvPr>
+        </p:nvSpPr>
+        <p:spPr>
+          <a:xfrm>
+            <a:off x="473765" y="1082040"/>
+            <a:ext cx="8229600" cy="4937760"/>
+          </a:xfrm>
+        </p:spPr>
+        <p:txBody>
+          <a:bodyPr>
+            <a:normAutofit/>
+          </a:bodyPr>
+          <a:lstStyle/>
+          <a:p>
+            <a:r>
+              <a:rPr lang="en-US" sz="1800" dirty="0"/>
+              <a:t>It starts with r0 = 1. It loops, incrementing r0 each time. When r0 reaches 5, it calls subroutine call, which adds 255 to r7 and resets r0 to 1. Control returns to main, and the cycle repeats. So the pattern goes like this:</a:t>
+            </a:r>
+          </a:p>
+          <a:p>
+            <a:r>
+              <a:rPr lang="en-US" sz="1800" dirty="0"/>
+              <a:t>r0: 1 → 2 → 3 → 4 → 5 → (call resets to 1)</a:t>
+            </a:r>
+          </a:p>
+          <a:p>
+            <a:r>
+              <a:rPr lang="en-US" sz="1800" dirty="0"/>
+              <a:t>r7: +255 each time r0 reaches 5</a:t>
+            </a:r>
+          </a:p>
+        </p:txBody>
+      </p:sp>
+      <p:sp>
+        <p:nvSpPr>
+          <p:cNvPr id="5" name="TextBox 4">
+            <a:extLst>
+              <a:ext uri="{FF2B5EF4-FFF2-40B4-BE49-F238E27FC236}">
+                <a16:creationId xmlns:a16="http://schemas.microsoft.com/office/drawing/2014/main" id="{A84A8A79-412F-4394-2139-FF1AAAAEDB7A}"/>
+              </a:ext>
+            </a:extLst>
+          </p:cNvPr>
+          <p:cNvSpPr txBox="1"/>
+          <p:nvPr/>
+        </p:nvSpPr>
+        <p:spPr>
+          <a:xfrm>
+            <a:off x="888940" y="2690237"/>
+            <a:ext cx="7366119" cy="4031873"/>
+          </a:xfrm>
+          <a:prstGeom prst="rect">
+            <a:avLst/>
+          </a:prstGeom>
+        </p:spPr>
+        <p:style>
+          <a:lnRef idx="2">
+            <a:schemeClr val="accent1"/>
+          </a:lnRef>
+          <a:fillRef idx="1">
+            <a:schemeClr val="lt1"/>
+          </a:fillRef>
+          <a:effectRef idx="0">
+            <a:schemeClr val="accent1"/>
+          </a:effectRef>
+          <a:fontRef idx="minor">
+            <a:schemeClr val="dk1"/>
+          </a:fontRef>
+        </p:style>
+        <p:txBody>
+          <a:bodyPr wrap="none" rtlCol="0">
+            <a:spAutoFit/>
+          </a:bodyPr>
+          <a:lstStyle/>
+          <a:p>
+            <a:r>
+              <a:rPr lang="en-US" sz="1600" dirty="0">
+                <a:latin typeface="Consolas" panose="020B0609020204030204" pitchFamily="49" charset="0"/>
+                <a:cs typeface="Consolas" panose="020B0609020204030204" pitchFamily="49" charset="0"/>
+              </a:rPr>
+              <a:t>start:</a:t>
+            </a:r>
+          </a:p>
+          <a:p>
+            <a:r>
+              <a:rPr lang="en-US" sz="1600" dirty="0">
+                <a:latin typeface="Consolas" panose="020B0609020204030204" pitchFamily="49" charset="0"/>
+                <a:cs typeface="Consolas" panose="020B0609020204030204" pitchFamily="49" charset="0"/>
+              </a:rPr>
+              <a:t>        mov     r0, #1       @ start: r0 = 1</a:t>
+            </a:r>
+          </a:p>
+          <a:p>
+            <a:endParaRPr lang="en-US" sz="1600" dirty="0">
+              <a:latin typeface="Consolas" panose="020B0609020204030204" pitchFamily="49" charset="0"/>
+              <a:cs typeface="Consolas" panose="020B0609020204030204" pitchFamily="49" charset="0"/>
+            </a:endParaRPr>
+          </a:p>
+          <a:p>
+            <a:r>
+              <a:rPr lang="en-US" sz="1600" dirty="0">
+                <a:latin typeface="Consolas" panose="020B0609020204030204" pitchFamily="49" charset="0"/>
+                <a:cs typeface="Consolas" panose="020B0609020204030204" pitchFamily="49" charset="0"/>
+              </a:rPr>
+              <a:t>main:</a:t>
+            </a:r>
+          </a:p>
+          <a:p>
+            <a:r>
+              <a:rPr lang="en-US" sz="1600" dirty="0">
+                <a:latin typeface="Consolas" panose="020B0609020204030204" pitchFamily="49" charset="0"/>
+                <a:cs typeface="Consolas" panose="020B0609020204030204" pitchFamily="49" charset="0"/>
+              </a:rPr>
+              <a:t>        add     r0, r0, #1   @ increment r0</a:t>
+            </a:r>
+          </a:p>
+          <a:p>
+            <a:r>
+              <a:rPr lang="en-US" sz="1600" dirty="0">
+                <a:latin typeface="Consolas" panose="020B0609020204030204" pitchFamily="49" charset="0"/>
+                <a:cs typeface="Consolas" panose="020B0609020204030204" pitchFamily="49" charset="0"/>
+              </a:rPr>
+              <a:t>        </a:t>
+            </a:r>
+            <a:r>
+              <a:rPr lang="en-US" sz="1600" dirty="0" err="1">
+                <a:latin typeface="Consolas" panose="020B0609020204030204" pitchFamily="49" charset="0"/>
+                <a:cs typeface="Consolas" panose="020B0609020204030204" pitchFamily="49" charset="0"/>
+              </a:rPr>
+              <a:t>cmp</a:t>
+            </a:r>
+            <a:r>
+              <a:rPr lang="en-US" sz="1600" dirty="0">
+                <a:latin typeface="Consolas" panose="020B0609020204030204" pitchFamily="49" charset="0"/>
+                <a:cs typeface="Consolas" panose="020B0609020204030204" pitchFamily="49" charset="0"/>
+              </a:rPr>
+              <a:t>     r0, #5       @ compare r0 to 5</a:t>
+            </a:r>
+          </a:p>
+          <a:p>
+            <a:r>
+              <a:rPr lang="en-US" sz="1600" dirty="0">
+                <a:latin typeface="Consolas" panose="020B0609020204030204" pitchFamily="49" charset="0"/>
+                <a:cs typeface="Consolas" panose="020B0609020204030204" pitchFamily="49" charset="0"/>
+              </a:rPr>
+              <a:t>        </a:t>
+            </a:r>
+            <a:r>
+              <a:rPr lang="en-US" sz="1600" dirty="0" err="1">
+                <a:latin typeface="Consolas" panose="020B0609020204030204" pitchFamily="49" charset="0"/>
+                <a:cs typeface="Consolas" panose="020B0609020204030204" pitchFamily="49" charset="0"/>
+              </a:rPr>
+              <a:t>bne</a:t>
+            </a:r>
+            <a:r>
+              <a:rPr lang="en-US" sz="1600" dirty="0">
+                <a:latin typeface="Consolas" panose="020B0609020204030204" pitchFamily="49" charset="0"/>
+                <a:cs typeface="Consolas" panose="020B0609020204030204" pitchFamily="49" charset="0"/>
+              </a:rPr>
+              <a:t>     skip         @ if not equal, go to skip</a:t>
+            </a:r>
+          </a:p>
+          <a:p>
+            <a:r>
+              <a:rPr lang="en-US" sz="1600" dirty="0">
+                <a:latin typeface="Consolas" panose="020B0609020204030204" pitchFamily="49" charset="0"/>
+                <a:cs typeface="Consolas" panose="020B0609020204030204" pitchFamily="49" charset="0"/>
+              </a:rPr>
+              <a:t>        bl      call         @ if equal, branch-and-link to call</a:t>
+            </a:r>
+          </a:p>
+          <a:p>
+            <a:endParaRPr lang="en-US" sz="1600" dirty="0">
+              <a:latin typeface="Consolas" panose="020B0609020204030204" pitchFamily="49" charset="0"/>
+              <a:cs typeface="Consolas" panose="020B0609020204030204" pitchFamily="49" charset="0"/>
+            </a:endParaRPr>
+          </a:p>
+          <a:p>
+            <a:r>
+              <a:rPr lang="en-US" sz="1600" dirty="0">
+                <a:latin typeface="Consolas" panose="020B0609020204030204" pitchFamily="49" charset="0"/>
+                <a:cs typeface="Consolas" panose="020B0609020204030204" pitchFamily="49" charset="0"/>
+              </a:rPr>
+              <a:t>skip:</a:t>
+            </a:r>
+          </a:p>
+          <a:p>
+            <a:r>
+              <a:rPr lang="en-US" sz="1600" dirty="0">
+                <a:latin typeface="Consolas" panose="020B0609020204030204" pitchFamily="49" charset="0"/>
+                <a:cs typeface="Consolas" panose="020B0609020204030204" pitchFamily="49" charset="0"/>
+              </a:rPr>
+              <a:t>        b       main         @ unconditional branch back to main</a:t>
+            </a:r>
+          </a:p>
+          <a:p>
+            <a:endParaRPr lang="en-US" sz="1600" dirty="0">
+              <a:latin typeface="Consolas" panose="020B0609020204030204" pitchFamily="49" charset="0"/>
+              <a:cs typeface="Consolas" panose="020B0609020204030204" pitchFamily="49" charset="0"/>
+            </a:endParaRPr>
+          </a:p>
+          <a:p>
+            <a:r>
+              <a:rPr lang="en-US" sz="1600" dirty="0">
+                <a:latin typeface="Consolas" panose="020B0609020204030204" pitchFamily="49" charset="0"/>
+                <a:cs typeface="Consolas" panose="020B0609020204030204" pitchFamily="49" charset="0"/>
+              </a:rPr>
+              <a:t>call:</a:t>
+            </a:r>
+          </a:p>
+          <a:p>
+            <a:r>
+              <a:rPr lang="en-US" sz="1600" dirty="0">
+                <a:latin typeface="Consolas" panose="020B0609020204030204" pitchFamily="49" charset="0"/>
+                <a:cs typeface="Consolas" panose="020B0609020204030204" pitchFamily="49" charset="0"/>
+              </a:rPr>
+              <a:t>        add     r7, r7, #255 @ add 255 to r7 (side-effect)</a:t>
+            </a:r>
+          </a:p>
+          <a:p>
+            <a:r>
+              <a:rPr lang="en-US" sz="1600" dirty="0">
+                <a:latin typeface="Consolas" panose="020B0609020204030204" pitchFamily="49" charset="0"/>
+                <a:cs typeface="Consolas" panose="020B0609020204030204" pitchFamily="49" charset="0"/>
+              </a:rPr>
+              <a:t>        mov     r0, #1       @ reset r0 to 1</a:t>
+            </a:r>
+          </a:p>
+          <a:p>
+            <a:r>
+              <a:rPr lang="en-US" sz="1600" dirty="0">
+                <a:latin typeface="Consolas" panose="020B0609020204030204" pitchFamily="49" charset="0"/>
+                <a:cs typeface="Consolas" panose="020B0609020204030204" pitchFamily="49" charset="0"/>
+              </a:rPr>
+              <a:t>        bx      </a:t>
+            </a:r>
+            <a:r>
+              <a:rPr lang="en-US" sz="1600" dirty="0" err="1">
+                <a:latin typeface="Consolas" panose="020B0609020204030204" pitchFamily="49" charset="0"/>
+                <a:cs typeface="Consolas" panose="020B0609020204030204" pitchFamily="49" charset="0"/>
+              </a:rPr>
+              <a:t>lr</a:t>
+            </a:r>
+            <a:r>
+              <a:rPr lang="en-US" sz="1600" dirty="0">
+                <a:latin typeface="Consolas" panose="020B0609020204030204" pitchFamily="49" charset="0"/>
+                <a:cs typeface="Consolas" panose="020B0609020204030204" pitchFamily="49" charset="0"/>
+              </a:rPr>
+              <a:t>           @ return (branch to link register)</a:t>
+            </a:r>
+          </a:p>
+        </p:txBody>
+      </p:sp>
+    </p:spTree>
+    <p:extLst>
+      <p:ext uri="{BB962C8B-B14F-4D97-AF65-F5344CB8AC3E}">
+        <p14:creationId xmlns:p14="http://schemas.microsoft.com/office/powerpoint/2010/main" val="3110859270"/>
+      </p:ext>
+    </p:extLst>
+  </p:cSld>
+  <p:clrMapOvr>
+    <a:masterClrMapping/>
+  </p:clrMapOvr>
+</p:sld>
+</file>
+
+<file path=ppt/slides/slide23.xml><?xml version="1.0" encoding="utf-8"?>
+<p:sld xmlns:a="http://schemas.openxmlformats.org/drawingml/2006/main" xmlns:r="http://schemas.openxmlformats.org/officeDocument/2006/relationships" xmlns:p="http://schemas.openxmlformats.org/presentationml/2006/main">
+  <p:cSld>
+    <p:spTree>
+      <p:nvGrpSpPr>
+        <p:cNvPr id="1" name=""/>
+        <p:cNvGrpSpPr/>
+        <p:nvPr/>
+      </p:nvGrpSpPr>
+      <p:grpSpPr>
+        <a:xfrm>
+          <a:off x="0" y="0"/>
+          <a:ext cx="0" cy="0"/>
+          <a:chOff x="0" y="0"/>
+          <a:chExt cx="0" cy="0"/>
+        </a:xfrm>
+      </p:grpSpPr>
+      <p:sp>
+        <p:nvSpPr>
+          <p:cNvPr id="2" name="Title 1">
+            <a:extLst>
+              <a:ext uri="{FF2B5EF4-FFF2-40B4-BE49-F238E27FC236}">
                 <a16:creationId xmlns:a16="http://schemas.microsoft.com/office/drawing/2014/main" id="{9F91FAD6-E4B6-9B88-FA7A-9F38A7C51248}"/>
               </a:ext>
             </a:extLst>
@@ -23516,7 +23877,7 @@
             <a:fld id="{EA7C8D44-3667-46F6-9772-CC52308E2A7F}" type="slidenum">
               <a:rPr kumimoji="0" lang="en-US" smtClean="0"/>
               <a:pPr/>
-              <a:t>21</a:t>
+              <a:t>23</a:t>
             </a:fld>
             <a:endParaRPr kumimoji="0" lang="en-US" dirty="0"/>
           </a:p>
@@ -24790,7 +25151,7 @@
           <p:nvPr>
             <p:extLst>
               <p:ext uri="{D42A27DB-BD31-4B8C-83A1-F6EECF244321}">
-                <p14:modId xmlns:p14="http://schemas.microsoft.com/office/powerpoint/2010/main" val="3135758298"/>
+                <p14:modId xmlns:p14="http://schemas.microsoft.com/office/powerpoint/2010/main" val="3797739913"/>
               </p:ext>
             </p:extLst>
           </p:nvPr>
@@ -24829,7 +25190,7 @@
                         </a:spcAft>
                       </a:pPr>
                       <a:r>
-                        <a:rPr lang="en-US" sz="1600" b="1">
+                        <a:rPr lang="en-US" sz="1600" b="1" dirty="0">
                           <a:solidFill>
                             <a:schemeClr val="bg1"/>
                           </a:solidFill>
@@ -24840,7 +25201,7 @@
                         <a:t>Calle</a:t>
                       </a:r>
                       <a:r>
-                        <a:rPr lang="en-US" altLang="zh-CN" sz="1600" b="1">
+                        <a:rPr lang="en-US" altLang="zh-CN" sz="1600" b="1" dirty="0">
                           <a:solidFill>
                             <a:schemeClr val="bg1"/>
                           </a:solidFill>
@@ -24851,7 +25212,7 @@
                         <a:t>e</a:t>
                       </a:r>
                       <a:r>
-                        <a:rPr lang="en-US" sz="1600" b="1">
+                        <a:rPr lang="en-US" sz="1600" b="1" dirty="0">
                           <a:solidFill>
                             <a:schemeClr val="bg1"/>
                           </a:solidFill>
@@ -24956,6 +25317,23 @@
                       </a:r>
                     </a:p>
                     <a:p>
+                      <a:pPr marL="0" marR="0" lvl="0" indent="0" algn="l" defTabSz="914400" rtl="0" eaLnBrk="1" fontAlgn="auto" latinLnBrk="0" hangingPunct="1">
+                        <a:lnSpc>
+                          <a:spcPct val="100000"/>
+                        </a:lnSpc>
+                        <a:spcBef>
+                          <a:spcPts val="0"/>
+                        </a:spcBef>
+                        <a:spcAft>
+                          <a:spcPts val="0"/>
+                        </a:spcAft>
+                        <a:buClrTx/>
+                        <a:buSzTx/>
+                        <a:buFontTx/>
+                        <a:buNone/>
+                        <a:tabLst/>
+                        <a:defRPr/>
+                      </a:pPr>
                       <a:r>
                         <a:rPr kumimoji="0" lang="en-US" sz="1400" b="0" i="0" kern="1200" dirty="0">
                           <a:solidFill>
@@ -24966,8 +25344,53 @@
                           <a:ea typeface="+mn-ea"/>
                           <a:cs typeface="+mn-cs"/>
                         </a:rPr>
-                        <a:t>     c += 'a' - 'A';</a:t>
+                        <a:t>     c += 32;  </a:t>
                       </a:r>
+                      <a:r>
+                        <a:rPr kumimoji="0" lang="en-US" sz="1400" b="0" i="1" kern="1200" dirty="0">
+                          <a:solidFill>
+                            <a:schemeClr val="tx1"/>
+                          </a:solidFill>
+                          <a:effectLst/>
+                          <a:latin typeface="Consolas" panose="020B0609020204030204" pitchFamily="49" charset="0"/>
+                          <a:ea typeface="+mn-ea"/>
+                          <a:cs typeface="+mn-cs"/>
+                        </a:rPr>
+                        <a:t>/*</a:t>
+                      </a:r>
+                      <a:r>
+                        <a:rPr kumimoji="0" lang="en-US" sz="1400" b="0" i="0" kern="1200" dirty="0">
+                          <a:solidFill>
+                            <a:schemeClr val="tx1"/>
+                          </a:solidFill>
+                          <a:effectLst/>
+                          <a:latin typeface="Consolas" panose="020B0609020204030204" pitchFamily="49" charset="0"/>
+                          <a:ea typeface="+mn-ea"/>
+                          <a:cs typeface="+mn-cs"/>
+                        </a:rPr>
+                        <a:t>'a' - ‘A’ = 32 </a:t>
+                      </a:r>
+                      <a:r>
+                        <a:rPr kumimoji="0" lang="en-US" sz="1400" b="0" i="1" kern="1200" dirty="0">
+                          <a:solidFill>
+                            <a:schemeClr val="tx1"/>
+                          </a:solidFill>
+                          <a:effectLst/>
+                          <a:latin typeface="Consolas" panose="020B0609020204030204" pitchFamily="49" charset="0"/>
+                          <a:ea typeface="+mn-ea"/>
+                          <a:cs typeface="+mn-cs"/>
+                        </a:rPr>
+                        <a:t>*/</a:t>
+                      </a:r>
+                      <a:endParaRPr kumimoji="0" lang="en-US" sz="1400" b="0" i="0" kern="1200" dirty="0">
+                        <a:solidFill>
+                          <a:schemeClr val="tx1"/>
+                        </a:solidFill>
+                        <a:effectLst/>
+                        <a:latin typeface="Consolas" panose="020B0609020204030204" pitchFamily="49" charset="0"/>
+                        <a:ea typeface="+mn-ea"/>
+                        <a:cs typeface="+mn-cs"/>
+                      </a:endParaRPr>
                     </a:p>
                     <a:p>
                       <a:endParaRPr kumimoji="0" lang="en-US" sz="1400" b="0" i="0" kern="1200" dirty="0">
@@ -25279,7 +25702,7 @@
 </p:sld>
 </file>
 
-<file path=ppt/slides/slide22.xml><?xml version="1.0" encoding="utf-8"?>
+<file path=ppt/slides/slide24.xml><?xml version="1.0" encoding="utf-8"?>
 <p:sld xmlns:a="http://schemas.openxmlformats.org/drawingml/2006/main" xmlns:r="http://schemas.openxmlformats.org/officeDocument/2006/relationships" xmlns:p="http://schemas.openxmlformats.org/presentationml/2006/main">
   <p:cSld>
     <p:spTree>
@@ -25358,7 +25781,7 @@
             <a:fld id="{EA7C8D44-3667-46F6-9772-CC52308E2A7F}" type="slidenum">
               <a:rPr kumimoji="0" lang="en-US" smtClean="0"/>
               <a:pPr/>
-              <a:t>22</a:t>
+              <a:t>24</a:t>
             </a:fld>
             <a:endParaRPr kumimoji="0" lang="en-US" dirty="0"/>
           </a:p>
@@ -25379,7 +25802,7 @@
           <p:nvPr>
             <p:extLst>
               <p:ext uri="{D42A27DB-BD31-4B8C-83A1-F6EECF244321}">
-                <p14:modId xmlns:p14="http://schemas.microsoft.com/office/powerpoint/2010/main" val="2484914283"/>
+                <p14:modId xmlns:p14="http://schemas.microsoft.com/office/powerpoint/2010/main" val="4043798945"/>
               </p:ext>
             </p:extLst>
           </p:nvPr>
@@ -25555,7 +25978,7 @@
                           <a:ea typeface="+mn-ea"/>
                           <a:cs typeface="+mn-cs"/>
                         </a:rPr>
-                        <a:t>     c += 'a' - 'A';</a:t>
+                        <a:t>     c += 32;</a:t>
                       </a:r>
                     </a:p>
                     <a:p>
@@ -25625,7 +26048,7 @@
           <p:nvPr>
             <p:extLst>
               <p:ext uri="{D42A27DB-BD31-4B8C-83A1-F6EECF244321}">
-                <p14:modId xmlns:p14="http://schemas.microsoft.com/office/powerpoint/2010/main" val="3738326912"/>
+                <p14:modId xmlns:p14="http://schemas.microsoft.com/office/powerpoint/2010/main" val="1881646543"/>
               </p:ext>
             </p:extLst>
           </p:nvPr>
@@ -26046,7 +26469,7 @@
                           <a:ea typeface="+mn-ea"/>
                           <a:cs typeface="+mn-cs"/>
                         </a:rPr>
-                        <a:t>    add     r0, r0, #('a' - 'A')    @ c += 32</a:t>
+                        <a:t>    add     r0, r0, #32             @ c += 32 = 'a' - 'A'</a:t>
                       </a:r>
                     </a:p>
                     <a:p>
@@ -26147,7 +26570,7 @@
 </p:sld>
 </file>
 
-<file path=ppt/slides/slide23.xml><?xml version="1.0" encoding="utf-8"?>
+<file path=ppt/slides/slide25.xml><?xml version="1.0" encoding="utf-8"?>
 <p:sld xmlns:a="http://schemas.openxmlformats.org/drawingml/2006/main" xmlns:r="http://schemas.openxmlformats.org/officeDocument/2006/relationships" xmlns:p="http://schemas.openxmlformats.org/presentationml/2006/main">
   <p:cSld>
     <p:spTree>
@@ -26169,6 +26592,138 @@
           <p:cNvPr id="2" name="Title 1">
             <a:extLst>
               <a:ext uri="{FF2B5EF4-FFF2-40B4-BE49-F238E27FC236}">
+                <a16:creationId xmlns:a16="http://schemas.microsoft.com/office/drawing/2014/main" id="{2D6E065B-6E1F-B821-412C-FD0AA6D6FFAC}"/>
+              </a:ext>
+            </a:extLst>
+          </p:cNvPr>
+          <p:cNvSpPr>
+            <a:spLocks noGrp="1"/>
+          </p:cNvSpPr>
+          <p:nvPr>
+            <p:ph type="title"/>
+          </p:nvPr>
+        </p:nvSpPr>
+        <p:spPr/>
+        <p:txBody>
+          <a:bodyPr/>
+          <a:lstStyle/>
+          <a:p>
+            <a:pPr algn="ctr"/>
+            <a:r>
+              <a:rPr lang="en-US" dirty="0">
+                <a:solidFill>
+                  <a:srgbClr val="C00000"/>
+                </a:solidFill>
+              </a:rPr>
+              <a:t>Separator Page</a:t>
+            </a:r>
+          </a:p>
+        </p:txBody>
+      </p:sp>
+      <p:sp>
+        <p:nvSpPr>
+          <p:cNvPr id="3" name="Slide Number Placeholder 2">
+            <a:extLst>
+              <a:ext uri="{FF2B5EF4-FFF2-40B4-BE49-F238E27FC236}">
+                <a16:creationId xmlns:a16="http://schemas.microsoft.com/office/drawing/2014/main" id="{AD736B6C-17FB-16E1-408B-AB3C19FF2650}"/>
+              </a:ext>
+            </a:extLst>
+          </p:cNvPr>
+          <p:cNvSpPr>
+            <a:spLocks noGrp="1"/>
+          </p:cNvSpPr>
+          <p:nvPr>
+            <p:ph type="sldNum" sz="quarter" idx="12"/>
+          </p:nvPr>
+        </p:nvSpPr>
+        <p:spPr/>
+        <p:txBody>
+          <a:bodyPr/>
+          <a:lstStyle/>
+          <a:p>
+            <a:fld id="{EA7C8D44-3667-46F6-9772-CC52308E2A7F}" type="slidenum">
+              <a:rPr kumimoji="0" lang="en-US" smtClean="0"/>
+              <a:pPr/>
+              <a:t>25</a:t>
+            </a:fld>
+            <a:endParaRPr kumimoji="0" lang="en-US" dirty="0"/>
+          </a:p>
+        </p:txBody>
+      </p:sp>
+      <p:sp>
+        <p:nvSpPr>
+          <p:cNvPr id="4" name="Content Placeholder 3">
+            <a:extLst>
+              <a:ext uri="{FF2B5EF4-FFF2-40B4-BE49-F238E27FC236}">
+                <a16:creationId xmlns:a16="http://schemas.microsoft.com/office/drawing/2014/main" id="{0C9C6FA3-D066-E5DA-E405-23B7F5B00998}"/>
+              </a:ext>
+            </a:extLst>
+          </p:cNvPr>
+          <p:cNvSpPr>
+            <a:spLocks noGrp="1"/>
+          </p:cNvSpPr>
+          <p:nvPr>
+            <p:ph sz="quarter" idx="1"/>
+          </p:nvPr>
+        </p:nvSpPr>
+        <p:spPr/>
+        <p:txBody>
+          <a:bodyPr>
+            <a:normAutofit/>
+          </a:bodyPr>
+          <a:lstStyle/>
+          <a:p>
+            <a:r>
+              <a:rPr lang="en-US" altLang="zh-CN" sz="4000" dirty="0">
+                <a:solidFill>
+                  <a:srgbClr val="C00000"/>
+                </a:solidFill>
+              </a:rPr>
+              <a:t>The following slides will not be covered in the exam</a:t>
+            </a:r>
+            <a:endParaRPr lang="en-US" sz="4000" dirty="0">
+              <a:solidFill>
+                <a:srgbClr val="C00000"/>
+              </a:solidFill>
+            </a:endParaRPr>
+          </a:p>
+        </p:txBody>
+      </p:sp>
+    </p:spTree>
+    <p:extLst>
+      <p:ext uri="{BB962C8B-B14F-4D97-AF65-F5344CB8AC3E}">
+        <p14:creationId xmlns:p14="http://schemas.microsoft.com/office/powerpoint/2010/main" val="780454370"/>
+      </p:ext>
+    </p:extLst>
+  </p:cSld>
+  <p:clrMapOvr>
+    <a:masterClrMapping/>
+  </p:clrMapOvr>
+</p:sld>
+</file>
+
+<file path=ppt/slides/slide26.xml><?xml version="1.0" encoding="utf-8"?>
+<p:sld xmlns:a="http://schemas.openxmlformats.org/drawingml/2006/main" xmlns:r="http://schemas.openxmlformats.org/officeDocument/2006/relationships" xmlns:p="http://schemas.openxmlformats.org/presentationml/2006/main">
+  <p:cSld>
+    <p:spTree>
+      <p:nvGrpSpPr>
+        <p:cNvPr id="1" name=""/>
+        <p:cNvGrpSpPr/>
+        <p:nvPr/>
+      </p:nvGrpSpPr>
+      <p:grpSpPr>
+        <a:xfrm>
+          <a:off x="0" y="0"/>
+          <a:ext cx="0" cy="0"/>
+          <a:chOff x="0" y="0"/>
+          <a:chExt cx="0" cy="0"/>
+        </a:xfrm>
+      </p:grpSpPr>
+      <p:sp>
+        <p:nvSpPr>
+          <p:cNvPr id="2" name="Title 1">
+            <a:extLst>
+              <a:ext uri="{FF2B5EF4-FFF2-40B4-BE49-F238E27FC236}">
                 <a16:creationId xmlns:a16="http://schemas.microsoft.com/office/drawing/2014/main" id="{440EADDE-B5E4-F571-7D39-10F7E6EFD50E}"/>
               </a:ext>
             </a:extLst>
@@ -26216,7 +26771,7 @@
             <a:fld id="{EA7C8D44-3667-46F6-9772-CC52308E2A7F}" type="slidenum">
               <a:rPr kumimoji="0" lang="en-US" smtClean="0"/>
               <a:pPr/>
-              <a:t>23</a:t>
+              <a:t>26</a:t>
             </a:fld>
             <a:endParaRPr kumimoji="0" lang="en-US" dirty="0"/>
           </a:p>
@@ -26270,7 +26825,7 @@
           <p:nvPr>
             <p:extLst>
               <p:ext uri="{D42A27DB-BD31-4B8C-83A1-F6EECF244321}">
-                <p14:modId xmlns:p14="http://schemas.microsoft.com/office/powerpoint/2010/main" val="1823502087"/>
+                <p14:modId xmlns:p14="http://schemas.microsoft.com/office/powerpoint/2010/main" val="112046773"/>
               </p:ext>
             </p:extLst>
           </p:nvPr>
@@ -26396,7 +26951,7 @@
                     <a:p>
                       <a:r>
                         <a:rPr lang="en-US" sz="1400" dirty="0"/>
-                        <a:t>  if (</a:t>
+                        <a:t>if (</a:t>
                       </a:r>
                       <a:r>
                         <a:rPr lang="en-US" sz="1400" dirty="0" err="1"/>
@@ -26510,7 +27065,7 @@
 </p:sld>
 </file>
 
-<file path=ppt/slides/slide24.xml><?xml version="1.0" encoding="utf-8"?>
+<file path=ppt/slides/slide27.xml><?xml version="1.0" encoding="utf-8"?>
 <p:sld xmlns:a="http://schemas.openxmlformats.org/drawingml/2006/main" xmlns:r="http://schemas.openxmlformats.org/officeDocument/2006/relationships" xmlns:p="http://schemas.openxmlformats.org/presentationml/2006/main">
   <p:cSld>
     <p:spTree>
@@ -26586,7 +27141,7 @@
             <a:fld id="{EA7C8D44-3667-46F6-9772-CC52308E2A7F}" type="slidenum">
               <a:rPr kumimoji="0" lang="en-US" smtClean="0"/>
               <a:pPr/>
-              <a:t>24</a:t>
+              <a:t>27</a:t>
             </a:fld>
             <a:endParaRPr kumimoji="0" lang="en-US" dirty="0"/>
           </a:p>
@@ -27442,7 +27997,7 @@
 </p:sld>
 </file>
 
-<file path=ppt/slides/slide25.xml><?xml version="1.0" encoding="utf-8"?>
+<file path=ppt/slides/slide28.xml><?xml version="1.0" encoding="utf-8"?>
 <p:sld xmlns:a="http://schemas.openxmlformats.org/drawingml/2006/main" xmlns:r="http://schemas.openxmlformats.org/officeDocument/2006/relationships" xmlns:p="http://schemas.openxmlformats.org/presentationml/2006/main">
   <p:cSld>
     <p:spTree>
@@ -27511,7 +28066,7 @@
             <a:fld id="{EA7C8D44-3667-46F6-9772-CC52308E2A7F}" type="slidenum">
               <a:rPr kumimoji="0" lang="en-US" smtClean="0"/>
               <a:pPr/>
-              <a:t>25</a:t>
+              <a:t>28</a:t>
             </a:fld>
             <a:endParaRPr kumimoji="0" lang="en-US" dirty="0"/>
           </a:p>
@@ -27547,7 +28102,7 @@
           <a:p>
             <a:r>
               <a:rPr lang="en-US" dirty="0"/>
-              <a:t>Fill in the blanks (TODO) for the assembly programs for calculating the factorial of a number, corresponding to the following C programs. One recursive version, one iterative version. </a:t>
+              <a:t>Fill in the blanks (marked TODO) for the assembly programs for calculating the factorial of a number, corresponding to the following C programs. One iterative version, one recursive version.</a:t>
             </a:r>
           </a:p>
         </p:txBody>
@@ -27568,8 +28123,8 @@
         </p:nvSpPr>
         <p:spPr>
           <a:xfrm>
-            <a:off x="4800600" y="2162810"/>
-            <a:ext cx="3886200" cy="3794760"/>
+            <a:off x="4724400" y="2162810"/>
+            <a:ext cx="3962400" cy="3794760"/>
           </a:xfrm>
           <a:prstGeom prst="rect">
             <a:avLst/>
@@ -27773,7 +28328,7 @@
             </a:pPr>
             <a:r>
               <a:rPr lang="en-US" sz="1800" dirty="0"/>
-              <a:t>//Recursive algorithms for Factorial</a:t>
+              <a:t>//Recursive version</a:t>
             </a:r>
           </a:p>
           <a:p>
@@ -27888,7 +28443,7 @@
         <p:spPr>
           <a:xfrm>
             <a:off x="685800" y="2162810"/>
-            <a:ext cx="3886200" cy="4251960"/>
+            <a:ext cx="3810000" cy="4251960"/>
           </a:xfrm>
           <a:prstGeom prst="rect">
             <a:avLst/>
@@ -28092,7 +28647,7 @@
             </a:pPr>
             <a:r>
               <a:rPr lang="en-US" dirty="0"/>
-              <a:t>//Iterative algorithms for Factorial</a:t>
+              <a:t>//Iterative version</a:t>
             </a:r>
           </a:p>
           <a:p>
@@ -28240,7 +28795,7 @@
 </p:sld>
 </file>
 
-<file path=ppt/slides/slide26.xml><?xml version="1.0" encoding="utf-8"?>
+<file path=ppt/slides/slide29.xml><?xml version="1.0" encoding="utf-8"?>
 <p:sld xmlns:a="http://schemas.openxmlformats.org/drawingml/2006/main" xmlns:r="http://schemas.openxmlformats.org/officeDocument/2006/relationships" xmlns:p="http://schemas.openxmlformats.org/presentationml/2006/main">
   <p:cSld>
     <p:spTree>
@@ -28309,7 +28864,7 @@
             <a:fld id="{EA7C8D44-3667-46F6-9772-CC52308E2A7F}" type="slidenum">
               <a:rPr kumimoji="0" lang="en-US" smtClean="0"/>
               <a:pPr/>
-              <a:t>26</a:t>
+              <a:t>29</a:t>
             </a:fld>
             <a:endParaRPr kumimoji="0" lang="en-US" dirty="0"/>
           </a:p>
@@ -28333,8 +28888,8 @@
         </p:nvSpPr>
         <p:spPr>
           <a:xfrm>
-            <a:off x="457200" y="1219200"/>
-            <a:ext cx="3657600" cy="4572000"/>
+            <a:off x="228600" y="1219200"/>
+            <a:ext cx="3886200" cy="4572000"/>
           </a:xfrm>
           <a:ln>
             <a:solidFill>
@@ -28361,7 +28916,7 @@
             </a:r>
             <a:r>
               <a:rPr lang="en-US" dirty="0"/>
-              <a:t>(uint32_t n);</a:t>
+              <a:t>(uint32_t n); iterative version</a:t>
             </a:r>
           </a:p>
           <a:p>
@@ -28463,14 +29018,17 @@
             </a:r>
             <a:r>
               <a:rPr lang="en-US" dirty="0"/>
-              <a:t>  % if n &lt;= 1, return 1</a:t>
+              <a:t>       % if n &lt;= 1, return 1</a:t>
             </a:r>
           </a:p>
           <a:p>
             <a:pPr marL="0" indent="0">
               <a:buNone/>
             </a:pPr>
-            <a:endParaRPr lang="en-US" dirty="0"/>
+            <a:r>
+              <a:rPr lang="en-US" dirty="0"/>
+              <a:t>                                      %(unsigned compare)</a:t>
+            </a:r>
           </a:p>
           <a:p>
             <a:pPr marL="0" indent="0">
@@ -28769,7 +29327,7 @@
             </a:pPr>
             <a:r>
               <a:rPr lang="en-US" dirty="0"/>
-              <a:t>% uint32_t factorial(uint32_t n);</a:t>
+              <a:t>% uint32_t factorial(uint32_t n); Recursive version</a:t>
             </a:r>
           </a:p>
           <a:p>
@@ -28820,7 +29378,7 @@
             </a:pPr>
             <a:r>
               <a:rPr lang="en-US" dirty="0"/>
-              <a:t>    BLE     </a:t>
+              <a:t>    BLS     </a:t>
             </a:r>
             <a:r>
               <a:rPr lang="en-US" dirty="0" err="1"/>
@@ -28994,7 +29552,765 @@
 </p:sld>
 </file>
 
-<file path=ppt/slides/slide27.xml><?xml version="1.0" encoding="utf-8"?>
+<file path=ppt/slides/slide3.xml><?xml version="1.0" encoding="utf-8"?>
+<p:sld xmlns:a="http://schemas.openxmlformats.org/drawingml/2006/main" xmlns:r="http://schemas.openxmlformats.org/officeDocument/2006/relationships" xmlns:p="http://schemas.openxmlformats.org/presentationml/2006/main">
+  <p:cSld>
+    <p:spTree>
+      <p:nvGrpSpPr>
+        <p:cNvPr id="1" name=""/>
+        <p:cNvGrpSpPr/>
+        <p:nvPr/>
+      </p:nvGrpSpPr>
+      <p:grpSpPr>
+        <a:xfrm>
+          <a:off x="0" y="0"/>
+          <a:ext cx="0" cy="0"/>
+          <a:chOff x="0" y="0"/>
+          <a:chExt cx="0" cy="0"/>
+        </a:xfrm>
+      </p:grpSpPr>
+      <p:sp>
+        <p:nvSpPr>
+          <p:cNvPr id="2" name="Title 1"/>
+          <p:cNvSpPr>
+            <a:spLocks noGrp="1"/>
+          </p:cNvSpPr>
+          <p:nvPr>
+            <p:ph type="title"/>
+          </p:nvPr>
+        </p:nvSpPr>
+        <p:spPr/>
+        <p:txBody>
+          <a:bodyPr/>
+          <a:lstStyle/>
+          <a:p>
+            <a:r>
+              <a:rPr lang="en-GB" dirty="0"/>
+              <a:t>Stack</a:t>
+            </a:r>
+          </a:p>
+        </p:txBody>
+      </p:sp>
+      <p:sp>
+        <p:nvSpPr>
+          <p:cNvPr id="3" name="Content Placeholder 2"/>
+          <p:cNvSpPr>
+            <a:spLocks noGrp="1"/>
+          </p:cNvSpPr>
+          <p:nvPr>
+            <p:ph idx="1"/>
+          </p:nvPr>
+        </p:nvSpPr>
+        <p:spPr/>
+        <p:txBody>
+          <a:bodyPr/>
+          <a:lstStyle/>
+          <a:p>
+            <a:pPr>
+              <a:buNone/>
+            </a:pPr>
+            <a:r>
+              <a:rPr lang="en-GB" sz="2100" b="1" dirty="0">
+                <a:solidFill>
+                  <a:srgbClr val="FF0000"/>
+                </a:solidFill>
+                <a:latin typeface="Consolas" panose="020B0609020204030204" pitchFamily="49" charset="0"/>
+                <a:cs typeface="Consolas" panose="020B0609020204030204" pitchFamily="49" charset="0"/>
+              </a:rPr>
+              <a:t>POP</a:t>
+            </a:r>
+            <a:r>
+              <a:rPr lang="en-GB" sz="2100" dirty="0">
+                <a:solidFill>
+                  <a:srgbClr val="FF0000"/>
+                </a:solidFill>
+                <a:latin typeface="Consolas" panose="020B0609020204030204" pitchFamily="49" charset="0"/>
+                <a:cs typeface="Consolas" panose="020B0609020204030204" pitchFamily="49" charset="0"/>
+              </a:rPr>
+              <a:t> </a:t>
+            </a:r>
+            <a:r>
+              <a:rPr lang="en-GB" sz="2100" dirty="0">
+                <a:latin typeface="Consolas" panose="020B0609020204030204" pitchFamily="49" charset="0"/>
+                <a:cs typeface="Consolas" panose="020B0609020204030204" pitchFamily="49" charset="0"/>
+              </a:rPr>
+              <a:t>{</a:t>
+            </a:r>
+            <a:r>
+              <a:rPr lang="en-GB" sz="2100" i="1" dirty="0">
+                <a:latin typeface="Consolas" panose="020B0609020204030204" pitchFamily="49" charset="0"/>
+                <a:cs typeface="Consolas" panose="020B0609020204030204" pitchFamily="49" charset="0"/>
+              </a:rPr>
+              <a:t>Rd</a:t>
+            </a:r>
+            <a:r>
+              <a:rPr lang="en-GB" sz="2100" dirty="0">
+                <a:latin typeface="Consolas" panose="020B0609020204030204" pitchFamily="49" charset="0"/>
+                <a:cs typeface="Consolas" panose="020B0609020204030204" pitchFamily="49" charset="0"/>
+              </a:rPr>
+              <a:t>} == LDMIA SP!, {Rd} == LDMFD SP!, {Rd}</a:t>
+            </a:r>
+          </a:p>
+          <a:p>
+            <a:pPr lvl="1"/>
+            <a:r>
+              <a:rPr lang="sv-SE" sz="1800" dirty="0">
+                <a:latin typeface="Consolas" panose="020B0609020204030204" pitchFamily="49" charset="0"/>
+                <a:cs typeface="Consolas" panose="020B0609020204030204" pitchFamily="49" charset="0"/>
+              </a:rPr>
+              <a:t>LDR Rd, [SP] @ </a:t>
+            </a:r>
+            <a:r>
+              <a:rPr lang="en-GB" sz="1800" dirty="0">
+                <a:latin typeface="Consolas" panose="020B0609020204030204" pitchFamily="49" charset="0"/>
+                <a:cs typeface="Consolas" panose="020B0609020204030204" pitchFamily="49" charset="0"/>
+              </a:rPr>
+              <a:t>Rd = (*SP)    </a:t>
+            </a:r>
+            <a:r>
+              <a:rPr lang="en-GB" sz="1800" dirty="0">
+                <a:latin typeface="Cambria Math"/>
+                <a:ea typeface="Cambria Math"/>
+                <a:cs typeface="Consolas" panose="020B0609020204030204" pitchFamily="49" charset="0"/>
+              </a:rPr>
+              <a:t>(full stack)</a:t>
+            </a:r>
+            <a:endParaRPr lang="en-GB" sz="1800" dirty="0">
+              <a:latin typeface="Consolas" panose="020B0609020204030204" pitchFamily="49" charset="0"/>
+              <a:cs typeface="Consolas" panose="020B0609020204030204" pitchFamily="49" charset="0"/>
+            </a:endParaRPr>
+          </a:p>
+          <a:p>
+            <a:pPr lvl="1"/>
+            <a:r>
+              <a:rPr lang="en-GB" sz="1800" dirty="0">
+                <a:latin typeface="Consolas" panose="020B0609020204030204" pitchFamily="49" charset="0"/>
+                <a:cs typeface="Consolas" panose="020B0609020204030204" pitchFamily="49" charset="0"/>
+              </a:rPr>
+              <a:t>ADD SP, #4   </a:t>
+            </a:r>
+            <a:r>
+              <a:rPr lang="sv-SE" sz="1800" dirty="0">
+                <a:latin typeface="Consolas" panose="020B0609020204030204" pitchFamily="49" charset="0"/>
+                <a:cs typeface="Consolas" panose="020B0609020204030204" pitchFamily="49" charset="0"/>
+              </a:rPr>
+              <a:t>@ </a:t>
+            </a:r>
+            <a:r>
+              <a:rPr lang="en-GB" sz="1800" dirty="0">
+                <a:latin typeface="Consolas" panose="020B0609020204030204" pitchFamily="49" charset="0"/>
+                <a:cs typeface="Consolas" panose="020B0609020204030204" pitchFamily="49" charset="0"/>
+              </a:rPr>
+              <a:t>SP = SP + 4   </a:t>
+            </a:r>
+            <a:r>
+              <a:rPr lang="en-GB" sz="1800" dirty="0">
+                <a:latin typeface="Cambria Math"/>
+                <a:ea typeface="Cambria Math"/>
+                <a:cs typeface="Consolas" panose="020B0609020204030204" pitchFamily="49" charset="0"/>
+              </a:rPr>
+              <a:t>(Stack shrinks)</a:t>
+            </a:r>
+          </a:p>
+          <a:p>
+            <a:pPr lvl="1"/>
+            <a:endParaRPr lang="en-GB" sz="2025" dirty="0">
+              <a:latin typeface="Consolas" panose="020B0609020204030204" pitchFamily="49" charset="0"/>
+              <a:cs typeface="Consolas" panose="020B0609020204030204" pitchFamily="49" charset="0"/>
+            </a:endParaRPr>
+          </a:p>
+          <a:p>
+            <a:pPr marL="0" indent="0">
+              <a:buNone/>
+            </a:pPr>
+            <a:r>
+              <a:rPr lang="en-GB" sz="2025" dirty="0">
+                <a:cs typeface="Consolas" panose="020B0609020204030204" pitchFamily="49" charset="0"/>
+              </a:rPr>
+              <a:t>Pop multiple registers</a:t>
+            </a:r>
+          </a:p>
+        </p:txBody>
+      </p:sp>
+      <p:sp>
+        <p:nvSpPr>
+          <p:cNvPr id="4" name="Slide Number Placeholder 3"/>
+          <p:cNvSpPr>
+            <a:spLocks noGrp="1"/>
+          </p:cNvSpPr>
+          <p:nvPr>
+            <p:ph type="sldNum" sz="quarter" idx="12"/>
+          </p:nvPr>
+        </p:nvSpPr>
+        <p:spPr/>
+        <p:txBody>
+          <a:bodyPr/>
+          <a:lstStyle/>
+          <a:p>
+            <a:pPr defTabSz="685800"/>
+            <a:fld id="{EA7C8D44-3667-46F6-9772-CC52308E2A7F}" type="slidenum">
+              <a:rPr lang="en-US">
+                <a:solidFill>
+                  <a:srgbClr val="1F497D"/>
+                </a:solidFill>
+                <a:latin typeface="Gill Sans MT"/>
+              </a:rPr>
+              <a:pPr defTabSz="685800"/>
+              <a:t>3</a:t>
+            </a:fld>
+            <a:endParaRPr lang="en-US" dirty="0">
+              <a:solidFill>
+                <a:srgbClr val="1F497D"/>
+              </a:solidFill>
+              <a:latin typeface="Gill Sans MT"/>
+            </a:endParaRPr>
+          </a:p>
+        </p:txBody>
+      </p:sp>
+      <p:sp>
+        <p:nvSpPr>
+          <p:cNvPr id="5" name="Rectangle 4"/>
+          <p:cNvSpPr/>
+          <p:nvPr/>
+        </p:nvSpPr>
+        <p:spPr>
+          <a:xfrm>
+            <a:off x="3629026" y="4075262"/>
+            <a:ext cx="2025632" cy="507831"/>
+          </a:xfrm>
+          <a:prstGeom prst="rect">
+            <a:avLst/>
+          </a:prstGeom>
+        </p:spPr>
+        <p:txBody>
+          <a:bodyPr wrap="square">
+            <a:spAutoFit/>
+          </a:bodyPr>
+          <a:lstStyle/>
+          <a:p>
+            <a:pPr defTabSz="685800"/>
+            <a:r>
+              <a:rPr lang="en-GB" sz="1350" b="1" dirty="0">
+                <a:solidFill>
+                  <a:srgbClr val="FF0000"/>
+                </a:solidFill>
+                <a:latin typeface="Consolas" panose="020B0609020204030204" pitchFamily="49" charset="0"/>
+                <a:cs typeface="Consolas" panose="020B0609020204030204" pitchFamily="49" charset="0"/>
+              </a:rPr>
+              <a:t>POP {r7, r3, r2, r1}</a:t>
+            </a:r>
+          </a:p>
+        </p:txBody>
+      </p:sp>
+      <p:sp>
+        <p:nvSpPr>
+          <p:cNvPr id="7" name="TextBox 6"/>
+          <p:cNvSpPr txBox="1"/>
+          <p:nvPr/>
+        </p:nvSpPr>
+        <p:spPr>
+          <a:xfrm>
+            <a:off x="3744661" y="3763639"/>
+            <a:ext cx="1521827" cy="300082"/>
+          </a:xfrm>
+          <a:prstGeom prst="rect">
+            <a:avLst/>
+          </a:prstGeom>
+          <a:noFill/>
+        </p:spPr>
+        <p:txBody>
+          <a:bodyPr wrap="none" rtlCol="0">
+            <a:spAutoFit/>
+          </a:bodyPr>
+          <a:lstStyle/>
+          <a:p>
+            <a:pPr defTabSz="685800"/>
+            <a:r>
+              <a:rPr lang="en-US" sz="1350" i="1" dirty="0">
+                <a:solidFill>
+                  <a:prstClr val="black"/>
+                </a:solidFill>
+                <a:latin typeface="Gill Sans MT"/>
+              </a:rPr>
+              <a:t>They are equivalent. </a:t>
+            </a:r>
+          </a:p>
+        </p:txBody>
+      </p:sp>
+      <p:sp>
+        <p:nvSpPr>
+          <p:cNvPr id="9" name="Rectangle 8"/>
+          <p:cNvSpPr/>
+          <p:nvPr/>
+        </p:nvSpPr>
+        <p:spPr>
+          <a:xfrm>
+            <a:off x="6224130" y="3763639"/>
+            <a:ext cx="941283" cy="923330"/>
+          </a:xfrm>
+          <a:prstGeom prst="rect">
+            <a:avLst/>
+          </a:prstGeom>
+        </p:spPr>
+        <p:txBody>
+          <a:bodyPr wrap="none">
+            <a:spAutoFit/>
+          </a:bodyPr>
+          <a:lstStyle/>
+          <a:p>
+            <a:pPr defTabSz="685800"/>
+            <a:r>
+              <a:rPr lang="en-GB" sz="1350" b="1" dirty="0">
+                <a:solidFill>
+                  <a:srgbClr val="FF0000"/>
+                </a:solidFill>
+                <a:latin typeface="Consolas" panose="020B0609020204030204" pitchFamily="49" charset="0"/>
+                <a:cs typeface="Consolas" panose="020B0609020204030204" pitchFamily="49" charset="0"/>
+              </a:rPr>
+              <a:t>POP {r1}</a:t>
+            </a:r>
+          </a:p>
+          <a:p>
+            <a:pPr defTabSz="685800"/>
+            <a:r>
+              <a:rPr lang="en-GB" sz="1350" b="1" dirty="0">
+                <a:solidFill>
+                  <a:srgbClr val="FF0000"/>
+                </a:solidFill>
+                <a:latin typeface="Consolas" panose="020B0609020204030204" pitchFamily="49" charset="0"/>
+                <a:cs typeface="Consolas" panose="020B0609020204030204" pitchFamily="49" charset="0"/>
+              </a:rPr>
+              <a:t>POP {r2}</a:t>
+            </a:r>
+          </a:p>
+          <a:p>
+            <a:pPr defTabSz="685800"/>
+            <a:r>
+              <a:rPr lang="en-GB" sz="1350" b="1" dirty="0">
+                <a:solidFill>
+                  <a:srgbClr val="FF0000"/>
+                </a:solidFill>
+                <a:latin typeface="Consolas" panose="020B0609020204030204" pitchFamily="49" charset="0"/>
+                <a:cs typeface="Consolas" panose="020B0609020204030204" pitchFamily="49" charset="0"/>
+              </a:rPr>
+              <a:t>POP {r3}</a:t>
+            </a:r>
+          </a:p>
+          <a:p>
+            <a:pPr defTabSz="685800"/>
+            <a:r>
+              <a:rPr lang="en-GB" sz="1350" b="1" dirty="0">
+                <a:solidFill>
+                  <a:srgbClr val="FF0000"/>
+                </a:solidFill>
+                <a:latin typeface="Consolas" panose="020B0609020204030204" pitchFamily="49" charset="0"/>
+                <a:cs typeface="Consolas" panose="020B0609020204030204" pitchFamily="49" charset="0"/>
+              </a:rPr>
+              <a:t>POP {r7}</a:t>
+            </a:r>
+          </a:p>
+        </p:txBody>
+      </p:sp>
+      <p:sp>
+        <p:nvSpPr>
+          <p:cNvPr id="10" name="Rectangle 9"/>
+          <p:cNvSpPr/>
+          <p:nvPr/>
+        </p:nvSpPr>
+        <p:spPr>
+          <a:xfrm>
+            <a:off x="1125325" y="4075262"/>
+            <a:ext cx="2076209" cy="300082"/>
+          </a:xfrm>
+          <a:prstGeom prst="rect">
+            <a:avLst/>
+          </a:prstGeom>
+        </p:spPr>
+        <p:txBody>
+          <a:bodyPr wrap="none">
+            <a:spAutoFit/>
+          </a:bodyPr>
+          <a:lstStyle/>
+          <a:p>
+            <a:pPr defTabSz="685800"/>
+            <a:r>
+              <a:rPr lang="en-GB" sz="1350" b="1" dirty="0">
+                <a:solidFill>
+                  <a:srgbClr val="FF0000"/>
+                </a:solidFill>
+                <a:latin typeface="Consolas" panose="020B0609020204030204" pitchFamily="49" charset="0"/>
+                <a:cs typeface="Consolas" panose="020B0609020204030204" pitchFamily="49" charset="0"/>
+              </a:rPr>
+              <a:t>POP {r1, r2, r3, r7}</a:t>
+            </a:r>
+          </a:p>
+        </p:txBody>
+      </p:sp>
+      <p:sp>
+        <p:nvSpPr>
+          <p:cNvPr id="11" name="Left-Right Arrow 10"/>
+          <p:cNvSpPr/>
+          <p:nvPr/>
+        </p:nvSpPr>
+        <p:spPr>
+          <a:xfrm>
+            <a:off x="3213091" y="4139556"/>
+            <a:ext cx="362213" cy="148412"/>
+          </a:xfrm>
+          <a:prstGeom prst="leftRightArrow">
+            <a:avLst/>
+          </a:prstGeom>
+        </p:spPr>
+        <p:style>
+          <a:lnRef idx="2">
+            <a:schemeClr val="accent1">
+              <a:shade val="50000"/>
+            </a:schemeClr>
+          </a:lnRef>
+          <a:fillRef idx="1">
+            <a:schemeClr val="accent1"/>
+          </a:fillRef>
+          <a:effectRef idx="0">
+            <a:schemeClr val="accent1"/>
+          </a:effectRef>
+          <a:fontRef idx="minor">
+            <a:schemeClr val="lt1"/>
+          </a:fontRef>
+        </p:style>
+        <p:txBody>
+          <a:bodyPr rtlCol="0" anchor="ctr"/>
+          <a:lstStyle/>
+          <a:p>
+            <a:pPr algn="ctr" defTabSz="685800"/>
+            <a:endParaRPr lang="en-US" sz="1350">
+              <a:solidFill>
+                <a:prstClr val="white"/>
+              </a:solidFill>
+              <a:latin typeface="Gill Sans MT"/>
+            </a:endParaRPr>
+          </a:p>
+        </p:txBody>
+      </p:sp>
+      <p:sp>
+        <p:nvSpPr>
+          <p:cNvPr id="12" name="Left-Right Arrow 11"/>
+          <p:cNvSpPr/>
+          <p:nvPr/>
+        </p:nvSpPr>
+        <p:spPr>
+          <a:xfrm>
+            <a:off x="5670541" y="4139556"/>
+            <a:ext cx="362213" cy="148412"/>
+          </a:xfrm>
+          <a:prstGeom prst="leftRightArrow">
+            <a:avLst/>
+          </a:prstGeom>
+        </p:spPr>
+        <p:style>
+          <a:lnRef idx="2">
+            <a:schemeClr val="accent1">
+              <a:shade val="50000"/>
+            </a:schemeClr>
+          </a:lnRef>
+          <a:fillRef idx="1">
+            <a:schemeClr val="accent1"/>
+          </a:fillRef>
+          <a:effectRef idx="0">
+            <a:schemeClr val="accent1"/>
+          </a:effectRef>
+          <a:fontRef idx="minor">
+            <a:schemeClr val="lt1"/>
+          </a:fontRef>
+        </p:style>
+        <p:txBody>
+          <a:bodyPr rtlCol="0" anchor="ctr"/>
+          <a:lstStyle/>
+          <a:p>
+            <a:pPr algn="ctr" defTabSz="685800"/>
+            <a:endParaRPr lang="en-US" sz="1350">
+              <a:solidFill>
+                <a:prstClr val="white"/>
+              </a:solidFill>
+              <a:latin typeface="Gill Sans MT"/>
+            </a:endParaRPr>
+          </a:p>
+        </p:txBody>
+      </p:sp>
+      <p:sp>
+        <p:nvSpPr>
+          <p:cNvPr id="6" name="Rectangle 5"/>
+          <p:cNvSpPr/>
+          <p:nvPr/>
+        </p:nvSpPr>
+        <p:spPr>
+          <a:xfrm>
+            <a:off x="441316" y="4663886"/>
+            <a:ext cx="8401050" cy="1015663"/>
+          </a:xfrm>
+          <a:prstGeom prst="rect">
+            <a:avLst/>
+          </a:prstGeom>
+        </p:spPr>
+        <p:txBody>
+          <a:bodyPr wrap="square">
+            <a:spAutoFit/>
+          </a:bodyPr>
+          <a:lstStyle/>
+          <a:p>
+            <a:pPr marL="214313" indent="-214313" defTabSz="685800">
+              <a:buFont typeface="Arial" panose="020B0604020202020204" pitchFamily="34" charset="0"/>
+              <a:buChar char="•"/>
+            </a:pPr>
+            <a:r>
+              <a:rPr lang="en-US" sz="1500" dirty="0">
+                <a:solidFill>
+                  <a:prstClr val="black"/>
+                </a:solidFill>
+                <a:latin typeface="Gill Sans MT"/>
+              </a:rPr>
+              <a:t>SP is incremented after POP (post-increment). </a:t>
+            </a:r>
+          </a:p>
+          <a:p>
+            <a:pPr marL="214313" indent="-214313" defTabSz="685800">
+              <a:buFont typeface="Arial" panose="020B0604020202020204" pitchFamily="34" charset="0"/>
+              <a:buChar char="•"/>
+            </a:pPr>
+            <a:r>
+              <a:rPr lang="en-US" sz="1500" dirty="0">
+                <a:solidFill>
+                  <a:prstClr val="black"/>
+                </a:solidFill>
+                <a:latin typeface="Gill Sans MT"/>
+              </a:rPr>
+              <a:t>The order in which registers listed in the register list does not matter. </a:t>
+            </a:r>
+          </a:p>
+          <a:p>
+            <a:pPr marL="214313" indent="-214313" defTabSz="685800">
+              <a:buFont typeface="Arial" panose="020B0604020202020204" pitchFamily="34" charset="0"/>
+              <a:buChar char="•"/>
+            </a:pPr>
+            <a:r>
+              <a:rPr lang="en-US" sz="1500" dirty="0">
+                <a:solidFill>
+                  <a:prstClr val="black"/>
+                </a:solidFill>
+                <a:latin typeface="Gill Sans MT"/>
+              </a:rPr>
+              <a:t>When popping multiple registers, these registers are automatically </a:t>
+            </a:r>
+            <a:r>
+              <a:rPr lang="en-US" sz="1500" dirty="0">
+                <a:solidFill>
+                  <a:srgbClr val="3333FF"/>
+                </a:solidFill>
+                <a:latin typeface="Gill Sans MT"/>
+              </a:rPr>
+              <a:t>sorted by name </a:t>
+            </a:r>
+            <a:r>
+              <a:rPr lang="en-US" sz="1500" dirty="0">
+                <a:solidFill>
+                  <a:prstClr val="black"/>
+                </a:solidFill>
+                <a:latin typeface="Gill Sans MT"/>
+              </a:rPr>
+              <a:t>and </a:t>
+            </a:r>
+            <a:r>
+              <a:rPr lang="en-US" sz="1500" dirty="0">
+                <a:solidFill>
+                  <a:srgbClr val="3333FF"/>
+                </a:solidFill>
+                <a:latin typeface="Gill Sans MT"/>
+              </a:rPr>
+              <a:t>the lowest-numbered register</a:t>
+            </a:r>
+            <a:r>
+              <a:rPr lang="en-US" sz="1500" dirty="0">
+                <a:solidFill>
+                  <a:prstClr val="black"/>
+                </a:solidFill>
+                <a:latin typeface="Gill Sans MT"/>
+              </a:rPr>
+              <a:t> is loaded from the lowest memory address, </a:t>
+            </a:r>
+            <a:r>
+              <a:rPr lang="en-US" sz="1500" i="1" dirty="0">
+                <a:solidFill>
+                  <a:prstClr val="black"/>
+                </a:solidFill>
+                <a:latin typeface="Gill Sans MT"/>
+              </a:rPr>
+              <a:t>i.e. </a:t>
+            </a:r>
+            <a:r>
+              <a:rPr lang="en-US" sz="1500" dirty="0">
+                <a:solidFill>
+                  <a:srgbClr val="3333FF"/>
+                </a:solidFill>
+                <a:latin typeface="Gill Sans MT"/>
+              </a:rPr>
+              <a:t>is loaded first</a:t>
+            </a:r>
+            <a:r>
+              <a:rPr lang="en-US" sz="1500" dirty="0">
+                <a:solidFill>
+                  <a:prstClr val="black"/>
+                </a:solidFill>
+                <a:latin typeface="Gill Sans MT"/>
+              </a:rPr>
+              <a:t>. </a:t>
+            </a:r>
+          </a:p>
+        </p:txBody>
+      </p:sp>
+      <p:pic>
+        <p:nvPicPr>
+          <p:cNvPr id="13" name="Picture 12">
+            <a:extLst>
+              <a:ext uri="{FF2B5EF4-FFF2-40B4-BE49-F238E27FC236}">
+                <a16:creationId xmlns:a16="http://schemas.microsoft.com/office/drawing/2014/main" id="{355D812E-3C2A-BCEA-1442-B45EE486FA9C}"/>
+              </a:ext>
+            </a:extLst>
+          </p:cNvPr>
+          <p:cNvPicPr>
+            <a:picLocks noChangeAspect="1"/>
+          </p:cNvPicPr>
+          <p:nvPr/>
+        </p:nvPicPr>
+        <p:blipFill>
+          <a:blip r:embed="rId2"/>
+          <a:stretch>
+            <a:fillRect/>
+          </a:stretch>
+        </p:blipFill>
+        <p:spPr>
+          <a:xfrm>
+            <a:off x="7720500" y="933655"/>
+            <a:ext cx="1263120" cy="3753851"/>
+          </a:xfrm>
+          <a:prstGeom prst="rect">
+            <a:avLst/>
+          </a:prstGeom>
+        </p:spPr>
+      </p:pic>
+      <p:sp>
+        <p:nvSpPr>
+          <p:cNvPr id="8" name="Horizontal Scroll 15">
+            <a:extLst>
+              <a:ext uri="{FF2B5EF4-FFF2-40B4-BE49-F238E27FC236}">
+                <a16:creationId xmlns:a16="http://schemas.microsoft.com/office/drawing/2014/main" id="{510E2E53-03DD-57F0-F850-07FD9C250CEA}"/>
+              </a:ext>
+            </a:extLst>
+          </p:cNvPr>
+          <p:cNvSpPr/>
+          <p:nvPr/>
+        </p:nvSpPr>
+        <p:spPr>
+          <a:xfrm>
+            <a:off x="76200" y="-23210"/>
+            <a:ext cx="1265712" cy="762000"/>
+          </a:xfrm>
+          <a:prstGeom prst="horizontalScroll">
+            <a:avLst/>
+          </a:prstGeom>
+          <a:gradFill rotWithShape="1">
+            <a:gsLst>
+              <a:gs pos="0">
+                <a:srgbClr val="4F81BD">
+                  <a:tint val="50000"/>
+                  <a:satMod val="300000"/>
+                </a:srgbClr>
+              </a:gs>
+              <a:gs pos="35000">
+                <a:srgbClr val="4F81BD">
+                  <a:tint val="37000"/>
+                  <a:satMod val="300000"/>
+                </a:srgbClr>
+              </a:gs>
+              <a:gs pos="100000">
+                <a:srgbClr val="4F81BD">
+                  <a:tint val="15000"/>
+                  <a:satMod val="350000"/>
+                </a:srgbClr>
+              </a:gs>
+            </a:gsLst>
+            <a:lin ang="16200000" scaled="1"/>
+          </a:gradFill>
+          <a:ln w="9525" cap="flat" cmpd="sng" algn="ctr">
+            <a:solidFill>
+              <a:srgbClr val="4F81BD">
+                <a:shade val="95000"/>
+                <a:satMod val="105000"/>
+              </a:srgbClr>
+            </a:solidFill>
+            <a:prstDash val="solid"/>
+          </a:ln>
+          <a:effectLst>
+            <a:outerShdw blurRad="40000" dist="20000" dir="5400000" rotWithShape="0">
+              <a:srgbClr val="000000">
+                <a:alpha val="38000"/>
+              </a:srgbClr>
+            </a:outerShdw>
+          </a:effectLst>
+        </p:spPr>
+        <p:txBody>
+          <a:bodyPr rtlCol="0" anchor="ctr"/>
+          <a:lstStyle/>
+          <a:p>
+            <a:pPr marL="0" marR="0" lvl="0" indent="0" algn="ctr" defTabSz="457200" eaLnBrk="1" fontAlgn="auto" latinLnBrk="0" hangingPunct="1">
+              <a:lnSpc>
+                <a:spcPct val="100000"/>
+              </a:lnSpc>
+              <a:spcBef>
+                <a:spcPts val="0"/>
+              </a:spcBef>
+              <a:spcAft>
+                <a:spcPts val="0"/>
+              </a:spcAft>
+              <a:buClrTx/>
+              <a:buSzTx/>
+              <a:buFontTx/>
+              <a:buNone/>
+              <a:tabLst/>
+              <a:defRPr/>
+            </a:pPr>
+            <a:r>
+              <a:rPr kumimoji="0" lang="en-US" sz="2400" b="0" i="0" u="none" strike="noStrike" kern="0" cap="none" spc="0" normalizeH="0" baseline="0" noProof="0" dirty="0">
+                <a:ln>
+                  <a:noFill/>
+                </a:ln>
+                <a:solidFill>
+                  <a:prstClr val="black"/>
+                </a:solidFill>
+                <a:effectLst/>
+                <a:uLnTx/>
+                <a:uFillTx/>
+                <a:latin typeface="Calibri"/>
+                <a:ea typeface="+mn-ea"/>
+                <a:cs typeface="+mn-cs"/>
+              </a:rPr>
+              <a:t>Review</a:t>
+            </a:r>
+          </a:p>
+        </p:txBody>
+      </p:sp>
+    </p:spTree>
+    <p:extLst>
+      <p:ext uri="{BB962C8B-B14F-4D97-AF65-F5344CB8AC3E}">
+        <p14:creationId xmlns:p14="http://schemas.microsoft.com/office/powerpoint/2010/main" val="424972285"/>
+      </p:ext>
+    </p:extLst>
+  </p:cSld>
+  <p:clrMapOvr>
+    <a:masterClrMapping/>
+  </p:clrMapOvr>
+</p:sld>
+</file>
+
+<file path=ppt/slides/slide30.xml><?xml version="1.0" encoding="utf-8"?>
 <p:sld xmlns:a="http://schemas.openxmlformats.org/drawingml/2006/main" xmlns:r="http://schemas.openxmlformats.org/officeDocument/2006/relationships" xmlns:p="http://schemas.openxmlformats.org/presentationml/2006/main">
   <p:cSld>
     <p:spTree>
@@ -29069,7 +30385,7 @@
             <a:fld id="{EA7C8D44-3667-46F6-9772-CC52308E2A7F}" type="slidenum">
               <a:rPr kumimoji="0" lang="en-US" smtClean="0"/>
               <a:pPr/>
-              <a:t>27</a:t>
+              <a:t>30</a:t>
             </a:fld>
             <a:endParaRPr kumimoji="0" lang="en-US" dirty="0"/>
           </a:p>
@@ -29093,8 +30409,8 @@
         </p:nvSpPr>
         <p:spPr>
           <a:xfrm>
-            <a:off x="457200" y="1219200"/>
-            <a:ext cx="3657600" cy="4572000"/>
+            <a:off x="152400" y="1219199"/>
+            <a:ext cx="3962400" cy="4800601"/>
           </a:xfrm>
           <a:ln>
             <a:solidFill>
@@ -29121,7 +30437,7 @@
             </a:r>
             <a:r>
               <a:rPr lang="en-US" dirty="0"/>
-              <a:t>(uint32_t n);</a:t>
+              <a:t>(uint32_t n); iterative version</a:t>
             </a:r>
           </a:p>
           <a:p>
@@ -29230,7 +30546,10 @@
             <a:pPr marL="0" indent="0">
               <a:buNone/>
             </a:pPr>
-            <a:endParaRPr lang="en-US" dirty="0"/>
+            <a:r>
+              <a:rPr lang="en-US" dirty="0"/>
+              <a:t>                                      % (unsigned compare)</a:t>
+            </a:r>
           </a:p>
           <a:p>
             <a:pPr marL="0" indent="0">
@@ -29302,7 +30621,16 @@
             </a:r>
             <a:r>
               <a:rPr lang="en-US" dirty="0"/>
-              <a:t> &gt; 1 (unsigned)</a:t>
+              <a:t> &gt; 1</a:t>
+            </a:r>
+          </a:p>
+          <a:p>
+            <a:pPr marL="0" indent="0">
+              <a:buNone/>
+            </a:pPr>
+            <a:r>
+              <a:rPr lang="en-US" dirty="0"/>
+              <a:t>                                      % (unsigned compare)</a:t>
             </a:r>
           </a:p>
           <a:p>
@@ -29576,7 +30904,7 @@
             </a:pPr>
             <a:r>
               <a:rPr lang="en-US" dirty="0"/>
-              <a:t> % uint32_t factorial(uint32_t n);</a:t>
+              <a:t> % uint32_t factorial(uint32_t n); Recursive version</a:t>
             </a:r>
           </a:p>
           <a:p>
@@ -29627,7 +30955,15 @@
             </a:pPr>
             <a:r>
               <a:rPr lang="en-US" dirty="0"/>
-              <a:t>    BLE     </a:t>
+              <a:t>    BL</a:t>
+            </a:r>
+            <a:r>
+              <a:rPr lang="en-US" altLang="zh-CN" dirty="0"/>
+              <a:t>S</a:t>
+            </a:r>
+            <a:r>
+              <a:rPr lang="en-US" dirty="0"/>
+              <a:t>     </a:t>
             </a:r>
             <a:r>
               <a:rPr lang="en-US" dirty="0" err="1"/>
@@ -29667,7 +31003,7 @@
             </a:pPr>
             <a:r>
               <a:rPr lang="en-US" dirty="0"/>
-              <a:t>    PUSH    {r0}              % save current n on stack (we'll need it after the recursive call)</a:t>
+              <a:t>    PUSH    {r0}             % save current n on stack (we'll need it after the recursive call)</a:t>
             </a:r>
           </a:p>
           <a:p>
@@ -29691,7 +31027,7 @@
             </a:pPr>
             <a:r>
               <a:rPr lang="en-US" dirty="0"/>
-              <a:t>    BL      factorial         % r0 = factorial(n - 1)</a:t>
+              <a:t>    BL      factorial          % r0 = factorial(n - 1)</a:t>
             </a:r>
           </a:p>
           <a:p>
@@ -29706,7 +31042,7 @@
             </a:pPr>
             <a:r>
               <a:rPr lang="en-US" dirty="0"/>
-              <a:t>    POP     {r1}              % r1 = saved n (restore caller's n)</a:t>
+              <a:t>    POP     {r1}               % r1 = saved n (restore caller's n)</a:t>
             </a:r>
           </a:p>
           <a:p>
@@ -29755,7 +31091,7 @@
             </a:r>
             <a:r>
               <a:rPr lang="en-US" dirty="0"/>
-              <a:t>                % return with result in r0</a:t>
+              <a:t>                 % return with result in r0</a:t>
             </a:r>
           </a:p>
           <a:p>
@@ -29887,7 +31223,7 @@
 </p:sld>
 </file>
 
-<file path=ppt/slides/slide28.xml><?xml version="1.0" encoding="utf-8"?>
+<file path=ppt/slides/slide31.xml><?xml version="1.0" encoding="utf-8"?>
 <p:sld xmlns:a="http://schemas.openxmlformats.org/drawingml/2006/main" xmlns:r="http://schemas.openxmlformats.org/officeDocument/2006/relationships" xmlns:p="http://schemas.openxmlformats.org/presentationml/2006/main">
   <p:cSld>
     <p:spTree>
@@ -29958,7 +31294,7 @@
             <a:fld id="{EA7C8D44-3667-46F6-9772-CC52308E2A7F}" type="slidenum">
               <a:rPr kumimoji="0" lang="en-US" smtClean="0"/>
               <a:pPr/>
-              <a:t>28</a:t>
+              <a:t>31</a:t>
             </a:fld>
             <a:endParaRPr kumimoji="0" lang="en-US" dirty="0"/>
           </a:p>
@@ -30562,7 +31898,7 @@
 </p:sld>
 </file>
 
-<file path=ppt/slides/slide29.xml><?xml version="1.0" encoding="utf-8"?>
+<file path=ppt/slides/slide32.xml><?xml version="1.0" encoding="utf-8"?>
 <p:sld xmlns:a="http://schemas.openxmlformats.org/drawingml/2006/main" xmlns:r="http://schemas.openxmlformats.org/officeDocument/2006/relationships" xmlns:p="http://schemas.openxmlformats.org/presentationml/2006/main">
   <p:cSld>
     <p:spTree>
@@ -30633,7 +31969,7 @@
             <a:fld id="{EA7C8D44-3667-46F6-9772-CC52308E2A7F}" type="slidenum">
               <a:rPr kumimoji="0" lang="en-US" smtClean="0"/>
               <a:pPr/>
-              <a:t>29</a:t>
+              <a:t>32</a:t>
             </a:fld>
             <a:endParaRPr kumimoji="0" lang="en-US" dirty="0"/>
           </a:p>
@@ -31609,7 +32945,7 @@
 </p:sld>
 </file>
 
-<file path=ppt/slides/slide3.xml><?xml version="1.0" encoding="utf-8"?>
+<file path=ppt/slides/slide33.xml><?xml version="1.0" encoding="utf-8"?>
 <p:sld xmlns:a="http://schemas.openxmlformats.org/drawingml/2006/main" xmlns:r="http://schemas.openxmlformats.org/officeDocument/2006/relationships" xmlns:p="http://schemas.openxmlformats.org/presentationml/2006/main">
   <p:cSld>
     <p:spTree>
@@ -31628,7 +32964,13 @@
       </p:grpSpPr>
       <p:sp>
         <p:nvSpPr>
-          <p:cNvPr id="2" name="Title 1"/>
+          <p:cNvPr id="2" name="Title 1">
+            <a:extLst>
+              <a:ext uri="{FF2B5EF4-FFF2-40B4-BE49-F238E27FC236}">
+                <a16:creationId xmlns:a16="http://schemas.microsoft.com/office/drawing/2014/main" id="{0B680E2F-C62E-EF54-5DBD-340196E1CA5F}"/>
+              </a:ext>
+            </a:extLst>
+          </p:cNvPr>
           <p:cNvSpPr>
             <a:spLocks noGrp="1"/>
           </p:cNvSpPr>
@@ -31642,156 +32984,21 @@
           <a:lstStyle/>
           <a:p>
             <a:r>
-              <a:rPr lang="en-GB" dirty="0"/>
-              <a:t>Stack</a:t>
-            </a:r>
-          </a:p>
-        </p:txBody>
-      </p:sp>
-      <p:sp>
-        <p:nvSpPr>
-          <p:cNvPr id="3" name="Content Placeholder 2"/>
-          <p:cNvSpPr>
-            <a:spLocks noGrp="1"/>
-          </p:cNvSpPr>
-          <p:nvPr>
-            <p:ph idx="1"/>
-          </p:nvPr>
-        </p:nvSpPr>
-        <p:spPr/>
-        <p:txBody>
-          <a:bodyPr/>
-          <a:lstStyle/>
-          <a:p>
-            <a:pPr>
-              <a:buNone/>
-            </a:pPr>
-            <a:r>
-              <a:rPr lang="en-GB" sz="2100" b="1" dirty="0">
-                <a:solidFill>
-                  <a:srgbClr val="FF0000"/>
-                </a:solidFill>
-                <a:latin typeface="Consolas" panose="020B0609020204030204" pitchFamily="49" charset="0"/>
-                <a:cs typeface="Consolas" panose="020B0609020204030204" pitchFamily="49" charset="0"/>
-              </a:rPr>
-              <a:t>POP</a:t>
-            </a:r>
-            <a:r>
-              <a:rPr lang="en-GB" sz="2100" dirty="0">
-                <a:solidFill>
-                  <a:srgbClr val="FF0000"/>
-                </a:solidFill>
-                <a:latin typeface="Consolas" panose="020B0609020204030204" pitchFamily="49" charset="0"/>
-                <a:cs typeface="Consolas" panose="020B0609020204030204" pitchFamily="49" charset="0"/>
-              </a:rPr>
-              <a:t> </a:t>
-            </a:r>
-            <a:r>
-              <a:rPr lang="en-GB" sz="2100" dirty="0">
-                <a:latin typeface="Consolas" panose="020B0609020204030204" pitchFamily="49" charset="0"/>
-                <a:cs typeface="Consolas" panose="020B0609020204030204" pitchFamily="49" charset="0"/>
-              </a:rPr>
-              <a:t>{</a:t>
-            </a:r>
-            <a:r>
-              <a:rPr lang="en-GB" sz="2100" i="1" dirty="0">
-                <a:latin typeface="Consolas" panose="020B0609020204030204" pitchFamily="49" charset="0"/>
-                <a:cs typeface="Consolas" panose="020B0609020204030204" pitchFamily="49" charset="0"/>
-              </a:rPr>
-              <a:t>Rd</a:t>
-            </a:r>
-            <a:r>
-              <a:rPr lang="en-GB" sz="2100" dirty="0">
-                <a:latin typeface="Consolas" panose="020B0609020204030204" pitchFamily="49" charset="0"/>
-                <a:cs typeface="Consolas" panose="020B0609020204030204" pitchFamily="49" charset="0"/>
-              </a:rPr>
-              <a:t>} == LDMIA SP!, {Rd} == LDMFD SP!, {Rd}</a:t>
-            </a:r>
-          </a:p>
-          <a:p>
-            <a:pPr lvl="1"/>
-            <a:r>
-              <a:rPr lang="sv-SE" sz="1800" dirty="0">
-                <a:latin typeface="Consolas" panose="020B0609020204030204" pitchFamily="49" charset="0"/>
-                <a:cs typeface="Consolas" panose="020B0609020204030204" pitchFamily="49" charset="0"/>
-              </a:rPr>
-              <a:t>LDR Rd, [SP] @ </a:t>
-            </a:r>
-            <a:r>
-              <a:rPr lang="en-GB" sz="1800" dirty="0">
-                <a:latin typeface="Consolas" panose="020B0609020204030204" pitchFamily="49" charset="0"/>
-                <a:cs typeface="Consolas" panose="020B0609020204030204" pitchFamily="49" charset="0"/>
-              </a:rPr>
-              <a:t>Rd = (*SP)    </a:t>
-            </a:r>
-            <a:r>
-              <a:rPr lang="en-GB" sz="1800" dirty="0">
-                <a:latin typeface="Cambria Math"/>
-                <a:ea typeface="Cambria Math"/>
-                <a:cs typeface="Consolas" panose="020B0609020204030204" pitchFamily="49" charset="0"/>
-              </a:rPr>
-              <a:t>(full stack)</a:t>
-            </a:r>
-            <a:endParaRPr lang="en-GB" sz="1800" dirty="0">
-              <a:latin typeface="Consolas" panose="020B0609020204030204" pitchFamily="49" charset="0"/>
-              <a:cs typeface="Consolas" panose="020B0609020204030204" pitchFamily="49" charset="0"/>
-            </a:endParaRPr>
-          </a:p>
-          <a:p>
-            <a:pPr lvl="1"/>
-            <a:r>
-              <a:rPr lang="en-GB" sz="1800" dirty="0">
-                <a:latin typeface="Consolas" panose="020B0609020204030204" pitchFamily="49" charset="0"/>
-                <a:cs typeface="Consolas" panose="020B0609020204030204" pitchFamily="49" charset="0"/>
-              </a:rPr>
-              <a:t>ADD SP, #4   </a:t>
-            </a:r>
-            <a:r>
-              <a:rPr lang="sv-SE" sz="1800" dirty="0">
-                <a:latin typeface="Consolas" panose="020B0609020204030204" pitchFamily="49" charset="0"/>
-                <a:cs typeface="Consolas" panose="020B0609020204030204" pitchFamily="49" charset="0"/>
-              </a:rPr>
-              <a:t>@ </a:t>
-            </a:r>
-            <a:r>
-              <a:rPr lang="en-GB" sz="1800" dirty="0">
-                <a:latin typeface="Consolas" panose="020B0609020204030204" pitchFamily="49" charset="0"/>
-                <a:cs typeface="Consolas" panose="020B0609020204030204" pitchFamily="49" charset="0"/>
-              </a:rPr>
-              <a:t>SP = SP + 4   </a:t>
-            </a:r>
-            <a:r>
-              <a:rPr lang="en-GB" sz="1800" dirty="0">
-                <a:latin typeface="Cambria Math"/>
-                <a:ea typeface="Cambria Math"/>
-                <a:cs typeface="Consolas" panose="020B0609020204030204" pitchFamily="49" charset="0"/>
-              </a:rPr>
-              <a:t>(Stack shrinks)</a:t>
-            </a:r>
-          </a:p>
-          <a:p>
-            <a:pPr lvl="1"/>
-            <a:endParaRPr lang="en-GB" sz="2025" dirty="0">
-              <a:latin typeface="Consolas" panose="020B0609020204030204" pitchFamily="49" charset="0"/>
-              <a:cs typeface="Consolas" panose="020B0609020204030204" pitchFamily="49" charset="0"/>
-            </a:endParaRPr>
-          </a:p>
-          <a:p>
-            <a:pPr marL="0" indent="0">
-              <a:buNone/>
-            </a:pPr>
-            <a:r>
-              <a:rPr lang="en-GB" sz="2025" dirty="0">
-                <a:cs typeface="Consolas" panose="020B0609020204030204" pitchFamily="49" charset="0"/>
-              </a:rPr>
-              <a:t>Pop multiple registers</a:t>
-            </a:r>
-          </a:p>
-        </p:txBody>
-      </p:sp>
-      <p:sp>
-        <p:nvSpPr>
-          <p:cNvPr id="4" name="Slide Number Placeholder 3"/>
+              <a:rPr lang="en-US" dirty="0"/>
+              <a:t>Explanations</a:t>
+            </a:r>
+          </a:p>
+        </p:txBody>
+      </p:sp>
+      <p:sp>
+        <p:nvSpPr>
+          <p:cNvPr id="3" name="Slide Number Placeholder 2">
+            <a:extLst>
+              <a:ext uri="{FF2B5EF4-FFF2-40B4-BE49-F238E27FC236}">
+                <a16:creationId xmlns:a16="http://schemas.microsoft.com/office/drawing/2014/main" id="{9ECF1D85-43EB-71B3-363D-9FF339EE4AA2}"/>
+              </a:ext>
+            </a:extLst>
+          </p:cNvPr>
           <p:cNvSpPr>
             <a:spLocks noGrp="1"/>
           </p:cNvSpPr>
@@ -31804,552 +33011,166 @@
           <a:bodyPr/>
           <a:lstStyle/>
           <a:p>
-            <a:pPr defTabSz="685800"/>
             <a:fld id="{EA7C8D44-3667-46F6-9772-CC52308E2A7F}" type="slidenum">
-              <a:rPr lang="en-US">
-                <a:solidFill>
-                  <a:srgbClr val="1F497D"/>
-                </a:solidFill>
-                <a:latin typeface="Gill Sans MT"/>
-              </a:rPr>
-              <a:pPr defTabSz="685800"/>
-              <a:t>3</a:t>
+              <a:rPr kumimoji="0" lang="en-US" smtClean="0"/>
+              <a:pPr/>
+              <a:t>33</a:t>
             </a:fld>
-            <a:endParaRPr lang="en-US" dirty="0">
-              <a:solidFill>
-                <a:srgbClr val="1F497D"/>
-              </a:solidFill>
-              <a:latin typeface="Gill Sans MT"/>
-            </a:endParaRPr>
-          </a:p>
-        </p:txBody>
-      </p:sp>
-      <p:sp>
-        <p:nvSpPr>
-          <p:cNvPr id="5" name="Rectangle 4"/>
-          <p:cNvSpPr/>
-          <p:nvPr/>
-        </p:nvSpPr>
-        <p:spPr>
-          <a:xfrm>
-            <a:off x="3629026" y="4075262"/>
-            <a:ext cx="2025632" cy="507831"/>
-          </a:xfrm>
-          <a:prstGeom prst="rect">
-            <a:avLst/>
-          </a:prstGeom>
-        </p:spPr>
-        <p:txBody>
-          <a:bodyPr wrap="square">
-            <a:spAutoFit/>
-          </a:bodyPr>
-          <a:lstStyle/>
-          <a:p>
-            <a:pPr defTabSz="685800"/>
-            <a:r>
-              <a:rPr lang="en-GB" sz="1350" b="1" dirty="0">
-                <a:solidFill>
-                  <a:srgbClr val="FF0000"/>
-                </a:solidFill>
-                <a:latin typeface="Consolas" panose="020B0609020204030204" pitchFamily="49" charset="0"/>
-                <a:cs typeface="Consolas" panose="020B0609020204030204" pitchFamily="49" charset="0"/>
-              </a:rPr>
-              <a:t>POP {r7, r3, r2, r1}</a:t>
-            </a:r>
-          </a:p>
-        </p:txBody>
-      </p:sp>
-      <p:sp>
-        <p:nvSpPr>
-          <p:cNvPr id="7" name="TextBox 6"/>
-          <p:cNvSpPr txBox="1"/>
-          <p:nvPr/>
-        </p:nvSpPr>
-        <p:spPr>
-          <a:xfrm>
-            <a:off x="3744661" y="3763639"/>
-            <a:ext cx="1521827" cy="300082"/>
-          </a:xfrm>
-          <a:prstGeom prst="rect">
-            <a:avLst/>
-          </a:prstGeom>
-          <a:noFill/>
-        </p:spPr>
-        <p:txBody>
-          <a:bodyPr wrap="none" rtlCol="0">
-            <a:spAutoFit/>
-          </a:bodyPr>
-          <a:lstStyle/>
-          <a:p>
-            <a:pPr defTabSz="685800"/>
-            <a:r>
-              <a:rPr lang="en-US" sz="1350" i="1" dirty="0">
-                <a:solidFill>
-                  <a:prstClr val="black"/>
-                </a:solidFill>
-                <a:latin typeface="Gill Sans MT"/>
-              </a:rPr>
-              <a:t>They are equivalent. </a:t>
-            </a:r>
-          </a:p>
-        </p:txBody>
-      </p:sp>
-      <p:sp>
-        <p:nvSpPr>
-          <p:cNvPr id="9" name="Rectangle 8"/>
-          <p:cNvSpPr/>
-          <p:nvPr/>
-        </p:nvSpPr>
-        <p:spPr>
-          <a:xfrm>
-            <a:off x="6224130" y="3763639"/>
-            <a:ext cx="941283" cy="923330"/>
-          </a:xfrm>
-          <a:prstGeom prst="rect">
-            <a:avLst/>
-          </a:prstGeom>
-        </p:spPr>
-        <p:txBody>
-          <a:bodyPr wrap="none">
-            <a:spAutoFit/>
-          </a:bodyPr>
-          <a:lstStyle/>
-          <a:p>
-            <a:pPr defTabSz="685800"/>
-            <a:r>
-              <a:rPr lang="en-GB" sz="1350" b="1" dirty="0">
-                <a:solidFill>
-                  <a:srgbClr val="FF0000"/>
-                </a:solidFill>
-                <a:latin typeface="Consolas" panose="020B0609020204030204" pitchFamily="49" charset="0"/>
-                <a:cs typeface="Consolas" panose="020B0609020204030204" pitchFamily="49" charset="0"/>
-              </a:rPr>
-              <a:t>POP {r1}</a:t>
-            </a:r>
-          </a:p>
-          <a:p>
-            <a:pPr defTabSz="685800"/>
-            <a:r>
-              <a:rPr lang="en-GB" sz="1350" b="1" dirty="0">
-                <a:solidFill>
-                  <a:srgbClr val="FF0000"/>
-                </a:solidFill>
-                <a:latin typeface="Consolas" panose="020B0609020204030204" pitchFamily="49" charset="0"/>
-                <a:cs typeface="Consolas" panose="020B0609020204030204" pitchFamily="49" charset="0"/>
-              </a:rPr>
-              <a:t>POP {r2}</a:t>
-            </a:r>
-          </a:p>
-          <a:p>
-            <a:pPr defTabSz="685800"/>
-            <a:r>
-              <a:rPr lang="en-GB" sz="1350" b="1" dirty="0">
-                <a:solidFill>
-                  <a:srgbClr val="FF0000"/>
-                </a:solidFill>
-                <a:latin typeface="Consolas" panose="020B0609020204030204" pitchFamily="49" charset="0"/>
-                <a:cs typeface="Consolas" panose="020B0609020204030204" pitchFamily="49" charset="0"/>
-              </a:rPr>
-              <a:t>POP {r3}</a:t>
-            </a:r>
-          </a:p>
-          <a:p>
-            <a:pPr defTabSz="685800"/>
-            <a:r>
-              <a:rPr lang="en-GB" sz="1350" b="1" dirty="0">
-                <a:solidFill>
-                  <a:srgbClr val="FF0000"/>
-                </a:solidFill>
-                <a:latin typeface="Consolas" panose="020B0609020204030204" pitchFamily="49" charset="0"/>
-                <a:cs typeface="Consolas" panose="020B0609020204030204" pitchFamily="49" charset="0"/>
-              </a:rPr>
-              <a:t>POP {r7}</a:t>
-            </a:r>
-          </a:p>
-        </p:txBody>
-      </p:sp>
-      <p:sp>
-        <p:nvSpPr>
-          <p:cNvPr id="10" name="Rectangle 9"/>
-          <p:cNvSpPr/>
-          <p:nvPr/>
-        </p:nvSpPr>
-        <p:spPr>
-          <a:xfrm>
-            <a:off x="1125325" y="4075262"/>
-            <a:ext cx="2076209" cy="300082"/>
-          </a:xfrm>
-          <a:prstGeom prst="rect">
-            <a:avLst/>
-          </a:prstGeom>
-        </p:spPr>
-        <p:txBody>
-          <a:bodyPr wrap="none">
-            <a:spAutoFit/>
-          </a:bodyPr>
-          <a:lstStyle/>
-          <a:p>
-            <a:pPr defTabSz="685800"/>
-            <a:r>
-              <a:rPr lang="en-GB" sz="1350" b="1" dirty="0">
-                <a:solidFill>
-                  <a:srgbClr val="FF0000"/>
-                </a:solidFill>
-                <a:latin typeface="Consolas" panose="020B0609020204030204" pitchFamily="49" charset="0"/>
-                <a:cs typeface="Consolas" panose="020B0609020204030204" pitchFamily="49" charset="0"/>
-              </a:rPr>
-              <a:t>POP {r1, r2, r3, r7}</a:t>
-            </a:r>
-          </a:p>
-        </p:txBody>
-      </p:sp>
-      <p:sp>
-        <p:nvSpPr>
-          <p:cNvPr id="11" name="Left-Right Arrow 10"/>
-          <p:cNvSpPr/>
-          <p:nvPr/>
-        </p:nvSpPr>
-        <p:spPr>
-          <a:xfrm>
-            <a:off x="3213091" y="4139556"/>
-            <a:ext cx="362213" cy="148412"/>
-          </a:xfrm>
-          <a:prstGeom prst="leftRightArrow">
-            <a:avLst/>
-          </a:prstGeom>
-        </p:spPr>
-        <p:style>
-          <a:lnRef idx="2">
-            <a:schemeClr val="accent1">
-              <a:shade val="50000"/>
-            </a:schemeClr>
-          </a:lnRef>
-          <a:fillRef idx="1">
-            <a:schemeClr val="accent1"/>
-          </a:fillRef>
-          <a:effectRef idx="0">
-            <a:schemeClr val="accent1"/>
-          </a:effectRef>
-          <a:fontRef idx="minor">
-            <a:schemeClr val="lt1"/>
-          </a:fontRef>
-        </p:style>
-        <p:txBody>
-          <a:bodyPr rtlCol="0" anchor="ctr"/>
-          <a:lstStyle/>
-          <a:p>
-            <a:pPr algn="ctr" defTabSz="685800"/>
-            <a:endParaRPr lang="en-US" sz="1350">
-              <a:solidFill>
-                <a:prstClr val="white"/>
-              </a:solidFill>
-              <a:latin typeface="Gill Sans MT"/>
-            </a:endParaRPr>
-          </a:p>
-        </p:txBody>
-      </p:sp>
-      <p:sp>
-        <p:nvSpPr>
-          <p:cNvPr id="12" name="Left-Right Arrow 11"/>
-          <p:cNvSpPr/>
-          <p:nvPr/>
-        </p:nvSpPr>
-        <p:spPr>
-          <a:xfrm>
-            <a:off x="5670541" y="4139556"/>
-            <a:ext cx="362213" cy="148412"/>
-          </a:xfrm>
-          <a:prstGeom prst="leftRightArrow">
-            <a:avLst/>
-          </a:prstGeom>
-        </p:spPr>
-        <p:style>
-          <a:lnRef idx="2">
-            <a:schemeClr val="accent1">
-              <a:shade val="50000"/>
-            </a:schemeClr>
-          </a:lnRef>
-          <a:fillRef idx="1">
-            <a:schemeClr val="accent1"/>
-          </a:fillRef>
-          <a:effectRef idx="0">
-            <a:schemeClr val="accent1"/>
-          </a:effectRef>
-          <a:fontRef idx="minor">
-            <a:schemeClr val="lt1"/>
-          </a:fontRef>
-        </p:style>
-        <p:txBody>
-          <a:bodyPr rtlCol="0" anchor="ctr"/>
-          <a:lstStyle/>
-          <a:p>
-            <a:pPr algn="ctr" defTabSz="685800"/>
-            <a:endParaRPr lang="en-US" sz="1350">
-              <a:solidFill>
-                <a:prstClr val="white"/>
-              </a:solidFill>
-              <a:latin typeface="Gill Sans MT"/>
-            </a:endParaRPr>
-          </a:p>
-        </p:txBody>
-      </p:sp>
-      <p:sp>
-        <p:nvSpPr>
-          <p:cNvPr id="6" name="Rectangle 5"/>
-          <p:cNvSpPr/>
-          <p:nvPr/>
-        </p:nvSpPr>
-        <p:spPr>
-          <a:xfrm>
-            <a:off x="441316" y="4663886"/>
-            <a:ext cx="8401050" cy="1015663"/>
-          </a:xfrm>
-          <a:prstGeom prst="rect">
-            <a:avLst/>
-          </a:prstGeom>
-        </p:spPr>
-        <p:txBody>
-          <a:bodyPr wrap="square">
-            <a:spAutoFit/>
-          </a:bodyPr>
-          <a:lstStyle/>
-          <a:p>
-            <a:pPr marL="214313" indent="-214313" defTabSz="685800">
-              <a:buFont typeface="Arial" panose="020B0604020202020204" pitchFamily="34" charset="0"/>
-              <a:buChar char="•"/>
-            </a:pPr>
-            <a:r>
-              <a:rPr lang="en-US" sz="1500" dirty="0">
-                <a:solidFill>
-                  <a:prstClr val="black"/>
-                </a:solidFill>
-                <a:latin typeface="Gill Sans MT"/>
-              </a:rPr>
-              <a:t>SP is incremented after POP (post-increment). </a:t>
-            </a:r>
-          </a:p>
-          <a:p>
-            <a:pPr marL="214313" indent="-214313" defTabSz="685800">
-              <a:buFont typeface="Arial" panose="020B0604020202020204" pitchFamily="34" charset="0"/>
-              <a:buChar char="•"/>
-            </a:pPr>
-            <a:r>
-              <a:rPr lang="en-US" sz="1500" dirty="0">
-                <a:solidFill>
-                  <a:prstClr val="black"/>
-                </a:solidFill>
-                <a:latin typeface="Gill Sans MT"/>
-              </a:rPr>
-              <a:t>The order in which registers listed in the register list does not matter. </a:t>
-            </a:r>
-          </a:p>
-          <a:p>
-            <a:pPr marL="214313" indent="-214313" defTabSz="685800">
-              <a:buFont typeface="Arial" panose="020B0604020202020204" pitchFamily="34" charset="0"/>
-              <a:buChar char="•"/>
-            </a:pPr>
-            <a:r>
-              <a:rPr lang="en-US" sz="1500" dirty="0">
-                <a:solidFill>
-                  <a:prstClr val="black"/>
-                </a:solidFill>
-                <a:latin typeface="Gill Sans MT"/>
-              </a:rPr>
-              <a:t>When popping multiple registers, these registers are automatically </a:t>
-            </a:r>
-            <a:r>
-              <a:rPr lang="en-US" sz="1500" dirty="0">
-                <a:solidFill>
-                  <a:srgbClr val="3333FF"/>
-                </a:solidFill>
-                <a:latin typeface="Gill Sans MT"/>
-              </a:rPr>
-              <a:t>sorted by name </a:t>
-            </a:r>
-            <a:r>
-              <a:rPr lang="en-US" sz="1500" dirty="0">
-                <a:solidFill>
-                  <a:prstClr val="black"/>
-                </a:solidFill>
-                <a:latin typeface="Gill Sans MT"/>
-              </a:rPr>
-              <a:t>and </a:t>
-            </a:r>
-            <a:r>
-              <a:rPr lang="en-US" sz="1500" dirty="0">
-                <a:solidFill>
-                  <a:srgbClr val="3333FF"/>
-                </a:solidFill>
-                <a:latin typeface="Gill Sans MT"/>
-              </a:rPr>
-              <a:t>the lowest-numbered register</a:t>
-            </a:r>
-            <a:r>
-              <a:rPr lang="en-US" sz="1500" dirty="0">
-                <a:solidFill>
-                  <a:prstClr val="black"/>
-                </a:solidFill>
-                <a:latin typeface="Gill Sans MT"/>
-              </a:rPr>
-              <a:t> is loaded from the lowest memory address, </a:t>
-            </a:r>
-            <a:r>
-              <a:rPr lang="en-US" sz="1500" i="1" dirty="0">
-                <a:solidFill>
-                  <a:prstClr val="black"/>
-                </a:solidFill>
-                <a:latin typeface="Gill Sans MT"/>
-              </a:rPr>
-              <a:t>i.e. </a:t>
-            </a:r>
-            <a:r>
-              <a:rPr lang="en-US" sz="1500" dirty="0">
-                <a:solidFill>
-                  <a:srgbClr val="3333FF"/>
-                </a:solidFill>
-                <a:latin typeface="Gill Sans MT"/>
-              </a:rPr>
-              <a:t>is loaded first</a:t>
-            </a:r>
-            <a:r>
-              <a:rPr lang="en-US" sz="1500" dirty="0">
-                <a:solidFill>
-                  <a:prstClr val="black"/>
-                </a:solidFill>
-                <a:latin typeface="Gill Sans MT"/>
-              </a:rPr>
-              <a:t>. </a:t>
-            </a:r>
-          </a:p>
-        </p:txBody>
-      </p:sp>
-      <p:pic>
-        <p:nvPicPr>
-          <p:cNvPr id="13" name="Picture 12">
+            <a:endParaRPr kumimoji="0" lang="en-US" dirty="0"/>
+          </a:p>
+        </p:txBody>
+      </p:sp>
+      <p:sp>
+        <p:nvSpPr>
+          <p:cNvPr id="4" name="Content Placeholder 3">
             <a:extLst>
               <a:ext uri="{FF2B5EF4-FFF2-40B4-BE49-F238E27FC236}">
-                <a16:creationId xmlns:a16="http://schemas.microsoft.com/office/drawing/2014/main" id="{355D812E-3C2A-BCEA-1442-B45EE486FA9C}"/>
+                <a16:creationId xmlns:a16="http://schemas.microsoft.com/office/drawing/2014/main" id="{E4F57FE1-A328-6D2A-AFB7-A6C1600FE210}"/>
               </a:ext>
             </a:extLst>
           </p:cNvPr>
-          <p:cNvPicPr>
-            <a:picLocks noChangeAspect="1"/>
-          </p:cNvPicPr>
-          <p:nvPr/>
-        </p:nvPicPr>
-        <p:blipFill>
-          <a:blip r:embed="rId2"/>
-          <a:stretch>
-            <a:fillRect/>
-          </a:stretch>
-        </p:blipFill>
+          <p:cNvSpPr>
+            <a:spLocks noGrp="1"/>
+          </p:cNvSpPr>
+          <p:nvPr>
+            <p:ph sz="quarter" idx="1"/>
+          </p:nvPr>
+        </p:nvSpPr>
         <p:spPr>
           <a:xfrm>
-            <a:off x="7720500" y="933655"/>
-            <a:ext cx="1263120" cy="3753851"/>
+            <a:off x="457200" y="1219200"/>
+            <a:ext cx="8229600" cy="5334000"/>
           </a:xfrm>
-          <a:prstGeom prst="rect">
-            <a:avLst/>
-          </a:prstGeom>
         </p:spPr>
-      </p:pic>
-      <p:sp>
-        <p:nvSpPr>
-          <p:cNvPr id="8" name="Horizontal Scroll 15">
-            <a:extLst>
-              <a:ext uri="{FF2B5EF4-FFF2-40B4-BE49-F238E27FC236}">
-                <a16:creationId xmlns:a16="http://schemas.microsoft.com/office/drawing/2014/main" id="{510E2E53-03DD-57F0-F850-07FD9C250CEA}"/>
-              </a:ext>
-            </a:extLst>
-          </p:cNvPr>
-          <p:cNvSpPr/>
-          <p:nvPr/>
-        </p:nvSpPr>
-        <p:spPr>
-          <a:xfrm>
-            <a:off x="76200" y="-23210"/>
-            <a:ext cx="1265712" cy="762000"/>
-          </a:xfrm>
-          <a:prstGeom prst="horizontalScroll">
-            <a:avLst/>
-          </a:prstGeom>
-          <a:gradFill rotWithShape="1">
-            <a:gsLst>
-              <a:gs pos="0">
-                <a:srgbClr val="4F81BD">
-                  <a:tint val="50000"/>
-                  <a:satMod val="300000"/>
-                </a:srgbClr>
-              </a:gs>
-              <a:gs pos="35000">
-                <a:srgbClr val="4F81BD">
-                  <a:tint val="37000"/>
-                  <a:satMod val="300000"/>
-                </a:srgbClr>
-              </a:gs>
-              <a:gs pos="100000">
-                <a:srgbClr val="4F81BD">
-                  <a:tint val="15000"/>
-                  <a:satMod val="350000"/>
-                </a:srgbClr>
-              </a:gs>
-            </a:gsLst>
-            <a:lin ang="16200000" scaled="1"/>
-          </a:gradFill>
-          <a:ln w="9525" cap="flat" cmpd="sng" algn="ctr">
-            <a:solidFill>
-              <a:srgbClr val="4F81BD">
-                <a:shade val="95000"/>
-                <a:satMod val="105000"/>
-              </a:srgbClr>
-            </a:solidFill>
-            <a:prstDash val="solid"/>
-          </a:ln>
-          <a:effectLst>
-            <a:outerShdw blurRad="40000" dist="20000" dir="5400000" rotWithShape="0">
-              <a:srgbClr val="000000">
-                <a:alpha val="38000"/>
-              </a:srgbClr>
-            </a:outerShdw>
-          </a:effectLst>
-        </p:spPr>
-        <p:txBody>
-          <a:bodyPr rtlCol="0" anchor="ctr"/>
-          <a:lstStyle/>
-          <a:p>
-            <a:pPr marL="0" marR="0" lvl="0" indent="0" algn="ctr" defTabSz="457200" eaLnBrk="1" fontAlgn="auto" latinLnBrk="0" hangingPunct="1">
-              <a:lnSpc>
-                <a:spcPct val="100000"/>
-              </a:lnSpc>
-              <a:spcBef>
-                <a:spcPts val="0"/>
-              </a:spcBef>
-              <a:spcAft>
-                <a:spcPts val="0"/>
-              </a:spcAft>
-              <a:buClrTx/>
-              <a:buSzTx/>
-              <a:buFontTx/>
-              <a:buNone/>
-              <a:tabLst/>
-              <a:defRPr/>
-            </a:pPr>
-            <a:r>
-              <a:rPr kumimoji="0" lang="en-US" sz="2400" b="0" i="0" u="none" strike="noStrike" kern="0" cap="none" spc="0" normalizeH="0" baseline="0" noProof="0" dirty="0">
-                <a:ln>
-                  <a:noFill/>
-                </a:ln>
-                <a:solidFill>
-                  <a:prstClr val="black"/>
-                </a:solidFill>
-                <a:effectLst/>
-                <a:uLnTx/>
-                <a:uFillTx/>
-                <a:latin typeface="Calibri"/>
-                <a:ea typeface="+mn-ea"/>
-                <a:cs typeface="+mn-cs"/>
-              </a:rPr>
-              <a:t>Review</a:t>
+        <p:txBody>
+          <a:bodyPr>
+            <a:normAutofit fontScale="70000" lnSpcReduction="20000"/>
+          </a:bodyPr>
+          <a:lstStyle/>
+          <a:p>
+            <a:r>
+              <a:rPr lang="en-US" dirty="0"/>
+              <a:t>These two lines sign-extend the lower 16 bits of r3 into a full 32-bit value in r0.</a:t>
+            </a:r>
+          </a:p>
+          <a:p>
+            <a:r>
+              <a:rPr lang="en-US" dirty="0"/>
+              <a:t>MOV r0, r3, LSL #16</a:t>
+            </a:r>
+          </a:p>
+          <a:p>
+            <a:pPr lvl="1"/>
+            <a:r>
+              <a:rPr lang="en-US" dirty="0"/>
+              <a:t>Shifts the value in r3 left by 16 bits.</a:t>
+            </a:r>
+          </a:p>
+          <a:p>
+            <a:pPr lvl="1"/>
+            <a:r>
+              <a:rPr lang="en-US" dirty="0"/>
+              <a:t>The lower 16 bits of r3 (the part we care about) move up into the upper 16 bits of r0.</a:t>
+            </a:r>
+          </a:p>
+          <a:p>
+            <a:pPr lvl="1"/>
+            <a:r>
+              <a:rPr lang="en-US" dirty="0"/>
+              <a:t>The bottom 16 bits of r0 become 0.</a:t>
+            </a:r>
+          </a:p>
+          <a:p>
+            <a:r>
+              <a:rPr lang="en-US" dirty="0"/>
+              <a:t>MOV r0, r0, ASR #16</a:t>
+            </a:r>
+          </a:p>
+          <a:p>
+            <a:pPr lvl="1"/>
+            <a:r>
+              <a:rPr lang="en-US" dirty="0"/>
+              <a:t>Shifts the value right by 16 bits, but preserves the sign (arithmetic shift).</a:t>
+            </a:r>
+          </a:p>
+          <a:p>
+            <a:pPr lvl="1"/>
+            <a:r>
+              <a:rPr lang="en-US" dirty="0"/>
+              <a:t>That means if bit 31 (the sign bit after the first shift) is 1, it fills with 1s; if 0, it fills with 0s.</a:t>
+            </a:r>
+          </a:p>
+          <a:p>
+            <a:pPr lvl="1"/>
+            <a:r>
+              <a:rPr lang="en-US" dirty="0"/>
+              <a:t>The result is a sign-extended 16-bit value from the original lower half of r3.</a:t>
+            </a:r>
+          </a:p>
+          <a:p>
+            <a:r>
+              <a:rPr lang="en-US" dirty="0"/>
+              <a:t>Examples: </a:t>
+            </a:r>
+          </a:p>
+          <a:p>
+            <a:r>
+              <a:rPr lang="en-US" dirty="0"/>
+              <a:t>r3 = 0x00001234</a:t>
+            </a:r>
+          </a:p>
+          <a:p>
+            <a:pPr lvl="1"/>
+            <a:r>
+              <a:rPr lang="en-US" dirty="0"/>
+              <a:t>LSL #16 → 0x12340000</a:t>
+            </a:r>
+          </a:p>
+          <a:p>
+            <a:pPr lvl="1"/>
+            <a:r>
+              <a:rPr lang="en-US" dirty="0"/>
+              <a:t>ASR #16 → 0x00001234</a:t>
+            </a:r>
+          </a:p>
+          <a:p>
+            <a:r>
+              <a:rPr lang="en-US" dirty="0"/>
+              <a:t>r3 = 0x0000ABCD</a:t>
+            </a:r>
+          </a:p>
+          <a:p>
+            <a:pPr lvl="1"/>
+            <a:r>
+              <a:rPr lang="en-US" dirty="0"/>
+              <a:t>LSL #16 → 0xABCD0000</a:t>
+            </a:r>
+          </a:p>
+          <a:p>
+            <a:pPr lvl="1"/>
+            <a:r>
+              <a:rPr lang="en-US" dirty="0"/>
+              <a:t>ASR #16 → 0xFFFFABCD</a:t>
+            </a:r>
+          </a:p>
+          <a:p>
+            <a:r>
+              <a:rPr lang="pt-BR" dirty="0"/>
+              <a:t>Can be replaced with a single instruction:</a:t>
+            </a:r>
+          </a:p>
+          <a:p>
+            <a:pPr lvl="1"/>
+            <a:r>
+              <a:rPr lang="pt-BR" dirty="0"/>
+              <a:t>SXTH  r0, r3   ; r0 = (int16_t) r3, sign-extend</a:t>
+            </a:r>
+          </a:p>
+          <a:p>
+            <a:pPr lvl="2"/>
+            <a:r>
+              <a:rPr lang="en-US" dirty="0"/>
+              <a:t>Take the low 16 bits of r3, sign-extend them to 32 bits, and store the result in r0.</a:t>
             </a:r>
           </a:p>
         </p:txBody>
@@ -32357,7 +33178,7 @@
     </p:spTree>
     <p:extLst>
       <p:ext uri="{BB962C8B-B14F-4D97-AF65-F5344CB8AC3E}">
-        <p14:creationId xmlns:p14="http://schemas.microsoft.com/office/powerpoint/2010/main" val="424972285"/>
+        <p14:creationId xmlns:p14="http://schemas.microsoft.com/office/powerpoint/2010/main" val="1757812227"/>
       </p:ext>
     </p:extLst>
   </p:cSld>
@@ -32367,7 +33188,7 @@
 </p:sld>
 </file>
 
-<file path=ppt/slides/slide30.xml><?xml version="1.0" encoding="utf-8"?>
+<file path=ppt/slides/slide34.xml><?xml version="1.0" encoding="utf-8"?>
 <p:sld xmlns:a="http://schemas.openxmlformats.org/drawingml/2006/main" xmlns:r="http://schemas.openxmlformats.org/officeDocument/2006/relationships" xmlns:p="http://schemas.openxmlformats.org/presentationml/2006/main">
   <p:cSld>
     <p:spTree>
@@ -32389,7 +33210,7 @@
           <p:cNvPr id="2" name="Title 1">
             <a:extLst>
               <a:ext uri="{FF2B5EF4-FFF2-40B4-BE49-F238E27FC236}">
-                <a16:creationId xmlns:a16="http://schemas.microsoft.com/office/drawing/2014/main" id="{0B680E2F-C62E-EF54-5DBD-340196E1CA5F}"/>
+                <a16:creationId xmlns:a16="http://schemas.microsoft.com/office/drawing/2014/main" id="{6234EC6E-B891-AF83-E66F-8217385C54F6}"/>
               </a:ext>
             </a:extLst>
           </p:cNvPr>
@@ -32407,7 +33228,7 @@
           <a:p>
             <a:r>
               <a:rPr lang="en-US" dirty="0"/>
-              <a:t>Explanations</a:t>
+              <a:t>Program Understanding</a:t>
             </a:r>
           </a:p>
         </p:txBody>
@@ -32417,7 +33238,7 @@
           <p:cNvPr id="3" name="Slide Number Placeholder 2">
             <a:extLst>
               <a:ext uri="{FF2B5EF4-FFF2-40B4-BE49-F238E27FC236}">
-                <a16:creationId xmlns:a16="http://schemas.microsoft.com/office/drawing/2014/main" id="{9ECF1D85-43EB-71B3-363D-9FF339EE4AA2}"/>
+                <a16:creationId xmlns:a16="http://schemas.microsoft.com/office/drawing/2014/main" id="{5959EC02-DF33-1CB3-210F-7D09C20A83C0}"/>
               </a:ext>
             </a:extLst>
           </p:cNvPr>
@@ -32436,7 +33257,7 @@
             <a:fld id="{EA7C8D44-3667-46F6-9772-CC52308E2A7F}" type="slidenum">
               <a:rPr kumimoji="0" lang="en-US" smtClean="0"/>
               <a:pPr/>
-              <a:t>30</a:t>
+              <a:t>34</a:t>
             </a:fld>
             <a:endParaRPr kumimoji="0" lang="en-US" dirty="0"/>
           </a:p>
@@ -32447,7 +33268,7 @@
           <p:cNvPr id="4" name="Content Placeholder 3">
             <a:extLst>
               <a:ext uri="{FF2B5EF4-FFF2-40B4-BE49-F238E27FC236}">
-                <a16:creationId xmlns:a16="http://schemas.microsoft.com/office/drawing/2014/main" id="{E4F57FE1-A328-6D2A-AFB7-A6C1600FE210}"/>
+                <a16:creationId xmlns:a16="http://schemas.microsoft.com/office/drawing/2014/main" id="{3DC23136-53FC-2BF5-8C7C-A3096D3761E3}"/>
               </a:ext>
             </a:extLst>
           </p:cNvPr>
@@ -32461,7 +33282,7 @@
         <p:spPr>
           <a:xfrm>
             <a:off x="457200" y="1219200"/>
-            <a:ext cx="8229600" cy="5334000"/>
+            <a:ext cx="8229600" cy="1066800"/>
           </a:xfrm>
         </p:spPr>
         <p:txBody>
@@ -32472,249 +33293,20 @@
           <a:p>
             <a:r>
               <a:rPr lang="en-US" dirty="0"/>
-              <a:t>These two lines sign-extend the lower 16 bits of r3 into a full 32-bit value in r0.</a:t>
-            </a:r>
-          </a:p>
-          <a:p>
+              <a:t>Given the following code, fill in the blanks listed next to each instruction with the values that would be in each register or status bit </a:t>
+            </a:r>
+            <a:r>
+              <a:rPr lang="en-US" dirty="0">
+                <a:solidFill>
+                  <a:srgbClr val="C00000"/>
+                </a:solidFill>
+              </a:rPr>
+              <a:t>after each instruction executes</a:t>
+            </a:r>
             <a:r>
               <a:rPr lang="en-US" dirty="0"/>
-              <a:t>MOV r0, r3, LSL #16</a:t>
-            </a:r>
-          </a:p>
-          <a:p>
-            <a:pPr lvl="1"/>
-            <a:r>
-              <a:rPr lang="en-US" dirty="0"/>
-              <a:t>Shifts the value in r3 left by 16 bits.</a:t>
-            </a:r>
-          </a:p>
-          <a:p>
-            <a:pPr lvl="1"/>
-            <a:r>
-              <a:rPr lang="en-US" dirty="0"/>
-              <a:t>The lower 16 bits of r3 (the part we care about) move up into the upper 16 bits of r0.</a:t>
-            </a:r>
-          </a:p>
-          <a:p>
-            <a:pPr lvl="1"/>
-            <a:r>
-              <a:rPr lang="en-US" dirty="0"/>
-              <a:t>The bottom 16 bits of r0 become 0.</a:t>
-            </a:r>
-          </a:p>
-          <a:p>
-            <a:r>
-              <a:rPr lang="en-US" dirty="0"/>
-              <a:t>MOV r0, r0, ASR #16</a:t>
-            </a:r>
-          </a:p>
-          <a:p>
-            <a:pPr lvl="1"/>
-            <a:r>
-              <a:rPr lang="en-US" dirty="0"/>
-              <a:t>Shifts the value right by 16 bits, but preserves the sign (arithmetic shift).</a:t>
-            </a:r>
-          </a:p>
-          <a:p>
-            <a:pPr lvl="1"/>
-            <a:r>
-              <a:rPr lang="en-US" dirty="0"/>
-              <a:t>That means if bit 31 (the sign bit after the first shift) is 1, it fills with 1s; if 0, it fills with 0s.</a:t>
-            </a:r>
-          </a:p>
-          <a:p>
-            <a:pPr lvl="1"/>
-            <a:r>
-              <a:rPr lang="en-US" dirty="0"/>
-              <a:t>The result is a sign-extended 16-bit value from the original lower half of r3.</a:t>
-            </a:r>
-          </a:p>
-          <a:p>
-            <a:r>
-              <a:rPr lang="en-US" dirty="0"/>
-              <a:t>Examples: </a:t>
-            </a:r>
-          </a:p>
-          <a:p>
-            <a:r>
-              <a:rPr lang="en-US" dirty="0"/>
-              <a:t>r3 = 0x00001234</a:t>
-            </a:r>
-          </a:p>
-          <a:p>
-            <a:pPr lvl="1"/>
-            <a:r>
-              <a:rPr lang="en-US" dirty="0"/>
-              <a:t>LSL #16 → 0x12340000</a:t>
-            </a:r>
-          </a:p>
-          <a:p>
-            <a:pPr lvl="1"/>
-            <a:r>
-              <a:rPr lang="en-US" dirty="0"/>
-              <a:t>ASR #16 → 0x00001234</a:t>
-            </a:r>
-          </a:p>
-          <a:p>
-            <a:r>
-              <a:rPr lang="en-US" dirty="0"/>
-              <a:t>r3 = 0x0000ABCD</a:t>
-            </a:r>
-          </a:p>
-          <a:p>
-            <a:pPr lvl="1"/>
-            <a:r>
-              <a:rPr lang="en-US" dirty="0"/>
-              <a:t>LSL #16 → 0xABCD0000</a:t>
-            </a:r>
-          </a:p>
-          <a:p>
-            <a:pPr lvl="1"/>
-            <a:r>
-              <a:rPr lang="en-US" dirty="0"/>
-              <a:t>ASR #16 → 0xFFFFABCD</a:t>
-            </a:r>
-          </a:p>
-          <a:p>
-            <a:r>
-              <a:rPr lang="pt-BR" dirty="0"/>
-              <a:t>Can be replaced with a single instruction:</a:t>
-            </a:r>
-          </a:p>
-          <a:p>
-            <a:pPr lvl="1"/>
-            <a:r>
-              <a:rPr lang="pt-BR" dirty="0"/>
-              <a:t>SXTH  r0, r3   ; r0 = (int16_t) r3, sign-extend</a:t>
-            </a:r>
-          </a:p>
-          <a:p>
-            <a:pPr lvl="2"/>
-            <a:r>
-              <a:rPr lang="en-US" dirty="0"/>
-              <a:t>Take the low 16 bits of r3, sign-extend them to 32 bits, and store the result in r0.</a:t>
-            </a:r>
-          </a:p>
-        </p:txBody>
-      </p:sp>
-    </p:spTree>
-    <p:extLst>
-      <p:ext uri="{BB962C8B-B14F-4D97-AF65-F5344CB8AC3E}">
-        <p14:creationId xmlns:p14="http://schemas.microsoft.com/office/powerpoint/2010/main" val="1757812227"/>
-      </p:ext>
-    </p:extLst>
-  </p:cSld>
-  <p:clrMapOvr>
-    <a:masterClrMapping/>
-  </p:clrMapOvr>
-</p:sld>
-</file>
-
-<file path=ppt/slides/slide31.xml><?xml version="1.0" encoding="utf-8"?>
-<p:sld xmlns:a="http://schemas.openxmlformats.org/drawingml/2006/main" xmlns:r="http://schemas.openxmlformats.org/officeDocument/2006/relationships" xmlns:p="http://schemas.openxmlformats.org/presentationml/2006/main">
-  <p:cSld>
-    <p:spTree>
-      <p:nvGrpSpPr>
-        <p:cNvPr id="1" name=""/>
-        <p:cNvGrpSpPr/>
-        <p:nvPr/>
-      </p:nvGrpSpPr>
-      <p:grpSpPr>
-        <a:xfrm>
-          <a:off x="0" y="0"/>
-          <a:ext cx="0" cy="0"/>
-          <a:chOff x="0" y="0"/>
-          <a:chExt cx="0" cy="0"/>
-        </a:xfrm>
-      </p:grpSpPr>
-      <p:sp>
-        <p:nvSpPr>
-          <p:cNvPr id="2" name="Title 1">
-            <a:extLst>
-              <a:ext uri="{FF2B5EF4-FFF2-40B4-BE49-F238E27FC236}">
-                <a16:creationId xmlns:a16="http://schemas.microsoft.com/office/drawing/2014/main" id="{0CCDC4F0-89D8-54C1-7B5F-442BB66DAAA7}"/>
-              </a:ext>
-            </a:extLst>
-          </p:cNvPr>
-          <p:cNvSpPr>
-            <a:spLocks noGrp="1"/>
-          </p:cNvSpPr>
-          <p:nvPr>
-            <p:ph type="title"/>
-          </p:nvPr>
-        </p:nvSpPr>
-        <p:spPr/>
-        <p:txBody>
-          <a:bodyPr/>
-          <a:lstStyle/>
-          <a:p>
-            <a:r>
-              <a:rPr lang="en-US" dirty="0"/>
-              <a:t>Program Understanding</a:t>
-            </a:r>
-          </a:p>
-        </p:txBody>
-      </p:sp>
-      <p:sp>
-        <p:nvSpPr>
-          <p:cNvPr id="3" name="Slide Number Placeholder 2">
-            <a:extLst>
-              <a:ext uri="{FF2B5EF4-FFF2-40B4-BE49-F238E27FC236}">
-                <a16:creationId xmlns:a16="http://schemas.microsoft.com/office/drawing/2014/main" id="{04ACEC4B-05BD-C502-9FB9-FEB63BA9F5F4}"/>
-              </a:ext>
-            </a:extLst>
-          </p:cNvPr>
-          <p:cNvSpPr>
-            <a:spLocks noGrp="1"/>
-          </p:cNvSpPr>
-          <p:nvPr>
-            <p:ph type="sldNum" sz="quarter" idx="12"/>
-          </p:nvPr>
-        </p:nvSpPr>
-        <p:spPr/>
-        <p:txBody>
-          <a:bodyPr/>
-          <a:lstStyle/>
-          <a:p>
-            <a:fld id="{EA7C8D44-3667-46F6-9772-CC52308E2A7F}" type="slidenum">
-              <a:rPr kumimoji="0" lang="en-US" smtClean="0"/>
-              <a:pPr/>
-              <a:t>31</a:t>
-            </a:fld>
-            <a:endParaRPr kumimoji="0" lang="en-US" dirty="0"/>
-          </a:p>
-        </p:txBody>
-      </p:sp>
-      <p:sp>
-        <p:nvSpPr>
-          <p:cNvPr id="4" name="Content Placeholder 3">
-            <a:extLst>
-              <a:ext uri="{FF2B5EF4-FFF2-40B4-BE49-F238E27FC236}">
-                <a16:creationId xmlns:a16="http://schemas.microsoft.com/office/drawing/2014/main" id="{4C97CD4C-D1B7-839F-818C-C650C0AA8892}"/>
-              </a:ext>
-            </a:extLst>
-          </p:cNvPr>
-          <p:cNvSpPr>
-            <a:spLocks noGrp="1"/>
-          </p:cNvSpPr>
-          <p:nvPr>
-            <p:ph sz="quarter" idx="1"/>
-          </p:nvPr>
-        </p:nvSpPr>
-        <p:spPr/>
-        <p:txBody>
-          <a:bodyPr/>
-          <a:lstStyle/>
-          <a:p>
-            <a:r>
-              <a:rPr lang="en-US" dirty="0"/>
-              <a:t>Write out the sequence of values of r0 and r7 after </a:t>
-            </a:r>
-            <a:r>
-              <a:rPr lang="en-US"/>
-              <a:t>running this program. </a:t>
-            </a:r>
-            <a:endParaRPr lang="en-US" dirty="0"/>
+              <a:t>. Instruction addresses are given to the left of each assembly instruction (not part of the code).  Assume that SP = 0x10000200 at the start of the program.</a:t>
+            </a:r>
           </a:p>
         </p:txBody>
       </p:sp>
@@ -32723,7 +33315,7 @@
           <p:cNvPr id="5" name="TextBox 4">
             <a:extLst>
               <a:ext uri="{FF2B5EF4-FFF2-40B4-BE49-F238E27FC236}">
-                <a16:creationId xmlns:a16="http://schemas.microsoft.com/office/drawing/2014/main" id="{E5333230-46BA-8663-0449-A907C073A049}"/>
+                <a16:creationId xmlns:a16="http://schemas.microsoft.com/office/drawing/2014/main" id="{080C4AE5-B126-9162-362F-24C26D91D6E5}"/>
               </a:ext>
             </a:extLst>
           </p:cNvPr>
@@ -32732,8 +33324,8 @@
         </p:nvSpPr>
         <p:spPr>
           <a:xfrm>
-            <a:off x="866618" y="2125087"/>
-            <a:ext cx="3454460" cy="4031873"/>
+            <a:off x="641001" y="2182128"/>
+            <a:ext cx="8350599" cy="4278094"/>
           </a:xfrm>
           <a:prstGeom prst="rect">
             <a:avLst/>
@@ -32764,16 +33356,102 @@
                 <a:latin typeface="Consolas" panose="020B0609020204030204" pitchFamily="49" charset="0"/>
                 <a:cs typeface="Consolas" panose="020B0609020204030204" pitchFamily="49" charset="0"/>
               </a:rPr>
-              <a:t>start:</a:t>
-            </a:r>
-          </a:p>
-          <a:p>
+              <a:t>          AREA </a:t>
+            </a:r>
+            <a:r>
+              <a:rPr lang="en-US" sz="1600" dirty="0" err="1">
+                <a:latin typeface="Consolas" panose="020B0609020204030204" pitchFamily="49" charset="0"/>
+                <a:cs typeface="Consolas" panose="020B0609020204030204" pitchFamily="49" charset="0"/>
+              </a:rPr>
+              <a:t>mycode</a:t>
+            </a:r>
             <a:r>
               <a:rPr lang="en-US" sz="1600" dirty="0">
                 <a:latin typeface="Consolas" panose="020B0609020204030204" pitchFamily="49" charset="0"/>
                 <a:cs typeface="Consolas" panose="020B0609020204030204" pitchFamily="49" charset="0"/>
               </a:rPr>
-              <a:t>        mov     r0, #1       </a:t>
+              <a:t>, CODE, READONLY</a:t>
+            </a:r>
+          </a:p>
+          <a:p>
+            <a:r>
+              <a:rPr lang="en-US" sz="1600" dirty="0">
+                <a:latin typeface="Consolas" panose="020B0609020204030204" pitchFamily="49" charset="0"/>
+                <a:cs typeface="Consolas" panose="020B0609020204030204" pitchFamily="49" charset="0"/>
+              </a:rPr>
+              <a:t>          EXPORT __main</a:t>
+            </a:r>
+          </a:p>
+          <a:p>
+            <a:r>
+              <a:rPr lang="en-US" sz="1600" dirty="0">
+                <a:latin typeface="Consolas" panose="020B0609020204030204" pitchFamily="49" charset="0"/>
+                <a:cs typeface="Consolas" panose="020B0609020204030204" pitchFamily="49" charset="0"/>
+              </a:rPr>
+              <a:t>__main    PROC</a:t>
+            </a:r>
+          </a:p>
+          <a:p>
+            <a:r>
+              <a:rPr lang="en-US" sz="1600" dirty="0">
+                <a:latin typeface="Consolas" panose="020B0609020204030204" pitchFamily="49" charset="0"/>
+                <a:cs typeface="Consolas" panose="020B0609020204030204" pitchFamily="49" charset="0"/>
+              </a:rPr>
+              <a:t>0x250     MOV R0, #5</a:t>
+            </a:r>
+          </a:p>
+          <a:p>
+            <a:r>
+              <a:rPr lang="en-US" sz="1600" dirty="0">
+                <a:latin typeface="Consolas" panose="020B0609020204030204" pitchFamily="49" charset="0"/>
+                <a:cs typeface="Consolas" panose="020B0609020204030204" pitchFamily="49" charset="0"/>
+              </a:rPr>
+              <a:t>0x254     MOV R1, #10</a:t>
+            </a:r>
+          </a:p>
+          <a:p>
+            <a:r>
+              <a:rPr lang="en-US" sz="1600" dirty="0">
+                <a:latin typeface="Consolas" panose="020B0609020204030204" pitchFamily="49" charset="0"/>
+                <a:cs typeface="Consolas" panose="020B0609020204030204" pitchFamily="49" charset="0"/>
+              </a:rPr>
+              <a:t>0x258     CMP R0, R1           ; NZCV = ______</a:t>
+            </a:r>
+          </a:p>
+          <a:p>
+            <a:r>
+              <a:rPr lang="en-US" sz="1600" dirty="0">
+                <a:latin typeface="Consolas" panose="020B0609020204030204" pitchFamily="49" charset="0"/>
+                <a:cs typeface="Consolas" panose="020B0609020204030204" pitchFamily="49" charset="0"/>
+              </a:rPr>
+              <a:t>0x25A     BGE loop             ; PC = ______(after this instruction)</a:t>
+            </a:r>
+          </a:p>
+          <a:p>
+            <a:r>
+              <a:rPr lang="en-US" sz="1600" dirty="0">
+                <a:latin typeface="Consolas" panose="020B0609020204030204" pitchFamily="49" charset="0"/>
+                <a:cs typeface="Consolas" panose="020B0609020204030204" pitchFamily="49" charset="0"/>
+              </a:rPr>
+              <a:t>0x25C     BL foo               ; LR = ______, PC = ____(after this inst.)</a:t>
+            </a:r>
+          </a:p>
+          <a:p>
+            <a:r>
+              <a:rPr lang="en-US" sz="1600" dirty="0">
+                <a:latin typeface="Consolas" panose="020B0609020204030204" pitchFamily="49" charset="0"/>
+                <a:cs typeface="Consolas" panose="020B0609020204030204" pitchFamily="49" charset="0"/>
+              </a:rPr>
+              <a:t>0x260 loop B loop</a:t>
+            </a:r>
+          </a:p>
+          <a:p>
+            <a:r>
+              <a:rPr lang="en-US" sz="1600" dirty="0">
+                <a:latin typeface="Consolas" panose="020B0609020204030204" pitchFamily="49" charset="0"/>
+                <a:cs typeface="Consolas" panose="020B0609020204030204" pitchFamily="49" charset="0"/>
+              </a:rPr>
+              <a:t>          ENDP</a:t>
             </a:r>
           </a:p>
           <a:p>
@@ -32788,7 +33466,7 @@
                 <a:latin typeface="Consolas" panose="020B0609020204030204" pitchFamily="49" charset="0"/>
                 <a:cs typeface="Consolas" panose="020B0609020204030204" pitchFamily="49" charset="0"/>
               </a:rPr>
-              <a:t>main:</a:t>
+              <a:t>foo       PROC</a:t>
             </a:r>
           </a:p>
           <a:p>
@@ -32797,7 +33475,7 @@
                 <a:latin typeface="Consolas" panose="020B0609020204030204" pitchFamily="49" charset="0"/>
                 <a:cs typeface="Consolas" panose="020B0609020204030204" pitchFamily="49" charset="0"/>
               </a:rPr>
-              <a:t>        add     r0, r0, #1</a:t>
+              <a:t>0x262     PUSH{R0, R1}         ; SP = ____________</a:t>
             </a:r>
           </a:p>
           <a:p>
@@ -32806,21 +33484,16 @@
                 <a:latin typeface="Consolas" panose="020B0609020204030204" pitchFamily="49" charset="0"/>
                 <a:cs typeface="Consolas" panose="020B0609020204030204" pitchFamily="49" charset="0"/>
               </a:rPr>
-              <a:t>        </a:t>
-            </a:r>
-            <a:r>
-              <a:rPr lang="en-US" sz="1600" dirty="0" err="1">
-                <a:latin typeface="Consolas" panose="020B0609020204030204" pitchFamily="49" charset="0"/>
-                <a:cs typeface="Consolas" panose="020B0609020204030204" pitchFamily="49" charset="0"/>
-              </a:rPr>
-              <a:t>cmp</a:t>
-            </a:r>
+              <a:t>0x264     POP{R1}</a:t>
+            </a:r>
+          </a:p>
+          <a:p>
             <a:r>
               <a:rPr lang="en-US" sz="1600" dirty="0">
                 <a:latin typeface="Consolas" panose="020B0609020204030204" pitchFamily="49" charset="0"/>
                 <a:cs typeface="Consolas" panose="020B0609020204030204" pitchFamily="49" charset="0"/>
               </a:rPr>
-              <a:t>     r0, #5       </a:t>
+              <a:t>0x266     POP{R0}              ; R0 = __________, SP = ____________</a:t>
             </a:r>
           </a:p>
           <a:p>
@@ -32829,110 +33502,16 @@
                 <a:latin typeface="Consolas" panose="020B0609020204030204" pitchFamily="49" charset="0"/>
                 <a:cs typeface="Consolas" panose="020B0609020204030204" pitchFamily="49" charset="0"/>
               </a:rPr>
-              <a:t>        </a:t>
-            </a:r>
-            <a:r>
-              <a:rPr lang="en-US" sz="1600" dirty="0" err="1">
-                <a:latin typeface="Consolas" panose="020B0609020204030204" pitchFamily="49" charset="0"/>
-                <a:cs typeface="Consolas" panose="020B0609020204030204" pitchFamily="49" charset="0"/>
-              </a:rPr>
-              <a:t>bne</a:t>
-            </a:r>
+              <a:t>0x268     BX LR                ; LR = ___________, PC = ____________</a:t>
+            </a:r>
+          </a:p>
+          <a:p>
             <a:r>
               <a:rPr lang="en-US" sz="1600" dirty="0">
                 <a:latin typeface="Consolas" panose="020B0609020204030204" pitchFamily="49" charset="0"/>
                 <a:cs typeface="Consolas" panose="020B0609020204030204" pitchFamily="49" charset="0"/>
               </a:rPr>
-              <a:t>     skip         </a:t>
-            </a:r>
-          </a:p>
-          <a:p>
-            <a:r>
-              <a:rPr lang="en-US" sz="1600" dirty="0">
-                <a:latin typeface="Consolas" panose="020B0609020204030204" pitchFamily="49" charset="0"/>
-                <a:cs typeface="Consolas" panose="020B0609020204030204" pitchFamily="49" charset="0"/>
-              </a:rPr>
-              <a:t>        bl      call</a:t>
-            </a:r>
-          </a:p>
-          <a:p>
-            <a:endParaRPr lang="en-US" sz="1600" dirty="0">
-              <a:latin typeface="Consolas" panose="020B0609020204030204" pitchFamily="49" charset="0"/>
-              <a:cs typeface="Consolas" panose="020B0609020204030204" pitchFamily="49" charset="0"/>
-            </a:endParaRPr>
-          </a:p>
-          <a:p>
-            <a:r>
-              <a:rPr lang="en-US" sz="1600" dirty="0">
-                <a:latin typeface="Consolas" panose="020B0609020204030204" pitchFamily="49" charset="0"/>
-                <a:cs typeface="Consolas" panose="020B0609020204030204" pitchFamily="49" charset="0"/>
-              </a:rPr>
-              <a:t>skip:</a:t>
-            </a:r>
-          </a:p>
-          <a:p>
-            <a:r>
-              <a:rPr lang="en-US" sz="1600" dirty="0">
-                <a:latin typeface="Consolas" panose="020B0609020204030204" pitchFamily="49" charset="0"/>
-                <a:cs typeface="Consolas" panose="020B0609020204030204" pitchFamily="49" charset="0"/>
-              </a:rPr>
-              <a:t>        b       main         </a:t>
-            </a:r>
-          </a:p>
-          <a:p>
-            <a:endParaRPr lang="en-US" sz="1600" dirty="0">
-              <a:latin typeface="Consolas" panose="020B0609020204030204" pitchFamily="49" charset="0"/>
-              <a:cs typeface="Consolas" panose="020B0609020204030204" pitchFamily="49" charset="0"/>
-            </a:endParaRPr>
-          </a:p>
-          <a:p>
-            <a:r>
-              <a:rPr lang="en-US" sz="1600" dirty="0">
-                <a:latin typeface="Consolas" panose="020B0609020204030204" pitchFamily="49" charset="0"/>
-                <a:cs typeface="Consolas" panose="020B0609020204030204" pitchFamily="49" charset="0"/>
-              </a:rPr>
-              <a:t>call:</a:t>
-            </a:r>
-          </a:p>
-          <a:p>
-            <a:r>
-              <a:rPr lang="en-US" sz="1600" dirty="0">
-                <a:latin typeface="Consolas" panose="020B0609020204030204" pitchFamily="49" charset="0"/>
-                <a:cs typeface="Consolas" panose="020B0609020204030204" pitchFamily="49" charset="0"/>
-              </a:rPr>
-              <a:t>        add     r7, r7, #255</a:t>
-            </a:r>
-          </a:p>
-          <a:p>
-            <a:r>
-              <a:rPr lang="en-US" sz="1600" dirty="0">
-                <a:latin typeface="Consolas" panose="020B0609020204030204" pitchFamily="49" charset="0"/>
-                <a:cs typeface="Consolas" panose="020B0609020204030204" pitchFamily="49" charset="0"/>
-              </a:rPr>
-              <a:t>        mov     r0, #1       </a:t>
-            </a:r>
-          </a:p>
-          <a:p>
-            <a:r>
-              <a:rPr lang="en-US" sz="1600" dirty="0">
-                <a:latin typeface="Consolas" panose="020B0609020204030204" pitchFamily="49" charset="0"/>
-                <a:cs typeface="Consolas" panose="020B0609020204030204" pitchFamily="49" charset="0"/>
-              </a:rPr>
-              <a:t>        bx      </a:t>
-            </a:r>
-            <a:r>
-              <a:rPr lang="en-US" sz="1600" dirty="0" err="1">
-                <a:latin typeface="Consolas" panose="020B0609020204030204" pitchFamily="49" charset="0"/>
-                <a:cs typeface="Consolas" panose="020B0609020204030204" pitchFamily="49" charset="0"/>
-              </a:rPr>
-              <a:t>lr</a:t>
-            </a:r>
-            <a:r>
-              <a:rPr lang="en-US" sz="1600" dirty="0">
-                <a:latin typeface="Consolas" panose="020B0609020204030204" pitchFamily="49" charset="0"/>
-                <a:cs typeface="Consolas" panose="020B0609020204030204" pitchFamily="49" charset="0"/>
-              </a:rPr>
-              <a:t>         </a:t>
+              <a:t>          ENDP</a:t>
             </a:r>
           </a:p>
         </p:txBody>
@@ -32940,7 +33519,7 @@
     </p:spTree>
     <p:extLst>
       <p:ext uri="{BB962C8B-B14F-4D97-AF65-F5344CB8AC3E}">
-        <p14:creationId xmlns:p14="http://schemas.microsoft.com/office/powerpoint/2010/main" val="4214831448"/>
+        <p14:creationId xmlns:p14="http://schemas.microsoft.com/office/powerpoint/2010/main" val="1829076800"/>
       </p:ext>
     </p:extLst>
   </p:cSld>
@@ -32950,696 +33529,7 @@
 </p:sld>
 </file>
 
-<file path=ppt/slides/slide32.xml><?xml version="1.0" encoding="utf-8"?>
-<p:sld xmlns:a="http://schemas.openxmlformats.org/drawingml/2006/main" xmlns:r="http://schemas.openxmlformats.org/officeDocument/2006/relationships" xmlns:p="http://schemas.openxmlformats.org/presentationml/2006/main">
-  <p:cSld>
-    <p:spTree>
-      <p:nvGrpSpPr>
-        <p:cNvPr id="1" name="">
-          <a:extLst>
-            <a:ext uri="{FF2B5EF4-FFF2-40B4-BE49-F238E27FC236}">
-              <a16:creationId xmlns:a16="http://schemas.microsoft.com/office/drawing/2014/main" id="{4E3CD278-9055-1654-5493-D4D5C252F8DD}"/>
-            </a:ext>
-          </a:extLst>
-        </p:cNvPr>
-        <p:cNvGrpSpPr/>
-        <p:nvPr/>
-      </p:nvGrpSpPr>
-      <p:grpSpPr>
-        <a:xfrm>
-          <a:off x="0" y="0"/>
-          <a:ext cx="0" cy="0"/>
-          <a:chOff x="0" y="0"/>
-          <a:chExt cx="0" cy="0"/>
-        </a:xfrm>
-      </p:grpSpPr>
-      <p:sp>
-        <p:nvSpPr>
-          <p:cNvPr id="2" name="Title 1">
-            <a:extLst>
-              <a:ext uri="{FF2B5EF4-FFF2-40B4-BE49-F238E27FC236}">
-                <a16:creationId xmlns:a16="http://schemas.microsoft.com/office/drawing/2014/main" id="{5BB67A95-DEC2-DAE0-E275-60B265AA044E}"/>
-              </a:ext>
-            </a:extLst>
-          </p:cNvPr>
-          <p:cNvSpPr>
-            <a:spLocks noGrp="1"/>
-          </p:cNvSpPr>
-          <p:nvPr>
-            <p:ph type="title"/>
-          </p:nvPr>
-        </p:nvSpPr>
-        <p:spPr/>
-        <p:txBody>
-          <a:bodyPr/>
-          <a:lstStyle/>
-          <a:p>
-            <a:r>
-              <a:rPr lang="en-US" dirty="0"/>
-              <a:t>Program Understanding ANS</a:t>
-            </a:r>
-          </a:p>
-        </p:txBody>
-      </p:sp>
-      <p:sp>
-        <p:nvSpPr>
-          <p:cNvPr id="3" name="Slide Number Placeholder 2">
-            <a:extLst>
-              <a:ext uri="{FF2B5EF4-FFF2-40B4-BE49-F238E27FC236}">
-                <a16:creationId xmlns:a16="http://schemas.microsoft.com/office/drawing/2014/main" id="{74502889-1E6F-132B-00E5-EBBFD6734866}"/>
-              </a:ext>
-            </a:extLst>
-          </p:cNvPr>
-          <p:cNvSpPr>
-            <a:spLocks noGrp="1"/>
-          </p:cNvSpPr>
-          <p:nvPr>
-            <p:ph type="sldNum" sz="quarter" idx="12"/>
-          </p:nvPr>
-        </p:nvSpPr>
-        <p:spPr/>
-        <p:txBody>
-          <a:bodyPr/>
-          <a:lstStyle/>
-          <a:p>
-            <a:fld id="{EA7C8D44-3667-46F6-9772-CC52308E2A7F}" type="slidenum">
-              <a:rPr kumimoji="0" lang="en-US" smtClean="0"/>
-              <a:pPr/>
-              <a:t>32</a:t>
-            </a:fld>
-            <a:endParaRPr kumimoji="0" lang="en-US" dirty="0"/>
-          </a:p>
-        </p:txBody>
-      </p:sp>
-      <p:sp>
-        <p:nvSpPr>
-          <p:cNvPr id="4" name="Content Placeholder 3">
-            <a:extLst>
-              <a:ext uri="{FF2B5EF4-FFF2-40B4-BE49-F238E27FC236}">
-                <a16:creationId xmlns:a16="http://schemas.microsoft.com/office/drawing/2014/main" id="{0707AC2E-44F3-B02C-EC23-E5EB61FA94EB}"/>
-              </a:ext>
-            </a:extLst>
-          </p:cNvPr>
-          <p:cNvSpPr>
-            <a:spLocks noGrp="1"/>
-          </p:cNvSpPr>
-          <p:nvPr>
-            <p:ph sz="quarter" idx="1"/>
-          </p:nvPr>
-        </p:nvSpPr>
-        <p:spPr>
-          <a:xfrm>
-            <a:off x="473765" y="1082040"/>
-            <a:ext cx="8229600" cy="4937760"/>
-          </a:xfrm>
-        </p:spPr>
-        <p:txBody>
-          <a:bodyPr>
-            <a:normAutofit/>
-          </a:bodyPr>
-          <a:lstStyle/>
-          <a:p>
-            <a:r>
-              <a:rPr lang="en-US" sz="1800" dirty="0"/>
-              <a:t>It starts with x0 = 1. It loops, incrementing x0 each time. When x0 reaches 5, it calls subroutine call, which adds 255 to x7 and resets x0 to 1. Control returns to main, and the cycle repeats. So the pattern goes like this:</a:t>
-            </a:r>
-          </a:p>
-          <a:p>
-            <a:r>
-              <a:rPr lang="en-US" sz="1800" dirty="0"/>
-              <a:t>x0: 1 → 2 → 3 → 4 → 5 → (call resets to 1)</a:t>
-            </a:r>
-          </a:p>
-          <a:p>
-            <a:r>
-              <a:rPr lang="en-US" sz="1800" dirty="0"/>
-              <a:t>x7: +255 each time x0 reaches 5</a:t>
-            </a:r>
-          </a:p>
-        </p:txBody>
-      </p:sp>
-      <p:sp>
-        <p:nvSpPr>
-          <p:cNvPr id="5" name="TextBox 4">
-            <a:extLst>
-              <a:ext uri="{FF2B5EF4-FFF2-40B4-BE49-F238E27FC236}">
-                <a16:creationId xmlns:a16="http://schemas.microsoft.com/office/drawing/2014/main" id="{A84A8A79-412F-4394-2139-FF1AAAAEDB7A}"/>
-              </a:ext>
-            </a:extLst>
-          </p:cNvPr>
-          <p:cNvSpPr txBox="1"/>
-          <p:nvPr/>
-        </p:nvSpPr>
-        <p:spPr>
-          <a:xfrm>
-            <a:off x="888940" y="2690237"/>
-            <a:ext cx="7366119" cy="4031873"/>
-          </a:xfrm>
-          <a:prstGeom prst="rect">
-            <a:avLst/>
-          </a:prstGeom>
-        </p:spPr>
-        <p:style>
-          <a:lnRef idx="2">
-            <a:schemeClr val="accent1"/>
-          </a:lnRef>
-          <a:fillRef idx="1">
-            <a:schemeClr val="lt1"/>
-          </a:fillRef>
-          <a:effectRef idx="0">
-            <a:schemeClr val="accent1"/>
-          </a:effectRef>
-          <a:fontRef idx="minor">
-            <a:schemeClr val="dk1"/>
-          </a:fontRef>
-        </p:style>
-        <p:txBody>
-          <a:bodyPr wrap="none" rtlCol="0">
-            <a:spAutoFit/>
-          </a:bodyPr>
-          <a:lstStyle/>
-          <a:p>
-            <a:r>
-              <a:rPr lang="en-US" sz="1600" dirty="0">
-                <a:latin typeface="Consolas" panose="020B0609020204030204" pitchFamily="49" charset="0"/>
-                <a:cs typeface="Consolas" panose="020B0609020204030204" pitchFamily="49" charset="0"/>
-              </a:rPr>
-              <a:t>start:</a:t>
-            </a:r>
-          </a:p>
-          <a:p>
-            <a:r>
-              <a:rPr lang="en-US" sz="1600" dirty="0">
-                <a:latin typeface="Consolas" panose="020B0609020204030204" pitchFamily="49" charset="0"/>
-                <a:cs typeface="Consolas" panose="020B0609020204030204" pitchFamily="49" charset="0"/>
-              </a:rPr>
-              <a:t>        mov     r0, #1       @ start: r0 = 1</a:t>
-            </a:r>
-          </a:p>
-          <a:p>
-            <a:endParaRPr lang="en-US" sz="1600" dirty="0">
-              <a:latin typeface="Consolas" panose="020B0609020204030204" pitchFamily="49" charset="0"/>
-              <a:cs typeface="Consolas" panose="020B0609020204030204" pitchFamily="49" charset="0"/>
-            </a:endParaRPr>
-          </a:p>
-          <a:p>
-            <a:r>
-              <a:rPr lang="en-US" sz="1600" dirty="0">
-                <a:latin typeface="Consolas" panose="020B0609020204030204" pitchFamily="49" charset="0"/>
-                <a:cs typeface="Consolas" panose="020B0609020204030204" pitchFamily="49" charset="0"/>
-              </a:rPr>
-              <a:t>main:</a:t>
-            </a:r>
-          </a:p>
-          <a:p>
-            <a:r>
-              <a:rPr lang="en-US" sz="1600" dirty="0">
-                <a:latin typeface="Consolas" panose="020B0609020204030204" pitchFamily="49" charset="0"/>
-                <a:cs typeface="Consolas" panose="020B0609020204030204" pitchFamily="49" charset="0"/>
-              </a:rPr>
-              <a:t>        add     r0, r0, #1   @ increment r0</a:t>
-            </a:r>
-          </a:p>
-          <a:p>
-            <a:r>
-              <a:rPr lang="en-US" sz="1600" dirty="0">
-                <a:latin typeface="Consolas" panose="020B0609020204030204" pitchFamily="49" charset="0"/>
-                <a:cs typeface="Consolas" panose="020B0609020204030204" pitchFamily="49" charset="0"/>
-              </a:rPr>
-              <a:t>        </a:t>
-            </a:r>
-            <a:r>
-              <a:rPr lang="en-US" sz="1600" dirty="0" err="1">
-                <a:latin typeface="Consolas" panose="020B0609020204030204" pitchFamily="49" charset="0"/>
-                <a:cs typeface="Consolas" panose="020B0609020204030204" pitchFamily="49" charset="0"/>
-              </a:rPr>
-              <a:t>cmp</a:t>
-            </a:r>
-            <a:r>
-              <a:rPr lang="en-US" sz="1600" dirty="0">
-                <a:latin typeface="Consolas" panose="020B0609020204030204" pitchFamily="49" charset="0"/>
-                <a:cs typeface="Consolas" panose="020B0609020204030204" pitchFamily="49" charset="0"/>
-              </a:rPr>
-              <a:t>     r0, #5       @ compare r0 to 5</a:t>
-            </a:r>
-          </a:p>
-          <a:p>
-            <a:r>
-              <a:rPr lang="en-US" sz="1600" dirty="0">
-                <a:latin typeface="Consolas" panose="020B0609020204030204" pitchFamily="49" charset="0"/>
-                <a:cs typeface="Consolas" panose="020B0609020204030204" pitchFamily="49" charset="0"/>
-              </a:rPr>
-              <a:t>        </a:t>
-            </a:r>
-            <a:r>
-              <a:rPr lang="en-US" sz="1600" dirty="0" err="1">
-                <a:latin typeface="Consolas" panose="020B0609020204030204" pitchFamily="49" charset="0"/>
-                <a:cs typeface="Consolas" panose="020B0609020204030204" pitchFamily="49" charset="0"/>
-              </a:rPr>
-              <a:t>bne</a:t>
-            </a:r>
-            <a:r>
-              <a:rPr lang="en-US" sz="1600" dirty="0">
-                <a:latin typeface="Consolas" panose="020B0609020204030204" pitchFamily="49" charset="0"/>
-                <a:cs typeface="Consolas" panose="020B0609020204030204" pitchFamily="49" charset="0"/>
-              </a:rPr>
-              <a:t>     skip         @ if not equal, go to skip</a:t>
-            </a:r>
-          </a:p>
-          <a:p>
-            <a:r>
-              <a:rPr lang="en-US" sz="1600" dirty="0">
-                <a:latin typeface="Consolas" panose="020B0609020204030204" pitchFamily="49" charset="0"/>
-                <a:cs typeface="Consolas" panose="020B0609020204030204" pitchFamily="49" charset="0"/>
-              </a:rPr>
-              <a:t>        bl      call         @ if equal, branch-and-link to call</a:t>
-            </a:r>
-          </a:p>
-          <a:p>
-            <a:endParaRPr lang="en-US" sz="1600" dirty="0">
-              <a:latin typeface="Consolas" panose="020B0609020204030204" pitchFamily="49" charset="0"/>
-              <a:cs typeface="Consolas" panose="020B0609020204030204" pitchFamily="49" charset="0"/>
-            </a:endParaRPr>
-          </a:p>
-          <a:p>
-            <a:r>
-              <a:rPr lang="en-US" sz="1600" dirty="0">
-                <a:latin typeface="Consolas" panose="020B0609020204030204" pitchFamily="49" charset="0"/>
-                <a:cs typeface="Consolas" panose="020B0609020204030204" pitchFamily="49" charset="0"/>
-              </a:rPr>
-              <a:t>skip:</a:t>
-            </a:r>
-          </a:p>
-          <a:p>
-            <a:r>
-              <a:rPr lang="en-US" sz="1600" dirty="0">
-                <a:latin typeface="Consolas" panose="020B0609020204030204" pitchFamily="49" charset="0"/>
-                <a:cs typeface="Consolas" panose="020B0609020204030204" pitchFamily="49" charset="0"/>
-              </a:rPr>
-              <a:t>        b       main         @ unconditional branch back to main</a:t>
-            </a:r>
-          </a:p>
-          <a:p>
-            <a:endParaRPr lang="en-US" sz="1600" dirty="0">
-              <a:latin typeface="Consolas" panose="020B0609020204030204" pitchFamily="49" charset="0"/>
-              <a:cs typeface="Consolas" panose="020B0609020204030204" pitchFamily="49" charset="0"/>
-            </a:endParaRPr>
-          </a:p>
-          <a:p>
-            <a:r>
-              <a:rPr lang="en-US" sz="1600" dirty="0">
-                <a:latin typeface="Consolas" panose="020B0609020204030204" pitchFamily="49" charset="0"/>
-                <a:cs typeface="Consolas" panose="020B0609020204030204" pitchFamily="49" charset="0"/>
-              </a:rPr>
-              <a:t>call:</a:t>
-            </a:r>
-          </a:p>
-          <a:p>
-            <a:r>
-              <a:rPr lang="en-US" sz="1600" dirty="0">
-                <a:latin typeface="Consolas" panose="020B0609020204030204" pitchFamily="49" charset="0"/>
-                <a:cs typeface="Consolas" panose="020B0609020204030204" pitchFamily="49" charset="0"/>
-              </a:rPr>
-              <a:t>        add     r7, r7, #255 @ add 255 to r7 (side-effect)</a:t>
-            </a:r>
-          </a:p>
-          <a:p>
-            <a:r>
-              <a:rPr lang="en-US" sz="1600" dirty="0">
-                <a:latin typeface="Consolas" panose="020B0609020204030204" pitchFamily="49" charset="0"/>
-                <a:cs typeface="Consolas" panose="020B0609020204030204" pitchFamily="49" charset="0"/>
-              </a:rPr>
-              <a:t>        mov     r0, #1       @ reset r0 to 1</a:t>
-            </a:r>
-          </a:p>
-          <a:p>
-            <a:r>
-              <a:rPr lang="en-US" sz="1600" dirty="0">
-                <a:latin typeface="Consolas" panose="020B0609020204030204" pitchFamily="49" charset="0"/>
-                <a:cs typeface="Consolas" panose="020B0609020204030204" pitchFamily="49" charset="0"/>
-              </a:rPr>
-              <a:t>        bx      </a:t>
-            </a:r>
-            <a:r>
-              <a:rPr lang="en-US" sz="1600" dirty="0" err="1">
-                <a:latin typeface="Consolas" panose="020B0609020204030204" pitchFamily="49" charset="0"/>
-                <a:cs typeface="Consolas" panose="020B0609020204030204" pitchFamily="49" charset="0"/>
-              </a:rPr>
-              <a:t>lr</a:t>
-            </a:r>
-            <a:r>
-              <a:rPr lang="en-US" sz="1600" dirty="0">
-                <a:latin typeface="Consolas" panose="020B0609020204030204" pitchFamily="49" charset="0"/>
-                <a:cs typeface="Consolas" panose="020B0609020204030204" pitchFamily="49" charset="0"/>
-              </a:rPr>
-              <a:t>           @ return (branch to link register)</a:t>
-            </a:r>
-          </a:p>
-        </p:txBody>
-      </p:sp>
-    </p:spTree>
-    <p:extLst>
-      <p:ext uri="{BB962C8B-B14F-4D97-AF65-F5344CB8AC3E}">
-        <p14:creationId xmlns:p14="http://schemas.microsoft.com/office/powerpoint/2010/main" val="3848203700"/>
-      </p:ext>
-    </p:extLst>
-  </p:cSld>
-  <p:clrMapOvr>
-    <a:masterClrMapping/>
-  </p:clrMapOvr>
-</p:sld>
-</file>
-
-<file path=ppt/slides/slide33.xml><?xml version="1.0" encoding="utf-8"?>
-<p:sld xmlns:a="http://schemas.openxmlformats.org/drawingml/2006/main" xmlns:r="http://schemas.openxmlformats.org/officeDocument/2006/relationships" xmlns:p="http://schemas.openxmlformats.org/presentationml/2006/main">
-  <p:cSld>
-    <p:spTree>
-      <p:nvGrpSpPr>
-        <p:cNvPr id="1" name=""/>
-        <p:cNvGrpSpPr/>
-        <p:nvPr/>
-      </p:nvGrpSpPr>
-      <p:grpSpPr>
-        <a:xfrm>
-          <a:off x="0" y="0"/>
-          <a:ext cx="0" cy="0"/>
-          <a:chOff x="0" y="0"/>
-          <a:chExt cx="0" cy="0"/>
-        </a:xfrm>
-      </p:grpSpPr>
-      <p:sp>
-        <p:nvSpPr>
-          <p:cNvPr id="2" name="Title 1">
-            <a:extLst>
-              <a:ext uri="{FF2B5EF4-FFF2-40B4-BE49-F238E27FC236}">
-                <a16:creationId xmlns:a16="http://schemas.microsoft.com/office/drawing/2014/main" id="{6234EC6E-B891-AF83-E66F-8217385C54F6}"/>
-              </a:ext>
-            </a:extLst>
-          </p:cNvPr>
-          <p:cNvSpPr>
-            <a:spLocks noGrp="1"/>
-          </p:cNvSpPr>
-          <p:nvPr>
-            <p:ph type="title"/>
-          </p:nvPr>
-        </p:nvSpPr>
-        <p:spPr/>
-        <p:txBody>
-          <a:bodyPr/>
-          <a:lstStyle/>
-          <a:p>
-            <a:r>
-              <a:rPr lang="en-US" dirty="0"/>
-              <a:t>Program Understanding</a:t>
-            </a:r>
-          </a:p>
-        </p:txBody>
-      </p:sp>
-      <p:sp>
-        <p:nvSpPr>
-          <p:cNvPr id="3" name="Slide Number Placeholder 2">
-            <a:extLst>
-              <a:ext uri="{FF2B5EF4-FFF2-40B4-BE49-F238E27FC236}">
-                <a16:creationId xmlns:a16="http://schemas.microsoft.com/office/drawing/2014/main" id="{5959EC02-DF33-1CB3-210F-7D09C20A83C0}"/>
-              </a:ext>
-            </a:extLst>
-          </p:cNvPr>
-          <p:cNvSpPr>
-            <a:spLocks noGrp="1"/>
-          </p:cNvSpPr>
-          <p:nvPr>
-            <p:ph type="sldNum" sz="quarter" idx="12"/>
-          </p:nvPr>
-        </p:nvSpPr>
-        <p:spPr/>
-        <p:txBody>
-          <a:bodyPr/>
-          <a:lstStyle/>
-          <a:p>
-            <a:fld id="{EA7C8D44-3667-46F6-9772-CC52308E2A7F}" type="slidenum">
-              <a:rPr kumimoji="0" lang="en-US" smtClean="0"/>
-              <a:pPr/>
-              <a:t>33</a:t>
-            </a:fld>
-            <a:endParaRPr kumimoji="0" lang="en-US" dirty="0"/>
-          </a:p>
-        </p:txBody>
-      </p:sp>
-      <p:sp>
-        <p:nvSpPr>
-          <p:cNvPr id="4" name="Content Placeholder 3">
-            <a:extLst>
-              <a:ext uri="{FF2B5EF4-FFF2-40B4-BE49-F238E27FC236}">
-                <a16:creationId xmlns:a16="http://schemas.microsoft.com/office/drawing/2014/main" id="{3DC23136-53FC-2BF5-8C7C-A3096D3761E3}"/>
-              </a:ext>
-            </a:extLst>
-          </p:cNvPr>
-          <p:cNvSpPr>
-            <a:spLocks noGrp="1"/>
-          </p:cNvSpPr>
-          <p:nvPr>
-            <p:ph sz="quarter" idx="1"/>
-          </p:nvPr>
-        </p:nvSpPr>
-        <p:spPr>
-          <a:xfrm>
-            <a:off x="457200" y="1219200"/>
-            <a:ext cx="8229600" cy="1066800"/>
-          </a:xfrm>
-        </p:spPr>
-        <p:txBody>
-          <a:bodyPr>
-            <a:normAutofit fontScale="70000" lnSpcReduction="20000"/>
-          </a:bodyPr>
-          <a:lstStyle/>
-          <a:p>
-            <a:r>
-              <a:rPr lang="en-US" dirty="0"/>
-              <a:t>Given the following code, fill in the blanks listed next to each instruction with the values that would be in each register or status bit after the instruction executes. Instruction addresses are given to the left of each assembly instruction (not part of the code).  Assume that SP = 0x10000200 at the start of the program.</a:t>
-            </a:r>
-          </a:p>
-        </p:txBody>
-      </p:sp>
-      <p:sp>
-        <p:nvSpPr>
-          <p:cNvPr id="5" name="TextBox 4">
-            <a:extLst>
-              <a:ext uri="{FF2B5EF4-FFF2-40B4-BE49-F238E27FC236}">
-                <a16:creationId xmlns:a16="http://schemas.microsoft.com/office/drawing/2014/main" id="{080C4AE5-B126-9162-362F-24C26D91D6E5}"/>
-              </a:ext>
-            </a:extLst>
-          </p:cNvPr>
-          <p:cNvSpPr txBox="1"/>
-          <p:nvPr/>
-        </p:nvSpPr>
-        <p:spPr>
-          <a:xfrm>
-            <a:off x="641001" y="2182128"/>
-            <a:ext cx="7927170" cy="4278094"/>
-          </a:xfrm>
-          <a:prstGeom prst="rect">
-            <a:avLst/>
-          </a:prstGeom>
-        </p:spPr>
-        <p:style>
-          <a:lnRef idx="2">
-            <a:schemeClr val="accent1"/>
-          </a:lnRef>
-          <a:fillRef idx="1">
-            <a:schemeClr val="lt1"/>
-          </a:fillRef>
-          <a:effectRef idx="0">
-            <a:schemeClr val="accent1"/>
-          </a:effectRef>
-          <a:fontRef idx="minor">
-            <a:schemeClr val="dk1"/>
-          </a:fontRef>
-        </p:style>
-        <p:txBody>
-          <a:bodyPr wrap="none" rtlCol="0">
-            <a:spAutoFit/>
-          </a:bodyPr>
-          <a:lstStyle/>
-          <a:p>
-            <a:r>
-              <a:rPr lang="en-US" sz="1600" dirty="0">
-                <a:latin typeface="Consolas" panose="020B0609020204030204" pitchFamily="49" charset="0"/>
-                <a:cs typeface="Consolas" panose="020B0609020204030204" pitchFamily="49" charset="0"/>
-              </a:rPr>
-              <a:t>          AREA </a:t>
-            </a:r>
-            <a:r>
-              <a:rPr lang="en-US" sz="1600" dirty="0" err="1">
-                <a:latin typeface="Consolas" panose="020B0609020204030204" pitchFamily="49" charset="0"/>
-                <a:cs typeface="Consolas" panose="020B0609020204030204" pitchFamily="49" charset="0"/>
-              </a:rPr>
-              <a:t>mycode</a:t>
-            </a:r>
-            <a:r>
-              <a:rPr lang="en-US" sz="1600" dirty="0">
-                <a:latin typeface="Consolas" panose="020B0609020204030204" pitchFamily="49" charset="0"/>
-                <a:cs typeface="Consolas" panose="020B0609020204030204" pitchFamily="49" charset="0"/>
-              </a:rPr>
-              <a:t>, CODE, READONLY</a:t>
-            </a:r>
-          </a:p>
-          <a:p>
-            <a:r>
-              <a:rPr lang="en-US" sz="1600" dirty="0">
-                <a:latin typeface="Consolas" panose="020B0609020204030204" pitchFamily="49" charset="0"/>
-                <a:cs typeface="Consolas" panose="020B0609020204030204" pitchFamily="49" charset="0"/>
-              </a:rPr>
-              <a:t>          EXPORT __main</a:t>
-            </a:r>
-          </a:p>
-          <a:p>
-            <a:r>
-              <a:rPr lang="en-US" sz="1600" dirty="0">
-                <a:latin typeface="Consolas" panose="020B0609020204030204" pitchFamily="49" charset="0"/>
-                <a:cs typeface="Consolas" panose="020B0609020204030204" pitchFamily="49" charset="0"/>
-              </a:rPr>
-              <a:t>__main    PROC</a:t>
-            </a:r>
-          </a:p>
-          <a:p>
-            <a:r>
-              <a:rPr lang="en-US" sz="1600" dirty="0">
-                <a:latin typeface="Consolas" panose="020B0609020204030204" pitchFamily="49" charset="0"/>
-                <a:cs typeface="Consolas" panose="020B0609020204030204" pitchFamily="49" charset="0"/>
-              </a:rPr>
-              <a:t>0x250     MOV R0, #5</a:t>
-            </a:r>
-          </a:p>
-          <a:p>
-            <a:r>
-              <a:rPr lang="en-US" sz="1600" dirty="0">
-                <a:latin typeface="Consolas" panose="020B0609020204030204" pitchFamily="49" charset="0"/>
-                <a:cs typeface="Consolas" panose="020B0609020204030204" pitchFamily="49" charset="0"/>
-              </a:rPr>
-              <a:t>0x254     MOV R1, #10</a:t>
-            </a:r>
-          </a:p>
-          <a:p>
-            <a:r>
-              <a:rPr lang="en-US" sz="1600" dirty="0">
-                <a:latin typeface="Consolas" panose="020B0609020204030204" pitchFamily="49" charset="0"/>
-                <a:cs typeface="Consolas" panose="020B0609020204030204" pitchFamily="49" charset="0"/>
-              </a:rPr>
-              <a:t>0x258     CMP R0, R1           ; NZCV = ____________</a:t>
-            </a:r>
-          </a:p>
-          <a:p>
-            <a:r>
-              <a:rPr lang="en-US" sz="1600" dirty="0">
-                <a:latin typeface="Consolas" panose="020B0609020204030204" pitchFamily="49" charset="0"/>
-                <a:cs typeface="Consolas" panose="020B0609020204030204" pitchFamily="49" charset="0"/>
-              </a:rPr>
-              <a:t>0x25A     BGE loop             ; PC = ____________</a:t>
-            </a:r>
-          </a:p>
-          <a:p>
-            <a:r>
-              <a:rPr lang="en-US" sz="1600" dirty="0">
-                <a:latin typeface="Consolas" panose="020B0609020204030204" pitchFamily="49" charset="0"/>
-                <a:cs typeface="Consolas" panose="020B0609020204030204" pitchFamily="49" charset="0"/>
-              </a:rPr>
-              <a:t>0x25C     BL foo               ; LR = ____________, PC = ____________</a:t>
-            </a:r>
-          </a:p>
-          <a:p>
-            <a:r>
-              <a:rPr lang="en-US" sz="1600" dirty="0">
-                <a:latin typeface="Consolas" panose="020B0609020204030204" pitchFamily="49" charset="0"/>
-                <a:cs typeface="Consolas" panose="020B0609020204030204" pitchFamily="49" charset="0"/>
-              </a:rPr>
-              <a:t>0x260 loop B loop</a:t>
-            </a:r>
-          </a:p>
-          <a:p>
-            <a:r>
-              <a:rPr lang="en-US" sz="1600" dirty="0">
-                <a:latin typeface="Consolas" panose="020B0609020204030204" pitchFamily="49" charset="0"/>
-                <a:cs typeface="Consolas" panose="020B0609020204030204" pitchFamily="49" charset="0"/>
-              </a:rPr>
-              <a:t>          ENDP</a:t>
-            </a:r>
-          </a:p>
-          <a:p>
-            <a:endParaRPr lang="en-US" sz="1600" dirty="0">
-              <a:latin typeface="Consolas" panose="020B0609020204030204" pitchFamily="49" charset="0"/>
-              <a:cs typeface="Consolas" panose="020B0609020204030204" pitchFamily="49" charset="0"/>
-            </a:endParaRPr>
-          </a:p>
-          <a:p>
-            <a:r>
-              <a:rPr lang="en-US" sz="1600" dirty="0">
-                <a:latin typeface="Consolas" panose="020B0609020204030204" pitchFamily="49" charset="0"/>
-                <a:cs typeface="Consolas" panose="020B0609020204030204" pitchFamily="49" charset="0"/>
-              </a:rPr>
-              <a:t>foo       PROC</a:t>
-            </a:r>
-          </a:p>
-          <a:p>
-            <a:r>
-              <a:rPr lang="en-US" sz="1600" dirty="0">
-                <a:latin typeface="Consolas" panose="020B0609020204030204" pitchFamily="49" charset="0"/>
-                <a:cs typeface="Consolas" panose="020B0609020204030204" pitchFamily="49" charset="0"/>
-              </a:rPr>
-              <a:t>0x262     PUSH{R0, R1}         ; SP = ____________</a:t>
-            </a:r>
-          </a:p>
-          <a:p>
-            <a:r>
-              <a:rPr lang="en-US" sz="1600" dirty="0">
-                <a:latin typeface="Consolas" panose="020B0609020204030204" pitchFamily="49" charset="0"/>
-                <a:cs typeface="Consolas" panose="020B0609020204030204" pitchFamily="49" charset="0"/>
-              </a:rPr>
-              <a:t>0x264     POP{R1}</a:t>
-            </a:r>
-          </a:p>
-          <a:p>
-            <a:r>
-              <a:rPr lang="en-US" sz="1600" dirty="0">
-                <a:latin typeface="Consolas" panose="020B0609020204030204" pitchFamily="49" charset="0"/>
-                <a:cs typeface="Consolas" panose="020B0609020204030204" pitchFamily="49" charset="0"/>
-              </a:rPr>
-              <a:t>0x266     POP{R0}              ; R0 = __________, SP = ____________</a:t>
-            </a:r>
-          </a:p>
-          <a:p>
-            <a:r>
-              <a:rPr lang="en-US" sz="1600" dirty="0">
-                <a:latin typeface="Consolas" panose="020B0609020204030204" pitchFamily="49" charset="0"/>
-                <a:cs typeface="Consolas" panose="020B0609020204030204" pitchFamily="49" charset="0"/>
-              </a:rPr>
-              <a:t>0x268     BX LR                ; LR = ___________, PC = ____________</a:t>
-            </a:r>
-          </a:p>
-          <a:p>
-            <a:r>
-              <a:rPr lang="en-US" sz="1600" dirty="0">
-                <a:latin typeface="Consolas" panose="020B0609020204030204" pitchFamily="49" charset="0"/>
-                <a:cs typeface="Consolas" panose="020B0609020204030204" pitchFamily="49" charset="0"/>
-              </a:rPr>
-              <a:t>          ENDP</a:t>
-            </a:r>
-          </a:p>
-        </p:txBody>
-      </p:sp>
-    </p:spTree>
-    <p:extLst>
-      <p:ext uri="{BB962C8B-B14F-4D97-AF65-F5344CB8AC3E}">
-        <p14:creationId xmlns:p14="http://schemas.microsoft.com/office/powerpoint/2010/main" val="1762553256"/>
-      </p:ext>
-    </p:extLst>
-  </p:cSld>
-  <p:clrMapOvr>
-    <a:masterClrMapping/>
-  </p:clrMapOvr>
-</p:sld>
-</file>
-
-<file path=ppt/slides/slide34.xml><?xml version="1.0" encoding="utf-8"?>
+<file path=ppt/slides/slide35.xml><?xml version="1.0" encoding="utf-8"?>
 <p:sld xmlns:a="http://schemas.openxmlformats.org/drawingml/2006/main" xmlns:r="http://schemas.openxmlformats.org/officeDocument/2006/relationships" xmlns:p="http://schemas.openxmlformats.org/presentationml/2006/main">
   <p:cSld>
     <p:spTree>
@@ -33714,7 +33604,7 @@
             <a:fld id="{EA7C8D44-3667-46F6-9772-CC52308E2A7F}" type="slidenum">
               <a:rPr kumimoji="0" lang="en-US" smtClean="0"/>
               <a:pPr/>
-              <a:t>34</a:t>
+              <a:t>35</a:t>
             </a:fld>
             <a:endParaRPr kumimoji="0" lang="en-US" dirty="0"/>
           </a:p>
@@ -33769,7 +33659,7 @@
         </p:nvSpPr>
         <p:spPr>
           <a:xfrm>
-            <a:off x="304800" y="2078256"/>
+            <a:off x="304800" y="2122706"/>
             <a:ext cx="8534400" cy="4278094"/>
           </a:xfrm>
           <a:prstGeom prst="rect">
@@ -33980,7 +33870,7 @@
     </p:spTree>
     <p:extLst>
       <p:ext uri="{BB962C8B-B14F-4D97-AF65-F5344CB8AC3E}">
-        <p14:creationId xmlns:p14="http://schemas.microsoft.com/office/powerpoint/2010/main" val="4286255382"/>
+        <p14:creationId xmlns:p14="http://schemas.microsoft.com/office/powerpoint/2010/main" val="2287290416"/>
       </p:ext>
     </p:extLst>
   </p:cSld>
@@ -33990,7 +33880,7 @@
 </p:sld>
 </file>
 
-<file path=ppt/slides/slide35.xml><?xml version="1.0" encoding="utf-8"?>
+<file path=ppt/slides/slide36.xml><?xml version="1.0" encoding="utf-8"?>
 <p:sld xmlns:a="http://schemas.openxmlformats.org/drawingml/2006/main" xmlns:r="http://schemas.openxmlformats.org/officeDocument/2006/relationships" xmlns:p="http://schemas.openxmlformats.org/presentationml/2006/main">
   <p:cSld>
     <p:spTree>
@@ -34059,7 +33949,7 @@
             <a:fld id="{EA7C8D44-3667-46F6-9772-CC52308E2A7F}" type="slidenum">
               <a:rPr kumimoji="0" lang="en-US" smtClean="0"/>
               <a:pPr/>
-              <a:t>35</a:t>
+              <a:t>36</a:t>
             </a:fld>
             <a:endParaRPr kumimoji="0" lang="en-US" dirty="0"/>
           </a:p>
@@ -34251,7 +34141,7 @@
     </p:spTree>
     <p:extLst>
       <p:ext uri="{BB962C8B-B14F-4D97-AF65-F5344CB8AC3E}">
-        <p14:creationId xmlns:p14="http://schemas.microsoft.com/office/powerpoint/2010/main" val="1599510770"/>
+        <p14:creationId xmlns:p14="http://schemas.microsoft.com/office/powerpoint/2010/main" val="1555766300"/>
       </p:ext>
     </p:extLst>
   </p:cSld>
